--- a/deck/FTAI_Long_Pitch.pptx
+++ b/deck/FTAI_Long_Pitch.pptx
@@ -7,9 +7,11 @@
   <p:sldIdLst>
     <p:sldId id="256" r:id="rId2"/>
     <p:sldId id="257" r:id="rId3"/>
+    <p:sldId id="258" r:id="rId4"/>
+    <p:sldId id="259" r:id="rId5"/>
   </p:sldIdLst>
   <p:notesMasterIdLst>
-    <p:notesMasterId r:id="rId4"/>
+    <p:notesMasterId r:id="rId6"/>
   </p:notesMasterIdLst>
   <p:sldSz cx="9144000" cy="6858000"/>
   <p:notesSz cx="6858000" cy="9144000"/>
@@ -108,14 +110,16 @@
   <p:extLst>
     <p:ext uri="{521415D9-36F7-43E2-AB2F-B90AF26B5E84}">
       <p14:sectionLst xmlns:p14="http://schemas.microsoft.com/office/powerpoint/2010/main">
-        <p14:section name="Introduction" id="{61af1e12-1633-1f35-ca79-4a05065c5de5}">
+        <p14:section name="Introduction" id="{c6e45d01-753a-955f-6327-0c3edc567ef7}">
           <p14:sldIdLst>
             <p14:sldId id="256"/>
           </p14:sldIdLst>
         </p14:section>
-        <p14:section name="The Opportunity" id="{163bd491-ca82-9423-2504-0830fd39f8ee}">
+        <p14:section name="The Opportunity" id="{cd9adb1a-eb8f-df16-d7f0-b3eabbd510e9}">
           <p14:sldIdLst>
             <p14:sldId id="257"/>
+            <p14:sldId id="258"/>
+            <p14:sldId id="259"/>
           </p14:sldIdLst>
         </p14:section>
       </p14:sectionLst>
@@ -125,6 +129,878 @@
     </p:ext>
   </p:extLst>
 </p:presentation>
+</file>
+
+<file path=ppt/charts/chart1.xml><?xml version="1.0" encoding="utf-8"?>
+<c:chartSpace xmlns:c="http://schemas.openxmlformats.org/drawingml/2006/chart" xmlns:a="http://schemas.openxmlformats.org/drawingml/2006/main" xmlns:r="http://schemas.openxmlformats.org/officeDocument/2006/relationships">
+  <c:date1904 val="0"/>
+  <c:roundedCorners val="1"/>
+  <c:chart>
+    <c:autoTitleDeleted val="1"/>
+    <c:plotArea>
+      <c:layout/>
+      <c:barChart>
+        <c:barDir val="col"/>
+        <c:grouping val="stacked"/>
+        <c:varyColors val="0"/>
+        <c:ser>
+          <c:idx val="0"/>
+          <c:order val="0"/>
+          <c:tx>
+            <c:strRef>
+              <c:f>Sheet1!$B$1</c:f>
+              <c:strCache>
+                <c:ptCount val="1"/>
+                <c:pt idx="0">
+                  <c:v>Reported</c:v>
+                </c:pt>
+              </c:strCache>
+            </c:strRef>
+          </c:tx>
+          <c:spPr>
+            <a:solidFill>
+              <a:srgbClr val="0A1C58"/>
+            </a:solidFill>
+            <a:effectLst/>
+          </c:spPr>
+          <c:invertIfNegative val="0"/>
+          <c:dLbls>
+            <c:numFmt formatCode="0.0%" sourceLinked="0"/>
+            <c:txPr>
+              <a:bodyPr/>
+              <a:lstStyle/>
+              <a:p>
+                <a:pPr>
+                  <a:defRPr b="1" i="0" strike="noStrike" sz="1100" u="none">
+                    <a:solidFill>
+                      <a:srgbClr val="FFFFFF"/>
+                    </a:solidFill>
+                    <a:latin typeface="+mn-lt"/>
+                  </a:defRPr>
+                </a:pPr>
+              </a:p>
+            </c:txPr>
+            <c:dLblPos val="inEnd"/>
+            <c:showLegendKey val="0"/>
+            <c:showVal val="1"/>
+            <c:showCatName val="0"/>
+            <c:showSerName val="0"/>
+            <c:showPercent val="0"/>
+            <c:showBubbleSize val="0"/>
+            <c:showLeaderLines val="0"/>
+          </c:dLbls>
+          <c:cat>
+            <c:multiLvlStrRef>
+              <c:f>Sheet1!$A$2:$A$9</c:f>
+              <c:multiLvlStrCache>
+                <c:ptCount val="8"/>
+                <c:lvl>
+                  <c:pt idx="0">
+                    <c:v>Q1'25</c:v>
+                  </c:pt>
+                  <c:pt idx="1">
+                    <c:v>Q2'25</c:v>
+                  </c:pt>
+                  <c:pt idx="2">
+                    <c:v>Q3'25</c:v>
+                  </c:pt>
+                  <c:pt idx="3">
+                    <c:v>Q4'25</c:v>
+                  </c:pt>
+                  <c:pt idx="4">
+                    <c:v>Q1'26</c:v>
+                  </c:pt>
+                  <c:pt idx="5">
+                    <c:v>Q2'26</c:v>
+                  </c:pt>
+                  <c:pt idx="6">
+                    <c:v>FY26E</c:v>
+                  </c:pt>
+                  <c:pt idx="7">
+                    <c:v>FY27E</c:v>
+                  </c:pt>
+                </c:lvl>
+              </c:multiLvlStrCache>
+            </c:multiLvlStrRef>
+          </c:cat>
+          <c:val>
+            <c:numRef>
+              <c:f>Sheet1!$B$2:$B$9</c:f>
+              <c:numCache>
+                <c:formatCode>General</c:formatCode>
+                <c:ptCount val="8"/>
+                <c:pt idx="0">
+                  <c:v>0.359</c:v>
+                </c:pt>
+                <c:pt idx="1">
+                  <c:v>0.336</c:v>
+                </c:pt>
+                <c:pt idx="2">
+                  <c:v>0.348</c:v>
+                </c:pt>
+                <c:pt idx="3">
+                  <c:v>0.346</c:v>
+                </c:pt>
+                <c:pt idx="4">
+                  <c:v>0.299</c:v>
+                </c:pt>
+                <c:pt idx="5">
+                  <c:v>0.285</c:v>
+                </c:pt>
+                <c:pt idx="6">
+                  <c:v/>
+                </c:pt>
+                <c:pt idx="7">
+                  <c:v/>
+                </c:pt>
+              </c:numCache>
+            </c:numRef>
+          </c:val>
+        </c:ser>
+        <c:ser>
+          <c:idx val="1"/>
+          <c:order val="1"/>
+          <c:tx>
+            <c:strRef>
+              <c:f>Sheet1!$C$1</c:f>
+              <c:strCache>
+                <c:ptCount val="1"/>
+                <c:pt idx="0">
+                  <c:v>Mgmt. guide</c:v>
+                </c:pt>
+              </c:strCache>
+            </c:strRef>
+          </c:tx>
+          <c:spPr>
+            <a:solidFill>
+              <a:srgbClr val="B5AEA9"/>
+            </a:solidFill>
+            <a:effectLst/>
+          </c:spPr>
+          <c:invertIfNegative val="0"/>
+          <c:dLbls>
+            <c:numFmt formatCode="0.0%" sourceLinked="0"/>
+            <c:txPr>
+              <a:bodyPr/>
+              <a:lstStyle/>
+              <a:p>
+                <a:pPr>
+                  <a:defRPr b="1" i="0" strike="noStrike" sz="1100" u="none">
+                    <a:solidFill>
+                      <a:srgbClr val="FFFFFF"/>
+                    </a:solidFill>
+                    <a:latin typeface="+mn-lt"/>
+                  </a:defRPr>
+                </a:pPr>
+              </a:p>
+            </c:txPr>
+            <c:dLblPos val="inEnd"/>
+            <c:showLegendKey val="0"/>
+            <c:showVal val="1"/>
+            <c:showCatName val="0"/>
+            <c:showSerName val="0"/>
+            <c:showPercent val="0"/>
+            <c:showBubbleSize val="0"/>
+            <c:showLeaderLines val="0"/>
+          </c:dLbls>
+          <c:cat>
+            <c:multiLvlStrRef>
+              <c:f>Sheet1!$A$2:$A$9</c:f>
+              <c:multiLvlStrCache>
+                <c:ptCount val="8"/>
+                <c:lvl>
+                  <c:pt idx="0">
+                    <c:v>Q1'25</c:v>
+                  </c:pt>
+                  <c:pt idx="1">
+                    <c:v>Q2'25</c:v>
+                  </c:pt>
+                  <c:pt idx="2">
+                    <c:v>Q3'25</c:v>
+                  </c:pt>
+                  <c:pt idx="3">
+                    <c:v>Q4'25</c:v>
+                  </c:pt>
+                  <c:pt idx="4">
+                    <c:v>Q1'26</c:v>
+                  </c:pt>
+                  <c:pt idx="5">
+                    <c:v>Q2'26</c:v>
+                  </c:pt>
+                  <c:pt idx="6">
+                    <c:v>FY26E</c:v>
+                  </c:pt>
+                  <c:pt idx="7">
+                    <c:v>FY27E</c:v>
+                  </c:pt>
+                </c:lvl>
+              </c:multiLvlStrCache>
+            </c:multiLvlStrRef>
+          </c:cat>
+          <c:val>
+            <c:numRef>
+              <c:f>Sheet1!$C$2:$C$9</c:f>
+              <c:numCache>
+                <c:formatCode>General</c:formatCode>
+                <c:ptCount val="8"/>
+                <c:pt idx="0">
+                  <c:v/>
+                </c:pt>
+                <c:pt idx="1">
+                  <c:v/>
+                </c:pt>
+                <c:pt idx="2">
+                  <c:v/>
+                </c:pt>
+                <c:pt idx="3">
+                  <c:v/>
+                </c:pt>
+                <c:pt idx="4">
+                  <c:v/>
+                </c:pt>
+                <c:pt idx="5">
+                  <c:v/>
+                </c:pt>
+                <c:pt idx="6">
+                  <c:v>0.3</c:v>
+                </c:pt>
+                <c:pt idx="7">
+                  <c:v>0.3</c:v>
+                </c:pt>
+              </c:numCache>
+            </c:numRef>
+          </c:val>
+        </c:ser>
+        <c:dLbls>
+          <c:numFmt formatCode="0.0%" sourceLinked="0"/>
+          <c:txPr>
+            <a:bodyPr/>
+            <a:lstStyle/>
+            <a:p>
+              <a:pPr>
+                <a:defRPr b="1" i="0" strike="noStrike" sz="1100" u="none">
+                  <a:solidFill>
+                    <a:srgbClr val="FFFFFF"/>
+                  </a:solidFill>
+                  <a:latin typeface="+mn-lt"/>
+                </a:defRPr>
+              </a:pPr>
+            </a:p>
+          </c:txPr>
+          <c:dLblPos val="inEnd"/>
+          <c:showLegendKey val="0"/>
+          <c:showVal val="1"/>
+          <c:showCatName val="0"/>
+          <c:showSerName val="0"/>
+          <c:showPercent val="0"/>
+          <c:showBubbleSize val="0"/>
+          <c:showLeaderLines val="0"/>
+        </c:dLbls>
+        <c:gapWidth val="30"/>
+        <c:overlap val="100"/>
+        <c:axId val="2094734554"/>
+        <c:axId val="2094734552"/>
+        <c:axId val="2094734556"/>
+      </c:barChart>
+      <c:catAx>
+        <c:axId val="2094734554"/>
+        <c:scaling>
+          <c:orientation val="minMax"/>
+        </c:scaling>
+        <c:delete val="0"/>
+        <c:axPos val="b"/>
+        <c:numFmt formatCode="General" sourceLinked="1"/>
+        <c:majorTickMark val="out"/>
+        <c:minorTickMark val="none"/>
+        <c:tickLblPos val="low"/>
+        <c:spPr>
+          <a:ln w="12700" cap="flat">
+            <a:solidFill>
+              <a:srgbClr val="BFBFBF"/>
+            </a:solidFill>
+            <a:prstDash val="solid"/>
+            <a:round/>
+          </a:ln>
+        </c:spPr>
+        <c:txPr>
+          <a:bodyPr/>
+          <a:lstStyle/>
+          <a:p>
+            <a:pPr>
+              <a:defRPr sz="1200" b="0" i="0" u="none" strike="noStrike">
+                <a:solidFill>
+                  <a:srgbClr val="1A1A1A"/>
+                </a:solidFill>
+                <a:latin typeface="+mn-lt"/>
+              </a:defRPr>
+            </a:pPr>
+            <a:endParaRPr lang="en-US"/>
+          </a:p>
+        </c:txPr>
+        <c:crossAx val="2094734552"/>
+        <c:crosses val="autoZero"/>
+        <c:auto val="1"/>
+        <c:lblAlgn val="ctr"/>
+        <c:noMultiLvlLbl val="1"/>
+      </c:catAx>
+      <c:valAx>
+        <c:axId val="2094734552"/>
+        <c:scaling>
+          <c:orientation val="minMax"/>
+          <c:max val="0.54"/>
+          <c:min val="0"/>
+        </c:scaling>
+        <c:delete val="1"/>
+        <c:axPos val="l"/>
+        <c:numFmt formatCode="General" sourceLinked="0"/>
+        <c:majorTickMark val="out"/>
+        <c:minorTickMark val="none"/>
+        <c:tickLblPos val="nextTo"/>
+        <c:spPr>
+          <a:ln w="12700" cap="flat">
+            <a:solidFill>
+              <a:srgbClr val="888888"/>
+            </a:solidFill>
+            <a:prstDash val="solid"/>
+            <a:round/>
+          </a:ln>
+        </c:spPr>
+        <c:txPr>
+          <a:bodyPr/>
+          <a:lstStyle/>
+          <a:p>
+            <a:pPr>
+              <a:defRPr sz="1200" b="0" i="0" u="none" strike="noStrike">
+                <a:solidFill>
+                  <a:srgbClr val="000000"/>
+                </a:solidFill>
+                <a:latin typeface="Arial"/>
+              </a:defRPr>
+            </a:pPr>
+            <a:endParaRPr lang="en-US"/>
+          </a:p>
+        </c:txPr>
+        <c:crossAx val="2094734554"/>
+        <c:crosses val="autoZero"/>
+        <c:crossBetween val="between"/>
+      </c:valAx>
+      <c:spPr>
+        <a:noFill/>
+        <a:ln>
+          <a:noFill/>
+        </a:ln>
+        <a:effectLst/>
+      </c:spPr>
+    </c:plotArea>
+    <c:plotVisOnly val="1"/>
+    <c:dispBlanksAs val="span"/>
+  </c:chart>
+  <c:spPr>
+    <a:noFill/>
+    <a:ln>
+      <a:noFill/>
+    </a:ln>
+    <a:effectLst/>
+  </c:spPr>
+  <c:externalData r:id="rId1">
+    <c:autoUpdate val="0"/>
+  </c:externalData>
+</c:chartSpace>
+</file>
+
+<file path=ppt/charts/chart2.xml><?xml version="1.0" encoding="utf-8"?>
+<c:chartSpace xmlns:c="http://schemas.openxmlformats.org/drawingml/2006/chart" xmlns:a="http://schemas.openxmlformats.org/drawingml/2006/main" xmlns:r="http://schemas.openxmlformats.org/officeDocument/2006/relationships">
+  <c:date1904 val="0"/>
+  <c:roundedCorners val="1"/>
+  <c:chart>
+    <c:autoTitleDeleted val="1"/>
+    <c:plotArea>
+      <c:layout/>
+      <c:barChart>
+        <c:barDir val="col"/>
+        <c:grouping val="clustered"/>
+        <c:varyColors val="0"/>
+        <c:ser>
+          <c:idx val="0"/>
+          <c:order val="0"/>
+          <c:tx>
+            <c:strRef>
+              <c:f>Sheet1!$B$1</c:f>
+              <c:strCache>
+                <c:ptCount val="1"/>
+                <c:pt idx="0">
+                  <c:v>Margin</c:v>
+                </c:pt>
+              </c:strCache>
+            </c:strRef>
+          </c:tx>
+          <c:spPr>
+            <a:solidFill>
+              <a:srgbClr val="B5AEA9"/>
+            </a:solidFill>
+            <a:effectLst/>
+          </c:spPr>
+          <c:invertIfNegative val="0"/>
+          <c:dLbls>
+            <c:numFmt formatCode="0%" sourceLinked="0"/>
+            <c:txPr>
+              <a:bodyPr/>
+              <a:lstStyle/>
+              <a:p>
+                <a:pPr>
+                  <a:defRPr b="1" i="0" strike="noStrike" sz="1300" u="none">
+                    <a:solidFill>
+                      <a:srgbClr val="1A1A1A"/>
+                    </a:solidFill>
+                    <a:latin typeface="+mn-lt"/>
+                  </a:defRPr>
+                </a:pPr>
+              </a:p>
+            </c:txPr>
+            <c:showLegendKey val="0"/>
+            <c:showVal val="1"/>
+            <c:showCatName val="0"/>
+            <c:showSerName val="0"/>
+            <c:showPercent val="0"/>
+            <c:showBubbleSize val="0"/>
+            <c:showLeaderLines val="0"/>
+          </c:dLbls>
+          <c:dPt>
+            <c:idx val="0"/>
+            <c:invertIfNegative val="0"/>
+            <c:bubble3D val="0"/>
+            <c:spPr>
+              <a:solidFill>
+                <a:srgbClr val="B5AEA9"/>
+              </a:solidFill>
+              <a:effectLst/>
+            </c:spPr>
+          </c:dPt>
+          <c:dPt>
+            <c:idx val="1"/>
+            <c:invertIfNegative val="0"/>
+            <c:bubble3D val="0"/>
+            <c:spPr>
+              <a:solidFill>
+                <a:srgbClr val="0A1C58"/>
+              </a:solidFill>
+              <a:effectLst/>
+            </c:spPr>
+          </c:dPt>
+          <c:dPt>
+            <c:idx val="2"/>
+            <c:invertIfNegative val="0"/>
+            <c:bubble3D val="0"/>
+            <c:spPr>
+              <a:solidFill>
+                <a:srgbClr val="5A5350"/>
+              </a:solidFill>
+              <a:effectLst/>
+            </c:spPr>
+          </c:dPt>
+          <c:cat>
+            <c:multiLvlStrRef>
+              <c:f>Sheet1!$A$2:$A$4</c:f>
+              <c:multiLvlStrCache>
+                <c:ptCount val="3"/>
+                <c:lvl>
+                  <c:pt idx="0">
+                    <c:v>Light</c:v>
+                  </c:pt>
+                  <c:pt idx="1">
+                    <c:v>Heavy</c:v>
+                  </c:pt>
+                  <c:pt idx="2">
+                    <c:v>Blended</c:v>
+                  </c:pt>
+                </c:lvl>
+              </c:multiLvlStrCache>
+            </c:multiLvlStrRef>
+          </c:cat>
+          <c:val>
+            <c:numRef>
+              <c:f>Sheet1!$B$2:$B$4</c:f>
+              <c:numCache>
+                <c:formatCode>General</c:formatCode>
+                <c:ptCount val="3"/>
+                <c:pt idx="0">
+                  <c:v>0.417</c:v>
+                </c:pt>
+                <c:pt idx="1">
+                  <c:v>0.25</c:v>
+                </c:pt>
+                <c:pt idx="2">
+                  <c:v>0.306</c:v>
+                </c:pt>
+              </c:numCache>
+            </c:numRef>
+          </c:val>
+        </c:ser>
+        <c:dLbls>
+          <c:numFmt formatCode="0%" sourceLinked="0"/>
+          <c:txPr>
+            <a:bodyPr/>
+            <a:lstStyle/>
+            <a:p>
+              <a:pPr>
+                <a:defRPr b="1" i="0" strike="noStrike" sz="1300" u="none">
+                  <a:solidFill>
+                    <a:srgbClr val="1A1A1A"/>
+                  </a:solidFill>
+                  <a:latin typeface="+mn-lt"/>
+                </a:defRPr>
+              </a:pPr>
+            </a:p>
+          </c:txPr>
+          <c:showLegendKey val="0"/>
+          <c:showVal val="1"/>
+          <c:showCatName val="0"/>
+          <c:showSerName val="0"/>
+          <c:showPercent val="0"/>
+          <c:showBubbleSize val="0"/>
+          <c:showLeaderLines val="0"/>
+        </c:dLbls>
+        <c:gapWidth val="45"/>
+        <c:overlap val="0"/>
+        <c:axId val="2094734554"/>
+        <c:axId val="2094734552"/>
+        <c:axId val="2094734556"/>
+      </c:barChart>
+      <c:catAx>
+        <c:axId val="2094734554"/>
+        <c:scaling>
+          <c:orientation val="minMax"/>
+        </c:scaling>
+        <c:delete val="0"/>
+        <c:axPos val="b"/>
+        <c:numFmt formatCode="General" sourceLinked="1"/>
+        <c:majorTickMark val="out"/>
+        <c:minorTickMark val="none"/>
+        <c:tickLblPos val="low"/>
+        <c:spPr>
+          <a:ln w="12700" cap="flat">
+            <a:solidFill>
+              <a:srgbClr val="BFBFBF"/>
+            </a:solidFill>
+            <a:prstDash val="solid"/>
+            <a:round/>
+          </a:ln>
+        </c:spPr>
+        <c:txPr>
+          <a:bodyPr/>
+          <a:lstStyle/>
+          <a:p>
+            <a:pPr>
+              <a:defRPr sz="1200" b="0" i="0" u="none" strike="noStrike">
+                <a:solidFill>
+                  <a:srgbClr val="1A1A1A"/>
+                </a:solidFill>
+                <a:latin typeface="+mn-lt"/>
+              </a:defRPr>
+            </a:pPr>
+            <a:endParaRPr lang="en-US"/>
+          </a:p>
+        </c:txPr>
+        <c:crossAx val="2094734552"/>
+        <c:crosses val="autoZero"/>
+        <c:auto val="1"/>
+        <c:lblAlgn val="ctr"/>
+        <c:noMultiLvlLbl val="1"/>
+      </c:catAx>
+      <c:valAx>
+        <c:axId val="2094734552"/>
+        <c:scaling>
+          <c:orientation val="minMax"/>
+          <c:max val="0.5"/>
+          <c:min val="0"/>
+        </c:scaling>
+        <c:delete val="1"/>
+        <c:axPos val="l"/>
+        <c:numFmt formatCode="General" sourceLinked="0"/>
+        <c:majorTickMark val="out"/>
+        <c:minorTickMark val="none"/>
+        <c:tickLblPos val="nextTo"/>
+        <c:spPr>
+          <a:ln w="12700" cap="flat">
+            <a:solidFill>
+              <a:srgbClr val="888888"/>
+            </a:solidFill>
+            <a:prstDash val="solid"/>
+            <a:round/>
+          </a:ln>
+        </c:spPr>
+        <c:txPr>
+          <a:bodyPr/>
+          <a:lstStyle/>
+          <a:p>
+            <a:pPr>
+              <a:defRPr sz="1200" b="0" i="0" u="none" strike="noStrike">
+                <a:solidFill>
+                  <a:srgbClr val="000000"/>
+                </a:solidFill>
+                <a:latin typeface="Arial"/>
+              </a:defRPr>
+            </a:pPr>
+            <a:endParaRPr lang="en-US"/>
+          </a:p>
+        </c:txPr>
+        <c:crossAx val="2094734554"/>
+        <c:crosses val="autoZero"/>
+        <c:crossBetween val="between"/>
+      </c:valAx>
+      <c:spPr>
+        <a:noFill/>
+        <a:ln>
+          <a:noFill/>
+        </a:ln>
+        <a:effectLst/>
+      </c:spPr>
+    </c:plotArea>
+    <c:plotVisOnly val="1"/>
+    <c:dispBlanksAs val="span"/>
+  </c:chart>
+  <c:spPr>
+    <a:noFill/>
+    <a:ln>
+      <a:noFill/>
+    </a:ln>
+    <a:effectLst/>
+  </c:spPr>
+  <c:externalData r:id="rId1">
+    <c:autoUpdate val="0"/>
+  </c:externalData>
+</c:chartSpace>
+</file>
+
+<file path=ppt/charts/chart3.xml><?xml version="1.0" encoding="utf-8"?>
+<c:chartSpace xmlns:c="http://schemas.openxmlformats.org/drawingml/2006/chart" xmlns:a="http://schemas.openxmlformats.org/drawingml/2006/main" xmlns:r="http://schemas.openxmlformats.org/officeDocument/2006/relationships">
+  <c:date1904 val="0"/>
+  <c:roundedCorners val="1"/>
+  <c:chart>
+    <c:autoTitleDeleted val="1"/>
+    <c:plotArea>
+      <c:layout/>
+      <c:barChart>
+        <c:barDir val="col"/>
+        <c:grouping val="clustered"/>
+        <c:varyColors val="0"/>
+        <c:ser>
+          <c:idx val="0"/>
+          <c:order val="0"/>
+          <c:tx>
+            <c:strRef>
+              <c:f>Sheet1!$B$1</c:f>
+              <c:strCache>
+                <c:ptCount val="1"/>
+                <c:pt idx="0">
+                  <c:v>EV / EBITDA</c:v>
+                </c:pt>
+              </c:strCache>
+            </c:strRef>
+          </c:tx>
+          <c:spPr>
+            <a:solidFill>
+              <a:srgbClr val="0A1C58"/>
+            </a:solidFill>
+            <a:effectLst/>
+          </c:spPr>
+          <c:invertIfNegative val="0"/>
+          <c:dLbls>
+            <c:numFmt formatCode="0.0&quot;x&quot;" sourceLinked="0"/>
+            <c:txPr>
+              <a:bodyPr/>
+              <a:lstStyle/>
+              <a:p>
+                <a:pPr>
+                  <a:defRPr b="1" i="0" strike="noStrike" sz="1300" u="none">
+                    <a:solidFill>
+                      <a:srgbClr val="1A1A1A"/>
+                    </a:solidFill>
+                    <a:latin typeface="+mn-lt"/>
+                  </a:defRPr>
+                </a:pPr>
+              </a:p>
+            </c:txPr>
+            <c:showLegendKey val="0"/>
+            <c:showVal val="1"/>
+            <c:showCatName val="0"/>
+            <c:showSerName val="0"/>
+            <c:showPercent val="0"/>
+            <c:showBubbleSize val="0"/>
+            <c:showLeaderLines val="0"/>
+          </c:dLbls>
+          <c:cat>
+            <c:multiLvlStrRef>
+              <c:f>Sheet1!$A$2:$A$4</c:f>
+              <c:multiLvlStrCache>
+                <c:ptCount val="3"/>
+                <c:lvl>
+                  <c:pt idx="0">
+                    <c:v>FY26E</c:v>
+                  </c:pt>
+                  <c:pt idx="1">
+                    <c:v>FY27E</c:v>
+                  </c:pt>
+                  <c:pt idx="2">
+                    <c:v>FY28E</c:v>
+                  </c:pt>
+                </c:lvl>
+              </c:multiLvlStrCache>
+            </c:multiLvlStrRef>
+          </c:cat>
+          <c:val>
+            <c:numRef>
+              <c:f>Sheet1!$B$2:$B$4</c:f>
+              <c:numCache>
+                <c:formatCode>General</c:formatCode>
+                <c:ptCount val="3"/>
+                <c:pt idx="0">
+                  <c:v>15.9</c:v>
+                </c:pt>
+                <c:pt idx="1">
+                  <c:v>9.8</c:v>
+                </c:pt>
+                <c:pt idx="2">
+                  <c:v>6.8</c:v>
+                </c:pt>
+              </c:numCache>
+            </c:numRef>
+          </c:val>
+        </c:ser>
+        <c:dLbls>
+          <c:numFmt formatCode="0.0&quot;x&quot;" sourceLinked="0"/>
+          <c:txPr>
+            <a:bodyPr/>
+            <a:lstStyle/>
+            <a:p>
+              <a:pPr>
+                <a:defRPr b="1" i="0" strike="noStrike" sz="1300" u="none">
+                  <a:solidFill>
+                    <a:srgbClr val="1A1A1A"/>
+                  </a:solidFill>
+                  <a:latin typeface="+mn-lt"/>
+                </a:defRPr>
+              </a:pPr>
+            </a:p>
+          </c:txPr>
+          <c:showLegendKey val="0"/>
+          <c:showVal val="1"/>
+          <c:showCatName val="0"/>
+          <c:showSerName val="0"/>
+          <c:showPercent val="0"/>
+          <c:showBubbleSize val="0"/>
+          <c:showLeaderLines val="0"/>
+        </c:dLbls>
+        <c:gapWidth val="45"/>
+        <c:overlap val="0"/>
+        <c:axId val="2094734554"/>
+        <c:axId val="2094734552"/>
+        <c:axId val="2094734556"/>
+      </c:barChart>
+      <c:catAx>
+        <c:axId val="2094734554"/>
+        <c:scaling>
+          <c:orientation val="minMax"/>
+        </c:scaling>
+        <c:delete val="0"/>
+        <c:axPos val="b"/>
+        <c:numFmt formatCode="General" sourceLinked="1"/>
+        <c:majorTickMark val="out"/>
+        <c:minorTickMark val="none"/>
+        <c:tickLblPos val="low"/>
+        <c:spPr>
+          <a:ln w="12700" cap="flat">
+            <a:solidFill>
+              <a:srgbClr val="BFBFBF"/>
+            </a:solidFill>
+            <a:prstDash val="solid"/>
+            <a:round/>
+          </a:ln>
+        </c:spPr>
+        <c:txPr>
+          <a:bodyPr/>
+          <a:lstStyle/>
+          <a:p>
+            <a:pPr>
+              <a:defRPr sz="1200" b="0" i="0" u="none" strike="noStrike">
+                <a:solidFill>
+                  <a:srgbClr val="1A1A1A"/>
+                </a:solidFill>
+                <a:latin typeface="+mn-lt"/>
+              </a:defRPr>
+            </a:pPr>
+            <a:endParaRPr lang="en-US"/>
+          </a:p>
+        </c:txPr>
+        <c:crossAx val="2094734552"/>
+        <c:crosses val="autoZero"/>
+        <c:auto val="1"/>
+        <c:lblAlgn val="ctr"/>
+        <c:noMultiLvlLbl val="1"/>
+      </c:catAx>
+      <c:valAx>
+        <c:axId val="2094734552"/>
+        <c:scaling>
+          <c:orientation val="minMax"/>
+          <c:max val="19"/>
+          <c:min val="0"/>
+        </c:scaling>
+        <c:delete val="1"/>
+        <c:axPos val="l"/>
+        <c:numFmt formatCode="General" sourceLinked="0"/>
+        <c:majorTickMark val="out"/>
+        <c:minorTickMark val="none"/>
+        <c:tickLblPos val="nextTo"/>
+        <c:spPr>
+          <a:ln w="12700" cap="flat">
+            <a:solidFill>
+              <a:srgbClr val="888888"/>
+            </a:solidFill>
+            <a:prstDash val="solid"/>
+            <a:round/>
+          </a:ln>
+        </c:spPr>
+        <c:txPr>
+          <a:bodyPr/>
+          <a:lstStyle/>
+          <a:p>
+            <a:pPr>
+              <a:defRPr sz="1200" b="0" i="0" u="none" strike="noStrike">
+                <a:solidFill>
+                  <a:srgbClr val="000000"/>
+                </a:solidFill>
+                <a:latin typeface="Arial"/>
+              </a:defRPr>
+            </a:pPr>
+            <a:endParaRPr lang="en-US"/>
+          </a:p>
+        </c:txPr>
+        <c:crossAx val="2094734554"/>
+        <c:crosses val="autoZero"/>
+        <c:crossBetween val="between"/>
+      </c:valAx>
+      <c:spPr>
+        <a:noFill/>
+        <a:ln>
+          <a:noFill/>
+        </a:ln>
+        <a:effectLst/>
+      </c:spPr>
+    </c:plotArea>
+    <c:plotVisOnly val="1"/>
+    <c:dispBlanksAs val="span"/>
+  </c:chart>
+  <c:spPr>
+    <a:noFill/>
+    <a:ln>
+      <a:noFill/>
+    </a:ln>
+    <a:effectLst/>
+  </c:spPr>
+  <c:externalData r:id="rId1">
+    <c:autoUpdate val="0"/>
+  </c:externalData>
+</c:chartSpace>
 </file>
 
 <file path=ppt/notesMasters/notesMaster1.xml><?xml version="1.0" encoding="utf-8"?>
@@ -652,6 +1528,182 @@
 </p:notes>
 </file>
 
+<file path=ppt/notesSlides/notesSlide3.xml><?xml version="1.0" encoding="utf-8"?>
+<p:notes xmlns:a="http://schemas.openxmlformats.org/drawingml/2006/main" xmlns:r="http://schemas.openxmlformats.org/officeDocument/2006/relationships" xmlns:p="http://schemas.openxmlformats.org/presentationml/2006/main">
+  <p:cSld>
+    <p:spTree>
+      <p:nvGrpSpPr>
+        <p:cNvPr id="1" name=""/>
+        <p:cNvGrpSpPr/>
+        <p:nvPr/>
+      </p:nvGrpSpPr>
+      <p:grpSpPr>
+        <a:xfrm>
+          <a:off x="0" y="0"/>
+          <a:ext cx="0" cy="0"/>
+          <a:chOff x="0" y="0"/>
+          <a:chExt cx="0" cy="0"/>
+        </a:xfrm>
+      </p:grpSpPr>
+      <p:sp>
+        <p:nvSpPr>
+          <p:cNvPr id="2" name="Slide Image Placeholder 1"/>
+          <p:cNvSpPr>
+            <a:spLocks noGrp="1" noRot="1" noChangeAspect="1"/>
+          </p:cNvSpPr>
+          <p:nvPr>
+            <p:ph type="sldImg"/>
+          </p:nvPr>
+        </p:nvSpPr>
+        <p:spPr/>
+      </p:sp>
+      <p:sp>
+        <p:nvSpPr>
+          <p:cNvPr id="3" name="Notes Placeholder 2"/>
+          <p:cNvSpPr>
+            <a:spLocks noGrp="1"/>
+          </p:cNvSpPr>
+          <p:nvPr>
+            <p:ph type="body" idx="1"/>
+          </p:nvPr>
+        </p:nvSpPr>
+        <p:spPr/>
+        <p:txBody>
+          <a:bodyPr/>
+          <a:lstStyle/>
+          <a:p>
+            <a:r>
+              <a:rPr lang="en-US" dirty="0"/>
+              <a:t>Reported quarterly Aerospace Products Adj. EBITDA margins from the RPM tab. Q4'25 34.6% to Q1'26 29.9% = -470 bps. Mix example is management's: a 6,000-cycle engine sold for ~$6M earns ~$2.5M; a 10,000-cycle engine sold for ~$12M earns ~$3M; one of each blends to ~30%.</a:t>
+            </a:r>
+            <a:endParaRPr lang="en-US" dirty="0"/>
+          </a:p>
+        </p:txBody>
+      </p:sp>
+      <p:sp>
+        <p:nvSpPr>
+          <p:cNvPr id="4" name="Slide Number Placeholder 3"/>
+          <p:cNvSpPr>
+            <a:spLocks noGrp="1"/>
+          </p:cNvSpPr>
+          <p:nvPr>
+            <p:ph type="sldNum" sz="quarter" idx="10"/>
+          </p:nvPr>
+        </p:nvSpPr>
+        <p:spPr/>
+        <p:txBody>
+          <a:bodyPr/>
+          <a:lstStyle/>
+          <a:p>
+            <a:fld id="{F7021451-1387-4CA6-816F-3879F97B5CBC}" type="slidenum">
+              <a:rPr lang="en-US"/>
+              <a:t>3</a:t>
+            </a:fld>
+            <a:endParaRPr lang="en-US"/>
+          </a:p>
+        </p:txBody>
+      </p:sp>
+    </p:spTree>
+    <p:extLst>
+      <p:ext uri="{BB962C8B-B14F-4D97-AF65-F5344CB8AC3E}">
+        <p14:creationId xmlns:p14="http://schemas.microsoft.com/office/powerpoint/2010/main" val="1024086991"/>
+      </p:ext>
+    </p:extLst>
+  </p:cSld>
+  <p:clrMapOvr>
+    <a:masterClrMapping/>
+  </p:clrMapOvr>
+</p:notes>
+</file>
+
+<file path=ppt/notesSlides/notesSlide4.xml><?xml version="1.0" encoding="utf-8"?>
+<p:notes xmlns:a="http://schemas.openxmlformats.org/drawingml/2006/main" xmlns:r="http://schemas.openxmlformats.org/officeDocument/2006/relationships" xmlns:p="http://schemas.openxmlformats.org/presentationml/2006/main">
+  <p:cSld>
+    <p:spTree>
+      <p:nvGrpSpPr>
+        <p:cNvPr id="1" name=""/>
+        <p:cNvGrpSpPr/>
+        <p:nvPr/>
+      </p:nvGrpSpPr>
+      <p:grpSpPr>
+        <a:xfrm>
+          <a:off x="0" y="0"/>
+          <a:ext cx="0" cy="0"/>
+          <a:chOff x="0" y="0"/>
+          <a:chExt cx="0" cy="0"/>
+        </a:xfrm>
+      </p:grpSpPr>
+      <p:sp>
+        <p:nvSpPr>
+          <p:cNvPr id="2" name="Slide Image Placeholder 1"/>
+          <p:cNvSpPr>
+            <a:spLocks noGrp="1" noRot="1" noChangeAspect="1"/>
+          </p:cNvSpPr>
+          <p:nvPr>
+            <p:ph type="sldImg"/>
+          </p:nvPr>
+        </p:nvSpPr>
+        <p:spPr/>
+      </p:sp>
+      <p:sp>
+        <p:nvSpPr>
+          <p:cNvPr id="3" name="Notes Placeholder 2"/>
+          <p:cNvSpPr>
+            <a:spLocks noGrp="1"/>
+          </p:cNvSpPr>
+          <p:nvPr>
+            <p:ph type="body" idx="1"/>
+          </p:nvPr>
+        </p:nvSpPr>
+        <p:spPr/>
+        <p:txBody>
+          <a:bodyPr/>
+          <a:lstStyle/>
+          <a:p>
+            <a:r>
+              <a:rPr lang="en-US" dirty="0"/>
+              <a:t>EV of $20.56B at $167.03 (10/2/26) over Jefferies Adj. EBITDA of $1,289M (FY26E), $2,099M (FY27E) and $3,023M (FY28E).</a:t>
+            </a:r>
+            <a:endParaRPr lang="en-US" dirty="0"/>
+          </a:p>
+        </p:txBody>
+      </p:sp>
+      <p:sp>
+        <p:nvSpPr>
+          <p:cNvPr id="4" name="Slide Number Placeholder 3"/>
+          <p:cNvSpPr>
+            <a:spLocks noGrp="1"/>
+          </p:cNvSpPr>
+          <p:nvPr>
+            <p:ph type="sldNum" sz="quarter" idx="10"/>
+          </p:nvPr>
+        </p:nvSpPr>
+        <p:spPr/>
+        <p:txBody>
+          <a:bodyPr/>
+          <a:lstStyle/>
+          <a:p>
+            <a:fld id="{F7021451-1387-4CA6-816F-3879F97B5CBC}" type="slidenum">
+              <a:rPr lang="en-US"/>
+              <a:t>4</a:t>
+            </a:fld>
+            <a:endParaRPr lang="en-US"/>
+          </a:p>
+        </p:txBody>
+      </p:sp>
+    </p:spTree>
+    <p:extLst>
+      <p:ext uri="{BB962C8B-B14F-4D97-AF65-F5344CB8AC3E}">
+        <p14:creationId xmlns:p14="http://schemas.microsoft.com/office/powerpoint/2010/main" val="1024086991"/>
+      </p:ext>
+    </p:extLst>
+  </p:cSld>
+  <p:clrMapOvr>
+    <a:masterClrMapping/>
+  </p:clrMapOvr>
+</p:notes>
+</file>
+
 <file path=ppt/slideLayouts/slideLayout1.xml><?xml version="1.0" encoding="utf-8"?>
 <p:sldLayout xmlns:a="http://schemas.openxmlformats.org/drawingml/2006/main" xmlns:r="http://schemas.openxmlformats.org/officeDocument/2006/relationships" xmlns:p="http://schemas.openxmlformats.org/presentationml/2006/main" preserve="1">
   <p:cSld name="DEFAULT">
@@ -877,6 +1929,208 @@
 </p:sldLayout>
 </file>
 
+<file path=ppt/slideLayouts/slideLayout4.xml><?xml version="1.0" encoding="utf-8"?>
+<p:sldLayout xmlns:a="http://schemas.openxmlformats.org/drawingml/2006/main" xmlns:r="http://schemas.openxmlformats.org/officeDocument/2006/relationships" xmlns:p="http://schemas.openxmlformats.org/presentationml/2006/main" preserve="1">
+  <p:cSld name="GPS Content Subtitle">
+    <p:bg>
+      <p:bgPr>
+        <a:solidFill>
+          <a:srgbClr val="FFFFFF"/>
+        </a:solidFill>
+      </p:bgPr>
+    </p:bg>
+    <p:spTree>
+      <p:nvGrpSpPr>
+        <p:cNvPr id="1" name=""/>
+        <p:cNvGrpSpPr/>
+        <p:nvPr/>
+      </p:nvGrpSpPr>
+      <p:grpSpPr>
+        <a:xfrm>
+          <a:off x="0" y="0"/>
+          <a:ext cx="0" cy="0"/>
+          <a:chOff x="0" y="0"/>
+          <a:chExt cx="0" cy="0"/>
+        </a:xfrm>
+      </p:grpSpPr>
+      <p:sp>
+        <p:nvSpPr>
+          <p:cNvPr id="2" name="Shape 0"/>
+          <p:cNvSpPr/>
+          <p:nvPr/>
+        </p:nvSpPr>
+        <p:spPr>
+          <a:xfrm>
+            <a:off x="320040" y="868680"/>
+            <a:ext cx="8503920" cy="0"/>
+          </a:xfrm>
+          <a:prstGeom prst="line">
+            <a:avLst/>
+          </a:prstGeom>
+          <a:noFill/>
+          <a:ln w="15875">
+            <a:solidFill>
+              <a:srgbClr val="0A1C58"/>
+            </a:solidFill>
+            <a:prstDash val="solid"/>
+          </a:ln>
+        </p:spPr>
+      </p:sp>
+      <p:pic>
+        <p:nvPicPr>
+          <p:cNvPr id="3" name="Image 0" descr="/home/user/SPOT/deck/gps_logo.jpeg">    </p:cNvPr>
+          <p:cNvPicPr>
+            <a:picLocks noChangeAspect="1"/>
+          </p:cNvPicPr>
+          <p:nvPr/>
+        </p:nvPicPr>
+        <p:blipFill>
+          <a:blip r:embed="rId1"/>
+          <a:stretch>
+            <a:fillRect/>
+          </a:stretch>
+        </p:blipFill>
+        <p:spPr>
+          <a:xfrm>
+            <a:off x="8119872" y="6144768"/>
+            <a:ext cx="621792" cy="566928"/>
+          </a:xfrm>
+          <a:prstGeom prst="rect">
+            <a:avLst/>
+          </a:prstGeom>
+        </p:spPr>
+      </p:pic>
+      <p:sp>
+        <p:nvSpPr>
+          <p:cNvPr id="4" name="Text 1"/>
+          <p:cNvSpPr/>
+          <p:nvPr>
+            <p:ph idx="102" type="title" hasCustomPrompt="1"/>
+          </p:nvPr>
+        </p:nvSpPr>
+        <p:spPr>
+          <a:xfrm>
+            <a:off x="320040" y="182880"/>
+            <a:ext cx="7132320" cy="640080"/>
+          </a:xfrm>
+          <a:prstGeom prst="rect">
+            <a:avLst/>
+          </a:prstGeom>
+          <a:noFill/>
+          <a:ln/>
+        </p:spPr>
+        <p:txBody>
+          <a:bodyPr wrap="square" rtlCol="0"/>
+          <a:lstStyle>
+            <a:lvl1pPr algn="l" indent="0" marL="0">
+              <a:buNone/>
+              <a:defRPr lang="en-US" sz="3200" b="1" dirty="0">
+                <a:solidFill>
+                  <a:schemeClr val="tx2"/>
+                </a:solidFill>
+              </a:defRPr>
+            </a:lvl1pPr>
+          </a:lstStyle>
+          <a:p>
+            <a:pPr algn="l" indent="0" marL="0">
+              <a:buNone/>
+            </a:pPr>
+            <a:endParaRPr lang="en-US" sz="3200" dirty="0"/>
+          </a:p>
+        </p:txBody>
+      </p:sp>
+      <p:sp>
+        <p:nvSpPr>
+          <p:cNvPr id="5" name="Text 1"/>
+          <p:cNvSpPr/>
+          <p:nvPr>
+            <p:ph idx="103" type="body" hasCustomPrompt="1"/>
+          </p:nvPr>
+        </p:nvSpPr>
+        <p:spPr>
+          <a:xfrm>
+            <a:off x="320040" y="932688"/>
+            <a:ext cx="8503920" cy="566928"/>
+          </a:xfrm>
+          <a:prstGeom prst="rect">
+            <a:avLst/>
+          </a:prstGeom>
+          <a:noFill/>
+          <a:ln/>
+        </p:spPr>
+        <p:txBody>
+          <a:bodyPr wrap="square" rtlCol="0"/>
+          <a:lstStyle>
+            <a:lvl1pPr algn="l" indent="0" marL="0">
+              <a:buNone/>
+              <a:defRPr lang="en-US" sz="1700" b="1" dirty="0">
+                <a:solidFill>
+                  <a:schemeClr val="tx2"/>
+                </a:solidFill>
+              </a:defRPr>
+            </a:lvl1pPr>
+          </a:lstStyle>
+          <a:p>
+            <a:pPr algn="l" indent="0" marL="0">
+              <a:buNone/>
+            </a:pPr>
+            <a:endParaRPr lang="en-US" sz="1700" dirty="0"/>
+          </a:p>
+        </p:txBody>
+      </p:sp>
+      <p:sp>
+        <p:nvSpPr>
+          <p:cNvPr id="25" name="Slide Number Placeholder 0"/>
+          <p:cNvSpPr>
+            <a:spLocks noGrp="1"/>
+          </p:cNvSpPr>
+          <p:nvPr>
+            <p:ph type="sldNum" sz="quarter" idx="4294967295"/>
+          </p:nvPr>
+        </p:nvSpPr>
+        <p:spPr>
+          <a:xfrm>
+            <a:off x="7635240" y="6327648"/>
+            <a:ext cx="411480" cy="274320"/>
+          </a:xfrm>
+          <a:prstGeom prst="rect">
+            <a:avLst/>
+          </a:prstGeom>
+          <a:extLst>
+            <a:ext uri="{C572A759-6A51-4108-AA02-DFA0A04FC94B}">
+              <ma14:wrappingTextBoxFlag xmlns:ma14="http://schemas.microsoft.com/office/mac/drawingml/2011/main" val="0"/>
+            </a:ext>
+          </a:extLst>
+        </p:spPr>
+        <p:txBody>
+          <a:bodyPr/>
+          <a:lstStyle>
+            <a:lvl1pPr>
+              <a:defRPr sz="1100">
+                <a:solidFill>
+                  <a:srgbClr val="1A1A1A"/>
+                </a:solidFill>
+              </a:defRPr>
+            </a:lvl1pPr>
+          </a:lstStyle>
+          <a:p>
+            <a:pPr algn="r"/>
+            <a:fld id="{F7021451-1387-4CA6-816F-3879F97B5CBC}" type="slidenum">
+              <a:rPr b="1" lang="en-US"/>
+              <a:t>1004</a:t>
+            </a:fld>
+            <a:endParaRPr lang="en-US"/>
+          </a:p>
+        </p:txBody>
+      </p:sp>
+    </p:spTree>
+  </p:cSld>
+  <p:clrMapOvr>
+    <a:masterClrMapping/>
+  </p:clrMapOvr>
+</p:sldLayout>
+</file>
+
 <file path=ppt/slideMasters/slideMaster1.xml><?xml version="1.0" encoding="utf-8"?>
 <p:sldMaster xmlns:a="http://schemas.openxmlformats.org/drawingml/2006/main" xmlns:r="http://schemas.openxmlformats.org/officeDocument/2006/relationships" xmlns:p="http://schemas.openxmlformats.org/presentationml/2006/main">
   <p:cSld>
@@ -946,6 +2200,7 @@
     <p:sldLayoutId id="2147483649" r:id="rId1"/>
     <p:sldLayoutId id="2147483650" r:id="rId2"/>
     <p:sldLayoutId id="2147483651" r:id="rId3"/>
+    <p:sldLayoutId id="2147483652" r:id="rId4"/>
   </p:sldLayoutIdLst>
   <p:hf sldNum="0" hdr="0" ftr="0" dt="0"/>
   <p:txStyles>
@@ -2353,6 +3608,1164 @@
             <a:fld id="{F7021451-1387-4CA6-816F-3879F97B5CBC}" type="slidenum">
               <a:rPr b="1" lang="en-US"/>
               <a:t>2</a:t>
+            </a:fld>
+            <a:endParaRPr lang="en-US"/>
+          </a:p>
+        </p:txBody>
+      </p:sp>
+    </p:spTree>
+  </p:cSld>
+  <p:clrMapOvr>
+    <a:masterClrMapping/>
+  </p:clrMapOvr>
+</p:sld>
+</file>
+
+<file path=ppt/slides/slide3.xml><?xml version="1.0" encoding="utf-8"?>
+<p:sld xmlns:a="http://schemas.openxmlformats.org/drawingml/2006/main" xmlns:r="http://schemas.openxmlformats.org/officeDocument/2006/relationships" xmlns:p="http://schemas.openxmlformats.org/presentationml/2006/main">
+  <p:cSld name="Slide 3">
+    <p:spTree>
+      <p:nvGrpSpPr>
+        <p:cNvPr id="1" name=""/>
+        <p:cNvGrpSpPr/>
+        <p:nvPr/>
+      </p:nvGrpSpPr>
+      <p:grpSpPr>
+        <a:xfrm>
+          <a:off x="0" y="0"/>
+          <a:ext cx="0" cy="0"/>
+          <a:chOff x="0" y="0"/>
+          <a:chExt cx="0" cy="0"/>
+        </a:xfrm>
+      </p:grpSpPr>
+      <p:sp>
+        <p:nvSpPr>
+          <p:cNvPr id="2" name="Text 1"/>
+          <p:cNvSpPr/>
+          <p:nvPr>
+            <p:ph idx="102" type="title" hasCustomPrompt="1"/>
+          </p:nvPr>
+        </p:nvSpPr>
+        <p:spPr>
+          <a:xfrm>
+            <a:off x="320040" y="182880"/>
+            <a:ext cx="7132320" cy="640080"/>
+          </a:xfrm>
+          <a:prstGeom prst="rect">
+            <a:avLst/>
+          </a:prstGeom>
+          <a:noFill/>
+          <a:ln/>
+        </p:spPr>
+        <p:txBody>
+          <a:bodyPr wrap="square" lIns="0" tIns="0" rIns="0" bIns="0" rtlCol="0" anchor="ctr"/>
+          <a:lstStyle/>
+          <a:p>
+            <a:pPr algn="l" indent="0" marL="0">
+              <a:buNone/>
+            </a:pPr>
+            <a:r>
+              <a:rPr lang="en-US" sz="3200" b="1" dirty="0">
+                <a:solidFill>
+                  <a:schemeClr val="tx2"/>
+                </a:solidFill>
+              </a:rPr>
+              <a:t>The Opportunity (1/3)</a:t>
+            </a:r>
+            <a:endParaRPr lang="en-US" sz="3200" dirty="0"/>
+          </a:p>
+        </p:txBody>
+      </p:sp>
+      <p:sp>
+        <p:nvSpPr>
+          <p:cNvPr id="3" name="Text 1"/>
+          <p:cNvSpPr/>
+          <p:nvPr>
+            <p:ph idx="103" type="body" hasCustomPrompt="1"/>
+          </p:nvPr>
+        </p:nvSpPr>
+        <p:spPr>
+          <a:xfrm>
+            <a:off x="320040" y="932688"/>
+            <a:ext cx="8503920" cy="566928"/>
+          </a:xfrm>
+          <a:prstGeom prst="rect">
+            <a:avLst/>
+          </a:prstGeom>
+          <a:noFill/>
+          <a:ln/>
+        </p:spPr>
+        <p:txBody>
+          <a:bodyPr wrap="square" lIns="0" tIns="0" rIns="0" bIns="0" rtlCol="0" anchor="t"/>
+          <a:lstStyle/>
+          <a:p>
+            <a:pPr algn="l" indent="0" marL="0">
+              <a:buNone/>
+            </a:pPr>
+            <a:r>
+              <a:rPr lang="en-US" sz="1700" b="1" dirty="0">
+                <a:solidFill>
+                  <a:schemeClr val="tx2"/>
+                </a:solidFill>
+              </a:rPr>
+              <a:t>In one quarter, Aerospace margins fell ~470 bps, and management guided ~30% for two years.</a:t>
+            </a:r>
+            <a:endParaRPr lang="en-US" sz="1700" dirty="0"/>
+          </a:p>
+        </p:txBody>
+      </p:sp>
+      <p:sp>
+        <p:nvSpPr>
+          <p:cNvPr id="4" name="Margin chart header"/>
+          <p:cNvSpPr txBox="1"/>
+          <p:nvPr/>
+        </p:nvSpPr>
+        <p:spPr>
+          <a:xfrm>
+            <a:off x="320040" y="1554480"/>
+            <a:ext cx="5257800" cy="365760"/>
+          </a:xfrm>
+          <a:prstGeom prst="rect">
+            <a:avLst/>
+          </a:prstGeom>
+          <a:noFill/>
+          <a:ln/>
+        </p:spPr>
+        <p:txBody>
+          <a:bodyPr wrap="square" lIns="0" tIns="0" rIns="0" bIns="0" rtlCol="0" anchor="b"/>
+          <a:lstStyle/>
+          <a:p>
+            <a:pPr algn="ctr" indent="0" marL="0">
+              <a:buNone/>
+            </a:pPr>
+            <a:r>
+              <a:rPr lang="en-US" sz="1600" b="1" dirty="0">
+                <a:solidFill>
+                  <a:srgbClr val="1A1A1A"/>
+                </a:solidFill>
+              </a:rPr>
+              <a:t>Aerospace Products Adj. EBITDA Margin</a:t>
+            </a:r>
+            <a:endParaRPr lang="en-US" sz="1600" dirty="0"/>
+          </a:p>
+        </p:txBody>
+      </p:sp>
+      <p:sp>
+        <p:nvSpPr>
+          <p:cNvPr id="5" name="Margin chart header rule"/>
+          <p:cNvSpPr/>
+          <p:nvPr/>
+        </p:nvSpPr>
+        <p:spPr>
+          <a:xfrm>
+            <a:off x="320040" y="1975104"/>
+            <a:ext cx="5257800" cy="0"/>
+          </a:xfrm>
+          <a:prstGeom prst="line">
+            <a:avLst/>
+          </a:prstGeom>
+          <a:noFill/>
+          <a:ln w="12700">
+            <a:solidFill>
+              <a:srgbClr val="1A1A1A"/>
+            </a:solidFill>
+            <a:prstDash val="solid"/>
+          </a:ln>
+        </p:spPr>
+      </p:sp>
+      <p:graphicFrame>
+        <p:nvGraphicFramePr>
+          <p:cNvPr id="6" name="Margin chart" descr=""/>
+          <p:cNvGraphicFramePr/>
+          <p:nvPr/>
+        </p:nvGraphicFramePr>
+        <p:xfrm>
+          <a:off x="320040" y="2103120"/>
+          <a:ext cx="5257800" cy="3200400"/>
+        </p:xfrm>
+        <a:graphic xmlns:a="http://schemas.openxmlformats.org/drawingml/2006/main">
+          <a:graphicData uri="http://schemas.openxmlformats.org/drawingml/2006/chart">
+            <c:chart xmlns:c="http://schemas.openxmlformats.org/drawingml/2006/chart" r:id="rId1"/>
+          </a:graphicData>
+        </a:graphic>
+      </p:graphicFrame>
+      <p:sp>
+        <p:nvSpPr>
+          <p:cNvPr id="7" name="Guide label"/>
+          <p:cNvSpPr txBox="1"/>
+          <p:nvPr/>
+        </p:nvSpPr>
+        <p:spPr>
+          <a:xfrm>
+            <a:off x="4206240" y="2788920"/>
+            <a:ext cx="1325880" cy="274320"/>
+          </a:xfrm>
+          <a:prstGeom prst="rect">
+            <a:avLst/>
+          </a:prstGeom>
+          <a:noFill/>
+          <a:ln/>
+        </p:spPr>
+        <p:txBody>
+          <a:bodyPr wrap="square" lIns="0" tIns="0" rIns="0" bIns="0" rtlCol="0" anchor="ctr"/>
+          <a:lstStyle/>
+          <a:p>
+            <a:pPr algn="ctr" indent="0" marL="0">
+              <a:buNone/>
+            </a:pPr>
+            <a:r>
+              <a:rPr lang="en-US" sz="1200" b="1" i="1" dirty="0">
+                <a:solidFill>
+                  <a:schemeClr val="accent2"/>
+                </a:solidFill>
+              </a:rPr>
+              <a:t>Mgmt. guide</a:t>
+            </a:r>
+            <a:endParaRPr lang="en-US" sz="1200" dirty="0"/>
+          </a:p>
+        </p:txBody>
+      </p:sp>
+      <p:sp>
+        <p:nvSpPr>
+          <p:cNvPr id="8" name="Compression callout"/>
+          <p:cNvSpPr/>
+          <p:nvPr/>
+        </p:nvSpPr>
+        <p:spPr>
+          <a:xfrm>
+            <a:off x="2606040" y="2103120"/>
+            <a:ext cx="1097280" cy="1097280"/>
+          </a:xfrm>
+          <a:prstGeom prst="ellipse">
+            <a:avLst/>
+          </a:prstGeom>
+          <a:solidFill>
+            <a:srgbClr val="0A1C58"/>
+          </a:solidFill>
+          <a:ln>
+            <a:solidFill>
+              <a:srgbClr val="0A1C58"/>
+            </a:solidFill>
+          </a:ln>
+        </p:spPr>
+        <p:txBody>
+          <a:bodyPr wrap="square" lIns="0" tIns="0" rIns="0" bIns="0" rtlCol="0" anchor="ctr"/>
+          <a:lstStyle/>
+          <a:p>
+            <a:pPr algn="ctr" indent="0" marL="0">
+              <a:buNone/>
+            </a:pPr>
+            <a:r>
+              <a:rPr lang="en-US" sz="2000" b="1" dirty="0">
+                <a:solidFill>
+                  <a:schemeClr val="bg1"/>
+                </a:solidFill>
+              </a:rPr>
+              <a:t>–470</a:t>
+            </a:r>
+            <a:endParaRPr lang="en-US" sz="2000" dirty="0"/>
+          </a:p>
+          <a:p>
+            <a:pPr algn="ctr" indent="0" marL="0">
+              <a:buNone/>
+            </a:pPr>
+            <a:r>
+              <a:rPr lang="en-US" sz="1100" b="1" dirty="0">
+                <a:solidFill>
+                  <a:schemeClr val="bg1"/>
+                </a:solidFill>
+              </a:rPr>
+              <a:t>bps q/q</a:t>
+            </a:r>
+            <a:endParaRPr lang="en-US" sz="2000" dirty="0"/>
+          </a:p>
+        </p:txBody>
+      </p:sp>
+      <p:sp>
+        <p:nvSpPr>
+          <p:cNvPr id="9" name="Mix chart header"/>
+          <p:cNvSpPr txBox="1"/>
+          <p:nvPr/>
+        </p:nvSpPr>
+        <p:spPr>
+          <a:xfrm>
+            <a:off x="5897880" y="1554480"/>
+            <a:ext cx="2926080" cy="365760"/>
+          </a:xfrm>
+          <a:prstGeom prst="rect">
+            <a:avLst/>
+          </a:prstGeom>
+          <a:noFill/>
+          <a:ln/>
+        </p:spPr>
+        <p:txBody>
+          <a:bodyPr wrap="square" lIns="0" tIns="0" rIns="0" bIns="0" rtlCol="0" anchor="b"/>
+          <a:lstStyle/>
+          <a:p>
+            <a:pPr algn="ctr" indent="0" marL="0">
+              <a:buNone/>
+            </a:pPr>
+            <a:r>
+              <a:rPr lang="en-US" sz="1600" b="1" dirty="0">
+                <a:solidFill>
+                  <a:srgbClr val="1A1A1A"/>
+                </a:solidFill>
+              </a:rPr>
+              <a:t>Management: “It's Mix”</a:t>
+            </a:r>
+            <a:endParaRPr lang="en-US" sz="1600" dirty="0"/>
+          </a:p>
+        </p:txBody>
+      </p:sp>
+      <p:sp>
+        <p:nvSpPr>
+          <p:cNvPr id="10" name="Mix chart header rule"/>
+          <p:cNvSpPr/>
+          <p:nvPr/>
+        </p:nvSpPr>
+        <p:spPr>
+          <a:xfrm>
+            <a:off x="5897880" y="1975104"/>
+            <a:ext cx="2926080" cy="0"/>
+          </a:xfrm>
+          <a:prstGeom prst="line">
+            <a:avLst/>
+          </a:prstGeom>
+          <a:noFill/>
+          <a:ln w="12700">
+            <a:solidFill>
+              <a:srgbClr val="1A1A1A"/>
+            </a:solidFill>
+            <a:prstDash val="solid"/>
+          </a:ln>
+        </p:spPr>
+      </p:sp>
+      <p:graphicFrame>
+        <p:nvGraphicFramePr>
+          <p:cNvPr id="11" name="Mix chart" descr=""/>
+          <p:cNvGraphicFramePr/>
+          <p:nvPr/>
+        </p:nvGraphicFramePr>
+        <p:xfrm>
+          <a:off x="5897880" y="2103120"/>
+          <a:ext cx="2926080" cy="2194560"/>
+        </p:xfrm>
+        <a:graphic xmlns:a="http://schemas.openxmlformats.org/drawingml/2006/main">
+          <a:graphicData uri="http://schemas.openxmlformats.org/drawingml/2006/chart">
+            <c:chart xmlns:c="http://schemas.openxmlformats.org/drawingml/2006/chart" r:id="rId2"/>
+          </a:graphicData>
+        </a:graphic>
+      </p:graphicFrame>
+      <p:sp>
+        <p:nvSpPr>
+          <p:cNvPr id="12" name="Mix detail"/>
+          <p:cNvSpPr txBox="1"/>
+          <p:nvPr/>
+        </p:nvSpPr>
+        <p:spPr>
+          <a:xfrm>
+            <a:off x="5897880" y="4370832"/>
+            <a:ext cx="2926080" cy="566928"/>
+          </a:xfrm>
+          <a:prstGeom prst="rect">
+            <a:avLst/>
+          </a:prstGeom>
+          <a:noFill/>
+          <a:ln/>
+        </p:spPr>
+        <p:txBody>
+          <a:bodyPr wrap="square" lIns="0" tIns="0" rIns="0" bIns="0" rtlCol="0" anchor="t"/>
+          <a:lstStyle/>
+          <a:p>
+            <a:pPr indent="0" marL="0">
+              <a:buNone/>
+            </a:pPr>
+            <a:r>
+              <a:rPr lang="en-US" sz="1200" b="1" dirty="0">
+                <a:solidFill>
+                  <a:srgbClr val="1A1A1A"/>
+                </a:solidFill>
+              </a:rPr>
+              <a:t>Light: </a:t>
+            </a:r>
+            <a:pPr indent="0" marL="0">
+              <a:buNone/>
+            </a:pPr>
+            <a:r>
+              <a:rPr lang="en-US" sz="1200" dirty="0">
+                <a:solidFill>
+                  <a:srgbClr val="1A1A1A"/>
+                </a:solidFill>
+              </a:rPr>
+              <a:t>$6M sale, $2.5M profit</a:t>
+            </a:r>
+            <a:endParaRPr lang="en-US" sz="1200" dirty="0"/>
+          </a:p>
+          <a:p>
+            <a:pPr indent="0" marL="0">
+              <a:buNone/>
+            </a:pPr>
+            <a:r>
+              <a:rPr lang="en-US" sz="1200" b="1" dirty="0">
+                <a:solidFill>
+                  <a:srgbClr val="1A1A1A"/>
+                </a:solidFill>
+              </a:rPr>
+              <a:t>Heavy: </a:t>
+            </a:r>
+            <a:pPr indent="0" marL="0">
+              <a:buNone/>
+            </a:pPr>
+            <a:r>
+              <a:rPr lang="en-US" sz="1200" dirty="0">
+                <a:solidFill>
+                  <a:srgbClr val="1A1A1A"/>
+                </a:solidFill>
+              </a:rPr>
+              <a:t>$12M sale, $3.0M profit</a:t>
+            </a:r>
+            <a:endParaRPr lang="en-US" sz="1200" dirty="0"/>
+          </a:p>
+        </p:txBody>
+      </p:sp>
+      <p:sp>
+        <p:nvSpPr>
+          <p:cNvPr id="13" name="Mix kicker"/>
+          <p:cNvSpPr txBox="1"/>
+          <p:nvPr/>
+        </p:nvSpPr>
+        <p:spPr>
+          <a:xfrm>
+            <a:off x="5897880" y="4983480"/>
+            <a:ext cx="2926080" cy="320040"/>
+          </a:xfrm>
+          <a:prstGeom prst="rect">
+            <a:avLst/>
+          </a:prstGeom>
+          <a:noFill/>
+          <a:ln/>
+        </p:spPr>
+        <p:txBody>
+          <a:bodyPr wrap="square" lIns="0" tIns="0" rIns="0" bIns="0" rtlCol="0" anchor="ctr"/>
+          <a:lstStyle/>
+          <a:p>
+            <a:pPr indent="0" marL="0">
+              <a:buNone/>
+            </a:pPr>
+            <a:r>
+              <a:rPr lang="en-US" sz="1300" b="1" i="1" dirty="0">
+                <a:solidFill>
+                  <a:schemeClr val="tx2"/>
+                </a:solidFill>
+              </a:rPr>
+              <a:t>Lower margin, more dollars per job</a:t>
+            </a:r>
+            <a:endParaRPr lang="en-US" sz="1300" dirty="0"/>
+          </a:p>
+        </p:txBody>
+      </p:sp>
+      <p:sp>
+        <p:nvSpPr>
+          <p:cNvPr id="14" name="Takeaway"/>
+          <p:cNvSpPr txBox="1"/>
+          <p:nvPr/>
+        </p:nvSpPr>
+        <p:spPr>
+          <a:xfrm>
+            <a:off x="320040" y="5504688"/>
+            <a:ext cx="8503920" cy="566928"/>
+          </a:xfrm>
+          <a:prstGeom prst="rect">
+            <a:avLst/>
+          </a:prstGeom>
+          <a:solidFill>
+            <a:srgbClr val="0A1C58"/>
+          </a:solidFill>
+          <a:ln/>
+        </p:spPr>
+        <p:txBody>
+          <a:bodyPr wrap="square" lIns="101600" tIns="25400" rIns="101600" bIns="25400" rtlCol="0" anchor="ctr"/>
+          <a:lstStyle/>
+          <a:p>
+            <a:pPr algn="ctr" indent="0" marL="0">
+              <a:buNone/>
+            </a:pPr>
+            <a:r>
+              <a:rPr lang="en-US" sz="1700" b="1" dirty="0">
+                <a:solidFill>
+                  <a:schemeClr val="bg1"/>
+                </a:solidFill>
+              </a:rPr>
+              <a:t>The drop is real. Is ~30% the floor, or just a waypoint?</a:t>
+            </a:r>
+            <a:endParaRPr lang="en-US" sz="1700" dirty="0"/>
+          </a:p>
+        </p:txBody>
+      </p:sp>
+      <p:sp>
+        <p:nvSpPr>
+          <p:cNvPr id="15" name="Source"/>
+          <p:cNvSpPr txBox="1"/>
+          <p:nvPr/>
+        </p:nvSpPr>
+        <p:spPr>
+          <a:xfrm>
+            <a:off x="320040" y="6355080"/>
+            <a:ext cx="7132320" cy="274320"/>
+          </a:xfrm>
+          <a:prstGeom prst="rect">
+            <a:avLst/>
+          </a:prstGeom>
+          <a:noFill/>
+          <a:ln/>
+        </p:spPr>
+        <p:txBody>
+          <a:bodyPr wrap="square" lIns="0" tIns="0" rIns="0" bIns="0" rtlCol="0" anchor="ctr"/>
+          <a:lstStyle/>
+          <a:p>
+            <a:pPr indent="0" marL="0">
+              <a:buNone/>
+            </a:pPr>
+            <a:r>
+              <a:rPr lang="en-US" sz="1100" b="1" dirty="0">
+                <a:solidFill>
+                  <a:srgbClr val="1A1A1A"/>
+                </a:solidFill>
+              </a:rPr>
+              <a:t>Source: </a:t>
+            </a:r>
+            <a:pPr indent="0" marL="0">
+              <a:buNone/>
+            </a:pPr>
+            <a:r>
+              <a:rPr lang="en-US" sz="1100" dirty="0">
+                <a:solidFill>
+                  <a:srgbClr val="1A1A1A"/>
+                </a:solidFill>
+              </a:rPr>
+              <a:t>FTAI filings and earnings calls, GPS model</a:t>
+            </a:r>
+            <a:endParaRPr lang="en-US" sz="1100" dirty="0"/>
+          </a:p>
+        </p:txBody>
+      </p:sp>
+      <p:sp>
+        <p:nvSpPr>
+          <p:cNvPr id="25" name="Slide Number Placeholder 0"/>
+          <p:cNvSpPr>
+            <a:spLocks noGrp="1"/>
+          </p:cNvSpPr>
+          <p:nvPr>
+            <p:ph type="sldNum" sz="quarter" idx="4294967295"/>
+          </p:nvPr>
+        </p:nvSpPr>
+        <p:spPr>
+          <a:xfrm>
+            <a:off x="7635240" y="6327648"/>
+            <a:ext cx="411480" cy="274320"/>
+          </a:xfrm>
+          <a:prstGeom prst="rect">
+            <a:avLst/>
+          </a:prstGeom>
+          <a:extLst>
+            <a:ext uri="{C572A759-6A51-4108-AA02-DFA0A04FC94B}">
+              <ma14:wrappingTextBoxFlag xmlns:ma14="http://schemas.microsoft.com/office/mac/drawingml/2011/main" val="0"/>
+            </a:ext>
+          </a:extLst>
+        </p:spPr>
+        <p:txBody>
+          <a:bodyPr/>
+          <a:lstStyle>
+            <a:lvl1pPr>
+              <a:defRPr sz="1100">
+                <a:solidFill>
+                  <a:srgbClr val="1A1A1A"/>
+                </a:solidFill>
+              </a:defRPr>
+            </a:lvl1pPr>
+          </a:lstStyle>
+          <a:p>
+            <a:pPr algn="r"/>
+            <a:fld id="{F7021451-1387-4CA6-816F-3879F97B5CBC}" type="slidenum">
+              <a:rPr b="1" lang="en-US"/>
+              <a:t>3</a:t>
+            </a:fld>
+            <a:endParaRPr lang="en-US"/>
+          </a:p>
+        </p:txBody>
+      </p:sp>
+    </p:spTree>
+  </p:cSld>
+  <p:clrMapOvr>
+    <a:masterClrMapping/>
+  </p:clrMapOvr>
+</p:sld>
+</file>
+
+<file path=ppt/slides/slide4.xml><?xml version="1.0" encoding="utf-8"?>
+<p:sld xmlns:a="http://schemas.openxmlformats.org/drawingml/2006/main" xmlns:r="http://schemas.openxmlformats.org/officeDocument/2006/relationships" xmlns:p="http://schemas.openxmlformats.org/presentationml/2006/main">
+  <p:cSld name="Slide 4">
+    <p:spTree>
+      <p:nvGrpSpPr>
+        <p:cNvPr id="1" name=""/>
+        <p:cNvGrpSpPr/>
+        <p:nvPr/>
+      </p:nvGrpSpPr>
+      <p:grpSpPr>
+        <a:xfrm>
+          <a:off x="0" y="0"/>
+          <a:ext cx="0" cy="0"/>
+          <a:chOff x="0" y="0"/>
+          <a:chExt cx="0" cy="0"/>
+        </a:xfrm>
+      </p:grpSpPr>
+      <p:sp>
+        <p:nvSpPr>
+          <p:cNvPr id="2" name="Text 1"/>
+          <p:cNvSpPr/>
+          <p:nvPr>
+            <p:ph idx="102" type="title" hasCustomPrompt="1"/>
+          </p:nvPr>
+        </p:nvSpPr>
+        <p:spPr>
+          <a:xfrm>
+            <a:off x="320040" y="182880"/>
+            <a:ext cx="7132320" cy="640080"/>
+          </a:xfrm>
+          <a:prstGeom prst="rect">
+            <a:avLst/>
+          </a:prstGeom>
+          <a:noFill/>
+          <a:ln/>
+        </p:spPr>
+        <p:txBody>
+          <a:bodyPr wrap="square" lIns="0" tIns="0" rIns="0" bIns="0" rtlCol="0" anchor="ctr"/>
+          <a:lstStyle/>
+          <a:p>
+            <a:pPr algn="l" indent="0" marL="0">
+              <a:buNone/>
+            </a:pPr>
+            <a:r>
+              <a:rPr lang="en-US" sz="3200" b="1" dirty="0">
+                <a:solidFill>
+                  <a:schemeClr val="tx2"/>
+                </a:solidFill>
+              </a:rPr>
+              <a:t>The Opportunity (2/3)</a:t>
+            </a:r>
+            <a:endParaRPr lang="en-US" sz="3200" dirty="0"/>
+          </a:p>
+        </p:txBody>
+      </p:sp>
+      <p:sp>
+        <p:nvSpPr>
+          <p:cNvPr id="3" name="Text 1"/>
+          <p:cNvSpPr/>
+          <p:nvPr>
+            <p:ph idx="103" type="body" hasCustomPrompt="1"/>
+          </p:nvPr>
+        </p:nvSpPr>
+        <p:spPr>
+          <a:xfrm>
+            <a:off x="320040" y="932688"/>
+            <a:ext cx="8503920" cy="566928"/>
+          </a:xfrm>
+          <a:prstGeom prst="rect">
+            <a:avLst/>
+          </a:prstGeom>
+          <a:noFill/>
+          <a:ln/>
+        </p:spPr>
+        <p:txBody>
+          <a:bodyPr wrap="square" lIns="0" tIns="0" rIns="0" bIns="0" rtlCol="0" anchor="t"/>
+          <a:lstStyle/>
+          <a:p>
+            <a:pPr algn="l" indent="0" marL="0">
+              <a:buNone/>
+            </a:pPr>
+            <a:r>
+              <a:rPr lang="en-US" sz="1700" b="1" dirty="0">
+                <a:solidFill>
+                  <a:schemeClr val="tx2"/>
+                </a:solidFill>
+              </a:rPr>
+              <a:t>A 2025 short report gave the market a darker explanation, and it stuck.</a:t>
+            </a:r>
+            <a:endParaRPr lang="en-US" sz="1700" dirty="0"/>
+          </a:p>
+        </p:txBody>
+      </p:sp>
+      <p:sp>
+        <p:nvSpPr>
+          <p:cNvPr id="4" name="Short thesis header"/>
+          <p:cNvSpPr txBox="1"/>
+          <p:nvPr/>
+        </p:nvSpPr>
+        <p:spPr>
+          <a:xfrm>
+            <a:off x="320040" y="1554480"/>
+            <a:ext cx="4572000" cy="365760"/>
+          </a:xfrm>
+          <a:prstGeom prst="rect">
+            <a:avLst/>
+          </a:prstGeom>
+          <a:noFill/>
+          <a:ln/>
+        </p:spPr>
+        <p:txBody>
+          <a:bodyPr wrap="square" lIns="0" tIns="0" rIns="0" bIns="0" rtlCol="0" anchor="b"/>
+          <a:lstStyle/>
+          <a:p>
+            <a:pPr algn="ctr" indent="0" marL="0">
+              <a:buNone/>
+            </a:pPr>
+            <a:r>
+              <a:rPr lang="en-US" sz="1600" b="1" dirty="0">
+                <a:solidFill>
+                  <a:srgbClr val="1A1A1A"/>
+                </a:solidFill>
+              </a:rPr>
+              <a:t>The Short Thesis (Jan. 2025)</a:t>
+            </a:r>
+            <a:endParaRPr lang="en-US" sz="1600" dirty="0"/>
+          </a:p>
+        </p:txBody>
+      </p:sp>
+      <p:sp>
+        <p:nvSpPr>
+          <p:cNvPr id="5" name="Short thesis header rule"/>
+          <p:cNvSpPr/>
+          <p:nvPr/>
+        </p:nvSpPr>
+        <p:spPr>
+          <a:xfrm>
+            <a:off x="320040" y="1975104"/>
+            <a:ext cx="4572000" cy="0"/>
+          </a:xfrm>
+          <a:prstGeom prst="line">
+            <a:avLst/>
+          </a:prstGeom>
+          <a:noFill/>
+          <a:ln w="12700">
+            <a:solidFill>
+              <a:srgbClr val="1A1A1A"/>
+            </a:solidFill>
+            <a:prstDash val="solid"/>
+          </a:ln>
+        </p:spPr>
+      </p:sp>
+      <p:sp>
+        <p:nvSpPr>
+          <p:cNvPr id="6" name="Short step 1"/>
+          <p:cNvSpPr txBox="1"/>
+          <p:nvPr/>
+        </p:nvSpPr>
+        <p:spPr>
+          <a:xfrm>
+            <a:off x="548640" y="2148840"/>
+            <a:ext cx="4114800" cy="731520"/>
+          </a:xfrm>
+          <a:prstGeom prst="rect">
+            <a:avLst/>
+          </a:prstGeom>
+          <a:solidFill>
+            <a:srgbClr val="DCD8D3"/>
+          </a:solidFill>
+          <a:ln/>
+        </p:spPr>
+        <p:txBody>
+          <a:bodyPr wrap="square" lIns="127000" tIns="25400" rIns="127000" bIns="25400" rtlCol="0" anchor="ctr"/>
+          <a:lstStyle/>
+          <a:p>
+            <a:pPr algn="ctr" indent="0" marL="0">
+              <a:buNone/>
+            </a:pPr>
+            <a:r>
+              <a:rPr lang="en-US" sz="1500" b="1" dirty="0">
+                <a:solidFill>
+                  <a:schemeClr val="tx2"/>
+                </a:solidFill>
+              </a:rPr>
+              <a:t>Leasing engines sit on the books at depreciated value</a:t>
+            </a:r>
+            <a:endParaRPr lang="en-US" sz="1500" dirty="0"/>
+          </a:p>
+        </p:txBody>
+      </p:sp>
+      <p:sp>
+        <p:nvSpPr>
+          <p:cNvPr id="7" name="Short arrow 1"/>
+          <p:cNvSpPr/>
+          <p:nvPr/>
+        </p:nvSpPr>
+        <p:spPr>
+          <a:xfrm>
+            <a:off x="2395728" y="2907792"/>
+            <a:ext cx="420624" cy="292608"/>
+          </a:xfrm>
+          <a:prstGeom prst="downArrow">
+            <a:avLst/>
+          </a:prstGeom>
+          <a:solidFill>
+            <a:srgbClr val="847C7A"/>
+          </a:solidFill>
+          <a:ln/>
+        </p:spPr>
+      </p:sp>
+      <p:sp>
+        <p:nvSpPr>
+          <p:cNvPr id="8" name="Short step 2"/>
+          <p:cNvSpPr txBox="1"/>
+          <p:nvPr/>
+        </p:nvSpPr>
+        <p:spPr>
+          <a:xfrm>
+            <a:off x="548640" y="3227832"/>
+            <a:ext cx="4114800" cy="731520"/>
+          </a:xfrm>
+          <a:prstGeom prst="rect">
+            <a:avLst/>
+          </a:prstGeom>
+          <a:solidFill>
+            <a:srgbClr val="DCD8D3"/>
+          </a:solidFill>
+          <a:ln/>
+        </p:spPr>
+        <p:txBody>
+          <a:bodyPr wrap="square" lIns="127000" tIns="25400" rIns="127000" bIns="25400" rtlCol="0" anchor="ctr"/>
+          <a:lstStyle/>
+          <a:p>
+            <a:pPr algn="ctr" indent="0" marL="0">
+              <a:buNone/>
+            </a:pPr>
+            <a:r>
+              <a:rPr lang="en-US" sz="1500" b="1" dirty="0">
+                <a:solidFill>
+                  <a:schemeClr val="tx2"/>
+                </a:solidFill>
+              </a:rPr>
+              <a:t>They are moved into Aerospace Products as inventory</a:t>
+            </a:r>
+            <a:endParaRPr lang="en-US" sz="1500" dirty="0"/>
+          </a:p>
+        </p:txBody>
+      </p:sp>
+      <p:sp>
+        <p:nvSpPr>
+          <p:cNvPr id="9" name="Short arrow 2"/>
+          <p:cNvSpPr/>
+          <p:nvPr/>
+        </p:nvSpPr>
+        <p:spPr>
+          <a:xfrm>
+            <a:off x="2395728" y="3986784"/>
+            <a:ext cx="420624" cy="292608"/>
+          </a:xfrm>
+          <a:prstGeom prst="downArrow">
+            <a:avLst/>
+          </a:prstGeom>
+          <a:solidFill>
+            <a:srgbClr val="847C7A"/>
+          </a:solidFill>
+          <a:ln/>
+        </p:spPr>
+      </p:sp>
+      <p:sp>
+        <p:nvSpPr>
+          <p:cNvPr id="10" name="Short step 3"/>
+          <p:cNvSpPr txBox="1"/>
+          <p:nvPr/>
+        </p:nvSpPr>
+        <p:spPr>
+          <a:xfrm>
+            <a:off x="548640" y="4306824"/>
+            <a:ext cx="4114800" cy="731520"/>
+          </a:xfrm>
+          <a:prstGeom prst="rect">
+            <a:avLst/>
+          </a:prstGeom>
+          <a:solidFill>
+            <a:srgbClr val="0A1C58"/>
+          </a:solidFill>
+          <a:ln/>
+        </p:spPr>
+        <p:txBody>
+          <a:bodyPr wrap="square" lIns="127000" tIns="25400" rIns="127000" bIns="25400" rtlCol="0" anchor="ctr"/>
+          <a:lstStyle/>
+          <a:p>
+            <a:pPr algn="ctr" indent="0" marL="0">
+              <a:buNone/>
+            </a:pPr>
+            <a:r>
+              <a:rPr lang="en-US" sz="1500" b="1" dirty="0">
+                <a:solidFill>
+                  <a:schemeClr val="bg1"/>
+                </a:solidFill>
+              </a:rPr>
+              <a:t>Sold at market prices, the low cost basis inflates AP margins</a:t>
+            </a:r>
+            <a:endParaRPr lang="en-US" sz="1500" dirty="0"/>
+          </a:p>
+        </p:txBody>
+      </p:sp>
+      <p:sp>
+        <p:nvSpPr>
+          <p:cNvPr id="11" name="Multiple header"/>
+          <p:cNvSpPr txBox="1"/>
+          <p:nvPr/>
+        </p:nvSpPr>
+        <p:spPr>
+          <a:xfrm>
+            <a:off x="5257800" y="1554480"/>
+            <a:ext cx="3566160" cy="365760"/>
+          </a:xfrm>
+          <a:prstGeom prst="rect">
+            <a:avLst/>
+          </a:prstGeom>
+          <a:noFill/>
+          <a:ln/>
+        </p:spPr>
+        <p:txBody>
+          <a:bodyPr wrap="square" lIns="0" tIns="0" rIns="0" bIns="0" rtlCol="0" anchor="b"/>
+          <a:lstStyle/>
+          <a:p>
+            <a:pPr algn="ctr" indent="0" marL="0">
+              <a:buNone/>
+            </a:pPr>
+            <a:r>
+              <a:rPr lang="en-US" sz="1600" b="1" dirty="0">
+                <a:solidFill>
+                  <a:srgbClr val="1A1A1A"/>
+                </a:solidFill>
+              </a:rPr>
+              <a:t>…So the Market Won't Pay Up</a:t>
+            </a:r>
+            <a:endParaRPr lang="en-US" sz="1600" dirty="0"/>
+          </a:p>
+        </p:txBody>
+      </p:sp>
+      <p:sp>
+        <p:nvSpPr>
+          <p:cNvPr id="12" name="Multiple header rule"/>
+          <p:cNvSpPr/>
+          <p:nvPr/>
+        </p:nvSpPr>
+        <p:spPr>
+          <a:xfrm>
+            <a:off x="5257800" y="1975104"/>
+            <a:ext cx="3566160" cy="0"/>
+          </a:xfrm>
+          <a:prstGeom prst="line">
+            <a:avLst/>
+          </a:prstGeom>
+          <a:noFill/>
+          <a:ln w="12700">
+            <a:solidFill>
+              <a:srgbClr val="1A1A1A"/>
+            </a:solidFill>
+            <a:prstDash val="solid"/>
+          </a:ln>
+        </p:spPr>
+      </p:sp>
+      <p:graphicFrame>
+        <p:nvGraphicFramePr>
+          <p:cNvPr id="13" name="Multiple chart" descr=""/>
+          <p:cNvGraphicFramePr/>
+          <p:nvPr/>
+        </p:nvGraphicFramePr>
+        <p:xfrm>
+          <a:off x="5257800" y="2103120"/>
+          <a:ext cx="3566160" cy="2743200"/>
+        </p:xfrm>
+        <a:graphic xmlns:a="http://schemas.openxmlformats.org/drawingml/2006/main">
+          <a:graphicData uri="http://schemas.openxmlformats.org/drawingml/2006/chart">
+            <c:chart xmlns:c="http://schemas.openxmlformats.org/drawingml/2006/chart" r:id="rId1"/>
+          </a:graphicData>
+        </a:graphic>
+      </p:graphicFrame>
+      <p:sp>
+        <p:nvSpPr>
+          <p:cNvPr id="14" name="FY28 highlight"/>
+          <p:cNvSpPr/>
+          <p:nvPr/>
+        </p:nvSpPr>
+        <p:spPr>
+          <a:xfrm>
+            <a:off x="7644384" y="3383280"/>
+            <a:ext cx="1024128" cy="1481328"/>
+          </a:xfrm>
+          <a:prstGeom prst="rect">
+            <a:avLst/>
+          </a:prstGeom>
+          <a:ln w="25400">
+            <a:solidFill>
+              <a:schemeClr val="accent2"/>
+            </a:solidFill>
+            <a:prstDash val="dash"/>
+          </a:ln>
+        </p:spPr>
+      </p:sp>
+      <p:sp>
+        <p:nvSpPr>
+          <p:cNvPr id="15" name="Multiple caption"/>
+          <p:cNvSpPr txBox="1"/>
+          <p:nvPr/>
+        </p:nvSpPr>
+        <p:spPr>
+          <a:xfrm>
+            <a:off x="5257800" y="5102352"/>
+            <a:ext cx="3566160" cy="274320"/>
+          </a:xfrm>
+          <a:prstGeom prst="rect">
+            <a:avLst/>
+          </a:prstGeom>
+          <a:noFill/>
+          <a:ln/>
+        </p:spPr>
+        <p:txBody>
+          <a:bodyPr wrap="square" lIns="0" tIns="0" rIns="0" bIns="0" rtlCol="0" anchor="ctr"/>
+          <a:lstStyle/>
+          <a:p>
+            <a:pPr algn="ctr" indent="0" marL="0">
+              <a:buNone/>
+            </a:pPr>
+            <a:r>
+              <a:rPr lang="en-US" sz="1200" i="1" dirty="0">
+                <a:solidFill>
+                  <a:schemeClr val="accent2"/>
+                </a:solidFill>
+              </a:rPr>
+              <a:t>EV / Adj. EBITDA (Jefferies estimates)</a:t>
+            </a:r>
+            <a:endParaRPr lang="en-US" sz="1200" dirty="0"/>
+          </a:p>
+        </p:txBody>
+      </p:sp>
+      <p:sp>
+        <p:nvSpPr>
+          <p:cNvPr id="16" name="Takeaway"/>
+          <p:cNvSpPr txBox="1"/>
+          <p:nvPr/>
+        </p:nvSpPr>
+        <p:spPr>
+          <a:xfrm>
+            <a:off x="320040" y="5504688"/>
+            <a:ext cx="8503920" cy="566928"/>
+          </a:xfrm>
+          <a:prstGeom prst="rect">
+            <a:avLst/>
+          </a:prstGeom>
+          <a:solidFill>
+            <a:srgbClr val="0A1C58"/>
+          </a:solidFill>
+          <a:ln/>
+        </p:spPr>
+        <p:txBody>
+          <a:bodyPr wrap="square" lIns="101600" tIns="25400" rIns="101600" bIns="25400" rtlCol="0" anchor="ctr"/>
+          <a:lstStyle/>
+          <a:p>
+            <a:pPr algn="ctr" indent="0" marL="0">
+              <a:buNone/>
+            </a:pPr>
+            <a:r>
+              <a:rPr lang="en-US" sz="1700" b="1" dirty="0">
+                <a:solidFill>
+                  <a:schemeClr val="bg1"/>
+                </a:solidFill>
+              </a:rPr>
+              <a:t>The market reads the margin reset as the short thesis unwinding, and prices FTAI as if it's still over-earning.</a:t>
+            </a:r>
+            <a:endParaRPr lang="en-US" sz="1700" dirty="0"/>
+          </a:p>
+        </p:txBody>
+      </p:sp>
+      <p:sp>
+        <p:nvSpPr>
+          <p:cNvPr id="17" name="Source"/>
+          <p:cNvSpPr txBox="1"/>
+          <p:nvPr/>
+        </p:nvSpPr>
+        <p:spPr>
+          <a:xfrm>
+            <a:off x="320040" y="6355080"/>
+            <a:ext cx="7132320" cy="274320"/>
+          </a:xfrm>
+          <a:prstGeom prst="rect">
+            <a:avLst/>
+          </a:prstGeom>
+          <a:noFill/>
+          <a:ln/>
+        </p:spPr>
+        <p:txBody>
+          <a:bodyPr wrap="square" lIns="0" tIns="0" rIns="0" bIns="0" rtlCol="0" anchor="ctr"/>
+          <a:lstStyle/>
+          <a:p>
+            <a:pPr indent="0" marL="0">
+              <a:buNone/>
+            </a:pPr>
+            <a:r>
+              <a:rPr lang="en-US" sz="1100" b="1" dirty="0">
+                <a:solidFill>
+                  <a:srgbClr val="1A1A1A"/>
+                </a:solidFill>
+              </a:rPr>
+              <a:t>Source: </a:t>
+            </a:r>
+            <a:pPr indent="0" marL="0">
+              <a:buNone/>
+            </a:pPr>
+            <a:r>
+              <a:rPr lang="en-US" sz="1100" dirty="0">
+                <a:solidFill>
+                  <a:srgbClr val="1A1A1A"/>
+                </a:solidFill>
+              </a:rPr>
+              <a:t>Muddy Waters Research (Jan. 2025), Jefferies (8/2/26), FTAI filings, GPS analysis</a:t>
+            </a:r>
+            <a:endParaRPr lang="en-US" sz="1100" dirty="0"/>
+          </a:p>
+        </p:txBody>
+      </p:sp>
+      <p:sp>
+        <p:nvSpPr>
+          <p:cNvPr id="25" name="Slide Number Placeholder 0"/>
+          <p:cNvSpPr>
+            <a:spLocks noGrp="1"/>
+          </p:cNvSpPr>
+          <p:nvPr>
+            <p:ph type="sldNum" sz="quarter" idx="4294967295"/>
+          </p:nvPr>
+        </p:nvSpPr>
+        <p:spPr>
+          <a:xfrm>
+            <a:off x="7635240" y="6327648"/>
+            <a:ext cx="411480" cy="274320"/>
+          </a:xfrm>
+          <a:prstGeom prst="rect">
+            <a:avLst/>
+          </a:prstGeom>
+          <a:extLst>
+            <a:ext uri="{C572A759-6A51-4108-AA02-DFA0A04FC94B}">
+              <ma14:wrappingTextBoxFlag xmlns:ma14="http://schemas.microsoft.com/office/mac/drawingml/2011/main" val="0"/>
+            </a:ext>
+          </a:extLst>
+        </p:spPr>
+        <p:txBody>
+          <a:bodyPr/>
+          <a:lstStyle>
+            <a:lvl1pPr>
+              <a:defRPr sz="1100">
+                <a:solidFill>
+                  <a:srgbClr val="1A1A1A"/>
+                </a:solidFill>
+              </a:defRPr>
+            </a:lvl1pPr>
+          </a:lstStyle>
+          <a:p>
+            <a:pPr algn="r"/>
+            <a:fld id="{F7021451-1387-4CA6-816F-3879F97B5CBC}" type="slidenum">
+              <a:rPr b="1" lang="en-US"/>
+              <a:t>4</a:t>
             </a:fld>
             <a:endParaRPr lang="en-US"/>
           </a:p>

--- a/deck/FTAI_Long_Pitch.pptx
+++ b/deck/FTAI_Long_Pitch.pptx
@@ -9,9 +9,11 @@
     <p:sldId id="257" r:id="rId3"/>
     <p:sldId id="258" r:id="rId4"/>
     <p:sldId id="259" r:id="rId5"/>
+    <p:sldId id="260" r:id="rId6"/>
+    <p:sldId id="261" r:id="rId7"/>
   </p:sldIdLst>
   <p:notesMasterIdLst>
-    <p:notesMasterId r:id="rId6"/>
+    <p:notesMasterId r:id="rId8"/>
   </p:notesMasterIdLst>
   <p:sldSz cx="9144000" cy="6858000"/>
   <p:notesSz cx="6858000" cy="9144000"/>
@@ -110,16 +112,22 @@
   <p:extLst>
     <p:ext uri="{521415D9-36F7-43E2-AB2F-B90AF26B5E84}">
       <p14:sectionLst xmlns:p14="http://schemas.microsoft.com/office/powerpoint/2010/main">
-        <p14:section name="Introduction" id="{c6e45d01-753a-955f-6327-0c3edc567ef7}">
+        <p14:section name="Introduction" id="{6f02f5a6-dc43-1ee2-9535-a9708f533475}">
           <p14:sldIdLst>
             <p14:sldId id="256"/>
           </p14:sldIdLst>
         </p14:section>
-        <p14:section name="The Opportunity" id="{cd9adb1a-eb8f-df16-d7f0-b3eabbd510e9}">
+        <p14:section name="The Opportunity" id="{9ae56ad3-5f16-ec52-07f1-37933beff07f}">
           <p14:sldIdLst>
             <p14:sldId id="257"/>
             <p14:sldId id="258"/>
             <p14:sldId id="259"/>
+            <p14:sldId id="260"/>
+          </p14:sldIdLst>
+        </p14:section>
+        <p14:section name="Business Overview" id="{77b7aa6d-0535-624e-8eed-9755271bbafa}">
+          <p14:sldIdLst>
+            <p14:sldId id="261"/>
           </p14:sldIdLst>
         </p14:section>
       </p14:sectionLst>
@@ -1003,6 +1011,425 @@
 </c:chartSpace>
 </file>
 
+<file path=ppt/charts/chart4.xml><?xml version="1.0" encoding="utf-8"?>
+<c:chartSpace xmlns:c="http://schemas.openxmlformats.org/drawingml/2006/chart" xmlns:a="http://schemas.openxmlformats.org/drawingml/2006/main" xmlns:r="http://schemas.openxmlformats.org/officeDocument/2006/relationships">
+  <c:date1904 val="0"/>
+  <c:roundedCorners val="1"/>
+  <c:chart>
+    <c:autoTitleDeleted val="1"/>
+    <c:plotArea>
+      <c:layout/>
+      <c:barChart>
+        <c:barDir val="col"/>
+        <c:grouping val="stacked"/>
+        <c:varyColors val="0"/>
+        <c:ser>
+          <c:idx val="0"/>
+          <c:order val="0"/>
+          <c:tx>
+            <c:strRef>
+              <c:f>Sheet1!$B$1</c:f>
+              <c:strCache>
+                <c:ptCount val="1"/>
+                <c:pt idx="0">
+                  <c:v>Base</c:v>
+                </c:pt>
+              </c:strCache>
+            </c:strRef>
+          </c:tx>
+          <c:spPr>
+            <a:solidFill>
+              <a:srgbClr val="FFFFFF"/>
+            </a:solidFill>
+            <a:effectLst/>
+          </c:spPr>
+          <c:invertIfNegative val="0"/>
+          <c:dLbls>
+            <c:numFmt formatCode="&quot;$&quot;0;;;" sourceLinked="0"/>
+            <c:txPr>
+              <a:bodyPr/>
+              <a:lstStyle/>
+              <a:p>
+                <a:pPr>
+                  <a:defRPr b="1" i="0" strike="noStrike" sz="1500" u="none">
+                    <a:solidFill>
+                      <a:srgbClr val="FFFFFF"/>
+                    </a:solidFill>
+                    <a:latin typeface="+mn-lt"/>
+                  </a:defRPr>
+                </a:pPr>
+              </a:p>
+            </c:txPr>
+            <c:dLblPos val="inEnd"/>
+            <c:showLegendKey val="0"/>
+            <c:showVal val="1"/>
+            <c:showCatName val="0"/>
+            <c:showSerName val="0"/>
+            <c:showPercent val="0"/>
+            <c:showBubbleSize val="0"/>
+            <c:showLeaderLines val="0"/>
+          </c:dLbls>
+          <c:cat>
+            <c:multiLvlStrRef>
+              <c:f>Sheet1!$A$2:$A$5</c:f>
+              <c:multiLvlStrCache>
+                <c:ptCount val="4"/>
+                <c:lvl>
+                  <c:pt idx="0">
+                    <c:v>Current Price</c:v>
+                  </c:pt>
+                  <c:pt idx="1">
+                    <c:v>Core ex-Power</c:v>
+                  </c:pt>
+                  <c:pt idx="2">
+                    <c:v>Power</c:v>
+                  </c:pt>
+                  <c:pt idx="3">
+                    <c:v>SOTP</c:v>
+                  </c:pt>
+                </c:lvl>
+              </c:multiLvlStrCache>
+            </c:multiLvlStrRef>
+          </c:cat>
+          <c:val>
+            <c:numRef>
+              <c:f>Sheet1!$B$2:$B$5</c:f>
+              <c:numCache>
+                <c:formatCode>General</c:formatCode>
+                <c:ptCount val="4"/>
+                <c:pt idx="0">
+                  <c:v>0</c:v>
+                </c:pt>
+                <c:pt idx="1">
+                  <c:v>0</c:v>
+                </c:pt>
+                <c:pt idx="2">
+                  <c:v>224.75</c:v>
+                </c:pt>
+                <c:pt idx="3">
+                  <c:v>0</c:v>
+                </c:pt>
+              </c:numCache>
+            </c:numRef>
+          </c:val>
+        </c:ser>
+        <c:ser>
+          <c:idx val="1"/>
+          <c:order val="1"/>
+          <c:tx>
+            <c:strRef>
+              <c:f>Sheet1!$C$1</c:f>
+              <c:strCache>
+                <c:ptCount val="1"/>
+                <c:pt idx="0">
+                  <c:v>Value</c:v>
+                </c:pt>
+              </c:strCache>
+            </c:strRef>
+          </c:tx>
+          <c:spPr>
+            <a:solidFill>
+              <a:srgbClr val="0A1C58"/>
+            </a:solidFill>
+            <a:effectLst/>
+          </c:spPr>
+          <c:invertIfNegative val="0"/>
+          <c:dLbls>
+            <c:numFmt formatCode="&quot;$&quot;0;;;" sourceLinked="0"/>
+            <c:txPr>
+              <a:bodyPr/>
+              <a:lstStyle/>
+              <a:p>
+                <a:pPr>
+                  <a:defRPr b="1" i="0" strike="noStrike" sz="1500" u="none">
+                    <a:solidFill>
+                      <a:srgbClr val="FFFFFF"/>
+                    </a:solidFill>
+                    <a:latin typeface="+mn-lt"/>
+                  </a:defRPr>
+                </a:pPr>
+              </a:p>
+            </c:txPr>
+            <c:dLblPos val="inEnd"/>
+            <c:showLegendKey val="0"/>
+            <c:showVal val="1"/>
+            <c:showCatName val="0"/>
+            <c:showSerName val="0"/>
+            <c:showPercent val="0"/>
+            <c:showBubbleSize val="0"/>
+            <c:showLeaderLines val="0"/>
+          </c:dLbls>
+          <c:cat>
+            <c:multiLvlStrRef>
+              <c:f>Sheet1!$A$2:$A$5</c:f>
+              <c:multiLvlStrCache>
+                <c:ptCount val="4"/>
+                <c:lvl>
+                  <c:pt idx="0">
+                    <c:v>Current Price</c:v>
+                  </c:pt>
+                  <c:pt idx="1">
+                    <c:v>Core ex-Power</c:v>
+                  </c:pt>
+                  <c:pt idx="2">
+                    <c:v>Power</c:v>
+                  </c:pt>
+                  <c:pt idx="3">
+                    <c:v>SOTP</c:v>
+                  </c:pt>
+                </c:lvl>
+              </c:multiLvlStrCache>
+            </c:multiLvlStrRef>
+          </c:cat>
+          <c:val>
+            <c:numRef>
+              <c:f>Sheet1!$C$2:$C$5</c:f>
+              <c:numCache>
+                <c:formatCode>General</c:formatCode>
+                <c:ptCount val="4"/>
+                <c:pt idx="0">
+                  <c:v>167.03</c:v>
+                </c:pt>
+                <c:pt idx="1">
+                  <c:v>224.75</c:v>
+                </c:pt>
+                <c:pt idx="2">
+                  <c:v>0</c:v>
+                </c:pt>
+                <c:pt idx="3">
+                  <c:v>276.65</c:v>
+                </c:pt>
+              </c:numCache>
+            </c:numRef>
+          </c:val>
+        </c:ser>
+        <c:ser>
+          <c:idx val="2"/>
+          <c:order val="2"/>
+          <c:tx>
+            <c:strRef>
+              <c:f>Sheet1!$D$1</c:f>
+              <c:strCache>
+                <c:ptCount val="1"/>
+                <c:pt idx="0">
+                  <c:v>Power</c:v>
+                </c:pt>
+              </c:strCache>
+            </c:strRef>
+          </c:tx>
+          <c:spPr>
+            <a:solidFill>
+              <a:srgbClr val="847C7A"/>
+            </a:solidFill>
+            <a:effectLst/>
+          </c:spPr>
+          <c:invertIfNegative val="0"/>
+          <c:dLbls>
+            <c:numFmt formatCode="&quot;$&quot;0;;;" sourceLinked="0"/>
+            <c:txPr>
+              <a:bodyPr/>
+              <a:lstStyle/>
+              <a:p>
+                <a:pPr>
+                  <a:defRPr b="1" i="0" strike="noStrike" sz="1500" u="none">
+                    <a:solidFill>
+                      <a:srgbClr val="FFFFFF"/>
+                    </a:solidFill>
+                    <a:latin typeface="+mn-lt"/>
+                  </a:defRPr>
+                </a:pPr>
+              </a:p>
+            </c:txPr>
+            <c:dLblPos val="inEnd"/>
+            <c:showLegendKey val="0"/>
+            <c:showVal val="1"/>
+            <c:showCatName val="0"/>
+            <c:showSerName val="0"/>
+            <c:showPercent val="0"/>
+            <c:showBubbleSize val="0"/>
+            <c:showLeaderLines val="0"/>
+          </c:dLbls>
+          <c:cat>
+            <c:multiLvlStrRef>
+              <c:f>Sheet1!$A$2:$A$5</c:f>
+              <c:multiLvlStrCache>
+                <c:ptCount val="4"/>
+                <c:lvl>
+                  <c:pt idx="0">
+                    <c:v>Current Price</c:v>
+                  </c:pt>
+                  <c:pt idx="1">
+                    <c:v>Core ex-Power</c:v>
+                  </c:pt>
+                  <c:pt idx="2">
+                    <c:v>Power</c:v>
+                  </c:pt>
+                  <c:pt idx="3">
+                    <c:v>SOTP</c:v>
+                  </c:pt>
+                </c:lvl>
+              </c:multiLvlStrCache>
+            </c:multiLvlStrRef>
+          </c:cat>
+          <c:val>
+            <c:numRef>
+              <c:f>Sheet1!$D$2:$D$5</c:f>
+              <c:numCache>
+                <c:formatCode>General</c:formatCode>
+                <c:ptCount val="4"/>
+                <c:pt idx="0">
+                  <c:v>0</c:v>
+                </c:pt>
+                <c:pt idx="1">
+                  <c:v>0</c:v>
+                </c:pt>
+                <c:pt idx="2">
+                  <c:v>51.9</c:v>
+                </c:pt>
+                <c:pt idx="3">
+                  <c:v>0</c:v>
+                </c:pt>
+              </c:numCache>
+            </c:numRef>
+          </c:val>
+        </c:ser>
+        <c:dLbls>
+          <c:numFmt formatCode="&quot;$&quot;0;;;" sourceLinked="0"/>
+          <c:txPr>
+            <a:bodyPr/>
+            <a:lstStyle/>
+            <a:p>
+              <a:pPr>
+                <a:defRPr b="1" i="0" strike="noStrike" sz="1500" u="none">
+                  <a:solidFill>
+                    <a:srgbClr val="FFFFFF"/>
+                  </a:solidFill>
+                  <a:latin typeface="+mn-lt"/>
+                </a:defRPr>
+              </a:pPr>
+            </a:p>
+          </c:txPr>
+          <c:dLblPos val="inEnd"/>
+          <c:showLegendKey val="0"/>
+          <c:showVal val="1"/>
+          <c:showCatName val="0"/>
+          <c:showSerName val="0"/>
+          <c:showPercent val="0"/>
+          <c:showBubbleSize val="0"/>
+          <c:showLeaderLines val="0"/>
+        </c:dLbls>
+        <c:gapWidth val="35"/>
+        <c:overlap val="100"/>
+        <c:axId val="2094734554"/>
+        <c:axId val="2094734552"/>
+        <c:axId val="2094734556"/>
+      </c:barChart>
+      <c:catAx>
+        <c:axId val="2094734554"/>
+        <c:scaling>
+          <c:orientation val="minMax"/>
+        </c:scaling>
+        <c:delete val="0"/>
+        <c:axPos val="b"/>
+        <c:numFmt formatCode="General" sourceLinked="1"/>
+        <c:majorTickMark val="out"/>
+        <c:minorTickMark val="none"/>
+        <c:tickLblPos val="low"/>
+        <c:spPr>
+          <a:ln w="12700" cap="flat">
+            <a:solidFill>
+              <a:srgbClr val="BFBFBF"/>
+            </a:solidFill>
+            <a:prstDash val="solid"/>
+            <a:round/>
+          </a:ln>
+        </c:spPr>
+        <c:txPr>
+          <a:bodyPr/>
+          <a:lstStyle/>
+          <a:p>
+            <a:pPr>
+              <a:defRPr sz="1200" b="0" i="0" u="none" strike="noStrike">
+                <a:solidFill>
+                  <a:srgbClr val="1A1A1A"/>
+                </a:solidFill>
+                <a:latin typeface="+mn-lt"/>
+              </a:defRPr>
+            </a:pPr>
+            <a:endParaRPr lang="en-US"/>
+          </a:p>
+        </c:txPr>
+        <c:crossAx val="2094734552"/>
+        <c:crosses val="autoZero"/>
+        <c:auto val="1"/>
+        <c:lblAlgn val="ctr"/>
+        <c:noMultiLvlLbl val="1"/>
+      </c:catAx>
+      <c:valAx>
+        <c:axId val="2094734552"/>
+        <c:scaling>
+          <c:orientation val="minMax"/>
+          <c:max val="330"/>
+          <c:min val="0"/>
+        </c:scaling>
+        <c:delete val="1"/>
+        <c:axPos val="l"/>
+        <c:numFmt formatCode="General" sourceLinked="0"/>
+        <c:majorTickMark val="out"/>
+        <c:minorTickMark val="none"/>
+        <c:tickLblPos val="nextTo"/>
+        <c:spPr>
+          <a:ln w="12700" cap="flat">
+            <a:solidFill>
+              <a:srgbClr val="888888"/>
+            </a:solidFill>
+            <a:prstDash val="solid"/>
+            <a:round/>
+          </a:ln>
+        </c:spPr>
+        <c:txPr>
+          <a:bodyPr/>
+          <a:lstStyle/>
+          <a:p>
+            <a:pPr>
+              <a:defRPr sz="1200" b="0" i="0" u="none" strike="noStrike">
+                <a:solidFill>
+                  <a:srgbClr val="000000"/>
+                </a:solidFill>
+                <a:latin typeface="Arial"/>
+              </a:defRPr>
+            </a:pPr>
+            <a:endParaRPr lang="en-US"/>
+          </a:p>
+        </c:txPr>
+        <c:crossAx val="2094734554"/>
+        <c:crosses val="autoZero"/>
+        <c:crossBetween val="between"/>
+      </c:valAx>
+      <c:spPr>
+        <a:noFill/>
+        <a:ln>
+          <a:noFill/>
+        </a:ln>
+        <a:effectLst/>
+      </c:spPr>
+    </c:plotArea>
+    <c:plotVisOnly val="1"/>
+    <c:dispBlanksAs val="span"/>
+  </c:chart>
+  <c:spPr>
+    <a:noFill/>
+    <a:ln>
+      <a:noFill/>
+    </a:ln>
+    <a:effectLst/>
+  </c:spPr>
+  <c:externalData r:id="rId1">
+    <c:autoUpdate val="0"/>
+  </c:externalData>
+</c:chartSpace>
+</file>
+
 <file path=ppt/notesMasters/notesMaster1.xml><?xml version="1.0" encoding="utf-8"?>
 <p:notesMaster xmlns:a="http://schemas.openxmlformats.org/drawingml/2006/main" xmlns:r="http://schemas.openxmlformats.org/officeDocument/2006/relationships" xmlns:p="http://schemas.openxmlformats.org/presentationml/2006/main">
   <p:cSld>
@@ -1686,6 +2113,182 @@
             <a:fld id="{F7021451-1387-4CA6-816F-3879F97B5CBC}" type="slidenum">
               <a:rPr lang="en-US"/>
               <a:t>4</a:t>
+            </a:fld>
+            <a:endParaRPr lang="en-US"/>
+          </a:p>
+        </p:txBody>
+      </p:sp>
+    </p:spTree>
+    <p:extLst>
+      <p:ext uri="{BB962C8B-B14F-4D97-AF65-F5344CB8AC3E}">
+        <p14:creationId xmlns:p14="http://schemas.microsoft.com/office/powerpoint/2010/main" val="1024086991"/>
+      </p:ext>
+    </p:extLst>
+  </p:cSld>
+  <p:clrMapOvr>
+    <a:masterClrMapping/>
+  </p:clrMapOvr>
+</p:notes>
+</file>
+
+<file path=ppt/notesSlides/notesSlide5.xml><?xml version="1.0" encoding="utf-8"?>
+<p:notes xmlns:a="http://schemas.openxmlformats.org/drawingml/2006/main" xmlns:r="http://schemas.openxmlformats.org/officeDocument/2006/relationships" xmlns:p="http://schemas.openxmlformats.org/presentationml/2006/main">
+  <p:cSld>
+    <p:spTree>
+      <p:nvGrpSpPr>
+        <p:cNvPr id="1" name=""/>
+        <p:cNvGrpSpPr/>
+        <p:nvPr/>
+      </p:nvGrpSpPr>
+      <p:grpSpPr>
+        <a:xfrm>
+          <a:off x="0" y="0"/>
+          <a:ext cx="0" cy="0"/>
+          <a:chOff x="0" y="0"/>
+          <a:chExt cx="0" cy="0"/>
+        </a:xfrm>
+      </p:grpSpPr>
+      <p:sp>
+        <p:nvSpPr>
+          <p:cNvPr id="2" name="Slide Image Placeholder 1"/>
+          <p:cNvSpPr>
+            <a:spLocks noGrp="1" noRot="1" noChangeAspect="1"/>
+          </p:cNvSpPr>
+          <p:nvPr>
+            <p:ph type="sldImg"/>
+          </p:nvPr>
+        </p:nvSpPr>
+        <p:spPr/>
+      </p:sp>
+      <p:sp>
+        <p:nvSpPr>
+          <p:cNvPr id="3" name="Notes Placeholder 2"/>
+          <p:cNvSpPr>
+            <a:spLocks noGrp="1"/>
+          </p:cNvSpPr>
+          <p:nvPr>
+            <p:ph type="body" idx="1"/>
+          </p:nvPr>
+        </p:nvSpPr>
+        <p:spPr/>
+        <p:txBody>
+          <a:bodyPr/>
+          <a:lstStyle/>
+          <a:p>
+            <a:r>
+              <a:rPr lang="en-US" dirty="0"/>
+              <a:t>SOTP on FY27E EBITDA: Aerospace Products $1,541M at 16x ($237/sh), Power $450M at 12x ($52/sh, low end of guide), Aviation Leasing + SCI $455M at 9x ($39/sh), less corporate (-$28/sh), net debt (-$23/sh) and preferred (-$1/sh) = $277/sh. Ex-Power = $225/sh vs. $167.03 current (10/2/26), a 26% discount.</a:t>
+            </a:r>
+            <a:endParaRPr lang="en-US" dirty="0"/>
+          </a:p>
+        </p:txBody>
+      </p:sp>
+      <p:sp>
+        <p:nvSpPr>
+          <p:cNvPr id="4" name="Slide Number Placeholder 3"/>
+          <p:cNvSpPr>
+            <a:spLocks noGrp="1"/>
+          </p:cNvSpPr>
+          <p:nvPr>
+            <p:ph type="sldNum" sz="quarter" idx="10"/>
+          </p:nvPr>
+        </p:nvSpPr>
+        <p:spPr/>
+        <p:txBody>
+          <a:bodyPr/>
+          <a:lstStyle/>
+          <a:p>
+            <a:fld id="{F7021451-1387-4CA6-816F-3879F97B5CBC}" type="slidenum">
+              <a:rPr lang="en-US"/>
+              <a:t>5</a:t>
+            </a:fld>
+            <a:endParaRPr lang="en-US"/>
+          </a:p>
+        </p:txBody>
+      </p:sp>
+    </p:spTree>
+    <p:extLst>
+      <p:ext uri="{BB962C8B-B14F-4D97-AF65-F5344CB8AC3E}">
+        <p14:creationId xmlns:p14="http://schemas.microsoft.com/office/powerpoint/2010/main" val="1024086991"/>
+      </p:ext>
+    </p:extLst>
+  </p:cSld>
+  <p:clrMapOvr>
+    <a:masterClrMapping/>
+  </p:clrMapOvr>
+</p:notes>
+</file>
+
+<file path=ppt/notesSlides/notesSlide6.xml><?xml version="1.0" encoding="utf-8"?>
+<p:notes xmlns:a="http://schemas.openxmlformats.org/drawingml/2006/main" xmlns:r="http://schemas.openxmlformats.org/officeDocument/2006/relationships" xmlns:p="http://schemas.openxmlformats.org/presentationml/2006/main">
+  <p:cSld>
+    <p:spTree>
+      <p:nvGrpSpPr>
+        <p:cNvPr id="1" name=""/>
+        <p:cNvGrpSpPr/>
+        <p:nvPr/>
+      </p:nvGrpSpPr>
+      <p:grpSpPr>
+        <a:xfrm>
+          <a:off x="0" y="0"/>
+          <a:ext cx="0" cy="0"/>
+          <a:chOff x="0" y="0"/>
+          <a:chExt cx="0" cy="0"/>
+        </a:xfrm>
+      </p:grpSpPr>
+      <p:sp>
+        <p:nvSpPr>
+          <p:cNvPr id="2" name="Slide Image Placeholder 1"/>
+          <p:cNvSpPr>
+            <a:spLocks noGrp="1" noRot="1" noChangeAspect="1"/>
+          </p:cNvSpPr>
+          <p:nvPr>
+            <p:ph type="sldImg"/>
+          </p:nvPr>
+        </p:nvSpPr>
+        <p:spPr/>
+      </p:sp>
+      <p:sp>
+        <p:nvSpPr>
+          <p:cNvPr id="3" name="Notes Placeholder 2"/>
+          <p:cNvSpPr>
+            <a:spLocks noGrp="1"/>
+          </p:cNvSpPr>
+          <p:nvPr>
+            <p:ph type="body" idx="1"/>
+          </p:nvPr>
+        </p:nvSpPr>
+        <p:spPr/>
+        <p:txBody>
+          <a:bodyPr/>
+          <a:lstStyle/>
+          <a:p>
+            <a:r>
+              <a:rPr lang="en-US" dirty="0"/>
+              <a:t/>
+            </a:r>
+            <a:endParaRPr lang="en-US" dirty="0"/>
+          </a:p>
+        </p:txBody>
+      </p:sp>
+      <p:sp>
+        <p:nvSpPr>
+          <p:cNvPr id="4" name="Slide Number Placeholder 3"/>
+          <p:cNvSpPr>
+            <a:spLocks noGrp="1"/>
+          </p:cNvSpPr>
+          <p:nvPr>
+            <p:ph type="sldNum" sz="quarter" idx="10"/>
+          </p:nvPr>
+        </p:nvSpPr>
+        <p:spPr/>
+        <p:txBody>
+          <a:bodyPr/>
+          <a:lstStyle/>
+          <a:p>
+            <a:fld id="{F7021451-1387-4CA6-816F-3879F97B5CBC}" type="slidenum">
+              <a:rPr lang="en-US"/>
+              <a:t>6</a:t>
             </a:fld>
             <a:endParaRPr lang="en-US"/>
           </a:p>
@@ -4766,6 +5369,1400 @@
             <a:fld id="{F7021451-1387-4CA6-816F-3879F97B5CBC}" type="slidenum">
               <a:rPr b="1" lang="en-US"/>
               <a:t>4</a:t>
+            </a:fld>
+            <a:endParaRPr lang="en-US"/>
+          </a:p>
+        </p:txBody>
+      </p:sp>
+    </p:spTree>
+  </p:cSld>
+  <p:clrMapOvr>
+    <a:masterClrMapping/>
+  </p:clrMapOvr>
+</p:sld>
+</file>
+
+<file path=ppt/slides/slide5.xml><?xml version="1.0" encoding="utf-8"?>
+<p:sld xmlns:a="http://schemas.openxmlformats.org/drawingml/2006/main" xmlns:r="http://schemas.openxmlformats.org/officeDocument/2006/relationships" xmlns:p="http://schemas.openxmlformats.org/presentationml/2006/main">
+  <p:cSld name="Slide 5">
+    <p:spTree>
+      <p:nvGrpSpPr>
+        <p:cNvPr id="1" name=""/>
+        <p:cNvGrpSpPr/>
+        <p:nvPr/>
+      </p:nvGrpSpPr>
+      <p:grpSpPr>
+        <a:xfrm>
+          <a:off x="0" y="0"/>
+          <a:ext cx="0" cy="0"/>
+          <a:chOff x="0" y="0"/>
+          <a:chExt cx="0" cy="0"/>
+        </a:xfrm>
+      </p:grpSpPr>
+      <p:sp>
+        <p:nvSpPr>
+          <p:cNvPr id="2" name="Text 1"/>
+          <p:cNvSpPr/>
+          <p:nvPr>
+            <p:ph idx="102" type="title" hasCustomPrompt="1"/>
+          </p:nvPr>
+        </p:nvSpPr>
+        <p:spPr>
+          <a:xfrm>
+            <a:off x="320040" y="182880"/>
+            <a:ext cx="7132320" cy="640080"/>
+          </a:xfrm>
+          <a:prstGeom prst="rect">
+            <a:avLst/>
+          </a:prstGeom>
+          <a:noFill/>
+          <a:ln/>
+        </p:spPr>
+        <p:txBody>
+          <a:bodyPr wrap="square" lIns="0" tIns="0" rIns="0" bIns="0" rtlCol="0" anchor="ctr"/>
+          <a:lstStyle/>
+          <a:p>
+            <a:pPr algn="l" indent="0" marL="0">
+              <a:buNone/>
+            </a:pPr>
+            <a:r>
+              <a:rPr lang="en-US" sz="3200" b="1" dirty="0">
+                <a:solidFill>
+                  <a:schemeClr val="tx2"/>
+                </a:solidFill>
+              </a:rPr>
+              <a:t>The Opportunity (3/3)</a:t>
+            </a:r>
+            <a:endParaRPr lang="en-US" sz="3200" dirty="0"/>
+          </a:p>
+        </p:txBody>
+      </p:sp>
+      <p:sp>
+        <p:nvSpPr>
+          <p:cNvPr id="3" name="Text 1"/>
+          <p:cNvSpPr/>
+          <p:nvPr>
+            <p:ph idx="103" type="body" hasCustomPrompt="1"/>
+          </p:nvPr>
+        </p:nvSpPr>
+        <p:spPr>
+          <a:xfrm>
+            <a:off x="320040" y="932688"/>
+            <a:ext cx="8503920" cy="566928"/>
+          </a:xfrm>
+          <a:prstGeom prst="rect">
+            <a:avLst/>
+          </a:prstGeom>
+          <a:noFill/>
+          <a:ln/>
+        </p:spPr>
+        <p:txBody>
+          <a:bodyPr wrap="square" lIns="0" tIns="0" rIns="0" bIns="0" rtlCol="0" anchor="t"/>
+          <a:lstStyle/>
+          <a:p>
+            <a:pPr algn="l" indent="0" marL="0">
+              <a:buNone/>
+            </a:pPr>
+            <a:r>
+              <a:rPr lang="en-US" sz="1700" b="1" dirty="0">
+                <a:solidFill>
+                  <a:schemeClr val="tx2"/>
+                </a:solidFill>
+              </a:rPr>
+              <a:t>The market assigns no value to Power: the stock trades below the core business alone.</a:t>
+            </a:r>
+            <a:endParaRPr lang="en-US" sz="1700" dirty="0"/>
+          </a:p>
+        </p:txBody>
+      </p:sp>
+      <p:sp>
+        <p:nvSpPr>
+          <p:cNvPr id="4" name="SOTP header"/>
+          <p:cNvSpPr txBox="1"/>
+          <p:nvPr/>
+        </p:nvSpPr>
+        <p:spPr>
+          <a:xfrm>
+            <a:off x="320040" y="1554480"/>
+            <a:ext cx="5257800" cy="365760"/>
+          </a:xfrm>
+          <a:prstGeom prst="rect">
+            <a:avLst/>
+          </a:prstGeom>
+          <a:noFill/>
+          <a:ln/>
+        </p:spPr>
+        <p:txBody>
+          <a:bodyPr wrap="square" lIns="0" tIns="0" rIns="0" bIns="0" rtlCol="0" anchor="b"/>
+          <a:lstStyle/>
+          <a:p>
+            <a:pPr algn="ctr" indent="0" marL="0">
+              <a:buNone/>
+            </a:pPr>
+            <a:r>
+              <a:rPr lang="en-US" sz="1600" b="1" dirty="0">
+                <a:solidFill>
+                  <a:srgbClr val="1A1A1A"/>
+                </a:solidFill>
+              </a:rPr>
+              <a:t>FY27E Sum of the Parts ($ / Share)</a:t>
+            </a:r>
+            <a:endParaRPr lang="en-US" sz="1600" dirty="0"/>
+          </a:p>
+        </p:txBody>
+      </p:sp>
+      <p:sp>
+        <p:nvSpPr>
+          <p:cNvPr id="5" name="SOTP header rule"/>
+          <p:cNvSpPr/>
+          <p:nvPr/>
+        </p:nvSpPr>
+        <p:spPr>
+          <a:xfrm>
+            <a:off x="320040" y="1975104"/>
+            <a:ext cx="5257800" cy="0"/>
+          </a:xfrm>
+          <a:prstGeom prst="line">
+            <a:avLst/>
+          </a:prstGeom>
+          <a:noFill/>
+          <a:ln w="12700">
+            <a:solidFill>
+              <a:srgbClr val="1A1A1A"/>
+            </a:solidFill>
+            <a:prstDash val="solid"/>
+          </a:ln>
+        </p:spPr>
+      </p:sp>
+      <p:graphicFrame>
+        <p:nvGraphicFramePr>
+          <p:cNvPr id="6" name="SOTP chart" descr=""/>
+          <p:cNvGraphicFramePr/>
+          <p:nvPr/>
+        </p:nvGraphicFramePr>
+        <p:xfrm>
+          <a:off x="320040" y="2103120"/>
+          <a:ext cx="5257800" cy="3200400"/>
+        </p:xfrm>
+        <a:graphic xmlns:a="http://schemas.openxmlformats.org/drawingml/2006/main">
+          <a:graphicData uri="http://schemas.openxmlformats.org/drawingml/2006/chart">
+            <c:chart xmlns:c="http://schemas.openxmlformats.org/drawingml/2006/chart" r:id="rId1"/>
+          </a:graphicData>
+        </a:graphic>
+      </p:graphicFrame>
+      <p:sp>
+        <p:nvSpPr>
+          <p:cNvPr id="7" name="Discount callout"/>
+          <p:cNvSpPr/>
+          <p:nvPr/>
+        </p:nvSpPr>
+        <p:spPr>
+          <a:xfrm>
+            <a:off x="548640" y="2148840"/>
+            <a:ext cx="1051560" cy="1051560"/>
+          </a:xfrm>
+          <a:prstGeom prst="ellipse">
+            <a:avLst/>
+          </a:prstGeom>
+          <a:solidFill>
+            <a:srgbClr val="0A1C58"/>
+          </a:solidFill>
+          <a:ln>
+            <a:solidFill>
+              <a:srgbClr val="0A1C58"/>
+            </a:solidFill>
+          </a:ln>
+        </p:spPr>
+        <p:txBody>
+          <a:bodyPr wrap="square" lIns="0" tIns="0" rIns="0" bIns="0" rtlCol="0" anchor="ctr"/>
+          <a:lstStyle/>
+          <a:p>
+            <a:pPr algn="ctr" indent="0" marL="0">
+              <a:buNone/>
+            </a:pPr>
+            <a:r>
+              <a:rPr lang="en-US" sz="2000" b="1" dirty="0">
+                <a:solidFill>
+                  <a:schemeClr val="bg1"/>
+                </a:solidFill>
+              </a:rPr>
+              <a:t>26%</a:t>
+            </a:r>
+            <a:endParaRPr lang="en-US" sz="2000" dirty="0"/>
+          </a:p>
+          <a:p>
+            <a:pPr algn="ctr" indent="0" marL="0">
+              <a:buNone/>
+            </a:pPr>
+            <a:r>
+              <a:rPr lang="en-US" sz="1100" b="1" dirty="0">
+                <a:solidFill>
+                  <a:schemeClr val="bg1"/>
+                </a:solidFill>
+              </a:rPr>
+              <a:t>below core</a:t>
+            </a:r>
+            <a:endParaRPr lang="en-US" sz="2000" dirty="0"/>
+          </a:p>
+        </p:txBody>
+      </p:sp>
+      <p:sp>
+        <p:nvSpPr>
+          <p:cNvPr id="8" name="Power label"/>
+          <p:cNvSpPr txBox="1"/>
+          <p:nvPr/>
+        </p:nvSpPr>
+        <p:spPr>
+          <a:xfrm>
+            <a:off x="2971800" y="2286000"/>
+            <a:ext cx="1325880" cy="274320"/>
+          </a:xfrm>
+          <a:prstGeom prst="rect">
+            <a:avLst/>
+          </a:prstGeom>
+          <a:noFill/>
+          <a:ln/>
+        </p:spPr>
+        <p:txBody>
+          <a:bodyPr wrap="square" lIns="0" tIns="0" rIns="0" bIns="0" rtlCol="0" anchor="ctr"/>
+          <a:lstStyle/>
+          <a:p>
+            <a:pPr algn="ctr" indent="0" marL="0">
+              <a:buNone/>
+            </a:pPr>
+            <a:r>
+              <a:rPr lang="en-US" sz="1200" b="1" i="1" dirty="0">
+                <a:solidFill>
+                  <a:schemeClr val="accent2"/>
+                </a:solidFill>
+              </a:rPr>
+              <a:t>Free call option</a:t>
+            </a:r>
+            <a:endParaRPr lang="en-US" sz="1200" dirty="0"/>
+          </a:p>
+        </p:txBody>
+      </p:sp>
+      <p:sp>
+        <p:nvSpPr>
+          <p:cNvPr id="9" name="Power stats header"/>
+          <p:cNvSpPr txBox="1"/>
+          <p:nvPr/>
+        </p:nvSpPr>
+        <p:spPr>
+          <a:xfrm>
+            <a:off x="5897880" y="1554480"/>
+            <a:ext cx="2926080" cy="365760"/>
+          </a:xfrm>
+          <a:prstGeom prst="rect">
+            <a:avLst/>
+          </a:prstGeom>
+          <a:noFill/>
+          <a:ln/>
+        </p:spPr>
+        <p:txBody>
+          <a:bodyPr wrap="square" lIns="0" tIns="0" rIns="0" bIns="0" rtlCol="0" anchor="b"/>
+          <a:lstStyle/>
+          <a:p>
+            <a:pPr algn="ctr" indent="0" marL="0">
+              <a:buNone/>
+            </a:pPr>
+            <a:r>
+              <a:rPr lang="en-US" sz="1600" b="1" dirty="0">
+                <a:solidFill>
+                  <a:srgbClr val="1A1A1A"/>
+                </a:solidFill>
+              </a:rPr>
+              <a:t>FTAI Power at a Glance</a:t>
+            </a:r>
+            <a:endParaRPr lang="en-US" sz="1600" dirty="0"/>
+          </a:p>
+        </p:txBody>
+      </p:sp>
+      <p:sp>
+        <p:nvSpPr>
+          <p:cNvPr id="10" name="Power stats header rule"/>
+          <p:cNvSpPr/>
+          <p:nvPr/>
+        </p:nvSpPr>
+        <p:spPr>
+          <a:xfrm>
+            <a:off x="5897880" y="1975104"/>
+            <a:ext cx="2926080" cy="0"/>
+          </a:xfrm>
+          <a:prstGeom prst="line">
+            <a:avLst/>
+          </a:prstGeom>
+          <a:noFill/>
+          <a:ln w="12700">
+            <a:solidFill>
+              <a:srgbClr val="1A1A1A"/>
+            </a:solidFill>
+            <a:prstDash val="solid"/>
+          </a:ln>
+        </p:spPr>
+      </p:sp>
+      <p:sp>
+        <p:nvSpPr>
+          <p:cNvPr id="11" name="Power stat 1"/>
+          <p:cNvSpPr txBox="1"/>
+          <p:nvPr/>
+        </p:nvSpPr>
+        <p:spPr>
+          <a:xfrm>
+            <a:off x="5897880" y="2148840"/>
+            <a:ext cx="2926080" cy="530352"/>
+          </a:xfrm>
+          <a:prstGeom prst="rect">
+            <a:avLst/>
+          </a:prstGeom>
+          <a:noFill/>
+          <a:ln/>
+        </p:spPr>
+        <p:txBody>
+          <a:bodyPr wrap="square" lIns="0" tIns="0" rIns="0" bIns="0" rtlCol="0" anchor="b"/>
+          <a:lstStyle/>
+          <a:p>
+            <a:pPr algn="ctr" indent="0" marL="0">
+              <a:buNone/>
+            </a:pPr>
+            <a:r>
+              <a:rPr lang="en-US" sz="3000" b="1" dirty="0">
+                <a:solidFill>
+                  <a:schemeClr val="tx2"/>
+                </a:solidFill>
+              </a:rPr>
+              <a:t>$1.465B</a:t>
+            </a:r>
+            <a:endParaRPr lang="en-US" sz="3000" dirty="0"/>
+          </a:p>
+        </p:txBody>
+      </p:sp>
+      <p:sp>
+        <p:nvSpPr>
+          <p:cNvPr id="12" name="Power stat 1 label"/>
+          <p:cNvSpPr txBox="1"/>
+          <p:nvPr/>
+        </p:nvSpPr>
+        <p:spPr>
+          <a:xfrm>
+            <a:off x="5897880" y="2697480"/>
+            <a:ext cx="2926080" cy="320040"/>
+          </a:xfrm>
+          <a:prstGeom prst="rect">
+            <a:avLst/>
+          </a:prstGeom>
+          <a:noFill/>
+          <a:ln/>
+        </p:spPr>
+        <p:txBody>
+          <a:bodyPr wrap="square" lIns="0" tIns="0" rIns="0" bIns="0" rtlCol="0" anchor="t"/>
+          <a:lstStyle/>
+          <a:p>
+            <a:pPr algn="ctr" indent="0" marL="0">
+              <a:buNone/>
+            </a:pPr>
+            <a:r>
+              <a:rPr lang="en-US" sz="1300" dirty="0">
+                <a:solidFill>
+                  <a:schemeClr val="accent2"/>
+                </a:solidFill>
+              </a:rPr>
+              <a:t>First hyperscaler order, via the J&amp;F JV</a:t>
+            </a:r>
+            <a:endParaRPr lang="en-US" sz="1300" dirty="0"/>
+          </a:p>
+        </p:txBody>
+      </p:sp>
+      <p:sp>
+        <p:nvSpPr>
+          <p:cNvPr id="13" name="Power stat 2"/>
+          <p:cNvSpPr txBox="1"/>
+          <p:nvPr/>
+        </p:nvSpPr>
+        <p:spPr>
+          <a:xfrm>
+            <a:off x="5897880" y="3227832"/>
+            <a:ext cx="2926080" cy="530352"/>
+          </a:xfrm>
+          <a:prstGeom prst="rect">
+            <a:avLst/>
+          </a:prstGeom>
+          <a:noFill/>
+          <a:ln/>
+        </p:spPr>
+        <p:txBody>
+          <a:bodyPr wrap="square" lIns="0" tIns="0" rIns="0" bIns="0" rtlCol="0" anchor="b"/>
+          <a:lstStyle/>
+          <a:p>
+            <a:pPr algn="ctr" indent="0" marL="0">
+              <a:buNone/>
+            </a:pPr>
+            <a:r>
+              <a:rPr lang="en-US" sz="3000" b="1" dirty="0">
+                <a:solidFill>
+                  <a:schemeClr val="tx2"/>
+                </a:solidFill>
+              </a:rPr>
+              <a:t>$450–750M</a:t>
+            </a:r>
+            <a:endParaRPr lang="en-US" sz="3000" dirty="0"/>
+          </a:p>
+        </p:txBody>
+      </p:sp>
+      <p:sp>
+        <p:nvSpPr>
+          <p:cNvPr id="14" name="Power stat 2 label"/>
+          <p:cNvSpPr txBox="1"/>
+          <p:nvPr/>
+        </p:nvSpPr>
+        <p:spPr>
+          <a:xfrm>
+            <a:off x="5897880" y="3776472"/>
+            <a:ext cx="2926080" cy="320040"/>
+          </a:xfrm>
+          <a:prstGeom prst="rect">
+            <a:avLst/>
+          </a:prstGeom>
+          <a:noFill/>
+          <a:ln/>
+        </p:spPr>
+        <p:txBody>
+          <a:bodyPr wrap="square" lIns="0" tIns="0" rIns="0" bIns="0" rtlCol="0" anchor="t"/>
+          <a:lstStyle/>
+          <a:p>
+            <a:pPr algn="ctr" indent="0" marL="0">
+              <a:buNone/>
+            </a:pPr>
+            <a:r>
+              <a:rPr lang="en-US" sz="1300" dirty="0">
+                <a:solidFill>
+                  <a:schemeClr val="accent2"/>
+                </a:solidFill>
+              </a:rPr>
+              <a:t>FY27 Power EBITDA guide</a:t>
+            </a:r>
+            <a:endParaRPr lang="en-US" sz="1300" dirty="0"/>
+          </a:p>
+        </p:txBody>
+      </p:sp>
+      <p:sp>
+        <p:nvSpPr>
+          <p:cNvPr id="15" name="Power stat 3"/>
+          <p:cNvSpPr txBox="1"/>
+          <p:nvPr/>
+        </p:nvSpPr>
+        <p:spPr>
+          <a:xfrm>
+            <a:off x="5897880" y="4306824"/>
+            <a:ext cx="2926080" cy="530352"/>
+          </a:xfrm>
+          <a:prstGeom prst="rect">
+            <a:avLst/>
+          </a:prstGeom>
+          <a:noFill/>
+          <a:ln/>
+        </p:spPr>
+        <p:txBody>
+          <a:bodyPr wrap="square" lIns="0" tIns="0" rIns="0" bIns="0" rtlCol="0" anchor="b"/>
+          <a:lstStyle/>
+          <a:p>
+            <a:pPr algn="ctr" indent="0" marL="0">
+              <a:buNone/>
+            </a:pPr>
+            <a:r>
+              <a:rPr lang="en-US" sz="3000" b="1" dirty="0">
+                <a:solidFill>
+                  <a:schemeClr val="tx2"/>
+                </a:solidFill>
+              </a:rPr>
+              <a:t>25 MW</a:t>
+            </a:r>
+            <a:endParaRPr lang="en-US" sz="3000" dirty="0"/>
+          </a:p>
+        </p:txBody>
+      </p:sp>
+      <p:sp>
+        <p:nvSpPr>
+          <p:cNvPr id="16" name="Power stat 3 label"/>
+          <p:cNvSpPr txBox="1"/>
+          <p:nvPr/>
+        </p:nvSpPr>
+        <p:spPr>
+          <a:xfrm>
+            <a:off x="5897880" y="4855464"/>
+            <a:ext cx="2926080" cy="320040"/>
+          </a:xfrm>
+          <a:prstGeom prst="rect">
+            <a:avLst/>
+          </a:prstGeom>
+          <a:noFill/>
+          <a:ln/>
+        </p:spPr>
+        <p:txBody>
+          <a:bodyPr wrap="square" lIns="0" tIns="0" rIns="0" bIns="0" rtlCol="0" anchor="t"/>
+          <a:lstStyle/>
+          <a:p>
+            <a:pPr algn="ctr" indent="0" marL="0">
+              <a:buNone/>
+            </a:pPr>
+            <a:r>
+              <a:rPr lang="en-US" sz="1300" dirty="0">
+                <a:solidFill>
+                  <a:schemeClr val="accent2"/>
+                </a:solidFill>
+              </a:rPr>
+              <a:t>Per unit, built from CFM56 cores</a:t>
+            </a:r>
+            <a:endParaRPr lang="en-US" sz="1300" dirty="0"/>
+          </a:p>
+        </p:txBody>
+      </p:sp>
+      <p:sp>
+        <p:nvSpPr>
+          <p:cNvPr id="17" name="Takeaway"/>
+          <p:cNvSpPr txBox="1"/>
+          <p:nvPr/>
+        </p:nvSpPr>
+        <p:spPr>
+          <a:xfrm>
+            <a:off x="320040" y="5504688"/>
+            <a:ext cx="8503920" cy="566928"/>
+          </a:xfrm>
+          <a:prstGeom prst="rect">
+            <a:avLst/>
+          </a:prstGeom>
+          <a:solidFill>
+            <a:srgbClr val="0A1C58"/>
+          </a:solidFill>
+          <a:ln/>
+        </p:spPr>
+        <p:txBody>
+          <a:bodyPr wrap="square" lIns="101600" tIns="25400" rIns="101600" bIns="25400" rtlCol="0" anchor="ctr"/>
+          <a:lstStyle/>
+          <a:p>
+            <a:pPr algn="ctr" indent="0" marL="0">
+              <a:buNone/>
+            </a:pPr>
+            <a:r>
+              <a:rPr lang="en-US" sz="1700" b="1" dirty="0">
+                <a:solidFill>
+                  <a:schemeClr val="bg1"/>
+                </a:solidFill>
+              </a:rPr>
+              <a:t>Even with Power at zero, FTAI is cheap. Power is a free call option on top.</a:t>
+            </a:r>
+            <a:endParaRPr lang="en-US" sz="1700" dirty="0"/>
+          </a:p>
+        </p:txBody>
+      </p:sp>
+      <p:sp>
+        <p:nvSpPr>
+          <p:cNvPr id="18" name="Source"/>
+          <p:cNvSpPr txBox="1"/>
+          <p:nvPr/>
+        </p:nvSpPr>
+        <p:spPr>
+          <a:xfrm>
+            <a:off x="320040" y="6355080"/>
+            <a:ext cx="7132320" cy="274320"/>
+          </a:xfrm>
+          <a:prstGeom prst="rect">
+            <a:avLst/>
+          </a:prstGeom>
+          <a:noFill/>
+          <a:ln/>
+        </p:spPr>
+        <p:txBody>
+          <a:bodyPr wrap="square" lIns="0" tIns="0" rIns="0" bIns="0" rtlCol="0" anchor="ctr"/>
+          <a:lstStyle/>
+          <a:p>
+            <a:pPr indent="0" marL="0">
+              <a:buNone/>
+            </a:pPr>
+            <a:r>
+              <a:rPr lang="en-US" sz="1100" b="1" dirty="0">
+                <a:solidFill>
+                  <a:srgbClr val="1A1A1A"/>
+                </a:solidFill>
+              </a:rPr>
+              <a:t>Source: </a:t>
+            </a:r>
+            <a:pPr indent="0" marL="0">
+              <a:buNone/>
+            </a:pPr>
+            <a:r>
+              <a:rPr lang="en-US" sz="1100" dirty="0">
+                <a:solidFill>
+                  <a:srgbClr val="1A1A1A"/>
+                </a:solidFill>
+              </a:rPr>
+              <a:t>FTAI filings and earnings calls, GPS SOTP (FY27E EBITDA × segment multiples)</a:t>
+            </a:r>
+            <a:endParaRPr lang="en-US" sz="1100" dirty="0"/>
+          </a:p>
+        </p:txBody>
+      </p:sp>
+      <p:sp>
+        <p:nvSpPr>
+          <p:cNvPr id="25" name="Slide Number Placeholder 0"/>
+          <p:cNvSpPr>
+            <a:spLocks noGrp="1"/>
+          </p:cNvSpPr>
+          <p:nvPr>
+            <p:ph type="sldNum" sz="quarter" idx="4294967295"/>
+          </p:nvPr>
+        </p:nvSpPr>
+        <p:spPr>
+          <a:xfrm>
+            <a:off x="7635240" y="6327648"/>
+            <a:ext cx="411480" cy="274320"/>
+          </a:xfrm>
+          <a:prstGeom prst="rect">
+            <a:avLst/>
+          </a:prstGeom>
+          <a:extLst>
+            <a:ext uri="{C572A759-6A51-4108-AA02-DFA0A04FC94B}">
+              <ma14:wrappingTextBoxFlag xmlns:ma14="http://schemas.microsoft.com/office/mac/drawingml/2011/main" val="0"/>
+            </a:ext>
+          </a:extLst>
+        </p:spPr>
+        <p:txBody>
+          <a:bodyPr/>
+          <a:lstStyle>
+            <a:lvl1pPr>
+              <a:defRPr sz="1100">
+                <a:solidFill>
+                  <a:srgbClr val="1A1A1A"/>
+                </a:solidFill>
+              </a:defRPr>
+            </a:lvl1pPr>
+          </a:lstStyle>
+          <a:p>
+            <a:pPr algn="r"/>
+            <a:fld id="{F7021451-1387-4CA6-816F-3879F97B5CBC}" type="slidenum">
+              <a:rPr b="1" lang="en-US"/>
+              <a:t>5</a:t>
+            </a:fld>
+            <a:endParaRPr lang="en-US"/>
+          </a:p>
+        </p:txBody>
+      </p:sp>
+    </p:spTree>
+  </p:cSld>
+  <p:clrMapOvr>
+    <a:masterClrMapping/>
+  </p:clrMapOvr>
+</p:sld>
+</file>
+
+<file path=ppt/slides/slide6.xml><?xml version="1.0" encoding="utf-8"?>
+<p:sld xmlns:a="http://schemas.openxmlformats.org/drawingml/2006/main" xmlns:r="http://schemas.openxmlformats.org/officeDocument/2006/relationships" xmlns:p="http://schemas.openxmlformats.org/presentationml/2006/main">
+  <p:cSld name="Slide 6">
+    <p:spTree>
+      <p:nvGrpSpPr>
+        <p:cNvPr id="1" name=""/>
+        <p:cNvGrpSpPr/>
+        <p:nvPr/>
+      </p:nvGrpSpPr>
+      <p:grpSpPr>
+        <a:xfrm>
+          <a:off x="0" y="0"/>
+          <a:ext cx="0" cy="0"/>
+          <a:chOff x="0" y="0"/>
+          <a:chExt cx="0" cy="0"/>
+        </a:xfrm>
+      </p:grpSpPr>
+      <p:sp>
+        <p:nvSpPr>
+          <p:cNvPr id="2" name="Text 1"/>
+          <p:cNvSpPr/>
+          <p:nvPr>
+            <p:ph idx="102" type="title" hasCustomPrompt="1"/>
+          </p:nvPr>
+        </p:nvSpPr>
+        <p:spPr>
+          <a:xfrm>
+            <a:off x="320040" y="182880"/>
+            <a:ext cx="7132320" cy="640080"/>
+          </a:xfrm>
+          <a:prstGeom prst="rect">
+            <a:avLst/>
+          </a:prstGeom>
+          <a:noFill/>
+          <a:ln/>
+        </p:spPr>
+        <p:txBody>
+          <a:bodyPr wrap="square" lIns="0" tIns="0" rIns="0" bIns="0" rtlCol="0" anchor="ctr"/>
+          <a:lstStyle/>
+          <a:p>
+            <a:pPr algn="l" indent="0" marL="0">
+              <a:buNone/>
+            </a:pPr>
+            <a:r>
+              <a:rPr lang="en-US" sz="3200" b="1" dirty="0">
+                <a:solidFill>
+                  <a:schemeClr val="tx2"/>
+                </a:solidFill>
+              </a:rPr>
+              <a:t>Business Overview</a:t>
+            </a:r>
+            <a:endParaRPr lang="en-US" sz="3200" dirty="0"/>
+          </a:p>
+        </p:txBody>
+      </p:sp>
+      <p:sp>
+        <p:nvSpPr>
+          <p:cNvPr id="3" name="Text 1"/>
+          <p:cNvSpPr/>
+          <p:nvPr>
+            <p:ph idx="103" type="body" hasCustomPrompt="1"/>
+          </p:nvPr>
+        </p:nvSpPr>
+        <p:spPr>
+          <a:xfrm>
+            <a:off x="320040" y="932688"/>
+            <a:ext cx="8503920" cy="566928"/>
+          </a:xfrm>
+          <a:prstGeom prst="rect">
+            <a:avLst/>
+          </a:prstGeom>
+          <a:noFill/>
+          <a:ln/>
+        </p:spPr>
+        <p:txBody>
+          <a:bodyPr wrap="square" lIns="0" tIns="0" rIns="0" bIns="0" rtlCol="0" anchor="t"/>
+          <a:lstStyle/>
+          <a:p>
+            <a:pPr algn="l" indent="0" marL="0">
+              <a:buNone/>
+            </a:pPr>
+            <a:r>
+              <a:rPr lang="en-US" sz="1700" b="1" dirty="0">
+                <a:solidFill>
+                  <a:schemeClr val="tx2"/>
+                </a:solidFill>
+              </a:rPr>
+              <a:t>FTAI keeps the world's best-selling jet engine flying, and turns old ones into power.</a:t>
+            </a:r>
+            <a:endParaRPr lang="en-US" sz="1700" dirty="0"/>
+          </a:p>
+        </p:txBody>
+      </p:sp>
+      <p:pic>
+        <p:nvPicPr>
+          <p:cNvPr id="4" name="Aerospace Products illustration" descr="/home/user/SPOT/deck/img/cfm56.png">    </p:cNvPr>
+          <p:cNvPicPr>
+            <a:picLocks noChangeAspect="1"/>
+          </p:cNvPicPr>
+          <p:nvPr/>
+        </p:nvPicPr>
+        <p:blipFill>
+          <a:blip r:embed="rId1"/>
+          <a:stretch>
+            <a:fillRect/>
+          </a:stretch>
+        </p:blipFill>
+        <p:spPr>
+          <a:xfrm>
+            <a:off x="457200" y="1600200"/>
+            <a:ext cx="2377440" cy="1344168"/>
+          </a:xfrm>
+          <a:prstGeom prst="rect">
+            <a:avLst/>
+          </a:prstGeom>
+        </p:spPr>
+      </p:pic>
+      <p:sp>
+        <p:nvSpPr>
+          <p:cNvPr id="5" name="Aerospace Products name"/>
+          <p:cNvSpPr txBox="1"/>
+          <p:nvPr/>
+        </p:nvSpPr>
+        <p:spPr>
+          <a:xfrm>
+            <a:off x="320040" y="3035808"/>
+            <a:ext cx="2651760" cy="365760"/>
+          </a:xfrm>
+          <a:prstGeom prst="rect">
+            <a:avLst/>
+          </a:prstGeom>
+          <a:noFill/>
+          <a:ln/>
+        </p:spPr>
+        <p:txBody>
+          <a:bodyPr wrap="square" lIns="0" tIns="0" rIns="0" bIns="0" rtlCol="0" anchor="ctr"/>
+          <a:lstStyle/>
+          <a:p>
+            <a:pPr algn="ctr" indent="0" marL="0">
+              <a:buNone/>
+            </a:pPr>
+            <a:r>
+              <a:rPr lang="en-US" sz="1800" b="1" dirty="0">
+                <a:solidFill>
+                  <a:schemeClr val="tx2"/>
+                </a:solidFill>
+              </a:rPr>
+              <a:t>Aerospace Products</a:t>
+            </a:r>
+            <a:endParaRPr lang="en-US" sz="1800" dirty="0"/>
+          </a:p>
+        </p:txBody>
+      </p:sp>
+      <p:sp>
+        <p:nvSpPr>
+          <p:cNvPr id="6" name="Aerospace Products description"/>
+          <p:cNvSpPr txBox="1"/>
+          <p:nvPr/>
+        </p:nvSpPr>
+        <p:spPr>
+          <a:xfrm>
+            <a:off x="320040" y="3429000"/>
+            <a:ext cx="2651760" cy="914400"/>
+          </a:xfrm>
+          <a:prstGeom prst="rect">
+            <a:avLst/>
+          </a:prstGeom>
+          <a:noFill/>
+          <a:ln/>
+        </p:spPr>
+        <p:txBody>
+          <a:bodyPr wrap="square" lIns="0" tIns="0" rIns="0" bIns="0" rtlCol="0" anchor="t"/>
+          <a:lstStyle/>
+          <a:p>
+            <a:pPr algn="ctr" indent="0" marL="0">
+              <a:buNone/>
+            </a:pPr>
+            <a:r>
+              <a:rPr lang="en-US" sz="1300" dirty="0">
+                <a:solidFill>
+                  <a:srgbClr val="1A1A1A"/>
+                </a:solidFill>
+              </a:rPr>
+              <a:t>Restores and swaps CFM56 engine modules, so airlines get engines back in days, not months.</a:t>
+            </a:r>
+            <a:endParaRPr lang="en-US" sz="1300" dirty="0"/>
+          </a:p>
+        </p:txBody>
+      </p:sp>
+      <p:sp>
+        <p:nvSpPr>
+          <p:cNvPr id="7" name="Aerospace Products stat"/>
+          <p:cNvSpPr txBox="1"/>
+          <p:nvPr/>
+        </p:nvSpPr>
+        <p:spPr>
+          <a:xfrm>
+            <a:off x="502920" y="4434840"/>
+            <a:ext cx="2286000" cy="868680"/>
+          </a:xfrm>
+          <a:prstGeom prst="rect">
+            <a:avLst/>
+          </a:prstGeom>
+          <a:solidFill>
+            <a:srgbClr val="EFEDEA"/>
+          </a:solidFill>
+          <a:ln/>
+        </p:spPr>
+        <p:txBody>
+          <a:bodyPr wrap="square" lIns="0" tIns="0" rIns="0" bIns="0" rtlCol="0" anchor="ctr"/>
+          <a:lstStyle/>
+          <a:p>
+            <a:pPr algn="ctr" indent="0" marL="0">
+              <a:buNone/>
+            </a:pPr>
+            <a:r>
+              <a:rPr lang="en-US" sz="2200" b="1" dirty="0">
+                <a:solidFill>
+                  <a:schemeClr val="tx2"/>
+                </a:solidFill>
+              </a:rPr>
+              <a:t>757 → 1,200</a:t>
+            </a:r>
+            <a:endParaRPr lang="en-US" sz="2200" dirty="0"/>
+          </a:p>
+          <a:p>
+            <a:pPr algn="ctr" indent="0" marL="0">
+              <a:buNone/>
+            </a:pPr>
+            <a:r>
+              <a:rPr lang="en-US" sz="1200" dirty="0">
+                <a:solidFill>
+                  <a:schemeClr val="accent2"/>
+                </a:solidFill>
+              </a:rPr>
+              <a:t>Modules, 2025 → 2026E</a:t>
+            </a:r>
+            <a:endParaRPr lang="en-US" sz="2200" dirty="0"/>
+          </a:p>
+        </p:txBody>
+      </p:sp>
+      <p:pic>
+        <p:nvPicPr>
+          <p:cNvPr id="8" name="FTAI Power illustration" descr="/home/user/SPOT/deck/img/power.png">    </p:cNvPr>
+          <p:cNvPicPr>
+            <a:picLocks noChangeAspect="1"/>
+          </p:cNvPicPr>
+          <p:nvPr/>
+        </p:nvPicPr>
+        <p:blipFill>
+          <a:blip r:embed="rId2"/>
+          <a:stretch>
+            <a:fillRect/>
+          </a:stretch>
+        </p:blipFill>
+        <p:spPr>
+          <a:xfrm>
+            <a:off x="3383280" y="1600200"/>
+            <a:ext cx="2377440" cy="1344168"/>
+          </a:xfrm>
+          <a:prstGeom prst="rect">
+            <a:avLst/>
+          </a:prstGeom>
+        </p:spPr>
+      </p:pic>
+      <p:sp>
+        <p:nvSpPr>
+          <p:cNvPr id="9" name="FTAI Power name"/>
+          <p:cNvSpPr txBox="1"/>
+          <p:nvPr/>
+        </p:nvSpPr>
+        <p:spPr>
+          <a:xfrm>
+            <a:off x="3246120" y="3035808"/>
+            <a:ext cx="2651760" cy="365760"/>
+          </a:xfrm>
+          <a:prstGeom prst="rect">
+            <a:avLst/>
+          </a:prstGeom>
+          <a:noFill/>
+          <a:ln/>
+        </p:spPr>
+        <p:txBody>
+          <a:bodyPr wrap="square" lIns="0" tIns="0" rIns="0" bIns="0" rtlCol="0" anchor="ctr"/>
+          <a:lstStyle/>
+          <a:p>
+            <a:pPr algn="ctr" indent="0" marL="0">
+              <a:buNone/>
+            </a:pPr>
+            <a:r>
+              <a:rPr lang="en-US" sz="1800" b="1" dirty="0">
+                <a:solidFill>
+                  <a:schemeClr val="tx2"/>
+                </a:solidFill>
+              </a:rPr>
+              <a:t>FTAI Power</a:t>
+            </a:r>
+            <a:endParaRPr lang="en-US" sz="1800" dirty="0"/>
+          </a:p>
+        </p:txBody>
+      </p:sp>
+      <p:sp>
+        <p:nvSpPr>
+          <p:cNvPr id="10" name="FTAI Power description"/>
+          <p:cNvSpPr txBox="1"/>
+          <p:nvPr/>
+        </p:nvSpPr>
+        <p:spPr>
+          <a:xfrm>
+            <a:off x="3246120" y="3429000"/>
+            <a:ext cx="2651760" cy="914400"/>
+          </a:xfrm>
+          <a:prstGeom prst="rect">
+            <a:avLst/>
+          </a:prstGeom>
+          <a:noFill/>
+          <a:ln/>
+        </p:spPr>
+        <p:txBody>
+          <a:bodyPr wrap="square" lIns="0" tIns="0" rIns="0" bIns="0" rtlCol="0" anchor="t"/>
+          <a:lstStyle/>
+          <a:p>
+            <a:pPr algn="ctr" indent="0" marL="0">
+              <a:buNone/>
+            </a:pPr>
+            <a:r>
+              <a:rPr lang="en-US" sz="1300" dirty="0">
+                <a:solidFill>
+                  <a:srgbClr val="1A1A1A"/>
+                </a:solidFill>
+              </a:rPr>
+              <a:t>Converts CFM56 cores into 25 MW mobile gas turbines that power data centers.</a:t>
+            </a:r>
+            <a:endParaRPr lang="en-US" sz="1300" dirty="0"/>
+          </a:p>
+        </p:txBody>
+      </p:sp>
+      <p:sp>
+        <p:nvSpPr>
+          <p:cNvPr id="11" name="FTAI Power stat"/>
+          <p:cNvSpPr txBox="1"/>
+          <p:nvPr/>
+        </p:nvSpPr>
+        <p:spPr>
+          <a:xfrm>
+            <a:off x="3429000" y="4434840"/>
+            <a:ext cx="2286000" cy="868680"/>
+          </a:xfrm>
+          <a:prstGeom prst="rect">
+            <a:avLst/>
+          </a:prstGeom>
+          <a:solidFill>
+            <a:srgbClr val="EFEDEA"/>
+          </a:solidFill>
+          <a:ln/>
+        </p:spPr>
+        <p:txBody>
+          <a:bodyPr wrap="square" lIns="0" tIns="0" rIns="0" bIns="0" rtlCol="0" anchor="ctr"/>
+          <a:lstStyle/>
+          <a:p>
+            <a:pPr algn="ctr" indent="0" marL="0">
+              <a:buNone/>
+            </a:pPr>
+            <a:r>
+              <a:rPr lang="en-US" sz="2200" b="1" dirty="0">
+                <a:solidFill>
+                  <a:schemeClr val="tx2"/>
+                </a:solidFill>
+              </a:rPr>
+              <a:t>$450–750M</a:t>
+            </a:r>
+            <a:endParaRPr lang="en-US" sz="2200" dirty="0"/>
+          </a:p>
+          <a:p>
+            <a:pPr algn="ctr" indent="0" marL="0">
+              <a:buNone/>
+            </a:pPr>
+            <a:r>
+              <a:rPr lang="en-US" sz="1200" dirty="0">
+                <a:solidFill>
+                  <a:schemeClr val="accent2"/>
+                </a:solidFill>
+              </a:rPr>
+              <a:t>FY27 EBITDA guide</a:t>
+            </a:r>
+            <a:endParaRPr lang="en-US" sz="2200" dirty="0"/>
+          </a:p>
+        </p:txBody>
+      </p:sp>
+      <p:sp>
+        <p:nvSpPr>
+          <p:cNvPr id="12" name="Column divider 1"/>
+          <p:cNvSpPr/>
+          <p:nvPr/>
+        </p:nvSpPr>
+        <p:spPr>
+          <a:xfrm>
+            <a:off x="3108960" y="1691640"/>
+            <a:ext cx="0" cy="3566160"/>
+          </a:xfrm>
+          <a:prstGeom prst="line">
+            <a:avLst/>
+          </a:prstGeom>
+          <a:noFill/>
+          <a:ln w="12700">
+            <a:solidFill>
+              <a:srgbClr val="DCD8D3"/>
+            </a:solidFill>
+            <a:prstDash val="solid"/>
+          </a:ln>
+        </p:spPr>
+      </p:sp>
+      <p:pic>
+        <p:nvPicPr>
+          <p:cNvPr id="13" name="Leasing + SCI illustration" descr="/home/user/SPOT/deck/img/aircraft.png">    </p:cNvPr>
+          <p:cNvPicPr>
+            <a:picLocks noChangeAspect="1"/>
+          </p:cNvPicPr>
+          <p:nvPr/>
+        </p:nvPicPr>
+        <p:blipFill>
+          <a:blip r:embed="rId3"/>
+          <a:stretch>
+            <a:fillRect/>
+          </a:stretch>
+        </p:blipFill>
+        <p:spPr>
+          <a:xfrm>
+            <a:off x="6309360" y="1600200"/>
+            <a:ext cx="2377440" cy="1344168"/>
+          </a:xfrm>
+          <a:prstGeom prst="rect">
+            <a:avLst/>
+          </a:prstGeom>
+        </p:spPr>
+      </p:pic>
+      <p:sp>
+        <p:nvSpPr>
+          <p:cNvPr id="14" name="Leasing + SCI name"/>
+          <p:cNvSpPr txBox="1"/>
+          <p:nvPr/>
+        </p:nvSpPr>
+        <p:spPr>
+          <a:xfrm>
+            <a:off x="6172200" y="3035808"/>
+            <a:ext cx="2651760" cy="365760"/>
+          </a:xfrm>
+          <a:prstGeom prst="rect">
+            <a:avLst/>
+          </a:prstGeom>
+          <a:noFill/>
+          <a:ln/>
+        </p:spPr>
+        <p:txBody>
+          <a:bodyPr wrap="square" lIns="0" tIns="0" rIns="0" bIns="0" rtlCol="0" anchor="ctr"/>
+          <a:lstStyle/>
+          <a:p>
+            <a:pPr algn="ctr" indent="0" marL="0">
+              <a:buNone/>
+            </a:pPr>
+            <a:r>
+              <a:rPr lang="en-US" sz="1800" b="1" dirty="0">
+                <a:solidFill>
+                  <a:schemeClr val="tx2"/>
+                </a:solidFill>
+              </a:rPr>
+              <a:t>Leasing + SCI</a:t>
+            </a:r>
+            <a:endParaRPr lang="en-US" sz="1800" dirty="0"/>
+          </a:p>
+        </p:txBody>
+      </p:sp>
+      <p:sp>
+        <p:nvSpPr>
+          <p:cNvPr id="15" name="Leasing + SCI description"/>
+          <p:cNvSpPr txBox="1"/>
+          <p:nvPr/>
+        </p:nvSpPr>
+        <p:spPr>
+          <a:xfrm>
+            <a:off x="6172200" y="3429000"/>
+            <a:ext cx="2651760" cy="914400"/>
+          </a:xfrm>
+          <a:prstGeom prst="rect">
+            <a:avLst/>
+          </a:prstGeom>
+          <a:noFill/>
+          <a:ln/>
+        </p:spPr>
+        <p:txBody>
+          <a:bodyPr wrap="square" lIns="0" tIns="0" rIns="0" bIns="0" rtlCol="0" anchor="t"/>
+          <a:lstStyle/>
+          <a:p>
+            <a:pPr algn="ctr" indent="0" marL="0">
+              <a:buNone/>
+            </a:pPr>
+            <a:r>
+              <a:rPr lang="en-US" sz="1300" dirty="0">
+                <a:solidFill>
+                  <a:srgbClr val="1A1A1A"/>
+                </a:solidFill>
+              </a:rPr>
+              <a:t>Leases jets and engines. The SCI partnership buys mid-life jets and sends all engine work to FTAI.</a:t>
+            </a:r>
+            <a:endParaRPr lang="en-US" sz="1300" dirty="0"/>
+          </a:p>
+        </p:txBody>
+      </p:sp>
+      <p:sp>
+        <p:nvSpPr>
+          <p:cNvPr id="16" name="Leasing + SCI stat"/>
+          <p:cNvSpPr txBox="1"/>
+          <p:nvPr/>
+        </p:nvSpPr>
+        <p:spPr>
+          <a:xfrm>
+            <a:off x="6355080" y="4434840"/>
+            <a:ext cx="2286000" cy="868680"/>
+          </a:xfrm>
+          <a:prstGeom prst="rect">
+            <a:avLst/>
+          </a:prstGeom>
+          <a:solidFill>
+            <a:srgbClr val="EFEDEA"/>
+          </a:solidFill>
+          <a:ln/>
+        </p:spPr>
+        <p:txBody>
+          <a:bodyPr wrap="square" lIns="0" tIns="0" rIns="0" bIns="0" rtlCol="0" anchor="ctr"/>
+          <a:lstStyle/>
+          <a:p>
+            <a:pPr algn="ctr" indent="0" marL="0">
+              <a:buNone/>
+            </a:pPr>
+            <a:r>
+              <a:rPr lang="en-US" sz="2200" b="1" dirty="0">
+                <a:solidFill>
+                  <a:schemeClr val="tx2"/>
+                </a:solidFill>
+              </a:rPr>
+              <a:t>316</a:t>
+            </a:r>
+            <a:endParaRPr lang="en-US" sz="2200" dirty="0"/>
+          </a:p>
+          <a:p>
+            <a:pPr algn="ctr" indent="0" marL="0">
+              <a:buNone/>
+            </a:pPr>
+            <a:r>
+              <a:rPr lang="en-US" sz="1200" dirty="0">
+                <a:solidFill>
+                  <a:schemeClr val="accent2"/>
+                </a:solidFill>
+              </a:rPr>
+              <a:t>SCI aircraft, YE26E</a:t>
+            </a:r>
+            <a:endParaRPr lang="en-US" sz="2200" dirty="0"/>
+          </a:p>
+        </p:txBody>
+      </p:sp>
+      <p:sp>
+        <p:nvSpPr>
+          <p:cNvPr id="17" name="Column divider 2"/>
+          <p:cNvSpPr/>
+          <p:nvPr/>
+        </p:nvSpPr>
+        <p:spPr>
+          <a:xfrm>
+            <a:off x="6035040" y="1691640"/>
+            <a:ext cx="0" cy="3566160"/>
+          </a:xfrm>
+          <a:prstGeom prst="line">
+            <a:avLst/>
+          </a:prstGeom>
+          <a:noFill/>
+          <a:ln w="12700">
+            <a:solidFill>
+              <a:srgbClr val="DCD8D3"/>
+            </a:solidFill>
+            <a:prstDash val="solid"/>
+          </a:ln>
+        </p:spPr>
+      </p:sp>
+      <p:sp>
+        <p:nvSpPr>
+          <p:cNvPr id="18" name="Takeaway"/>
+          <p:cNvSpPr txBox="1"/>
+          <p:nvPr/>
+        </p:nvSpPr>
+        <p:spPr>
+          <a:xfrm>
+            <a:off x="320040" y="5504688"/>
+            <a:ext cx="8503920" cy="566928"/>
+          </a:xfrm>
+          <a:prstGeom prst="rect">
+            <a:avLst/>
+          </a:prstGeom>
+          <a:solidFill>
+            <a:srgbClr val="0A1C58"/>
+          </a:solidFill>
+          <a:ln/>
+        </p:spPr>
+        <p:txBody>
+          <a:bodyPr wrap="square" lIns="101600" tIns="25400" rIns="101600" bIns="25400" rtlCol="0" anchor="ctr"/>
+          <a:lstStyle/>
+          <a:p>
+            <a:pPr algn="ctr" indent="0" marL="0">
+              <a:buNone/>
+            </a:pPr>
+            <a:r>
+              <a:rPr lang="en-US" sz="1700" b="1" dirty="0">
+                <a:solidFill>
+                  <a:schemeClr val="bg1"/>
+                </a:solidFill>
+              </a:rPr>
+              <a:t>One engine, three ways to earn: fix it, power with it, and own the planes it flies on.</a:t>
+            </a:r>
+            <a:endParaRPr lang="en-US" sz="1700" dirty="0"/>
+          </a:p>
+        </p:txBody>
+      </p:sp>
+      <p:sp>
+        <p:nvSpPr>
+          <p:cNvPr id="19" name="Source"/>
+          <p:cNvSpPr txBox="1"/>
+          <p:nvPr/>
+        </p:nvSpPr>
+        <p:spPr>
+          <a:xfrm>
+            <a:off x="320040" y="6355080"/>
+            <a:ext cx="7132320" cy="274320"/>
+          </a:xfrm>
+          <a:prstGeom prst="rect">
+            <a:avLst/>
+          </a:prstGeom>
+          <a:noFill/>
+          <a:ln/>
+        </p:spPr>
+        <p:txBody>
+          <a:bodyPr wrap="square" lIns="0" tIns="0" rIns="0" bIns="0" rtlCol="0" anchor="ctr"/>
+          <a:lstStyle/>
+          <a:p>
+            <a:pPr indent="0" marL="0">
+              <a:buNone/>
+            </a:pPr>
+            <a:r>
+              <a:rPr lang="en-US" sz="1100" b="1" dirty="0">
+                <a:solidFill>
+                  <a:srgbClr val="1A1A1A"/>
+                </a:solidFill>
+              </a:rPr>
+              <a:t>Source: </a:t>
+            </a:r>
+            <a:pPr indent="0" marL="0">
+              <a:buNone/>
+            </a:pPr>
+            <a:r>
+              <a:rPr lang="en-US" sz="1100" dirty="0">
+                <a:solidFill>
+                  <a:srgbClr val="1A1A1A"/>
+                </a:solidFill>
+              </a:rPr>
+              <a:t>FTAI filings and earnings calls, GPS model. Illustrations are schematic.</a:t>
+            </a:r>
+            <a:endParaRPr lang="en-US" sz="1100" dirty="0"/>
+          </a:p>
+        </p:txBody>
+      </p:sp>
+      <p:sp>
+        <p:nvSpPr>
+          <p:cNvPr id="25" name="Slide Number Placeholder 0"/>
+          <p:cNvSpPr>
+            <a:spLocks noGrp="1"/>
+          </p:cNvSpPr>
+          <p:nvPr>
+            <p:ph type="sldNum" sz="quarter" idx="4294967295"/>
+          </p:nvPr>
+        </p:nvSpPr>
+        <p:spPr>
+          <a:xfrm>
+            <a:off x="7635240" y="6327648"/>
+            <a:ext cx="411480" cy="274320"/>
+          </a:xfrm>
+          <a:prstGeom prst="rect">
+            <a:avLst/>
+          </a:prstGeom>
+          <a:extLst>
+            <a:ext uri="{C572A759-6A51-4108-AA02-DFA0A04FC94B}">
+              <ma14:wrappingTextBoxFlag xmlns:ma14="http://schemas.microsoft.com/office/mac/drawingml/2011/main" val="0"/>
+            </a:ext>
+          </a:extLst>
+        </p:spPr>
+        <p:txBody>
+          <a:bodyPr/>
+          <a:lstStyle>
+            <a:lvl1pPr>
+              <a:defRPr sz="1100">
+                <a:solidFill>
+                  <a:srgbClr val="1A1A1A"/>
+                </a:solidFill>
+              </a:defRPr>
+            </a:lvl1pPr>
+          </a:lstStyle>
+          <a:p>
+            <a:pPr algn="r"/>
+            <a:fld id="{F7021451-1387-4CA6-816F-3879F97B5CBC}" type="slidenum">
+              <a:rPr b="1" lang="en-US"/>
+              <a:t>6</a:t>
             </a:fld>
             <a:endParaRPr lang="en-US"/>
           </a:p>

--- a/deck/FTAI_Long_Pitch.pptx
+++ b/deck/FTAI_Long_Pitch.pptx
@@ -11,9 +11,10 @@
     <p:sldId id="259" r:id="rId5"/>
     <p:sldId id="260" r:id="rId6"/>
     <p:sldId id="261" r:id="rId7"/>
+    <p:sldId id="262" r:id="rId8"/>
   </p:sldIdLst>
   <p:notesMasterIdLst>
-    <p:notesMasterId r:id="rId8"/>
+    <p:notesMasterId r:id="rId9"/>
   </p:notesMasterIdLst>
   <p:sldSz cx="9144000" cy="6858000"/>
   <p:notesSz cx="6858000" cy="9144000"/>
@@ -112,12 +113,12 @@
   <p:extLst>
     <p:ext uri="{521415D9-36F7-43E2-AB2F-B90AF26B5E84}">
       <p14:sectionLst xmlns:p14="http://schemas.microsoft.com/office/powerpoint/2010/main">
-        <p14:section name="Introduction" id="{6f02f5a6-dc43-1ee2-9535-a9708f533475}">
+        <p14:section name="Introduction" id="{42e1bbcb-b37e-8072-932e-0c106723d09b}">
           <p14:sldIdLst>
             <p14:sldId id="256"/>
           </p14:sldIdLst>
         </p14:section>
-        <p14:section name="The Opportunity" id="{9ae56ad3-5f16-ec52-07f1-37933beff07f}">
+        <p14:section name="The Opportunity" id="{47169bf5-169b-d86d-bd68-53cb05a10231}">
           <p14:sldIdLst>
             <p14:sldId id="257"/>
             <p14:sldId id="258"/>
@@ -125,9 +126,10 @@
             <p14:sldId id="260"/>
           </p14:sldIdLst>
         </p14:section>
-        <p14:section name="Business Overview" id="{77b7aa6d-0535-624e-8eed-9755271bbafa}">
+        <p14:section name="Business Overview" id="{39e846e0-c3ff-ac6b-9933-ef456dd7b2b3}">
           <p14:sldIdLst>
             <p14:sldId id="261"/>
+            <p14:sldId id="262"/>
           </p14:sldIdLst>
         </p14:section>
       </p14:sectionLst>
@@ -2307,6 +2309,94 @@
 </p:notes>
 </file>
 
+<file path=ppt/notesSlides/notesSlide7.xml><?xml version="1.0" encoding="utf-8"?>
+<p:notes xmlns:a="http://schemas.openxmlformats.org/drawingml/2006/main" xmlns:r="http://schemas.openxmlformats.org/officeDocument/2006/relationships" xmlns:p="http://schemas.openxmlformats.org/presentationml/2006/main">
+  <p:cSld>
+    <p:spTree>
+      <p:nvGrpSpPr>
+        <p:cNvPr id="1" name=""/>
+        <p:cNvGrpSpPr/>
+        <p:nvPr/>
+      </p:nvGrpSpPr>
+      <p:grpSpPr>
+        <a:xfrm>
+          <a:off x="0" y="0"/>
+          <a:ext cx="0" cy="0"/>
+          <a:chOff x="0" y="0"/>
+          <a:chExt cx="0" cy="0"/>
+        </a:xfrm>
+      </p:grpSpPr>
+      <p:sp>
+        <p:nvSpPr>
+          <p:cNvPr id="2" name="Slide Image Placeholder 1"/>
+          <p:cNvSpPr>
+            <a:spLocks noGrp="1" noRot="1" noChangeAspect="1"/>
+          </p:cNvSpPr>
+          <p:nvPr>
+            <p:ph type="sldImg"/>
+          </p:nvPr>
+        </p:nvSpPr>
+        <p:spPr/>
+      </p:sp>
+      <p:sp>
+        <p:nvSpPr>
+          <p:cNvPr id="3" name="Notes Placeholder 2"/>
+          <p:cNvSpPr>
+            <a:spLocks noGrp="1"/>
+          </p:cNvSpPr>
+          <p:nvPr>
+            <p:ph type="body" idx="1"/>
+          </p:nvPr>
+        </p:nvSpPr>
+        <p:spPr/>
+        <p:txBody>
+          <a:bodyPr/>
+          <a:lstStyle/>
+          <a:p>
+            <a:r>
+              <a:rPr lang="en-US" dirty="0"/>
+              <a:t>Module Factory example (FTAI): three unserviceable engines worth $2.0M, $2.5M and $2.0M each still hold modules with life left (cycles shown per Fan / Core / LPT). FTAI splits them into nine modules, adds $3.5M of MRO work, and reassembles two serviceable engines ($8.5M at 7k/7k/7k and $6.0M at 4k/4k/4k) plus one run-out core ($1.5M): $16.0M out vs. $10.0M in, $6.0M of value created.</a:t>
+            </a:r>
+            <a:endParaRPr lang="en-US" dirty="0"/>
+          </a:p>
+        </p:txBody>
+      </p:sp>
+      <p:sp>
+        <p:nvSpPr>
+          <p:cNvPr id="4" name="Slide Number Placeholder 3"/>
+          <p:cNvSpPr>
+            <a:spLocks noGrp="1"/>
+          </p:cNvSpPr>
+          <p:nvPr>
+            <p:ph type="sldNum" sz="quarter" idx="10"/>
+          </p:nvPr>
+        </p:nvSpPr>
+        <p:spPr/>
+        <p:txBody>
+          <a:bodyPr/>
+          <a:lstStyle/>
+          <a:p>
+            <a:fld id="{F7021451-1387-4CA6-816F-3879F97B5CBC}" type="slidenum">
+              <a:rPr lang="en-US"/>
+              <a:t>7</a:t>
+            </a:fld>
+            <a:endParaRPr lang="en-US"/>
+          </a:p>
+        </p:txBody>
+      </p:sp>
+    </p:spTree>
+    <p:extLst>
+      <p:ext uri="{BB962C8B-B14F-4D97-AF65-F5344CB8AC3E}">
+        <p14:creationId xmlns:p14="http://schemas.microsoft.com/office/powerpoint/2010/main" val="1024086991"/>
+      </p:ext>
+    </p:extLst>
+  </p:cSld>
+  <p:clrMapOvr>
+    <a:masterClrMapping/>
+  </p:clrMapOvr>
+</p:notes>
+</file>
+
 <file path=ppt/slideLayouts/slideLayout1.xml><?xml version="1.0" encoding="utf-8"?>
 <p:sldLayout xmlns:a="http://schemas.openxmlformats.org/drawingml/2006/main" xmlns:r="http://schemas.openxmlformats.org/officeDocument/2006/relationships" xmlns:p="http://schemas.openxmlformats.org/presentationml/2006/main" preserve="1">
   <p:cSld name="DEFAULT">
@@ -6104,7 +6194,7 @@
                   <a:schemeClr val="tx2"/>
                 </a:solidFill>
               </a:rPr>
-              <a:t>Business Overview</a:t>
+              <a:t>Business Overview (1/2)</a:t>
             </a:r>
             <a:endParaRPr lang="en-US" sz="3200" dirty="0"/>
           </a:p>
@@ -6763,6 +6853,2217 @@
             <a:fld id="{F7021451-1387-4CA6-816F-3879F97B5CBC}" type="slidenum">
               <a:rPr b="1" lang="en-US"/>
               <a:t>6</a:t>
+            </a:fld>
+            <a:endParaRPr lang="en-US"/>
+          </a:p>
+        </p:txBody>
+      </p:sp>
+    </p:spTree>
+  </p:cSld>
+  <p:clrMapOvr>
+    <a:masterClrMapping/>
+  </p:clrMapOvr>
+</p:sld>
+</file>
+
+<file path=ppt/slides/slide7.xml><?xml version="1.0" encoding="utf-8"?>
+<p:sld xmlns:a="http://schemas.openxmlformats.org/drawingml/2006/main" xmlns:r="http://schemas.openxmlformats.org/officeDocument/2006/relationships" xmlns:p="http://schemas.openxmlformats.org/presentationml/2006/main">
+  <p:cSld name="Slide 7">
+    <p:spTree>
+      <p:nvGrpSpPr>
+        <p:cNvPr id="1" name=""/>
+        <p:cNvGrpSpPr/>
+        <p:nvPr/>
+      </p:nvGrpSpPr>
+      <p:grpSpPr>
+        <a:xfrm>
+          <a:off x="0" y="0"/>
+          <a:ext cx="0" cy="0"/>
+          <a:chOff x="0" y="0"/>
+          <a:chExt cx="0" cy="0"/>
+        </a:xfrm>
+      </p:grpSpPr>
+      <p:sp>
+        <p:nvSpPr>
+          <p:cNvPr id="2" name="Text 1"/>
+          <p:cNvSpPr/>
+          <p:nvPr>
+            <p:ph idx="102" type="title" hasCustomPrompt="1"/>
+          </p:nvPr>
+        </p:nvSpPr>
+        <p:spPr>
+          <a:xfrm>
+            <a:off x="320040" y="182880"/>
+            <a:ext cx="7132320" cy="640080"/>
+          </a:xfrm>
+          <a:prstGeom prst="rect">
+            <a:avLst/>
+          </a:prstGeom>
+          <a:noFill/>
+          <a:ln/>
+        </p:spPr>
+        <p:txBody>
+          <a:bodyPr wrap="square" lIns="0" tIns="0" rIns="0" bIns="0" rtlCol="0" anchor="ctr"/>
+          <a:lstStyle/>
+          <a:p>
+            <a:pPr algn="l" indent="0" marL="0">
+              <a:buNone/>
+            </a:pPr>
+            <a:r>
+              <a:rPr lang="en-US" sz="3200" b="1" dirty="0">
+                <a:solidFill>
+                  <a:schemeClr val="tx2"/>
+                </a:solidFill>
+              </a:rPr>
+              <a:t>Business Overview (2/2)</a:t>
+            </a:r>
+            <a:endParaRPr lang="en-US" sz="3200" dirty="0"/>
+          </a:p>
+        </p:txBody>
+      </p:sp>
+      <p:sp>
+        <p:nvSpPr>
+          <p:cNvPr id="3" name="Text 1"/>
+          <p:cNvSpPr/>
+          <p:nvPr>
+            <p:ph idx="103" type="body" hasCustomPrompt="1"/>
+          </p:nvPr>
+        </p:nvSpPr>
+        <p:spPr>
+          <a:xfrm>
+            <a:off x="320040" y="932688"/>
+            <a:ext cx="8503920" cy="566928"/>
+          </a:xfrm>
+          <a:prstGeom prst="rect">
+            <a:avLst/>
+          </a:prstGeom>
+          <a:noFill/>
+          <a:ln/>
+        </p:spPr>
+        <p:txBody>
+          <a:bodyPr wrap="square" lIns="0" tIns="0" rIns="0" bIns="0" rtlCol="0" anchor="t"/>
+          <a:lstStyle/>
+          <a:p>
+            <a:pPr algn="l" indent="0" marL="0">
+              <a:buNone/>
+            </a:pPr>
+            <a:r>
+              <a:rPr lang="en-US" sz="1700" b="1" dirty="0">
+                <a:solidFill>
+                  <a:schemeClr val="tx2"/>
+                </a:solidFill>
+              </a:rPr>
+              <a:t>FTAI swaps worn modules for restored ones from its own pool, so airlines skip the shop queue.</a:t>
+            </a:r>
+            <a:endParaRPr lang="en-US" sz="1700" dirty="0"/>
+          </a:p>
+        </p:txBody>
+      </p:sp>
+      <p:sp>
+        <p:nvSpPr>
+          <p:cNvPr id="4" name="Loop header"/>
+          <p:cNvSpPr txBox="1"/>
+          <p:nvPr/>
+        </p:nvSpPr>
+        <p:spPr>
+          <a:xfrm>
+            <a:off x="320040" y="1554480"/>
+            <a:ext cx="3931920" cy="365760"/>
+          </a:xfrm>
+          <a:prstGeom prst="rect">
+            <a:avLst/>
+          </a:prstGeom>
+          <a:noFill/>
+          <a:ln/>
+        </p:spPr>
+        <p:txBody>
+          <a:bodyPr wrap="square" lIns="0" tIns="0" rIns="0" bIns="0" rtlCol="0" anchor="b"/>
+          <a:lstStyle/>
+          <a:p>
+            <a:pPr algn="ctr" indent="0" marL="0">
+              <a:buNone/>
+            </a:pPr>
+            <a:r>
+              <a:rPr lang="en-US" sz="1600" b="1" dirty="0">
+                <a:solidFill>
+                  <a:srgbClr val="1A1A1A"/>
+                </a:solidFill>
+              </a:rPr>
+              <a:t>How an Exchange Works</a:t>
+            </a:r>
+            <a:endParaRPr lang="en-US" sz="1600" dirty="0"/>
+          </a:p>
+        </p:txBody>
+      </p:sp>
+      <p:sp>
+        <p:nvSpPr>
+          <p:cNvPr id="5" name="Loop header rule"/>
+          <p:cNvSpPr/>
+          <p:nvPr/>
+        </p:nvSpPr>
+        <p:spPr>
+          <a:xfrm>
+            <a:off x="320040" y="1975104"/>
+            <a:ext cx="3931920" cy="0"/>
+          </a:xfrm>
+          <a:prstGeom prst="line">
+            <a:avLst/>
+          </a:prstGeom>
+          <a:noFill/>
+          <a:ln w="12700">
+            <a:solidFill>
+              <a:srgbClr val="1A1A1A"/>
+            </a:solidFill>
+            <a:prstDash val="solid"/>
+          </a:ln>
+        </p:spPr>
+      </p:sp>
+      <p:sp>
+        <p:nvSpPr>
+          <p:cNvPr id="6" name="Loop ring"/>
+          <p:cNvSpPr/>
+          <p:nvPr/>
+        </p:nvSpPr>
+        <p:spPr>
+          <a:xfrm>
+            <a:off x="914400" y="2514600"/>
+            <a:ext cx="2743200" cy="2231136"/>
+          </a:xfrm>
+          <a:prstGeom prst="ellipse">
+            <a:avLst/>
+          </a:prstGeom>
+          <a:ln w="38100">
+            <a:solidFill>
+              <a:srgbClr val="B5AEA9"/>
+            </a:solidFill>
+            <a:prstDash val="solid"/>
+          </a:ln>
+        </p:spPr>
+      </p:sp>
+      <p:sp>
+        <p:nvSpPr>
+          <p:cNvPr id="7" name="Loop arrow 1"/>
+          <p:cNvSpPr/>
+          <p:nvPr/>
+        </p:nvSpPr>
+        <p:spPr>
+          <a:xfrm rot="8100000">
+            <a:off x="3146140" y="2731614"/>
+            <a:ext cx="219456" cy="219456"/>
+          </a:xfrm>
+          <a:prstGeom prst="triangle">
+            <a:avLst/>
+          </a:prstGeom>
+          <a:solidFill>
+            <a:srgbClr val="847C7A"/>
+          </a:solidFill>
+          <a:ln/>
+        </p:spPr>
+      </p:sp>
+      <p:sp>
+        <p:nvSpPr>
+          <p:cNvPr id="8" name="Loop arrow 2"/>
+          <p:cNvSpPr/>
+          <p:nvPr/>
+        </p:nvSpPr>
+        <p:spPr>
+          <a:xfrm rot="13500000">
+            <a:off x="3146140" y="4309266"/>
+            <a:ext cx="219456" cy="219456"/>
+          </a:xfrm>
+          <a:prstGeom prst="triangle">
+            <a:avLst/>
+          </a:prstGeom>
+          <a:solidFill>
+            <a:srgbClr val="847C7A"/>
+          </a:solidFill>
+          <a:ln/>
+        </p:spPr>
+      </p:sp>
+      <p:sp>
+        <p:nvSpPr>
+          <p:cNvPr id="9" name="Loop arrow 3"/>
+          <p:cNvSpPr/>
+          <p:nvPr/>
+        </p:nvSpPr>
+        <p:spPr>
+          <a:xfrm rot="18900000">
+            <a:off x="1206404" y="4309266"/>
+            <a:ext cx="219456" cy="219456"/>
+          </a:xfrm>
+          <a:prstGeom prst="triangle">
+            <a:avLst/>
+          </a:prstGeom>
+          <a:solidFill>
+            <a:srgbClr val="847C7A"/>
+          </a:solidFill>
+          <a:ln/>
+        </p:spPr>
+      </p:sp>
+      <p:sp>
+        <p:nvSpPr>
+          <p:cNvPr id="10" name="Loop arrow 4"/>
+          <p:cNvSpPr/>
+          <p:nvPr/>
+        </p:nvSpPr>
+        <p:spPr>
+          <a:xfrm rot="2700000">
+            <a:off x="1206404" y="2731614"/>
+            <a:ext cx="219456" cy="219456"/>
+          </a:xfrm>
+          <a:prstGeom prst="triangle">
+            <a:avLst/>
+          </a:prstGeom>
+          <a:solidFill>
+            <a:srgbClr val="847C7A"/>
+          </a:solidFill>
+          <a:ln/>
+        </p:spPr>
+      </p:sp>
+      <p:sp>
+        <p:nvSpPr>
+          <p:cNvPr id="11" name="Module pool"/>
+          <p:cNvSpPr/>
+          <p:nvPr/>
+        </p:nvSpPr>
+        <p:spPr>
+          <a:xfrm>
+            <a:off x="1783080" y="3127248"/>
+            <a:ext cx="1005840" cy="1005840"/>
+          </a:xfrm>
+          <a:prstGeom prst="ellipse">
+            <a:avLst/>
+          </a:prstGeom>
+          <a:solidFill>
+            <a:srgbClr val="0A1C58"/>
+          </a:solidFill>
+          <a:ln>
+            <a:solidFill>
+              <a:srgbClr val="0A1C58"/>
+            </a:solidFill>
+          </a:ln>
+        </p:spPr>
+        <p:txBody>
+          <a:bodyPr wrap="square" lIns="0" tIns="0" rIns="0" bIns="0" rtlCol="0" anchor="ctr"/>
+          <a:lstStyle/>
+          <a:p>
+            <a:pPr algn="ctr" indent="0" marL="0">
+              <a:buNone/>
+            </a:pPr>
+            <a:r>
+              <a:rPr lang="en-US" sz="1300" b="1" dirty="0">
+                <a:solidFill>
+                  <a:schemeClr val="bg1"/>
+                </a:solidFill>
+              </a:rPr>
+              <a:t>Module</a:t>
+            </a:r>
+            <a:endParaRPr lang="en-US" sz="1300" dirty="0"/>
+          </a:p>
+          <a:p>
+            <a:pPr algn="ctr" indent="0" marL="0">
+              <a:buNone/>
+            </a:pPr>
+            <a:r>
+              <a:rPr lang="en-US" sz="1300" b="1" dirty="0">
+                <a:solidFill>
+                  <a:schemeClr val="bg1"/>
+                </a:solidFill>
+              </a:rPr>
+              <a:t>pool</a:t>
+            </a:r>
+            <a:endParaRPr lang="en-US" sz="1300" dirty="0"/>
+          </a:p>
+        </p:txBody>
+      </p:sp>
+      <p:sp>
+        <p:nvSpPr>
+          <p:cNvPr id="12" name="Loop step 1"/>
+          <p:cNvSpPr txBox="1"/>
+          <p:nvPr/>
+        </p:nvSpPr>
+        <p:spPr>
+          <a:xfrm>
+            <a:off x="1682496" y="2148840"/>
+            <a:ext cx="1207008" cy="731520"/>
+          </a:xfrm>
+          <a:prstGeom prst="rect">
+            <a:avLst/>
+          </a:prstGeom>
+          <a:solidFill>
+            <a:srgbClr val="DCD8D3"/>
+          </a:solidFill>
+          <a:ln/>
+        </p:spPr>
+        <p:txBody>
+          <a:bodyPr wrap="square" lIns="76200" tIns="25400" rIns="50800" bIns="25400" rtlCol="0" anchor="ctr"/>
+          <a:lstStyle/>
+          <a:p>
+            <a:pPr algn="ctr" indent="0" marL="0">
+              <a:buNone/>
+            </a:pPr>
+            <a:r>
+              <a:rPr lang="en-US" sz="1200" b="1" dirty="0">
+                <a:solidFill>
+                  <a:schemeClr val="tx2"/>
+                </a:solidFill>
+              </a:rPr>
+              <a:t>Engine needs a shop visit</a:t>
+            </a:r>
+            <a:endParaRPr lang="en-US" sz="1200" dirty="0"/>
+          </a:p>
+        </p:txBody>
+      </p:sp>
+      <p:sp>
+        <p:nvSpPr>
+          <p:cNvPr id="13" name="Loop step 1 number"/>
+          <p:cNvSpPr/>
+          <p:nvPr/>
+        </p:nvSpPr>
+        <p:spPr>
+          <a:xfrm>
+            <a:off x="1499616" y="1965960"/>
+            <a:ext cx="310896" cy="310896"/>
+          </a:xfrm>
+          <a:prstGeom prst="ellipse">
+            <a:avLst/>
+          </a:prstGeom>
+          <a:solidFill>
+            <a:srgbClr val="0A1C58"/>
+          </a:solidFill>
+          <a:ln w="19050">
+            <a:solidFill>
+              <a:srgbClr val="FFFFFF"/>
+            </a:solidFill>
+          </a:ln>
+        </p:spPr>
+        <p:txBody>
+          <a:bodyPr wrap="square" lIns="0" tIns="0" rIns="0" bIns="0" rtlCol="0" anchor="ctr"/>
+          <a:lstStyle/>
+          <a:p>
+            <a:pPr algn="ctr" indent="0" marL="0">
+              <a:buNone/>
+            </a:pPr>
+            <a:r>
+              <a:rPr lang="en-US" sz="1200" b="1" dirty="0">
+                <a:solidFill>
+                  <a:schemeClr val="bg1"/>
+                </a:solidFill>
+              </a:rPr>
+              <a:t>1</a:t>
+            </a:r>
+            <a:endParaRPr lang="en-US" sz="1200" dirty="0"/>
+          </a:p>
+        </p:txBody>
+      </p:sp>
+      <p:sp>
+        <p:nvSpPr>
+          <p:cNvPr id="14" name="Loop step 2"/>
+          <p:cNvSpPr txBox="1"/>
+          <p:nvPr/>
+        </p:nvSpPr>
+        <p:spPr>
+          <a:xfrm>
+            <a:off x="3054096" y="3264408"/>
+            <a:ext cx="1207008" cy="731520"/>
+          </a:xfrm>
+          <a:prstGeom prst="rect">
+            <a:avLst/>
+          </a:prstGeom>
+          <a:solidFill>
+            <a:srgbClr val="DCD8D3"/>
+          </a:solidFill>
+          <a:ln/>
+        </p:spPr>
+        <p:txBody>
+          <a:bodyPr wrap="square" lIns="76200" tIns="25400" rIns="50800" bIns="25400" rtlCol="0" anchor="ctr"/>
+          <a:lstStyle/>
+          <a:p>
+            <a:pPr algn="ctr" indent="0" marL="0">
+              <a:buNone/>
+            </a:pPr>
+            <a:r>
+              <a:rPr lang="en-US" sz="1200" b="1" dirty="0">
+                <a:solidFill>
+                  <a:schemeClr val="tx2"/>
+                </a:solidFill>
+              </a:rPr>
+              <a:t>FTAI swaps in a restored module</a:t>
+            </a:r>
+            <a:endParaRPr lang="en-US" sz="1200" dirty="0"/>
+          </a:p>
+        </p:txBody>
+      </p:sp>
+      <p:sp>
+        <p:nvSpPr>
+          <p:cNvPr id="15" name="Loop step 2 number"/>
+          <p:cNvSpPr/>
+          <p:nvPr/>
+        </p:nvSpPr>
+        <p:spPr>
+          <a:xfrm>
+            <a:off x="2871216" y="3081528"/>
+            <a:ext cx="310896" cy="310896"/>
+          </a:xfrm>
+          <a:prstGeom prst="ellipse">
+            <a:avLst/>
+          </a:prstGeom>
+          <a:solidFill>
+            <a:srgbClr val="0A1C58"/>
+          </a:solidFill>
+          <a:ln w="19050">
+            <a:solidFill>
+              <a:srgbClr val="FFFFFF"/>
+            </a:solidFill>
+          </a:ln>
+        </p:spPr>
+        <p:txBody>
+          <a:bodyPr wrap="square" lIns="0" tIns="0" rIns="0" bIns="0" rtlCol="0" anchor="ctr"/>
+          <a:lstStyle/>
+          <a:p>
+            <a:pPr algn="ctr" indent="0" marL="0">
+              <a:buNone/>
+            </a:pPr>
+            <a:r>
+              <a:rPr lang="en-US" sz="1200" b="1" dirty="0">
+                <a:solidFill>
+                  <a:schemeClr val="bg1"/>
+                </a:solidFill>
+              </a:rPr>
+              <a:t>2</a:t>
+            </a:r>
+            <a:endParaRPr lang="en-US" sz="1200" dirty="0"/>
+          </a:p>
+        </p:txBody>
+      </p:sp>
+      <p:sp>
+        <p:nvSpPr>
+          <p:cNvPr id="16" name="Loop step 3"/>
+          <p:cNvSpPr txBox="1"/>
+          <p:nvPr/>
+        </p:nvSpPr>
+        <p:spPr>
+          <a:xfrm>
+            <a:off x="1682496" y="4379976"/>
+            <a:ext cx="1207008" cy="731520"/>
+          </a:xfrm>
+          <a:prstGeom prst="rect">
+            <a:avLst/>
+          </a:prstGeom>
+          <a:solidFill>
+            <a:srgbClr val="DCD8D3"/>
+          </a:solidFill>
+          <a:ln/>
+        </p:spPr>
+        <p:txBody>
+          <a:bodyPr wrap="square" lIns="76200" tIns="25400" rIns="50800" bIns="25400" rtlCol="0" anchor="ctr"/>
+          <a:lstStyle/>
+          <a:p>
+            <a:pPr algn="ctr" indent="0" marL="0">
+              <a:buNone/>
+            </a:pPr>
+            <a:r>
+              <a:rPr lang="en-US" sz="1200" b="1" dirty="0">
+                <a:solidFill>
+                  <a:schemeClr val="tx2"/>
+                </a:solidFill>
+              </a:rPr>
+              <a:t>Engine back in service in days</a:t>
+            </a:r>
+            <a:endParaRPr lang="en-US" sz="1200" dirty="0"/>
+          </a:p>
+        </p:txBody>
+      </p:sp>
+      <p:sp>
+        <p:nvSpPr>
+          <p:cNvPr id="17" name="Loop step 3 number"/>
+          <p:cNvSpPr/>
+          <p:nvPr/>
+        </p:nvSpPr>
+        <p:spPr>
+          <a:xfrm>
+            <a:off x="1499616" y="4197096"/>
+            <a:ext cx="310896" cy="310896"/>
+          </a:xfrm>
+          <a:prstGeom prst="ellipse">
+            <a:avLst/>
+          </a:prstGeom>
+          <a:solidFill>
+            <a:srgbClr val="0A1C58"/>
+          </a:solidFill>
+          <a:ln w="19050">
+            <a:solidFill>
+              <a:srgbClr val="FFFFFF"/>
+            </a:solidFill>
+          </a:ln>
+        </p:spPr>
+        <p:txBody>
+          <a:bodyPr wrap="square" lIns="0" tIns="0" rIns="0" bIns="0" rtlCol="0" anchor="ctr"/>
+          <a:lstStyle/>
+          <a:p>
+            <a:pPr algn="ctr" indent="0" marL="0">
+              <a:buNone/>
+            </a:pPr>
+            <a:r>
+              <a:rPr lang="en-US" sz="1200" b="1" dirty="0">
+                <a:solidFill>
+                  <a:schemeClr val="bg1"/>
+                </a:solidFill>
+              </a:rPr>
+              <a:t>3</a:t>
+            </a:r>
+            <a:endParaRPr lang="en-US" sz="1200" dirty="0"/>
+          </a:p>
+        </p:txBody>
+      </p:sp>
+      <p:sp>
+        <p:nvSpPr>
+          <p:cNvPr id="18" name="Loop step 4"/>
+          <p:cNvSpPr txBox="1"/>
+          <p:nvPr/>
+        </p:nvSpPr>
+        <p:spPr>
+          <a:xfrm>
+            <a:off x="310896" y="3264408"/>
+            <a:ext cx="1207008" cy="731520"/>
+          </a:xfrm>
+          <a:prstGeom prst="rect">
+            <a:avLst/>
+          </a:prstGeom>
+          <a:solidFill>
+            <a:srgbClr val="DCD8D3"/>
+          </a:solidFill>
+          <a:ln/>
+        </p:spPr>
+        <p:txBody>
+          <a:bodyPr wrap="square" lIns="76200" tIns="25400" rIns="50800" bIns="25400" rtlCol="0" anchor="ctr"/>
+          <a:lstStyle/>
+          <a:p>
+            <a:pPr algn="ctr" indent="0" marL="0">
+              <a:buNone/>
+            </a:pPr>
+            <a:r>
+              <a:rPr lang="en-US" sz="1200" b="1" dirty="0">
+                <a:solidFill>
+                  <a:schemeClr val="tx2"/>
+                </a:solidFill>
+              </a:rPr>
+              <a:t>Worn module restored for the pool</a:t>
+            </a:r>
+            <a:endParaRPr lang="en-US" sz="1200" dirty="0"/>
+          </a:p>
+        </p:txBody>
+      </p:sp>
+      <p:sp>
+        <p:nvSpPr>
+          <p:cNvPr id="19" name="Loop step 4 number"/>
+          <p:cNvSpPr/>
+          <p:nvPr/>
+        </p:nvSpPr>
+        <p:spPr>
+          <a:xfrm>
+            <a:off x="128016" y="3081528"/>
+            <a:ext cx="310896" cy="310896"/>
+          </a:xfrm>
+          <a:prstGeom prst="ellipse">
+            <a:avLst/>
+          </a:prstGeom>
+          <a:solidFill>
+            <a:srgbClr val="0A1C58"/>
+          </a:solidFill>
+          <a:ln w="19050">
+            <a:solidFill>
+              <a:srgbClr val="FFFFFF"/>
+            </a:solidFill>
+          </a:ln>
+        </p:spPr>
+        <p:txBody>
+          <a:bodyPr wrap="square" lIns="0" tIns="0" rIns="0" bIns="0" rtlCol="0" anchor="ctr"/>
+          <a:lstStyle/>
+          <a:p>
+            <a:pPr algn="ctr" indent="0" marL="0">
+              <a:buNone/>
+            </a:pPr>
+            <a:r>
+              <a:rPr lang="en-US" sz="1200" b="1" dirty="0">
+                <a:solidFill>
+                  <a:schemeClr val="bg1"/>
+                </a:solidFill>
+              </a:rPr>
+              <a:t>4</a:t>
+            </a:r>
+            <a:endParaRPr lang="en-US" sz="1200" dirty="0"/>
+          </a:p>
+        </p:txBody>
+      </p:sp>
+      <p:sp>
+        <p:nvSpPr>
+          <p:cNvPr id="20" name="Factory header"/>
+          <p:cNvSpPr txBox="1"/>
+          <p:nvPr/>
+        </p:nvSpPr>
+        <p:spPr>
+          <a:xfrm>
+            <a:off x="4526280" y="1554480"/>
+            <a:ext cx="4297680" cy="365760"/>
+          </a:xfrm>
+          <a:prstGeom prst="rect">
+            <a:avLst/>
+          </a:prstGeom>
+          <a:noFill/>
+          <a:ln/>
+        </p:spPr>
+        <p:txBody>
+          <a:bodyPr wrap="square" lIns="0" tIns="0" rIns="0" bIns="0" rtlCol="0" anchor="b"/>
+          <a:lstStyle/>
+          <a:p>
+            <a:pPr algn="ctr" indent="0" marL="0">
+              <a:buNone/>
+            </a:pPr>
+            <a:r>
+              <a:rPr lang="en-US" sz="1600" b="1" dirty="0">
+                <a:solidFill>
+                  <a:srgbClr val="1A1A1A"/>
+                </a:solidFill>
+              </a:rPr>
+              <a:t>Why It Pays: The Module Factory</a:t>
+            </a:r>
+            <a:endParaRPr lang="en-US" sz="1600" dirty="0"/>
+          </a:p>
+        </p:txBody>
+      </p:sp>
+      <p:sp>
+        <p:nvSpPr>
+          <p:cNvPr id="21" name="Factory header rule"/>
+          <p:cNvSpPr/>
+          <p:nvPr/>
+        </p:nvSpPr>
+        <p:spPr>
+          <a:xfrm>
+            <a:off x="4526280" y="1975104"/>
+            <a:ext cx="4297680" cy="0"/>
+          </a:xfrm>
+          <a:prstGeom prst="line">
+            <a:avLst/>
+          </a:prstGeom>
+          <a:noFill/>
+          <a:ln w="12700">
+            <a:solidFill>
+              <a:srgbClr val="1A1A1A"/>
+            </a:solidFill>
+            <a:prstDash val="solid"/>
+          </a:ln>
+        </p:spPr>
+      </p:sp>
+      <p:sp>
+        <p:nvSpPr>
+          <p:cNvPr id="22" name="Before label"/>
+          <p:cNvSpPr txBox="1"/>
+          <p:nvPr/>
+        </p:nvSpPr>
+        <p:spPr>
+          <a:xfrm>
+            <a:off x="4526280" y="2011680"/>
+            <a:ext cx="1901952" cy="274320"/>
+          </a:xfrm>
+          <a:prstGeom prst="rect">
+            <a:avLst/>
+          </a:prstGeom>
+          <a:noFill/>
+          <a:ln/>
+        </p:spPr>
+        <p:txBody>
+          <a:bodyPr wrap="square" lIns="0" tIns="0" rIns="0" bIns="0" rtlCol="0" anchor="ctr"/>
+          <a:lstStyle/>
+          <a:p>
+            <a:pPr algn="ctr" indent="0" marL="0">
+              <a:buNone/>
+            </a:pPr>
+            <a:r>
+              <a:rPr lang="en-US" sz="1300" b="1" i="1" dirty="0">
+                <a:solidFill>
+                  <a:schemeClr val="accent2"/>
+                </a:solidFill>
+              </a:rPr>
+              <a:t>3 worn engines in</a:t>
+            </a:r>
+            <a:endParaRPr lang="en-US" sz="1300" dirty="0"/>
+          </a:p>
+        </p:txBody>
+      </p:sp>
+      <p:sp>
+        <p:nvSpPr>
+          <p:cNvPr id="23" name="Before engine 1 value"/>
+          <p:cNvSpPr txBox="1"/>
+          <p:nvPr/>
+        </p:nvSpPr>
+        <p:spPr>
+          <a:xfrm>
+            <a:off x="4526280" y="2395728"/>
+            <a:ext cx="658368" cy="365760"/>
+          </a:xfrm>
+          <a:prstGeom prst="rect">
+            <a:avLst/>
+          </a:prstGeom>
+          <a:noFill/>
+          <a:ln/>
+        </p:spPr>
+        <p:txBody>
+          <a:bodyPr wrap="square" lIns="0" tIns="0" rIns="0" bIns="0" rtlCol="0" anchor="ctr"/>
+          <a:lstStyle/>
+          <a:p>
+            <a:pPr algn="l" indent="0" marL="0">
+              <a:buNone/>
+            </a:pPr>
+            <a:r>
+              <a:rPr lang="en-US" sz="1400" b="1" dirty="0">
+                <a:solidFill>
+                  <a:schemeClr val="tx2"/>
+                </a:solidFill>
+              </a:rPr>
+              <a:t>$2.0M</a:t>
+            </a:r>
+            <a:endParaRPr lang="en-US" sz="1400" dirty="0"/>
+          </a:p>
+        </p:txBody>
+      </p:sp>
+      <p:sp>
+        <p:nvSpPr>
+          <p:cNvPr id="24" name="Before engine 1 module 1"/>
+          <p:cNvSpPr/>
+          <p:nvPr/>
+        </p:nvSpPr>
+        <p:spPr>
+          <a:xfrm>
+            <a:off x="5221224" y="2395728"/>
+            <a:ext cx="365760" cy="365760"/>
+          </a:xfrm>
+          <a:prstGeom prst="rect">
+            <a:avLst/>
+          </a:prstGeom>
+          <a:solidFill>
+            <a:srgbClr val="0A1C58"/>
+          </a:solidFill>
+          <a:ln w="15875">
+            <a:solidFill>
+              <a:srgbClr val="0A1C58"/>
+            </a:solidFill>
+          </a:ln>
+        </p:spPr>
+        <p:txBody>
+          <a:bodyPr wrap="square" lIns="0" tIns="0" rIns="0" bIns="0" rtlCol="0" anchor="ctr"/>
+          <a:lstStyle/>
+          <a:p>
+            <a:pPr algn="ctr" indent="0" marL="0">
+              <a:buNone/>
+            </a:pPr>
+            <a:r>
+              <a:rPr lang="en-US" sz="1100" b="1" dirty="0">
+                <a:solidFill>
+                  <a:srgbClr val="FFFFFF"/>
+                </a:solidFill>
+              </a:rPr>
+              <a:t>7k</a:t>
+            </a:r>
+            <a:endParaRPr lang="en-US" sz="1100" dirty="0"/>
+          </a:p>
+        </p:txBody>
+      </p:sp>
+      <p:sp>
+        <p:nvSpPr>
+          <p:cNvPr id="25" name="Before engine 1 module 2"/>
+          <p:cNvSpPr/>
+          <p:nvPr/>
+        </p:nvSpPr>
+        <p:spPr>
+          <a:xfrm>
+            <a:off x="5641848" y="2395728"/>
+            <a:ext cx="365760" cy="365760"/>
+          </a:xfrm>
+          <a:prstGeom prst="rect">
+            <a:avLst/>
+          </a:prstGeom>
+          <a:solidFill>
+            <a:srgbClr val="FFFFFF"/>
+          </a:solidFill>
+          <a:ln w="15875">
+            <a:solidFill>
+              <a:srgbClr val="B5AEA9"/>
+            </a:solidFill>
+          </a:ln>
+        </p:spPr>
+        <p:txBody>
+          <a:bodyPr wrap="square" lIns="0" tIns="0" rIns="0" bIns="0" rtlCol="0" anchor="ctr"/>
+          <a:lstStyle/>
+          <a:p>
+            <a:pPr algn="ctr" indent="0" marL="0">
+              <a:buNone/>
+            </a:pPr>
+            <a:r>
+              <a:rPr lang="en-US" sz="1100" b="1" dirty="0">
+                <a:solidFill>
+                  <a:srgbClr val="847C7A"/>
+                </a:solidFill>
+              </a:rPr>
+              <a:t>0k</a:t>
+            </a:r>
+            <a:endParaRPr lang="en-US" sz="1100" dirty="0"/>
+          </a:p>
+        </p:txBody>
+      </p:sp>
+      <p:sp>
+        <p:nvSpPr>
+          <p:cNvPr id="26" name="Before engine 1 module 3"/>
+          <p:cNvSpPr/>
+          <p:nvPr/>
+        </p:nvSpPr>
+        <p:spPr>
+          <a:xfrm>
+            <a:off x="6062472" y="2395728"/>
+            <a:ext cx="365760" cy="365760"/>
+          </a:xfrm>
+          <a:prstGeom prst="rect">
+            <a:avLst/>
+          </a:prstGeom>
+          <a:solidFill>
+            <a:srgbClr val="B5AEA9"/>
+          </a:solidFill>
+          <a:ln w="15875">
+            <a:solidFill>
+              <a:srgbClr val="B5AEA9"/>
+            </a:solidFill>
+          </a:ln>
+        </p:spPr>
+        <p:txBody>
+          <a:bodyPr wrap="square" lIns="0" tIns="0" rIns="0" bIns="0" rtlCol="0" anchor="ctr"/>
+          <a:lstStyle/>
+          <a:p>
+            <a:pPr algn="ctr" indent="0" marL="0">
+              <a:buNone/>
+            </a:pPr>
+            <a:r>
+              <a:rPr lang="en-US" sz="1100" b="1" dirty="0">
+                <a:solidFill>
+                  <a:srgbClr val="0A1C58"/>
+                </a:solidFill>
+              </a:rPr>
+              <a:t>4k</a:t>
+            </a:r>
+            <a:endParaRPr lang="en-US" sz="1100" dirty="0"/>
+          </a:p>
+        </p:txBody>
+      </p:sp>
+      <p:sp>
+        <p:nvSpPr>
+          <p:cNvPr id="27" name="Before engine 2 value"/>
+          <p:cNvSpPr txBox="1"/>
+          <p:nvPr/>
+        </p:nvSpPr>
+        <p:spPr>
+          <a:xfrm>
+            <a:off x="4526280" y="3108960"/>
+            <a:ext cx="658368" cy="365760"/>
+          </a:xfrm>
+          <a:prstGeom prst="rect">
+            <a:avLst/>
+          </a:prstGeom>
+          <a:noFill/>
+          <a:ln/>
+        </p:spPr>
+        <p:txBody>
+          <a:bodyPr wrap="square" lIns="0" tIns="0" rIns="0" bIns="0" rtlCol="0" anchor="ctr"/>
+          <a:lstStyle/>
+          <a:p>
+            <a:pPr algn="l" indent="0" marL="0">
+              <a:buNone/>
+            </a:pPr>
+            <a:r>
+              <a:rPr lang="en-US" sz="1400" b="1" dirty="0">
+                <a:solidFill>
+                  <a:schemeClr val="tx2"/>
+                </a:solidFill>
+              </a:rPr>
+              <a:t>$2.5M</a:t>
+            </a:r>
+            <a:endParaRPr lang="en-US" sz="1400" dirty="0"/>
+          </a:p>
+        </p:txBody>
+      </p:sp>
+      <p:sp>
+        <p:nvSpPr>
+          <p:cNvPr id="28" name="Before engine 2 module 1"/>
+          <p:cNvSpPr/>
+          <p:nvPr/>
+        </p:nvSpPr>
+        <p:spPr>
+          <a:xfrm>
+            <a:off x="5221224" y="3108960"/>
+            <a:ext cx="365760" cy="365760"/>
+          </a:xfrm>
+          <a:prstGeom prst="rect">
+            <a:avLst/>
+          </a:prstGeom>
+          <a:solidFill>
+            <a:srgbClr val="B5AEA9"/>
+          </a:solidFill>
+          <a:ln w="15875">
+            <a:solidFill>
+              <a:srgbClr val="B5AEA9"/>
+            </a:solidFill>
+          </a:ln>
+        </p:spPr>
+        <p:txBody>
+          <a:bodyPr wrap="square" lIns="0" tIns="0" rIns="0" bIns="0" rtlCol="0" anchor="ctr"/>
+          <a:lstStyle/>
+          <a:p>
+            <a:pPr algn="ctr" indent="0" marL="0">
+              <a:buNone/>
+            </a:pPr>
+            <a:r>
+              <a:rPr lang="en-US" sz="1100" b="1" dirty="0">
+                <a:solidFill>
+                  <a:srgbClr val="0A1C58"/>
+                </a:solidFill>
+              </a:rPr>
+              <a:t>4k</a:t>
+            </a:r>
+            <a:endParaRPr lang="en-US" sz="1100" dirty="0"/>
+          </a:p>
+        </p:txBody>
+      </p:sp>
+      <p:sp>
+        <p:nvSpPr>
+          <p:cNvPr id="29" name="Before engine 2 module 2"/>
+          <p:cNvSpPr/>
+          <p:nvPr/>
+        </p:nvSpPr>
+        <p:spPr>
+          <a:xfrm>
+            <a:off x="5641848" y="3108960"/>
+            <a:ext cx="365760" cy="365760"/>
+          </a:xfrm>
+          <a:prstGeom prst="rect">
+            <a:avLst/>
+          </a:prstGeom>
+          <a:solidFill>
+            <a:srgbClr val="0A1C58"/>
+          </a:solidFill>
+          <a:ln w="15875">
+            <a:solidFill>
+              <a:srgbClr val="0A1C58"/>
+            </a:solidFill>
+          </a:ln>
+        </p:spPr>
+        <p:txBody>
+          <a:bodyPr wrap="square" lIns="0" tIns="0" rIns="0" bIns="0" rtlCol="0" anchor="ctr"/>
+          <a:lstStyle/>
+          <a:p>
+            <a:pPr algn="ctr" indent="0" marL="0">
+              <a:buNone/>
+            </a:pPr>
+            <a:r>
+              <a:rPr lang="en-US" sz="1100" b="1" dirty="0">
+                <a:solidFill>
+                  <a:srgbClr val="FFFFFF"/>
+                </a:solidFill>
+              </a:rPr>
+              <a:t>7k</a:t>
+            </a:r>
+            <a:endParaRPr lang="en-US" sz="1100" dirty="0"/>
+          </a:p>
+        </p:txBody>
+      </p:sp>
+      <p:sp>
+        <p:nvSpPr>
+          <p:cNvPr id="30" name="Before engine 2 module 3"/>
+          <p:cNvSpPr/>
+          <p:nvPr/>
+        </p:nvSpPr>
+        <p:spPr>
+          <a:xfrm>
+            <a:off x="6062472" y="3108960"/>
+            <a:ext cx="365760" cy="365760"/>
+          </a:xfrm>
+          <a:prstGeom prst="rect">
+            <a:avLst/>
+          </a:prstGeom>
+          <a:solidFill>
+            <a:srgbClr val="FFFFFF"/>
+          </a:solidFill>
+          <a:ln w="15875">
+            <a:solidFill>
+              <a:srgbClr val="B5AEA9"/>
+            </a:solidFill>
+          </a:ln>
+        </p:spPr>
+        <p:txBody>
+          <a:bodyPr wrap="square" lIns="0" tIns="0" rIns="0" bIns="0" rtlCol="0" anchor="ctr"/>
+          <a:lstStyle/>
+          <a:p>
+            <a:pPr algn="ctr" indent="0" marL="0">
+              <a:buNone/>
+            </a:pPr>
+            <a:r>
+              <a:rPr lang="en-US" sz="1100" b="1" dirty="0">
+                <a:solidFill>
+                  <a:srgbClr val="847C7A"/>
+                </a:solidFill>
+              </a:rPr>
+              <a:t>0k</a:t>
+            </a:r>
+            <a:endParaRPr lang="en-US" sz="1100" dirty="0"/>
+          </a:p>
+        </p:txBody>
+      </p:sp>
+      <p:sp>
+        <p:nvSpPr>
+          <p:cNvPr id="31" name="Before engine 3 value"/>
+          <p:cNvSpPr txBox="1"/>
+          <p:nvPr/>
+        </p:nvSpPr>
+        <p:spPr>
+          <a:xfrm>
+            <a:off x="4526280" y="3822192"/>
+            <a:ext cx="658368" cy="365760"/>
+          </a:xfrm>
+          <a:prstGeom prst="rect">
+            <a:avLst/>
+          </a:prstGeom>
+          <a:noFill/>
+          <a:ln/>
+        </p:spPr>
+        <p:txBody>
+          <a:bodyPr wrap="square" lIns="0" tIns="0" rIns="0" bIns="0" rtlCol="0" anchor="ctr"/>
+          <a:lstStyle/>
+          <a:p>
+            <a:pPr algn="l" indent="0" marL="0">
+              <a:buNone/>
+            </a:pPr>
+            <a:r>
+              <a:rPr lang="en-US" sz="1400" b="1" dirty="0">
+                <a:solidFill>
+                  <a:schemeClr val="tx2"/>
+                </a:solidFill>
+              </a:rPr>
+              <a:t>$2.0M</a:t>
+            </a:r>
+            <a:endParaRPr lang="en-US" sz="1400" dirty="0"/>
+          </a:p>
+        </p:txBody>
+      </p:sp>
+      <p:sp>
+        <p:nvSpPr>
+          <p:cNvPr id="32" name="Before engine 3 module 1"/>
+          <p:cNvSpPr/>
+          <p:nvPr/>
+        </p:nvSpPr>
+        <p:spPr>
+          <a:xfrm>
+            <a:off x="5221224" y="3822192"/>
+            <a:ext cx="365760" cy="365760"/>
+          </a:xfrm>
+          <a:prstGeom prst="rect">
+            <a:avLst/>
+          </a:prstGeom>
+          <a:solidFill>
+            <a:srgbClr val="FFFFFF"/>
+          </a:solidFill>
+          <a:ln w="15875">
+            <a:solidFill>
+              <a:srgbClr val="B5AEA9"/>
+            </a:solidFill>
+          </a:ln>
+        </p:spPr>
+        <p:txBody>
+          <a:bodyPr wrap="square" lIns="0" tIns="0" rIns="0" bIns="0" rtlCol="0" anchor="ctr"/>
+          <a:lstStyle/>
+          <a:p>
+            <a:pPr algn="ctr" indent="0" marL="0">
+              <a:buNone/>
+            </a:pPr>
+            <a:r>
+              <a:rPr lang="en-US" sz="1100" b="1" dirty="0">
+                <a:solidFill>
+                  <a:srgbClr val="847C7A"/>
+                </a:solidFill>
+              </a:rPr>
+              <a:t>0k</a:t>
+            </a:r>
+            <a:endParaRPr lang="en-US" sz="1100" dirty="0"/>
+          </a:p>
+        </p:txBody>
+      </p:sp>
+      <p:sp>
+        <p:nvSpPr>
+          <p:cNvPr id="33" name="Before engine 3 module 2"/>
+          <p:cNvSpPr/>
+          <p:nvPr/>
+        </p:nvSpPr>
+        <p:spPr>
+          <a:xfrm>
+            <a:off x="5641848" y="3822192"/>
+            <a:ext cx="365760" cy="365760"/>
+          </a:xfrm>
+          <a:prstGeom prst="rect">
+            <a:avLst/>
+          </a:prstGeom>
+          <a:solidFill>
+            <a:srgbClr val="B5AEA9"/>
+          </a:solidFill>
+          <a:ln w="15875">
+            <a:solidFill>
+              <a:srgbClr val="B5AEA9"/>
+            </a:solidFill>
+          </a:ln>
+        </p:spPr>
+        <p:txBody>
+          <a:bodyPr wrap="square" lIns="0" tIns="0" rIns="0" bIns="0" rtlCol="0" anchor="ctr"/>
+          <a:lstStyle/>
+          <a:p>
+            <a:pPr algn="ctr" indent="0" marL="0">
+              <a:buNone/>
+            </a:pPr>
+            <a:r>
+              <a:rPr lang="en-US" sz="1100" b="1" dirty="0">
+                <a:solidFill>
+                  <a:srgbClr val="0A1C58"/>
+                </a:solidFill>
+              </a:rPr>
+              <a:t>4k</a:t>
+            </a:r>
+            <a:endParaRPr lang="en-US" sz="1100" dirty="0"/>
+          </a:p>
+        </p:txBody>
+      </p:sp>
+      <p:sp>
+        <p:nvSpPr>
+          <p:cNvPr id="34" name="Before engine 3 module 3"/>
+          <p:cNvSpPr/>
+          <p:nvPr/>
+        </p:nvSpPr>
+        <p:spPr>
+          <a:xfrm>
+            <a:off x="6062472" y="3822192"/>
+            <a:ext cx="365760" cy="365760"/>
+          </a:xfrm>
+          <a:prstGeom prst="rect">
+            <a:avLst/>
+          </a:prstGeom>
+          <a:solidFill>
+            <a:srgbClr val="0A1C58"/>
+          </a:solidFill>
+          <a:ln w="15875">
+            <a:solidFill>
+              <a:srgbClr val="0A1C58"/>
+            </a:solidFill>
+          </a:ln>
+        </p:spPr>
+        <p:txBody>
+          <a:bodyPr wrap="square" lIns="0" tIns="0" rIns="0" bIns="0" rtlCol="0" anchor="ctr"/>
+          <a:lstStyle/>
+          <a:p>
+            <a:pPr algn="ctr" indent="0" marL="0">
+              <a:buNone/>
+            </a:pPr>
+            <a:r>
+              <a:rPr lang="en-US" sz="1100" b="1" dirty="0">
+                <a:solidFill>
+                  <a:srgbClr val="FFFFFF"/>
+                </a:solidFill>
+              </a:rPr>
+              <a:t>7k</a:t>
+            </a:r>
+            <a:endParaRPr lang="en-US" sz="1100" dirty="0"/>
+          </a:p>
+        </p:txBody>
+      </p:sp>
+      <p:sp>
+        <p:nvSpPr>
+          <p:cNvPr id="35" name="Before Fan caption"/>
+          <p:cNvSpPr txBox="1"/>
+          <p:nvPr/>
+        </p:nvSpPr>
+        <p:spPr>
+          <a:xfrm>
+            <a:off x="5175504" y="4242816"/>
+            <a:ext cx="457200" cy="228600"/>
+          </a:xfrm>
+          <a:prstGeom prst="rect">
+            <a:avLst/>
+          </a:prstGeom>
+          <a:noFill/>
+          <a:ln/>
+        </p:spPr>
+        <p:txBody>
+          <a:bodyPr wrap="square" lIns="0" tIns="0" rIns="0" bIns="0" rtlCol="0" anchor="ctr"/>
+          <a:lstStyle/>
+          <a:p>
+            <a:pPr algn="ctr" indent="0" marL="0">
+              <a:buNone/>
+            </a:pPr>
+            <a:r>
+              <a:rPr lang="en-US" sz="1000" dirty="0">
+                <a:solidFill>
+                  <a:schemeClr val="accent2"/>
+                </a:solidFill>
+              </a:rPr>
+              <a:t>Fan</a:t>
+            </a:r>
+            <a:endParaRPr lang="en-US" sz="1000" dirty="0"/>
+          </a:p>
+        </p:txBody>
+      </p:sp>
+      <p:sp>
+        <p:nvSpPr>
+          <p:cNvPr id="36" name="Before Core caption"/>
+          <p:cNvSpPr txBox="1"/>
+          <p:nvPr/>
+        </p:nvSpPr>
+        <p:spPr>
+          <a:xfrm>
+            <a:off x="5596128" y="4242816"/>
+            <a:ext cx="457200" cy="228600"/>
+          </a:xfrm>
+          <a:prstGeom prst="rect">
+            <a:avLst/>
+          </a:prstGeom>
+          <a:noFill/>
+          <a:ln/>
+        </p:spPr>
+        <p:txBody>
+          <a:bodyPr wrap="square" lIns="0" tIns="0" rIns="0" bIns="0" rtlCol="0" anchor="ctr"/>
+          <a:lstStyle/>
+          <a:p>
+            <a:pPr algn="ctr" indent="0" marL="0">
+              <a:buNone/>
+            </a:pPr>
+            <a:r>
+              <a:rPr lang="en-US" sz="1000" dirty="0">
+                <a:solidFill>
+                  <a:schemeClr val="accent2"/>
+                </a:solidFill>
+              </a:rPr>
+              <a:t>Core</a:t>
+            </a:r>
+            <a:endParaRPr lang="en-US" sz="1000" dirty="0"/>
+          </a:p>
+        </p:txBody>
+      </p:sp>
+      <p:sp>
+        <p:nvSpPr>
+          <p:cNvPr id="37" name="Before LPT caption"/>
+          <p:cNvSpPr txBox="1"/>
+          <p:nvPr/>
+        </p:nvSpPr>
+        <p:spPr>
+          <a:xfrm>
+            <a:off x="6016752" y="4242816"/>
+            <a:ext cx="457200" cy="228600"/>
+          </a:xfrm>
+          <a:prstGeom prst="rect">
+            <a:avLst/>
+          </a:prstGeom>
+          <a:noFill/>
+          <a:ln/>
+        </p:spPr>
+        <p:txBody>
+          <a:bodyPr wrap="square" lIns="0" tIns="0" rIns="0" bIns="0" rtlCol="0" anchor="ctr"/>
+          <a:lstStyle/>
+          <a:p>
+            <a:pPr algn="ctr" indent="0" marL="0">
+              <a:buNone/>
+            </a:pPr>
+            <a:r>
+              <a:rPr lang="en-US" sz="1000" dirty="0">
+                <a:solidFill>
+                  <a:schemeClr val="accent2"/>
+                </a:solidFill>
+              </a:rPr>
+              <a:t>LPT</a:t>
+            </a:r>
+            <a:endParaRPr lang="en-US" sz="1000" dirty="0"/>
+          </a:p>
+        </p:txBody>
+      </p:sp>
+      <p:sp>
+        <p:nvSpPr>
+          <p:cNvPr id="38" name="After label"/>
+          <p:cNvSpPr txBox="1"/>
+          <p:nvPr/>
+        </p:nvSpPr>
+        <p:spPr>
+          <a:xfrm>
+            <a:off x="6922008" y="2011680"/>
+            <a:ext cx="1901952" cy="274320"/>
+          </a:xfrm>
+          <a:prstGeom prst="rect">
+            <a:avLst/>
+          </a:prstGeom>
+          <a:noFill/>
+          <a:ln/>
+        </p:spPr>
+        <p:txBody>
+          <a:bodyPr wrap="square" lIns="0" tIns="0" rIns="0" bIns="0" rtlCol="0" anchor="ctr"/>
+          <a:lstStyle/>
+          <a:p>
+            <a:pPr algn="ctr" indent="0" marL="0">
+              <a:buNone/>
+            </a:pPr>
+            <a:r>
+              <a:rPr lang="en-US" sz="1300" b="1" i="1" dirty="0">
+                <a:solidFill>
+                  <a:schemeClr val="accent2"/>
+                </a:solidFill>
+              </a:rPr>
+              <a:t>Engines out</a:t>
+            </a:r>
+            <a:endParaRPr lang="en-US" sz="1300" dirty="0"/>
+          </a:p>
+        </p:txBody>
+      </p:sp>
+      <p:sp>
+        <p:nvSpPr>
+          <p:cNvPr id="39" name="After engine 1 value"/>
+          <p:cNvSpPr txBox="1"/>
+          <p:nvPr/>
+        </p:nvSpPr>
+        <p:spPr>
+          <a:xfrm>
+            <a:off x="6922008" y="2395728"/>
+            <a:ext cx="658368" cy="365760"/>
+          </a:xfrm>
+          <a:prstGeom prst="rect">
+            <a:avLst/>
+          </a:prstGeom>
+          <a:noFill/>
+          <a:ln/>
+        </p:spPr>
+        <p:txBody>
+          <a:bodyPr wrap="square" lIns="0" tIns="0" rIns="0" bIns="0" rtlCol="0" anchor="ctr"/>
+          <a:lstStyle/>
+          <a:p>
+            <a:pPr algn="l" indent="0" marL="0">
+              <a:buNone/>
+            </a:pPr>
+            <a:r>
+              <a:rPr lang="en-US" sz="1400" b="1" dirty="0">
+                <a:solidFill>
+                  <a:schemeClr val="tx2"/>
+                </a:solidFill>
+              </a:rPr>
+              <a:t>$8.5M</a:t>
+            </a:r>
+            <a:endParaRPr lang="en-US" sz="1400" dirty="0"/>
+          </a:p>
+        </p:txBody>
+      </p:sp>
+      <p:sp>
+        <p:nvSpPr>
+          <p:cNvPr id="40" name="After engine 1 module 1"/>
+          <p:cNvSpPr/>
+          <p:nvPr/>
+        </p:nvSpPr>
+        <p:spPr>
+          <a:xfrm>
+            <a:off x="7616952" y="2395728"/>
+            <a:ext cx="365760" cy="365760"/>
+          </a:xfrm>
+          <a:prstGeom prst="rect">
+            <a:avLst/>
+          </a:prstGeom>
+          <a:solidFill>
+            <a:srgbClr val="0A1C58"/>
+          </a:solidFill>
+          <a:ln w="15875">
+            <a:solidFill>
+              <a:srgbClr val="0A1C58"/>
+            </a:solidFill>
+          </a:ln>
+        </p:spPr>
+        <p:txBody>
+          <a:bodyPr wrap="square" lIns="0" tIns="0" rIns="0" bIns="0" rtlCol="0" anchor="ctr"/>
+          <a:lstStyle/>
+          <a:p>
+            <a:pPr algn="ctr" indent="0" marL="0">
+              <a:buNone/>
+            </a:pPr>
+            <a:r>
+              <a:rPr lang="en-US" sz="1100" b="1" dirty="0">
+                <a:solidFill>
+                  <a:srgbClr val="FFFFFF"/>
+                </a:solidFill>
+              </a:rPr>
+              <a:t>7k</a:t>
+            </a:r>
+            <a:endParaRPr lang="en-US" sz="1100" dirty="0"/>
+          </a:p>
+        </p:txBody>
+      </p:sp>
+      <p:sp>
+        <p:nvSpPr>
+          <p:cNvPr id="41" name="After engine 1 module 2"/>
+          <p:cNvSpPr/>
+          <p:nvPr/>
+        </p:nvSpPr>
+        <p:spPr>
+          <a:xfrm>
+            <a:off x="8037576" y="2395728"/>
+            <a:ext cx="365760" cy="365760"/>
+          </a:xfrm>
+          <a:prstGeom prst="rect">
+            <a:avLst/>
+          </a:prstGeom>
+          <a:solidFill>
+            <a:srgbClr val="0A1C58"/>
+          </a:solidFill>
+          <a:ln w="15875">
+            <a:solidFill>
+              <a:srgbClr val="0A1C58"/>
+            </a:solidFill>
+          </a:ln>
+        </p:spPr>
+        <p:txBody>
+          <a:bodyPr wrap="square" lIns="0" tIns="0" rIns="0" bIns="0" rtlCol="0" anchor="ctr"/>
+          <a:lstStyle/>
+          <a:p>
+            <a:pPr algn="ctr" indent="0" marL="0">
+              <a:buNone/>
+            </a:pPr>
+            <a:r>
+              <a:rPr lang="en-US" sz="1100" b="1" dirty="0">
+                <a:solidFill>
+                  <a:srgbClr val="FFFFFF"/>
+                </a:solidFill>
+              </a:rPr>
+              <a:t>7k</a:t>
+            </a:r>
+            <a:endParaRPr lang="en-US" sz="1100" dirty="0"/>
+          </a:p>
+        </p:txBody>
+      </p:sp>
+      <p:sp>
+        <p:nvSpPr>
+          <p:cNvPr id="42" name="After engine 1 module 3"/>
+          <p:cNvSpPr/>
+          <p:nvPr/>
+        </p:nvSpPr>
+        <p:spPr>
+          <a:xfrm>
+            <a:off x="8458200" y="2395728"/>
+            <a:ext cx="365760" cy="365760"/>
+          </a:xfrm>
+          <a:prstGeom prst="rect">
+            <a:avLst/>
+          </a:prstGeom>
+          <a:solidFill>
+            <a:srgbClr val="0A1C58"/>
+          </a:solidFill>
+          <a:ln w="15875">
+            <a:solidFill>
+              <a:srgbClr val="0A1C58"/>
+            </a:solidFill>
+          </a:ln>
+        </p:spPr>
+        <p:txBody>
+          <a:bodyPr wrap="square" lIns="0" tIns="0" rIns="0" bIns="0" rtlCol="0" anchor="ctr"/>
+          <a:lstStyle/>
+          <a:p>
+            <a:pPr algn="ctr" indent="0" marL="0">
+              <a:buNone/>
+            </a:pPr>
+            <a:r>
+              <a:rPr lang="en-US" sz="1100" b="1" dirty="0">
+                <a:solidFill>
+                  <a:srgbClr val="FFFFFF"/>
+                </a:solidFill>
+              </a:rPr>
+              <a:t>7k</a:t>
+            </a:r>
+            <a:endParaRPr lang="en-US" sz="1100" dirty="0"/>
+          </a:p>
+        </p:txBody>
+      </p:sp>
+      <p:sp>
+        <p:nvSpPr>
+          <p:cNvPr id="43" name="After engine 2 value"/>
+          <p:cNvSpPr txBox="1"/>
+          <p:nvPr/>
+        </p:nvSpPr>
+        <p:spPr>
+          <a:xfrm>
+            <a:off x="6922008" y="3108960"/>
+            <a:ext cx="658368" cy="365760"/>
+          </a:xfrm>
+          <a:prstGeom prst="rect">
+            <a:avLst/>
+          </a:prstGeom>
+          <a:noFill/>
+          <a:ln/>
+        </p:spPr>
+        <p:txBody>
+          <a:bodyPr wrap="square" lIns="0" tIns="0" rIns="0" bIns="0" rtlCol="0" anchor="ctr"/>
+          <a:lstStyle/>
+          <a:p>
+            <a:pPr algn="l" indent="0" marL="0">
+              <a:buNone/>
+            </a:pPr>
+            <a:r>
+              <a:rPr lang="en-US" sz="1400" b="1" dirty="0">
+                <a:solidFill>
+                  <a:schemeClr val="tx2"/>
+                </a:solidFill>
+              </a:rPr>
+              <a:t>$6.0M</a:t>
+            </a:r>
+            <a:endParaRPr lang="en-US" sz="1400" dirty="0"/>
+          </a:p>
+        </p:txBody>
+      </p:sp>
+      <p:sp>
+        <p:nvSpPr>
+          <p:cNvPr id="44" name="After engine 2 module 1"/>
+          <p:cNvSpPr/>
+          <p:nvPr/>
+        </p:nvSpPr>
+        <p:spPr>
+          <a:xfrm>
+            <a:off x="7616952" y="3108960"/>
+            <a:ext cx="365760" cy="365760"/>
+          </a:xfrm>
+          <a:prstGeom prst="rect">
+            <a:avLst/>
+          </a:prstGeom>
+          <a:solidFill>
+            <a:srgbClr val="B5AEA9"/>
+          </a:solidFill>
+          <a:ln w="15875">
+            <a:solidFill>
+              <a:srgbClr val="B5AEA9"/>
+            </a:solidFill>
+          </a:ln>
+        </p:spPr>
+        <p:txBody>
+          <a:bodyPr wrap="square" lIns="0" tIns="0" rIns="0" bIns="0" rtlCol="0" anchor="ctr"/>
+          <a:lstStyle/>
+          <a:p>
+            <a:pPr algn="ctr" indent="0" marL="0">
+              <a:buNone/>
+            </a:pPr>
+            <a:r>
+              <a:rPr lang="en-US" sz="1100" b="1" dirty="0">
+                <a:solidFill>
+                  <a:srgbClr val="0A1C58"/>
+                </a:solidFill>
+              </a:rPr>
+              <a:t>4k</a:t>
+            </a:r>
+            <a:endParaRPr lang="en-US" sz="1100" dirty="0"/>
+          </a:p>
+        </p:txBody>
+      </p:sp>
+      <p:sp>
+        <p:nvSpPr>
+          <p:cNvPr id="45" name="After engine 2 module 2"/>
+          <p:cNvSpPr/>
+          <p:nvPr/>
+        </p:nvSpPr>
+        <p:spPr>
+          <a:xfrm>
+            <a:off x="8037576" y="3108960"/>
+            <a:ext cx="365760" cy="365760"/>
+          </a:xfrm>
+          <a:prstGeom prst="rect">
+            <a:avLst/>
+          </a:prstGeom>
+          <a:solidFill>
+            <a:srgbClr val="B5AEA9"/>
+          </a:solidFill>
+          <a:ln w="15875">
+            <a:solidFill>
+              <a:srgbClr val="B5AEA9"/>
+            </a:solidFill>
+          </a:ln>
+        </p:spPr>
+        <p:txBody>
+          <a:bodyPr wrap="square" lIns="0" tIns="0" rIns="0" bIns="0" rtlCol="0" anchor="ctr"/>
+          <a:lstStyle/>
+          <a:p>
+            <a:pPr algn="ctr" indent="0" marL="0">
+              <a:buNone/>
+            </a:pPr>
+            <a:r>
+              <a:rPr lang="en-US" sz="1100" b="1" dirty="0">
+                <a:solidFill>
+                  <a:srgbClr val="0A1C58"/>
+                </a:solidFill>
+              </a:rPr>
+              <a:t>4k</a:t>
+            </a:r>
+            <a:endParaRPr lang="en-US" sz="1100" dirty="0"/>
+          </a:p>
+        </p:txBody>
+      </p:sp>
+      <p:sp>
+        <p:nvSpPr>
+          <p:cNvPr id="46" name="After engine 2 module 3"/>
+          <p:cNvSpPr/>
+          <p:nvPr/>
+        </p:nvSpPr>
+        <p:spPr>
+          <a:xfrm>
+            <a:off x="8458200" y="3108960"/>
+            <a:ext cx="365760" cy="365760"/>
+          </a:xfrm>
+          <a:prstGeom prst="rect">
+            <a:avLst/>
+          </a:prstGeom>
+          <a:solidFill>
+            <a:srgbClr val="B5AEA9"/>
+          </a:solidFill>
+          <a:ln w="15875">
+            <a:solidFill>
+              <a:srgbClr val="B5AEA9"/>
+            </a:solidFill>
+          </a:ln>
+        </p:spPr>
+        <p:txBody>
+          <a:bodyPr wrap="square" lIns="0" tIns="0" rIns="0" bIns="0" rtlCol="0" anchor="ctr"/>
+          <a:lstStyle/>
+          <a:p>
+            <a:pPr algn="ctr" indent="0" marL="0">
+              <a:buNone/>
+            </a:pPr>
+            <a:r>
+              <a:rPr lang="en-US" sz="1100" b="1" dirty="0">
+                <a:solidFill>
+                  <a:srgbClr val="0A1C58"/>
+                </a:solidFill>
+              </a:rPr>
+              <a:t>4k</a:t>
+            </a:r>
+            <a:endParaRPr lang="en-US" sz="1100" dirty="0"/>
+          </a:p>
+        </p:txBody>
+      </p:sp>
+      <p:sp>
+        <p:nvSpPr>
+          <p:cNvPr id="47" name="After engine 3 value"/>
+          <p:cNvSpPr txBox="1"/>
+          <p:nvPr/>
+        </p:nvSpPr>
+        <p:spPr>
+          <a:xfrm>
+            <a:off x="6922008" y="3822192"/>
+            <a:ext cx="658368" cy="365760"/>
+          </a:xfrm>
+          <a:prstGeom prst="rect">
+            <a:avLst/>
+          </a:prstGeom>
+          <a:noFill/>
+          <a:ln/>
+        </p:spPr>
+        <p:txBody>
+          <a:bodyPr wrap="square" lIns="0" tIns="0" rIns="0" bIns="0" rtlCol="0" anchor="ctr"/>
+          <a:lstStyle/>
+          <a:p>
+            <a:pPr algn="l" indent="0" marL="0">
+              <a:buNone/>
+            </a:pPr>
+            <a:r>
+              <a:rPr lang="en-US" sz="1400" b="1" dirty="0">
+                <a:solidFill>
+                  <a:schemeClr val="tx2"/>
+                </a:solidFill>
+              </a:rPr>
+              <a:t>$1.5M</a:t>
+            </a:r>
+            <a:endParaRPr lang="en-US" sz="1400" dirty="0"/>
+          </a:p>
+        </p:txBody>
+      </p:sp>
+      <p:sp>
+        <p:nvSpPr>
+          <p:cNvPr id="48" name="After engine 3 module 1"/>
+          <p:cNvSpPr/>
+          <p:nvPr/>
+        </p:nvSpPr>
+        <p:spPr>
+          <a:xfrm>
+            <a:off x="7616952" y="3822192"/>
+            <a:ext cx="365760" cy="365760"/>
+          </a:xfrm>
+          <a:prstGeom prst="rect">
+            <a:avLst/>
+          </a:prstGeom>
+          <a:solidFill>
+            <a:srgbClr val="FFFFFF"/>
+          </a:solidFill>
+          <a:ln w="15875">
+            <a:solidFill>
+              <a:srgbClr val="B5AEA9"/>
+            </a:solidFill>
+          </a:ln>
+        </p:spPr>
+        <p:txBody>
+          <a:bodyPr wrap="square" lIns="0" tIns="0" rIns="0" bIns="0" rtlCol="0" anchor="ctr"/>
+          <a:lstStyle/>
+          <a:p>
+            <a:pPr algn="ctr" indent="0" marL="0">
+              <a:buNone/>
+            </a:pPr>
+            <a:r>
+              <a:rPr lang="en-US" sz="1100" b="1" dirty="0">
+                <a:solidFill>
+                  <a:srgbClr val="847C7A"/>
+                </a:solidFill>
+              </a:rPr>
+              <a:t>0k</a:t>
+            </a:r>
+            <a:endParaRPr lang="en-US" sz="1100" dirty="0"/>
+          </a:p>
+        </p:txBody>
+      </p:sp>
+      <p:sp>
+        <p:nvSpPr>
+          <p:cNvPr id="49" name="After engine 3 module 2"/>
+          <p:cNvSpPr/>
+          <p:nvPr/>
+        </p:nvSpPr>
+        <p:spPr>
+          <a:xfrm>
+            <a:off x="8037576" y="3822192"/>
+            <a:ext cx="365760" cy="365760"/>
+          </a:xfrm>
+          <a:prstGeom prst="rect">
+            <a:avLst/>
+          </a:prstGeom>
+          <a:solidFill>
+            <a:srgbClr val="FFFFFF"/>
+          </a:solidFill>
+          <a:ln w="15875">
+            <a:solidFill>
+              <a:srgbClr val="B5AEA9"/>
+            </a:solidFill>
+          </a:ln>
+        </p:spPr>
+        <p:txBody>
+          <a:bodyPr wrap="square" lIns="0" tIns="0" rIns="0" bIns="0" rtlCol="0" anchor="ctr"/>
+          <a:lstStyle/>
+          <a:p>
+            <a:pPr algn="ctr" indent="0" marL="0">
+              <a:buNone/>
+            </a:pPr>
+            <a:r>
+              <a:rPr lang="en-US" sz="1100" b="1" dirty="0">
+                <a:solidFill>
+                  <a:srgbClr val="847C7A"/>
+                </a:solidFill>
+              </a:rPr>
+              <a:t>0k</a:t>
+            </a:r>
+            <a:endParaRPr lang="en-US" sz="1100" dirty="0"/>
+          </a:p>
+        </p:txBody>
+      </p:sp>
+      <p:sp>
+        <p:nvSpPr>
+          <p:cNvPr id="50" name="After engine 3 module 3"/>
+          <p:cNvSpPr/>
+          <p:nvPr/>
+        </p:nvSpPr>
+        <p:spPr>
+          <a:xfrm>
+            <a:off x="8458200" y="3822192"/>
+            <a:ext cx="365760" cy="365760"/>
+          </a:xfrm>
+          <a:prstGeom prst="rect">
+            <a:avLst/>
+          </a:prstGeom>
+          <a:solidFill>
+            <a:srgbClr val="FFFFFF"/>
+          </a:solidFill>
+          <a:ln w="15875">
+            <a:solidFill>
+              <a:srgbClr val="B5AEA9"/>
+            </a:solidFill>
+          </a:ln>
+        </p:spPr>
+        <p:txBody>
+          <a:bodyPr wrap="square" lIns="0" tIns="0" rIns="0" bIns="0" rtlCol="0" anchor="ctr"/>
+          <a:lstStyle/>
+          <a:p>
+            <a:pPr algn="ctr" indent="0" marL="0">
+              <a:buNone/>
+            </a:pPr>
+            <a:r>
+              <a:rPr lang="en-US" sz="1100" b="1" dirty="0">
+                <a:solidFill>
+                  <a:srgbClr val="847C7A"/>
+                </a:solidFill>
+              </a:rPr>
+              <a:t>0k</a:t>
+            </a:r>
+            <a:endParaRPr lang="en-US" sz="1100" dirty="0"/>
+          </a:p>
+        </p:txBody>
+      </p:sp>
+      <p:sp>
+        <p:nvSpPr>
+          <p:cNvPr id="51" name="After Fan caption"/>
+          <p:cNvSpPr txBox="1"/>
+          <p:nvPr/>
+        </p:nvSpPr>
+        <p:spPr>
+          <a:xfrm>
+            <a:off x="7571232" y="4242816"/>
+            <a:ext cx="457200" cy="228600"/>
+          </a:xfrm>
+          <a:prstGeom prst="rect">
+            <a:avLst/>
+          </a:prstGeom>
+          <a:noFill/>
+          <a:ln/>
+        </p:spPr>
+        <p:txBody>
+          <a:bodyPr wrap="square" lIns="0" tIns="0" rIns="0" bIns="0" rtlCol="0" anchor="ctr"/>
+          <a:lstStyle/>
+          <a:p>
+            <a:pPr algn="ctr" indent="0" marL="0">
+              <a:buNone/>
+            </a:pPr>
+            <a:r>
+              <a:rPr lang="en-US" sz="1000" dirty="0">
+                <a:solidFill>
+                  <a:schemeClr val="accent2"/>
+                </a:solidFill>
+              </a:rPr>
+              <a:t>Fan</a:t>
+            </a:r>
+            <a:endParaRPr lang="en-US" sz="1000" dirty="0"/>
+          </a:p>
+        </p:txBody>
+      </p:sp>
+      <p:sp>
+        <p:nvSpPr>
+          <p:cNvPr id="52" name="After Core caption"/>
+          <p:cNvSpPr txBox="1"/>
+          <p:nvPr/>
+        </p:nvSpPr>
+        <p:spPr>
+          <a:xfrm>
+            <a:off x="7991856" y="4242816"/>
+            <a:ext cx="457200" cy="228600"/>
+          </a:xfrm>
+          <a:prstGeom prst="rect">
+            <a:avLst/>
+          </a:prstGeom>
+          <a:noFill/>
+          <a:ln/>
+        </p:spPr>
+        <p:txBody>
+          <a:bodyPr wrap="square" lIns="0" tIns="0" rIns="0" bIns="0" rtlCol="0" anchor="ctr"/>
+          <a:lstStyle/>
+          <a:p>
+            <a:pPr algn="ctr" indent="0" marL="0">
+              <a:buNone/>
+            </a:pPr>
+            <a:r>
+              <a:rPr lang="en-US" sz="1000" dirty="0">
+                <a:solidFill>
+                  <a:schemeClr val="accent2"/>
+                </a:solidFill>
+              </a:rPr>
+              <a:t>Core</a:t>
+            </a:r>
+            <a:endParaRPr lang="en-US" sz="1000" dirty="0"/>
+          </a:p>
+        </p:txBody>
+      </p:sp>
+      <p:sp>
+        <p:nvSpPr>
+          <p:cNvPr id="53" name="After LPT caption"/>
+          <p:cNvSpPr txBox="1"/>
+          <p:nvPr/>
+        </p:nvSpPr>
+        <p:spPr>
+          <a:xfrm>
+            <a:off x="8412480" y="4242816"/>
+            <a:ext cx="457200" cy="228600"/>
+          </a:xfrm>
+          <a:prstGeom prst="rect">
+            <a:avLst/>
+          </a:prstGeom>
+          <a:noFill/>
+          <a:ln/>
+        </p:spPr>
+        <p:txBody>
+          <a:bodyPr wrap="square" lIns="0" tIns="0" rIns="0" bIns="0" rtlCol="0" anchor="ctr"/>
+          <a:lstStyle/>
+          <a:p>
+            <a:pPr algn="ctr" indent="0" marL="0">
+              <a:buNone/>
+            </a:pPr>
+            <a:r>
+              <a:rPr lang="en-US" sz="1000" dirty="0">
+                <a:solidFill>
+                  <a:schemeClr val="accent2"/>
+                </a:solidFill>
+              </a:rPr>
+              <a:t>LPT</a:t>
+            </a:r>
+            <a:endParaRPr lang="en-US" sz="1000" dirty="0"/>
+          </a:p>
+        </p:txBody>
+      </p:sp>
+      <p:sp>
+        <p:nvSpPr>
+          <p:cNvPr id="54" name="Factory arrow"/>
+          <p:cNvSpPr/>
+          <p:nvPr/>
+        </p:nvSpPr>
+        <p:spPr>
+          <a:xfrm>
+            <a:off x="6492240" y="3108960"/>
+            <a:ext cx="365760" cy="329184"/>
+          </a:xfrm>
+          <a:prstGeom prst="rightArrow">
+            <a:avLst/>
+          </a:prstGeom>
+          <a:solidFill>
+            <a:srgbClr val="847C7A"/>
+          </a:solidFill>
+          <a:ln/>
+        </p:spPr>
+      </p:sp>
+      <p:sp>
+        <p:nvSpPr>
+          <p:cNvPr id="55" name="Before total"/>
+          <p:cNvSpPr txBox="1"/>
+          <p:nvPr/>
+        </p:nvSpPr>
+        <p:spPr>
+          <a:xfrm>
+            <a:off x="4526280" y="4645152"/>
+            <a:ext cx="1901952" cy="658368"/>
+          </a:xfrm>
+          <a:prstGeom prst="rect">
+            <a:avLst/>
+          </a:prstGeom>
+          <a:solidFill>
+            <a:srgbClr val="DCD8D3"/>
+          </a:solidFill>
+          <a:ln/>
+        </p:spPr>
+        <p:txBody>
+          <a:bodyPr wrap="square" lIns="0" tIns="0" rIns="0" bIns="0" rtlCol="0" anchor="ctr"/>
+          <a:lstStyle/>
+          <a:p>
+            <a:pPr algn="ctr" indent="0" marL="0">
+              <a:buNone/>
+            </a:pPr>
+            <a:r>
+              <a:rPr lang="en-US" sz="1800" b="1" dirty="0">
+                <a:solidFill>
+                  <a:schemeClr val="tx2"/>
+                </a:solidFill>
+              </a:rPr>
+              <a:t>$6.5M</a:t>
+            </a:r>
+            <a:endParaRPr lang="en-US" sz="1800" dirty="0"/>
+          </a:p>
+          <a:p>
+            <a:pPr algn="ctr" indent="0" marL="0">
+              <a:buNone/>
+            </a:pPr>
+            <a:r>
+              <a:rPr lang="en-US" sz="1100" dirty="0">
+                <a:solidFill>
+                  <a:schemeClr val="tx2"/>
+                </a:solidFill>
+              </a:rPr>
+              <a:t>engines + $3.5M of work</a:t>
+            </a:r>
+            <a:endParaRPr lang="en-US" sz="1800" dirty="0"/>
+          </a:p>
+        </p:txBody>
+      </p:sp>
+      <p:sp>
+        <p:nvSpPr>
+          <p:cNvPr id="56" name="After total"/>
+          <p:cNvSpPr txBox="1"/>
+          <p:nvPr/>
+        </p:nvSpPr>
+        <p:spPr>
+          <a:xfrm>
+            <a:off x="6922008" y="4645152"/>
+            <a:ext cx="1901952" cy="658368"/>
+          </a:xfrm>
+          <a:prstGeom prst="rect">
+            <a:avLst/>
+          </a:prstGeom>
+          <a:solidFill>
+            <a:srgbClr val="0A1C58"/>
+          </a:solidFill>
+          <a:ln/>
+        </p:spPr>
+        <p:txBody>
+          <a:bodyPr wrap="square" lIns="0" tIns="0" rIns="0" bIns="0" rtlCol="0" anchor="ctr"/>
+          <a:lstStyle/>
+          <a:p>
+            <a:pPr algn="ctr" indent="0" marL="0">
+              <a:buNone/>
+            </a:pPr>
+            <a:r>
+              <a:rPr lang="en-US" sz="1800" b="1" dirty="0">
+                <a:solidFill>
+                  <a:schemeClr val="bg1"/>
+                </a:solidFill>
+              </a:rPr>
+              <a:t>$16.0M</a:t>
+            </a:r>
+            <a:endParaRPr lang="en-US" sz="1800" dirty="0"/>
+          </a:p>
+          <a:p>
+            <a:pPr algn="ctr" indent="0" marL="0">
+              <a:buNone/>
+            </a:pPr>
+            <a:r>
+              <a:rPr lang="en-US" sz="1100" dirty="0">
+                <a:solidFill>
+                  <a:schemeClr val="bg1"/>
+                </a:solidFill>
+              </a:rPr>
+              <a:t>+$6.0M of value created</a:t>
+            </a:r>
+            <a:endParaRPr lang="en-US" sz="1800" dirty="0"/>
+          </a:p>
+        </p:txBody>
+      </p:sp>
+      <p:sp>
+        <p:nvSpPr>
+          <p:cNvPr id="57" name="Takeaway"/>
+          <p:cNvSpPr txBox="1"/>
+          <p:nvPr/>
+        </p:nvSpPr>
+        <p:spPr>
+          <a:xfrm>
+            <a:off x="320040" y="5504688"/>
+            <a:ext cx="8503920" cy="566928"/>
+          </a:xfrm>
+          <a:prstGeom prst="rect">
+            <a:avLst/>
+          </a:prstGeom>
+          <a:solidFill>
+            <a:srgbClr val="0A1C58"/>
+          </a:solidFill>
+          <a:ln/>
+        </p:spPr>
+        <p:txBody>
+          <a:bodyPr wrap="square" lIns="101600" tIns="25400" rIns="101600" bIns="25400" rtlCol="0" anchor="ctr"/>
+          <a:lstStyle/>
+          <a:p>
+            <a:pPr algn="ctr" indent="0" marL="0">
+              <a:buNone/>
+            </a:pPr>
+            <a:r>
+              <a:rPr lang="en-US" sz="1700" b="1" dirty="0">
+                <a:solidFill>
+                  <a:schemeClr val="bg1"/>
+                </a:solidFill>
+              </a:rPr>
+              <a:t>FTAI sells speed to airlines and harvests cycles from engines no one else can use.</a:t>
+            </a:r>
+            <a:endParaRPr lang="en-US" sz="1700" dirty="0"/>
+          </a:p>
+        </p:txBody>
+      </p:sp>
+      <p:sp>
+        <p:nvSpPr>
+          <p:cNvPr id="58" name="Source"/>
+          <p:cNvSpPr txBox="1"/>
+          <p:nvPr/>
+        </p:nvSpPr>
+        <p:spPr>
+          <a:xfrm>
+            <a:off x="320040" y="6355080"/>
+            <a:ext cx="7132320" cy="274320"/>
+          </a:xfrm>
+          <a:prstGeom prst="rect">
+            <a:avLst/>
+          </a:prstGeom>
+          <a:noFill/>
+          <a:ln/>
+        </p:spPr>
+        <p:txBody>
+          <a:bodyPr wrap="square" lIns="0" tIns="0" rIns="0" bIns="0" rtlCol="0" anchor="ctr"/>
+          <a:lstStyle/>
+          <a:p>
+            <a:pPr indent="0" marL="0">
+              <a:buNone/>
+            </a:pPr>
+            <a:r>
+              <a:rPr lang="en-US" sz="1100" b="1" dirty="0">
+                <a:solidFill>
+                  <a:srgbClr val="1A1A1A"/>
+                </a:solidFill>
+              </a:rPr>
+              <a:t>Source: </a:t>
+            </a:r>
+            <a:pPr indent="0" marL="0">
+              <a:buNone/>
+            </a:pPr>
+            <a:r>
+              <a:rPr lang="en-US" sz="1100" dirty="0">
+                <a:solidFill>
+                  <a:srgbClr val="1A1A1A"/>
+                </a:solidFill>
+              </a:rPr>
+              <a:t>FTAI investor materials (Module Factory example), GPS analysis</a:t>
+            </a:r>
+            <a:endParaRPr lang="en-US" sz="1100" dirty="0"/>
+          </a:p>
+        </p:txBody>
+      </p:sp>
+      <p:sp>
+        <p:nvSpPr>
+          <p:cNvPr id="25" name="Slide Number Placeholder 0"/>
+          <p:cNvSpPr>
+            <a:spLocks noGrp="1"/>
+          </p:cNvSpPr>
+          <p:nvPr>
+            <p:ph type="sldNum" sz="quarter" idx="4294967295"/>
+          </p:nvPr>
+        </p:nvSpPr>
+        <p:spPr>
+          <a:xfrm>
+            <a:off x="7635240" y="6327648"/>
+            <a:ext cx="411480" cy="274320"/>
+          </a:xfrm>
+          <a:prstGeom prst="rect">
+            <a:avLst/>
+          </a:prstGeom>
+          <a:extLst>
+            <a:ext uri="{C572A759-6A51-4108-AA02-DFA0A04FC94B}">
+              <ma14:wrappingTextBoxFlag xmlns:ma14="http://schemas.microsoft.com/office/mac/drawingml/2011/main" val="0"/>
+            </a:ext>
+          </a:extLst>
+        </p:spPr>
+        <p:txBody>
+          <a:bodyPr/>
+          <a:lstStyle>
+            <a:lvl1pPr>
+              <a:defRPr sz="1100">
+                <a:solidFill>
+                  <a:srgbClr val="1A1A1A"/>
+                </a:solidFill>
+              </a:defRPr>
+            </a:lvl1pPr>
+          </a:lstStyle>
+          <a:p>
+            <a:pPr algn="r"/>
+            <a:fld id="{F7021451-1387-4CA6-816F-3879F97B5CBC}" type="slidenum">
+              <a:rPr b="1" lang="en-US"/>
+              <a:t>7</a:t>
             </a:fld>
             <a:endParaRPr lang="en-US"/>
           </a:p>

--- a/deck/FTAI_Long_Pitch.pptx
+++ b/deck/FTAI_Long_Pitch.pptx
@@ -12,9 +12,10 @@
     <p:sldId id="260" r:id="rId6"/>
     <p:sldId id="261" r:id="rId7"/>
     <p:sldId id="262" r:id="rId8"/>
+    <p:sldId id="263" r:id="rId9"/>
   </p:sldIdLst>
   <p:notesMasterIdLst>
-    <p:notesMasterId r:id="rId9"/>
+    <p:notesMasterId r:id="rId10"/>
   </p:notesMasterIdLst>
   <p:sldSz cx="9144000" cy="6858000"/>
   <p:notesSz cx="6858000" cy="9144000"/>
@@ -113,12 +114,12 @@
   <p:extLst>
     <p:ext uri="{521415D9-36F7-43E2-AB2F-B90AF26B5E84}">
       <p14:sectionLst xmlns:p14="http://schemas.microsoft.com/office/powerpoint/2010/main">
-        <p14:section name="Introduction" id="{42e1bbcb-b37e-8072-932e-0c106723d09b}">
+        <p14:section name="Introduction" id="{eb4af803-e60c-5174-4412-4ed0535da0f6}">
           <p14:sldIdLst>
             <p14:sldId id="256"/>
           </p14:sldIdLst>
         </p14:section>
-        <p14:section name="The Opportunity" id="{47169bf5-169b-d86d-bd68-53cb05a10231}">
+        <p14:section name="The Opportunity" id="{20258212-df10-de1c-26c8-523f20c4b6ba}">
           <p14:sldIdLst>
             <p14:sldId id="257"/>
             <p14:sldId id="258"/>
@@ -126,10 +127,15 @@
             <p14:sldId id="260"/>
           </p14:sldIdLst>
         </p14:section>
-        <p14:section name="Business Overview" id="{39e846e0-c3ff-ac6b-9933-ef456dd7b2b3}">
+        <p14:section name="Returns" id="{e277c82b-bff0-828e-9676-ee448e4233c2}">
           <p14:sldIdLst>
             <p14:sldId id="261"/>
+          </p14:sldIdLst>
+        </p14:section>
+        <p14:section name="Business Overview" id="{80493cde-9a26-e612-11f5-64b4967261d5}">
+          <p14:sldIdLst>
             <p14:sldId id="262"/>
+            <p14:sldId id="263"/>
           </p14:sldIdLst>
         </p14:section>
       </p14:sectionLst>
@@ -2267,7 +2273,7 @@
           <a:p>
             <a:r>
               <a:rPr lang="en-US" dirty="0"/>
-              <a:t/>
+              <a:t>Attribution re-runs the full model (blended DCF: 50% perpetuity, 50% exit multiple) for all 8 on/off combinations. Margins = OEM escalator, pass-through, Aerospace margin ex-PMA and PMA penetration rows. Volume = FTAI share of MRO and SCI aircraft rows. Power = Mod-1 units delivered (off = 0, i.e. what the market prices today). Exact values: baseline $99.16, margins +$36.02, volume +$56.49, Power +$116.36, total $308.03 (dollars and % upside rounded by largest remainder so each bridge sums). Power's DCF contribution is larger than its $52 SOTP value on the Opportunity (3/3) slide because the DCF captures the ramp to $1.3B of FY31 EBITDA and terminal value, while the SOTP applies 12x to FY27E $450M only.</a:t>
             </a:r>
             <a:endParaRPr lang="en-US" dirty="0"/>
           </a:p>
@@ -2355,7 +2361,7 @@
           <a:p>
             <a:r>
               <a:rPr lang="en-US" dirty="0"/>
-              <a:t>Module Factory example (FTAI): three unserviceable engines worth $2.0M, $2.5M and $2.0M each still hold modules with life left (cycles shown per Fan / Core / LPT). FTAI splits them into nine modules, adds $3.5M of MRO work, and reassembles two serviceable engines ($8.5M at 7k/7k/7k and $6.0M at 4k/4k/4k) plus one run-out core ($1.5M): $16.0M out vs. $10.0M in, $6.0M of value created.</a:t>
+              <a:t/>
             </a:r>
             <a:endParaRPr lang="en-US" dirty="0"/>
           </a:p>
@@ -2379,6 +2385,94 @@
             <a:fld id="{F7021451-1387-4CA6-816F-3879F97B5CBC}" type="slidenum">
               <a:rPr lang="en-US"/>
               <a:t>7</a:t>
+            </a:fld>
+            <a:endParaRPr lang="en-US"/>
+          </a:p>
+        </p:txBody>
+      </p:sp>
+    </p:spTree>
+    <p:extLst>
+      <p:ext uri="{BB962C8B-B14F-4D97-AF65-F5344CB8AC3E}">
+        <p14:creationId xmlns:p14="http://schemas.microsoft.com/office/powerpoint/2010/main" val="1024086991"/>
+      </p:ext>
+    </p:extLst>
+  </p:cSld>
+  <p:clrMapOvr>
+    <a:masterClrMapping/>
+  </p:clrMapOvr>
+</p:notes>
+</file>
+
+<file path=ppt/notesSlides/notesSlide8.xml><?xml version="1.0" encoding="utf-8"?>
+<p:notes xmlns:a="http://schemas.openxmlformats.org/drawingml/2006/main" xmlns:r="http://schemas.openxmlformats.org/officeDocument/2006/relationships" xmlns:p="http://schemas.openxmlformats.org/presentationml/2006/main">
+  <p:cSld>
+    <p:spTree>
+      <p:nvGrpSpPr>
+        <p:cNvPr id="1" name=""/>
+        <p:cNvGrpSpPr/>
+        <p:nvPr/>
+      </p:nvGrpSpPr>
+      <p:grpSpPr>
+        <a:xfrm>
+          <a:off x="0" y="0"/>
+          <a:ext cx="0" cy="0"/>
+          <a:chOff x="0" y="0"/>
+          <a:chExt cx="0" cy="0"/>
+        </a:xfrm>
+      </p:grpSpPr>
+      <p:sp>
+        <p:nvSpPr>
+          <p:cNvPr id="2" name="Slide Image Placeholder 1"/>
+          <p:cNvSpPr>
+            <a:spLocks noGrp="1" noRot="1" noChangeAspect="1"/>
+          </p:cNvSpPr>
+          <p:nvPr>
+            <p:ph type="sldImg"/>
+          </p:nvPr>
+        </p:nvSpPr>
+        <p:spPr/>
+      </p:sp>
+      <p:sp>
+        <p:nvSpPr>
+          <p:cNvPr id="3" name="Notes Placeholder 2"/>
+          <p:cNvSpPr>
+            <a:spLocks noGrp="1"/>
+          </p:cNvSpPr>
+          <p:nvPr>
+            <p:ph type="body" idx="1"/>
+          </p:nvPr>
+        </p:nvSpPr>
+        <p:spPr/>
+        <p:txBody>
+          <a:bodyPr/>
+          <a:lstStyle/>
+          <a:p>
+            <a:r>
+              <a:rPr lang="en-US" dirty="0"/>
+              <a:t>Module Factory example (FTAI): three unserviceable engines worth $2.0M, $2.5M and $2.0M each still hold modules with life left (cycles shown per Fan / Core / LPT). FTAI splits them into nine modules, adds $3.5M of MRO work, and reassembles two serviceable engines ($8.5M at 7k/7k/7k and $6.0M at 4k/4k/4k) plus one run-out core ($1.5M): $16.0M out vs. $10.0M in, $6.0M of value created.</a:t>
+            </a:r>
+            <a:endParaRPr lang="en-US" dirty="0"/>
+          </a:p>
+        </p:txBody>
+      </p:sp>
+      <p:sp>
+        <p:nvSpPr>
+          <p:cNvPr id="4" name="Slide Number Placeholder 3"/>
+          <p:cNvSpPr>
+            <a:spLocks noGrp="1"/>
+          </p:cNvSpPr>
+          <p:nvPr>
+            <p:ph type="sldNum" sz="quarter" idx="10"/>
+          </p:nvPr>
+        </p:nvSpPr>
+        <p:spPr/>
+        <p:txBody>
+          <a:bodyPr/>
+          <a:lstStyle/>
+          <a:p>
+            <a:fld id="{F7021451-1387-4CA6-816F-3879F97B5CBC}" type="slidenum">
+              <a:rPr lang="en-US"/>
+              <a:t>8</a:t>
             </a:fld>
             <a:endParaRPr lang="en-US"/>
           </a:p>
@@ -6194,7 +6288,7 @@
                   <a:schemeClr val="tx2"/>
                 </a:solidFill>
               </a:rPr>
-              <a:t>Business Overview (1/2)</a:t>
+              <a:t>Returns Summary</a:t>
             </a:r>
             <a:endParaRPr lang="en-US" sz="3200" dirty="0"/>
           </a:p>
@@ -6202,16 +6296,467 @@
       </p:sp>
       <p:sp>
         <p:nvSpPr>
-          <p:cNvPr id="3" name="Text 1"/>
+          <p:cNvPr id="3" name="Headline banner"/>
+          <p:cNvSpPr txBox="1"/>
+          <p:nvPr/>
+        </p:nvSpPr>
+        <p:spPr>
+          <a:xfrm>
+            <a:off x="320040" y="1024128"/>
+            <a:ext cx="8503920" cy="512064"/>
+          </a:xfrm>
+          <a:prstGeom prst="rect">
+            <a:avLst/>
+          </a:prstGeom>
+          <a:solidFill>
+            <a:srgbClr val="0A1C58"/>
+          </a:solidFill>
+          <a:ln/>
+        </p:spPr>
+        <p:txBody>
+          <a:bodyPr wrap="square" lIns="0" tIns="0" rIns="0" bIns="0" rtlCol="0" anchor="ctr"/>
+          <a:lstStyle/>
+          <a:p>
+            <a:pPr algn="ctr" indent="0" marL="0">
+              <a:buNone/>
+            </a:pPr>
+            <a:r>
+              <a:rPr lang="en-US" sz="1700" b="1" dirty="0">
+                <a:solidFill>
+                  <a:schemeClr val="bg1"/>
+                </a:solidFill>
+              </a:rPr>
+              <a:t>Three under-priced drivers take a –41% bear baseline to +84% upside.</a:t>
+            </a:r>
+            <a:endParaRPr lang="en-US" sz="1700" dirty="0"/>
+          </a:p>
+        </p:txBody>
+      </p:sp>
+      <p:sp>
+        <p:nvSpPr>
+          <p:cNvPr id="4" name="Sub banner"/>
+          <p:cNvSpPr txBox="1"/>
+          <p:nvPr/>
+        </p:nvSpPr>
+        <p:spPr>
+          <a:xfrm>
+            <a:off x="320040" y="1627632"/>
+            <a:ext cx="8503920" cy="384048"/>
+          </a:xfrm>
+          <a:prstGeom prst="rect">
+            <a:avLst/>
+          </a:prstGeom>
+          <a:solidFill>
+            <a:srgbClr val="0A1C58"/>
+          </a:solidFill>
+          <a:ln/>
+        </p:spPr>
+        <p:txBody>
+          <a:bodyPr wrap="square" lIns="0" tIns="0" rIns="0" bIns="0" rtlCol="0" anchor="ctr"/>
+          <a:lstStyle/>
+          <a:p>
+            <a:pPr algn="ctr" indent="0" marL="0">
+              <a:buNone/>
+            </a:pPr>
+            <a:r>
+              <a:rPr lang="en-US" sz="1600" dirty="0">
+                <a:solidFill>
+                  <a:schemeClr val="bg1"/>
+                </a:solidFill>
+              </a:rPr>
+              <a:t>What Each Thesis Adds to the Target Price</a:t>
+            </a:r>
+            <a:endParaRPr lang="en-US" sz="1600" dirty="0"/>
+          </a:p>
+        </p:txBody>
+      </p:sp>
+      <p:sp>
+        <p:nvSpPr>
+          <p:cNvPr id="5" name="Thesis 1 box"/>
+          <p:cNvSpPr txBox="1"/>
+          <p:nvPr/>
+        </p:nvSpPr>
+        <p:spPr>
+          <a:xfrm>
+            <a:off x="320040" y="2176272"/>
+            <a:ext cx="5623560" cy="859536"/>
+          </a:xfrm>
+          <a:prstGeom prst="rect">
+            <a:avLst/>
+          </a:prstGeom>
+          <a:noFill/>
+          <a:ln w="12700">
+            <a:solidFill>
+              <a:srgbClr val="1A1A1A"/>
+            </a:solidFill>
+            <a:prstDash val="dash"/>
+          </a:ln>
+        </p:spPr>
+        <p:txBody>
+          <a:bodyPr wrap="square" lIns="101600" tIns="38100" rIns="101600" bIns="38100" rtlCol="0" anchor="ctr"/>
+          <a:lstStyle/>
+          <a:p>
+            <a:pPr algn="ctr" indent="0" marL="0">
+              <a:buNone/>
+            </a:pPr>
+            <a:r>
+              <a:rPr lang="en-US" sz="1500" b="1" dirty="0">
+                <a:solidFill>
+                  <a:schemeClr val="tx2"/>
+                </a:solidFill>
+              </a:rPr>
+              <a:t>Thesis 1a) Margins Have Bottomed</a:t>
+            </a:r>
+            <a:endParaRPr lang="en-US" sz="1500" dirty="0"/>
+          </a:p>
+          <a:p>
+            <a:pPr algn="ctr" indent="0" marL="0">
+              <a:buNone/>
+            </a:pPr>
+            <a:r>
+              <a:rPr lang="en-US" sz="1200" dirty="0">
+                <a:solidFill>
+                  <a:srgbClr val="1A1A1A"/>
+                </a:solidFill>
+              </a:rPr>
+              <a:t>PMA parts, OEM-linked pricing and technician productivity lift Aerospace margins from ~30% to ~32.5% by FY31.</a:t>
+            </a:r>
+            <a:endParaRPr lang="en-US" sz="1500" dirty="0"/>
+          </a:p>
+        </p:txBody>
+      </p:sp>
+      <p:sp>
+        <p:nvSpPr>
+          <p:cNvPr id="6" name="Thesis 1 contribution"/>
+          <p:cNvSpPr txBox="1"/>
+          <p:nvPr/>
+        </p:nvSpPr>
+        <p:spPr>
+          <a:xfrm>
+            <a:off x="6583680" y="2176272"/>
+            <a:ext cx="2240280" cy="859536"/>
+          </a:xfrm>
+          <a:prstGeom prst="rect">
+            <a:avLst/>
+          </a:prstGeom>
+          <a:noFill/>
+          <a:ln/>
+        </p:spPr>
+        <p:txBody>
+          <a:bodyPr wrap="square" lIns="0" tIns="0" rIns="0" bIns="0" rtlCol="0" anchor="ctr"/>
+          <a:lstStyle/>
+          <a:p>
+            <a:pPr algn="ctr" indent="0" marL="0">
+              <a:buNone/>
+            </a:pPr>
+            <a:r>
+              <a:rPr lang="en-US" sz="1300" b="1" dirty="0">
+                <a:solidFill>
+                  <a:srgbClr val="1A1A1A"/>
+                </a:solidFill>
+              </a:rPr>
+              <a:t>Contribution:</a:t>
+            </a:r>
+            <a:endParaRPr lang="en-US" sz="1300" dirty="0"/>
+          </a:p>
+          <a:p>
+            <a:pPr algn="ctr" indent="0" marL="0">
+              <a:buNone/>
+            </a:pPr>
+            <a:r>
+              <a:rPr lang="en-US" sz="2400" b="1" dirty="0">
+                <a:solidFill>
+                  <a:schemeClr val="tx2"/>
+                </a:solidFill>
+              </a:rPr>
+              <a:t>+$36</a:t>
+            </a:r>
+            <a:endParaRPr lang="en-US" sz="1300" dirty="0"/>
+          </a:p>
+          <a:p>
+            <a:pPr algn="ctr" indent="0" marL="0">
+              <a:buNone/>
+            </a:pPr>
+            <a:r>
+              <a:rPr lang="en-US" sz="1200" dirty="0">
+                <a:solidFill>
+                  <a:schemeClr val="accent2"/>
+                </a:solidFill>
+              </a:rPr>
+              <a:t>+21% upside</a:t>
+            </a:r>
+            <a:endParaRPr lang="en-US" sz="1300" dirty="0"/>
+          </a:p>
+        </p:txBody>
+      </p:sp>
+      <p:sp>
+        <p:nvSpPr>
+          <p:cNvPr id="7" name="Thesis 2 box"/>
+          <p:cNvSpPr txBox="1"/>
+          <p:nvPr/>
+        </p:nvSpPr>
+        <p:spPr>
+          <a:xfrm>
+            <a:off x="320040" y="3145536"/>
+            <a:ext cx="5623560" cy="859536"/>
+          </a:xfrm>
+          <a:prstGeom prst="rect">
+            <a:avLst/>
+          </a:prstGeom>
+          <a:noFill/>
+          <a:ln w="12700">
+            <a:solidFill>
+              <a:srgbClr val="1A1A1A"/>
+            </a:solidFill>
+            <a:prstDash val="dash"/>
+          </a:ln>
+        </p:spPr>
+        <p:txBody>
+          <a:bodyPr wrap="square" lIns="101600" tIns="38100" rIns="101600" bIns="38100" rtlCol="0" anchor="ctr"/>
+          <a:lstStyle/>
+          <a:p>
+            <a:pPr algn="ctr" indent="0" marL="0">
+              <a:buNone/>
+            </a:pPr>
+            <a:r>
+              <a:rPr lang="en-US" sz="1500" b="1" dirty="0">
+                <a:solidFill>
+                  <a:schemeClr val="tx2"/>
+                </a:solidFill>
+              </a:rPr>
+              <a:t>Thesis 1b) Volume Grows With Share</a:t>
+            </a:r>
+            <a:endParaRPr lang="en-US" sz="1500" dirty="0"/>
+          </a:p>
+          <a:p>
+            <a:pPr algn="ctr" indent="0" marL="0">
+              <a:buNone/>
+            </a:pPr>
+            <a:r>
+              <a:rPr lang="en-US" sz="1200" dirty="0">
+                <a:solidFill>
+                  <a:srgbClr val="1A1A1A"/>
+                </a:solidFill>
+              </a:rPr>
+              <a:t>New capacity, OEMs moving to LEAP and faster turnaround lift FTAI's CFM56 module share from ~12% to 20% by FY30.</a:t>
+            </a:r>
+            <a:endParaRPr lang="en-US" sz="1500" dirty="0"/>
+          </a:p>
+        </p:txBody>
+      </p:sp>
+      <p:sp>
+        <p:nvSpPr>
+          <p:cNvPr id="8" name="Thesis 2 contribution"/>
+          <p:cNvSpPr txBox="1"/>
+          <p:nvPr/>
+        </p:nvSpPr>
+        <p:spPr>
+          <a:xfrm>
+            <a:off x="6583680" y="3145536"/>
+            <a:ext cx="2240280" cy="859536"/>
+          </a:xfrm>
+          <a:prstGeom prst="rect">
+            <a:avLst/>
+          </a:prstGeom>
+          <a:noFill/>
+          <a:ln/>
+        </p:spPr>
+        <p:txBody>
+          <a:bodyPr wrap="square" lIns="0" tIns="0" rIns="0" bIns="0" rtlCol="0" anchor="ctr"/>
+          <a:lstStyle/>
+          <a:p>
+            <a:pPr algn="ctr" indent="0" marL="0">
+              <a:buNone/>
+            </a:pPr>
+            <a:r>
+              <a:rPr lang="en-US" sz="1300" b="1" dirty="0">
+                <a:solidFill>
+                  <a:srgbClr val="1A1A1A"/>
+                </a:solidFill>
+              </a:rPr>
+              <a:t>Contribution:</a:t>
+            </a:r>
+            <a:endParaRPr lang="en-US" sz="1300" dirty="0"/>
+          </a:p>
+          <a:p>
+            <a:pPr algn="ctr" indent="0" marL="0">
+              <a:buNone/>
+            </a:pPr>
+            <a:r>
+              <a:rPr lang="en-US" sz="2400" b="1" dirty="0">
+                <a:solidFill>
+                  <a:schemeClr val="tx2"/>
+                </a:solidFill>
+              </a:rPr>
+              <a:t>+$57</a:t>
+            </a:r>
+            <a:endParaRPr lang="en-US" sz="1300" dirty="0"/>
+          </a:p>
+          <a:p>
+            <a:pPr algn="ctr" indent="0" marL="0">
+              <a:buNone/>
+            </a:pPr>
+            <a:r>
+              <a:rPr lang="en-US" sz="1200" dirty="0">
+                <a:solidFill>
+                  <a:schemeClr val="accent2"/>
+                </a:solidFill>
+              </a:rPr>
+              <a:t>+34% upside</a:t>
+            </a:r>
+            <a:endParaRPr lang="en-US" sz="1300" dirty="0"/>
+          </a:p>
+        </p:txBody>
+      </p:sp>
+      <p:sp>
+        <p:nvSpPr>
+          <p:cNvPr id="9" name="Thesis 3 box"/>
+          <p:cNvSpPr txBox="1"/>
+          <p:nvPr/>
+        </p:nvSpPr>
+        <p:spPr>
+          <a:xfrm>
+            <a:off x="320040" y="4114800"/>
+            <a:ext cx="5623560" cy="859536"/>
+          </a:xfrm>
+          <a:prstGeom prst="rect">
+            <a:avLst/>
+          </a:prstGeom>
+          <a:noFill/>
+          <a:ln w="12700">
+            <a:solidFill>
+              <a:srgbClr val="1A1A1A"/>
+            </a:solidFill>
+            <a:prstDash val="dash"/>
+          </a:ln>
+        </p:spPr>
+        <p:txBody>
+          <a:bodyPr wrap="square" lIns="101600" tIns="38100" rIns="101600" bIns="38100" rtlCol="0" anchor="ctr"/>
+          <a:lstStyle/>
+          <a:p>
+            <a:pPr algn="ctr" indent="0" marL="0">
+              <a:buNone/>
+            </a:pPr>
+            <a:r>
+              <a:rPr lang="en-US" sz="1500" b="1" dirty="0">
+                <a:solidFill>
+                  <a:schemeClr val="tx2"/>
+                </a:solidFill>
+              </a:rPr>
+              <a:t>Thesis 2) Power Is a Call Option</a:t>
+            </a:r>
+            <a:endParaRPr lang="en-US" sz="1500" dirty="0"/>
+          </a:p>
+          <a:p>
+            <a:pPr algn="ctr" indent="0" marL="0">
+              <a:buNone/>
+            </a:pPr>
+            <a:r>
+              <a:rPr lang="en-US" sz="1200" dirty="0">
+                <a:solidFill>
+                  <a:srgbClr val="1A1A1A"/>
+                </a:solidFill>
+              </a:rPr>
+              <a:t>Mod-1 deliveries ramp from 45 units in FY27 to 110 by FY29 at ~40% EBITDA margins.</a:t>
+            </a:r>
+            <a:endParaRPr lang="en-US" sz="1500" dirty="0"/>
+          </a:p>
+        </p:txBody>
+      </p:sp>
+      <p:sp>
+        <p:nvSpPr>
+          <p:cNvPr id="10" name="Thesis 3 contribution"/>
+          <p:cNvSpPr txBox="1"/>
+          <p:nvPr/>
+        </p:nvSpPr>
+        <p:spPr>
+          <a:xfrm>
+            <a:off x="6583680" y="4114800"/>
+            <a:ext cx="2240280" cy="859536"/>
+          </a:xfrm>
+          <a:prstGeom prst="rect">
+            <a:avLst/>
+          </a:prstGeom>
+          <a:noFill/>
+          <a:ln/>
+        </p:spPr>
+        <p:txBody>
+          <a:bodyPr wrap="square" lIns="0" tIns="0" rIns="0" bIns="0" rtlCol="0" anchor="ctr"/>
+          <a:lstStyle/>
+          <a:p>
+            <a:pPr algn="ctr" indent="0" marL="0">
+              <a:buNone/>
+            </a:pPr>
+            <a:r>
+              <a:rPr lang="en-US" sz="1300" b="1" dirty="0">
+                <a:solidFill>
+                  <a:srgbClr val="1A1A1A"/>
+                </a:solidFill>
+              </a:rPr>
+              <a:t>Contribution:</a:t>
+            </a:r>
+            <a:endParaRPr lang="en-US" sz="1300" dirty="0"/>
+          </a:p>
+          <a:p>
+            <a:pPr algn="ctr" indent="0" marL="0">
+              <a:buNone/>
+            </a:pPr>
+            <a:r>
+              <a:rPr lang="en-US" sz="2400" b="1" dirty="0">
+                <a:solidFill>
+                  <a:schemeClr val="tx2"/>
+                </a:solidFill>
+              </a:rPr>
+              <a:t>+$116</a:t>
+            </a:r>
+            <a:endParaRPr lang="en-US" sz="1300" dirty="0"/>
+          </a:p>
+          <a:p>
+            <a:pPr algn="ctr" indent="0" marL="0">
+              <a:buNone/>
+            </a:pPr>
+            <a:r>
+              <a:rPr lang="en-US" sz="1200" dirty="0">
+                <a:solidFill>
+                  <a:schemeClr val="accent2"/>
+                </a:solidFill>
+              </a:rPr>
+              <a:t>+70% upside</a:t>
+            </a:r>
+            <a:endParaRPr lang="en-US" sz="1300" dirty="0"/>
+          </a:p>
+        </p:txBody>
+      </p:sp>
+      <p:sp>
+        <p:nvSpPr>
+          <p:cNvPr id="11" name="Chevron"/>
           <p:cNvSpPr/>
-          <p:nvPr>
-            <p:ph idx="103" type="body" hasCustomPrompt="1"/>
-          </p:nvPr>
-        </p:nvSpPr>
-        <p:spPr>
-          <a:xfrm>
-            <a:off x="320040" y="932688"/>
-            <a:ext cx="8503920" cy="566928"/>
+          <p:nvPr/>
+        </p:nvSpPr>
+        <p:spPr>
+          <a:xfrm>
+            <a:off x="6053328" y="2176272"/>
+            <a:ext cx="420624" cy="2798064"/>
+          </a:xfrm>
+          <a:prstGeom prst="chevron">
+            <a:avLst/>
+          </a:prstGeom>
+          <a:solidFill>
+            <a:srgbClr val="DCD8D3"/>
+          </a:solidFill>
+          <a:ln/>
+        </p:spPr>
+      </p:sp>
+      <p:sp>
+        <p:nvSpPr>
+          <p:cNvPr id="12" name="Baseline note"/>
+          <p:cNvSpPr txBox="1"/>
+          <p:nvPr/>
+        </p:nvSpPr>
+        <p:spPr>
+          <a:xfrm>
+            <a:off x="320040" y="5120640"/>
+            <a:ext cx="8503920" cy="274320"/>
           </a:xfrm>
           <a:prstGeom prst="rect">
             <a:avLst/>
@@ -6220,130 +6765,34 @@
           <a:ln/>
         </p:spPr>
         <p:txBody>
-          <a:bodyPr wrap="square" lIns="0" tIns="0" rIns="0" bIns="0" rtlCol="0" anchor="t"/>
-          <a:lstStyle/>
-          <a:p>
-            <a:pPr algn="l" indent="0" marL="0">
-              <a:buNone/>
-            </a:pPr>
-            <a:r>
-              <a:rPr lang="en-US" sz="1700" b="1" dirty="0">
-                <a:solidFill>
-                  <a:schemeClr val="tx2"/>
-                </a:solidFill>
-              </a:rPr>
-              <a:t>FTAI keeps the world's best-selling jet engine flying, and turns old ones into power.</a:t>
-            </a:r>
-            <a:endParaRPr lang="en-US" sz="1700" dirty="0"/>
-          </a:p>
-        </p:txBody>
-      </p:sp>
-      <p:pic>
-        <p:nvPicPr>
-          <p:cNvPr id="4" name="Aerospace Products illustration" descr="/home/user/SPOT/deck/img/cfm56.png">    </p:cNvPr>
-          <p:cNvPicPr>
-            <a:picLocks noChangeAspect="1"/>
-          </p:cNvPicPr>
-          <p:nvPr/>
-        </p:nvPicPr>
-        <p:blipFill>
-          <a:blip r:embed="rId1"/>
-          <a:stretch>
-            <a:fillRect/>
-          </a:stretch>
-        </p:blipFill>
-        <p:spPr>
-          <a:xfrm>
-            <a:off x="457200" y="1600200"/>
-            <a:ext cx="2377440" cy="1344168"/>
-          </a:xfrm>
-          <a:prstGeom prst="rect">
-            <a:avLst/>
-          </a:prstGeom>
-        </p:spPr>
-      </p:pic>
-      <p:sp>
-        <p:nvSpPr>
-          <p:cNvPr id="5" name="Aerospace Products name"/>
+          <a:bodyPr wrap="square" lIns="0" tIns="0" rIns="0" bIns="0" rtlCol="0" anchor="ctr"/>
+          <a:lstStyle/>
+          <a:p>
+            <a:pPr algn="ctr" indent="0" marL="0">
+              <a:buNone/>
+            </a:pPr>
+            <a:r>
+              <a:rPr lang="en-US" sz="1200" dirty="0">
+                <a:solidFill>
+                  <a:schemeClr val="accent2"/>
+                </a:solidFill>
+              </a:rPr>
+              <a:t>Bear baseline (Bear-case margins and share, no Power): $99 per share, 41% below today's $167.</a:t>
+            </a:r>
+            <a:endParaRPr lang="en-US" sz="1200" dirty="0"/>
+          </a:p>
+        </p:txBody>
+      </p:sp>
+      <p:sp>
+        <p:nvSpPr>
+          <p:cNvPr id="13" name="Base case bridge"/>
           <p:cNvSpPr txBox="1"/>
           <p:nvPr/>
         </p:nvSpPr>
         <p:spPr>
           <a:xfrm>
-            <a:off x="320040" y="3035808"/>
-            <a:ext cx="2651760" cy="365760"/>
-          </a:xfrm>
-          <a:prstGeom prst="rect">
-            <a:avLst/>
-          </a:prstGeom>
-          <a:noFill/>
-          <a:ln/>
-        </p:spPr>
-        <p:txBody>
-          <a:bodyPr wrap="square" lIns="0" tIns="0" rIns="0" bIns="0" rtlCol="0" anchor="ctr"/>
-          <a:lstStyle/>
-          <a:p>
-            <a:pPr algn="ctr" indent="0" marL="0">
-              <a:buNone/>
-            </a:pPr>
-            <a:r>
-              <a:rPr lang="en-US" sz="1800" b="1" dirty="0">
-                <a:solidFill>
-                  <a:schemeClr val="tx2"/>
-                </a:solidFill>
-              </a:rPr>
-              <a:t>Aerospace Products</a:t>
-            </a:r>
-            <a:endParaRPr lang="en-US" sz="1800" dirty="0"/>
-          </a:p>
-        </p:txBody>
-      </p:sp>
-      <p:sp>
-        <p:nvSpPr>
-          <p:cNvPr id="6" name="Aerospace Products description"/>
-          <p:cNvSpPr txBox="1"/>
-          <p:nvPr/>
-        </p:nvSpPr>
-        <p:spPr>
-          <a:xfrm>
-            <a:off x="320040" y="3429000"/>
-            <a:ext cx="2651760" cy="914400"/>
-          </a:xfrm>
-          <a:prstGeom prst="rect">
-            <a:avLst/>
-          </a:prstGeom>
-          <a:noFill/>
-          <a:ln/>
-        </p:spPr>
-        <p:txBody>
-          <a:bodyPr wrap="square" lIns="0" tIns="0" rIns="0" bIns="0" rtlCol="0" anchor="t"/>
-          <a:lstStyle/>
-          <a:p>
-            <a:pPr algn="ctr" indent="0" marL="0">
-              <a:buNone/>
-            </a:pPr>
-            <a:r>
-              <a:rPr lang="en-US" sz="1300" dirty="0">
-                <a:solidFill>
-                  <a:srgbClr val="1A1A1A"/>
-                </a:solidFill>
-              </a:rPr>
-              <a:t>Restores and swaps CFM56 engine modules, so airlines get engines back in days, not months.</a:t>
-            </a:r>
-            <a:endParaRPr lang="en-US" sz="1300" dirty="0"/>
-          </a:p>
-        </p:txBody>
-      </p:sp>
-      <p:sp>
-        <p:nvSpPr>
-          <p:cNvPr id="7" name="Aerospace Products stat"/>
-          <p:cNvSpPr txBox="1"/>
-          <p:nvPr/>
-        </p:nvSpPr>
-        <p:spPr>
-          <a:xfrm>
-            <a:off x="502920" y="4434840"/>
-            <a:ext cx="2286000" cy="868680"/>
+            <a:off x="320040" y="5468112"/>
+            <a:ext cx="8503920" cy="512064"/>
           </a:xfrm>
           <a:prstGeom prst="rect">
             <a:avLst/>
@@ -6351,7 +6800,11 @@
           <a:solidFill>
             <a:srgbClr val="EFEDEA"/>
           </a:solidFill>
-          <a:ln/>
+          <a:ln w="15875">
+            <a:solidFill>
+              <a:srgbClr val="0A1C58"/>
+            </a:solidFill>
+          </a:ln>
         </p:spPr>
         <p:txBody>
           <a:bodyPr wrap="square" lIns="0" tIns="0" rIns="0" bIns="0" rtlCol="0" anchor="ctr"/>
@@ -6361,414 +6814,42 @@
               <a:buNone/>
             </a:pPr>
             <a:r>
-              <a:rPr lang="en-US" sz="2200" b="1" dirty="0">
-                <a:solidFill>
-                  <a:schemeClr val="tx2"/>
-                </a:solidFill>
-              </a:rPr>
-              <a:t>757 → 1,200</a:t>
-            </a:r>
-            <a:endParaRPr lang="en-US" sz="2200" dirty="0"/>
-          </a:p>
-          <a:p>
-            <a:pPr algn="ctr" indent="0" marL="0">
-              <a:buNone/>
-            </a:pPr>
-            <a:r>
-              <a:rPr lang="en-US" sz="1200" dirty="0">
-                <a:solidFill>
-                  <a:schemeClr val="accent2"/>
-                </a:solidFill>
-              </a:rPr>
-              <a:t>Modules, 2025 → 2026E</a:t>
-            </a:r>
-            <a:endParaRPr lang="en-US" sz="2200" dirty="0"/>
-          </a:p>
-        </p:txBody>
-      </p:sp>
-      <p:pic>
-        <p:nvPicPr>
-          <p:cNvPr id="8" name="FTAI Power illustration" descr="/home/user/SPOT/deck/img/power.png">    </p:cNvPr>
-          <p:cNvPicPr>
-            <a:picLocks noChangeAspect="1"/>
-          </p:cNvPicPr>
-          <p:nvPr/>
-        </p:nvPicPr>
-        <p:blipFill>
-          <a:blip r:embed="rId2"/>
-          <a:stretch>
-            <a:fillRect/>
-          </a:stretch>
-        </p:blipFill>
-        <p:spPr>
-          <a:xfrm>
-            <a:off x="3383280" y="1600200"/>
-            <a:ext cx="2377440" cy="1344168"/>
-          </a:xfrm>
-          <a:prstGeom prst="rect">
-            <a:avLst/>
-          </a:prstGeom>
-        </p:spPr>
-      </p:pic>
-      <p:sp>
-        <p:nvSpPr>
-          <p:cNvPr id="9" name="FTAI Power name"/>
-          <p:cNvSpPr txBox="1"/>
-          <p:nvPr/>
-        </p:nvSpPr>
-        <p:spPr>
-          <a:xfrm>
-            <a:off x="3246120" y="3035808"/>
-            <a:ext cx="2651760" cy="365760"/>
-          </a:xfrm>
-          <a:prstGeom prst="rect">
-            <a:avLst/>
-          </a:prstGeom>
-          <a:noFill/>
-          <a:ln/>
-        </p:spPr>
-        <p:txBody>
-          <a:bodyPr wrap="square" lIns="0" tIns="0" rIns="0" bIns="0" rtlCol="0" anchor="ctr"/>
-          <a:lstStyle/>
-          <a:p>
-            <a:pPr algn="ctr" indent="0" marL="0">
-              <a:buNone/>
-            </a:pPr>
-            <a:r>
-              <a:rPr lang="en-US" sz="1800" b="1" dirty="0">
-                <a:solidFill>
-                  <a:schemeClr val="tx2"/>
-                </a:solidFill>
-              </a:rPr>
-              <a:t>FTAI Power</a:t>
-            </a:r>
-            <a:endParaRPr lang="en-US" sz="1800" dirty="0"/>
-          </a:p>
-        </p:txBody>
-      </p:sp>
-      <p:sp>
-        <p:nvSpPr>
-          <p:cNvPr id="10" name="FTAI Power description"/>
-          <p:cNvSpPr txBox="1"/>
-          <p:nvPr/>
-        </p:nvSpPr>
-        <p:spPr>
-          <a:xfrm>
-            <a:off x="3246120" y="3429000"/>
-            <a:ext cx="2651760" cy="914400"/>
-          </a:xfrm>
-          <a:prstGeom prst="rect">
-            <a:avLst/>
-          </a:prstGeom>
-          <a:noFill/>
-          <a:ln/>
-        </p:spPr>
-        <p:txBody>
-          <a:bodyPr wrap="square" lIns="0" tIns="0" rIns="0" bIns="0" rtlCol="0" anchor="t"/>
-          <a:lstStyle/>
-          <a:p>
-            <a:pPr algn="ctr" indent="0" marL="0">
-              <a:buNone/>
-            </a:pPr>
-            <a:r>
-              <a:rPr lang="en-US" sz="1300" dirty="0">
+              <a:rPr lang="en-US" sz="1400" dirty="0">
                 <a:solidFill>
                   <a:srgbClr val="1A1A1A"/>
                 </a:solidFill>
               </a:rPr>
-              <a:t>Converts CFM56 cores into 25 MW mobile gas turbines that power data centers.</a:t>
-            </a:r>
-            <a:endParaRPr lang="en-US" sz="1300" dirty="0"/>
-          </a:p>
-        </p:txBody>
-      </p:sp>
-      <p:sp>
-        <p:nvSpPr>
-          <p:cNvPr id="11" name="FTAI Power stat"/>
-          <p:cNvSpPr txBox="1"/>
-          <p:nvPr/>
-        </p:nvSpPr>
-        <p:spPr>
-          <a:xfrm>
-            <a:off x="3429000" y="4434840"/>
-            <a:ext cx="2286000" cy="868680"/>
-          </a:xfrm>
-          <a:prstGeom prst="rect">
-            <a:avLst/>
-          </a:prstGeom>
-          <a:solidFill>
-            <a:srgbClr val="EFEDEA"/>
-          </a:solidFill>
-          <a:ln/>
-        </p:spPr>
-        <p:txBody>
-          <a:bodyPr wrap="square" lIns="0" tIns="0" rIns="0" bIns="0" rtlCol="0" anchor="ctr"/>
-          <a:lstStyle/>
-          <a:p>
-            <a:pPr algn="ctr" indent="0" marL="0">
-              <a:buNone/>
-            </a:pPr>
-            <a:r>
-              <a:rPr lang="en-US" sz="2200" b="1" dirty="0">
-                <a:solidFill>
-                  <a:schemeClr val="tx2"/>
-                </a:solidFill>
-              </a:rPr>
-              <a:t>$450–750M</a:t>
-            </a:r>
-            <a:endParaRPr lang="en-US" sz="2200" dirty="0"/>
-          </a:p>
-          <a:p>
-            <a:pPr algn="ctr" indent="0" marL="0">
-              <a:buNone/>
-            </a:pPr>
-            <a:r>
-              <a:rPr lang="en-US" sz="1200" dirty="0">
-                <a:solidFill>
-                  <a:schemeClr val="accent2"/>
-                </a:solidFill>
-              </a:rPr>
-              <a:t>FY27 EBITDA guide</a:t>
-            </a:r>
-            <a:endParaRPr lang="en-US" sz="2200" dirty="0"/>
-          </a:p>
-        </p:txBody>
-      </p:sp>
-      <p:sp>
-        <p:nvSpPr>
-          <p:cNvPr id="12" name="Column divider 1"/>
-          <p:cNvSpPr/>
-          <p:nvPr/>
-        </p:nvSpPr>
-        <p:spPr>
-          <a:xfrm>
-            <a:off x="3108960" y="1691640"/>
-            <a:ext cx="0" cy="3566160"/>
-          </a:xfrm>
-          <a:prstGeom prst="line">
-            <a:avLst/>
-          </a:prstGeom>
-          <a:noFill/>
-          <a:ln w="12700">
-            <a:solidFill>
-              <a:srgbClr val="DCD8D3"/>
-            </a:solidFill>
-            <a:prstDash val="solid"/>
-          </a:ln>
-        </p:spPr>
-      </p:sp>
-      <p:pic>
-        <p:nvPicPr>
-          <p:cNvPr id="13" name="Leasing + SCI illustration" descr="/home/user/SPOT/deck/img/aircraft.png">    </p:cNvPr>
-          <p:cNvPicPr>
-            <a:picLocks noChangeAspect="1"/>
-          </p:cNvPicPr>
-          <p:nvPr/>
-        </p:nvPicPr>
-        <p:blipFill>
-          <a:blip r:embed="rId3"/>
-          <a:stretch>
-            <a:fillRect/>
-          </a:stretch>
-        </p:blipFill>
-        <p:spPr>
-          <a:xfrm>
-            <a:off x="6309360" y="1600200"/>
-            <a:ext cx="2377440" cy="1344168"/>
-          </a:xfrm>
-          <a:prstGeom prst="rect">
-            <a:avLst/>
-          </a:prstGeom>
-        </p:spPr>
-      </p:pic>
-      <p:sp>
-        <p:nvSpPr>
-          <p:cNvPr id="14" name="Leasing + SCI name"/>
-          <p:cNvSpPr txBox="1"/>
-          <p:nvPr/>
-        </p:nvSpPr>
-        <p:spPr>
-          <a:xfrm>
-            <a:off x="6172200" y="3035808"/>
-            <a:ext cx="2651760" cy="365760"/>
-          </a:xfrm>
-          <a:prstGeom prst="rect">
-            <a:avLst/>
-          </a:prstGeom>
-          <a:noFill/>
-          <a:ln/>
-        </p:spPr>
-        <p:txBody>
-          <a:bodyPr wrap="square" lIns="0" tIns="0" rIns="0" bIns="0" rtlCol="0" anchor="ctr"/>
-          <a:lstStyle/>
-          <a:p>
-            <a:pPr algn="ctr" indent="0" marL="0">
-              <a:buNone/>
-            </a:pPr>
-            <a:r>
-              <a:rPr lang="en-US" sz="1800" b="1" dirty="0">
-                <a:solidFill>
-                  <a:schemeClr val="tx2"/>
-                </a:solidFill>
-              </a:rPr>
-              <a:t>Leasing + SCI</a:t>
-            </a:r>
-            <a:endParaRPr lang="en-US" sz="1800" dirty="0"/>
-          </a:p>
-        </p:txBody>
-      </p:sp>
-      <p:sp>
-        <p:nvSpPr>
-          <p:cNvPr id="15" name="Leasing + SCI description"/>
-          <p:cNvSpPr txBox="1"/>
-          <p:nvPr/>
-        </p:nvSpPr>
-        <p:spPr>
-          <a:xfrm>
-            <a:off x="6172200" y="3429000"/>
-            <a:ext cx="2651760" cy="914400"/>
-          </a:xfrm>
-          <a:prstGeom prst="rect">
-            <a:avLst/>
-          </a:prstGeom>
-          <a:noFill/>
-          <a:ln/>
-        </p:spPr>
-        <p:txBody>
-          <a:bodyPr wrap="square" lIns="0" tIns="0" rIns="0" bIns="0" rtlCol="0" anchor="t"/>
-          <a:lstStyle/>
-          <a:p>
-            <a:pPr algn="ctr" indent="0" marL="0">
-              <a:buNone/>
-            </a:pPr>
-            <a:r>
-              <a:rPr lang="en-US" sz="1300" dirty="0">
+              <a:t>Base case: $99 + $36 margins + $57 volume + $116 Power = </a:t>
+            </a:r>
+            <a:pPr algn="ctr" indent="0" marL="0">
+              <a:buNone/>
+            </a:pPr>
+            <a:r>
+              <a:rPr lang="en-US" sz="1400" b="1" dirty="0">
                 <a:solidFill>
                   <a:srgbClr val="1A1A1A"/>
                 </a:solidFill>
               </a:rPr>
-              <a:t>Leases jets and engines. The SCI partnership buys mid-life jets and sends all engine work to FTAI.</a:t>
-            </a:r>
-            <a:endParaRPr lang="en-US" sz="1300" dirty="0"/>
-          </a:p>
-        </p:txBody>
-      </p:sp>
-      <p:sp>
-        <p:nvSpPr>
-          <p:cNvPr id="16" name="Leasing + SCI stat"/>
-          <p:cNvSpPr txBox="1"/>
-          <p:nvPr/>
-        </p:nvSpPr>
-        <p:spPr>
-          <a:xfrm>
-            <a:off x="6355080" y="4434840"/>
-            <a:ext cx="2286000" cy="868680"/>
-          </a:xfrm>
-          <a:prstGeom prst="rect">
-            <a:avLst/>
-          </a:prstGeom>
-          <a:solidFill>
-            <a:srgbClr val="EFEDEA"/>
-          </a:solidFill>
-          <a:ln/>
-        </p:spPr>
-        <p:txBody>
-          <a:bodyPr wrap="square" lIns="0" tIns="0" rIns="0" bIns="0" rtlCol="0" anchor="ctr"/>
-          <a:lstStyle/>
-          <a:p>
-            <a:pPr algn="ctr" indent="0" marL="0">
-              <a:buNone/>
-            </a:pPr>
-            <a:r>
-              <a:rPr lang="en-US" sz="2200" b="1" dirty="0">
-                <a:solidFill>
-                  <a:schemeClr val="tx2"/>
-                </a:solidFill>
-              </a:rPr>
-              <a:t>316</a:t>
-            </a:r>
-            <a:endParaRPr lang="en-US" sz="2200" dirty="0"/>
-          </a:p>
-          <a:p>
-            <a:pPr algn="ctr" indent="0" marL="0">
-              <a:buNone/>
-            </a:pPr>
-            <a:r>
-              <a:rPr lang="en-US" sz="1200" dirty="0">
-                <a:solidFill>
-                  <a:schemeClr val="accent2"/>
-                </a:solidFill>
-              </a:rPr>
-              <a:t>SCI aircraft, YE26E</a:t>
-            </a:r>
-            <a:endParaRPr lang="en-US" sz="2200" dirty="0"/>
-          </a:p>
-        </p:txBody>
-      </p:sp>
-      <p:sp>
-        <p:nvSpPr>
-          <p:cNvPr id="17" name="Column divider 2"/>
-          <p:cNvSpPr/>
-          <p:nvPr/>
-        </p:nvSpPr>
-        <p:spPr>
-          <a:xfrm>
-            <a:off x="6035040" y="1691640"/>
-            <a:ext cx="0" cy="3566160"/>
-          </a:xfrm>
-          <a:prstGeom prst="line">
-            <a:avLst/>
-          </a:prstGeom>
-          <a:noFill/>
-          <a:ln w="12700">
-            <a:solidFill>
-              <a:srgbClr val="DCD8D3"/>
-            </a:solidFill>
-            <a:prstDash val="solid"/>
-          </a:ln>
-        </p:spPr>
-      </p:sp>
-      <p:sp>
-        <p:nvSpPr>
-          <p:cNvPr id="18" name="Takeaway"/>
-          <p:cNvSpPr txBox="1"/>
-          <p:nvPr/>
-        </p:nvSpPr>
-        <p:spPr>
-          <a:xfrm>
-            <a:off x="320040" y="5504688"/>
-            <a:ext cx="8503920" cy="566928"/>
-          </a:xfrm>
-          <a:prstGeom prst="rect">
-            <a:avLst/>
-          </a:prstGeom>
-          <a:solidFill>
-            <a:srgbClr val="0A1C58"/>
-          </a:solidFill>
-          <a:ln/>
-        </p:spPr>
-        <p:txBody>
-          <a:bodyPr wrap="square" lIns="101600" tIns="25400" rIns="101600" bIns="25400" rtlCol="0" anchor="ctr"/>
-          <a:lstStyle/>
-          <a:p>
-            <a:pPr algn="ctr" indent="0" marL="0">
-              <a:buNone/>
-            </a:pPr>
-            <a:r>
-              <a:rPr lang="en-US" sz="1700" b="1" dirty="0">
-                <a:solidFill>
-                  <a:schemeClr val="bg1"/>
-                </a:solidFill>
-              </a:rPr>
-              <a:t>One engine, three ways to earn: fix it, power with it, and own the planes it flies on.</a:t>
-            </a:r>
-            <a:endParaRPr lang="en-US" sz="1700" dirty="0"/>
-          </a:p>
-        </p:txBody>
-      </p:sp>
-      <p:sp>
-        <p:nvSpPr>
-          <p:cNvPr id="19" name="Source"/>
+              <a:t>$308 target</a:t>
+            </a:r>
+            <a:pPr algn="ctr" indent="0" marL="0">
+              <a:buNone/>
+            </a:pPr>
+            <a:r>
+              <a:rPr lang="en-US" sz="1400" dirty="0">
+                <a:solidFill>
+                  <a:srgbClr val="1A1A1A"/>
+                </a:solidFill>
+              </a:rPr>
+              <a:t> (+84%)</a:t>
+            </a:r>
+            <a:endParaRPr lang="en-US" sz="1400" dirty="0"/>
+          </a:p>
+        </p:txBody>
+      </p:sp>
+      <p:sp>
+        <p:nvSpPr>
+          <p:cNvPr id="14" name="Source"/>
           <p:cNvSpPr txBox="1"/>
           <p:nvPr/>
         </p:nvSpPr>
@@ -6807,7 +6888,7 @@
                   <a:srgbClr val="1A1A1A"/>
                 </a:solidFill>
               </a:rPr>
-              <a:t>FTAI filings and earnings calls, GPS model. Illustrations are schematic.</a:t>
+              <a:t>GPS model: thesis drivers switched Bear vs. Base (Power off = 0 units), Shapley average; blended DCF</a:t>
             </a:r>
             <a:endParaRPr lang="en-US" sz="1100" dirty="0"/>
           </a:p>
@@ -6915,6 +6996,727 @@
                   <a:schemeClr val="tx2"/>
                 </a:solidFill>
               </a:rPr>
+              <a:t>Business Overview (1/2)</a:t>
+            </a:r>
+            <a:endParaRPr lang="en-US" sz="3200" dirty="0"/>
+          </a:p>
+        </p:txBody>
+      </p:sp>
+      <p:sp>
+        <p:nvSpPr>
+          <p:cNvPr id="3" name="Text 1"/>
+          <p:cNvSpPr/>
+          <p:nvPr>
+            <p:ph idx="103" type="body" hasCustomPrompt="1"/>
+          </p:nvPr>
+        </p:nvSpPr>
+        <p:spPr>
+          <a:xfrm>
+            <a:off x="320040" y="932688"/>
+            <a:ext cx="8503920" cy="566928"/>
+          </a:xfrm>
+          <a:prstGeom prst="rect">
+            <a:avLst/>
+          </a:prstGeom>
+          <a:noFill/>
+          <a:ln/>
+        </p:spPr>
+        <p:txBody>
+          <a:bodyPr wrap="square" lIns="0" tIns="0" rIns="0" bIns="0" rtlCol="0" anchor="t"/>
+          <a:lstStyle/>
+          <a:p>
+            <a:pPr algn="l" indent="0" marL="0">
+              <a:buNone/>
+            </a:pPr>
+            <a:r>
+              <a:rPr lang="en-US" sz="1700" b="1" dirty="0">
+                <a:solidFill>
+                  <a:schemeClr val="tx2"/>
+                </a:solidFill>
+              </a:rPr>
+              <a:t>FTAI keeps the world's best-selling jet engine flying, and turns old ones into power.</a:t>
+            </a:r>
+            <a:endParaRPr lang="en-US" sz="1700" dirty="0"/>
+          </a:p>
+        </p:txBody>
+      </p:sp>
+      <p:pic>
+        <p:nvPicPr>
+          <p:cNvPr id="4" name="Aerospace Products illustration" descr="/home/user/SPOT/deck/img/cfm56.png">    </p:cNvPr>
+          <p:cNvPicPr>
+            <a:picLocks noChangeAspect="1"/>
+          </p:cNvPicPr>
+          <p:nvPr/>
+        </p:nvPicPr>
+        <p:blipFill>
+          <a:blip r:embed="rId1"/>
+          <a:stretch>
+            <a:fillRect/>
+          </a:stretch>
+        </p:blipFill>
+        <p:spPr>
+          <a:xfrm>
+            <a:off x="457200" y="1600200"/>
+            <a:ext cx="2377440" cy="1344168"/>
+          </a:xfrm>
+          <a:prstGeom prst="rect">
+            <a:avLst/>
+          </a:prstGeom>
+        </p:spPr>
+      </p:pic>
+      <p:sp>
+        <p:nvSpPr>
+          <p:cNvPr id="5" name="Aerospace Products name"/>
+          <p:cNvSpPr txBox="1"/>
+          <p:nvPr/>
+        </p:nvSpPr>
+        <p:spPr>
+          <a:xfrm>
+            <a:off x="320040" y="3035808"/>
+            <a:ext cx="2651760" cy="365760"/>
+          </a:xfrm>
+          <a:prstGeom prst="rect">
+            <a:avLst/>
+          </a:prstGeom>
+          <a:noFill/>
+          <a:ln/>
+        </p:spPr>
+        <p:txBody>
+          <a:bodyPr wrap="square" lIns="0" tIns="0" rIns="0" bIns="0" rtlCol="0" anchor="ctr"/>
+          <a:lstStyle/>
+          <a:p>
+            <a:pPr algn="ctr" indent="0" marL="0">
+              <a:buNone/>
+            </a:pPr>
+            <a:r>
+              <a:rPr lang="en-US" sz="1800" b="1" dirty="0">
+                <a:solidFill>
+                  <a:schemeClr val="tx2"/>
+                </a:solidFill>
+              </a:rPr>
+              <a:t>Aerospace Products</a:t>
+            </a:r>
+            <a:endParaRPr lang="en-US" sz="1800" dirty="0"/>
+          </a:p>
+        </p:txBody>
+      </p:sp>
+      <p:sp>
+        <p:nvSpPr>
+          <p:cNvPr id="6" name="Aerospace Products description"/>
+          <p:cNvSpPr txBox="1"/>
+          <p:nvPr/>
+        </p:nvSpPr>
+        <p:spPr>
+          <a:xfrm>
+            <a:off x="320040" y="3429000"/>
+            <a:ext cx="2651760" cy="914400"/>
+          </a:xfrm>
+          <a:prstGeom prst="rect">
+            <a:avLst/>
+          </a:prstGeom>
+          <a:noFill/>
+          <a:ln/>
+        </p:spPr>
+        <p:txBody>
+          <a:bodyPr wrap="square" lIns="0" tIns="0" rIns="0" bIns="0" rtlCol="0" anchor="t"/>
+          <a:lstStyle/>
+          <a:p>
+            <a:pPr algn="ctr" indent="0" marL="0">
+              <a:buNone/>
+            </a:pPr>
+            <a:r>
+              <a:rPr lang="en-US" sz="1300" dirty="0">
+                <a:solidFill>
+                  <a:srgbClr val="1A1A1A"/>
+                </a:solidFill>
+              </a:rPr>
+              <a:t>Restores and swaps CFM56 engine modules, so airlines get engines back in days, not months.</a:t>
+            </a:r>
+            <a:endParaRPr lang="en-US" sz="1300" dirty="0"/>
+          </a:p>
+        </p:txBody>
+      </p:sp>
+      <p:sp>
+        <p:nvSpPr>
+          <p:cNvPr id="7" name="Aerospace Products stat"/>
+          <p:cNvSpPr txBox="1"/>
+          <p:nvPr/>
+        </p:nvSpPr>
+        <p:spPr>
+          <a:xfrm>
+            <a:off x="502920" y="4434840"/>
+            <a:ext cx="2286000" cy="868680"/>
+          </a:xfrm>
+          <a:prstGeom prst="rect">
+            <a:avLst/>
+          </a:prstGeom>
+          <a:solidFill>
+            <a:srgbClr val="EFEDEA"/>
+          </a:solidFill>
+          <a:ln/>
+        </p:spPr>
+        <p:txBody>
+          <a:bodyPr wrap="square" lIns="0" tIns="0" rIns="0" bIns="0" rtlCol="0" anchor="ctr"/>
+          <a:lstStyle/>
+          <a:p>
+            <a:pPr algn="ctr" indent="0" marL="0">
+              <a:buNone/>
+            </a:pPr>
+            <a:r>
+              <a:rPr lang="en-US" sz="2200" b="1" dirty="0">
+                <a:solidFill>
+                  <a:schemeClr val="tx2"/>
+                </a:solidFill>
+              </a:rPr>
+              <a:t>757 → 1,200</a:t>
+            </a:r>
+            <a:endParaRPr lang="en-US" sz="2200" dirty="0"/>
+          </a:p>
+          <a:p>
+            <a:pPr algn="ctr" indent="0" marL="0">
+              <a:buNone/>
+            </a:pPr>
+            <a:r>
+              <a:rPr lang="en-US" sz="1200" dirty="0">
+                <a:solidFill>
+                  <a:schemeClr val="accent2"/>
+                </a:solidFill>
+              </a:rPr>
+              <a:t>Modules, 2025 → 2026E</a:t>
+            </a:r>
+            <a:endParaRPr lang="en-US" sz="2200" dirty="0"/>
+          </a:p>
+        </p:txBody>
+      </p:sp>
+      <p:pic>
+        <p:nvPicPr>
+          <p:cNvPr id="8" name="FTAI Power illustration" descr="/home/user/SPOT/deck/img/power.png">    </p:cNvPr>
+          <p:cNvPicPr>
+            <a:picLocks noChangeAspect="1"/>
+          </p:cNvPicPr>
+          <p:nvPr/>
+        </p:nvPicPr>
+        <p:blipFill>
+          <a:blip r:embed="rId2"/>
+          <a:stretch>
+            <a:fillRect/>
+          </a:stretch>
+        </p:blipFill>
+        <p:spPr>
+          <a:xfrm>
+            <a:off x="3383280" y="1600200"/>
+            <a:ext cx="2377440" cy="1344168"/>
+          </a:xfrm>
+          <a:prstGeom prst="rect">
+            <a:avLst/>
+          </a:prstGeom>
+        </p:spPr>
+      </p:pic>
+      <p:sp>
+        <p:nvSpPr>
+          <p:cNvPr id="9" name="FTAI Power name"/>
+          <p:cNvSpPr txBox="1"/>
+          <p:nvPr/>
+        </p:nvSpPr>
+        <p:spPr>
+          <a:xfrm>
+            <a:off x="3246120" y="3035808"/>
+            <a:ext cx="2651760" cy="365760"/>
+          </a:xfrm>
+          <a:prstGeom prst="rect">
+            <a:avLst/>
+          </a:prstGeom>
+          <a:noFill/>
+          <a:ln/>
+        </p:spPr>
+        <p:txBody>
+          <a:bodyPr wrap="square" lIns="0" tIns="0" rIns="0" bIns="0" rtlCol="0" anchor="ctr"/>
+          <a:lstStyle/>
+          <a:p>
+            <a:pPr algn="ctr" indent="0" marL="0">
+              <a:buNone/>
+            </a:pPr>
+            <a:r>
+              <a:rPr lang="en-US" sz="1800" b="1" dirty="0">
+                <a:solidFill>
+                  <a:schemeClr val="tx2"/>
+                </a:solidFill>
+              </a:rPr>
+              <a:t>FTAI Power</a:t>
+            </a:r>
+            <a:endParaRPr lang="en-US" sz="1800" dirty="0"/>
+          </a:p>
+        </p:txBody>
+      </p:sp>
+      <p:sp>
+        <p:nvSpPr>
+          <p:cNvPr id="10" name="FTAI Power description"/>
+          <p:cNvSpPr txBox="1"/>
+          <p:nvPr/>
+        </p:nvSpPr>
+        <p:spPr>
+          <a:xfrm>
+            <a:off x="3246120" y="3429000"/>
+            <a:ext cx="2651760" cy="914400"/>
+          </a:xfrm>
+          <a:prstGeom prst="rect">
+            <a:avLst/>
+          </a:prstGeom>
+          <a:noFill/>
+          <a:ln/>
+        </p:spPr>
+        <p:txBody>
+          <a:bodyPr wrap="square" lIns="0" tIns="0" rIns="0" bIns="0" rtlCol="0" anchor="t"/>
+          <a:lstStyle/>
+          <a:p>
+            <a:pPr algn="ctr" indent="0" marL="0">
+              <a:buNone/>
+            </a:pPr>
+            <a:r>
+              <a:rPr lang="en-US" sz="1300" dirty="0">
+                <a:solidFill>
+                  <a:srgbClr val="1A1A1A"/>
+                </a:solidFill>
+              </a:rPr>
+              <a:t>Converts CFM56 cores into 25 MW mobile gas turbines that power data centers.</a:t>
+            </a:r>
+            <a:endParaRPr lang="en-US" sz="1300" dirty="0"/>
+          </a:p>
+        </p:txBody>
+      </p:sp>
+      <p:sp>
+        <p:nvSpPr>
+          <p:cNvPr id="11" name="FTAI Power stat"/>
+          <p:cNvSpPr txBox="1"/>
+          <p:nvPr/>
+        </p:nvSpPr>
+        <p:spPr>
+          <a:xfrm>
+            <a:off x="3429000" y="4434840"/>
+            <a:ext cx="2286000" cy="868680"/>
+          </a:xfrm>
+          <a:prstGeom prst="rect">
+            <a:avLst/>
+          </a:prstGeom>
+          <a:solidFill>
+            <a:srgbClr val="EFEDEA"/>
+          </a:solidFill>
+          <a:ln/>
+        </p:spPr>
+        <p:txBody>
+          <a:bodyPr wrap="square" lIns="0" tIns="0" rIns="0" bIns="0" rtlCol="0" anchor="ctr"/>
+          <a:lstStyle/>
+          <a:p>
+            <a:pPr algn="ctr" indent="0" marL="0">
+              <a:buNone/>
+            </a:pPr>
+            <a:r>
+              <a:rPr lang="en-US" sz="2200" b="1" dirty="0">
+                <a:solidFill>
+                  <a:schemeClr val="tx2"/>
+                </a:solidFill>
+              </a:rPr>
+              <a:t>$450–750M</a:t>
+            </a:r>
+            <a:endParaRPr lang="en-US" sz="2200" dirty="0"/>
+          </a:p>
+          <a:p>
+            <a:pPr algn="ctr" indent="0" marL="0">
+              <a:buNone/>
+            </a:pPr>
+            <a:r>
+              <a:rPr lang="en-US" sz="1200" dirty="0">
+                <a:solidFill>
+                  <a:schemeClr val="accent2"/>
+                </a:solidFill>
+              </a:rPr>
+              <a:t>FY27 EBITDA guide</a:t>
+            </a:r>
+            <a:endParaRPr lang="en-US" sz="2200" dirty="0"/>
+          </a:p>
+        </p:txBody>
+      </p:sp>
+      <p:sp>
+        <p:nvSpPr>
+          <p:cNvPr id="12" name="Column divider 1"/>
+          <p:cNvSpPr/>
+          <p:nvPr/>
+        </p:nvSpPr>
+        <p:spPr>
+          <a:xfrm>
+            <a:off x="3108960" y="1691640"/>
+            <a:ext cx="0" cy="3566160"/>
+          </a:xfrm>
+          <a:prstGeom prst="line">
+            <a:avLst/>
+          </a:prstGeom>
+          <a:noFill/>
+          <a:ln w="12700">
+            <a:solidFill>
+              <a:srgbClr val="DCD8D3"/>
+            </a:solidFill>
+            <a:prstDash val="solid"/>
+          </a:ln>
+        </p:spPr>
+      </p:sp>
+      <p:pic>
+        <p:nvPicPr>
+          <p:cNvPr id="13" name="Leasing + SCI illustration" descr="/home/user/SPOT/deck/img/aircraft.png">    </p:cNvPr>
+          <p:cNvPicPr>
+            <a:picLocks noChangeAspect="1"/>
+          </p:cNvPicPr>
+          <p:nvPr/>
+        </p:nvPicPr>
+        <p:blipFill>
+          <a:blip r:embed="rId3"/>
+          <a:stretch>
+            <a:fillRect/>
+          </a:stretch>
+        </p:blipFill>
+        <p:spPr>
+          <a:xfrm>
+            <a:off x="6309360" y="1600200"/>
+            <a:ext cx="2377440" cy="1344168"/>
+          </a:xfrm>
+          <a:prstGeom prst="rect">
+            <a:avLst/>
+          </a:prstGeom>
+        </p:spPr>
+      </p:pic>
+      <p:sp>
+        <p:nvSpPr>
+          <p:cNvPr id="14" name="Leasing + SCI name"/>
+          <p:cNvSpPr txBox="1"/>
+          <p:nvPr/>
+        </p:nvSpPr>
+        <p:spPr>
+          <a:xfrm>
+            <a:off x="6172200" y="3035808"/>
+            <a:ext cx="2651760" cy="365760"/>
+          </a:xfrm>
+          <a:prstGeom prst="rect">
+            <a:avLst/>
+          </a:prstGeom>
+          <a:noFill/>
+          <a:ln/>
+        </p:spPr>
+        <p:txBody>
+          <a:bodyPr wrap="square" lIns="0" tIns="0" rIns="0" bIns="0" rtlCol="0" anchor="ctr"/>
+          <a:lstStyle/>
+          <a:p>
+            <a:pPr algn="ctr" indent="0" marL="0">
+              <a:buNone/>
+            </a:pPr>
+            <a:r>
+              <a:rPr lang="en-US" sz="1800" b="1" dirty="0">
+                <a:solidFill>
+                  <a:schemeClr val="tx2"/>
+                </a:solidFill>
+              </a:rPr>
+              <a:t>Leasing + SCI</a:t>
+            </a:r>
+            <a:endParaRPr lang="en-US" sz="1800" dirty="0"/>
+          </a:p>
+        </p:txBody>
+      </p:sp>
+      <p:sp>
+        <p:nvSpPr>
+          <p:cNvPr id="15" name="Leasing + SCI description"/>
+          <p:cNvSpPr txBox="1"/>
+          <p:nvPr/>
+        </p:nvSpPr>
+        <p:spPr>
+          <a:xfrm>
+            <a:off x="6172200" y="3429000"/>
+            <a:ext cx="2651760" cy="914400"/>
+          </a:xfrm>
+          <a:prstGeom prst="rect">
+            <a:avLst/>
+          </a:prstGeom>
+          <a:noFill/>
+          <a:ln/>
+        </p:spPr>
+        <p:txBody>
+          <a:bodyPr wrap="square" lIns="0" tIns="0" rIns="0" bIns="0" rtlCol="0" anchor="t"/>
+          <a:lstStyle/>
+          <a:p>
+            <a:pPr algn="ctr" indent="0" marL="0">
+              <a:buNone/>
+            </a:pPr>
+            <a:r>
+              <a:rPr lang="en-US" sz="1300" dirty="0">
+                <a:solidFill>
+                  <a:srgbClr val="1A1A1A"/>
+                </a:solidFill>
+              </a:rPr>
+              <a:t>Leases jets and engines. The SCI partnership buys mid-life jets and sends all engine work to FTAI.</a:t>
+            </a:r>
+            <a:endParaRPr lang="en-US" sz="1300" dirty="0"/>
+          </a:p>
+        </p:txBody>
+      </p:sp>
+      <p:sp>
+        <p:nvSpPr>
+          <p:cNvPr id="16" name="Leasing + SCI stat"/>
+          <p:cNvSpPr txBox="1"/>
+          <p:nvPr/>
+        </p:nvSpPr>
+        <p:spPr>
+          <a:xfrm>
+            <a:off x="6355080" y="4434840"/>
+            <a:ext cx="2286000" cy="868680"/>
+          </a:xfrm>
+          <a:prstGeom prst="rect">
+            <a:avLst/>
+          </a:prstGeom>
+          <a:solidFill>
+            <a:srgbClr val="EFEDEA"/>
+          </a:solidFill>
+          <a:ln/>
+        </p:spPr>
+        <p:txBody>
+          <a:bodyPr wrap="square" lIns="0" tIns="0" rIns="0" bIns="0" rtlCol="0" anchor="ctr"/>
+          <a:lstStyle/>
+          <a:p>
+            <a:pPr algn="ctr" indent="0" marL="0">
+              <a:buNone/>
+            </a:pPr>
+            <a:r>
+              <a:rPr lang="en-US" sz="2200" b="1" dirty="0">
+                <a:solidFill>
+                  <a:schemeClr val="tx2"/>
+                </a:solidFill>
+              </a:rPr>
+              <a:t>316</a:t>
+            </a:r>
+            <a:endParaRPr lang="en-US" sz="2200" dirty="0"/>
+          </a:p>
+          <a:p>
+            <a:pPr algn="ctr" indent="0" marL="0">
+              <a:buNone/>
+            </a:pPr>
+            <a:r>
+              <a:rPr lang="en-US" sz="1200" dirty="0">
+                <a:solidFill>
+                  <a:schemeClr val="accent2"/>
+                </a:solidFill>
+              </a:rPr>
+              <a:t>SCI aircraft, YE26E</a:t>
+            </a:r>
+            <a:endParaRPr lang="en-US" sz="2200" dirty="0"/>
+          </a:p>
+        </p:txBody>
+      </p:sp>
+      <p:sp>
+        <p:nvSpPr>
+          <p:cNvPr id="17" name="Column divider 2"/>
+          <p:cNvSpPr/>
+          <p:nvPr/>
+        </p:nvSpPr>
+        <p:spPr>
+          <a:xfrm>
+            <a:off x="6035040" y="1691640"/>
+            <a:ext cx="0" cy="3566160"/>
+          </a:xfrm>
+          <a:prstGeom prst="line">
+            <a:avLst/>
+          </a:prstGeom>
+          <a:noFill/>
+          <a:ln w="12700">
+            <a:solidFill>
+              <a:srgbClr val="DCD8D3"/>
+            </a:solidFill>
+            <a:prstDash val="solid"/>
+          </a:ln>
+        </p:spPr>
+      </p:sp>
+      <p:sp>
+        <p:nvSpPr>
+          <p:cNvPr id="18" name="Takeaway"/>
+          <p:cNvSpPr txBox="1"/>
+          <p:nvPr/>
+        </p:nvSpPr>
+        <p:spPr>
+          <a:xfrm>
+            <a:off x="320040" y="5504688"/>
+            <a:ext cx="8503920" cy="566928"/>
+          </a:xfrm>
+          <a:prstGeom prst="rect">
+            <a:avLst/>
+          </a:prstGeom>
+          <a:solidFill>
+            <a:srgbClr val="0A1C58"/>
+          </a:solidFill>
+          <a:ln/>
+        </p:spPr>
+        <p:txBody>
+          <a:bodyPr wrap="square" lIns="101600" tIns="25400" rIns="101600" bIns="25400" rtlCol="0" anchor="ctr"/>
+          <a:lstStyle/>
+          <a:p>
+            <a:pPr algn="ctr" indent="0" marL="0">
+              <a:buNone/>
+            </a:pPr>
+            <a:r>
+              <a:rPr lang="en-US" sz="1700" b="1" dirty="0">
+                <a:solidFill>
+                  <a:schemeClr val="bg1"/>
+                </a:solidFill>
+              </a:rPr>
+              <a:t>One engine, three ways to earn: fix it, power with it, and own the planes it flies on.</a:t>
+            </a:r>
+            <a:endParaRPr lang="en-US" sz="1700" dirty="0"/>
+          </a:p>
+        </p:txBody>
+      </p:sp>
+      <p:sp>
+        <p:nvSpPr>
+          <p:cNvPr id="19" name="Source"/>
+          <p:cNvSpPr txBox="1"/>
+          <p:nvPr/>
+        </p:nvSpPr>
+        <p:spPr>
+          <a:xfrm>
+            <a:off x="320040" y="6355080"/>
+            <a:ext cx="7132320" cy="274320"/>
+          </a:xfrm>
+          <a:prstGeom prst="rect">
+            <a:avLst/>
+          </a:prstGeom>
+          <a:noFill/>
+          <a:ln/>
+        </p:spPr>
+        <p:txBody>
+          <a:bodyPr wrap="square" lIns="0" tIns="0" rIns="0" bIns="0" rtlCol="0" anchor="ctr"/>
+          <a:lstStyle/>
+          <a:p>
+            <a:pPr indent="0" marL="0">
+              <a:buNone/>
+            </a:pPr>
+            <a:r>
+              <a:rPr lang="en-US" sz="1100" b="1" dirty="0">
+                <a:solidFill>
+                  <a:srgbClr val="1A1A1A"/>
+                </a:solidFill>
+              </a:rPr>
+              <a:t>Source: </a:t>
+            </a:r>
+            <a:pPr indent="0" marL="0">
+              <a:buNone/>
+            </a:pPr>
+            <a:r>
+              <a:rPr lang="en-US" sz="1100" dirty="0">
+                <a:solidFill>
+                  <a:srgbClr val="1A1A1A"/>
+                </a:solidFill>
+              </a:rPr>
+              <a:t>FTAI filings and earnings calls, GPS model. Illustrations are schematic.</a:t>
+            </a:r>
+            <a:endParaRPr lang="en-US" sz="1100" dirty="0"/>
+          </a:p>
+        </p:txBody>
+      </p:sp>
+      <p:sp>
+        <p:nvSpPr>
+          <p:cNvPr id="25" name="Slide Number Placeholder 0"/>
+          <p:cNvSpPr>
+            <a:spLocks noGrp="1"/>
+          </p:cNvSpPr>
+          <p:nvPr>
+            <p:ph type="sldNum" sz="quarter" idx="4294967295"/>
+          </p:nvPr>
+        </p:nvSpPr>
+        <p:spPr>
+          <a:xfrm>
+            <a:off x="7635240" y="6327648"/>
+            <a:ext cx="411480" cy="274320"/>
+          </a:xfrm>
+          <a:prstGeom prst="rect">
+            <a:avLst/>
+          </a:prstGeom>
+          <a:extLst>
+            <a:ext uri="{C572A759-6A51-4108-AA02-DFA0A04FC94B}">
+              <ma14:wrappingTextBoxFlag xmlns:ma14="http://schemas.microsoft.com/office/mac/drawingml/2011/main" val="0"/>
+            </a:ext>
+          </a:extLst>
+        </p:spPr>
+        <p:txBody>
+          <a:bodyPr/>
+          <a:lstStyle>
+            <a:lvl1pPr>
+              <a:defRPr sz="1100">
+                <a:solidFill>
+                  <a:srgbClr val="1A1A1A"/>
+                </a:solidFill>
+              </a:defRPr>
+            </a:lvl1pPr>
+          </a:lstStyle>
+          <a:p>
+            <a:pPr algn="r"/>
+            <a:fld id="{F7021451-1387-4CA6-816F-3879F97B5CBC}" type="slidenum">
+              <a:rPr b="1" lang="en-US"/>
+              <a:t>7</a:t>
+            </a:fld>
+            <a:endParaRPr lang="en-US"/>
+          </a:p>
+        </p:txBody>
+      </p:sp>
+    </p:spTree>
+  </p:cSld>
+  <p:clrMapOvr>
+    <a:masterClrMapping/>
+  </p:clrMapOvr>
+</p:sld>
+</file>
+
+<file path=ppt/slides/slide8.xml><?xml version="1.0" encoding="utf-8"?>
+<p:sld xmlns:a="http://schemas.openxmlformats.org/drawingml/2006/main" xmlns:r="http://schemas.openxmlformats.org/officeDocument/2006/relationships" xmlns:p="http://schemas.openxmlformats.org/presentationml/2006/main">
+  <p:cSld name="Slide 8">
+    <p:spTree>
+      <p:nvGrpSpPr>
+        <p:cNvPr id="1" name=""/>
+        <p:cNvGrpSpPr/>
+        <p:nvPr/>
+      </p:nvGrpSpPr>
+      <p:grpSpPr>
+        <a:xfrm>
+          <a:off x="0" y="0"/>
+          <a:ext cx="0" cy="0"/>
+          <a:chOff x="0" y="0"/>
+          <a:chExt cx="0" cy="0"/>
+        </a:xfrm>
+      </p:grpSpPr>
+      <p:sp>
+        <p:nvSpPr>
+          <p:cNvPr id="2" name="Text 1"/>
+          <p:cNvSpPr/>
+          <p:nvPr>
+            <p:ph idx="102" type="title" hasCustomPrompt="1"/>
+          </p:nvPr>
+        </p:nvSpPr>
+        <p:spPr>
+          <a:xfrm>
+            <a:off x="320040" y="182880"/>
+            <a:ext cx="7132320" cy="640080"/>
+          </a:xfrm>
+          <a:prstGeom prst="rect">
+            <a:avLst/>
+          </a:prstGeom>
+          <a:noFill/>
+          <a:ln/>
+        </p:spPr>
+        <p:txBody>
+          <a:bodyPr wrap="square" lIns="0" tIns="0" rIns="0" bIns="0" rtlCol="0" anchor="ctr"/>
+          <a:lstStyle/>
+          <a:p>
+            <a:pPr algn="l" indent="0" marL="0">
+              <a:buNone/>
+            </a:pPr>
+            <a:r>
+              <a:rPr lang="en-US" sz="3200" b="1" dirty="0">
+                <a:solidFill>
+                  <a:schemeClr val="tx2"/>
+                </a:solidFill>
+              </a:rPr>
               <a:t>Business Overview (2/2)</a:t>
             </a:r>
             <a:endParaRPr lang="en-US" sz="3200" dirty="0"/>
@@ -9063,7 +9865,7 @@
             <a:pPr algn="r"/>
             <a:fld id="{F7021451-1387-4CA6-816F-3879F97B5CBC}" type="slidenum">
               <a:rPr b="1" lang="en-US"/>
-              <a:t>7</a:t>
+              <a:t>8</a:t>
             </a:fld>
             <a:endParaRPr lang="en-US"/>
           </a:p>

--- a/deck/FTAI_Long_Pitch.pptx
+++ b/deck/FTAI_Long_Pitch.pptx
@@ -114,12 +114,12 @@
   <p:extLst>
     <p:ext uri="{521415D9-36F7-43E2-AB2F-B90AF26B5E84}">
       <p14:sectionLst xmlns:p14="http://schemas.microsoft.com/office/powerpoint/2010/main">
-        <p14:section name="Introduction" id="{eb4af803-e60c-5174-4412-4ed0535da0f6}">
+        <p14:section name="Introduction" id="{50def43a-4d1c-54d2-cd96-23e6cfacceb5}">
           <p14:sldIdLst>
             <p14:sldId id="256"/>
           </p14:sldIdLst>
         </p14:section>
-        <p14:section name="The Opportunity" id="{20258212-df10-de1c-26c8-523f20c4b6ba}">
+        <p14:section name="The Opportunity" id="{e31d002f-ccfc-ae80-18b6-007b7d5b59d4}">
           <p14:sldIdLst>
             <p14:sldId id="257"/>
             <p14:sldId id="258"/>
@@ -127,12 +127,12 @@
             <p14:sldId id="260"/>
           </p14:sldIdLst>
         </p14:section>
-        <p14:section name="Returns" id="{e277c82b-bff0-828e-9676-ee448e4233c2}">
+        <p14:section name="Returns" id="{63b2dc6e-20c5-e749-e68e-e8a4464dc7e4}">
           <p14:sldIdLst>
             <p14:sldId id="261"/>
           </p14:sldIdLst>
         </p14:section>
-        <p14:section name="Business Overview" id="{80493cde-9a26-e612-11f5-64b4967261d5}">
+        <p14:section name="Business Overview" id="{078566ca-fb96-195d-9bcf-0932ff475bc7}">
           <p14:sldIdLst>
             <p14:sldId id="262"/>
             <p14:sldId id="263"/>
@@ -2273,7 +2273,7 @@
           <a:p>
             <a:r>
               <a:rPr lang="en-US" dirty="0"/>
-              <a:t>Attribution re-runs the full model (blended DCF: 50% perpetuity, 50% exit multiple) for all 8 on/off combinations. Margins = OEM escalator, pass-through, Aerospace margin ex-PMA and PMA penetration rows. Volume = FTAI share of MRO and SCI aircraft rows. Power = Mod-1 units delivered (off = 0, i.e. what the market prices today). Exact values: baseline $99.16, margins +$36.02, volume +$56.49, Power +$116.36, total $308.03 (dollars and % upside rounded by largest remainder so each bridge sums). Power's DCF contribution is larger than its $52 SOTP value on the Opportunity (3/3) slide because the DCF captures the ramp to $1.3B of FY31 EBITDA and terminal value, while the SOTP applies 12x to FY27E $450M only.</a:t>
+              <a:t>Return math uses the base-case FY27E sum of the parts ($276.65/share): Aerospace 16x, Power 12x, Leasing + SCI 9x, less corporate, net debt and preferred. Attribution re-runs the full model for all 8 on/off combinations of the three theses. Margins = OEM escalator, pass-through, Aerospace margin ex-PMA and PMA rows. Volume = FTAI share of MRO and SCI aircraft rows. Power = Mod-1 units delivered (off = 0, i.e. what the market prices today). Bear case with no Power = $171.86 vs. $167.03 today (+$4.83). Shapley contributions: margins +$17.04, volume +$32.66, Power +$55.08 (the $51.90 SOTP value plus ~$3 of FY27 Power cash that lowers net debt). Total $276.64.</a:t>
             </a:r>
             <a:endParaRPr lang="en-US" dirty="0"/>
           </a:p>
@@ -6326,7 +6326,7 @@
                   <a:schemeClr val="bg1"/>
                 </a:solidFill>
               </a:rPr>
-              <a:t>Three under-priced drivers take a –41% bear baseline to +84% upside.</a:t>
+              <a:t>At $167, the market prices the bear case. Our three theses add $110 of upside.</a:t>
             </a:r>
             <a:endParaRPr lang="en-US" sz="1700" dirty="0"/>
           </a:p>
@@ -6469,7 +6469,7 @@
                   <a:schemeClr val="tx2"/>
                 </a:solidFill>
               </a:rPr>
-              <a:t>+$36</a:t>
+              <a:t>+$17</a:t>
             </a:r>
             <a:endParaRPr lang="en-US" sz="1300" dirty="0"/>
           </a:p>
@@ -6483,7 +6483,7 @@
                   <a:schemeClr val="accent2"/>
                 </a:solidFill>
               </a:rPr>
-              <a:t>+21% upside</a:t>
+              <a:t>+10% upside</a:t>
             </a:r>
             <a:endParaRPr lang="en-US" sz="1300" dirty="0"/>
           </a:p>
@@ -6588,7 +6588,7 @@
                   <a:schemeClr val="tx2"/>
                 </a:solidFill>
               </a:rPr>
-              <a:t>+$57</a:t>
+              <a:t>+$33</a:t>
             </a:r>
             <a:endParaRPr lang="en-US" sz="1300" dirty="0"/>
           </a:p>
@@ -6602,7 +6602,7 @@
                   <a:schemeClr val="accent2"/>
                 </a:solidFill>
               </a:rPr>
-              <a:t>+34% upside</a:t>
+              <a:t>+20% upside</a:t>
             </a:r>
             <a:endParaRPr lang="en-US" sz="1300" dirty="0"/>
           </a:p>
@@ -6707,7 +6707,7 @@
                   <a:schemeClr val="tx2"/>
                 </a:solidFill>
               </a:rPr>
-              <a:t>+$116</a:t>
+              <a:t>+$55</a:t>
             </a:r>
             <a:endParaRPr lang="en-US" sz="1300" dirty="0"/>
           </a:p>
@@ -6721,7 +6721,7 @@
                   <a:schemeClr val="accent2"/>
                 </a:solidFill>
               </a:rPr>
-              <a:t>+70% upside</a:t>
+              <a:t>+33% upside</a:t>
             </a:r>
             <a:endParaRPr lang="en-US" sz="1300" dirty="0"/>
           </a:p>
@@ -6777,7 +6777,7 @@
                   <a:schemeClr val="accent2"/>
                 </a:solidFill>
               </a:rPr>
-              <a:t>Bear baseline (Bear-case margins and share, no Power): $99 per share, 41% below today's $167.</a:t>
+              <a:t>Bear case (bear margins and share, no Power) is worth $172 on our SOTP, just above today's $167.</a:t>
             </a:r>
             <a:endParaRPr lang="en-US" sz="1200" dirty="0"/>
           </a:p>
@@ -6814,36 +6814,36 @@
               <a:buNone/>
             </a:pPr>
             <a:r>
-              <a:rPr lang="en-US" sz="1400" dirty="0">
+              <a:rPr lang="en-US" sz="1300" dirty="0">
                 <a:solidFill>
                   <a:srgbClr val="1A1A1A"/>
                 </a:solidFill>
               </a:rPr>
-              <a:t>Base case: $99 + $36 margins + $57 volume + $116 Power = </a:t>
-            </a:r>
-            <a:pPr algn="ctr" indent="0" marL="0">
-              <a:buNone/>
-            </a:pPr>
-            <a:r>
-              <a:rPr lang="en-US" sz="1400" b="1" dirty="0">
+              <a:t>$167 today + $5 to bear value + $17 margins + $33 volume + $55 Power = </a:t>
+            </a:r>
+            <a:pPr algn="ctr" indent="0" marL="0">
+              <a:buNone/>
+            </a:pPr>
+            <a:r>
+              <a:rPr lang="en-US" sz="1300" b="1" dirty="0">
                 <a:solidFill>
                   <a:srgbClr val="1A1A1A"/>
                 </a:solidFill>
               </a:rPr>
-              <a:t>$308 target</a:t>
-            </a:r>
-            <a:pPr algn="ctr" indent="0" marL="0">
-              <a:buNone/>
-            </a:pPr>
-            <a:r>
-              <a:rPr lang="en-US" sz="1400" dirty="0">
+              <a:t>$277 SOTP</a:t>
+            </a:r>
+            <a:pPr algn="ctr" indent="0" marL="0">
+              <a:buNone/>
+            </a:pPr>
+            <a:r>
+              <a:rPr lang="en-US" sz="1300" dirty="0">
                 <a:solidFill>
                   <a:srgbClr val="1A1A1A"/>
                 </a:solidFill>
               </a:rPr>
-              <a:t> (+84%)</a:t>
-            </a:r>
-            <a:endParaRPr lang="en-US" sz="1400" dirty="0"/>
+              <a:t> (+66%)</a:t>
+            </a:r>
+            <a:endParaRPr lang="en-US" sz="1300" dirty="0"/>
           </a:p>
         </p:txBody>
       </p:sp>
@@ -6888,7 +6888,7 @@
                   <a:srgbClr val="1A1A1A"/>
                 </a:solidFill>
               </a:rPr>
-              <a:t>GPS model: thesis drivers switched Bear vs. Base (Power off = 0 units), Shapley average; blended DCF</a:t>
+              <a:t>GPS model: base-case FY27E SOTP; thesis drivers switched Bear vs. Base (Power off = 0 units), Shapley average</a:t>
             </a:r>
             <a:endParaRPr lang="en-US" sz="1100" dirty="0"/>
           </a:p>

--- a/deck/FTAI_Long_Pitch.pptx
+++ b/deck/FTAI_Long_Pitch.pptx
@@ -114,12 +114,12 @@
   <p:extLst>
     <p:ext uri="{521415D9-36F7-43E2-AB2F-B90AF26B5E84}">
       <p14:sectionLst xmlns:p14="http://schemas.microsoft.com/office/powerpoint/2010/main">
-        <p14:section name="Introduction" id="{50def43a-4d1c-54d2-cd96-23e6cfacceb5}">
+        <p14:section name="Introduction" id="{46874f80-4d71-d0a9-f658-ae55353e5e7b}">
           <p14:sldIdLst>
             <p14:sldId id="256"/>
           </p14:sldIdLst>
         </p14:section>
-        <p14:section name="The Opportunity" id="{e31d002f-ccfc-ae80-18b6-007b7d5b59d4}">
+        <p14:section name="The Opportunity" id="{042e9f46-9e83-59f4-d0ed-4a5a8bb6af77}">
           <p14:sldIdLst>
             <p14:sldId id="257"/>
             <p14:sldId id="258"/>
@@ -127,12 +127,12 @@
             <p14:sldId id="260"/>
           </p14:sldIdLst>
         </p14:section>
-        <p14:section name="Returns" id="{63b2dc6e-20c5-e749-e68e-e8a4464dc7e4}">
+        <p14:section name="Returns" id="{f14cb231-a1d1-2c4c-384a-80d71f0b0bbd}">
           <p14:sldIdLst>
             <p14:sldId id="261"/>
           </p14:sldIdLst>
         </p14:section>
-        <p14:section name="Business Overview" id="{078566ca-fb96-195d-9bcf-0932ff475bc7}">
+        <p14:section name="Business Overview" id="{3e1a021a-5d6f-5cff-a771-3f3210bf669e}">
           <p14:sldIdLst>
             <p14:sldId id="262"/>
             <p14:sldId id="263"/>
@@ -798,7 +798,7 @@
       <c:layout/>
       <c:barChart>
         <c:barDir val="col"/>
-        <c:grouping val="clustered"/>
+        <c:grouping val="stacked"/>
         <c:varyColors val="0"/>
         <c:ser>
           <c:idx val="0"/>
@@ -809,7 +809,85 @@
               <c:strCache>
                 <c:ptCount val="1"/>
                 <c:pt idx="0">
-                  <c:v>EV / EBITDA</c:v>
+                  <c:v>Market</c:v>
+                </c:pt>
+              </c:strCache>
+            </c:strRef>
+          </c:tx>
+          <c:spPr>
+            <a:solidFill>
+              <a:srgbClr val="B5AEA9"/>
+            </a:solidFill>
+            <a:effectLst/>
+          </c:spPr>
+          <c:invertIfNegative val="0"/>
+          <c:dLbls>
+            <c:numFmt formatCode="0.0&quot;x&quot;;;;" sourceLinked="0"/>
+            <c:txPr>
+              <a:bodyPr/>
+              <a:lstStyle/>
+              <a:p>
+                <a:pPr>
+                  <a:defRPr b="1" i="0" strike="noStrike" sz="1500" u="none">
+                    <a:solidFill>
+                      <a:srgbClr val="FFFFFF"/>
+                    </a:solidFill>
+                    <a:latin typeface="+mn-lt"/>
+                  </a:defRPr>
+                </a:pPr>
+              </a:p>
+            </c:txPr>
+            <c:dLblPos val="inEnd"/>
+            <c:showLegendKey val="0"/>
+            <c:showVal val="1"/>
+            <c:showCatName val="0"/>
+            <c:showSerName val="0"/>
+            <c:showPercent val="0"/>
+            <c:showBubbleSize val="0"/>
+            <c:showLeaderLines val="0"/>
+          </c:dLbls>
+          <c:cat>
+            <c:multiLvlStrRef>
+              <c:f>Sheet1!$A$2:$A$3</c:f>
+              <c:multiLvlStrCache>
+                <c:ptCount val="2"/>
+                <c:lvl>
+                  <c:pt idx="0">
+                    <c:v>Market Today</c:v>
+                  </c:pt>
+                  <c:pt idx="1">
+                    <c:v>Our SOTP</c:v>
+                  </c:pt>
+                </c:lvl>
+              </c:multiLvlStrCache>
+            </c:multiLvlStrRef>
+          </c:cat>
+          <c:val>
+            <c:numRef>
+              <c:f>Sheet1!$B$2:$B$3</c:f>
+              <c:numCache>
+                <c:formatCode>General</c:formatCode>
+                <c:ptCount val="2"/>
+                <c:pt idx="0">
+                  <c:v>9.2</c:v>
+                </c:pt>
+                <c:pt idx="1">
+                  <c:v/>
+                </c:pt>
+              </c:numCache>
+            </c:numRef>
+          </c:val>
+        </c:ser>
+        <c:ser>
+          <c:idx val="1"/>
+          <c:order val="1"/>
+          <c:tx>
+            <c:strRef>
+              <c:f>Sheet1!$C$1</c:f>
+              <c:strCache>
+                <c:ptCount val="1"/>
+                <c:pt idx="0">
+                  <c:v>SOTP</c:v>
                 </c:pt>
               </c:strCache>
             </c:strRef>
@@ -822,21 +900,22 @@
           </c:spPr>
           <c:invertIfNegative val="0"/>
           <c:dLbls>
-            <c:numFmt formatCode="0.0&quot;x&quot;" sourceLinked="0"/>
+            <c:numFmt formatCode="0.0&quot;x&quot;;;;" sourceLinked="0"/>
             <c:txPr>
               <a:bodyPr/>
               <a:lstStyle/>
               <a:p>
                 <a:pPr>
-                  <a:defRPr b="1" i="0" strike="noStrike" sz="1300" u="none">
+                  <a:defRPr b="1" i="0" strike="noStrike" sz="1500" u="none">
                     <a:solidFill>
-                      <a:srgbClr val="1A1A1A"/>
+                      <a:srgbClr val="FFFFFF"/>
                     </a:solidFill>
                     <a:latin typeface="+mn-lt"/>
                   </a:defRPr>
                 </a:pPr>
               </a:p>
             </c:txPr>
+            <c:dLblPos val="inEnd"/>
             <c:showLegendKey val="0"/>
             <c:showVal val="1"/>
             <c:showCatName val="0"/>
@@ -847,18 +926,15 @@
           </c:dLbls>
           <c:cat>
             <c:multiLvlStrRef>
-              <c:f>Sheet1!$A$2:$A$4</c:f>
+              <c:f>Sheet1!$A$2:$A$3</c:f>
               <c:multiLvlStrCache>
-                <c:ptCount val="3"/>
+                <c:ptCount val="2"/>
                 <c:lvl>
                   <c:pt idx="0">
-                    <c:v>FY26E</c:v>
+                    <c:v>Market Today</c:v>
                   </c:pt>
                   <c:pt idx="1">
-                    <c:v>FY27E</c:v>
-                  </c:pt>
-                  <c:pt idx="2">
-                    <c:v>FY28E</c:v>
+                    <c:v>Our SOTP</c:v>
                   </c:pt>
                 </c:lvl>
               </c:multiLvlStrCache>
@@ -866,39 +942,37 @@
           </c:cat>
           <c:val>
             <c:numRef>
-              <c:f>Sheet1!$B$2:$B$4</c:f>
+              <c:f>Sheet1!$C$2:$C$3</c:f>
               <c:numCache>
                 <c:formatCode>General</c:formatCode>
-                <c:ptCount val="3"/>
+                <c:ptCount val="2"/>
                 <c:pt idx="0">
-                  <c:v>15.9</c:v>
+                  <c:v/>
                 </c:pt>
                 <c:pt idx="1">
-                  <c:v>9.8</c:v>
-                </c:pt>
-                <c:pt idx="2">
-                  <c:v>6.8</c:v>
+                  <c:v>14</c:v>
                 </c:pt>
               </c:numCache>
             </c:numRef>
           </c:val>
         </c:ser>
         <c:dLbls>
-          <c:numFmt formatCode="0.0&quot;x&quot;" sourceLinked="0"/>
+          <c:numFmt formatCode="0.0&quot;x&quot;;;;" sourceLinked="0"/>
           <c:txPr>
             <a:bodyPr/>
             <a:lstStyle/>
             <a:p>
               <a:pPr>
-                <a:defRPr b="1" i="0" strike="noStrike" sz="1300" u="none">
+                <a:defRPr b="1" i="0" strike="noStrike" sz="1500" u="none">
                   <a:solidFill>
-                    <a:srgbClr val="1A1A1A"/>
+                    <a:srgbClr val="FFFFFF"/>
                   </a:solidFill>
                   <a:latin typeface="+mn-lt"/>
                 </a:defRPr>
               </a:pPr>
             </a:p>
           </c:txPr>
+          <c:dLblPos val="inEnd"/>
           <c:showLegendKey val="0"/>
           <c:showVal val="1"/>
           <c:showCatName val="0"/>
@@ -907,8 +981,8 @@
           <c:showBubbleSize val="0"/>
           <c:showLeaderLines val="0"/>
         </c:dLbls>
-        <c:gapWidth val="45"/>
-        <c:overlap val="0"/>
+        <c:gapWidth val="60"/>
+        <c:overlap val="100"/>
         <c:axId val="2094734554"/>
         <c:axId val="2094734552"/>
         <c:axId val="2094734556"/>
@@ -958,7 +1032,7 @@
         <c:axId val="2094734552"/>
         <c:scaling>
           <c:orientation val="minMax"/>
-          <c:max val="19"/>
+          <c:max val="16.5"/>
           <c:min val="0"/>
         </c:scaling>
         <c:delete val="1"/>
@@ -2097,7 +2171,7 @@
           <a:p>
             <a:r>
               <a:rPr lang="en-US" dirty="0"/>
-              <a:t>EV of $20.56B at $167.03 (10/2/26) over Jefferies Adj. EBITDA of $1,289M (FY26E), $2,099M (FY27E) and $3,023M (FY28E).</a:t>
+              <a:t>Market: EV of $20.56B at $167.03 (10/2/26) over GPS FY27E Adj. EBITDA of $2,239M = 9.2x (9.8x on Jefferies FY27E of $2,099M; ~16x on FY26E). Our SOTP: $31.3B implied EV over the same $2,239M = 14.0x blended (Aerospace 16x, Power 12x, Leasing + SCI 9x).</a:t>
             </a:r>
             <a:endParaRPr lang="en-US" dirty="0"/>
           </a:p>
@@ -5372,35 +5446,13 @@
       </p:graphicFrame>
       <p:sp>
         <p:nvSpPr>
-          <p:cNvPr id="14" name="FY28 highlight"/>
-          <p:cNvSpPr/>
-          <p:nvPr/>
-        </p:nvSpPr>
-        <p:spPr>
-          <a:xfrm>
-            <a:off x="7644384" y="3383280"/>
-            <a:ext cx="1024128" cy="1481328"/>
-          </a:xfrm>
-          <a:prstGeom prst="rect">
-            <a:avLst/>
-          </a:prstGeom>
-          <a:ln w="25400">
-            <a:solidFill>
-              <a:schemeClr val="accent2"/>
-            </a:solidFill>
-            <a:prstDash val="dash"/>
-          </a:ln>
-        </p:spPr>
-      </p:sp>
-      <p:sp>
-        <p:nvSpPr>
-          <p:cNvPr id="15" name="Multiple caption"/>
+          <p:cNvPr id="14" name="Multiple caption"/>
           <p:cNvSpPr txBox="1"/>
           <p:nvPr/>
         </p:nvSpPr>
         <p:spPr>
           <a:xfrm>
-            <a:off x="5257800" y="5102352"/>
+            <a:off x="5257800" y="4937760"/>
             <a:ext cx="3566160" cy="274320"/>
           </a:xfrm>
           <a:prstGeom prst="rect">
@@ -5422,7 +5474,7 @@
                   <a:schemeClr val="accent2"/>
                 </a:solidFill>
               </a:rPr>
-              <a:t>EV / Adj. EBITDA (Jefferies estimates)</a:t>
+              <a:t>EV / FY27E Adj. EBITDA (GPS model)</a:t>
             </a:r>
             <a:endParaRPr lang="en-US" sz="1200" dirty="0"/>
           </a:p>
@@ -5430,7 +5482,7 @@
       </p:sp>
       <p:sp>
         <p:nvSpPr>
-          <p:cNvPr id="16" name="Takeaway"/>
+          <p:cNvPr id="15" name="Takeaway"/>
           <p:cNvSpPr txBox="1"/>
           <p:nvPr/>
         </p:nvSpPr>
@@ -5468,7 +5520,7 @@
       </p:sp>
       <p:sp>
         <p:nvSpPr>
-          <p:cNvPr id="17" name="Source"/>
+          <p:cNvPr id="16" name="Source"/>
           <p:cNvSpPr txBox="1"/>
           <p:nvPr/>
         </p:nvSpPr>
@@ -5507,7 +5559,7 @@
                   <a:srgbClr val="1A1A1A"/>
                 </a:solidFill>
               </a:rPr>
-              <a:t>Muddy Waters Research (Jan. 2025), Jefferies (8/2/26), FTAI filings, GPS analysis</a:t>
+              <a:t>Muddy Waters Research (Jan. 2025), FTAI filings, GPS model</a:t>
             </a:r>
             <a:endParaRPr lang="en-US" sz="1100" dirty="0"/>
           </a:p>

--- a/deck/FTAI_Long_Pitch.pptx
+++ b/deck/FTAI_Long_Pitch.pptx
@@ -114,12 +114,12 @@
   <p:extLst>
     <p:ext uri="{521415D9-36F7-43E2-AB2F-B90AF26B5E84}">
       <p14:sectionLst xmlns:p14="http://schemas.microsoft.com/office/powerpoint/2010/main">
-        <p14:section name="Introduction" id="{46874f80-4d71-d0a9-f658-ae55353e5e7b}">
+        <p14:section name="Introduction" id="{468378ea-4bbc-1575-aaf3-25041d37d700}">
           <p14:sldIdLst>
             <p14:sldId id="256"/>
           </p14:sldIdLst>
         </p14:section>
-        <p14:section name="The Opportunity" id="{042e9f46-9e83-59f4-d0ed-4a5a8bb6af77}">
+        <p14:section name="The Opportunity" id="{11e4ba15-dbf5-89dd-a275-36bf595c4da5}">
           <p14:sldIdLst>
             <p14:sldId id="257"/>
             <p14:sldId id="258"/>
@@ -127,12 +127,12 @@
             <p14:sldId id="260"/>
           </p14:sldIdLst>
         </p14:section>
-        <p14:section name="Returns" id="{f14cb231-a1d1-2c4c-384a-80d71f0b0bbd}">
+        <p14:section name="Returns" id="{41b6b63c-d9d1-3e13-a815-99662b13ae83}">
           <p14:sldIdLst>
             <p14:sldId id="261"/>
           </p14:sldIdLst>
         </p14:section>
-        <p14:section name="Business Overview" id="{3e1a021a-5d6f-5cff-a771-3f3210bf669e}">
+        <p14:section name="Business Overview" id="{667575b4-f73e-1640-d87d-5d83a02e9321}">
           <p14:sldIdLst>
             <p14:sldId id="262"/>
             <p14:sldId id="263"/>
@@ -789,311 +789,6 @@
 </file>
 
 <file path=ppt/charts/chart3.xml><?xml version="1.0" encoding="utf-8"?>
-<c:chartSpace xmlns:c="http://schemas.openxmlformats.org/drawingml/2006/chart" xmlns:a="http://schemas.openxmlformats.org/drawingml/2006/main" xmlns:r="http://schemas.openxmlformats.org/officeDocument/2006/relationships">
-  <c:date1904 val="0"/>
-  <c:roundedCorners val="1"/>
-  <c:chart>
-    <c:autoTitleDeleted val="1"/>
-    <c:plotArea>
-      <c:layout/>
-      <c:barChart>
-        <c:barDir val="col"/>
-        <c:grouping val="stacked"/>
-        <c:varyColors val="0"/>
-        <c:ser>
-          <c:idx val="0"/>
-          <c:order val="0"/>
-          <c:tx>
-            <c:strRef>
-              <c:f>Sheet1!$B$1</c:f>
-              <c:strCache>
-                <c:ptCount val="1"/>
-                <c:pt idx="0">
-                  <c:v>Market</c:v>
-                </c:pt>
-              </c:strCache>
-            </c:strRef>
-          </c:tx>
-          <c:spPr>
-            <a:solidFill>
-              <a:srgbClr val="B5AEA9"/>
-            </a:solidFill>
-            <a:effectLst/>
-          </c:spPr>
-          <c:invertIfNegative val="0"/>
-          <c:dLbls>
-            <c:numFmt formatCode="0.0&quot;x&quot;;;;" sourceLinked="0"/>
-            <c:txPr>
-              <a:bodyPr/>
-              <a:lstStyle/>
-              <a:p>
-                <a:pPr>
-                  <a:defRPr b="1" i="0" strike="noStrike" sz="1500" u="none">
-                    <a:solidFill>
-                      <a:srgbClr val="FFFFFF"/>
-                    </a:solidFill>
-                    <a:latin typeface="+mn-lt"/>
-                  </a:defRPr>
-                </a:pPr>
-              </a:p>
-            </c:txPr>
-            <c:dLblPos val="inEnd"/>
-            <c:showLegendKey val="0"/>
-            <c:showVal val="1"/>
-            <c:showCatName val="0"/>
-            <c:showSerName val="0"/>
-            <c:showPercent val="0"/>
-            <c:showBubbleSize val="0"/>
-            <c:showLeaderLines val="0"/>
-          </c:dLbls>
-          <c:cat>
-            <c:multiLvlStrRef>
-              <c:f>Sheet1!$A$2:$A$3</c:f>
-              <c:multiLvlStrCache>
-                <c:ptCount val="2"/>
-                <c:lvl>
-                  <c:pt idx="0">
-                    <c:v>Market Today</c:v>
-                  </c:pt>
-                  <c:pt idx="1">
-                    <c:v>Our SOTP</c:v>
-                  </c:pt>
-                </c:lvl>
-              </c:multiLvlStrCache>
-            </c:multiLvlStrRef>
-          </c:cat>
-          <c:val>
-            <c:numRef>
-              <c:f>Sheet1!$B$2:$B$3</c:f>
-              <c:numCache>
-                <c:formatCode>General</c:formatCode>
-                <c:ptCount val="2"/>
-                <c:pt idx="0">
-                  <c:v>9.2</c:v>
-                </c:pt>
-                <c:pt idx="1">
-                  <c:v/>
-                </c:pt>
-              </c:numCache>
-            </c:numRef>
-          </c:val>
-        </c:ser>
-        <c:ser>
-          <c:idx val="1"/>
-          <c:order val="1"/>
-          <c:tx>
-            <c:strRef>
-              <c:f>Sheet1!$C$1</c:f>
-              <c:strCache>
-                <c:ptCount val="1"/>
-                <c:pt idx="0">
-                  <c:v>SOTP</c:v>
-                </c:pt>
-              </c:strCache>
-            </c:strRef>
-          </c:tx>
-          <c:spPr>
-            <a:solidFill>
-              <a:srgbClr val="0A1C58"/>
-            </a:solidFill>
-            <a:effectLst/>
-          </c:spPr>
-          <c:invertIfNegative val="0"/>
-          <c:dLbls>
-            <c:numFmt formatCode="0.0&quot;x&quot;;;;" sourceLinked="0"/>
-            <c:txPr>
-              <a:bodyPr/>
-              <a:lstStyle/>
-              <a:p>
-                <a:pPr>
-                  <a:defRPr b="1" i="0" strike="noStrike" sz="1500" u="none">
-                    <a:solidFill>
-                      <a:srgbClr val="FFFFFF"/>
-                    </a:solidFill>
-                    <a:latin typeface="+mn-lt"/>
-                  </a:defRPr>
-                </a:pPr>
-              </a:p>
-            </c:txPr>
-            <c:dLblPos val="inEnd"/>
-            <c:showLegendKey val="0"/>
-            <c:showVal val="1"/>
-            <c:showCatName val="0"/>
-            <c:showSerName val="0"/>
-            <c:showPercent val="0"/>
-            <c:showBubbleSize val="0"/>
-            <c:showLeaderLines val="0"/>
-          </c:dLbls>
-          <c:cat>
-            <c:multiLvlStrRef>
-              <c:f>Sheet1!$A$2:$A$3</c:f>
-              <c:multiLvlStrCache>
-                <c:ptCount val="2"/>
-                <c:lvl>
-                  <c:pt idx="0">
-                    <c:v>Market Today</c:v>
-                  </c:pt>
-                  <c:pt idx="1">
-                    <c:v>Our SOTP</c:v>
-                  </c:pt>
-                </c:lvl>
-              </c:multiLvlStrCache>
-            </c:multiLvlStrRef>
-          </c:cat>
-          <c:val>
-            <c:numRef>
-              <c:f>Sheet1!$C$2:$C$3</c:f>
-              <c:numCache>
-                <c:formatCode>General</c:formatCode>
-                <c:ptCount val="2"/>
-                <c:pt idx="0">
-                  <c:v/>
-                </c:pt>
-                <c:pt idx="1">
-                  <c:v>14</c:v>
-                </c:pt>
-              </c:numCache>
-            </c:numRef>
-          </c:val>
-        </c:ser>
-        <c:dLbls>
-          <c:numFmt formatCode="0.0&quot;x&quot;;;;" sourceLinked="0"/>
-          <c:txPr>
-            <a:bodyPr/>
-            <a:lstStyle/>
-            <a:p>
-              <a:pPr>
-                <a:defRPr b="1" i="0" strike="noStrike" sz="1500" u="none">
-                  <a:solidFill>
-                    <a:srgbClr val="FFFFFF"/>
-                  </a:solidFill>
-                  <a:latin typeface="+mn-lt"/>
-                </a:defRPr>
-              </a:pPr>
-            </a:p>
-          </c:txPr>
-          <c:dLblPos val="inEnd"/>
-          <c:showLegendKey val="0"/>
-          <c:showVal val="1"/>
-          <c:showCatName val="0"/>
-          <c:showSerName val="0"/>
-          <c:showPercent val="0"/>
-          <c:showBubbleSize val="0"/>
-          <c:showLeaderLines val="0"/>
-        </c:dLbls>
-        <c:gapWidth val="60"/>
-        <c:overlap val="100"/>
-        <c:axId val="2094734554"/>
-        <c:axId val="2094734552"/>
-        <c:axId val="2094734556"/>
-      </c:barChart>
-      <c:catAx>
-        <c:axId val="2094734554"/>
-        <c:scaling>
-          <c:orientation val="minMax"/>
-        </c:scaling>
-        <c:delete val="0"/>
-        <c:axPos val="b"/>
-        <c:numFmt formatCode="General" sourceLinked="1"/>
-        <c:majorTickMark val="out"/>
-        <c:minorTickMark val="none"/>
-        <c:tickLblPos val="low"/>
-        <c:spPr>
-          <a:ln w="12700" cap="flat">
-            <a:solidFill>
-              <a:srgbClr val="BFBFBF"/>
-            </a:solidFill>
-            <a:prstDash val="solid"/>
-            <a:round/>
-          </a:ln>
-        </c:spPr>
-        <c:txPr>
-          <a:bodyPr/>
-          <a:lstStyle/>
-          <a:p>
-            <a:pPr>
-              <a:defRPr sz="1200" b="0" i="0" u="none" strike="noStrike">
-                <a:solidFill>
-                  <a:srgbClr val="1A1A1A"/>
-                </a:solidFill>
-                <a:latin typeface="+mn-lt"/>
-              </a:defRPr>
-            </a:pPr>
-            <a:endParaRPr lang="en-US"/>
-          </a:p>
-        </c:txPr>
-        <c:crossAx val="2094734552"/>
-        <c:crosses val="autoZero"/>
-        <c:auto val="1"/>
-        <c:lblAlgn val="ctr"/>
-        <c:noMultiLvlLbl val="1"/>
-      </c:catAx>
-      <c:valAx>
-        <c:axId val="2094734552"/>
-        <c:scaling>
-          <c:orientation val="minMax"/>
-          <c:max val="16.5"/>
-          <c:min val="0"/>
-        </c:scaling>
-        <c:delete val="1"/>
-        <c:axPos val="l"/>
-        <c:numFmt formatCode="General" sourceLinked="0"/>
-        <c:majorTickMark val="out"/>
-        <c:minorTickMark val="none"/>
-        <c:tickLblPos val="nextTo"/>
-        <c:spPr>
-          <a:ln w="12700" cap="flat">
-            <a:solidFill>
-              <a:srgbClr val="888888"/>
-            </a:solidFill>
-            <a:prstDash val="solid"/>
-            <a:round/>
-          </a:ln>
-        </c:spPr>
-        <c:txPr>
-          <a:bodyPr/>
-          <a:lstStyle/>
-          <a:p>
-            <a:pPr>
-              <a:defRPr sz="1200" b="0" i="0" u="none" strike="noStrike">
-                <a:solidFill>
-                  <a:srgbClr val="000000"/>
-                </a:solidFill>
-                <a:latin typeface="Arial"/>
-              </a:defRPr>
-            </a:pPr>
-            <a:endParaRPr lang="en-US"/>
-          </a:p>
-        </c:txPr>
-        <c:crossAx val="2094734554"/>
-        <c:crosses val="autoZero"/>
-        <c:crossBetween val="between"/>
-      </c:valAx>
-      <c:spPr>
-        <a:noFill/>
-        <a:ln>
-          <a:noFill/>
-        </a:ln>
-        <a:effectLst/>
-      </c:spPr>
-    </c:plotArea>
-    <c:plotVisOnly val="1"/>
-    <c:dispBlanksAs val="span"/>
-  </c:chart>
-  <c:spPr>
-    <a:noFill/>
-    <a:ln>
-      <a:noFill/>
-    </a:ln>
-    <a:effectLst/>
-  </c:spPr>
-  <c:externalData r:id="rId1">
-    <c:autoUpdate val="0"/>
-  </c:externalData>
-</c:chartSpace>
-</file>
-
-<file path=ppt/charts/chart4.xml><?xml version="1.0" encoding="utf-8"?>
 <c:chartSpace xmlns:c="http://schemas.openxmlformats.org/drawingml/2006/chart" xmlns:a="http://schemas.openxmlformats.org/drawingml/2006/main" xmlns:r="http://schemas.openxmlformats.org/officeDocument/2006/relationships">
   <c:date1904 val="0"/>
   <c:roundedCorners val="1"/>
@@ -2171,7 +1866,7 @@
           <a:p>
             <a:r>
               <a:rPr lang="en-US" dirty="0"/>
-              <a:t>Market: EV of $20.56B at $167.03 (10/2/26) over GPS FY27E Adj. EBITDA of $2,239M = 9.2x (9.8x on Jefferies FY27E of $2,099M; ~16x on FY26E). Our SOTP: $31.3B implied EV over the same $2,239M = 14.0x blended (Aerospace 16x, Power 12x, Leasing + SCI 9x).</a:t>
+              <a:t>Both readings explain the same 1Q26 drop. Management cites heavier-scope work, new facilities and technician productivity still ramping, and pricing held below OEM escalators to take share. The bear reading, following the short report, is that depreciated leasing inventory moved into Aerospace Products had been propping up margins and is running out.</a:t>
             </a:r>
             <a:endParaRPr lang="en-US" dirty="0"/>
           </a:p>
@@ -5371,7 +5066,7 @@
       </p:sp>
       <p:sp>
         <p:nvSpPr>
-          <p:cNvPr id="11" name="Multiple header"/>
+          <p:cNvPr id="11" name="Readings header"/>
           <p:cNvSpPr txBox="1"/>
           <p:nvPr/>
         </p:nvSpPr>
@@ -5399,7 +5094,7 @@
                   <a:srgbClr val="1A1A1A"/>
                 </a:solidFill>
               </a:rPr>
-              <a:t>…So the Market Won't Pay Up</a:t>
+              <a:t>Two Readings of the Drop</a:t>
             </a:r>
             <a:endParaRPr lang="en-US" sz="1600" dirty="0"/>
           </a:p>
@@ -5407,7 +5102,7 @@
       </p:sp>
       <p:sp>
         <p:nvSpPr>
-          <p:cNvPr id="12" name="Multiple header rule"/>
+          <p:cNvPr id="12" name="Readings header rule"/>
           <p:cNvSpPr/>
           <p:nvPr/>
         </p:nvSpPr>
@@ -5428,68 +5123,91 @@
           </a:ln>
         </p:spPr>
       </p:sp>
-      <p:graphicFrame>
-        <p:nvGraphicFramePr>
-          <p:cNvPr id="13" name="Multiple chart" descr=""/>
-          <p:cNvGraphicFramePr/>
-          <p:nvPr/>
-        </p:nvGraphicFramePr>
-        <p:xfrm>
-          <a:off x="5257800" y="2103120"/>
-          <a:ext cx="3566160" cy="2743200"/>
-        </p:xfrm>
-        <a:graphic xmlns:a="http://schemas.openxmlformats.org/drawingml/2006/main">
-          <a:graphicData uri="http://schemas.openxmlformats.org/drawingml/2006/chart">
-            <c:chart xmlns:c="http://schemas.openxmlformats.org/drawingml/2006/chart" r:id="rId1"/>
-          </a:graphicData>
-        </a:graphic>
-      </p:graphicFrame>
-      <p:sp>
-        <p:nvSpPr>
-          <p:cNvPr id="14" name="Multiple caption"/>
+      <p:sp>
+        <p:nvSpPr>
+          <p:cNvPr id="13" name="Management reading"/>
           <p:cNvSpPr txBox="1"/>
           <p:nvPr/>
         </p:nvSpPr>
         <p:spPr>
           <a:xfrm>
-            <a:off x="5257800" y="4937760"/>
-            <a:ext cx="3566160" cy="274320"/>
-          </a:xfrm>
-          <a:prstGeom prst="rect">
-            <a:avLst/>
-          </a:prstGeom>
-          <a:noFill/>
-          <a:ln/>
-        </p:spPr>
-        <p:txBody>
-          <a:bodyPr wrap="square" lIns="0" tIns="0" rIns="0" bIns="0" rtlCol="0" anchor="ctr"/>
-          <a:lstStyle/>
-          <a:p>
-            <a:pPr algn="ctr" indent="0" marL="0">
-              <a:buNone/>
-            </a:pPr>
-            <a:r>
-              <a:rPr lang="en-US" sz="1200" i="1" dirty="0">
-                <a:solidFill>
-                  <a:schemeClr val="accent2"/>
-                </a:solidFill>
-              </a:rPr>
-              <a:t>EV / FY27E Adj. EBITDA (GPS model)</a:t>
-            </a:r>
-            <a:endParaRPr lang="en-US" sz="1200" dirty="0"/>
-          </a:p>
-        </p:txBody>
-      </p:sp>
-      <p:sp>
-        <p:nvSpPr>
-          <p:cNvPr id="15" name="Takeaway"/>
+            <a:off x="5257800" y="2148840"/>
+            <a:ext cx="3566160" cy="1325880"/>
+          </a:xfrm>
+          <a:prstGeom prst="rect">
+            <a:avLst/>
+          </a:prstGeom>
+          <a:solidFill>
+            <a:srgbClr val="DCD8D3"/>
+          </a:solidFill>
+          <a:ln/>
+        </p:spPr>
+        <p:txBody>
+          <a:bodyPr wrap="square" lIns="127000" tIns="50800" rIns="127000" bIns="50800" rtlCol="0" anchor="ctr"/>
+          <a:lstStyle/>
+          <a:p>
+            <a:pPr algn="ctr" indent="0" marL="0">
+              <a:spcAft>
+                <a:spcPts val="400"/>
+              </a:spcAft>
+              <a:buNone/>
+            </a:pPr>
+            <a:r>
+              <a:rPr lang="en-US" sz="1500" b="1" dirty="0">
+                <a:solidFill>
+                  <a:schemeClr val="tx2"/>
+                </a:solidFill>
+              </a:rPr>
+              <a:t>Management</a:t>
+            </a:r>
+            <a:endParaRPr lang="en-US" sz="1500" dirty="0"/>
+          </a:p>
+          <a:p>
+            <a:pPr algn="ctr" indent="0" marL="0">
+              <a:spcAft>
+                <a:spcPts val="400"/>
+              </a:spcAft>
+              <a:buNone/>
+            </a:pPr>
+            <a:r>
+              <a:rPr lang="en-US" sz="1200" dirty="0">
+                <a:solidFill>
+                  <a:schemeClr val="tx2"/>
+                </a:solidFill>
+              </a:rPr>
+              <a:t>Heavier-scope work, new shops still ramping, and prices held below OEM to win share.</a:t>
+            </a:r>
+            <a:endParaRPr lang="en-US" sz="1500" dirty="0"/>
+          </a:p>
+          <a:p>
+            <a:pPr algn="ctr" indent="0" marL="0">
+              <a:spcAft>
+                <a:spcPts val="400"/>
+              </a:spcAft>
+              <a:buNone/>
+            </a:pPr>
+            <a:r>
+              <a:rPr lang="en-US" sz="1300" b="1" i="1" dirty="0">
+                <a:solidFill>
+                  <a:schemeClr val="tx2"/>
+                </a:solidFill>
+              </a:rPr>
+              <a:t>→ Temporary: margins recover</a:t>
+            </a:r>
+            <a:endParaRPr lang="en-US" sz="1500" dirty="0"/>
+          </a:p>
+        </p:txBody>
+      </p:sp>
+      <p:sp>
+        <p:nvSpPr>
+          <p:cNvPr id="14" name="The Bears reading"/>
           <p:cNvSpPr txBox="1"/>
           <p:nvPr/>
         </p:nvSpPr>
         <p:spPr>
           <a:xfrm>
-            <a:off x="320040" y="5504688"/>
-            <a:ext cx="8503920" cy="566928"/>
+            <a:off x="5257800" y="3721608"/>
+            <a:ext cx="3566160" cy="1325880"/>
           </a:xfrm>
           <a:prstGeom prst="rect">
             <a:avLst/>
@@ -5500,6 +5218,117 @@
           <a:ln/>
         </p:spPr>
         <p:txBody>
+          <a:bodyPr wrap="square" lIns="127000" tIns="50800" rIns="127000" bIns="50800" rtlCol="0" anchor="ctr"/>
+          <a:lstStyle/>
+          <a:p>
+            <a:pPr algn="ctr" indent="0" marL="0">
+              <a:spcAft>
+                <a:spcPts val="400"/>
+              </a:spcAft>
+              <a:buNone/>
+            </a:pPr>
+            <a:r>
+              <a:rPr lang="en-US" sz="1500" b="1" dirty="0">
+                <a:solidFill>
+                  <a:schemeClr val="bg1"/>
+                </a:solidFill>
+              </a:rPr>
+              <a:t>The Bears</a:t>
+            </a:r>
+            <a:endParaRPr lang="en-US" sz="1500" dirty="0"/>
+          </a:p>
+          <a:p>
+            <a:pPr algn="ctr" indent="0" marL="0">
+              <a:spcAft>
+                <a:spcPts val="400"/>
+              </a:spcAft>
+              <a:buNone/>
+            </a:pPr>
+            <a:r>
+              <a:rPr lang="en-US" sz="1200" dirty="0">
+                <a:solidFill>
+                  <a:schemeClr val="bg1"/>
+                </a:solidFill>
+              </a:rPr>
+              <a:t>The cheap, depreciated leasing engines that flattered margins are running out.</a:t>
+            </a:r>
+            <a:endParaRPr lang="en-US" sz="1500" dirty="0"/>
+          </a:p>
+          <a:p>
+            <a:pPr algn="ctr" indent="0" marL="0">
+              <a:spcAft>
+                <a:spcPts val="400"/>
+              </a:spcAft>
+              <a:buNone/>
+            </a:pPr>
+            <a:r>
+              <a:rPr lang="en-US" sz="1300" b="1" i="1" dirty="0">
+                <a:solidFill>
+                  <a:schemeClr val="bg1"/>
+                </a:solidFill>
+              </a:rPr>
+              <a:t>→ Structural: margins keep falling</a:t>
+            </a:r>
+            <a:endParaRPr lang="en-US" sz="1500" dirty="0"/>
+          </a:p>
+        </p:txBody>
+      </p:sp>
+      <p:sp>
+        <p:nvSpPr>
+          <p:cNvPr id="15" name="Readings vs"/>
+          <p:cNvSpPr txBox="1"/>
+          <p:nvPr/>
+        </p:nvSpPr>
+        <p:spPr>
+          <a:xfrm>
+            <a:off x="6720840" y="3474720"/>
+            <a:ext cx="640080" cy="246888"/>
+          </a:xfrm>
+          <a:prstGeom prst="rect">
+            <a:avLst/>
+          </a:prstGeom>
+          <a:noFill/>
+          <a:ln/>
+        </p:spPr>
+        <p:txBody>
+          <a:bodyPr wrap="square" lIns="0" tIns="0" rIns="0" bIns="0" rtlCol="0" anchor="ctr"/>
+          <a:lstStyle/>
+          <a:p>
+            <a:pPr algn="ctr" indent="0" marL="0">
+              <a:buNone/>
+            </a:pPr>
+            <a:r>
+              <a:rPr lang="en-US" sz="1400" b="1" i="1" dirty="0">
+                <a:solidFill>
+                  <a:schemeClr val="accent2"/>
+                </a:solidFill>
+              </a:rPr>
+              <a:t>vs.</a:t>
+            </a:r>
+            <a:endParaRPr lang="en-US" sz="1400" dirty="0"/>
+          </a:p>
+        </p:txBody>
+      </p:sp>
+      <p:sp>
+        <p:nvSpPr>
+          <p:cNvPr id="16" name="Takeaway"/>
+          <p:cNvSpPr txBox="1"/>
+          <p:nvPr/>
+        </p:nvSpPr>
+        <p:spPr>
+          <a:xfrm>
+            <a:off x="320040" y="5504688"/>
+            <a:ext cx="8503920" cy="566928"/>
+          </a:xfrm>
+          <a:prstGeom prst="rect">
+            <a:avLst/>
+          </a:prstGeom>
+          <a:solidFill>
+            <a:srgbClr val="0A1C58"/>
+          </a:solidFill>
+          <a:ln/>
+        </p:spPr>
+        <p:txBody>
           <a:bodyPr wrap="square" lIns="101600" tIns="25400" rIns="101600" bIns="25400" rtlCol="0" anchor="ctr"/>
           <a:lstStyle/>
           <a:p>
@@ -5520,7 +5349,7 @@
       </p:sp>
       <p:sp>
         <p:nvSpPr>
-          <p:cNvPr id="16" name="Source"/>
+          <p:cNvPr id="17" name="Source"/>
           <p:cNvSpPr txBox="1"/>
           <p:nvPr/>
         </p:nvSpPr>
@@ -5559,7 +5388,7 @@
                   <a:srgbClr val="1A1A1A"/>
                 </a:solidFill>
               </a:rPr>
-              <a:t>Muddy Waters Research (Jan. 2025), FTAI filings, GPS model</a:t>
+              <a:t>Muddy Waters Research (Jan. 2025), FTAI filings and earnings calls, GPS analysis</a:t>
             </a:r>
             <a:endParaRPr lang="en-US" sz="1100" dirty="0"/>
           </a:p>

--- a/deck/FTAI_Long_Pitch.pptx
+++ b/deck/FTAI_Long_Pitch.pptx
@@ -13,9 +13,12 @@
     <p:sldId id="261" r:id="rId7"/>
     <p:sldId id="262" r:id="rId8"/>
     <p:sldId id="263" r:id="rId9"/>
+    <p:sldId id="264" r:id="rId10"/>
+    <p:sldId id="265" r:id="rId11"/>
+    <p:sldId id="266" r:id="rId12"/>
   </p:sldIdLst>
   <p:notesMasterIdLst>
-    <p:notesMasterId r:id="rId10"/>
+    <p:notesMasterId r:id="rId13"/>
   </p:notesMasterIdLst>
   <p:sldSz cx="9144000" cy="6858000"/>
   <p:notesSz cx="6858000" cy="9144000"/>
@@ -114,12 +117,12 @@
   <p:extLst>
     <p:ext uri="{521415D9-36F7-43E2-AB2F-B90AF26B5E84}">
       <p14:sectionLst xmlns:p14="http://schemas.microsoft.com/office/powerpoint/2010/main">
-        <p14:section name="Introduction" id="{468378ea-4bbc-1575-aaf3-25041d37d700}">
+        <p14:section name="Introduction" id="{7e988cde-3e54-642d-d9b7-c1621351f566}">
           <p14:sldIdLst>
             <p14:sldId id="256"/>
           </p14:sldIdLst>
         </p14:section>
-        <p14:section name="The Opportunity" id="{11e4ba15-dbf5-89dd-a275-36bf595c4da5}">
+        <p14:section name="The Opportunity" id="{fcf58372-f6a9-73a2-6989-84f279138b92}">
           <p14:sldIdLst>
             <p14:sldId id="257"/>
             <p14:sldId id="258"/>
@@ -127,15 +130,22 @@
             <p14:sldId id="260"/>
           </p14:sldIdLst>
         </p14:section>
-        <p14:section name="Returns" id="{41b6b63c-d9d1-3e13-a815-99662b13ae83}">
+        <p14:section name="Returns" id="{3ae0c718-b415-f1db-9b71-24c97f7fe216}">
           <p14:sldIdLst>
             <p14:sldId id="261"/>
           </p14:sldIdLst>
         </p14:section>
-        <p14:section name="Business Overview" id="{667575b4-f73e-1640-d87d-5d83a02e9321}">
+        <p14:section name="Business Overview" id="{9ed50f8e-f3dd-67c5-8462-ad1c2e6971f1}">
           <p14:sldIdLst>
             <p14:sldId id="262"/>
             <p14:sldId id="263"/>
+          </p14:sldIdLst>
+        </p14:section>
+        <p14:section name="Thesis 1a" id="{dfc4b62f-2901-a76a-8388-0636e17cc701}">
+          <p14:sldIdLst>
+            <p14:sldId id="264"/>
+            <p14:sldId id="265"/>
+            <p14:sldId id="266"/>
           </p14:sldIdLst>
         </p14:section>
       </p14:sectionLst>
@@ -465,6 +475,279 @@
           <c:orientation val="minMax"/>
           <c:max val="0.54"/>
           <c:min val="0"/>
+        </c:scaling>
+        <c:delete val="1"/>
+        <c:axPos val="l"/>
+        <c:numFmt formatCode="General" sourceLinked="0"/>
+        <c:majorTickMark val="out"/>
+        <c:minorTickMark val="none"/>
+        <c:tickLblPos val="nextTo"/>
+        <c:spPr>
+          <a:ln w="12700" cap="flat">
+            <a:solidFill>
+              <a:srgbClr val="888888"/>
+            </a:solidFill>
+            <a:prstDash val="solid"/>
+            <a:round/>
+          </a:ln>
+        </c:spPr>
+        <c:txPr>
+          <a:bodyPr/>
+          <a:lstStyle/>
+          <a:p>
+            <a:pPr>
+              <a:defRPr sz="1200" b="0" i="0" u="none" strike="noStrike">
+                <a:solidFill>
+                  <a:srgbClr val="000000"/>
+                </a:solidFill>
+                <a:latin typeface="Arial"/>
+              </a:defRPr>
+            </a:pPr>
+            <a:endParaRPr lang="en-US"/>
+          </a:p>
+        </c:txPr>
+        <c:crossAx val="2094734554"/>
+        <c:crosses val="autoZero"/>
+        <c:crossBetween val="between"/>
+      </c:valAx>
+      <c:spPr>
+        <a:noFill/>
+        <a:ln>
+          <a:noFill/>
+        </a:ln>
+        <a:effectLst/>
+      </c:spPr>
+    </c:plotArea>
+    <c:plotVisOnly val="1"/>
+    <c:dispBlanksAs val="span"/>
+  </c:chart>
+  <c:spPr>
+    <a:noFill/>
+    <a:ln>
+      <a:noFill/>
+    </a:ln>
+    <a:effectLst/>
+  </c:spPr>
+  <c:externalData r:id="rId1">
+    <c:autoUpdate val="0"/>
+  </c:externalData>
+</c:chartSpace>
+</file>
+
+<file path=ppt/charts/chart10.xml><?xml version="1.0" encoding="utf-8"?>
+<c:chartSpace xmlns:c="http://schemas.openxmlformats.org/drawingml/2006/chart" xmlns:a="http://schemas.openxmlformats.org/drawingml/2006/main" xmlns:r="http://schemas.openxmlformats.org/officeDocument/2006/relationships">
+  <c:date1904 val="0"/>
+  <c:roundedCorners val="1"/>
+  <c:chart>
+    <c:autoTitleDeleted val="1"/>
+    <c:plotArea>
+      <c:layout/>
+      <c:lineChart>
+        <c:varyColors val="0"/>
+        <c:ser>
+          <c:idx val="0"/>
+          <c:order val="0"/>
+          <c:tx>
+            <c:strRef>
+              <c:f>Sheet1!$B$1</c:f>
+              <c:strCache>
+                <c:ptCount val="1"/>
+                <c:pt idx="0">
+                  <c:v>AP EBITDA ($M)</c:v>
+                </c:pt>
+              </c:strCache>
+            </c:strRef>
+          </c:tx>
+          <c:spPr>
+            <a:solidFill>
+              <a:srgbClr val="0A1C58"/>
+            </a:solidFill>
+            <a:ln w="38100" cap="flat">
+              <a:solidFill>
+                <a:srgbClr val="0A1C58"/>
+              </a:solidFill>
+              <a:prstDash val="solid"/>
+              <a:round/>
+            </a:ln>
+            <a:effectLst/>
+          </c:spPr>
+          <c:invertIfNegative val="0"/>
+          <c:dLbls>
+            <c:numFmt formatCode="&quot;$&quot;#,##0" sourceLinked="0"/>
+            <c:txPr>
+              <a:bodyPr/>
+              <a:lstStyle/>
+              <a:p>
+                <a:pPr>
+                  <a:defRPr b="1" i="0" strike="noStrike" sz="1100" u="none">
+                    <a:solidFill>
+                      <a:srgbClr val="1A1A1A"/>
+                    </a:solidFill>
+                    <a:latin typeface="+mn-lt"/>
+                  </a:defRPr>
+                </a:pPr>
+              </a:p>
+            </c:txPr>
+            <c:dLblPos val="t"/>
+            <c:showLegendKey val="0"/>
+            <c:showVal val="1"/>
+            <c:showCatName val="0"/>
+            <c:showSerName val="0"/>
+            <c:showPercent val="0"/>
+            <c:showBubbleSize val="0"/>
+            <c:showLeaderLines val="0"/>
+          </c:dLbls>
+          <c:marker>
+            <c:symbol val="circle"/>
+            <c:size val="7"/>
+            <c:spPr>
+              <a:solidFill>
+                <a:srgbClr val="0A1C58"/>
+              </a:solidFill>
+              <a:ln w="9525" cap="flat">
+                <a:solidFill>
+                  <a:srgbClr val="0A1C58"/>
+                </a:solidFill>
+                <a:prstDash val="solid"/>
+                <a:round/>
+              </a:ln>
+              <a:effectLst/>
+            </c:spPr>
+          </c:marker>
+          <c:cat>
+            <c:multiLvlStrRef>
+              <c:f>Sheet1!$A$2:$A$7</c:f>
+              <c:multiLvlStrCache>
+                <c:ptCount val="6"/>
+                <c:lvl>
+                  <c:pt idx="0">
+                    <c:v>0%</c:v>
+                  </c:pt>
+                  <c:pt idx="1">
+                    <c:v>10%</c:v>
+                  </c:pt>
+                  <c:pt idx="2">
+                    <c:v>20%</c:v>
+                  </c:pt>
+                  <c:pt idx="3">
+                    <c:v>30%</c:v>
+                  </c:pt>
+                  <c:pt idx="4">
+                    <c:v>40%</c:v>
+                  </c:pt>
+                  <c:pt idx="5">
+                    <c:v>50%</c:v>
+                  </c:pt>
+                </c:lvl>
+              </c:multiLvlStrCache>
+            </c:multiLvlStrRef>
+          </c:cat>
+          <c:val>
+            <c:numRef>
+              <c:f>Sheet1!$B$2:$B$7</c:f>
+              <c:numCache>
+                <c:formatCode>General</c:formatCode>
+                <c:ptCount val="6"/>
+                <c:pt idx="0">
+                  <c:v>1132</c:v>
+                </c:pt>
+                <c:pt idx="1">
+                  <c:v>1225</c:v>
+                </c:pt>
+                <c:pt idx="2">
+                  <c:v>1318</c:v>
+                </c:pt>
+                <c:pt idx="3">
+                  <c:v>1411</c:v>
+                </c:pt>
+                <c:pt idx="4">
+                  <c:v>1504</c:v>
+                </c:pt>
+                <c:pt idx="5">
+                  <c:v>1597</c:v>
+                </c:pt>
+              </c:numCache>
+            </c:numRef>
+          </c:val>
+          <c:smooth val="0"/>
+        </c:ser>
+        <c:dLbls>
+          <c:numFmt formatCode="&quot;$&quot;#,##0" sourceLinked="0"/>
+          <c:txPr>
+            <a:bodyPr/>
+            <a:lstStyle/>
+            <a:p>
+              <a:pPr>
+                <a:defRPr b="1" i="0" strike="noStrike" sz="1100" u="none">
+                  <a:solidFill>
+                    <a:srgbClr val="1A1A1A"/>
+                  </a:solidFill>
+                  <a:latin typeface="+mn-lt"/>
+                </a:defRPr>
+              </a:pPr>
+            </a:p>
+          </c:txPr>
+          <c:dLblPos val="t"/>
+          <c:showLegendKey val="0"/>
+          <c:showVal val="1"/>
+          <c:showCatName val="0"/>
+          <c:showSerName val="0"/>
+          <c:showPercent val="0"/>
+          <c:showBubbleSize val="0"/>
+          <c:showLeaderLines val="0"/>
+        </c:dLbls>
+        <c:marker val="1"/>
+        <c:axId val="2094734554"/>
+        <c:axId val="2094734552"/>
+        <c:axId val="2094734556"/>
+      </c:lineChart>
+      <c:catAx>
+        <c:axId val="2094734554"/>
+        <c:scaling>
+          <c:orientation val="minMax"/>
+        </c:scaling>
+        <c:delete val="0"/>
+        <c:axPos val="b"/>
+        <c:numFmt formatCode="General" sourceLinked="1"/>
+        <c:majorTickMark val="out"/>
+        <c:minorTickMark val="none"/>
+        <c:tickLblPos val="low"/>
+        <c:spPr>
+          <a:ln w="12700" cap="flat">
+            <a:solidFill>
+              <a:srgbClr val="BFBFBF"/>
+            </a:solidFill>
+            <a:prstDash val="solid"/>
+            <a:round/>
+          </a:ln>
+        </c:spPr>
+        <c:txPr>
+          <a:bodyPr/>
+          <a:lstStyle/>
+          <a:p>
+            <a:pPr>
+              <a:defRPr sz="1200" b="0" i="0" u="none" strike="noStrike">
+                <a:solidFill>
+                  <a:srgbClr val="1A1A1A"/>
+                </a:solidFill>
+                <a:latin typeface="+mn-lt"/>
+              </a:defRPr>
+            </a:pPr>
+            <a:endParaRPr lang="en-US"/>
+          </a:p>
+        </c:txPr>
+        <c:crossAx val="2094734552"/>
+        <c:crosses val="autoZero"/>
+        <c:auto val="1"/>
+        <c:lblAlgn val="ctr"/>
+        <c:noMultiLvlLbl val="1"/>
+      </c:catAx>
+      <c:valAx>
+        <c:axId val="2094734552"/>
+        <c:scaling>
+          <c:orientation val="minMax"/>
+          <c:max val="1700"/>
+          <c:min val="1000"/>
         </c:scaling>
         <c:delete val="1"/>
         <c:axPos val="l"/>
@@ -1207,6 +1490,1875 @@
 </c:chartSpace>
 </file>
 
+<file path=ppt/charts/chart4.xml><?xml version="1.0" encoding="utf-8"?>
+<c:chartSpace xmlns:c="http://schemas.openxmlformats.org/drawingml/2006/chart" xmlns:a="http://schemas.openxmlformats.org/drawingml/2006/main" xmlns:r="http://schemas.openxmlformats.org/officeDocument/2006/relationships">
+  <c:date1904 val="0"/>
+  <c:roundedCorners val="1"/>
+  <c:chart>
+    <c:autoTitleDeleted val="1"/>
+    <c:plotArea>
+      <c:layout/>
+      <c:doughnutChart>
+        <c:varyColors val="1"/>
+        <c:ser>
+          <c:idx val="0"/>
+          <c:order val="0"/>
+          <c:tx>
+            <c:strRef>
+              <c:f>Sheet1!$B$1</c:f>
+              <c:strCache>
+                <c:ptCount val="1"/>
+                <c:pt idx="0">
+                  <c:v>AP inventory</c:v>
+                </c:pt>
+              </c:strCache>
+            </c:strRef>
+          </c:tx>
+          <c:spPr>
+            <a:solidFill>
+              <a:schemeClr val="accent1"/>
+            </a:solidFill>
+            <a:ln w="9525" cap="flat">
+              <a:solidFill>
+                <a:srgbClr val="F9F9F9"/>
+              </a:solidFill>
+              <a:prstDash val="solid"/>
+              <a:round/>
+            </a:ln>
+            <a:effectLst/>
+          </c:spPr>
+          <c:dPt>
+            <c:idx val="0"/>
+            <c:bubble3D val="0"/>
+            <c:spPr>
+              <a:solidFill>
+                <a:srgbClr val="0A1C58"/>
+              </a:solidFill>
+              <a:ln w="12700" cap="flat">
+                <a:solidFill>
+                  <a:srgbClr val="FFFFFF"/>
+                </a:solidFill>
+                <a:prstDash val="solid"/>
+                <a:round/>
+              </a:ln>
+              <a:effectLst/>
+            </c:spPr>
+          </c:dPt>
+          <c:dPt>
+            <c:idx val="1"/>
+            <c:bubble3D val="0"/>
+            <c:spPr>
+              <a:solidFill>
+                <a:srgbClr val="DCD8D3"/>
+              </a:solidFill>
+              <a:ln w="12700" cap="flat">
+                <a:solidFill>
+                  <a:srgbClr val="FFFFFF"/>
+                </a:solidFill>
+                <a:prstDash val="solid"/>
+                <a:round/>
+              </a:ln>
+              <a:effectLst/>
+            </c:spPr>
+          </c:dPt>
+          <c:dLbls>
+            <c:dLbl>
+              <c:idx val="0"/>
+              <c:numFmt formatCode="General" sourceLinked="0"/>
+              <c:spPr/>
+              <c:txPr>
+                <a:bodyPr/>
+                <a:lstStyle/>
+                <a:p>
+                  <a:pPr>
+                    <a:defRPr sz="1200" b="0" i="0" u="none" strike="noStrike">
+                      <a:solidFill>
+                        <a:srgbClr val="000000"/>
+                      </a:solidFill>
+                      <a:latin typeface="Arial"/>
+                    </a:defRPr>
+                  </a:pPr>
+                </a:p>
+              </c:txPr>
+              <c:showLegendKey val="0"/>
+              <c:showVal val="0"/>
+              <c:showCatName val="0"/>
+              <c:showSerName val="0"/>
+              <c:showPercent val="0"/>
+              <c:showBubbleSize val="0"/>
+            </c:dLbl>
+            <c:dLbl>
+              <c:idx val="1"/>
+              <c:numFmt formatCode="General" sourceLinked="0"/>
+              <c:spPr/>
+              <c:txPr>
+                <a:bodyPr/>
+                <a:lstStyle/>
+                <a:p>
+                  <a:pPr>
+                    <a:defRPr sz="1200" b="0" i="0" u="none" strike="noStrike">
+                      <a:solidFill>
+                        <a:srgbClr val="000000"/>
+                      </a:solidFill>
+                      <a:latin typeface="Arial"/>
+                    </a:defRPr>
+                  </a:pPr>
+                </a:p>
+              </c:txPr>
+              <c:showLegendKey val="0"/>
+              <c:showVal val="0"/>
+              <c:showCatName val="0"/>
+              <c:showSerName val="0"/>
+              <c:showPercent val="0"/>
+              <c:showBubbleSize val="0"/>
+            </c:dLbl>
+            <c:numFmt formatCode="General" sourceLinked="0"/>
+            <c:txPr>
+              <a:bodyPr/>
+              <a:lstStyle/>
+              <a:p>
+                <a:pPr>
+                  <a:defRPr sz="1800" b="0" i="0" u="none" strike="noStrike">
+                    <a:solidFill>
+                      <a:srgbClr val="000000"/>
+                    </a:solidFill>
+                    <a:latin typeface="Arial"/>
+                  </a:defRPr>
+                </a:pPr>
+              </a:p>
+            </c:txPr>
+            <c:showLegendKey val="0"/>
+            <c:showVal val="0"/>
+            <c:showCatName val="1"/>
+            <c:showSerName val="0"/>
+            <c:showPercent val="1"/>
+            <c:showBubbleSize val="0"/>
+            <c:showLeaderLines val="0"/>
+          </c:dLbls>
+          <c:cat>
+            <c:strRef>
+              <c:f>Sheet1!$A$2:$A$3</c:f>
+              <c:strCache>
+                <c:ptCount val="2"/>
+                <c:pt idx="0">
+                  <c:v>Depreciated leasing stock</c:v>
+                </c:pt>
+                <c:pt idx="1">
+                  <c:v>Everything else</c:v>
+                </c:pt>
+              </c:strCache>
+            </c:strRef>
+          </c:cat>
+          <c:val>
+            <c:numRef>
+              <c:f>Sheet1!$B$2:$B$3</c:f>
+              <c:numCache>
+                <c:ptCount val="2"/>
+                <c:pt idx="0">
+                  <c:v>8</c:v>
+                </c:pt>
+                <c:pt idx="1">
+                  <c:v>92</c:v>
+                </c:pt>
+              </c:numCache>
+            </c:numRef>
+          </c:val>
+        </c:ser>
+        <c:firstSliceAng val="0"/>
+        <c:holeSize val="68"/>
+      </c:doughnutChart>
+      <c:spPr>
+        <a:noFill/>
+        <a:ln>
+          <a:noFill/>
+        </a:ln>
+        <a:effectLst/>
+      </c:spPr>
+    </c:plotArea>
+    <c:plotVisOnly val="1"/>
+    <c:dispBlanksAs val="span"/>
+  </c:chart>
+  <c:spPr>
+    <a:noFill/>
+    <a:ln>
+      <a:noFill/>
+    </a:ln>
+    <a:effectLst/>
+  </c:spPr>
+  <c:externalData r:id="rId1">
+    <c:autoUpdate val="0"/>
+  </c:externalData>
+</c:chartSpace>
+</file>
+
+<file path=ppt/charts/chart5.xml><?xml version="1.0" encoding="utf-8"?>
+<c:chartSpace xmlns:c="http://schemas.openxmlformats.org/drawingml/2006/chart" xmlns:a="http://schemas.openxmlformats.org/drawingml/2006/main" xmlns:r="http://schemas.openxmlformats.org/officeDocument/2006/relationships">
+  <c:date1904 val="0"/>
+  <c:roundedCorners val="1"/>
+  <c:chart>
+    <c:autoTitleDeleted val="1"/>
+    <c:plotArea>
+      <c:layout/>
+      <c:barChart>
+        <c:barDir val="col"/>
+        <c:grouping val="clustered"/>
+        <c:varyColors val="0"/>
+        <c:ser>
+          <c:idx val="0"/>
+          <c:order val="0"/>
+          <c:tx>
+            <c:strRef>
+              <c:f>Sheet1!$B$1</c:f>
+              <c:strCache>
+                <c:ptCount val="1"/>
+                <c:pt idx="0">
+                  <c:v>Reported</c:v>
+                </c:pt>
+              </c:strCache>
+            </c:strRef>
+          </c:tx>
+          <c:spPr>
+            <a:solidFill>
+              <a:srgbClr val="0A1C58"/>
+            </a:solidFill>
+            <a:effectLst/>
+          </c:spPr>
+          <c:invertIfNegative val="0"/>
+          <c:dLbls>
+            <c:numFmt formatCode="0.0%" sourceLinked="0"/>
+            <c:txPr>
+              <a:bodyPr/>
+              <a:lstStyle/>
+              <a:p>
+                <a:pPr>
+                  <a:defRPr b="1" i="0" strike="noStrike" sz="1000" u="none">
+                    <a:solidFill>
+                      <a:srgbClr val="1A1A1A"/>
+                    </a:solidFill>
+                    <a:latin typeface="+mn-lt"/>
+                  </a:defRPr>
+                </a:pPr>
+              </a:p>
+            </c:txPr>
+            <c:showLegendKey val="0"/>
+            <c:showVal val="1"/>
+            <c:showCatName val="0"/>
+            <c:showSerName val="0"/>
+            <c:showPercent val="0"/>
+            <c:showBubbleSize val="0"/>
+            <c:showLeaderLines val="0"/>
+          </c:dLbls>
+          <c:cat>
+            <c:multiLvlStrRef>
+              <c:f>Sheet1!$A$2:$A$10</c:f>
+              <c:multiLvlStrCache>
+                <c:ptCount val="9"/>
+                <c:lvl>
+                  <c:pt idx="0">
+                    <c:v>FY25</c:v>
+                  </c:pt>
+                  <c:pt idx="1">
+                    <c:v>Q1'26</c:v>
+                  </c:pt>
+                  <c:pt idx="2">
+                    <c:v>Q2'26</c:v>
+                  </c:pt>
+                  <c:pt idx="3">
+                    <c:v>FY26E</c:v>
+                  </c:pt>
+                  <c:pt idx="4">
+                    <c:v>FY27E</c:v>
+                  </c:pt>
+                  <c:pt idx="5">
+                    <c:v>FY28E</c:v>
+                  </c:pt>
+                  <c:pt idx="6">
+                    <c:v>FY29E</c:v>
+                  </c:pt>
+                  <c:pt idx="7">
+                    <c:v>FY30E</c:v>
+                  </c:pt>
+                  <c:pt idx="8">
+                    <c:v>FY31E</c:v>
+                  </c:pt>
+                </c:lvl>
+              </c:multiLvlStrCache>
+            </c:multiLvlStrRef>
+          </c:cat>
+          <c:val>
+            <c:numRef>
+              <c:f>Sheet1!$B$2:$B$10</c:f>
+              <c:numCache>
+                <c:formatCode>General</c:formatCode>
+                <c:ptCount val="9"/>
+                <c:pt idx="0">
+                  <c:v>0.347</c:v>
+                </c:pt>
+                <c:pt idx="1">
+                  <c:v>0.299</c:v>
+                </c:pt>
+                <c:pt idx="2">
+                  <c:v>0.285</c:v>
+                </c:pt>
+                <c:pt idx="3">
+                  <c:v/>
+                </c:pt>
+                <c:pt idx="4">
+                  <c:v/>
+                </c:pt>
+                <c:pt idx="5">
+                  <c:v/>
+                </c:pt>
+                <c:pt idx="6">
+                  <c:v/>
+                </c:pt>
+                <c:pt idx="7">
+                  <c:v/>
+                </c:pt>
+                <c:pt idx="8">
+                  <c:v/>
+                </c:pt>
+              </c:numCache>
+            </c:numRef>
+          </c:val>
+        </c:ser>
+        <c:ser>
+          <c:idx val="1"/>
+          <c:order val="1"/>
+          <c:tx>
+            <c:strRef>
+              <c:f>Sheet1!$C$1</c:f>
+              <c:strCache>
+                <c:ptCount val="1"/>
+                <c:pt idx="0">
+                  <c:v>GPS model</c:v>
+                </c:pt>
+              </c:strCache>
+            </c:strRef>
+          </c:tx>
+          <c:spPr>
+            <a:solidFill>
+              <a:srgbClr val="B5AEA9"/>
+            </a:solidFill>
+            <a:effectLst/>
+          </c:spPr>
+          <c:invertIfNegative val="0"/>
+          <c:dLbls>
+            <c:numFmt formatCode="0.0%" sourceLinked="0"/>
+            <c:txPr>
+              <a:bodyPr/>
+              <a:lstStyle/>
+              <a:p>
+                <a:pPr>
+                  <a:defRPr b="1" i="0" strike="noStrike" sz="1000" u="none">
+                    <a:solidFill>
+                      <a:srgbClr val="1A1A1A"/>
+                    </a:solidFill>
+                    <a:latin typeface="+mn-lt"/>
+                  </a:defRPr>
+                </a:pPr>
+              </a:p>
+            </c:txPr>
+            <c:showLegendKey val="0"/>
+            <c:showVal val="1"/>
+            <c:showCatName val="0"/>
+            <c:showSerName val="0"/>
+            <c:showPercent val="0"/>
+            <c:showBubbleSize val="0"/>
+            <c:showLeaderLines val="0"/>
+          </c:dLbls>
+          <c:cat>
+            <c:multiLvlStrRef>
+              <c:f>Sheet1!$A$2:$A$10</c:f>
+              <c:multiLvlStrCache>
+                <c:ptCount val="9"/>
+                <c:lvl>
+                  <c:pt idx="0">
+                    <c:v>FY25</c:v>
+                  </c:pt>
+                  <c:pt idx="1">
+                    <c:v>Q1'26</c:v>
+                  </c:pt>
+                  <c:pt idx="2">
+                    <c:v>Q2'26</c:v>
+                  </c:pt>
+                  <c:pt idx="3">
+                    <c:v>FY26E</c:v>
+                  </c:pt>
+                  <c:pt idx="4">
+                    <c:v>FY27E</c:v>
+                  </c:pt>
+                  <c:pt idx="5">
+                    <c:v>FY28E</c:v>
+                  </c:pt>
+                  <c:pt idx="6">
+                    <c:v>FY29E</c:v>
+                  </c:pt>
+                  <c:pt idx="7">
+                    <c:v>FY30E</c:v>
+                  </c:pt>
+                  <c:pt idx="8">
+                    <c:v>FY31E</c:v>
+                  </c:pt>
+                </c:lvl>
+              </c:multiLvlStrCache>
+            </c:multiLvlStrRef>
+          </c:cat>
+          <c:val>
+            <c:numRef>
+              <c:f>Sheet1!$C$2:$C$10</c:f>
+              <c:numCache>
+                <c:formatCode>General</c:formatCode>
+                <c:ptCount val="9"/>
+                <c:pt idx="0">
+                  <c:v/>
+                </c:pt>
+                <c:pt idx="1">
+                  <c:v/>
+                </c:pt>
+                <c:pt idx="2">
+                  <c:v/>
+                </c:pt>
+                <c:pt idx="3">
+                  <c:v>0.301</c:v>
+                </c:pt>
+                <c:pt idx="4">
+                  <c:v>0.299</c:v>
+                </c:pt>
+                <c:pt idx="5">
+                  <c:v>0.307</c:v>
+                </c:pt>
+                <c:pt idx="6">
+                  <c:v>0.314</c:v>
+                </c:pt>
+                <c:pt idx="7">
+                  <c:v>0.32</c:v>
+                </c:pt>
+                <c:pt idx="8">
+                  <c:v>0.325</c:v>
+                </c:pt>
+              </c:numCache>
+            </c:numRef>
+          </c:val>
+        </c:ser>
+        <c:dLbls>
+          <c:numFmt formatCode="0.0%" sourceLinked="0"/>
+          <c:txPr>
+            <a:bodyPr/>
+            <a:lstStyle/>
+            <a:p>
+              <a:pPr>
+                <a:defRPr b="1" i="0" strike="noStrike" sz="1000" u="none">
+                  <a:solidFill>
+                    <a:srgbClr val="1A1A1A"/>
+                  </a:solidFill>
+                  <a:latin typeface="+mn-lt"/>
+                </a:defRPr>
+              </a:pPr>
+            </a:p>
+          </c:txPr>
+          <c:showLegendKey val="0"/>
+          <c:showVal val="1"/>
+          <c:showCatName val="0"/>
+          <c:showSerName val="0"/>
+          <c:showPercent val="0"/>
+          <c:showBubbleSize val="0"/>
+          <c:showLeaderLines val="0"/>
+        </c:dLbls>
+        <c:gapWidth val="30"/>
+        <c:overlap val="100"/>
+        <c:axId val="2094734554"/>
+        <c:axId val="2094734552"/>
+        <c:axId val="2094734556"/>
+      </c:barChart>
+      <c:catAx>
+        <c:axId val="2094734554"/>
+        <c:scaling>
+          <c:orientation val="minMax"/>
+        </c:scaling>
+        <c:delete val="0"/>
+        <c:axPos val="b"/>
+        <c:numFmt formatCode="General" sourceLinked="1"/>
+        <c:majorTickMark val="out"/>
+        <c:minorTickMark val="none"/>
+        <c:tickLblPos val="low"/>
+        <c:spPr>
+          <a:ln w="12700" cap="flat">
+            <a:solidFill>
+              <a:srgbClr val="BFBFBF"/>
+            </a:solidFill>
+            <a:prstDash val="solid"/>
+            <a:round/>
+          </a:ln>
+        </c:spPr>
+        <c:txPr>
+          <a:bodyPr/>
+          <a:lstStyle/>
+          <a:p>
+            <a:pPr>
+              <a:defRPr sz="1000" b="0" i="0" u="none" strike="noStrike">
+                <a:solidFill>
+                  <a:srgbClr val="1A1A1A"/>
+                </a:solidFill>
+                <a:latin typeface="+mn-lt"/>
+              </a:defRPr>
+            </a:pPr>
+            <a:endParaRPr lang="en-US"/>
+          </a:p>
+        </c:txPr>
+        <c:crossAx val="2094734552"/>
+        <c:crosses val="autoZero"/>
+        <c:auto val="1"/>
+        <c:lblAlgn val="ctr"/>
+        <c:noMultiLvlLbl val="1"/>
+      </c:catAx>
+      <c:valAx>
+        <c:axId val="2094734552"/>
+        <c:scaling>
+          <c:orientation val="minMax"/>
+          <c:max val="0.4"/>
+          <c:min val="0"/>
+        </c:scaling>
+        <c:delete val="1"/>
+        <c:axPos val="l"/>
+        <c:numFmt formatCode="General" sourceLinked="0"/>
+        <c:majorTickMark val="out"/>
+        <c:minorTickMark val="none"/>
+        <c:tickLblPos val="nextTo"/>
+        <c:spPr>
+          <a:ln w="12700" cap="flat">
+            <a:solidFill>
+              <a:srgbClr val="888888"/>
+            </a:solidFill>
+            <a:prstDash val="solid"/>
+            <a:round/>
+          </a:ln>
+        </c:spPr>
+        <c:txPr>
+          <a:bodyPr/>
+          <a:lstStyle/>
+          <a:p>
+            <a:pPr>
+              <a:defRPr sz="1200" b="0" i="0" u="none" strike="noStrike">
+                <a:solidFill>
+                  <a:srgbClr val="000000"/>
+                </a:solidFill>
+                <a:latin typeface="Arial"/>
+              </a:defRPr>
+            </a:pPr>
+            <a:endParaRPr lang="en-US"/>
+          </a:p>
+        </c:txPr>
+        <c:crossAx val="2094734554"/>
+        <c:crosses val="autoZero"/>
+        <c:crossBetween val="between"/>
+      </c:valAx>
+      <c:spPr>
+        <a:noFill/>
+        <a:ln>
+          <a:noFill/>
+        </a:ln>
+        <a:effectLst/>
+      </c:spPr>
+    </c:plotArea>
+    <c:plotVisOnly val="1"/>
+    <c:dispBlanksAs val="span"/>
+  </c:chart>
+  <c:spPr>
+    <a:noFill/>
+    <a:ln>
+      <a:noFill/>
+    </a:ln>
+    <a:effectLst/>
+  </c:spPr>
+  <c:externalData r:id="rId1">
+    <c:autoUpdate val="0"/>
+  </c:externalData>
+</c:chartSpace>
+</file>
+
+<file path=ppt/charts/chart6.xml><?xml version="1.0" encoding="utf-8"?>
+<c:chartSpace xmlns:c="http://schemas.openxmlformats.org/drawingml/2006/chart" xmlns:a="http://schemas.openxmlformats.org/drawingml/2006/main" xmlns:r="http://schemas.openxmlformats.org/officeDocument/2006/relationships">
+  <c:date1904 val="0"/>
+  <c:roundedCorners val="1"/>
+  <c:chart>
+    <c:autoTitleDeleted val="1"/>
+    <c:plotArea>
+      <c:layout/>
+      <c:lineChart>
+        <c:varyColors val="0"/>
+        <c:ser>
+          <c:idx val="0"/>
+          <c:order val="0"/>
+          <c:tx>
+            <c:strRef>
+              <c:f>Sheet1!$B$1</c:f>
+              <c:strCache>
+                <c:ptCount val="1"/>
+                <c:pt idx="0">
+                  <c:v>OEM list price</c:v>
+                </c:pt>
+              </c:strCache>
+            </c:strRef>
+          </c:tx>
+          <c:spPr>
+            <a:solidFill>
+              <a:srgbClr val="0A1C58"/>
+            </a:solidFill>
+            <a:ln w="38100" cap="flat">
+              <a:solidFill>
+                <a:srgbClr val="0A1C58"/>
+              </a:solidFill>
+              <a:prstDash val="solid"/>
+              <a:round/>
+            </a:ln>
+            <a:effectLst/>
+          </c:spPr>
+          <c:invertIfNegative val="0"/>
+          <c:dLbls>
+            <c:numFmt formatCode="#,##0" sourceLinked="0"/>
+            <c:txPr>
+              <a:bodyPr/>
+              <a:lstStyle/>
+              <a:p>
+                <a:pPr>
+                  <a:defRPr b="1" i="0" strike="noStrike" sz="1300" u="none">
+                    <a:solidFill>
+                      <a:srgbClr val="1A1A1A"/>
+                    </a:solidFill>
+                    <a:latin typeface="+mn-lt"/>
+                  </a:defRPr>
+                </a:pPr>
+              </a:p>
+            </c:txPr>
+            <c:showLegendKey val="0"/>
+            <c:showVal val="0"/>
+            <c:showCatName val="0"/>
+            <c:showSerName val="0"/>
+            <c:showPercent val="0"/>
+            <c:showBubbleSize val="0"/>
+            <c:showLeaderLines val="0"/>
+          </c:dLbls>
+          <c:marker>
+            <c:symbol val="circle"/>
+            <c:size val="7"/>
+            <c:spPr>
+              <a:solidFill>
+                <a:srgbClr val="0A1C58"/>
+              </a:solidFill>
+              <a:ln w="9525" cap="flat">
+                <a:solidFill>
+                  <a:srgbClr val="0A1C58"/>
+                </a:solidFill>
+                <a:prstDash val="solid"/>
+                <a:round/>
+              </a:ln>
+              <a:effectLst/>
+            </c:spPr>
+          </c:marker>
+          <c:cat>
+            <c:multiLvlStrRef>
+              <c:f>Sheet1!$A$2:$A$8</c:f>
+              <c:multiLvlStrCache>
+                <c:ptCount val="7"/>
+                <c:lvl>
+                  <c:pt idx="0">
+                    <c:v>2025</c:v>
+                  </c:pt>
+                  <c:pt idx="1">
+                    <c:v>2026</c:v>
+                  </c:pt>
+                  <c:pt idx="2">
+                    <c:v>2027</c:v>
+                  </c:pt>
+                  <c:pt idx="3">
+                    <c:v>2028</c:v>
+                  </c:pt>
+                  <c:pt idx="4">
+                    <c:v>2029</c:v>
+                  </c:pt>
+                  <c:pt idx="5">
+                    <c:v>2030</c:v>
+                  </c:pt>
+                  <c:pt idx="6">
+                    <c:v>2031</c:v>
+                  </c:pt>
+                </c:lvl>
+              </c:multiLvlStrCache>
+            </c:multiLvlStrRef>
+          </c:cat>
+          <c:val>
+            <c:numRef>
+              <c:f>Sheet1!$B$2:$B$8</c:f>
+              <c:numCache>
+                <c:formatCode>General</c:formatCode>
+                <c:ptCount val="7"/>
+                <c:pt idx="0">
+                  <c:v>100</c:v>
+                </c:pt>
+                <c:pt idx="1">
+                  <c:v>107</c:v>
+                </c:pt>
+                <c:pt idx="2">
+                  <c:v>114</c:v>
+                </c:pt>
+                <c:pt idx="3">
+                  <c:v>121.9</c:v>
+                </c:pt>
+                <c:pt idx="4">
+                  <c:v>130.5</c:v>
+                </c:pt>
+                <c:pt idx="5">
+                  <c:v>139.6</c:v>
+                </c:pt>
+                <c:pt idx="6">
+                  <c:v>149.4</c:v>
+                </c:pt>
+              </c:numCache>
+            </c:numRef>
+          </c:val>
+          <c:smooth val="0"/>
+        </c:ser>
+        <c:ser>
+          <c:idx val="1"/>
+          <c:order val="1"/>
+          <c:tx>
+            <c:strRef>
+              <c:f>Sheet1!$C$1</c:f>
+              <c:strCache>
+                <c:ptCount val="1"/>
+                <c:pt idx="0">
+                  <c:v>FTAI price</c:v>
+                </c:pt>
+              </c:strCache>
+            </c:strRef>
+          </c:tx>
+          <c:spPr>
+            <a:solidFill>
+              <a:srgbClr val="B5AEA9"/>
+            </a:solidFill>
+            <a:ln w="38100" cap="flat">
+              <a:solidFill>
+                <a:srgbClr val="B5AEA9"/>
+              </a:solidFill>
+              <a:prstDash val="solid"/>
+              <a:round/>
+            </a:ln>
+            <a:effectLst/>
+          </c:spPr>
+          <c:invertIfNegative val="0"/>
+          <c:dLbls>
+            <c:numFmt formatCode="#,##0" sourceLinked="0"/>
+            <c:txPr>
+              <a:bodyPr/>
+              <a:lstStyle/>
+              <a:p>
+                <a:pPr>
+                  <a:defRPr b="1" i="0" strike="noStrike" sz="1300" u="none">
+                    <a:solidFill>
+                      <a:srgbClr val="1A1A1A"/>
+                    </a:solidFill>
+                    <a:latin typeface="+mn-lt"/>
+                  </a:defRPr>
+                </a:pPr>
+              </a:p>
+            </c:txPr>
+            <c:showLegendKey val="0"/>
+            <c:showVal val="0"/>
+            <c:showCatName val="0"/>
+            <c:showSerName val="0"/>
+            <c:showPercent val="0"/>
+            <c:showBubbleSize val="0"/>
+            <c:showLeaderLines val="0"/>
+          </c:dLbls>
+          <c:marker>
+            <c:symbol val="circle"/>
+            <c:size val="7"/>
+            <c:spPr>
+              <a:solidFill>
+                <a:srgbClr val="B5AEA9"/>
+              </a:solidFill>
+              <a:ln w="9525" cap="flat">
+                <a:solidFill>
+                  <a:srgbClr val="B5AEA9"/>
+                </a:solidFill>
+                <a:prstDash val="solid"/>
+                <a:round/>
+              </a:ln>
+              <a:effectLst/>
+            </c:spPr>
+          </c:marker>
+          <c:cat>
+            <c:multiLvlStrRef>
+              <c:f>Sheet1!$A$2:$A$8</c:f>
+              <c:multiLvlStrCache>
+                <c:ptCount val="7"/>
+                <c:lvl>
+                  <c:pt idx="0">
+                    <c:v>2025</c:v>
+                  </c:pt>
+                  <c:pt idx="1">
+                    <c:v>2026</c:v>
+                  </c:pt>
+                  <c:pt idx="2">
+                    <c:v>2027</c:v>
+                  </c:pt>
+                  <c:pt idx="3">
+                    <c:v>2028</c:v>
+                  </c:pt>
+                  <c:pt idx="4">
+                    <c:v>2029</c:v>
+                  </c:pt>
+                  <c:pt idx="5">
+                    <c:v>2030</c:v>
+                  </c:pt>
+                  <c:pt idx="6">
+                    <c:v>2031</c:v>
+                  </c:pt>
+                </c:lvl>
+              </c:multiLvlStrCache>
+            </c:multiLvlStrRef>
+          </c:cat>
+          <c:val>
+            <c:numRef>
+              <c:f>Sheet1!$C$2:$C$8</c:f>
+              <c:numCache>
+                <c:formatCode>General</c:formatCode>
+                <c:ptCount val="7"/>
+                <c:pt idx="0">
+                  <c:v>100</c:v>
+                </c:pt>
+                <c:pt idx="1">
+                  <c:v>100</c:v>
+                </c:pt>
+                <c:pt idx="2">
+                  <c:v>103.3</c:v>
+                </c:pt>
+                <c:pt idx="3">
+                  <c:v>106.9</c:v>
+                </c:pt>
+                <c:pt idx="4">
+                  <c:v>110.6</c:v>
+                </c:pt>
+                <c:pt idx="5">
+                  <c:v>114.5</c:v>
+                </c:pt>
+                <c:pt idx="6">
+                  <c:v>118.5</c:v>
+                </c:pt>
+              </c:numCache>
+            </c:numRef>
+          </c:val>
+          <c:smooth val="0"/>
+        </c:ser>
+        <c:dLbls>
+          <c:numFmt formatCode="#,##0" sourceLinked="0"/>
+          <c:txPr>
+            <a:bodyPr/>
+            <a:lstStyle/>
+            <a:p>
+              <a:pPr>
+                <a:defRPr b="1" i="0" strike="noStrike" sz="1300" u="none">
+                  <a:solidFill>
+                    <a:srgbClr val="1A1A1A"/>
+                  </a:solidFill>
+                  <a:latin typeface="+mn-lt"/>
+                </a:defRPr>
+              </a:pPr>
+            </a:p>
+          </c:txPr>
+          <c:showLegendKey val="0"/>
+          <c:showVal val="0"/>
+          <c:showCatName val="0"/>
+          <c:showSerName val="0"/>
+          <c:showPercent val="0"/>
+          <c:showBubbleSize val="0"/>
+          <c:showLeaderLines val="0"/>
+        </c:dLbls>
+        <c:marker val="1"/>
+        <c:axId val="2094734554"/>
+        <c:axId val="2094734552"/>
+        <c:axId val="2094734556"/>
+      </c:lineChart>
+      <c:catAx>
+        <c:axId val="2094734554"/>
+        <c:scaling>
+          <c:orientation val="minMax"/>
+        </c:scaling>
+        <c:delete val="0"/>
+        <c:axPos val="b"/>
+        <c:numFmt formatCode="General" sourceLinked="1"/>
+        <c:majorTickMark val="out"/>
+        <c:minorTickMark val="none"/>
+        <c:tickLblPos val="low"/>
+        <c:spPr>
+          <a:ln w="12700" cap="flat">
+            <a:solidFill>
+              <a:srgbClr val="BFBFBF"/>
+            </a:solidFill>
+            <a:prstDash val="solid"/>
+            <a:round/>
+          </a:ln>
+        </c:spPr>
+        <c:txPr>
+          <a:bodyPr/>
+          <a:lstStyle/>
+          <a:p>
+            <a:pPr>
+              <a:defRPr sz="1200" b="0" i="0" u="none" strike="noStrike">
+                <a:solidFill>
+                  <a:srgbClr val="1A1A1A"/>
+                </a:solidFill>
+                <a:latin typeface="+mn-lt"/>
+              </a:defRPr>
+            </a:pPr>
+            <a:endParaRPr lang="en-US"/>
+          </a:p>
+        </c:txPr>
+        <c:crossAx val="2094734552"/>
+        <c:crosses val="autoZero"/>
+        <c:auto val="1"/>
+        <c:lblAlgn val="ctr"/>
+        <c:noMultiLvlLbl val="1"/>
+      </c:catAx>
+      <c:valAx>
+        <c:axId val="2094734552"/>
+        <c:scaling>
+          <c:orientation val="minMax"/>
+          <c:max val="160"/>
+          <c:min val="90"/>
+        </c:scaling>
+        <c:delete val="1"/>
+        <c:axPos val="l"/>
+        <c:numFmt formatCode="General" sourceLinked="0"/>
+        <c:majorTickMark val="out"/>
+        <c:minorTickMark val="none"/>
+        <c:tickLblPos val="nextTo"/>
+        <c:spPr>
+          <a:ln w="12700" cap="flat">
+            <a:solidFill>
+              <a:srgbClr val="888888"/>
+            </a:solidFill>
+            <a:prstDash val="solid"/>
+            <a:round/>
+          </a:ln>
+        </c:spPr>
+        <c:txPr>
+          <a:bodyPr/>
+          <a:lstStyle/>
+          <a:p>
+            <a:pPr>
+              <a:defRPr sz="1200" b="0" i="0" u="none" strike="noStrike">
+                <a:solidFill>
+                  <a:srgbClr val="000000"/>
+                </a:solidFill>
+                <a:latin typeface="Arial"/>
+              </a:defRPr>
+            </a:pPr>
+            <a:endParaRPr lang="en-US"/>
+          </a:p>
+        </c:txPr>
+        <c:crossAx val="2094734554"/>
+        <c:crosses val="autoZero"/>
+        <c:crossBetween val="between"/>
+      </c:valAx>
+      <c:spPr>
+        <a:noFill/>
+        <a:ln>
+          <a:noFill/>
+        </a:ln>
+        <a:effectLst/>
+      </c:spPr>
+    </c:plotArea>
+    <c:plotVisOnly val="1"/>
+    <c:dispBlanksAs val="span"/>
+  </c:chart>
+  <c:spPr>
+    <a:noFill/>
+    <a:ln>
+      <a:noFill/>
+    </a:ln>
+    <a:effectLst/>
+  </c:spPr>
+  <c:externalData r:id="rId1">
+    <c:autoUpdate val="0"/>
+  </c:externalData>
+</c:chartSpace>
+</file>
+
+<file path=ppt/charts/chart7.xml><?xml version="1.0" encoding="utf-8"?>
+<c:chartSpace xmlns:c="http://schemas.openxmlformats.org/drawingml/2006/chart" xmlns:a="http://schemas.openxmlformats.org/drawingml/2006/main" xmlns:r="http://schemas.openxmlformats.org/officeDocument/2006/relationships">
+  <c:date1904 val="0"/>
+  <c:roundedCorners val="1"/>
+  <c:chart>
+    <c:autoTitleDeleted val="1"/>
+    <c:plotArea>
+      <c:layout/>
+      <c:barChart>
+        <c:barDir val="col"/>
+        <c:grouping val="stacked"/>
+        <c:varyColors val="0"/>
+        <c:ser>
+          <c:idx val="0"/>
+          <c:order val="0"/>
+          <c:tx>
+            <c:strRef>
+              <c:f>Sheet1!$B$1</c:f>
+              <c:strCache>
+                <c:ptCount val="1"/>
+                <c:pt idx="0">
+                  <c:v>Trough</c:v>
+                </c:pt>
+              </c:strCache>
+            </c:strRef>
+          </c:tx>
+          <c:spPr>
+            <a:solidFill>
+              <a:srgbClr val="B5AEA9"/>
+            </a:solidFill>
+            <a:effectLst/>
+          </c:spPr>
+          <c:invertIfNegative val="0"/>
+          <c:dLbls>
+            <c:numFmt formatCode="#,##0;;;" sourceLinked="0"/>
+            <c:txPr>
+              <a:bodyPr/>
+              <a:lstStyle/>
+              <a:p>
+                <a:pPr>
+                  <a:defRPr b="1" i="0" strike="noStrike" sz="1000" u="none">
+                    <a:solidFill>
+                      <a:srgbClr val="FFFFFF"/>
+                    </a:solidFill>
+                    <a:latin typeface="+mn-lt"/>
+                  </a:defRPr>
+                </a:pPr>
+              </a:p>
+            </c:txPr>
+            <c:dLblPos val="inEnd"/>
+            <c:showLegendKey val="0"/>
+            <c:showVal val="1"/>
+            <c:showCatName val="0"/>
+            <c:showSerName val="0"/>
+            <c:showPercent val="0"/>
+            <c:showBubbleSize val="0"/>
+            <c:showLeaderLines val="0"/>
+          </c:dLbls>
+          <c:cat>
+            <c:multiLvlStrRef>
+              <c:f>Sheet1!$A$2:$A$8</c:f>
+              <c:multiLvlStrCache>
+                <c:ptCount val="7"/>
+                <c:lvl>
+                  <c:pt idx="0">
+                    <c:v>FY25</c:v>
+                  </c:pt>
+                  <c:pt idx="1">
+                    <c:v>FY26E</c:v>
+                  </c:pt>
+                  <c:pt idx="2">
+                    <c:v>FY27E</c:v>
+                  </c:pt>
+                  <c:pt idx="3">
+                    <c:v>FY28E</c:v>
+                  </c:pt>
+                  <c:pt idx="4">
+                    <c:v>FY29E</c:v>
+                  </c:pt>
+                  <c:pt idx="5">
+                    <c:v>FY30E</c:v>
+                  </c:pt>
+                  <c:pt idx="6">
+                    <c:v>FY31E</c:v>
+                  </c:pt>
+                </c:lvl>
+              </c:multiLvlStrCache>
+            </c:multiLvlStrRef>
+          </c:cat>
+          <c:val>
+            <c:numRef>
+              <c:f>Sheet1!$B$2:$B$8</c:f>
+              <c:numCache>
+                <c:formatCode>General</c:formatCode>
+                <c:ptCount val="7"/>
+                <c:pt idx="0">
+                  <c:v/>
+                </c:pt>
+                <c:pt idx="1">
+                  <c:v>876</c:v>
+                </c:pt>
+                <c:pt idx="2">
+                  <c:v/>
+                </c:pt>
+                <c:pt idx="3">
+                  <c:v/>
+                </c:pt>
+                <c:pt idx="4">
+                  <c:v/>
+                </c:pt>
+                <c:pt idx="5">
+                  <c:v/>
+                </c:pt>
+                <c:pt idx="6">
+                  <c:v/>
+                </c:pt>
+              </c:numCache>
+            </c:numRef>
+          </c:val>
+        </c:ser>
+        <c:ser>
+          <c:idx val="1"/>
+          <c:order val="1"/>
+          <c:tx>
+            <c:strRef>
+              <c:f>Sheet1!$C$1</c:f>
+              <c:strCache>
+                <c:ptCount val="1"/>
+                <c:pt idx="0">
+                  <c:v>EBITDA / module</c:v>
+                </c:pt>
+              </c:strCache>
+            </c:strRef>
+          </c:tx>
+          <c:spPr>
+            <a:solidFill>
+              <a:srgbClr val="0A1C58"/>
+            </a:solidFill>
+            <a:effectLst/>
+          </c:spPr>
+          <c:invertIfNegative val="0"/>
+          <c:dLbls>
+            <c:numFmt formatCode="#,##0;;;" sourceLinked="0"/>
+            <c:txPr>
+              <a:bodyPr/>
+              <a:lstStyle/>
+              <a:p>
+                <a:pPr>
+                  <a:defRPr b="1" i="0" strike="noStrike" sz="1000" u="none">
+                    <a:solidFill>
+                      <a:srgbClr val="FFFFFF"/>
+                    </a:solidFill>
+                    <a:latin typeface="+mn-lt"/>
+                  </a:defRPr>
+                </a:pPr>
+              </a:p>
+            </c:txPr>
+            <c:dLblPos val="inEnd"/>
+            <c:showLegendKey val="0"/>
+            <c:showVal val="1"/>
+            <c:showCatName val="0"/>
+            <c:showSerName val="0"/>
+            <c:showPercent val="0"/>
+            <c:showBubbleSize val="0"/>
+            <c:showLeaderLines val="0"/>
+          </c:dLbls>
+          <c:cat>
+            <c:multiLvlStrRef>
+              <c:f>Sheet1!$A$2:$A$8</c:f>
+              <c:multiLvlStrCache>
+                <c:ptCount val="7"/>
+                <c:lvl>
+                  <c:pt idx="0">
+                    <c:v>FY25</c:v>
+                  </c:pt>
+                  <c:pt idx="1">
+                    <c:v>FY26E</c:v>
+                  </c:pt>
+                  <c:pt idx="2">
+                    <c:v>FY27E</c:v>
+                  </c:pt>
+                  <c:pt idx="3">
+                    <c:v>FY28E</c:v>
+                  </c:pt>
+                  <c:pt idx="4">
+                    <c:v>FY29E</c:v>
+                  </c:pt>
+                  <c:pt idx="5">
+                    <c:v>FY30E</c:v>
+                  </c:pt>
+                  <c:pt idx="6">
+                    <c:v>FY31E</c:v>
+                  </c:pt>
+                </c:lvl>
+              </c:multiLvlStrCache>
+            </c:multiLvlStrRef>
+          </c:cat>
+          <c:val>
+            <c:numRef>
+              <c:f>Sheet1!$C$2:$C$8</c:f>
+              <c:numCache>
+                <c:formatCode>General</c:formatCode>
+                <c:ptCount val="7"/>
+                <c:pt idx="0">
+                  <c:v>887</c:v>
+                </c:pt>
+                <c:pt idx="1">
+                  <c:v/>
+                </c:pt>
+                <c:pt idx="2">
+                  <c:v>913</c:v>
+                </c:pt>
+                <c:pt idx="3">
+                  <c:v>969</c:v>
+                </c:pt>
+                <c:pt idx="4">
+                  <c:v>1027</c:v>
+                </c:pt>
+                <c:pt idx="5">
+                  <c:v>1084</c:v>
+                </c:pt>
+                <c:pt idx="6">
+                  <c:v>1139</c:v>
+                </c:pt>
+              </c:numCache>
+            </c:numRef>
+          </c:val>
+        </c:ser>
+        <c:dLbls>
+          <c:numFmt formatCode="#,##0;;;" sourceLinked="0"/>
+          <c:txPr>
+            <a:bodyPr/>
+            <a:lstStyle/>
+            <a:p>
+              <a:pPr>
+                <a:defRPr b="1" i="0" strike="noStrike" sz="1000" u="none">
+                  <a:solidFill>
+                    <a:srgbClr val="FFFFFF"/>
+                  </a:solidFill>
+                  <a:latin typeface="+mn-lt"/>
+                </a:defRPr>
+              </a:pPr>
+            </a:p>
+          </c:txPr>
+          <c:dLblPos val="inEnd"/>
+          <c:showLegendKey val="0"/>
+          <c:showVal val="1"/>
+          <c:showCatName val="0"/>
+          <c:showSerName val="0"/>
+          <c:showPercent val="0"/>
+          <c:showBubbleSize val="0"/>
+          <c:showLeaderLines val="0"/>
+        </c:dLbls>
+        <c:gapWidth val="30"/>
+        <c:overlap val="100"/>
+        <c:axId val="2094734554"/>
+        <c:axId val="2094734552"/>
+        <c:axId val="2094734556"/>
+      </c:barChart>
+      <c:catAx>
+        <c:axId val="2094734554"/>
+        <c:scaling>
+          <c:orientation val="minMax"/>
+        </c:scaling>
+        <c:delete val="0"/>
+        <c:axPos val="b"/>
+        <c:numFmt formatCode="General" sourceLinked="1"/>
+        <c:majorTickMark val="out"/>
+        <c:minorTickMark val="none"/>
+        <c:tickLblPos val="low"/>
+        <c:spPr>
+          <a:ln w="12700" cap="flat">
+            <a:solidFill>
+              <a:srgbClr val="BFBFBF"/>
+            </a:solidFill>
+            <a:prstDash val="solid"/>
+            <a:round/>
+          </a:ln>
+        </c:spPr>
+        <c:txPr>
+          <a:bodyPr/>
+          <a:lstStyle/>
+          <a:p>
+            <a:pPr>
+              <a:defRPr sz="1000" b="0" i="0" u="none" strike="noStrike">
+                <a:solidFill>
+                  <a:srgbClr val="1A1A1A"/>
+                </a:solidFill>
+                <a:latin typeface="+mn-lt"/>
+              </a:defRPr>
+            </a:pPr>
+            <a:endParaRPr lang="en-US"/>
+          </a:p>
+        </c:txPr>
+        <c:crossAx val="2094734552"/>
+        <c:crosses val="autoZero"/>
+        <c:auto val="1"/>
+        <c:lblAlgn val="ctr"/>
+        <c:noMultiLvlLbl val="1"/>
+      </c:catAx>
+      <c:valAx>
+        <c:axId val="2094734552"/>
+        <c:scaling>
+          <c:orientation val="minMax"/>
+          <c:max val="1300"/>
+          <c:min val="0"/>
+        </c:scaling>
+        <c:delete val="1"/>
+        <c:axPos val="l"/>
+        <c:numFmt formatCode="General" sourceLinked="0"/>
+        <c:majorTickMark val="out"/>
+        <c:minorTickMark val="none"/>
+        <c:tickLblPos val="nextTo"/>
+        <c:spPr>
+          <a:ln w="12700" cap="flat">
+            <a:solidFill>
+              <a:srgbClr val="888888"/>
+            </a:solidFill>
+            <a:prstDash val="solid"/>
+            <a:round/>
+          </a:ln>
+        </c:spPr>
+        <c:txPr>
+          <a:bodyPr/>
+          <a:lstStyle/>
+          <a:p>
+            <a:pPr>
+              <a:defRPr sz="1200" b="0" i="0" u="none" strike="noStrike">
+                <a:solidFill>
+                  <a:srgbClr val="000000"/>
+                </a:solidFill>
+                <a:latin typeface="Arial"/>
+              </a:defRPr>
+            </a:pPr>
+            <a:endParaRPr lang="en-US"/>
+          </a:p>
+        </c:txPr>
+        <c:crossAx val="2094734554"/>
+        <c:crosses val="autoZero"/>
+        <c:crossBetween val="between"/>
+      </c:valAx>
+      <c:spPr>
+        <a:noFill/>
+        <a:ln>
+          <a:noFill/>
+        </a:ln>
+        <a:effectLst/>
+      </c:spPr>
+    </c:plotArea>
+    <c:plotVisOnly val="1"/>
+    <c:dispBlanksAs val="span"/>
+  </c:chart>
+  <c:spPr>
+    <a:noFill/>
+    <a:ln>
+      <a:noFill/>
+    </a:ln>
+    <a:effectLst/>
+  </c:spPr>
+  <c:externalData r:id="rId1">
+    <c:autoUpdate val="0"/>
+  </c:externalData>
+</c:chartSpace>
+</file>
+
+<file path=ppt/charts/chart8.xml><?xml version="1.0" encoding="utf-8"?>
+<c:chartSpace xmlns:c="http://schemas.openxmlformats.org/drawingml/2006/chart" xmlns:a="http://schemas.openxmlformats.org/drawingml/2006/main" xmlns:r="http://schemas.openxmlformats.org/officeDocument/2006/relationships">
+  <c:date1904 val="0"/>
+  <c:roundedCorners val="1"/>
+  <c:chart>
+    <c:autoTitleDeleted val="1"/>
+    <c:plotArea>
+      <c:layout/>
+      <c:lineChart>
+        <c:varyColors val="0"/>
+        <c:ser>
+          <c:idx val="0"/>
+          <c:order val="0"/>
+          <c:tx>
+            <c:strRef>
+              <c:f>Sheet1!$B$1</c:f>
+              <c:strCache>
+                <c:ptCount val="1"/>
+                <c:pt idx="0">
+                  <c:v>PMA adoption</c:v>
+                </c:pt>
+              </c:strCache>
+            </c:strRef>
+          </c:tx>
+          <c:spPr>
+            <a:solidFill>
+              <a:srgbClr val="B5AEA9"/>
+            </a:solidFill>
+            <a:ln w="38100" cap="flat">
+              <a:solidFill>
+                <a:srgbClr val="B5AEA9"/>
+              </a:solidFill>
+              <a:prstDash val="solid"/>
+              <a:round/>
+            </a:ln>
+            <a:effectLst/>
+          </c:spPr>
+          <c:invertIfNegative val="0"/>
+          <c:dLbls>
+            <c:numFmt formatCode="0.0" sourceLinked="0"/>
+            <c:txPr>
+              <a:bodyPr/>
+              <a:lstStyle/>
+              <a:p>
+                <a:pPr>
+                  <a:defRPr b="1" i="0" strike="noStrike" sz="1100" u="none">
+                    <a:solidFill>
+                      <a:srgbClr val="847C7A"/>
+                    </a:solidFill>
+                    <a:latin typeface="+mn-lt"/>
+                  </a:defRPr>
+                </a:pPr>
+              </a:p>
+            </c:txPr>
+            <c:dLblPos val="t"/>
+            <c:showLegendKey val="0"/>
+            <c:showVal val="1"/>
+            <c:showCatName val="0"/>
+            <c:showSerName val="0"/>
+            <c:showPercent val="0"/>
+            <c:showBubbleSize val="0"/>
+            <c:showLeaderLines val="0"/>
+          </c:dLbls>
+          <c:marker>
+            <c:symbol val="circle"/>
+            <c:size val="8"/>
+            <c:spPr>
+              <a:solidFill>
+                <a:srgbClr val="B5AEA9"/>
+              </a:solidFill>
+              <a:ln w="9525" cap="flat">
+                <a:solidFill>
+                  <a:srgbClr val="B5AEA9"/>
+                </a:solidFill>
+                <a:prstDash val="solid"/>
+                <a:round/>
+              </a:ln>
+              <a:effectLst/>
+            </c:spPr>
+          </c:marker>
+          <c:cat>
+            <c:multiLvlStrRef>
+              <c:f>Sheet1!$A$2:$A$6</c:f>
+              <c:multiLvlStrCache>
+                <c:ptCount val="5"/>
+                <c:lvl>
+                  <c:pt idx="0">
+                    <c:v>FY27E</c:v>
+                  </c:pt>
+                  <c:pt idx="1">
+                    <c:v>FY28E</c:v>
+                  </c:pt>
+                  <c:pt idx="2">
+                    <c:v>FY29E</c:v>
+                  </c:pt>
+                  <c:pt idx="3">
+                    <c:v>FY30E</c:v>
+                  </c:pt>
+                  <c:pt idx="4">
+                    <c:v>FY31E</c:v>
+                  </c:pt>
+                </c:lvl>
+              </c:multiLvlStrCache>
+            </c:multiLvlStrRef>
+          </c:cat>
+          <c:val>
+            <c:numRef>
+              <c:f>Sheet1!$B$2:$B$6</c:f>
+              <c:numCache>
+                <c:formatCode>General</c:formatCode>
+                <c:ptCount val="5"/>
+                <c:pt idx="0">
+                  <c:v>0.9</c:v>
+                </c:pt>
+                <c:pt idx="1">
+                  <c:v>3</c:v>
+                </c:pt>
+                <c:pt idx="2">
+                  <c:v>5</c:v>
+                </c:pt>
+                <c:pt idx="3">
+                  <c:v>7</c:v>
+                </c:pt>
+                <c:pt idx="4">
+                  <c:v>9</c:v>
+                </c:pt>
+              </c:numCache>
+            </c:numRef>
+          </c:val>
+          <c:smooth val="0"/>
+        </c:ser>
+        <c:dLbls>
+          <c:numFmt formatCode="0.0" sourceLinked="0"/>
+          <c:txPr>
+            <a:bodyPr/>
+            <a:lstStyle/>
+            <a:p>
+              <a:pPr>
+                <a:defRPr b="1" i="0" strike="noStrike" sz="1100" u="none">
+                  <a:solidFill>
+                    <a:srgbClr val="847C7A"/>
+                  </a:solidFill>
+                  <a:latin typeface="+mn-lt"/>
+                </a:defRPr>
+              </a:pPr>
+            </a:p>
+          </c:txPr>
+          <c:dLblPos val="t"/>
+          <c:showLegendKey val="0"/>
+          <c:showVal val="1"/>
+          <c:showCatName val="0"/>
+          <c:showSerName val="0"/>
+          <c:showPercent val="0"/>
+          <c:showBubbleSize val="0"/>
+          <c:showLeaderLines val="0"/>
+        </c:dLbls>
+        <c:marker val="1"/>
+        <c:axId val="2094734554"/>
+        <c:axId val="2094734552"/>
+        <c:axId val="2094734556"/>
+      </c:lineChart>
+      <c:catAx>
+        <c:axId val="2094734554"/>
+        <c:scaling>
+          <c:orientation val="minMax"/>
+        </c:scaling>
+        <c:delete val="1"/>
+        <c:axPos val="b"/>
+        <c:numFmt formatCode="General" sourceLinked="1"/>
+        <c:majorTickMark val="out"/>
+        <c:minorTickMark val="none"/>
+        <c:tickLblPos val="low"/>
+        <c:spPr>
+          <a:ln w="12700" cap="flat">
+            <a:noFill/>
+            <a:prstDash val="solid"/>
+            <a:round/>
+          </a:ln>
+        </c:spPr>
+        <c:txPr>
+          <a:bodyPr/>
+          <a:lstStyle/>
+          <a:p>
+            <a:pPr>
+              <a:defRPr sz="1200" b="0" i="0" u="none" strike="noStrike">
+                <a:solidFill>
+                  <a:srgbClr val="1A1A1A"/>
+                </a:solidFill>
+                <a:latin typeface="+mn-lt"/>
+              </a:defRPr>
+            </a:pPr>
+            <a:endParaRPr lang="en-US"/>
+          </a:p>
+        </c:txPr>
+        <c:crossAx val="2094734552"/>
+        <c:crosses val="autoZero"/>
+        <c:auto val="1"/>
+        <c:lblAlgn val="ctr"/>
+        <c:noMultiLvlLbl val="1"/>
+      </c:catAx>
+      <c:valAx>
+        <c:axId val="2094734552"/>
+        <c:scaling>
+          <c:orientation val="minMax"/>
+          <c:max val="13"/>
+          <c:min val="0"/>
+        </c:scaling>
+        <c:delete val="1"/>
+        <c:axPos val="l"/>
+        <c:numFmt formatCode="General" sourceLinked="0"/>
+        <c:majorTickMark val="out"/>
+        <c:minorTickMark val="none"/>
+        <c:tickLblPos val="nextTo"/>
+        <c:spPr>
+          <a:ln w="12700" cap="flat">
+            <a:solidFill>
+              <a:srgbClr val="888888"/>
+            </a:solidFill>
+            <a:prstDash val="solid"/>
+            <a:round/>
+          </a:ln>
+        </c:spPr>
+        <c:txPr>
+          <a:bodyPr/>
+          <a:lstStyle/>
+          <a:p>
+            <a:pPr>
+              <a:defRPr sz="1200" b="0" i="0" u="none" strike="noStrike">
+                <a:solidFill>
+                  <a:srgbClr val="000000"/>
+                </a:solidFill>
+                <a:latin typeface="Arial"/>
+              </a:defRPr>
+            </a:pPr>
+            <a:endParaRPr lang="en-US"/>
+          </a:p>
+        </c:txPr>
+        <c:crossAx val="2094734554"/>
+        <c:crosses val="autoZero"/>
+        <c:crossBetween val="between"/>
+      </c:valAx>
+      <c:spPr>
+        <a:noFill/>
+        <a:ln>
+          <a:noFill/>
+        </a:ln>
+        <a:effectLst/>
+      </c:spPr>
+    </c:plotArea>
+    <c:plotVisOnly val="1"/>
+    <c:dispBlanksAs val="span"/>
+  </c:chart>
+  <c:spPr>
+    <a:noFill/>
+    <a:ln>
+      <a:noFill/>
+    </a:ln>
+    <a:effectLst/>
+  </c:spPr>
+  <c:externalData r:id="rId1">
+    <c:autoUpdate val="0"/>
+  </c:externalData>
+</c:chartSpace>
+</file>
+
+<file path=ppt/charts/chart9.xml><?xml version="1.0" encoding="utf-8"?>
+<c:chartSpace xmlns:c="http://schemas.openxmlformats.org/drawingml/2006/chart" xmlns:a="http://schemas.openxmlformats.org/drawingml/2006/main" xmlns:r="http://schemas.openxmlformats.org/officeDocument/2006/relationships">
+  <c:date1904 val="0"/>
+  <c:roundedCorners val="1"/>
+  <c:chart>
+    <c:autoTitleDeleted val="1"/>
+    <c:plotArea>
+      <c:layout/>
+      <c:barChart>
+        <c:barDir val="col"/>
+        <c:grouping val="clustered"/>
+        <c:varyColors val="0"/>
+        <c:ser>
+          <c:idx val="0"/>
+          <c:order val="0"/>
+          <c:tx>
+            <c:strRef>
+              <c:f>Sheet1!$B$1</c:f>
+              <c:strCache>
+                <c:ptCount val="1"/>
+                <c:pt idx="0">
+                  <c:v>PMA EBITDA uplift</c:v>
+                </c:pt>
+              </c:strCache>
+            </c:strRef>
+          </c:tx>
+          <c:spPr>
+            <a:solidFill>
+              <a:srgbClr val="0A1C58"/>
+            </a:solidFill>
+            <a:effectLst/>
+          </c:spPr>
+          <c:invertIfNegative val="0"/>
+          <c:dLbls>
+            <c:numFmt formatCode="&quot;$&quot;0&quot;M&quot;" sourceLinked="0"/>
+            <c:txPr>
+              <a:bodyPr/>
+              <a:lstStyle/>
+              <a:p>
+                <a:pPr>
+                  <a:defRPr b="1" i="0" strike="noStrike" sz="1100" u="none">
+                    <a:solidFill>
+                      <a:srgbClr val="1A1A1A"/>
+                    </a:solidFill>
+                    <a:latin typeface="+mn-lt"/>
+                  </a:defRPr>
+                </a:pPr>
+              </a:p>
+            </c:txPr>
+            <c:showLegendKey val="0"/>
+            <c:showVal val="1"/>
+            <c:showCatName val="0"/>
+            <c:showSerName val="0"/>
+            <c:showPercent val="0"/>
+            <c:showBubbleSize val="0"/>
+            <c:showLeaderLines val="0"/>
+          </c:dLbls>
+          <c:cat>
+            <c:multiLvlStrRef>
+              <c:f>Sheet1!$A$2:$A$6</c:f>
+              <c:multiLvlStrCache>
+                <c:ptCount val="5"/>
+                <c:lvl>
+                  <c:pt idx="0">
+                    <c:v>FY27E</c:v>
+                  </c:pt>
+                  <c:pt idx="1">
+                    <c:v>FY28E</c:v>
+                  </c:pt>
+                  <c:pt idx="2">
+                    <c:v>FY29E</c:v>
+                  </c:pt>
+                  <c:pt idx="3">
+                    <c:v>FY30E</c:v>
+                  </c:pt>
+                  <c:pt idx="4">
+                    <c:v>FY31E</c:v>
+                  </c:pt>
+                </c:lvl>
+              </c:multiLvlStrCache>
+            </c:multiLvlStrRef>
+          </c:cat>
+          <c:val>
+            <c:numRef>
+              <c:f>Sheet1!$B$2:$B$6</c:f>
+              <c:numCache>
+                <c:formatCode>General</c:formatCode>
+                <c:ptCount val="5"/>
+                <c:pt idx="0">
+                  <c:v>6</c:v>
+                </c:pt>
+                <c:pt idx="1">
+                  <c:v>24</c:v>
+                </c:pt>
+                <c:pt idx="2">
+                  <c:v>42</c:v>
+                </c:pt>
+                <c:pt idx="3">
+                  <c:v>59</c:v>
+                </c:pt>
+                <c:pt idx="4">
+                  <c:v>77</c:v>
+                </c:pt>
+              </c:numCache>
+            </c:numRef>
+          </c:val>
+        </c:ser>
+        <c:dLbls>
+          <c:numFmt formatCode="&quot;$&quot;0&quot;M&quot;" sourceLinked="0"/>
+          <c:txPr>
+            <a:bodyPr/>
+            <a:lstStyle/>
+            <a:p>
+              <a:pPr>
+                <a:defRPr b="1" i="0" strike="noStrike" sz="1100" u="none">
+                  <a:solidFill>
+                    <a:srgbClr val="1A1A1A"/>
+                  </a:solidFill>
+                  <a:latin typeface="+mn-lt"/>
+                </a:defRPr>
+              </a:pPr>
+            </a:p>
+          </c:txPr>
+          <c:showLegendKey val="0"/>
+          <c:showVal val="1"/>
+          <c:showCatName val="0"/>
+          <c:showSerName val="0"/>
+          <c:showPercent val="0"/>
+          <c:showBubbleSize val="0"/>
+          <c:showLeaderLines val="0"/>
+        </c:dLbls>
+        <c:gapWidth val="45"/>
+        <c:overlap val="0"/>
+        <c:axId val="2094734554"/>
+        <c:axId val="2094734552"/>
+        <c:axId val="2094734556"/>
+      </c:barChart>
+      <c:catAx>
+        <c:axId val="2094734554"/>
+        <c:scaling>
+          <c:orientation val="minMax"/>
+        </c:scaling>
+        <c:delete val="0"/>
+        <c:axPos val="b"/>
+        <c:numFmt formatCode="General" sourceLinked="1"/>
+        <c:majorTickMark val="out"/>
+        <c:minorTickMark val="none"/>
+        <c:tickLblPos val="low"/>
+        <c:spPr>
+          <a:ln w="12700" cap="flat">
+            <a:solidFill>
+              <a:srgbClr val="BFBFBF"/>
+            </a:solidFill>
+            <a:prstDash val="solid"/>
+            <a:round/>
+          </a:ln>
+        </c:spPr>
+        <c:txPr>
+          <a:bodyPr/>
+          <a:lstStyle/>
+          <a:p>
+            <a:pPr>
+              <a:defRPr sz="1200" b="0" i="0" u="none" strike="noStrike">
+                <a:solidFill>
+                  <a:srgbClr val="1A1A1A"/>
+                </a:solidFill>
+                <a:latin typeface="+mn-lt"/>
+              </a:defRPr>
+            </a:pPr>
+            <a:endParaRPr lang="en-US"/>
+          </a:p>
+        </c:txPr>
+        <c:crossAx val="2094734552"/>
+        <c:crosses val="autoZero"/>
+        <c:auto val="1"/>
+        <c:lblAlgn val="ctr"/>
+        <c:noMultiLvlLbl val="1"/>
+      </c:catAx>
+      <c:valAx>
+        <c:axId val="2094734552"/>
+        <c:scaling>
+          <c:orientation val="minMax"/>
+          <c:max val="92"/>
+          <c:min val="0"/>
+        </c:scaling>
+        <c:delete val="1"/>
+        <c:axPos val="l"/>
+        <c:numFmt formatCode="General" sourceLinked="0"/>
+        <c:majorTickMark val="out"/>
+        <c:minorTickMark val="none"/>
+        <c:tickLblPos val="nextTo"/>
+        <c:spPr>
+          <a:ln w="12700" cap="flat">
+            <a:solidFill>
+              <a:srgbClr val="888888"/>
+            </a:solidFill>
+            <a:prstDash val="solid"/>
+            <a:round/>
+          </a:ln>
+        </c:spPr>
+        <c:txPr>
+          <a:bodyPr/>
+          <a:lstStyle/>
+          <a:p>
+            <a:pPr>
+              <a:defRPr sz="1200" b="0" i="0" u="none" strike="noStrike">
+                <a:solidFill>
+                  <a:srgbClr val="000000"/>
+                </a:solidFill>
+                <a:latin typeface="Arial"/>
+              </a:defRPr>
+            </a:pPr>
+            <a:endParaRPr lang="en-US"/>
+          </a:p>
+        </c:txPr>
+        <c:crossAx val="2094734554"/>
+        <c:crosses val="autoZero"/>
+        <c:crossBetween val="between"/>
+      </c:valAx>
+      <c:spPr>
+        <a:noFill/>
+        <a:ln>
+          <a:noFill/>
+        </a:ln>
+        <a:effectLst/>
+      </c:spPr>
+    </c:plotArea>
+    <c:plotVisOnly val="1"/>
+    <c:dispBlanksAs val="span"/>
+  </c:chart>
+  <c:spPr>
+    <a:noFill/>
+    <a:ln>
+      <a:noFill/>
+    </a:ln>
+    <a:effectLst/>
+  </c:spPr>
+  <c:externalData r:id="rId1">
+    <c:autoUpdate val="0"/>
+  </c:externalData>
+</c:chartSpace>
+</file>
+
 <file path=ppt/notesMasters/notesMaster1.xml><?xml version="1.0" encoding="utf-8"?>
 <p:notesMaster xmlns:a="http://schemas.openxmlformats.org/drawingml/2006/main" xmlns:r="http://schemas.openxmlformats.org/officeDocument/2006/relationships" xmlns:p="http://schemas.openxmlformats.org/presentationml/2006/main">
   <p:cSld>
@@ -1644,6 +3796,182 @@
 </p:notes>
 </file>
 
+<file path=ppt/notesSlides/notesSlide10.xml><?xml version="1.0" encoding="utf-8"?>
+<p:notes xmlns:a="http://schemas.openxmlformats.org/drawingml/2006/main" xmlns:r="http://schemas.openxmlformats.org/officeDocument/2006/relationships" xmlns:p="http://schemas.openxmlformats.org/presentationml/2006/main">
+  <p:cSld>
+    <p:spTree>
+      <p:nvGrpSpPr>
+        <p:cNvPr id="1" name=""/>
+        <p:cNvGrpSpPr/>
+        <p:nvPr/>
+      </p:nvGrpSpPr>
+      <p:grpSpPr>
+        <a:xfrm>
+          <a:off x="0" y="0"/>
+          <a:ext cx="0" cy="0"/>
+          <a:chOff x="0" y="0"/>
+          <a:chExt cx="0" cy="0"/>
+        </a:xfrm>
+      </p:grpSpPr>
+      <p:sp>
+        <p:nvSpPr>
+          <p:cNvPr id="2" name="Slide Image Placeholder 1"/>
+          <p:cNvSpPr>
+            <a:spLocks noGrp="1" noRot="1" noChangeAspect="1"/>
+          </p:cNvSpPr>
+          <p:nvPr>
+            <p:ph type="sldImg"/>
+          </p:nvPr>
+        </p:nvSpPr>
+        <p:spPr/>
+      </p:sp>
+      <p:sp>
+        <p:nvSpPr>
+          <p:cNvPr id="3" name="Notes Placeholder 2"/>
+          <p:cNvSpPr>
+            <a:spLocks noGrp="1"/>
+          </p:cNvSpPr>
+          <p:nvPr>
+            <p:ph type="body" idx="1"/>
+          </p:nvPr>
+        </p:nvSpPr>
+        <p:spPr/>
+        <p:txBody>
+          <a:bodyPr/>
+          <a:lstStyle/>
+          <a:p>
+            <a:r>
+              <a:rPr lang="en-US" dirty="0"/>
+              <a:t>OEM index compounds the CFM escalator (7% in 2026, 6.5% in 2027, 7% thereafter). FTAI index applies the model's pass-through: 0% in 2026, then 50% of the escalator. EBITDA per module: $887K FY25, $876K FY26E trough, $913K FY27E, $969K FY28E, $1,027K FY29E, $1,084K FY30E, $1,139K FY31E (+30% vs. FY26E).</a:t>
+            </a:r>
+            <a:endParaRPr lang="en-US" dirty="0"/>
+          </a:p>
+        </p:txBody>
+      </p:sp>
+      <p:sp>
+        <p:nvSpPr>
+          <p:cNvPr id="4" name="Slide Number Placeholder 3"/>
+          <p:cNvSpPr>
+            <a:spLocks noGrp="1"/>
+          </p:cNvSpPr>
+          <p:nvPr>
+            <p:ph type="sldNum" sz="quarter" idx="10"/>
+          </p:nvPr>
+        </p:nvSpPr>
+        <p:spPr/>
+        <p:txBody>
+          <a:bodyPr/>
+          <a:lstStyle/>
+          <a:p>
+            <a:fld id="{F7021451-1387-4CA6-816F-3879F97B5CBC}" type="slidenum">
+              <a:rPr lang="en-US"/>
+              <a:t>10</a:t>
+            </a:fld>
+            <a:endParaRPr lang="en-US"/>
+          </a:p>
+        </p:txBody>
+      </p:sp>
+    </p:spTree>
+    <p:extLst>
+      <p:ext uri="{BB962C8B-B14F-4D97-AF65-F5344CB8AC3E}">
+        <p14:creationId xmlns:p14="http://schemas.microsoft.com/office/powerpoint/2010/main" val="1024086991"/>
+      </p:ext>
+    </p:extLst>
+  </p:cSld>
+  <p:clrMapOvr>
+    <a:masterClrMapping/>
+  </p:clrMapOvr>
+</p:notes>
+</file>
+
+<file path=ppt/notesSlides/notesSlide11.xml><?xml version="1.0" encoding="utf-8"?>
+<p:notes xmlns:a="http://schemas.openxmlformats.org/drawingml/2006/main" xmlns:r="http://schemas.openxmlformats.org/officeDocument/2006/relationships" xmlns:p="http://schemas.openxmlformats.org/presentationml/2006/main">
+  <p:cSld>
+    <p:spTree>
+      <p:nvGrpSpPr>
+        <p:cNvPr id="1" name=""/>
+        <p:cNvGrpSpPr/>
+        <p:nvPr/>
+      </p:nvGrpSpPr>
+      <p:grpSpPr>
+        <a:xfrm>
+          <a:off x="0" y="0"/>
+          <a:ext cx="0" cy="0"/>
+          <a:chOff x="0" y="0"/>
+          <a:chExt cx="0" cy="0"/>
+        </a:xfrm>
+      </p:grpSpPr>
+      <p:sp>
+        <p:nvSpPr>
+          <p:cNvPr id="2" name="Slide Image Placeholder 1"/>
+          <p:cNvSpPr>
+            <a:spLocks noGrp="1" noRot="1" noChangeAspect="1"/>
+          </p:cNvSpPr>
+          <p:nvPr>
+            <p:ph type="sldImg"/>
+          </p:nvPr>
+        </p:nvSpPr>
+        <p:spPr/>
+      </p:sp>
+      <p:sp>
+        <p:nvSpPr>
+          <p:cNvPr id="3" name="Notes Placeholder 2"/>
+          <p:cNvSpPr>
+            <a:spLocks noGrp="1"/>
+          </p:cNvSpPr>
+          <p:nvPr>
+            <p:ph type="body" idx="1"/>
+          </p:nvPr>
+        </p:nvSpPr>
+        <p:spPr/>
+        <p:txBody>
+          <a:bodyPr/>
+          <a:lstStyle/>
+          <a:p>
+            <a:r>
+              <a:rPr lang="en-US" dirty="0"/>
+              <a:t>Our model: PMA penetration 0.9% FY27E rising to 9% FY31E at $0.4M EBITDA uplift per PMA module = $6M to $77M. Jefferies estimates ~$0.8M uplift per PMA module and ~$43M of 2026E Aerospace EBITDA per 5 pts of adoption, so our case is conservative on both rate and uplift. Chromalloy JV program: 3 of 5 parts approved (LPT stage 1 vane 2021, HPT stage 1 vane Oct 2024, HPT stage 1 blade Oct 2025), covering ~80% of targeted savings; 2 in FAA review.</a:t>
+            </a:r>
+            <a:endParaRPr lang="en-US" dirty="0"/>
+          </a:p>
+        </p:txBody>
+      </p:sp>
+      <p:sp>
+        <p:nvSpPr>
+          <p:cNvPr id="4" name="Slide Number Placeholder 3"/>
+          <p:cNvSpPr>
+            <a:spLocks noGrp="1"/>
+          </p:cNvSpPr>
+          <p:nvPr>
+            <p:ph type="sldNum" sz="quarter" idx="10"/>
+          </p:nvPr>
+        </p:nvSpPr>
+        <p:spPr/>
+        <p:txBody>
+          <a:bodyPr/>
+          <a:lstStyle/>
+          <a:p>
+            <a:fld id="{F7021451-1387-4CA6-816F-3879F97B5CBC}" type="slidenum">
+              <a:rPr lang="en-US"/>
+              <a:t>11</a:t>
+            </a:fld>
+            <a:endParaRPr lang="en-US"/>
+          </a:p>
+        </p:txBody>
+      </p:sp>
+    </p:spTree>
+    <p:extLst>
+      <p:ext uri="{BB962C8B-B14F-4D97-AF65-F5344CB8AC3E}">
+        <p14:creationId xmlns:p14="http://schemas.microsoft.com/office/powerpoint/2010/main" val="1024086991"/>
+      </p:ext>
+    </p:extLst>
+  </p:cSld>
+  <p:clrMapOvr>
+    <a:masterClrMapping/>
+  </p:clrMapOvr>
+</p:notes>
+</file>
+
 <file path=ppt/notesSlides/notesSlide2.xml><?xml version="1.0" encoding="utf-8"?>
 <p:notes xmlns:a="http://schemas.openxmlformats.org/drawingml/2006/main" xmlns:r="http://schemas.openxmlformats.org/officeDocument/2006/relationships" xmlns:p="http://schemas.openxmlformats.org/presentationml/2006/main">
   <p:cSld>
@@ -2242,6 +4570,94 @@
             <a:fld id="{F7021451-1387-4CA6-816F-3879F97B5CBC}" type="slidenum">
               <a:rPr lang="en-US"/>
               <a:t>8</a:t>
+            </a:fld>
+            <a:endParaRPr lang="en-US"/>
+          </a:p>
+        </p:txBody>
+      </p:sp>
+    </p:spTree>
+    <p:extLst>
+      <p:ext uri="{BB962C8B-B14F-4D97-AF65-F5344CB8AC3E}">
+        <p14:creationId xmlns:p14="http://schemas.microsoft.com/office/powerpoint/2010/main" val="1024086991"/>
+      </p:ext>
+    </p:extLst>
+  </p:cSld>
+  <p:clrMapOvr>
+    <a:masterClrMapping/>
+  </p:clrMapOvr>
+</p:notes>
+</file>
+
+<file path=ppt/notesSlides/notesSlide9.xml><?xml version="1.0" encoding="utf-8"?>
+<p:notes xmlns:a="http://schemas.openxmlformats.org/drawingml/2006/main" xmlns:r="http://schemas.openxmlformats.org/officeDocument/2006/relationships" xmlns:p="http://schemas.openxmlformats.org/presentationml/2006/main">
+  <p:cSld>
+    <p:spTree>
+      <p:nvGrpSpPr>
+        <p:cNvPr id="1" name=""/>
+        <p:cNvGrpSpPr/>
+        <p:nvPr/>
+      </p:nvGrpSpPr>
+      <p:grpSpPr>
+        <a:xfrm>
+          <a:off x="0" y="0"/>
+          <a:ext cx="0" cy="0"/>
+          <a:chOff x="0" y="0"/>
+          <a:chExt cx="0" cy="0"/>
+        </a:xfrm>
+      </p:grpSpPr>
+      <p:sp>
+        <p:nvSpPr>
+          <p:cNvPr id="2" name="Slide Image Placeholder 1"/>
+          <p:cNvSpPr>
+            <a:spLocks noGrp="1" noRot="1" noChangeAspect="1"/>
+          </p:cNvSpPr>
+          <p:nvPr>
+            <p:ph type="sldImg"/>
+          </p:nvPr>
+        </p:nvSpPr>
+        <p:spPr/>
+      </p:sp>
+      <p:sp>
+        <p:nvSpPr>
+          <p:cNvPr id="3" name="Notes Placeholder 2"/>
+          <p:cNvSpPr>
+            <a:spLocks noGrp="1"/>
+          </p:cNvSpPr>
+          <p:nvPr>
+            <p:ph type="body" idx="1"/>
+          </p:nvPr>
+        </p:nvSpPr>
+        <p:spPr/>
+        <p:txBody>
+          <a:bodyPr/>
+          <a:lstStyle/>
+          <a:p>
+            <a:r>
+              <a:rPr lang="en-US" dirty="0"/>
+              <a:t>Depreciated leasing inventory remaining in Aerospace Products is under 8% (GPS analysis), so even on the short report's logic there is little left to compress margins. Margin path: FY25 34.7%, Q1'26 29.9%, Q2'26 28.5% reported; GPS model 30.1% FY26E, 29.9% FY27E, then 30.7% / 31.4% / 32.0% / 32.5% FY28E–FY31E.</a:t>
+            </a:r>
+            <a:endParaRPr lang="en-US" dirty="0"/>
+          </a:p>
+        </p:txBody>
+      </p:sp>
+      <p:sp>
+        <p:nvSpPr>
+          <p:cNvPr id="4" name="Slide Number Placeholder 3"/>
+          <p:cNvSpPr>
+            <a:spLocks noGrp="1"/>
+          </p:cNvSpPr>
+          <p:nvPr>
+            <p:ph type="sldNum" sz="quarter" idx="10"/>
+          </p:nvPr>
+        </p:nvSpPr>
+        <p:spPr/>
+        <p:txBody>
+          <a:bodyPr/>
+          <a:lstStyle/>
+          <a:p>
+            <a:fld id="{F7021451-1387-4CA6-816F-3879F97B5CBC}" type="slidenum">
+              <a:rPr lang="en-US"/>
+              <a:t>9</a:t>
             </a:fld>
             <a:endParaRPr lang="en-US"/>
           </a:p>
@@ -2404,7 +4820,7 @@
         <p:spPr>
           <a:xfrm>
             <a:off x="320040" y="182880"/>
-            <a:ext cx="7132320" cy="640080"/>
+            <a:ext cx="8503920" cy="640080"/>
           </a:xfrm>
           <a:prstGeom prst="rect">
             <a:avLst/>
@@ -2567,7 +4983,7 @@
         <p:spPr>
           <a:xfrm>
             <a:off x="320040" y="182880"/>
-            <a:ext cx="7132320" cy="640080"/>
+            <a:ext cx="8503920" cy="640080"/>
           </a:xfrm>
           <a:prstGeom prst="rect">
             <a:avLst/>
@@ -3724,6 +6140,1000 @@
 </p:sld>
 </file>
 
+<file path=ppt/slides/slide10.xml><?xml version="1.0" encoding="utf-8"?>
+<p:sld xmlns:a="http://schemas.openxmlformats.org/drawingml/2006/main" xmlns:r="http://schemas.openxmlformats.org/officeDocument/2006/relationships" xmlns:p="http://schemas.openxmlformats.org/presentationml/2006/main">
+  <p:cSld name="Slide 10">
+    <p:spTree>
+      <p:nvGrpSpPr>
+        <p:cNvPr id="1" name=""/>
+        <p:cNvGrpSpPr/>
+        <p:nvPr/>
+      </p:nvGrpSpPr>
+      <p:grpSpPr>
+        <a:xfrm>
+          <a:off x="0" y="0"/>
+          <a:ext cx="0" cy="0"/>
+          <a:chOff x="0" y="0"/>
+          <a:chExt cx="0" cy="0"/>
+        </a:xfrm>
+      </p:grpSpPr>
+      <p:sp>
+        <p:nvSpPr>
+          <p:cNvPr id="2" name="Text 1"/>
+          <p:cNvSpPr/>
+          <p:nvPr>
+            <p:ph idx="102" type="title" hasCustomPrompt="1"/>
+          </p:nvPr>
+        </p:nvSpPr>
+        <p:spPr>
+          <a:xfrm>
+            <a:off x="320040" y="182880"/>
+            <a:ext cx="8503920" cy="640080"/>
+          </a:xfrm>
+          <a:prstGeom prst="rect">
+            <a:avLst/>
+          </a:prstGeom>
+          <a:noFill/>
+          <a:ln/>
+        </p:spPr>
+        <p:txBody>
+          <a:bodyPr wrap="square" lIns="0" tIns="0" rIns="0" bIns="0" rtlCol="0" anchor="ctr"/>
+          <a:lstStyle/>
+          <a:p>
+            <a:pPr algn="l" indent="0" marL="0">
+              <a:buNone/>
+            </a:pPr>
+            <a:r>
+              <a:rPr lang="en-US" sz="3200" b="1" dirty="0">
+                <a:solidFill>
+                  <a:schemeClr val="tx2"/>
+                </a:solidFill>
+              </a:rPr>
+              <a:t>Thesis 1a: Margin Floor (2/3)</a:t>
+            </a:r>
+            <a:endParaRPr lang="en-US" sz="3200" dirty="0"/>
+          </a:p>
+        </p:txBody>
+      </p:sp>
+      <p:sp>
+        <p:nvSpPr>
+          <p:cNvPr id="3" name="Text 1"/>
+          <p:cNvSpPr/>
+          <p:nvPr>
+            <p:ph idx="103" type="body" hasCustomPrompt="1"/>
+          </p:nvPr>
+        </p:nvSpPr>
+        <p:spPr>
+          <a:xfrm>
+            <a:off x="320040" y="932688"/>
+            <a:ext cx="8503920" cy="566928"/>
+          </a:xfrm>
+          <a:prstGeom prst="rect">
+            <a:avLst/>
+          </a:prstGeom>
+          <a:noFill/>
+          <a:ln/>
+        </p:spPr>
+        <p:txBody>
+          <a:bodyPr wrap="square" lIns="0" tIns="0" rIns="0" bIns="0" rtlCol="0" anchor="t"/>
+          <a:lstStyle/>
+          <a:p>
+            <a:pPr algn="l" indent="0" marL="0">
+              <a:buNone/>
+            </a:pPr>
+            <a:r>
+              <a:rPr lang="en-US" sz="1700" b="1" dirty="0">
+                <a:solidFill>
+                  <a:schemeClr val="tx2"/>
+                </a:solidFill>
+              </a:rPr>
+              <a:t>FTAI held price to win share while OEM list prices rose ~7% a year. It can now catch up.</a:t>
+            </a:r>
+            <a:endParaRPr lang="en-US" sz="1700" dirty="0"/>
+          </a:p>
+        </p:txBody>
+      </p:sp>
+      <p:sp>
+        <p:nvSpPr>
+          <p:cNvPr id="4" name="Price header"/>
+          <p:cNvSpPr txBox="1"/>
+          <p:nvPr/>
+        </p:nvSpPr>
+        <p:spPr>
+          <a:xfrm>
+            <a:off x="320040" y="1554480"/>
+            <a:ext cx="4206240" cy="365760"/>
+          </a:xfrm>
+          <a:prstGeom prst="rect">
+            <a:avLst/>
+          </a:prstGeom>
+          <a:noFill/>
+          <a:ln/>
+        </p:spPr>
+        <p:txBody>
+          <a:bodyPr wrap="square" lIns="0" tIns="0" rIns="0" bIns="0" rtlCol="0" anchor="b"/>
+          <a:lstStyle/>
+          <a:p>
+            <a:pPr algn="ctr" indent="0" marL="0">
+              <a:buNone/>
+            </a:pPr>
+            <a:r>
+              <a:rPr lang="en-US" sz="1600" b="1" dirty="0">
+                <a:solidFill>
+                  <a:srgbClr val="1A1A1A"/>
+                </a:solidFill>
+              </a:rPr>
+              <a:t>Price Index (2025 = 100)</a:t>
+            </a:r>
+            <a:endParaRPr lang="en-US" sz="1600" dirty="0"/>
+          </a:p>
+        </p:txBody>
+      </p:sp>
+      <p:sp>
+        <p:nvSpPr>
+          <p:cNvPr id="5" name="Price header rule"/>
+          <p:cNvSpPr/>
+          <p:nvPr/>
+        </p:nvSpPr>
+        <p:spPr>
+          <a:xfrm>
+            <a:off x="320040" y="1975104"/>
+            <a:ext cx="4206240" cy="0"/>
+          </a:xfrm>
+          <a:prstGeom prst="line">
+            <a:avLst/>
+          </a:prstGeom>
+          <a:noFill/>
+          <a:ln w="12700">
+            <a:solidFill>
+              <a:srgbClr val="1A1A1A"/>
+            </a:solidFill>
+            <a:prstDash val="solid"/>
+          </a:ln>
+        </p:spPr>
+      </p:sp>
+      <p:graphicFrame>
+        <p:nvGraphicFramePr>
+          <p:cNvPr id="6" name="Price index chart" descr=""/>
+          <p:cNvGraphicFramePr/>
+          <p:nvPr/>
+        </p:nvGraphicFramePr>
+        <p:xfrm>
+          <a:off x="320040" y="2103120"/>
+          <a:ext cx="4206240" cy="2834640"/>
+        </p:xfrm>
+        <a:graphic xmlns:a="http://schemas.openxmlformats.org/drawingml/2006/main">
+          <a:graphicData uri="http://schemas.openxmlformats.org/drawingml/2006/chart">
+            <c:chart xmlns:c="http://schemas.openxmlformats.org/drawingml/2006/chart" r:id="rId1"/>
+          </a:graphicData>
+        </a:graphic>
+      </p:graphicFrame>
+      <p:sp>
+        <p:nvSpPr>
+          <p:cNvPr id="7" name="OEM line label"/>
+          <p:cNvSpPr txBox="1"/>
+          <p:nvPr/>
+        </p:nvSpPr>
+        <p:spPr>
+          <a:xfrm>
+            <a:off x="2697480" y="2148840"/>
+            <a:ext cx="1737360" cy="274320"/>
+          </a:xfrm>
+          <a:prstGeom prst="rect">
+            <a:avLst/>
+          </a:prstGeom>
+          <a:noFill/>
+          <a:ln/>
+        </p:spPr>
+        <p:txBody>
+          <a:bodyPr wrap="square" lIns="0" tIns="0" rIns="0" bIns="0" rtlCol="0" anchor="ctr"/>
+          <a:lstStyle/>
+          <a:p>
+            <a:pPr algn="r" indent="0" marL="0">
+              <a:buNone/>
+            </a:pPr>
+            <a:r>
+              <a:rPr lang="en-US" sz="1200" b="1" dirty="0">
+                <a:solidFill>
+                  <a:schemeClr val="tx2"/>
+                </a:solidFill>
+              </a:rPr>
+              <a:t>OEM list (+7%/yr)</a:t>
+            </a:r>
+            <a:endParaRPr lang="en-US" sz="1200" dirty="0"/>
+          </a:p>
+        </p:txBody>
+      </p:sp>
+      <p:sp>
+        <p:nvSpPr>
+          <p:cNvPr id="8" name="FTAI line label"/>
+          <p:cNvSpPr txBox="1"/>
+          <p:nvPr/>
+        </p:nvSpPr>
+        <p:spPr>
+          <a:xfrm>
+            <a:off x="2697480" y="3337560"/>
+            <a:ext cx="1737360" cy="274320"/>
+          </a:xfrm>
+          <a:prstGeom prst="rect">
+            <a:avLst/>
+          </a:prstGeom>
+          <a:noFill/>
+          <a:ln/>
+        </p:spPr>
+        <p:txBody>
+          <a:bodyPr wrap="square" lIns="0" tIns="0" rIns="0" bIns="0" rtlCol="0" anchor="ctr"/>
+          <a:lstStyle/>
+          <a:p>
+            <a:pPr algn="r" indent="0" marL="0">
+              <a:buNone/>
+            </a:pPr>
+            <a:r>
+              <a:rPr lang="en-US" sz="1200" b="1" dirty="0">
+                <a:solidFill>
+                  <a:schemeClr val="accent2"/>
+                </a:solidFill>
+              </a:rPr>
+              <a:t>FTAI (half of OEM)</a:t>
+            </a:r>
+            <a:endParaRPr lang="en-US" sz="1200" dirty="0"/>
+          </a:p>
+        </p:txBody>
+      </p:sp>
+      <p:sp>
+        <p:nvSpPr>
+          <p:cNvPr id="9" name="Price caption"/>
+          <p:cNvSpPr txBox="1"/>
+          <p:nvPr/>
+        </p:nvSpPr>
+        <p:spPr>
+          <a:xfrm>
+            <a:off x="320040" y="4983480"/>
+            <a:ext cx="4206240" cy="274320"/>
+          </a:xfrm>
+          <a:prstGeom prst="rect">
+            <a:avLst/>
+          </a:prstGeom>
+          <a:noFill/>
+          <a:ln/>
+        </p:spPr>
+        <p:txBody>
+          <a:bodyPr wrap="square" lIns="0" tIns="0" rIns="0" bIns="0" rtlCol="0" anchor="ctr"/>
+          <a:lstStyle/>
+          <a:p>
+            <a:pPr algn="ctr" indent="0" marL="0">
+              <a:buNone/>
+            </a:pPr>
+            <a:r>
+              <a:rPr lang="en-US" sz="1200" i="1" dirty="0">
+                <a:solidFill>
+                  <a:schemeClr val="accent2"/>
+                </a:solidFill>
+              </a:rPr>
+              <a:t>The gap is pricing room</a:t>
+            </a:r>
+            <a:endParaRPr lang="en-US" sz="1200" dirty="0"/>
+          </a:p>
+        </p:txBody>
+      </p:sp>
+      <p:sp>
+        <p:nvSpPr>
+          <p:cNvPr id="10" name="EPM header"/>
+          <p:cNvSpPr txBox="1"/>
+          <p:nvPr/>
+        </p:nvSpPr>
+        <p:spPr>
+          <a:xfrm>
+            <a:off x="4892040" y="1554480"/>
+            <a:ext cx="3931920" cy="365760"/>
+          </a:xfrm>
+          <a:prstGeom prst="rect">
+            <a:avLst/>
+          </a:prstGeom>
+          <a:noFill/>
+          <a:ln/>
+        </p:spPr>
+        <p:txBody>
+          <a:bodyPr wrap="square" lIns="0" tIns="0" rIns="0" bIns="0" rtlCol="0" anchor="b"/>
+          <a:lstStyle/>
+          <a:p>
+            <a:pPr algn="ctr" indent="0" marL="0">
+              <a:buNone/>
+            </a:pPr>
+            <a:r>
+              <a:rPr lang="en-US" sz="1600" b="1" dirty="0">
+                <a:solidFill>
+                  <a:srgbClr val="1A1A1A"/>
+                </a:solidFill>
+              </a:rPr>
+              <a:t>EBITDA per Module ($K)</a:t>
+            </a:r>
+            <a:endParaRPr lang="en-US" sz="1600" dirty="0"/>
+          </a:p>
+        </p:txBody>
+      </p:sp>
+      <p:sp>
+        <p:nvSpPr>
+          <p:cNvPr id="11" name="EPM header rule"/>
+          <p:cNvSpPr/>
+          <p:nvPr/>
+        </p:nvSpPr>
+        <p:spPr>
+          <a:xfrm>
+            <a:off x="4892040" y="1975104"/>
+            <a:ext cx="3931920" cy="0"/>
+          </a:xfrm>
+          <a:prstGeom prst="line">
+            <a:avLst/>
+          </a:prstGeom>
+          <a:noFill/>
+          <a:ln w="12700">
+            <a:solidFill>
+              <a:srgbClr val="1A1A1A"/>
+            </a:solidFill>
+            <a:prstDash val="solid"/>
+          </a:ln>
+        </p:spPr>
+      </p:sp>
+      <p:graphicFrame>
+        <p:nvGraphicFramePr>
+          <p:cNvPr id="12" name="EBITDA per module chart" descr=""/>
+          <p:cNvGraphicFramePr/>
+          <p:nvPr/>
+        </p:nvGraphicFramePr>
+        <p:xfrm>
+          <a:off x="4892040" y="2103120"/>
+          <a:ext cx="3931920" cy="3200400"/>
+        </p:xfrm>
+        <a:graphic xmlns:a="http://schemas.openxmlformats.org/drawingml/2006/main">
+          <a:graphicData uri="http://schemas.openxmlformats.org/drawingml/2006/chart">
+            <c:chart xmlns:c="http://schemas.openxmlformats.org/drawingml/2006/chart" r:id="rId2"/>
+          </a:graphicData>
+        </a:graphic>
+      </p:graphicFrame>
+      <p:sp>
+        <p:nvSpPr>
+          <p:cNvPr id="13" name="Takeaway"/>
+          <p:cNvSpPr txBox="1"/>
+          <p:nvPr/>
+        </p:nvSpPr>
+        <p:spPr>
+          <a:xfrm>
+            <a:off x="320040" y="5504688"/>
+            <a:ext cx="8503920" cy="566928"/>
+          </a:xfrm>
+          <a:prstGeom prst="rect">
+            <a:avLst/>
+          </a:prstGeom>
+          <a:solidFill>
+            <a:srgbClr val="0A1C58"/>
+          </a:solidFill>
+          <a:ln/>
+        </p:spPr>
+        <p:txBody>
+          <a:bodyPr wrap="square" lIns="101600" tIns="25400" rIns="101600" bIns="25400" rtlCol="0" anchor="ctr"/>
+          <a:lstStyle/>
+          <a:p>
+            <a:pPr algn="ctr" indent="0" marL="0">
+              <a:buNone/>
+            </a:pPr>
+            <a:r>
+              <a:rPr lang="en-US" sz="1700" b="1" dirty="0">
+                <a:solidFill>
+                  <a:schemeClr val="bg1"/>
+                </a:solidFill>
+              </a:rPr>
+              <a:t>Passing through just half of OEM increases, plus PMA, lifts EBITDA per module ~30% by FY31.</a:t>
+            </a:r>
+            <a:endParaRPr lang="en-US" sz="1700" dirty="0"/>
+          </a:p>
+        </p:txBody>
+      </p:sp>
+      <p:sp>
+        <p:nvSpPr>
+          <p:cNvPr id="14" name="Source"/>
+          <p:cNvSpPr txBox="1"/>
+          <p:nvPr/>
+        </p:nvSpPr>
+        <p:spPr>
+          <a:xfrm>
+            <a:off x="320040" y="6355080"/>
+            <a:ext cx="7132320" cy="274320"/>
+          </a:xfrm>
+          <a:prstGeom prst="rect">
+            <a:avLst/>
+          </a:prstGeom>
+          <a:noFill/>
+          <a:ln/>
+        </p:spPr>
+        <p:txBody>
+          <a:bodyPr wrap="square" lIns="0" tIns="0" rIns="0" bIns="0" rtlCol="0" anchor="ctr"/>
+          <a:lstStyle/>
+          <a:p>
+            <a:pPr indent="0" marL="0">
+              <a:buNone/>
+            </a:pPr>
+            <a:r>
+              <a:rPr lang="en-US" sz="1100" b="1" dirty="0">
+                <a:solidFill>
+                  <a:srgbClr val="1A1A1A"/>
+                </a:solidFill>
+              </a:rPr>
+              <a:t>Source: </a:t>
+            </a:r>
+            <a:pPr indent="0" marL="0">
+              <a:buNone/>
+            </a:pPr>
+            <a:r>
+              <a:rPr lang="en-US" sz="1100" dirty="0">
+                <a:solidFill>
+                  <a:srgbClr val="1A1A1A"/>
+                </a:solidFill>
+              </a:rPr>
+              <a:t>GPS model (RPM tab: CFM escalator 7%/yr, FTAI pass-through 50% from 2027; EBITDA per module incl. PMA)</a:t>
+            </a:r>
+            <a:endParaRPr lang="en-US" sz="1100" dirty="0"/>
+          </a:p>
+        </p:txBody>
+      </p:sp>
+      <p:sp>
+        <p:nvSpPr>
+          <p:cNvPr id="25" name="Slide Number Placeholder 0"/>
+          <p:cNvSpPr>
+            <a:spLocks noGrp="1"/>
+          </p:cNvSpPr>
+          <p:nvPr>
+            <p:ph type="sldNum" sz="quarter" idx="4294967295"/>
+          </p:nvPr>
+        </p:nvSpPr>
+        <p:spPr>
+          <a:xfrm>
+            <a:off x="7635240" y="6327648"/>
+            <a:ext cx="411480" cy="274320"/>
+          </a:xfrm>
+          <a:prstGeom prst="rect">
+            <a:avLst/>
+          </a:prstGeom>
+          <a:extLst>
+            <a:ext uri="{C572A759-6A51-4108-AA02-DFA0A04FC94B}">
+              <ma14:wrappingTextBoxFlag xmlns:ma14="http://schemas.microsoft.com/office/mac/drawingml/2011/main" val="0"/>
+            </a:ext>
+          </a:extLst>
+        </p:spPr>
+        <p:txBody>
+          <a:bodyPr/>
+          <a:lstStyle>
+            <a:lvl1pPr>
+              <a:defRPr sz="1100">
+                <a:solidFill>
+                  <a:srgbClr val="1A1A1A"/>
+                </a:solidFill>
+              </a:defRPr>
+            </a:lvl1pPr>
+          </a:lstStyle>
+          <a:p>
+            <a:pPr algn="r"/>
+            <a:fld id="{F7021451-1387-4CA6-816F-3879F97B5CBC}" type="slidenum">
+              <a:rPr b="1" lang="en-US"/>
+              <a:t>10</a:t>
+            </a:fld>
+            <a:endParaRPr lang="en-US"/>
+          </a:p>
+        </p:txBody>
+      </p:sp>
+    </p:spTree>
+  </p:cSld>
+  <p:clrMapOvr>
+    <a:masterClrMapping/>
+  </p:clrMapOvr>
+</p:sld>
+</file>
+
+<file path=ppt/slides/slide11.xml><?xml version="1.0" encoding="utf-8"?>
+<p:sld xmlns:a="http://schemas.openxmlformats.org/drawingml/2006/main" xmlns:r="http://schemas.openxmlformats.org/officeDocument/2006/relationships" xmlns:p="http://schemas.openxmlformats.org/presentationml/2006/main">
+  <p:cSld name="Slide 11">
+    <p:spTree>
+      <p:nvGrpSpPr>
+        <p:cNvPr id="1" name=""/>
+        <p:cNvGrpSpPr/>
+        <p:nvPr/>
+      </p:nvGrpSpPr>
+      <p:grpSpPr>
+        <a:xfrm>
+          <a:off x="0" y="0"/>
+          <a:ext cx="0" cy="0"/>
+          <a:chOff x="0" y="0"/>
+          <a:chExt cx="0" cy="0"/>
+        </a:xfrm>
+      </p:grpSpPr>
+      <p:sp>
+        <p:nvSpPr>
+          <p:cNvPr id="2" name="Text 1"/>
+          <p:cNvSpPr/>
+          <p:nvPr>
+            <p:ph idx="102" type="title" hasCustomPrompt="1"/>
+          </p:nvPr>
+        </p:nvSpPr>
+        <p:spPr>
+          <a:xfrm>
+            <a:off x="320040" y="182880"/>
+            <a:ext cx="8503920" cy="640080"/>
+          </a:xfrm>
+          <a:prstGeom prst="rect">
+            <a:avLst/>
+          </a:prstGeom>
+          <a:noFill/>
+          <a:ln/>
+        </p:spPr>
+        <p:txBody>
+          <a:bodyPr wrap="square" lIns="0" tIns="0" rIns="0" bIns="0" rtlCol="0" anchor="ctr"/>
+          <a:lstStyle/>
+          <a:p>
+            <a:pPr algn="l" indent="0" marL="0">
+              <a:buNone/>
+            </a:pPr>
+            <a:r>
+              <a:rPr lang="en-US" sz="3200" b="1" dirty="0">
+                <a:solidFill>
+                  <a:schemeClr val="tx2"/>
+                </a:solidFill>
+              </a:rPr>
+              <a:t>Thesis 1a: Margin Floor (3/3)</a:t>
+            </a:r>
+            <a:endParaRPr lang="en-US" sz="3200" dirty="0"/>
+          </a:p>
+        </p:txBody>
+      </p:sp>
+      <p:sp>
+        <p:nvSpPr>
+          <p:cNvPr id="3" name="Text 1"/>
+          <p:cNvSpPr/>
+          <p:nvPr>
+            <p:ph idx="103" type="body" hasCustomPrompt="1"/>
+          </p:nvPr>
+        </p:nvSpPr>
+        <p:spPr>
+          <a:xfrm>
+            <a:off x="320040" y="932688"/>
+            <a:ext cx="8503920" cy="566928"/>
+          </a:xfrm>
+          <a:prstGeom prst="rect">
+            <a:avLst/>
+          </a:prstGeom>
+          <a:noFill/>
+          <a:ln/>
+        </p:spPr>
+        <p:txBody>
+          <a:bodyPr wrap="square" lIns="0" tIns="0" rIns="0" bIns="0" rtlCol="0" anchor="t"/>
+          <a:lstStyle/>
+          <a:p>
+            <a:pPr algn="l" indent="0" marL="0">
+              <a:buNone/>
+            </a:pPr>
+            <a:r>
+              <a:rPr lang="en-US" sz="1700" b="1" dirty="0">
+                <a:solidFill>
+                  <a:schemeClr val="tx2"/>
+                </a:solidFill>
+              </a:rPr>
+              <a:t>Cheaper PMA parts add a new margin lever, and our base case uses it sparingly.</a:t>
+            </a:r>
+            <a:endParaRPr lang="en-US" sz="1700" dirty="0"/>
+          </a:p>
+        </p:txBody>
+      </p:sp>
+      <p:sp>
+        <p:nvSpPr>
+          <p:cNvPr id="4" name="PMA ramp header"/>
+          <p:cNvSpPr txBox="1"/>
+          <p:nvPr/>
+        </p:nvSpPr>
+        <p:spPr>
+          <a:xfrm>
+            <a:off x="320040" y="1554480"/>
+            <a:ext cx="4206240" cy="365760"/>
+          </a:xfrm>
+          <a:prstGeom prst="rect">
+            <a:avLst/>
+          </a:prstGeom>
+          <a:noFill/>
+          <a:ln/>
+        </p:spPr>
+        <p:txBody>
+          <a:bodyPr wrap="square" lIns="0" tIns="0" rIns="0" bIns="0" rtlCol="0" anchor="b"/>
+          <a:lstStyle/>
+          <a:p>
+            <a:pPr algn="ctr" indent="0" marL="0">
+              <a:buNone/>
+            </a:pPr>
+            <a:r>
+              <a:rPr lang="en-US" sz="1600" b="1" dirty="0">
+                <a:solidFill>
+                  <a:srgbClr val="1A1A1A"/>
+                </a:solidFill>
+              </a:rPr>
+              <a:t>PMA Ramp in Our Model</a:t>
+            </a:r>
+            <a:endParaRPr lang="en-US" sz="1600" dirty="0"/>
+          </a:p>
+        </p:txBody>
+      </p:sp>
+      <p:sp>
+        <p:nvSpPr>
+          <p:cNvPr id="5" name="PMA ramp header rule"/>
+          <p:cNvSpPr/>
+          <p:nvPr/>
+        </p:nvSpPr>
+        <p:spPr>
+          <a:xfrm>
+            <a:off x="320040" y="1975104"/>
+            <a:ext cx="4206240" cy="0"/>
+          </a:xfrm>
+          <a:prstGeom prst="line">
+            <a:avLst/>
+          </a:prstGeom>
+          <a:noFill/>
+          <a:ln w="12700">
+            <a:solidFill>
+              <a:srgbClr val="1A1A1A"/>
+            </a:solidFill>
+            <a:prstDash val="solid"/>
+          </a:ln>
+        </p:spPr>
+      </p:sp>
+      <p:sp>
+        <p:nvSpPr>
+          <p:cNvPr id="6" name="Adoption label"/>
+          <p:cNvSpPr txBox="1"/>
+          <p:nvPr/>
+        </p:nvSpPr>
+        <p:spPr>
+          <a:xfrm>
+            <a:off x="320040" y="2084832"/>
+            <a:ext cx="4206240" cy="228600"/>
+          </a:xfrm>
+          <a:prstGeom prst="rect">
+            <a:avLst/>
+          </a:prstGeom>
+          <a:noFill/>
+          <a:ln/>
+        </p:spPr>
+        <p:txBody>
+          <a:bodyPr wrap="square" lIns="0" tIns="0" rIns="0" bIns="0" rtlCol="0" anchor="ctr"/>
+          <a:lstStyle/>
+          <a:p>
+            <a:pPr algn="l" indent="0" marL="0">
+              <a:buNone/>
+            </a:pPr>
+            <a:r>
+              <a:rPr lang="en-US" sz="1100" i="1" dirty="0">
+                <a:solidFill>
+                  <a:schemeClr val="accent2"/>
+                </a:solidFill>
+              </a:rPr>
+              <a:t>Adoption (% of modules)</a:t>
+            </a:r>
+            <a:endParaRPr lang="en-US" sz="1100" dirty="0"/>
+          </a:p>
+        </p:txBody>
+      </p:sp>
+      <p:graphicFrame>
+        <p:nvGraphicFramePr>
+          <p:cNvPr id="7" name="PMA adoption chart" descr=""/>
+          <p:cNvGraphicFramePr/>
+          <p:nvPr/>
+        </p:nvGraphicFramePr>
+        <p:xfrm>
+          <a:off x="320040" y="2240280"/>
+          <a:ext cx="4206240" cy="960120"/>
+        </p:xfrm>
+        <a:graphic xmlns:a="http://schemas.openxmlformats.org/drawingml/2006/main">
+          <a:graphicData uri="http://schemas.openxmlformats.org/drawingml/2006/chart">
+            <c:chart xmlns:c="http://schemas.openxmlformats.org/drawingml/2006/chart" r:id="rId1"/>
+          </a:graphicData>
+        </a:graphic>
+      </p:graphicFrame>
+      <p:sp>
+        <p:nvSpPr>
+          <p:cNvPr id="8" name="Uplift label"/>
+          <p:cNvSpPr txBox="1"/>
+          <p:nvPr/>
+        </p:nvSpPr>
+        <p:spPr>
+          <a:xfrm>
+            <a:off x="320040" y="3200400"/>
+            <a:ext cx="4206240" cy="228600"/>
+          </a:xfrm>
+          <a:prstGeom prst="rect">
+            <a:avLst/>
+          </a:prstGeom>
+          <a:noFill/>
+          <a:ln/>
+        </p:spPr>
+        <p:txBody>
+          <a:bodyPr wrap="square" lIns="0" tIns="0" rIns="0" bIns="0" rtlCol="0" anchor="ctr"/>
+          <a:lstStyle/>
+          <a:p>
+            <a:pPr algn="l" indent="0" marL="0">
+              <a:buNone/>
+            </a:pPr>
+            <a:r>
+              <a:rPr lang="en-US" sz="1100" i="1" dirty="0">
+                <a:solidFill>
+                  <a:schemeClr val="tx2"/>
+                </a:solidFill>
+              </a:rPr>
+              <a:t>EBITDA uplift ($M)</a:t>
+            </a:r>
+            <a:endParaRPr lang="en-US" sz="1100" dirty="0"/>
+          </a:p>
+        </p:txBody>
+      </p:sp>
+      <p:graphicFrame>
+        <p:nvGraphicFramePr>
+          <p:cNvPr id="9" name="PMA uplift chart" descr=""/>
+          <p:cNvGraphicFramePr/>
+          <p:nvPr/>
+        </p:nvGraphicFramePr>
+        <p:xfrm>
+          <a:off x="320040" y="3383280"/>
+          <a:ext cx="4206240" cy="1920240"/>
+        </p:xfrm>
+        <a:graphic xmlns:a="http://schemas.openxmlformats.org/drawingml/2006/main">
+          <a:graphicData uri="http://schemas.openxmlformats.org/drawingml/2006/chart">
+            <c:chart xmlns:c="http://schemas.openxmlformats.org/drawingml/2006/chart" r:id="rId2"/>
+          </a:graphicData>
+        </a:graphic>
+      </p:graphicFrame>
+      <p:sp>
+        <p:nvSpPr>
+          <p:cNvPr id="10" name="Sensitivity header"/>
+          <p:cNvSpPr txBox="1"/>
+          <p:nvPr/>
+        </p:nvSpPr>
+        <p:spPr>
+          <a:xfrm>
+            <a:off x="4892040" y="1554480"/>
+            <a:ext cx="3931920" cy="365760"/>
+          </a:xfrm>
+          <a:prstGeom prst="rect">
+            <a:avLst/>
+          </a:prstGeom>
+          <a:noFill/>
+          <a:ln/>
+        </p:spPr>
+        <p:txBody>
+          <a:bodyPr wrap="square" lIns="0" tIns="0" rIns="0" bIns="0" rtlCol="0" anchor="b"/>
+          <a:lstStyle/>
+          <a:p>
+            <a:pPr algn="ctr" indent="0" marL="0">
+              <a:buNone/>
+            </a:pPr>
+            <a:r>
+              <a:rPr lang="en-US" sz="1600" b="1" dirty="0">
+                <a:solidFill>
+                  <a:srgbClr val="1A1A1A"/>
+                </a:solidFill>
+              </a:rPr>
+              <a:t>Upside If Adoption Runs Faster</a:t>
+            </a:r>
+            <a:endParaRPr lang="en-US" sz="1600" dirty="0"/>
+          </a:p>
+        </p:txBody>
+      </p:sp>
+      <p:sp>
+        <p:nvSpPr>
+          <p:cNvPr id="11" name="Sensitivity header rule"/>
+          <p:cNvSpPr/>
+          <p:nvPr/>
+        </p:nvSpPr>
+        <p:spPr>
+          <a:xfrm>
+            <a:off x="4892040" y="1975104"/>
+            <a:ext cx="3931920" cy="0"/>
+          </a:xfrm>
+          <a:prstGeom prst="line">
+            <a:avLst/>
+          </a:prstGeom>
+          <a:noFill/>
+          <a:ln w="12700">
+            <a:solidFill>
+              <a:srgbClr val="1A1A1A"/>
+            </a:solidFill>
+            <a:prstDash val="solid"/>
+          </a:ln>
+        </p:spPr>
+      </p:sp>
+      <p:graphicFrame>
+        <p:nvGraphicFramePr>
+          <p:cNvPr id="12" name="PMA sensitivity chart" descr=""/>
+          <p:cNvGraphicFramePr/>
+          <p:nvPr/>
+        </p:nvGraphicFramePr>
+        <p:xfrm>
+          <a:off x="4892040" y="2103120"/>
+          <a:ext cx="3931920" cy="2743200"/>
+        </p:xfrm>
+        <a:graphic xmlns:a="http://schemas.openxmlformats.org/drawingml/2006/main">
+          <a:graphicData uri="http://schemas.openxmlformats.org/drawingml/2006/chart">
+            <c:chart xmlns:c="http://schemas.openxmlformats.org/drawingml/2006/chart" r:id="rId3"/>
+          </a:graphicData>
+        </a:graphic>
+      </p:graphicFrame>
+      <p:sp>
+        <p:nvSpPr>
+          <p:cNvPr id="13" name="Sensitivity caption"/>
+          <p:cNvSpPr txBox="1"/>
+          <p:nvPr/>
+        </p:nvSpPr>
+        <p:spPr>
+          <a:xfrm>
+            <a:off x="4892040" y="4892040"/>
+            <a:ext cx="3931920" cy="411480"/>
+          </a:xfrm>
+          <a:prstGeom prst="rect">
+            <a:avLst/>
+          </a:prstGeom>
+          <a:noFill/>
+          <a:ln/>
+        </p:spPr>
+        <p:txBody>
+          <a:bodyPr wrap="square" lIns="0" tIns="0" rIns="0" bIns="0" rtlCol="0" anchor="ctr"/>
+          <a:lstStyle/>
+          <a:p>
+            <a:pPr algn="ctr" indent="0" marL="0">
+              <a:buNone/>
+            </a:pPr>
+            <a:r>
+              <a:rPr lang="en-US" sz="1100" i="1" dirty="0">
+                <a:solidFill>
+                  <a:schemeClr val="accent2"/>
+                </a:solidFill>
+              </a:rPr>
+              <a:t>FY26E Aerospace EBITDA ($M) at 1,200 modules vs. PMA adoption (Jefferies)</a:t>
+            </a:r>
+            <a:endParaRPr lang="en-US" sz="1100" dirty="0"/>
+          </a:p>
+        </p:txBody>
+      </p:sp>
+      <p:sp>
+        <p:nvSpPr>
+          <p:cNvPr id="14" name="Takeaway"/>
+          <p:cNvSpPr txBox="1"/>
+          <p:nvPr/>
+        </p:nvSpPr>
+        <p:spPr>
+          <a:xfrm>
+            <a:off x="320040" y="5504688"/>
+            <a:ext cx="8503920" cy="566928"/>
+          </a:xfrm>
+          <a:prstGeom prst="rect">
+            <a:avLst/>
+          </a:prstGeom>
+          <a:solidFill>
+            <a:srgbClr val="0A1C58"/>
+          </a:solidFill>
+          <a:ln/>
+        </p:spPr>
+        <p:txBody>
+          <a:bodyPr wrap="square" lIns="101600" tIns="25400" rIns="101600" bIns="25400" rtlCol="0" anchor="ctr"/>
+          <a:lstStyle/>
+          <a:p>
+            <a:pPr algn="ctr" indent="0" marL="0">
+              <a:buNone/>
+            </a:pPr>
+            <a:r>
+              <a:rPr lang="en-US" sz="1700" b="1" dirty="0">
+                <a:solidFill>
+                  <a:schemeClr val="bg1"/>
+                </a:solidFill>
+              </a:rPr>
+              <a:t>3 of 5 Chromalloy parts are approved, and every 5 pts of adoption adds ~$43M of EBITDA.</a:t>
+            </a:r>
+            <a:endParaRPr lang="en-US" sz="1700" dirty="0"/>
+          </a:p>
+        </p:txBody>
+      </p:sp>
+      <p:sp>
+        <p:nvSpPr>
+          <p:cNvPr id="15" name="Source"/>
+          <p:cNvSpPr txBox="1"/>
+          <p:nvPr/>
+        </p:nvSpPr>
+        <p:spPr>
+          <a:xfrm>
+            <a:off x="320040" y="6355080"/>
+            <a:ext cx="7132320" cy="274320"/>
+          </a:xfrm>
+          <a:prstGeom prst="rect">
+            <a:avLst/>
+          </a:prstGeom>
+          <a:noFill/>
+          <a:ln/>
+        </p:spPr>
+        <p:txBody>
+          <a:bodyPr wrap="square" lIns="0" tIns="0" rIns="0" bIns="0" rtlCol="0" anchor="ctr"/>
+          <a:lstStyle/>
+          <a:p>
+            <a:pPr indent="0" marL="0">
+              <a:buNone/>
+            </a:pPr>
+            <a:r>
+              <a:rPr lang="en-US" sz="1100" b="1" dirty="0">
+                <a:solidFill>
+                  <a:srgbClr val="1A1A1A"/>
+                </a:solidFill>
+              </a:rPr>
+              <a:t>Source: </a:t>
+            </a:r>
+            <a:pPr indent="0" marL="0">
+              <a:buNone/>
+            </a:pPr>
+            <a:r>
+              <a:rPr lang="en-US" sz="1100" dirty="0">
+                <a:solidFill>
+                  <a:srgbClr val="1A1A1A"/>
+                </a:solidFill>
+              </a:rPr>
+              <a:t>GPS model (RPM tab: PMA penetration × $0.4M uplift per module); Jefferies estimates; FAA PMA data</a:t>
+            </a:r>
+            <a:endParaRPr lang="en-US" sz="1100" dirty="0"/>
+          </a:p>
+        </p:txBody>
+      </p:sp>
+      <p:sp>
+        <p:nvSpPr>
+          <p:cNvPr id="25" name="Slide Number Placeholder 0"/>
+          <p:cNvSpPr>
+            <a:spLocks noGrp="1"/>
+          </p:cNvSpPr>
+          <p:nvPr>
+            <p:ph type="sldNum" sz="quarter" idx="4294967295"/>
+          </p:nvPr>
+        </p:nvSpPr>
+        <p:spPr>
+          <a:xfrm>
+            <a:off x="7635240" y="6327648"/>
+            <a:ext cx="411480" cy="274320"/>
+          </a:xfrm>
+          <a:prstGeom prst="rect">
+            <a:avLst/>
+          </a:prstGeom>
+          <a:extLst>
+            <a:ext uri="{C572A759-6A51-4108-AA02-DFA0A04FC94B}">
+              <ma14:wrappingTextBoxFlag xmlns:ma14="http://schemas.microsoft.com/office/mac/drawingml/2011/main" val="0"/>
+            </a:ext>
+          </a:extLst>
+        </p:spPr>
+        <p:txBody>
+          <a:bodyPr/>
+          <a:lstStyle>
+            <a:lvl1pPr>
+              <a:defRPr sz="1100">
+                <a:solidFill>
+                  <a:srgbClr val="1A1A1A"/>
+                </a:solidFill>
+              </a:defRPr>
+            </a:lvl1pPr>
+          </a:lstStyle>
+          <a:p>
+            <a:pPr algn="r"/>
+            <a:fld id="{F7021451-1387-4CA6-816F-3879F97B5CBC}" type="slidenum">
+              <a:rPr b="1" lang="en-US"/>
+              <a:t>11</a:t>
+            </a:fld>
+            <a:endParaRPr lang="en-US"/>
+          </a:p>
+        </p:txBody>
+      </p:sp>
+    </p:spTree>
+  </p:cSld>
+  <p:clrMapOvr>
+    <a:masterClrMapping/>
+  </p:clrMapOvr>
+</p:sld>
+</file>
+
 <file path=ppt/slides/slide2.xml><?xml version="1.0" encoding="utf-8"?>
 <p:sld xmlns:a="http://schemas.openxmlformats.org/drawingml/2006/main" xmlns:r="http://schemas.openxmlformats.org/officeDocument/2006/relationships" xmlns:p="http://schemas.openxmlformats.org/presentationml/2006/main">
   <p:cSld name="Slide 2">
@@ -3752,7 +7162,7 @@
         <p:spPr>
           <a:xfrm>
             <a:off x="320040" y="182880"/>
-            <a:ext cx="7132320" cy="640080"/>
+            <a:ext cx="8503920" cy="640080"/>
           </a:xfrm>
           <a:prstGeom prst="rect">
             <a:avLst/>
@@ -4205,7 +7615,7 @@
         <p:spPr>
           <a:xfrm>
             <a:off x="320040" y="182880"/>
-            <a:ext cx="7132320" cy="640080"/>
+            <a:ext cx="8503920" cy="640080"/>
           </a:xfrm>
           <a:prstGeom prst="rect">
             <a:avLst/>
@@ -4786,7 +8196,7 @@
         <p:spPr>
           <a:xfrm>
             <a:off x="320040" y="182880"/>
-            <a:ext cx="7132320" cy="640080"/>
+            <a:ext cx="8503920" cy="640080"/>
           </a:xfrm>
           <a:prstGeom prst="rect">
             <a:avLst/>
@@ -5475,7 +8885,7 @@
         <p:spPr>
           <a:xfrm>
             <a:off x="320040" y="182880"/>
-            <a:ext cx="7132320" cy="640080"/>
+            <a:ext cx="8503920" cy="640080"/>
           </a:xfrm>
           <a:prstGeom prst="rect">
             <a:avLst/>
@@ -6148,7 +9558,7 @@
         <p:spPr>
           <a:xfrm>
             <a:off x="320040" y="182880"/>
-            <a:ext cx="7132320" cy="640080"/>
+            <a:ext cx="8503920" cy="640080"/>
           </a:xfrm>
           <a:prstGeom prst="rect">
             <a:avLst/>
@@ -6856,7 +10266,7 @@
         <p:spPr>
           <a:xfrm>
             <a:off x="320040" y="182880"/>
-            <a:ext cx="7132320" cy="640080"/>
+            <a:ext cx="8503920" cy="640080"/>
           </a:xfrm>
           <a:prstGeom prst="rect">
             <a:avLst/>
@@ -7577,7 +10987,7 @@
         <p:spPr>
           <a:xfrm>
             <a:off x="320040" y="182880"/>
-            <a:ext cx="7132320" cy="640080"/>
+            <a:ext cx="8503920" cy="640080"/>
           </a:xfrm>
           <a:prstGeom prst="rect">
             <a:avLst/>
@@ -9747,6 +13157,473 @@
             <a:fld id="{F7021451-1387-4CA6-816F-3879F97B5CBC}" type="slidenum">
               <a:rPr b="1" lang="en-US"/>
               <a:t>8</a:t>
+            </a:fld>
+            <a:endParaRPr lang="en-US"/>
+          </a:p>
+        </p:txBody>
+      </p:sp>
+    </p:spTree>
+  </p:cSld>
+  <p:clrMapOvr>
+    <a:masterClrMapping/>
+  </p:clrMapOvr>
+</p:sld>
+</file>
+
+<file path=ppt/slides/slide9.xml><?xml version="1.0" encoding="utf-8"?>
+<p:sld xmlns:a="http://schemas.openxmlformats.org/drawingml/2006/main" xmlns:r="http://schemas.openxmlformats.org/officeDocument/2006/relationships" xmlns:p="http://schemas.openxmlformats.org/presentationml/2006/main">
+  <p:cSld name="Slide 9">
+    <p:spTree>
+      <p:nvGrpSpPr>
+        <p:cNvPr id="1" name=""/>
+        <p:cNvGrpSpPr/>
+        <p:nvPr/>
+      </p:nvGrpSpPr>
+      <p:grpSpPr>
+        <a:xfrm>
+          <a:off x="0" y="0"/>
+          <a:ext cx="0" cy="0"/>
+          <a:chOff x="0" y="0"/>
+          <a:chExt cx="0" cy="0"/>
+        </a:xfrm>
+      </p:grpSpPr>
+      <p:sp>
+        <p:nvSpPr>
+          <p:cNvPr id="2" name="Text 1"/>
+          <p:cNvSpPr/>
+          <p:nvPr>
+            <p:ph idx="102" type="title" hasCustomPrompt="1"/>
+          </p:nvPr>
+        </p:nvSpPr>
+        <p:spPr>
+          <a:xfrm>
+            <a:off x="320040" y="182880"/>
+            <a:ext cx="8503920" cy="640080"/>
+          </a:xfrm>
+          <a:prstGeom prst="rect">
+            <a:avLst/>
+          </a:prstGeom>
+          <a:noFill/>
+          <a:ln/>
+        </p:spPr>
+        <p:txBody>
+          <a:bodyPr wrap="square" lIns="0" tIns="0" rIns="0" bIns="0" rtlCol="0" anchor="ctr"/>
+          <a:lstStyle/>
+          <a:p>
+            <a:pPr algn="l" indent="0" marL="0">
+              <a:buNone/>
+            </a:pPr>
+            <a:r>
+              <a:rPr lang="en-US" sz="3200" b="1" dirty="0">
+                <a:solidFill>
+                  <a:schemeClr val="tx2"/>
+                </a:solidFill>
+              </a:rPr>
+              <a:t>Thesis 1a: Margin Floor (1/3)</a:t>
+            </a:r>
+            <a:endParaRPr lang="en-US" sz="3200" dirty="0"/>
+          </a:p>
+        </p:txBody>
+      </p:sp>
+      <p:sp>
+        <p:nvSpPr>
+          <p:cNvPr id="3" name="Text 1"/>
+          <p:cNvSpPr/>
+          <p:nvPr>
+            <p:ph idx="103" type="body" hasCustomPrompt="1"/>
+          </p:nvPr>
+        </p:nvSpPr>
+        <p:spPr>
+          <a:xfrm>
+            <a:off x="320040" y="932688"/>
+            <a:ext cx="8503920" cy="566928"/>
+          </a:xfrm>
+          <a:prstGeom prst="rect">
+            <a:avLst/>
+          </a:prstGeom>
+          <a:noFill/>
+          <a:ln/>
+        </p:spPr>
+        <p:txBody>
+          <a:bodyPr wrap="square" lIns="0" tIns="0" rIns="0" bIns="0" rtlCol="0" anchor="t"/>
+          <a:lstStyle/>
+          <a:p>
+            <a:pPr algn="l" indent="0" marL="0">
+              <a:buNone/>
+            </a:pPr>
+            <a:r>
+              <a:rPr lang="en-US" sz="1700" b="1" dirty="0">
+                <a:solidFill>
+                  <a:schemeClr val="tx2"/>
+                </a:solidFill>
+              </a:rPr>
+              <a:t>Even if the bears are right, too little cheap inventory is left to push margins lower.</a:t>
+            </a:r>
+            <a:endParaRPr lang="en-US" sz="1700" dirty="0"/>
+          </a:p>
+        </p:txBody>
+      </p:sp>
+      <p:sp>
+        <p:nvSpPr>
+          <p:cNvPr id="4" name="Donut header"/>
+          <p:cNvSpPr txBox="1"/>
+          <p:nvPr/>
+        </p:nvSpPr>
+        <p:spPr>
+          <a:xfrm>
+            <a:off x="320040" y="1554480"/>
+            <a:ext cx="3566160" cy="365760"/>
+          </a:xfrm>
+          <a:prstGeom prst="rect">
+            <a:avLst/>
+          </a:prstGeom>
+          <a:noFill/>
+          <a:ln/>
+        </p:spPr>
+        <p:txBody>
+          <a:bodyPr wrap="square" lIns="0" tIns="0" rIns="0" bIns="0" rtlCol="0" anchor="b"/>
+          <a:lstStyle/>
+          <a:p>
+            <a:pPr algn="ctr" indent="0" marL="0">
+              <a:buNone/>
+            </a:pPr>
+            <a:r>
+              <a:rPr lang="en-US" sz="1600" b="1" dirty="0">
+                <a:solidFill>
+                  <a:srgbClr val="1A1A1A"/>
+                </a:solidFill>
+              </a:rPr>
+              <a:t>Cheap Stock Left in AP</a:t>
+            </a:r>
+            <a:endParaRPr lang="en-US" sz="1600" dirty="0"/>
+          </a:p>
+        </p:txBody>
+      </p:sp>
+      <p:sp>
+        <p:nvSpPr>
+          <p:cNvPr id="5" name="Donut header rule"/>
+          <p:cNvSpPr/>
+          <p:nvPr/>
+        </p:nvSpPr>
+        <p:spPr>
+          <a:xfrm>
+            <a:off x="320040" y="1975104"/>
+            <a:ext cx="3566160" cy="0"/>
+          </a:xfrm>
+          <a:prstGeom prst="line">
+            <a:avLst/>
+          </a:prstGeom>
+          <a:noFill/>
+          <a:ln w="12700">
+            <a:solidFill>
+              <a:srgbClr val="1A1A1A"/>
+            </a:solidFill>
+            <a:prstDash val="solid"/>
+          </a:ln>
+        </p:spPr>
+      </p:sp>
+      <p:graphicFrame>
+        <p:nvGraphicFramePr>
+          <p:cNvPr id="6" name="Inventory donut" descr=""/>
+          <p:cNvGraphicFramePr/>
+          <p:nvPr/>
+        </p:nvGraphicFramePr>
+        <p:xfrm>
+          <a:off x="548640" y="2103120"/>
+          <a:ext cx="3108960" cy="2834640"/>
+        </p:xfrm>
+        <a:graphic xmlns:a="http://schemas.openxmlformats.org/drawingml/2006/main">
+          <a:graphicData uri="http://schemas.openxmlformats.org/drawingml/2006/chart">
+            <c:chart xmlns:c="http://schemas.openxmlformats.org/drawingml/2006/chart" r:id="rId1"/>
+          </a:graphicData>
+        </a:graphic>
+      </p:graphicFrame>
+      <p:sp>
+        <p:nvSpPr>
+          <p:cNvPr id="7" name="Donut center"/>
+          <p:cNvSpPr txBox="1"/>
+          <p:nvPr/>
+        </p:nvSpPr>
+        <p:spPr>
+          <a:xfrm>
+            <a:off x="1188720" y="3063240"/>
+            <a:ext cx="1828800" cy="914400"/>
+          </a:xfrm>
+          <a:prstGeom prst="rect">
+            <a:avLst/>
+          </a:prstGeom>
+          <a:noFill/>
+          <a:ln/>
+        </p:spPr>
+        <p:txBody>
+          <a:bodyPr wrap="square" lIns="0" tIns="0" rIns="0" bIns="0" rtlCol="0" anchor="ctr"/>
+          <a:lstStyle/>
+          <a:p>
+            <a:pPr algn="ctr" indent="0" marL="0">
+              <a:buNone/>
+            </a:pPr>
+            <a:r>
+              <a:rPr lang="en-US" sz="3400" b="1" dirty="0">
+                <a:solidFill>
+                  <a:schemeClr val="tx2"/>
+                </a:solidFill>
+              </a:rPr>
+              <a:t>&lt;8%</a:t>
+            </a:r>
+            <a:endParaRPr lang="en-US" sz="3400" dirty="0"/>
+          </a:p>
+          <a:p>
+            <a:pPr algn="ctr" indent="0" marL="0">
+              <a:buNone/>
+            </a:pPr>
+            <a:r>
+              <a:rPr lang="en-US" sz="1300" dirty="0">
+                <a:solidFill>
+                  <a:schemeClr val="accent2"/>
+                </a:solidFill>
+              </a:rPr>
+              <a:t>left to unwind</a:t>
+            </a:r>
+            <a:endParaRPr lang="en-US" sz="3400" dirty="0"/>
+          </a:p>
+        </p:txBody>
+      </p:sp>
+      <p:sp>
+        <p:nvSpPr>
+          <p:cNvPr id="8" name="Margin path header"/>
+          <p:cNvSpPr txBox="1"/>
+          <p:nvPr/>
+        </p:nvSpPr>
+        <p:spPr>
+          <a:xfrm>
+            <a:off x="4160520" y="1554480"/>
+            <a:ext cx="4663440" cy="365760"/>
+          </a:xfrm>
+          <a:prstGeom prst="rect">
+            <a:avLst/>
+          </a:prstGeom>
+          <a:noFill/>
+          <a:ln/>
+        </p:spPr>
+        <p:txBody>
+          <a:bodyPr wrap="square" lIns="0" tIns="0" rIns="0" bIns="0" rtlCol="0" anchor="b"/>
+          <a:lstStyle/>
+          <a:p>
+            <a:pPr algn="ctr" indent="0" marL="0">
+              <a:buNone/>
+            </a:pPr>
+            <a:r>
+              <a:rPr lang="en-US" sz="1600" b="1" dirty="0">
+                <a:solidFill>
+                  <a:srgbClr val="1A1A1A"/>
+                </a:solidFill>
+              </a:rPr>
+              <a:t>Margin: Trough, Then Rebuild</a:t>
+            </a:r>
+            <a:endParaRPr lang="en-US" sz="1600" dirty="0"/>
+          </a:p>
+        </p:txBody>
+      </p:sp>
+      <p:sp>
+        <p:nvSpPr>
+          <p:cNvPr id="9" name="Margin path header rule"/>
+          <p:cNvSpPr/>
+          <p:nvPr/>
+        </p:nvSpPr>
+        <p:spPr>
+          <a:xfrm>
+            <a:off x="4160520" y="1975104"/>
+            <a:ext cx="4663440" cy="0"/>
+          </a:xfrm>
+          <a:prstGeom prst="line">
+            <a:avLst/>
+          </a:prstGeom>
+          <a:noFill/>
+          <a:ln w="12700">
+            <a:solidFill>
+              <a:srgbClr val="1A1A1A"/>
+            </a:solidFill>
+            <a:prstDash val="solid"/>
+          </a:ln>
+        </p:spPr>
+      </p:sp>
+      <p:graphicFrame>
+        <p:nvGraphicFramePr>
+          <p:cNvPr id="10" name="Margin path chart" descr=""/>
+          <p:cNvGraphicFramePr/>
+          <p:nvPr/>
+        </p:nvGraphicFramePr>
+        <p:xfrm>
+          <a:off x="4160520" y="2103120"/>
+          <a:ext cx="4663440" cy="3200400"/>
+        </p:xfrm>
+        <a:graphic xmlns:a="http://schemas.openxmlformats.org/drawingml/2006/main">
+          <a:graphicData uri="http://schemas.openxmlformats.org/drawingml/2006/chart">
+            <c:chart xmlns:c="http://schemas.openxmlformats.org/drawingml/2006/chart" r:id="rId2"/>
+          </a:graphicData>
+        </a:graphic>
+      </p:graphicFrame>
+      <p:sp>
+        <p:nvSpPr>
+          <p:cNvPr id="11" name="Model label"/>
+          <p:cNvSpPr txBox="1"/>
+          <p:nvPr/>
+        </p:nvSpPr>
+        <p:spPr>
+          <a:xfrm>
+            <a:off x="6766560" y="2103120"/>
+            <a:ext cx="1463040" cy="274320"/>
+          </a:xfrm>
+          <a:prstGeom prst="rect">
+            <a:avLst/>
+          </a:prstGeom>
+          <a:noFill/>
+          <a:ln/>
+        </p:spPr>
+        <p:txBody>
+          <a:bodyPr wrap="square" lIns="0" tIns="0" rIns="0" bIns="0" rtlCol="0" anchor="ctr"/>
+          <a:lstStyle/>
+          <a:p>
+            <a:pPr algn="ctr" indent="0" marL="0">
+              <a:buNone/>
+            </a:pPr>
+            <a:r>
+              <a:rPr lang="en-US" sz="1200" b="1" i="1" dirty="0">
+                <a:solidFill>
+                  <a:schemeClr val="accent2"/>
+                </a:solidFill>
+              </a:rPr>
+              <a:t>Our model</a:t>
+            </a:r>
+            <a:endParaRPr lang="en-US" sz="1200" dirty="0"/>
+          </a:p>
+        </p:txBody>
+      </p:sp>
+      <p:sp>
+        <p:nvSpPr>
+          <p:cNvPr id="12" name="Takeaway"/>
+          <p:cNvSpPr txBox="1"/>
+          <p:nvPr/>
+        </p:nvSpPr>
+        <p:spPr>
+          <a:xfrm>
+            <a:off x="320040" y="5504688"/>
+            <a:ext cx="8503920" cy="566928"/>
+          </a:xfrm>
+          <a:prstGeom prst="rect">
+            <a:avLst/>
+          </a:prstGeom>
+          <a:solidFill>
+            <a:srgbClr val="0A1C58"/>
+          </a:solidFill>
+          <a:ln/>
+        </p:spPr>
+        <p:txBody>
+          <a:bodyPr wrap="square" lIns="101600" tIns="25400" rIns="101600" bIns="25400" rtlCol="0" anchor="ctr"/>
+          <a:lstStyle/>
+          <a:p>
+            <a:pPr algn="ctr" indent="0" marL="0">
+              <a:buNone/>
+            </a:pPr>
+            <a:r>
+              <a:rPr lang="en-US" sz="1700" b="1" dirty="0">
+                <a:solidFill>
+                  <a:schemeClr val="bg1"/>
+                </a:solidFill>
+              </a:rPr>
+              <a:t>With little cheap stock left, ~30% is the floor, and margins rebuild from here.</a:t>
+            </a:r>
+            <a:endParaRPr lang="en-US" sz="1700" dirty="0"/>
+          </a:p>
+        </p:txBody>
+      </p:sp>
+      <p:sp>
+        <p:nvSpPr>
+          <p:cNvPr id="13" name="Source"/>
+          <p:cNvSpPr txBox="1"/>
+          <p:nvPr/>
+        </p:nvSpPr>
+        <p:spPr>
+          <a:xfrm>
+            <a:off x="320040" y="6355080"/>
+            <a:ext cx="7132320" cy="274320"/>
+          </a:xfrm>
+          <a:prstGeom prst="rect">
+            <a:avLst/>
+          </a:prstGeom>
+          <a:noFill/>
+          <a:ln/>
+        </p:spPr>
+        <p:txBody>
+          <a:bodyPr wrap="square" lIns="0" tIns="0" rIns="0" bIns="0" rtlCol="0" anchor="ctr"/>
+          <a:lstStyle/>
+          <a:p>
+            <a:pPr indent="0" marL="0">
+              <a:buNone/>
+            </a:pPr>
+            <a:r>
+              <a:rPr lang="en-US" sz="1100" b="1" dirty="0">
+                <a:solidFill>
+                  <a:srgbClr val="1A1A1A"/>
+                </a:solidFill>
+              </a:rPr>
+              <a:t>Source: </a:t>
+            </a:r>
+            <a:pPr indent="0" marL="0">
+              <a:buNone/>
+            </a:pPr>
+            <a:r>
+              <a:rPr lang="en-US" sz="1100" dirty="0">
+                <a:solidFill>
+                  <a:srgbClr val="1A1A1A"/>
+                </a:solidFill>
+              </a:rPr>
+              <a:t>FTAI filings, GPS analysis and model (Aerospace Adj. EBITDA margin incl. PMA)</a:t>
+            </a:r>
+            <a:endParaRPr lang="en-US" sz="1100" dirty="0"/>
+          </a:p>
+        </p:txBody>
+      </p:sp>
+      <p:sp>
+        <p:nvSpPr>
+          <p:cNvPr id="25" name="Slide Number Placeholder 0"/>
+          <p:cNvSpPr>
+            <a:spLocks noGrp="1"/>
+          </p:cNvSpPr>
+          <p:nvPr>
+            <p:ph type="sldNum" sz="quarter" idx="4294967295"/>
+          </p:nvPr>
+        </p:nvSpPr>
+        <p:spPr>
+          <a:xfrm>
+            <a:off x="7635240" y="6327648"/>
+            <a:ext cx="411480" cy="274320"/>
+          </a:xfrm>
+          <a:prstGeom prst="rect">
+            <a:avLst/>
+          </a:prstGeom>
+          <a:extLst>
+            <a:ext uri="{C572A759-6A51-4108-AA02-DFA0A04FC94B}">
+              <ma14:wrappingTextBoxFlag xmlns:ma14="http://schemas.microsoft.com/office/mac/drawingml/2011/main" val="0"/>
+            </a:ext>
+          </a:extLst>
+        </p:spPr>
+        <p:txBody>
+          <a:bodyPr/>
+          <a:lstStyle>
+            <a:lvl1pPr>
+              <a:defRPr sz="1100">
+                <a:solidFill>
+                  <a:srgbClr val="1A1A1A"/>
+                </a:solidFill>
+              </a:defRPr>
+            </a:lvl1pPr>
+          </a:lstStyle>
+          <a:p>
+            <a:pPr algn="r"/>
+            <a:fld id="{F7021451-1387-4CA6-816F-3879F97B5CBC}" type="slidenum">
+              <a:rPr b="1" lang="en-US"/>
+              <a:t>9</a:t>
             </a:fld>
             <a:endParaRPr lang="en-US"/>
           </a:p>

--- a/deck/FTAI_Long_Pitch.pptx
+++ b/deck/FTAI_Long_Pitch.pptx
@@ -16,9 +16,10 @@
     <p:sldId id="264" r:id="rId10"/>
     <p:sldId id="265" r:id="rId11"/>
     <p:sldId id="266" r:id="rId12"/>
+    <p:sldId id="267" r:id="rId13"/>
   </p:sldIdLst>
   <p:notesMasterIdLst>
-    <p:notesMasterId r:id="rId13"/>
+    <p:notesMasterId r:id="rId14"/>
   </p:notesMasterIdLst>
   <p:sldSz cx="9144000" cy="6858000"/>
   <p:notesSz cx="6858000" cy="9144000"/>
@@ -117,12 +118,12 @@
   <p:extLst>
     <p:ext uri="{521415D9-36F7-43E2-AB2F-B90AF26B5E84}">
       <p14:sectionLst xmlns:p14="http://schemas.microsoft.com/office/powerpoint/2010/main">
-        <p14:section name="Introduction" id="{7e988cde-3e54-642d-d9b7-c1621351f566}">
+        <p14:section name="Introduction" id="{d49411df-28c9-f923-f4da-2cbe4ecb29ef}">
           <p14:sldIdLst>
             <p14:sldId id="256"/>
           </p14:sldIdLst>
         </p14:section>
-        <p14:section name="The Opportunity" id="{fcf58372-f6a9-73a2-6989-84f279138b92}">
+        <p14:section name="The Opportunity" id="{6a6bacb4-3b9b-d437-756a-a04a457fafdf}">
           <p14:sldIdLst>
             <p14:sldId id="257"/>
             <p14:sldId id="258"/>
@@ -130,22 +131,23 @@
             <p14:sldId id="260"/>
           </p14:sldIdLst>
         </p14:section>
-        <p14:section name="Returns" id="{3ae0c718-b415-f1db-9b71-24c97f7fe216}">
+        <p14:section name="Returns" id="{c6055543-e0f4-1267-d3f8-3aca399c7631}">
           <p14:sldIdLst>
             <p14:sldId id="261"/>
           </p14:sldIdLst>
         </p14:section>
-        <p14:section name="Business Overview" id="{9ed50f8e-f3dd-67c5-8462-ad1c2e6971f1}">
+        <p14:section name="Business Overview" id="{2967d547-b784-5d1f-d2c4-a411a339aee1}">
           <p14:sldIdLst>
             <p14:sldId id="262"/>
             <p14:sldId id="263"/>
           </p14:sldIdLst>
         </p14:section>
-        <p14:section name="Thesis 1a" id="{dfc4b62f-2901-a76a-8388-0636e17cc701}">
+        <p14:section name="Thesis 1a" id="{1d725cb6-be0b-32f5-8152-7b20bcfcffb0}">
           <p14:sldIdLst>
             <p14:sldId id="264"/>
             <p14:sldId id="265"/>
             <p14:sldId id="266"/>
+            <p14:sldId id="267"/>
           </p14:sldIdLst>
         </p14:section>
       </p14:sectionLst>
@@ -535,6 +537,514 @@
 </file>
 
 <file path=ppt/charts/chart10.xml><?xml version="1.0" encoding="utf-8"?>
+<c:chartSpace xmlns:c="http://schemas.openxmlformats.org/drawingml/2006/chart" xmlns:a="http://schemas.openxmlformats.org/drawingml/2006/main" xmlns:r="http://schemas.openxmlformats.org/officeDocument/2006/relationships">
+  <c:date1904 val="0"/>
+  <c:roundedCorners val="1"/>
+  <c:chart>
+    <c:autoTitleDeleted val="1"/>
+    <c:plotArea>
+      <c:layout/>
+      <c:lineChart>
+        <c:varyColors val="0"/>
+        <c:ser>
+          <c:idx val="0"/>
+          <c:order val="0"/>
+          <c:tx>
+            <c:strRef>
+              <c:f>Sheet1!$B$1</c:f>
+              <c:strCache>
+                <c:ptCount val="1"/>
+                <c:pt idx="0">
+                  <c:v>PMA adoption</c:v>
+                </c:pt>
+              </c:strCache>
+            </c:strRef>
+          </c:tx>
+          <c:spPr>
+            <a:solidFill>
+              <a:srgbClr val="B5AEA9"/>
+            </a:solidFill>
+            <a:ln w="38100" cap="flat">
+              <a:solidFill>
+                <a:srgbClr val="B5AEA9"/>
+              </a:solidFill>
+              <a:prstDash val="solid"/>
+              <a:round/>
+            </a:ln>
+            <a:effectLst/>
+          </c:spPr>
+          <c:invertIfNegative val="0"/>
+          <c:dLbls>
+            <c:numFmt formatCode="0.0" sourceLinked="0"/>
+            <c:txPr>
+              <a:bodyPr/>
+              <a:lstStyle/>
+              <a:p>
+                <a:pPr>
+                  <a:defRPr b="1" i="0" strike="noStrike" sz="1100" u="none">
+                    <a:solidFill>
+                      <a:srgbClr val="847C7A"/>
+                    </a:solidFill>
+                    <a:latin typeface="+mn-lt"/>
+                  </a:defRPr>
+                </a:pPr>
+              </a:p>
+            </c:txPr>
+            <c:dLblPos val="t"/>
+            <c:showLegendKey val="0"/>
+            <c:showVal val="1"/>
+            <c:showCatName val="0"/>
+            <c:showSerName val="0"/>
+            <c:showPercent val="0"/>
+            <c:showBubbleSize val="0"/>
+            <c:showLeaderLines val="0"/>
+          </c:dLbls>
+          <c:marker>
+            <c:symbol val="circle"/>
+            <c:size val="8"/>
+            <c:spPr>
+              <a:solidFill>
+                <a:srgbClr val="B5AEA9"/>
+              </a:solidFill>
+              <a:ln w="9525" cap="flat">
+                <a:solidFill>
+                  <a:srgbClr val="B5AEA9"/>
+                </a:solidFill>
+                <a:prstDash val="solid"/>
+                <a:round/>
+              </a:ln>
+              <a:effectLst/>
+            </c:spPr>
+          </c:marker>
+          <c:cat>
+            <c:multiLvlStrRef>
+              <c:f>Sheet1!$A$2:$A$6</c:f>
+              <c:multiLvlStrCache>
+                <c:ptCount val="5"/>
+                <c:lvl>
+                  <c:pt idx="0">
+                    <c:v>FY27E</c:v>
+                  </c:pt>
+                  <c:pt idx="1">
+                    <c:v>FY28E</c:v>
+                  </c:pt>
+                  <c:pt idx="2">
+                    <c:v>FY29E</c:v>
+                  </c:pt>
+                  <c:pt idx="3">
+                    <c:v>FY30E</c:v>
+                  </c:pt>
+                  <c:pt idx="4">
+                    <c:v>FY31E</c:v>
+                  </c:pt>
+                </c:lvl>
+              </c:multiLvlStrCache>
+            </c:multiLvlStrRef>
+          </c:cat>
+          <c:val>
+            <c:numRef>
+              <c:f>Sheet1!$B$2:$B$6</c:f>
+              <c:numCache>
+                <c:formatCode>General</c:formatCode>
+                <c:ptCount val="5"/>
+                <c:pt idx="0">
+                  <c:v>0.9</c:v>
+                </c:pt>
+                <c:pt idx="1">
+                  <c:v>3</c:v>
+                </c:pt>
+                <c:pt idx="2">
+                  <c:v>5</c:v>
+                </c:pt>
+                <c:pt idx="3">
+                  <c:v>7</c:v>
+                </c:pt>
+                <c:pt idx="4">
+                  <c:v>9</c:v>
+                </c:pt>
+              </c:numCache>
+            </c:numRef>
+          </c:val>
+          <c:smooth val="0"/>
+        </c:ser>
+        <c:dLbls>
+          <c:numFmt formatCode="0.0" sourceLinked="0"/>
+          <c:txPr>
+            <a:bodyPr/>
+            <a:lstStyle/>
+            <a:p>
+              <a:pPr>
+                <a:defRPr b="1" i="0" strike="noStrike" sz="1100" u="none">
+                  <a:solidFill>
+                    <a:srgbClr val="847C7A"/>
+                  </a:solidFill>
+                  <a:latin typeface="+mn-lt"/>
+                </a:defRPr>
+              </a:pPr>
+            </a:p>
+          </c:txPr>
+          <c:dLblPos val="t"/>
+          <c:showLegendKey val="0"/>
+          <c:showVal val="1"/>
+          <c:showCatName val="0"/>
+          <c:showSerName val="0"/>
+          <c:showPercent val="0"/>
+          <c:showBubbleSize val="0"/>
+          <c:showLeaderLines val="0"/>
+        </c:dLbls>
+        <c:marker val="1"/>
+        <c:axId val="2094734554"/>
+        <c:axId val="2094734552"/>
+        <c:axId val="2094734556"/>
+      </c:lineChart>
+      <c:catAx>
+        <c:axId val="2094734554"/>
+        <c:scaling>
+          <c:orientation val="minMax"/>
+        </c:scaling>
+        <c:delete val="1"/>
+        <c:axPos val="b"/>
+        <c:numFmt formatCode="General" sourceLinked="1"/>
+        <c:majorTickMark val="out"/>
+        <c:minorTickMark val="none"/>
+        <c:tickLblPos val="low"/>
+        <c:spPr>
+          <a:ln w="12700" cap="flat">
+            <a:noFill/>
+            <a:prstDash val="solid"/>
+            <a:round/>
+          </a:ln>
+        </c:spPr>
+        <c:txPr>
+          <a:bodyPr/>
+          <a:lstStyle/>
+          <a:p>
+            <a:pPr>
+              <a:defRPr sz="1200" b="0" i="0" u="none" strike="noStrike">
+                <a:solidFill>
+                  <a:srgbClr val="1A1A1A"/>
+                </a:solidFill>
+                <a:latin typeface="+mn-lt"/>
+              </a:defRPr>
+            </a:pPr>
+            <a:endParaRPr lang="en-US"/>
+          </a:p>
+        </c:txPr>
+        <c:crossAx val="2094734552"/>
+        <c:crosses val="autoZero"/>
+        <c:auto val="1"/>
+        <c:lblAlgn val="ctr"/>
+        <c:noMultiLvlLbl val="1"/>
+      </c:catAx>
+      <c:valAx>
+        <c:axId val="2094734552"/>
+        <c:scaling>
+          <c:orientation val="minMax"/>
+          <c:max val="13"/>
+          <c:min val="0"/>
+        </c:scaling>
+        <c:delete val="1"/>
+        <c:axPos val="l"/>
+        <c:numFmt formatCode="General" sourceLinked="0"/>
+        <c:majorTickMark val="out"/>
+        <c:minorTickMark val="none"/>
+        <c:tickLblPos val="nextTo"/>
+        <c:spPr>
+          <a:ln w="12700" cap="flat">
+            <a:solidFill>
+              <a:srgbClr val="888888"/>
+            </a:solidFill>
+            <a:prstDash val="solid"/>
+            <a:round/>
+          </a:ln>
+        </c:spPr>
+        <c:txPr>
+          <a:bodyPr/>
+          <a:lstStyle/>
+          <a:p>
+            <a:pPr>
+              <a:defRPr sz="1200" b="0" i="0" u="none" strike="noStrike">
+                <a:solidFill>
+                  <a:srgbClr val="000000"/>
+                </a:solidFill>
+                <a:latin typeface="Arial"/>
+              </a:defRPr>
+            </a:pPr>
+            <a:endParaRPr lang="en-US"/>
+          </a:p>
+        </c:txPr>
+        <c:crossAx val="2094734554"/>
+        <c:crosses val="autoZero"/>
+        <c:crossBetween val="between"/>
+      </c:valAx>
+      <c:spPr>
+        <a:noFill/>
+        <a:ln>
+          <a:noFill/>
+        </a:ln>
+        <a:effectLst/>
+      </c:spPr>
+    </c:plotArea>
+    <c:plotVisOnly val="1"/>
+    <c:dispBlanksAs val="span"/>
+  </c:chart>
+  <c:spPr>
+    <a:noFill/>
+    <a:ln>
+      <a:noFill/>
+    </a:ln>
+    <a:effectLst/>
+  </c:spPr>
+  <c:externalData r:id="rId1">
+    <c:autoUpdate val="0"/>
+  </c:externalData>
+</c:chartSpace>
+</file>
+
+<file path=ppt/charts/chart11.xml><?xml version="1.0" encoding="utf-8"?>
+<c:chartSpace xmlns:c="http://schemas.openxmlformats.org/drawingml/2006/chart" xmlns:a="http://schemas.openxmlformats.org/drawingml/2006/main" xmlns:r="http://schemas.openxmlformats.org/officeDocument/2006/relationships">
+  <c:date1904 val="0"/>
+  <c:roundedCorners val="1"/>
+  <c:chart>
+    <c:autoTitleDeleted val="1"/>
+    <c:plotArea>
+      <c:layout/>
+      <c:barChart>
+        <c:barDir val="col"/>
+        <c:grouping val="clustered"/>
+        <c:varyColors val="0"/>
+        <c:ser>
+          <c:idx val="0"/>
+          <c:order val="0"/>
+          <c:tx>
+            <c:strRef>
+              <c:f>Sheet1!$B$1</c:f>
+              <c:strCache>
+                <c:ptCount val="1"/>
+                <c:pt idx="0">
+                  <c:v>PMA EBITDA uplift</c:v>
+                </c:pt>
+              </c:strCache>
+            </c:strRef>
+          </c:tx>
+          <c:spPr>
+            <a:solidFill>
+              <a:srgbClr val="0A1C58"/>
+            </a:solidFill>
+            <a:effectLst/>
+          </c:spPr>
+          <c:invertIfNegative val="0"/>
+          <c:dLbls>
+            <c:numFmt formatCode="&quot;$&quot;0&quot;M&quot;" sourceLinked="0"/>
+            <c:txPr>
+              <a:bodyPr/>
+              <a:lstStyle/>
+              <a:p>
+                <a:pPr>
+                  <a:defRPr b="1" i="0" strike="noStrike" sz="1100" u="none">
+                    <a:solidFill>
+                      <a:srgbClr val="1A1A1A"/>
+                    </a:solidFill>
+                    <a:latin typeface="+mn-lt"/>
+                  </a:defRPr>
+                </a:pPr>
+              </a:p>
+            </c:txPr>
+            <c:showLegendKey val="0"/>
+            <c:showVal val="1"/>
+            <c:showCatName val="0"/>
+            <c:showSerName val="0"/>
+            <c:showPercent val="0"/>
+            <c:showBubbleSize val="0"/>
+            <c:showLeaderLines val="0"/>
+          </c:dLbls>
+          <c:cat>
+            <c:multiLvlStrRef>
+              <c:f>Sheet1!$A$2:$A$6</c:f>
+              <c:multiLvlStrCache>
+                <c:ptCount val="5"/>
+                <c:lvl>
+                  <c:pt idx="0">
+                    <c:v>FY27E</c:v>
+                  </c:pt>
+                  <c:pt idx="1">
+                    <c:v>FY28E</c:v>
+                  </c:pt>
+                  <c:pt idx="2">
+                    <c:v>FY29E</c:v>
+                  </c:pt>
+                  <c:pt idx="3">
+                    <c:v>FY30E</c:v>
+                  </c:pt>
+                  <c:pt idx="4">
+                    <c:v>FY31E</c:v>
+                  </c:pt>
+                </c:lvl>
+              </c:multiLvlStrCache>
+            </c:multiLvlStrRef>
+          </c:cat>
+          <c:val>
+            <c:numRef>
+              <c:f>Sheet1!$B$2:$B$6</c:f>
+              <c:numCache>
+                <c:formatCode>General</c:formatCode>
+                <c:ptCount val="5"/>
+                <c:pt idx="0">
+                  <c:v>6</c:v>
+                </c:pt>
+                <c:pt idx="1">
+                  <c:v>24</c:v>
+                </c:pt>
+                <c:pt idx="2">
+                  <c:v>42</c:v>
+                </c:pt>
+                <c:pt idx="3">
+                  <c:v>59</c:v>
+                </c:pt>
+                <c:pt idx="4">
+                  <c:v>77</c:v>
+                </c:pt>
+              </c:numCache>
+            </c:numRef>
+          </c:val>
+        </c:ser>
+        <c:dLbls>
+          <c:numFmt formatCode="&quot;$&quot;0&quot;M&quot;" sourceLinked="0"/>
+          <c:txPr>
+            <a:bodyPr/>
+            <a:lstStyle/>
+            <a:p>
+              <a:pPr>
+                <a:defRPr b="1" i="0" strike="noStrike" sz="1100" u="none">
+                  <a:solidFill>
+                    <a:srgbClr val="1A1A1A"/>
+                  </a:solidFill>
+                  <a:latin typeface="+mn-lt"/>
+                </a:defRPr>
+              </a:pPr>
+            </a:p>
+          </c:txPr>
+          <c:showLegendKey val="0"/>
+          <c:showVal val="1"/>
+          <c:showCatName val="0"/>
+          <c:showSerName val="0"/>
+          <c:showPercent val="0"/>
+          <c:showBubbleSize val="0"/>
+          <c:showLeaderLines val="0"/>
+        </c:dLbls>
+        <c:gapWidth val="45"/>
+        <c:overlap val="0"/>
+        <c:axId val="2094734554"/>
+        <c:axId val="2094734552"/>
+        <c:axId val="2094734556"/>
+      </c:barChart>
+      <c:catAx>
+        <c:axId val="2094734554"/>
+        <c:scaling>
+          <c:orientation val="minMax"/>
+        </c:scaling>
+        <c:delete val="0"/>
+        <c:axPos val="b"/>
+        <c:numFmt formatCode="General" sourceLinked="1"/>
+        <c:majorTickMark val="out"/>
+        <c:minorTickMark val="none"/>
+        <c:tickLblPos val="low"/>
+        <c:spPr>
+          <a:ln w="12700" cap="flat">
+            <a:solidFill>
+              <a:srgbClr val="BFBFBF"/>
+            </a:solidFill>
+            <a:prstDash val="solid"/>
+            <a:round/>
+          </a:ln>
+        </c:spPr>
+        <c:txPr>
+          <a:bodyPr/>
+          <a:lstStyle/>
+          <a:p>
+            <a:pPr>
+              <a:defRPr sz="1200" b="0" i="0" u="none" strike="noStrike">
+                <a:solidFill>
+                  <a:srgbClr val="1A1A1A"/>
+                </a:solidFill>
+                <a:latin typeface="+mn-lt"/>
+              </a:defRPr>
+            </a:pPr>
+            <a:endParaRPr lang="en-US"/>
+          </a:p>
+        </c:txPr>
+        <c:crossAx val="2094734552"/>
+        <c:crosses val="autoZero"/>
+        <c:auto val="1"/>
+        <c:lblAlgn val="ctr"/>
+        <c:noMultiLvlLbl val="1"/>
+      </c:catAx>
+      <c:valAx>
+        <c:axId val="2094734552"/>
+        <c:scaling>
+          <c:orientation val="minMax"/>
+          <c:max val="92"/>
+          <c:min val="0"/>
+        </c:scaling>
+        <c:delete val="1"/>
+        <c:axPos val="l"/>
+        <c:numFmt formatCode="General" sourceLinked="0"/>
+        <c:majorTickMark val="out"/>
+        <c:minorTickMark val="none"/>
+        <c:tickLblPos val="nextTo"/>
+        <c:spPr>
+          <a:ln w="12700" cap="flat">
+            <a:solidFill>
+              <a:srgbClr val="888888"/>
+            </a:solidFill>
+            <a:prstDash val="solid"/>
+            <a:round/>
+          </a:ln>
+        </c:spPr>
+        <c:txPr>
+          <a:bodyPr/>
+          <a:lstStyle/>
+          <a:p>
+            <a:pPr>
+              <a:defRPr sz="1200" b="0" i="0" u="none" strike="noStrike">
+                <a:solidFill>
+                  <a:srgbClr val="000000"/>
+                </a:solidFill>
+                <a:latin typeface="Arial"/>
+              </a:defRPr>
+            </a:pPr>
+            <a:endParaRPr lang="en-US"/>
+          </a:p>
+        </c:txPr>
+        <c:crossAx val="2094734554"/>
+        <c:crosses val="autoZero"/>
+        <c:crossBetween val="between"/>
+      </c:valAx>
+      <c:spPr>
+        <a:noFill/>
+        <a:ln>
+          <a:noFill/>
+        </a:ln>
+        <a:effectLst/>
+      </c:spPr>
+    </c:plotArea>
+    <c:plotVisOnly val="1"/>
+    <c:dispBlanksAs val="span"/>
+  </c:chart>
+  <c:spPr>
+    <a:noFill/>
+    <a:ln>
+      <a:noFill/>
+    </a:ln>
+    <a:effectLst/>
+  </c:spPr>
+  <c:externalData r:id="rId1">
+    <c:autoUpdate val="0"/>
+  </c:externalData>
+</c:chartSpace>
+</file>
+
+<file path=ppt/charts/chart12.xml><?xml version="1.0" encoding="utf-8"?>
 <c:chartSpace xmlns:c="http://schemas.openxmlformats.org/drawingml/2006/chart" xmlns:a="http://schemas.openxmlformats.org/drawingml/2006/main" xmlns:r="http://schemas.openxmlformats.org/officeDocument/2006/relationships">
   <c:date1904 val="0"/>
   <c:roundedCorners val="1"/>
@@ -2859,7 +3369,9 @@
     <c:autoTitleDeleted val="1"/>
     <c:plotArea>
       <c:layout/>
-      <c:lineChart>
+      <c:barChart>
+        <c:barDir val="col"/>
+        <c:grouping val="stacked"/>
         <c:varyColors val="0"/>
         <c:ser>
           <c:idx val="0"/>
@@ -2870,87 +3382,65 @@
               <c:strCache>
                 <c:ptCount val="1"/>
                 <c:pt idx="0">
-                  <c:v>PMA adoption</c:v>
+                  <c:v>First visits</c:v>
                 </c:pt>
               </c:strCache>
             </c:strRef>
           </c:tx>
           <c:spPr>
             <a:solidFill>
-              <a:srgbClr val="B5AEA9"/>
+              <a:srgbClr val="DCD8D3"/>
             </a:solidFill>
-            <a:ln w="38100" cap="flat">
-              <a:solidFill>
-                <a:srgbClr val="B5AEA9"/>
-              </a:solidFill>
-              <a:prstDash val="solid"/>
-              <a:round/>
-            </a:ln>
             <a:effectLst/>
           </c:spPr>
           <c:invertIfNegative val="0"/>
           <c:dLbls>
-            <c:numFmt formatCode="0.0" sourceLinked="0"/>
+            <c:numFmt formatCode="#,##0" sourceLinked="0"/>
             <c:txPr>
               <a:bodyPr/>
               <a:lstStyle/>
               <a:p>
                 <a:pPr>
-                  <a:defRPr b="1" i="0" strike="noStrike" sz="1100" u="none">
+                  <a:defRPr b="1" i="0" strike="noStrike" sz="1300" u="none">
                     <a:solidFill>
-                      <a:srgbClr val="847C7A"/>
+                      <a:srgbClr val="1A1A1A"/>
                     </a:solidFill>
                     <a:latin typeface="+mn-lt"/>
                   </a:defRPr>
                 </a:pPr>
               </a:p>
             </c:txPr>
-            <c:dLblPos val="t"/>
             <c:showLegendKey val="0"/>
-            <c:showVal val="1"/>
+            <c:showVal val="0"/>
             <c:showCatName val="0"/>
             <c:showSerName val="0"/>
             <c:showPercent val="0"/>
             <c:showBubbleSize val="0"/>
             <c:showLeaderLines val="0"/>
           </c:dLbls>
-          <c:marker>
-            <c:symbol val="circle"/>
-            <c:size val="8"/>
-            <c:spPr>
-              <a:solidFill>
-                <a:srgbClr val="B5AEA9"/>
-              </a:solidFill>
-              <a:ln w="9525" cap="flat">
-                <a:solidFill>
-                  <a:srgbClr val="B5AEA9"/>
-                </a:solidFill>
-                <a:prstDash val="solid"/>
-                <a:round/>
-              </a:ln>
-              <a:effectLst/>
-            </c:spPr>
-          </c:marker>
           <c:cat>
             <c:multiLvlStrRef>
-              <c:f>Sheet1!$A$2:$A$6</c:f>
+              <c:f>Sheet1!$A$2:$A$7</c:f>
               <c:multiLvlStrCache>
-                <c:ptCount val="5"/>
+                <c:ptCount val="6"/>
                 <c:lvl>
                   <c:pt idx="0">
-                    <c:v>FY27E</c:v>
+                    <c:v>2025</c:v>
                   </c:pt>
                   <c:pt idx="1">
-                    <c:v>FY28E</c:v>
+                    <c:v>2026</c:v>
                   </c:pt>
                   <c:pt idx="2">
-                    <c:v>FY29E</c:v>
+                    <c:v>2027</c:v>
                   </c:pt>
                   <c:pt idx="3">
-                    <c:v>FY30E</c:v>
+                    <c:v>2028</c:v>
                   </c:pt>
                   <c:pt idx="4">
-                    <c:v>FY31E</c:v>
+                    <c:v>2029</c:v>
+                  </c:pt>
+                  <c:pt idx="5">
+                    <c:v>2030</c:v>
                   </c:pt>
                 </c:lvl>
               </c:multiLvlStrCache>
@@ -2958,186 +3448,42 @@
           </c:cat>
           <c:val>
             <c:numRef>
-              <c:f>Sheet1!$B$2:$B$6</c:f>
+              <c:f>Sheet1!$B$2:$B$7</c:f>
               <c:numCache>
                 <c:formatCode>General</c:formatCode>
-                <c:ptCount val="5"/>
+                <c:ptCount val="6"/>
                 <c:pt idx="0">
-                  <c:v>0.9</c:v>
+                  <c:v>976</c:v>
                 </c:pt>
                 <c:pt idx="1">
-                  <c:v>3</c:v>
+                  <c:v>912</c:v>
                 </c:pt>
                 <c:pt idx="2">
-                  <c:v>5</c:v>
+                  <c:v>845</c:v>
                 </c:pt>
                 <c:pt idx="3">
-                  <c:v>7</c:v>
+                  <c:v>763</c:v>
                 </c:pt>
                 <c:pt idx="4">
-                  <c:v>9</c:v>
+                  <c:v>676</c:v>
+                </c:pt>
+                <c:pt idx="5">
+                  <c:v>598</c:v>
                 </c:pt>
               </c:numCache>
             </c:numRef>
           </c:val>
-          <c:smooth val="0"/>
         </c:ser>
-        <c:dLbls>
-          <c:numFmt formatCode="0.0" sourceLinked="0"/>
-          <c:txPr>
-            <a:bodyPr/>
-            <a:lstStyle/>
-            <a:p>
-              <a:pPr>
-                <a:defRPr b="1" i="0" strike="noStrike" sz="1100" u="none">
-                  <a:solidFill>
-                    <a:srgbClr val="847C7A"/>
-                  </a:solidFill>
-                  <a:latin typeface="+mn-lt"/>
-                </a:defRPr>
-              </a:pPr>
-            </a:p>
-          </c:txPr>
-          <c:dLblPos val="t"/>
-          <c:showLegendKey val="0"/>
-          <c:showVal val="1"/>
-          <c:showCatName val="0"/>
-          <c:showSerName val="0"/>
-          <c:showPercent val="0"/>
-          <c:showBubbleSize val="0"/>
-          <c:showLeaderLines val="0"/>
-        </c:dLbls>
-        <c:marker val="1"/>
-        <c:axId val="2094734554"/>
-        <c:axId val="2094734552"/>
-        <c:axId val="2094734556"/>
-      </c:lineChart>
-      <c:catAx>
-        <c:axId val="2094734554"/>
-        <c:scaling>
-          <c:orientation val="minMax"/>
-        </c:scaling>
-        <c:delete val="1"/>
-        <c:axPos val="b"/>
-        <c:numFmt formatCode="General" sourceLinked="1"/>
-        <c:majorTickMark val="out"/>
-        <c:minorTickMark val="none"/>
-        <c:tickLblPos val="low"/>
-        <c:spPr>
-          <a:ln w="12700" cap="flat">
-            <a:noFill/>
-            <a:prstDash val="solid"/>
-            <a:round/>
-          </a:ln>
-        </c:spPr>
-        <c:txPr>
-          <a:bodyPr/>
-          <a:lstStyle/>
-          <a:p>
-            <a:pPr>
-              <a:defRPr sz="1200" b="0" i="0" u="none" strike="noStrike">
-                <a:solidFill>
-                  <a:srgbClr val="1A1A1A"/>
-                </a:solidFill>
-                <a:latin typeface="+mn-lt"/>
-              </a:defRPr>
-            </a:pPr>
-            <a:endParaRPr lang="en-US"/>
-          </a:p>
-        </c:txPr>
-        <c:crossAx val="2094734552"/>
-        <c:crosses val="autoZero"/>
-        <c:auto val="1"/>
-        <c:lblAlgn val="ctr"/>
-        <c:noMultiLvlLbl val="1"/>
-      </c:catAx>
-      <c:valAx>
-        <c:axId val="2094734552"/>
-        <c:scaling>
-          <c:orientation val="minMax"/>
-          <c:max val="13"/>
-          <c:min val="0"/>
-        </c:scaling>
-        <c:delete val="1"/>
-        <c:axPos val="l"/>
-        <c:numFmt formatCode="General" sourceLinked="0"/>
-        <c:majorTickMark val="out"/>
-        <c:minorTickMark val="none"/>
-        <c:tickLblPos val="nextTo"/>
-        <c:spPr>
-          <a:ln w="12700" cap="flat">
-            <a:solidFill>
-              <a:srgbClr val="888888"/>
-            </a:solidFill>
-            <a:prstDash val="solid"/>
-            <a:round/>
-          </a:ln>
-        </c:spPr>
-        <c:txPr>
-          <a:bodyPr/>
-          <a:lstStyle/>
-          <a:p>
-            <a:pPr>
-              <a:defRPr sz="1200" b="0" i="0" u="none" strike="noStrike">
-                <a:solidFill>
-                  <a:srgbClr val="000000"/>
-                </a:solidFill>
-                <a:latin typeface="Arial"/>
-              </a:defRPr>
-            </a:pPr>
-            <a:endParaRPr lang="en-US"/>
-          </a:p>
-        </c:txPr>
-        <c:crossAx val="2094734554"/>
-        <c:crosses val="autoZero"/>
-        <c:crossBetween val="between"/>
-      </c:valAx>
-      <c:spPr>
-        <a:noFill/>
-        <a:ln>
-          <a:noFill/>
-        </a:ln>
-        <a:effectLst/>
-      </c:spPr>
-    </c:plotArea>
-    <c:plotVisOnly val="1"/>
-    <c:dispBlanksAs val="span"/>
-  </c:chart>
-  <c:spPr>
-    <a:noFill/>
-    <a:ln>
-      <a:noFill/>
-    </a:ln>
-    <a:effectLst/>
-  </c:spPr>
-  <c:externalData r:id="rId1">
-    <c:autoUpdate val="0"/>
-  </c:externalData>
-</c:chartSpace>
-</file>
-
-<file path=ppt/charts/chart9.xml><?xml version="1.0" encoding="utf-8"?>
-<c:chartSpace xmlns:c="http://schemas.openxmlformats.org/drawingml/2006/chart" xmlns:a="http://schemas.openxmlformats.org/drawingml/2006/main" xmlns:r="http://schemas.openxmlformats.org/officeDocument/2006/relationships">
-  <c:date1904 val="0"/>
-  <c:roundedCorners val="1"/>
-  <c:chart>
-    <c:autoTitleDeleted val="1"/>
-    <c:plotArea>
-      <c:layout/>
-      <c:barChart>
-        <c:barDir val="col"/>
-        <c:grouping val="clustered"/>
-        <c:varyColors val="0"/>
         <c:ser>
-          <c:idx val="0"/>
-          <c:order val="0"/>
+          <c:idx val="1"/>
+          <c:order val="1"/>
           <c:tx>
             <c:strRef>
-              <c:f>Sheet1!$B$1</c:f>
+              <c:f>Sheet1!$C$1</c:f>
               <c:strCache>
                 <c:ptCount val="1"/>
                 <c:pt idx="0">
-                  <c:v>PMA EBITDA uplift</c:v>
+                  <c:v>Second visits (heaviest)</c:v>
                 </c:pt>
               </c:strCache>
             </c:strRef>
@@ -3150,13 +3496,13 @@
           </c:spPr>
           <c:invertIfNegative val="0"/>
           <c:dLbls>
-            <c:numFmt formatCode="&quot;$&quot;0&quot;M&quot;" sourceLinked="0"/>
+            <c:numFmt formatCode="#,##0" sourceLinked="0"/>
             <c:txPr>
               <a:bodyPr/>
               <a:lstStyle/>
               <a:p>
                 <a:pPr>
-                  <a:defRPr b="1" i="0" strike="noStrike" sz="1100" u="none">
+                  <a:defRPr b="1" i="0" strike="noStrike" sz="1300" u="none">
                     <a:solidFill>
                       <a:srgbClr val="1A1A1A"/>
                     </a:solidFill>
@@ -3166,7 +3512,7 @@
               </a:p>
             </c:txPr>
             <c:showLegendKey val="0"/>
-            <c:showVal val="1"/>
+            <c:showVal val="0"/>
             <c:showCatName val="0"/>
             <c:showSerName val="0"/>
             <c:showPercent val="0"/>
@@ -3175,24 +3521,27 @@
           </c:dLbls>
           <c:cat>
             <c:multiLvlStrRef>
-              <c:f>Sheet1!$A$2:$A$6</c:f>
+              <c:f>Sheet1!$A$2:$A$7</c:f>
               <c:multiLvlStrCache>
-                <c:ptCount val="5"/>
+                <c:ptCount val="6"/>
                 <c:lvl>
                   <c:pt idx="0">
-                    <c:v>FY27E</c:v>
+                    <c:v>2025</c:v>
                   </c:pt>
                   <c:pt idx="1">
-                    <c:v>FY28E</c:v>
+                    <c:v>2026</c:v>
                   </c:pt>
                   <c:pt idx="2">
-                    <c:v>FY29E</c:v>
+                    <c:v>2027</c:v>
                   </c:pt>
                   <c:pt idx="3">
-                    <c:v>FY30E</c:v>
+                    <c:v>2028</c:v>
                   </c:pt>
                   <c:pt idx="4">
-                    <c:v>FY31E</c:v>
+                    <c:v>2029</c:v>
+                  </c:pt>
+                  <c:pt idx="5">
+                    <c:v>2030</c:v>
                   </c:pt>
                 </c:lvl>
               </c:multiLvlStrCache>
@@ -3200,37 +3549,141 @@
           </c:cat>
           <c:val>
             <c:numRef>
-              <c:f>Sheet1!$B$2:$B$6</c:f>
+              <c:f>Sheet1!$C$2:$C$7</c:f>
               <c:numCache>
                 <c:formatCode>General</c:formatCode>
-                <c:ptCount val="5"/>
+                <c:ptCount val="6"/>
                 <c:pt idx="0">
-                  <c:v>6</c:v>
+                  <c:v>842</c:v>
                 </c:pt>
                 <c:pt idx="1">
-                  <c:v>24</c:v>
+                  <c:v>891</c:v>
                 </c:pt>
                 <c:pt idx="2">
-                  <c:v>42</c:v>
+                  <c:v>914</c:v>
                 </c:pt>
                 <c:pt idx="3">
-                  <c:v>59</c:v>
+                  <c:v>908</c:v>
                 </c:pt>
                 <c:pt idx="4">
-                  <c:v>77</c:v>
+                  <c:v>874</c:v>
+                </c:pt>
+                <c:pt idx="5">
+                  <c:v>832</c:v>
+                </c:pt>
+              </c:numCache>
+            </c:numRef>
+          </c:val>
+        </c:ser>
+        <c:ser>
+          <c:idx val="2"/>
+          <c:order val="2"/>
+          <c:tx>
+            <c:strRef>
+              <c:f>Sheet1!$D$1</c:f>
+              <c:strCache>
+                <c:ptCount val="1"/>
+                <c:pt idx="0">
+                  <c:v>Third+ visits (late life)</c:v>
+                </c:pt>
+              </c:strCache>
+            </c:strRef>
+          </c:tx>
+          <c:spPr>
+            <a:solidFill>
+              <a:srgbClr val="847C7A"/>
+            </a:solidFill>
+            <a:effectLst/>
+          </c:spPr>
+          <c:invertIfNegative val="0"/>
+          <c:dLbls>
+            <c:numFmt formatCode="#,##0" sourceLinked="0"/>
+            <c:txPr>
+              <a:bodyPr/>
+              <a:lstStyle/>
+              <a:p>
+                <a:pPr>
+                  <a:defRPr b="1" i="0" strike="noStrike" sz="1300" u="none">
+                    <a:solidFill>
+                      <a:srgbClr val="1A1A1A"/>
+                    </a:solidFill>
+                    <a:latin typeface="+mn-lt"/>
+                  </a:defRPr>
+                </a:pPr>
+              </a:p>
+            </c:txPr>
+            <c:showLegendKey val="0"/>
+            <c:showVal val="0"/>
+            <c:showCatName val="0"/>
+            <c:showSerName val="0"/>
+            <c:showPercent val="0"/>
+            <c:showBubbleSize val="0"/>
+            <c:showLeaderLines val="0"/>
+          </c:dLbls>
+          <c:cat>
+            <c:multiLvlStrRef>
+              <c:f>Sheet1!$A$2:$A$7</c:f>
+              <c:multiLvlStrCache>
+                <c:ptCount val="6"/>
+                <c:lvl>
+                  <c:pt idx="0">
+                    <c:v>2025</c:v>
+                  </c:pt>
+                  <c:pt idx="1">
+                    <c:v>2026</c:v>
+                  </c:pt>
+                  <c:pt idx="2">
+                    <c:v>2027</c:v>
+                  </c:pt>
+                  <c:pt idx="3">
+                    <c:v>2028</c:v>
+                  </c:pt>
+                  <c:pt idx="4">
+                    <c:v>2029</c:v>
+                  </c:pt>
+                  <c:pt idx="5">
+                    <c:v>2030</c:v>
+                  </c:pt>
+                </c:lvl>
+              </c:multiLvlStrCache>
+            </c:multiLvlStrRef>
+          </c:cat>
+          <c:val>
+            <c:numRef>
+              <c:f>Sheet1!$D$2:$D$7</c:f>
+              <c:numCache>
+                <c:formatCode>General</c:formatCode>
+                <c:ptCount val="6"/>
+                <c:pt idx="0">
+                  <c:v>532</c:v>
+                </c:pt>
+                <c:pt idx="1">
+                  <c:v>597</c:v>
+                </c:pt>
+                <c:pt idx="2">
+                  <c:v>641</c:v>
+                </c:pt>
+                <c:pt idx="3">
+                  <c:v>679</c:v>
+                </c:pt>
+                <c:pt idx="4">
+                  <c:v>700</c:v>
+                </c:pt>
+                <c:pt idx="5">
+                  <c:v>720</c:v>
                 </c:pt>
               </c:numCache>
             </c:numRef>
           </c:val>
         </c:ser>
         <c:dLbls>
-          <c:numFmt formatCode="&quot;$&quot;0&quot;M&quot;" sourceLinked="0"/>
+          <c:numFmt formatCode="#,##0" sourceLinked="0"/>
           <c:txPr>
             <a:bodyPr/>
             <a:lstStyle/>
             <a:p>
               <a:pPr>
-                <a:defRPr b="1" i="0" strike="noStrike" sz="1100" u="none">
+                <a:defRPr b="1" i="0" strike="noStrike" sz="1300" u="none">
                   <a:solidFill>
                     <a:srgbClr val="1A1A1A"/>
                   </a:solidFill>
@@ -3240,15 +3693,15 @@
             </a:p>
           </c:txPr>
           <c:showLegendKey val="0"/>
-          <c:showVal val="1"/>
+          <c:showVal val="0"/>
           <c:showCatName val="0"/>
           <c:showSerName val="0"/>
           <c:showPercent val="0"/>
           <c:showBubbleSize val="0"/>
           <c:showLeaderLines val="0"/>
         </c:dLbls>
-        <c:gapWidth val="45"/>
-        <c:overlap val="0"/>
+        <c:gapWidth val="40"/>
+        <c:overlap val="100"/>
         <c:axId val="2094734554"/>
         <c:axId val="2094734552"/>
         <c:axId val="2094734556"/>
@@ -3298,8 +3751,301 @@
         <c:axId val="2094734552"/>
         <c:scaling>
           <c:orientation val="minMax"/>
-          <c:max val="92"/>
+          <c:max val="2700"/>
           <c:min val="0"/>
+        </c:scaling>
+        <c:delete val="1"/>
+        <c:axPos val="l"/>
+        <c:numFmt formatCode="General" sourceLinked="0"/>
+        <c:majorTickMark val="out"/>
+        <c:minorTickMark val="none"/>
+        <c:tickLblPos val="nextTo"/>
+        <c:spPr>
+          <a:ln w="12700" cap="flat">
+            <a:solidFill>
+              <a:srgbClr val="888888"/>
+            </a:solidFill>
+            <a:prstDash val="solid"/>
+            <a:round/>
+          </a:ln>
+        </c:spPr>
+        <c:txPr>
+          <a:bodyPr/>
+          <a:lstStyle/>
+          <a:p>
+            <a:pPr>
+              <a:defRPr sz="1200" b="0" i="0" u="none" strike="noStrike">
+                <a:solidFill>
+                  <a:srgbClr val="000000"/>
+                </a:solidFill>
+                <a:latin typeface="Arial"/>
+              </a:defRPr>
+            </a:pPr>
+            <a:endParaRPr lang="en-US"/>
+          </a:p>
+        </c:txPr>
+        <c:crossAx val="2094734554"/>
+        <c:crosses val="autoZero"/>
+        <c:crossBetween val="between"/>
+      </c:valAx>
+      <c:spPr>
+        <a:noFill/>
+        <a:ln>
+          <a:noFill/>
+        </a:ln>
+        <a:effectLst/>
+      </c:spPr>
+    </c:plotArea>
+    <c:legend>
+      <c:legendPos val="b"/>
+      <c:overlay val="0"/>
+      <c:txPr>
+        <a:bodyPr/>
+        <a:lstStyle/>
+        <a:p>
+          <a:pPr>
+            <a:defRPr sz="1000">
+              <a:solidFill>
+                <a:srgbClr val="1A1A1A"/>
+              </a:solidFill>
+              <a:latin typeface="+mn-lt"/>
+              <a:cs typeface="+mn-lt"/>
+            </a:defRPr>
+          </a:pPr>
+          <a:endParaRPr lang="en-US"/>
+        </a:p>
+      </c:txPr>
+    </c:legend>
+    <c:plotVisOnly val="1"/>
+    <c:dispBlanksAs val="span"/>
+  </c:chart>
+  <c:spPr>
+    <a:noFill/>
+    <a:ln>
+      <a:noFill/>
+    </a:ln>
+    <a:effectLst/>
+  </c:spPr>
+  <c:externalData r:id="rId1">
+    <c:autoUpdate val="0"/>
+  </c:externalData>
+</c:chartSpace>
+</file>
+
+<file path=ppt/charts/chart9.xml><?xml version="1.0" encoding="utf-8"?>
+<c:chartSpace xmlns:c="http://schemas.openxmlformats.org/drawingml/2006/chart" xmlns:a="http://schemas.openxmlformats.org/drawingml/2006/main" xmlns:r="http://schemas.openxmlformats.org/officeDocument/2006/relationships">
+  <c:date1904 val="0"/>
+  <c:roundedCorners val="1"/>
+  <c:chart>
+    <c:autoTitleDeleted val="1"/>
+    <c:plotArea>
+      <c:layout/>
+      <c:lineChart>
+        <c:varyColors val="0"/>
+        <c:ser>
+          <c:idx val="0"/>
+          <c:order val="0"/>
+          <c:tx>
+            <c:strRef>
+              <c:f>Sheet1!$B$1</c:f>
+              <c:strCache>
+                <c:ptCount val="1"/>
+                <c:pt idx="0">
+                  <c:v>Blended margin</c:v>
+                </c:pt>
+              </c:strCache>
+            </c:strRef>
+          </c:tx>
+          <c:spPr>
+            <a:solidFill>
+              <a:srgbClr val="0A1C58"/>
+            </a:solidFill>
+            <a:ln w="38100" cap="flat">
+              <a:solidFill>
+                <a:srgbClr val="0A1C58"/>
+              </a:solidFill>
+              <a:prstDash val="solid"/>
+              <a:round/>
+            </a:ln>
+            <a:effectLst/>
+          </c:spPr>
+          <c:invertIfNegative val="0"/>
+          <c:dLbls>
+            <c:numFmt formatCode="0%" sourceLinked="0"/>
+            <c:txPr>
+              <a:bodyPr/>
+              <a:lstStyle/>
+              <a:p>
+                <a:pPr>
+                  <a:defRPr b="1" i="0" strike="noStrike" sz="1100" u="none">
+                    <a:solidFill>
+                      <a:srgbClr val="1A1A1A"/>
+                    </a:solidFill>
+                    <a:latin typeface="+mn-lt"/>
+                  </a:defRPr>
+                </a:pPr>
+              </a:p>
+            </c:txPr>
+            <c:dLblPos val="t"/>
+            <c:showLegendKey val="0"/>
+            <c:showVal val="1"/>
+            <c:showCatName val="0"/>
+            <c:showSerName val="0"/>
+            <c:showPercent val="0"/>
+            <c:showBubbleSize val="0"/>
+            <c:showLeaderLines val="0"/>
+          </c:dLbls>
+          <c:marker>
+            <c:symbol val="circle"/>
+            <c:size val="7"/>
+            <c:spPr>
+              <a:solidFill>
+                <a:srgbClr val="0A1C58"/>
+              </a:solidFill>
+              <a:ln w="9525" cap="flat">
+                <a:solidFill>
+                  <a:srgbClr val="0A1C58"/>
+                </a:solidFill>
+                <a:prstDash val="solid"/>
+                <a:round/>
+              </a:ln>
+              <a:effectLst/>
+            </c:spPr>
+          </c:marker>
+          <c:cat>
+            <c:multiLvlStrRef>
+              <c:f>Sheet1!$A$2:$A$7</c:f>
+              <c:multiLvlStrCache>
+                <c:ptCount val="6"/>
+                <c:lvl>
+                  <c:pt idx="0">
+                    <c:v>30%</c:v>
+                  </c:pt>
+                  <c:pt idx="1">
+                    <c:v>40%</c:v>
+                  </c:pt>
+                  <c:pt idx="2">
+                    <c:v>50%</c:v>
+                  </c:pt>
+                  <c:pt idx="3">
+                    <c:v>60%</c:v>
+                  </c:pt>
+                  <c:pt idx="4">
+                    <c:v>70%</c:v>
+                  </c:pt>
+                  <c:pt idx="5">
+                    <c:v>80%</c:v>
+                  </c:pt>
+                </c:lvl>
+              </c:multiLvlStrCache>
+            </c:multiLvlStrRef>
+          </c:cat>
+          <c:val>
+            <c:numRef>
+              <c:f>Sheet1!$B$2:$B$7</c:f>
+              <c:numCache>
+                <c:formatCode>General</c:formatCode>
+                <c:ptCount val="6"/>
+                <c:pt idx="0">
+                  <c:v>0.279</c:v>
+                </c:pt>
+                <c:pt idx="1">
+                  <c:v>0.292</c:v>
+                </c:pt>
+                <c:pt idx="2">
+                  <c:v>0.306</c:v>
+                </c:pt>
+                <c:pt idx="3">
+                  <c:v>0.321</c:v>
+                </c:pt>
+                <c:pt idx="4">
+                  <c:v>0.34</c:v>
+                </c:pt>
+                <c:pt idx="5">
+                  <c:v>0.361</c:v>
+                </c:pt>
+              </c:numCache>
+            </c:numRef>
+          </c:val>
+          <c:smooth val="0"/>
+        </c:ser>
+        <c:dLbls>
+          <c:numFmt formatCode="0%" sourceLinked="0"/>
+          <c:txPr>
+            <a:bodyPr/>
+            <a:lstStyle/>
+            <a:p>
+              <a:pPr>
+                <a:defRPr b="1" i="0" strike="noStrike" sz="1100" u="none">
+                  <a:solidFill>
+                    <a:srgbClr val="1A1A1A"/>
+                  </a:solidFill>
+                  <a:latin typeface="+mn-lt"/>
+                </a:defRPr>
+              </a:pPr>
+            </a:p>
+          </c:txPr>
+          <c:dLblPos val="t"/>
+          <c:showLegendKey val="0"/>
+          <c:showVal val="1"/>
+          <c:showCatName val="0"/>
+          <c:showSerName val="0"/>
+          <c:showPercent val="0"/>
+          <c:showBubbleSize val="0"/>
+          <c:showLeaderLines val="0"/>
+        </c:dLbls>
+        <c:marker val="1"/>
+        <c:axId val="2094734554"/>
+        <c:axId val="2094734552"/>
+        <c:axId val="2094734556"/>
+      </c:lineChart>
+      <c:catAx>
+        <c:axId val="2094734554"/>
+        <c:scaling>
+          <c:orientation val="minMax"/>
+        </c:scaling>
+        <c:delete val="0"/>
+        <c:axPos val="b"/>
+        <c:numFmt formatCode="General" sourceLinked="1"/>
+        <c:majorTickMark val="out"/>
+        <c:minorTickMark val="none"/>
+        <c:tickLblPos val="low"/>
+        <c:spPr>
+          <a:ln w="12700" cap="flat">
+            <a:solidFill>
+              <a:srgbClr val="BFBFBF"/>
+            </a:solidFill>
+            <a:prstDash val="solid"/>
+            <a:round/>
+          </a:ln>
+        </c:spPr>
+        <c:txPr>
+          <a:bodyPr/>
+          <a:lstStyle/>
+          <a:p>
+            <a:pPr>
+              <a:defRPr sz="1200" b="0" i="0" u="none" strike="noStrike">
+                <a:solidFill>
+                  <a:srgbClr val="1A1A1A"/>
+                </a:solidFill>
+                <a:latin typeface="+mn-lt"/>
+              </a:defRPr>
+            </a:pPr>
+            <a:endParaRPr lang="en-US"/>
+          </a:p>
+        </c:txPr>
+        <c:crossAx val="2094734552"/>
+        <c:crosses val="autoZero"/>
+        <c:auto val="1"/>
+        <c:lblAlgn val="ctr"/>
+        <c:noMultiLvlLbl val="1"/>
+      </c:catAx>
+      <c:valAx>
+        <c:axId val="2094734552"/>
+        <c:scaling>
+          <c:orientation val="minMax"/>
+          <c:max val="0.39"/>
+          <c:min val="0.24"/>
         </c:scaling>
         <c:delete val="1"/>
         <c:axPos val="l"/>
@@ -3930,7 +4676,7 @@
           <a:p>
             <a:r>
               <a:rPr lang="en-US" dirty="0"/>
-              <a:t>Our model: PMA penetration 0.9% FY27E rising to 9% FY31E at $0.4M EBITDA uplift per PMA module = $6M to $77M. Jefferies estimates ~$0.8M uplift per PMA module and ~$43M of 2026E Aerospace EBITDA per 5 pts of adoption, so our case is conservative on both rate and uplift. Chromalloy JV program: 3 of 5 parts approved (LPT stage 1 vane 2021, HPT stage 1 vane Oct 2024, HPT stage 1 blade Oct 2025), covering ~80% of targeted savings; 2 in FAA review.</a:t>
+              <a:t>Cohort roll-forward (central): first visits fall 976 → 598 (2025–2030) as the last 737NG / A320ceo deliveries pass their first run; second visits, typically the heaviest, peak at 914 in 2027; third-and-later visits rise 532 → 720. Late-life engines increasingly get green-time-only restorations (model assumes 100% / 90% / 70% of due engines get a full visit at &lt;20 / 20–25 / 25+ years). Mix curve uses management's example: light job ~$6M revenue / ~$2.5M profit, heavy ~$12M / ~$3.0M; blended margin by share of jobs. Caveat: the model's broader-work share still rises from 48% to 52% through 2030, so the light-scope return is a late-cycle (2030+) effect.</a:t>
             </a:r>
             <a:endParaRPr lang="en-US" dirty="0"/>
           </a:p>
@@ -3954,6 +4700,94 @@
             <a:fld id="{F7021451-1387-4CA6-816F-3879F97B5CBC}" type="slidenum">
               <a:rPr lang="en-US"/>
               <a:t>11</a:t>
+            </a:fld>
+            <a:endParaRPr lang="en-US"/>
+          </a:p>
+        </p:txBody>
+      </p:sp>
+    </p:spTree>
+    <p:extLst>
+      <p:ext uri="{BB962C8B-B14F-4D97-AF65-F5344CB8AC3E}">
+        <p14:creationId xmlns:p14="http://schemas.microsoft.com/office/powerpoint/2010/main" val="1024086991"/>
+      </p:ext>
+    </p:extLst>
+  </p:cSld>
+  <p:clrMapOvr>
+    <a:masterClrMapping/>
+  </p:clrMapOvr>
+</p:notes>
+</file>
+
+<file path=ppt/notesSlides/notesSlide12.xml><?xml version="1.0" encoding="utf-8"?>
+<p:notes xmlns:a="http://schemas.openxmlformats.org/drawingml/2006/main" xmlns:r="http://schemas.openxmlformats.org/officeDocument/2006/relationships" xmlns:p="http://schemas.openxmlformats.org/presentationml/2006/main">
+  <p:cSld>
+    <p:spTree>
+      <p:nvGrpSpPr>
+        <p:cNvPr id="1" name=""/>
+        <p:cNvGrpSpPr/>
+        <p:nvPr/>
+      </p:nvGrpSpPr>
+      <p:grpSpPr>
+        <a:xfrm>
+          <a:off x="0" y="0"/>
+          <a:ext cx="0" cy="0"/>
+          <a:chOff x="0" y="0"/>
+          <a:chExt cx="0" cy="0"/>
+        </a:xfrm>
+      </p:grpSpPr>
+      <p:sp>
+        <p:nvSpPr>
+          <p:cNvPr id="2" name="Slide Image Placeholder 1"/>
+          <p:cNvSpPr>
+            <a:spLocks noGrp="1" noRot="1" noChangeAspect="1"/>
+          </p:cNvSpPr>
+          <p:nvPr>
+            <p:ph type="sldImg"/>
+          </p:nvPr>
+        </p:nvSpPr>
+        <p:spPr/>
+      </p:sp>
+      <p:sp>
+        <p:nvSpPr>
+          <p:cNvPr id="3" name="Notes Placeholder 2"/>
+          <p:cNvSpPr>
+            <a:spLocks noGrp="1"/>
+          </p:cNvSpPr>
+          <p:nvPr>
+            <p:ph type="body" idx="1"/>
+          </p:nvPr>
+        </p:nvSpPr>
+        <p:spPr/>
+        <p:txBody>
+          <a:bodyPr/>
+          <a:lstStyle/>
+          <a:p>
+            <a:r>
+              <a:rPr lang="en-US" dirty="0"/>
+              <a:t>Our model: PMA penetration 0.9% FY27E rising to 9% FY31E at $0.4M EBITDA uplift per PMA module = $6M to $77M. Jefferies estimates ~$0.8M uplift per PMA module and ~$43M of 2026E Aerospace EBITDA per 5 pts of adoption, so our case is conservative on both rate and uplift. Chromalloy JV program: 3 of 5 parts approved (LPT stage 1 vane 2021, HPT stage 1 vane Oct 2024, HPT stage 1 blade Oct 2025), covering ~80% of targeted savings; 2 in FAA review.</a:t>
+            </a:r>
+            <a:endParaRPr lang="en-US" dirty="0"/>
+          </a:p>
+        </p:txBody>
+      </p:sp>
+      <p:sp>
+        <p:nvSpPr>
+          <p:cNvPr id="4" name="Slide Number Placeholder 3"/>
+          <p:cNvSpPr>
+            <a:spLocks noGrp="1"/>
+          </p:cNvSpPr>
+          <p:nvPr>
+            <p:ph type="sldNum" sz="quarter" idx="10"/>
+          </p:nvPr>
+        </p:nvSpPr>
+        <p:spPr/>
+        <p:txBody>
+          <a:bodyPr/>
+          <a:lstStyle/>
+          <a:p>
+            <a:fld id="{F7021451-1387-4CA6-816F-3879F97B5CBC}" type="slidenum">
+              <a:rPr lang="en-US"/>
+              <a:t>12</a:t>
             </a:fld>
             <a:endParaRPr lang="en-US"/>
           </a:p>
@@ -6189,7 +7023,7 @@
                   <a:schemeClr val="tx2"/>
                 </a:solidFill>
               </a:rPr>
-              <a:t>Thesis 1a: Margin Floor (2/3)</a:t>
+              <a:t>Thesis 1a: Margin Floor (2/4)</a:t>
             </a:r>
             <a:endParaRPr lang="en-US" sz="3200" dirty="0"/>
           </a:p>
@@ -6678,7 +7512,460 @@
                   <a:schemeClr val="tx2"/>
                 </a:solidFill>
               </a:rPr>
-              <a:t>Thesis 1a: Margin Floor (3/3)</a:t>
+              <a:t>Thesis 1a: Margin Floor (3/4)</a:t>
+            </a:r>
+            <a:endParaRPr lang="en-US" sz="3200" dirty="0"/>
+          </a:p>
+        </p:txBody>
+      </p:sp>
+      <p:sp>
+        <p:nvSpPr>
+          <p:cNvPr id="3" name="Text 1"/>
+          <p:cNvSpPr/>
+          <p:nvPr>
+            <p:ph idx="103" type="body" hasCustomPrompt="1"/>
+          </p:nvPr>
+        </p:nvSpPr>
+        <p:spPr>
+          <a:xfrm>
+            <a:off x="320040" y="932688"/>
+            <a:ext cx="8503920" cy="566928"/>
+          </a:xfrm>
+          <a:prstGeom prst="rect">
+            <a:avLst/>
+          </a:prstGeom>
+          <a:noFill/>
+          <a:ln/>
+        </p:spPr>
+        <p:txBody>
+          <a:bodyPr wrap="square" lIns="0" tIns="0" rIns="0" bIns="0" rtlCol="0" anchor="t"/>
+          <a:lstStyle/>
+          <a:p>
+            <a:pPr algn="l" indent="0" marL="0">
+              <a:buNone/>
+            </a:pPr>
+            <a:r>
+              <a:rPr lang="en-US" sz="1700" b="1" dirty="0">
+                <a:solidFill>
+                  <a:schemeClr val="tx2"/>
+                </a:solidFill>
+              </a:rPr>
+              <a:t>The heavy second-visit wave peaks in 2027. Late-life, lighter work follows and lifts margins.</a:t>
+            </a:r>
+            <a:endParaRPr lang="en-US" sz="1700" dirty="0"/>
+          </a:p>
+        </p:txBody>
+      </p:sp>
+      <p:sp>
+        <p:nvSpPr>
+          <p:cNvPr id="4" name="Cohort header"/>
+          <p:cNvSpPr txBox="1"/>
+          <p:nvPr/>
+        </p:nvSpPr>
+        <p:spPr>
+          <a:xfrm>
+            <a:off x="320040" y="1554480"/>
+            <a:ext cx="4343400" cy="365760"/>
+          </a:xfrm>
+          <a:prstGeom prst="rect">
+            <a:avLst/>
+          </a:prstGeom>
+          <a:noFill/>
+          <a:ln/>
+        </p:spPr>
+        <p:txBody>
+          <a:bodyPr wrap="square" lIns="0" tIns="0" rIns="0" bIns="0" rtlCol="0" anchor="b"/>
+          <a:lstStyle/>
+          <a:p>
+            <a:pPr algn="ctr" indent="0" marL="0">
+              <a:buNone/>
+            </a:pPr>
+            <a:r>
+              <a:rPr lang="en-US" sz="1600" b="1" dirty="0">
+                <a:solidFill>
+                  <a:srgbClr val="1A1A1A"/>
+                </a:solidFill>
+              </a:rPr>
+              <a:t>CFM56 Shop Visits by Visit Number</a:t>
+            </a:r>
+            <a:endParaRPr lang="en-US" sz="1600" dirty="0"/>
+          </a:p>
+        </p:txBody>
+      </p:sp>
+      <p:sp>
+        <p:nvSpPr>
+          <p:cNvPr id="5" name="Cohort header rule"/>
+          <p:cNvSpPr/>
+          <p:nvPr/>
+        </p:nvSpPr>
+        <p:spPr>
+          <a:xfrm>
+            <a:off x="320040" y="1975104"/>
+            <a:ext cx="4343400" cy="0"/>
+          </a:xfrm>
+          <a:prstGeom prst="line">
+            <a:avLst/>
+          </a:prstGeom>
+          <a:noFill/>
+          <a:ln w="12700">
+            <a:solidFill>
+              <a:srgbClr val="1A1A1A"/>
+            </a:solidFill>
+            <a:prstDash val="solid"/>
+          </a:ln>
+        </p:spPr>
+      </p:sp>
+      <p:graphicFrame>
+        <p:nvGraphicFramePr>
+          <p:cNvPr id="6" name="Cohort chart" descr=""/>
+          <p:cNvGraphicFramePr/>
+          <p:nvPr/>
+        </p:nvGraphicFramePr>
+        <p:xfrm>
+          <a:off x="320040" y="2103120"/>
+          <a:ext cx="4343400" cy="2880360"/>
+        </p:xfrm>
+        <a:graphic xmlns:a="http://schemas.openxmlformats.org/drawingml/2006/main">
+          <a:graphicData uri="http://schemas.openxmlformats.org/drawingml/2006/chart">
+            <c:chart xmlns:c="http://schemas.openxmlformats.org/drawingml/2006/chart" r:id="rId1"/>
+          </a:graphicData>
+        </a:graphic>
+      </p:graphicFrame>
+      <p:sp>
+        <p:nvSpPr>
+          <p:cNvPr id="7" name="Peak label"/>
+          <p:cNvSpPr txBox="1"/>
+          <p:nvPr/>
+        </p:nvSpPr>
+        <p:spPr>
+          <a:xfrm>
+            <a:off x="1709928" y="2011680"/>
+            <a:ext cx="1188720" cy="256032"/>
+          </a:xfrm>
+          <a:prstGeom prst="rect">
+            <a:avLst/>
+          </a:prstGeom>
+          <a:noFill/>
+          <a:ln/>
+        </p:spPr>
+        <p:txBody>
+          <a:bodyPr wrap="square" lIns="0" tIns="0" rIns="0" bIns="0" rtlCol="0" anchor="ctr"/>
+          <a:lstStyle/>
+          <a:p>
+            <a:pPr algn="ctr" indent="0" marL="0">
+              <a:buNone/>
+            </a:pPr>
+            <a:r>
+              <a:rPr lang="en-US" sz="1100" b="1" i="1" dirty="0">
+                <a:solidFill>
+                  <a:schemeClr val="tx2"/>
+                </a:solidFill>
+              </a:rPr>
+              <a:t>2nd-visit peak</a:t>
+            </a:r>
+            <a:endParaRPr lang="en-US" sz="1100" dirty="0"/>
+          </a:p>
+        </p:txBody>
+      </p:sp>
+      <p:sp>
+        <p:nvSpPr>
+          <p:cNvPr id="8" name="Mix header"/>
+          <p:cNvSpPr txBox="1"/>
+          <p:nvPr/>
+        </p:nvSpPr>
+        <p:spPr>
+          <a:xfrm>
+            <a:off x="4892040" y="1554480"/>
+            <a:ext cx="3931920" cy="365760"/>
+          </a:xfrm>
+          <a:prstGeom prst="rect">
+            <a:avLst/>
+          </a:prstGeom>
+          <a:noFill/>
+          <a:ln/>
+        </p:spPr>
+        <p:txBody>
+          <a:bodyPr wrap="square" lIns="0" tIns="0" rIns="0" bIns="0" rtlCol="0" anchor="b"/>
+          <a:lstStyle/>
+          <a:p>
+            <a:pPr algn="ctr" indent="0" marL="0">
+              <a:buNone/>
+            </a:pPr>
+            <a:r>
+              <a:rPr lang="en-US" sz="1600" b="1" dirty="0">
+                <a:solidFill>
+                  <a:srgbClr val="1A1A1A"/>
+                </a:solidFill>
+              </a:rPr>
+              <a:t>Margin vs. Light-Scope Mix</a:t>
+            </a:r>
+            <a:endParaRPr lang="en-US" sz="1600" dirty="0"/>
+          </a:p>
+        </p:txBody>
+      </p:sp>
+      <p:sp>
+        <p:nvSpPr>
+          <p:cNvPr id="9" name="Mix header rule"/>
+          <p:cNvSpPr/>
+          <p:nvPr/>
+        </p:nvSpPr>
+        <p:spPr>
+          <a:xfrm>
+            <a:off x="4892040" y="1975104"/>
+            <a:ext cx="3931920" cy="0"/>
+          </a:xfrm>
+          <a:prstGeom prst="line">
+            <a:avLst/>
+          </a:prstGeom>
+          <a:noFill/>
+          <a:ln w="12700">
+            <a:solidFill>
+              <a:srgbClr val="1A1A1A"/>
+            </a:solidFill>
+            <a:prstDash val="solid"/>
+          </a:ln>
+        </p:spPr>
+      </p:sp>
+      <p:graphicFrame>
+        <p:nvGraphicFramePr>
+          <p:cNvPr id="10" name="Mix margin chart" descr=""/>
+          <p:cNvGraphicFramePr/>
+          <p:nvPr/>
+        </p:nvGraphicFramePr>
+        <p:xfrm>
+          <a:off x="4892040" y="2103120"/>
+          <a:ext cx="3931920" cy="2743200"/>
+        </p:xfrm>
+        <a:graphic xmlns:a="http://schemas.openxmlformats.org/drawingml/2006/main">
+          <a:graphicData uri="http://schemas.openxmlformats.org/drawingml/2006/chart">
+            <c:chart xmlns:c="http://schemas.openxmlformats.org/drawingml/2006/chart" r:id="rId2"/>
+          </a:graphicData>
+        </a:graphic>
+      </p:graphicFrame>
+      <p:sp>
+        <p:nvSpPr>
+          <p:cNvPr id="11" name="Mix caption"/>
+          <p:cNvSpPr txBox="1"/>
+          <p:nvPr/>
+        </p:nvSpPr>
+        <p:spPr>
+          <a:xfrm>
+            <a:off x="4892040" y="4892040"/>
+            <a:ext cx="3931920" cy="411480"/>
+          </a:xfrm>
+          <a:prstGeom prst="rect">
+            <a:avLst/>
+          </a:prstGeom>
+          <a:noFill/>
+          <a:ln/>
+        </p:spPr>
+        <p:txBody>
+          <a:bodyPr wrap="square" lIns="0" tIns="0" rIns="0" bIns="0" rtlCol="0" anchor="ctr"/>
+          <a:lstStyle/>
+          <a:p>
+            <a:pPr algn="ctr" indent="0" marL="0">
+              <a:buNone/>
+            </a:pPr>
+            <a:r>
+              <a:rPr lang="en-US" sz="1100" i="1" dirty="0">
+                <a:solidFill>
+                  <a:schemeClr val="accent2"/>
+                </a:solidFill>
+              </a:rPr>
+              <a:t>Light-scope share of jobs (management's job economics)</a:t>
+            </a:r>
+            <a:endParaRPr lang="en-US" sz="1100" dirty="0"/>
+          </a:p>
+        </p:txBody>
+      </p:sp>
+      <p:sp>
+        <p:nvSpPr>
+          <p:cNvPr id="12" name="Takeaway"/>
+          <p:cNvSpPr txBox="1"/>
+          <p:nvPr/>
+        </p:nvSpPr>
+        <p:spPr>
+          <a:xfrm>
+            <a:off x="320040" y="5504688"/>
+            <a:ext cx="8503920" cy="566928"/>
+          </a:xfrm>
+          <a:prstGeom prst="rect">
+            <a:avLst/>
+          </a:prstGeom>
+          <a:solidFill>
+            <a:srgbClr val="0A1C58"/>
+          </a:solidFill>
+          <a:ln/>
+        </p:spPr>
+        <p:txBody>
+          <a:bodyPr wrap="square" lIns="101600" tIns="25400" rIns="101600" bIns="25400" rtlCol="0" anchor="ctr"/>
+          <a:lstStyle/>
+          <a:p>
+            <a:pPr algn="ctr" indent="0" marL="0">
+              <a:buNone/>
+            </a:pPr>
+            <a:r>
+              <a:rPr lang="en-US" sz="1700" b="1" dirty="0">
+                <a:solidFill>
+                  <a:schemeClr val="bg1"/>
+                </a:solidFill>
+              </a:rPr>
+              <a:t>When light work returns, every 10 pts of mix adds ~1.5–2 pts of margin, above today's ~30%.</a:t>
+            </a:r>
+            <a:endParaRPr lang="en-US" sz="1700" dirty="0"/>
+          </a:p>
+        </p:txBody>
+      </p:sp>
+      <p:sp>
+        <p:nvSpPr>
+          <p:cNvPr id="13" name="Source"/>
+          <p:cNvSpPr txBox="1"/>
+          <p:nvPr/>
+        </p:nvSpPr>
+        <p:spPr>
+          <a:xfrm>
+            <a:off x="320040" y="6355080"/>
+            <a:ext cx="7132320" cy="274320"/>
+          </a:xfrm>
+          <a:prstGeom prst="rect">
+            <a:avLst/>
+          </a:prstGeom>
+          <a:noFill/>
+          <a:ln/>
+        </p:spPr>
+        <p:txBody>
+          <a:bodyPr wrap="square" lIns="0" tIns="0" rIns="0" bIns="0" rtlCol="0" anchor="ctr"/>
+          <a:lstStyle/>
+          <a:p>
+            <a:pPr indent="0" marL="0">
+              <a:buNone/>
+            </a:pPr>
+            <a:r>
+              <a:rPr lang="en-US" sz="1100" b="1" dirty="0">
+                <a:solidFill>
+                  <a:srgbClr val="1A1A1A"/>
+                </a:solidFill>
+              </a:rPr>
+              <a:t>Source: </a:t>
+            </a:r>
+            <a:pPr indent="0" marL="0">
+              <a:buNone/>
+            </a:pPr>
+            <a:r>
+              <a:rPr lang="en-US" sz="1100" dirty="0">
+                <a:solidFill>
+                  <a:srgbClr val="1A1A1A"/>
+                </a:solidFill>
+              </a:rPr>
+              <a:t>GPS model (CFM56 Data tab: cohort roll-forward, central case); FTAI earnings call (light vs. heavy job economics)</a:t>
+            </a:r>
+            <a:endParaRPr lang="en-US" sz="1100" dirty="0"/>
+          </a:p>
+        </p:txBody>
+      </p:sp>
+      <p:sp>
+        <p:nvSpPr>
+          <p:cNvPr id="25" name="Slide Number Placeholder 0"/>
+          <p:cNvSpPr>
+            <a:spLocks noGrp="1"/>
+          </p:cNvSpPr>
+          <p:nvPr>
+            <p:ph type="sldNum" sz="quarter" idx="4294967295"/>
+          </p:nvPr>
+        </p:nvSpPr>
+        <p:spPr>
+          <a:xfrm>
+            <a:off x="7635240" y="6327648"/>
+            <a:ext cx="411480" cy="274320"/>
+          </a:xfrm>
+          <a:prstGeom prst="rect">
+            <a:avLst/>
+          </a:prstGeom>
+          <a:extLst>
+            <a:ext uri="{C572A759-6A51-4108-AA02-DFA0A04FC94B}">
+              <ma14:wrappingTextBoxFlag xmlns:ma14="http://schemas.microsoft.com/office/mac/drawingml/2011/main" val="0"/>
+            </a:ext>
+          </a:extLst>
+        </p:spPr>
+        <p:txBody>
+          <a:bodyPr/>
+          <a:lstStyle>
+            <a:lvl1pPr>
+              <a:defRPr sz="1100">
+                <a:solidFill>
+                  <a:srgbClr val="1A1A1A"/>
+                </a:solidFill>
+              </a:defRPr>
+            </a:lvl1pPr>
+          </a:lstStyle>
+          <a:p>
+            <a:pPr algn="r"/>
+            <a:fld id="{F7021451-1387-4CA6-816F-3879F97B5CBC}" type="slidenum">
+              <a:rPr b="1" lang="en-US"/>
+              <a:t>11</a:t>
+            </a:fld>
+            <a:endParaRPr lang="en-US"/>
+          </a:p>
+        </p:txBody>
+      </p:sp>
+    </p:spTree>
+  </p:cSld>
+  <p:clrMapOvr>
+    <a:masterClrMapping/>
+  </p:clrMapOvr>
+</p:sld>
+</file>
+
+<file path=ppt/slides/slide12.xml><?xml version="1.0" encoding="utf-8"?>
+<p:sld xmlns:a="http://schemas.openxmlformats.org/drawingml/2006/main" xmlns:r="http://schemas.openxmlformats.org/officeDocument/2006/relationships" xmlns:p="http://schemas.openxmlformats.org/presentationml/2006/main">
+  <p:cSld name="Slide 12">
+    <p:spTree>
+      <p:nvGrpSpPr>
+        <p:cNvPr id="1" name=""/>
+        <p:cNvGrpSpPr/>
+        <p:nvPr/>
+      </p:nvGrpSpPr>
+      <p:grpSpPr>
+        <a:xfrm>
+          <a:off x="0" y="0"/>
+          <a:ext cx="0" cy="0"/>
+          <a:chOff x="0" y="0"/>
+          <a:chExt cx="0" cy="0"/>
+        </a:xfrm>
+      </p:grpSpPr>
+      <p:sp>
+        <p:nvSpPr>
+          <p:cNvPr id="2" name="Text 1"/>
+          <p:cNvSpPr/>
+          <p:nvPr>
+            <p:ph idx="102" type="title" hasCustomPrompt="1"/>
+          </p:nvPr>
+        </p:nvSpPr>
+        <p:spPr>
+          <a:xfrm>
+            <a:off x="320040" y="182880"/>
+            <a:ext cx="8503920" cy="640080"/>
+          </a:xfrm>
+          <a:prstGeom prst="rect">
+            <a:avLst/>
+          </a:prstGeom>
+          <a:noFill/>
+          <a:ln/>
+        </p:spPr>
+        <p:txBody>
+          <a:bodyPr wrap="square" lIns="0" tIns="0" rIns="0" bIns="0" rtlCol="0" anchor="ctr"/>
+          <a:lstStyle/>
+          <a:p>
+            <a:pPr algn="l" indent="0" marL="0">
+              <a:buNone/>
+            </a:pPr>
+            <a:r>
+              <a:rPr lang="en-US" sz="3200" b="1" dirty="0">
+                <a:solidFill>
+                  <a:schemeClr val="tx2"/>
+                </a:solidFill>
+              </a:rPr>
+              <a:t>Thesis 1a: Margin Floor (4/4)</a:t>
             </a:r>
             <a:endParaRPr lang="en-US" sz="3200" dirty="0"/>
           </a:p>
@@ -7120,7 +8407,7 @@
             <a:pPr algn="r"/>
             <a:fld id="{F7021451-1387-4CA6-816F-3879F97B5CBC}" type="slidenum">
               <a:rPr b="1" lang="en-US"/>
-              <a:t>11</a:t>
+              <a:t>12</a:t>
             </a:fld>
             <a:endParaRPr lang="en-US"/>
           </a:p>
@@ -13219,7 +14506,7 @@
                   <a:schemeClr val="tx2"/>
                 </a:solidFill>
               </a:rPr>
-              <a:t>Thesis 1a: Margin Floor (1/3)</a:t>
+              <a:t>Thesis 1a: Margin Floor (1/4)</a:t>
             </a:r>
             <a:endParaRPr lang="en-US" sz="3200" dirty="0"/>
           </a:p>

--- a/deck/FTAI_Long_Pitch.pptx
+++ b/deck/FTAI_Long_Pitch.pptx
@@ -118,12 +118,12 @@
   <p:extLst>
     <p:ext uri="{521415D9-36F7-43E2-AB2F-B90AF26B5E84}">
       <p14:sectionLst xmlns:p14="http://schemas.microsoft.com/office/powerpoint/2010/main">
-        <p14:section name="Introduction" id="{d49411df-28c9-f923-f4da-2cbe4ecb29ef}">
+        <p14:section name="Introduction" id="{37bf942e-6af1-2707-200b-40230c2780d9}">
           <p14:sldIdLst>
             <p14:sldId id="256"/>
           </p14:sldIdLst>
         </p14:section>
-        <p14:section name="The Opportunity" id="{6a6bacb4-3b9b-d437-756a-a04a457fafdf}">
+        <p14:section name="The Opportunity" id="{10a15b37-9cb9-4872-fa71-9af9fbcfbe8e}">
           <p14:sldIdLst>
             <p14:sldId id="257"/>
             <p14:sldId id="258"/>
@@ -131,18 +131,18 @@
             <p14:sldId id="260"/>
           </p14:sldIdLst>
         </p14:section>
-        <p14:section name="Returns" id="{c6055543-e0f4-1267-d3f8-3aca399c7631}">
+        <p14:section name="Returns" id="{dedd65bb-15b8-cd2c-f9f6-ca7cf2a97fd4}">
           <p14:sldIdLst>
             <p14:sldId id="261"/>
           </p14:sldIdLst>
         </p14:section>
-        <p14:section name="Business Overview" id="{2967d547-b784-5d1f-d2c4-a411a339aee1}">
+        <p14:section name="Business Overview" id="{ea06e014-97ab-d653-53e3-f0f2e9529466}">
           <p14:sldIdLst>
             <p14:sldId id="262"/>
             <p14:sldId id="263"/>
           </p14:sldIdLst>
         </p14:section>
-        <p14:section name="Thesis 1a" id="{1d725cb6-be0b-32f5-8152-7b20bcfcffb0}">
+        <p14:section name="Thesis 1a" id="{37a6339b-33f9-ef02-eb66-78cf23d1d6e6}">
           <p14:sldIdLst>
             <p14:sldId id="264"/>
             <p14:sldId id="265"/>
@@ -3369,9 +3369,7 @@
     <c:autoTitleDeleted val="1"/>
     <c:plotArea>
       <c:layout/>
-      <c:barChart>
-        <c:barDir val="col"/>
-        <c:grouping val="stacked"/>
+      <c:lineChart>
         <c:varyColors val="0"/>
         <c:ser>
           <c:idx val="0"/>
@@ -3382,15 +3380,22 @@
               <c:strCache>
                 <c:ptCount val="1"/>
                 <c:pt idx="0">
-                  <c:v>First visits</c:v>
+                  <c:v>Second visits (heaviest)</c:v>
                 </c:pt>
               </c:strCache>
             </c:strRef>
           </c:tx>
           <c:spPr>
             <a:solidFill>
-              <a:srgbClr val="DCD8D3"/>
+              <a:srgbClr val="0A1C58"/>
             </a:solidFill>
+            <a:ln w="44450" cap="flat">
+              <a:solidFill>
+                <a:srgbClr val="0A1C58"/>
+              </a:solidFill>
+              <a:prstDash val="solid"/>
+              <a:round/>
+            </a:ln>
             <a:effectLst/>
           </c:spPr>
           <c:invertIfNegative val="0"/>
@@ -3401,11 +3406,11 @@
               <a:lstStyle/>
               <a:p>
                 <a:pPr>
-                  <a:defRPr b="1" i="0" strike="noStrike" sz="1300" u="none">
+                  <a:defRPr b="0" i="0" strike="noStrike" sz="1200" u="none">
                     <a:solidFill>
-                      <a:srgbClr val="1A1A1A"/>
+                      <a:srgbClr val="000000"/>
                     </a:solidFill>
-                    <a:latin typeface="+mn-lt"/>
+                    <a:latin typeface="Arial"/>
                   </a:defRPr>
                 </a:pPr>
               </a:p>
@@ -3418,11 +3423,28 @@
             <c:showBubbleSize val="0"/>
             <c:showLeaderLines val="0"/>
           </c:dLbls>
+          <c:marker>
+            <c:symbol val="circle"/>
+            <c:size val="7"/>
+            <c:spPr>
+              <a:solidFill>
+                <a:srgbClr val="0A1C58"/>
+              </a:solidFill>
+              <a:ln w="9525" cap="flat">
+                <a:solidFill>
+                  <a:srgbClr val="0A1C58"/>
+                </a:solidFill>
+                <a:prstDash val="solid"/>
+                <a:round/>
+              </a:ln>
+              <a:effectLst/>
+            </c:spPr>
+          </c:marker>
           <c:cat>
             <c:multiLvlStrRef>
-              <c:f>Sheet1!$A$2:$A$7</c:f>
+              <c:f>Sheet1!$A$2:$A$9</c:f>
               <c:multiLvlStrCache>
-                <c:ptCount val="6"/>
+                <c:ptCount val="8"/>
                 <c:lvl>
                   <c:pt idx="0">
                     <c:v>2025</c:v>
@@ -3442,37 +3464,50 @@
                   <c:pt idx="5">
                     <c:v>2030</c:v>
                   </c:pt>
+                  <c:pt idx="6">
+                    <c:v>2031</c:v>
+                  </c:pt>
+                  <c:pt idx="7">
+                    <c:v>2032</c:v>
+                  </c:pt>
                 </c:lvl>
               </c:multiLvlStrCache>
             </c:multiLvlStrRef>
           </c:cat>
           <c:val>
             <c:numRef>
-              <c:f>Sheet1!$B$2:$B$7</c:f>
+              <c:f>Sheet1!$B$2:$B$9</c:f>
               <c:numCache>
                 <c:formatCode>General</c:formatCode>
-                <c:ptCount val="6"/>
+                <c:ptCount val="8"/>
                 <c:pt idx="0">
-                  <c:v>976</c:v>
+                  <c:v>842</c:v>
                 </c:pt>
                 <c:pt idx="1">
-                  <c:v>912</c:v>
+                  <c:v>891</c:v>
                 </c:pt>
                 <c:pt idx="2">
-                  <c:v>845</c:v>
+                  <c:v>914</c:v>
                 </c:pt>
                 <c:pt idx="3">
-                  <c:v>763</c:v>
+                  <c:v>908</c:v>
                 </c:pt>
                 <c:pt idx="4">
-                  <c:v>676</c:v>
+                  <c:v>874</c:v>
                 </c:pt>
                 <c:pt idx="5">
-                  <c:v>598</c:v>
+                  <c:v>832</c:v>
+                </c:pt>
+                <c:pt idx="6">
+                  <c:v/>
+                </c:pt>
+                <c:pt idx="7">
+                  <c:v/>
                 </c:pt>
               </c:numCache>
             </c:numRef>
           </c:val>
+          <c:smooth val="0"/>
         </c:ser>
         <c:ser>
           <c:idx val="1"/>
@@ -3483,15 +3518,22 @@
               <c:strCache>
                 <c:ptCount val="1"/>
                 <c:pt idx="0">
-                  <c:v>Second visits (heaviest)</c:v>
+                  <c:v>Third+ visits (late life, lighter)</c:v>
                 </c:pt>
               </c:strCache>
             </c:strRef>
           </c:tx>
           <c:spPr>
             <a:solidFill>
-              <a:srgbClr val="0A1C58"/>
+              <a:srgbClr val="847C7A"/>
             </a:solidFill>
+            <a:ln w="44450" cap="flat">
+              <a:solidFill>
+                <a:srgbClr val="847C7A"/>
+              </a:solidFill>
+              <a:prstDash val="solid"/>
+              <a:round/>
+            </a:ln>
             <a:effectLst/>
           </c:spPr>
           <c:invertIfNegative val="0"/>
@@ -3502,11 +3544,11 @@
               <a:lstStyle/>
               <a:p>
                 <a:pPr>
-                  <a:defRPr b="1" i="0" strike="noStrike" sz="1300" u="none">
+                  <a:defRPr b="0" i="0" strike="noStrike" sz="1200" u="none">
                     <a:solidFill>
-                      <a:srgbClr val="1A1A1A"/>
+                      <a:srgbClr val="000000"/>
                     </a:solidFill>
-                    <a:latin typeface="+mn-lt"/>
+                    <a:latin typeface="Arial"/>
                   </a:defRPr>
                 </a:pPr>
               </a:p>
@@ -3519,11 +3561,28 @@
             <c:showBubbleSize val="0"/>
             <c:showLeaderLines val="0"/>
           </c:dLbls>
+          <c:marker>
+            <c:symbol val="circle"/>
+            <c:size val="7"/>
+            <c:spPr>
+              <a:solidFill>
+                <a:srgbClr val="847C7A"/>
+              </a:solidFill>
+              <a:ln w="9525" cap="flat">
+                <a:solidFill>
+                  <a:srgbClr val="847C7A"/>
+                </a:solidFill>
+                <a:prstDash val="solid"/>
+                <a:round/>
+              </a:ln>
+              <a:effectLst/>
+            </c:spPr>
+          </c:marker>
           <c:cat>
             <c:multiLvlStrRef>
-              <c:f>Sheet1!$A$2:$A$7</c:f>
+              <c:f>Sheet1!$A$2:$A$9</c:f>
               <c:multiLvlStrCache>
-                <c:ptCount val="6"/>
+                <c:ptCount val="8"/>
                 <c:lvl>
                   <c:pt idx="0">
                     <c:v>2025</c:v>
@@ -3543,38 +3602,82 @@
                   <c:pt idx="5">
                     <c:v>2030</c:v>
                   </c:pt>
+                  <c:pt idx="6">
+                    <c:v>2031</c:v>
+                  </c:pt>
+                  <c:pt idx="7">
+                    <c:v>2032</c:v>
+                  </c:pt>
                 </c:lvl>
               </c:multiLvlStrCache>
             </c:multiLvlStrRef>
           </c:cat>
           <c:val>
             <c:numRef>
-              <c:f>Sheet1!$C$2:$C$7</c:f>
+              <c:f>Sheet1!$C$2:$C$9</c:f>
               <c:numCache>
                 <c:formatCode>General</c:formatCode>
-                <c:ptCount val="6"/>
+                <c:ptCount val="8"/>
                 <c:pt idx="0">
-                  <c:v>842</c:v>
+                  <c:v>532</c:v>
                 </c:pt>
                 <c:pt idx="1">
-                  <c:v>891</c:v>
+                  <c:v>597</c:v>
                 </c:pt>
                 <c:pt idx="2">
-                  <c:v>914</c:v>
+                  <c:v>641</c:v>
                 </c:pt>
                 <c:pt idx="3">
-                  <c:v>908</c:v>
+                  <c:v>679</c:v>
                 </c:pt>
                 <c:pt idx="4">
-                  <c:v>874</c:v>
+                  <c:v>700</c:v>
                 </c:pt>
                 <c:pt idx="5">
-                  <c:v>832</c:v>
+                  <c:v>720</c:v>
+                </c:pt>
+                <c:pt idx="6">
+                  <c:v/>
+                </c:pt>
+                <c:pt idx="7">
+                  <c:v/>
                 </c:pt>
               </c:numCache>
             </c:numRef>
           </c:val>
+          <c:smooth val="0"/>
         </c:ser>
+        <c:dLbls>
+          <c:numFmt formatCode="#,##0" sourceLinked="0"/>
+          <c:txPr>
+            <a:bodyPr/>
+            <a:lstStyle/>
+            <a:p>
+              <a:pPr>
+                <a:defRPr b="0" i="0" strike="noStrike" sz="1200" u="none">
+                  <a:solidFill>
+                    <a:srgbClr val="000000"/>
+                  </a:solidFill>
+                  <a:latin typeface="Arial"/>
+                </a:defRPr>
+              </a:pPr>
+            </a:p>
+          </c:txPr>
+          <c:showLegendKey val="0"/>
+          <c:showVal val="0"/>
+          <c:showCatName val="0"/>
+          <c:showSerName val="0"/>
+          <c:showPercent val="0"/>
+          <c:showBubbleSize val="0"/>
+          <c:showLeaderLines val="0"/>
+        </c:dLbls>
+        <c:marker val="1"/>
+        <c:axId val="2094734554"/>
+        <c:axId val="2094734552"/>
+        <c:axId val="2094734556"/>
+      </c:lineChart>
+      <c:lineChart>
+        <c:varyColors val="0"/>
         <c:ser>
           <c:idx val="2"/>
           <c:order val="2"/>
@@ -3584,15 +3687,22 @@
               <c:strCache>
                 <c:ptCount val="1"/>
                 <c:pt idx="0">
-                  <c:v>Third+ visits (late life)</c:v>
+                  <c:v>Second trend</c:v>
                 </c:pt>
               </c:strCache>
             </c:strRef>
           </c:tx>
           <c:spPr>
             <a:solidFill>
-              <a:srgbClr val="847C7A"/>
+              <a:srgbClr val="0A1C58"/>
             </a:solidFill>
+            <a:ln w="31750" cap="flat">
+              <a:solidFill>
+                <a:srgbClr val="0A1C58"/>
+              </a:solidFill>
+              <a:prstDash val="dash"/>
+              <a:round/>
+            </a:ln>
             <a:effectLst/>
           </c:spPr>
           <c:invertIfNegative val="0"/>
@@ -3603,11 +3713,11 @@
               <a:lstStyle/>
               <a:p>
                 <a:pPr>
-                  <a:defRPr b="1" i="0" strike="noStrike" sz="1300" u="none">
+                  <a:defRPr b="0" i="0" strike="noStrike" sz="1200" u="none">
                     <a:solidFill>
-                      <a:srgbClr val="1A1A1A"/>
+                      <a:srgbClr val="000000"/>
                     </a:solidFill>
-                    <a:latin typeface="+mn-lt"/>
+                    <a:latin typeface="Arial"/>
                   </a:defRPr>
                 </a:pPr>
               </a:p>
@@ -3620,11 +3730,28 @@
             <c:showBubbleSize val="0"/>
             <c:showLeaderLines val="0"/>
           </c:dLbls>
+          <c:marker>
+            <c:symbol val="none"/>
+            <c:size val="6"/>
+            <c:spPr>
+              <a:solidFill>
+                <a:srgbClr val="0A1C58"/>
+              </a:solidFill>
+              <a:ln w="9525" cap="flat">
+                <a:solidFill>
+                  <a:srgbClr val="0A1C58"/>
+                </a:solidFill>
+                <a:prstDash val="solid"/>
+                <a:round/>
+              </a:ln>
+              <a:effectLst/>
+            </c:spPr>
+          </c:marker>
           <c:cat>
             <c:multiLvlStrRef>
-              <c:f>Sheet1!$A$2:$A$7</c:f>
+              <c:f>Sheet1!$A$2:$A$9</c:f>
               <c:multiLvlStrCache>
-                <c:ptCount val="6"/>
+                <c:ptCount val="8"/>
                 <c:lvl>
                   <c:pt idx="0">
                     <c:v>2025</c:v>
@@ -3644,37 +3771,188 @@
                   <c:pt idx="5">
                     <c:v>2030</c:v>
                   </c:pt>
+                  <c:pt idx="6">
+                    <c:v>2031</c:v>
+                  </c:pt>
+                  <c:pt idx="7">
+                    <c:v>2032</c:v>
+                  </c:pt>
                 </c:lvl>
               </c:multiLvlStrCache>
             </c:multiLvlStrRef>
           </c:cat>
           <c:val>
             <c:numRef>
-              <c:f>Sheet1!$D$2:$D$7</c:f>
+              <c:f>Sheet1!$D$2:$D$9</c:f>
               <c:numCache>
                 <c:formatCode>General</c:formatCode>
-                <c:ptCount val="6"/>
+                <c:ptCount val="8"/>
                 <c:pt idx="0">
-                  <c:v>532</c:v>
+                  <c:v/>
                 </c:pt>
                 <c:pt idx="1">
-                  <c:v>597</c:v>
+                  <c:v/>
                 </c:pt>
                 <c:pt idx="2">
-                  <c:v>641</c:v>
+                  <c:v/>
                 </c:pt>
                 <c:pt idx="3">
-                  <c:v>679</c:v>
+                  <c:v/>
                 </c:pt>
                 <c:pt idx="4">
-                  <c:v>700</c:v>
+                  <c:v/>
+                </c:pt>
+                <c:pt idx="5">
+                  <c:v>832</c:v>
+                </c:pt>
+                <c:pt idx="6">
+                  <c:v>790</c:v>
+                </c:pt>
+                <c:pt idx="7">
+                  <c:v>748</c:v>
+                </c:pt>
+              </c:numCache>
+            </c:numRef>
+          </c:val>
+          <c:smooth val="0"/>
+        </c:ser>
+        <c:ser>
+          <c:idx val="3"/>
+          <c:order val="3"/>
+          <c:tx>
+            <c:strRef>
+              <c:f>Sheet1!$E$1</c:f>
+              <c:strCache>
+                <c:ptCount val="1"/>
+                <c:pt idx="0">
+                  <c:v>Third+ trend</c:v>
+                </c:pt>
+              </c:strCache>
+            </c:strRef>
+          </c:tx>
+          <c:spPr>
+            <a:solidFill>
+              <a:srgbClr val="847C7A"/>
+            </a:solidFill>
+            <a:ln w="31750" cap="flat">
+              <a:solidFill>
+                <a:srgbClr val="847C7A"/>
+              </a:solidFill>
+              <a:prstDash val="dash"/>
+              <a:round/>
+            </a:ln>
+            <a:effectLst/>
+          </c:spPr>
+          <c:invertIfNegative val="0"/>
+          <c:dLbls>
+            <c:numFmt formatCode="#,##0" sourceLinked="0"/>
+            <c:txPr>
+              <a:bodyPr/>
+              <a:lstStyle/>
+              <a:p>
+                <a:pPr>
+                  <a:defRPr b="0" i="0" strike="noStrike" sz="1200" u="none">
+                    <a:solidFill>
+                      <a:srgbClr val="000000"/>
+                    </a:solidFill>
+                    <a:latin typeface="Arial"/>
+                  </a:defRPr>
+                </a:pPr>
+              </a:p>
+            </c:txPr>
+            <c:showLegendKey val="0"/>
+            <c:showVal val="0"/>
+            <c:showCatName val="0"/>
+            <c:showSerName val="0"/>
+            <c:showPercent val="0"/>
+            <c:showBubbleSize val="0"/>
+            <c:showLeaderLines val="0"/>
+          </c:dLbls>
+          <c:marker>
+            <c:symbol val="none"/>
+            <c:size val="6"/>
+            <c:spPr>
+              <a:solidFill>
+                <a:srgbClr val="0A1C58"/>
+              </a:solidFill>
+              <a:ln w="9525" cap="flat">
+                <a:solidFill>
+                  <a:srgbClr val="847C7A"/>
+                </a:solidFill>
+                <a:prstDash val="solid"/>
+                <a:round/>
+              </a:ln>
+              <a:effectLst/>
+            </c:spPr>
+          </c:marker>
+          <c:cat>
+            <c:multiLvlStrRef>
+              <c:f>Sheet1!$A$2:$A$9</c:f>
+              <c:multiLvlStrCache>
+                <c:ptCount val="8"/>
+                <c:lvl>
+                  <c:pt idx="0">
+                    <c:v>2025</c:v>
+                  </c:pt>
+                  <c:pt idx="1">
+                    <c:v>2026</c:v>
+                  </c:pt>
+                  <c:pt idx="2">
+                    <c:v>2027</c:v>
+                  </c:pt>
+                  <c:pt idx="3">
+                    <c:v>2028</c:v>
+                  </c:pt>
+                  <c:pt idx="4">
+                    <c:v>2029</c:v>
+                  </c:pt>
+                  <c:pt idx="5">
+                    <c:v>2030</c:v>
+                  </c:pt>
+                  <c:pt idx="6">
+                    <c:v>2031</c:v>
+                  </c:pt>
+                  <c:pt idx="7">
+                    <c:v>2032</c:v>
+                  </c:pt>
+                </c:lvl>
+              </c:multiLvlStrCache>
+            </c:multiLvlStrRef>
+          </c:cat>
+          <c:val>
+            <c:numRef>
+              <c:f>Sheet1!$E$2:$E$9</c:f>
+              <c:numCache>
+                <c:formatCode>General</c:formatCode>
+                <c:ptCount val="8"/>
+                <c:pt idx="0">
+                  <c:v/>
+                </c:pt>
+                <c:pt idx="1">
+                  <c:v/>
+                </c:pt>
+                <c:pt idx="2">
+                  <c:v/>
+                </c:pt>
+                <c:pt idx="3">
+                  <c:v/>
+                </c:pt>
+                <c:pt idx="4">
+                  <c:v/>
                 </c:pt>
                 <c:pt idx="5">
                   <c:v>720</c:v>
                 </c:pt>
+                <c:pt idx="6">
+                  <c:v>740</c:v>
+                </c:pt>
+                <c:pt idx="7">
+                  <c:v>760</c:v>
+                </c:pt>
               </c:numCache>
             </c:numRef>
           </c:val>
+          <c:smooth val="0"/>
         </c:ser>
         <c:dLbls>
           <c:numFmt formatCode="#,##0" sourceLinked="0"/>
@@ -3683,11 +3961,11 @@
             <a:lstStyle/>
             <a:p>
               <a:pPr>
-                <a:defRPr b="1" i="0" strike="noStrike" sz="1300" u="none">
+                <a:defRPr b="0" i="0" strike="noStrike" sz="1200" u="none">
                   <a:solidFill>
-                    <a:srgbClr val="1A1A1A"/>
+                    <a:srgbClr val="000000"/>
                   </a:solidFill>
-                  <a:latin typeface="+mn-lt"/>
+                  <a:latin typeface="Arial"/>
                 </a:defRPr>
               </a:pPr>
             </a:p>
@@ -3700,12 +3978,11 @@
           <c:showBubbleSize val="0"/>
           <c:showLeaderLines val="0"/>
         </c:dLbls>
-        <c:gapWidth val="40"/>
-        <c:overlap val="100"/>
+        <c:marker val="1"/>
         <c:axId val="2094734554"/>
         <c:axId val="2094734552"/>
         <c:axId val="2094734556"/>
-      </c:barChart>
+      </c:lineChart>
       <c:catAx>
         <c:axId val="2094734554"/>
         <c:scaling>
@@ -3731,7 +4008,7 @@
           <a:lstStyle/>
           <a:p>
             <a:pPr>
-              <a:defRPr sz="1200" b="0" i="0" u="none" strike="noStrike">
+              <a:defRPr sz="1100" b="0" i="0" u="none" strike="noStrike">
                 <a:solidFill>
                   <a:srgbClr val="1A1A1A"/>
                 </a:solidFill>
@@ -3751,8 +4028,8 @@
         <c:axId val="2094734552"/>
         <c:scaling>
           <c:orientation val="minMax"/>
-          <c:max val="2700"/>
-          <c:min val="0"/>
+          <c:max val="1000"/>
+          <c:min val="450"/>
         </c:scaling>
         <c:delete val="1"/>
         <c:axPos val="l"/>
@@ -3796,26 +4073,6 @@
         <a:effectLst/>
       </c:spPr>
     </c:plotArea>
-    <c:legend>
-      <c:legendPos val="b"/>
-      <c:overlay val="0"/>
-      <c:txPr>
-        <a:bodyPr/>
-        <a:lstStyle/>
-        <a:p>
-          <a:pPr>
-            <a:defRPr sz="1000">
-              <a:solidFill>
-                <a:srgbClr val="1A1A1A"/>
-              </a:solidFill>
-              <a:latin typeface="+mn-lt"/>
-              <a:cs typeface="+mn-lt"/>
-            </a:defRPr>
-          </a:pPr>
-          <a:endParaRPr lang="en-US"/>
-        </a:p>
-      </c:txPr>
-    </c:legend>
     <c:plotVisOnly val="1"/>
     <c:dispBlanksAs val="span"/>
   </c:chart>
@@ -4676,7 +4933,7 @@
           <a:p>
             <a:r>
               <a:rPr lang="en-US" dirty="0"/>
-              <a:t>Cohort roll-forward (central): first visits fall 976 → 598 (2025–2030) as the last 737NG / A320ceo deliveries pass their first run; second visits, typically the heaviest, peak at 914 in 2027; third-and-later visits rise 532 → 720. Late-life engines increasingly get green-time-only restorations (model assumes 100% / 90% / 70% of due engines get a full visit at &lt;20 / 20–25 / 25+ years). Mix curve uses management's example: light job ~$6M revenue / ~$2.5M profit, heavy ~$12M / ~$3.0M; blended margin by share of jobs. Caveat: the model's broader-work share still rises from 48% to 52% through 2030, so the light-scope return is a late-cycle (2030+) effect.</a:t>
+              <a:t>Cohort roll-forward (central): first visits fall 976 → 598 (2025–2030) as the last 737NG / A320ceo deliveries pass their first run; second visits, typically the heaviest, peak at 914 in 2027; third-and-later visits rise 532 → 720. Dashed lines extend the 2029–30 slopes (-42/yr and +20/yr), which cross around 2032. Late-life engines increasingly get green-time-only restorations (model assumes 100% / 90% / 70% of due engines get a full visit at &lt;20 / 20–25 / 25+ years). Mix curve uses management's example: light job ~$6M revenue / ~$2.5M profit, heavy ~$12M / ~$3.0M; blended margin by share of jobs. Caveat: the model's broader-work share still rises from 48% to 52% through 2030, so the light-scope return is a late-cycle (2030+) effect.</a:t>
             </a:r>
             <a:endParaRPr lang="en-US" dirty="0"/>
           </a:p>
@@ -7550,7 +7807,7 @@
                   <a:schemeClr val="tx2"/>
                 </a:solidFill>
               </a:rPr>
-              <a:t>The heavy second-visit wave peaks in 2027. Late-life, lighter work follows and lifts margins.</a:t>
+              <a:t>Heavy second visits peak in 2027 while late-life, lighter visits keep rising, and they cross.</a:t>
             </a:r>
             <a:endParaRPr lang="en-US" sz="1700" dirty="0"/>
           </a:p>
@@ -7586,7 +7843,7 @@
                   <a:srgbClr val="1A1A1A"/>
                 </a:solidFill>
               </a:rPr>
-              <a:t>CFM56 Shop Visits by Visit Number</a:t>
+              <a:t>Heavy vs. Late-Life Shop Visits</a:t>
             </a:r>
             <a:endParaRPr lang="en-US" sz="1600" dirty="0"/>
           </a:p>
@@ -7623,7 +7880,7 @@
         </p:nvGraphicFramePr>
         <p:xfrm>
           <a:off x="320040" y="2103120"/>
-          <a:ext cx="4343400" cy="2880360"/>
+          <a:ext cx="4343400" cy="2834640"/>
         </p:xfrm>
         <a:graphic xmlns:a="http://schemas.openxmlformats.org/drawingml/2006/main">
           <a:graphicData uri="http://schemas.openxmlformats.org/drawingml/2006/chart">
@@ -7639,8 +7896,8 @@
         </p:nvSpPr>
         <p:spPr>
           <a:xfrm>
-            <a:off x="1709928" y="2011680"/>
-            <a:ext cx="1188720" cy="256032"/>
+            <a:off x="868680" y="2103120"/>
+            <a:ext cx="2286000" cy="256032"/>
           </a:xfrm>
           <a:prstGeom prst="rect">
             <a:avLst/>
@@ -7656,12 +7913,48 @@
               <a:buNone/>
             </a:pPr>
             <a:r>
-              <a:rPr lang="en-US" sz="1100" b="1" i="1" dirty="0">
+              <a:rPr lang="en-US" sz="1200" b="1" dirty="0">
                 <a:solidFill>
                   <a:schemeClr val="tx2"/>
                 </a:solidFill>
               </a:rPr>
-              <a:t>2nd-visit peak</a:t>
+              <a:t>Heavy 2nd visits peak</a:t>
+            </a:r>
+            <a:endParaRPr lang="en-US" sz="1200" dirty="0"/>
+          </a:p>
+        </p:txBody>
+      </p:sp>
+      <p:sp>
+        <p:nvSpPr>
+          <p:cNvPr id="8" name="Late-life label"/>
+          <p:cNvSpPr txBox="1"/>
+          <p:nvPr/>
+        </p:nvSpPr>
+        <p:spPr>
+          <a:xfrm>
+            <a:off x="868680" y="4315968"/>
+            <a:ext cx="3017520" cy="256032"/>
+          </a:xfrm>
+          <a:prstGeom prst="rect">
+            <a:avLst/>
+          </a:prstGeom>
+          <a:noFill/>
+          <a:ln/>
+        </p:spPr>
+        <p:txBody>
+          <a:bodyPr wrap="square" lIns="0" tIns="0" rIns="0" bIns="0" rtlCol="0" anchor="ctr"/>
+          <a:lstStyle/>
+          <a:p>
+            <a:pPr algn="l" indent="0" marL="0">
+              <a:buNone/>
+            </a:pPr>
+            <a:r>
+              <a:rPr lang="en-US" sz="1100" b="1" dirty="0">
+                <a:solidFill>
+                  <a:schemeClr val="accent2"/>
+                </a:solidFill>
+              </a:rPr>
+              <a:t>Late-life, lighter visits keep rising</a:t>
             </a:r>
             <a:endParaRPr lang="en-US" sz="1100" dirty="0"/>
           </a:p>
@@ -7669,7 +7962,126 @@
       </p:sp>
       <p:sp>
         <p:nvSpPr>
-          <p:cNvPr id="8" name="Mix header"/>
+          <p:cNvPr id="9" name="Crossover dot"/>
+          <p:cNvSpPr/>
+          <p:nvPr/>
+        </p:nvSpPr>
+        <p:spPr>
+          <a:xfrm>
+            <a:off x="4206240" y="3145536"/>
+            <a:ext cx="164592" cy="164592"/>
+          </a:xfrm>
+          <a:prstGeom prst="ellipse">
+            <a:avLst/>
+          </a:prstGeom>
+          <a:solidFill>
+            <a:srgbClr val="0A1C58"/>
+          </a:solidFill>
+          <a:ln w="19050">
+            <a:solidFill>
+              <a:srgbClr val="FFFFFF"/>
+            </a:solidFill>
+            <a:prstDash val="solid"/>
+          </a:ln>
+        </p:spPr>
+      </p:sp>
+      <p:sp>
+        <p:nvSpPr>
+          <p:cNvPr id="10" name="Crossover callout"/>
+          <p:cNvSpPr/>
+          <p:nvPr/>
+        </p:nvSpPr>
+        <p:spPr>
+          <a:xfrm>
+            <a:off x="3246120" y="3520440"/>
+            <a:ext cx="1371600" cy="566928"/>
+          </a:xfrm>
+          <a:prstGeom prst="roundRect">
+            <a:avLst>
+              <a:gd name="adj" fmla="val 12903"/>
+            </a:avLst>
+          </a:prstGeom>
+          <a:solidFill>
+            <a:srgbClr val="0A1C58"/>
+          </a:solidFill>
+          <a:ln>
+            <a:solidFill>
+              <a:srgbClr val="0A1C58"/>
+            </a:solidFill>
+          </a:ln>
+        </p:spPr>
+        <p:txBody>
+          <a:bodyPr wrap="square" lIns="0" tIns="0" rIns="0" bIns="0" rtlCol="0" anchor="ctr"/>
+          <a:lstStyle/>
+          <a:p>
+            <a:pPr algn="ctr" indent="0" marL="0">
+              <a:buNone/>
+            </a:pPr>
+            <a:r>
+              <a:rPr lang="en-US" sz="1100" b="1" dirty="0">
+                <a:solidFill>
+                  <a:schemeClr val="bg1"/>
+                </a:solidFill>
+              </a:rPr>
+              <a:t>Light work</a:t>
+            </a:r>
+            <a:endParaRPr lang="en-US" sz="1100" dirty="0"/>
+          </a:p>
+          <a:p>
+            <a:pPr algn="ctr" indent="0" marL="0">
+              <a:buNone/>
+            </a:pPr>
+            <a:r>
+              <a:rPr lang="en-US" sz="1100" b="1" dirty="0">
+                <a:solidFill>
+                  <a:schemeClr val="bg1"/>
+                </a:solidFill>
+              </a:rPr>
+              <a:t>overtakes ~2032</a:t>
+            </a:r>
+            <a:endParaRPr lang="en-US" sz="1100" dirty="0"/>
+          </a:p>
+        </p:txBody>
+      </p:sp>
+      <p:sp>
+        <p:nvSpPr>
+          <p:cNvPr id="11" name="Cohort caption"/>
+          <p:cNvSpPr txBox="1"/>
+          <p:nvPr/>
+        </p:nvSpPr>
+        <p:spPr>
+          <a:xfrm>
+            <a:off x="320040" y="4956048"/>
+            <a:ext cx="4343400" cy="274320"/>
+          </a:xfrm>
+          <a:prstGeom prst="rect">
+            <a:avLst/>
+          </a:prstGeom>
+          <a:noFill/>
+          <a:ln/>
+        </p:spPr>
+        <p:txBody>
+          <a:bodyPr wrap="square" lIns="0" tIns="0" rIns="0" bIns="0" rtlCol="0" anchor="ctr"/>
+          <a:lstStyle/>
+          <a:p>
+            <a:pPr algn="ctr" indent="0" marL="0">
+              <a:buNone/>
+            </a:pPr>
+            <a:r>
+              <a:rPr lang="en-US" sz="1100" i="1" dirty="0">
+                <a:solidFill>
+                  <a:schemeClr val="accent2"/>
+                </a:solidFill>
+              </a:rPr>
+              <a:t>Model through 2030; dashed = trend</a:t>
+            </a:r>
+            <a:endParaRPr lang="en-US" sz="1100" dirty="0"/>
+          </a:p>
+        </p:txBody>
+      </p:sp>
+      <p:sp>
+        <p:nvSpPr>
+          <p:cNvPr id="12" name="Mix header"/>
           <p:cNvSpPr txBox="1"/>
           <p:nvPr/>
         </p:nvSpPr>
@@ -7705,7 +8117,7 @@
       </p:sp>
       <p:sp>
         <p:nvSpPr>
-          <p:cNvPr id="9" name="Mix header rule"/>
+          <p:cNvPr id="13" name="Mix header rule"/>
           <p:cNvSpPr/>
           <p:nvPr/>
         </p:nvSpPr>
@@ -7728,7 +8140,7 @@
       </p:sp>
       <p:graphicFrame>
         <p:nvGraphicFramePr>
-          <p:cNvPr id="10" name="Mix margin chart" descr=""/>
+          <p:cNvPr id="14" name="Mix margin chart" descr=""/>
           <p:cNvGraphicFramePr/>
           <p:nvPr/>
         </p:nvGraphicFramePr>
@@ -7744,7 +8156,7 @@
       </p:graphicFrame>
       <p:sp>
         <p:nvSpPr>
-          <p:cNvPr id="11" name="Mix caption"/>
+          <p:cNvPr id="15" name="Mix caption"/>
           <p:cNvSpPr txBox="1"/>
           <p:nvPr/>
         </p:nvSpPr>
@@ -7780,7 +8192,7 @@
       </p:sp>
       <p:sp>
         <p:nvSpPr>
-          <p:cNvPr id="12" name="Takeaway"/>
+          <p:cNvPr id="16" name="Takeaway"/>
           <p:cNvSpPr txBox="1"/>
           <p:nvPr/>
         </p:nvSpPr>
@@ -7818,7 +8230,7 @@
       </p:sp>
       <p:sp>
         <p:nvSpPr>
-          <p:cNvPr id="13" name="Source"/>
+          <p:cNvPr id="17" name="Source"/>
           <p:cNvSpPr txBox="1"/>
           <p:nvPr/>
         </p:nvSpPr>

--- a/deck/FTAI_Long_Pitch.pptx
+++ b/deck/FTAI_Long_Pitch.pptx
@@ -17,9 +17,14 @@
     <p:sldId id="265" r:id="rId11"/>
     <p:sldId id="266" r:id="rId12"/>
     <p:sldId id="267" r:id="rId13"/>
+    <p:sldId id="268" r:id="rId14"/>
+    <p:sldId id="269" r:id="rId15"/>
+    <p:sldId id="270" r:id="rId16"/>
+    <p:sldId id="271" r:id="rId17"/>
+    <p:sldId id="272" r:id="rId18"/>
   </p:sldIdLst>
   <p:notesMasterIdLst>
-    <p:notesMasterId r:id="rId14"/>
+    <p:notesMasterId r:id="rId19"/>
   </p:notesMasterIdLst>
   <p:sldSz cx="9144000" cy="6858000"/>
   <p:notesSz cx="6858000" cy="9144000"/>
@@ -118,12 +123,12 @@
   <p:extLst>
     <p:ext uri="{521415D9-36F7-43E2-AB2F-B90AF26B5E84}">
       <p14:sectionLst xmlns:p14="http://schemas.microsoft.com/office/powerpoint/2010/main">
-        <p14:section name="Introduction" id="{37bf942e-6af1-2707-200b-40230c2780d9}">
+        <p14:section name="Introduction" id="{e8d0fafb-aa79-2d9e-319a-5074e0734d6e}">
           <p14:sldIdLst>
             <p14:sldId id="256"/>
           </p14:sldIdLst>
         </p14:section>
-        <p14:section name="The Opportunity" id="{10a15b37-9cb9-4872-fa71-9af9fbcfbe8e}">
+        <p14:section name="The Opportunity" id="{ffa3a2c2-6418-8007-74be-4e074fb0831f}">
           <p14:sldIdLst>
             <p14:sldId id="257"/>
             <p14:sldId id="258"/>
@@ -131,23 +136,32 @@
             <p14:sldId id="260"/>
           </p14:sldIdLst>
         </p14:section>
-        <p14:section name="Returns" id="{dedd65bb-15b8-cd2c-f9f6-ca7cf2a97fd4}">
+        <p14:section name="Returns" id="{6b03a5ca-8056-a30a-1f33-b2683c32ada5}">
           <p14:sldIdLst>
             <p14:sldId id="261"/>
           </p14:sldIdLst>
         </p14:section>
-        <p14:section name="Business Overview" id="{ea06e014-97ab-d653-53e3-f0f2e9529466}">
+        <p14:section name="Business Overview" id="{f184f02e-8139-5bf3-ce8d-ce3a5f36f9d8}">
           <p14:sldIdLst>
             <p14:sldId id="262"/>
             <p14:sldId id="263"/>
           </p14:sldIdLst>
         </p14:section>
-        <p14:section name="Thesis 1a" id="{37a6339b-33f9-ef02-eb66-78cf23d1d6e6}">
+        <p14:section name="Thesis 1a" id="{7c20b910-f9d8-2779-2ec1-ccb12651d875}">
           <p14:sldIdLst>
             <p14:sldId id="264"/>
             <p14:sldId id="265"/>
             <p14:sldId id="266"/>
             <p14:sldId id="267"/>
+          </p14:sldIdLst>
+        </p14:section>
+        <p14:section name="Thesis 1b" id="{59a5d50f-3134-8ce3-1f73-e2c1220fd11a}">
+          <p14:sldIdLst>
+            <p14:sldId id="268"/>
+            <p14:sldId id="269"/>
+            <p14:sldId id="270"/>
+            <p14:sldId id="271"/>
+            <p14:sldId id="272"/>
           </p14:sldIdLst>
         </p14:section>
       </p14:sectionLst>
@@ -1258,6 +1272,1639 @@
           <c:orientation val="minMax"/>
           <c:max val="1700"/>
           <c:min val="1000"/>
+        </c:scaling>
+        <c:delete val="1"/>
+        <c:axPos val="l"/>
+        <c:numFmt formatCode="General" sourceLinked="0"/>
+        <c:majorTickMark val="out"/>
+        <c:minorTickMark val="none"/>
+        <c:tickLblPos val="nextTo"/>
+        <c:spPr>
+          <a:ln w="12700" cap="flat">
+            <a:solidFill>
+              <a:srgbClr val="888888"/>
+            </a:solidFill>
+            <a:prstDash val="solid"/>
+            <a:round/>
+          </a:ln>
+        </c:spPr>
+        <c:txPr>
+          <a:bodyPr/>
+          <a:lstStyle/>
+          <a:p>
+            <a:pPr>
+              <a:defRPr sz="1200" b="0" i="0" u="none" strike="noStrike">
+                <a:solidFill>
+                  <a:srgbClr val="000000"/>
+                </a:solidFill>
+                <a:latin typeface="Arial"/>
+              </a:defRPr>
+            </a:pPr>
+            <a:endParaRPr lang="en-US"/>
+          </a:p>
+        </c:txPr>
+        <c:crossAx val="2094734554"/>
+        <c:crosses val="autoZero"/>
+        <c:crossBetween val="between"/>
+      </c:valAx>
+      <c:spPr>
+        <a:noFill/>
+        <a:ln>
+          <a:noFill/>
+        </a:ln>
+        <a:effectLst/>
+      </c:spPr>
+    </c:plotArea>
+    <c:plotVisOnly val="1"/>
+    <c:dispBlanksAs val="span"/>
+  </c:chart>
+  <c:spPr>
+    <a:noFill/>
+    <a:ln>
+      <a:noFill/>
+    </a:ln>
+    <a:effectLst/>
+  </c:spPr>
+  <c:externalData r:id="rId1">
+    <c:autoUpdate val="0"/>
+  </c:externalData>
+</c:chartSpace>
+</file>
+
+<file path=ppt/charts/chart13.xml><?xml version="1.0" encoding="utf-8"?>
+<c:chartSpace xmlns:c="http://schemas.openxmlformats.org/drawingml/2006/chart" xmlns:a="http://schemas.openxmlformats.org/drawingml/2006/main" xmlns:r="http://schemas.openxmlformats.org/officeDocument/2006/relationships">
+  <c:date1904 val="0"/>
+  <c:roundedCorners val="1"/>
+  <c:chart>
+    <c:autoTitleDeleted val="1"/>
+    <c:plotArea>
+      <c:layout/>
+      <c:barChart>
+        <c:barDir val="col"/>
+        <c:grouping val="stacked"/>
+        <c:varyColors val="0"/>
+        <c:ser>
+          <c:idx val="0"/>
+          <c:order val="0"/>
+          <c:tx>
+            <c:strRef>
+              <c:f>Sheet1!$B$1</c:f>
+              <c:strCache>
+                <c:ptCount val="1"/>
+                <c:pt idx="0">
+                  <c:v>Pre-COVID</c:v>
+                </c:pt>
+              </c:strCache>
+            </c:strRef>
+          </c:tx>
+          <c:spPr>
+            <a:solidFill>
+              <a:srgbClr val="B5AEA9"/>
+            </a:solidFill>
+            <a:effectLst/>
+          </c:spPr>
+          <c:invertIfNegative val="0"/>
+          <c:dLbls>
+            <c:numFmt formatCode="#,##0" sourceLinked="0"/>
+            <c:txPr>
+              <a:bodyPr/>
+              <a:lstStyle/>
+              <a:p>
+                <a:pPr>
+                  <a:defRPr b="1" i="0" strike="noStrike" sz="1300" u="none">
+                    <a:solidFill>
+                      <a:srgbClr val="1A1A1A"/>
+                    </a:solidFill>
+                    <a:latin typeface="+mn-lt"/>
+                  </a:defRPr>
+                </a:pPr>
+              </a:p>
+            </c:txPr>
+            <c:showLegendKey val="0"/>
+            <c:showVal val="0"/>
+            <c:showCatName val="0"/>
+            <c:showSerName val="0"/>
+            <c:showPercent val="0"/>
+            <c:showBubbleSize val="0"/>
+            <c:showLeaderLines val="0"/>
+          </c:dLbls>
+          <c:cat>
+            <c:multiLvlStrRef>
+              <c:f>Sheet1!$A$2:$A$3</c:f>
+              <c:multiLvlStrCache>
+                <c:ptCount val="2"/>
+                <c:lvl>
+                  <c:pt idx="0">
+                    <c:v>Pre-COVID</c:v>
+                  </c:pt>
+                  <c:pt idx="1">
+                    <c:v>Today</c:v>
+                  </c:pt>
+                </c:lvl>
+              </c:multiLvlStrCache>
+            </c:multiLvlStrRef>
+          </c:cat>
+          <c:val>
+            <c:numRef>
+              <c:f>Sheet1!$B$2:$B$3</c:f>
+              <c:numCache>
+                <c:formatCode>General</c:formatCode>
+                <c:ptCount val="2"/>
+                <c:pt idx="0">
+                  <c:v>60</c:v>
+                </c:pt>
+                <c:pt idx="1">
+                  <c:v/>
+                </c:pt>
+              </c:numCache>
+            </c:numRef>
+          </c:val>
+        </c:ser>
+        <c:ser>
+          <c:idx val="1"/>
+          <c:order val="1"/>
+          <c:tx>
+            <c:strRef>
+              <c:f>Sheet1!$C$1</c:f>
+              <c:strCache>
+                <c:ptCount val="1"/>
+                <c:pt idx="0">
+                  <c:v>Today (low)</c:v>
+                </c:pt>
+              </c:strCache>
+            </c:strRef>
+          </c:tx>
+          <c:spPr>
+            <a:solidFill>
+              <a:srgbClr val="0A1C58"/>
+            </a:solidFill>
+            <a:effectLst/>
+          </c:spPr>
+          <c:invertIfNegative val="0"/>
+          <c:dLbls>
+            <c:numFmt formatCode="#,##0" sourceLinked="0"/>
+            <c:txPr>
+              <a:bodyPr/>
+              <a:lstStyle/>
+              <a:p>
+                <a:pPr>
+                  <a:defRPr b="1" i="0" strike="noStrike" sz="1300" u="none">
+                    <a:solidFill>
+                      <a:srgbClr val="1A1A1A"/>
+                    </a:solidFill>
+                    <a:latin typeface="+mn-lt"/>
+                  </a:defRPr>
+                </a:pPr>
+              </a:p>
+            </c:txPr>
+            <c:showLegendKey val="0"/>
+            <c:showVal val="0"/>
+            <c:showCatName val="0"/>
+            <c:showSerName val="0"/>
+            <c:showPercent val="0"/>
+            <c:showBubbleSize val="0"/>
+            <c:showLeaderLines val="0"/>
+          </c:dLbls>
+          <c:cat>
+            <c:multiLvlStrRef>
+              <c:f>Sheet1!$A$2:$A$3</c:f>
+              <c:multiLvlStrCache>
+                <c:ptCount val="2"/>
+                <c:lvl>
+                  <c:pt idx="0">
+                    <c:v>Pre-COVID</c:v>
+                  </c:pt>
+                  <c:pt idx="1">
+                    <c:v>Today</c:v>
+                  </c:pt>
+                </c:lvl>
+              </c:multiLvlStrCache>
+            </c:multiLvlStrRef>
+          </c:cat>
+          <c:val>
+            <c:numRef>
+              <c:f>Sheet1!$C$2:$C$3</c:f>
+              <c:numCache>
+                <c:formatCode>General</c:formatCode>
+                <c:ptCount val="2"/>
+                <c:pt idx="0">
+                  <c:v/>
+                </c:pt>
+                <c:pt idx="1">
+                  <c:v>90</c:v>
+                </c:pt>
+              </c:numCache>
+            </c:numRef>
+          </c:val>
+        </c:ser>
+        <c:ser>
+          <c:idx val="2"/>
+          <c:order val="2"/>
+          <c:tx>
+            <c:strRef>
+              <c:f>Sheet1!$D$1</c:f>
+              <c:strCache>
+                <c:ptCount val="1"/>
+                <c:pt idx="0">
+                  <c:v>Today (range)</c:v>
+                </c:pt>
+              </c:strCache>
+            </c:strRef>
+          </c:tx>
+          <c:spPr>
+            <a:solidFill>
+              <a:srgbClr val="3B4C82"/>
+            </a:solidFill>
+            <a:effectLst/>
+          </c:spPr>
+          <c:invertIfNegative val="0"/>
+          <c:dLbls>
+            <c:numFmt formatCode="#,##0" sourceLinked="0"/>
+            <c:txPr>
+              <a:bodyPr/>
+              <a:lstStyle/>
+              <a:p>
+                <a:pPr>
+                  <a:defRPr b="1" i="0" strike="noStrike" sz="1300" u="none">
+                    <a:solidFill>
+                      <a:srgbClr val="1A1A1A"/>
+                    </a:solidFill>
+                    <a:latin typeface="+mn-lt"/>
+                  </a:defRPr>
+                </a:pPr>
+              </a:p>
+            </c:txPr>
+            <c:showLegendKey val="0"/>
+            <c:showVal val="0"/>
+            <c:showCatName val="0"/>
+            <c:showSerName val="0"/>
+            <c:showPercent val="0"/>
+            <c:showBubbleSize val="0"/>
+            <c:showLeaderLines val="0"/>
+          </c:dLbls>
+          <c:cat>
+            <c:multiLvlStrRef>
+              <c:f>Sheet1!$A$2:$A$3</c:f>
+              <c:multiLvlStrCache>
+                <c:ptCount val="2"/>
+                <c:lvl>
+                  <c:pt idx="0">
+                    <c:v>Pre-COVID</c:v>
+                  </c:pt>
+                  <c:pt idx="1">
+                    <c:v>Today</c:v>
+                  </c:pt>
+                </c:lvl>
+              </c:multiLvlStrCache>
+            </c:multiLvlStrRef>
+          </c:cat>
+          <c:val>
+            <c:numRef>
+              <c:f>Sheet1!$D$2:$D$3</c:f>
+              <c:numCache>
+                <c:formatCode>General</c:formatCode>
+                <c:ptCount val="2"/>
+                <c:pt idx="0">
+                  <c:v/>
+                </c:pt>
+                <c:pt idx="1">
+                  <c:v>30</c:v>
+                </c:pt>
+              </c:numCache>
+            </c:numRef>
+          </c:val>
+        </c:ser>
+        <c:dLbls>
+          <c:numFmt formatCode="#,##0" sourceLinked="0"/>
+          <c:txPr>
+            <a:bodyPr/>
+            <a:lstStyle/>
+            <a:p>
+              <a:pPr>
+                <a:defRPr b="1" i="0" strike="noStrike" sz="1300" u="none">
+                  <a:solidFill>
+                    <a:srgbClr val="1A1A1A"/>
+                  </a:solidFill>
+                  <a:latin typeface="+mn-lt"/>
+                </a:defRPr>
+              </a:pPr>
+            </a:p>
+          </c:txPr>
+          <c:showLegendKey val="0"/>
+          <c:showVal val="0"/>
+          <c:showCatName val="0"/>
+          <c:showSerName val="0"/>
+          <c:showPercent val="0"/>
+          <c:showBubbleSize val="0"/>
+          <c:showLeaderLines val="0"/>
+        </c:dLbls>
+        <c:gapWidth val="45"/>
+        <c:overlap val="100"/>
+        <c:axId val="2094734554"/>
+        <c:axId val="2094734552"/>
+        <c:axId val="2094734556"/>
+      </c:barChart>
+      <c:catAx>
+        <c:axId val="2094734554"/>
+        <c:scaling>
+          <c:orientation val="minMax"/>
+        </c:scaling>
+        <c:delete val="0"/>
+        <c:axPos val="b"/>
+        <c:numFmt formatCode="General" sourceLinked="1"/>
+        <c:majorTickMark val="out"/>
+        <c:minorTickMark val="none"/>
+        <c:tickLblPos val="low"/>
+        <c:spPr>
+          <a:ln w="12700" cap="flat">
+            <a:solidFill>
+              <a:srgbClr val="BFBFBF"/>
+            </a:solidFill>
+            <a:prstDash val="solid"/>
+            <a:round/>
+          </a:ln>
+        </c:spPr>
+        <c:txPr>
+          <a:bodyPr/>
+          <a:lstStyle/>
+          <a:p>
+            <a:pPr>
+              <a:defRPr sz="1200" b="0" i="0" u="none" strike="noStrike">
+                <a:solidFill>
+                  <a:srgbClr val="1A1A1A"/>
+                </a:solidFill>
+                <a:latin typeface="+mn-lt"/>
+              </a:defRPr>
+            </a:pPr>
+            <a:endParaRPr lang="en-US"/>
+          </a:p>
+        </c:txPr>
+        <c:crossAx val="2094734552"/>
+        <c:crosses val="autoZero"/>
+        <c:auto val="1"/>
+        <c:lblAlgn val="ctr"/>
+        <c:noMultiLvlLbl val="1"/>
+      </c:catAx>
+      <c:valAx>
+        <c:axId val="2094734552"/>
+        <c:scaling>
+          <c:orientation val="minMax"/>
+          <c:max val="140"/>
+          <c:min val="0"/>
+        </c:scaling>
+        <c:delete val="1"/>
+        <c:axPos val="l"/>
+        <c:numFmt formatCode="General" sourceLinked="0"/>
+        <c:majorTickMark val="out"/>
+        <c:minorTickMark val="none"/>
+        <c:tickLblPos val="nextTo"/>
+        <c:spPr>
+          <a:ln w="12700" cap="flat">
+            <a:solidFill>
+              <a:srgbClr val="888888"/>
+            </a:solidFill>
+            <a:prstDash val="solid"/>
+            <a:round/>
+          </a:ln>
+        </c:spPr>
+        <c:txPr>
+          <a:bodyPr/>
+          <a:lstStyle/>
+          <a:p>
+            <a:pPr>
+              <a:defRPr sz="1200" b="0" i="0" u="none" strike="noStrike">
+                <a:solidFill>
+                  <a:srgbClr val="000000"/>
+                </a:solidFill>
+                <a:latin typeface="Arial"/>
+              </a:defRPr>
+            </a:pPr>
+            <a:endParaRPr lang="en-US"/>
+          </a:p>
+        </c:txPr>
+        <c:crossAx val="2094734554"/>
+        <c:crosses val="autoZero"/>
+        <c:crossBetween val="between"/>
+      </c:valAx>
+      <c:spPr>
+        <a:noFill/>
+        <a:ln>
+          <a:noFill/>
+        </a:ln>
+        <a:effectLst/>
+      </c:spPr>
+    </c:plotArea>
+    <c:plotVisOnly val="1"/>
+    <c:dispBlanksAs val="span"/>
+  </c:chart>
+  <c:spPr>
+    <a:noFill/>
+    <a:ln>
+      <a:noFill/>
+    </a:ln>
+    <a:effectLst/>
+  </c:spPr>
+  <c:externalData r:id="rId1">
+    <c:autoUpdate val="0"/>
+  </c:externalData>
+</c:chartSpace>
+</file>
+
+<file path=ppt/charts/chart14.xml><?xml version="1.0" encoding="utf-8"?>
+<c:chartSpace xmlns:c="http://schemas.openxmlformats.org/drawingml/2006/chart" xmlns:a="http://schemas.openxmlformats.org/drawingml/2006/main" xmlns:r="http://schemas.openxmlformats.org/officeDocument/2006/relationships">
+  <c:date1904 val="0"/>
+  <c:roundedCorners val="1"/>
+  <c:chart>
+    <c:autoTitleDeleted val="1"/>
+    <c:plotArea>
+      <c:layout/>
+      <c:barChart>
+        <c:barDir val="col"/>
+        <c:grouping val="clustered"/>
+        <c:varyColors val="0"/>
+        <c:ser>
+          <c:idx val="0"/>
+          <c:order val="0"/>
+          <c:tx>
+            <c:strRef>
+              <c:f>Sheet1!$B$1</c:f>
+              <c:strCache>
+                <c:ptCount val="1"/>
+                <c:pt idx="0">
+                  <c:v>LEAP installed base</c:v>
+                </c:pt>
+              </c:strCache>
+            </c:strRef>
+          </c:tx>
+          <c:spPr>
+            <a:solidFill>
+              <a:srgbClr val="0A1C58"/>
+            </a:solidFill>
+            <a:effectLst/>
+          </c:spPr>
+          <c:invertIfNegative val="0"/>
+          <c:dLbls>
+            <c:numFmt formatCode="0&quot;x&quot;" sourceLinked="0"/>
+            <c:txPr>
+              <a:bodyPr/>
+              <a:lstStyle/>
+              <a:p>
+                <a:pPr>
+                  <a:defRPr b="1" i="0" strike="noStrike" sz="1600" u="none">
+                    <a:solidFill>
+                      <a:srgbClr val="1A1A1A"/>
+                    </a:solidFill>
+                    <a:latin typeface="+mn-lt"/>
+                  </a:defRPr>
+                </a:pPr>
+              </a:p>
+            </c:txPr>
+            <c:showLegendKey val="0"/>
+            <c:showVal val="1"/>
+            <c:showCatName val="0"/>
+            <c:showSerName val="0"/>
+            <c:showPercent val="0"/>
+            <c:showBubbleSize val="0"/>
+            <c:showLeaderLines val="0"/>
+          </c:dLbls>
+          <c:cat>
+            <c:multiLvlStrRef>
+              <c:f>Sheet1!$A$2:$A$3</c:f>
+              <c:multiLvlStrCache>
+                <c:ptCount val="2"/>
+                <c:lvl>
+                  <c:pt idx="0">
+                    <c:v>2024</c:v>
+                  </c:pt>
+                  <c:pt idx="1">
+                    <c:v>2030E</c:v>
+                  </c:pt>
+                </c:lvl>
+              </c:multiLvlStrCache>
+            </c:multiLvlStrRef>
+          </c:cat>
+          <c:val>
+            <c:numRef>
+              <c:f>Sheet1!$B$2:$B$3</c:f>
+              <c:numCache>
+                <c:formatCode>General</c:formatCode>
+                <c:ptCount val="2"/>
+                <c:pt idx="0">
+                  <c:v>1</c:v>
+                </c:pt>
+                <c:pt idx="1">
+                  <c:v>3</c:v>
+                </c:pt>
+              </c:numCache>
+            </c:numRef>
+          </c:val>
+        </c:ser>
+        <c:dLbls>
+          <c:numFmt formatCode="0&quot;x&quot;" sourceLinked="0"/>
+          <c:txPr>
+            <a:bodyPr/>
+            <a:lstStyle/>
+            <a:p>
+              <a:pPr>
+                <a:defRPr b="1" i="0" strike="noStrike" sz="1600" u="none">
+                  <a:solidFill>
+                    <a:srgbClr val="1A1A1A"/>
+                  </a:solidFill>
+                  <a:latin typeface="+mn-lt"/>
+                </a:defRPr>
+              </a:pPr>
+            </a:p>
+          </c:txPr>
+          <c:showLegendKey val="0"/>
+          <c:showVal val="1"/>
+          <c:showCatName val="0"/>
+          <c:showSerName val="0"/>
+          <c:showPercent val="0"/>
+          <c:showBubbleSize val="0"/>
+          <c:showLeaderLines val="0"/>
+        </c:dLbls>
+        <c:gapWidth val="45"/>
+        <c:overlap val="0"/>
+        <c:axId val="2094734554"/>
+        <c:axId val="2094734552"/>
+        <c:axId val="2094734556"/>
+      </c:barChart>
+      <c:catAx>
+        <c:axId val="2094734554"/>
+        <c:scaling>
+          <c:orientation val="minMax"/>
+        </c:scaling>
+        <c:delete val="0"/>
+        <c:axPos val="b"/>
+        <c:numFmt formatCode="General" sourceLinked="1"/>
+        <c:majorTickMark val="out"/>
+        <c:minorTickMark val="none"/>
+        <c:tickLblPos val="low"/>
+        <c:spPr>
+          <a:ln w="12700" cap="flat">
+            <a:solidFill>
+              <a:srgbClr val="BFBFBF"/>
+            </a:solidFill>
+            <a:prstDash val="solid"/>
+            <a:round/>
+          </a:ln>
+        </c:spPr>
+        <c:txPr>
+          <a:bodyPr/>
+          <a:lstStyle/>
+          <a:p>
+            <a:pPr>
+              <a:defRPr sz="1200" b="0" i="0" u="none" strike="noStrike">
+                <a:solidFill>
+                  <a:srgbClr val="1A1A1A"/>
+                </a:solidFill>
+                <a:latin typeface="+mn-lt"/>
+              </a:defRPr>
+            </a:pPr>
+            <a:endParaRPr lang="en-US"/>
+          </a:p>
+        </c:txPr>
+        <c:crossAx val="2094734552"/>
+        <c:crosses val="autoZero"/>
+        <c:auto val="1"/>
+        <c:lblAlgn val="ctr"/>
+        <c:noMultiLvlLbl val="1"/>
+      </c:catAx>
+      <c:valAx>
+        <c:axId val="2094734552"/>
+        <c:scaling>
+          <c:orientation val="minMax"/>
+          <c:max val="3.6"/>
+          <c:min val="0"/>
+        </c:scaling>
+        <c:delete val="1"/>
+        <c:axPos val="l"/>
+        <c:numFmt formatCode="General" sourceLinked="0"/>
+        <c:majorTickMark val="out"/>
+        <c:minorTickMark val="none"/>
+        <c:tickLblPos val="nextTo"/>
+        <c:spPr>
+          <a:ln w="12700" cap="flat">
+            <a:solidFill>
+              <a:srgbClr val="888888"/>
+            </a:solidFill>
+            <a:prstDash val="solid"/>
+            <a:round/>
+          </a:ln>
+        </c:spPr>
+        <c:txPr>
+          <a:bodyPr/>
+          <a:lstStyle/>
+          <a:p>
+            <a:pPr>
+              <a:defRPr sz="1200" b="0" i="0" u="none" strike="noStrike">
+                <a:solidFill>
+                  <a:srgbClr val="000000"/>
+                </a:solidFill>
+                <a:latin typeface="Arial"/>
+              </a:defRPr>
+            </a:pPr>
+            <a:endParaRPr lang="en-US"/>
+          </a:p>
+        </c:txPr>
+        <c:crossAx val="2094734554"/>
+        <c:crosses val="autoZero"/>
+        <c:crossBetween val="between"/>
+      </c:valAx>
+      <c:spPr>
+        <a:noFill/>
+        <a:ln>
+          <a:noFill/>
+        </a:ln>
+        <a:effectLst/>
+      </c:spPr>
+    </c:plotArea>
+    <c:plotVisOnly val="1"/>
+    <c:dispBlanksAs val="span"/>
+  </c:chart>
+  <c:spPr>
+    <a:noFill/>
+    <a:ln>
+      <a:noFill/>
+    </a:ln>
+    <a:effectLst/>
+  </c:spPr>
+  <c:externalData r:id="rId1">
+    <c:autoUpdate val="0"/>
+  </c:externalData>
+</c:chartSpace>
+</file>
+
+<file path=ppt/charts/chart15.xml><?xml version="1.0" encoding="utf-8"?>
+<c:chartSpace xmlns:c="http://schemas.openxmlformats.org/drawingml/2006/chart" xmlns:a="http://schemas.openxmlformats.org/drawingml/2006/main" xmlns:r="http://schemas.openxmlformats.org/officeDocument/2006/relationships">
+  <c:date1904 val="0"/>
+  <c:roundedCorners val="1"/>
+  <c:chart>
+    <c:autoTitleDeleted val="1"/>
+    <c:plotArea>
+      <c:layout/>
+      <c:barChart>
+        <c:barDir val="col"/>
+        <c:grouping val="stacked"/>
+        <c:varyColors val="0"/>
+        <c:ser>
+          <c:idx val="0"/>
+          <c:order val="0"/>
+          <c:tx>
+            <c:strRef>
+              <c:f>Sheet1!$B$1</c:f>
+              <c:strCache>
+                <c:ptCount val="1"/>
+                <c:pt idx="0">
+                  <c:v>Output</c:v>
+                </c:pt>
+              </c:strCache>
+            </c:strRef>
+          </c:tx>
+          <c:spPr>
+            <a:solidFill>
+              <a:srgbClr val="0A1C58"/>
+            </a:solidFill>
+            <a:effectLst/>
+          </c:spPr>
+          <c:invertIfNegative val="0"/>
+          <c:dLbls>
+            <c:numFmt formatCode="#,##0;;;" sourceLinked="0"/>
+            <c:txPr>
+              <a:bodyPr/>
+              <a:lstStyle/>
+              <a:p>
+                <a:pPr>
+                  <a:defRPr b="1" i="0" strike="noStrike" sz="1300" u="none">
+                    <a:solidFill>
+                      <a:srgbClr val="FFFFFF"/>
+                    </a:solidFill>
+                    <a:latin typeface="+mn-lt"/>
+                  </a:defRPr>
+                </a:pPr>
+              </a:p>
+            </c:txPr>
+            <c:dLblPos val="inEnd"/>
+            <c:showLegendKey val="0"/>
+            <c:showVal val="1"/>
+            <c:showCatName val="0"/>
+            <c:showSerName val="0"/>
+            <c:showPercent val="0"/>
+            <c:showBubbleSize val="0"/>
+            <c:showLeaderLines val="0"/>
+          </c:dLbls>
+          <c:cat>
+            <c:multiLvlStrRef>
+              <c:f>Sheet1!$A$2:$A$4</c:f>
+              <c:multiLvlStrCache>
+                <c:ptCount val="3"/>
+                <c:lvl>
+                  <c:pt idx="0">
+                    <c:v>2025</c:v>
+                  </c:pt>
+                  <c:pt idx="1">
+                    <c:v>2026E</c:v>
+                  </c:pt>
+                  <c:pt idx="2">
+                    <c:v>2027E</c:v>
+                  </c:pt>
+                </c:lvl>
+              </c:multiLvlStrCache>
+            </c:multiLvlStrRef>
+          </c:cat>
+          <c:val>
+            <c:numRef>
+              <c:f>Sheet1!$B$2:$B$4</c:f>
+              <c:numCache>
+                <c:formatCode>General</c:formatCode>
+                <c:ptCount val="3"/>
+                <c:pt idx="0">
+                  <c:v>757</c:v>
+                </c:pt>
+                <c:pt idx="1">
+                  <c:v>1200</c:v>
+                </c:pt>
+                <c:pt idx="2">
+                  <c:v>1700</c:v>
+                </c:pt>
+              </c:numCache>
+            </c:numRef>
+          </c:val>
+        </c:ser>
+        <c:ser>
+          <c:idx val="1"/>
+          <c:order val="1"/>
+          <c:tx>
+            <c:strRef>
+              <c:f>Sheet1!$C$1</c:f>
+              <c:strCache>
+                <c:ptCount val="1"/>
+                <c:pt idx="0">
+                  <c:v>Unused capacity</c:v>
+                </c:pt>
+              </c:strCache>
+            </c:strRef>
+          </c:tx>
+          <c:spPr>
+            <a:solidFill>
+              <a:srgbClr val="B5AEA9"/>
+            </a:solidFill>
+            <a:effectLst/>
+          </c:spPr>
+          <c:invertIfNegative val="0"/>
+          <c:dLbls>
+            <c:numFmt formatCode="#,##0;;;" sourceLinked="0"/>
+            <c:txPr>
+              <a:bodyPr/>
+              <a:lstStyle/>
+              <a:p>
+                <a:pPr>
+                  <a:defRPr b="1" i="0" strike="noStrike" sz="1300" u="none">
+                    <a:solidFill>
+                      <a:srgbClr val="FFFFFF"/>
+                    </a:solidFill>
+                    <a:latin typeface="+mn-lt"/>
+                  </a:defRPr>
+                </a:pPr>
+              </a:p>
+            </c:txPr>
+            <c:dLblPos val="inEnd"/>
+            <c:showLegendKey val="0"/>
+            <c:showVal val="1"/>
+            <c:showCatName val="0"/>
+            <c:showSerName val="0"/>
+            <c:showPercent val="0"/>
+            <c:showBubbleSize val="0"/>
+            <c:showLeaderLines val="0"/>
+          </c:dLbls>
+          <c:cat>
+            <c:multiLvlStrRef>
+              <c:f>Sheet1!$A$2:$A$4</c:f>
+              <c:multiLvlStrCache>
+                <c:ptCount val="3"/>
+                <c:lvl>
+                  <c:pt idx="0">
+                    <c:v>2025</c:v>
+                  </c:pt>
+                  <c:pt idx="1">
+                    <c:v>2026E</c:v>
+                  </c:pt>
+                  <c:pt idx="2">
+                    <c:v>2027E</c:v>
+                  </c:pt>
+                </c:lvl>
+              </c:multiLvlStrCache>
+            </c:multiLvlStrRef>
+          </c:cat>
+          <c:val>
+            <c:numRef>
+              <c:f>Sheet1!$C$2:$C$4</c:f>
+              <c:numCache>
+                <c:formatCode>General</c:formatCode>
+                <c:ptCount val="3"/>
+                <c:pt idx="0">
+                  <c:v/>
+                </c:pt>
+                <c:pt idx="1">
+                  <c:v>1800</c:v>
+                </c:pt>
+                <c:pt idx="2">
+                  <c:v>1300</c:v>
+                </c:pt>
+              </c:numCache>
+            </c:numRef>
+          </c:val>
+        </c:ser>
+        <c:dLbls>
+          <c:numFmt formatCode="#,##0;;;" sourceLinked="0"/>
+          <c:txPr>
+            <a:bodyPr/>
+            <a:lstStyle/>
+            <a:p>
+              <a:pPr>
+                <a:defRPr b="1" i="0" strike="noStrike" sz="1300" u="none">
+                  <a:solidFill>
+                    <a:srgbClr val="FFFFFF"/>
+                  </a:solidFill>
+                  <a:latin typeface="+mn-lt"/>
+                </a:defRPr>
+              </a:pPr>
+            </a:p>
+          </c:txPr>
+          <c:dLblPos val="inEnd"/>
+          <c:showLegendKey val="0"/>
+          <c:showVal val="1"/>
+          <c:showCatName val="0"/>
+          <c:showSerName val="0"/>
+          <c:showPercent val="0"/>
+          <c:showBubbleSize val="0"/>
+          <c:showLeaderLines val="0"/>
+        </c:dLbls>
+        <c:gapWidth val="45"/>
+        <c:overlap val="100"/>
+        <c:axId val="2094734554"/>
+        <c:axId val="2094734552"/>
+        <c:axId val="2094734556"/>
+      </c:barChart>
+      <c:catAx>
+        <c:axId val="2094734554"/>
+        <c:scaling>
+          <c:orientation val="minMax"/>
+        </c:scaling>
+        <c:delete val="0"/>
+        <c:axPos val="b"/>
+        <c:numFmt formatCode="General" sourceLinked="1"/>
+        <c:majorTickMark val="out"/>
+        <c:minorTickMark val="none"/>
+        <c:tickLblPos val="low"/>
+        <c:spPr>
+          <a:ln w="12700" cap="flat">
+            <a:solidFill>
+              <a:srgbClr val="BFBFBF"/>
+            </a:solidFill>
+            <a:prstDash val="solid"/>
+            <a:round/>
+          </a:ln>
+        </c:spPr>
+        <c:txPr>
+          <a:bodyPr/>
+          <a:lstStyle/>
+          <a:p>
+            <a:pPr>
+              <a:defRPr sz="1200" b="0" i="0" u="none" strike="noStrike">
+                <a:solidFill>
+                  <a:srgbClr val="1A1A1A"/>
+                </a:solidFill>
+                <a:latin typeface="+mn-lt"/>
+              </a:defRPr>
+            </a:pPr>
+            <a:endParaRPr lang="en-US"/>
+          </a:p>
+        </c:txPr>
+        <c:crossAx val="2094734552"/>
+        <c:crosses val="autoZero"/>
+        <c:auto val="1"/>
+        <c:lblAlgn val="ctr"/>
+        <c:noMultiLvlLbl val="1"/>
+      </c:catAx>
+      <c:valAx>
+        <c:axId val="2094734552"/>
+        <c:scaling>
+          <c:orientation val="minMax"/>
+          <c:max val="3300"/>
+          <c:min val="0"/>
+        </c:scaling>
+        <c:delete val="1"/>
+        <c:axPos val="l"/>
+        <c:numFmt formatCode="General" sourceLinked="0"/>
+        <c:majorTickMark val="out"/>
+        <c:minorTickMark val="none"/>
+        <c:tickLblPos val="nextTo"/>
+        <c:spPr>
+          <a:ln w="12700" cap="flat">
+            <a:solidFill>
+              <a:srgbClr val="888888"/>
+            </a:solidFill>
+            <a:prstDash val="solid"/>
+            <a:round/>
+          </a:ln>
+        </c:spPr>
+        <c:txPr>
+          <a:bodyPr/>
+          <a:lstStyle/>
+          <a:p>
+            <a:pPr>
+              <a:defRPr sz="1200" b="0" i="0" u="none" strike="noStrike">
+                <a:solidFill>
+                  <a:srgbClr val="000000"/>
+                </a:solidFill>
+                <a:latin typeface="Arial"/>
+              </a:defRPr>
+            </a:pPr>
+            <a:endParaRPr lang="en-US"/>
+          </a:p>
+        </c:txPr>
+        <c:crossAx val="2094734554"/>
+        <c:crosses val="autoZero"/>
+        <c:crossBetween val="between"/>
+      </c:valAx>
+      <c:spPr>
+        <a:noFill/>
+        <a:ln>
+          <a:noFill/>
+        </a:ln>
+        <a:effectLst/>
+      </c:spPr>
+    </c:plotArea>
+    <c:plotVisOnly val="1"/>
+    <c:dispBlanksAs val="span"/>
+  </c:chart>
+  <c:spPr>
+    <a:noFill/>
+    <a:ln>
+      <a:noFill/>
+    </a:ln>
+    <a:effectLst/>
+  </c:spPr>
+  <c:externalData r:id="rId1">
+    <c:autoUpdate val="0"/>
+  </c:externalData>
+</c:chartSpace>
+</file>
+
+<file path=ppt/charts/chart16.xml><?xml version="1.0" encoding="utf-8"?>
+<c:chartSpace xmlns:c="http://schemas.openxmlformats.org/drawingml/2006/chart" xmlns:a="http://schemas.openxmlformats.org/drawingml/2006/main" xmlns:r="http://schemas.openxmlformats.org/officeDocument/2006/relationships">
+  <c:date1904 val="0"/>
+  <c:roundedCorners val="1"/>
+  <c:chart>
+    <c:autoTitleDeleted val="1"/>
+    <c:plotArea>
+      <c:layout/>
+      <c:barChart>
+        <c:barDir val="col"/>
+        <c:grouping val="clustered"/>
+        <c:varyColors val="0"/>
+        <c:ser>
+          <c:idx val="0"/>
+          <c:order val="0"/>
+          <c:tx>
+            <c:strRef>
+              <c:f>Sheet1!$B$1</c:f>
+              <c:strCache>
+                <c:ptCount val="1"/>
+                <c:pt idx="0">
+                  <c:v>Reported</c:v>
+                </c:pt>
+              </c:strCache>
+            </c:strRef>
+          </c:tx>
+          <c:spPr>
+            <a:solidFill>
+              <a:srgbClr val="0A1C58"/>
+            </a:solidFill>
+            <a:effectLst/>
+          </c:spPr>
+          <c:invertIfNegative val="0"/>
+          <c:dLbls>
+            <c:numFmt formatCode="0%" sourceLinked="0"/>
+            <c:txPr>
+              <a:bodyPr/>
+              <a:lstStyle/>
+              <a:p>
+                <a:pPr>
+                  <a:defRPr b="1" i="0" strike="noStrike" sz="1100" u="none">
+                    <a:solidFill>
+                      <a:srgbClr val="1A1A1A"/>
+                    </a:solidFill>
+                    <a:latin typeface="+mn-lt"/>
+                  </a:defRPr>
+                </a:pPr>
+              </a:p>
+            </c:txPr>
+            <c:showLegendKey val="0"/>
+            <c:showVal val="1"/>
+            <c:showCatName val="0"/>
+            <c:showSerName val="0"/>
+            <c:showPercent val="0"/>
+            <c:showBubbleSize val="0"/>
+            <c:showLeaderLines val="0"/>
+          </c:dLbls>
+          <c:cat>
+            <c:multiLvlStrRef>
+              <c:f>Sheet1!$A$2:$A$8</c:f>
+              <c:multiLvlStrCache>
+                <c:ptCount val="7"/>
+                <c:lvl>
+                  <c:pt idx="0">
+                    <c:v>2024</c:v>
+                  </c:pt>
+                  <c:pt idx="1">
+                    <c:v>2025</c:v>
+                  </c:pt>
+                  <c:pt idx="2">
+                    <c:v>2026E</c:v>
+                  </c:pt>
+                  <c:pt idx="3">
+                    <c:v>2027E</c:v>
+                  </c:pt>
+                  <c:pt idx="4">
+                    <c:v>2028E</c:v>
+                  </c:pt>
+                  <c:pt idx="5">
+                    <c:v>2029E</c:v>
+                  </c:pt>
+                  <c:pt idx="6">
+                    <c:v>2030E</c:v>
+                  </c:pt>
+                </c:lvl>
+              </c:multiLvlStrCache>
+            </c:multiLvlStrRef>
+          </c:cat>
+          <c:val>
+            <c:numRef>
+              <c:f>Sheet1!$B$2:$B$8</c:f>
+              <c:numCache>
+                <c:formatCode>General</c:formatCode>
+                <c:ptCount val="7"/>
+                <c:pt idx="0">
+                  <c:v>0.04</c:v>
+                </c:pt>
+                <c:pt idx="1">
+                  <c:v>0.08</c:v>
+                </c:pt>
+                <c:pt idx="2">
+                  <c:v/>
+                </c:pt>
+                <c:pt idx="3">
+                  <c:v/>
+                </c:pt>
+                <c:pt idx="4">
+                  <c:v/>
+                </c:pt>
+                <c:pt idx="5">
+                  <c:v/>
+                </c:pt>
+                <c:pt idx="6">
+                  <c:v/>
+                </c:pt>
+              </c:numCache>
+            </c:numRef>
+          </c:val>
+        </c:ser>
+        <c:ser>
+          <c:idx val="1"/>
+          <c:order val="1"/>
+          <c:tx>
+            <c:strRef>
+              <c:f>Sheet1!$C$1</c:f>
+              <c:strCache>
+                <c:ptCount val="1"/>
+                <c:pt idx="0">
+                  <c:v>GPS model</c:v>
+                </c:pt>
+              </c:strCache>
+            </c:strRef>
+          </c:tx>
+          <c:spPr>
+            <a:solidFill>
+              <a:srgbClr val="B5AEA9"/>
+            </a:solidFill>
+            <a:effectLst/>
+          </c:spPr>
+          <c:invertIfNegative val="0"/>
+          <c:dLbls>
+            <c:numFmt formatCode="0%" sourceLinked="0"/>
+            <c:txPr>
+              <a:bodyPr/>
+              <a:lstStyle/>
+              <a:p>
+                <a:pPr>
+                  <a:defRPr b="1" i="0" strike="noStrike" sz="1100" u="none">
+                    <a:solidFill>
+                      <a:srgbClr val="1A1A1A"/>
+                    </a:solidFill>
+                    <a:latin typeface="+mn-lt"/>
+                  </a:defRPr>
+                </a:pPr>
+              </a:p>
+            </c:txPr>
+            <c:showLegendKey val="0"/>
+            <c:showVal val="1"/>
+            <c:showCatName val="0"/>
+            <c:showSerName val="0"/>
+            <c:showPercent val="0"/>
+            <c:showBubbleSize val="0"/>
+            <c:showLeaderLines val="0"/>
+          </c:dLbls>
+          <c:cat>
+            <c:multiLvlStrRef>
+              <c:f>Sheet1!$A$2:$A$8</c:f>
+              <c:multiLvlStrCache>
+                <c:ptCount val="7"/>
+                <c:lvl>
+                  <c:pt idx="0">
+                    <c:v>2024</c:v>
+                  </c:pt>
+                  <c:pt idx="1">
+                    <c:v>2025</c:v>
+                  </c:pt>
+                  <c:pt idx="2">
+                    <c:v>2026E</c:v>
+                  </c:pt>
+                  <c:pt idx="3">
+                    <c:v>2027E</c:v>
+                  </c:pt>
+                  <c:pt idx="4">
+                    <c:v>2028E</c:v>
+                  </c:pt>
+                  <c:pt idx="5">
+                    <c:v>2029E</c:v>
+                  </c:pt>
+                  <c:pt idx="6">
+                    <c:v>2030E</c:v>
+                  </c:pt>
+                </c:lvl>
+              </c:multiLvlStrCache>
+            </c:multiLvlStrRef>
+          </c:cat>
+          <c:val>
+            <c:numRef>
+              <c:f>Sheet1!$C$2:$C$8</c:f>
+              <c:numCache>
+                <c:formatCode>General</c:formatCode>
+                <c:ptCount val="7"/>
+                <c:pt idx="0">
+                  <c:v/>
+                </c:pt>
+                <c:pt idx="1">
+                  <c:v/>
+                </c:pt>
+                <c:pt idx="2">
+                  <c:v>0.124</c:v>
+                </c:pt>
+                <c:pt idx="3">
+                  <c:v>0.168</c:v>
+                </c:pt>
+                <c:pt idx="4">
+                  <c:v>0.19</c:v>
+                </c:pt>
+                <c:pt idx="5">
+                  <c:v>0.195</c:v>
+                </c:pt>
+                <c:pt idx="6">
+                  <c:v>0.2</c:v>
+                </c:pt>
+              </c:numCache>
+            </c:numRef>
+          </c:val>
+        </c:ser>
+        <c:dLbls>
+          <c:numFmt formatCode="0%" sourceLinked="0"/>
+          <c:txPr>
+            <a:bodyPr/>
+            <a:lstStyle/>
+            <a:p>
+              <a:pPr>
+                <a:defRPr b="1" i="0" strike="noStrike" sz="1100" u="none">
+                  <a:solidFill>
+                    <a:srgbClr val="1A1A1A"/>
+                  </a:solidFill>
+                  <a:latin typeface="+mn-lt"/>
+                </a:defRPr>
+              </a:pPr>
+            </a:p>
+          </c:txPr>
+          <c:showLegendKey val="0"/>
+          <c:showVal val="1"/>
+          <c:showCatName val="0"/>
+          <c:showSerName val="0"/>
+          <c:showPercent val="0"/>
+          <c:showBubbleSize val="0"/>
+          <c:showLeaderLines val="0"/>
+        </c:dLbls>
+        <c:gapWidth val="35"/>
+        <c:overlap val="100"/>
+        <c:axId val="2094734554"/>
+        <c:axId val="2094734552"/>
+        <c:axId val="2094734556"/>
+      </c:barChart>
+      <c:catAx>
+        <c:axId val="2094734554"/>
+        <c:scaling>
+          <c:orientation val="minMax"/>
+        </c:scaling>
+        <c:delete val="0"/>
+        <c:axPos val="b"/>
+        <c:numFmt formatCode="General" sourceLinked="1"/>
+        <c:majorTickMark val="out"/>
+        <c:minorTickMark val="none"/>
+        <c:tickLblPos val="low"/>
+        <c:spPr>
+          <a:ln w="12700" cap="flat">
+            <a:solidFill>
+              <a:srgbClr val="BFBFBF"/>
+            </a:solidFill>
+            <a:prstDash val="solid"/>
+            <a:round/>
+          </a:ln>
+        </c:spPr>
+        <c:txPr>
+          <a:bodyPr/>
+          <a:lstStyle/>
+          <a:p>
+            <a:pPr>
+              <a:defRPr sz="1000" b="0" i="0" u="none" strike="noStrike">
+                <a:solidFill>
+                  <a:srgbClr val="1A1A1A"/>
+                </a:solidFill>
+                <a:latin typeface="+mn-lt"/>
+              </a:defRPr>
+            </a:pPr>
+            <a:endParaRPr lang="en-US"/>
+          </a:p>
+        </c:txPr>
+        <c:crossAx val="2094734552"/>
+        <c:crosses val="autoZero"/>
+        <c:auto val="1"/>
+        <c:lblAlgn val="ctr"/>
+        <c:noMultiLvlLbl val="1"/>
+      </c:catAx>
+      <c:valAx>
+        <c:axId val="2094734552"/>
+        <c:scaling>
+          <c:orientation val="minMax"/>
+          <c:max val="0.25"/>
+          <c:min val="0"/>
+        </c:scaling>
+        <c:delete val="1"/>
+        <c:axPos val="l"/>
+        <c:numFmt formatCode="General" sourceLinked="0"/>
+        <c:majorTickMark val="out"/>
+        <c:minorTickMark val="none"/>
+        <c:tickLblPos val="nextTo"/>
+        <c:spPr>
+          <a:ln w="12700" cap="flat">
+            <a:solidFill>
+              <a:srgbClr val="888888"/>
+            </a:solidFill>
+            <a:prstDash val="solid"/>
+            <a:round/>
+          </a:ln>
+        </c:spPr>
+        <c:txPr>
+          <a:bodyPr/>
+          <a:lstStyle/>
+          <a:p>
+            <a:pPr>
+              <a:defRPr sz="1200" b="0" i="0" u="none" strike="noStrike">
+                <a:solidFill>
+                  <a:srgbClr val="000000"/>
+                </a:solidFill>
+                <a:latin typeface="Arial"/>
+              </a:defRPr>
+            </a:pPr>
+            <a:endParaRPr lang="en-US"/>
+          </a:p>
+        </c:txPr>
+        <c:crossAx val="2094734554"/>
+        <c:crosses val="autoZero"/>
+        <c:crossBetween val="between"/>
+      </c:valAx>
+      <c:spPr>
+        <a:noFill/>
+        <a:ln>
+          <a:noFill/>
+        </a:ln>
+        <a:effectLst/>
+      </c:spPr>
+    </c:plotArea>
+    <c:plotVisOnly val="1"/>
+    <c:dispBlanksAs val="span"/>
+  </c:chart>
+  <c:spPr>
+    <a:noFill/>
+    <a:ln>
+      <a:noFill/>
+    </a:ln>
+    <a:effectLst/>
+  </c:spPr>
+  <c:externalData r:id="rId1">
+    <c:autoUpdate val="0"/>
+  </c:externalData>
+</c:chartSpace>
+</file>
+
+<file path=ppt/charts/chart17.xml><?xml version="1.0" encoding="utf-8"?>
+<c:chartSpace xmlns:c="http://schemas.openxmlformats.org/drawingml/2006/chart" xmlns:a="http://schemas.openxmlformats.org/drawingml/2006/main" xmlns:r="http://schemas.openxmlformats.org/officeDocument/2006/relationships">
+  <c:date1904 val="0"/>
+  <c:roundedCorners val="1"/>
+  <c:chart>
+    <c:autoTitleDeleted val="1"/>
+    <c:plotArea>
+      <c:layout/>
+      <c:barChart>
+        <c:barDir val="col"/>
+        <c:grouping val="stacked"/>
+        <c:varyColors val="0"/>
+        <c:ser>
+          <c:idx val="0"/>
+          <c:order val="0"/>
+          <c:tx>
+            <c:strRef>
+              <c:f>Sheet1!$B$1</c:f>
+              <c:strCache>
+                <c:ptCount val="1"/>
+                <c:pt idx="0">
+                  <c:v>Third-party</c:v>
+                </c:pt>
+              </c:strCache>
+            </c:strRef>
+          </c:tx>
+          <c:spPr>
+            <a:solidFill>
+              <a:srgbClr val="0A1C58"/>
+            </a:solidFill>
+            <a:effectLst/>
+          </c:spPr>
+          <c:invertIfNegative val="0"/>
+          <c:dLbls>
+            <c:numFmt formatCode="#,##0" sourceLinked="0"/>
+            <c:txPr>
+              <a:bodyPr/>
+              <a:lstStyle/>
+              <a:p>
+                <a:pPr>
+                  <a:defRPr b="1" i="0" strike="noStrike" sz="1300" u="none">
+                    <a:solidFill>
+                      <a:srgbClr val="1A1A1A"/>
+                    </a:solidFill>
+                    <a:latin typeface="+mn-lt"/>
+                  </a:defRPr>
+                </a:pPr>
+              </a:p>
+            </c:txPr>
+            <c:showLegendKey val="0"/>
+            <c:showVal val="0"/>
+            <c:showCatName val="0"/>
+            <c:showSerName val="0"/>
+            <c:showPercent val="0"/>
+            <c:showBubbleSize val="0"/>
+            <c:showLeaderLines val="0"/>
+          </c:dLbls>
+          <c:cat>
+            <c:multiLvlStrRef>
+              <c:f>Sheet1!$A$2:$A$7</c:f>
+              <c:multiLvlStrCache>
+                <c:ptCount val="6"/>
+                <c:lvl>
+                  <c:pt idx="0">
+                    <c:v>2025</c:v>
+                  </c:pt>
+                  <c:pt idx="1">
+                    <c:v>2026E</c:v>
+                  </c:pt>
+                  <c:pt idx="2">
+                    <c:v>2027E</c:v>
+                  </c:pt>
+                  <c:pt idx="3">
+                    <c:v>2028E</c:v>
+                  </c:pt>
+                  <c:pt idx="4">
+                    <c:v>2029E</c:v>
+                  </c:pt>
+                  <c:pt idx="5">
+                    <c:v>2030E</c:v>
+                  </c:pt>
+                </c:lvl>
+              </c:multiLvlStrCache>
+            </c:multiLvlStrRef>
+          </c:cat>
+          <c:val>
+            <c:numRef>
+              <c:f>Sheet1!$B$2:$B$7</c:f>
+              <c:numCache>
+                <c:formatCode>General</c:formatCode>
+                <c:ptCount val="6"/>
+                <c:pt idx="0">
+                  <c:v>675</c:v>
+                </c:pt>
+                <c:pt idx="1">
+                  <c:v>866</c:v>
+                </c:pt>
+                <c:pt idx="2">
+                  <c:v>1206</c:v>
+                </c:pt>
+                <c:pt idx="3">
+                  <c:v>1321</c:v>
+                </c:pt>
+                <c:pt idx="4">
+                  <c:v>1298</c:v>
+                </c:pt>
+                <c:pt idx="5">
+                  <c:v>1272</c:v>
+                </c:pt>
+              </c:numCache>
+            </c:numRef>
+          </c:val>
+        </c:ser>
+        <c:ser>
+          <c:idx val="1"/>
+          <c:order val="1"/>
+          <c:tx>
+            <c:strRef>
+              <c:f>Sheet1!$C$1</c:f>
+              <c:strCache>
+                <c:ptCount val="1"/>
+                <c:pt idx="0">
+                  <c:v>SCI (contracted)</c:v>
+                </c:pt>
+              </c:strCache>
+            </c:strRef>
+          </c:tx>
+          <c:spPr>
+            <a:solidFill>
+              <a:srgbClr val="B5AEA9"/>
+            </a:solidFill>
+            <a:effectLst/>
+          </c:spPr>
+          <c:invertIfNegative val="0"/>
+          <c:dLbls>
+            <c:numFmt formatCode="#,##0" sourceLinked="0"/>
+            <c:txPr>
+              <a:bodyPr/>
+              <a:lstStyle/>
+              <a:p>
+                <a:pPr>
+                  <a:defRPr b="1" i="0" strike="noStrike" sz="1300" u="none">
+                    <a:solidFill>
+                      <a:srgbClr val="1A1A1A"/>
+                    </a:solidFill>
+                    <a:latin typeface="+mn-lt"/>
+                  </a:defRPr>
+                </a:pPr>
+              </a:p>
+            </c:txPr>
+            <c:showLegendKey val="0"/>
+            <c:showVal val="0"/>
+            <c:showCatName val="0"/>
+            <c:showSerName val="0"/>
+            <c:showPercent val="0"/>
+            <c:showBubbleSize val="0"/>
+            <c:showLeaderLines val="0"/>
+          </c:dLbls>
+          <c:cat>
+            <c:multiLvlStrRef>
+              <c:f>Sheet1!$A$2:$A$7</c:f>
+              <c:multiLvlStrCache>
+                <c:ptCount val="6"/>
+                <c:lvl>
+                  <c:pt idx="0">
+                    <c:v>2025</c:v>
+                  </c:pt>
+                  <c:pt idx="1">
+                    <c:v>2026E</c:v>
+                  </c:pt>
+                  <c:pt idx="2">
+                    <c:v>2027E</c:v>
+                  </c:pt>
+                  <c:pt idx="3">
+                    <c:v>2028E</c:v>
+                  </c:pt>
+                  <c:pt idx="4">
+                    <c:v>2029E</c:v>
+                  </c:pt>
+                  <c:pt idx="5">
+                    <c:v>2030E</c:v>
+                  </c:pt>
+                </c:lvl>
+              </c:multiLvlStrCache>
+            </c:multiLvlStrRef>
+          </c:cat>
+          <c:val>
+            <c:numRef>
+              <c:f>Sheet1!$C$2:$C$7</c:f>
+              <c:numCache>
+                <c:formatCode>General</c:formatCode>
+                <c:ptCount val="6"/>
+                <c:pt idx="0">
+                  <c:v>82</c:v>
+                </c:pt>
+                <c:pt idx="1">
+                  <c:v>328</c:v>
+                </c:pt>
+                <c:pt idx="2">
+                  <c:v>482</c:v>
+                </c:pt>
+                <c:pt idx="3">
+                  <c:v>660</c:v>
+                </c:pt>
+                <c:pt idx="4">
+                  <c:v>780</c:v>
+                </c:pt>
+                <c:pt idx="5">
+                  <c:v>840</c:v>
+                </c:pt>
+              </c:numCache>
+            </c:numRef>
+          </c:val>
+        </c:ser>
+        <c:dLbls>
+          <c:numFmt formatCode="#,##0" sourceLinked="0"/>
+          <c:txPr>
+            <a:bodyPr/>
+            <a:lstStyle/>
+            <a:p>
+              <a:pPr>
+                <a:defRPr b="1" i="0" strike="noStrike" sz="1300" u="none">
+                  <a:solidFill>
+                    <a:srgbClr val="1A1A1A"/>
+                  </a:solidFill>
+                  <a:latin typeface="+mn-lt"/>
+                </a:defRPr>
+              </a:pPr>
+            </a:p>
+          </c:txPr>
+          <c:showLegendKey val="0"/>
+          <c:showVal val="0"/>
+          <c:showCatName val="0"/>
+          <c:showSerName val="0"/>
+          <c:showPercent val="0"/>
+          <c:showBubbleSize val="0"/>
+          <c:showLeaderLines val="0"/>
+        </c:dLbls>
+        <c:gapWidth val="35"/>
+        <c:overlap val="100"/>
+        <c:axId val="2094734554"/>
+        <c:axId val="2094734552"/>
+        <c:axId val="2094734556"/>
+      </c:barChart>
+      <c:catAx>
+        <c:axId val="2094734554"/>
+        <c:scaling>
+          <c:orientation val="minMax"/>
+        </c:scaling>
+        <c:delete val="0"/>
+        <c:axPos val="b"/>
+        <c:numFmt formatCode="General" sourceLinked="1"/>
+        <c:majorTickMark val="out"/>
+        <c:minorTickMark val="none"/>
+        <c:tickLblPos val="low"/>
+        <c:spPr>
+          <a:ln w="12700" cap="flat">
+            <a:solidFill>
+              <a:srgbClr val="BFBFBF"/>
+            </a:solidFill>
+            <a:prstDash val="solid"/>
+            <a:round/>
+          </a:ln>
+        </c:spPr>
+        <c:txPr>
+          <a:bodyPr/>
+          <a:lstStyle/>
+          <a:p>
+            <a:pPr>
+              <a:defRPr sz="1000" b="0" i="0" u="none" strike="noStrike">
+                <a:solidFill>
+                  <a:srgbClr val="1A1A1A"/>
+                </a:solidFill>
+                <a:latin typeface="+mn-lt"/>
+              </a:defRPr>
+            </a:pPr>
+            <a:endParaRPr lang="en-US"/>
+          </a:p>
+        </c:txPr>
+        <c:crossAx val="2094734552"/>
+        <c:crosses val="autoZero"/>
+        <c:auto val="1"/>
+        <c:lblAlgn val="ctr"/>
+        <c:noMultiLvlLbl val="1"/>
+      </c:catAx>
+      <c:valAx>
+        <c:axId val="2094734552"/>
+        <c:scaling>
+          <c:orientation val="minMax"/>
+          <c:max val="2300"/>
+          <c:min val="0"/>
         </c:scaling>
         <c:delete val="1"/>
         <c:axPos val="l"/>
@@ -3873,7 +5520,7 @@
             <c:size val="6"/>
             <c:spPr>
               <a:solidFill>
-                <a:srgbClr val="0A1C58"/>
+                <a:srgbClr val="847C7A"/>
               </a:solidFill>
               <a:ln w="9525" cap="flat">
                 <a:solidFill>
@@ -5045,6 +6692,446 @@
             <a:fld id="{F7021451-1387-4CA6-816F-3879F97B5CBC}" type="slidenum">
               <a:rPr lang="en-US"/>
               <a:t>12</a:t>
+            </a:fld>
+            <a:endParaRPr lang="en-US"/>
+          </a:p>
+        </p:txBody>
+      </p:sp>
+    </p:spTree>
+    <p:extLst>
+      <p:ext uri="{BB962C8B-B14F-4D97-AF65-F5344CB8AC3E}">
+        <p14:creationId xmlns:p14="http://schemas.microsoft.com/office/powerpoint/2010/main" val="1024086991"/>
+      </p:ext>
+    </p:extLst>
+  </p:cSld>
+  <p:clrMapOvr>
+    <a:masterClrMapping/>
+  </p:clrMapOvr>
+</p:notes>
+</file>
+
+<file path=ppt/notesSlides/notesSlide13.xml><?xml version="1.0" encoding="utf-8"?>
+<p:notes xmlns:a="http://schemas.openxmlformats.org/drawingml/2006/main" xmlns:r="http://schemas.openxmlformats.org/officeDocument/2006/relationships" xmlns:p="http://schemas.openxmlformats.org/presentationml/2006/main">
+  <p:cSld>
+    <p:spTree>
+      <p:nvGrpSpPr>
+        <p:cNvPr id="1" name=""/>
+        <p:cNvGrpSpPr/>
+        <p:nvPr/>
+      </p:nvGrpSpPr>
+      <p:grpSpPr>
+        <a:xfrm>
+          <a:off x="0" y="0"/>
+          <a:ext cx="0" cy="0"/>
+          <a:chOff x="0" y="0"/>
+          <a:chExt cx="0" cy="0"/>
+        </a:xfrm>
+      </p:grpSpPr>
+      <p:sp>
+        <p:nvSpPr>
+          <p:cNvPr id="2" name="Slide Image Placeholder 1"/>
+          <p:cNvSpPr>
+            <a:spLocks noGrp="1" noRot="1" noChangeAspect="1"/>
+          </p:cNvSpPr>
+          <p:nvPr>
+            <p:ph type="sldImg"/>
+          </p:nvPr>
+        </p:nvSpPr>
+        <p:spPr/>
+      </p:sp>
+      <p:sp>
+        <p:nvSpPr>
+          <p:cNvPr id="3" name="Notes Placeholder 2"/>
+          <p:cNvSpPr>
+            <a:spLocks noGrp="1"/>
+          </p:cNvSpPr>
+          <p:nvPr>
+            <p:ph type="body" idx="1"/>
+          </p:nvPr>
+        </p:nvSpPr>
+        <p:spPr/>
+        <p:txBody>
+          <a:bodyPr/>
+          <a:lstStyle/>
+          <a:p>
+            <a:r>
+              <a:rPr lang="en-US" dirty="0"/>
+              <a:t/>
+            </a:r>
+            <a:endParaRPr lang="en-US" dirty="0"/>
+          </a:p>
+        </p:txBody>
+      </p:sp>
+      <p:sp>
+        <p:nvSpPr>
+          <p:cNvPr id="4" name="Slide Number Placeholder 3"/>
+          <p:cNvSpPr>
+            <a:spLocks noGrp="1"/>
+          </p:cNvSpPr>
+          <p:nvPr>
+            <p:ph type="sldNum" sz="quarter" idx="10"/>
+          </p:nvPr>
+        </p:nvSpPr>
+        <p:spPr/>
+        <p:txBody>
+          <a:bodyPr/>
+          <a:lstStyle/>
+          <a:p>
+            <a:fld id="{F7021451-1387-4CA6-816F-3879F97B5CBC}" type="slidenum">
+              <a:rPr lang="en-US"/>
+              <a:t>13</a:t>
+            </a:fld>
+            <a:endParaRPr lang="en-US"/>
+          </a:p>
+        </p:txBody>
+      </p:sp>
+    </p:spTree>
+    <p:extLst>
+      <p:ext uri="{BB962C8B-B14F-4D97-AF65-F5344CB8AC3E}">
+        <p14:creationId xmlns:p14="http://schemas.microsoft.com/office/powerpoint/2010/main" val="1024086991"/>
+      </p:ext>
+    </p:extLst>
+  </p:cSld>
+  <p:clrMapOvr>
+    <a:masterClrMapping/>
+  </p:clrMapOvr>
+</p:notes>
+</file>
+
+<file path=ppt/notesSlides/notesSlide14.xml><?xml version="1.0" encoding="utf-8"?>
+<p:notes xmlns:a="http://schemas.openxmlformats.org/drawingml/2006/main" xmlns:r="http://schemas.openxmlformats.org/officeDocument/2006/relationships" xmlns:p="http://schemas.openxmlformats.org/presentationml/2006/main">
+  <p:cSld>
+    <p:spTree>
+      <p:nvGrpSpPr>
+        <p:cNvPr id="1" name=""/>
+        <p:cNvGrpSpPr/>
+        <p:nvPr/>
+      </p:nvGrpSpPr>
+      <p:grpSpPr>
+        <a:xfrm>
+          <a:off x="0" y="0"/>
+          <a:ext cx="0" cy="0"/>
+          <a:chOff x="0" y="0"/>
+          <a:chExt cx="0" cy="0"/>
+        </a:xfrm>
+      </p:grpSpPr>
+      <p:sp>
+        <p:nvSpPr>
+          <p:cNvPr id="2" name="Slide Image Placeholder 1"/>
+          <p:cNvSpPr>
+            <a:spLocks noGrp="1" noRot="1" noChangeAspect="1"/>
+          </p:cNvSpPr>
+          <p:nvPr>
+            <p:ph type="sldImg"/>
+          </p:nvPr>
+        </p:nvSpPr>
+        <p:spPr/>
+      </p:sp>
+      <p:sp>
+        <p:nvSpPr>
+          <p:cNvPr id="3" name="Notes Placeholder 2"/>
+          <p:cNvSpPr>
+            <a:spLocks noGrp="1"/>
+          </p:cNvSpPr>
+          <p:nvPr>
+            <p:ph type="body" idx="1"/>
+          </p:nvPr>
+        </p:nvSpPr>
+        <p:spPr/>
+        <p:txBody>
+          <a:bodyPr/>
+          <a:lstStyle/>
+          <a:p>
+            <a:r>
+              <a:rPr lang="en-US" dirty="0"/>
+              <a:t>CFM56 full overhaul ~60 days pre-pandemic vs. 90–120 days now (Aviation Business News, 2025; secondary source). Slot waits up 2–6 months (Bain, 2024; 2025 market summaries). GE: LEAP shop visits up &gt;50% in Q1 and Q2 2026; LEAP installed base to roughly triple 2024–2030; ~$500M of &gt;$1B MRO investment to LEAP, roughly doubling internal LEAP capacity. Former MRO executive: 'the variability in capital investment required to capture the LEAP is extremely low versus what it took them to capture the CFM.'</a:t>
+            </a:r>
+            <a:endParaRPr lang="en-US" dirty="0"/>
+          </a:p>
+        </p:txBody>
+      </p:sp>
+      <p:sp>
+        <p:nvSpPr>
+          <p:cNvPr id="4" name="Slide Number Placeholder 3"/>
+          <p:cNvSpPr>
+            <a:spLocks noGrp="1"/>
+          </p:cNvSpPr>
+          <p:nvPr>
+            <p:ph type="sldNum" sz="quarter" idx="10"/>
+          </p:nvPr>
+        </p:nvSpPr>
+        <p:spPr/>
+        <p:txBody>
+          <a:bodyPr/>
+          <a:lstStyle/>
+          <a:p>
+            <a:fld id="{F7021451-1387-4CA6-816F-3879F97B5CBC}" type="slidenum">
+              <a:rPr lang="en-US"/>
+              <a:t>14</a:t>
+            </a:fld>
+            <a:endParaRPr lang="en-US"/>
+          </a:p>
+        </p:txBody>
+      </p:sp>
+    </p:spTree>
+    <p:extLst>
+      <p:ext uri="{BB962C8B-B14F-4D97-AF65-F5344CB8AC3E}">
+        <p14:creationId xmlns:p14="http://schemas.microsoft.com/office/powerpoint/2010/main" val="1024086991"/>
+      </p:ext>
+    </p:extLst>
+  </p:cSld>
+  <p:clrMapOvr>
+    <a:masterClrMapping/>
+  </p:clrMapOvr>
+</p:notes>
+</file>
+
+<file path=ppt/notesSlides/notesSlide15.xml><?xml version="1.0" encoding="utf-8"?>
+<p:notes xmlns:a="http://schemas.openxmlformats.org/drawingml/2006/main" xmlns:r="http://schemas.openxmlformats.org/officeDocument/2006/relationships" xmlns:p="http://schemas.openxmlformats.org/presentationml/2006/main">
+  <p:cSld>
+    <p:spTree>
+      <p:nvGrpSpPr>
+        <p:cNvPr id="1" name=""/>
+        <p:cNvGrpSpPr/>
+        <p:nvPr/>
+      </p:nvGrpSpPr>
+      <p:grpSpPr>
+        <a:xfrm>
+          <a:off x="0" y="0"/>
+          <a:ext cx="0" cy="0"/>
+          <a:chOff x="0" y="0"/>
+          <a:chExt cx="0" cy="0"/>
+        </a:xfrm>
+      </p:grpSpPr>
+      <p:sp>
+        <p:nvSpPr>
+          <p:cNvPr id="2" name="Slide Image Placeholder 1"/>
+          <p:cNvSpPr>
+            <a:spLocks noGrp="1" noRot="1" noChangeAspect="1"/>
+          </p:cNvSpPr>
+          <p:nvPr>
+            <p:ph type="sldImg"/>
+          </p:nvPr>
+        </p:nvSpPr>
+        <p:spPr/>
+      </p:sp>
+      <p:sp>
+        <p:nvSpPr>
+          <p:cNvPr id="3" name="Notes Placeholder 2"/>
+          <p:cNvSpPr>
+            <a:spLocks noGrp="1"/>
+          </p:cNvSpPr>
+          <p:nvPr>
+            <p:ph type="body" idx="1"/>
+          </p:nvPr>
+        </p:nvSpPr>
+        <p:spPr/>
+        <p:txBody>
+          <a:bodyPr/>
+          <a:lstStyle/>
+          <a:p>
+            <a:r>
+              <a:rPr lang="en-US" dirty="0"/>
+              <a:t>FTAI (Q2'24 call, as reported by third parties): average CFM56 engine turnaround ~120–180 days vs. 5–25 days for a module swap. Midpoints 150 vs. ~20 days = ~7x. Step lengths within the shop visit are illustrative; slot waits of 2–6 months and HPT blade shortages drive most of the delay. Caveat: the fastest swaps apply where the core does not need to be opened; roughly half of shop visits require core disassembly.</a:t>
+            </a:r>
+            <a:endParaRPr lang="en-US" dirty="0"/>
+          </a:p>
+        </p:txBody>
+      </p:sp>
+      <p:sp>
+        <p:nvSpPr>
+          <p:cNvPr id="4" name="Slide Number Placeholder 3"/>
+          <p:cNvSpPr>
+            <a:spLocks noGrp="1"/>
+          </p:cNvSpPr>
+          <p:nvPr>
+            <p:ph type="sldNum" sz="quarter" idx="10"/>
+          </p:nvPr>
+        </p:nvSpPr>
+        <p:spPr/>
+        <p:txBody>
+          <a:bodyPr/>
+          <a:lstStyle/>
+          <a:p>
+            <a:fld id="{F7021451-1387-4CA6-816F-3879F97B5CBC}" type="slidenum">
+              <a:rPr lang="en-US"/>
+              <a:t>15</a:t>
+            </a:fld>
+            <a:endParaRPr lang="en-US"/>
+          </a:p>
+        </p:txBody>
+      </p:sp>
+    </p:spTree>
+    <p:extLst>
+      <p:ext uri="{BB962C8B-B14F-4D97-AF65-F5344CB8AC3E}">
+        <p14:creationId xmlns:p14="http://schemas.microsoft.com/office/powerpoint/2010/main" val="1024086991"/>
+      </p:ext>
+    </p:extLst>
+  </p:cSld>
+  <p:clrMapOvr>
+    <a:masterClrMapping/>
+  </p:clrMapOvr>
+</p:notes>
+</file>
+
+<file path=ppt/notesSlides/notesSlide16.xml><?xml version="1.0" encoding="utf-8"?>
+<p:notes xmlns:a="http://schemas.openxmlformats.org/drawingml/2006/main" xmlns:r="http://schemas.openxmlformats.org/officeDocument/2006/relationships" xmlns:p="http://schemas.openxmlformats.org/presentationml/2006/main">
+  <p:cSld>
+    <p:spTree>
+      <p:nvGrpSpPr>
+        <p:cNvPr id="1" name=""/>
+        <p:cNvGrpSpPr/>
+        <p:nvPr/>
+      </p:nvGrpSpPr>
+      <p:grpSpPr>
+        <a:xfrm>
+          <a:off x="0" y="0"/>
+          <a:ext cx="0" cy="0"/>
+          <a:chOff x="0" y="0"/>
+          <a:chExt cx="0" cy="0"/>
+        </a:xfrm>
+      </p:grpSpPr>
+      <p:sp>
+        <p:nvSpPr>
+          <p:cNvPr id="2" name="Slide Image Placeholder 1"/>
+          <p:cNvSpPr>
+            <a:spLocks noGrp="1" noRot="1" noChangeAspect="1"/>
+          </p:cNvSpPr>
+          <p:nvPr>
+            <p:ph type="sldImg"/>
+          </p:nvPr>
+        </p:nvSpPr>
+        <p:spPr/>
+      </p:sp>
+      <p:sp>
+        <p:nvSpPr>
+          <p:cNvPr id="3" name="Notes Placeholder 2"/>
+          <p:cNvSpPr>
+            <a:spLocks noGrp="1"/>
+          </p:cNvSpPr>
+          <p:nvPr>
+            <p:ph type="body" idx="1"/>
+          </p:nvPr>
+        </p:nvSpPr>
+        <p:spPr/>
+        <p:txBody>
+          <a:bodyPr/>
+          <a:lstStyle/>
+          <a:p>
+            <a:r>
+              <a:rPr lang="en-US" dirty="0"/>
+              <a:t>Network output 757 modules in 2025, 1,200 guided for 2026 (Montreal 450, Miami 475, Europe 275) and 1,700 targeted for 2027 including GMF and EgyptAir. Network capacity raised from 2,000 to 3,000 modules in 2026. Montreal capacity up to 900 (377 output in 2025). Jakarta 300–450 and Cairo 150–180 are GPS estimates; partners are ~7–18% of 2027 output.</a:t>
+            </a:r>
+            <a:endParaRPr lang="en-US" dirty="0"/>
+          </a:p>
+        </p:txBody>
+      </p:sp>
+      <p:sp>
+        <p:nvSpPr>
+          <p:cNvPr id="4" name="Slide Number Placeholder 3"/>
+          <p:cNvSpPr>
+            <a:spLocks noGrp="1"/>
+          </p:cNvSpPr>
+          <p:nvPr>
+            <p:ph type="sldNum" sz="quarter" idx="10"/>
+          </p:nvPr>
+        </p:nvSpPr>
+        <p:spPr/>
+        <p:txBody>
+          <a:bodyPr/>
+          <a:lstStyle/>
+          <a:p>
+            <a:fld id="{F7021451-1387-4CA6-816F-3879F97B5CBC}" type="slidenum">
+              <a:rPr lang="en-US"/>
+              <a:t>16</a:t>
+            </a:fld>
+            <a:endParaRPr lang="en-US"/>
+          </a:p>
+        </p:txBody>
+      </p:sp>
+    </p:spTree>
+    <p:extLst>
+      <p:ext uri="{BB962C8B-B14F-4D97-AF65-F5344CB8AC3E}">
+        <p14:creationId xmlns:p14="http://schemas.microsoft.com/office/powerpoint/2010/main" val="1024086991"/>
+      </p:ext>
+    </p:extLst>
+  </p:cSld>
+  <p:clrMapOvr>
+    <a:masterClrMapping/>
+  </p:clrMapOvr>
+</p:notes>
+</file>
+
+<file path=ppt/notesSlides/notesSlide17.xml><?xml version="1.0" encoding="utf-8"?>
+<p:notes xmlns:a="http://schemas.openxmlformats.org/drawingml/2006/main" xmlns:r="http://schemas.openxmlformats.org/officeDocument/2006/relationships" xmlns:p="http://schemas.openxmlformats.org/presentationml/2006/main">
+  <p:cSld>
+    <p:spTree>
+      <p:nvGrpSpPr>
+        <p:cNvPr id="1" name=""/>
+        <p:cNvGrpSpPr/>
+        <p:nvPr/>
+      </p:nvGrpSpPr>
+      <p:grpSpPr>
+        <a:xfrm>
+          <a:off x="0" y="0"/>
+          <a:ext cx="0" cy="0"/>
+          <a:chOff x="0" y="0"/>
+          <a:chExt cx="0" cy="0"/>
+        </a:xfrm>
+      </p:grpSpPr>
+      <p:sp>
+        <p:nvSpPr>
+          <p:cNvPr id="2" name="Slide Image Placeholder 1"/>
+          <p:cNvSpPr>
+            <a:spLocks noGrp="1" noRot="1" noChangeAspect="1"/>
+          </p:cNvSpPr>
+          <p:nvPr>
+            <p:ph type="sldImg"/>
+          </p:nvPr>
+        </p:nvSpPr>
+        <p:spPr/>
+      </p:sp>
+      <p:sp>
+        <p:nvSpPr>
+          <p:cNvPr id="3" name="Notes Placeholder 2"/>
+          <p:cNvSpPr>
+            <a:spLocks noGrp="1"/>
+          </p:cNvSpPr>
+          <p:nvPr>
+            <p:ph type="body" idx="1"/>
+          </p:nvPr>
+        </p:nvSpPr>
+        <p:spPr/>
+        <p:txBody>
+          <a:bodyPr/>
+          <a:lstStyle/>
+          <a:p>
+            <a:r>
+              <a:rPr lang="en-US" dirty="0"/>
+              <a:t>Volume math (FY27E, GPS model): 2,386 CFM56 shop visits × 3 modules = 7,159 modules of demand × 16.8% FTAI share = 1,206 third-party modules, plus 482 SCI modules (450 aircraft × 2 engines × 20% shop-visit rate × 3 modules, approx.) = 1,687, vs. FTAI's 1,700 target. Share path 12.4% FY26E → 20% by FY30E. 2025 split approximates SCI at 82 modules and the remainder third-party.</a:t>
+            </a:r>
+            <a:endParaRPr lang="en-US" dirty="0"/>
+          </a:p>
+        </p:txBody>
+      </p:sp>
+      <p:sp>
+        <p:nvSpPr>
+          <p:cNvPr id="4" name="Slide Number Placeholder 3"/>
+          <p:cNvSpPr>
+            <a:spLocks noGrp="1"/>
+          </p:cNvSpPr>
+          <p:nvPr>
+            <p:ph type="sldNum" sz="quarter" idx="10"/>
+          </p:nvPr>
+        </p:nvSpPr>
+        <p:spPr/>
+        <p:txBody>
+          <a:bodyPr/>
+          <a:lstStyle/>
+          <a:p>
+            <a:fld id="{F7021451-1387-4CA6-816F-3879F97B5CBC}" type="slidenum">
+              <a:rPr lang="en-US"/>
+              <a:t>17</a:t>
             </a:fld>
             <a:endParaRPr lang="en-US"/>
           </a:p>
@@ -8820,6 +10907,3917 @@
             <a:fld id="{F7021451-1387-4CA6-816F-3879F97B5CBC}" type="slidenum">
               <a:rPr b="1" lang="en-US"/>
               <a:t>12</a:t>
+            </a:fld>
+            <a:endParaRPr lang="en-US"/>
+          </a:p>
+        </p:txBody>
+      </p:sp>
+    </p:spTree>
+  </p:cSld>
+  <p:clrMapOvr>
+    <a:masterClrMapping/>
+  </p:clrMapOvr>
+</p:sld>
+</file>
+
+<file path=ppt/slides/slide13.xml><?xml version="1.0" encoding="utf-8"?>
+<p:sld xmlns:a="http://schemas.openxmlformats.org/drawingml/2006/main" xmlns:r="http://schemas.openxmlformats.org/officeDocument/2006/relationships" xmlns:p="http://schemas.openxmlformats.org/presentationml/2006/main">
+  <p:cSld name="Slide 13">
+    <p:spTree>
+      <p:nvGrpSpPr>
+        <p:cNvPr id="1" name=""/>
+        <p:cNvGrpSpPr/>
+        <p:nvPr/>
+      </p:nvGrpSpPr>
+      <p:grpSpPr>
+        <a:xfrm>
+          <a:off x="0" y="0"/>
+          <a:ext cx="0" cy="0"/>
+          <a:chOff x="0" y="0"/>
+          <a:chExt cx="0" cy="0"/>
+        </a:xfrm>
+      </p:grpSpPr>
+      <p:sp>
+        <p:nvSpPr>
+          <p:cNvPr id="2" name="Text 1"/>
+          <p:cNvSpPr/>
+          <p:nvPr>
+            <p:ph idx="102" type="title" hasCustomPrompt="1"/>
+          </p:nvPr>
+        </p:nvSpPr>
+        <p:spPr>
+          <a:xfrm>
+            <a:off x="320040" y="182880"/>
+            <a:ext cx="8503920" cy="640080"/>
+          </a:xfrm>
+          <a:prstGeom prst="rect">
+            <a:avLst/>
+          </a:prstGeom>
+          <a:noFill/>
+          <a:ln/>
+        </p:spPr>
+        <p:txBody>
+          <a:bodyPr wrap="square" lIns="0" tIns="0" rIns="0" bIns="0" rtlCol="0" anchor="ctr"/>
+          <a:lstStyle/>
+          <a:p>
+            <a:pPr algn="l" indent="0" marL="0">
+              <a:buNone/>
+            </a:pPr>
+            <a:r>
+              <a:rPr lang="en-US" sz="3200" b="1" dirty="0">
+                <a:solidFill>
+                  <a:schemeClr val="tx2"/>
+                </a:solidFill>
+              </a:rPr>
+              <a:t>Thesis 1b: Share Gains (1/5)</a:t>
+            </a:r>
+            <a:endParaRPr lang="en-US" sz="3200" dirty="0"/>
+          </a:p>
+        </p:txBody>
+      </p:sp>
+      <p:sp>
+        <p:nvSpPr>
+          <p:cNvPr id="3" name="Reason 1"/>
+          <p:cNvSpPr txBox="1"/>
+          <p:nvPr/>
+        </p:nvSpPr>
+        <p:spPr>
+          <a:xfrm>
+            <a:off x="1600200" y="1097280"/>
+            <a:ext cx="6629400" cy="713232"/>
+          </a:xfrm>
+          <a:prstGeom prst="rect">
+            <a:avLst/>
+          </a:prstGeom>
+          <a:solidFill>
+            <a:srgbClr val="DCD8D3"/>
+          </a:solidFill>
+          <a:ln/>
+        </p:spPr>
+        <p:txBody>
+          <a:bodyPr wrap="square" lIns="558800" tIns="25400" rIns="127000" bIns="25400" rtlCol="0" anchor="ctr"/>
+          <a:lstStyle/>
+          <a:p>
+            <a:pPr algn="ctr" indent="0" marL="0">
+              <a:buNone/>
+            </a:pPr>
+            <a:r>
+              <a:rPr lang="en-US" sz="1500" b="1" dirty="0">
+                <a:solidFill>
+                  <a:schemeClr val="tx2"/>
+                </a:solidFill>
+              </a:rPr>
+              <a:t>OEM shops are moving their capacity to LEAP, leaving CFM56 work behind.</a:t>
+            </a:r>
+            <a:endParaRPr lang="en-US" sz="1500" dirty="0"/>
+          </a:p>
+        </p:txBody>
+      </p:sp>
+      <p:sp>
+        <p:nvSpPr>
+          <p:cNvPr id="4" name="Reason 1 number"/>
+          <p:cNvSpPr/>
+          <p:nvPr/>
+        </p:nvSpPr>
+        <p:spPr>
+          <a:xfrm>
+            <a:off x="1161288" y="1060704"/>
+            <a:ext cx="786384" cy="786384"/>
+          </a:xfrm>
+          <a:prstGeom prst="ellipse">
+            <a:avLst/>
+          </a:prstGeom>
+          <a:solidFill>
+            <a:srgbClr val="FFFFFF"/>
+          </a:solidFill>
+          <a:ln w="25400">
+            <a:solidFill>
+              <a:srgbClr val="0A1C58"/>
+            </a:solidFill>
+          </a:ln>
+        </p:spPr>
+        <p:txBody>
+          <a:bodyPr wrap="square" lIns="0" tIns="0" rIns="0" bIns="0" rtlCol="0" anchor="ctr"/>
+          <a:lstStyle/>
+          <a:p>
+            <a:pPr algn="ctr" indent="0" marL="0">
+              <a:buNone/>
+            </a:pPr>
+            <a:r>
+              <a:rPr lang="en-US" sz="2400" b="1" dirty="0">
+                <a:solidFill>
+                  <a:schemeClr val="tx2"/>
+                </a:solidFill>
+              </a:rPr>
+              <a:t>1</a:t>
+            </a:r>
+            <a:endParaRPr lang="en-US" sz="2400" dirty="0"/>
+          </a:p>
+        </p:txBody>
+      </p:sp>
+      <p:sp>
+        <p:nvSpPr>
+          <p:cNvPr id="5" name="Reason 2"/>
+          <p:cNvSpPr txBox="1"/>
+          <p:nvPr/>
+        </p:nvSpPr>
+        <p:spPr>
+          <a:xfrm>
+            <a:off x="1600200" y="2011680"/>
+            <a:ext cx="6629400" cy="713232"/>
+          </a:xfrm>
+          <a:prstGeom prst="rect">
+            <a:avLst/>
+          </a:prstGeom>
+          <a:solidFill>
+            <a:srgbClr val="DCD8D3"/>
+          </a:solidFill>
+          <a:ln/>
+        </p:spPr>
+        <p:txBody>
+          <a:bodyPr wrap="square" lIns="558800" tIns="25400" rIns="127000" bIns="25400" rtlCol="0" anchor="ctr"/>
+          <a:lstStyle/>
+          <a:p>
+            <a:pPr algn="ctr" indent="0" marL="0">
+              <a:buNone/>
+            </a:pPr>
+            <a:r>
+              <a:rPr lang="en-US" sz="1500" b="1" dirty="0">
+                <a:solidFill>
+                  <a:schemeClr val="tx2"/>
+                </a:solidFill>
+              </a:rPr>
+              <a:t>Independent MROs are clogged: CFM56 overhauls now take 90–120 days.</a:t>
+            </a:r>
+            <a:endParaRPr lang="en-US" sz="1500" dirty="0"/>
+          </a:p>
+        </p:txBody>
+      </p:sp>
+      <p:sp>
+        <p:nvSpPr>
+          <p:cNvPr id="6" name="Reason 2 number"/>
+          <p:cNvSpPr/>
+          <p:nvPr/>
+        </p:nvSpPr>
+        <p:spPr>
+          <a:xfrm>
+            <a:off x="1161288" y="1975104"/>
+            <a:ext cx="786384" cy="786384"/>
+          </a:xfrm>
+          <a:prstGeom prst="ellipse">
+            <a:avLst/>
+          </a:prstGeom>
+          <a:solidFill>
+            <a:srgbClr val="FFFFFF"/>
+          </a:solidFill>
+          <a:ln w="25400">
+            <a:solidFill>
+              <a:srgbClr val="0A1C58"/>
+            </a:solidFill>
+          </a:ln>
+        </p:spPr>
+        <p:txBody>
+          <a:bodyPr wrap="square" lIns="0" tIns="0" rIns="0" bIns="0" rtlCol="0" anchor="ctr"/>
+          <a:lstStyle/>
+          <a:p>
+            <a:pPr algn="ctr" indent="0" marL="0">
+              <a:buNone/>
+            </a:pPr>
+            <a:r>
+              <a:rPr lang="en-US" sz="2400" b="1" dirty="0">
+                <a:solidFill>
+                  <a:schemeClr val="tx2"/>
+                </a:solidFill>
+              </a:rPr>
+              <a:t>2</a:t>
+            </a:r>
+            <a:endParaRPr lang="en-US" sz="2400" dirty="0"/>
+          </a:p>
+        </p:txBody>
+      </p:sp>
+      <p:sp>
+        <p:nvSpPr>
+          <p:cNvPr id="7" name="Reason 3"/>
+          <p:cNvSpPr txBox="1"/>
+          <p:nvPr/>
+        </p:nvSpPr>
+        <p:spPr>
+          <a:xfrm>
+            <a:off x="1600200" y="2926080"/>
+            <a:ext cx="6629400" cy="713232"/>
+          </a:xfrm>
+          <a:prstGeom prst="rect">
+            <a:avLst/>
+          </a:prstGeom>
+          <a:solidFill>
+            <a:srgbClr val="DCD8D3"/>
+          </a:solidFill>
+          <a:ln/>
+        </p:spPr>
+        <p:txBody>
+          <a:bodyPr wrap="square" lIns="558800" tIns="25400" rIns="127000" bIns="25400" rtlCol="0" anchor="ctr"/>
+          <a:lstStyle/>
+          <a:p>
+            <a:pPr algn="ctr" indent="0" marL="0">
+              <a:buNone/>
+            </a:pPr>
+            <a:r>
+              <a:rPr lang="en-US" sz="1500" b="1" dirty="0">
+                <a:solidFill>
+                  <a:schemeClr val="tx2"/>
+                </a:solidFill>
+              </a:rPr>
+              <a:t>FTAI's module swap returns an engine in 5–25 days, not months.</a:t>
+            </a:r>
+            <a:endParaRPr lang="en-US" sz="1500" dirty="0"/>
+          </a:p>
+        </p:txBody>
+      </p:sp>
+      <p:sp>
+        <p:nvSpPr>
+          <p:cNvPr id="8" name="Reason 3 number"/>
+          <p:cNvSpPr/>
+          <p:nvPr/>
+        </p:nvSpPr>
+        <p:spPr>
+          <a:xfrm>
+            <a:off x="1161288" y="2889504"/>
+            <a:ext cx="786384" cy="786384"/>
+          </a:xfrm>
+          <a:prstGeom prst="ellipse">
+            <a:avLst/>
+          </a:prstGeom>
+          <a:solidFill>
+            <a:srgbClr val="FFFFFF"/>
+          </a:solidFill>
+          <a:ln w="25400">
+            <a:solidFill>
+              <a:srgbClr val="0A1C58"/>
+            </a:solidFill>
+          </a:ln>
+        </p:spPr>
+        <p:txBody>
+          <a:bodyPr wrap="square" lIns="0" tIns="0" rIns="0" bIns="0" rtlCol="0" anchor="ctr"/>
+          <a:lstStyle/>
+          <a:p>
+            <a:pPr algn="ctr" indent="0" marL="0">
+              <a:buNone/>
+            </a:pPr>
+            <a:r>
+              <a:rPr lang="en-US" sz="2400" b="1" dirty="0">
+                <a:solidFill>
+                  <a:schemeClr val="tx2"/>
+                </a:solidFill>
+              </a:rPr>
+              <a:t>3</a:t>
+            </a:r>
+            <a:endParaRPr lang="en-US" sz="2400" dirty="0"/>
+          </a:p>
+        </p:txBody>
+      </p:sp>
+      <p:sp>
+        <p:nvSpPr>
+          <p:cNvPr id="9" name="Reason 4"/>
+          <p:cNvSpPr txBox="1"/>
+          <p:nvPr/>
+        </p:nvSpPr>
+        <p:spPr>
+          <a:xfrm>
+            <a:off x="1600200" y="3840480"/>
+            <a:ext cx="6629400" cy="713232"/>
+          </a:xfrm>
+          <a:prstGeom prst="rect">
+            <a:avLst/>
+          </a:prstGeom>
+          <a:solidFill>
+            <a:srgbClr val="DCD8D3"/>
+          </a:solidFill>
+          <a:ln/>
+        </p:spPr>
+        <p:txBody>
+          <a:bodyPr wrap="square" lIns="558800" tIns="25400" rIns="127000" bIns="25400" rtlCol="0" anchor="ctr"/>
+          <a:lstStyle/>
+          <a:p>
+            <a:pPr algn="ctr" indent="0" marL="0">
+              <a:buNone/>
+            </a:pPr>
+            <a:r>
+              <a:rPr lang="en-US" sz="1500" b="1" dirty="0">
+                <a:solidFill>
+                  <a:schemeClr val="tx2"/>
+                </a:solidFill>
+              </a:rPr>
+              <a:t>New sites in Jakarta, Cairo and Lisbon lift capacity to 3,000 modules.</a:t>
+            </a:r>
+            <a:endParaRPr lang="en-US" sz="1500" dirty="0"/>
+          </a:p>
+        </p:txBody>
+      </p:sp>
+      <p:sp>
+        <p:nvSpPr>
+          <p:cNvPr id="10" name="Reason 4 number"/>
+          <p:cNvSpPr/>
+          <p:nvPr/>
+        </p:nvSpPr>
+        <p:spPr>
+          <a:xfrm>
+            <a:off x="1161288" y="3803904"/>
+            <a:ext cx="786384" cy="786384"/>
+          </a:xfrm>
+          <a:prstGeom prst="ellipse">
+            <a:avLst/>
+          </a:prstGeom>
+          <a:solidFill>
+            <a:srgbClr val="FFFFFF"/>
+          </a:solidFill>
+          <a:ln w="25400">
+            <a:solidFill>
+              <a:srgbClr val="0A1C58"/>
+            </a:solidFill>
+          </a:ln>
+        </p:spPr>
+        <p:txBody>
+          <a:bodyPr wrap="square" lIns="0" tIns="0" rIns="0" bIns="0" rtlCol="0" anchor="ctr"/>
+          <a:lstStyle/>
+          <a:p>
+            <a:pPr algn="ctr" indent="0" marL="0">
+              <a:buNone/>
+            </a:pPr>
+            <a:r>
+              <a:rPr lang="en-US" sz="2400" b="1" dirty="0">
+                <a:solidFill>
+                  <a:schemeClr val="tx2"/>
+                </a:solidFill>
+              </a:rPr>
+              <a:t>4</a:t>
+            </a:r>
+            <a:endParaRPr lang="en-US" sz="2400" dirty="0"/>
+          </a:p>
+        </p:txBody>
+      </p:sp>
+      <p:sp>
+        <p:nvSpPr>
+          <p:cNvPr id="11" name="Funnel"/>
+          <p:cNvSpPr/>
+          <p:nvPr/>
+        </p:nvSpPr>
+        <p:spPr>
+          <a:xfrm flipV="1">
+            <a:off x="1188720" y="4709160"/>
+            <a:ext cx="7040880" cy="365760"/>
+          </a:xfrm>
+          <a:prstGeom prst="triangle">
+            <a:avLst/>
+          </a:prstGeom>
+          <a:solidFill>
+            <a:srgbClr val="DCD8D3"/>
+          </a:solidFill>
+          <a:ln/>
+        </p:spPr>
+      </p:sp>
+      <p:sp>
+        <p:nvSpPr>
+          <p:cNvPr id="12" name="Conclusion"/>
+          <p:cNvSpPr txBox="1"/>
+          <p:nvPr/>
+        </p:nvSpPr>
+        <p:spPr>
+          <a:xfrm>
+            <a:off x="1188720" y="5193792"/>
+            <a:ext cx="7040880" cy="777240"/>
+          </a:xfrm>
+          <a:prstGeom prst="rect">
+            <a:avLst/>
+          </a:prstGeom>
+          <a:solidFill>
+            <a:srgbClr val="0A1C58"/>
+          </a:solidFill>
+          <a:ln/>
+        </p:spPr>
+        <p:txBody>
+          <a:bodyPr wrap="square" lIns="127000" tIns="25400" rIns="127000" bIns="25400" rtlCol="0" anchor="ctr"/>
+          <a:lstStyle/>
+          <a:p>
+            <a:pPr algn="ctr" indent="0" marL="0">
+              <a:buNone/>
+            </a:pPr>
+            <a:r>
+              <a:rPr lang="en-US" sz="1600" b="1" dirty="0">
+                <a:solidFill>
+                  <a:schemeClr val="bg1"/>
+                </a:solidFill>
+              </a:rPr>
+              <a:t>FTAI's share of CFM56 module work rises from ~12% to 20% by FY30, with every SCI aircraft as a contracted floor.</a:t>
+            </a:r>
+            <a:endParaRPr lang="en-US" sz="1600" dirty="0"/>
+          </a:p>
+        </p:txBody>
+      </p:sp>
+      <p:sp>
+        <p:nvSpPr>
+          <p:cNvPr id="13" name="Source"/>
+          <p:cNvSpPr txBox="1"/>
+          <p:nvPr/>
+        </p:nvSpPr>
+        <p:spPr>
+          <a:xfrm>
+            <a:off x="320040" y="6355080"/>
+            <a:ext cx="7132320" cy="274320"/>
+          </a:xfrm>
+          <a:prstGeom prst="rect">
+            <a:avLst/>
+          </a:prstGeom>
+          <a:noFill/>
+          <a:ln/>
+        </p:spPr>
+        <p:txBody>
+          <a:bodyPr wrap="square" lIns="0" tIns="0" rIns="0" bIns="0" rtlCol="0" anchor="ctr"/>
+          <a:lstStyle/>
+          <a:p>
+            <a:pPr indent="0" marL="0">
+              <a:buNone/>
+            </a:pPr>
+            <a:r>
+              <a:rPr lang="en-US" sz="1100" b="1" dirty="0">
+                <a:solidFill>
+                  <a:srgbClr val="1A1A1A"/>
+                </a:solidFill>
+              </a:rPr>
+              <a:t>Source: </a:t>
+            </a:r>
+            <a:pPr indent="0" marL="0">
+              <a:buNone/>
+            </a:pPr>
+            <a:r>
+              <a:rPr lang="en-US" sz="1100" dirty="0">
+                <a:solidFill>
+                  <a:srgbClr val="1A1A1A"/>
+                </a:solidFill>
+              </a:rPr>
+              <a:t>GE Aerospace earnings calls (2026), Aviation Business News (2025), FTAI Q2'24 call and Q2'26 supplement, GPS model</a:t>
+            </a:r>
+            <a:endParaRPr lang="en-US" sz="1100" dirty="0"/>
+          </a:p>
+        </p:txBody>
+      </p:sp>
+      <p:sp>
+        <p:nvSpPr>
+          <p:cNvPr id="25" name="Slide Number Placeholder 0"/>
+          <p:cNvSpPr>
+            <a:spLocks noGrp="1"/>
+          </p:cNvSpPr>
+          <p:nvPr>
+            <p:ph type="sldNum" sz="quarter" idx="4294967295"/>
+          </p:nvPr>
+        </p:nvSpPr>
+        <p:spPr>
+          <a:xfrm>
+            <a:off x="7635240" y="6327648"/>
+            <a:ext cx="411480" cy="274320"/>
+          </a:xfrm>
+          <a:prstGeom prst="rect">
+            <a:avLst/>
+          </a:prstGeom>
+          <a:extLst>
+            <a:ext uri="{C572A759-6A51-4108-AA02-DFA0A04FC94B}">
+              <ma14:wrappingTextBoxFlag xmlns:ma14="http://schemas.microsoft.com/office/mac/drawingml/2011/main" val="0"/>
+            </a:ext>
+          </a:extLst>
+        </p:spPr>
+        <p:txBody>
+          <a:bodyPr/>
+          <a:lstStyle>
+            <a:lvl1pPr>
+              <a:defRPr sz="1100">
+                <a:solidFill>
+                  <a:srgbClr val="1A1A1A"/>
+                </a:solidFill>
+              </a:defRPr>
+            </a:lvl1pPr>
+          </a:lstStyle>
+          <a:p>
+            <a:pPr algn="r"/>
+            <a:fld id="{F7021451-1387-4CA6-816F-3879F97B5CBC}" type="slidenum">
+              <a:rPr b="1" lang="en-US"/>
+              <a:t>13</a:t>
+            </a:fld>
+            <a:endParaRPr lang="en-US"/>
+          </a:p>
+        </p:txBody>
+      </p:sp>
+    </p:spTree>
+  </p:cSld>
+  <p:clrMapOvr>
+    <a:masterClrMapping/>
+  </p:clrMapOvr>
+</p:sld>
+</file>
+
+<file path=ppt/slides/slide14.xml><?xml version="1.0" encoding="utf-8"?>
+<p:sld xmlns:a="http://schemas.openxmlformats.org/drawingml/2006/main" xmlns:r="http://schemas.openxmlformats.org/officeDocument/2006/relationships" xmlns:p="http://schemas.openxmlformats.org/presentationml/2006/main">
+  <p:cSld name="Slide 14">
+    <p:spTree>
+      <p:nvGrpSpPr>
+        <p:cNvPr id="1" name=""/>
+        <p:cNvGrpSpPr/>
+        <p:nvPr/>
+      </p:nvGrpSpPr>
+      <p:grpSpPr>
+        <a:xfrm>
+          <a:off x="0" y="0"/>
+          <a:ext cx="0" cy="0"/>
+          <a:chOff x="0" y="0"/>
+          <a:chExt cx="0" cy="0"/>
+        </a:xfrm>
+      </p:grpSpPr>
+      <p:sp>
+        <p:nvSpPr>
+          <p:cNvPr id="2" name="Text 1"/>
+          <p:cNvSpPr/>
+          <p:nvPr>
+            <p:ph idx="102" type="title" hasCustomPrompt="1"/>
+          </p:nvPr>
+        </p:nvSpPr>
+        <p:spPr>
+          <a:xfrm>
+            <a:off x="320040" y="182880"/>
+            <a:ext cx="8503920" cy="640080"/>
+          </a:xfrm>
+          <a:prstGeom prst="rect">
+            <a:avLst/>
+          </a:prstGeom>
+          <a:noFill/>
+          <a:ln/>
+        </p:spPr>
+        <p:txBody>
+          <a:bodyPr wrap="square" lIns="0" tIns="0" rIns="0" bIns="0" rtlCol="0" anchor="ctr"/>
+          <a:lstStyle/>
+          <a:p>
+            <a:pPr algn="l" indent="0" marL="0">
+              <a:buNone/>
+            </a:pPr>
+            <a:r>
+              <a:rPr lang="en-US" sz="3200" b="1" dirty="0">
+                <a:solidFill>
+                  <a:schemeClr val="tx2"/>
+                </a:solidFill>
+              </a:rPr>
+              <a:t>Thesis 1b: Share Gains (2/5)</a:t>
+            </a:r>
+            <a:endParaRPr lang="en-US" sz="3200" dirty="0"/>
+          </a:p>
+        </p:txBody>
+      </p:sp>
+      <p:sp>
+        <p:nvSpPr>
+          <p:cNvPr id="3" name="Text 1"/>
+          <p:cNvSpPr/>
+          <p:nvPr>
+            <p:ph idx="103" type="body" hasCustomPrompt="1"/>
+          </p:nvPr>
+        </p:nvSpPr>
+        <p:spPr>
+          <a:xfrm>
+            <a:off x="320040" y="932688"/>
+            <a:ext cx="8503920" cy="566928"/>
+          </a:xfrm>
+          <a:prstGeom prst="rect">
+            <a:avLst/>
+          </a:prstGeom>
+          <a:noFill/>
+          <a:ln/>
+        </p:spPr>
+        <p:txBody>
+          <a:bodyPr wrap="square" lIns="0" tIns="0" rIns="0" bIns="0" rtlCol="0" anchor="t"/>
+          <a:lstStyle/>
+          <a:p>
+            <a:pPr algn="l" indent="0" marL="0">
+              <a:buNone/>
+            </a:pPr>
+            <a:r>
+              <a:rPr lang="en-US" sz="1700" b="1" dirty="0">
+                <a:solidFill>
+                  <a:schemeClr val="tx2"/>
+                </a:solidFill>
+              </a:rPr>
+              <a:t>Independent shops are clogged just as OEMs pivot to LEAP. CFM56 work needs a new home.</a:t>
+            </a:r>
+            <a:endParaRPr lang="en-US" sz="1700" dirty="0"/>
+          </a:p>
+        </p:txBody>
+      </p:sp>
+      <p:sp>
+        <p:nvSpPr>
+          <p:cNvPr id="4" name="MRO header"/>
+          <p:cNvSpPr txBox="1"/>
+          <p:nvPr/>
+        </p:nvSpPr>
+        <p:spPr>
+          <a:xfrm>
+            <a:off x="320040" y="1554480"/>
+            <a:ext cx="4023360" cy="365760"/>
+          </a:xfrm>
+          <a:prstGeom prst="rect">
+            <a:avLst/>
+          </a:prstGeom>
+          <a:noFill/>
+          <a:ln/>
+        </p:spPr>
+        <p:txBody>
+          <a:bodyPr wrap="square" lIns="0" tIns="0" rIns="0" bIns="0" rtlCol="0" anchor="b"/>
+          <a:lstStyle/>
+          <a:p>
+            <a:pPr algn="ctr" indent="0" marL="0">
+              <a:buNone/>
+            </a:pPr>
+            <a:r>
+              <a:rPr lang="en-US" sz="1600" b="1" dirty="0">
+                <a:solidFill>
+                  <a:srgbClr val="1A1A1A"/>
+                </a:solidFill>
+              </a:rPr>
+              <a:t>Independent Shops Are Clogged…</a:t>
+            </a:r>
+            <a:endParaRPr lang="en-US" sz="1600" dirty="0"/>
+          </a:p>
+        </p:txBody>
+      </p:sp>
+      <p:sp>
+        <p:nvSpPr>
+          <p:cNvPr id="5" name="MRO header rule"/>
+          <p:cNvSpPr/>
+          <p:nvPr/>
+        </p:nvSpPr>
+        <p:spPr>
+          <a:xfrm>
+            <a:off x="320040" y="1975104"/>
+            <a:ext cx="4023360" cy="0"/>
+          </a:xfrm>
+          <a:prstGeom prst="line">
+            <a:avLst/>
+          </a:prstGeom>
+          <a:noFill/>
+          <a:ln w="12700">
+            <a:solidFill>
+              <a:srgbClr val="1A1A1A"/>
+            </a:solidFill>
+            <a:prstDash val="solid"/>
+          </a:ln>
+        </p:spPr>
+      </p:sp>
+      <p:graphicFrame>
+        <p:nvGraphicFramePr>
+          <p:cNvPr id="6" name="Overhaul days chart" descr=""/>
+          <p:cNvGraphicFramePr/>
+          <p:nvPr/>
+        </p:nvGraphicFramePr>
+        <p:xfrm>
+          <a:off x="548640" y="2240280"/>
+          <a:ext cx="2286000" cy="2514600"/>
+        </p:xfrm>
+        <a:graphic xmlns:a="http://schemas.openxmlformats.org/drawingml/2006/main">
+          <a:graphicData uri="http://schemas.openxmlformats.org/drawingml/2006/chart">
+            <c:chart xmlns:c="http://schemas.openxmlformats.org/drawingml/2006/chart" r:id="rId1"/>
+          </a:graphicData>
+        </a:graphic>
+      </p:graphicFrame>
+      <p:sp>
+        <p:nvSpPr>
+          <p:cNvPr id="7" name="Pre-COVID days"/>
+          <p:cNvSpPr txBox="1"/>
+          <p:nvPr/>
+        </p:nvSpPr>
+        <p:spPr>
+          <a:xfrm>
+            <a:off x="685800" y="3200400"/>
+            <a:ext cx="914400" cy="320040"/>
+          </a:xfrm>
+          <a:prstGeom prst="rect">
+            <a:avLst/>
+          </a:prstGeom>
+          <a:noFill/>
+          <a:ln/>
+        </p:spPr>
+        <p:txBody>
+          <a:bodyPr wrap="square" lIns="0" tIns="0" rIns="0" bIns="0" rtlCol="0" anchor="ctr"/>
+          <a:lstStyle/>
+          <a:p>
+            <a:pPr algn="ctr" indent="0" marL="0">
+              <a:buNone/>
+            </a:pPr>
+            <a:r>
+              <a:rPr lang="en-US" sz="1600" b="1" dirty="0">
+                <a:solidFill>
+                  <a:srgbClr val="1A1A1A"/>
+                </a:solidFill>
+              </a:rPr>
+              <a:t>~60</a:t>
+            </a:r>
+            <a:endParaRPr lang="en-US" sz="1600" dirty="0"/>
+          </a:p>
+        </p:txBody>
+      </p:sp>
+      <p:sp>
+        <p:nvSpPr>
+          <p:cNvPr id="8" name="Today days"/>
+          <p:cNvSpPr txBox="1"/>
+          <p:nvPr/>
+        </p:nvSpPr>
+        <p:spPr>
+          <a:xfrm>
+            <a:off x="1737360" y="2148840"/>
+            <a:ext cx="1005840" cy="320040"/>
+          </a:xfrm>
+          <a:prstGeom prst="rect">
+            <a:avLst/>
+          </a:prstGeom>
+          <a:noFill/>
+          <a:ln/>
+        </p:spPr>
+        <p:txBody>
+          <a:bodyPr wrap="square" lIns="0" tIns="0" rIns="0" bIns="0" rtlCol="0" anchor="ctr"/>
+          <a:lstStyle/>
+          <a:p>
+            <a:pPr algn="ctr" indent="0" marL="0">
+              <a:buNone/>
+            </a:pPr>
+            <a:r>
+              <a:rPr lang="en-US" sz="1600" b="1" dirty="0">
+                <a:solidFill>
+                  <a:schemeClr val="tx2"/>
+                </a:solidFill>
+              </a:rPr>
+              <a:t>90–120</a:t>
+            </a:r>
+            <a:endParaRPr lang="en-US" sz="1600" dirty="0"/>
+          </a:p>
+        </p:txBody>
+      </p:sp>
+      <p:sp>
+        <p:nvSpPr>
+          <p:cNvPr id="9" name="Days caption"/>
+          <p:cNvSpPr txBox="1"/>
+          <p:nvPr/>
+        </p:nvSpPr>
+        <p:spPr>
+          <a:xfrm>
+            <a:off x="548640" y="4773168"/>
+            <a:ext cx="2286000" cy="256032"/>
+          </a:xfrm>
+          <a:prstGeom prst="rect">
+            <a:avLst/>
+          </a:prstGeom>
+          <a:noFill/>
+          <a:ln/>
+        </p:spPr>
+        <p:txBody>
+          <a:bodyPr wrap="square" lIns="0" tIns="0" rIns="0" bIns="0" rtlCol="0" anchor="ctr"/>
+          <a:lstStyle/>
+          <a:p>
+            <a:pPr algn="ctr" indent="0" marL="0">
+              <a:buNone/>
+            </a:pPr>
+            <a:r>
+              <a:rPr lang="en-US" sz="1100" i="1" dirty="0">
+                <a:solidFill>
+                  <a:schemeClr val="accent2"/>
+                </a:solidFill>
+              </a:rPr>
+              <a:t>CFM56 overhaul, days</a:t>
+            </a:r>
+            <a:endParaRPr lang="en-US" sz="1100" dirty="0"/>
+          </a:p>
+        </p:txBody>
+      </p:sp>
+      <p:sp>
+        <p:nvSpPr>
+          <p:cNvPr id="10" name="Slot wait stat"/>
+          <p:cNvSpPr txBox="1"/>
+          <p:nvPr/>
+        </p:nvSpPr>
+        <p:spPr>
+          <a:xfrm>
+            <a:off x="2880360" y="2743200"/>
+            <a:ext cx="1463040" cy="1280160"/>
+          </a:xfrm>
+          <a:prstGeom prst="rect">
+            <a:avLst/>
+          </a:prstGeom>
+          <a:noFill/>
+          <a:ln/>
+        </p:spPr>
+        <p:txBody>
+          <a:bodyPr wrap="square" lIns="0" tIns="0" rIns="0" bIns="0" rtlCol="0" anchor="ctr"/>
+          <a:lstStyle/>
+          <a:p>
+            <a:pPr algn="ctr" indent="0" marL="0">
+              <a:buNone/>
+            </a:pPr>
+            <a:r>
+              <a:rPr lang="en-US" sz="2600" b="1" dirty="0">
+                <a:solidFill>
+                  <a:schemeClr val="tx2"/>
+                </a:solidFill>
+              </a:rPr>
+              <a:t>+2–6</a:t>
+            </a:r>
+            <a:endParaRPr lang="en-US" sz="2600" dirty="0"/>
+          </a:p>
+          <a:p>
+            <a:pPr algn="ctr" indent="0" marL="0">
+              <a:buNone/>
+            </a:pPr>
+            <a:r>
+              <a:rPr lang="en-US" sz="1200" dirty="0">
+                <a:solidFill>
+                  <a:srgbClr val="1A1A1A"/>
+                </a:solidFill>
+              </a:rPr>
+              <a:t>months just to get a shop slot</a:t>
+            </a:r>
+            <a:endParaRPr lang="en-US" sz="2600" dirty="0"/>
+          </a:p>
+        </p:txBody>
+      </p:sp>
+      <p:sp>
+        <p:nvSpPr>
+          <p:cNvPr id="11" name="OEM header"/>
+          <p:cNvSpPr txBox="1"/>
+          <p:nvPr/>
+        </p:nvSpPr>
+        <p:spPr>
+          <a:xfrm>
+            <a:off x="4800600" y="1554480"/>
+            <a:ext cx="4023360" cy="365760"/>
+          </a:xfrm>
+          <a:prstGeom prst="rect">
+            <a:avLst/>
+          </a:prstGeom>
+          <a:noFill/>
+          <a:ln/>
+        </p:spPr>
+        <p:txBody>
+          <a:bodyPr wrap="square" lIns="0" tIns="0" rIns="0" bIns="0" rtlCol="0" anchor="b"/>
+          <a:lstStyle/>
+          <a:p>
+            <a:pPr algn="ctr" indent="0" marL="0">
+              <a:buNone/>
+            </a:pPr>
+            <a:r>
+              <a:rPr lang="en-US" sz="1600" b="1" dirty="0">
+                <a:solidFill>
+                  <a:srgbClr val="1A1A1A"/>
+                </a:solidFill>
+              </a:rPr>
+              <a:t>…While OEMs Move to LEAP</a:t>
+            </a:r>
+            <a:endParaRPr lang="en-US" sz="1600" dirty="0"/>
+          </a:p>
+        </p:txBody>
+      </p:sp>
+      <p:sp>
+        <p:nvSpPr>
+          <p:cNvPr id="12" name="OEM header rule"/>
+          <p:cNvSpPr/>
+          <p:nvPr/>
+        </p:nvSpPr>
+        <p:spPr>
+          <a:xfrm>
+            <a:off x="4800600" y="1975104"/>
+            <a:ext cx="4023360" cy="0"/>
+          </a:xfrm>
+          <a:prstGeom prst="line">
+            <a:avLst/>
+          </a:prstGeom>
+          <a:noFill/>
+          <a:ln w="12700">
+            <a:solidFill>
+              <a:srgbClr val="1A1A1A"/>
+            </a:solidFill>
+            <a:prstDash val="solid"/>
+          </a:ln>
+        </p:spPr>
+      </p:sp>
+      <p:graphicFrame>
+        <p:nvGraphicFramePr>
+          <p:cNvPr id="13" name="LEAP base chart" descr=""/>
+          <p:cNvGraphicFramePr/>
+          <p:nvPr/>
+        </p:nvGraphicFramePr>
+        <p:xfrm>
+          <a:off x="4937760" y="2240280"/>
+          <a:ext cx="2103120" cy="2514600"/>
+        </p:xfrm>
+        <a:graphic xmlns:a="http://schemas.openxmlformats.org/drawingml/2006/main">
+          <a:graphicData uri="http://schemas.openxmlformats.org/drawingml/2006/chart">
+            <c:chart xmlns:c="http://schemas.openxmlformats.org/drawingml/2006/chart" r:id="rId2"/>
+          </a:graphicData>
+        </a:graphic>
+      </p:graphicFrame>
+      <p:sp>
+        <p:nvSpPr>
+          <p:cNvPr id="14" name="LEAP caption"/>
+          <p:cNvSpPr txBox="1"/>
+          <p:nvPr/>
+        </p:nvSpPr>
+        <p:spPr>
+          <a:xfrm>
+            <a:off x="4937760" y="4773168"/>
+            <a:ext cx="2103120" cy="256032"/>
+          </a:xfrm>
+          <a:prstGeom prst="rect">
+            <a:avLst/>
+          </a:prstGeom>
+          <a:noFill/>
+          <a:ln/>
+        </p:spPr>
+        <p:txBody>
+          <a:bodyPr wrap="square" lIns="0" tIns="0" rIns="0" bIns="0" rtlCol="0" anchor="ctr"/>
+          <a:lstStyle/>
+          <a:p>
+            <a:pPr algn="ctr" indent="0" marL="0">
+              <a:buNone/>
+            </a:pPr>
+            <a:r>
+              <a:rPr lang="en-US" sz="1100" i="1" dirty="0">
+                <a:solidFill>
+                  <a:schemeClr val="accent2"/>
+                </a:solidFill>
+              </a:rPr>
+              <a:t>LEAP installed base</a:t>
+            </a:r>
+            <a:endParaRPr lang="en-US" sz="1100" dirty="0"/>
+          </a:p>
+        </p:txBody>
+      </p:sp>
+      <p:sp>
+        <p:nvSpPr>
+          <p:cNvPr id="15" name="LEAP stat 1"/>
+          <p:cNvSpPr txBox="1"/>
+          <p:nvPr/>
+        </p:nvSpPr>
+        <p:spPr>
+          <a:xfrm>
+            <a:off x="7132320" y="2331720"/>
+            <a:ext cx="1691640" cy="1097280"/>
+          </a:xfrm>
+          <a:prstGeom prst="rect">
+            <a:avLst/>
+          </a:prstGeom>
+          <a:noFill/>
+          <a:ln/>
+        </p:spPr>
+        <p:txBody>
+          <a:bodyPr wrap="square" lIns="0" tIns="0" rIns="0" bIns="0" rtlCol="0" anchor="ctr"/>
+          <a:lstStyle/>
+          <a:p>
+            <a:pPr algn="ctr" indent="0" marL="0">
+              <a:buNone/>
+            </a:pPr>
+            <a:r>
+              <a:rPr lang="en-US" sz="2400" b="1" dirty="0">
+                <a:solidFill>
+                  <a:schemeClr val="tx2"/>
+                </a:solidFill>
+              </a:rPr>
+              <a:t>+50%</a:t>
+            </a:r>
+            <a:endParaRPr lang="en-US" sz="2400" dirty="0"/>
+          </a:p>
+          <a:p>
+            <a:pPr algn="ctr" indent="0" marL="0">
+              <a:buNone/>
+            </a:pPr>
+            <a:r>
+              <a:rPr lang="en-US" sz="1100" dirty="0">
+                <a:solidFill>
+                  <a:srgbClr val="1A1A1A"/>
+                </a:solidFill>
+              </a:rPr>
+              <a:t>LEAP shop visits, y/y (GE, 2026)</a:t>
+            </a:r>
+            <a:endParaRPr lang="en-US" sz="2400" dirty="0"/>
+          </a:p>
+        </p:txBody>
+      </p:sp>
+      <p:sp>
+        <p:nvSpPr>
+          <p:cNvPr id="16" name="LEAP stat 2"/>
+          <p:cNvSpPr txBox="1"/>
+          <p:nvPr/>
+        </p:nvSpPr>
+        <p:spPr>
+          <a:xfrm>
+            <a:off x="7132320" y="3566160"/>
+            <a:ext cx="1691640" cy="1097280"/>
+          </a:xfrm>
+          <a:prstGeom prst="rect">
+            <a:avLst/>
+          </a:prstGeom>
+          <a:noFill/>
+          <a:ln/>
+        </p:spPr>
+        <p:txBody>
+          <a:bodyPr wrap="square" lIns="0" tIns="0" rIns="0" bIns="0" rtlCol="0" anchor="ctr"/>
+          <a:lstStyle/>
+          <a:p>
+            <a:pPr algn="ctr" indent="0" marL="0">
+              <a:buNone/>
+            </a:pPr>
+            <a:r>
+              <a:rPr lang="en-US" sz="2400" b="1" dirty="0">
+                <a:solidFill>
+                  <a:schemeClr val="tx2"/>
+                </a:solidFill>
+              </a:rPr>
+              <a:t>~2x</a:t>
+            </a:r>
+            <a:endParaRPr lang="en-US" sz="2400" dirty="0"/>
+          </a:p>
+          <a:p>
+            <a:pPr algn="ctr" indent="0" marL="0">
+              <a:buNone/>
+            </a:pPr>
+            <a:r>
+              <a:rPr lang="en-US" sz="1100" dirty="0">
+                <a:solidFill>
+                  <a:srgbClr val="1A1A1A"/>
+                </a:solidFill>
+              </a:rPr>
+              <a:t>GE's LEAP repair capacity, from ~$500M of spend</a:t>
+            </a:r>
+            <a:endParaRPr lang="en-US" sz="2400" dirty="0"/>
+          </a:p>
+        </p:txBody>
+      </p:sp>
+      <p:sp>
+        <p:nvSpPr>
+          <p:cNvPr id="17" name="Takeaway"/>
+          <p:cNvSpPr txBox="1"/>
+          <p:nvPr/>
+        </p:nvSpPr>
+        <p:spPr>
+          <a:xfrm>
+            <a:off x="320040" y="5504688"/>
+            <a:ext cx="8503920" cy="566928"/>
+          </a:xfrm>
+          <a:prstGeom prst="rect">
+            <a:avLst/>
+          </a:prstGeom>
+          <a:solidFill>
+            <a:srgbClr val="0A1C58"/>
+          </a:solidFill>
+          <a:ln/>
+        </p:spPr>
+        <p:txBody>
+          <a:bodyPr wrap="square" lIns="101600" tIns="25400" rIns="101600" bIns="25400" rtlCol="0" anchor="ctr"/>
+          <a:lstStyle/>
+          <a:p>
+            <a:pPr algn="ctr" indent="0" marL="0">
+              <a:buNone/>
+            </a:pPr>
+            <a:r>
+              <a:rPr lang="en-US" sz="1700" b="1" dirty="0">
+                <a:solidFill>
+                  <a:schemeClr val="bg1"/>
+                </a:solidFill>
+              </a:rPr>
+              <a:t>OEM slots go to LEAP as independent shops clog. CFM56 owners need a faster option.</a:t>
+            </a:r>
+            <a:endParaRPr lang="en-US" sz="1700" dirty="0"/>
+          </a:p>
+        </p:txBody>
+      </p:sp>
+      <p:sp>
+        <p:nvSpPr>
+          <p:cNvPr id="18" name="Source"/>
+          <p:cNvSpPr txBox="1"/>
+          <p:nvPr/>
+        </p:nvSpPr>
+        <p:spPr>
+          <a:xfrm>
+            <a:off x="320040" y="6355080"/>
+            <a:ext cx="7132320" cy="274320"/>
+          </a:xfrm>
+          <a:prstGeom prst="rect">
+            <a:avLst/>
+          </a:prstGeom>
+          <a:noFill/>
+          <a:ln/>
+        </p:spPr>
+        <p:txBody>
+          <a:bodyPr wrap="square" lIns="0" tIns="0" rIns="0" bIns="0" rtlCol="0" anchor="ctr"/>
+          <a:lstStyle/>
+          <a:p>
+            <a:pPr indent="0" marL="0">
+              <a:buNone/>
+            </a:pPr>
+            <a:r>
+              <a:rPr lang="en-US" sz="1100" b="1" dirty="0">
+                <a:solidFill>
+                  <a:srgbClr val="1A1A1A"/>
+                </a:solidFill>
+              </a:rPr>
+              <a:t>Source: </a:t>
+            </a:r>
+            <a:pPr indent="0" marL="0">
+              <a:buNone/>
+            </a:pPr>
+            <a:r>
+              <a:rPr lang="en-US" sz="1100" dirty="0">
+                <a:solidFill>
+                  <a:srgbClr val="1A1A1A"/>
+                </a:solidFill>
+              </a:rPr>
+              <a:t>Aviation Business News (2025); Bain (2024); GE Aerospace Q1/Q2'26 earnings calls</a:t>
+            </a:r>
+            <a:endParaRPr lang="en-US" sz="1100" dirty="0"/>
+          </a:p>
+        </p:txBody>
+      </p:sp>
+      <p:sp>
+        <p:nvSpPr>
+          <p:cNvPr id="25" name="Slide Number Placeholder 0"/>
+          <p:cNvSpPr>
+            <a:spLocks noGrp="1"/>
+          </p:cNvSpPr>
+          <p:nvPr>
+            <p:ph type="sldNum" sz="quarter" idx="4294967295"/>
+          </p:nvPr>
+        </p:nvSpPr>
+        <p:spPr>
+          <a:xfrm>
+            <a:off x="7635240" y="6327648"/>
+            <a:ext cx="411480" cy="274320"/>
+          </a:xfrm>
+          <a:prstGeom prst="rect">
+            <a:avLst/>
+          </a:prstGeom>
+          <a:extLst>
+            <a:ext uri="{C572A759-6A51-4108-AA02-DFA0A04FC94B}">
+              <ma14:wrappingTextBoxFlag xmlns:ma14="http://schemas.microsoft.com/office/mac/drawingml/2011/main" val="0"/>
+            </a:ext>
+          </a:extLst>
+        </p:spPr>
+        <p:txBody>
+          <a:bodyPr/>
+          <a:lstStyle>
+            <a:lvl1pPr>
+              <a:defRPr sz="1100">
+                <a:solidFill>
+                  <a:srgbClr val="1A1A1A"/>
+                </a:solidFill>
+              </a:defRPr>
+            </a:lvl1pPr>
+          </a:lstStyle>
+          <a:p>
+            <a:pPr algn="r"/>
+            <a:fld id="{F7021451-1387-4CA6-816F-3879F97B5CBC}" type="slidenum">
+              <a:rPr b="1" lang="en-US"/>
+              <a:t>14</a:t>
+            </a:fld>
+            <a:endParaRPr lang="en-US"/>
+          </a:p>
+        </p:txBody>
+      </p:sp>
+    </p:spTree>
+  </p:cSld>
+  <p:clrMapOvr>
+    <a:masterClrMapping/>
+  </p:clrMapOvr>
+</p:sld>
+</file>
+
+<file path=ppt/slides/slide15.xml><?xml version="1.0" encoding="utf-8"?>
+<p:sld xmlns:a="http://schemas.openxmlformats.org/drawingml/2006/main" xmlns:r="http://schemas.openxmlformats.org/officeDocument/2006/relationships" xmlns:p="http://schemas.openxmlformats.org/presentationml/2006/main">
+  <p:cSld name="Slide 15">
+    <p:spTree>
+      <p:nvGrpSpPr>
+        <p:cNvPr id="1" name=""/>
+        <p:cNvGrpSpPr/>
+        <p:nvPr/>
+      </p:nvGrpSpPr>
+      <p:grpSpPr>
+        <a:xfrm>
+          <a:off x="0" y="0"/>
+          <a:ext cx="0" cy="0"/>
+          <a:chOff x="0" y="0"/>
+          <a:chExt cx="0" cy="0"/>
+        </a:xfrm>
+      </p:grpSpPr>
+      <p:sp>
+        <p:nvSpPr>
+          <p:cNvPr id="2" name="Text 1"/>
+          <p:cNvSpPr/>
+          <p:nvPr>
+            <p:ph idx="102" type="title" hasCustomPrompt="1"/>
+          </p:nvPr>
+        </p:nvSpPr>
+        <p:spPr>
+          <a:xfrm>
+            <a:off x="320040" y="182880"/>
+            <a:ext cx="8503920" cy="640080"/>
+          </a:xfrm>
+          <a:prstGeom prst="rect">
+            <a:avLst/>
+          </a:prstGeom>
+          <a:noFill/>
+          <a:ln/>
+        </p:spPr>
+        <p:txBody>
+          <a:bodyPr wrap="square" lIns="0" tIns="0" rIns="0" bIns="0" rtlCol="0" anchor="ctr"/>
+          <a:lstStyle/>
+          <a:p>
+            <a:pPr algn="l" indent="0" marL="0">
+              <a:buNone/>
+            </a:pPr>
+            <a:r>
+              <a:rPr lang="en-US" sz="3200" b="1" dirty="0">
+                <a:solidFill>
+                  <a:schemeClr val="tx2"/>
+                </a:solidFill>
+              </a:rPr>
+              <a:t>Thesis 1b: Share Gains (3/5)</a:t>
+            </a:r>
+            <a:endParaRPr lang="en-US" sz="3200" dirty="0"/>
+          </a:p>
+        </p:txBody>
+      </p:sp>
+      <p:sp>
+        <p:nvSpPr>
+          <p:cNvPr id="3" name="Text 1"/>
+          <p:cNvSpPr/>
+          <p:nvPr>
+            <p:ph idx="103" type="body" hasCustomPrompt="1"/>
+          </p:nvPr>
+        </p:nvSpPr>
+        <p:spPr>
+          <a:xfrm>
+            <a:off x="320040" y="932688"/>
+            <a:ext cx="8503920" cy="566928"/>
+          </a:xfrm>
+          <a:prstGeom prst="rect">
+            <a:avLst/>
+          </a:prstGeom>
+          <a:noFill/>
+          <a:ln/>
+        </p:spPr>
+        <p:txBody>
+          <a:bodyPr wrap="square" lIns="0" tIns="0" rIns="0" bIns="0" rtlCol="0" anchor="t"/>
+          <a:lstStyle/>
+          <a:p>
+            <a:pPr algn="l" indent="0" marL="0">
+              <a:buNone/>
+            </a:pPr>
+            <a:r>
+              <a:rPr lang="en-US" sz="1700" b="1" dirty="0">
+                <a:solidFill>
+                  <a:schemeClr val="tx2"/>
+                </a:solidFill>
+              </a:rPr>
+              <a:t>A shop visit grounds an engine for months. FTAI's module swap gets it flying in weeks.</a:t>
+            </a:r>
+            <a:endParaRPr lang="en-US" sz="1700" dirty="0"/>
+          </a:p>
+        </p:txBody>
+      </p:sp>
+      <p:sp>
+        <p:nvSpPr>
+          <p:cNvPr id="4" name="Timeline label"/>
+          <p:cNvSpPr txBox="1"/>
+          <p:nvPr/>
+        </p:nvSpPr>
+        <p:spPr>
+          <a:xfrm>
+            <a:off x="2148840" y="1600200"/>
+            <a:ext cx="6400800" cy="274320"/>
+          </a:xfrm>
+          <a:prstGeom prst="rect">
+            <a:avLst/>
+          </a:prstGeom>
+          <a:noFill/>
+          <a:ln/>
+        </p:spPr>
+        <p:txBody>
+          <a:bodyPr wrap="square" lIns="0" tIns="0" rIns="0" bIns="0" rtlCol="0" anchor="ctr"/>
+          <a:lstStyle/>
+          <a:p>
+            <a:pPr algn="l" indent="0" marL="0">
+              <a:buNone/>
+            </a:pPr>
+            <a:r>
+              <a:rPr lang="en-US" sz="1200" i="1" dirty="0">
+                <a:solidFill>
+                  <a:schemeClr val="accent2"/>
+                </a:solidFill>
+              </a:rPr>
+              <a:t>Days off wing</a:t>
+            </a:r>
+            <a:endParaRPr lang="en-US" sz="1200" dirty="0"/>
+          </a:p>
+        </p:txBody>
+      </p:sp>
+      <p:sp>
+        <p:nvSpPr>
+          <p:cNvPr id="5" name="Grid 0"/>
+          <p:cNvSpPr/>
+          <p:nvPr/>
+        </p:nvSpPr>
+        <p:spPr>
+          <a:xfrm>
+            <a:off x="2148840" y="1920240"/>
+            <a:ext cx="0" cy="2743200"/>
+          </a:xfrm>
+          <a:prstGeom prst="line">
+            <a:avLst/>
+          </a:prstGeom>
+          <a:noFill/>
+          <a:ln w="9525">
+            <a:solidFill>
+              <a:srgbClr val="E3E0DC"/>
+            </a:solidFill>
+            <a:prstDash val="solid"/>
+          </a:ln>
+        </p:spPr>
+      </p:sp>
+      <p:sp>
+        <p:nvSpPr>
+          <p:cNvPr id="6" name="Tick 0"/>
+          <p:cNvSpPr txBox="1"/>
+          <p:nvPr/>
+        </p:nvSpPr>
+        <p:spPr>
+          <a:xfrm>
+            <a:off x="1874520" y="4663440"/>
+            <a:ext cx="548640" cy="228600"/>
+          </a:xfrm>
+          <a:prstGeom prst="rect">
+            <a:avLst/>
+          </a:prstGeom>
+          <a:noFill/>
+          <a:ln/>
+        </p:spPr>
+        <p:txBody>
+          <a:bodyPr wrap="square" lIns="0" tIns="0" rIns="0" bIns="0" rtlCol="0" anchor="ctr"/>
+          <a:lstStyle/>
+          <a:p>
+            <a:pPr algn="ctr" indent="0" marL="0">
+              <a:buNone/>
+            </a:pPr>
+            <a:r>
+              <a:rPr lang="en-US" sz="1000" dirty="0">
+                <a:solidFill>
+                  <a:schemeClr val="accent2"/>
+                </a:solidFill>
+              </a:rPr>
+              <a:t>0</a:t>
+            </a:r>
+            <a:endParaRPr lang="en-US" sz="1000" dirty="0"/>
+          </a:p>
+        </p:txBody>
+      </p:sp>
+      <p:sp>
+        <p:nvSpPr>
+          <p:cNvPr id="7" name="Grid 30"/>
+          <p:cNvSpPr/>
+          <p:nvPr/>
+        </p:nvSpPr>
+        <p:spPr>
+          <a:xfrm>
+            <a:off x="3215640" y="1920240"/>
+            <a:ext cx="0" cy="2743200"/>
+          </a:xfrm>
+          <a:prstGeom prst="line">
+            <a:avLst/>
+          </a:prstGeom>
+          <a:noFill/>
+          <a:ln w="9525">
+            <a:solidFill>
+              <a:srgbClr val="E3E0DC"/>
+            </a:solidFill>
+            <a:prstDash val="solid"/>
+          </a:ln>
+        </p:spPr>
+      </p:sp>
+      <p:sp>
+        <p:nvSpPr>
+          <p:cNvPr id="8" name="Tick 30"/>
+          <p:cNvSpPr txBox="1"/>
+          <p:nvPr/>
+        </p:nvSpPr>
+        <p:spPr>
+          <a:xfrm>
+            <a:off x="2941320" y="4663440"/>
+            <a:ext cx="548640" cy="228600"/>
+          </a:xfrm>
+          <a:prstGeom prst="rect">
+            <a:avLst/>
+          </a:prstGeom>
+          <a:noFill/>
+          <a:ln/>
+        </p:spPr>
+        <p:txBody>
+          <a:bodyPr wrap="square" lIns="0" tIns="0" rIns="0" bIns="0" rtlCol="0" anchor="ctr"/>
+          <a:lstStyle/>
+          <a:p>
+            <a:pPr algn="ctr" indent="0" marL="0">
+              <a:buNone/>
+            </a:pPr>
+            <a:r>
+              <a:rPr lang="en-US" sz="1000" dirty="0">
+                <a:solidFill>
+                  <a:schemeClr val="accent2"/>
+                </a:solidFill>
+              </a:rPr>
+              <a:t>30</a:t>
+            </a:r>
+            <a:endParaRPr lang="en-US" sz="1000" dirty="0"/>
+          </a:p>
+        </p:txBody>
+      </p:sp>
+      <p:sp>
+        <p:nvSpPr>
+          <p:cNvPr id="9" name="Grid 60"/>
+          <p:cNvSpPr/>
+          <p:nvPr/>
+        </p:nvSpPr>
+        <p:spPr>
+          <a:xfrm>
+            <a:off x="4282440" y="1920240"/>
+            <a:ext cx="0" cy="2743200"/>
+          </a:xfrm>
+          <a:prstGeom prst="line">
+            <a:avLst/>
+          </a:prstGeom>
+          <a:noFill/>
+          <a:ln w="9525">
+            <a:solidFill>
+              <a:srgbClr val="E3E0DC"/>
+            </a:solidFill>
+            <a:prstDash val="solid"/>
+          </a:ln>
+        </p:spPr>
+      </p:sp>
+      <p:sp>
+        <p:nvSpPr>
+          <p:cNvPr id="10" name="Tick 60"/>
+          <p:cNvSpPr txBox="1"/>
+          <p:nvPr/>
+        </p:nvSpPr>
+        <p:spPr>
+          <a:xfrm>
+            <a:off x="4008120" y="4663440"/>
+            <a:ext cx="548640" cy="228600"/>
+          </a:xfrm>
+          <a:prstGeom prst="rect">
+            <a:avLst/>
+          </a:prstGeom>
+          <a:noFill/>
+          <a:ln/>
+        </p:spPr>
+        <p:txBody>
+          <a:bodyPr wrap="square" lIns="0" tIns="0" rIns="0" bIns="0" rtlCol="0" anchor="ctr"/>
+          <a:lstStyle/>
+          <a:p>
+            <a:pPr algn="ctr" indent="0" marL="0">
+              <a:buNone/>
+            </a:pPr>
+            <a:r>
+              <a:rPr lang="en-US" sz="1000" dirty="0">
+                <a:solidFill>
+                  <a:schemeClr val="accent2"/>
+                </a:solidFill>
+              </a:rPr>
+              <a:t>60</a:t>
+            </a:r>
+            <a:endParaRPr lang="en-US" sz="1000" dirty="0"/>
+          </a:p>
+        </p:txBody>
+      </p:sp>
+      <p:sp>
+        <p:nvSpPr>
+          <p:cNvPr id="11" name="Grid 90"/>
+          <p:cNvSpPr/>
+          <p:nvPr/>
+        </p:nvSpPr>
+        <p:spPr>
+          <a:xfrm>
+            <a:off x="5349240" y="1920240"/>
+            <a:ext cx="0" cy="2743200"/>
+          </a:xfrm>
+          <a:prstGeom prst="line">
+            <a:avLst/>
+          </a:prstGeom>
+          <a:noFill/>
+          <a:ln w="9525">
+            <a:solidFill>
+              <a:srgbClr val="E3E0DC"/>
+            </a:solidFill>
+            <a:prstDash val="solid"/>
+          </a:ln>
+        </p:spPr>
+      </p:sp>
+      <p:sp>
+        <p:nvSpPr>
+          <p:cNvPr id="12" name="Tick 90"/>
+          <p:cNvSpPr txBox="1"/>
+          <p:nvPr/>
+        </p:nvSpPr>
+        <p:spPr>
+          <a:xfrm>
+            <a:off x="5074920" y="4663440"/>
+            <a:ext cx="548640" cy="228600"/>
+          </a:xfrm>
+          <a:prstGeom prst="rect">
+            <a:avLst/>
+          </a:prstGeom>
+          <a:noFill/>
+          <a:ln/>
+        </p:spPr>
+        <p:txBody>
+          <a:bodyPr wrap="square" lIns="0" tIns="0" rIns="0" bIns="0" rtlCol="0" anchor="ctr"/>
+          <a:lstStyle/>
+          <a:p>
+            <a:pPr algn="ctr" indent="0" marL="0">
+              <a:buNone/>
+            </a:pPr>
+            <a:r>
+              <a:rPr lang="en-US" sz="1000" dirty="0">
+                <a:solidFill>
+                  <a:schemeClr val="accent2"/>
+                </a:solidFill>
+              </a:rPr>
+              <a:t>90</a:t>
+            </a:r>
+            <a:endParaRPr lang="en-US" sz="1000" dirty="0"/>
+          </a:p>
+        </p:txBody>
+      </p:sp>
+      <p:sp>
+        <p:nvSpPr>
+          <p:cNvPr id="13" name="Grid 120"/>
+          <p:cNvSpPr/>
+          <p:nvPr/>
+        </p:nvSpPr>
+        <p:spPr>
+          <a:xfrm>
+            <a:off x="6416040" y="1920240"/>
+            <a:ext cx="0" cy="2743200"/>
+          </a:xfrm>
+          <a:prstGeom prst="line">
+            <a:avLst/>
+          </a:prstGeom>
+          <a:noFill/>
+          <a:ln w="9525">
+            <a:solidFill>
+              <a:srgbClr val="E3E0DC"/>
+            </a:solidFill>
+            <a:prstDash val="solid"/>
+          </a:ln>
+        </p:spPr>
+      </p:sp>
+      <p:sp>
+        <p:nvSpPr>
+          <p:cNvPr id="14" name="Tick 120"/>
+          <p:cNvSpPr txBox="1"/>
+          <p:nvPr/>
+        </p:nvSpPr>
+        <p:spPr>
+          <a:xfrm>
+            <a:off x="6141720" y="4663440"/>
+            <a:ext cx="548640" cy="228600"/>
+          </a:xfrm>
+          <a:prstGeom prst="rect">
+            <a:avLst/>
+          </a:prstGeom>
+          <a:noFill/>
+          <a:ln/>
+        </p:spPr>
+        <p:txBody>
+          <a:bodyPr wrap="square" lIns="0" tIns="0" rIns="0" bIns="0" rtlCol="0" anchor="ctr"/>
+          <a:lstStyle/>
+          <a:p>
+            <a:pPr algn="ctr" indent="0" marL="0">
+              <a:buNone/>
+            </a:pPr>
+            <a:r>
+              <a:rPr lang="en-US" sz="1000" dirty="0">
+                <a:solidFill>
+                  <a:schemeClr val="accent2"/>
+                </a:solidFill>
+              </a:rPr>
+              <a:t>120</a:t>
+            </a:r>
+            <a:endParaRPr lang="en-US" sz="1000" dirty="0"/>
+          </a:p>
+        </p:txBody>
+      </p:sp>
+      <p:sp>
+        <p:nvSpPr>
+          <p:cNvPr id="15" name="Grid 150"/>
+          <p:cNvSpPr/>
+          <p:nvPr/>
+        </p:nvSpPr>
+        <p:spPr>
+          <a:xfrm>
+            <a:off x="7482840" y="1920240"/>
+            <a:ext cx="0" cy="2743200"/>
+          </a:xfrm>
+          <a:prstGeom prst="line">
+            <a:avLst/>
+          </a:prstGeom>
+          <a:noFill/>
+          <a:ln w="9525">
+            <a:solidFill>
+              <a:srgbClr val="E3E0DC"/>
+            </a:solidFill>
+            <a:prstDash val="solid"/>
+          </a:ln>
+        </p:spPr>
+      </p:sp>
+      <p:sp>
+        <p:nvSpPr>
+          <p:cNvPr id="16" name="Tick 150"/>
+          <p:cNvSpPr txBox="1"/>
+          <p:nvPr/>
+        </p:nvSpPr>
+        <p:spPr>
+          <a:xfrm>
+            <a:off x="7208520" y="4663440"/>
+            <a:ext cx="548640" cy="228600"/>
+          </a:xfrm>
+          <a:prstGeom prst="rect">
+            <a:avLst/>
+          </a:prstGeom>
+          <a:noFill/>
+          <a:ln/>
+        </p:spPr>
+        <p:txBody>
+          <a:bodyPr wrap="square" lIns="0" tIns="0" rIns="0" bIns="0" rtlCol="0" anchor="ctr"/>
+          <a:lstStyle/>
+          <a:p>
+            <a:pPr algn="ctr" indent="0" marL="0">
+              <a:buNone/>
+            </a:pPr>
+            <a:r>
+              <a:rPr lang="en-US" sz="1000" dirty="0">
+                <a:solidFill>
+                  <a:schemeClr val="accent2"/>
+                </a:solidFill>
+              </a:rPr>
+              <a:t>150</a:t>
+            </a:r>
+            <a:endParaRPr lang="en-US" sz="1000" dirty="0"/>
+          </a:p>
+        </p:txBody>
+      </p:sp>
+      <p:sp>
+        <p:nvSpPr>
+          <p:cNvPr id="17" name="Grid 180"/>
+          <p:cNvSpPr/>
+          <p:nvPr/>
+        </p:nvSpPr>
+        <p:spPr>
+          <a:xfrm>
+            <a:off x="8549640" y="1920240"/>
+            <a:ext cx="0" cy="2743200"/>
+          </a:xfrm>
+          <a:prstGeom prst="line">
+            <a:avLst/>
+          </a:prstGeom>
+          <a:noFill/>
+          <a:ln w="9525">
+            <a:solidFill>
+              <a:srgbClr val="E3E0DC"/>
+            </a:solidFill>
+            <a:prstDash val="solid"/>
+          </a:ln>
+        </p:spPr>
+      </p:sp>
+      <p:sp>
+        <p:nvSpPr>
+          <p:cNvPr id="18" name="Tick 180"/>
+          <p:cNvSpPr txBox="1"/>
+          <p:nvPr/>
+        </p:nvSpPr>
+        <p:spPr>
+          <a:xfrm>
+            <a:off x="8275320" y="4663440"/>
+            <a:ext cx="548640" cy="228600"/>
+          </a:xfrm>
+          <a:prstGeom prst="rect">
+            <a:avLst/>
+          </a:prstGeom>
+          <a:noFill/>
+          <a:ln/>
+        </p:spPr>
+        <p:txBody>
+          <a:bodyPr wrap="square" lIns="0" tIns="0" rIns="0" bIns="0" rtlCol="0" anchor="ctr"/>
+          <a:lstStyle/>
+          <a:p>
+            <a:pPr algn="ctr" indent="0" marL="0">
+              <a:buNone/>
+            </a:pPr>
+            <a:r>
+              <a:rPr lang="en-US" sz="1000" dirty="0">
+                <a:solidFill>
+                  <a:schemeClr val="accent2"/>
+                </a:solidFill>
+              </a:rPr>
+              <a:t>180</a:t>
+            </a:r>
+            <a:endParaRPr lang="en-US" sz="1000" dirty="0"/>
+          </a:p>
+        </p:txBody>
+      </p:sp>
+      <p:sp>
+        <p:nvSpPr>
+          <p:cNvPr id="19" name="Shop visit label"/>
+          <p:cNvSpPr txBox="1"/>
+          <p:nvPr/>
+        </p:nvSpPr>
+        <p:spPr>
+          <a:xfrm>
+            <a:off x="320040" y="2103120"/>
+            <a:ext cx="1737360" cy="685800"/>
+          </a:xfrm>
+          <a:prstGeom prst="rect">
+            <a:avLst/>
+          </a:prstGeom>
+          <a:noFill/>
+          <a:ln/>
+        </p:spPr>
+        <p:txBody>
+          <a:bodyPr wrap="square" lIns="0" tIns="0" rIns="0" bIns="0" rtlCol="0" anchor="ctr"/>
+          <a:lstStyle/>
+          <a:p>
+            <a:pPr algn="r" indent="0" marL="0">
+              <a:buNone/>
+            </a:pPr>
+            <a:r>
+              <a:rPr lang="en-US" sz="1400" b="1" dirty="0">
+                <a:solidFill>
+                  <a:srgbClr val="1A1A1A"/>
+                </a:solidFill>
+              </a:rPr>
+              <a:t>Typical shop visit</a:t>
+            </a:r>
+            <a:endParaRPr lang="en-US" sz="1400" dirty="0"/>
+          </a:p>
+          <a:p>
+            <a:pPr algn="r" indent="0" marL="0">
+              <a:buNone/>
+            </a:pPr>
+            <a:r>
+              <a:rPr lang="en-US" sz="1200" dirty="0">
+                <a:solidFill>
+                  <a:srgbClr val="1A1A1A"/>
+                </a:solidFill>
+              </a:rPr>
+              <a:t>120–180 days</a:t>
+            </a:r>
+            <a:endParaRPr lang="en-US" sz="1400" dirty="0"/>
+          </a:p>
+        </p:txBody>
+      </p:sp>
+      <p:sp>
+        <p:nvSpPr>
+          <p:cNvPr id="20" name="Shop step 1"/>
+          <p:cNvSpPr/>
+          <p:nvPr/>
+        </p:nvSpPr>
+        <p:spPr>
+          <a:xfrm>
+            <a:off x="2148840" y="2148840"/>
+            <a:ext cx="1532128" cy="594360"/>
+          </a:xfrm>
+          <a:prstGeom prst="chevron">
+            <a:avLst/>
+          </a:prstGeom>
+          <a:solidFill>
+            <a:srgbClr val="DCD8D3"/>
+          </a:solidFill>
+          <a:ln/>
+        </p:spPr>
+        <p:txBody>
+          <a:bodyPr wrap="square" lIns="0" tIns="0" rIns="0" bIns="0" rtlCol="0" anchor="ctr"/>
+          <a:lstStyle/>
+          <a:p>
+            <a:pPr algn="ctr" indent="0" marL="0">
+              <a:buNone/>
+            </a:pPr>
+            <a:r>
+              <a:rPr lang="en-US" sz="900" b="1" dirty="0">
+                <a:solidFill>
+                  <a:schemeClr val="tx2"/>
+                </a:solidFill>
+              </a:rPr>
+              <a:t>Wait for slot</a:t>
+            </a:r>
+            <a:endParaRPr lang="en-US" sz="900" dirty="0"/>
+          </a:p>
+        </p:txBody>
+      </p:sp>
+      <p:sp>
+        <p:nvSpPr>
+          <p:cNvPr id="21" name="Shop step 2"/>
+          <p:cNvSpPr/>
+          <p:nvPr/>
+        </p:nvSpPr>
+        <p:spPr>
+          <a:xfrm>
+            <a:off x="3571240" y="2148840"/>
+            <a:ext cx="1105408" cy="594360"/>
+          </a:xfrm>
+          <a:prstGeom prst="chevron">
+            <a:avLst/>
+          </a:prstGeom>
+          <a:solidFill>
+            <a:srgbClr val="B5AEA9"/>
+          </a:solidFill>
+          <a:ln/>
+        </p:spPr>
+        <p:txBody>
+          <a:bodyPr wrap="square" lIns="0" tIns="0" rIns="0" bIns="0" rtlCol="0" anchor="ctr"/>
+          <a:lstStyle/>
+          <a:p>
+            <a:pPr algn="ctr" indent="0" marL="0">
+              <a:buNone/>
+            </a:pPr>
+            <a:r>
+              <a:rPr lang="en-US" sz="900" b="1" dirty="0">
+                <a:solidFill>
+                  <a:schemeClr val="tx2"/>
+                </a:solidFill>
+              </a:rPr>
+              <a:t>Strip</a:t>
+            </a:r>
+            <a:endParaRPr lang="en-US" sz="900" dirty="0"/>
+          </a:p>
+        </p:txBody>
+      </p:sp>
+      <p:sp>
+        <p:nvSpPr>
+          <p:cNvPr id="22" name="Shop step 3"/>
+          <p:cNvSpPr/>
+          <p:nvPr/>
+        </p:nvSpPr>
+        <p:spPr>
+          <a:xfrm>
+            <a:off x="4566920" y="2148840"/>
+            <a:ext cx="1532128" cy="594360"/>
+          </a:xfrm>
+          <a:prstGeom prst="chevron">
+            <a:avLst/>
+          </a:prstGeom>
+          <a:solidFill>
+            <a:srgbClr val="DCD8D3"/>
+          </a:solidFill>
+          <a:ln/>
+        </p:spPr>
+        <p:txBody>
+          <a:bodyPr wrap="square" lIns="0" tIns="0" rIns="0" bIns="0" rtlCol="0" anchor="ctr"/>
+          <a:lstStyle/>
+          <a:p>
+            <a:pPr algn="ctr" indent="0" marL="0">
+              <a:buNone/>
+            </a:pPr>
+            <a:r>
+              <a:rPr lang="en-US" sz="900" b="1" dirty="0">
+                <a:solidFill>
+                  <a:schemeClr val="tx2"/>
+                </a:solidFill>
+              </a:rPr>
+              <a:t>Wait for parts</a:t>
+            </a:r>
+            <a:endParaRPr lang="en-US" sz="900" dirty="0"/>
+          </a:p>
+        </p:txBody>
+      </p:sp>
+      <p:sp>
+        <p:nvSpPr>
+          <p:cNvPr id="23" name="Shop step 4"/>
+          <p:cNvSpPr/>
+          <p:nvPr/>
+        </p:nvSpPr>
+        <p:spPr>
+          <a:xfrm>
+            <a:off x="5989320" y="2148840"/>
+            <a:ext cx="1247648" cy="594360"/>
+          </a:xfrm>
+          <a:prstGeom prst="chevron">
+            <a:avLst/>
+          </a:prstGeom>
+          <a:solidFill>
+            <a:srgbClr val="B5AEA9"/>
+          </a:solidFill>
+          <a:ln/>
+        </p:spPr>
+        <p:txBody>
+          <a:bodyPr wrap="square" lIns="0" tIns="0" rIns="0" bIns="0" rtlCol="0" anchor="ctr"/>
+          <a:lstStyle/>
+          <a:p>
+            <a:pPr algn="ctr" indent="0" marL="0">
+              <a:buNone/>
+            </a:pPr>
+            <a:r>
+              <a:rPr lang="en-US" sz="900" b="1" dirty="0">
+                <a:solidFill>
+                  <a:schemeClr val="tx2"/>
+                </a:solidFill>
+              </a:rPr>
+              <a:t>Repair</a:t>
+            </a:r>
+            <a:endParaRPr lang="en-US" sz="900" dirty="0"/>
+          </a:p>
+        </p:txBody>
+      </p:sp>
+      <p:sp>
+        <p:nvSpPr>
+          <p:cNvPr id="24" name="Shop step 5"/>
+          <p:cNvSpPr/>
+          <p:nvPr/>
+        </p:nvSpPr>
+        <p:spPr>
+          <a:xfrm>
+            <a:off x="7127240" y="2148840"/>
+            <a:ext cx="465328" cy="594360"/>
+          </a:xfrm>
+          <a:prstGeom prst="chevron">
+            <a:avLst/>
+          </a:prstGeom>
+          <a:solidFill>
+            <a:srgbClr val="DCD8D3"/>
+          </a:solidFill>
+          <a:ln/>
+        </p:spPr>
+        <p:txBody>
+          <a:bodyPr wrap="square" lIns="0" tIns="0" rIns="0" bIns="0" rtlCol="0" anchor="ctr"/>
+          <a:lstStyle/>
+          <a:p>
+            <a:pPr algn="ctr" indent="0" marL="0">
+              <a:buNone/>
+            </a:pPr>
+            <a:r>
+              <a:rPr lang="en-US" sz="900" b="1" dirty="0">
+                <a:solidFill>
+                  <a:schemeClr val="tx2"/>
+                </a:solidFill>
+              </a:rPr>
+              <a:t>Test</a:t>
+            </a:r>
+            <a:endParaRPr lang="en-US" sz="900" dirty="0"/>
+          </a:p>
+        </p:txBody>
+      </p:sp>
+      <p:sp>
+        <p:nvSpPr>
+          <p:cNvPr id="25" name="Shop visit range"/>
+          <p:cNvSpPr/>
+          <p:nvPr/>
+        </p:nvSpPr>
+        <p:spPr>
+          <a:xfrm>
+            <a:off x="7482840" y="2240280"/>
+            <a:ext cx="1066800" cy="411480"/>
+          </a:xfrm>
+          <a:prstGeom prst="rect">
+            <a:avLst/>
+          </a:prstGeom>
+          <a:ln w="15875">
+            <a:solidFill>
+              <a:srgbClr val="B5AEA9"/>
+            </a:solidFill>
+            <a:prstDash val="dash"/>
+          </a:ln>
+        </p:spPr>
+      </p:sp>
+      <p:sp>
+        <p:nvSpPr>
+          <p:cNvPr id="26" name="Swap label"/>
+          <p:cNvSpPr txBox="1"/>
+          <p:nvPr/>
+        </p:nvSpPr>
+        <p:spPr>
+          <a:xfrm>
+            <a:off x="320040" y="3337560"/>
+            <a:ext cx="1737360" cy="685800"/>
+          </a:xfrm>
+          <a:prstGeom prst="rect">
+            <a:avLst/>
+          </a:prstGeom>
+          <a:noFill/>
+          <a:ln/>
+        </p:spPr>
+        <p:txBody>
+          <a:bodyPr wrap="square" lIns="0" tIns="0" rIns="0" bIns="0" rtlCol="0" anchor="ctr"/>
+          <a:lstStyle/>
+          <a:p>
+            <a:pPr algn="r" indent="0" marL="0">
+              <a:buNone/>
+            </a:pPr>
+            <a:r>
+              <a:rPr lang="en-US" sz="1400" b="1" dirty="0">
+                <a:solidFill>
+                  <a:schemeClr val="tx2"/>
+                </a:solidFill>
+              </a:rPr>
+              <a:t>FTAI module swap</a:t>
+            </a:r>
+            <a:endParaRPr lang="en-US" sz="1400" dirty="0"/>
+          </a:p>
+          <a:p>
+            <a:pPr algn="r" indent="0" marL="0">
+              <a:buNone/>
+            </a:pPr>
+            <a:r>
+              <a:rPr lang="en-US" sz="1200" dirty="0">
+                <a:solidFill>
+                  <a:schemeClr val="tx2"/>
+                </a:solidFill>
+              </a:rPr>
+              <a:t>5–25 days</a:t>
+            </a:r>
+            <a:endParaRPr lang="en-US" sz="1400" dirty="0"/>
+          </a:p>
+        </p:txBody>
+      </p:sp>
+      <p:sp>
+        <p:nvSpPr>
+          <p:cNvPr id="27" name="Swap bar"/>
+          <p:cNvSpPr/>
+          <p:nvPr/>
+        </p:nvSpPr>
+        <p:spPr>
+          <a:xfrm>
+            <a:off x="2148840" y="3383280"/>
+            <a:ext cx="998728" cy="594360"/>
+          </a:xfrm>
+          <a:prstGeom prst="chevron">
+            <a:avLst/>
+          </a:prstGeom>
+          <a:solidFill>
+            <a:srgbClr val="0A1C58"/>
+          </a:solidFill>
+          <a:ln/>
+        </p:spPr>
+      </p:sp>
+      <p:sp>
+        <p:nvSpPr>
+          <p:cNvPr id="28" name="Swap description"/>
+          <p:cNvSpPr txBox="1"/>
+          <p:nvPr/>
+        </p:nvSpPr>
+        <p:spPr>
+          <a:xfrm>
+            <a:off x="3266440" y="3383280"/>
+            <a:ext cx="3840480" cy="594360"/>
+          </a:xfrm>
+          <a:prstGeom prst="rect">
+            <a:avLst/>
+          </a:prstGeom>
+          <a:noFill/>
+          <a:ln/>
+        </p:spPr>
+        <p:txBody>
+          <a:bodyPr wrap="square" lIns="0" tIns="0" rIns="0" bIns="0" rtlCol="0" anchor="ctr"/>
+          <a:lstStyle/>
+          <a:p>
+            <a:pPr algn="l" indent="0" marL="0">
+              <a:buNone/>
+            </a:pPr>
+            <a:r>
+              <a:rPr lang="en-US" sz="1300" b="1" dirty="0">
+                <a:solidFill>
+                  <a:schemeClr val="tx2"/>
+                </a:solidFill>
+              </a:rPr>
+              <a:t>Swap a restored module from FTAI's pool, test, fly</a:t>
+            </a:r>
+            <a:endParaRPr lang="en-US" sz="1300" dirty="0"/>
+          </a:p>
+        </p:txBody>
+      </p:sp>
+      <p:sp>
+        <p:nvSpPr>
+          <p:cNvPr id="29" name="Speed callout"/>
+          <p:cNvSpPr/>
+          <p:nvPr/>
+        </p:nvSpPr>
+        <p:spPr>
+          <a:xfrm>
+            <a:off x="7178040" y="3429000"/>
+            <a:ext cx="1325880" cy="1143000"/>
+          </a:xfrm>
+          <a:prstGeom prst="ellipse">
+            <a:avLst/>
+          </a:prstGeom>
+          <a:solidFill>
+            <a:srgbClr val="0A1C58"/>
+          </a:solidFill>
+          <a:ln>
+            <a:solidFill>
+              <a:srgbClr val="0A1C58"/>
+            </a:solidFill>
+          </a:ln>
+        </p:spPr>
+        <p:txBody>
+          <a:bodyPr wrap="square" lIns="0" tIns="0" rIns="0" bIns="0" rtlCol="0" anchor="ctr"/>
+          <a:lstStyle/>
+          <a:p>
+            <a:pPr algn="ctr" indent="0" marL="0">
+              <a:buNone/>
+            </a:pPr>
+            <a:r>
+              <a:rPr lang="en-US" sz="2600" b="1" dirty="0">
+                <a:solidFill>
+                  <a:schemeClr val="bg1"/>
+                </a:solidFill>
+              </a:rPr>
+              <a:t>~7x</a:t>
+            </a:r>
+            <a:endParaRPr lang="en-US" sz="2600" dirty="0"/>
+          </a:p>
+          <a:p>
+            <a:pPr algn="ctr" indent="0" marL="0">
+              <a:buNone/>
+            </a:pPr>
+            <a:r>
+              <a:rPr lang="en-US" sz="1200" b="1" dirty="0">
+                <a:solidFill>
+                  <a:schemeClr val="bg1"/>
+                </a:solidFill>
+              </a:rPr>
+              <a:t>faster</a:t>
+            </a:r>
+            <a:endParaRPr lang="en-US" sz="2600" dirty="0"/>
+          </a:p>
+        </p:txBody>
+      </p:sp>
+      <p:sp>
+        <p:nvSpPr>
+          <p:cNvPr id="30" name="Why it works"/>
+          <p:cNvSpPr txBox="1"/>
+          <p:nvPr/>
+        </p:nvSpPr>
+        <p:spPr>
+          <a:xfrm>
+            <a:off x="320040" y="4983480"/>
+            <a:ext cx="8503920" cy="365760"/>
+          </a:xfrm>
+          <a:prstGeom prst="rect">
+            <a:avLst/>
+          </a:prstGeom>
+          <a:solidFill>
+            <a:srgbClr val="EFEDEA"/>
+          </a:solidFill>
+          <a:ln/>
+        </p:spPr>
+        <p:txBody>
+          <a:bodyPr wrap="square" lIns="0" tIns="0" rIns="0" bIns="0" rtlCol="0" anchor="ctr"/>
+          <a:lstStyle/>
+          <a:p>
+            <a:pPr algn="ctr" indent="0" marL="0">
+              <a:buNone/>
+            </a:pPr>
+            <a:r>
+              <a:rPr lang="en-US" sz="1300" i="1" dirty="0">
+                <a:solidFill>
+                  <a:srgbClr val="1A1A1A"/>
+                </a:solidFill>
+              </a:rPr>
+              <a:t>Why it works: FTAI keeps a pool of restored modules on the shelf, so the airline never waits for parts.</a:t>
+            </a:r>
+            <a:endParaRPr lang="en-US" sz="1300" dirty="0"/>
+          </a:p>
+        </p:txBody>
+      </p:sp>
+      <p:sp>
+        <p:nvSpPr>
+          <p:cNvPr id="31" name="Takeaway"/>
+          <p:cNvSpPr txBox="1"/>
+          <p:nvPr/>
+        </p:nvSpPr>
+        <p:spPr>
+          <a:xfrm>
+            <a:off x="320040" y="5504688"/>
+            <a:ext cx="8503920" cy="566928"/>
+          </a:xfrm>
+          <a:prstGeom prst="rect">
+            <a:avLst/>
+          </a:prstGeom>
+          <a:solidFill>
+            <a:srgbClr val="0A1C58"/>
+          </a:solidFill>
+          <a:ln/>
+        </p:spPr>
+        <p:txBody>
+          <a:bodyPr wrap="square" lIns="101600" tIns="25400" rIns="101600" bIns="25400" rtlCol="0" anchor="ctr"/>
+          <a:lstStyle/>
+          <a:p>
+            <a:pPr algn="ctr" indent="0" marL="0">
+              <a:buNone/>
+            </a:pPr>
+            <a:r>
+              <a:rPr lang="en-US" sz="1700" b="1" dirty="0">
+                <a:solidFill>
+                  <a:schemeClr val="bg1"/>
+                </a:solidFill>
+              </a:rPr>
+              <a:t>Every day an engine is off wing costs the airline a jet. FTAI sells that time back.</a:t>
+            </a:r>
+            <a:endParaRPr lang="en-US" sz="1700" dirty="0"/>
+          </a:p>
+        </p:txBody>
+      </p:sp>
+      <p:sp>
+        <p:nvSpPr>
+          <p:cNvPr id="32" name="Source"/>
+          <p:cNvSpPr txBox="1"/>
+          <p:nvPr/>
+        </p:nvSpPr>
+        <p:spPr>
+          <a:xfrm>
+            <a:off x="320040" y="6355080"/>
+            <a:ext cx="7132320" cy="274320"/>
+          </a:xfrm>
+          <a:prstGeom prst="rect">
+            <a:avLst/>
+          </a:prstGeom>
+          <a:noFill/>
+          <a:ln/>
+        </p:spPr>
+        <p:txBody>
+          <a:bodyPr wrap="square" lIns="0" tIns="0" rIns="0" bIns="0" rtlCol="0" anchor="ctr"/>
+          <a:lstStyle/>
+          <a:p>
+            <a:pPr indent="0" marL="0">
+              <a:buNone/>
+            </a:pPr>
+            <a:r>
+              <a:rPr lang="en-US" sz="1100" b="1" dirty="0">
+                <a:solidFill>
+                  <a:srgbClr val="1A1A1A"/>
+                </a:solidFill>
+              </a:rPr>
+              <a:t>Source: </a:t>
+            </a:r>
+            <a:pPr indent="0" marL="0">
+              <a:buNone/>
+            </a:pPr>
+            <a:r>
+              <a:rPr lang="en-US" sz="1100" dirty="0">
+                <a:solidFill>
+                  <a:srgbClr val="1A1A1A"/>
+                </a:solidFill>
+              </a:rPr>
+              <a:t>FTAI Q2'24 earnings call (120–180 vs. 5–25 days, via third-party analysis); shop-visit step lengths illustrative</a:t>
+            </a:r>
+            <a:endParaRPr lang="en-US" sz="1100" dirty="0"/>
+          </a:p>
+        </p:txBody>
+      </p:sp>
+      <p:sp>
+        <p:nvSpPr>
+          <p:cNvPr id="25" name="Slide Number Placeholder 0"/>
+          <p:cNvSpPr>
+            <a:spLocks noGrp="1"/>
+          </p:cNvSpPr>
+          <p:nvPr>
+            <p:ph type="sldNum" sz="quarter" idx="4294967295"/>
+          </p:nvPr>
+        </p:nvSpPr>
+        <p:spPr>
+          <a:xfrm>
+            <a:off x="7635240" y="6327648"/>
+            <a:ext cx="411480" cy="274320"/>
+          </a:xfrm>
+          <a:prstGeom prst="rect">
+            <a:avLst/>
+          </a:prstGeom>
+          <a:extLst>
+            <a:ext uri="{C572A759-6A51-4108-AA02-DFA0A04FC94B}">
+              <ma14:wrappingTextBoxFlag xmlns:ma14="http://schemas.microsoft.com/office/mac/drawingml/2011/main" val="0"/>
+            </a:ext>
+          </a:extLst>
+        </p:spPr>
+        <p:txBody>
+          <a:bodyPr/>
+          <a:lstStyle>
+            <a:lvl1pPr>
+              <a:defRPr sz="1100">
+                <a:solidFill>
+                  <a:srgbClr val="1A1A1A"/>
+                </a:solidFill>
+              </a:defRPr>
+            </a:lvl1pPr>
+          </a:lstStyle>
+          <a:p>
+            <a:pPr algn="r"/>
+            <a:fld id="{F7021451-1387-4CA6-816F-3879F97B5CBC}" type="slidenum">
+              <a:rPr b="1" lang="en-US"/>
+              <a:t>15</a:t>
+            </a:fld>
+            <a:endParaRPr lang="en-US"/>
+          </a:p>
+        </p:txBody>
+      </p:sp>
+    </p:spTree>
+  </p:cSld>
+  <p:clrMapOvr>
+    <a:masterClrMapping/>
+  </p:clrMapOvr>
+</p:sld>
+</file>
+
+<file path=ppt/slides/slide16.xml><?xml version="1.0" encoding="utf-8"?>
+<p:sld xmlns:a="http://schemas.openxmlformats.org/drawingml/2006/main" xmlns:r="http://schemas.openxmlformats.org/officeDocument/2006/relationships" xmlns:p="http://schemas.openxmlformats.org/presentationml/2006/main">
+  <p:cSld name="Slide 16">
+    <p:spTree>
+      <p:nvGrpSpPr>
+        <p:cNvPr id="1" name=""/>
+        <p:cNvGrpSpPr/>
+        <p:nvPr/>
+      </p:nvGrpSpPr>
+      <p:grpSpPr>
+        <a:xfrm>
+          <a:off x="0" y="0"/>
+          <a:ext cx="0" cy="0"/>
+          <a:chOff x="0" y="0"/>
+          <a:chExt cx="0" cy="0"/>
+        </a:xfrm>
+      </p:grpSpPr>
+      <p:sp>
+        <p:nvSpPr>
+          <p:cNvPr id="2" name="Text 1"/>
+          <p:cNvSpPr/>
+          <p:nvPr>
+            <p:ph idx="102" type="title" hasCustomPrompt="1"/>
+          </p:nvPr>
+        </p:nvSpPr>
+        <p:spPr>
+          <a:xfrm>
+            <a:off x="320040" y="182880"/>
+            <a:ext cx="8503920" cy="640080"/>
+          </a:xfrm>
+          <a:prstGeom prst="rect">
+            <a:avLst/>
+          </a:prstGeom>
+          <a:noFill/>
+          <a:ln/>
+        </p:spPr>
+        <p:txBody>
+          <a:bodyPr wrap="square" lIns="0" tIns="0" rIns="0" bIns="0" rtlCol="0" anchor="ctr"/>
+          <a:lstStyle/>
+          <a:p>
+            <a:pPr algn="l" indent="0" marL="0">
+              <a:buNone/>
+            </a:pPr>
+            <a:r>
+              <a:rPr lang="en-US" sz="3200" b="1" dirty="0">
+                <a:solidFill>
+                  <a:schemeClr val="tx2"/>
+                </a:solidFill>
+              </a:rPr>
+              <a:t>Thesis 1b: Share Gains (4/5)</a:t>
+            </a:r>
+            <a:endParaRPr lang="en-US" sz="3200" dirty="0"/>
+          </a:p>
+        </p:txBody>
+      </p:sp>
+      <p:sp>
+        <p:nvSpPr>
+          <p:cNvPr id="3" name="Text 1"/>
+          <p:cNvSpPr/>
+          <p:nvPr>
+            <p:ph idx="103" type="body" hasCustomPrompt="1"/>
+          </p:nvPr>
+        </p:nvSpPr>
+        <p:spPr>
+          <a:xfrm>
+            <a:off x="320040" y="932688"/>
+            <a:ext cx="8503920" cy="566928"/>
+          </a:xfrm>
+          <a:prstGeom prst="rect">
+            <a:avLst/>
+          </a:prstGeom>
+          <a:noFill/>
+          <a:ln/>
+        </p:spPr>
+        <p:txBody>
+          <a:bodyPr wrap="square" lIns="0" tIns="0" rIns="0" bIns="0" rtlCol="0" anchor="t"/>
+          <a:lstStyle/>
+          <a:p>
+            <a:pPr algn="l" indent="0" marL="0">
+              <a:buNone/>
+            </a:pPr>
+            <a:r>
+              <a:rPr lang="en-US" sz="1700" b="1" dirty="0">
+                <a:solidFill>
+                  <a:schemeClr val="tx2"/>
+                </a:solidFill>
+              </a:rPr>
+              <a:t>FTAI built capacity ahead of demand. New sites leave room to keep taking share.</a:t>
+            </a:r>
+            <a:endParaRPr lang="en-US" sz="1700" dirty="0"/>
+          </a:p>
+        </p:txBody>
+      </p:sp>
+      <p:sp>
+        <p:nvSpPr>
+          <p:cNvPr id="4" name="Capacity header"/>
+          <p:cNvSpPr txBox="1"/>
+          <p:nvPr/>
+        </p:nvSpPr>
+        <p:spPr>
+          <a:xfrm>
+            <a:off x="320040" y="1554480"/>
+            <a:ext cx="4206240" cy="365760"/>
+          </a:xfrm>
+          <a:prstGeom prst="rect">
+            <a:avLst/>
+          </a:prstGeom>
+          <a:noFill/>
+          <a:ln/>
+        </p:spPr>
+        <p:txBody>
+          <a:bodyPr wrap="square" lIns="0" tIns="0" rIns="0" bIns="0" rtlCol="0" anchor="b"/>
+          <a:lstStyle/>
+          <a:p>
+            <a:pPr algn="ctr" indent="0" marL="0">
+              <a:buNone/>
+            </a:pPr>
+            <a:r>
+              <a:rPr lang="en-US" sz="1600" b="1" dirty="0">
+                <a:solidFill>
+                  <a:srgbClr val="1A1A1A"/>
+                </a:solidFill>
+              </a:rPr>
+              <a:t>Output vs. Capacity (Modules)</a:t>
+            </a:r>
+            <a:endParaRPr lang="en-US" sz="1600" dirty="0"/>
+          </a:p>
+        </p:txBody>
+      </p:sp>
+      <p:sp>
+        <p:nvSpPr>
+          <p:cNvPr id="5" name="Capacity header rule"/>
+          <p:cNvSpPr/>
+          <p:nvPr/>
+        </p:nvSpPr>
+        <p:spPr>
+          <a:xfrm>
+            <a:off x="320040" y="1975104"/>
+            <a:ext cx="4206240" cy="0"/>
+          </a:xfrm>
+          <a:prstGeom prst="line">
+            <a:avLst/>
+          </a:prstGeom>
+          <a:noFill/>
+          <a:ln w="12700">
+            <a:solidFill>
+              <a:srgbClr val="1A1A1A"/>
+            </a:solidFill>
+            <a:prstDash val="solid"/>
+          </a:ln>
+        </p:spPr>
+      </p:sp>
+      <p:graphicFrame>
+        <p:nvGraphicFramePr>
+          <p:cNvPr id="6" name="Capacity chart" descr=""/>
+          <p:cNvGraphicFramePr/>
+          <p:nvPr/>
+        </p:nvGraphicFramePr>
+        <p:xfrm>
+          <a:off x="320040" y="2103120"/>
+          <a:ext cx="4206240" cy="2926080"/>
+        </p:xfrm>
+        <a:graphic xmlns:a="http://schemas.openxmlformats.org/drawingml/2006/main">
+          <a:graphicData uri="http://schemas.openxmlformats.org/drawingml/2006/chart">
+            <c:chart xmlns:c="http://schemas.openxmlformats.org/drawingml/2006/chart" r:id="rId1"/>
+          </a:graphicData>
+        </a:graphic>
+      </p:graphicFrame>
+      <p:sp>
+        <p:nvSpPr>
+          <p:cNvPr id="7" name="Capacity label"/>
+          <p:cNvSpPr txBox="1"/>
+          <p:nvPr/>
+        </p:nvSpPr>
+        <p:spPr>
+          <a:xfrm>
+            <a:off x="1828800" y="2103120"/>
+            <a:ext cx="2651760" cy="274320"/>
+          </a:xfrm>
+          <a:prstGeom prst="rect">
+            <a:avLst/>
+          </a:prstGeom>
+          <a:noFill/>
+          <a:ln/>
+        </p:spPr>
+        <p:txBody>
+          <a:bodyPr wrap="square" lIns="0" tIns="0" rIns="0" bIns="0" rtlCol="0" anchor="ctr"/>
+          <a:lstStyle/>
+          <a:p>
+            <a:pPr algn="ctr" indent="0" marL="0">
+              <a:buNone/>
+            </a:pPr>
+            <a:r>
+              <a:rPr lang="en-US" sz="1200" b="1" i="1" dirty="0">
+                <a:solidFill>
+                  <a:schemeClr val="accent2"/>
+                </a:solidFill>
+              </a:rPr>
+              <a:t>3,000 capacity</a:t>
+            </a:r>
+            <a:endParaRPr lang="en-US" sz="1200" dirty="0"/>
+          </a:p>
+        </p:txBody>
+      </p:sp>
+      <p:sp>
+        <p:nvSpPr>
+          <p:cNvPr id="8" name="Capacity legend"/>
+          <p:cNvSpPr txBox="1"/>
+          <p:nvPr/>
+        </p:nvSpPr>
+        <p:spPr>
+          <a:xfrm>
+            <a:off x="320040" y="5047488"/>
+            <a:ext cx="4206240" cy="256032"/>
+          </a:xfrm>
+          <a:prstGeom prst="rect">
+            <a:avLst/>
+          </a:prstGeom>
+          <a:noFill/>
+          <a:ln/>
+        </p:spPr>
+        <p:txBody>
+          <a:bodyPr wrap="square" lIns="0" tIns="0" rIns="0" bIns="0" rtlCol="0" anchor="ctr"/>
+          <a:lstStyle/>
+          <a:p>
+            <a:pPr algn="ctr" indent="0" marL="0">
+              <a:buNone/>
+            </a:pPr>
+            <a:r>
+              <a:rPr lang="en-US" sz="1100" dirty="0">
+                <a:solidFill>
+                  <a:srgbClr val="0A1C58"/>
+                </a:solidFill>
+              </a:rPr>
+              <a:t>■ </a:t>
+            </a:r>
+            <a:pPr algn="ctr" indent="0" marL="0">
+              <a:buNone/>
+            </a:pPr>
+            <a:r>
+              <a:rPr lang="en-US" sz="1100" dirty="0">
+                <a:solidFill>
+                  <a:srgbClr val="1A1A1A"/>
+                </a:solidFill>
+              </a:rPr>
+              <a:t>Output   </a:t>
+            </a:r>
+            <a:pPr algn="ctr" indent="0" marL="0">
+              <a:buNone/>
+            </a:pPr>
+            <a:r>
+              <a:rPr lang="en-US" sz="1100" dirty="0">
+                <a:solidFill>
+                  <a:srgbClr val="B5AEA9"/>
+                </a:solidFill>
+              </a:rPr>
+              <a:t>■ </a:t>
+            </a:r>
+            <a:pPr algn="ctr" indent="0" marL="0">
+              <a:buNone/>
+            </a:pPr>
+            <a:r>
+              <a:rPr lang="en-US" sz="1100" dirty="0">
+                <a:solidFill>
+                  <a:srgbClr val="1A1A1A"/>
+                </a:solidFill>
+              </a:rPr>
+              <a:t>Unused capacity</a:t>
+            </a:r>
+            <a:endParaRPr lang="en-US" sz="1100" dirty="0"/>
+          </a:p>
+        </p:txBody>
+      </p:sp>
+      <p:sp>
+        <p:nvSpPr>
+          <p:cNvPr id="9" name="Network header"/>
+          <p:cNvSpPr txBox="1"/>
+          <p:nvPr/>
+        </p:nvSpPr>
+        <p:spPr>
+          <a:xfrm>
+            <a:off x="4892040" y="1554480"/>
+            <a:ext cx="3931920" cy="365760"/>
+          </a:xfrm>
+          <a:prstGeom prst="rect">
+            <a:avLst/>
+          </a:prstGeom>
+          <a:noFill/>
+          <a:ln/>
+        </p:spPr>
+        <p:txBody>
+          <a:bodyPr wrap="square" lIns="0" tIns="0" rIns="0" bIns="0" rtlCol="0" anchor="b"/>
+          <a:lstStyle/>
+          <a:p>
+            <a:pPr algn="ctr" indent="0" marL="0">
+              <a:buNone/>
+            </a:pPr>
+            <a:r>
+              <a:rPr lang="en-US" sz="1600" b="1" dirty="0">
+                <a:solidFill>
+                  <a:srgbClr val="1A1A1A"/>
+                </a:solidFill>
+              </a:rPr>
+              <a:t>The Network</a:t>
+            </a:r>
+            <a:endParaRPr lang="en-US" sz="1600" dirty="0"/>
+          </a:p>
+        </p:txBody>
+      </p:sp>
+      <p:sp>
+        <p:nvSpPr>
+          <p:cNvPr id="10" name="Network header rule"/>
+          <p:cNvSpPr/>
+          <p:nvPr/>
+        </p:nvSpPr>
+        <p:spPr>
+          <a:xfrm>
+            <a:off x="4892040" y="1975104"/>
+            <a:ext cx="3931920" cy="0"/>
+          </a:xfrm>
+          <a:prstGeom prst="line">
+            <a:avLst/>
+          </a:prstGeom>
+          <a:noFill/>
+          <a:ln w="12700">
+            <a:solidFill>
+              <a:srgbClr val="1A1A1A"/>
+            </a:solidFill>
+            <a:prstDash val="solid"/>
+          </a:ln>
+        </p:spPr>
+      </p:sp>
+      <p:sp>
+        <p:nvSpPr>
+          <p:cNvPr id="11" name="Site Montreal"/>
+          <p:cNvSpPr txBox="1"/>
+          <p:nvPr/>
+        </p:nvSpPr>
+        <p:spPr>
+          <a:xfrm>
+            <a:off x="4892040" y="2103120"/>
+            <a:ext cx="1920240" cy="868680"/>
+          </a:xfrm>
+          <a:prstGeom prst="rect">
+            <a:avLst/>
+          </a:prstGeom>
+          <a:solidFill>
+            <a:srgbClr val="DCD8D3"/>
+          </a:solidFill>
+          <a:ln/>
+        </p:spPr>
+        <p:txBody>
+          <a:bodyPr wrap="square" lIns="50800" tIns="50800" rIns="50800" bIns="50800" rtlCol="0" anchor="ctr"/>
+          <a:lstStyle/>
+          <a:p>
+            <a:pPr algn="ctr" indent="0" marL="0">
+              <a:buNone/>
+            </a:pPr>
+            <a:r>
+              <a:rPr lang="en-US" sz="1500" b="1" dirty="0">
+                <a:solidFill>
+                  <a:schemeClr val="tx2"/>
+                </a:solidFill>
+              </a:rPr>
+              <a:t>Montreal</a:t>
+            </a:r>
+            <a:endParaRPr lang="en-US" sz="1500" dirty="0"/>
+          </a:p>
+          <a:p>
+            <a:pPr algn="ctr" indent="0" marL="0">
+              <a:buNone/>
+            </a:pPr>
+            <a:r>
+              <a:rPr lang="en-US" sz="1100" dirty="0">
+                <a:solidFill>
+                  <a:schemeClr val="tx2"/>
+                </a:solidFill>
+              </a:rPr>
+              <a:t>Flagship, up to 900</a:t>
+            </a:r>
+            <a:endParaRPr lang="en-US" sz="1500" dirty="0"/>
+          </a:p>
+        </p:txBody>
+      </p:sp>
+      <p:sp>
+        <p:nvSpPr>
+          <p:cNvPr id="12" name="Site Miami"/>
+          <p:cNvSpPr txBox="1"/>
+          <p:nvPr/>
+        </p:nvSpPr>
+        <p:spPr>
+          <a:xfrm>
+            <a:off x="6903720" y="2103120"/>
+            <a:ext cx="1920240" cy="868680"/>
+          </a:xfrm>
+          <a:prstGeom prst="rect">
+            <a:avLst/>
+          </a:prstGeom>
+          <a:solidFill>
+            <a:srgbClr val="DCD8D3"/>
+          </a:solidFill>
+          <a:ln/>
+        </p:spPr>
+        <p:txBody>
+          <a:bodyPr wrap="square" lIns="50800" tIns="50800" rIns="50800" bIns="50800" rtlCol="0" anchor="ctr"/>
+          <a:lstStyle/>
+          <a:p>
+            <a:pPr algn="ctr" indent="0" marL="0">
+              <a:buNone/>
+            </a:pPr>
+            <a:r>
+              <a:rPr lang="en-US" sz="1500" b="1" dirty="0">
+                <a:solidFill>
+                  <a:schemeClr val="tx2"/>
+                </a:solidFill>
+              </a:rPr>
+              <a:t>Miami</a:t>
+            </a:r>
+            <a:endParaRPr lang="en-US" sz="1500" dirty="0"/>
+          </a:p>
+          <a:p>
+            <a:pPr algn="ctr" indent="0" marL="0">
+              <a:buNone/>
+            </a:pPr>
+            <a:r>
+              <a:rPr lang="en-US" sz="1100" dirty="0">
+                <a:solidFill>
+                  <a:schemeClr val="tx2"/>
+                </a:solidFill>
+              </a:rPr>
+              <a:t>~475 in 2026E</a:t>
+            </a:r>
+            <a:endParaRPr lang="en-US" sz="1500" dirty="0"/>
+          </a:p>
+        </p:txBody>
+      </p:sp>
+      <p:sp>
+        <p:nvSpPr>
+          <p:cNvPr id="13" name="Site Rome"/>
+          <p:cNvSpPr txBox="1"/>
+          <p:nvPr/>
+        </p:nvSpPr>
+        <p:spPr>
+          <a:xfrm>
+            <a:off x="4892040" y="3090672"/>
+            <a:ext cx="1920240" cy="868680"/>
+          </a:xfrm>
+          <a:prstGeom prst="rect">
+            <a:avLst/>
+          </a:prstGeom>
+          <a:solidFill>
+            <a:srgbClr val="DCD8D3"/>
+          </a:solidFill>
+          <a:ln/>
+        </p:spPr>
+        <p:txBody>
+          <a:bodyPr wrap="square" lIns="50800" tIns="50800" rIns="50800" bIns="50800" rtlCol="0" anchor="ctr"/>
+          <a:lstStyle/>
+          <a:p>
+            <a:pPr algn="ctr" indent="0" marL="0">
+              <a:buNone/>
+            </a:pPr>
+            <a:r>
+              <a:rPr lang="en-US" sz="1500" b="1" dirty="0">
+                <a:solidFill>
+                  <a:schemeClr val="tx2"/>
+                </a:solidFill>
+              </a:rPr>
+              <a:t>Rome</a:t>
+            </a:r>
+            <a:endParaRPr lang="en-US" sz="1500" dirty="0"/>
+          </a:p>
+          <a:p>
+            <a:pPr algn="ctr" indent="0" marL="0">
+              <a:buNone/>
+            </a:pPr>
+            <a:r>
+              <a:rPr lang="en-US" sz="1100" dirty="0">
+                <a:solidFill>
+                  <a:schemeClr val="tx2"/>
+                </a:solidFill>
+              </a:rPr>
+              <a:t>Ramping</a:t>
+            </a:r>
+            <a:endParaRPr lang="en-US" sz="1500" dirty="0"/>
+          </a:p>
+        </p:txBody>
+      </p:sp>
+      <p:sp>
+        <p:nvSpPr>
+          <p:cNvPr id="14" name="Site Lisbon"/>
+          <p:cNvSpPr txBox="1"/>
+          <p:nvPr/>
+        </p:nvSpPr>
+        <p:spPr>
+          <a:xfrm>
+            <a:off x="6903720" y="3090672"/>
+            <a:ext cx="1920240" cy="868680"/>
+          </a:xfrm>
+          <a:prstGeom prst="rect">
+            <a:avLst/>
+          </a:prstGeom>
+          <a:solidFill>
+            <a:srgbClr val="0A1C58"/>
+          </a:solidFill>
+          <a:ln/>
+        </p:spPr>
+        <p:txBody>
+          <a:bodyPr wrap="square" lIns="50800" tIns="50800" rIns="50800" bIns="50800" rtlCol="0" anchor="ctr"/>
+          <a:lstStyle/>
+          <a:p>
+            <a:pPr algn="ctr" indent="0" marL="0">
+              <a:buNone/>
+            </a:pPr>
+            <a:r>
+              <a:rPr lang="en-US" sz="1500" b="1" dirty="0">
+                <a:solidFill>
+                  <a:schemeClr val="bg1"/>
+                </a:solidFill>
+              </a:rPr>
+              <a:t>Lisbon</a:t>
+            </a:r>
+            <a:endParaRPr lang="en-US" sz="1500" dirty="0"/>
+          </a:p>
+          <a:p>
+            <a:pPr algn="ctr" indent="0" marL="0">
+              <a:buNone/>
+            </a:pPr>
+            <a:r>
+              <a:rPr lang="en-US" sz="1100" dirty="0">
+                <a:solidFill>
+                  <a:schemeClr val="bg1"/>
+                </a:solidFill>
+              </a:rPr>
+              <a:t>Heading to 300+</a:t>
+            </a:r>
+            <a:endParaRPr lang="en-US" sz="1500" dirty="0"/>
+          </a:p>
+        </p:txBody>
+      </p:sp>
+      <p:sp>
+        <p:nvSpPr>
+          <p:cNvPr id="15" name="Site Jakarta"/>
+          <p:cNvSpPr txBox="1"/>
+          <p:nvPr/>
+        </p:nvSpPr>
+        <p:spPr>
+          <a:xfrm>
+            <a:off x="4892040" y="4078224"/>
+            <a:ext cx="1920240" cy="868680"/>
+          </a:xfrm>
+          <a:prstGeom prst="rect">
+            <a:avLst/>
+          </a:prstGeom>
+          <a:solidFill>
+            <a:srgbClr val="0A1C58"/>
+          </a:solidFill>
+          <a:ln/>
+        </p:spPr>
+        <p:txBody>
+          <a:bodyPr wrap="square" lIns="50800" tIns="50800" rIns="50800" bIns="50800" rtlCol="0" anchor="ctr"/>
+          <a:lstStyle/>
+          <a:p>
+            <a:pPr algn="ctr" indent="0" marL="0">
+              <a:buNone/>
+            </a:pPr>
+            <a:r>
+              <a:rPr lang="en-US" sz="1500" b="1" dirty="0">
+                <a:solidFill>
+                  <a:schemeClr val="bg1"/>
+                </a:solidFill>
+              </a:rPr>
+              <a:t>Jakarta</a:t>
+            </a:r>
+            <a:endParaRPr lang="en-US" sz="1500" dirty="0"/>
+          </a:p>
+          <a:p>
+            <a:pPr algn="ctr" indent="0" marL="0">
+              <a:buNone/>
+            </a:pPr>
+            <a:r>
+              <a:rPr lang="en-US" sz="1100" dirty="0">
+                <a:solidFill>
+                  <a:schemeClr val="bg1"/>
+                </a:solidFill>
+              </a:rPr>
+              <a:t>Heavy work, 300–450 (E)</a:t>
+            </a:r>
+            <a:endParaRPr lang="en-US" sz="1500" dirty="0"/>
+          </a:p>
+        </p:txBody>
+      </p:sp>
+      <p:sp>
+        <p:nvSpPr>
+          <p:cNvPr id="16" name="Site Cairo"/>
+          <p:cNvSpPr txBox="1"/>
+          <p:nvPr/>
+        </p:nvSpPr>
+        <p:spPr>
+          <a:xfrm>
+            <a:off x="6903720" y="4078224"/>
+            <a:ext cx="1920240" cy="868680"/>
+          </a:xfrm>
+          <a:prstGeom prst="rect">
+            <a:avLst/>
+          </a:prstGeom>
+          <a:solidFill>
+            <a:srgbClr val="0A1C58"/>
+          </a:solidFill>
+          <a:ln/>
+        </p:spPr>
+        <p:txBody>
+          <a:bodyPr wrap="square" lIns="50800" tIns="50800" rIns="50800" bIns="50800" rtlCol="0" anchor="ctr"/>
+          <a:lstStyle/>
+          <a:p>
+            <a:pPr algn="ctr" indent="0" marL="0">
+              <a:buNone/>
+            </a:pPr>
+            <a:r>
+              <a:rPr lang="en-US" sz="1500" b="1" dirty="0">
+                <a:solidFill>
+                  <a:schemeClr val="bg1"/>
+                </a:solidFill>
+              </a:rPr>
+              <a:t>Cairo</a:t>
+            </a:r>
+            <a:endParaRPr lang="en-US" sz="1500" dirty="0"/>
+          </a:p>
+          <a:p>
+            <a:pPr algn="ctr" indent="0" marL="0">
+              <a:buNone/>
+            </a:pPr>
+            <a:r>
+              <a:rPr lang="en-US" sz="1100" dirty="0">
+                <a:solidFill>
+                  <a:schemeClr val="bg1"/>
+                </a:solidFill>
+              </a:rPr>
+              <a:t>Light work, 150–180 (E)</a:t>
+            </a:r>
+            <a:endParaRPr lang="en-US" sz="1500" dirty="0"/>
+          </a:p>
+        </p:txBody>
+      </p:sp>
+      <p:sp>
+        <p:nvSpPr>
+          <p:cNvPr id="17" name="Network legend"/>
+          <p:cNvSpPr txBox="1"/>
+          <p:nvPr/>
+        </p:nvSpPr>
+        <p:spPr>
+          <a:xfrm>
+            <a:off x="4892040" y="5047488"/>
+            <a:ext cx="3931920" cy="256032"/>
+          </a:xfrm>
+          <a:prstGeom prst="rect">
+            <a:avLst/>
+          </a:prstGeom>
+          <a:noFill/>
+          <a:ln/>
+        </p:spPr>
+        <p:txBody>
+          <a:bodyPr wrap="square" lIns="0" tIns="0" rIns="0" bIns="0" rtlCol="0" anchor="ctr"/>
+          <a:lstStyle/>
+          <a:p>
+            <a:pPr algn="ctr" indent="0" marL="0">
+              <a:buNone/>
+            </a:pPr>
+            <a:r>
+              <a:rPr lang="en-US" sz="1100" dirty="0">
+                <a:solidFill>
+                  <a:srgbClr val="0A1C58"/>
+                </a:solidFill>
+              </a:rPr>
+              <a:t>■ </a:t>
+            </a:r>
+            <a:pPr algn="ctr" indent="0" marL="0">
+              <a:buNone/>
+            </a:pPr>
+            <a:r>
+              <a:rPr lang="en-US" sz="1100" dirty="0">
+                <a:solidFill>
+                  <a:srgbClr val="1A1A1A"/>
+                </a:solidFill>
+              </a:rPr>
+              <a:t>New sites   </a:t>
+            </a:r>
+            <a:pPr algn="ctr" indent="0" marL="0">
+              <a:buNone/>
+            </a:pPr>
+            <a:r>
+              <a:rPr lang="en-US" sz="1100" dirty="0">
+                <a:solidFill>
+                  <a:srgbClr val="DCD8D3"/>
+                </a:solidFill>
+              </a:rPr>
+              <a:t>■ </a:t>
+            </a:r>
+            <a:pPr algn="ctr" indent="0" marL="0">
+              <a:buNone/>
+            </a:pPr>
+            <a:r>
+              <a:rPr lang="en-US" sz="1100" dirty="0">
+                <a:solidFill>
+                  <a:srgbClr val="1A1A1A"/>
+                </a:solidFill>
+              </a:rPr>
+              <a:t>Existing (modules / yr)</a:t>
+            </a:r>
+            <a:endParaRPr lang="en-US" sz="1100" dirty="0"/>
+          </a:p>
+        </p:txBody>
+      </p:sp>
+      <p:sp>
+        <p:nvSpPr>
+          <p:cNvPr id="18" name="Takeaway"/>
+          <p:cNvSpPr txBox="1"/>
+          <p:nvPr/>
+        </p:nvSpPr>
+        <p:spPr>
+          <a:xfrm>
+            <a:off x="320040" y="5504688"/>
+            <a:ext cx="8503920" cy="566928"/>
+          </a:xfrm>
+          <a:prstGeom prst="rect">
+            <a:avLst/>
+          </a:prstGeom>
+          <a:solidFill>
+            <a:srgbClr val="0A1C58"/>
+          </a:solidFill>
+          <a:ln/>
+        </p:spPr>
+        <p:txBody>
+          <a:bodyPr wrap="square" lIns="101600" tIns="25400" rIns="101600" bIns="25400" rtlCol="0" anchor="ctr"/>
+          <a:lstStyle/>
+          <a:p>
+            <a:pPr algn="ctr" indent="0" marL="0">
+              <a:buNone/>
+            </a:pPr>
+            <a:r>
+              <a:rPr lang="en-US" sz="1700" b="1" dirty="0">
+                <a:solidFill>
+                  <a:schemeClr val="bg1"/>
+                </a:solidFill>
+              </a:rPr>
+              <a:t>With 3,000 modules of capacity against 1,700 planned, FTAI can absorb share gains.</a:t>
+            </a:r>
+            <a:endParaRPr lang="en-US" sz="1700" dirty="0"/>
+          </a:p>
+        </p:txBody>
+      </p:sp>
+      <p:sp>
+        <p:nvSpPr>
+          <p:cNvPr id="19" name="Source"/>
+          <p:cNvSpPr txBox="1"/>
+          <p:nvPr/>
+        </p:nvSpPr>
+        <p:spPr>
+          <a:xfrm>
+            <a:off x="320040" y="6355080"/>
+            <a:ext cx="7132320" cy="274320"/>
+          </a:xfrm>
+          <a:prstGeom prst="rect">
+            <a:avLst/>
+          </a:prstGeom>
+          <a:noFill/>
+          <a:ln/>
+        </p:spPr>
+        <p:txBody>
+          <a:bodyPr wrap="square" lIns="0" tIns="0" rIns="0" bIns="0" rtlCol="0" anchor="ctr"/>
+          <a:lstStyle/>
+          <a:p>
+            <a:pPr indent="0" marL="0">
+              <a:buNone/>
+            </a:pPr>
+            <a:r>
+              <a:rPr lang="en-US" sz="1100" b="1" dirty="0">
+                <a:solidFill>
+                  <a:srgbClr val="1A1A1A"/>
+                </a:solidFill>
+              </a:rPr>
+              <a:t>Source: </a:t>
+            </a:r>
+            <a:pPr indent="0" marL="0">
+              <a:buNone/>
+            </a:pPr>
+            <a:r>
+              <a:rPr lang="en-US" sz="1100" dirty="0">
+                <a:solidFill>
+                  <a:srgbClr val="1A1A1A"/>
+                </a:solidFill>
+              </a:rPr>
+              <a:t>FTAI Q1/Q2'26 earnings supplements; GMF and EgyptAir reports; GPS estimates (E)</a:t>
+            </a:r>
+            <a:endParaRPr lang="en-US" sz="1100" dirty="0"/>
+          </a:p>
+        </p:txBody>
+      </p:sp>
+      <p:sp>
+        <p:nvSpPr>
+          <p:cNvPr id="25" name="Slide Number Placeholder 0"/>
+          <p:cNvSpPr>
+            <a:spLocks noGrp="1"/>
+          </p:cNvSpPr>
+          <p:nvPr>
+            <p:ph type="sldNum" sz="quarter" idx="4294967295"/>
+          </p:nvPr>
+        </p:nvSpPr>
+        <p:spPr>
+          <a:xfrm>
+            <a:off x="7635240" y="6327648"/>
+            <a:ext cx="411480" cy="274320"/>
+          </a:xfrm>
+          <a:prstGeom prst="rect">
+            <a:avLst/>
+          </a:prstGeom>
+          <a:extLst>
+            <a:ext uri="{C572A759-6A51-4108-AA02-DFA0A04FC94B}">
+              <ma14:wrappingTextBoxFlag xmlns:ma14="http://schemas.microsoft.com/office/mac/drawingml/2011/main" val="0"/>
+            </a:ext>
+          </a:extLst>
+        </p:spPr>
+        <p:txBody>
+          <a:bodyPr/>
+          <a:lstStyle>
+            <a:lvl1pPr>
+              <a:defRPr sz="1100">
+                <a:solidFill>
+                  <a:srgbClr val="1A1A1A"/>
+                </a:solidFill>
+              </a:defRPr>
+            </a:lvl1pPr>
+          </a:lstStyle>
+          <a:p>
+            <a:pPr algn="r"/>
+            <a:fld id="{F7021451-1387-4CA6-816F-3879F97B5CBC}" type="slidenum">
+              <a:rPr b="1" lang="en-US"/>
+              <a:t>16</a:t>
+            </a:fld>
+            <a:endParaRPr lang="en-US"/>
+          </a:p>
+        </p:txBody>
+      </p:sp>
+    </p:spTree>
+  </p:cSld>
+  <p:clrMapOvr>
+    <a:masterClrMapping/>
+  </p:clrMapOvr>
+</p:sld>
+</file>
+
+<file path=ppt/slides/slide17.xml><?xml version="1.0" encoding="utf-8"?>
+<p:sld xmlns:a="http://schemas.openxmlformats.org/drawingml/2006/main" xmlns:r="http://schemas.openxmlformats.org/officeDocument/2006/relationships" xmlns:p="http://schemas.openxmlformats.org/presentationml/2006/main">
+  <p:cSld name="Slide 17">
+    <p:spTree>
+      <p:nvGrpSpPr>
+        <p:cNvPr id="1" name=""/>
+        <p:cNvGrpSpPr/>
+        <p:nvPr/>
+      </p:nvGrpSpPr>
+      <p:grpSpPr>
+        <a:xfrm>
+          <a:off x="0" y="0"/>
+          <a:ext cx="0" cy="0"/>
+          <a:chOff x="0" y="0"/>
+          <a:chExt cx="0" cy="0"/>
+        </a:xfrm>
+      </p:grpSpPr>
+      <p:sp>
+        <p:nvSpPr>
+          <p:cNvPr id="2" name="Text 1"/>
+          <p:cNvSpPr/>
+          <p:nvPr>
+            <p:ph idx="102" type="title" hasCustomPrompt="1"/>
+          </p:nvPr>
+        </p:nvSpPr>
+        <p:spPr>
+          <a:xfrm>
+            <a:off x="320040" y="182880"/>
+            <a:ext cx="8503920" cy="640080"/>
+          </a:xfrm>
+          <a:prstGeom prst="rect">
+            <a:avLst/>
+          </a:prstGeom>
+          <a:noFill/>
+          <a:ln/>
+        </p:spPr>
+        <p:txBody>
+          <a:bodyPr wrap="square" lIns="0" tIns="0" rIns="0" bIns="0" rtlCol="0" anchor="ctr"/>
+          <a:lstStyle/>
+          <a:p>
+            <a:pPr algn="l" indent="0" marL="0">
+              <a:buNone/>
+            </a:pPr>
+            <a:r>
+              <a:rPr lang="en-US" sz="3200" b="1" dirty="0">
+                <a:solidFill>
+                  <a:schemeClr val="tx2"/>
+                </a:solidFill>
+              </a:rPr>
+              <a:t>Thesis 1b: Share Gains (5/5)</a:t>
+            </a:r>
+            <a:endParaRPr lang="en-US" sz="3200" dirty="0"/>
+          </a:p>
+        </p:txBody>
+      </p:sp>
+      <p:sp>
+        <p:nvSpPr>
+          <p:cNvPr id="3" name="Text 1"/>
+          <p:cNvSpPr/>
+          <p:nvPr>
+            <p:ph idx="103" type="body" hasCustomPrompt="1"/>
+          </p:nvPr>
+        </p:nvSpPr>
+        <p:spPr>
+          <a:xfrm>
+            <a:off x="320040" y="932688"/>
+            <a:ext cx="8503920" cy="566928"/>
+          </a:xfrm>
+          <a:prstGeom prst="rect">
+            <a:avLst/>
+          </a:prstGeom>
+          <a:noFill/>
+          <a:ln/>
+        </p:spPr>
+        <p:txBody>
+          <a:bodyPr wrap="square" lIns="0" tIns="0" rIns="0" bIns="0" rtlCol="0" anchor="t"/>
+          <a:lstStyle/>
+          <a:p>
+            <a:pPr algn="l" indent="0" marL="0">
+              <a:buNone/>
+            </a:pPr>
+            <a:r>
+              <a:rPr lang="en-US" sz="1700" b="1" dirty="0">
+                <a:solidFill>
+                  <a:schemeClr val="tx2"/>
+                </a:solidFill>
+              </a:rPr>
+              <a:t>Share gains plus the SCI floor take FTAI to ~1,700 modules in FY27, in line with its target.</a:t>
+            </a:r>
+            <a:endParaRPr lang="en-US" sz="1700" dirty="0"/>
+          </a:p>
+        </p:txBody>
+      </p:sp>
+      <p:sp>
+        <p:nvSpPr>
+          <p:cNvPr id="4" name="Volume tile 1"/>
+          <p:cNvSpPr txBox="1"/>
+          <p:nvPr/>
+        </p:nvSpPr>
+        <p:spPr>
+          <a:xfrm>
+            <a:off x="320040" y="1600200"/>
+            <a:ext cx="1572768" cy="868680"/>
+          </a:xfrm>
+          <a:prstGeom prst="rect">
+            <a:avLst/>
+          </a:prstGeom>
+          <a:solidFill>
+            <a:srgbClr val="DCD8D3"/>
+          </a:solidFill>
+          <a:ln/>
+        </p:spPr>
+        <p:txBody>
+          <a:bodyPr wrap="square" lIns="25400" tIns="25400" rIns="25400" bIns="25400" rtlCol="0" anchor="ctr"/>
+          <a:lstStyle/>
+          <a:p>
+            <a:pPr algn="ctr" indent="0" marL="0">
+              <a:buNone/>
+            </a:pPr>
+            <a:r>
+              <a:rPr lang="en-US" sz="2000" b="1" dirty="0">
+                <a:solidFill>
+                  <a:schemeClr val="tx2"/>
+                </a:solidFill>
+              </a:rPr>
+              <a:t>2,386</a:t>
+            </a:r>
+            <a:endParaRPr lang="en-US" sz="2000" dirty="0"/>
+          </a:p>
+          <a:p>
+            <a:pPr algn="ctr" indent="0" marL="0">
+              <a:buNone/>
+            </a:pPr>
+            <a:r>
+              <a:rPr lang="en-US" sz="1100" dirty="0">
+                <a:solidFill>
+                  <a:schemeClr val="tx2"/>
+                </a:solidFill>
+              </a:rPr>
+              <a:t>CFM56 shop visits</a:t>
+            </a:r>
+            <a:endParaRPr lang="en-US" sz="2000" dirty="0"/>
+          </a:p>
+        </p:txBody>
+      </p:sp>
+      <p:sp>
+        <p:nvSpPr>
+          <p:cNvPr id="5" name="Volume tile 2"/>
+          <p:cNvSpPr txBox="1"/>
+          <p:nvPr/>
+        </p:nvSpPr>
+        <p:spPr>
+          <a:xfrm>
+            <a:off x="2048256" y="1600200"/>
+            <a:ext cx="1572768" cy="868680"/>
+          </a:xfrm>
+          <a:prstGeom prst="rect">
+            <a:avLst/>
+          </a:prstGeom>
+          <a:solidFill>
+            <a:srgbClr val="DCD8D3"/>
+          </a:solidFill>
+          <a:ln/>
+        </p:spPr>
+        <p:txBody>
+          <a:bodyPr wrap="square" lIns="25400" tIns="25400" rIns="25400" bIns="25400" rtlCol="0" anchor="ctr"/>
+          <a:lstStyle/>
+          <a:p>
+            <a:pPr algn="ctr" indent="0" marL="0">
+              <a:buNone/>
+            </a:pPr>
+            <a:r>
+              <a:rPr lang="en-US" sz="2000" b="1" dirty="0">
+                <a:solidFill>
+                  <a:schemeClr val="tx2"/>
+                </a:solidFill>
+              </a:rPr>
+              <a:t>× 3</a:t>
+            </a:r>
+            <a:endParaRPr lang="en-US" sz="2000" dirty="0"/>
+          </a:p>
+          <a:p>
+            <a:pPr algn="ctr" indent="0" marL="0">
+              <a:buNone/>
+            </a:pPr>
+            <a:r>
+              <a:rPr lang="en-US" sz="1100" dirty="0">
+                <a:solidFill>
+                  <a:schemeClr val="tx2"/>
+                </a:solidFill>
+              </a:rPr>
+              <a:t>modules each</a:t>
+            </a:r>
+            <a:endParaRPr lang="en-US" sz="2000" dirty="0"/>
+          </a:p>
+        </p:txBody>
+      </p:sp>
+      <p:sp>
+        <p:nvSpPr>
+          <p:cNvPr id="6" name="Volume tile 3"/>
+          <p:cNvSpPr txBox="1"/>
+          <p:nvPr/>
+        </p:nvSpPr>
+        <p:spPr>
+          <a:xfrm>
+            <a:off x="3776472" y="1600200"/>
+            <a:ext cx="1572768" cy="868680"/>
+          </a:xfrm>
+          <a:prstGeom prst="rect">
+            <a:avLst/>
+          </a:prstGeom>
+          <a:solidFill>
+            <a:srgbClr val="DCD8D3"/>
+          </a:solidFill>
+          <a:ln/>
+        </p:spPr>
+        <p:txBody>
+          <a:bodyPr wrap="square" lIns="25400" tIns="25400" rIns="25400" bIns="25400" rtlCol="0" anchor="ctr"/>
+          <a:lstStyle/>
+          <a:p>
+            <a:pPr algn="ctr" indent="0" marL="0">
+              <a:buNone/>
+            </a:pPr>
+            <a:r>
+              <a:rPr lang="en-US" sz="2000" b="1" dirty="0">
+                <a:solidFill>
+                  <a:schemeClr val="tx2"/>
+                </a:solidFill>
+              </a:rPr>
+              <a:t>× 16.8%</a:t>
+            </a:r>
+            <a:endParaRPr lang="en-US" sz="2000" dirty="0"/>
+          </a:p>
+          <a:p>
+            <a:pPr algn="ctr" indent="0" marL="0">
+              <a:buNone/>
+            </a:pPr>
+            <a:r>
+              <a:rPr lang="en-US" sz="1100" dirty="0">
+                <a:solidFill>
+                  <a:schemeClr val="tx2"/>
+                </a:solidFill>
+              </a:rPr>
+              <a:t>FTAI share</a:t>
+            </a:r>
+            <a:endParaRPr lang="en-US" sz="2000" dirty="0"/>
+          </a:p>
+        </p:txBody>
+      </p:sp>
+      <p:sp>
+        <p:nvSpPr>
+          <p:cNvPr id="7" name="Volume tile 4"/>
+          <p:cNvSpPr txBox="1"/>
+          <p:nvPr/>
+        </p:nvSpPr>
+        <p:spPr>
+          <a:xfrm>
+            <a:off x="5504688" y="1600200"/>
+            <a:ext cx="1572768" cy="868680"/>
+          </a:xfrm>
+          <a:prstGeom prst="rect">
+            <a:avLst/>
+          </a:prstGeom>
+          <a:solidFill>
+            <a:srgbClr val="DCD8D3"/>
+          </a:solidFill>
+          <a:ln/>
+        </p:spPr>
+        <p:txBody>
+          <a:bodyPr wrap="square" lIns="25400" tIns="25400" rIns="25400" bIns="25400" rtlCol="0" anchor="ctr"/>
+          <a:lstStyle/>
+          <a:p>
+            <a:pPr algn="ctr" indent="0" marL="0">
+              <a:buNone/>
+            </a:pPr>
+            <a:r>
+              <a:rPr lang="en-US" sz="2000" b="1" dirty="0">
+                <a:solidFill>
+                  <a:schemeClr val="tx2"/>
+                </a:solidFill>
+              </a:rPr>
+              <a:t>+ 482</a:t>
+            </a:r>
+            <a:endParaRPr lang="en-US" sz="2000" dirty="0"/>
+          </a:p>
+          <a:p>
+            <a:pPr algn="ctr" indent="0" marL="0">
+              <a:buNone/>
+            </a:pPr>
+            <a:r>
+              <a:rPr lang="en-US" sz="1100" dirty="0">
+                <a:solidFill>
+                  <a:schemeClr val="tx2"/>
+                </a:solidFill>
+              </a:rPr>
+              <a:t>SCI modules</a:t>
+            </a:r>
+            <a:endParaRPr lang="en-US" sz="2000" dirty="0"/>
+          </a:p>
+        </p:txBody>
+      </p:sp>
+      <p:sp>
+        <p:nvSpPr>
+          <p:cNvPr id="8" name="Volume tile 5"/>
+          <p:cNvSpPr txBox="1"/>
+          <p:nvPr/>
+        </p:nvSpPr>
+        <p:spPr>
+          <a:xfrm>
+            <a:off x="7232904" y="1600200"/>
+            <a:ext cx="1572768" cy="868680"/>
+          </a:xfrm>
+          <a:prstGeom prst="rect">
+            <a:avLst/>
+          </a:prstGeom>
+          <a:solidFill>
+            <a:srgbClr val="0A1C58"/>
+          </a:solidFill>
+          <a:ln/>
+        </p:spPr>
+        <p:txBody>
+          <a:bodyPr wrap="square" lIns="25400" tIns="25400" rIns="25400" bIns="25400" rtlCol="0" anchor="ctr"/>
+          <a:lstStyle/>
+          <a:p>
+            <a:pPr algn="ctr" indent="0" marL="0">
+              <a:buNone/>
+            </a:pPr>
+            <a:r>
+              <a:rPr lang="en-US" sz="2000" b="1" dirty="0">
+                <a:solidFill>
+                  <a:schemeClr val="bg1"/>
+                </a:solidFill>
+              </a:rPr>
+              <a:t>= 1,687</a:t>
+            </a:r>
+            <a:endParaRPr lang="en-US" sz="2000" dirty="0"/>
+          </a:p>
+          <a:p>
+            <a:pPr algn="ctr" indent="0" marL="0">
+              <a:buNone/>
+            </a:pPr>
+            <a:r>
+              <a:rPr lang="en-US" sz="1100" dirty="0">
+                <a:solidFill>
+                  <a:schemeClr val="bg1"/>
+                </a:solidFill>
+              </a:rPr>
+              <a:t>FY27E modules</a:t>
+            </a:r>
+            <a:endParaRPr lang="en-US" sz="2000" dirty="0"/>
+          </a:p>
+        </p:txBody>
+      </p:sp>
+      <p:sp>
+        <p:nvSpPr>
+          <p:cNvPr id="9" name="Share header"/>
+          <p:cNvSpPr txBox="1"/>
+          <p:nvPr/>
+        </p:nvSpPr>
+        <p:spPr>
+          <a:xfrm>
+            <a:off x="320040" y="2606040"/>
+            <a:ext cx="4206240" cy="365760"/>
+          </a:xfrm>
+          <a:prstGeom prst="rect">
+            <a:avLst/>
+          </a:prstGeom>
+          <a:noFill/>
+          <a:ln/>
+        </p:spPr>
+        <p:txBody>
+          <a:bodyPr wrap="square" lIns="0" tIns="0" rIns="0" bIns="0" rtlCol="0" anchor="b"/>
+          <a:lstStyle/>
+          <a:p>
+            <a:pPr algn="ctr" indent="0" marL="0">
+              <a:buNone/>
+            </a:pPr>
+            <a:r>
+              <a:rPr lang="en-US" sz="1600" b="1" dirty="0">
+                <a:solidFill>
+                  <a:srgbClr val="1A1A1A"/>
+                </a:solidFill>
+              </a:rPr>
+              <a:t>FTAI Share of CFM56 Module Work</a:t>
+            </a:r>
+            <a:endParaRPr lang="en-US" sz="1600" dirty="0"/>
+          </a:p>
+        </p:txBody>
+      </p:sp>
+      <p:sp>
+        <p:nvSpPr>
+          <p:cNvPr id="10" name="Share header rule"/>
+          <p:cNvSpPr/>
+          <p:nvPr/>
+        </p:nvSpPr>
+        <p:spPr>
+          <a:xfrm>
+            <a:off x="320040" y="3026664"/>
+            <a:ext cx="4206240" cy="0"/>
+          </a:xfrm>
+          <a:prstGeom prst="line">
+            <a:avLst/>
+          </a:prstGeom>
+          <a:noFill/>
+          <a:ln w="12700">
+            <a:solidFill>
+              <a:srgbClr val="1A1A1A"/>
+            </a:solidFill>
+            <a:prstDash val="solid"/>
+          </a:ln>
+        </p:spPr>
+      </p:sp>
+      <p:graphicFrame>
+        <p:nvGraphicFramePr>
+          <p:cNvPr id="11" name="Share chart" descr=""/>
+          <p:cNvGraphicFramePr/>
+          <p:nvPr/>
+        </p:nvGraphicFramePr>
+        <p:xfrm>
+          <a:off x="320040" y="3108960"/>
+          <a:ext cx="4206240" cy="2240280"/>
+        </p:xfrm>
+        <a:graphic xmlns:a="http://schemas.openxmlformats.org/drawingml/2006/main">
+          <a:graphicData uri="http://schemas.openxmlformats.org/drawingml/2006/chart">
+            <c:chart xmlns:c="http://schemas.openxmlformats.org/drawingml/2006/chart" r:id="rId1"/>
+          </a:graphicData>
+        </a:graphic>
+      </p:graphicFrame>
+      <p:sp>
+        <p:nvSpPr>
+          <p:cNvPr id="12" name="Modules header"/>
+          <p:cNvSpPr txBox="1"/>
+          <p:nvPr/>
+        </p:nvSpPr>
+        <p:spPr>
+          <a:xfrm>
+            <a:off x="4892040" y="2606040"/>
+            <a:ext cx="3931920" cy="365760"/>
+          </a:xfrm>
+          <a:prstGeom prst="rect">
+            <a:avLst/>
+          </a:prstGeom>
+          <a:noFill/>
+          <a:ln/>
+        </p:spPr>
+        <p:txBody>
+          <a:bodyPr wrap="square" lIns="0" tIns="0" rIns="0" bIns="0" rtlCol="0" anchor="b"/>
+          <a:lstStyle/>
+          <a:p>
+            <a:pPr algn="ctr" indent="0" marL="0">
+              <a:buNone/>
+            </a:pPr>
+            <a:r>
+              <a:rPr lang="en-US" sz="1600" b="1" dirty="0">
+                <a:solidFill>
+                  <a:srgbClr val="1A1A1A"/>
+                </a:solidFill>
+              </a:rPr>
+              <a:t>FTAI Modules Produced</a:t>
+            </a:r>
+            <a:endParaRPr lang="en-US" sz="1600" dirty="0"/>
+          </a:p>
+        </p:txBody>
+      </p:sp>
+      <p:sp>
+        <p:nvSpPr>
+          <p:cNvPr id="13" name="Modules header rule"/>
+          <p:cNvSpPr/>
+          <p:nvPr/>
+        </p:nvSpPr>
+        <p:spPr>
+          <a:xfrm>
+            <a:off x="4892040" y="3026664"/>
+            <a:ext cx="3931920" cy="0"/>
+          </a:xfrm>
+          <a:prstGeom prst="line">
+            <a:avLst/>
+          </a:prstGeom>
+          <a:noFill/>
+          <a:ln w="12700">
+            <a:solidFill>
+              <a:srgbClr val="1A1A1A"/>
+            </a:solidFill>
+            <a:prstDash val="solid"/>
+          </a:ln>
+        </p:spPr>
+      </p:sp>
+      <p:graphicFrame>
+        <p:nvGraphicFramePr>
+          <p:cNvPr id="14" name="Modules chart" descr=""/>
+          <p:cNvGraphicFramePr/>
+          <p:nvPr/>
+        </p:nvGraphicFramePr>
+        <p:xfrm>
+          <a:off x="4892040" y="3108960"/>
+          <a:ext cx="3931920" cy="2011680"/>
+        </p:xfrm>
+        <a:graphic xmlns:a="http://schemas.openxmlformats.org/drawingml/2006/main">
+          <a:graphicData uri="http://schemas.openxmlformats.org/drawingml/2006/chart">
+            <c:chart xmlns:c="http://schemas.openxmlformats.org/drawingml/2006/chart" r:id="rId2"/>
+          </a:graphicData>
+        </a:graphic>
+      </p:graphicFrame>
+      <p:sp>
+        <p:nvSpPr>
+          <p:cNvPr id="15" name="Modules legend"/>
+          <p:cNvSpPr txBox="1"/>
+          <p:nvPr/>
+        </p:nvSpPr>
+        <p:spPr>
+          <a:xfrm>
+            <a:off x="4892040" y="5120640"/>
+            <a:ext cx="3931920" cy="228600"/>
+          </a:xfrm>
+          <a:prstGeom prst="rect">
+            <a:avLst/>
+          </a:prstGeom>
+          <a:noFill/>
+          <a:ln/>
+        </p:spPr>
+        <p:txBody>
+          <a:bodyPr wrap="square" lIns="0" tIns="0" rIns="0" bIns="0" rtlCol="0" anchor="ctr"/>
+          <a:lstStyle/>
+          <a:p>
+            <a:pPr algn="ctr" indent="0" marL="0">
+              <a:buNone/>
+            </a:pPr>
+            <a:r>
+              <a:rPr lang="en-US" sz="1100" dirty="0">
+                <a:solidFill>
+                  <a:srgbClr val="0A1C58"/>
+                </a:solidFill>
+              </a:rPr>
+              <a:t>■ </a:t>
+            </a:r>
+            <a:pPr algn="ctr" indent="0" marL="0">
+              <a:buNone/>
+            </a:pPr>
+            <a:r>
+              <a:rPr lang="en-US" sz="1100" dirty="0">
+                <a:solidFill>
+                  <a:srgbClr val="1A1A1A"/>
+                </a:solidFill>
+              </a:rPr>
+              <a:t>Third-party   </a:t>
+            </a:r>
+            <a:pPr algn="ctr" indent="0" marL="0">
+              <a:buNone/>
+            </a:pPr>
+            <a:r>
+              <a:rPr lang="en-US" sz="1100" dirty="0">
+                <a:solidFill>
+                  <a:srgbClr val="B5AEA9"/>
+                </a:solidFill>
+              </a:rPr>
+              <a:t>■ </a:t>
+            </a:r>
+            <a:pPr algn="ctr" indent="0" marL="0">
+              <a:buNone/>
+            </a:pPr>
+            <a:r>
+              <a:rPr lang="en-US" sz="1100" dirty="0">
+                <a:solidFill>
+                  <a:srgbClr val="1A1A1A"/>
+                </a:solidFill>
+              </a:rPr>
+              <a:t>SCI floor</a:t>
+            </a:r>
+            <a:endParaRPr lang="en-US" sz="1100" dirty="0"/>
+          </a:p>
+        </p:txBody>
+      </p:sp>
+      <p:sp>
+        <p:nvSpPr>
+          <p:cNvPr id="16" name="Takeaway"/>
+          <p:cNvSpPr txBox="1"/>
+          <p:nvPr/>
+        </p:nvSpPr>
+        <p:spPr>
+          <a:xfrm>
+            <a:off x="320040" y="5504688"/>
+            <a:ext cx="8503920" cy="566928"/>
+          </a:xfrm>
+          <a:prstGeom prst="rect">
+            <a:avLst/>
+          </a:prstGeom>
+          <a:solidFill>
+            <a:srgbClr val="0A1C58"/>
+          </a:solidFill>
+          <a:ln/>
+        </p:spPr>
+        <p:txBody>
+          <a:bodyPr wrap="square" lIns="101600" tIns="25400" rIns="101600" bIns="25400" rtlCol="0" anchor="ctr"/>
+          <a:lstStyle/>
+          <a:p>
+            <a:pPr algn="ctr" indent="0" marL="0">
+              <a:buNone/>
+            </a:pPr>
+            <a:r>
+              <a:rPr lang="en-US" sz="1700" b="1" dirty="0">
+                <a:solidFill>
+                  <a:schemeClr val="bg1"/>
+                </a:solidFill>
+              </a:rPr>
+              <a:t>Even if share stalls, SCI's contracted fleet keeps adding volume: a floor under the thesis.</a:t>
+            </a:r>
+            <a:endParaRPr lang="en-US" sz="1700" dirty="0"/>
+          </a:p>
+        </p:txBody>
+      </p:sp>
+      <p:sp>
+        <p:nvSpPr>
+          <p:cNvPr id="17" name="Source"/>
+          <p:cNvSpPr txBox="1"/>
+          <p:nvPr/>
+        </p:nvSpPr>
+        <p:spPr>
+          <a:xfrm>
+            <a:off x="320040" y="6355080"/>
+            <a:ext cx="7132320" cy="274320"/>
+          </a:xfrm>
+          <a:prstGeom prst="rect">
+            <a:avLst/>
+          </a:prstGeom>
+          <a:noFill/>
+          <a:ln/>
+        </p:spPr>
+        <p:txBody>
+          <a:bodyPr wrap="square" lIns="0" tIns="0" rIns="0" bIns="0" rtlCol="0" anchor="ctr"/>
+          <a:lstStyle/>
+          <a:p>
+            <a:pPr indent="0" marL="0">
+              <a:buNone/>
+            </a:pPr>
+            <a:r>
+              <a:rPr lang="en-US" sz="1100" b="1" dirty="0">
+                <a:solidFill>
+                  <a:srgbClr val="1A1A1A"/>
+                </a:solidFill>
+              </a:rPr>
+              <a:t>Source: </a:t>
+            </a:r>
+            <a:pPr indent="0" marL="0">
+              <a:buNone/>
+            </a:pPr>
+            <a:r>
+              <a:rPr lang="en-US" sz="1100" dirty="0">
+                <a:solidFill>
+                  <a:srgbClr val="1A1A1A"/>
+                </a:solidFill>
+              </a:rPr>
+              <a:t>GPS model (RPM tab); 2024–25 share per GPS analysis; FTAI 2027 target of 1,700 modules (Q2'26 supplement)</a:t>
+            </a:r>
+            <a:endParaRPr lang="en-US" sz="1100" dirty="0"/>
+          </a:p>
+        </p:txBody>
+      </p:sp>
+      <p:sp>
+        <p:nvSpPr>
+          <p:cNvPr id="25" name="Slide Number Placeholder 0"/>
+          <p:cNvSpPr>
+            <a:spLocks noGrp="1"/>
+          </p:cNvSpPr>
+          <p:nvPr>
+            <p:ph type="sldNum" sz="quarter" idx="4294967295"/>
+          </p:nvPr>
+        </p:nvSpPr>
+        <p:spPr>
+          <a:xfrm>
+            <a:off x="7635240" y="6327648"/>
+            <a:ext cx="411480" cy="274320"/>
+          </a:xfrm>
+          <a:prstGeom prst="rect">
+            <a:avLst/>
+          </a:prstGeom>
+          <a:extLst>
+            <a:ext uri="{C572A759-6A51-4108-AA02-DFA0A04FC94B}">
+              <ma14:wrappingTextBoxFlag xmlns:ma14="http://schemas.microsoft.com/office/mac/drawingml/2011/main" val="0"/>
+            </a:ext>
+          </a:extLst>
+        </p:spPr>
+        <p:txBody>
+          <a:bodyPr/>
+          <a:lstStyle>
+            <a:lvl1pPr>
+              <a:defRPr sz="1100">
+                <a:solidFill>
+                  <a:srgbClr val="1A1A1A"/>
+                </a:solidFill>
+              </a:defRPr>
+            </a:lvl1pPr>
+          </a:lstStyle>
+          <a:p>
+            <a:pPr algn="r"/>
+            <a:fld id="{F7021451-1387-4CA6-816F-3879F97B5CBC}" type="slidenum">
+              <a:rPr b="1" lang="en-US"/>
+              <a:t>17</a:t>
             </a:fld>
             <a:endParaRPr lang="en-US"/>
           </a:p>

--- a/deck/FTAI_Long_Pitch.pptx
+++ b/deck/FTAI_Long_Pitch.pptx
@@ -123,12 +123,12 @@
   <p:extLst>
     <p:ext uri="{521415D9-36F7-43E2-AB2F-B90AF26B5E84}">
       <p14:sectionLst xmlns:p14="http://schemas.microsoft.com/office/powerpoint/2010/main">
-        <p14:section name="Introduction" id="{e8d0fafb-aa79-2d9e-319a-5074e0734d6e}">
+        <p14:section name="Introduction" id="{00389e8b-40cf-f582-ad16-f8777f86c9a0}">
           <p14:sldIdLst>
             <p14:sldId id="256"/>
           </p14:sldIdLst>
         </p14:section>
-        <p14:section name="The Opportunity" id="{ffa3a2c2-6418-8007-74be-4e074fb0831f}">
+        <p14:section name="The Opportunity" id="{79d2db7f-cbac-ec4f-3d15-3e454878abd9}">
           <p14:sldIdLst>
             <p14:sldId id="257"/>
             <p14:sldId id="258"/>
@@ -136,18 +136,18 @@
             <p14:sldId id="260"/>
           </p14:sldIdLst>
         </p14:section>
-        <p14:section name="Returns" id="{6b03a5ca-8056-a30a-1f33-b2683c32ada5}">
+        <p14:section name="Returns" id="{fb0a65e6-53fa-27fa-764e-e36436b8d4d5}">
           <p14:sldIdLst>
             <p14:sldId id="261"/>
           </p14:sldIdLst>
         </p14:section>
-        <p14:section name="Business Overview" id="{f184f02e-8139-5bf3-ce8d-ce3a5f36f9d8}">
+        <p14:section name="Business Overview" id="{94d8a67a-4cc0-5acd-3480-3545a3634e9f}">
           <p14:sldIdLst>
             <p14:sldId id="262"/>
             <p14:sldId id="263"/>
           </p14:sldIdLst>
         </p14:section>
-        <p14:section name="Thesis 1a" id="{7c20b910-f9d8-2779-2ec1-ccb12651d875}">
+        <p14:section name="Thesis 1a" id="{71c51c67-b94e-309a-3a33-568a84bba587}">
           <p14:sldIdLst>
             <p14:sldId id="264"/>
             <p14:sldId id="265"/>
@@ -155,7 +155,7 @@
             <p14:sldId id="267"/>
           </p14:sldIdLst>
         </p14:section>
-        <p14:section name="Thesis 1b" id="{59a5d50f-3134-8ce3-1f73-e2c1220fd11a}">
+        <p14:section name="Thesis 1b" id="{3285a031-5fcc-d810-8c87-1ca6c2aceb57}">
           <p14:sldIdLst>
             <p14:sldId id="268"/>
             <p14:sldId id="269"/>
@@ -1720,7 +1720,7 @@
       <c:layout/>
       <c:barChart>
         <c:barDir val="col"/>
-        <c:grouping val="clustered"/>
+        <c:grouping val="percentStacked"/>
         <c:varyColors val="0"/>
         <c:ser>
           <c:idx val="0"/>
@@ -1731,34 +1731,35 @@
               <c:strCache>
                 <c:ptCount val="1"/>
                 <c:pt idx="0">
-                  <c:v>LEAP installed base</c:v>
+                  <c:v>CFM56</c:v>
                 </c:pt>
               </c:strCache>
             </c:strRef>
           </c:tx>
           <c:spPr>
             <a:solidFill>
-              <a:srgbClr val="0A1C58"/>
+              <a:srgbClr val="B5AEA9"/>
             </a:solidFill>
             <a:effectLst/>
           </c:spPr>
           <c:invertIfNegative val="0"/>
           <c:dLbls>
-            <c:numFmt formatCode="0&quot;x&quot;" sourceLinked="0"/>
+            <c:numFmt formatCode="0%" sourceLinked="0"/>
             <c:txPr>
               <a:bodyPr/>
               <a:lstStyle/>
               <a:p>
                 <a:pPr>
-                  <a:defRPr b="1" i="0" strike="noStrike" sz="1600" u="none">
+                  <a:defRPr b="1" i="0" strike="noStrike" sz="1300" u="none">
                     <a:solidFill>
-                      <a:srgbClr val="1A1A1A"/>
+                      <a:srgbClr val="FFFFFF"/>
                     </a:solidFill>
                     <a:latin typeface="+mn-lt"/>
                   </a:defRPr>
                 </a:pPr>
               </a:p>
             </c:txPr>
+            <c:dLblPos val="ctr"/>
             <c:showLegendKey val="0"/>
             <c:showVal val="1"/>
             <c:showCatName val="0"/>
@@ -1774,7 +1775,7 @@
                 <c:ptCount val="2"/>
                 <c:lvl>
                   <c:pt idx="0">
-                    <c:v>2024</c:v>
+                    <c:v>2025</c:v>
                   </c:pt>
                   <c:pt idx="1">
                     <c:v>2030E</c:v>
@@ -1790,31 +1791,110 @@
                 <c:formatCode>General</c:formatCode>
                 <c:ptCount val="2"/>
                 <c:pt idx="0">
-                  <c:v>1</c:v>
+                  <c:v>0.68</c:v>
                 </c:pt>
                 <c:pt idx="1">
-                  <c:v>3</c:v>
+                  <c:v>0.49</c:v>
+                </c:pt>
+              </c:numCache>
+            </c:numRef>
+          </c:val>
+        </c:ser>
+        <c:ser>
+          <c:idx val="1"/>
+          <c:order val="1"/>
+          <c:tx>
+            <c:strRef>
+              <c:f>Sheet1!$C$1</c:f>
+              <c:strCache>
+                <c:ptCount val="1"/>
+                <c:pt idx="0">
+                  <c:v>LEAP</c:v>
+                </c:pt>
+              </c:strCache>
+            </c:strRef>
+          </c:tx>
+          <c:spPr>
+            <a:solidFill>
+              <a:srgbClr val="0A1C58"/>
+            </a:solidFill>
+            <a:effectLst/>
+          </c:spPr>
+          <c:invertIfNegative val="0"/>
+          <c:dLbls>
+            <c:numFmt formatCode="0%" sourceLinked="0"/>
+            <c:txPr>
+              <a:bodyPr/>
+              <a:lstStyle/>
+              <a:p>
+                <a:pPr>
+                  <a:defRPr b="1" i="0" strike="noStrike" sz="1300" u="none">
+                    <a:solidFill>
+                      <a:srgbClr val="FFFFFF"/>
+                    </a:solidFill>
+                    <a:latin typeface="+mn-lt"/>
+                  </a:defRPr>
+                </a:pPr>
+              </a:p>
+            </c:txPr>
+            <c:dLblPos val="ctr"/>
+            <c:showLegendKey val="0"/>
+            <c:showVal val="1"/>
+            <c:showCatName val="0"/>
+            <c:showSerName val="0"/>
+            <c:showPercent val="0"/>
+            <c:showBubbleSize val="0"/>
+            <c:showLeaderLines val="0"/>
+          </c:dLbls>
+          <c:cat>
+            <c:multiLvlStrRef>
+              <c:f>Sheet1!$A$2:$A$3</c:f>
+              <c:multiLvlStrCache>
+                <c:ptCount val="2"/>
+                <c:lvl>
+                  <c:pt idx="0">
+                    <c:v>2025</c:v>
+                  </c:pt>
+                  <c:pt idx="1">
+                    <c:v>2030E</c:v>
+                  </c:pt>
+                </c:lvl>
+              </c:multiLvlStrCache>
+            </c:multiLvlStrRef>
+          </c:cat>
+          <c:val>
+            <c:numRef>
+              <c:f>Sheet1!$C$2:$C$3</c:f>
+              <c:numCache>
+                <c:formatCode>General</c:formatCode>
+                <c:ptCount val="2"/>
+                <c:pt idx="0">
+                  <c:v>0.32</c:v>
+                </c:pt>
+                <c:pt idx="1">
+                  <c:v>0.51</c:v>
                 </c:pt>
               </c:numCache>
             </c:numRef>
           </c:val>
         </c:ser>
         <c:dLbls>
-          <c:numFmt formatCode="0&quot;x&quot;" sourceLinked="0"/>
+          <c:numFmt formatCode="0%" sourceLinked="0"/>
           <c:txPr>
             <a:bodyPr/>
             <a:lstStyle/>
             <a:p>
               <a:pPr>
-                <a:defRPr b="1" i="0" strike="noStrike" sz="1600" u="none">
+                <a:defRPr b="1" i="0" strike="noStrike" sz="1300" u="none">
                   <a:solidFill>
-                    <a:srgbClr val="1A1A1A"/>
+                    <a:srgbClr val="FFFFFF"/>
                   </a:solidFill>
                   <a:latin typeface="+mn-lt"/>
                 </a:defRPr>
               </a:pPr>
             </a:p>
           </c:txPr>
+          <c:dLblPos val="ctr"/>
           <c:showLegendKey val="0"/>
           <c:showVal val="1"/>
           <c:showCatName val="0"/>
@@ -1823,8 +1903,8 @@
           <c:showBubbleSize val="0"/>
           <c:showLeaderLines val="0"/>
         </c:dLbls>
-        <c:gapWidth val="45"/>
-        <c:overlap val="0"/>
+        <c:gapWidth val="40"/>
+        <c:overlap val="100"/>
         <c:axId val="2094734554"/>
         <c:axId val="2094734552"/>
         <c:axId val="2094734556"/>
@@ -1874,8 +1954,6 @@
         <c:axId val="2094734552"/>
         <c:scaling>
           <c:orientation val="minMax"/>
-          <c:max val="3.6"/>
-          <c:min val="0"/>
         </c:scaling>
         <c:delete val="1"/>
         <c:axPos val="l"/>
@@ -5520,7 +5598,7 @@
             <c:size val="6"/>
             <c:spPr>
               <a:solidFill>
-                <a:srgbClr val="847C7A"/>
+                <a:srgbClr val="0A1C58"/>
               </a:solidFill>
               <a:ln w="9525" cap="flat">
                 <a:solidFill>
@@ -6844,7 +6922,7 @@
           <a:p>
             <a:r>
               <a:rPr lang="en-US" dirty="0"/>
-              <a:t>CFM56 full overhaul ~60 days pre-pandemic vs. 90–120 days now (Aviation Business News, 2025; secondary source). Slot waits up 2–6 months (Bain, 2024; 2025 market summaries). GE: LEAP shop visits up &gt;50% in Q1 and Q2 2026; LEAP installed base to roughly triple 2024–2030; ~$500M of &gt;$1B MRO investment to LEAP, roughly doubling internal LEAP capacity. Former MRO executive: 'the variability in capital investment required to capture the LEAP is extremely low versus what it took them to capture the CFM.'</a:t>
+              <a:t>CFM56 full overhaul ~60 days pre-pandemic vs. 90–120 days now (Aviation Business News, 2025; secondary source). Slot waits up 2–6 months (Bain, 2024; 2025 market summaries). GE: LEAP shop visits up &gt;50% in Q1 and Q2 2026; LEAP installed base to roughly triple 2024–2030; ~$500M of &gt;$1B MRO investment to LEAP, roughly doubling internal LEAP capacity. Shop-visit mix: CFM56 2,350 (2025) and 2,150 (2030E) from GPS model; LEAP ~1,100 (2025) and ~2,200 (2030E) per CFM forecast that LEAP visits exceed CFM56 by 2030. No source found showing OEMs cutting CFM56 capacity outright; the shift is in where new OEM capacity goes. Former MRO executive: 'the variability in capital investment required to capture the LEAP is extremely low versus what it took them to capture the CFM.'</a:t>
             </a:r>
             <a:endParaRPr lang="en-US" dirty="0"/>
           </a:p>
@@ -6932,7 +7010,7 @@
           <a:p>
             <a:r>
               <a:rPr lang="en-US" dirty="0"/>
-              <a:t>FTAI (Q2'24 call, as reported by third parties): average CFM56 engine turnaround ~120–180 days vs. 5–25 days for a module swap. Midpoints 150 vs. ~20 days = ~7x. Step lengths within the shop visit are illustrative; slot waits of 2–6 months and HPT blade shortages drive most of the delay. Caveat: the fastest swaps apply where the core does not need to be opened; roughly half of shop visits require core disassembly.</a:t>
+              <a:t>FTAI (Q2'24 call, as reported by third parties): average CFM56 engine turnaround ~120–180 days vs. 5–25 days for a module swap. Midpoints 150 vs. ~20 days = ~7x. Step lengths within the shop visit are illustrative; slot waits of 2–6 months and HPT blade shortages drive most of the delay. Caveat: the fastest swaps apply where the core does not need to be opened; roughly half of shop visits require core disassembly. Cost chart: IBA puts CFM56-7B spare-engine lease rates at ~$100K/month in 2024 (up from ~$75K in 2019), ~$3.3K/day. 150 days = ~$493K vs. 20 days = ~$66K. Lease cost only; lost flying revenue on a grounded jet (often $10K+ per day) would widen the gap.</a:t>
             </a:r>
             <a:endParaRPr lang="en-US" dirty="0"/>
           </a:p>
@@ -11540,7 +11618,7 @@
                   <a:schemeClr val="tx2"/>
                 </a:solidFill>
               </a:rPr>
-              <a:t>Independent shops are clogged just as OEMs pivot to LEAP. CFM56 work needs a new home.</a:t>
+              <a:t>Independent shops are clogged, and OEMs are pouring new capacity into LEAP, not CFM56.</a:t>
             </a:r>
             <a:endParaRPr lang="en-US" sz="1700" dirty="0"/>
           </a:p>
@@ -11613,7 +11691,7 @@
         </p:nvGraphicFramePr>
         <p:xfrm>
           <a:off x="548640" y="2240280"/>
-          <a:ext cx="2286000" cy="2514600"/>
+          <a:ext cx="2286000" cy="1874520"/>
         </p:xfrm>
         <a:graphic xmlns:a="http://schemas.openxmlformats.org/drawingml/2006/main">
           <a:graphicData uri="http://schemas.openxmlformats.org/drawingml/2006/chart">
@@ -11629,8 +11707,8 @@
         </p:nvSpPr>
         <p:spPr>
           <a:xfrm>
-            <a:off x="685800" y="3200400"/>
-            <a:ext cx="914400" cy="320040"/>
+            <a:off x="685800" y="2926080"/>
+            <a:ext cx="914400" cy="274320"/>
           </a:xfrm>
           <a:prstGeom prst="rect">
             <a:avLst/>
@@ -11646,14 +11724,14 @@
               <a:buNone/>
             </a:pPr>
             <a:r>
-              <a:rPr lang="en-US" sz="1600" b="1" dirty="0">
+              <a:rPr lang="en-US" sz="1500" b="1" dirty="0">
                 <a:solidFill>
                   <a:srgbClr val="1A1A1A"/>
                 </a:solidFill>
               </a:rPr>
               <a:t>~60</a:t>
             </a:r>
-            <a:endParaRPr lang="en-US" sz="1600" dirty="0"/>
+            <a:endParaRPr lang="en-US" sz="1500" dirty="0"/>
           </a:p>
         </p:txBody>
       </p:sp>
@@ -11665,8 +11743,8 @@
         </p:nvSpPr>
         <p:spPr>
           <a:xfrm>
-            <a:off x="1737360" y="2148840"/>
-            <a:ext cx="1005840" cy="320040"/>
+            <a:off x="1737360" y="2103120"/>
+            <a:ext cx="1005840" cy="274320"/>
           </a:xfrm>
           <a:prstGeom prst="rect">
             <a:avLst/>
@@ -11682,14 +11760,14 @@
               <a:buNone/>
             </a:pPr>
             <a:r>
-              <a:rPr lang="en-US" sz="1600" b="1" dirty="0">
+              <a:rPr lang="en-US" sz="1500" b="1" dirty="0">
                 <a:solidFill>
                   <a:schemeClr val="tx2"/>
                 </a:solidFill>
               </a:rPr>
               <a:t>90–120</a:t>
             </a:r>
-            <a:endParaRPr lang="en-US" sz="1600" dirty="0"/>
+            <a:endParaRPr lang="en-US" sz="1500" dirty="0"/>
           </a:p>
         </p:txBody>
       </p:sp>
@@ -11701,8 +11779,8 @@
         </p:nvSpPr>
         <p:spPr>
           <a:xfrm>
-            <a:off x="548640" y="4773168"/>
-            <a:ext cx="2286000" cy="256032"/>
+            <a:off x="548640" y="4133088"/>
+            <a:ext cx="2286000" cy="237744"/>
           </a:xfrm>
           <a:prstGeom prst="rect">
             <a:avLst/>
@@ -11737,8 +11815,8 @@
         </p:nvSpPr>
         <p:spPr>
           <a:xfrm>
-            <a:off x="2880360" y="2743200"/>
-            <a:ext cx="1463040" cy="1280160"/>
+            <a:off x="2880360" y="2514600"/>
+            <a:ext cx="1463040" cy="1188720"/>
           </a:xfrm>
           <a:prstGeom prst="rect">
             <a:avLst/>
@@ -11754,28 +11832,28 @@
               <a:buNone/>
             </a:pPr>
             <a:r>
-              <a:rPr lang="en-US" sz="2600" b="1" dirty="0">
+              <a:rPr lang="en-US" sz="2400" b="1" dirty="0">
                 <a:solidFill>
                   <a:schemeClr val="tx2"/>
                 </a:solidFill>
               </a:rPr>
               <a:t>+2–6</a:t>
             </a:r>
-            <a:endParaRPr lang="en-US" sz="2600" dirty="0"/>
-          </a:p>
-          <a:p>
-            <a:pPr algn="ctr" indent="0" marL="0">
-              <a:buNone/>
-            </a:pPr>
-            <a:r>
-              <a:rPr lang="en-US" sz="1200" dirty="0">
+            <a:endParaRPr lang="en-US" sz="2400" dirty="0"/>
+          </a:p>
+          <a:p>
+            <a:pPr algn="ctr" indent="0" marL="0">
+              <a:buNone/>
+            </a:pPr>
+            <a:r>
+              <a:rPr lang="en-US" sz="1100" dirty="0">
                 <a:solidFill>
                   <a:srgbClr val="1A1A1A"/>
                 </a:solidFill>
               </a:rPr>
               <a:t>months just to get a shop slot</a:t>
             </a:r>
-            <a:endParaRPr lang="en-US" sz="2600" dirty="0"/>
+            <a:endParaRPr lang="en-US" sz="2400" dirty="0"/>
           </a:p>
         </p:txBody>
       </p:sp>
@@ -11809,7 +11887,7 @@
                   <a:srgbClr val="1A1A1A"/>
                 </a:solidFill>
               </a:rPr>
-              <a:t>…While OEMs Move to LEAP</a:t>
+              <a:t>…While OEMs Pivot to LEAP</a:t>
             </a:r>
             <a:endParaRPr lang="en-US" sz="1600" dirty="0"/>
           </a:p>
@@ -11840,13 +11918,13 @@
       </p:sp>
       <p:graphicFrame>
         <p:nvGraphicFramePr>
-          <p:cNvPr id="13" name="LEAP base chart" descr=""/>
+          <p:cNvPr id="13" name="Shop visit mix chart" descr=""/>
           <p:cNvGraphicFramePr/>
           <p:nvPr/>
         </p:nvGraphicFramePr>
         <p:xfrm>
-          <a:off x="4937760" y="2240280"/>
-          <a:ext cx="2103120" cy="2514600"/>
+          <a:off x="4892040" y="2240280"/>
+          <a:ext cx="2240280" cy="1874520"/>
         </p:xfrm>
         <a:graphic xmlns:a="http://schemas.openxmlformats.org/drawingml/2006/main">
           <a:graphicData uri="http://schemas.openxmlformats.org/drawingml/2006/chart">
@@ -11856,14 +11934,14 @@
       </p:graphicFrame>
       <p:sp>
         <p:nvSpPr>
-          <p:cNvPr id="14" name="LEAP caption"/>
+          <p:cNvPr id="14" name="Mix legend"/>
           <p:cNvSpPr txBox="1"/>
           <p:nvPr/>
         </p:nvSpPr>
         <p:spPr>
           <a:xfrm>
-            <a:off x="4937760" y="4773168"/>
-            <a:ext cx="2103120" cy="256032"/>
+            <a:off x="4892040" y="4133088"/>
+            <a:ext cx="2240280" cy="237744"/>
           </a:xfrm>
           <a:prstGeom prst="rect">
             <a:avLst/>
@@ -11879,12 +11957,45 @@
               <a:buNone/>
             </a:pPr>
             <a:r>
-              <a:rPr lang="en-US" sz="1100" i="1" dirty="0">
-                <a:solidFill>
-                  <a:schemeClr val="accent2"/>
-                </a:solidFill>
-              </a:rPr>
-              <a:t>LEAP installed base</a:t>
+              <a:rPr lang="en-US" sz="1100" dirty="0">
+                <a:solidFill>
+                  <a:srgbClr val="B5AEA9"/>
+                </a:solidFill>
+              </a:rPr>
+              <a:t>■ </a:t>
+            </a:r>
+            <a:pPr algn="ctr" indent="0" marL="0">
+              <a:buNone/>
+            </a:pPr>
+            <a:r>
+              <a:rPr lang="en-US" sz="1100" dirty="0">
+                <a:solidFill>
+                  <a:srgbClr val="1A1A1A"/>
+                </a:solidFill>
+              </a:rPr>
+              <a:t>CFM56  </a:t>
+            </a:r>
+            <a:pPr algn="ctr" indent="0" marL="0">
+              <a:buNone/>
+            </a:pPr>
+            <a:r>
+              <a:rPr lang="en-US" sz="1100" dirty="0">
+                <a:solidFill>
+                  <a:srgbClr val="0A1C58"/>
+                </a:solidFill>
+              </a:rPr>
+              <a:t>■ </a:t>
+            </a:r>
+            <a:pPr algn="ctr" indent="0" marL="0">
+              <a:buNone/>
+            </a:pPr>
+            <a:r>
+              <a:rPr lang="en-US" sz="1100" dirty="0">
+                <a:solidFill>
+                  <a:srgbClr val="1A1A1A"/>
+                </a:solidFill>
+              </a:rPr>
+              <a:t>LEAP</a:t>
             </a:r>
             <a:endParaRPr lang="en-US" sz="1100" dirty="0"/>
           </a:p>
@@ -11898,8 +12009,8 @@
         </p:nvSpPr>
         <p:spPr>
           <a:xfrm>
-            <a:off x="7132320" y="2331720"/>
-            <a:ext cx="1691640" cy="1097280"/>
+            <a:off x="7178040" y="2240280"/>
+            <a:ext cx="1645920" cy="914400"/>
           </a:xfrm>
           <a:prstGeom prst="rect">
             <a:avLst/>
@@ -11915,14 +12026,14 @@
               <a:buNone/>
             </a:pPr>
             <a:r>
-              <a:rPr lang="en-US" sz="2400" b="1" dirty="0">
+              <a:rPr lang="en-US" sz="2200" b="1" dirty="0">
                 <a:solidFill>
                   <a:schemeClr val="tx2"/>
                 </a:solidFill>
               </a:rPr>
-              <a:t>+50%</a:t>
-            </a:r>
-            <a:endParaRPr lang="en-US" sz="2400" dirty="0"/>
+              <a:t>~1/2</a:t>
+            </a:r>
+            <a:endParaRPr lang="en-US" sz="2200" dirty="0"/>
           </a:p>
           <a:p>
             <a:pPr algn="ctr" indent="0" marL="0">
@@ -11934,9 +12045,9 @@
                   <a:srgbClr val="1A1A1A"/>
                 </a:solidFill>
               </a:rPr>
-              <a:t>LEAP shop visits, y/y (GE, 2026)</a:t>
-            </a:r>
-            <a:endParaRPr lang="en-US" sz="2400" dirty="0"/>
+              <a:t>of GE's $1B+ MRO spend goes to LEAP</a:t>
+            </a:r>
+            <a:endParaRPr lang="en-US" sz="2200" dirty="0"/>
           </a:p>
         </p:txBody>
       </p:sp>
@@ -11948,8 +12059,8 @@
         </p:nvSpPr>
         <p:spPr>
           <a:xfrm>
-            <a:off x="7132320" y="3566160"/>
-            <a:ext cx="1691640" cy="1097280"/>
+            <a:off x="7178040" y="3246120"/>
+            <a:ext cx="1645920" cy="914400"/>
           </a:xfrm>
           <a:prstGeom prst="rect">
             <a:avLst/>
@@ -11965,14 +12076,14 @@
               <a:buNone/>
             </a:pPr>
             <a:r>
-              <a:rPr lang="en-US" sz="2400" b="1" dirty="0">
+              <a:rPr lang="en-US" sz="2200" b="1" dirty="0">
                 <a:solidFill>
                   <a:schemeClr val="tx2"/>
                 </a:solidFill>
               </a:rPr>
-              <a:t>~2x</a:t>
-            </a:r>
-            <a:endParaRPr lang="en-US" sz="2400" dirty="0"/>
+              <a:t>+50%</a:t>
+            </a:r>
+            <a:endParaRPr lang="en-US" sz="2200" dirty="0"/>
           </a:p>
           <a:p>
             <a:pPr algn="ctr" indent="0" marL="0">
@@ -11984,15 +12095,67 @@
                   <a:srgbClr val="1A1A1A"/>
                 </a:solidFill>
               </a:rPr>
-              <a:t>GE's LEAP repair capacity, from ~$500M of spend</a:t>
-            </a:r>
-            <a:endParaRPr lang="en-US" sz="2400" dirty="0"/>
-          </a:p>
-        </p:txBody>
-      </p:sp>
-      <p:sp>
-        <p:nvSpPr>
-          <p:cNvPr id="17" name="Takeaway"/>
+              <a:t>LEAP shop visits, y/y (GE, 2026)</a:t>
+            </a:r>
+            <a:endParaRPr lang="en-US" sz="2200" dirty="0"/>
+          </a:p>
+        </p:txBody>
+      </p:sp>
+      <p:sp>
+        <p:nvSpPr>
+          <p:cNvPr id="17" name="Expert quote"/>
+          <p:cNvSpPr txBox="1"/>
+          <p:nvPr/>
+        </p:nvSpPr>
+        <p:spPr>
+          <a:xfrm>
+            <a:off x="320040" y="4526280"/>
+            <a:ext cx="8503920" cy="868680"/>
+          </a:xfrm>
+          <a:prstGeom prst="rect">
+            <a:avLst/>
+          </a:prstGeom>
+          <a:solidFill>
+            <a:srgbClr val="EFEDEA"/>
+          </a:solidFill>
+          <a:ln/>
+        </p:spPr>
+        <p:txBody>
+          <a:bodyPr wrap="square" lIns="152400" tIns="50800" rIns="152400" bIns="50800" rtlCol="0" anchor="ctr"/>
+          <a:lstStyle/>
+          <a:p>
+            <a:pPr algn="ctr" indent="0" marL="0">
+              <a:buNone/>
+            </a:pPr>
+            <a:r>
+              <a:rPr lang="en-US" sz="1400" b="1" dirty="0">
+                <a:solidFill>
+                  <a:srgbClr val="1A1A1A"/>
+                </a:solidFill>
+              </a:rPr>
+              <a:t>“The variability in capital investment required to capture the LEAP is extremely low versus what it took them to capture the CFM.”</a:t>
+            </a:r>
+            <a:endParaRPr lang="en-US" sz="1400" dirty="0"/>
+          </a:p>
+          <a:p>
+            <a:pPr algn="ctr" indent="0" marL="0">
+              <a:buNone/>
+            </a:pPr>
+            <a:r>
+              <a:rPr lang="en-US" sz="1200" i="1" dirty="0">
+                <a:solidFill>
+                  <a:srgbClr val="1A1A1A"/>
+                </a:solidFill>
+              </a:rPr>
+              <a:t>— Former executive, engine MRO shop</a:t>
+            </a:r>
+            <a:endParaRPr lang="en-US" sz="1400" dirty="0"/>
+          </a:p>
+        </p:txBody>
+      </p:sp>
+      <p:sp>
+        <p:nvSpPr>
+          <p:cNvPr id="18" name="Takeaway"/>
           <p:cNvSpPr txBox="1"/>
           <p:nvPr/>
         </p:nvSpPr>
@@ -12022,7 +12185,7 @@
                   <a:schemeClr val="bg1"/>
                 </a:solidFill>
               </a:rPr>
-              <a:t>OEM slots go to LEAP as independent shops clog. CFM56 owners need a faster option.</a:t>
+              <a:t>OEM slots shift to LEAP as independent shops clog. CFM56 owners need a faster option.</a:t>
             </a:r>
             <a:endParaRPr lang="en-US" sz="1700" dirty="0"/>
           </a:p>
@@ -12030,7 +12193,7 @@
       </p:sp>
       <p:sp>
         <p:nvSpPr>
-          <p:cNvPr id="18" name="Source"/>
+          <p:cNvPr id="19" name="Source"/>
           <p:cNvSpPr txBox="1"/>
           <p:nvPr/>
         </p:nvSpPr>
@@ -12069,7 +12232,7 @@
                   <a:srgbClr val="1A1A1A"/>
                 </a:solidFill>
               </a:rPr>
-              <a:t>Aviation Business News (2025); Bain (2024); GE Aerospace Q1/Q2'26 earnings calls</a:t>
+              <a:t>Aviation Business News (2025); Bain (2024); GE Q4'25–Q2'26 calls; CFM LEAP forecast; GPS model; GPS expert call</a:t>
             </a:r>
             <a:endParaRPr lang="en-US" sz="1100" dirty="0"/>
           </a:p>
@@ -12229,8 +12392,8 @@
         </p:nvSpPr>
         <p:spPr>
           <a:xfrm>
-            <a:off x="2148840" y="1600200"/>
-            <a:ext cx="6400800" cy="274320"/>
+            <a:off x="2148840" y="1536192"/>
+            <a:ext cx="6400800" cy="237744"/>
           </a:xfrm>
           <a:prstGeom prst="rect">
             <a:avLst/>
@@ -12246,14 +12409,14 @@
               <a:buNone/>
             </a:pPr>
             <a:r>
-              <a:rPr lang="en-US" sz="1200" i="1" dirty="0">
+              <a:rPr lang="en-US" sz="1100" i="1" dirty="0">
                 <a:solidFill>
                   <a:schemeClr val="accent2"/>
                 </a:solidFill>
               </a:rPr>
               <a:t>Days off wing</a:t>
             </a:r>
-            <a:endParaRPr lang="en-US" sz="1200" dirty="0"/>
+            <a:endParaRPr lang="en-US" sz="1100" dirty="0"/>
           </a:p>
         </p:txBody>
       </p:sp>
@@ -12265,8 +12428,8 @@
         </p:nvSpPr>
         <p:spPr>
           <a:xfrm>
-            <a:off x="2148840" y="1920240"/>
-            <a:ext cx="0" cy="2743200"/>
+            <a:off x="2148840" y="1783080"/>
+            <a:ext cx="0" cy="1508760"/>
           </a:xfrm>
           <a:prstGeom prst="line">
             <a:avLst/>
@@ -12288,8 +12451,8 @@
         </p:nvSpPr>
         <p:spPr>
           <a:xfrm>
-            <a:off x="1874520" y="4663440"/>
-            <a:ext cx="548640" cy="228600"/>
+            <a:off x="1874520" y="3291840"/>
+            <a:ext cx="548640" cy="201168"/>
           </a:xfrm>
           <a:prstGeom prst="rect">
             <a:avLst/>
@@ -12324,8 +12487,8 @@
         </p:nvSpPr>
         <p:spPr>
           <a:xfrm>
-            <a:off x="3215640" y="1920240"/>
-            <a:ext cx="0" cy="2743200"/>
+            <a:off x="3215640" y="1783080"/>
+            <a:ext cx="0" cy="1508760"/>
           </a:xfrm>
           <a:prstGeom prst="line">
             <a:avLst/>
@@ -12347,8 +12510,8 @@
         </p:nvSpPr>
         <p:spPr>
           <a:xfrm>
-            <a:off x="2941320" y="4663440"/>
-            <a:ext cx="548640" cy="228600"/>
+            <a:off x="2941320" y="3291840"/>
+            <a:ext cx="548640" cy="201168"/>
           </a:xfrm>
           <a:prstGeom prst="rect">
             <a:avLst/>
@@ -12383,8 +12546,8 @@
         </p:nvSpPr>
         <p:spPr>
           <a:xfrm>
-            <a:off x="4282440" y="1920240"/>
-            <a:ext cx="0" cy="2743200"/>
+            <a:off x="4282440" y="1783080"/>
+            <a:ext cx="0" cy="1508760"/>
           </a:xfrm>
           <a:prstGeom prst="line">
             <a:avLst/>
@@ -12406,8 +12569,8 @@
         </p:nvSpPr>
         <p:spPr>
           <a:xfrm>
-            <a:off x="4008120" y="4663440"/>
-            <a:ext cx="548640" cy="228600"/>
+            <a:off x="4008120" y="3291840"/>
+            <a:ext cx="548640" cy="201168"/>
           </a:xfrm>
           <a:prstGeom prst="rect">
             <a:avLst/>
@@ -12442,8 +12605,8 @@
         </p:nvSpPr>
         <p:spPr>
           <a:xfrm>
-            <a:off x="5349240" y="1920240"/>
-            <a:ext cx="0" cy="2743200"/>
+            <a:off x="5349240" y="1783080"/>
+            <a:ext cx="0" cy="1508760"/>
           </a:xfrm>
           <a:prstGeom prst="line">
             <a:avLst/>
@@ -12465,8 +12628,8 @@
         </p:nvSpPr>
         <p:spPr>
           <a:xfrm>
-            <a:off x="5074920" y="4663440"/>
-            <a:ext cx="548640" cy="228600"/>
+            <a:off x="5074920" y="3291840"/>
+            <a:ext cx="548640" cy="201168"/>
           </a:xfrm>
           <a:prstGeom prst="rect">
             <a:avLst/>
@@ -12501,8 +12664,8 @@
         </p:nvSpPr>
         <p:spPr>
           <a:xfrm>
-            <a:off x="6416040" y="1920240"/>
-            <a:ext cx="0" cy="2743200"/>
+            <a:off x="6416040" y="1783080"/>
+            <a:ext cx="0" cy="1508760"/>
           </a:xfrm>
           <a:prstGeom prst="line">
             <a:avLst/>
@@ -12524,8 +12687,8 @@
         </p:nvSpPr>
         <p:spPr>
           <a:xfrm>
-            <a:off x="6141720" y="4663440"/>
-            <a:ext cx="548640" cy="228600"/>
+            <a:off x="6141720" y="3291840"/>
+            <a:ext cx="548640" cy="201168"/>
           </a:xfrm>
           <a:prstGeom prst="rect">
             <a:avLst/>
@@ -12560,8 +12723,8 @@
         </p:nvSpPr>
         <p:spPr>
           <a:xfrm>
-            <a:off x="7482840" y="1920240"/>
-            <a:ext cx="0" cy="2743200"/>
+            <a:off x="7482840" y="1783080"/>
+            <a:ext cx="0" cy="1508760"/>
           </a:xfrm>
           <a:prstGeom prst="line">
             <a:avLst/>
@@ -12583,8 +12746,8 @@
         </p:nvSpPr>
         <p:spPr>
           <a:xfrm>
-            <a:off x="7208520" y="4663440"/>
-            <a:ext cx="548640" cy="228600"/>
+            <a:off x="7208520" y="3291840"/>
+            <a:ext cx="548640" cy="201168"/>
           </a:xfrm>
           <a:prstGeom prst="rect">
             <a:avLst/>
@@ -12619,8 +12782,8 @@
         </p:nvSpPr>
         <p:spPr>
           <a:xfrm>
-            <a:off x="8549640" y="1920240"/>
-            <a:ext cx="0" cy="2743200"/>
+            <a:off x="8549640" y="1783080"/>
+            <a:ext cx="0" cy="1508760"/>
           </a:xfrm>
           <a:prstGeom prst="line">
             <a:avLst/>
@@ -12642,8 +12805,8 @@
         </p:nvSpPr>
         <p:spPr>
           <a:xfrm>
-            <a:off x="8275320" y="4663440"/>
-            <a:ext cx="548640" cy="228600"/>
+            <a:off x="8275320" y="3291840"/>
+            <a:ext cx="548640" cy="201168"/>
           </a:xfrm>
           <a:prstGeom prst="rect">
             <a:avLst/>
@@ -12678,8 +12841,8 @@
         </p:nvSpPr>
         <p:spPr>
           <a:xfrm>
-            <a:off x="320040" y="2103120"/>
-            <a:ext cx="1737360" cy="685800"/>
+            <a:off x="320040" y="1828800"/>
+            <a:ext cx="1737360" cy="548640"/>
           </a:xfrm>
           <a:prstGeom prst="rect">
             <a:avLst/>
@@ -12728,8 +12891,8 @@
         </p:nvSpPr>
         <p:spPr>
           <a:xfrm>
-            <a:off x="2148840" y="2148840"/>
-            <a:ext cx="1532128" cy="594360"/>
+            <a:off x="2148840" y="1856232"/>
+            <a:ext cx="1532128" cy="502920"/>
           </a:xfrm>
           <a:prstGeom prst="chevron">
             <a:avLst/>
@@ -12766,8 +12929,8 @@
         </p:nvSpPr>
         <p:spPr>
           <a:xfrm>
-            <a:off x="3571240" y="2148840"/>
-            <a:ext cx="1105408" cy="594360"/>
+            <a:off x="3571240" y="1856232"/>
+            <a:ext cx="1105408" cy="502920"/>
           </a:xfrm>
           <a:prstGeom prst="chevron">
             <a:avLst/>
@@ -12804,8 +12967,8 @@
         </p:nvSpPr>
         <p:spPr>
           <a:xfrm>
-            <a:off x="4566920" y="2148840"/>
-            <a:ext cx="1532128" cy="594360"/>
+            <a:off x="4566920" y="1856232"/>
+            <a:ext cx="1532128" cy="502920"/>
           </a:xfrm>
           <a:prstGeom prst="chevron">
             <a:avLst/>
@@ -12842,8 +13005,8 @@
         </p:nvSpPr>
         <p:spPr>
           <a:xfrm>
-            <a:off x="5989320" y="2148840"/>
-            <a:ext cx="1247648" cy="594360"/>
+            <a:off x="5989320" y="1856232"/>
+            <a:ext cx="1247648" cy="502920"/>
           </a:xfrm>
           <a:prstGeom prst="chevron">
             <a:avLst/>
@@ -12880,8 +13043,8 @@
         </p:nvSpPr>
         <p:spPr>
           <a:xfrm>
-            <a:off x="7127240" y="2148840"/>
-            <a:ext cx="465328" cy="594360"/>
+            <a:off x="7127240" y="1856232"/>
+            <a:ext cx="465328" cy="502920"/>
           </a:xfrm>
           <a:prstGeom prst="chevron">
             <a:avLst/>
@@ -12918,8 +13081,8 @@
         </p:nvSpPr>
         <p:spPr>
           <a:xfrm>
-            <a:off x="7482840" y="2240280"/>
-            <a:ext cx="1066800" cy="411480"/>
+            <a:off x="7482840" y="1929384"/>
+            <a:ext cx="1066800" cy="356616"/>
           </a:xfrm>
           <a:prstGeom prst="rect">
             <a:avLst/>
@@ -12940,8 +13103,8 @@
         </p:nvSpPr>
         <p:spPr>
           <a:xfrm>
-            <a:off x="320040" y="3337560"/>
-            <a:ext cx="1737360" cy="685800"/>
+            <a:off x="228600" y="2560320"/>
+            <a:ext cx="1828800" cy="548640"/>
           </a:xfrm>
           <a:prstGeom prst="rect">
             <a:avLst/>
@@ -12957,14 +13120,14 @@
               <a:buNone/>
             </a:pPr>
             <a:r>
-              <a:rPr lang="en-US" sz="1400" b="1" dirty="0">
+              <a:rPr lang="en-US" sz="1300" b="1" dirty="0">
                 <a:solidFill>
                   <a:schemeClr val="tx2"/>
                 </a:solidFill>
               </a:rPr>
               <a:t>FTAI module swap</a:t>
             </a:r>
-            <a:endParaRPr lang="en-US" sz="1400" dirty="0"/>
+            <a:endParaRPr lang="en-US" sz="1300" dirty="0"/>
           </a:p>
           <a:p>
             <a:pPr algn="r" indent="0" marL="0">
@@ -12978,7 +13141,7 @@
               </a:rPr>
               <a:t>5–25 days</a:t>
             </a:r>
-            <a:endParaRPr lang="en-US" sz="1400" dirty="0"/>
+            <a:endParaRPr lang="en-US" sz="1300" dirty="0"/>
           </a:p>
         </p:txBody>
       </p:sp>
@@ -12990,8 +13153,8 @@
         </p:nvSpPr>
         <p:spPr>
           <a:xfrm>
-            <a:off x="2148840" y="3383280"/>
-            <a:ext cx="998728" cy="594360"/>
+            <a:off x="2148840" y="2587752"/>
+            <a:ext cx="998728" cy="502920"/>
           </a:xfrm>
           <a:prstGeom prst="chevron">
             <a:avLst/>
@@ -13010,8 +13173,8 @@
         </p:nvSpPr>
         <p:spPr>
           <a:xfrm>
-            <a:off x="3266440" y="3383280"/>
-            <a:ext cx="3840480" cy="594360"/>
+            <a:off x="3266440" y="2587752"/>
+            <a:ext cx="3291840" cy="502920"/>
           </a:xfrm>
           <a:prstGeom prst="rect">
             <a:avLst/>
@@ -13027,14 +13190,14 @@
               <a:buNone/>
             </a:pPr>
             <a:r>
-              <a:rPr lang="en-US" sz="1300" b="1" dirty="0">
+              <a:rPr lang="en-US" sz="1200" b="1" dirty="0">
                 <a:solidFill>
                   <a:schemeClr val="tx2"/>
                 </a:solidFill>
               </a:rPr>
               <a:t>Swap a restored module from FTAI's pool, test, fly</a:t>
             </a:r>
-            <a:endParaRPr lang="en-US" sz="1300" dirty="0"/>
+            <a:endParaRPr lang="en-US" sz="1200" dirty="0"/>
           </a:p>
         </p:txBody>
       </p:sp>
@@ -13046,8 +13209,8 @@
         </p:nvSpPr>
         <p:spPr>
           <a:xfrm>
-            <a:off x="7178040" y="3429000"/>
-            <a:ext cx="1325880" cy="1143000"/>
+            <a:off x="7589520" y="2423160"/>
+            <a:ext cx="1051560" cy="868680"/>
           </a:xfrm>
           <a:prstGeom prst="ellipse">
             <a:avLst/>
@@ -13069,41 +13232,320 @@
               <a:buNone/>
             </a:pPr>
             <a:r>
-              <a:rPr lang="en-US" sz="2600" b="1" dirty="0">
+              <a:rPr lang="en-US" sz="2200" b="1" dirty="0">
                 <a:solidFill>
                   <a:schemeClr val="bg1"/>
                 </a:solidFill>
               </a:rPr>
               <a:t>~7x</a:t>
             </a:r>
-            <a:endParaRPr lang="en-US" sz="2600" dirty="0"/>
-          </a:p>
-          <a:p>
-            <a:pPr algn="ctr" indent="0" marL="0">
-              <a:buNone/>
-            </a:pPr>
-            <a:r>
-              <a:rPr lang="en-US" sz="1200" b="1" dirty="0">
+            <a:endParaRPr lang="en-US" sz="2200" dirty="0"/>
+          </a:p>
+          <a:p>
+            <a:pPr algn="ctr" indent="0" marL="0">
+              <a:buNone/>
+            </a:pPr>
+            <a:r>
+              <a:rPr lang="en-US" sz="1100" b="1" dirty="0">
                 <a:solidFill>
                   <a:schemeClr val="bg1"/>
                 </a:solidFill>
               </a:rPr>
               <a:t>faster</a:t>
             </a:r>
-            <a:endParaRPr lang="en-US" sz="2600" dirty="0"/>
-          </a:p>
-        </p:txBody>
-      </p:sp>
-      <p:sp>
-        <p:nvSpPr>
-          <p:cNvPr id="30" name="Why it works"/>
+            <a:endParaRPr lang="en-US" sz="2200" dirty="0"/>
+          </a:p>
+        </p:txBody>
+      </p:sp>
+      <p:sp>
+        <p:nvSpPr>
+          <p:cNvPr id="30" name="Cost header"/>
           <p:cNvSpPr txBox="1"/>
           <p:nvPr/>
         </p:nvSpPr>
         <p:spPr>
           <a:xfrm>
-            <a:off x="320040" y="4983480"/>
-            <a:ext cx="8503920" cy="365760"/>
+            <a:off x="320040" y="3584448"/>
+            <a:ext cx="4160520" cy="365760"/>
+          </a:xfrm>
+          <a:prstGeom prst="rect">
+            <a:avLst/>
+          </a:prstGeom>
+          <a:noFill/>
+          <a:ln/>
+        </p:spPr>
+        <p:txBody>
+          <a:bodyPr wrap="square" lIns="0" tIns="0" rIns="0" bIns="0" rtlCol="0" anchor="b"/>
+          <a:lstStyle/>
+          <a:p>
+            <a:pPr algn="ctr" indent="0" marL="0">
+              <a:buNone/>
+            </a:pPr>
+            <a:r>
+              <a:rPr lang="en-US" sz="1600" b="1" dirty="0">
+                <a:solidFill>
+                  <a:srgbClr val="1A1A1A"/>
+                </a:solidFill>
+              </a:rPr>
+              <a:t>Lease Cost While Grounded</a:t>
+            </a:r>
+            <a:endParaRPr lang="en-US" sz="1600" dirty="0"/>
+          </a:p>
+        </p:txBody>
+      </p:sp>
+      <p:sp>
+        <p:nvSpPr>
+          <p:cNvPr id="31" name="Cost header rule"/>
+          <p:cNvSpPr/>
+          <p:nvPr/>
+        </p:nvSpPr>
+        <p:spPr>
+          <a:xfrm>
+            <a:off x="320040" y="4005072"/>
+            <a:ext cx="4160520" cy="0"/>
+          </a:xfrm>
+          <a:prstGeom prst="line">
+            <a:avLst/>
+          </a:prstGeom>
+          <a:noFill/>
+          <a:ln w="12700">
+            <a:solidFill>
+              <a:srgbClr val="1A1A1A"/>
+            </a:solidFill>
+            <a:prstDash val="solid"/>
+          </a:ln>
+        </p:spPr>
+      </p:sp>
+      <p:sp>
+        <p:nvSpPr>
+          <p:cNvPr id="32" name="Cost label 1"/>
+          <p:cNvSpPr txBox="1"/>
+          <p:nvPr/>
+        </p:nvSpPr>
+        <p:spPr>
+          <a:xfrm>
+            <a:off x="320040" y="4160520"/>
+            <a:ext cx="1691640" cy="347472"/>
+          </a:xfrm>
+          <a:prstGeom prst="rect">
+            <a:avLst/>
+          </a:prstGeom>
+          <a:noFill/>
+          <a:ln/>
+        </p:spPr>
+        <p:txBody>
+          <a:bodyPr wrap="square" lIns="0" tIns="0" rIns="0" bIns="0" rtlCol="0" anchor="ctr"/>
+          <a:lstStyle/>
+          <a:p>
+            <a:pPr algn="r" indent="0" marL="0">
+              <a:buNone/>
+            </a:pPr>
+            <a:r>
+              <a:rPr lang="en-US" sz="1100" dirty="0">
+                <a:solidFill>
+                  <a:srgbClr val="1A1A1A"/>
+                </a:solidFill>
+              </a:rPr>
+              <a:t>Shop visit, ~150 days</a:t>
+            </a:r>
+            <a:endParaRPr lang="en-US" sz="1100" dirty="0"/>
+          </a:p>
+        </p:txBody>
+      </p:sp>
+      <p:sp>
+        <p:nvSpPr>
+          <p:cNvPr id="33" name="Cost bar 1"/>
+          <p:cNvSpPr/>
+          <p:nvPr/>
+        </p:nvSpPr>
+        <p:spPr>
+          <a:xfrm>
+            <a:off x="2103120" y="4160520"/>
+            <a:ext cx="1737360" cy="347472"/>
+          </a:xfrm>
+          <a:prstGeom prst="rect">
+            <a:avLst/>
+          </a:prstGeom>
+          <a:solidFill>
+            <a:srgbClr val="0A1C58"/>
+          </a:solidFill>
+          <a:ln/>
+        </p:spPr>
+      </p:sp>
+      <p:sp>
+        <p:nvSpPr>
+          <p:cNvPr id="34" name="Cost value 1"/>
+          <p:cNvSpPr txBox="1"/>
+          <p:nvPr/>
+        </p:nvSpPr>
+        <p:spPr>
+          <a:xfrm>
+            <a:off x="3913632" y="4160520"/>
+            <a:ext cx="731520" cy="347472"/>
+          </a:xfrm>
+          <a:prstGeom prst="rect">
+            <a:avLst/>
+          </a:prstGeom>
+          <a:noFill/>
+          <a:ln/>
+        </p:spPr>
+        <p:txBody>
+          <a:bodyPr wrap="square" lIns="0" tIns="0" rIns="0" bIns="0" rtlCol="0" anchor="ctr"/>
+          <a:lstStyle/>
+          <a:p>
+            <a:pPr algn="l" indent="0" marL="0">
+              <a:buNone/>
+            </a:pPr>
+            <a:r>
+              <a:rPr lang="en-US" sz="1300" b="1" dirty="0">
+                <a:solidFill>
+                  <a:schemeClr val="tx2"/>
+                </a:solidFill>
+              </a:rPr>
+              <a:t>$493K</a:t>
+            </a:r>
+            <a:endParaRPr lang="en-US" sz="1300" dirty="0"/>
+          </a:p>
+        </p:txBody>
+      </p:sp>
+      <p:sp>
+        <p:nvSpPr>
+          <p:cNvPr id="35" name="Cost label 2"/>
+          <p:cNvSpPr txBox="1"/>
+          <p:nvPr/>
+        </p:nvSpPr>
+        <p:spPr>
+          <a:xfrm>
+            <a:off x="320040" y="4636008"/>
+            <a:ext cx="1691640" cy="347472"/>
+          </a:xfrm>
+          <a:prstGeom prst="rect">
+            <a:avLst/>
+          </a:prstGeom>
+          <a:noFill/>
+          <a:ln/>
+        </p:spPr>
+        <p:txBody>
+          <a:bodyPr wrap="square" lIns="0" tIns="0" rIns="0" bIns="0" rtlCol="0" anchor="ctr"/>
+          <a:lstStyle/>
+          <a:p>
+            <a:pPr algn="r" indent="0" marL="0">
+              <a:buNone/>
+            </a:pPr>
+            <a:r>
+              <a:rPr lang="en-US" sz="1100" dirty="0">
+                <a:solidFill>
+                  <a:srgbClr val="1A1A1A"/>
+                </a:solidFill>
+              </a:rPr>
+              <a:t>FTAI swap, ~20 days</a:t>
+            </a:r>
+            <a:endParaRPr lang="en-US" sz="1100" dirty="0"/>
+          </a:p>
+        </p:txBody>
+      </p:sp>
+      <p:sp>
+        <p:nvSpPr>
+          <p:cNvPr id="36" name="Cost bar 2"/>
+          <p:cNvSpPr/>
+          <p:nvPr/>
+        </p:nvSpPr>
+        <p:spPr>
+          <a:xfrm>
+            <a:off x="2103120" y="4636008"/>
+            <a:ext cx="232588" cy="347472"/>
+          </a:xfrm>
+          <a:prstGeom prst="rect">
+            <a:avLst/>
+          </a:prstGeom>
+          <a:solidFill>
+            <a:srgbClr val="B5AEA9"/>
+          </a:solidFill>
+          <a:ln/>
+        </p:spPr>
+      </p:sp>
+      <p:sp>
+        <p:nvSpPr>
+          <p:cNvPr id="37" name="Cost value 2"/>
+          <p:cNvSpPr txBox="1"/>
+          <p:nvPr/>
+        </p:nvSpPr>
+        <p:spPr>
+          <a:xfrm>
+            <a:off x="2408860" y="4636008"/>
+            <a:ext cx="731520" cy="347472"/>
+          </a:xfrm>
+          <a:prstGeom prst="rect">
+            <a:avLst/>
+          </a:prstGeom>
+          <a:noFill/>
+          <a:ln/>
+        </p:spPr>
+        <p:txBody>
+          <a:bodyPr wrap="square" lIns="0" tIns="0" rIns="0" bIns="0" rtlCol="0" anchor="ctr"/>
+          <a:lstStyle/>
+          <a:p>
+            <a:pPr algn="l" indent="0" marL="0">
+              <a:buNone/>
+            </a:pPr>
+            <a:r>
+              <a:rPr lang="en-US" sz="1300" b="1" dirty="0">
+                <a:solidFill>
+                  <a:schemeClr val="tx2"/>
+                </a:solidFill>
+              </a:rPr>
+              <a:t>$66K</a:t>
+            </a:r>
+            <a:endParaRPr lang="en-US" sz="1300" dirty="0"/>
+          </a:p>
+        </p:txBody>
+      </p:sp>
+      <p:sp>
+        <p:nvSpPr>
+          <p:cNvPr id="38" name="Cost caption"/>
+          <p:cNvSpPr txBox="1"/>
+          <p:nvPr/>
+        </p:nvSpPr>
+        <p:spPr>
+          <a:xfrm>
+            <a:off x="320040" y="5138928"/>
+            <a:ext cx="4160520" cy="256032"/>
+          </a:xfrm>
+          <a:prstGeom prst="rect">
+            <a:avLst/>
+          </a:prstGeom>
+          <a:noFill/>
+          <a:ln/>
+        </p:spPr>
+        <p:txBody>
+          <a:bodyPr wrap="square" lIns="0" tIns="0" rIns="0" bIns="0" rtlCol="0" anchor="ctr"/>
+          <a:lstStyle/>
+          <a:p>
+            <a:pPr algn="ctr" indent="0" marL="0">
+              <a:buNone/>
+            </a:pPr>
+            <a:r>
+              <a:rPr lang="en-US" sz="1100" i="1" dirty="0">
+                <a:solidFill>
+                  <a:schemeClr val="accent2"/>
+                </a:solidFill>
+              </a:rPr>
+              <a:t>~$430K saved per visit (IBA lease rate, ~$100K/mo)</a:t>
+            </a:r>
+            <a:endParaRPr lang="en-US" sz="1100" dirty="0"/>
+          </a:p>
+        </p:txBody>
+      </p:sp>
+      <p:sp>
+        <p:nvSpPr>
+          <p:cNvPr id="39" name="Turnaround expert quote"/>
+          <p:cNvSpPr txBox="1"/>
+          <p:nvPr/>
+        </p:nvSpPr>
+        <p:spPr>
+          <a:xfrm>
+            <a:off x="4709160" y="3657600"/>
+            <a:ext cx="4114800" cy="1737360"/>
           </a:xfrm>
           <a:prstGeom prst="rect">
             <a:avLst/>
@@ -13114,27 +13556,47 @@
           <a:ln/>
         </p:spPr>
         <p:txBody>
-          <a:bodyPr wrap="square" lIns="0" tIns="0" rIns="0" bIns="0" rtlCol="0" anchor="ctr"/>
-          <a:lstStyle/>
-          <a:p>
-            <a:pPr algn="ctr" indent="0" marL="0">
-              <a:buNone/>
-            </a:pPr>
-            <a:r>
-              <a:rPr lang="en-US" sz="1300" i="1" dirty="0">
+          <a:bodyPr wrap="square" lIns="177800" tIns="76200" rIns="177800" bIns="76200" rtlCol="0" anchor="ctr"/>
+          <a:lstStyle/>
+          <a:p>
+            <a:pPr algn="ctr" indent="0" marL="0">
+              <a:spcAft>
+                <a:spcPts val="600"/>
+              </a:spcAft>
+              <a:buNone/>
+            </a:pPr>
+            <a:r>
+              <a:rPr lang="en-US" sz="1600" b="1" dirty="0">
                 <a:solidFill>
                   <a:srgbClr val="1A1A1A"/>
                 </a:solidFill>
               </a:rPr>
-              <a:t>Why it works: FTAI keeps a pool of restored modules on the shelf, so the airline never waits for parts.</a:t>
-            </a:r>
-            <a:endParaRPr lang="en-US" sz="1300" dirty="0"/>
-          </a:p>
-        </p:txBody>
-      </p:sp>
-      <p:sp>
-        <p:nvSpPr>
-          <p:cNvPr id="31" name="Takeaway"/>
+              <a:t>“FTAI's advantage is basically turnaround time and cheaper sourcing.”</a:t>
+            </a:r>
+            <a:endParaRPr lang="en-US" sz="1600" dirty="0"/>
+          </a:p>
+          <a:p>
+            <a:pPr algn="ctr" indent="0" marL="0">
+              <a:spcAft>
+                <a:spcPts val="600"/>
+              </a:spcAft>
+              <a:buNone/>
+            </a:pPr>
+            <a:r>
+              <a:rPr lang="en-US" sz="1200" i="1" dirty="0">
+                <a:solidFill>
+                  <a:srgbClr val="1A1A1A"/>
+                </a:solidFill>
+              </a:rPr>
+              <a:t>— Industry expert, GPS expert call</a:t>
+            </a:r>
+            <a:endParaRPr lang="en-US" sz="1600" dirty="0"/>
+          </a:p>
+        </p:txBody>
+      </p:sp>
+      <p:sp>
+        <p:nvSpPr>
+          <p:cNvPr id="40" name="Takeaway"/>
           <p:cNvSpPr txBox="1"/>
           <p:nvPr/>
         </p:nvSpPr>
@@ -13172,7 +13634,7 @@
       </p:sp>
       <p:sp>
         <p:nvSpPr>
-          <p:cNvPr id="32" name="Source"/>
+          <p:cNvPr id="41" name="Source"/>
           <p:cNvSpPr txBox="1"/>
           <p:nvPr/>
         </p:nvSpPr>
@@ -13211,7 +13673,7 @@
                   <a:srgbClr val="1A1A1A"/>
                 </a:solidFill>
               </a:rPr>
-              <a:t>FTAI Q2'24 earnings call (120–180 vs. 5–25 days, via third-party analysis); shop-visit step lengths illustrative</a:t>
+              <a:t>FTAI Q2'24 call via third-party analysis; IBA (2024) lease rates; GPS expert call; step lengths illustrative</a:t>
             </a:r>
             <a:endParaRPr lang="en-US" sz="1100" dirty="0"/>
           </a:p>

--- a/deck/FTAI_Long_Pitch.pptx
+++ b/deck/FTAI_Long_Pitch.pptx
@@ -22,9 +22,11 @@
     <p:sldId id="270" r:id="rId16"/>
     <p:sldId id="271" r:id="rId17"/>
     <p:sldId id="272" r:id="rId18"/>
+    <p:sldId id="273" r:id="rId19"/>
+    <p:sldId id="274" r:id="rId20"/>
   </p:sldIdLst>
   <p:notesMasterIdLst>
-    <p:notesMasterId r:id="rId19"/>
+    <p:notesMasterId r:id="rId21"/>
   </p:notesMasterIdLst>
   <p:sldSz cx="9144000" cy="6858000"/>
   <p:notesSz cx="6858000" cy="9144000"/>
@@ -123,12 +125,12 @@
   <p:extLst>
     <p:ext uri="{521415D9-36F7-43E2-AB2F-B90AF26B5E84}">
       <p14:sectionLst xmlns:p14="http://schemas.microsoft.com/office/powerpoint/2010/main">
-        <p14:section name="Introduction" id="{00389e8b-40cf-f582-ad16-f8777f86c9a0}">
+        <p14:section name="Introduction" id="{fecd948a-b699-990c-34e9-bcef80e65e0f}">
           <p14:sldIdLst>
             <p14:sldId id="256"/>
           </p14:sldIdLst>
         </p14:section>
-        <p14:section name="The Opportunity" id="{79d2db7f-cbac-ec4f-3d15-3e454878abd9}">
+        <p14:section name="The Opportunity" id="{d60ed93c-007b-9415-d2ae-265dfc7ced92}">
           <p14:sldIdLst>
             <p14:sldId id="257"/>
             <p14:sldId id="258"/>
@@ -136,18 +138,18 @@
             <p14:sldId id="260"/>
           </p14:sldIdLst>
         </p14:section>
-        <p14:section name="Returns" id="{fb0a65e6-53fa-27fa-764e-e36436b8d4d5}">
+        <p14:section name="Returns" id="{fda27848-b4aa-b930-0913-b6daeb880e3b}">
           <p14:sldIdLst>
             <p14:sldId id="261"/>
           </p14:sldIdLst>
         </p14:section>
-        <p14:section name="Business Overview" id="{94d8a67a-4cc0-5acd-3480-3545a3634e9f}">
+        <p14:section name="Business Overview" id="{6f6b8b27-d4ec-6884-4755-22acf5aba655}">
           <p14:sldIdLst>
             <p14:sldId id="262"/>
             <p14:sldId id="263"/>
           </p14:sldIdLst>
         </p14:section>
-        <p14:section name="Thesis 1a" id="{71c51c67-b94e-309a-3a33-568a84bba587}">
+        <p14:section name="Thesis 1a" id="{4b8161ae-51bb-93a1-c82d-be4abbf96942}">
           <p14:sldIdLst>
             <p14:sldId id="264"/>
             <p14:sldId id="265"/>
@@ -155,13 +157,15 @@
             <p14:sldId id="267"/>
           </p14:sldIdLst>
         </p14:section>
-        <p14:section name="Thesis 1b" id="{3285a031-5fcc-d810-8c87-1ca6c2aceb57}">
+        <p14:section name="Thesis 1b" id="{17a1a3c6-c35d-7585-a3bd-0f6ce3cc292f}">
           <p14:sldIdLst>
             <p14:sldId id="268"/>
             <p14:sldId id="269"/>
             <p14:sldId id="270"/>
             <p14:sldId id="271"/>
             <p14:sldId id="272"/>
+            <p14:sldId id="273"/>
+            <p14:sldId id="274"/>
           </p14:sldIdLst>
         </p14:section>
       </p14:sectionLst>
@@ -2982,6 +2986,255 @@
         <c:scaling>
           <c:orientation val="minMax"/>
           <c:max val="2300"/>
+          <c:min val="0"/>
+        </c:scaling>
+        <c:delete val="1"/>
+        <c:axPos val="l"/>
+        <c:numFmt formatCode="General" sourceLinked="0"/>
+        <c:majorTickMark val="out"/>
+        <c:minorTickMark val="none"/>
+        <c:tickLblPos val="nextTo"/>
+        <c:spPr>
+          <a:ln w="12700" cap="flat">
+            <a:solidFill>
+              <a:srgbClr val="888888"/>
+            </a:solidFill>
+            <a:prstDash val="solid"/>
+            <a:round/>
+          </a:ln>
+        </c:spPr>
+        <c:txPr>
+          <a:bodyPr/>
+          <a:lstStyle/>
+          <a:p>
+            <a:pPr>
+              <a:defRPr sz="1200" b="0" i="0" u="none" strike="noStrike">
+                <a:solidFill>
+                  <a:srgbClr val="000000"/>
+                </a:solidFill>
+                <a:latin typeface="Arial"/>
+              </a:defRPr>
+            </a:pPr>
+            <a:endParaRPr lang="en-US"/>
+          </a:p>
+        </c:txPr>
+        <c:crossAx val="2094734554"/>
+        <c:crosses val="autoZero"/>
+        <c:crossBetween val="between"/>
+      </c:valAx>
+      <c:spPr>
+        <a:noFill/>
+        <a:ln>
+          <a:noFill/>
+        </a:ln>
+        <a:effectLst/>
+      </c:spPr>
+    </c:plotArea>
+    <c:plotVisOnly val="1"/>
+    <c:dispBlanksAs val="span"/>
+  </c:chart>
+  <c:spPr>
+    <a:noFill/>
+    <a:ln>
+      <a:noFill/>
+    </a:ln>
+    <a:effectLst/>
+  </c:spPr>
+  <c:externalData r:id="rId1">
+    <c:autoUpdate val="0"/>
+  </c:externalData>
+</c:chartSpace>
+</file>
+
+<file path=ppt/charts/chart18.xml><?xml version="1.0" encoding="utf-8"?>
+<c:chartSpace xmlns:c="http://schemas.openxmlformats.org/drawingml/2006/chart" xmlns:a="http://schemas.openxmlformats.org/drawingml/2006/main" xmlns:r="http://schemas.openxmlformats.org/officeDocument/2006/relationships">
+  <c:date1904 val="0"/>
+  <c:roundedCorners val="1"/>
+  <c:chart>
+    <c:autoTitleDeleted val="1"/>
+    <c:plotArea>
+      <c:layout/>
+      <c:barChart>
+        <c:barDir val="col"/>
+        <c:grouping val="clustered"/>
+        <c:varyColors val="0"/>
+        <c:ser>
+          <c:idx val="0"/>
+          <c:order val="0"/>
+          <c:tx>
+            <c:strRef>
+              <c:f>Sheet1!$B$1</c:f>
+              <c:strCache>
+                <c:ptCount val="1"/>
+                <c:pt idx="0">
+                  <c:v>Your return</c:v>
+                </c:pt>
+              </c:strCache>
+            </c:strRef>
+          </c:tx>
+          <c:spPr>
+            <a:solidFill>
+              <a:srgbClr val="0A1C58"/>
+            </a:solidFill>
+            <a:effectLst/>
+          </c:spPr>
+          <c:invertIfNegative val="0"/>
+          <c:dLbls>
+            <c:numFmt formatCode="0%" sourceLinked="0"/>
+            <c:txPr>
+              <a:bodyPr/>
+              <a:lstStyle/>
+              <a:p>
+                <a:pPr>
+                  <a:defRPr b="1" i="0" strike="noStrike" sz="1300" u="none">
+                    <a:solidFill>
+                      <a:srgbClr val="1A1A1A"/>
+                    </a:solidFill>
+                    <a:latin typeface="+mn-lt"/>
+                  </a:defRPr>
+                </a:pPr>
+              </a:p>
+            </c:txPr>
+            <c:showLegendKey val="0"/>
+            <c:showVal val="1"/>
+            <c:showCatName val="0"/>
+            <c:showSerName val="0"/>
+            <c:showPercent val="0"/>
+            <c:showBubbleSize val="0"/>
+            <c:showLeaderLines val="0"/>
+          </c:dLbls>
+          <c:cat>
+            <c:multiLvlStrRef>
+              <c:f>Sheet1!$A$2:$A$7</c:f>
+              <c:multiLvlStrCache>
+                <c:ptCount val="6"/>
+                <c:lvl>
+                  <c:pt idx="0">
+                    <c:v>0%</c:v>
+                  </c:pt>
+                  <c:pt idx="1">
+                    <c:v>5%</c:v>
+                  </c:pt>
+                  <c:pt idx="2">
+                    <c:v>10%</c:v>
+                  </c:pt>
+                  <c:pt idx="3">
+                    <c:v>15%</c:v>
+                  </c:pt>
+                  <c:pt idx="4">
+                    <c:v>20%</c:v>
+                  </c:pt>
+                  <c:pt idx="5">
+                    <c:v>25%</c:v>
+                  </c:pt>
+                </c:lvl>
+              </c:multiLvlStrCache>
+            </c:multiLvlStrRef>
+          </c:cat>
+          <c:val>
+            <c:numRef>
+              <c:f>Sheet1!$B$2:$B$7</c:f>
+              <c:numCache>
+                <c:formatCode>General</c:formatCode>
+                <c:ptCount val="6"/>
+                <c:pt idx="0">
+                  <c:v>0.66</c:v>
+                </c:pt>
+                <c:pt idx="1">
+                  <c:v>0.74</c:v>
+                </c:pt>
+                <c:pt idx="2">
+                  <c:v>0.83</c:v>
+                </c:pt>
+                <c:pt idx="3">
+                  <c:v>0.92</c:v>
+                </c:pt>
+                <c:pt idx="4">
+                  <c:v>1.01</c:v>
+                </c:pt>
+                <c:pt idx="5">
+                  <c:v>1.09</c:v>
+                </c:pt>
+              </c:numCache>
+            </c:numRef>
+          </c:val>
+        </c:ser>
+        <c:dLbls>
+          <c:numFmt formatCode="0%" sourceLinked="0"/>
+          <c:txPr>
+            <a:bodyPr/>
+            <a:lstStyle/>
+            <a:p>
+              <a:pPr>
+                <a:defRPr b="1" i="0" strike="noStrike" sz="1300" u="none">
+                  <a:solidFill>
+                    <a:srgbClr val="1A1A1A"/>
+                  </a:solidFill>
+                  <a:latin typeface="+mn-lt"/>
+                </a:defRPr>
+              </a:pPr>
+            </a:p>
+          </c:txPr>
+          <c:showLegendKey val="0"/>
+          <c:showVal val="1"/>
+          <c:showCatName val="0"/>
+          <c:showSerName val="0"/>
+          <c:showPercent val="0"/>
+          <c:showBubbleSize val="0"/>
+          <c:showLeaderLines val="0"/>
+        </c:dLbls>
+        <c:gapWidth val="45"/>
+        <c:overlap val="0"/>
+        <c:axId val="2094734554"/>
+        <c:axId val="2094734552"/>
+        <c:axId val="2094734556"/>
+      </c:barChart>
+      <c:catAx>
+        <c:axId val="2094734554"/>
+        <c:scaling>
+          <c:orientation val="minMax"/>
+        </c:scaling>
+        <c:delete val="0"/>
+        <c:axPos val="b"/>
+        <c:numFmt formatCode="General" sourceLinked="1"/>
+        <c:majorTickMark val="out"/>
+        <c:minorTickMark val="none"/>
+        <c:tickLblPos val="low"/>
+        <c:spPr>
+          <a:ln w="12700" cap="flat">
+            <a:solidFill>
+              <a:srgbClr val="BFBFBF"/>
+            </a:solidFill>
+            <a:prstDash val="solid"/>
+            <a:round/>
+          </a:ln>
+        </c:spPr>
+        <c:txPr>
+          <a:bodyPr/>
+          <a:lstStyle/>
+          <a:p>
+            <a:pPr>
+              <a:defRPr sz="1300" b="0" i="0" u="none" strike="noStrike">
+                <a:solidFill>
+                  <a:srgbClr val="0A1C58"/>
+                </a:solidFill>
+                <a:latin typeface="+mn-lt"/>
+              </a:defRPr>
+            </a:pPr>
+            <a:endParaRPr lang="en-US"/>
+          </a:p>
+        </c:txPr>
+        <c:crossAx val="2094734552"/>
+        <c:crosses val="autoZero"/>
+        <c:auto val="1"/>
+        <c:lblAlgn val="ctr"/>
+        <c:noMultiLvlLbl val="1"/>
+      </c:catAx>
+      <c:valAx>
+        <c:axId val="2094734552"/>
+        <c:scaling>
+          <c:orientation val="minMax"/>
+          <c:max val="1.25"/>
           <c:min val="0"/>
         </c:scaling>
         <c:delete val="1"/>
@@ -5598,7 +5851,7 @@
             <c:size val="6"/>
             <c:spPr>
               <a:solidFill>
-                <a:srgbClr val="0A1C58"/>
+                <a:srgbClr val="847C7A"/>
               </a:solidFill>
               <a:ln w="9525" cap="flat">
                 <a:solidFill>
@@ -7210,6 +7463,182 @@
             <a:fld id="{F7021451-1387-4CA6-816F-3879F97B5CBC}" type="slidenum">
               <a:rPr lang="en-US"/>
               <a:t>17</a:t>
+            </a:fld>
+            <a:endParaRPr lang="en-US"/>
+          </a:p>
+        </p:txBody>
+      </p:sp>
+    </p:spTree>
+    <p:extLst>
+      <p:ext uri="{BB962C8B-B14F-4D97-AF65-F5344CB8AC3E}">
+        <p14:creationId xmlns:p14="http://schemas.microsoft.com/office/powerpoint/2010/main" val="1024086991"/>
+      </p:ext>
+    </p:extLst>
+  </p:cSld>
+  <p:clrMapOvr>
+    <a:masterClrMapping/>
+  </p:clrMapOvr>
+</p:notes>
+</file>
+
+<file path=ppt/notesSlides/notesSlide18.xml><?xml version="1.0" encoding="utf-8"?>
+<p:notes xmlns:a="http://schemas.openxmlformats.org/drawingml/2006/main" xmlns:r="http://schemas.openxmlformats.org/officeDocument/2006/relationships" xmlns:p="http://schemas.openxmlformats.org/presentationml/2006/main">
+  <p:cSld>
+    <p:spTree>
+      <p:nvGrpSpPr>
+        <p:cNvPr id="1" name=""/>
+        <p:cNvGrpSpPr/>
+        <p:nvPr/>
+      </p:nvGrpSpPr>
+      <p:grpSpPr>
+        <a:xfrm>
+          <a:off x="0" y="0"/>
+          <a:ext cx="0" cy="0"/>
+          <a:chOff x="0" y="0"/>
+          <a:chExt cx="0" cy="0"/>
+        </a:xfrm>
+      </p:grpSpPr>
+      <p:sp>
+        <p:nvSpPr>
+          <p:cNvPr id="2" name="Slide Image Placeholder 1"/>
+          <p:cNvSpPr>
+            <a:spLocks noGrp="1" noRot="1" noChangeAspect="1"/>
+          </p:cNvSpPr>
+          <p:nvPr>
+            <p:ph type="sldImg"/>
+          </p:nvPr>
+        </p:nvSpPr>
+        <p:spPr/>
+      </p:sp>
+      <p:sp>
+        <p:nvSpPr>
+          <p:cNvPr id="3" name="Notes Placeholder 2"/>
+          <p:cNvSpPr>
+            <a:spLocks noGrp="1"/>
+          </p:cNvSpPr>
+          <p:nvPr>
+            <p:ph type="body" idx="1"/>
+          </p:nvPr>
+        </p:nvSpPr>
+        <p:spPr/>
+        <p:txBody>
+          <a:bodyPr/>
+          <a:lstStyle/>
+          <a:p>
+            <a:r>
+              <a:rPr lang="en-US" dirty="0"/>
+              <a:t>LTSA coverage: Safran estimates ~50% of ~5,500 in-service LEAPs are on long-term agreements vs. ~15% of CFM56s, peaking near 70% in 2030 before shifting back to time-and-materials (Aviation Week). LEAP overhauls ~2,000 a year by 2030, roughly matching CFM56 (Aviation Week). First LEAP shop visits clustering at 2,000–6,000 cycles with ~4,000 as a planning base, vs. 10,000+ originally expected (Visual Approach). LEAP-1A/1B shop visit $2.0–4.5M+ before LLPs (Safe Fly, unsourced benchmark); The Air Current: the overhaul far eclipses the cost of the same work on a CFM56. FTAI: CFM56/LEAP test cell planned at Rome as its entry into next-generation engine maintenance (Q2'26 call coverage). No public LEAP repair licence found; confirm before presenting. Former MRO executive: the machines and capital equipment for LEAP are 'very near that for CFM'.</a:t>
+            </a:r>
+            <a:endParaRPr lang="en-US" dirty="0"/>
+          </a:p>
+        </p:txBody>
+      </p:sp>
+      <p:sp>
+        <p:nvSpPr>
+          <p:cNvPr id="4" name="Slide Number Placeholder 3"/>
+          <p:cNvSpPr>
+            <a:spLocks noGrp="1"/>
+          </p:cNvSpPr>
+          <p:nvPr>
+            <p:ph type="sldNum" sz="quarter" idx="10"/>
+          </p:nvPr>
+        </p:nvSpPr>
+        <p:spPr/>
+        <p:txBody>
+          <a:bodyPr/>
+          <a:lstStyle/>
+          <a:p>
+            <a:fld id="{F7021451-1387-4CA6-816F-3879F97B5CBC}" type="slidenum">
+              <a:rPr lang="en-US"/>
+              <a:t>18</a:t>
+            </a:fld>
+            <a:endParaRPr lang="en-US"/>
+          </a:p>
+        </p:txBody>
+      </p:sp>
+    </p:spTree>
+    <p:extLst>
+      <p:ext uri="{BB962C8B-B14F-4D97-AF65-F5344CB8AC3E}">
+        <p14:creationId xmlns:p14="http://schemas.microsoft.com/office/powerpoint/2010/main" val="1024086991"/>
+      </p:ext>
+    </p:extLst>
+  </p:cSld>
+  <p:clrMapOvr>
+    <a:masterClrMapping/>
+  </p:clrMapOvr>
+</p:notes>
+</file>
+
+<file path=ppt/notesSlides/notesSlide19.xml><?xml version="1.0" encoding="utf-8"?>
+<p:notes xmlns:a="http://schemas.openxmlformats.org/drawingml/2006/main" xmlns:r="http://schemas.openxmlformats.org/officeDocument/2006/relationships" xmlns:p="http://schemas.openxmlformats.org/presentationml/2006/main">
+  <p:cSld>
+    <p:spTree>
+      <p:nvGrpSpPr>
+        <p:cNvPr id="1" name=""/>
+        <p:cNvGrpSpPr/>
+        <p:nvPr/>
+      </p:nvGrpSpPr>
+      <p:grpSpPr>
+        <a:xfrm>
+          <a:off x="0" y="0"/>
+          <a:ext cx="0" cy="0"/>
+          <a:chOff x="0" y="0"/>
+          <a:chExt cx="0" cy="0"/>
+        </a:xfrm>
+      </p:grpSpPr>
+      <p:sp>
+        <p:nvSpPr>
+          <p:cNvPr id="2" name="Slide Image Placeholder 1"/>
+          <p:cNvSpPr>
+            <a:spLocks noGrp="1" noRot="1" noChangeAspect="1"/>
+          </p:cNvSpPr>
+          <p:nvPr>
+            <p:ph type="sldImg"/>
+          </p:nvPr>
+        </p:nvSpPr>
+        <p:spPr/>
+      </p:sp>
+      <p:sp>
+        <p:nvSpPr>
+          <p:cNvPr id="3" name="Notes Placeholder 2"/>
+          <p:cNvSpPr>
+            <a:spLocks noGrp="1"/>
+          </p:cNvSpPr>
+          <p:nvPr>
+            <p:ph type="body" idx="1"/>
+          </p:nvPr>
+        </p:nvSpPr>
+        <p:spPr/>
+        <p:txBody>
+          <a:bodyPr/>
+          <a:lstStyle/>
+          <a:p>
+            <a:r>
+              <a:rPr lang="en-US" dirty="0"/>
+              <a:t>Return = (base-case SOTP $276.65 + LEAP value per share) / $167.03 − 1. LEAP value: 2,000 LEAP shop visits a year (Aviation Week, ~2030) × 50% off OEM contracts (coverage falling back from the ~70% 2030 peak) × FTAI share × 3 modules per visit × $0.913M EBITDA per module (FY27E CFM56 level; LEAP visits cost more, so conservative) × 16x Aerospace multiple, discounted four years at the 9.5% WACC. Each point of share ≈ $2.93/share. 20% share (FTAI's FY28E+ CFM56 share) ≈ $548M EBITDA and +$59/share → 101% return.</a:t>
+            </a:r>
+            <a:endParaRPr lang="en-US" dirty="0"/>
+          </a:p>
+        </p:txBody>
+      </p:sp>
+      <p:sp>
+        <p:nvSpPr>
+          <p:cNvPr id="4" name="Slide Number Placeholder 3"/>
+          <p:cNvSpPr>
+            <a:spLocks noGrp="1"/>
+          </p:cNvSpPr>
+          <p:nvPr>
+            <p:ph type="sldNum" sz="quarter" idx="10"/>
+          </p:nvPr>
+        </p:nvSpPr>
+        <p:spPr/>
+        <p:txBody>
+          <a:bodyPr/>
+          <a:lstStyle/>
+          <a:p>
+            <a:fld id="{F7021451-1387-4CA6-816F-3879F97B5CBC}" type="slidenum">
+              <a:rPr lang="en-US"/>
+              <a:t>19</a:t>
             </a:fld>
             <a:endParaRPr lang="en-US"/>
           </a:p>
@@ -15280,6 +15709,1442 @@
             <a:fld id="{F7021451-1387-4CA6-816F-3879F97B5CBC}" type="slidenum">
               <a:rPr b="1" lang="en-US"/>
               <a:t>17</a:t>
+            </a:fld>
+            <a:endParaRPr lang="en-US"/>
+          </a:p>
+        </p:txBody>
+      </p:sp>
+    </p:spTree>
+  </p:cSld>
+  <p:clrMapOvr>
+    <a:masterClrMapping/>
+  </p:clrMapOvr>
+</p:sld>
+</file>
+
+<file path=ppt/slides/slide18.xml><?xml version="1.0" encoding="utf-8"?>
+<p:sld xmlns:a="http://schemas.openxmlformats.org/drawingml/2006/main" xmlns:r="http://schemas.openxmlformats.org/officeDocument/2006/relationships" xmlns:p="http://schemas.openxmlformats.org/presentationml/2006/main">
+  <p:cSld name="Slide 18">
+    <p:spTree>
+      <p:nvGrpSpPr>
+        <p:cNvPr id="1" name=""/>
+        <p:cNvGrpSpPr/>
+        <p:nvPr/>
+      </p:nvGrpSpPr>
+      <p:grpSpPr>
+        <a:xfrm>
+          <a:off x="0" y="0"/>
+          <a:ext cx="0" cy="0"/>
+          <a:chOff x="0" y="0"/>
+          <a:chExt cx="0" cy="0"/>
+        </a:xfrm>
+      </p:grpSpPr>
+      <p:sp>
+        <p:nvSpPr>
+          <p:cNvPr id="2" name="Text 1"/>
+          <p:cNvSpPr/>
+          <p:nvPr>
+            <p:ph idx="102" type="title" hasCustomPrompt="1"/>
+          </p:nvPr>
+        </p:nvSpPr>
+        <p:spPr>
+          <a:xfrm>
+            <a:off x="320040" y="182880"/>
+            <a:ext cx="8503920" cy="640080"/>
+          </a:xfrm>
+          <a:prstGeom prst="rect">
+            <a:avLst/>
+          </a:prstGeom>
+          <a:noFill/>
+          <a:ln/>
+        </p:spPr>
+        <p:txBody>
+          <a:bodyPr wrap="square" lIns="0" tIns="0" rIns="0" bIns="0" rtlCol="0" anchor="ctr"/>
+          <a:lstStyle/>
+          <a:p>
+            <a:pPr algn="l" indent="0" marL="0">
+              <a:buNone/>
+            </a:pPr>
+            <a:r>
+              <a:rPr lang="en-US" sz="3200" b="1" dirty="0">
+                <a:solidFill>
+                  <a:schemeClr val="tx2"/>
+                </a:solidFill>
+              </a:rPr>
+              <a:t>Thesis 1b: The LEAP Option (1/2)</a:t>
+            </a:r>
+            <a:endParaRPr lang="en-US" sz="3200" dirty="0"/>
+          </a:p>
+        </p:txBody>
+      </p:sp>
+      <p:sp>
+        <p:nvSpPr>
+          <p:cNvPr id="3" name="Text 1"/>
+          <p:cNvSpPr/>
+          <p:nvPr>
+            <p:ph idx="103" type="body" hasCustomPrompt="1"/>
+          </p:nvPr>
+        </p:nvSpPr>
+        <p:spPr>
+          <a:xfrm>
+            <a:off x="320040" y="932688"/>
+            <a:ext cx="8503920" cy="566928"/>
+          </a:xfrm>
+          <a:prstGeom prst="rect">
+            <a:avLst/>
+          </a:prstGeom>
+          <a:noFill/>
+          <a:ln/>
+        </p:spPr>
+        <p:txBody>
+          <a:bodyPr wrap="square" lIns="0" tIns="0" rIns="0" bIns="0" rtlCol="0" anchor="t"/>
+          <a:lstStyle/>
+          <a:p>
+            <a:pPr algn="l" indent="0" marL="0">
+              <a:buNone/>
+            </a:pPr>
+            <a:r>
+              <a:rPr lang="en-US" sz="1700" b="1" dirty="0">
+                <a:solidFill>
+                  <a:schemeClr val="tx2"/>
+                </a:solidFill>
+              </a:rPr>
+              <a:t>LEAP engines need more maintenance, and OEM contracts start rolling off after 2030.</a:t>
+            </a:r>
+            <a:endParaRPr lang="en-US" sz="1700" dirty="0"/>
+          </a:p>
+        </p:txBody>
+      </p:sp>
+      <p:sp>
+        <p:nvSpPr>
+          <p:cNvPr id="4" name="Timeline arrow"/>
+          <p:cNvSpPr/>
+          <p:nvPr/>
+        </p:nvSpPr>
+        <p:spPr>
+          <a:xfrm>
+            <a:off x="320040" y="1783080"/>
+            <a:ext cx="8503920" cy="457200"/>
+          </a:xfrm>
+          <a:prstGeom prst="rightArrow">
+            <a:avLst/>
+          </a:prstGeom>
+          <a:solidFill>
+            <a:srgbClr val="0A1C58"/>
+          </a:solidFill>
+          <a:ln/>
+        </p:spPr>
+      </p:sp>
+      <p:sp>
+        <p:nvSpPr>
+          <p:cNvPr id="5" name="Stop 1"/>
+          <p:cNvSpPr txBox="1"/>
+          <p:nvPr/>
+        </p:nvSpPr>
+        <p:spPr>
+          <a:xfrm>
+            <a:off x="685800" y="1627632"/>
+            <a:ext cx="2103120" cy="768096"/>
+          </a:xfrm>
+          <a:prstGeom prst="rect">
+            <a:avLst/>
+          </a:prstGeom>
+          <a:solidFill>
+            <a:srgbClr val="FFFFFF"/>
+          </a:solidFill>
+          <a:ln w="25400">
+            <a:solidFill>
+              <a:srgbClr val="0A1C58"/>
+            </a:solidFill>
+          </a:ln>
+        </p:spPr>
+        <p:txBody>
+          <a:bodyPr wrap="square" lIns="0" tIns="0" rIns="0" bIns="0" rtlCol="0" anchor="ctr"/>
+          <a:lstStyle/>
+          <a:p>
+            <a:pPr algn="ctr" indent="0" marL="0">
+              <a:buNone/>
+            </a:pPr>
+            <a:r>
+              <a:rPr lang="en-US" sz="2200" b="1" dirty="0">
+                <a:solidFill>
+                  <a:schemeClr val="tx2"/>
+                </a:solidFill>
+              </a:rPr>
+              <a:t>Today</a:t>
+            </a:r>
+            <a:endParaRPr lang="en-US" sz="2200" dirty="0"/>
+          </a:p>
+        </p:txBody>
+      </p:sp>
+      <p:sp>
+        <p:nvSpPr>
+          <p:cNvPr id="6" name="Stop 1 detail"/>
+          <p:cNvSpPr txBox="1"/>
+          <p:nvPr/>
+        </p:nvSpPr>
+        <p:spPr>
+          <a:xfrm>
+            <a:off x="457200" y="2487168"/>
+            <a:ext cx="2560320" cy="640080"/>
+          </a:xfrm>
+          <a:prstGeom prst="rect">
+            <a:avLst/>
+          </a:prstGeom>
+          <a:noFill/>
+          <a:ln/>
+        </p:spPr>
+        <p:txBody>
+          <a:bodyPr wrap="square" lIns="0" tIns="0" rIns="0" bIns="0" rtlCol="0" anchor="t"/>
+          <a:lstStyle/>
+          <a:p>
+            <a:pPr algn="ctr" indent="0" marL="0">
+              <a:buNone/>
+            </a:pPr>
+            <a:r>
+              <a:rPr lang="en-US" sz="1400" b="1" dirty="0">
+                <a:solidFill>
+                  <a:schemeClr val="tx2"/>
+                </a:solidFill>
+              </a:rPr>
+              <a:t>~50% of LEAPs on OEM deals</a:t>
+            </a:r>
+            <a:endParaRPr lang="en-US" sz="1400" dirty="0"/>
+          </a:p>
+          <a:p>
+            <a:pPr algn="ctr" indent="0" marL="0">
+              <a:buNone/>
+            </a:pPr>
+            <a:r>
+              <a:rPr lang="en-US" sz="1200" dirty="0">
+                <a:solidFill>
+                  <a:srgbClr val="1A1A1A"/>
+                </a:solidFill>
+              </a:rPr>
+              <a:t>vs. ~15% of CFM56s</a:t>
+            </a:r>
+            <a:endParaRPr lang="en-US" sz="1400" dirty="0"/>
+          </a:p>
+        </p:txBody>
+      </p:sp>
+      <p:sp>
+        <p:nvSpPr>
+          <p:cNvPr id="7" name="Stop 2"/>
+          <p:cNvSpPr txBox="1"/>
+          <p:nvPr/>
+        </p:nvSpPr>
+        <p:spPr>
+          <a:xfrm>
+            <a:off x="3520440" y="1627632"/>
+            <a:ext cx="2103120" cy="768096"/>
+          </a:xfrm>
+          <a:prstGeom prst="rect">
+            <a:avLst/>
+          </a:prstGeom>
+          <a:solidFill>
+            <a:srgbClr val="FFFFFF"/>
+          </a:solidFill>
+          <a:ln w="25400">
+            <a:solidFill>
+              <a:srgbClr val="0A1C58"/>
+            </a:solidFill>
+          </a:ln>
+        </p:spPr>
+        <p:txBody>
+          <a:bodyPr wrap="square" lIns="0" tIns="0" rIns="0" bIns="0" rtlCol="0" anchor="ctr"/>
+          <a:lstStyle/>
+          <a:p>
+            <a:pPr algn="ctr" indent="0" marL="0">
+              <a:buNone/>
+            </a:pPr>
+            <a:r>
+              <a:rPr lang="en-US" sz="2200" b="1" dirty="0">
+                <a:solidFill>
+                  <a:schemeClr val="tx2"/>
+                </a:solidFill>
+              </a:rPr>
+              <a:t>2030</a:t>
+            </a:r>
+            <a:endParaRPr lang="en-US" sz="2200" dirty="0"/>
+          </a:p>
+        </p:txBody>
+      </p:sp>
+      <p:sp>
+        <p:nvSpPr>
+          <p:cNvPr id="8" name="Stop 2 detail"/>
+          <p:cNvSpPr txBox="1"/>
+          <p:nvPr/>
+        </p:nvSpPr>
+        <p:spPr>
+          <a:xfrm>
+            <a:off x="3291840" y="2487168"/>
+            <a:ext cx="2560320" cy="640080"/>
+          </a:xfrm>
+          <a:prstGeom prst="rect">
+            <a:avLst/>
+          </a:prstGeom>
+          <a:noFill/>
+          <a:ln/>
+        </p:spPr>
+        <p:txBody>
+          <a:bodyPr wrap="square" lIns="0" tIns="0" rIns="0" bIns="0" rtlCol="0" anchor="t"/>
+          <a:lstStyle/>
+          <a:p>
+            <a:pPr algn="ctr" indent="0" marL="0">
+              <a:buNone/>
+            </a:pPr>
+            <a:r>
+              <a:rPr lang="en-US" sz="1400" b="1" dirty="0">
+                <a:solidFill>
+                  <a:schemeClr val="tx2"/>
+                </a:solidFill>
+              </a:rPr>
+              <a:t>~2,000 LEAP visits a year</a:t>
+            </a:r>
+            <a:endParaRPr lang="en-US" sz="1400" dirty="0"/>
+          </a:p>
+          <a:p>
+            <a:pPr algn="ctr" indent="0" marL="0">
+              <a:buNone/>
+            </a:pPr>
+            <a:r>
+              <a:rPr lang="en-US" sz="1200" dirty="0">
+                <a:solidFill>
+                  <a:srgbClr val="1A1A1A"/>
+                </a:solidFill>
+              </a:rPr>
+              <a:t>OEM coverage peaks near 70%</a:t>
+            </a:r>
+            <a:endParaRPr lang="en-US" sz="1400" dirty="0"/>
+          </a:p>
+        </p:txBody>
+      </p:sp>
+      <p:sp>
+        <p:nvSpPr>
+          <p:cNvPr id="9" name="Stop 3"/>
+          <p:cNvSpPr txBox="1"/>
+          <p:nvPr/>
+        </p:nvSpPr>
+        <p:spPr>
+          <a:xfrm>
+            <a:off x="6355080" y="1627632"/>
+            <a:ext cx="2103120" cy="768096"/>
+          </a:xfrm>
+          <a:prstGeom prst="rect">
+            <a:avLst/>
+          </a:prstGeom>
+          <a:solidFill>
+            <a:srgbClr val="FFFFFF"/>
+          </a:solidFill>
+          <a:ln w="25400">
+            <a:solidFill>
+              <a:srgbClr val="0A1C58"/>
+            </a:solidFill>
+          </a:ln>
+        </p:spPr>
+        <p:txBody>
+          <a:bodyPr wrap="square" lIns="0" tIns="0" rIns="0" bIns="0" rtlCol="0" anchor="ctr"/>
+          <a:lstStyle/>
+          <a:p>
+            <a:pPr algn="ctr" indent="0" marL="0">
+              <a:buNone/>
+            </a:pPr>
+            <a:r>
+              <a:rPr lang="en-US" sz="2200" b="1" dirty="0">
+                <a:solidFill>
+                  <a:schemeClr val="tx2"/>
+                </a:solidFill>
+              </a:rPr>
+              <a:t>2030+</a:t>
+            </a:r>
+            <a:endParaRPr lang="en-US" sz="2200" dirty="0"/>
+          </a:p>
+        </p:txBody>
+      </p:sp>
+      <p:sp>
+        <p:nvSpPr>
+          <p:cNvPr id="10" name="Stop 3 detail"/>
+          <p:cNvSpPr txBox="1"/>
+          <p:nvPr/>
+        </p:nvSpPr>
+        <p:spPr>
+          <a:xfrm>
+            <a:off x="6126480" y="2487168"/>
+            <a:ext cx="2560320" cy="640080"/>
+          </a:xfrm>
+          <a:prstGeom prst="rect">
+            <a:avLst/>
+          </a:prstGeom>
+          <a:noFill/>
+          <a:ln/>
+        </p:spPr>
+        <p:txBody>
+          <a:bodyPr wrap="square" lIns="0" tIns="0" rIns="0" bIns="0" rtlCol="0" anchor="t"/>
+          <a:lstStyle/>
+          <a:p>
+            <a:pPr algn="ctr" indent="0" marL="0">
+              <a:buNone/>
+            </a:pPr>
+            <a:r>
+              <a:rPr lang="en-US" sz="1400" b="1" dirty="0">
+                <a:solidFill>
+                  <a:schemeClr val="tx2"/>
+                </a:solidFill>
+              </a:rPr>
+              <a:t>Contracts roll off</a:t>
+            </a:r>
+            <a:endParaRPr lang="en-US" sz="1400" dirty="0"/>
+          </a:p>
+          <a:p>
+            <a:pPr algn="ctr" indent="0" marL="0">
+              <a:buNone/>
+            </a:pPr>
+            <a:r>
+              <a:rPr lang="en-US" sz="1200" dirty="0">
+                <a:solidFill>
+                  <a:srgbClr val="1A1A1A"/>
+                </a:solidFill>
+              </a:rPr>
+              <a:t>Work opens to independents</a:t>
+            </a:r>
+            <a:endParaRPr lang="en-US" sz="1400" dirty="0"/>
+          </a:p>
+        </p:txBody>
+      </p:sp>
+      <p:sp>
+        <p:nvSpPr>
+          <p:cNvPr id="11" name="Card 1"/>
+          <p:cNvSpPr/>
+          <p:nvPr/>
+        </p:nvSpPr>
+        <p:spPr>
+          <a:xfrm>
+            <a:off x="320040" y="3291840"/>
+            <a:ext cx="2706624" cy="2057400"/>
+          </a:xfrm>
+          <a:prstGeom prst="rect">
+            <a:avLst/>
+          </a:prstGeom>
+          <a:solidFill>
+            <a:srgbClr val="EFEDEA"/>
+          </a:solidFill>
+          <a:ln/>
+        </p:spPr>
+      </p:sp>
+      <p:sp>
+        <p:nvSpPr>
+          <p:cNvPr id="12" name="Card 1 stat"/>
+          <p:cNvSpPr/>
+          <p:nvPr/>
+        </p:nvSpPr>
+        <p:spPr>
+          <a:xfrm>
+            <a:off x="411480" y="3401568"/>
+            <a:ext cx="1143000" cy="1143000"/>
+          </a:xfrm>
+          <a:prstGeom prst="ellipse">
+            <a:avLst/>
+          </a:prstGeom>
+          <a:solidFill>
+            <a:srgbClr val="FFFFFF"/>
+          </a:solidFill>
+          <a:ln w="25400">
+            <a:solidFill>
+              <a:srgbClr val="0A1C58"/>
+            </a:solidFill>
+          </a:ln>
+        </p:spPr>
+        <p:txBody>
+          <a:bodyPr wrap="square" lIns="0" tIns="0" rIns="0" bIns="0" rtlCol="0" anchor="ctr"/>
+          <a:lstStyle/>
+          <a:p>
+            <a:pPr algn="ctr" indent="0" marL="0">
+              <a:buNone/>
+            </a:pPr>
+            <a:r>
+              <a:rPr lang="en-US" sz="2000" b="1" dirty="0">
+                <a:solidFill>
+                  <a:schemeClr val="tx2"/>
+                </a:solidFill>
+              </a:rPr>
+              <a:t>2.5x</a:t>
+            </a:r>
+            <a:endParaRPr lang="en-US" sz="2000" dirty="0"/>
+          </a:p>
+          <a:p>
+            <a:pPr algn="ctr" indent="0" marL="0">
+              <a:buNone/>
+            </a:pPr>
+            <a:r>
+              <a:rPr lang="en-US" sz="1000" dirty="0">
+                <a:solidFill>
+                  <a:schemeClr val="tx2"/>
+                </a:solidFill>
+              </a:rPr>
+              <a:t>sooner</a:t>
+            </a:r>
+            <a:endParaRPr lang="en-US" sz="2000" dirty="0"/>
+          </a:p>
+        </p:txBody>
+      </p:sp>
+      <p:sp>
+        <p:nvSpPr>
+          <p:cNvPr id="13" name="Card 1 head"/>
+          <p:cNvSpPr txBox="1"/>
+          <p:nvPr/>
+        </p:nvSpPr>
+        <p:spPr>
+          <a:xfrm>
+            <a:off x="1618488" y="3520440"/>
+            <a:ext cx="1371600" cy="868680"/>
+          </a:xfrm>
+          <a:prstGeom prst="rect">
+            <a:avLst/>
+          </a:prstGeom>
+          <a:noFill/>
+          <a:ln/>
+        </p:spPr>
+        <p:txBody>
+          <a:bodyPr wrap="square" lIns="0" tIns="0" rIns="0" bIns="0" rtlCol="0" anchor="ctr"/>
+          <a:lstStyle/>
+          <a:p>
+            <a:pPr algn="l" indent="0" marL="0">
+              <a:buNone/>
+            </a:pPr>
+            <a:r>
+              <a:rPr lang="en-US" sz="1500" b="1" dirty="0">
+                <a:solidFill>
+                  <a:schemeClr val="tx2"/>
+                </a:solidFill>
+              </a:rPr>
+              <a:t>More shop visits</a:t>
+            </a:r>
+            <a:endParaRPr lang="en-US" sz="1500" dirty="0"/>
+          </a:p>
+        </p:txBody>
+      </p:sp>
+      <p:sp>
+        <p:nvSpPr>
+          <p:cNvPr id="14" name="Card 1 body"/>
+          <p:cNvSpPr txBox="1"/>
+          <p:nvPr/>
+        </p:nvSpPr>
+        <p:spPr>
+          <a:xfrm>
+            <a:off x="457200" y="4572000"/>
+            <a:ext cx="2432304" cy="731520"/>
+          </a:xfrm>
+          <a:prstGeom prst="rect">
+            <a:avLst/>
+          </a:prstGeom>
+          <a:noFill/>
+          <a:ln/>
+        </p:spPr>
+        <p:txBody>
+          <a:bodyPr wrap="square" lIns="0" tIns="0" rIns="0" bIns="0" rtlCol="0" anchor="t"/>
+          <a:lstStyle/>
+          <a:p>
+            <a:pPr algn="l" indent="0" marL="0">
+              <a:buNone/>
+            </a:pPr>
+            <a:r>
+              <a:rPr lang="en-US" sz="1200" dirty="0">
+                <a:solidFill>
+                  <a:srgbClr val="1A1A1A"/>
+                </a:solidFill>
+              </a:rPr>
+              <a:t>First LEAP visits at ~4,000 cycles vs. the 10,000+ originally planned.</a:t>
+            </a:r>
+            <a:endParaRPr lang="en-US" sz="1200" dirty="0"/>
+          </a:p>
+        </p:txBody>
+      </p:sp>
+      <p:sp>
+        <p:nvSpPr>
+          <p:cNvPr id="15" name="Card 2"/>
+          <p:cNvSpPr/>
+          <p:nvPr/>
+        </p:nvSpPr>
+        <p:spPr>
+          <a:xfrm>
+            <a:off x="3218688" y="3291840"/>
+            <a:ext cx="2706624" cy="2057400"/>
+          </a:xfrm>
+          <a:prstGeom prst="rect">
+            <a:avLst/>
+          </a:prstGeom>
+          <a:solidFill>
+            <a:srgbClr val="EFEDEA"/>
+          </a:solidFill>
+          <a:ln/>
+        </p:spPr>
+      </p:sp>
+      <p:sp>
+        <p:nvSpPr>
+          <p:cNvPr id="16" name="Card 2 stat"/>
+          <p:cNvSpPr/>
+          <p:nvPr/>
+        </p:nvSpPr>
+        <p:spPr>
+          <a:xfrm>
+            <a:off x="3310128" y="3401568"/>
+            <a:ext cx="1143000" cy="1143000"/>
+          </a:xfrm>
+          <a:prstGeom prst="ellipse">
+            <a:avLst/>
+          </a:prstGeom>
+          <a:solidFill>
+            <a:srgbClr val="FFFFFF"/>
+          </a:solidFill>
+          <a:ln w="25400">
+            <a:solidFill>
+              <a:srgbClr val="0A1C58"/>
+            </a:solidFill>
+          </a:ln>
+        </p:spPr>
+        <p:txBody>
+          <a:bodyPr wrap="square" lIns="0" tIns="0" rIns="0" bIns="0" rtlCol="0" anchor="ctr"/>
+          <a:lstStyle/>
+          <a:p>
+            <a:pPr algn="ctr" indent="0" marL="0">
+              <a:buNone/>
+            </a:pPr>
+            <a:r>
+              <a:rPr lang="en-US" sz="1400" b="1" dirty="0">
+                <a:solidFill>
+                  <a:schemeClr val="tx2"/>
+                </a:solidFill>
+              </a:rPr>
+              <a:t>$2–4.5M</a:t>
+            </a:r>
+            <a:endParaRPr lang="en-US" sz="1400" dirty="0"/>
+          </a:p>
+          <a:p>
+            <a:pPr algn="ctr" indent="0" marL="0">
+              <a:buNone/>
+            </a:pPr>
+            <a:r>
+              <a:rPr lang="en-US" sz="1000" dirty="0">
+                <a:solidFill>
+                  <a:schemeClr val="tx2"/>
+                </a:solidFill>
+              </a:rPr>
+              <a:t>per visit</a:t>
+            </a:r>
+            <a:endParaRPr lang="en-US" sz="1400" dirty="0"/>
+          </a:p>
+        </p:txBody>
+      </p:sp>
+      <p:sp>
+        <p:nvSpPr>
+          <p:cNvPr id="17" name="Card 2 head"/>
+          <p:cNvSpPr txBox="1"/>
+          <p:nvPr/>
+        </p:nvSpPr>
+        <p:spPr>
+          <a:xfrm>
+            <a:off x="4517136" y="3520440"/>
+            <a:ext cx="1371600" cy="868680"/>
+          </a:xfrm>
+          <a:prstGeom prst="rect">
+            <a:avLst/>
+          </a:prstGeom>
+          <a:noFill/>
+          <a:ln/>
+        </p:spPr>
+        <p:txBody>
+          <a:bodyPr wrap="square" lIns="0" tIns="0" rIns="0" bIns="0" rtlCol="0" anchor="ctr"/>
+          <a:lstStyle/>
+          <a:p>
+            <a:pPr algn="l" indent="0" marL="0">
+              <a:buNone/>
+            </a:pPr>
+            <a:r>
+              <a:rPr lang="en-US" sz="1500" b="1" dirty="0">
+                <a:solidFill>
+                  <a:schemeClr val="tx2"/>
+                </a:solidFill>
+              </a:rPr>
+              <a:t>Costlier visits</a:t>
+            </a:r>
+            <a:endParaRPr lang="en-US" sz="1500" dirty="0"/>
+          </a:p>
+        </p:txBody>
+      </p:sp>
+      <p:sp>
+        <p:nvSpPr>
+          <p:cNvPr id="18" name="Card 2 body"/>
+          <p:cNvSpPr txBox="1"/>
+          <p:nvPr/>
+        </p:nvSpPr>
+        <p:spPr>
+          <a:xfrm>
+            <a:off x="3355848" y="4572000"/>
+            <a:ext cx="2432304" cy="731520"/>
+          </a:xfrm>
+          <a:prstGeom prst="rect">
+            <a:avLst/>
+          </a:prstGeom>
+          <a:noFill/>
+          <a:ln/>
+        </p:spPr>
+        <p:txBody>
+          <a:bodyPr wrap="square" lIns="0" tIns="0" rIns="0" bIns="0" rtlCol="0" anchor="t"/>
+          <a:lstStyle/>
+          <a:p>
+            <a:pPr algn="l" indent="0" marL="0">
+              <a:buNone/>
+            </a:pPr>
+            <a:r>
+              <a:rPr lang="en-US" sz="1200" dirty="0">
+                <a:solidFill>
+                  <a:srgbClr val="1A1A1A"/>
+                </a:solidFill>
+              </a:rPr>
+              <a:t>LEAP overhauls cost far more than the same work on a CFM56.</a:t>
+            </a:r>
+            <a:endParaRPr lang="en-US" sz="1200" dirty="0"/>
+          </a:p>
+        </p:txBody>
+      </p:sp>
+      <p:sp>
+        <p:nvSpPr>
+          <p:cNvPr id="19" name="Card 3"/>
+          <p:cNvSpPr/>
+          <p:nvPr/>
+        </p:nvSpPr>
+        <p:spPr>
+          <a:xfrm>
+            <a:off x="6117336" y="3291840"/>
+            <a:ext cx="2706624" cy="2057400"/>
+          </a:xfrm>
+          <a:prstGeom prst="rect">
+            <a:avLst/>
+          </a:prstGeom>
+          <a:solidFill>
+            <a:srgbClr val="EFEDEA"/>
+          </a:solidFill>
+          <a:ln/>
+        </p:spPr>
+      </p:sp>
+      <p:sp>
+        <p:nvSpPr>
+          <p:cNvPr id="20" name="Card 3 stat"/>
+          <p:cNvSpPr/>
+          <p:nvPr/>
+        </p:nvSpPr>
+        <p:spPr>
+          <a:xfrm>
+            <a:off x="6208776" y="3401568"/>
+            <a:ext cx="1143000" cy="1143000"/>
+          </a:xfrm>
+          <a:prstGeom prst="ellipse">
+            <a:avLst/>
+          </a:prstGeom>
+          <a:solidFill>
+            <a:srgbClr val="0A1C58"/>
+          </a:solidFill>
+          <a:ln w="25400">
+            <a:solidFill>
+              <a:srgbClr val="0A1C58"/>
+            </a:solidFill>
+          </a:ln>
+        </p:spPr>
+        <p:txBody>
+          <a:bodyPr wrap="square" lIns="0" tIns="0" rIns="0" bIns="0" rtlCol="0" anchor="ctr"/>
+          <a:lstStyle/>
+          <a:p>
+            <a:pPr algn="ctr" indent="0" marL="0">
+              <a:buNone/>
+            </a:pPr>
+            <a:r>
+              <a:rPr lang="en-US" sz="2000" b="1" dirty="0">
+                <a:solidFill>
+                  <a:schemeClr val="bg1"/>
+                </a:solidFill>
+              </a:rPr>
+              <a:t>Same</a:t>
+            </a:r>
+            <a:endParaRPr lang="en-US" sz="2000" dirty="0"/>
+          </a:p>
+          <a:p>
+            <a:pPr algn="ctr" indent="0" marL="0">
+              <a:buNone/>
+            </a:pPr>
+            <a:r>
+              <a:rPr lang="en-US" sz="1000" dirty="0">
+                <a:solidFill>
+                  <a:schemeClr val="bg1"/>
+                </a:solidFill>
+              </a:rPr>
+              <a:t>tooling</a:t>
+            </a:r>
+            <a:endParaRPr lang="en-US" sz="2000" dirty="0"/>
+          </a:p>
+        </p:txBody>
+      </p:sp>
+      <p:sp>
+        <p:nvSpPr>
+          <p:cNvPr id="21" name="Card 3 head"/>
+          <p:cNvSpPr txBox="1"/>
+          <p:nvPr/>
+        </p:nvSpPr>
+        <p:spPr>
+          <a:xfrm>
+            <a:off x="7415784" y="3520440"/>
+            <a:ext cx="1371600" cy="868680"/>
+          </a:xfrm>
+          <a:prstGeom prst="rect">
+            <a:avLst/>
+          </a:prstGeom>
+          <a:noFill/>
+          <a:ln/>
+        </p:spPr>
+        <p:txBody>
+          <a:bodyPr wrap="square" lIns="0" tIns="0" rIns="0" bIns="0" rtlCol="0" anchor="ctr"/>
+          <a:lstStyle/>
+          <a:p>
+            <a:pPr algn="l" indent="0" marL="0">
+              <a:buNone/>
+            </a:pPr>
+            <a:r>
+              <a:rPr lang="en-US" sz="1500" b="1" dirty="0">
+                <a:solidFill>
+                  <a:schemeClr val="tx2"/>
+                </a:solidFill>
+              </a:rPr>
+              <a:t>FTAI can pivot fast</a:t>
+            </a:r>
+            <a:endParaRPr lang="en-US" sz="1500" dirty="0"/>
+          </a:p>
+        </p:txBody>
+      </p:sp>
+      <p:sp>
+        <p:nvSpPr>
+          <p:cNvPr id="22" name="Card 3 body"/>
+          <p:cNvSpPr txBox="1"/>
+          <p:nvPr/>
+        </p:nvSpPr>
+        <p:spPr>
+          <a:xfrm>
+            <a:off x="6254496" y="4572000"/>
+            <a:ext cx="2432304" cy="731520"/>
+          </a:xfrm>
+          <a:prstGeom prst="rect">
+            <a:avLst/>
+          </a:prstGeom>
+          <a:noFill/>
+          <a:ln/>
+        </p:spPr>
+        <p:txBody>
+          <a:bodyPr wrap="square" lIns="0" tIns="0" rIns="0" bIns="0" rtlCol="0" anchor="t"/>
+          <a:lstStyle/>
+          <a:p>
+            <a:pPr algn="l" indent="0" marL="0">
+              <a:buNone/>
+            </a:pPr>
+            <a:r>
+              <a:rPr lang="en-US" sz="1200" dirty="0">
+                <a:solidFill>
+                  <a:srgbClr val="1A1A1A"/>
+                </a:solidFill>
+              </a:rPr>
+              <a:t>A CFM56/LEAP test cell is coming to Rome, and CFM56 tools and techs carry over.</a:t>
+            </a:r>
+            <a:endParaRPr lang="en-US" sz="1200" dirty="0"/>
+          </a:p>
+        </p:txBody>
+      </p:sp>
+      <p:sp>
+        <p:nvSpPr>
+          <p:cNvPr id="23" name="Takeaway"/>
+          <p:cNvSpPr txBox="1"/>
+          <p:nvPr/>
+        </p:nvSpPr>
+        <p:spPr>
+          <a:xfrm>
+            <a:off x="320040" y="5504688"/>
+            <a:ext cx="8503920" cy="566928"/>
+          </a:xfrm>
+          <a:prstGeom prst="rect">
+            <a:avLst/>
+          </a:prstGeom>
+          <a:solidFill>
+            <a:srgbClr val="0A1C58"/>
+          </a:solidFill>
+          <a:ln/>
+        </p:spPr>
+        <p:txBody>
+          <a:bodyPr wrap="square" lIns="101600" tIns="25400" rIns="101600" bIns="25400" rtlCol="0" anchor="ctr"/>
+          <a:lstStyle/>
+          <a:p>
+            <a:pPr algn="ctr" indent="0" marL="0">
+              <a:buNone/>
+            </a:pPr>
+            <a:r>
+              <a:rPr lang="en-US" sz="1700" b="1" dirty="0">
+                <a:solidFill>
+                  <a:schemeClr val="bg1"/>
+                </a:solidFill>
+              </a:rPr>
+              <a:t>As OEM contracts roll off, LEAP becomes FTAI's next CFM56, with costlier, more frequent visits.</a:t>
+            </a:r>
+            <a:endParaRPr lang="en-US" sz="1700" dirty="0"/>
+          </a:p>
+        </p:txBody>
+      </p:sp>
+      <p:sp>
+        <p:nvSpPr>
+          <p:cNvPr id="24" name="Source"/>
+          <p:cNvSpPr txBox="1"/>
+          <p:nvPr/>
+        </p:nvSpPr>
+        <p:spPr>
+          <a:xfrm>
+            <a:off x="320040" y="6355080"/>
+            <a:ext cx="7132320" cy="274320"/>
+          </a:xfrm>
+          <a:prstGeom prst="rect">
+            <a:avLst/>
+          </a:prstGeom>
+          <a:noFill/>
+          <a:ln/>
+        </p:spPr>
+        <p:txBody>
+          <a:bodyPr wrap="square" lIns="0" tIns="0" rIns="0" bIns="0" rtlCol="0" anchor="ctr"/>
+          <a:lstStyle/>
+          <a:p>
+            <a:pPr indent="0" marL="0">
+              <a:buNone/>
+            </a:pPr>
+            <a:r>
+              <a:rPr lang="en-US" sz="1100" b="1" dirty="0">
+                <a:solidFill>
+                  <a:srgbClr val="1A1A1A"/>
+                </a:solidFill>
+              </a:rPr>
+              <a:t>Source: </a:t>
+            </a:r>
+            <a:pPr indent="0" marL="0">
+              <a:buNone/>
+            </a:pPr>
+            <a:r>
+              <a:rPr lang="en-US" sz="1100" dirty="0">
+                <a:solidFill>
+                  <a:srgbClr val="1A1A1A"/>
+                </a:solidFill>
+              </a:rPr>
+              <a:t>Safran via Aviation Week; Visual Approach; The Air Current; Safe Fly Aviation; FTAI Q2'26 call; GPS expert call</a:t>
+            </a:r>
+            <a:endParaRPr lang="en-US" sz="1100" dirty="0"/>
+          </a:p>
+        </p:txBody>
+      </p:sp>
+      <p:sp>
+        <p:nvSpPr>
+          <p:cNvPr id="25" name="Slide Number Placeholder 0"/>
+          <p:cNvSpPr>
+            <a:spLocks noGrp="1"/>
+          </p:cNvSpPr>
+          <p:nvPr>
+            <p:ph type="sldNum" sz="quarter" idx="4294967295"/>
+          </p:nvPr>
+        </p:nvSpPr>
+        <p:spPr>
+          <a:xfrm>
+            <a:off x="7635240" y="6327648"/>
+            <a:ext cx="411480" cy="274320"/>
+          </a:xfrm>
+          <a:prstGeom prst="rect">
+            <a:avLst/>
+          </a:prstGeom>
+          <a:extLst>
+            <a:ext uri="{C572A759-6A51-4108-AA02-DFA0A04FC94B}">
+              <ma14:wrappingTextBoxFlag xmlns:ma14="http://schemas.microsoft.com/office/mac/drawingml/2011/main" val="0"/>
+            </a:ext>
+          </a:extLst>
+        </p:spPr>
+        <p:txBody>
+          <a:bodyPr/>
+          <a:lstStyle>
+            <a:lvl1pPr>
+              <a:defRPr sz="1100">
+                <a:solidFill>
+                  <a:srgbClr val="1A1A1A"/>
+                </a:solidFill>
+              </a:defRPr>
+            </a:lvl1pPr>
+          </a:lstStyle>
+          <a:p>
+            <a:pPr algn="r"/>
+            <a:fld id="{F7021451-1387-4CA6-816F-3879F97B5CBC}" type="slidenum">
+              <a:rPr b="1" lang="en-US"/>
+              <a:t>18</a:t>
+            </a:fld>
+            <a:endParaRPr lang="en-US"/>
+          </a:p>
+        </p:txBody>
+      </p:sp>
+    </p:spTree>
+  </p:cSld>
+  <p:clrMapOvr>
+    <a:masterClrMapping/>
+  </p:clrMapOvr>
+</p:sld>
+</file>
+
+<file path=ppt/slides/slide19.xml><?xml version="1.0" encoding="utf-8"?>
+<p:sld xmlns:a="http://schemas.openxmlformats.org/drawingml/2006/main" xmlns:r="http://schemas.openxmlformats.org/officeDocument/2006/relationships" xmlns:p="http://schemas.openxmlformats.org/presentationml/2006/main">
+  <p:cSld name="Slide 19">
+    <p:spTree>
+      <p:nvGrpSpPr>
+        <p:cNvPr id="1" name=""/>
+        <p:cNvGrpSpPr/>
+        <p:nvPr/>
+      </p:nvGrpSpPr>
+      <p:grpSpPr>
+        <a:xfrm>
+          <a:off x="0" y="0"/>
+          <a:ext cx="0" cy="0"/>
+          <a:chOff x="0" y="0"/>
+          <a:chExt cx="0" cy="0"/>
+        </a:xfrm>
+      </p:grpSpPr>
+      <p:sp>
+        <p:nvSpPr>
+          <p:cNvPr id="2" name="Text 1"/>
+          <p:cNvSpPr/>
+          <p:nvPr>
+            <p:ph idx="102" type="title" hasCustomPrompt="1"/>
+          </p:nvPr>
+        </p:nvSpPr>
+        <p:spPr>
+          <a:xfrm>
+            <a:off x="320040" y="182880"/>
+            <a:ext cx="8503920" cy="640080"/>
+          </a:xfrm>
+          <a:prstGeom prst="rect">
+            <a:avLst/>
+          </a:prstGeom>
+          <a:noFill/>
+          <a:ln/>
+        </p:spPr>
+        <p:txBody>
+          <a:bodyPr wrap="square" lIns="0" tIns="0" rIns="0" bIns="0" rtlCol="0" anchor="ctr"/>
+          <a:lstStyle/>
+          <a:p>
+            <a:pPr algn="l" indent="0" marL="0">
+              <a:buNone/>
+            </a:pPr>
+            <a:r>
+              <a:rPr lang="en-US" sz="3200" b="1" dirty="0">
+                <a:solidFill>
+                  <a:schemeClr val="tx2"/>
+                </a:solidFill>
+              </a:rPr>
+              <a:t>Thesis 1b: The LEAP Option (2/2)</a:t>
+            </a:r>
+            <a:endParaRPr lang="en-US" sz="3200" dirty="0"/>
+          </a:p>
+        </p:txBody>
+      </p:sp>
+      <p:sp>
+        <p:nvSpPr>
+          <p:cNvPr id="3" name="Text 1"/>
+          <p:cNvSpPr/>
+          <p:nvPr>
+            <p:ph idx="103" type="body" hasCustomPrompt="1"/>
+          </p:nvPr>
+        </p:nvSpPr>
+        <p:spPr>
+          <a:xfrm>
+            <a:off x="320040" y="932688"/>
+            <a:ext cx="8503920" cy="566928"/>
+          </a:xfrm>
+          <a:prstGeom prst="rect">
+            <a:avLst/>
+          </a:prstGeom>
+          <a:noFill/>
+          <a:ln/>
+        </p:spPr>
+        <p:txBody>
+          <a:bodyPr wrap="square" lIns="0" tIns="0" rIns="0" bIns="0" rtlCol="0" anchor="t"/>
+          <a:lstStyle/>
+          <a:p>
+            <a:pPr algn="l" indent="0" marL="0">
+              <a:buNone/>
+            </a:pPr>
+            <a:r>
+              <a:rPr lang="en-US" sz="1700" b="1" dirty="0">
+                <a:solidFill>
+                  <a:schemeClr val="tx2"/>
+                </a:solidFill>
+              </a:rPr>
+              <a:t>LEAP isn't in our target. Matching FTAI's CFM56 share takes your return past 100%.</a:t>
+            </a:r>
+            <a:endParaRPr lang="en-US" sz="1700" dirty="0"/>
+          </a:p>
+        </p:txBody>
+      </p:sp>
+      <p:sp>
+        <p:nvSpPr>
+          <p:cNvPr id="4" name="LEAP quote"/>
+          <p:cNvSpPr txBox="1"/>
+          <p:nvPr/>
+        </p:nvSpPr>
+        <p:spPr>
+          <a:xfrm>
+            <a:off x="822960" y="1600200"/>
+            <a:ext cx="7498080" cy="1005840"/>
+          </a:xfrm>
+          <a:prstGeom prst="rect">
+            <a:avLst/>
+          </a:prstGeom>
+          <a:solidFill>
+            <a:srgbClr val="EFEDEA"/>
+          </a:solidFill>
+          <a:ln/>
+        </p:spPr>
+        <p:txBody>
+          <a:bodyPr wrap="square" lIns="152400" tIns="50800" rIns="152400" bIns="50800" rtlCol="0" anchor="ctr"/>
+          <a:lstStyle/>
+          <a:p>
+            <a:pPr algn="ctr" indent="0" marL="0">
+              <a:buNone/>
+            </a:pPr>
+            <a:r>
+              <a:rPr lang="en-US" sz="1500" b="1" dirty="0">
+                <a:solidFill>
+                  <a:srgbClr val="1A1A1A"/>
+                </a:solidFill>
+              </a:rPr>
+              <a:t>“It will happen. The reason why it will happen is because they have set their CFM line up to have a measurable amount of shared services in that line.”</a:t>
+            </a:r>
+            <a:endParaRPr lang="en-US" sz="1500" dirty="0"/>
+          </a:p>
+          <a:p>
+            <a:pPr algn="ctr" indent="0" marL="0">
+              <a:buNone/>
+            </a:pPr>
+            <a:r>
+              <a:rPr lang="en-US" sz="1200" i="1" dirty="0">
+                <a:solidFill>
+                  <a:srgbClr val="1A1A1A"/>
+                </a:solidFill>
+              </a:rPr>
+              <a:t>— Former executive, engine MRO shop</a:t>
+            </a:r>
+            <a:endParaRPr lang="en-US" sz="1500" dirty="0"/>
+          </a:p>
+        </p:txBody>
+      </p:sp>
+      <p:graphicFrame>
+        <p:nvGraphicFramePr>
+          <p:cNvPr id="5" name="LEAP return chart" descr=""/>
+          <p:cNvGraphicFramePr/>
+          <p:nvPr/>
+        </p:nvGraphicFramePr>
+        <p:xfrm>
+          <a:off x="1005840" y="2743200"/>
+          <a:ext cx="7132320" cy="2331720"/>
+        </p:xfrm>
+        <a:graphic xmlns:a="http://schemas.openxmlformats.org/drawingml/2006/main">
+          <a:graphicData uri="http://schemas.openxmlformats.org/drawingml/2006/chart">
+            <c:chart xmlns:c="http://schemas.openxmlformats.org/drawingml/2006/chart" r:id="rId1"/>
+          </a:graphicData>
+        </a:graphic>
+      </p:graphicFrame>
+      <p:sp>
+        <p:nvSpPr>
+          <p:cNvPr id="6" name="Y label"/>
+          <p:cNvSpPr txBox="1"/>
+          <p:nvPr/>
+        </p:nvSpPr>
+        <p:spPr>
+          <a:xfrm rot="16200000">
+            <a:off x="-45720" y="3749040"/>
+            <a:ext cx="1280160" cy="320040"/>
+          </a:xfrm>
+          <a:prstGeom prst="rect">
+            <a:avLst/>
+          </a:prstGeom>
+          <a:noFill/>
+          <a:ln/>
+        </p:spPr>
+        <p:txBody>
+          <a:bodyPr wrap="square" lIns="0" tIns="0" rIns="0" bIns="0" rtlCol="0" anchor="ctr"/>
+          <a:lstStyle/>
+          <a:p>
+            <a:pPr algn="ctr" indent="0" marL="0">
+              <a:buNone/>
+            </a:pPr>
+            <a:r>
+              <a:rPr lang="en-US" sz="1200" b="1" dirty="0">
+                <a:solidFill>
+                  <a:srgbClr val="1A1A1A"/>
+                </a:solidFill>
+              </a:rPr>
+              <a:t>Your return</a:t>
+            </a:r>
+            <a:endParaRPr lang="en-US" sz="1200" dirty="0"/>
+          </a:p>
+        </p:txBody>
+      </p:sp>
+      <p:sp>
+        <p:nvSpPr>
+          <p:cNvPr id="7" name="X label"/>
+          <p:cNvSpPr txBox="1"/>
+          <p:nvPr/>
+        </p:nvSpPr>
+        <p:spPr>
+          <a:xfrm>
+            <a:off x="1005840" y="5074920"/>
+            <a:ext cx="7132320" cy="256032"/>
+          </a:xfrm>
+          <a:prstGeom prst="rect">
+            <a:avLst/>
+          </a:prstGeom>
+          <a:noFill/>
+          <a:ln/>
+        </p:spPr>
+        <p:txBody>
+          <a:bodyPr wrap="square" lIns="0" tIns="0" rIns="0" bIns="0" rtlCol="0" anchor="ctr"/>
+          <a:lstStyle/>
+          <a:p>
+            <a:pPr algn="ctr" indent="0" marL="0">
+              <a:buNone/>
+            </a:pPr>
+            <a:r>
+              <a:rPr lang="en-US" sz="1200" b="1" dirty="0">
+                <a:solidFill>
+                  <a:srgbClr val="1A1A1A"/>
+                </a:solidFill>
+              </a:rPr>
+              <a:t>FTAI share of off-contract LEAP shop visits</a:t>
+            </a:r>
+            <a:endParaRPr lang="en-US" sz="1200" dirty="0"/>
+          </a:p>
+        </p:txBody>
+      </p:sp>
+      <p:sp>
+        <p:nvSpPr>
+          <p:cNvPr id="8" name="Base label"/>
+          <p:cNvSpPr txBox="1"/>
+          <p:nvPr/>
+        </p:nvSpPr>
+        <p:spPr>
+          <a:xfrm>
+            <a:off x="1143000" y="4343400"/>
+            <a:ext cx="1005840" cy="228600"/>
+          </a:xfrm>
+          <a:prstGeom prst="rect">
+            <a:avLst/>
+          </a:prstGeom>
+          <a:noFill/>
+          <a:ln/>
+        </p:spPr>
+        <p:txBody>
+          <a:bodyPr wrap="square" lIns="0" tIns="0" rIns="0" bIns="0" rtlCol="0" anchor="ctr"/>
+          <a:lstStyle/>
+          <a:p>
+            <a:pPr algn="ctr" indent="0" marL="0">
+              <a:buNone/>
+            </a:pPr>
+            <a:r>
+              <a:rPr lang="en-US" sz="1100" b="1" i="1" dirty="0">
+                <a:solidFill>
+                  <a:schemeClr val="bg1"/>
+                </a:solidFill>
+              </a:rPr>
+              <a:t>Base case</a:t>
+            </a:r>
+            <a:endParaRPr lang="en-US" sz="1100" dirty="0"/>
+          </a:p>
+        </p:txBody>
+      </p:sp>
+      <p:sp>
+        <p:nvSpPr>
+          <p:cNvPr id="9" name="CFM56 share box"/>
+          <p:cNvSpPr/>
+          <p:nvPr/>
+        </p:nvSpPr>
+        <p:spPr>
+          <a:xfrm>
+            <a:off x="5897880" y="2944368"/>
+            <a:ext cx="1051560" cy="2194560"/>
+          </a:xfrm>
+          <a:prstGeom prst="rect">
+            <a:avLst/>
+          </a:prstGeom>
+          <a:ln w="19050">
+            <a:solidFill>
+              <a:schemeClr val="accent2"/>
+            </a:solidFill>
+            <a:prstDash val="dash"/>
+          </a:ln>
+        </p:spPr>
+      </p:sp>
+      <p:sp>
+        <p:nvSpPr>
+          <p:cNvPr id="10" name="CFM56 share label"/>
+          <p:cNvSpPr txBox="1"/>
+          <p:nvPr/>
+        </p:nvSpPr>
+        <p:spPr>
+          <a:xfrm>
+            <a:off x="5760720" y="2651760"/>
+            <a:ext cx="1325880" cy="237744"/>
+          </a:xfrm>
+          <a:prstGeom prst="rect">
+            <a:avLst/>
+          </a:prstGeom>
+          <a:noFill/>
+          <a:ln/>
+        </p:spPr>
+        <p:txBody>
+          <a:bodyPr wrap="square" lIns="0" tIns="0" rIns="0" bIns="0" rtlCol="0" anchor="ctr"/>
+          <a:lstStyle/>
+          <a:p>
+            <a:pPr algn="ctr" indent="0" marL="0">
+              <a:buNone/>
+            </a:pPr>
+            <a:r>
+              <a:rPr lang="en-US" sz="1100" b="1" i="1" dirty="0">
+                <a:solidFill>
+                  <a:schemeClr val="accent2"/>
+                </a:solidFill>
+              </a:rPr>
+              <a:t>= CFM56 share</a:t>
+            </a:r>
+            <a:endParaRPr lang="en-US" sz="1100" dirty="0"/>
+          </a:p>
+        </p:txBody>
+      </p:sp>
+      <p:sp>
+        <p:nvSpPr>
+          <p:cNvPr id="11" name="Takeaway"/>
+          <p:cNvSpPr txBox="1"/>
+          <p:nvPr/>
+        </p:nvSpPr>
+        <p:spPr>
+          <a:xfrm>
+            <a:off x="320040" y="5504688"/>
+            <a:ext cx="8503920" cy="566928"/>
+          </a:xfrm>
+          <a:prstGeom prst="rect">
+            <a:avLst/>
+          </a:prstGeom>
+          <a:solidFill>
+            <a:srgbClr val="0A1C58"/>
+          </a:solidFill>
+          <a:ln/>
+        </p:spPr>
+        <p:txBody>
+          <a:bodyPr wrap="square" lIns="101600" tIns="25400" rIns="101600" bIns="25400" rtlCol="0" anchor="ctr"/>
+          <a:lstStyle/>
+          <a:p>
+            <a:pPr algn="ctr" indent="0" marL="0">
+              <a:buNone/>
+            </a:pPr>
+            <a:r>
+              <a:rPr lang="en-US" sz="1700" b="1" dirty="0">
+                <a:solidFill>
+                  <a:schemeClr val="bg1"/>
+                </a:solidFill>
+              </a:rPr>
+              <a:t>Every 5 pts of off-contract LEAP share adds ~9 pts to your return on top of our base case.</a:t>
+            </a:r>
+            <a:endParaRPr lang="en-US" sz="1700" dirty="0"/>
+          </a:p>
+        </p:txBody>
+      </p:sp>
+      <p:sp>
+        <p:nvSpPr>
+          <p:cNvPr id="12" name="Source"/>
+          <p:cNvSpPr txBox="1"/>
+          <p:nvPr/>
+        </p:nvSpPr>
+        <p:spPr>
+          <a:xfrm>
+            <a:off x="320040" y="6355080"/>
+            <a:ext cx="7132320" cy="274320"/>
+          </a:xfrm>
+          <a:prstGeom prst="rect">
+            <a:avLst/>
+          </a:prstGeom>
+          <a:noFill/>
+          <a:ln/>
+        </p:spPr>
+        <p:txBody>
+          <a:bodyPr wrap="square" lIns="0" tIns="0" rIns="0" bIns="0" rtlCol="0" anchor="ctr"/>
+          <a:lstStyle/>
+          <a:p>
+            <a:pPr indent="0" marL="0">
+              <a:buNone/>
+            </a:pPr>
+            <a:r>
+              <a:rPr lang="en-US" sz="1100" b="1" dirty="0">
+                <a:solidFill>
+                  <a:srgbClr val="1A1A1A"/>
+                </a:solidFill>
+              </a:rPr>
+              <a:t>Source: </a:t>
+            </a:r>
+            <a:pPr indent="0" marL="0">
+              <a:buNone/>
+            </a:pPr>
+            <a:r>
+              <a:rPr lang="en-US" sz="1100" dirty="0">
+                <a:solidFill>
+                  <a:srgbClr val="1A1A1A"/>
+                </a:solidFill>
+              </a:rPr>
+              <a:t>GPS analysis: 2,000 LEAP visits/yr, 50% off contract, 3 modules/visit, FY27E EBITDA/module, 16x, discounted 4 yrs at 9.5%</a:t>
+            </a:r>
+            <a:endParaRPr lang="en-US" sz="1100" dirty="0"/>
+          </a:p>
+        </p:txBody>
+      </p:sp>
+      <p:sp>
+        <p:nvSpPr>
+          <p:cNvPr id="25" name="Slide Number Placeholder 0"/>
+          <p:cNvSpPr>
+            <a:spLocks noGrp="1"/>
+          </p:cNvSpPr>
+          <p:nvPr>
+            <p:ph type="sldNum" sz="quarter" idx="4294967295"/>
+          </p:nvPr>
+        </p:nvSpPr>
+        <p:spPr>
+          <a:xfrm>
+            <a:off x="7635240" y="6327648"/>
+            <a:ext cx="411480" cy="274320"/>
+          </a:xfrm>
+          <a:prstGeom prst="rect">
+            <a:avLst/>
+          </a:prstGeom>
+          <a:extLst>
+            <a:ext uri="{C572A759-6A51-4108-AA02-DFA0A04FC94B}">
+              <ma14:wrappingTextBoxFlag xmlns:ma14="http://schemas.microsoft.com/office/mac/drawingml/2011/main" val="0"/>
+            </a:ext>
+          </a:extLst>
+        </p:spPr>
+        <p:txBody>
+          <a:bodyPr/>
+          <a:lstStyle>
+            <a:lvl1pPr>
+              <a:defRPr sz="1100">
+                <a:solidFill>
+                  <a:srgbClr val="1A1A1A"/>
+                </a:solidFill>
+              </a:defRPr>
+            </a:lvl1pPr>
+          </a:lstStyle>
+          <a:p>
+            <a:pPr algn="r"/>
+            <a:fld id="{F7021451-1387-4CA6-816F-3879F97B5CBC}" type="slidenum">
+              <a:rPr b="1" lang="en-US"/>
+              <a:t>19</a:t>
             </a:fld>
             <a:endParaRPr lang="en-US"/>
           </a:p>

--- a/deck/FTAI_Long_Pitch.pptx
+++ b/deck/FTAI_Long_Pitch.pptx
@@ -125,12 +125,12 @@
   <p:extLst>
     <p:ext uri="{521415D9-36F7-43E2-AB2F-B90AF26B5E84}">
       <p14:sectionLst xmlns:p14="http://schemas.microsoft.com/office/powerpoint/2010/main">
-        <p14:section name="Introduction" id="{fecd948a-b699-990c-34e9-bcef80e65e0f}">
+        <p14:section name="Introduction" id="{56df8b19-efca-eed9-280a-a65e64a539b9}">
           <p14:sldIdLst>
             <p14:sldId id="256"/>
           </p14:sldIdLst>
         </p14:section>
-        <p14:section name="The Opportunity" id="{d60ed93c-007b-9415-d2ae-265dfc7ced92}">
+        <p14:section name="The Opportunity" id="{edcdc077-bdba-edb2-7cd5-055638959fd5}">
           <p14:sldIdLst>
             <p14:sldId id="257"/>
             <p14:sldId id="258"/>
@@ -138,18 +138,18 @@
             <p14:sldId id="260"/>
           </p14:sldIdLst>
         </p14:section>
-        <p14:section name="Returns" id="{fda27848-b4aa-b930-0913-b6daeb880e3b}">
+        <p14:section name="Returns" id="{2f1b7334-3388-706d-eb36-da3ef4100d0f}">
           <p14:sldIdLst>
             <p14:sldId id="261"/>
           </p14:sldIdLst>
         </p14:section>
-        <p14:section name="Business Overview" id="{6f6b8b27-d4ec-6884-4755-22acf5aba655}">
+        <p14:section name="Business Overview" id="{63d619a8-3df8-4adf-c65f-a73cffc55e5a}">
           <p14:sldIdLst>
             <p14:sldId id="262"/>
             <p14:sldId id="263"/>
           </p14:sldIdLst>
         </p14:section>
-        <p14:section name="Thesis 1a" id="{4b8161ae-51bb-93a1-c82d-be4abbf96942}">
+        <p14:section name="Thesis 1a" id="{dba1b191-a61c-c134-d033-6ab611ac1c4f}">
           <p14:sldIdLst>
             <p14:sldId id="264"/>
             <p14:sldId id="265"/>
@@ -157,7 +157,7 @@
             <p14:sldId id="267"/>
           </p14:sldIdLst>
         </p14:section>
-        <p14:section name="Thesis 1b" id="{17a1a3c6-c35d-7585-a3bd-0f6ce3cc292f}">
+        <p14:section name="Thesis 1b" id="{804b8410-fb50-d979-6ba6-b1e51ffbe1ac}">
           <p14:sldIdLst>
             <p14:sldId id="268"/>
             <p14:sldId id="269"/>
@@ -3074,7 +3074,7 @@
           </c:tx>
           <c:spPr>
             <a:solidFill>
-              <a:srgbClr val="0A1C58"/>
+              <a:srgbClr val="B5AEA9"/>
             </a:solidFill>
             <a:effectLst/>
           </c:spPr>
@@ -3086,7 +3086,7 @@
               <a:lstStyle/>
               <a:p>
                 <a:pPr>
-                  <a:defRPr b="1" i="0" strike="noStrike" sz="1300" u="none">
+                  <a:defRPr b="1" i="0" strike="noStrike" sz="1400" u="none">
                     <a:solidFill>
                       <a:srgbClr val="1A1A1A"/>
                     </a:solidFill>
@@ -3110,7 +3110,7 @@
                 <c:ptCount val="6"/>
                 <c:lvl>
                   <c:pt idx="0">
-                    <c:v>0%</c:v>
+                    <c:v>0% (base)</c:v>
                   </c:pt>
                   <c:pt idx="1">
                     <c:v>5%</c:v>
@@ -3122,7 +3122,7 @@
                     <c:v>15%</c:v>
                   </c:pt>
                   <c:pt idx="4">
-                    <c:v>20%</c:v>
+                    <c:v>20% (CFM56)</c:v>
                   </c:pt>
                   <c:pt idx="5">
                     <c:v>25%</c:v>
@@ -3150,10 +3150,111 @@
                   <c:v>0.92</c:v>
                 </c:pt>
                 <c:pt idx="4">
+                  <c:v/>
+                </c:pt>
+                <c:pt idx="5">
+                  <c:v>1.09</c:v>
+                </c:pt>
+              </c:numCache>
+            </c:numRef>
+          </c:val>
+        </c:ser>
+        <c:ser>
+          <c:idx val="1"/>
+          <c:order val="1"/>
+          <c:tx>
+            <c:strRef>
+              <c:f>Sheet1!$C$1</c:f>
+              <c:strCache>
+                <c:ptCount val="1"/>
+                <c:pt idx="0">
+                  <c:v>Matches CFM56 share</c:v>
+                </c:pt>
+              </c:strCache>
+            </c:strRef>
+          </c:tx>
+          <c:spPr>
+            <a:solidFill>
+              <a:srgbClr val="0A1C58"/>
+            </a:solidFill>
+            <a:effectLst/>
+          </c:spPr>
+          <c:invertIfNegative val="0"/>
+          <c:dLbls>
+            <c:numFmt formatCode="0%" sourceLinked="0"/>
+            <c:txPr>
+              <a:bodyPr/>
+              <a:lstStyle/>
+              <a:p>
+                <a:pPr>
+                  <a:defRPr b="1" i="0" strike="noStrike" sz="1400" u="none">
+                    <a:solidFill>
+                      <a:srgbClr val="1A1A1A"/>
+                    </a:solidFill>
+                    <a:latin typeface="+mn-lt"/>
+                  </a:defRPr>
+                </a:pPr>
+              </a:p>
+            </c:txPr>
+            <c:showLegendKey val="0"/>
+            <c:showVal val="1"/>
+            <c:showCatName val="0"/>
+            <c:showSerName val="0"/>
+            <c:showPercent val="0"/>
+            <c:showBubbleSize val="0"/>
+            <c:showLeaderLines val="0"/>
+          </c:dLbls>
+          <c:cat>
+            <c:multiLvlStrRef>
+              <c:f>Sheet1!$A$2:$A$7</c:f>
+              <c:multiLvlStrCache>
+                <c:ptCount val="6"/>
+                <c:lvl>
+                  <c:pt idx="0">
+                    <c:v>0% (base)</c:v>
+                  </c:pt>
+                  <c:pt idx="1">
+                    <c:v>5%</c:v>
+                  </c:pt>
+                  <c:pt idx="2">
+                    <c:v>10%</c:v>
+                  </c:pt>
+                  <c:pt idx="3">
+                    <c:v>15%</c:v>
+                  </c:pt>
+                  <c:pt idx="4">
+                    <c:v>20% (CFM56)</c:v>
+                  </c:pt>
+                  <c:pt idx="5">
+                    <c:v>25%</c:v>
+                  </c:pt>
+                </c:lvl>
+              </c:multiLvlStrCache>
+            </c:multiLvlStrRef>
+          </c:cat>
+          <c:val>
+            <c:numRef>
+              <c:f>Sheet1!$C$2:$C$7</c:f>
+              <c:numCache>
+                <c:formatCode>General</c:formatCode>
+                <c:ptCount val="6"/>
+                <c:pt idx="0">
+                  <c:v/>
+                </c:pt>
+                <c:pt idx="1">
+                  <c:v/>
+                </c:pt>
+                <c:pt idx="2">
+                  <c:v/>
+                </c:pt>
+                <c:pt idx="3">
+                  <c:v/>
+                </c:pt>
+                <c:pt idx="4">
                   <c:v>1.01</c:v>
                 </c:pt>
                 <c:pt idx="5">
-                  <c:v>1.09</c:v>
+                  <c:v/>
                 </c:pt>
               </c:numCache>
             </c:numRef>
@@ -3166,7 +3267,7 @@
             <a:lstStyle/>
             <a:p>
               <a:pPr>
-                <a:defRPr b="1" i="0" strike="noStrike" sz="1300" u="none">
+                <a:defRPr b="1" i="0" strike="noStrike" sz="1400" u="none">
                   <a:solidFill>
                     <a:srgbClr val="1A1A1A"/>
                   </a:solidFill>
@@ -3183,8 +3284,8 @@
           <c:showBubbleSize val="0"/>
           <c:showLeaderLines val="0"/>
         </c:dLbls>
-        <c:gapWidth val="45"/>
-        <c:overlap val="0"/>
+        <c:gapWidth val="55"/>
+        <c:overlap val="100"/>
         <c:axId val="2094734554"/>
         <c:axId val="2094734552"/>
         <c:axId val="2094734556"/>
@@ -5713,7 +5814,7 @@
             <c:size val="6"/>
             <c:spPr>
               <a:solidFill>
-                <a:srgbClr val="0A1C58"/>
+                <a:srgbClr val="847C7A"/>
               </a:solidFill>
               <a:ln w="9525" cap="flat">
                 <a:solidFill>
@@ -5851,7 +5952,7 @@
             <c:size val="6"/>
             <c:spPr>
               <a:solidFill>
-                <a:srgbClr val="847C7A"/>
+                <a:srgbClr val="0A1C58"/>
               </a:solidFill>
               <a:ln w="9525" cap="flat">
                 <a:solidFill>
@@ -16794,8 +16895,8 @@
         </p:nvSpPr>
         <p:spPr>
           <a:xfrm>
-            <a:off x="822960" y="1600200"/>
-            <a:ext cx="7498080" cy="1005840"/>
+            <a:off x="822960" y="1627632"/>
+            <a:ext cx="7498080" cy="868680"/>
           </a:xfrm>
           <a:prstGeom prst="rect">
             <a:avLst/>
@@ -16806,47 +16907,69 @@
           <a:ln/>
         </p:spPr>
         <p:txBody>
-          <a:bodyPr wrap="square" lIns="152400" tIns="50800" rIns="152400" bIns="50800" rtlCol="0" anchor="ctr"/>
-          <a:lstStyle/>
-          <a:p>
-            <a:pPr algn="ctr" indent="0" marL="0">
-              <a:buNone/>
-            </a:pPr>
-            <a:r>
-              <a:rPr lang="en-US" sz="1500" b="1" dirty="0">
+          <a:bodyPr wrap="square" lIns="177800" tIns="50800" rIns="177800" bIns="50800" rtlCol="0" anchor="ctr"/>
+          <a:lstStyle/>
+          <a:p>
+            <a:pPr algn="l" indent="0" marL="0">
+              <a:buNone/>
+            </a:pPr>
+            <a:r>
+              <a:rPr lang="en-US" sz="1600" b="1" dirty="0">
                 <a:solidFill>
                   <a:srgbClr val="1A1A1A"/>
                 </a:solidFill>
               </a:rPr>
               <a:t>“It will happen. The reason why it will happen is because they have set their CFM line up to have a measurable amount of shared services in that line.”</a:t>
             </a:r>
-            <a:endParaRPr lang="en-US" sz="1500" dirty="0"/>
-          </a:p>
-          <a:p>
-            <a:pPr algn="ctr" indent="0" marL="0">
-              <a:buNone/>
-            </a:pPr>
-            <a:r>
-              <a:rPr lang="en-US" sz="1200" i="1" dirty="0">
+            <a:endParaRPr lang="en-US" sz="1600" dirty="0"/>
+          </a:p>
+        </p:txBody>
+      </p:sp>
+      <p:sp>
+        <p:nvSpPr>
+          <p:cNvPr id="5" name="LEAP quote attribution"/>
+          <p:cNvSpPr txBox="1"/>
+          <p:nvPr/>
+        </p:nvSpPr>
+        <p:spPr>
+          <a:xfrm>
+            <a:off x="4206240" y="2542032"/>
+            <a:ext cx="4114800" cy="274320"/>
+          </a:xfrm>
+          <a:prstGeom prst="rect">
+            <a:avLst/>
+          </a:prstGeom>
+          <a:noFill/>
+          <a:ln/>
+        </p:spPr>
+        <p:txBody>
+          <a:bodyPr wrap="square" lIns="0" tIns="0" rIns="0" bIns="0" rtlCol="0" anchor="ctr"/>
+          <a:lstStyle/>
+          <a:p>
+            <a:pPr algn="r" indent="0" marL="0">
+              <a:buNone/>
+            </a:pPr>
+            <a:r>
+              <a:rPr lang="en-US" sz="1400" b="1" i="1" dirty="0">
                 <a:solidFill>
                   <a:srgbClr val="1A1A1A"/>
                 </a:solidFill>
               </a:rPr>
               <a:t>— Former executive, engine MRO shop</a:t>
             </a:r>
-            <a:endParaRPr lang="en-US" sz="1500" dirty="0"/>
+            <a:endParaRPr lang="en-US" sz="1400" dirty="0"/>
           </a:p>
         </p:txBody>
       </p:sp>
       <p:graphicFrame>
         <p:nvGraphicFramePr>
-          <p:cNvPr id="5" name="LEAP return chart" descr=""/>
+          <p:cNvPr id="6" name="LEAP return chart" descr=""/>
           <p:cNvGraphicFramePr/>
           <p:nvPr/>
         </p:nvGraphicFramePr>
         <p:xfrm>
-          <a:off x="1005840" y="2743200"/>
-          <a:ext cx="7132320" cy="2331720"/>
+          <a:off x="960120" y="2926080"/>
+          <a:ext cx="7680960" cy="2148840"/>
         </p:xfrm>
         <a:graphic xmlns:a="http://schemas.openxmlformats.org/drawingml/2006/main">
           <a:graphicData uri="http://schemas.openxmlformats.org/drawingml/2006/chart">
@@ -16856,14 +16979,14 @@
       </p:graphicFrame>
       <p:sp>
         <p:nvSpPr>
-          <p:cNvPr id="6" name="Y label"/>
+          <p:cNvPr id="7" name="Y label"/>
           <p:cNvSpPr txBox="1"/>
           <p:nvPr/>
         </p:nvSpPr>
         <p:spPr>
           <a:xfrm rot="16200000">
-            <a:off x="-45720" y="3749040"/>
-            <a:ext cx="1280160" cy="320040"/>
+            <a:off x="0" y="3703320"/>
+            <a:ext cx="1371600" cy="320040"/>
           </a:xfrm>
           <a:prstGeom prst="rect">
             <a:avLst/>
@@ -16892,14 +17015,14 @@
       </p:sp>
       <p:sp>
         <p:nvSpPr>
-          <p:cNvPr id="7" name="X label"/>
+          <p:cNvPr id="8" name="X label"/>
           <p:cNvSpPr txBox="1"/>
           <p:nvPr/>
         </p:nvSpPr>
         <p:spPr>
           <a:xfrm>
-            <a:off x="1005840" y="5074920"/>
-            <a:ext cx="7132320" cy="256032"/>
+            <a:off x="960120" y="5102352"/>
+            <a:ext cx="7680960" cy="256032"/>
           </a:xfrm>
           <a:prstGeom prst="rect">
             <a:avLst/>
@@ -16928,101 +17051,7 @@
       </p:sp>
       <p:sp>
         <p:nvSpPr>
-          <p:cNvPr id="8" name="Base label"/>
-          <p:cNvSpPr txBox="1"/>
-          <p:nvPr/>
-        </p:nvSpPr>
-        <p:spPr>
-          <a:xfrm>
-            <a:off x="1143000" y="4343400"/>
-            <a:ext cx="1005840" cy="228600"/>
-          </a:xfrm>
-          <a:prstGeom prst="rect">
-            <a:avLst/>
-          </a:prstGeom>
-          <a:noFill/>
-          <a:ln/>
-        </p:spPr>
-        <p:txBody>
-          <a:bodyPr wrap="square" lIns="0" tIns="0" rIns="0" bIns="0" rtlCol="0" anchor="ctr"/>
-          <a:lstStyle/>
-          <a:p>
-            <a:pPr algn="ctr" indent="0" marL="0">
-              <a:buNone/>
-            </a:pPr>
-            <a:r>
-              <a:rPr lang="en-US" sz="1100" b="1" i="1" dirty="0">
-                <a:solidFill>
-                  <a:schemeClr val="bg1"/>
-                </a:solidFill>
-              </a:rPr>
-              <a:t>Base case</a:t>
-            </a:r>
-            <a:endParaRPr lang="en-US" sz="1100" dirty="0"/>
-          </a:p>
-        </p:txBody>
-      </p:sp>
-      <p:sp>
-        <p:nvSpPr>
-          <p:cNvPr id="9" name="CFM56 share box"/>
-          <p:cNvSpPr/>
-          <p:nvPr/>
-        </p:nvSpPr>
-        <p:spPr>
-          <a:xfrm>
-            <a:off x="5897880" y="2944368"/>
-            <a:ext cx="1051560" cy="2194560"/>
-          </a:xfrm>
-          <a:prstGeom prst="rect">
-            <a:avLst/>
-          </a:prstGeom>
-          <a:ln w="19050">
-            <a:solidFill>
-              <a:schemeClr val="accent2"/>
-            </a:solidFill>
-            <a:prstDash val="dash"/>
-          </a:ln>
-        </p:spPr>
-      </p:sp>
-      <p:sp>
-        <p:nvSpPr>
-          <p:cNvPr id="10" name="CFM56 share label"/>
-          <p:cNvSpPr txBox="1"/>
-          <p:nvPr/>
-        </p:nvSpPr>
-        <p:spPr>
-          <a:xfrm>
-            <a:off x="5760720" y="2651760"/>
-            <a:ext cx="1325880" cy="237744"/>
-          </a:xfrm>
-          <a:prstGeom prst="rect">
-            <a:avLst/>
-          </a:prstGeom>
-          <a:noFill/>
-          <a:ln/>
-        </p:spPr>
-        <p:txBody>
-          <a:bodyPr wrap="square" lIns="0" tIns="0" rIns="0" bIns="0" rtlCol="0" anchor="ctr"/>
-          <a:lstStyle/>
-          <a:p>
-            <a:pPr algn="ctr" indent="0" marL="0">
-              <a:buNone/>
-            </a:pPr>
-            <a:r>
-              <a:rPr lang="en-US" sz="1100" b="1" i="1" dirty="0">
-                <a:solidFill>
-                  <a:schemeClr val="accent2"/>
-                </a:solidFill>
-              </a:rPr>
-              <a:t>= CFM56 share</a:t>
-            </a:r>
-            <a:endParaRPr lang="en-US" sz="1100" dirty="0"/>
-          </a:p>
-        </p:txBody>
-      </p:sp>
-      <p:sp>
-        <p:nvSpPr>
-          <p:cNvPr id="11" name="Takeaway"/>
+          <p:cNvPr id="9" name="Takeaway"/>
           <p:cNvSpPr txBox="1"/>
           <p:nvPr/>
         </p:nvSpPr>
@@ -17060,7 +17089,7 @@
       </p:sp>
       <p:sp>
         <p:nvSpPr>
-          <p:cNvPr id="12" name="Source"/>
+          <p:cNvPr id="10" name="Source"/>
           <p:cNvSpPr txBox="1"/>
           <p:nvPr/>
         </p:nvSpPr>

--- a/deck/FTAI_Long_Pitch.pptx
+++ b/deck/FTAI_Long_Pitch.pptx
@@ -24,9 +24,13 @@
     <p:sldId id="272" r:id="rId18"/>
     <p:sldId id="273" r:id="rId19"/>
     <p:sldId id="274" r:id="rId20"/>
+    <p:sldId id="275" r:id="rId21"/>
+    <p:sldId id="276" r:id="rId22"/>
+    <p:sldId id="277" r:id="rId23"/>
+    <p:sldId id="278" r:id="rId24"/>
   </p:sldIdLst>
   <p:notesMasterIdLst>
-    <p:notesMasterId r:id="rId21"/>
+    <p:notesMasterId r:id="rId25"/>
   </p:notesMasterIdLst>
   <p:sldSz cx="9144000" cy="6858000"/>
   <p:notesSz cx="6858000" cy="9144000"/>
@@ -125,12 +129,12 @@
   <p:extLst>
     <p:ext uri="{521415D9-36F7-43E2-AB2F-B90AF26B5E84}">
       <p14:sectionLst xmlns:p14="http://schemas.microsoft.com/office/powerpoint/2010/main">
-        <p14:section name="Introduction" id="{56df8b19-efca-eed9-280a-a65e64a539b9}">
+        <p14:section name="Introduction" id="{64b27d7d-c1f1-06f1-06c4-f0414baf88e9}">
           <p14:sldIdLst>
             <p14:sldId id="256"/>
           </p14:sldIdLst>
         </p14:section>
-        <p14:section name="The Opportunity" id="{edcdc077-bdba-edb2-7cd5-055638959fd5}">
+        <p14:section name="The Opportunity" id="{9797a552-2527-f7ed-92d6-c6851ff2551f}">
           <p14:sldIdLst>
             <p14:sldId id="257"/>
             <p14:sldId id="258"/>
@@ -138,18 +142,18 @@
             <p14:sldId id="260"/>
           </p14:sldIdLst>
         </p14:section>
-        <p14:section name="Returns" id="{2f1b7334-3388-706d-eb36-da3ef4100d0f}">
+        <p14:section name="Returns" id="{398f241b-a6a1-fd09-85e5-d8f590ed79b2}">
           <p14:sldIdLst>
             <p14:sldId id="261"/>
           </p14:sldIdLst>
         </p14:section>
-        <p14:section name="Business Overview" id="{63d619a8-3df8-4adf-c65f-a73cffc55e5a}">
+        <p14:section name="Business Overview" id="{74a643fc-7c43-781d-1697-64518b20c19d}">
           <p14:sldIdLst>
             <p14:sldId id="262"/>
             <p14:sldId id="263"/>
           </p14:sldIdLst>
         </p14:section>
-        <p14:section name="Thesis 1a" id="{dba1b191-a61c-c134-d033-6ab611ac1c4f}">
+        <p14:section name="Thesis 1a" id="{8cfa63a4-192a-a850-9629-afba908b57d0}">
           <p14:sldIdLst>
             <p14:sldId id="264"/>
             <p14:sldId id="265"/>
@@ -157,7 +161,7 @@
             <p14:sldId id="267"/>
           </p14:sldIdLst>
         </p14:section>
-        <p14:section name="Thesis 1b" id="{804b8410-fb50-d979-6ba6-b1e51ffbe1ac}">
+        <p14:section name="Thesis 1b" id="{a1c0ada0-0a46-8c1a-12f9-099c8d5d1a0c}">
           <p14:sldIdLst>
             <p14:sldId id="268"/>
             <p14:sldId id="269"/>
@@ -166,6 +170,14 @@
             <p14:sldId id="272"/>
             <p14:sldId id="273"/>
             <p14:sldId id="274"/>
+          </p14:sldIdLst>
+        </p14:section>
+        <p14:section name="Thesis 2" id="{027334ae-35ea-e5b2-2bbd-5651263e45bc}">
+          <p14:sldIdLst>
+            <p14:sldId id="275"/>
+            <p14:sldId id="276"/>
+            <p14:sldId id="277"/>
+            <p14:sldId id="278"/>
           </p14:sldIdLst>
         </p14:section>
       </p14:sectionLst>
@@ -3396,6 +3408,380 @@
 </c:chartSpace>
 </file>
 
+<file path=ppt/charts/chart19.xml><?xml version="1.0" encoding="utf-8"?>
+<c:chartSpace xmlns:c="http://schemas.openxmlformats.org/drawingml/2006/chart" xmlns:a="http://schemas.openxmlformats.org/drawingml/2006/main" xmlns:r="http://schemas.openxmlformats.org/officeDocument/2006/relationships">
+  <c:date1904 val="0"/>
+  <c:roundedCorners val="1"/>
+  <c:chart>
+    <c:autoTitleDeleted val="1"/>
+    <c:plotArea>
+      <c:layout/>
+      <c:barChart>
+        <c:barDir val="col"/>
+        <c:grouping val="clustered"/>
+        <c:varyColors val="0"/>
+        <c:ser>
+          <c:idx val="0"/>
+          <c:order val="0"/>
+          <c:tx>
+            <c:strRef>
+              <c:f>Sheet1!$B$1</c:f>
+              <c:strCache>
+                <c:ptCount val="1"/>
+                <c:pt idx="0">
+                  <c:v>Reported</c:v>
+                </c:pt>
+              </c:strCache>
+            </c:strRef>
+          </c:tx>
+          <c:spPr>
+            <a:solidFill>
+              <a:srgbClr val="B5AEA9"/>
+            </a:solidFill>
+            <a:effectLst/>
+          </c:spPr>
+          <c:invertIfNegative val="0"/>
+          <c:dLbls>
+            <c:numFmt formatCode="#,##0" sourceLinked="0"/>
+            <c:txPr>
+              <a:bodyPr/>
+              <a:lstStyle/>
+              <a:p>
+                <a:pPr>
+                  <a:defRPr b="1" i="0" strike="noStrike" sz="1100" u="none">
+                    <a:solidFill>
+                      <a:srgbClr val="1A1A1A"/>
+                    </a:solidFill>
+                    <a:latin typeface="+mn-lt"/>
+                  </a:defRPr>
+                </a:pPr>
+              </a:p>
+            </c:txPr>
+            <c:showLegendKey val="0"/>
+            <c:showVal val="1"/>
+            <c:showCatName val="0"/>
+            <c:showSerName val="0"/>
+            <c:showPercent val="0"/>
+            <c:showBubbleSize val="0"/>
+            <c:showLeaderLines val="0"/>
+          </c:dLbls>
+          <c:cat>
+            <c:multiLvlStrRef>
+              <c:f>Sheet1!$A$2:$A$9</c:f>
+              <c:multiLvlStrCache>
+                <c:ptCount val="8"/>
+                <c:lvl>
+                  <c:pt idx="0">
+                    <c:v>2019</c:v>
+                  </c:pt>
+                  <c:pt idx="1">
+                    <c:v>2020</c:v>
+                  </c:pt>
+                  <c:pt idx="2">
+                    <c:v>2021</c:v>
+                  </c:pt>
+                  <c:pt idx="3">
+                    <c:v>2022</c:v>
+                  </c:pt>
+                  <c:pt idx="4">
+                    <c:v>2023</c:v>
+                  </c:pt>
+                  <c:pt idx="5">
+                    <c:v>2024</c:v>
+                  </c:pt>
+                  <c:pt idx="6">
+                    <c:v>2025</c:v>
+                  </c:pt>
+                  <c:pt idx="7">
+                    <c:v>2026E</c:v>
+                  </c:pt>
+                </c:lvl>
+              </c:multiLvlStrCache>
+            </c:multiLvlStrRef>
+          </c:cat>
+          <c:val>
+            <c:numRef>
+              <c:f>Sheet1!$B$2:$B$9</c:f>
+              <c:numCache>
+                <c:formatCode>General</c:formatCode>
+                <c:ptCount val="8"/>
+                <c:pt idx="0">
+                  <c:v>69</c:v>
+                </c:pt>
+                <c:pt idx="1">
+                  <c:v>95</c:v>
+                </c:pt>
+                <c:pt idx="2">
+                  <c:v>128</c:v>
+                </c:pt>
+                <c:pt idx="3">
+                  <c:v>151</c:v>
+                </c:pt>
+                <c:pt idx="4">
+                  <c:v>147</c:v>
+                </c:pt>
+                <c:pt idx="5">
+                  <c:v>228</c:v>
+                </c:pt>
+                <c:pt idx="6">
+                  <c:v>376</c:v>
+                </c:pt>
+                <c:pt idx="7">
+                  <c:v/>
+                </c:pt>
+              </c:numCache>
+            </c:numRef>
+          </c:val>
+        </c:ser>
+        <c:ser>
+          <c:idx val="1"/>
+          <c:order val="1"/>
+          <c:tx>
+            <c:strRef>
+              <c:f>Sheet1!$C$1</c:f>
+              <c:strCache>
+                <c:ptCount val="1"/>
+                <c:pt idx="0">
+                  <c:v>Guided</c:v>
+                </c:pt>
+              </c:strCache>
+            </c:strRef>
+          </c:tx>
+          <c:spPr>
+            <a:solidFill>
+              <a:srgbClr val="0A1C58"/>
+            </a:solidFill>
+            <a:effectLst/>
+          </c:spPr>
+          <c:invertIfNegative val="0"/>
+          <c:dLbls>
+            <c:numFmt formatCode="#,##0" sourceLinked="0"/>
+            <c:txPr>
+              <a:bodyPr/>
+              <a:lstStyle/>
+              <a:p>
+                <a:pPr>
+                  <a:defRPr b="1" i="0" strike="noStrike" sz="1100" u="none">
+                    <a:solidFill>
+                      <a:srgbClr val="1A1A1A"/>
+                    </a:solidFill>
+                    <a:latin typeface="+mn-lt"/>
+                  </a:defRPr>
+                </a:pPr>
+              </a:p>
+            </c:txPr>
+            <c:showLegendKey val="0"/>
+            <c:showVal val="1"/>
+            <c:showCatName val="0"/>
+            <c:showSerName val="0"/>
+            <c:showPercent val="0"/>
+            <c:showBubbleSize val="0"/>
+            <c:showLeaderLines val="0"/>
+          </c:dLbls>
+          <c:cat>
+            <c:multiLvlStrRef>
+              <c:f>Sheet1!$A$2:$A$9</c:f>
+              <c:multiLvlStrCache>
+                <c:ptCount val="8"/>
+                <c:lvl>
+                  <c:pt idx="0">
+                    <c:v>2019</c:v>
+                  </c:pt>
+                  <c:pt idx="1">
+                    <c:v>2020</c:v>
+                  </c:pt>
+                  <c:pt idx="2">
+                    <c:v>2021</c:v>
+                  </c:pt>
+                  <c:pt idx="3">
+                    <c:v>2022</c:v>
+                  </c:pt>
+                  <c:pt idx="4">
+                    <c:v>2023</c:v>
+                  </c:pt>
+                  <c:pt idx="5">
+                    <c:v>2024</c:v>
+                  </c:pt>
+                  <c:pt idx="6">
+                    <c:v>2025</c:v>
+                  </c:pt>
+                  <c:pt idx="7">
+                    <c:v>2026E</c:v>
+                  </c:pt>
+                </c:lvl>
+              </c:multiLvlStrCache>
+            </c:multiLvlStrRef>
+          </c:cat>
+          <c:val>
+            <c:numRef>
+              <c:f>Sheet1!$C$2:$C$9</c:f>
+              <c:numCache>
+                <c:formatCode>General</c:formatCode>
+                <c:ptCount val="8"/>
+                <c:pt idx="0">
+                  <c:v/>
+                </c:pt>
+                <c:pt idx="1">
+                  <c:v/>
+                </c:pt>
+                <c:pt idx="2">
+                  <c:v/>
+                </c:pt>
+                <c:pt idx="3">
+                  <c:v/>
+                </c:pt>
+                <c:pt idx="4">
+                  <c:v/>
+                </c:pt>
+                <c:pt idx="5">
+                  <c:v/>
+                </c:pt>
+                <c:pt idx="6">
+                  <c:v/>
+                </c:pt>
+                <c:pt idx="7">
+                  <c:v>733</c:v>
+                </c:pt>
+              </c:numCache>
+            </c:numRef>
+          </c:val>
+        </c:ser>
+        <c:dLbls>
+          <c:numFmt formatCode="#,##0" sourceLinked="0"/>
+          <c:txPr>
+            <a:bodyPr/>
+            <a:lstStyle/>
+            <a:p>
+              <a:pPr>
+                <a:defRPr b="1" i="0" strike="noStrike" sz="1100" u="none">
+                  <a:solidFill>
+                    <a:srgbClr val="1A1A1A"/>
+                  </a:solidFill>
+                  <a:latin typeface="+mn-lt"/>
+                </a:defRPr>
+              </a:pPr>
+            </a:p>
+          </c:txPr>
+          <c:showLegendKey val="0"/>
+          <c:showVal val="1"/>
+          <c:showCatName val="0"/>
+          <c:showSerName val="0"/>
+          <c:showPercent val="0"/>
+          <c:showBubbleSize val="0"/>
+          <c:showLeaderLines val="0"/>
+        </c:dLbls>
+        <c:gapWidth val="35"/>
+        <c:overlap val="100"/>
+        <c:axId val="2094734554"/>
+        <c:axId val="2094734552"/>
+        <c:axId val="2094734556"/>
+      </c:barChart>
+      <c:catAx>
+        <c:axId val="2094734554"/>
+        <c:scaling>
+          <c:orientation val="minMax"/>
+        </c:scaling>
+        <c:delete val="0"/>
+        <c:axPos val="b"/>
+        <c:numFmt formatCode="General" sourceLinked="1"/>
+        <c:majorTickMark val="out"/>
+        <c:minorTickMark val="none"/>
+        <c:tickLblPos val="low"/>
+        <c:spPr>
+          <a:ln w="12700" cap="flat">
+            <a:solidFill>
+              <a:srgbClr val="BFBFBF"/>
+            </a:solidFill>
+            <a:prstDash val="solid"/>
+            <a:round/>
+          </a:ln>
+        </c:spPr>
+        <c:txPr>
+          <a:bodyPr/>
+          <a:lstStyle/>
+          <a:p>
+            <a:pPr>
+              <a:defRPr sz="1000" b="0" i="0" u="none" strike="noStrike">
+                <a:solidFill>
+                  <a:srgbClr val="1A1A1A"/>
+                </a:solidFill>
+                <a:latin typeface="+mn-lt"/>
+              </a:defRPr>
+            </a:pPr>
+            <a:endParaRPr lang="en-US"/>
+          </a:p>
+        </c:txPr>
+        <c:crossAx val="2094734552"/>
+        <c:crosses val="autoZero"/>
+        <c:auto val="1"/>
+        <c:lblAlgn val="ctr"/>
+        <c:noMultiLvlLbl val="1"/>
+      </c:catAx>
+      <c:valAx>
+        <c:axId val="2094734552"/>
+        <c:scaling>
+          <c:orientation val="minMax"/>
+          <c:max val="820"/>
+          <c:min val="0"/>
+        </c:scaling>
+        <c:delete val="1"/>
+        <c:axPos val="l"/>
+        <c:numFmt formatCode="General" sourceLinked="0"/>
+        <c:majorTickMark val="out"/>
+        <c:minorTickMark val="none"/>
+        <c:tickLblPos val="nextTo"/>
+        <c:spPr>
+          <a:ln w="12700" cap="flat">
+            <a:solidFill>
+              <a:srgbClr val="888888"/>
+            </a:solidFill>
+            <a:prstDash val="solid"/>
+            <a:round/>
+          </a:ln>
+        </c:spPr>
+        <c:txPr>
+          <a:bodyPr/>
+          <a:lstStyle/>
+          <a:p>
+            <a:pPr>
+              <a:defRPr sz="1200" b="0" i="0" u="none" strike="noStrike">
+                <a:solidFill>
+                  <a:srgbClr val="000000"/>
+                </a:solidFill>
+                <a:latin typeface="Arial"/>
+              </a:defRPr>
+            </a:pPr>
+            <a:endParaRPr lang="en-US"/>
+          </a:p>
+        </c:txPr>
+        <c:crossAx val="2094734554"/>
+        <c:crosses val="autoZero"/>
+        <c:crossBetween val="between"/>
+      </c:valAx>
+      <c:spPr>
+        <a:noFill/>
+        <a:ln>
+          <a:noFill/>
+        </a:ln>
+        <a:effectLst/>
+      </c:spPr>
+    </c:plotArea>
+    <c:plotVisOnly val="1"/>
+    <c:dispBlanksAs val="span"/>
+  </c:chart>
+  <c:spPr>
+    <a:noFill/>
+    <a:ln>
+      <a:noFill/>
+    </a:ln>
+    <a:effectLst/>
+  </c:spPr>
+  <c:externalData r:id="rId1">
+    <c:autoUpdate val="0"/>
+  </c:externalData>
+</c:chartSpace>
+</file>
+
 <file path=ppt/charts/chart2.xml><?xml version="1.0" encoding="utf-8"?>
 <c:chartSpace xmlns:c="http://schemas.openxmlformats.org/drawingml/2006/chart" xmlns:a="http://schemas.openxmlformats.org/drawingml/2006/main" xmlns:r="http://schemas.openxmlformats.org/officeDocument/2006/relationships">
   <c:date1904 val="0"/>
@@ -3600,6 +3986,866 @@
         <c:scaling>
           <c:orientation val="minMax"/>
           <c:max val="0.5"/>
+          <c:min val="0"/>
+        </c:scaling>
+        <c:delete val="1"/>
+        <c:axPos val="l"/>
+        <c:numFmt formatCode="General" sourceLinked="0"/>
+        <c:majorTickMark val="out"/>
+        <c:minorTickMark val="none"/>
+        <c:tickLblPos val="nextTo"/>
+        <c:spPr>
+          <a:ln w="12700" cap="flat">
+            <a:solidFill>
+              <a:srgbClr val="888888"/>
+            </a:solidFill>
+            <a:prstDash val="solid"/>
+            <a:round/>
+          </a:ln>
+        </c:spPr>
+        <c:txPr>
+          <a:bodyPr/>
+          <a:lstStyle/>
+          <a:p>
+            <a:pPr>
+              <a:defRPr sz="1200" b="0" i="0" u="none" strike="noStrike">
+                <a:solidFill>
+                  <a:srgbClr val="000000"/>
+                </a:solidFill>
+                <a:latin typeface="Arial"/>
+              </a:defRPr>
+            </a:pPr>
+            <a:endParaRPr lang="en-US"/>
+          </a:p>
+        </c:txPr>
+        <c:crossAx val="2094734554"/>
+        <c:crosses val="autoZero"/>
+        <c:crossBetween val="between"/>
+      </c:valAx>
+      <c:spPr>
+        <a:noFill/>
+        <a:ln>
+          <a:noFill/>
+        </a:ln>
+        <a:effectLst/>
+      </c:spPr>
+    </c:plotArea>
+    <c:plotVisOnly val="1"/>
+    <c:dispBlanksAs val="span"/>
+  </c:chart>
+  <c:spPr>
+    <a:noFill/>
+    <a:ln>
+      <a:noFill/>
+    </a:ln>
+    <a:effectLst/>
+  </c:spPr>
+  <c:externalData r:id="rId1">
+    <c:autoUpdate val="0"/>
+  </c:externalData>
+</c:chartSpace>
+</file>
+
+<file path=ppt/charts/chart20.xml><?xml version="1.0" encoding="utf-8"?>
+<c:chartSpace xmlns:c="http://schemas.openxmlformats.org/drawingml/2006/chart" xmlns:a="http://schemas.openxmlformats.org/drawingml/2006/main" xmlns:r="http://schemas.openxmlformats.org/officeDocument/2006/relationships">
+  <c:date1904 val="0"/>
+  <c:roundedCorners val="1"/>
+  <c:chart>
+    <c:autoTitleDeleted val="1"/>
+    <c:plotArea>
+      <c:layout/>
+      <c:barChart>
+        <c:barDir val="col"/>
+        <c:grouping val="clustered"/>
+        <c:varyColors val="0"/>
+        <c:ser>
+          <c:idx val="0"/>
+          <c:order val="0"/>
+          <c:tx>
+            <c:strRef>
+              <c:f>Sheet1!$B$1</c:f>
+              <c:strCache>
+                <c:ptCount val="1"/>
+                <c:pt idx="0">
+                  <c:v>Shortfall</c:v>
+                </c:pt>
+              </c:strCache>
+            </c:strRef>
+          </c:tx>
+          <c:spPr>
+            <a:solidFill>
+              <a:srgbClr val="0A1C58"/>
+            </a:solidFill>
+            <a:effectLst/>
+          </c:spPr>
+          <c:invertIfNegative val="0"/>
+          <c:dLbls>
+            <c:numFmt formatCode="0.0;;0" sourceLinked="0"/>
+            <c:txPr>
+              <a:bodyPr/>
+              <a:lstStyle/>
+              <a:p>
+                <a:pPr>
+                  <a:defRPr b="1" i="0" strike="noStrike" sz="1200" u="none">
+                    <a:solidFill>
+                      <a:srgbClr val="1A1A1A"/>
+                    </a:solidFill>
+                    <a:latin typeface="+mn-lt"/>
+                  </a:defRPr>
+                </a:pPr>
+              </a:p>
+            </c:txPr>
+            <c:showLegendKey val="0"/>
+            <c:showVal val="1"/>
+            <c:showCatName val="0"/>
+            <c:showSerName val="0"/>
+            <c:showPercent val="0"/>
+            <c:showBubbleSize val="0"/>
+            <c:showLeaderLines val="0"/>
+          </c:dLbls>
+          <c:cat>
+            <c:multiLvlStrRef>
+              <c:f>Sheet1!$A$2:$A$7</c:f>
+              <c:multiLvlStrCache>
+                <c:ptCount val="6"/>
+                <c:lvl>
+                  <c:pt idx="0">
+                    <c:v>2026</c:v>
+                  </c:pt>
+                  <c:pt idx="1">
+                    <c:v>2027</c:v>
+                  </c:pt>
+                  <c:pt idx="2">
+                    <c:v>2028</c:v>
+                  </c:pt>
+                  <c:pt idx="3">
+                    <c:v>2029</c:v>
+                  </c:pt>
+                  <c:pt idx="4">
+                    <c:v>2030</c:v>
+                  </c:pt>
+                  <c:pt idx="5">
+                    <c:v>2031</c:v>
+                  </c:pt>
+                </c:lvl>
+              </c:multiLvlStrCache>
+            </c:multiLvlStrRef>
+          </c:cat>
+          <c:val>
+            <c:numRef>
+              <c:f>Sheet1!$B$2:$B$7</c:f>
+              <c:numCache>
+                <c:formatCode>General</c:formatCode>
+                <c:ptCount val="6"/>
+                <c:pt idx="0">
+                  <c:v>0</c:v>
+                </c:pt>
+                <c:pt idx="1">
+                  <c:v>0</c:v>
+                </c:pt>
+                <c:pt idx="2">
+                  <c:v>0</c:v>
+                </c:pt>
+                <c:pt idx="3">
+                  <c:v>8.4</c:v>
+                </c:pt>
+                <c:pt idx="4">
+                  <c:v>27.2</c:v>
+                </c:pt>
+                <c:pt idx="5">
+                  <c:v>47.2</c:v>
+                </c:pt>
+              </c:numCache>
+            </c:numRef>
+          </c:val>
+        </c:ser>
+        <c:dLbls>
+          <c:numFmt formatCode="0.0;;0" sourceLinked="0"/>
+          <c:txPr>
+            <a:bodyPr/>
+            <a:lstStyle/>
+            <a:p>
+              <a:pPr>
+                <a:defRPr b="1" i="0" strike="noStrike" sz="1200" u="none">
+                  <a:solidFill>
+                    <a:srgbClr val="1A1A1A"/>
+                  </a:solidFill>
+                  <a:latin typeface="+mn-lt"/>
+                </a:defRPr>
+              </a:pPr>
+            </a:p>
+          </c:txPr>
+          <c:showLegendKey val="0"/>
+          <c:showVal val="1"/>
+          <c:showCatName val="0"/>
+          <c:showSerName val="0"/>
+          <c:showPercent val="0"/>
+          <c:showBubbleSize val="0"/>
+          <c:showLeaderLines val="0"/>
+        </c:dLbls>
+        <c:gapWidth val="35"/>
+        <c:overlap val="0"/>
+        <c:axId val="2094734554"/>
+        <c:axId val="2094734552"/>
+        <c:axId val="2094734556"/>
+      </c:barChart>
+      <c:catAx>
+        <c:axId val="2094734554"/>
+        <c:scaling>
+          <c:orientation val="minMax"/>
+        </c:scaling>
+        <c:delete val="0"/>
+        <c:axPos val="b"/>
+        <c:numFmt formatCode="General" sourceLinked="1"/>
+        <c:majorTickMark val="out"/>
+        <c:minorTickMark val="none"/>
+        <c:tickLblPos val="low"/>
+        <c:spPr>
+          <a:ln w="12700" cap="flat">
+            <a:solidFill>
+              <a:srgbClr val="BFBFBF"/>
+            </a:solidFill>
+            <a:prstDash val="solid"/>
+            <a:round/>
+          </a:ln>
+        </c:spPr>
+        <c:txPr>
+          <a:bodyPr/>
+          <a:lstStyle/>
+          <a:p>
+            <a:pPr>
+              <a:defRPr sz="1200" b="0" i="0" u="none" strike="noStrike">
+                <a:solidFill>
+                  <a:srgbClr val="1A1A1A"/>
+                </a:solidFill>
+                <a:latin typeface="+mn-lt"/>
+              </a:defRPr>
+            </a:pPr>
+            <a:endParaRPr lang="en-US"/>
+          </a:p>
+        </c:txPr>
+        <c:crossAx val="2094734552"/>
+        <c:crosses val="autoZero"/>
+        <c:auto val="1"/>
+        <c:lblAlgn val="ctr"/>
+        <c:noMultiLvlLbl val="1"/>
+      </c:catAx>
+      <c:valAx>
+        <c:axId val="2094734552"/>
+        <c:scaling>
+          <c:orientation val="minMax"/>
+          <c:max val="54"/>
+          <c:min val="0"/>
+        </c:scaling>
+        <c:delete val="1"/>
+        <c:axPos val="l"/>
+        <c:numFmt formatCode="General" sourceLinked="0"/>
+        <c:majorTickMark val="out"/>
+        <c:minorTickMark val="none"/>
+        <c:tickLblPos val="nextTo"/>
+        <c:spPr>
+          <a:ln w="12700" cap="flat">
+            <a:solidFill>
+              <a:srgbClr val="888888"/>
+            </a:solidFill>
+            <a:prstDash val="solid"/>
+            <a:round/>
+          </a:ln>
+        </c:spPr>
+        <c:txPr>
+          <a:bodyPr/>
+          <a:lstStyle/>
+          <a:p>
+            <a:pPr>
+              <a:defRPr sz="1200" b="0" i="0" u="none" strike="noStrike">
+                <a:solidFill>
+                  <a:srgbClr val="000000"/>
+                </a:solidFill>
+                <a:latin typeface="Arial"/>
+              </a:defRPr>
+            </a:pPr>
+            <a:endParaRPr lang="en-US"/>
+          </a:p>
+        </c:txPr>
+        <c:crossAx val="2094734554"/>
+        <c:crosses val="autoZero"/>
+        <c:crossBetween val="between"/>
+      </c:valAx>
+      <c:spPr>
+        <a:noFill/>
+        <a:ln>
+          <a:noFill/>
+        </a:ln>
+        <a:effectLst/>
+      </c:spPr>
+    </c:plotArea>
+    <c:plotVisOnly val="1"/>
+    <c:dispBlanksAs val="span"/>
+  </c:chart>
+  <c:spPr>
+    <a:noFill/>
+    <a:ln>
+      <a:noFill/>
+    </a:ln>
+    <a:effectLst/>
+  </c:spPr>
+  <c:externalData r:id="rId1">
+    <c:autoUpdate val="0"/>
+  </c:externalData>
+</c:chartSpace>
+</file>
+
+<file path=ppt/charts/chart21.xml><?xml version="1.0" encoding="utf-8"?>
+<c:chartSpace xmlns:c="http://schemas.openxmlformats.org/drawingml/2006/chart" xmlns:a="http://schemas.openxmlformats.org/drawingml/2006/main" xmlns:r="http://schemas.openxmlformats.org/officeDocument/2006/relationships">
+  <c:date1904 val="0"/>
+  <c:roundedCorners val="1"/>
+  <c:chart>
+    <c:autoTitleDeleted val="1"/>
+    <c:plotArea>
+      <c:layout/>
+      <c:barChart>
+        <c:barDir val="col"/>
+        <c:grouping val="clustered"/>
+        <c:varyColors val="0"/>
+        <c:ser>
+          <c:idx val="0"/>
+          <c:order val="0"/>
+          <c:tx>
+            <c:strRef>
+              <c:f>Sheet1!$B$1</c:f>
+              <c:strCache>
+                <c:ptCount val="1"/>
+                <c:pt idx="0">
+                  <c:v>Before 2029</c:v>
+                </c:pt>
+              </c:strCache>
+            </c:strRef>
+          </c:tx>
+          <c:spPr>
+            <a:solidFill>
+              <a:srgbClr val="B5AEA9"/>
+            </a:solidFill>
+            <a:effectLst/>
+          </c:spPr>
+          <c:invertIfNegative val="0"/>
+          <c:dLbls>
+            <c:numFmt formatCode="0.0" sourceLinked="0"/>
+            <c:txPr>
+              <a:bodyPr/>
+              <a:lstStyle/>
+              <a:p>
+                <a:pPr>
+                  <a:defRPr b="1" i="0" strike="noStrike" sz="1200" u="none">
+                    <a:solidFill>
+                      <a:srgbClr val="1A1A1A"/>
+                    </a:solidFill>
+                    <a:latin typeface="+mn-lt"/>
+                  </a:defRPr>
+                </a:pPr>
+              </a:p>
+            </c:txPr>
+            <c:showLegendKey val="0"/>
+            <c:showVal val="1"/>
+            <c:showCatName val="0"/>
+            <c:showSerName val="0"/>
+            <c:showPercent val="0"/>
+            <c:showBubbleSize val="0"/>
+            <c:showLeaderLines val="0"/>
+          </c:dLbls>
+          <c:cat>
+            <c:multiLvlStrRef>
+              <c:f>Sheet1!$A$2:$A$8</c:f>
+              <c:multiLvlStrCache>
+                <c:ptCount val="7"/>
+                <c:lvl>
+                  <c:pt idx="0">
+                    <c:v>≤2026</c:v>
+                  </c:pt>
+                  <c:pt idx="1">
+                    <c:v>2027</c:v>
+                  </c:pt>
+                  <c:pt idx="2">
+                    <c:v>2028</c:v>
+                  </c:pt>
+                  <c:pt idx="3">
+                    <c:v>2029</c:v>
+                  </c:pt>
+                  <c:pt idx="4">
+                    <c:v>2030</c:v>
+                  </c:pt>
+                  <c:pt idx="5">
+                    <c:v>2031</c:v>
+                  </c:pt>
+                  <c:pt idx="6">
+                    <c:v>2032+</c:v>
+                  </c:pt>
+                </c:lvl>
+              </c:multiLvlStrCache>
+            </c:multiLvlStrRef>
+          </c:cat>
+          <c:val>
+            <c:numRef>
+              <c:f>Sheet1!$B$2:$B$8</c:f>
+              <c:numCache>
+                <c:formatCode>General</c:formatCode>
+                <c:ptCount val="7"/>
+                <c:pt idx="0">
+                  <c:v>1.8</c:v>
+                </c:pt>
+                <c:pt idx="1">
+                  <c:v>5.7</c:v>
+                </c:pt>
+                <c:pt idx="2">
+                  <c:v>3.3</c:v>
+                </c:pt>
+                <c:pt idx="3">
+                  <c:v/>
+                </c:pt>
+                <c:pt idx="4">
+                  <c:v/>
+                </c:pt>
+                <c:pt idx="5">
+                  <c:v/>
+                </c:pt>
+                <c:pt idx="6">
+                  <c:v/>
+                </c:pt>
+              </c:numCache>
+            </c:numRef>
+          </c:val>
+        </c:ser>
+        <c:ser>
+          <c:idx val="1"/>
+          <c:order val="1"/>
+          <c:tx>
+            <c:strRef>
+              <c:f>Sheet1!$C$1</c:f>
+              <c:strCache>
+                <c:ptCount val="1"/>
+                <c:pt idx="0">
+                  <c:v>2029 or later</c:v>
+                </c:pt>
+              </c:strCache>
+            </c:strRef>
+          </c:tx>
+          <c:spPr>
+            <a:solidFill>
+              <a:srgbClr val="0A1C58"/>
+            </a:solidFill>
+            <a:effectLst/>
+          </c:spPr>
+          <c:invertIfNegative val="0"/>
+          <c:dLbls>
+            <c:numFmt formatCode="0.0" sourceLinked="0"/>
+            <c:txPr>
+              <a:bodyPr/>
+              <a:lstStyle/>
+              <a:p>
+                <a:pPr>
+                  <a:defRPr b="1" i="0" strike="noStrike" sz="1200" u="none">
+                    <a:solidFill>
+                      <a:srgbClr val="1A1A1A"/>
+                    </a:solidFill>
+                    <a:latin typeface="+mn-lt"/>
+                  </a:defRPr>
+                </a:pPr>
+              </a:p>
+            </c:txPr>
+            <c:showLegendKey val="0"/>
+            <c:showVal val="1"/>
+            <c:showCatName val="0"/>
+            <c:showSerName val="0"/>
+            <c:showPercent val="0"/>
+            <c:showBubbleSize val="0"/>
+            <c:showLeaderLines val="0"/>
+          </c:dLbls>
+          <c:cat>
+            <c:multiLvlStrRef>
+              <c:f>Sheet1!$A$2:$A$8</c:f>
+              <c:multiLvlStrCache>
+                <c:ptCount val="7"/>
+                <c:lvl>
+                  <c:pt idx="0">
+                    <c:v>≤2026</c:v>
+                  </c:pt>
+                  <c:pt idx="1">
+                    <c:v>2027</c:v>
+                  </c:pt>
+                  <c:pt idx="2">
+                    <c:v>2028</c:v>
+                  </c:pt>
+                  <c:pt idx="3">
+                    <c:v>2029</c:v>
+                  </c:pt>
+                  <c:pt idx="4">
+                    <c:v>2030</c:v>
+                  </c:pt>
+                  <c:pt idx="5">
+                    <c:v>2031</c:v>
+                  </c:pt>
+                  <c:pt idx="6">
+                    <c:v>2032+</c:v>
+                  </c:pt>
+                </c:lvl>
+              </c:multiLvlStrCache>
+            </c:multiLvlStrRef>
+          </c:cat>
+          <c:val>
+            <c:numRef>
+              <c:f>Sheet1!$C$2:$C$8</c:f>
+              <c:numCache>
+                <c:formatCode>General</c:formatCode>
+                <c:ptCount val="7"/>
+                <c:pt idx="0">
+                  <c:v/>
+                </c:pt>
+                <c:pt idx="1">
+                  <c:v/>
+                </c:pt>
+                <c:pt idx="2">
+                  <c:v/>
+                </c:pt>
+                <c:pt idx="3">
+                  <c:v>3.1</c:v>
+                </c:pt>
+                <c:pt idx="4">
+                  <c:v>2.2</c:v>
+                </c:pt>
+                <c:pt idx="5">
+                  <c:v>6.2</c:v>
+                </c:pt>
+                <c:pt idx="6">
+                  <c:v>3</c:v>
+                </c:pt>
+              </c:numCache>
+            </c:numRef>
+          </c:val>
+        </c:ser>
+        <c:dLbls>
+          <c:numFmt formatCode="0.0" sourceLinked="0"/>
+          <c:txPr>
+            <a:bodyPr/>
+            <a:lstStyle/>
+            <a:p>
+              <a:pPr>
+                <a:defRPr b="1" i="0" strike="noStrike" sz="1200" u="none">
+                  <a:solidFill>
+                    <a:srgbClr val="1A1A1A"/>
+                  </a:solidFill>
+                  <a:latin typeface="+mn-lt"/>
+                </a:defRPr>
+              </a:pPr>
+            </a:p>
+          </c:txPr>
+          <c:showLegendKey val="0"/>
+          <c:showVal val="1"/>
+          <c:showCatName val="0"/>
+          <c:showSerName val="0"/>
+          <c:showPercent val="0"/>
+          <c:showBubbleSize val="0"/>
+          <c:showLeaderLines val="0"/>
+        </c:dLbls>
+        <c:gapWidth val="35"/>
+        <c:overlap val="100"/>
+        <c:axId val="2094734554"/>
+        <c:axId val="2094734552"/>
+        <c:axId val="2094734556"/>
+      </c:barChart>
+      <c:catAx>
+        <c:axId val="2094734554"/>
+        <c:scaling>
+          <c:orientation val="minMax"/>
+        </c:scaling>
+        <c:delete val="0"/>
+        <c:axPos val="b"/>
+        <c:numFmt formatCode="General" sourceLinked="1"/>
+        <c:majorTickMark val="out"/>
+        <c:minorTickMark val="none"/>
+        <c:tickLblPos val="low"/>
+        <c:spPr>
+          <a:ln w="12700" cap="flat">
+            <a:solidFill>
+              <a:srgbClr val="BFBFBF"/>
+            </a:solidFill>
+            <a:prstDash val="solid"/>
+            <a:round/>
+          </a:ln>
+        </c:spPr>
+        <c:txPr>
+          <a:bodyPr/>
+          <a:lstStyle/>
+          <a:p>
+            <a:pPr>
+              <a:defRPr sz="1100" b="0" i="0" u="none" strike="noStrike">
+                <a:solidFill>
+                  <a:srgbClr val="1A1A1A"/>
+                </a:solidFill>
+                <a:latin typeface="+mn-lt"/>
+              </a:defRPr>
+            </a:pPr>
+            <a:endParaRPr lang="en-US"/>
+          </a:p>
+        </c:txPr>
+        <c:crossAx val="2094734552"/>
+        <c:crosses val="autoZero"/>
+        <c:auto val="1"/>
+        <c:lblAlgn val="ctr"/>
+        <c:noMultiLvlLbl val="1"/>
+      </c:catAx>
+      <c:valAx>
+        <c:axId val="2094734552"/>
+        <c:scaling>
+          <c:orientation val="minMax"/>
+          <c:max val="7.5"/>
+          <c:min val="0"/>
+        </c:scaling>
+        <c:delete val="1"/>
+        <c:axPos val="l"/>
+        <c:numFmt formatCode="General" sourceLinked="0"/>
+        <c:majorTickMark val="out"/>
+        <c:minorTickMark val="none"/>
+        <c:tickLblPos val="nextTo"/>
+        <c:spPr>
+          <a:ln w="12700" cap="flat">
+            <a:solidFill>
+              <a:srgbClr val="888888"/>
+            </a:solidFill>
+            <a:prstDash val="solid"/>
+            <a:round/>
+          </a:ln>
+        </c:spPr>
+        <c:txPr>
+          <a:bodyPr/>
+          <a:lstStyle/>
+          <a:p>
+            <a:pPr>
+              <a:defRPr sz="1200" b="0" i="0" u="none" strike="noStrike">
+                <a:solidFill>
+                  <a:srgbClr val="000000"/>
+                </a:solidFill>
+                <a:latin typeface="Arial"/>
+              </a:defRPr>
+            </a:pPr>
+            <a:endParaRPr lang="en-US"/>
+          </a:p>
+        </c:txPr>
+        <c:crossAx val="2094734554"/>
+        <c:crosses val="autoZero"/>
+        <c:crossBetween val="between"/>
+      </c:valAx>
+      <c:spPr>
+        <a:noFill/>
+        <a:ln>
+          <a:noFill/>
+        </a:ln>
+        <a:effectLst/>
+      </c:spPr>
+    </c:plotArea>
+    <c:plotVisOnly val="1"/>
+    <c:dispBlanksAs val="span"/>
+  </c:chart>
+  <c:spPr>
+    <a:noFill/>
+    <a:ln>
+      <a:noFill/>
+    </a:ln>
+    <a:effectLst/>
+  </c:spPr>
+  <c:externalData r:id="rId1">
+    <c:autoUpdate val="0"/>
+  </c:externalData>
+</c:chartSpace>
+</file>
+
+<file path=ppt/charts/chart22.xml><?xml version="1.0" encoding="utf-8"?>
+<c:chartSpace xmlns:c="http://schemas.openxmlformats.org/drawingml/2006/chart" xmlns:a="http://schemas.openxmlformats.org/drawingml/2006/main" xmlns:r="http://schemas.openxmlformats.org/officeDocument/2006/relationships">
+  <c:date1904 val="0"/>
+  <c:roundedCorners val="1"/>
+  <c:chart>
+    <c:autoTitleDeleted val="1"/>
+    <c:plotArea>
+      <c:layout/>
+      <c:barChart>
+        <c:barDir val="col"/>
+        <c:grouping val="clustered"/>
+        <c:varyColors val="0"/>
+        <c:ser>
+          <c:idx val="0"/>
+          <c:order val="0"/>
+          <c:tx>
+            <c:strRef>
+              <c:f>Sheet1!$B$1</c:f>
+              <c:strCache>
+                <c:ptCount val="1"/>
+                <c:pt idx="0">
+                  <c:v>Power EBITDA</c:v>
+                </c:pt>
+              </c:strCache>
+            </c:strRef>
+          </c:tx>
+          <c:spPr>
+            <a:solidFill>
+              <a:srgbClr val="0A1C58"/>
+            </a:solidFill>
+            <a:effectLst/>
+          </c:spPr>
+          <c:invertIfNegative val="0"/>
+          <c:dLbls>
+            <c:numFmt formatCode="#,##0" sourceLinked="0"/>
+            <c:txPr>
+              <a:bodyPr/>
+              <a:lstStyle/>
+              <a:p>
+                <a:pPr>
+                  <a:defRPr b="1" i="0" strike="noStrike" sz="1200" u="none">
+                    <a:solidFill>
+                      <a:srgbClr val="1A1A1A"/>
+                    </a:solidFill>
+                    <a:latin typeface="+mn-lt"/>
+                  </a:defRPr>
+                </a:pPr>
+              </a:p>
+            </c:txPr>
+            <c:showLegendKey val="0"/>
+            <c:showVal val="1"/>
+            <c:showCatName val="0"/>
+            <c:showSerName val="0"/>
+            <c:showPercent val="0"/>
+            <c:showBubbleSize val="0"/>
+            <c:showLeaderLines val="0"/>
+          </c:dLbls>
+          <c:cat>
+            <c:multiLvlStrRef>
+              <c:f>Sheet1!$A$2:$A$7</c:f>
+              <c:multiLvlStrCache>
+                <c:ptCount val="6"/>
+                <c:lvl>
+                  <c:pt idx="0">
+                    <c:v>FY26E</c:v>
+                  </c:pt>
+                  <c:pt idx="1">
+                    <c:v>FY27E</c:v>
+                  </c:pt>
+                  <c:pt idx="2">
+                    <c:v>FY28E</c:v>
+                  </c:pt>
+                  <c:pt idx="3">
+                    <c:v>FY29E</c:v>
+                  </c:pt>
+                  <c:pt idx="4">
+                    <c:v>FY30E</c:v>
+                  </c:pt>
+                  <c:pt idx="5">
+                    <c:v>FY31E</c:v>
+                  </c:pt>
+                </c:lvl>
+              </c:multiLvlStrCache>
+            </c:multiLvlStrRef>
+          </c:cat>
+          <c:val>
+            <c:numRef>
+              <c:f>Sheet1!$B$2:$B$7</c:f>
+              <c:numCache>
+                <c:formatCode>General</c:formatCode>
+                <c:ptCount val="6"/>
+                <c:pt idx="0">
+                  <c:v>20</c:v>
+                </c:pt>
+                <c:pt idx="1">
+                  <c:v>450</c:v>
+                </c:pt>
+                <c:pt idx="2">
+                  <c:v>900</c:v>
+                </c:pt>
+                <c:pt idx="3">
+                  <c:v>1100</c:v>
+                </c:pt>
+                <c:pt idx="4">
+                  <c:v>1200</c:v>
+                </c:pt>
+                <c:pt idx="5">
+                  <c:v>1300</c:v>
+                </c:pt>
+              </c:numCache>
+            </c:numRef>
+          </c:val>
+        </c:ser>
+        <c:dLbls>
+          <c:numFmt formatCode="#,##0" sourceLinked="0"/>
+          <c:txPr>
+            <a:bodyPr/>
+            <a:lstStyle/>
+            <a:p>
+              <a:pPr>
+                <a:defRPr b="1" i="0" strike="noStrike" sz="1200" u="none">
+                  <a:solidFill>
+                    <a:srgbClr val="1A1A1A"/>
+                  </a:solidFill>
+                  <a:latin typeface="+mn-lt"/>
+                </a:defRPr>
+              </a:pPr>
+            </a:p>
+          </c:txPr>
+          <c:showLegendKey val="0"/>
+          <c:showVal val="1"/>
+          <c:showCatName val="0"/>
+          <c:showSerName val="0"/>
+          <c:showPercent val="0"/>
+          <c:showBubbleSize val="0"/>
+          <c:showLeaderLines val="0"/>
+        </c:dLbls>
+        <c:gapWidth val="35"/>
+        <c:overlap val="0"/>
+        <c:axId val="2094734554"/>
+        <c:axId val="2094734552"/>
+        <c:axId val="2094734556"/>
+      </c:barChart>
+      <c:catAx>
+        <c:axId val="2094734554"/>
+        <c:scaling>
+          <c:orientation val="minMax"/>
+        </c:scaling>
+        <c:delete val="0"/>
+        <c:axPos val="b"/>
+        <c:numFmt formatCode="General" sourceLinked="1"/>
+        <c:majorTickMark val="out"/>
+        <c:minorTickMark val="none"/>
+        <c:tickLblPos val="low"/>
+        <c:spPr>
+          <a:ln w="12700" cap="flat">
+            <a:solidFill>
+              <a:srgbClr val="BFBFBF"/>
+            </a:solidFill>
+            <a:prstDash val="solid"/>
+            <a:round/>
+          </a:ln>
+        </c:spPr>
+        <c:txPr>
+          <a:bodyPr/>
+          <a:lstStyle/>
+          <a:p>
+            <a:pPr>
+              <a:defRPr sz="1000" b="0" i="0" u="none" strike="noStrike">
+                <a:solidFill>
+                  <a:srgbClr val="1A1A1A"/>
+                </a:solidFill>
+                <a:latin typeface="+mn-lt"/>
+              </a:defRPr>
+            </a:pPr>
+            <a:endParaRPr lang="en-US"/>
+          </a:p>
+        </c:txPr>
+        <c:crossAx val="2094734552"/>
+        <c:crosses val="autoZero"/>
+        <c:auto val="1"/>
+        <c:lblAlgn val="ctr"/>
+        <c:noMultiLvlLbl val="1"/>
+      </c:catAx>
+      <c:valAx>
+        <c:axId val="2094734552"/>
+        <c:scaling>
+          <c:orientation val="minMax"/>
+          <c:max val="1500"/>
           <c:min val="0"/>
         </c:scaling>
         <c:delete val="1"/>
@@ -7846,6 +9092,358 @@
 </p:notes>
 </file>
 
+<file path=ppt/notesSlides/notesSlide20.xml><?xml version="1.0" encoding="utf-8"?>
+<p:notes xmlns:a="http://schemas.openxmlformats.org/drawingml/2006/main" xmlns:r="http://schemas.openxmlformats.org/officeDocument/2006/relationships" xmlns:p="http://schemas.openxmlformats.org/presentationml/2006/main">
+  <p:cSld>
+    <p:spTree>
+      <p:nvGrpSpPr>
+        <p:cNvPr id="1" name=""/>
+        <p:cNvGrpSpPr/>
+        <p:nvPr/>
+      </p:nvGrpSpPr>
+      <p:grpSpPr>
+        <a:xfrm>
+          <a:off x="0" y="0"/>
+          <a:ext cx="0" cy="0"/>
+          <a:chOff x="0" y="0"/>
+          <a:chExt cx="0" cy="0"/>
+        </a:xfrm>
+      </p:grpSpPr>
+      <p:sp>
+        <p:nvSpPr>
+          <p:cNvPr id="2" name="Slide Image Placeholder 1"/>
+          <p:cNvSpPr>
+            <a:spLocks noGrp="1" noRot="1" noChangeAspect="1"/>
+          </p:cNvSpPr>
+          <p:nvPr>
+            <p:ph type="sldImg"/>
+          </p:nvPr>
+        </p:nvSpPr>
+        <p:spPr/>
+      </p:sp>
+      <p:sp>
+        <p:nvSpPr>
+          <p:cNvPr id="3" name="Notes Placeholder 2"/>
+          <p:cNvSpPr>
+            <a:spLocks noGrp="1"/>
+          </p:cNvSpPr>
+          <p:nvPr>
+            <p:ph type="body" idx="1"/>
+          </p:nvPr>
+        </p:nvSpPr>
+        <p:spPr/>
+        <p:txBody>
+          <a:bodyPr/>
+          <a:lstStyle/>
+          <a:p>
+            <a:r>
+              <a:rPr lang="en-US" dirty="0"/>
+              <a:t>Big Four cash capex: $69B (2019) → $376B (2025); 2026 guidance midpoints sum to ~$733B. Reserve shortfall = required capacity (NERC demand × reserve margin) minus anticipated capacity and contracted additions, summed across NERC regions: 8.4 GW in 2029 (PJM), 27.2 GW in 2030 (PJM, MISO), 47.2 GW in 2031. US data center energy demand rises from ~298 TWh (2026) to ~649 TWh (2030).</a:t>
+            </a:r>
+            <a:endParaRPr lang="en-US" dirty="0"/>
+          </a:p>
+        </p:txBody>
+      </p:sp>
+      <p:sp>
+        <p:nvSpPr>
+          <p:cNvPr id="4" name="Slide Number Placeholder 3"/>
+          <p:cNvSpPr>
+            <a:spLocks noGrp="1"/>
+          </p:cNvSpPr>
+          <p:nvPr>
+            <p:ph type="sldNum" sz="quarter" idx="10"/>
+          </p:nvPr>
+        </p:nvSpPr>
+        <p:spPr/>
+        <p:txBody>
+          <a:bodyPr/>
+          <a:lstStyle/>
+          <a:p>
+            <a:fld id="{F7021451-1387-4CA6-816F-3879F97B5CBC}" type="slidenum">
+              <a:rPr lang="en-US"/>
+              <a:t>20</a:t>
+            </a:fld>
+            <a:endParaRPr lang="en-US"/>
+          </a:p>
+        </p:txBody>
+      </p:sp>
+    </p:spTree>
+    <p:extLst>
+      <p:ext uri="{BB962C8B-B14F-4D97-AF65-F5344CB8AC3E}">
+        <p14:creationId xmlns:p14="http://schemas.microsoft.com/office/powerpoint/2010/main" val="1024086991"/>
+      </p:ext>
+    </p:extLst>
+  </p:cSld>
+  <p:clrMapOvr>
+    <a:masterClrMapping/>
+  </p:clrMapOvr>
+</p:notes>
+</file>
+
+<file path=ppt/notesSlides/notesSlide21.xml><?xml version="1.0" encoding="utf-8"?>
+<p:notes xmlns:a="http://schemas.openxmlformats.org/drawingml/2006/main" xmlns:r="http://schemas.openxmlformats.org/officeDocument/2006/relationships" xmlns:p="http://schemas.openxmlformats.org/presentationml/2006/main">
+  <p:cSld>
+    <p:spTree>
+      <p:nvGrpSpPr>
+        <p:cNvPr id="1" name=""/>
+        <p:cNvGrpSpPr/>
+        <p:nvPr/>
+      </p:nvGrpSpPr>
+      <p:grpSpPr>
+        <a:xfrm>
+          <a:off x="0" y="0"/>
+          <a:ext cx="0" cy="0"/>
+          <a:chOff x="0" y="0"/>
+          <a:chExt cx="0" cy="0"/>
+        </a:xfrm>
+      </p:grpSpPr>
+      <p:sp>
+        <p:nvSpPr>
+          <p:cNvPr id="2" name="Slide Image Placeholder 1"/>
+          <p:cNvSpPr>
+            <a:spLocks noGrp="1" noRot="1" noChangeAspect="1"/>
+          </p:cNvSpPr>
+          <p:nvPr>
+            <p:ph type="sldImg"/>
+          </p:nvPr>
+        </p:nvSpPr>
+        <p:spPr/>
+      </p:sp>
+      <p:sp>
+        <p:nvSpPr>
+          <p:cNvPr id="3" name="Notes Placeholder 2"/>
+          <p:cNvSpPr>
+            <a:spLocks noGrp="1"/>
+          </p:cNvSpPr>
+          <p:nvPr>
+            <p:ph type="body" idx="1"/>
+          </p:nvPr>
+        </p:nvSpPr>
+        <p:spPr/>
+        <p:txBody>
+          <a:bodyPr/>
+          <a:lstStyle/>
+          <a:p>
+            <a:r>
+              <a:rPr lang="en-US" dirty="0"/>
+              <a:t>Power agreements tab: 45 included hyperscaler deals with ~25.3 GW of new or restarted capacity. By full commercial operation date: ≤2026 1.8 GW, 2027 5.7 GW, 2028 3.3 GW, 2029 3.1 GW, 2030 2.2 GW, 2031 6.2 GW, 2032+ 3.0 GW. 57% is fully online in 2029 or later (38% by first COD). Existing-plant offtake deals (no new MW) are excluded.</a:t>
+            </a:r>
+            <a:endParaRPr lang="en-US" dirty="0"/>
+          </a:p>
+        </p:txBody>
+      </p:sp>
+      <p:sp>
+        <p:nvSpPr>
+          <p:cNvPr id="4" name="Slide Number Placeholder 3"/>
+          <p:cNvSpPr>
+            <a:spLocks noGrp="1"/>
+          </p:cNvSpPr>
+          <p:nvPr>
+            <p:ph type="sldNum" sz="quarter" idx="10"/>
+          </p:nvPr>
+        </p:nvSpPr>
+        <p:spPr/>
+        <p:txBody>
+          <a:bodyPr/>
+          <a:lstStyle/>
+          <a:p>
+            <a:fld id="{F7021451-1387-4CA6-816F-3879F97B5CBC}" type="slidenum">
+              <a:rPr lang="en-US"/>
+              <a:t>21</a:t>
+            </a:fld>
+            <a:endParaRPr lang="en-US"/>
+          </a:p>
+        </p:txBody>
+      </p:sp>
+    </p:spTree>
+    <p:extLst>
+      <p:ext uri="{BB962C8B-B14F-4D97-AF65-F5344CB8AC3E}">
+        <p14:creationId xmlns:p14="http://schemas.microsoft.com/office/powerpoint/2010/main" val="1024086991"/>
+      </p:ext>
+    </p:extLst>
+  </p:cSld>
+  <p:clrMapOvr>
+    <a:masterClrMapping/>
+  </p:clrMapOvr>
+</p:notes>
+</file>
+
+<file path=ppt/notesSlides/notesSlide22.xml><?xml version="1.0" encoding="utf-8"?>
+<p:notes xmlns:a="http://schemas.openxmlformats.org/drawingml/2006/main" xmlns:r="http://schemas.openxmlformats.org/officeDocument/2006/relationships" xmlns:p="http://schemas.openxmlformats.org/presentationml/2006/main">
+  <p:cSld>
+    <p:spTree>
+      <p:nvGrpSpPr>
+        <p:cNvPr id="1" name=""/>
+        <p:cNvGrpSpPr/>
+        <p:nvPr/>
+      </p:nvGrpSpPr>
+      <p:grpSpPr>
+        <a:xfrm>
+          <a:off x="0" y="0"/>
+          <a:ext cx="0" cy="0"/>
+          <a:chOff x="0" y="0"/>
+          <a:chExt cx="0" cy="0"/>
+        </a:xfrm>
+      </p:grpSpPr>
+      <p:sp>
+        <p:nvSpPr>
+          <p:cNvPr id="2" name="Slide Image Placeholder 1"/>
+          <p:cNvSpPr>
+            <a:spLocks noGrp="1" noRot="1" noChangeAspect="1"/>
+          </p:cNvSpPr>
+          <p:nvPr>
+            <p:ph type="sldImg"/>
+          </p:nvPr>
+        </p:nvSpPr>
+        <p:spPr/>
+      </p:sp>
+      <p:sp>
+        <p:nvSpPr>
+          <p:cNvPr id="3" name="Notes Placeholder 2"/>
+          <p:cNvSpPr>
+            <a:spLocks noGrp="1"/>
+          </p:cNvSpPr>
+          <p:nvPr>
+            <p:ph type="body" idx="1"/>
+          </p:nvPr>
+        </p:nvSpPr>
+        <p:spPr/>
+        <p:txBody>
+          <a:bodyPr/>
+          <a:lstStyle/>
+          <a:p>
+            <a:r>
+              <a:rPr lang="en-US" dirty="0"/>
+              <a:t>Build cost: GPS model assumes ~$12M per MW of data center facility spend, so 100 MW ≈ $1.2B before GPUs; FTAI's contract implies ~$1M per MW, so four 25 MW Mod-1 units ≈ $100M (~8%). Lead times: GE Vernova's large gas turbine order book is full until 2029 with orders out to 2031 (CNBC, Jun-26); new aeroderivative orders are being slotted for 2028–2030 (Tom's Hardware, Oct-25). FTAI guided first Mod-1 deliveries to Q4'26, later saying it is prudent to expect deliveries in 2027.</a:t>
+            </a:r>
+            <a:endParaRPr lang="en-US" dirty="0"/>
+          </a:p>
+        </p:txBody>
+      </p:sp>
+      <p:sp>
+        <p:nvSpPr>
+          <p:cNvPr id="4" name="Slide Number Placeholder 3"/>
+          <p:cNvSpPr>
+            <a:spLocks noGrp="1"/>
+          </p:cNvSpPr>
+          <p:nvPr>
+            <p:ph type="sldNum" sz="quarter" idx="10"/>
+          </p:nvPr>
+        </p:nvSpPr>
+        <p:spPr/>
+        <p:txBody>
+          <a:bodyPr/>
+          <a:lstStyle/>
+          <a:p>
+            <a:fld id="{F7021451-1387-4CA6-816F-3879F97B5CBC}" type="slidenum">
+              <a:rPr lang="en-US"/>
+              <a:t>22</a:t>
+            </a:fld>
+            <a:endParaRPr lang="en-US"/>
+          </a:p>
+        </p:txBody>
+      </p:sp>
+    </p:spTree>
+    <p:extLst>
+      <p:ext uri="{BB962C8B-B14F-4D97-AF65-F5344CB8AC3E}">
+        <p14:creationId xmlns:p14="http://schemas.microsoft.com/office/powerpoint/2010/main" val="1024086991"/>
+      </p:ext>
+    </p:extLst>
+  </p:cSld>
+  <p:clrMapOvr>
+    <a:masterClrMapping/>
+  </p:clrMapOvr>
+</p:notes>
+</file>
+
+<file path=ppt/notesSlides/notesSlide23.xml><?xml version="1.0" encoding="utf-8"?>
+<p:notes xmlns:a="http://schemas.openxmlformats.org/drawingml/2006/main" xmlns:r="http://schemas.openxmlformats.org/officeDocument/2006/relationships" xmlns:p="http://schemas.openxmlformats.org/presentationml/2006/main">
+  <p:cSld>
+    <p:spTree>
+      <p:nvGrpSpPr>
+        <p:cNvPr id="1" name=""/>
+        <p:cNvGrpSpPr/>
+        <p:nvPr/>
+      </p:nvGrpSpPr>
+      <p:grpSpPr>
+        <a:xfrm>
+          <a:off x="0" y="0"/>
+          <a:ext cx="0" cy="0"/>
+          <a:chOff x="0" y="0"/>
+          <a:chExt cx="0" cy="0"/>
+        </a:xfrm>
+      </p:grpSpPr>
+      <p:sp>
+        <p:nvSpPr>
+          <p:cNvPr id="2" name="Slide Image Placeholder 1"/>
+          <p:cNvSpPr>
+            <a:spLocks noGrp="1" noRot="1" noChangeAspect="1"/>
+          </p:cNvSpPr>
+          <p:nvPr>
+            <p:ph type="sldImg"/>
+          </p:nvPr>
+        </p:nvSpPr>
+        <p:spPr/>
+      </p:sp>
+      <p:sp>
+        <p:nvSpPr>
+          <p:cNvPr id="3" name="Notes Placeholder 2"/>
+          <p:cNvSpPr>
+            <a:spLocks noGrp="1"/>
+          </p:cNvSpPr>
+          <p:nvPr>
+            <p:ph type="body" idx="1"/>
+          </p:nvPr>
+        </p:nvSpPr>
+        <p:spPr/>
+        <p:txBody>
+          <a:bodyPr/>
+          <a:lstStyle/>
+          <a:p>
+            <a:r>
+              <a:rPr lang="en-US" dirty="0"/>
+              <a:t>Competitor cancellation is from GPS diligence: a competitor offering a similar aeroderivative product had its hyperscaler deal cancelled, with a later delivery date than FTAI's. Name and source to be added before presenting. FTAI's $1.465B order through the J&amp;F JV remains in place. Power EBITDA: units delivered 2 (FY26E), 45, 90, 110, 120, 130 × 25 MW × $1M/MW × 40% margin. Low-end FY27E guide $450M × 12x = ~$52/share in the SOTP.</a:t>
+            </a:r>
+            <a:endParaRPr lang="en-US" dirty="0"/>
+          </a:p>
+        </p:txBody>
+      </p:sp>
+      <p:sp>
+        <p:nvSpPr>
+          <p:cNvPr id="4" name="Slide Number Placeholder 3"/>
+          <p:cNvSpPr>
+            <a:spLocks noGrp="1"/>
+          </p:cNvSpPr>
+          <p:nvPr>
+            <p:ph type="sldNum" sz="quarter" idx="10"/>
+          </p:nvPr>
+        </p:nvSpPr>
+        <p:spPr/>
+        <p:txBody>
+          <a:bodyPr/>
+          <a:lstStyle/>
+          <a:p>
+            <a:fld id="{F7021451-1387-4CA6-816F-3879F97B5CBC}" type="slidenum">
+              <a:rPr lang="en-US"/>
+              <a:t>23</a:t>
+            </a:fld>
+            <a:endParaRPr lang="en-US"/>
+          </a:p>
+        </p:txBody>
+      </p:sp>
+    </p:spTree>
+    <p:extLst>
+      <p:ext uri="{BB962C8B-B14F-4D97-AF65-F5344CB8AC3E}">
+        <p14:creationId xmlns:p14="http://schemas.microsoft.com/office/powerpoint/2010/main" val="1024086991"/>
+      </p:ext>
+    </p:extLst>
+  </p:cSld>
+  <p:clrMapOvr>
+    <a:masterClrMapping/>
+  </p:clrMapOvr>
+</p:notes>
+</file>
+
 <file path=ppt/notesSlides/notesSlide3.xml><?xml version="1.0" encoding="utf-8"?>
 <p:notes xmlns:a="http://schemas.openxmlformats.org/drawingml/2006/main" xmlns:r="http://schemas.openxmlformats.org/officeDocument/2006/relationships" xmlns:p="http://schemas.openxmlformats.org/presentationml/2006/main">
   <p:cSld>
@@ -17627,6 +19225,2743 @@
             <a:fld id="{F7021451-1387-4CA6-816F-3879F97B5CBC}" type="slidenum">
               <a:rPr b="1" lang="en-US"/>
               <a:t>2</a:t>
+            </a:fld>
+            <a:endParaRPr lang="en-US"/>
+          </a:p>
+        </p:txBody>
+      </p:sp>
+    </p:spTree>
+  </p:cSld>
+  <p:clrMapOvr>
+    <a:masterClrMapping/>
+  </p:clrMapOvr>
+</p:sld>
+</file>
+
+<file path=ppt/slides/slide20.xml><?xml version="1.0" encoding="utf-8"?>
+<p:sld xmlns:a="http://schemas.openxmlformats.org/drawingml/2006/main" xmlns:r="http://schemas.openxmlformats.org/officeDocument/2006/relationships" xmlns:p="http://schemas.openxmlformats.org/presentationml/2006/main">
+  <p:cSld name="Slide 20">
+    <p:spTree>
+      <p:nvGrpSpPr>
+        <p:cNvPr id="1" name=""/>
+        <p:cNvGrpSpPr/>
+        <p:nvPr/>
+      </p:nvGrpSpPr>
+      <p:grpSpPr>
+        <a:xfrm>
+          <a:off x="0" y="0"/>
+          <a:ext cx="0" cy="0"/>
+          <a:chOff x="0" y="0"/>
+          <a:chExt cx="0" cy="0"/>
+        </a:xfrm>
+      </p:grpSpPr>
+      <p:sp>
+        <p:nvSpPr>
+          <p:cNvPr id="2" name="Text 1"/>
+          <p:cNvSpPr/>
+          <p:nvPr>
+            <p:ph idx="102" type="title" hasCustomPrompt="1"/>
+          </p:nvPr>
+        </p:nvSpPr>
+        <p:spPr>
+          <a:xfrm>
+            <a:off x="320040" y="182880"/>
+            <a:ext cx="8503920" cy="640080"/>
+          </a:xfrm>
+          <a:prstGeom prst="rect">
+            <a:avLst/>
+          </a:prstGeom>
+          <a:noFill/>
+          <a:ln/>
+        </p:spPr>
+        <p:txBody>
+          <a:bodyPr wrap="square" lIns="0" tIns="0" rIns="0" bIns="0" rtlCol="0" anchor="ctr"/>
+          <a:lstStyle/>
+          <a:p>
+            <a:pPr algn="l" indent="0" marL="0">
+              <a:buNone/>
+            </a:pPr>
+            <a:r>
+              <a:rPr lang="en-US" sz="3200" b="1" dirty="0">
+                <a:solidFill>
+                  <a:schemeClr val="tx2"/>
+                </a:solidFill>
+              </a:rPr>
+              <a:t>Thesis 2: Power (1/4)</a:t>
+            </a:r>
+            <a:endParaRPr lang="en-US" sz="3200" dirty="0"/>
+          </a:p>
+        </p:txBody>
+      </p:sp>
+      <p:sp>
+        <p:nvSpPr>
+          <p:cNvPr id="3" name="Text 1"/>
+          <p:cNvSpPr/>
+          <p:nvPr>
+            <p:ph idx="103" type="body" hasCustomPrompt="1"/>
+          </p:nvPr>
+        </p:nvSpPr>
+        <p:spPr>
+          <a:xfrm>
+            <a:off x="320040" y="932688"/>
+            <a:ext cx="8503920" cy="566928"/>
+          </a:xfrm>
+          <a:prstGeom prst="rect">
+            <a:avLst/>
+          </a:prstGeom>
+          <a:noFill/>
+          <a:ln/>
+        </p:spPr>
+        <p:txBody>
+          <a:bodyPr wrap="square" lIns="0" tIns="0" rIns="0" bIns="0" rtlCol="0" anchor="t"/>
+          <a:lstStyle/>
+          <a:p>
+            <a:pPr algn="l" indent="0" marL="0">
+              <a:buNone/>
+            </a:pPr>
+            <a:r>
+              <a:rPr lang="en-US" sz="1700" b="1" dirty="0">
+                <a:solidFill>
+                  <a:schemeClr val="tx2"/>
+                </a:solidFill>
+              </a:rPr>
+              <a:t>AI spending is exploding, and our model shows the grid falling short from 2029.</a:t>
+            </a:r>
+            <a:endParaRPr lang="en-US" sz="1700" dirty="0"/>
+          </a:p>
+        </p:txBody>
+      </p:sp>
+      <p:sp>
+        <p:nvSpPr>
+          <p:cNvPr id="4" name="Capex header"/>
+          <p:cNvSpPr txBox="1"/>
+          <p:nvPr/>
+        </p:nvSpPr>
+        <p:spPr>
+          <a:xfrm>
+            <a:off x="320040" y="1554480"/>
+            <a:ext cx="4206240" cy="365760"/>
+          </a:xfrm>
+          <a:prstGeom prst="rect">
+            <a:avLst/>
+          </a:prstGeom>
+          <a:noFill/>
+          <a:ln/>
+        </p:spPr>
+        <p:txBody>
+          <a:bodyPr wrap="square" lIns="0" tIns="0" rIns="0" bIns="0" rtlCol="0" anchor="b"/>
+          <a:lstStyle/>
+          <a:p>
+            <a:pPr algn="ctr" indent="0" marL="0">
+              <a:buNone/>
+            </a:pPr>
+            <a:r>
+              <a:rPr lang="en-US" sz="1600" b="1" dirty="0">
+                <a:solidFill>
+                  <a:srgbClr val="1A1A1A"/>
+                </a:solidFill>
+              </a:rPr>
+              <a:t>Big Four Hyperscaler Capex ($B)</a:t>
+            </a:r>
+            <a:endParaRPr lang="en-US" sz="1600" dirty="0"/>
+          </a:p>
+        </p:txBody>
+      </p:sp>
+      <p:sp>
+        <p:nvSpPr>
+          <p:cNvPr id="5" name="Capex header rule"/>
+          <p:cNvSpPr/>
+          <p:nvPr/>
+        </p:nvSpPr>
+        <p:spPr>
+          <a:xfrm>
+            <a:off x="320040" y="1975104"/>
+            <a:ext cx="4206240" cy="0"/>
+          </a:xfrm>
+          <a:prstGeom prst="line">
+            <a:avLst/>
+          </a:prstGeom>
+          <a:noFill/>
+          <a:ln w="12700">
+            <a:solidFill>
+              <a:srgbClr val="1A1A1A"/>
+            </a:solidFill>
+            <a:prstDash val="solid"/>
+          </a:ln>
+        </p:spPr>
+      </p:sp>
+      <p:graphicFrame>
+        <p:nvGraphicFramePr>
+          <p:cNvPr id="6" name="Capex chart" descr=""/>
+          <p:cNvGraphicFramePr/>
+          <p:nvPr/>
+        </p:nvGraphicFramePr>
+        <p:xfrm>
+          <a:off x="320040" y="2103120"/>
+          <a:ext cx="4206240" cy="3200400"/>
+        </p:xfrm>
+        <a:graphic xmlns:a="http://schemas.openxmlformats.org/drawingml/2006/main">
+          <a:graphicData uri="http://schemas.openxmlformats.org/drawingml/2006/chart">
+            <c:chart xmlns:c="http://schemas.openxmlformats.org/drawingml/2006/chart" r:id="rId1"/>
+          </a:graphicData>
+        </a:graphic>
+      </p:graphicFrame>
+      <p:sp>
+        <p:nvSpPr>
+          <p:cNvPr id="7" name="Shortfall header"/>
+          <p:cNvSpPr txBox="1"/>
+          <p:nvPr/>
+        </p:nvSpPr>
+        <p:spPr>
+          <a:xfrm>
+            <a:off x="4892040" y="1554480"/>
+            <a:ext cx="3931920" cy="365760"/>
+          </a:xfrm>
+          <a:prstGeom prst="rect">
+            <a:avLst/>
+          </a:prstGeom>
+          <a:noFill/>
+          <a:ln/>
+        </p:spPr>
+        <p:txBody>
+          <a:bodyPr wrap="square" lIns="0" tIns="0" rIns="0" bIns="0" rtlCol="0" anchor="b"/>
+          <a:lstStyle/>
+          <a:p>
+            <a:pPr algn="ctr" indent="0" marL="0">
+              <a:buNone/>
+            </a:pPr>
+            <a:r>
+              <a:rPr lang="en-US" sz="1600" b="1" dirty="0">
+                <a:solidFill>
+                  <a:srgbClr val="1A1A1A"/>
+                </a:solidFill>
+              </a:rPr>
+              <a:t>U.S. Power Reserve Shortfall (GW)</a:t>
+            </a:r>
+            <a:endParaRPr lang="en-US" sz="1600" dirty="0"/>
+          </a:p>
+        </p:txBody>
+      </p:sp>
+      <p:sp>
+        <p:nvSpPr>
+          <p:cNvPr id="8" name="Shortfall header rule"/>
+          <p:cNvSpPr/>
+          <p:nvPr/>
+        </p:nvSpPr>
+        <p:spPr>
+          <a:xfrm>
+            <a:off x="4892040" y="1975104"/>
+            <a:ext cx="3931920" cy="0"/>
+          </a:xfrm>
+          <a:prstGeom prst="line">
+            <a:avLst/>
+          </a:prstGeom>
+          <a:noFill/>
+          <a:ln w="12700">
+            <a:solidFill>
+              <a:srgbClr val="1A1A1A"/>
+            </a:solidFill>
+            <a:prstDash val="solid"/>
+          </a:ln>
+        </p:spPr>
+      </p:sp>
+      <p:graphicFrame>
+        <p:nvGraphicFramePr>
+          <p:cNvPr id="9" name="Shortfall chart" descr=""/>
+          <p:cNvGraphicFramePr/>
+          <p:nvPr/>
+        </p:nvGraphicFramePr>
+        <p:xfrm>
+          <a:off x="4892040" y="2103120"/>
+          <a:ext cx="3931920" cy="2926080"/>
+        </p:xfrm>
+        <a:graphic xmlns:a="http://schemas.openxmlformats.org/drawingml/2006/main">
+          <a:graphicData uri="http://schemas.openxmlformats.org/drawingml/2006/chart">
+            <c:chart xmlns:c="http://schemas.openxmlformats.org/drawingml/2006/chart" r:id="rId2"/>
+          </a:graphicData>
+        </a:graphic>
+      </p:graphicFrame>
+      <p:sp>
+        <p:nvSpPr>
+          <p:cNvPr id="10" name="Shortfall caption"/>
+          <p:cNvSpPr txBox="1"/>
+          <p:nvPr/>
+        </p:nvSpPr>
+        <p:spPr>
+          <a:xfrm>
+            <a:off x="4892040" y="5029200"/>
+            <a:ext cx="3931920" cy="274320"/>
+          </a:xfrm>
+          <a:prstGeom prst="rect">
+            <a:avLst/>
+          </a:prstGeom>
+          <a:noFill/>
+          <a:ln/>
+        </p:spPr>
+        <p:txBody>
+          <a:bodyPr wrap="square" lIns="0" tIns="0" rIns="0" bIns="0" rtlCol="0" anchor="ctr"/>
+          <a:lstStyle/>
+          <a:p>
+            <a:pPr algn="ctr" indent="0" marL="0">
+              <a:buNone/>
+            </a:pPr>
+            <a:r>
+              <a:rPr lang="en-US" sz="1000" i="1" dirty="0">
+                <a:solidFill>
+                  <a:schemeClr val="accent2"/>
+                </a:solidFill>
+              </a:rPr>
+              <a:t>Capacity below required reserve margin, NERC regions (GPS model)</a:t>
+            </a:r>
+            <a:endParaRPr lang="en-US" sz="1000" dirty="0"/>
+          </a:p>
+        </p:txBody>
+      </p:sp>
+      <p:sp>
+        <p:nvSpPr>
+          <p:cNvPr id="11" name="Takeaway"/>
+          <p:cNvSpPr txBox="1"/>
+          <p:nvPr/>
+        </p:nvSpPr>
+        <p:spPr>
+          <a:xfrm>
+            <a:off x="320040" y="5504688"/>
+            <a:ext cx="8503920" cy="566928"/>
+          </a:xfrm>
+          <a:prstGeom prst="rect">
+            <a:avLst/>
+          </a:prstGeom>
+          <a:solidFill>
+            <a:srgbClr val="0A1C58"/>
+          </a:solidFill>
+          <a:ln/>
+        </p:spPr>
+        <p:txBody>
+          <a:bodyPr wrap="square" lIns="101600" tIns="25400" rIns="101600" bIns="25400" rtlCol="0" anchor="ctr"/>
+          <a:lstStyle/>
+          <a:p>
+            <a:pPr algn="ctr" indent="0" marL="0">
+              <a:buNone/>
+            </a:pPr>
+            <a:r>
+              <a:rPr lang="en-US" sz="1700" b="1" dirty="0">
+                <a:solidFill>
+                  <a:schemeClr val="bg1"/>
+                </a:solidFill>
+              </a:rPr>
+              <a:t>Hyperscalers will spend ~$730B this year, but there won't be enough power to run it.</a:t>
+            </a:r>
+            <a:endParaRPr lang="en-US" sz="1700" dirty="0"/>
+          </a:p>
+        </p:txBody>
+      </p:sp>
+      <p:sp>
+        <p:nvSpPr>
+          <p:cNvPr id="12" name="Source"/>
+          <p:cNvSpPr txBox="1"/>
+          <p:nvPr/>
+        </p:nvSpPr>
+        <p:spPr>
+          <a:xfrm>
+            <a:off x="320040" y="6355080"/>
+            <a:ext cx="7132320" cy="274320"/>
+          </a:xfrm>
+          <a:prstGeom prst="rect">
+            <a:avLst/>
+          </a:prstGeom>
+          <a:noFill/>
+          <a:ln/>
+        </p:spPr>
+        <p:txBody>
+          <a:bodyPr wrap="square" lIns="0" tIns="0" rIns="0" bIns="0" rtlCol="0" anchor="ctr"/>
+          <a:lstStyle/>
+          <a:p>
+            <a:pPr indent="0" marL="0">
+              <a:buNone/>
+            </a:pPr>
+            <a:r>
+              <a:rPr lang="en-US" sz="1100" b="1" dirty="0">
+                <a:solidFill>
+                  <a:srgbClr val="1A1A1A"/>
+                </a:solidFill>
+              </a:rPr>
+              <a:t>Source: </a:t>
+            </a:r>
+            <a:pPr indent="0" marL="0">
+              <a:buNone/>
+            </a:pPr>
+            <a:r>
+              <a:rPr lang="en-US" sz="1100" dirty="0">
+                <a:solidFill>
+                  <a:srgbClr val="1A1A1A"/>
+                </a:solidFill>
+              </a:rPr>
+              <a:t>Company filings and 2026 guidance (Amazon, Alphabet, Meta, Microsoft); NERC; GPS model (Power outlook, Regional model tabs)</a:t>
+            </a:r>
+            <a:endParaRPr lang="en-US" sz="1100" dirty="0"/>
+          </a:p>
+        </p:txBody>
+      </p:sp>
+      <p:sp>
+        <p:nvSpPr>
+          <p:cNvPr id="25" name="Slide Number Placeholder 0"/>
+          <p:cNvSpPr>
+            <a:spLocks noGrp="1"/>
+          </p:cNvSpPr>
+          <p:nvPr>
+            <p:ph type="sldNum" sz="quarter" idx="4294967295"/>
+          </p:nvPr>
+        </p:nvSpPr>
+        <p:spPr>
+          <a:xfrm>
+            <a:off x="7635240" y="6327648"/>
+            <a:ext cx="411480" cy="274320"/>
+          </a:xfrm>
+          <a:prstGeom prst="rect">
+            <a:avLst/>
+          </a:prstGeom>
+          <a:extLst>
+            <a:ext uri="{C572A759-6A51-4108-AA02-DFA0A04FC94B}">
+              <ma14:wrappingTextBoxFlag xmlns:ma14="http://schemas.microsoft.com/office/mac/drawingml/2011/main" val="0"/>
+            </a:ext>
+          </a:extLst>
+        </p:spPr>
+        <p:txBody>
+          <a:bodyPr/>
+          <a:lstStyle>
+            <a:lvl1pPr>
+              <a:defRPr sz="1100">
+                <a:solidFill>
+                  <a:srgbClr val="1A1A1A"/>
+                </a:solidFill>
+              </a:defRPr>
+            </a:lvl1pPr>
+          </a:lstStyle>
+          <a:p>
+            <a:pPr algn="r"/>
+            <a:fld id="{F7021451-1387-4CA6-816F-3879F97B5CBC}" type="slidenum">
+              <a:rPr b="1" lang="en-US"/>
+              <a:t>20</a:t>
+            </a:fld>
+            <a:endParaRPr lang="en-US"/>
+          </a:p>
+        </p:txBody>
+      </p:sp>
+    </p:spTree>
+  </p:cSld>
+  <p:clrMapOvr>
+    <a:masterClrMapping/>
+  </p:clrMapOvr>
+</p:sld>
+</file>
+
+<file path=ppt/slides/slide21.xml><?xml version="1.0" encoding="utf-8"?>
+<p:sld xmlns:a="http://schemas.openxmlformats.org/drawingml/2006/main" xmlns:r="http://schemas.openxmlformats.org/officeDocument/2006/relationships" xmlns:p="http://schemas.openxmlformats.org/presentationml/2006/main">
+  <p:cSld name="Slide 21">
+    <p:spTree>
+      <p:nvGrpSpPr>
+        <p:cNvPr id="1" name=""/>
+        <p:cNvGrpSpPr/>
+        <p:nvPr/>
+      </p:nvGrpSpPr>
+      <p:grpSpPr>
+        <a:xfrm>
+          <a:off x="0" y="0"/>
+          <a:ext cx="0" cy="0"/>
+          <a:chOff x="0" y="0"/>
+          <a:chExt cx="0" cy="0"/>
+        </a:xfrm>
+      </p:grpSpPr>
+      <p:sp>
+        <p:nvSpPr>
+          <p:cNvPr id="2" name="Text 1"/>
+          <p:cNvSpPr/>
+          <p:nvPr>
+            <p:ph idx="102" type="title" hasCustomPrompt="1"/>
+          </p:nvPr>
+        </p:nvSpPr>
+        <p:spPr>
+          <a:xfrm>
+            <a:off x="320040" y="182880"/>
+            <a:ext cx="8503920" cy="640080"/>
+          </a:xfrm>
+          <a:prstGeom prst="rect">
+            <a:avLst/>
+          </a:prstGeom>
+          <a:noFill/>
+          <a:ln/>
+        </p:spPr>
+        <p:txBody>
+          <a:bodyPr wrap="square" lIns="0" tIns="0" rIns="0" bIns="0" rtlCol="0" anchor="ctr"/>
+          <a:lstStyle/>
+          <a:p>
+            <a:pPr algn="l" indent="0" marL="0">
+              <a:buNone/>
+            </a:pPr>
+            <a:r>
+              <a:rPr lang="en-US" sz="3200" b="1" dirty="0">
+                <a:solidFill>
+                  <a:schemeClr val="tx2"/>
+                </a:solidFill>
+              </a:rPr>
+              <a:t>Thesis 2: Power (2/4)</a:t>
+            </a:r>
+            <a:endParaRPr lang="en-US" sz="3200" dirty="0"/>
+          </a:p>
+        </p:txBody>
+      </p:sp>
+      <p:sp>
+        <p:nvSpPr>
+          <p:cNvPr id="3" name="Text 1"/>
+          <p:cNvSpPr/>
+          <p:nvPr>
+            <p:ph idx="103" type="body" hasCustomPrompt="1"/>
+          </p:nvPr>
+        </p:nvSpPr>
+        <p:spPr>
+          <a:xfrm>
+            <a:off x="320040" y="932688"/>
+            <a:ext cx="8503920" cy="566928"/>
+          </a:xfrm>
+          <a:prstGeom prst="rect">
+            <a:avLst/>
+          </a:prstGeom>
+          <a:noFill/>
+          <a:ln/>
+        </p:spPr>
+        <p:txBody>
+          <a:bodyPr wrap="square" lIns="0" tIns="0" rIns="0" bIns="0" rtlCol="0" anchor="t"/>
+          <a:lstStyle/>
+          <a:p>
+            <a:pPr algn="l" indent="0" marL="0">
+              <a:buNone/>
+            </a:pPr>
+            <a:r>
+              <a:rPr lang="en-US" sz="1700" b="1" dirty="0">
+                <a:solidFill>
+                  <a:schemeClr val="tx2"/>
+                </a:solidFill>
+              </a:rPr>
+              <a:t>Most new power hyperscalers have contracted isn't fully online until 2029 or later.</a:t>
+            </a:r>
+            <a:endParaRPr lang="en-US" sz="1700" dirty="0"/>
+          </a:p>
+        </p:txBody>
+      </p:sp>
+      <p:sp>
+        <p:nvSpPr>
+          <p:cNvPr id="4" name="COD header"/>
+          <p:cNvSpPr txBox="1"/>
+          <p:nvPr/>
+        </p:nvSpPr>
+        <p:spPr>
+          <a:xfrm>
+            <a:off x="320040" y="1554480"/>
+            <a:ext cx="4572000" cy="365760"/>
+          </a:xfrm>
+          <a:prstGeom prst="rect">
+            <a:avLst/>
+          </a:prstGeom>
+          <a:noFill/>
+          <a:ln/>
+        </p:spPr>
+        <p:txBody>
+          <a:bodyPr wrap="square" lIns="0" tIns="0" rIns="0" bIns="0" rtlCol="0" anchor="b"/>
+          <a:lstStyle/>
+          <a:p>
+            <a:pPr algn="ctr" indent="0" marL="0">
+              <a:buNone/>
+            </a:pPr>
+            <a:r>
+              <a:rPr lang="en-US" sz="1600" b="1" dirty="0">
+                <a:solidFill>
+                  <a:srgbClr val="1A1A1A"/>
+                </a:solidFill>
+              </a:rPr>
+              <a:t>New Capacity by Online Date (GW)</a:t>
+            </a:r>
+            <a:endParaRPr lang="en-US" sz="1600" dirty="0"/>
+          </a:p>
+        </p:txBody>
+      </p:sp>
+      <p:sp>
+        <p:nvSpPr>
+          <p:cNvPr id="5" name="COD header rule"/>
+          <p:cNvSpPr/>
+          <p:nvPr/>
+        </p:nvSpPr>
+        <p:spPr>
+          <a:xfrm>
+            <a:off x="320040" y="1975104"/>
+            <a:ext cx="4572000" cy="0"/>
+          </a:xfrm>
+          <a:prstGeom prst="line">
+            <a:avLst/>
+          </a:prstGeom>
+          <a:noFill/>
+          <a:ln w="12700">
+            <a:solidFill>
+              <a:srgbClr val="1A1A1A"/>
+            </a:solidFill>
+            <a:prstDash val="solid"/>
+          </a:ln>
+        </p:spPr>
+      </p:sp>
+      <p:graphicFrame>
+        <p:nvGraphicFramePr>
+          <p:cNvPr id="6" name="COD chart" descr=""/>
+          <p:cNvGraphicFramePr/>
+          <p:nvPr/>
+        </p:nvGraphicFramePr>
+        <p:xfrm>
+          <a:off x="320040" y="2103120"/>
+          <a:ext cx="4572000" cy="2926080"/>
+        </p:xfrm>
+        <a:graphic xmlns:a="http://schemas.openxmlformats.org/drawingml/2006/main">
+          <a:graphicData uri="http://schemas.openxmlformats.org/drawingml/2006/chart">
+            <c:chart xmlns:c="http://schemas.openxmlformats.org/drawingml/2006/chart" r:id="rId1"/>
+          </a:graphicData>
+        </a:graphic>
+      </p:graphicFrame>
+      <p:sp>
+        <p:nvSpPr>
+          <p:cNvPr id="7" name="Late share callout"/>
+          <p:cNvSpPr/>
+          <p:nvPr/>
+        </p:nvSpPr>
+        <p:spPr>
+          <a:xfrm>
+            <a:off x="2697480" y="2103120"/>
+            <a:ext cx="1005840" cy="1005840"/>
+          </a:xfrm>
+          <a:prstGeom prst="ellipse">
+            <a:avLst/>
+          </a:prstGeom>
+          <a:solidFill>
+            <a:srgbClr val="0A1C58"/>
+          </a:solidFill>
+          <a:ln>
+            <a:solidFill>
+              <a:srgbClr val="0A1C58"/>
+            </a:solidFill>
+          </a:ln>
+        </p:spPr>
+        <p:txBody>
+          <a:bodyPr wrap="square" lIns="0" tIns="0" rIns="0" bIns="0" rtlCol="0" anchor="ctr"/>
+          <a:lstStyle/>
+          <a:p>
+            <a:pPr algn="ctr" indent="0" marL="0">
+              <a:buNone/>
+            </a:pPr>
+            <a:r>
+              <a:rPr lang="en-US" sz="2200" b="1" dirty="0">
+                <a:solidFill>
+                  <a:schemeClr val="bg1"/>
+                </a:solidFill>
+              </a:rPr>
+              <a:t>57%</a:t>
+            </a:r>
+            <a:endParaRPr lang="en-US" sz="2200" dirty="0"/>
+          </a:p>
+          <a:p>
+            <a:pPr algn="ctr" indent="0" marL="0">
+              <a:buNone/>
+            </a:pPr>
+            <a:r>
+              <a:rPr lang="en-US" sz="1000" b="1" dirty="0">
+                <a:solidFill>
+                  <a:schemeClr val="bg1"/>
+                </a:solidFill>
+              </a:rPr>
+              <a:t>2029 or later</a:t>
+            </a:r>
+            <a:endParaRPr lang="en-US" sz="2200" dirty="0"/>
+          </a:p>
+        </p:txBody>
+      </p:sp>
+      <p:sp>
+        <p:nvSpPr>
+          <p:cNvPr id="8" name="COD caption"/>
+          <p:cNvSpPr txBox="1"/>
+          <p:nvPr/>
+        </p:nvSpPr>
+        <p:spPr>
+          <a:xfrm>
+            <a:off x="320040" y="5029200"/>
+            <a:ext cx="4572000" cy="274320"/>
+          </a:xfrm>
+          <a:prstGeom prst="rect">
+            <a:avLst/>
+          </a:prstGeom>
+          <a:noFill/>
+          <a:ln/>
+        </p:spPr>
+        <p:txBody>
+          <a:bodyPr wrap="square" lIns="0" tIns="0" rIns="0" bIns="0" rtlCol="0" anchor="ctr"/>
+          <a:lstStyle/>
+          <a:p>
+            <a:pPr algn="ctr" indent="0" marL="0">
+              <a:buNone/>
+            </a:pPr>
+            <a:r>
+              <a:rPr lang="en-US" sz="1000" i="1" dirty="0">
+                <a:solidFill>
+                  <a:schemeClr val="accent2"/>
+                </a:solidFill>
+              </a:rPr>
+              <a:t>25 GW of new and restarted capacity across 45 tracked hyperscaler power deals</a:t>
+            </a:r>
+            <a:endParaRPr lang="en-US" sz="1000" dirty="0"/>
+          </a:p>
+        </p:txBody>
+      </p:sp>
+      <p:sp>
+        <p:nvSpPr>
+          <p:cNvPr id="9" name="Bridge header"/>
+          <p:cNvSpPr txBox="1"/>
+          <p:nvPr/>
+        </p:nvSpPr>
+        <p:spPr>
+          <a:xfrm>
+            <a:off x="5212080" y="1554480"/>
+            <a:ext cx="3611880" cy="365760"/>
+          </a:xfrm>
+          <a:prstGeom prst="rect">
+            <a:avLst/>
+          </a:prstGeom>
+          <a:noFill/>
+          <a:ln/>
+        </p:spPr>
+        <p:txBody>
+          <a:bodyPr wrap="square" lIns="0" tIns="0" rIns="0" bIns="0" rtlCol="0" anchor="b"/>
+          <a:lstStyle/>
+          <a:p>
+            <a:pPr algn="ctr" indent="0" marL="0">
+              <a:buNone/>
+            </a:pPr>
+            <a:r>
+              <a:rPr lang="en-US" sz="1600" b="1" dirty="0">
+                <a:solidFill>
+                  <a:srgbClr val="1A1A1A"/>
+                </a:solidFill>
+              </a:rPr>
+              <a:t>The Bridge</a:t>
+            </a:r>
+            <a:endParaRPr lang="en-US" sz="1600" dirty="0"/>
+          </a:p>
+        </p:txBody>
+      </p:sp>
+      <p:sp>
+        <p:nvSpPr>
+          <p:cNvPr id="10" name="Bridge header rule"/>
+          <p:cNvSpPr/>
+          <p:nvPr/>
+        </p:nvSpPr>
+        <p:spPr>
+          <a:xfrm>
+            <a:off x="5212080" y="1975104"/>
+            <a:ext cx="3611880" cy="0"/>
+          </a:xfrm>
+          <a:prstGeom prst="line">
+            <a:avLst/>
+          </a:prstGeom>
+          <a:noFill/>
+          <a:ln w="12700">
+            <a:solidFill>
+              <a:srgbClr val="1A1A1A"/>
+            </a:solidFill>
+            <a:prstDash val="solid"/>
+          </a:ln>
+        </p:spPr>
+      </p:sp>
+      <p:sp>
+        <p:nvSpPr>
+          <p:cNvPr id="11" name="Bridge step 1"/>
+          <p:cNvSpPr txBox="1"/>
+          <p:nvPr/>
+        </p:nvSpPr>
+        <p:spPr>
+          <a:xfrm>
+            <a:off x="5212080" y="2148840"/>
+            <a:ext cx="3611880" cy="777240"/>
+          </a:xfrm>
+          <a:prstGeom prst="rect">
+            <a:avLst/>
+          </a:prstGeom>
+          <a:solidFill>
+            <a:srgbClr val="DCD8D3"/>
+          </a:solidFill>
+          <a:ln/>
+        </p:spPr>
+        <p:txBody>
+          <a:bodyPr wrap="square" lIns="76200" tIns="76200" rIns="76200" bIns="76200" rtlCol="0" anchor="ctr"/>
+          <a:lstStyle/>
+          <a:p>
+            <a:pPr algn="ctr" indent="0" marL="0">
+              <a:buNone/>
+            </a:pPr>
+            <a:r>
+              <a:rPr lang="en-US" sz="1500" b="1" dirty="0">
+                <a:solidFill>
+                  <a:schemeClr val="tx2"/>
+                </a:solidFill>
+              </a:rPr>
+              <a:t>Today</a:t>
+            </a:r>
+            <a:endParaRPr lang="en-US" sz="1500" dirty="0"/>
+          </a:p>
+          <a:p>
+            <a:pPr algn="ctr" indent="0" marL="0">
+              <a:buNone/>
+            </a:pPr>
+            <a:r>
+              <a:rPr lang="en-US" sz="1200" dirty="0">
+                <a:solidFill>
+                  <a:schemeClr val="tx2"/>
+                </a:solidFill>
+              </a:rPr>
+              <a:t>GPUs bought, data center shells built</a:t>
+            </a:r>
+            <a:endParaRPr lang="en-US" sz="1500" dirty="0"/>
+          </a:p>
+        </p:txBody>
+      </p:sp>
+      <p:sp>
+        <p:nvSpPr>
+          <p:cNvPr id="12" name="Bridge arrow 1"/>
+          <p:cNvSpPr/>
+          <p:nvPr/>
+        </p:nvSpPr>
+        <p:spPr>
+          <a:xfrm>
+            <a:off x="6830568" y="2944368"/>
+            <a:ext cx="365760" cy="182880"/>
+          </a:xfrm>
+          <a:prstGeom prst="downArrow">
+            <a:avLst/>
+          </a:prstGeom>
+          <a:solidFill>
+            <a:srgbClr val="847C7A"/>
+          </a:solidFill>
+          <a:ln/>
+        </p:spPr>
+      </p:sp>
+      <p:sp>
+        <p:nvSpPr>
+          <p:cNvPr id="13" name="Bridge step 2"/>
+          <p:cNvSpPr txBox="1"/>
+          <p:nvPr/>
+        </p:nvSpPr>
+        <p:spPr>
+          <a:xfrm>
+            <a:off x="5212080" y="3136392"/>
+            <a:ext cx="3611880" cy="777240"/>
+          </a:xfrm>
+          <a:prstGeom prst="rect">
+            <a:avLst/>
+          </a:prstGeom>
+          <a:solidFill>
+            <a:srgbClr val="0A1C58"/>
+          </a:solidFill>
+          <a:ln/>
+        </p:spPr>
+        <p:txBody>
+          <a:bodyPr wrap="square" lIns="76200" tIns="76200" rIns="76200" bIns="76200" rtlCol="0" anchor="ctr"/>
+          <a:lstStyle/>
+          <a:p>
+            <a:pPr algn="ctr" indent="0" marL="0">
+              <a:buNone/>
+            </a:pPr>
+            <a:r>
+              <a:rPr lang="en-US" sz="1500" b="1" dirty="0">
+                <a:solidFill>
+                  <a:schemeClr val="bg1"/>
+                </a:solidFill>
+              </a:rPr>
+              <a:t>2026–2029</a:t>
+            </a:r>
+            <a:endParaRPr lang="en-US" sz="1500" dirty="0"/>
+          </a:p>
+          <a:p>
+            <a:pPr algn="ctr" indent="0" marL="0">
+              <a:buNone/>
+            </a:pPr>
+            <a:r>
+              <a:rPr lang="en-US" sz="1200" dirty="0">
+                <a:solidFill>
+                  <a:schemeClr val="bg1"/>
+                </a:solidFill>
+              </a:rPr>
+              <a:t>FTAI's mobile turbines power the site</a:t>
+            </a:r>
+            <a:endParaRPr lang="en-US" sz="1500" dirty="0"/>
+          </a:p>
+        </p:txBody>
+      </p:sp>
+      <p:sp>
+        <p:nvSpPr>
+          <p:cNvPr id="14" name="Bridge arrow 2"/>
+          <p:cNvSpPr/>
+          <p:nvPr/>
+        </p:nvSpPr>
+        <p:spPr>
+          <a:xfrm>
+            <a:off x="6830568" y="3931920"/>
+            <a:ext cx="365760" cy="182880"/>
+          </a:xfrm>
+          <a:prstGeom prst="downArrow">
+            <a:avLst/>
+          </a:prstGeom>
+          <a:solidFill>
+            <a:srgbClr val="847C7A"/>
+          </a:solidFill>
+          <a:ln/>
+        </p:spPr>
+      </p:sp>
+      <p:sp>
+        <p:nvSpPr>
+          <p:cNvPr id="15" name="Bridge step 3"/>
+          <p:cNvSpPr txBox="1"/>
+          <p:nvPr/>
+        </p:nvSpPr>
+        <p:spPr>
+          <a:xfrm>
+            <a:off x="5212080" y="4123944"/>
+            <a:ext cx="3611880" cy="777240"/>
+          </a:xfrm>
+          <a:prstGeom prst="rect">
+            <a:avLst/>
+          </a:prstGeom>
+          <a:solidFill>
+            <a:srgbClr val="DCD8D3"/>
+          </a:solidFill>
+          <a:ln/>
+        </p:spPr>
+        <p:txBody>
+          <a:bodyPr wrap="square" lIns="76200" tIns="76200" rIns="76200" bIns="76200" rtlCol="0" anchor="ctr"/>
+          <a:lstStyle/>
+          <a:p>
+            <a:pPr algn="ctr" indent="0" marL="0">
+              <a:buNone/>
+            </a:pPr>
+            <a:r>
+              <a:rPr lang="en-US" sz="1500" b="1" dirty="0">
+                <a:solidFill>
+                  <a:schemeClr val="tx2"/>
+                </a:solidFill>
+              </a:rPr>
+              <a:t>2029+</a:t>
+            </a:r>
+            <a:endParaRPr lang="en-US" sz="1500" dirty="0"/>
+          </a:p>
+          <a:p>
+            <a:pPr algn="ctr" indent="0" marL="0">
+              <a:buNone/>
+            </a:pPr>
+            <a:r>
+              <a:rPr lang="en-US" sz="1200" dirty="0">
+                <a:solidFill>
+                  <a:schemeClr val="tx2"/>
+                </a:solidFill>
+              </a:rPr>
+              <a:t>Grid connections and new plants arrive</a:t>
+            </a:r>
+            <a:endParaRPr lang="en-US" sz="1500" dirty="0"/>
+          </a:p>
+        </p:txBody>
+      </p:sp>
+      <p:sp>
+        <p:nvSpPr>
+          <p:cNvPr id="16" name="Takeaway"/>
+          <p:cNvSpPr txBox="1"/>
+          <p:nvPr/>
+        </p:nvSpPr>
+        <p:spPr>
+          <a:xfrm>
+            <a:off x="320040" y="5504688"/>
+            <a:ext cx="8503920" cy="566928"/>
+          </a:xfrm>
+          <a:prstGeom prst="rect">
+            <a:avLst/>
+          </a:prstGeom>
+          <a:solidFill>
+            <a:srgbClr val="0A1C58"/>
+          </a:solidFill>
+          <a:ln/>
+        </p:spPr>
+        <p:txBody>
+          <a:bodyPr wrap="square" lIns="101600" tIns="25400" rIns="101600" bIns="25400" rtlCol="0" anchor="ctr"/>
+          <a:lstStyle/>
+          <a:p>
+            <a:pPr algn="ctr" indent="0" marL="0">
+              <a:buNone/>
+            </a:pPr>
+            <a:r>
+              <a:rPr lang="en-US" sz="1700" b="1" dirty="0">
+                <a:solidFill>
+                  <a:schemeClr val="bg1"/>
+                </a:solidFill>
+              </a:rPr>
+              <a:t>Data centers built today need power now. Transitory units like FTAI's fill the gap.</a:t>
+            </a:r>
+            <a:endParaRPr lang="en-US" sz="1700" dirty="0"/>
+          </a:p>
+        </p:txBody>
+      </p:sp>
+      <p:sp>
+        <p:nvSpPr>
+          <p:cNvPr id="17" name="Source"/>
+          <p:cNvSpPr txBox="1"/>
+          <p:nvPr/>
+        </p:nvSpPr>
+        <p:spPr>
+          <a:xfrm>
+            <a:off x="320040" y="6355080"/>
+            <a:ext cx="7132320" cy="274320"/>
+          </a:xfrm>
+          <a:prstGeom prst="rect">
+            <a:avLst/>
+          </a:prstGeom>
+          <a:noFill/>
+          <a:ln/>
+        </p:spPr>
+        <p:txBody>
+          <a:bodyPr wrap="square" lIns="0" tIns="0" rIns="0" bIns="0" rtlCol="0" anchor="ctr"/>
+          <a:lstStyle/>
+          <a:p>
+            <a:pPr indent="0" marL="0">
+              <a:buNone/>
+            </a:pPr>
+            <a:r>
+              <a:rPr lang="en-US" sz="1100" b="1" dirty="0">
+                <a:solidFill>
+                  <a:srgbClr val="1A1A1A"/>
+                </a:solidFill>
+              </a:rPr>
+              <a:t>Source: </a:t>
+            </a:r>
+            <a:pPr indent="0" marL="0">
+              <a:buNone/>
+            </a:pPr>
+            <a:r>
+              <a:rPr lang="en-US" sz="1100" dirty="0">
+                <a:solidFill>
+                  <a:srgbClr val="1A1A1A"/>
+                </a:solidFill>
+              </a:rPr>
+              <a:t>GPS model (Power agreements tab: 45 hyperscaler deals, new/restart MW by full COD); company announcements</a:t>
+            </a:r>
+            <a:endParaRPr lang="en-US" sz="1100" dirty="0"/>
+          </a:p>
+        </p:txBody>
+      </p:sp>
+      <p:sp>
+        <p:nvSpPr>
+          <p:cNvPr id="25" name="Slide Number Placeholder 0"/>
+          <p:cNvSpPr>
+            <a:spLocks noGrp="1"/>
+          </p:cNvSpPr>
+          <p:nvPr>
+            <p:ph type="sldNum" sz="quarter" idx="4294967295"/>
+          </p:nvPr>
+        </p:nvSpPr>
+        <p:spPr>
+          <a:xfrm>
+            <a:off x="7635240" y="6327648"/>
+            <a:ext cx="411480" cy="274320"/>
+          </a:xfrm>
+          <a:prstGeom prst="rect">
+            <a:avLst/>
+          </a:prstGeom>
+          <a:extLst>
+            <a:ext uri="{C572A759-6A51-4108-AA02-DFA0A04FC94B}">
+              <ma14:wrappingTextBoxFlag xmlns:ma14="http://schemas.microsoft.com/office/mac/drawingml/2011/main" val="0"/>
+            </a:ext>
+          </a:extLst>
+        </p:spPr>
+        <p:txBody>
+          <a:bodyPr/>
+          <a:lstStyle>
+            <a:lvl1pPr>
+              <a:defRPr sz="1100">
+                <a:solidFill>
+                  <a:srgbClr val="1A1A1A"/>
+                </a:solidFill>
+              </a:defRPr>
+            </a:lvl1pPr>
+          </a:lstStyle>
+          <a:p>
+            <a:pPr algn="r"/>
+            <a:fld id="{F7021451-1387-4CA6-816F-3879F97B5CBC}" type="slidenum">
+              <a:rPr b="1" lang="en-US"/>
+              <a:t>21</a:t>
+            </a:fld>
+            <a:endParaRPr lang="en-US"/>
+          </a:p>
+        </p:txBody>
+      </p:sp>
+    </p:spTree>
+  </p:cSld>
+  <p:clrMapOvr>
+    <a:masterClrMapping/>
+  </p:clrMapOvr>
+</p:sld>
+</file>
+
+<file path=ppt/slides/slide22.xml><?xml version="1.0" encoding="utf-8"?>
+<p:sld xmlns:a="http://schemas.openxmlformats.org/drawingml/2006/main" xmlns:r="http://schemas.openxmlformats.org/officeDocument/2006/relationships" xmlns:p="http://schemas.openxmlformats.org/presentationml/2006/main">
+  <p:cSld name="Slide 22">
+    <p:spTree>
+      <p:nvGrpSpPr>
+        <p:cNvPr id="1" name=""/>
+        <p:cNvGrpSpPr/>
+        <p:nvPr/>
+      </p:nvGrpSpPr>
+      <p:grpSpPr>
+        <a:xfrm>
+          <a:off x="0" y="0"/>
+          <a:ext cx="0" cy="0"/>
+          <a:chOff x="0" y="0"/>
+          <a:chExt cx="0" cy="0"/>
+        </a:xfrm>
+      </p:grpSpPr>
+      <p:sp>
+        <p:nvSpPr>
+          <p:cNvPr id="2" name="Text 1"/>
+          <p:cNvSpPr/>
+          <p:nvPr>
+            <p:ph idx="102" type="title" hasCustomPrompt="1"/>
+          </p:nvPr>
+        </p:nvSpPr>
+        <p:spPr>
+          <a:xfrm>
+            <a:off x="320040" y="182880"/>
+            <a:ext cx="8503920" cy="640080"/>
+          </a:xfrm>
+          <a:prstGeom prst="rect">
+            <a:avLst/>
+          </a:prstGeom>
+          <a:noFill/>
+          <a:ln/>
+        </p:spPr>
+        <p:txBody>
+          <a:bodyPr wrap="square" lIns="0" tIns="0" rIns="0" bIns="0" rtlCol="0" anchor="ctr"/>
+          <a:lstStyle/>
+          <a:p>
+            <a:pPr algn="l" indent="0" marL="0">
+              <a:buNone/>
+            </a:pPr>
+            <a:r>
+              <a:rPr lang="en-US" sz="3200" b="1" dirty="0">
+                <a:solidFill>
+                  <a:schemeClr val="tx2"/>
+                </a:solidFill>
+              </a:rPr>
+              <a:t>Thesis 2: Power (3/4)</a:t>
+            </a:r>
+            <a:endParaRPr lang="en-US" sz="3200" dirty="0"/>
+          </a:p>
+        </p:txBody>
+      </p:sp>
+      <p:sp>
+        <p:nvSpPr>
+          <p:cNvPr id="3" name="Text 1"/>
+          <p:cNvSpPr/>
+          <p:nvPr>
+            <p:ph idx="103" type="body" hasCustomPrompt="1"/>
+          </p:nvPr>
+        </p:nvSpPr>
+        <p:spPr>
+          <a:xfrm>
+            <a:off x="320040" y="932688"/>
+            <a:ext cx="8503920" cy="566928"/>
+          </a:xfrm>
+          <a:prstGeom prst="rect">
+            <a:avLst/>
+          </a:prstGeom>
+          <a:noFill/>
+          <a:ln/>
+        </p:spPr>
+        <p:txBody>
+          <a:bodyPr wrap="square" lIns="0" tIns="0" rIns="0" bIns="0" rtlCol="0" anchor="t"/>
+          <a:lstStyle/>
+          <a:p>
+            <a:pPr algn="l" indent="0" marL="0">
+              <a:buNone/>
+            </a:pPr>
+            <a:r>
+              <a:rPr lang="en-US" sz="1700" b="1" dirty="0">
+                <a:solidFill>
+                  <a:schemeClr val="tx2"/>
+                </a:solidFill>
+              </a:rPr>
+              <a:t>Power is a small slice of a data center's cost, and new turbines are sold out. FTAI has pricing power.</a:t>
+            </a:r>
+            <a:endParaRPr lang="en-US" sz="1700" dirty="0"/>
+          </a:p>
+        </p:txBody>
+      </p:sp>
+      <p:sp>
+        <p:nvSpPr>
+          <p:cNvPr id="4" name="Cost header"/>
+          <p:cNvSpPr txBox="1"/>
+          <p:nvPr/>
+        </p:nvSpPr>
+        <p:spPr>
+          <a:xfrm>
+            <a:off x="320040" y="1554480"/>
+            <a:ext cx="3931920" cy="365760"/>
+          </a:xfrm>
+          <a:prstGeom prst="rect">
+            <a:avLst/>
+          </a:prstGeom>
+          <a:noFill/>
+          <a:ln/>
+        </p:spPr>
+        <p:txBody>
+          <a:bodyPr wrap="square" lIns="0" tIns="0" rIns="0" bIns="0" rtlCol="0" anchor="b"/>
+          <a:lstStyle/>
+          <a:p>
+            <a:pPr algn="ctr" indent="0" marL="0">
+              <a:buNone/>
+            </a:pPr>
+            <a:r>
+              <a:rPr lang="en-US" sz="1600" b="1" dirty="0">
+                <a:solidFill>
+                  <a:srgbClr val="1A1A1A"/>
+                </a:solidFill>
+              </a:rPr>
+              <a:t>Cost to Build 100 MW ($M)</a:t>
+            </a:r>
+            <a:endParaRPr lang="en-US" sz="1600" dirty="0"/>
+          </a:p>
+        </p:txBody>
+      </p:sp>
+      <p:sp>
+        <p:nvSpPr>
+          <p:cNvPr id="5" name="Cost header rule"/>
+          <p:cNvSpPr/>
+          <p:nvPr/>
+        </p:nvSpPr>
+        <p:spPr>
+          <a:xfrm>
+            <a:off x="320040" y="1975104"/>
+            <a:ext cx="3931920" cy="0"/>
+          </a:xfrm>
+          <a:prstGeom prst="line">
+            <a:avLst/>
+          </a:prstGeom>
+          <a:noFill/>
+          <a:ln w="12700">
+            <a:solidFill>
+              <a:srgbClr val="1A1A1A"/>
+            </a:solidFill>
+            <a:prstDash val="solid"/>
+          </a:ln>
+        </p:spPr>
+      </p:sp>
+      <p:sp>
+        <p:nvSpPr>
+          <p:cNvPr id="6" name="Build cost label 1"/>
+          <p:cNvSpPr txBox="1"/>
+          <p:nvPr/>
+        </p:nvSpPr>
+        <p:spPr>
+          <a:xfrm>
+            <a:off x="320040" y="2240280"/>
+            <a:ext cx="1828800" cy="548640"/>
+          </a:xfrm>
+          <a:prstGeom prst="rect">
+            <a:avLst/>
+          </a:prstGeom>
+          <a:noFill/>
+          <a:ln/>
+        </p:spPr>
+        <p:txBody>
+          <a:bodyPr wrap="square" lIns="0" tIns="0" rIns="0" bIns="0" rtlCol="0" anchor="ctr"/>
+          <a:lstStyle/>
+          <a:p>
+            <a:pPr algn="r" indent="0" marL="0">
+              <a:buNone/>
+            </a:pPr>
+            <a:r>
+              <a:rPr lang="en-US" sz="1200" dirty="0">
+                <a:solidFill>
+                  <a:srgbClr val="1A1A1A"/>
+                </a:solidFill>
+              </a:rPr>
+              <a:t>Data center facility</a:t>
+            </a:r>
+            <a:endParaRPr lang="en-US" sz="1200" dirty="0"/>
+          </a:p>
+        </p:txBody>
+      </p:sp>
+      <p:sp>
+        <p:nvSpPr>
+          <p:cNvPr id="7" name="Build cost bar 1"/>
+          <p:cNvSpPr/>
+          <p:nvPr/>
+        </p:nvSpPr>
+        <p:spPr>
+          <a:xfrm>
+            <a:off x="2240280" y="2240280"/>
+            <a:ext cx="1371600" cy="548640"/>
+          </a:xfrm>
+          <a:prstGeom prst="rect">
+            <a:avLst/>
+          </a:prstGeom>
+          <a:solidFill>
+            <a:srgbClr val="B5AEA9"/>
+          </a:solidFill>
+          <a:ln/>
+        </p:spPr>
+      </p:sp>
+      <p:sp>
+        <p:nvSpPr>
+          <p:cNvPr id="8" name="Build cost value 1"/>
+          <p:cNvSpPr txBox="1"/>
+          <p:nvPr/>
+        </p:nvSpPr>
+        <p:spPr>
+          <a:xfrm>
+            <a:off x="3685032" y="2240280"/>
+            <a:ext cx="822960" cy="548640"/>
+          </a:xfrm>
+          <a:prstGeom prst="rect">
+            <a:avLst/>
+          </a:prstGeom>
+          <a:noFill/>
+          <a:ln/>
+        </p:spPr>
+        <p:txBody>
+          <a:bodyPr wrap="square" lIns="0" tIns="0" rIns="0" bIns="0" rtlCol="0" anchor="ctr"/>
+          <a:lstStyle/>
+          <a:p>
+            <a:pPr algn="l" indent="0" marL="0">
+              <a:buNone/>
+            </a:pPr>
+            <a:r>
+              <a:rPr lang="en-US" sz="1300" b="1" dirty="0">
+                <a:solidFill>
+                  <a:schemeClr val="tx2"/>
+                </a:solidFill>
+              </a:rPr>
+              <a:t>$1,200M</a:t>
+            </a:r>
+            <a:endParaRPr lang="en-US" sz="1300" dirty="0"/>
+          </a:p>
+        </p:txBody>
+      </p:sp>
+      <p:sp>
+        <p:nvSpPr>
+          <p:cNvPr id="9" name="Build cost label 2"/>
+          <p:cNvSpPr txBox="1"/>
+          <p:nvPr/>
+        </p:nvSpPr>
+        <p:spPr>
+          <a:xfrm>
+            <a:off x="320040" y="3017520"/>
+            <a:ext cx="1828800" cy="548640"/>
+          </a:xfrm>
+          <a:prstGeom prst="rect">
+            <a:avLst/>
+          </a:prstGeom>
+          <a:noFill/>
+          <a:ln/>
+        </p:spPr>
+        <p:txBody>
+          <a:bodyPr wrap="square" lIns="0" tIns="0" rIns="0" bIns="0" rtlCol="0" anchor="ctr"/>
+          <a:lstStyle/>
+          <a:p>
+            <a:pPr algn="r" indent="0" marL="0">
+              <a:buNone/>
+            </a:pPr>
+            <a:r>
+              <a:rPr lang="en-US" sz="1200" dirty="0">
+                <a:solidFill>
+                  <a:srgbClr val="1A1A1A"/>
+                </a:solidFill>
+              </a:rPr>
+              <a:t>FTAI turbines (4 units)</a:t>
+            </a:r>
+            <a:endParaRPr lang="en-US" sz="1200" dirty="0"/>
+          </a:p>
+        </p:txBody>
+      </p:sp>
+      <p:sp>
+        <p:nvSpPr>
+          <p:cNvPr id="10" name="Build cost bar 2"/>
+          <p:cNvSpPr/>
+          <p:nvPr/>
+        </p:nvSpPr>
+        <p:spPr>
+          <a:xfrm>
+            <a:off x="2240280" y="3017520"/>
+            <a:ext cx="114300" cy="548640"/>
+          </a:xfrm>
+          <a:prstGeom prst="rect">
+            <a:avLst/>
+          </a:prstGeom>
+          <a:solidFill>
+            <a:srgbClr val="0A1C58"/>
+          </a:solidFill>
+          <a:ln/>
+        </p:spPr>
+      </p:sp>
+      <p:sp>
+        <p:nvSpPr>
+          <p:cNvPr id="11" name="Build cost value 2"/>
+          <p:cNvSpPr txBox="1"/>
+          <p:nvPr/>
+        </p:nvSpPr>
+        <p:spPr>
+          <a:xfrm>
+            <a:off x="2427732" y="3017520"/>
+            <a:ext cx="822960" cy="548640"/>
+          </a:xfrm>
+          <a:prstGeom prst="rect">
+            <a:avLst/>
+          </a:prstGeom>
+          <a:noFill/>
+          <a:ln/>
+        </p:spPr>
+        <p:txBody>
+          <a:bodyPr wrap="square" lIns="0" tIns="0" rIns="0" bIns="0" rtlCol="0" anchor="ctr"/>
+          <a:lstStyle/>
+          <a:p>
+            <a:pPr algn="l" indent="0" marL="0">
+              <a:buNone/>
+            </a:pPr>
+            <a:r>
+              <a:rPr lang="en-US" sz="1300" b="1" dirty="0">
+                <a:solidFill>
+                  <a:schemeClr val="tx2"/>
+                </a:solidFill>
+              </a:rPr>
+              <a:t>$100M</a:t>
+            </a:r>
+            <a:endParaRPr lang="en-US" sz="1300" dirty="0"/>
+          </a:p>
+        </p:txBody>
+      </p:sp>
+      <p:sp>
+        <p:nvSpPr>
+          <p:cNvPr id="12" name="Cost takeaway"/>
+          <p:cNvSpPr txBox="1"/>
+          <p:nvPr/>
+        </p:nvSpPr>
+        <p:spPr>
+          <a:xfrm>
+            <a:off x="320040" y="3931920"/>
+            <a:ext cx="3931920" cy="1325880"/>
+          </a:xfrm>
+          <a:prstGeom prst="rect">
+            <a:avLst/>
+          </a:prstGeom>
+          <a:solidFill>
+            <a:srgbClr val="EFEDEA"/>
+          </a:solidFill>
+          <a:ln/>
+        </p:spPr>
+        <p:txBody>
+          <a:bodyPr wrap="square" lIns="127000" tIns="127000" rIns="127000" bIns="127000" rtlCol="0" anchor="ctr"/>
+          <a:lstStyle/>
+          <a:p>
+            <a:pPr algn="ctr" indent="0" marL="0">
+              <a:buNone/>
+            </a:pPr>
+            <a:r>
+              <a:rPr lang="en-US" sz="2600" b="1" dirty="0">
+                <a:solidFill>
+                  <a:schemeClr val="tx2"/>
+                </a:solidFill>
+              </a:rPr>
+              <a:t>~8%</a:t>
+            </a:r>
+            <a:endParaRPr lang="en-US" sz="2600" dirty="0"/>
+          </a:p>
+          <a:p>
+            <a:pPr algn="ctr" indent="0" marL="0">
+              <a:buNone/>
+            </a:pPr>
+            <a:r>
+              <a:rPr lang="en-US" sz="1200" dirty="0">
+                <a:solidFill>
+                  <a:srgbClr val="1A1A1A"/>
+                </a:solidFill>
+              </a:rPr>
+              <a:t>Power is a rounding error next to the stranded build cost, before counting the GPUs inside.</a:t>
+            </a:r>
+            <a:endParaRPr lang="en-US" sz="2600" dirty="0"/>
+          </a:p>
+        </p:txBody>
+      </p:sp>
+      <p:sp>
+        <p:nvSpPr>
+          <p:cNvPr id="13" name="Lead time header"/>
+          <p:cNvSpPr txBox="1"/>
+          <p:nvPr/>
+        </p:nvSpPr>
+        <p:spPr>
+          <a:xfrm>
+            <a:off x="4572000" y="1554480"/>
+            <a:ext cx="4251960" cy="365760"/>
+          </a:xfrm>
+          <a:prstGeom prst="rect">
+            <a:avLst/>
+          </a:prstGeom>
+          <a:noFill/>
+          <a:ln/>
+        </p:spPr>
+        <p:txBody>
+          <a:bodyPr wrap="square" lIns="0" tIns="0" rIns="0" bIns="0" rtlCol="0" anchor="b"/>
+          <a:lstStyle/>
+          <a:p>
+            <a:pPr algn="ctr" indent="0" marL="0">
+              <a:buNone/>
+            </a:pPr>
+            <a:r>
+              <a:rPr lang="en-US" sz="1600" b="1" dirty="0">
+                <a:solidFill>
+                  <a:srgbClr val="1A1A1A"/>
+                </a:solidFill>
+              </a:rPr>
+              <a:t>When New Turbines Can Arrive</a:t>
+            </a:r>
+            <a:endParaRPr lang="en-US" sz="1600" dirty="0"/>
+          </a:p>
+        </p:txBody>
+      </p:sp>
+      <p:sp>
+        <p:nvSpPr>
+          <p:cNvPr id="14" name="Lead time header rule"/>
+          <p:cNvSpPr/>
+          <p:nvPr/>
+        </p:nvSpPr>
+        <p:spPr>
+          <a:xfrm>
+            <a:off x="4572000" y="1975104"/>
+            <a:ext cx="4251960" cy="0"/>
+          </a:xfrm>
+          <a:prstGeom prst="line">
+            <a:avLst/>
+          </a:prstGeom>
+          <a:noFill/>
+          <a:ln w="12700">
+            <a:solidFill>
+              <a:srgbClr val="1A1A1A"/>
+            </a:solidFill>
+            <a:prstDash val="solid"/>
+          </a:ln>
+        </p:spPr>
+      </p:sp>
+      <p:sp>
+        <p:nvSpPr>
+          <p:cNvPr id="15" name="Year grid 2026"/>
+          <p:cNvSpPr/>
+          <p:nvPr/>
+        </p:nvSpPr>
+        <p:spPr>
+          <a:xfrm>
+            <a:off x="6172200" y="2103120"/>
+            <a:ext cx="0" cy="2514600"/>
+          </a:xfrm>
+          <a:prstGeom prst="line">
+            <a:avLst/>
+          </a:prstGeom>
+          <a:noFill/>
+          <a:ln w="9525">
+            <a:solidFill>
+              <a:srgbClr val="E3E0DC"/>
+            </a:solidFill>
+            <a:prstDash val="solid"/>
+          </a:ln>
+        </p:spPr>
+      </p:sp>
+      <p:sp>
+        <p:nvSpPr>
+          <p:cNvPr id="16" name="Year tick 2026"/>
+          <p:cNvSpPr txBox="1"/>
+          <p:nvPr/>
+        </p:nvSpPr>
+        <p:spPr>
+          <a:xfrm>
+            <a:off x="5897880" y="4617720"/>
+            <a:ext cx="548640" cy="228600"/>
+          </a:xfrm>
+          <a:prstGeom prst="rect">
+            <a:avLst/>
+          </a:prstGeom>
+          <a:noFill/>
+          <a:ln/>
+        </p:spPr>
+        <p:txBody>
+          <a:bodyPr wrap="square" lIns="0" tIns="0" rIns="0" bIns="0" rtlCol="0" anchor="ctr"/>
+          <a:lstStyle/>
+          <a:p>
+            <a:pPr algn="ctr" indent="0" marL="0">
+              <a:buNone/>
+            </a:pPr>
+            <a:r>
+              <a:rPr lang="en-US" sz="1000" dirty="0">
+                <a:solidFill>
+                  <a:schemeClr val="accent2"/>
+                </a:solidFill>
+              </a:rPr>
+              <a:t>2026</a:t>
+            </a:r>
+            <a:endParaRPr lang="en-US" sz="1000" dirty="0"/>
+          </a:p>
+        </p:txBody>
+      </p:sp>
+      <p:sp>
+        <p:nvSpPr>
+          <p:cNvPr id="17" name="Year grid 2028"/>
+          <p:cNvSpPr/>
+          <p:nvPr/>
+        </p:nvSpPr>
+        <p:spPr>
+          <a:xfrm>
+            <a:off x="7214616" y="2103120"/>
+            <a:ext cx="0" cy="2514600"/>
+          </a:xfrm>
+          <a:prstGeom prst="line">
+            <a:avLst/>
+          </a:prstGeom>
+          <a:noFill/>
+          <a:ln w="9525">
+            <a:solidFill>
+              <a:srgbClr val="E3E0DC"/>
+            </a:solidFill>
+            <a:prstDash val="solid"/>
+          </a:ln>
+        </p:spPr>
+      </p:sp>
+      <p:sp>
+        <p:nvSpPr>
+          <p:cNvPr id="18" name="Year tick 2028"/>
+          <p:cNvSpPr txBox="1"/>
+          <p:nvPr/>
+        </p:nvSpPr>
+        <p:spPr>
+          <a:xfrm>
+            <a:off x="6940296" y="4617720"/>
+            <a:ext cx="548640" cy="228600"/>
+          </a:xfrm>
+          <a:prstGeom prst="rect">
+            <a:avLst/>
+          </a:prstGeom>
+          <a:noFill/>
+          <a:ln/>
+        </p:spPr>
+        <p:txBody>
+          <a:bodyPr wrap="square" lIns="0" tIns="0" rIns="0" bIns="0" rtlCol="0" anchor="ctr"/>
+          <a:lstStyle/>
+          <a:p>
+            <a:pPr algn="ctr" indent="0" marL="0">
+              <a:buNone/>
+            </a:pPr>
+            <a:r>
+              <a:rPr lang="en-US" sz="1000" dirty="0">
+                <a:solidFill>
+                  <a:schemeClr val="accent2"/>
+                </a:solidFill>
+              </a:rPr>
+              <a:t>2028</a:t>
+            </a:r>
+            <a:endParaRPr lang="en-US" sz="1000" dirty="0"/>
+          </a:p>
+        </p:txBody>
+      </p:sp>
+      <p:sp>
+        <p:nvSpPr>
+          <p:cNvPr id="19" name="Year grid 2030"/>
+          <p:cNvSpPr/>
+          <p:nvPr/>
+        </p:nvSpPr>
+        <p:spPr>
+          <a:xfrm>
+            <a:off x="8257032" y="2103120"/>
+            <a:ext cx="0" cy="2514600"/>
+          </a:xfrm>
+          <a:prstGeom prst="line">
+            <a:avLst/>
+          </a:prstGeom>
+          <a:noFill/>
+          <a:ln w="9525">
+            <a:solidFill>
+              <a:srgbClr val="E3E0DC"/>
+            </a:solidFill>
+            <a:prstDash val="solid"/>
+          </a:ln>
+        </p:spPr>
+      </p:sp>
+      <p:sp>
+        <p:nvSpPr>
+          <p:cNvPr id="20" name="Year tick 2030"/>
+          <p:cNvSpPr txBox="1"/>
+          <p:nvPr/>
+        </p:nvSpPr>
+        <p:spPr>
+          <a:xfrm>
+            <a:off x="7982712" y="4617720"/>
+            <a:ext cx="548640" cy="228600"/>
+          </a:xfrm>
+          <a:prstGeom prst="rect">
+            <a:avLst/>
+          </a:prstGeom>
+          <a:noFill/>
+          <a:ln/>
+        </p:spPr>
+        <p:txBody>
+          <a:bodyPr wrap="square" lIns="0" tIns="0" rIns="0" bIns="0" rtlCol="0" anchor="ctr"/>
+          <a:lstStyle/>
+          <a:p>
+            <a:pPr algn="ctr" indent="0" marL="0">
+              <a:buNone/>
+            </a:pPr>
+            <a:r>
+              <a:rPr lang="en-US" sz="1000" dirty="0">
+                <a:solidFill>
+                  <a:schemeClr val="accent2"/>
+                </a:solidFill>
+              </a:rPr>
+              <a:t>2030</a:t>
+            </a:r>
+            <a:endParaRPr lang="en-US" sz="1000" dirty="0"/>
+          </a:p>
+        </p:txBody>
+      </p:sp>
+      <p:sp>
+        <p:nvSpPr>
+          <p:cNvPr id="21" name="Lane 1 label"/>
+          <p:cNvSpPr txBox="1"/>
+          <p:nvPr/>
+        </p:nvSpPr>
+        <p:spPr>
+          <a:xfrm>
+            <a:off x="4572000" y="2286000"/>
+            <a:ext cx="1508760" cy="502920"/>
+          </a:xfrm>
+          <a:prstGeom prst="rect">
+            <a:avLst/>
+          </a:prstGeom>
+          <a:noFill/>
+          <a:ln/>
+        </p:spPr>
+        <p:txBody>
+          <a:bodyPr wrap="square" lIns="0" tIns="0" rIns="0" bIns="0" rtlCol="0" anchor="ctr"/>
+          <a:lstStyle/>
+          <a:p>
+            <a:pPr algn="r" indent="0" marL="0">
+              <a:buNone/>
+            </a:pPr>
+            <a:r>
+              <a:rPr lang="en-US" sz="1200" b="1" dirty="0">
+                <a:solidFill>
+                  <a:schemeClr val="tx2"/>
+                </a:solidFill>
+              </a:rPr>
+              <a:t>FTAI Mod-1</a:t>
+            </a:r>
+            <a:endParaRPr lang="en-US" sz="1200" dirty="0"/>
+          </a:p>
+        </p:txBody>
+      </p:sp>
+      <p:sp>
+        <p:nvSpPr>
+          <p:cNvPr id="22" name="Lane 1 bar"/>
+          <p:cNvSpPr/>
+          <p:nvPr/>
+        </p:nvSpPr>
+        <p:spPr>
+          <a:xfrm>
+            <a:off x="6589166" y="2359152"/>
+            <a:ext cx="625450" cy="365760"/>
+          </a:xfrm>
+          <a:prstGeom prst="roundRect">
+            <a:avLst>
+              <a:gd name="adj" fmla="val 20000"/>
+            </a:avLst>
+          </a:prstGeom>
+          <a:solidFill>
+            <a:srgbClr val="0A1C58"/>
+          </a:solidFill>
+          <a:ln/>
+        </p:spPr>
+      </p:sp>
+      <p:sp>
+        <p:nvSpPr>
+          <p:cNvPr id="23" name="Lane 2 label"/>
+          <p:cNvSpPr txBox="1"/>
+          <p:nvPr/>
+        </p:nvSpPr>
+        <p:spPr>
+          <a:xfrm>
+            <a:off x="4572000" y="3063240"/>
+            <a:ext cx="1508760" cy="502920"/>
+          </a:xfrm>
+          <a:prstGeom prst="rect">
+            <a:avLst/>
+          </a:prstGeom>
+          <a:noFill/>
+          <a:ln/>
+        </p:spPr>
+        <p:txBody>
+          <a:bodyPr wrap="square" lIns="0" tIns="0" rIns="0" bIns="0" rtlCol="0" anchor="ctr"/>
+          <a:lstStyle/>
+          <a:p>
+            <a:pPr algn="r" indent="0" marL="0">
+              <a:buNone/>
+            </a:pPr>
+            <a:r>
+              <a:rPr lang="en-US" sz="1200" dirty="0">
+                <a:solidFill>
+                  <a:srgbClr val="1A1A1A"/>
+                </a:solidFill>
+              </a:rPr>
+              <a:t>New aero orders</a:t>
+            </a:r>
+            <a:endParaRPr lang="en-US" sz="1200" dirty="0"/>
+          </a:p>
+        </p:txBody>
+      </p:sp>
+      <p:sp>
+        <p:nvSpPr>
+          <p:cNvPr id="24" name="Lane 2 bar"/>
+          <p:cNvSpPr/>
+          <p:nvPr/>
+        </p:nvSpPr>
+        <p:spPr>
+          <a:xfrm>
+            <a:off x="7214616" y="3136392"/>
+            <a:ext cx="1511503" cy="365760"/>
+          </a:xfrm>
+          <a:prstGeom prst="roundRect">
+            <a:avLst>
+              <a:gd name="adj" fmla="val 20000"/>
+            </a:avLst>
+          </a:prstGeom>
+          <a:solidFill>
+            <a:srgbClr val="B5AEA9"/>
+          </a:solidFill>
+          <a:ln/>
+        </p:spPr>
+      </p:sp>
+      <p:sp>
+        <p:nvSpPr>
+          <p:cNvPr id="25" name="Lane 3 label"/>
+          <p:cNvSpPr txBox="1"/>
+          <p:nvPr/>
+        </p:nvSpPr>
+        <p:spPr>
+          <a:xfrm>
+            <a:off x="4572000" y="3840480"/>
+            <a:ext cx="1508760" cy="502920"/>
+          </a:xfrm>
+          <a:prstGeom prst="rect">
+            <a:avLst/>
+          </a:prstGeom>
+          <a:noFill/>
+          <a:ln/>
+        </p:spPr>
+        <p:txBody>
+          <a:bodyPr wrap="square" lIns="0" tIns="0" rIns="0" bIns="0" rtlCol="0" anchor="ctr"/>
+          <a:lstStyle/>
+          <a:p>
+            <a:pPr algn="r" indent="0" marL="0">
+              <a:buNone/>
+            </a:pPr>
+            <a:r>
+              <a:rPr lang="en-US" sz="1200" dirty="0">
+                <a:solidFill>
+                  <a:srgbClr val="1A1A1A"/>
+                </a:solidFill>
+              </a:rPr>
+              <a:t>New large turbines</a:t>
+            </a:r>
+            <a:endParaRPr lang="en-US" sz="1200" dirty="0"/>
+          </a:p>
+        </p:txBody>
+      </p:sp>
+      <p:sp>
+        <p:nvSpPr>
+          <p:cNvPr id="26" name="Lane 3 bar"/>
+          <p:cNvSpPr/>
+          <p:nvPr/>
+        </p:nvSpPr>
+        <p:spPr>
+          <a:xfrm>
+            <a:off x="7735824" y="3913632"/>
+            <a:ext cx="1042416" cy="365760"/>
+          </a:xfrm>
+          <a:prstGeom prst="roundRect">
+            <a:avLst>
+              <a:gd name="adj" fmla="val 20000"/>
+            </a:avLst>
+          </a:prstGeom>
+          <a:solidFill>
+            <a:srgbClr val="B5AEA9"/>
+          </a:solidFill>
+          <a:ln/>
+        </p:spPr>
+      </p:sp>
+      <p:sp>
+        <p:nvSpPr>
+          <p:cNvPr id="27" name="Lead time caption"/>
+          <p:cNvSpPr txBox="1"/>
+          <p:nvPr/>
+        </p:nvSpPr>
+        <p:spPr>
+          <a:xfrm>
+            <a:off x="4572000" y="4937760"/>
+            <a:ext cx="4251960" cy="274320"/>
+          </a:xfrm>
+          <a:prstGeom prst="rect">
+            <a:avLst/>
+          </a:prstGeom>
+          <a:noFill/>
+          <a:ln/>
+        </p:spPr>
+        <p:txBody>
+          <a:bodyPr wrap="square" lIns="0" tIns="0" rIns="0" bIns="0" rtlCol="0" anchor="ctr"/>
+          <a:lstStyle/>
+          <a:p>
+            <a:pPr algn="ctr" indent="0" marL="0">
+              <a:buNone/>
+            </a:pPr>
+            <a:r>
+              <a:rPr lang="en-US" sz="1000" i="1" dirty="0">
+                <a:solidFill>
+                  <a:schemeClr val="accent2"/>
+                </a:solidFill>
+              </a:rPr>
+              <a:t>Delivery windows; large-turbine order books full to 2029</a:t>
+            </a:r>
+            <a:endParaRPr lang="en-US" sz="1000" dirty="0"/>
+          </a:p>
+        </p:txBody>
+      </p:sp>
+      <p:sp>
+        <p:nvSpPr>
+          <p:cNvPr id="28" name="Takeaway"/>
+          <p:cNvSpPr txBox="1"/>
+          <p:nvPr/>
+        </p:nvSpPr>
+        <p:spPr>
+          <a:xfrm>
+            <a:off x="320040" y="5504688"/>
+            <a:ext cx="8503920" cy="566928"/>
+          </a:xfrm>
+          <a:prstGeom prst="rect">
+            <a:avLst/>
+          </a:prstGeom>
+          <a:solidFill>
+            <a:srgbClr val="0A1C58"/>
+          </a:solidFill>
+          <a:ln/>
+        </p:spPr>
+        <p:txBody>
+          <a:bodyPr wrap="square" lIns="101600" tIns="25400" rIns="101600" bIns="25400" rtlCol="0" anchor="ctr"/>
+          <a:lstStyle/>
+          <a:p>
+            <a:pPr algn="ctr" indent="0" marL="0">
+              <a:buNone/>
+            </a:pPr>
+            <a:r>
+              <a:rPr lang="en-US" sz="1700" b="1" dirty="0">
+                <a:solidFill>
+                  <a:schemeClr val="bg1"/>
+                </a:solidFill>
+              </a:rPr>
+              <a:t>Idle data centers cost far more than power. FTAI delivers years before the competition.</a:t>
+            </a:r>
+            <a:endParaRPr lang="en-US" sz="1700" dirty="0"/>
+          </a:p>
+        </p:txBody>
+      </p:sp>
+      <p:sp>
+        <p:nvSpPr>
+          <p:cNvPr id="29" name="Source"/>
+          <p:cNvSpPr txBox="1"/>
+          <p:nvPr/>
+        </p:nvSpPr>
+        <p:spPr>
+          <a:xfrm>
+            <a:off x="320040" y="6355080"/>
+            <a:ext cx="7132320" cy="274320"/>
+          </a:xfrm>
+          <a:prstGeom prst="rect">
+            <a:avLst/>
+          </a:prstGeom>
+          <a:noFill/>
+          <a:ln/>
+        </p:spPr>
+        <p:txBody>
+          <a:bodyPr wrap="square" lIns="0" tIns="0" rIns="0" bIns="0" rtlCol="0" anchor="ctr"/>
+          <a:lstStyle/>
+          <a:p>
+            <a:pPr indent="0" marL="0">
+              <a:buNone/>
+            </a:pPr>
+            <a:r>
+              <a:rPr lang="en-US" sz="1100" b="1" dirty="0">
+                <a:solidFill>
+                  <a:srgbClr val="1A1A1A"/>
+                </a:solidFill>
+              </a:rPr>
+              <a:t>Source: </a:t>
+            </a:r>
+            <a:pPr indent="0" marL="0">
+              <a:buNone/>
+            </a:pPr>
+            <a:r>
+              <a:rPr lang="en-US" sz="1100" dirty="0">
+                <a:solidFill>
+                  <a:srgbClr val="1A1A1A"/>
+                </a:solidFill>
+              </a:rPr>
+              <a:t>GPS model (facility cost $12M/MW; FTAI ~$1M/MW, 25 MW units); CNBC (Jun-26); Tom's Hardware (Oct-25); FTAI earnings calls</a:t>
+            </a:r>
+            <a:endParaRPr lang="en-US" sz="1100" dirty="0"/>
+          </a:p>
+        </p:txBody>
+      </p:sp>
+      <p:sp>
+        <p:nvSpPr>
+          <p:cNvPr id="25" name="Slide Number Placeholder 0"/>
+          <p:cNvSpPr>
+            <a:spLocks noGrp="1"/>
+          </p:cNvSpPr>
+          <p:nvPr>
+            <p:ph type="sldNum" sz="quarter" idx="4294967295"/>
+          </p:nvPr>
+        </p:nvSpPr>
+        <p:spPr>
+          <a:xfrm>
+            <a:off x="7635240" y="6327648"/>
+            <a:ext cx="411480" cy="274320"/>
+          </a:xfrm>
+          <a:prstGeom prst="rect">
+            <a:avLst/>
+          </a:prstGeom>
+          <a:extLst>
+            <a:ext uri="{C572A759-6A51-4108-AA02-DFA0A04FC94B}">
+              <ma14:wrappingTextBoxFlag xmlns:ma14="http://schemas.microsoft.com/office/mac/drawingml/2011/main" val="0"/>
+            </a:ext>
+          </a:extLst>
+        </p:spPr>
+        <p:txBody>
+          <a:bodyPr/>
+          <a:lstStyle>
+            <a:lvl1pPr>
+              <a:defRPr sz="1100">
+                <a:solidFill>
+                  <a:srgbClr val="1A1A1A"/>
+                </a:solidFill>
+              </a:defRPr>
+            </a:lvl1pPr>
+          </a:lstStyle>
+          <a:p>
+            <a:pPr algn="r"/>
+            <a:fld id="{F7021451-1387-4CA6-816F-3879F97B5CBC}" type="slidenum">
+              <a:rPr b="1" lang="en-US"/>
+              <a:t>22</a:t>
+            </a:fld>
+            <a:endParaRPr lang="en-US"/>
+          </a:p>
+        </p:txBody>
+      </p:sp>
+    </p:spTree>
+  </p:cSld>
+  <p:clrMapOvr>
+    <a:masterClrMapping/>
+  </p:clrMapOvr>
+</p:sld>
+</file>
+
+<file path=ppt/slides/slide23.xml><?xml version="1.0" encoding="utf-8"?>
+<p:sld xmlns:a="http://schemas.openxmlformats.org/drawingml/2006/main" xmlns:r="http://schemas.openxmlformats.org/officeDocument/2006/relationships" xmlns:p="http://schemas.openxmlformats.org/presentationml/2006/main">
+  <p:cSld name="Slide 23">
+    <p:spTree>
+      <p:nvGrpSpPr>
+        <p:cNvPr id="1" name=""/>
+        <p:cNvGrpSpPr/>
+        <p:nvPr/>
+      </p:nvGrpSpPr>
+      <p:grpSpPr>
+        <a:xfrm>
+          <a:off x="0" y="0"/>
+          <a:ext cx="0" cy="0"/>
+          <a:chOff x="0" y="0"/>
+          <a:chExt cx="0" cy="0"/>
+        </a:xfrm>
+      </p:grpSpPr>
+      <p:sp>
+        <p:nvSpPr>
+          <p:cNvPr id="2" name="Text 1"/>
+          <p:cNvSpPr/>
+          <p:nvPr>
+            <p:ph idx="102" type="title" hasCustomPrompt="1"/>
+          </p:nvPr>
+        </p:nvSpPr>
+        <p:spPr>
+          <a:xfrm>
+            <a:off x="320040" y="182880"/>
+            <a:ext cx="8503920" cy="640080"/>
+          </a:xfrm>
+          <a:prstGeom prst="rect">
+            <a:avLst/>
+          </a:prstGeom>
+          <a:noFill/>
+          <a:ln/>
+        </p:spPr>
+        <p:txBody>
+          <a:bodyPr wrap="square" lIns="0" tIns="0" rIns="0" bIns="0" rtlCol="0" anchor="ctr"/>
+          <a:lstStyle/>
+          <a:p>
+            <a:pPr algn="l" indent="0" marL="0">
+              <a:buNone/>
+            </a:pPr>
+            <a:r>
+              <a:rPr lang="en-US" sz="3200" b="1" dirty="0">
+                <a:solidFill>
+                  <a:schemeClr val="tx2"/>
+                </a:solidFill>
+              </a:rPr>
+              <a:t>Thesis 2: Power (4/4)</a:t>
+            </a:r>
+            <a:endParaRPr lang="en-US" sz="3200" dirty="0"/>
+          </a:p>
+        </p:txBody>
+      </p:sp>
+      <p:sp>
+        <p:nvSpPr>
+          <p:cNvPr id="3" name="Text 1"/>
+          <p:cNvSpPr/>
+          <p:nvPr>
+            <p:ph idx="103" type="body" hasCustomPrompt="1"/>
+          </p:nvPr>
+        </p:nvSpPr>
+        <p:spPr>
+          <a:xfrm>
+            <a:off x="320040" y="932688"/>
+            <a:ext cx="8503920" cy="566928"/>
+          </a:xfrm>
+          <a:prstGeom prst="rect">
+            <a:avLst/>
+          </a:prstGeom>
+          <a:noFill/>
+          <a:ln/>
+        </p:spPr>
+        <p:txBody>
+          <a:bodyPr wrap="square" lIns="0" tIns="0" rIns="0" bIns="0" rtlCol="0" anchor="t"/>
+          <a:lstStyle/>
+          <a:p>
+            <a:pPr algn="l" indent="0" marL="0">
+              <a:buNone/>
+            </a:pPr>
+            <a:r>
+              <a:rPr lang="en-US" sz="1700" b="1" dirty="0">
+                <a:solidFill>
+                  <a:schemeClr val="tx2"/>
+                </a:solidFill>
+              </a:rPr>
+              <a:t>A hyperscaler cancelled a rival's later-dated order but kept FTAI's. That's a vote of confidence.</a:t>
+            </a:r>
+            <a:endParaRPr lang="en-US" sz="1700" dirty="0"/>
+          </a:p>
+        </p:txBody>
+      </p:sp>
+      <p:sp>
+        <p:nvSpPr>
+          <p:cNvPr id="4" name="Signal header"/>
+          <p:cNvSpPr txBox="1"/>
+          <p:nvPr/>
+        </p:nvSpPr>
+        <p:spPr>
+          <a:xfrm>
+            <a:off x="320040" y="1554480"/>
+            <a:ext cx="4206240" cy="365760"/>
+          </a:xfrm>
+          <a:prstGeom prst="rect">
+            <a:avLst/>
+          </a:prstGeom>
+          <a:noFill/>
+          <a:ln/>
+        </p:spPr>
+        <p:txBody>
+          <a:bodyPr wrap="square" lIns="0" tIns="0" rIns="0" bIns="0" rtlCol="0" anchor="b"/>
+          <a:lstStyle/>
+          <a:p>
+            <a:pPr algn="ctr" indent="0" marL="0">
+              <a:buNone/>
+            </a:pPr>
+            <a:r>
+              <a:rPr lang="en-US" sz="1600" b="1" dirty="0">
+                <a:solidFill>
+                  <a:srgbClr val="1A1A1A"/>
+                </a:solidFill>
+              </a:rPr>
+              <a:t>Same Buyer, Different Outcome</a:t>
+            </a:r>
+            <a:endParaRPr lang="en-US" sz="1600" dirty="0"/>
+          </a:p>
+        </p:txBody>
+      </p:sp>
+      <p:sp>
+        <p:nvSpPr>
+          <p:cNvPr id="5" name="Signal header rule"/>
+          <p:cNvSpPr/>
+          <p:nvPr/>
+        </p:nvSpPr>
+        <p:spPr>
+          <a:xfrm>
+            <a:off x="320040" y="1975104"/>
+            <a:ext cx="4206240" cy="0"/>
+          </a:xfrm>
+          <a:prstGeom prst="line">
+            <a:avLst/>
+          </a:prstGeom>
+          <a:noFill/>
+          <a:ln w="12700">
+            <a:solidFill>
+              <a:srgbClr val="1A1A1A"/>
+            </a:solidFill>
+            <a:prstDash val="solid"/>
+          </a:ln>
+        </p:spPr>
+      </p:sp>
+      <p:sp>
+        <p:nvSpPr>
+          <p:cNvPr id="6" name="Competitor card"/>
+          <p:cNvSpPr txBox="1"/>
+          <p:nvPr/>
+        </p:nvSpPr>
+        <p:spPr>
+          <a:xfrm>
+            <a:off x="320040" y="2148840"/>
+            <a:ext cx="2029968" cy="1417320"/>
+          </a:xfrm>
+          <a:prstGeom prst="rect">
+            <a:avLst/>
+          </a:prstGeom>
+          <a:solidFill>
+            <a:srgbClr val="DCD8D3"/>
+          </a:solidFill>
+          <a:ln/>
+        </p:spPr>
+        <p:txBody>
+          <a:bodyPr wrap="square" lIns="76200" tIns="76200" rIns="76200" bIns="76200" rtlCol="0" anchor="ctr"/>
+          <a:lstStyle/>
+          <a:p>
+            <a:pPr algn="ctr" indent="0" marL="0">
+              <a:buNone/>
+            </a:pPr>
+            <a:r>
+              <a:rPr lang="en-US" sz="1700" b="1" dirty="0">
+                <a:solidFill>
+                  <a:schemeClr val="tx2"/>
+                </a:solidFill>
+              </a:rPr>
+              <a:t>Competitor</a:t>
+            </a:r>
+            <a:endParaRPr lang="en-US" sz="1700" dirty="0"/>
+          </a:p>
+          <a:p>
+            <a:pPr algn="ctr" indent="0" marL="0">
+              <a:buNone/>
+            </a:pPr>
+            <a:r>
+              <a:rPr lang="en-US" sz="1100" dirty="0">
+                <a:solidFill>
+                  <a:schemeClr val="tx2"/>
+                </a:solidFill>
+              </a:rPr>
+              <a:t>Similar aeroderivative product</a:t>
+            </a:r>
+            <a:endParaRPr lang="en-US" sz="1700" dirty="0"/>
+          </a:p>
+          <a:p>
+            <a:pPr algn="ctr" indent="0" marL="0">
+              <a:buNone/>
+            </a:pPr>
+            <a:r>
+              <a:rPr lang="en-US" sz="1100" dirty="0">
+                <a:solidFill>
+                  <a:schemeClr val="tx2"/>
+                </a:solidFill>
+              </a:rPr>
+              <a:t>Later delivery date</a:t>
+            </a:r>
+            <a:endParaRPr lang="en-US" sz="1700" dirty="0"/>
+          </a:p>
+        </p:txBody>
+      </p:sp>
+      <p:sp>
+        <p:nvSpPr>
+          <p:cNvPr id="7" name="Competitor arrow"/>
+          <p:cNvSpPr/>
+          <p:nvPr/>
+        </p:nvSpPr>
+        <p:spPr>
+          <a:xfrm>
+            <a:off x="1152144" y="3611880"/>
+            <a:ext cx="365760" cy="292608"/>
+          </a:xfrm>
+          <a:prstGeom prst="downArrow">
+            <a:avLst/>
+          </a:prstGeom>
+          <a:solidFill>
+            <a:srgbClr val="847C7A"/>
+          </a:solidFill>
+          <a:ln/>
+        </p:spPr>
+      </p:sp>
+      <p:sp>
+        <p:nvSpPr>
+          <p:cNvPr id="8" name="Competitor result"/>
+          <p:cNvSpPr txBox="1"/>
+          <p:nvPr/>
+        </p:nvSpPr>
+        <p:spPr>
+          <a:xfrm>
+            <a:off x="320040" y="3950208"/>
+            <a:ext cx="2029968" cy="566928"/>
+          </a:xfrm>
+          <a:prstGeom prst="rect">
+            <a:avLst/>
+          </a:prstGeom>
+          <a:solidFill>
+            <a:srgbClr val="FFFFFF"/>
+          </a:solidFill>
+          <a:ln w="19050">
+            <a:solidFill>
+              <a:srgbClr val="0A1C58"/>
+            </a:solidFill>
+          </a:ln>
+        </p:spPr>
+        <p:txBody>
+          <a:bodyPr wrap="square" lIns="0" tIns="0" rIns="0" bIns="0" rtlCol="0" anchor="ctr"/>
+          <a:lstStyle/>
+          <a:p>
+            <a:pPr algn="ctr" indent="0" marL="0">
+              <a:buNone/>
+            </a:pPr>
+            <a:r>
+              <a:rPr lang="en-US" sz="1500" b="1" dirty="0">
+                <a:solidFill>
+                  <a:schemeClr val="tx2"/>
+                </a:solidFill>
+              </a:rPr>
+              <a:t>Cancelled</a:t>
+            </a:r>
+            <a:endParaRPr lang="en-US" sz="1500" dirty="0"/>
+          </a:p>
+        </p:txBody>
+      </p:sp>
+      <p:sp>
+        <p:nvSpPr>
+          <p:cNvPr id="9" name="FTAI card"/>
+          <p:cNvSpPr txBox="1"/>
+          <p:nvPr/>
+        </p:nvSpPr>
+        <p:spPr>
+          <a:xfrm>
+            <a:off x="2496312" y="2148840"/>
+            <a:ext cx="2029968" cy="1417320"/>
+          </a:xfrm>
+          <a:prstGeom prst="rect">
+            <a:avLst/>
+          </a:prstGeom>
+          <a:solidFill>
+            <a:srgbClr val="0A1C58"/>
+          </a:solidFill>
+          <a:ln/>
+        </p:spPr>
+        <p:txBody>
+          <a:bodyPr wrap="square" lIns="76200" tIns="76200" rIns="76200" bIns="76200" rtlCol="0" anchor="ctr"/>
+          <a:lstStyle/>
+          <a:p>
+            <a:pPr algn="ctr" indent="0" marL="0">
+              <a:buNone/>
+            </a:pPr>
+            <a:r>
+              <a:rPr lang="en-US" sz="1700" b="1" dirty="0">
+                <a:solidFill>
+                  <a:schemeClr val="bg1"/>
+                </a:solidFill>
+              </a:rPr>
+              <a:t>FTAI</a:t>
+            </a:r>
+            <a:endParaRPr lang="en-US" sz="1700" dirty="0"/>
+          </a:p>
+          <a:p>
+            <a:pPr algn="ctr" indent="0" marL="0">
+              <a:buNone/>
+            </a:pPr>
+            <a:r>
+              <a:rPr lang="en-US" sz="1100" dirty="0">
+                <a:solidFill>
+                  <a:schemeClr val="bg1"/>
+                </a:solidFill>
+              </a:rPr>
+              <a:t>Mod-1, 25 MW units</a:t>
+            </a:r>
+            <a:endParaRPr lang="en-US" sz="1700" dirty="0"/>
+          </a:p>
+          <a:p>
+            <a:pPr algn="ctr" indent="0" marL="0">
+              <a:buNone/>
+            </a:pPr>
+            <a:r>
+              <a:rPr lang="en-US" sz="1100" dirty="0">
+                <a:solidFill>
+                  <a:schemeClr val="bg1"/>
+                </a:solidFill>
+              </a:rPr>
+              <a:t>Deliveries from 2027</a:t>
+            </a:r>
+            <a:endParaRPr lang="en-US" sz="1700" dirty="0"/>
+          </a:p>
+        </p:txBody>
+      </p:sp>
+      <p:sp>
+        <p:nvSpPr>
+          <p:cNvPr id="10" name="FTAI arrow"/>
+          <p:cNvSpPr/>
+          <p:nvPr/>
+        </p:nvSpPr>
+        <p:spPr>
+          <a:xfrm>
+            <a:off x="3328416" y="3611880"/>
+            <a:ext cx="365760" cy="292608"/>
+          </a:xfrm>
+          <a:prstGeom prst="downArrow">
+            <a:avLst/>
+          </a:prstGeom>
+          <a:solidFill>
+            <a:srgbClr val="847C7A"/>
+          </a:solidFill>
+          <a:ln/>
+        </p:spPr>
+      </p:sp>
+      <p:sp>
+        <p:nvSpPr>
+          <p:cNvPr id="11" name="FTAI result"/>
+          <p:cNvSpPr txBox="1"/>
+          <p:nvPr/>
+        </p:nvSpPr>
+        <p:spPr>
+          <a:xfrm>
+            <a:off x="2496312" y="3950208"/>
+            <a:ext cx="2029968" cy="566928"/>
+          </a:xfrm>
+          <a:prstGeom prst="rect">
+            <a:avLst/>
+          </a:prstGeom>
+          <a:solidFill>
+            <a:srgbClr val="0A1C58"/>
+          </a:solidFill>
+          <a:ln w="19050">
+            <a:solidFill>
+              <a:srgbClr val="0A1C58"/>
+            </a:solidFill>
+          </a:ln>
+        </p:spPr>
+        <p:txBody>
+          <a:bodyPr wrap="square" lIns="0" tIns="0" rIns="0" bIns="0" rtlCol="0" anchor="ctr"/>
+          <a:lstStyle/>
+          <a:p>
+            <a:pPr algn="ctr" indent="0" marL="0">
+              <a:buNone/>
+            </a:pPr>
+            <a:r>
+              <a:rPr lang="en-US" sz="1500" b="1" dirty="0">
+                <a:solidFill>
+                  <a:schemeClr val="bg1"/>
+                </a:solidFill>
+              </a:rPr>
+              <a:t>Intact: $1.465B</a:t>
+            </a:r>
+            <a:endParaRPr lang="en-US" sz="1500" dirty="0"/>
+          </a:p>
+        </p:txBody>
+      </p:sp>
+      <p:sp>
+        <p:nvSpPr>
+          <p:cNvPr id="12" name="Market value note"/>
+          <p:cNvSpPr txBox="1"/>
+          <p:nvPr/>
+        </p:nvSpPr>
+        <p:spPr>
+          <a:xfrm>
+            <a:off x="320040" y="4709160"/>
+            <a:ext cx="4206240" cy="457200"/>
+          </a:xfrm>
+          <a:prstGeom prst="rect">
+            <a:avLst/>
+          </a:prstGeom>
+          <a:solidFill>
+            <a:srgbClr val="EFEDEA"/>
+          </a:solidFill>
+          <a:ln/>
+        </p:spPr>
+        <p:txBody>
+          <a:bodyPr wrap="square" lIns="0" tIns="0" rIns="0" bIns="0" rtlCol="0" anchor="ctr"/>
+          <a:lstStyle/>
+          <a:p>
+            <a:pPr algn="ctr" indent="0" marL="0">
+              <a:buNone/>
+            </a:pPr>
+            <a:r>
+              <a:rPr lang="en-US" sz="1300" b="1" i="1" dirty="0">
+                <a:solidFill>
+                  <a:schemeClr val="tx2"/>
+                </a:solidFill>
+              </a:rPr>
+              <a:t>The market still values Power at ~zero.</a:t>
+            </a:r>
+            <a:endParaRPr lang="en-US" sz="1300" dirty="0"/>
+          </a:p>
+        </p:txBody>
+      </p:sp>
+      <p:sp>
+        <p:nvSpPr>
+          <p:cNvPr id="13" name="Power EBITDA header"/>
+          <p:cNvSpPr txBox="1"/>
+          <p:nvPr/>
+        </p:nvSpPr>
+        <p:spPr>
+          <a:xfrm>
+            <a:off x="4892040" y="1554480"/>
+            <a:ext cx="3931920" cy="365760"/>
+          </a:xfrm>
+          <a:prstGeom prst="rect">
+            <a:avLst/>
+          </a:prstGeom>
+          <a:noFill/>
+          <a:ln/>
+        </p:spPr>
+        <p:txBody>
+          <a:bodyPr wrap="square" lIns="0" tIns="0" rIns="0" bIns="0" rtlCol="0" anchor="b"/>
+          <a:lstStyle/>
+          <a:p>
+            <a:pPr algn="ctr" indent="0" marL="0">
+              <a:buNone/>
+            </a:pPr>
+            <a:r>
+              <a:rPr lang="en-US" sz="1600" b="1" dirty="0">
+                <a:solidFill>
+                  <a:srgbClr val="1A1A1A"/>
+                </a:solidFill>
+              </a:rPr>
+              <a:t>FTAI Power Adj. EBITDA ($M)</a:t>
+            </a:r>
+            <a:endParaRPr lang="en-US" sz="1600" dirty="0"/>
+          </a:p>
+        </p:txBody>
+      </p:sp>
+      <p:sp>
+        <p:nvSpPr>
+          <p:cNvPr id="14" name="Power EBITDA header rule"/>
+          <p:cNvSpPr/>
+          <p:nvPr/>
+        </p:nvSpPr>
+        <p:spPr>
+          <a:xfrm>
+            <a:off x="4892040" y="1975104"/>
+            <a:ext cx="3931920" cy="0"/>
+          </a:xfrm>
+          <a:prstGeom prst="line">
+            <a:avLst/>
+          </a:prstGeom>
+          <a:noFill/>
+          <a:ln w="12700">
+            <a:solidFill>
+              <a:srgbClr val="1A1A1A"/>
+            </a:solidFill>
+            <a:prstDash val="solid"/>
+          </a:ln>
+        </p:spPr>
+      </p:sp>
+      <p:graphicFrame>
+        <p:nvGraphicFramePr>
+          <p:cNvPr id="15" name="Power EBITDA chart" descr=""/>
+          <p:cNvGraphicFramePr/>
+          <p:nvPr/>
+        </p:nvGraphicFramePr>
+        <p:xfrm>
+          <a:off x="4892040" y="2103120"/>
+          <a:ext cx="3931920" cy="2880360"/>
+        </p:xfrm>
+        <a:graphic xmlns:a="http://schemas.openxmlformats.org/drawingml/2006/main">
+          <a:graphicData uri="http://schemas.openxmlformats.org/drawingml/2006/chart">
+            <c:chart xmlns:c="http://schemas.openxmlformats.org/drawingml/2006/chart" r:id="rId1"/>
+          </a:graphicData>
+        </a:graphic>
+      </p:graphicFrame>
+      <p:sp>
+        <p:nvSpPr>
+          <p:cNvPr id="16" name="Power EBITDA caption"/>
+          <p:cNvSpPr txBox="1"/>
+          <p:nvPr/>
+        </p:nvSpPr>
+        <p:spPr>
+          <a:xfrm>
+            <a:off x="4892040" y="4983480"/>
+            <a:ext cx="3931920" cy="274320"/>
+          </a:xfrm>
+          <a:prstGeom prst="rect">
+            <a:avLst/>
+          </a:prstGeom>
+          <a:noFill/>
+          <a:ln/>
+        </p:spPr>
+        <p:txBody>
+          <a:bodyPr wrap="square" lIns="0" tIns="0" rIns="0" bIns="0" rtlCol="0" anchor="ctr"/>
+          <a:lstStyle/>
+          <a:p>
+            <a:pPr algn="ctr" indent="0" marL="0">
+              <a:buNone/>
+            </a:pPr>
+            <a:r>
+              <a:rPr lang="en-US" sz="1000" i="1" dirty="0">
+                <a:solidFill>
+                  <a:schemeClr val="accent2"/>
+                </a:solidFill>
+              </a:rPr>
+              <a:t>Our FY27E sits at the low end of the $450–750M guide</a:t>
+            </a:r>
+            <a:endParaRPr lang="en-US" sz="1000" dirty="0"/>
+          </a:p>
+        </p:txBody>
+      </p:sp>
+      <p:sp>
+        <p:nvSpPr>
+          <p:cNvPr id="17" name="Takeaway"/>
+          <p:cNvSpPr txBox="1"/>
+          <p:nvPr/>
+        </p:nvSpPr>
+        <p:spPr>
+          <a:xfrm>
+            <a:off x="320040" y="5504688"/>
+            <a:ext cx="8503920" cy="566928"/>
+          </a:xfrm>
+          <a:prstGeom prst="rect">
+            <a:avLst/>
+          </a:prstGeom>
+          <a:solidFill>
+            <a:srgbClr val="0A1C58"/>
+          </a:solidFill>
+          <a:ln/>
+        </p:spPr>
+        <p:txBody>
+          <a:bodyPr wrap="square" lIns="101600" tIns="25400" rIns="101600" bIns="25400" rtlCol="0" anchor="ctr"/>
+          <a:lstStyle/>
+          <a:p>
+            <a:pPr algn="ctr" indent="0" marL="0">
+              <a:buNone/>
+            </a:pPr>
+            <a:r>
+              <a:rPr lang="en-US" sz="1700" b="1" dirty="0">
+                <a:solidFill>
+                  <a:schemeClr val="bg1"/>
+                </a:solidFill>
+              </a:rPr>
+              <a:t>Delivering just the low end of guidance is worth ~$52 a share the market isn't paying for.</a:t>
+            </a:r>
+            <a:endParaRPr lang="en-US" sz="1700" dirty="0"/>
+          </a:p>
+        </p:txBody>
+      </p:sp>
+      <p:sp>
+        <p:nvSpPr>
+          <p:cNvPr id="18" name="Source"/>
+          <p:cNvSpPr txBox="1"/>
+          <p:nvPr/>
+        </p:nvSpPr>
+        <p:spPr>
+          <a:xfrm>
+            <a:off x="320040" y="6355080"/>
+            <a:ext cx="7132320" cy="274320"/>
+          </a:xfrm>
+          <a:prstGeom prst="rect">
+            <a:avLst/>
+          </a:prstGeom>
+          <a:noFill/>
+          <a:ln/>
+        </p:spPr>
+        <p:txBody>
+          <a:bodyPr wrap="square" lIns="0" tIns="0" rIns="0" bIns="0" rtlCol="0" anchor="ctr"/>
+          <a:lstStyle/>
+          <a:p>
+            <a:pPr indent="0" marL="0">
+              <a:buNone/>
+            </a:pPr>
+            <a:r>
+              <a:rPr lang="en-US" sz="1100" b="1" dirty="0">
+                <a:solidFill>
+                  <a:srgbClr val="1A1A1A"/>
+                </a:solidFill>
+              </a:rPr>
+              <a:t>Source: </a:t>
+            </a:r>
+            <a:pPr indent="0" marL="0">
+              <a:buNone/>
+            </a:pPr>
+            <a:r>
+              <a:rPr lang="en-US" sz="1100" dirty="0">
+                <a:solidFill>
+                  <a:srgbClr val="1A1A1A"/>
+                </a:solidFill>
+              </a:rPr>
+              <a:t>GPS diligence; FTAI earnings calls and filings; GPS model (RPM tab: units × 25 MW × $1M/MW × 40% margin)</a:t>
+            </a:r>
+            <a:endParaRPr lang="en-US" sz="1100" dirty="0"/>
+          </a:p>
+        </p:txBody>
+      </p:sp>
+      <p:sp>
+        <p:nvSpPr>
+          <p:cNvPr id="25" name="Slide Number Placeholder 0"/>
+          <p:cNvSpPr>
+            <a:spLocks noGrp="1"/>
+          </p:cNvSpPr>
+          <p:nvPr>
+            <p:ph type="sldNum" sz="quarter" idx="4294967295"/>
+          </p:nvPr>
+        </p:nvSpPr>
+        <p:spPr>
+          <a:xfrm>
+            <a:off x="7635240" y="6327648"/>
+            <a:ext cx="411480" cy="274320"/>
+          </a:xfrm>
+          <a:prstGeom prst="rect">
+            <a:avLst/>
+          </a:prstGeom>
+          <a:extLst>
+            <a:ext uri="{C572A759-6A51-4108-AA02-DFA0A04FC94B}">
+              <ma14:wrappingTextBoxFlag xmlns:ma14="http://schemas.microsoft.com/office/mac/drawingml/2011/main" val="0"/>
+            </a:ext>
+          </a:extLst>
+        </p:spPr>
+        <p:txBody>
+          <a:bodyPr/>
+          <a:lstStyle>
+            <a:lvl1pPr>
+              <a:defRPr sz="1100">
+                <a:solidFill>
+                  <a:srgbClr val="1A1A1A"/>
+                </a:solidFill>
+              </a:defRPr>
+            </a:lvl1pPr>
+          </a:lstStyle>
+          <a:p>
+            <a:pPr algn="r"/>
+            <a:fld id="{F7021451-1387-4CA6-816F-3879F97B5CBC}" type="slidenum">
+              <a:rPr b="1" lang="en-US"/>
+              <a:t>23</a:t>
             </a:fld>
             <a:endParaRPr lang="en-US"/>
           </a:p>

--- a/deck/FTAI_Long_Pitch.pptx
+++ b/deck/FTAI_Long_Pitch.pptx
@@ -129,12 +129,12 @@
   <p:extLst>
     <p:ext uri="{521415D9-36F7-43E2-AB2F-B90AF26B5E84}">
       <p14:sectionLst xmlns:p14="http://schemas.microsoft.com/office/powerpoint/2010/main">
-        <p14:section name="Introduction" id="{64b27d7d-c1f1-06f1-06c4-f0414baf88e9}">
+        <p14:section name="Introduction" id="{29d64bb3-d2e3-ffc7-2187-283918748bc6}">
           <p14:sldIdLst>
             <p14:sldId id="256"/>
           </p14:sldIdLst>
         </p14:section>
-        <p14:section name="The Opportunity" id="{9797a552-2527-f7ed-92d6-c6851ff2551f}">
+        <p14:section name="The Opportunity" id="{a80c0cc2-b134-36f1-e2ed-e425c5a46b98}">
           <p14:sldIdLst>
             <p14:sldId id="257"/>
             <p14:sldId id="258"/>
@@ -142,18 +142,18 @@
             <p14:sldId id="260"/>
           </p14:sldIdLst>
         </p14:section>
-        <p14:section name="Returns" id="{398f241b-a6a1-fd09-85e5-d8f590ed79b2}">
+        <p14:section name="Returns" id="{a6f55545-4246-a9b3-5079-dab404258cfa}">
           <p14:sldIdLst>
             <p14:sldId id="261"/>
           </p14:sldIdLst>
         </p14:section>
-        <p14:section name="Business Overview" id="{74a643fc-7c43-781d-1697-64518b20c19d}">
+        <p14:section name="Business Overview" id="{2c2d5321-7746-5193-3f5e-4bbaa4a12437}">
           <p14:sldIdLst>
             <p14:sldId id="262"/>
             <p14:sldId id="263"/>
           </p14:sldIdLst>
         </p14:section>
-        <p14:section name="Thesis 1a" id="{8cfa63a4-192a-a850-9629-afba908b57d0}">
+        <p14:section name="Thesis 1a" id="{1c71c26b-42c3-98d5-9ef2-fc2a36cd3471}">
           <p14:sldIdLst>
             <p14:sldId id="264"/>
             <p14:sldId id="265"/>
@@ -161,7 +161,7 @@
             <p14:sldId id="267"/>
           </p14:sldIdLst>
         </p14:section>
-        <p14:section name="Thesis 1b" id="{a1c0ada0-0a46-8c1a-12f9-099c8d5d1a0c}">
+        <p14:section name="Thesis 1b" id="{de3f7c21-6ad1-28fc-bb87-8a3202f3b60f}">
           <p14:sldIdLst>
             <p14:sldId id="268"/>
             <p14:sldId id="269"/>
@@ -172,7 +172,7 @@
             <p14:sldId id="274"/>
           </p14:sldIdLst>
         </p14:section>
-        <p14:section name="Thesis 2" id="{027334ae-35ea-e5b2-2bbd-5651263e45bc}">
+        <p14:section name="Thesis 2" id="{0290b414-2bc0-bd23-0ce0-25bd0125a0a8}">
           <p14:sldIdLst>
             <p14:sldId id="275"/>
             <p14:sldId id="276"/>
@@ -7060,7 +7060,7 @@
             <c:size val="6"/>
             <c:spPr>
               <a:solidFill>
-                <a:srgbClr val="847C7A"/>
+                <a:srgbClr val="0A1C58"/>
               </a:solidFill>
               <a:ln w="9525" cap="flat">
                 <a:solidFill>
@@ -9314,7 +9314,7 @@
           <a:p>
             <a:r>
               <a:rPr lang="en-US" dirty="0"/>
-              <a:t>Build cost: GPS model assumes ~$12M per MW of data center facility spend, so 100 MW ≈ $1.2B before GPUs; FTAI's contract implies ~$1M per MW, so four 25 MW Mod-1 units ≈ $100M (~8%). Lead times: GE Vernova's large gas turbine order book is full until 2029 with orders out to 2031 (CNBC, Jun-26); new aeroderivative orders are being slotted for 2028–2030 (Tom's Hardware, Oct-25). FTAI guided first Mod-1 deliveries to Q4'26, later saying it is prudent to expect deliveries in 2027.</a:t>
+              <a:t>Build cost: GPS model assumes ~$12M per MW of data center facility spend, so 100 MW ≈ $1.2B before GPUs; FTAI's contract implies ~$1M per MW; 100 MW of load needs ~150 MW of turbines with the model's 50% redundancy allowance, so six 25 MW Mod-1 units ≈ $150M (~13%). Hot-weather derating could add a unit. Lead times: GE Vernova's large gas turbine order book is full until 2029 with orders out to 2031 (CNBC, Jun-26); new aeroderivative orders are being slotted for 2028–2030 (Tom's Hardware, Oct-25). FTAI guided first Mod-1 deliveries to Q4'26, later saying it is prudent to expect deliveries in 2027.</a:t>
             </a:r>
             <a:endParaRPr lang="en-US" dirty="0"/>
           </a:p>
@@ -20582,7 +20582,7 @@
                   <a:srgbClr val="1A1A1A"/>
                 </a:solidFill>
               </a:rPr>
-              <a:t>FTAI turbines (4 units)</a:t>
+              <a:t>FTAI turbines (6 units)</a:t>
             </a:r>
             <a:endParaRPr lang="en-US" sz="1200" dirty="0"/>
           </a:p>
@@ -20597,7 +20597,7 @@
         <p:spPr>
           <a:xfrm>
             <a:off x="2240280" y="3017520"/>
-            <a:ext cx="114300" cy="548640"/>
+            <a:ext cx="171450" cy="548640"/>
           </a:xfrm>
           <a:prstGeom prst="rect">
             <a:avLst/>
@@ -20616,7 +20616,7 @@
         </p:nvSpPr>
         <p:spPr>
           <a:xfrm>
-            <a:off x="2427732" y="3017520"/>
+            <a:off x="2484882" y="3017520"/>
             <a:ext cx="822960" cy="548640"/>
           </a:xfrm>
           <a:prstGeom prst="rect">
@@ -20638,7 +20638,7 @@
                   <a:schemeClr val="tx2"/>
                 </a:solidFill>
               </a:rPr>
-              <a:t>$100M</a:t>
+              <a:t>$150M</a:t>
             </a:r>
             <a:endParaRPr lang="en-US" sz="1300" dirty="0"/>
           </a:p>
@@ -20676,7 +20676,7 @@
                   <a:schemeClr val="tx2"/>
                 </a:solidFill>
               </a:rPr>
-              <a:t>~8%</a:t>
+              <a:t>~13%</a:t>
             </a:r>
             <a:endParaRPr lang="en-US" sz="2600" dirty="0"/>
           </a:p>
@@ -20690,7 +20690,7 @@
                   <a:srgbClr val="1A1A1A"/>
                 </a:solidFill>
               </a:rPr>
-              <a:t>Power is a rounding error next to the stranded build cost, before counting the GPUs inside.</a:t>
+              <a:t>of the build cost, with 50% spare units for reliability, before counting the GPUs inside.</a:t>
             </a:r>
             <a:endParaRPr lang="en-US" sz="2600" dirty="0"/>
           </a:p>
@@ -21221,7 +21221,7 @@
                   <a:srgbClr val="1A1A1A"/>
                 </a:solidFill>
               </a:rPr>
-              <a:t>GPS model (facility cost $12M/MW; FTAI ~$1M/MW, 25 MW units); CNBC (Jun-26); Tom's Hardware (Oct-25); FTAI earnings calls</a:t>
+              <a:t>GPS model ($12M/MW facility; ~$1M/MW, 25 MW units, 50% redundancy); CNBC (Jun-26); Tom's Hardware (Oct-25); FTAI calls</a:t>
             </a:r>
             <a:endParaRPr lang="en-US" sz="1100" dirty="0"/>
           </a:p>

--- a/deck/FTAI_Long_Pitch.pptx
+++ b/deck/FTAI_Long_Pitch.pptx
@@ -129,12 +129,12 @@
   <p:extLst>
     <p:ext uri="{521415D9-36F7-43E2-AB2F-B90AF26B5E84}">
       <p14:sectionLst xmlns:p14="http://schemas.microsoft.com/office/powerpoint/2010/main">
-        <p14:section name="Introduction" id="{29d64bb3-d2e3-ffc7-2187-283918748bc6}">
+        <p14:section name="Introduction" id="{f386708d-0750-4b0e-96ca-54087c4494b7}">
           <p14:sldIdLst>
             <p14:sldId id="256"/>
           </p14:sldIdLst>
         </p14:section>
-        <p14:section name="The Opportunity" id="{a80c0cc2-b134-36f1-e2ed-e425c5a46b98}">
+        <p14:section name="The Opportunity" id="{ac83b7ee-a0f7-60fa-f59a-ee8832280d2d}">
           <p14:sldIdLst>
             <p14:sldId id="257"/>
             <p14:sldId id="258"/>
@@ -142,18 +142,18 @@
             <p14:sldId id="260"/>
           </p14:sldIdLst>
         </p14:section>
-        <p14:section name="Returns" id="{a6f55545-4246-a9b3-5079-dab404258cfa}">
+        <p14:section name="Returns" id="{79475a2d-c7ea-afb9-825a-956766c31df3}">
           <p14:sldIdLst>
             <p14:sldId id="261"/>
           </p14:sldIdLst>
         </p14:section>
-        <p14:section name="Business Overview" id="{2c2d5321-7746-5193-3f5e-4bbaa4a12437}">
+        <p14:section name="Business Overview" id="{38a3760b-8233-a9aa-b7e8-75b1b170ce3b}">
           <p14:sldIdLst>
             <p14:sldId id="262"/>
             <p14:sldId id="263"/>
           </p14:sldIdLst>
         </p14:section>
-        <p14:section name="Thesis 1a" id="{1c71c26b-42c3-98d5-9ef2-fc2a36cd3471}">
+        <p14:section name="Thesis 1a" id="{64214430-4196-5367-eb16-514968d033e8}">
           <p14:sldIdLst>
             <p14:sldId id="264"/>
             <p14:sldId id="265"/>
@@ -161,7 +161,7 @@
             <p14:sldId id="267"/>
           </p14:sldIdLst>
         </p14:section>
-        <p14:section name="Thesis 1b" id="{de3f7c21-6ad1-28fc-bb87-8a3202f3b60f}">
+        <p14:section name="Thesis 1b" id="{b230bf73-af7c-85e4-1165-076d7533ecc0}">
           <p14:sldIdLst>
             <p14:sldId id="268"/>
             <p14:sldId id="269"/>
@@ -172,7 +172,7 @@
             <p14:sldId id="274"/>
           </p14:sldIdLst>
         </p14:section>
-        <p14:section name="Thesis 2" id="{0290b414-2bc0-bd23-0ce0-25bd0125a0a8}">
+        <p14:section name="Thesis 2" id="{590ed45c-801f-5cf6-95ec-5acbb80ad126}">
           <p14:sldIdLst>
             <p14:sldId id="275"/>
             <p14:sldId id="276"/>
@@ -4678,26 +4678,26 @@
               <c:strCache>
                 <c:ptCount val="1"/>
                 <c:pt idx="0">
-                  <c:v>Power EBITDA</c:v>
+                  <c:v>Return</c:v>
                 </c:pt>
               </c:strCache>
             </c:strRef>
           </c:tx>
           <c:spPr>
             <a:solidFill>
-              <a:srgbClr val="0A1C58"/>
+              <a:srgbClr val="B5AEA9"/>
             </a:solidFill>
             <a:effectLst/>
           </c:spPr>
           <c:invertIfNegative val="0"/>
           <c:dLbls>
-            <c:numFmt formatCode="#,##0" sourceLinked="0"/>
+            <c:numFmt formatCode="0%" sourceLinked="0"/>
             <c:txPr>
               <a:bodyPr/>
               <a:lstStyle/>
               <a:p>
                 <a:pPr>
-                  <a:defRPr b="1" i="0" strike="noStrike" sz="1200" u="none">
+                  <a:defRPr b="1" i="0" strike="noStrike" sz="1400" u="none">
                     <a:solidFill>
                       <a:srgbClr val="1A1A1A"/>
                     </a:solidFill>
@@ -4716,27 +4716,21 @@
           </c:dLbls>
           <c:cat>
             <c:multiLvlStrRef>
-              <c:f>Sheet1!$A$2:$A$7</c:f>
+              <c:f>Sheet1!$A$2:$A$5</c:f>
               <c:multiLvlStrCache>
-                <c:ptCount val="6"/>
+                <c:ptCount val="4"/>
                 <c:lvl>
                   <c:pt idx="0">
-                    <c:v>FY26E</c:v>
+                    <c:v>No Power</c:v>
                   </c:pt>
                   <c:pt idx="1">
-                    <c:v>FY27E</c:v>
+                    <c:v>Signed order</c:v>
                   </c:pt>
                   <c:pt idx="2">
-                    <c:v>FY28E</c:v>
+                    <c:v>+1 contract</c:v>
                   </c:pt>
                   <c:pt idx="3">
-                    <c:v>FY29E</c:v>
-                  </c:pt>
-                  <c:pt idx="4">
-                    <c:v>FY30E</c:v>
-                  </c:pt>
-                  <c:pt idx="5">
-                    <c:v>FY31E</c:v>
+                    <c:v>+2 contracts</c:v>
                   </c:pt>
                 </c:lvl>
               </c:multiLvlStrCache>
@@ -4744,40 +4738,123 @@
           </c:cat>
           <c:val>
             <c:numRef>
-              <c:f>Sheet1!$B$2:$B$7</c:f>
+              <c:f>Sheet1!$B$2:$B$5</c:f>
               <c:numCache>
                 <c:formatCode>General</c:formatCode>
-                <c:ptCount val="6"/>
+                <c:ptCount val="4"/>
                 <c:pt idx="0">
-                  <c:v>20</c:v>
+                  <c:v>0.35</c:v>
                 </c:pt>
                 <c:pt idx="1">
-                  <c:v>450</c:v>
+                  <c:v>0.66</c:v>
                 </c:pt>
                 <c:pt idx="2">
-                  <c:v>900</c:v>
+                  <c:v/>
                 </c:pt>
                 <c:pt idx="3">
-                  <c:v>1100</c:v>
+                  <c:v/>
                 </c:pt>
-                <c:pt idx="4">
-                  <c:v>1200</c:v>
+              </c:numCache>
+            </c:numRef>
+          </c:val>
+        </c:ser>
+        <c:ser>
+          <c:idx val="1"/>
+          <c:order val="1"/>
+          <c:tx>
+            <c:strRef>
+              <c:f>Sheet1!$C$1</c:f>
+              <c:strCache>
+                <c:ptCount val="1"/>
+                <c:pt idx="0">
+                  <c:v>Upside scenarios</c:v>
                 </c:pt>
-                <c:pt idx="5">
-                  <c:v>1300</c:v>
+              </c:strCache>
+            </c:strRef>
+          </c:tx>
+          <c:spPr>
+            <a:solidFill>
+              <a:srgbClr val="0A1C58"/>
+            </a:solidFill>
+            <a:effectLst/>
+          </c:spPr>
+          <c:invertIfNegative val="0"/>
+          <c:dLbls>
+            <c:numFmt formatCode="0%" sourceLinked="0"/>
+            <c:txPr>
+              <a:bodyPr/>
+              <a:lstStyle/>
+              <a:p>
+                <a:pPr>
+                  <a:defRPr b="1" i="0" strike="noStrike" sz="1400" u="none">
+                    <a:solidFill>
+                      <a:srgbClr val="1A1A1A"/>
+                    </a:solidFill>
+                    <a:latin typeface="+mn-lt"/>
+                  </a:defRPr>
+                </a:pPr>
+              </a:p>
+            </c:txPr>
+            <c:showLegendKey val="0"/>
+            <c:showVal val="1"/>
+            <c:showCatName val="0"/>
+            <c:showSerName val="0"/>
+            <c:showPercent val="0"/>
+            <c:showBubbleSize val="0"/>
+            <c:showLeaderLines val="0"/>
+          </c:dLbls>
+          <c:cat>
+            <c:multiLvlStrRef>
+              <c:f>Sheet1!$A$2:$A$5</c:f>
+              <c:multiLvlStrCache>
+                <c:ptCount val="4"/>
+                <c:lvl>
+                  <c:pt idx="0">
+                    <c:v>No Power</c:v>
+                  </c:pt>
+                  <c:pt idx="1">
+                    <c:v>Signed order</c:v>
+                  </c:pt>
+                  <c:pt idx="2">
+                    <c:v>+1 contract</c:v>
+                  </c:pt>
+                  <c:pt idx="3">
+                    <c:v>+2 contracts</c:v>
+                  </c:pt>
+                </c:lvl>
+              </c:multiLvlStrCache>
+            </c:multiLvlStrRef>
+          </c:cat>
+          <c:val>
+            <c:numRef>
+              <c:f>Sheet1!$C$2:$C$5</c:f>
+              <c:numCache>
+                <c:formatCode>General</c:formatCode>
+                <c:ptCount val="4"/>
+                <c:pt idx="0">
+                  <c:v/>
+                </c:pt>
+                <c:pt idx="1">
+                  <c:v/>
+                </c:pt>
+                <c:pt idx="2">
+                  <c:v>0.86</c:v>
+                </c:pt>
+                <c:pt idx="3">
+                  <c:v>1.07</c:v>
                 </c:pt>
               </c:numCache>
             </c:numRef>
           </c:val>
         </c:ser>
         <c:dLbls>
-          <c:numFmt formatCode="#,##0" sourceLinked="0"/>
+          <c:numFmt formatCode="0%" sourceLinked="0"/>
           <c:txPr>
             <a:bodyPr/>
             <a:lstStyle/>
             <a:p>
               <a:pPr>
-                <a:defRPr b="1" i="0" strike="noStrike" sz="1200" u="none">
+                <a:defRPr b="1" i="0" strike="noStrike" sz="1400" u="none">
                   <a:solidFill>
                     <a:srgbClr val="1A1A1A"/>
                   </a:solidFill>
@@ -4794,8 +4871,8 @@
           <c:showBubbleSize val="0"/>
           <c:showLeaderLines val="0"/>
         </c:dLbls>
-        <c:gapWidth val="35"/>
-        <c:overlap val="0"/>
+        <c:gapWidth val="45"/>
+        <c:overlap val="100"/>
         <c:axId val="2094734554"/>
         <c:axId val="2094734552"/>
         <c:axId val="2094734556"/>
@@ -4825,9 +4902,9 @@
           <a:lstStyle/>
           <a:p>
             <a:pPr>
-              <a:defRPr sz="1000" b="0" i="0" u="none" strike="noStrike">
-                <a:solidFill>
-                  <a:srgbClr val="1A1A1A"/>
+              <a:defRPr sz="1100" b="0" i="0" u="none" strike="noStrike">
+                <a:solidFill>
+                  <a:srgbClr val="0A1C58"/>
                 </a:solidFill>
                 <a:latin typeface="+mn-lt"/>
               </a:defRPr>
@@ -4845,7 +4922,7 @@
         <c:axId val="2094734552"/>
         <c:scaling>
           <c:orientation val="minMax"/>
-          <c:max val="1500"/>
+          <c:max val="1.25"/>
           <c:min val="0"/>
         </c:scaling>
         <c:delete val="1"/>
@@ -7198,7 +7275,7 @@
             <c:size val="6"/>
             <c:spPr>
               <a:solidFill>
-                <a:srgbClr val="0A1C58"/>
+                <a:srgbClr val="847C7A"/>
               </a:solidFill>
               <a:ln w="9525" cap="flat">
                 <a:solidFill>
@@ -9226,7 +9303,7 @@
           <a:p>
             <a:r>
               <a:rPr lang="en-US" dirty="0"/>
-              <a:t>Power agreements tab: 45 included hyperscaler deals with ~25.3 GW of new or restarted capacity. By full commercial operation date: ≤2026 1.8 GW, 2027 5.7 GW, 2028 3.3 GW, 2029 3.1 GW, 2030 2.2 GW, 2031 6.2 GW, 2032+ 3.0 GW. 57% is fully online in 2029 or later (38% by first COD). Existing-plant offtake deals (no new MW) are excluded.</a:t>
+              <a:t>Power agreements tab: 45 included hyperscaler deals with ~25.3 GW of new or restarted capacity. By full commercial operation date: ≤2026 1.8 GW, 2027 5.7 GW, 2028 3.3 GW, 2029 3.1 GW, 2030 2.2 GW, 2031 6.2 GW, 2032+ 3.0 GW. 57% is fully online in 2029 or later (38% by first COD). Existing-plant offtake deals (no new MW) are excluded. TV risk: a bridge business ends when the grid catches up. Mitigants: the modeled shortfall still widens to 47 GW by 2031; turbines can remain as on-site backup/peaking capacity; the SOTP applies 12x to Power vs. 16x for Aerospace, pricing in a shorter life. The DCF does carry Power growth to FY31, so judges may push here.</a:t>
             </a:r>
             <a:endParaRPr lang="en-US" dirty="0"/>
           </a:p>
@@ -9402,7 +9479,7 @@
           <a:p>
             <a:r>
               <a:rPr lang="en-US" dirty="0"/>
-              <a:t>Competitor cancellation is from GPS diligence: a competitor offering a similar aeroderivative product had its hyperscaler deal cancelled, with a later delivery date than FTAI's. Name and source to be added before presenting. FTAI's $1.465B order through the J&amp;F JV remains in place. Power EBITDA: units delivered 2 (FY26E), 45, 90, 110, 120, 130 × 25 MW × $1M/MW × 40% margin. Low-end FY27E guide $450M × 12x = ~$52/share in the SOTP.</a:t>
+              <a:t>Scenarios on FTAI's FY27 Power guide: the signed $1.465B J&amp;F order (est. 40–60 units, ~1.0–1.5 GW) underpins the $450M low end; reaching $750M needs ~$1B of new orders (follow-ons under the hyperscaler master agreement or a second customer). A second ~$1B contract is extrapolated at the same ~$300M step to ~$1,050M. Units ≈ $1B / ($1M/MW × 25 MW) ≈ 40 per contract. Returns: SOTP ex-Power $224.75 + Power EBITDA × 12 / 104.0M shares, vs. $167.03: no Power 35%, signed order 66% (base case), +1 contract 86%, +2 contracts 107%.</a:t>
             </a:r>
             <a:endParaRPr lang="en-US" dirty="0"/>
           </a:p>
@@ -19982,8 +20059,8 @@
         </p:nvSpPr>
         <p:spPr>
           <a:xfrm>
-            <a:off x="5212080" y="2148840"/>
-            <a:ext cx="3611880" cy="777240"/>
+            <a:off x="5212080" y="2103120"/>
+            <a:ext cx="3611880" cy="475488"/>
           </a:xfrm>
           <a:prstGeom prst="rect">
             <a:avLst/>
@@ -20001,28 +20078,25 @@
               <a:buNone/>
             </a:pPr>
             <a:r>
-              <a:rPr lang="en-US" sz="1500" b="1" dirty="0">
+              <a:rPr lang="en-US" sz="1400" b="1" dirty="0">
                 <a:solidFill>
                   <a:schemeClr val="tx2"/>
                 </a:solidFill>
               </a:rPr>
-              <a:t>Today</a:t>
-            </a:r>
-            <a:endParaRPr lang="en-US" sz="1500" dirty="0"/>
-          </a:p>
-          <a:p>
-            <a:pPr algn="ctr" indent="0" marL="0">
-              <a:buNone/>
-            </a:pPr>
-            <a:r>
-              <a:rPr lang="en-US" sz="1200" dirty="0">
+              <a:t>Today  </a:t>
+            </a:r>
+            <a:pPr algn="ctr" indent="0" marL="0">
+              <a:buNone/>
+            </a:pPr>
+            <a:r>
+              <a:rPr lang="en-US" sz="1100" dirty="0">
                 <a:solidFill>
                   <a:schemeClr val="tx2"/>
                 </a:solidFill>
               </a:rPr>
-              <a:t>GPUs bought, data center shells built</a:t>
-            </a:r>
-            <a:endParaRPr lang="en-US" sz="1500" dirty="0"/>
+              <a:t>GPUs and shells ready</a:t>
+            </a:r>
+            <a:endParaRPr lang="en-US" sz="1400" dirty="0"/>
           </a:p>
         </p:txBody>
       </p:sp>
@@ -20034,8 +20108,8 @@
         </p:nvSpPr>
         <p:spPr>
           <a:xfrm>
-            <a:off x="6830568" y="2944368"/>
-            <a:ext cx="365760" cy="182880"/>
+            <a:off x="6876288" y="2587752"/>
+            <a:ext cx="274320" cy="109728"/>
           </a:xfrm>
           <a:prstGeom prst="downArrow">
             <a:avLst/>
@@ -20054,8 +20128,8 @@
         </p:nvSpPr>
         <p:spPr>
           <a:xfrm>
-            <a:off x="5212080" y="3136392"/>
-            <a:ext cx="3611880" cy="777240"/>
+            <a:off x="5212080" y="2706624"/>
+            <a:ext cx="3611880" cy="475488"/>
           </a:xfrm>
           <a:prstGeom prst="rect">
             <a:avLst/>
@@ -20073,28 +20147,25 @@
               <a:buNone/>
             </a:pPr>
             <a:r>
-              <a:rPr lang="en-US" sz="1500" b="1" dirty="0">
+              <a:rPr lang="en-US" sz="1400" b="1" dirty="0">
                 <a:solidFill>
                   <a:schemeClr val="bg1"/>
                 </a:solidFill>
               </a:rPr>
-              <a:t>2026–2029</a:t>
-            </a:r>
-            <a:endParaRPr lang="en-US" sz="1500" dirty="0"/>
-          </a:p>
-          <a:p>
-            <a:pPr algn="ctr" indent="0" marL="0">
-              <a:buNone/>
-            </a:pPr>
-            <a:r>
-              <a:rPr lang="en-US" sz="1200" dirty="0">
+              <a:t>2026–29  </a:t>
+            </a:r>
+            <a:pPr algn="ctr" indent="0" marL="0">
+              <a:buNone/>
+            </a:pPr>
+            <a:r>
+              <a:rPr lang="en-US" sz="1100" dirty="0">
                 <a:solidFill>
                   <a:schemeClr val="bg1"/>
                 </a:solidFill>
               </a:rPr>
-              <a:t>FTAI's mobile turbines power the site</a:t>
-            </a:r>
-            <a:endParaRPr lang="en-US" sz="1500" dirty="0"/>
+              <a:t>FTAI turbines power the site</a:t>
+            </a:r>
+            <a:endParaRPr lang="en-US" sz="1400" dirty="0"/>
           </a:p>
         </p:txBody>
       </p:sp>
@@ -20106,8 +20177,8 @@
         </p:nvSpPr>
         <p:spPr>
           <a:xfrm>
-            <a:off x="6830568" y="3931920"/>
-            <a:ext cx="365760" cy="182880"/>
+            <a:off x="6876288" y="3191256"/>
+            <a:ext cx="274320" cy="109728"/>
           </a:xfrm>
           <a:prstGeom prst="downArrow">
             <a:avLst/>
@@ -20126,8 +20197,8 @@
         </p:nvSpPr>
         <p:spPr>
           <a:xfrm>
-            <a:off x="5212080" y="4123944"/>
-            <a:ext cx="3611880" cy="777240"/>
+            <a:off x="5212080" y="3310128"/>
+            <a:ext cx="3611880" cy="475488"/>
           </a:xfrm>
           <a:prstGeom prst="rect">
             <a:avLst/>
@@ -20145,34 +20216,129 @@
               <a:buNone/>
             </a:pPr>
             <a:r>
-              <a:rPr lang="en-US" sz="1500" b="1" dirty="0">
+              <a:rPr lang="en-US" sz="1400" b="1" dirty="0">
                 <a:solidFill>
                   <a:schemeClr val="tx2"/>
                 </a:solidFill>
               </a:rPr>
-              <a:t>2029+</a:t>
-            </a:r>
-            <a:endParaRPr lang="en-US" sz="1500" dirty="0"/>
-          </a:p>
-          <a:p>
-            <a:pPr algn="ctr" indent="0" marL="0">
-              <a:buNone/>
-            </a:pPr>
-            <a:r>
-              <a:rPr lang="en-US" sz="1200" dirty="0">
+              <a:t>2029+  </a:t>
+            </a:r>
+            <a:pPr algn="ctr" indent="0" marL="0">
+              <a:buNone/>
+            </a:pPr>
+            <a:r>
+              <a:rPr lang="en-US" sz="1100" dirty="0">
                 <a:solidFill>
                   <a:schemeClr val="tx2"/>
                 </a:solidFill>
               </a:rPr>
-              <a:t>Grid connections and new plants arrive</a:t>
-            </a:r>
-            <a:endParaRPr lang="en-US" sz="1500" dirty="0"/>
-          </a:p>
-        </p:txBody>
-      </p:sp>
-      <p:sp>
-        <p:nvSpPr>
-          <p:cNvPr id="16" name="Takeaway"/>
+              <a:t>Grid and new plants arrive</a:t>
+            </a:r>
+            <a:endParaRPr lang="en-US" sz="1400" dirty="0"/>
+          </a:p>
+        </p:txBody>
+      </p:sp>
+      <p:sp>
+        <p:nvSpPr>
+          <p:cNvPr id="16" name="TV risk box"/>
+          <p:cNvSpPr txBox="1"/>
+          <p:nvPr/>
+        </p:nvSpPr>
+        <p:spPr>
+          <a:xfrm>
+            <a:off x="5212080" y="3977640"/>
+            <a:ext cx="3611880" cy="1371600"/>
+          </a:xfrm>
+          <a:prstGeom prst="rect">
+            <a:avLst/>
+          </a:prstGeom>
+          <a:noFill/>
+          <a:ln w="15875">
+            <a:solidFill>
+              <a:srgbClr val="0A1C58"/>
+            </a:solidFill>
+            <a:prstDash val="dash"/>
+          </a:ln>
+        </p:spPr>
+        <p:txBody>
+          <a:bodyPr wrap="square" lIns="101600" tIns="38100" rIns="76200" bIns="38100" rtlCol="0" anchor="ctr"/>
+          <a:lstStyle/>
+          <a:p>
+            <a:pPr algn="l" indent="0" marL="0">
+              <a:spcAft>
+                <a:spcPts val="200"/>
+              </a:spcAft>
+              <a:buNone/>
+            </a:pPr>
+            <a:r>
+              <a:rPr lang="en-US" sz="1300" b="1" dirty="0">
+                <a:solidFill>
+                  <a:schemeClr val="tx2"/>
+                </a:solidFill>
+              </a:rPr>
+              <a:t>But does the bridge end? (TV risk)</a:t>
+            </a:r>
+            <a:endParaRPr lang="en-US" sz="1300" dirty="0"/>
+          </a:p>
+          <a:p>
+            <a:pPr algn="l" marL="152400" indent="-152400">
+              <a:spcAft>
+                <a:spcPts val="200"/>
+              </a:spcAft>
+              <a:buSzPct val="100000"/>
+              <a:buChar char="•"/>
+            </a:pPr>
+            <a:r>
+              <a:rPr lang="en-US" sz="1100" dirty="0">
+                <a:solidFill>
+                  <a:srgbClr val="1A1A1A"/>
+                </a:solidFill>
+              </a:rPr>
+              <a:t>Gap still widens: 47 GW short in 2031</a:t>
+            </a:r>
+            <a:endParaRPr lang="en-US" sz="1300" dirty="0"/>
+          </a:p>
+          <a:p>
+            <a:pPr algn="l" marL="152400" indent="-152400">
+              <a:spcAft>
+                <a:spcPts val="200"/>
+              </a:spcAft>
+              <a:buSzPct val="100000"/>
+              <a:buChar char="•"/>
+            </a:pPr>
+            <a:r>
+              <a:rPr lang="en-US" sz="1100" dirty="0">
+                <a:solidFill>
+                  <a:srgbClr val="1A1A1A"/>
+                </a:solidFill>
+              </a:rPr>
+              <a:t>Units can stay as backup and peaking power</a:t>
+            </a:r>
+            <a:endParaRPr lang="en-US" sz="1300" dirty="0"/>
+          </a:p>
+          <a:p>
+            <a:pPr algn="l" marL="152400" indent="-152400">
+              <a:spcAft>
+                <a:spcPts val="200"/>
+              </a:spcAft>
+              <a:buSzPct val="100000"/>
+              <a:buChar char="•"/>
+            </a:pPr>
+            <a:r>
+              <a:rPr lang="en-US" sz="1100" dirty="0">
+                <a:solidFill>
+                  <a:srgbClr val="1A1A1A"/>
+                </a:solidFill>
+              </a:rPr>
+              <a:t>Valued at 12x, below Aerospace's 16x</a:t>
+            </a:r>
+            <a:endParaRPr lang="en-US" sz="1300" dirty="0"/>
+          </a:p>
+        </p:txBody>
+      </p:sp>
+      <p:sp>
+        <p:nvSpPr>
+          <p:cNvPr id="17" name="Takeaway"/>
           <p:cNvSpPr txBox="1"/>
           <p:nvPr/>
         </p:nvSpPr>
@@ -20210,7 +20376,7 @@
       </p:sp>
       <p:sp>
         <p:nvSpPr>
-          <p:cNvPr id="17" name="Source"/>
+          <p:cNvPr id="18" name="Source"/>
           <p:cNvSpPr txBox="1"/>
           <p:nvPr/>
         </p:nvSpPr>
@@ -21367,7 +21533,7 @@
                   <a:schemeClr val="tx2"/>
                 </a:solidFill>
               </a:rPr>
-              <a:t>A hyperscaler cancelled a rival's later-dated order but kept FTAI's. That's a vote of confidence.</a:t>
+              <a:t>Each new contract the size of FTAI's first adds ~20 points to your return.</a:t>
             </a:r>
             <a:endParaRPr lang="en-US" sz="1700" dirty="0"/>
           </a:p>
@@ -21375,14 +21541,14 @@
       </p:sp>
       <p:sp>
         <p:nvSpPr>
-          <p:cNvPr id="4" name="Signal header"/>
+          <p:cNvPr id="4" name="Scenario header"/>
           <p:cNvSpPr txBox="1"/>
           <p:nvPr/>
         </p:nvSpPr>
         <p:spPr>
           <a:xfrm>
             <a:off x="320040" y="1554480"/>
-            <a:ext cx="4206240" cy="365760"/>
+            <a:ext cx="3429000" cy="365760"/>
           </a:xfrm>
           <a:prstGeom prst="rect">
             <a:avLst/>
@@ -21403,7 +21569,7 @@
                   <a:srgbClr val="1A1A1A"/>
                 </a:solidFill>
               </a:rPr>
-              <a:t>Same Buyer, Different Outcome</a:t>
+              <a:t>Scenario Build (FY27E)</a:t>
             </a:r>
             <a:endParaRPr lang="en-US" sz="1600" dirty="0"/>
           </a:p>
@@ -21411,14 +21577,14 @@
       </p:sp>
       <p:sp>
         <p:nvSpPr>
-          <p:cNvPr id="5" name="Signal header rule"/>
+          <p:cNvPr id="5" name="Scenario header rule"/>
           <p:cNvSpPr/>
           <p:nvPr/>
         </p:nvSpPr>
         <p:spPr>
           <a:xfrm>
             <a:off x="320040" y="1975104"/>
-            <a:ext cx="4206240" cy="0"/>
+            <a:ext cx="3429000" cy="0"/>
           </a:xfrm>
           <a:prstGeom prst="line">
             <a:avLst/>
@@ -21434,14 +21600,86 @@
       </p:sp>
       <p:sp>
         <p:nvSpPr>
-          <p:cNvPr id="6" name="Competitor card"/>
+          <p:cNvPr id="6" name="Units col"/>
           <p:cNvSpPr txBox="1"/>
           <p:nvPr/>
         </p:nvSpPr>
         <p:spPr>
           <a:xfrm>
-            <a:off x="320040" y="2148840"/>
-            <a:ext cx="2029968" cy="1417320"/>
+            <a:off x="1691640" y="2029968"/>
+            <a:ext cx="914400" cy="228600"/>
+          </a:xfrm>
+          <a:prstGeom prst="rect">
+            <a:avLst/>
+          </a:prstGeom>
+          <a:noFill/>
+          <a:ln/>
+        </p:spPr>
+        <p:txBody>
+          <a:bodyPr wrap="square" lIns="0" tIns="0" rIns="0" bIns="0" rtlCol="0" anchor="ctr"/>
+          <a:lstStyle/>
+          <a:p>
+            <a:pPr algn="ctr" indent="0" marL="0">
+              <a:buNone/>
+            </a:pPr>
+            <a:r>
+              <a:rPr lang="en-US" sz="1100" i="1" dirty="0">
+                <a:solidFill>
+                  <a:schemeClr val="accent2"/>
+                </a:solidFill>
+              </a:rPr>
+              <a:t>Units</a:t>
+            </a:r>
+            <a:endParaRPr lang="en-US" sz="1100" dirty="0"/>
+          </a:p>
+        </p:txBody>
+      </p:sp>
+      <p:sp>
+        <p:nvSpPr>
+          <p:cNvPr id="7" name="EBITDA col"/>
+          <p:cNvSpPr txBox="1"/>
+          <p:nvPr/>
+        </p:nvSpPr>
+        <p:spPr>
+          <a:xfrm>
+            <a:off x="2697480" y="2029968"/>
+            <a:ext cx="1051560" cy="228600"/>
+          </a:xfrm>
+          <a:prstGeom prst="rect">
+            <a:avLst/>
+          </a:prstGeom>
+          <a:noFill/>
+          <a:ln/>
+        </p:spPr>
+        <p:txBody>
+          <a:bodyPr wrap="square" lIns="0" tIns="0" rIns="0" bIns="0" rtlCol="0" anchor="ctr"/>
+          <a:lstStyle/>
+          <a:p>
+            <a:pPr algn="ctr" indent="0" marL="0">
+              <a:buNone/>
+            </a:pPr>
+            <a:r>
+              <a:rPr lang="en-US" sz="1100" i="1" dirty="0">
+                <a:solidFill>
+                  <a:schemeClr val="accent2"/>
+                </a:solidFill>
+              </a:rPr>
+              <a:t>EBITDA</a:t>
+            </a:r>
+            <a:endParaRPr lang="en-US" sz="1100" dirty="0"/>
+          </a:p>
+        </p:txBody>
+      </p:sp>
+      <p:sp>
+        <p:nvSpPr>
+          <p:cNvPr id="8" name="Scenario 1 name"/>
+          <p:cNvSpPr txBox="1"/>
+          <p:nvPr/>
+        </p:nvSpPr>
+        <p:spPr>
+          <a:xfrm>
+            <a:off x="320040" y="2304288"/>
+            <a:ext cx="1325880" cy="713232"/>
           </a:xfrm>
           <a:prstGeom prst="rect">
             <a:avLst/>
@@ -21452,94 +21690,150 @@
           <a:ln/>
         </p:spPr>
         <p:txBody>
-          <a:bodyPr wrap="square" lIns="76200" tIns="76200" rIns="76200" bIns="76200" rtlCol="0" anchor="ctr"/>
-          <a:lstStyle/>
-          <a:p>
-            <a:pPr algn="ctr" indent="0" marL="0">
-              <a:buNone/>
-            </a:pPr>
-            <a:r>
-              <a:rPr lang="en-US" sz="1700" b="1" dirty="0">
+          <a:bodyPr wrap="square" lIns="25400" tIns="25400" rIns="25400" bIns="25400" rtlCol="0" anchor="ctr"/>
+          <a:lstStyle/>
+          <a:p>
+            <a:pPr algn="ctr" indent="0" marL="0">
+              <a:buNone/>
+            </a:pPr>
+            <a:r>
+              <a:rPr lang="en-US" sz="1400" b="1" dirty="0">
                 <a:solidFill>
                   <a:schemeClr val="tx2"/>
                 </a:solidFill>
               </a:rPr>
-              <a:t>Competitor</a:t>
-            </a:r>
-            <a:endParaRPr lang="en-US" sz="1700" dirty="0"/>
-          </a:p>
-          <a:p>
-            <a:pPr algn="ctr" indent="0" marL="0">
-              <a:buNone/>
-            </a:pPr>
-            <a:r>
-              <a:rPr lang="en-US" sz="1100" dirty="0">
+              <a:t>Signed order</a:t>
+            </a:r>
+            <a:endParaRPr lang="en-US" sz="1400" dirty="0"/>
+          </a:p>
+        </p:txBody>
+      </p:sp>
+      <p:sp>
+        <p:nvSpPr>
+          <p:cNvPr id="9" name="Scenario 1 units"/>
+          <p:cNvSpPr txBox="1"/>
+          <p:nvPr/>
+        </p:nvSpPr>
+        <p:spPr>
+          <a:xfrm>
+            <a:off x="1691640" y="2304288"/>
+            <a:ext cx="914400" cy="713232"/>
+          </a:xfrm>
+          <a:prstGeom prst="rect">
+            <a:avLst/>
+          </a:prstGeom>
+          <a:noFill/>
+          <a:ln/>
+        </p:spPr>
+        <p:txBody>
+          <a:bodyPr wrap="square" lIns="0" tIns="0" rIns="0" bIns="0" rtlCol="0" anchor="ctr"/>
+          <a:lstStyle/>
+          <a:p>
+            <a:pPr algn="ctr" indent="0" marL="0">
+              <a:buNone/>
+            </a:pPr>
+            <a:r>
+              <a:rPr lang="en-US" sz="1400" b="1" dirty="0">
                 <a:solidFill>
                   <a:schemeClr val="tx2"/>
                 </a:solidFill>
               </a:rPr>
-              <a:t>Similar aeroderivative product</a:t>
-            </a:r>
-            <a:endParaRPr lang="en-US" sz="1700" dirty="0"/>
-          </a:p>
-          <a:p>
-            <a:pPr algn="ctr" indent="0" marL="0">
-              <a:buNone/>
-            </a:pPr>
-            <a:r>
-              <a:rPr lang="en-US" sz="1100" dirty="0">
+              <a:t>~50</a:t>
+            </a:r>
+            <a:endParaRPr lang="en-US" sz="1400" dirty="0"/>
+          </a:p>
+        </p:txBody>
+      </p:sp>
+      <p:sp>
+        <p:nvSpPr>
+          <p:cNvPr id="10" name="Scenario 1 EBITDA"/>
+          <p:cNvSpPr txBox="1"/>
+          <p:nvPr/>
+        </p:nvSpPr>
+        <p:spPr>
+          <a:xfrm>
+            <a:off x="2697480" y="2304288"/>
+            <a:ext cx="1051560" cy="713232"/>
+          </a:xfrm>
+          <a:prstGeom prst="rect">
+            <a:avLst/>
+          </a:prstGeom>
+          <a:noFill/>
+          <a:ln/>
+        </p:spPr>
+        <p:txBody>
+          <a:bodyPr wrap="square" lIns="0" tIns="0" rIns="0" bIns="0" rtlCol="0" anchor="ctr"/>
+          <a:lstStyle/>
+          <a:p>
+            <a:pPr algn="ctr" indent="0" marL="0">
+              <a:buNone/>
+            </a:pPr>
+            <a:r>
+              <a:rPr lang="en-US" sz="1600" b="1" dirty="0">
                 <a:solidFill>
                   <a:schemeClr val="tx2"/>
                 </a:solidFill>
               </a:rPr>
-              <a:t>Later delivery date</a:t>
-            </a:r>
-            <a:endParaRPr lang="en-US" sz="1700" dirty="0"/>
-          </a:p>
-        </p:txBody>
-      </p:sp>
-      <p:sp>
-        <p:nvSpPr>
-          <p:cNvPr id="7" name="Competitor arrow"/>
-          <p:cNvSpPr/>
-          <p:nvPr/>
-        </p:nvSpPr>
-        <p:spPr>
-          <a:xfrm>
-            <a:off x="1152144" y="3611880"/>
-            <a:ext cx="365760" cy="292608"/>
-          </a:xfrm>
-          <a:prstGeom prst="downArrow">
+              <a:t>$450M</a:t>
+            </a:r>
+            <a:endParaRPr lang="en-US" sz="1600" dirty="0"/>
+          </a:p>
+        </p:txBody>
+      </p:sp>
+      <p:sp>
+        <p:nvSpPr>
+          <p:cNvPr id="11" name="Scenario 2 name"/>
+          <p:cNvSpPr txBox="1"/>
+          <p:nvPr/>
+        </p:nvSpPr>
+        <p:spPr>
+          <a:xfrm>
+            <a:off x="320040" y="3172968"/>
+            <a:ext cx="1325880" cy="713232"/>
+          </a:xfrm>
+          <a:prstGeom prst="rect">
             <a:avLst/>
           </a:prstGeom>
           <a:solidFill>
-            <a:srgbClr val="847C7A"/>
+            <a:srgbClr val="B5AEA9"/>
           </a:solidFill>
           <a:ln/>
         </p:spPr>
-      </p:sp>
-      <p:sp>
-        <p:nvSpPr>
-          <p:cNvPr id="8" name="Competitor result"/>
+        <p:txBody>
+          <a:bodyPr wrap="square" lIns="25400" tIns="25400" rIns="25400" bIns="25400" rtlCol="0" anchor="ctr"/>
+          <a:lstStyle/>
+          <a:p>
+            <a:pPr algn="ctr" indent="0" marL="0">
+              <a:buNone/>
+            </a:pPr>
+            <a:r>
+              <a:rPr lang="en-US" sz="1400" b="1" dirty="0">
+                <a:solidFill>
+                  <a:schemeClr val="tx2"/>
+                </a:solidFill>
+              </a:rPr>
+              <a:t>+1 contract</a:t>
+            </a:r>
+            <a:endParaRPr lang="en-US" sz="1400" dirty="0"/>
+          </a:p>
+        </p:txBody>
+      </p:sp>
+      <p:sp>
+        <p:nvSpPr>
+          <p:cNvPr id="12" name="Scenario 2 units"/>
           <p:cNvSpPr txBox="1"/>
           <p:nvPr/>
         </p:nvSpPr>
         <p:spPr>
           <a:xfrm>
-            <a:off x="320040" y="3950208"/>
-            <a:ext cx="2029968" cy="566928"/>
-          </a:xfrm>
-          <a:prstGeom prst="rect">
-            <a:avLst/>
-          </a:prstGeom>
-          <a:solidFill>
-            <a:srgbClr val="FFFFFF"/>
-          </a:solidFill>
-          <a:ln w="19050">
-            <a:solidFill>
-              <a:srgbClr val="0A1C58"/>
-            </a:solidFill>
-          </a:ln>
+            <a:off x="1691640" y="3172968"/>
+            <a:ext cx="914400" cy="713232"/>
+          </a:xfrm>
+          <a:prstGeom prst="rect">
+            <a:avLst/>
+          </a:prstGeom>
+          <a:noFill/>
+          <a:ln/>
         </p:spPr>
         <p:txBody>
           <a:bodyPr wrap="square" lIns="0" tIns="0" rIns="0" bIns="0" rtlCol="0" anchor="ctr"/>
@@ -21549,27 +21843,63 @@
               <a:buNone/>
             </a:pPr>
             <a:r>
-              <a:rPr lang="en-US" sz="1500" b="1" dirty="0">
+              <a:rPr lang="en-US" sz="1400" b="1" dirty="0">
                 <a:solidFill>
                   <a:schemeClr val="tx2"/>
                 </a:solidFill>
               </a:rPr>
-              <a:t>Cancelled</a:t>
-            </a:r>
-            <a:endParaRPr lang="en-US" sz="1500" dirty="0"/>
-          </a:p>
-        </p:txBody>
-      </p:sp>
-      <p:sp>
-        <p:nvSpPr>
-          <p:cNvPr id="9" name="FTAI card"/>
+              <a:t>~90</a:t>
+            </a:r>
+            <a:endParaRPr lang="en-US" sz="1400" dirty="0"/>
+          </a:p>
+        </p:txBody>
+      </p:sp>
+      <p:sp>
+        <p:nvSpPr>
+          <p:cNvPr id="13" name="Scenario 2 EBITDA"/>
           <p:cNvSpPr txBox="1"/>
           <p:nvPr/>
         </p:nvSpPr>
         <p:spPr>
           <a:xfrm>
-            <a:off x="2496312" y="2148840"/>
-            <a:ext cx="2029968" cy="1417320"/>
+            <a:off x="2697480" y="3172968"/>
+            <a:ext cx="1051560" cy="713232"/>
+          </a:xfrm>
+          <a:prstGeom prst="rect">
+            <a:avLst/>
+          </a:prstGeom>
+          <a:noFill/>
+          <a:ln/>
+        </p:spPr>
+        <p:txBody>
+          <a:bodyPr wrap="square" lIns="0" tIns="0" rIns="0" bIns="0" rtlCol="0" anchor="ctr"/>
+          <a:lstStyle/>
+          <a:p>
+            <a:pPr algn="ctr" indent="0" marL="0">
+              <a:buNone/>
+            </a:pPr>
+            <a:r>
+              <a:rPr lang="en-US" sz="1600" b="1" dirty="0">
+                <a:solidFill>
+                  <a:schemeClr val="tx2"/>
+                </a:solidFill>
+              </a:rPr>
+              <a:t>$750M</a:t>
+            </a:r>
+            <a:endParaRPr lang="en-US" sz="1600" dirty="0"/>
+          </a:p>
+        </p:txBody>
+      </p:sp>
+      <p:sp>
+        <p:nvSpPr>
+          <p:cNvPr id="14" name="Scenario 3 name"/>
+          <p:cNvSpPr txBox="1"/>
+          <p:nvPr/>
+        </p:nvSpPr>
+        <p:spPr>
+          <a:xfrm>
+            <a:off x="320040" y="4041648"/>
+            <a:ext cx="1325880" cy="713232"/>
           </a:xfrm>
           <a:prstGeom prst="rect">
             <a:avLst/>
@@ -21580,198 +21910,178 @@
           <a:ln/>
         </p:spPr>
         <p:txBody>
-          <a:bodyPr wrap="square" lIns="76200" tIns="76200" rIns="76200" bIns="76200" rtlCol="0" anchor="ctr"/>
-          <a:lstStyle/>
-          <a:p>
-            <a:pPr algn="ctr" indent="0" marL="0">
-              <a:buNone/>
-            </a:pPr>
-            <a:r>
-              <a:rPr lang="en-US" sz="1700" b="1" dirty="0">
+          <a:bodyPr wrap="square" lIns="25400" tIns="25400" rIns="25400" bIns="25400" rtlCol="0" anchor="ctr"/>
+          <a:lstStyle/>
+          <a:p>
+            <a:pPr algn="ctr" indent="0" marL="0">
+              <a:buNone/>
+            </a:pPr>
+            <a:r>
+              <a:rPr lang="en-US" sz="1400" b="1" dirty="0">
                 <a:solidFill>
                   <a:schemeClr val="bg1"/>
                 </a:solidFill>
               </a:rPr>
-              <a:t>FTAI</a:t>
-            </a:r>
-            <a:endParaRPr lang="en-US" sz="1700" dirty="0"/>
-          </a:p>
-          <a:p>
-            <a:pPr algn="ctr" indent="0" marL="0">
-              <a:buNone/>
-            </a:pPr>
-            <a:r>
-              <a:rPr lang="en-US" sz="1100" dirty="0">
-                <a:solidFill>
-                  <a:schemeClr val="bg1"/>
-                </a:solidFill>
-              </a:rPr>
-              <a:t>Mod-1, 25 MW units</a:t>
-            </a:r>
-            <a:endParaRPr lang="en-US" sz="1700" dirty="0"/>
-          </a:p>
-          <a:p>
-            <a:pPr algn="ctr" indent="0" marL="0">
-              <a:buNone/>
-            </a:pPr>
-            <a:r>
-              <a:rPr lang="en-US" sz="1100" dirty="0">
-                <a:solidFill>
-                  <a:schemeClr val="bg1"/>
-                </a:solidFill>
-              </a:rPr>
-              <a:t>Deliveries from 2027</a:t>
-            </a:r>
-            <a:endParaRPr lang="en-US" sz="1700" dirty="0"/>
-          </a:p>
-        </p:txBody>
-      </p:sp>
-      <p:sp>
-        <p:nvSpPr>
-          <p:cNvPr id="10" name="FTAI arrow"/>
+              <a:t>+2 contracts</a:t>
+            </a:r>
+            <a:endParaRPr lang="en-US" sz="1400" dirty="0"/>
+          </a:p>
+        </p:txBody>
+      </p:sp>
+      <p:sp>
+        <p:nvSpPr>
+          <p:cNvPr id="15" name="Scenario 3 units"/>
+          <p:cNvSpPr txBox="1"/>
+          <p:nvPr/>
+        </p:nvSpPr>
+        <p:spPr>
+          <a:xfrm>
+            <a:off x="1691640" y="4041648"/>
+            <a:ext cx="914400" cy="713232"/>
+          </a:xfrm>
+          <a:prstGeom prst="rect">
+            <a:avLst/>
+          </a:prstGeom>
+          <a:noFill/>
+          <a:ln/>
+        </p:spPr>
+        <p:txBody>
+          <a:bodyPr wrap="square" lIns="0" tIns="0" rIns="0" bIns="0" rtlCol="0" anchor="ctr"/>
+          <a:lstStyle/>
+          <a:p>
+            <a:pPr algn="ctr" indent="0" marL="0">
+              <a:buNone/>
+            </a:pPr>
+            <a:r>
+              <a:rPr lang="en-US" sz="1400" b="1" dirty="0">
+                <a:solidFill>
+                  <a:schemeClr val="tx2"/>
+                </a:solidFill>
+              </a:rPr>
+              <a:t>~130</a:t>
+            </a:r>
+            <a:endParaRPr lang="en-US" sz="1400" dirty="0"/>
+          </a:p>
+        </p:txBody>
+      </p:sp>
+      <p:sp>
+        <p:nvSpPr>
+          <p:cNvPr id="16" name="Scenario 3 EBITDA"/>
+          <p:cNvSpPr txBox="1"/>
+          <p:nvPr/>
+        </p:nvSpPr>
+        <p:spPr>
+          <a:xfrm>
+            <a:off x="2697480" y="4041648"/>
+            <a:ext cx="1051560" cy="713232"/>
+          </a:xfrm>
+          <a:prstGeom prst="rect">
+            <a:avLst/>
+          </a:prstGeom>
+          <a:noFill/>
+          <a:ln/>
+        </p:spPr>
+        <p:txBody>
+          <a:bodyPr wrap="square" lIns="0" tIns="0" rIns="0" bIns="0" rtlCol="0" anchor="ctr"/>
+          <a:lstStyle/>
+          <a:p>
+            <a:pPr algn="ctr" indent="0" marL="0">
+              <a:buNone/>
+            </a:pPr>
+            <a:r>
+              <a:rPr lang="en-US" sz="1600" b="1" dirty="0">
+                <a:solidFill>
+                  <a:schemeClr val="tx2"/>
+                </a:solidFill>
+              </a:rPr>
+              <a:t>$1,050M</a:t>
+            </a:r>
+            <a:endParaRPr lang="en-US" sz="1600" dirty="0"/>
+          </a:p>
+        </p:txBody>
+      </p:sp>
+      <p:sp>
+        <p:nvSpPr>
+          <p:cNvPr id="17" name="Scenario caption"/>
+          <p:cNvSpPr txBox="1"/>
+          <p:nvPr/>
+        </p:nvSpPr>
+        <p:spPr>
+          <a:xfrm>
+            <a:off x="320040" y="4937760"/>
+            <a:ext cx="3429000" cy="365760"/>
+          </a:xfrm>
+          <a:prstGeom prst="rect">
+            <a:avLst/>
+          </a:prstGeom>
+          <a:noFill/>
+          <a:ln/>
+        </p:spPr>
+        <p:txBody>
+          <a:bodyPr wrap="square" lIns="0" tIns="0" rIns="0" bIns="0" rtlCol="0" anchor="ctr"/>
+          <a:lstStyle/>
+          <a:p>
+            <a:pPr algn="ctr" indent="0" marL="0">
+              <a:buNone/>
+            </a:pPr>
+            <a:r>
+              <a:rPr lang="en-US" sz="1100" i="1" dirty="0">
+                <a:solidFill>
+                  <a:schemeClr val="accent2"/>
+                </a:solidFill>
+              </a:rPr>
+              <a:t>Each new ~$1B order ≈ 40 more units and ~$300M of EBITDA</a:t>
+            </a:r>
+            <a:endParaRPr lang="en-US" sz="1100" dirty="0"/>
+          </a:p>
+        </p:txBody>
+      </p:sp>
+      <p:sp>
+        <p:nvSpPr>
+          <p:cNvPr id="18" name="Return header"/>
+          <p:cNvSpPr txBox="1"/>
+          <p:nvPr/>
+        </p:nvSpPr>
+        <p:spPr>
+          <a:xfrm>
+            <a:off x="4069080" y="1554480"/>
+            <a:ext cx="4754880" cy="365760"/>
+          </a:xfrm>
+          <a:prstGeom prst="rect">
+            <a:avLst/>
+          </a:prstGeom>
+          <a:noFill/>
+          <a:ln/>
+        </p:spPr>
+        <p:txBody>
+          <a:bodyPr wrap="square" lIns="0" tIns="0" rIns="0" bIns="0" rtlCol="0" anchor="b"/>
+          <a:lstStyle/>
+          <a:p>
+            <a:pPr algn="ctr" indent="0" marL="0">
+              <a:buNone/>
+            </a:pPr>
+            <a:r>
+              <a:rPr lang="en-US" sz="1600" b="1" dirty="0">
+                <a:solidFill>
+                  <a:srgbClr val="1A1A1A"/>
+                </a:solidFill>
+              </a:rPr>
+              <a:t>Your Return</a:t>
+            </a:r>
+            <a:endParaRPr lang="en-US" sz="1600" dirty="0"/>
+          </a:p>
+        </p:txBody>
+      </p:sp>
+      <p:sp>
+        <p:nvSpPr>
+          <p:cNvPr id="19" name="Return header rule"/>
           <p:cNvSpPr/>
           <p:nvPr/>
         </p:nvSpPr>
         <p:spPr>
           <a:xfrm>
-            <a:off x="3328416" y="3611880"/>
-            <a:ext cx="365760" cy="292608"/>
-          </a:xfrm>
-          <a:prstGeom prst="downArrow">
-            <a:avLst/>
-          </a:prstGeom>
-          <a:solidFill>
-            <a:srgbClr val="847C7A"/>
-          </a:solidFill>
-          <a:ln/>
-        </p:spPr>
-      </p:sp>
-      <p:sp>
-        <p:nvSpPr>
-          <p:cNvPr id="11" name="FTAI result"/>
-          <p:cNvSpPr txBox="1"/>
-          <p:nvPr/>
-        </p:nvSpPr>
-        <p:spPr>
-          <a:xfrm>
-            <a:off x="2496312" y="3950208"/>
-            <a:ext cx="2029968" cy="566928"/>
-          </a:xfrm>
-          <a:prstGeom prst="rect">
-            <a:avLst/>
-          </a:prstGeom>
-          <a:solidFill>
-            <a:srgbClr val="0A1C58"/>
-          </a:solidFill>
-          <a:ln w="19050">
-            <a:solidFill>
-              <a:srgbClr val="0A1C58"/>
-            </a:solidFill>
-          </a:ln>
-        </p:spPr>
-        <p:txBody>
-          <a:bodyPr wrap="square" lIns="0" tIns="0" rIns="0" bIns="0" rtlCol="0" anchor="ctr"/>
-          <a:lstStyle/>
-          <a:p>
-            <a:pPr algn="ctr" indent="0" marL="0">
-              <a:buNone/>
-            </a:pPr>
-            <a:r>
-              <a:rPr lang="en-US" sz="1500" b="1" dirty="0">
-                <a:solidFill>
-                  <a:schemeClr val="bg1"/>
-                </a:solidFill>
-              </a:rPr>
-              <a:t>Intact: $1.465B</a:t>
-            </a:r>
-            <a:endParaRPr lang="en-US" sz="1500" dirty="0"/>
-          </a:p>
-        </p:txBody>
-      </p:sp>
-      <p:sp>
-        <p:nvSpPr>
-          <p:cNvPr id="12" name="Market value note"/>
-          <p:cNvSpPr txBox="1"/>
-          <p:nvPr/>
-        </p:nvSpPr>
-        <p:spPr>
-          <a:xfrm>
-            <a:off x="320040" y="4709160"/>
-            <a:ext cx="4206240" cy="457200"/>
-          </a:xfrm>
-          <a:prstGeom prst="rect">
-            <a:avLst/>
-          </a:prstGeom>
-          <a:solidFill>
-            <a:srgbClr val="EFEDEA"/>
-          </a:solidFill>
-          <a:ln/>
-        </p:spPr>
-        <p:txBody>
-          <a:bodyPr wrap="square" lIns="0" tIns="0" rIns="0" bIns="0" rtlCol="0" anchor="ctr"/>
-          <a:lstStyle/>
-          <a:p>
-            <a:pPr algn="ctr" indent="0" marL="0">
-              <a:buNone/>
-            </a:pPr>
-            <a:r>
-              <a:rPr lang="en-US" sz="1300" b="1" i="1" dirty="0">
-                <a:solidFill>
-                  <a:schemeClr val="tx2"/>
-                </a:solidFill>
-              </a:rPr>
-              <a:t>The market still values Power at ~zero.</a:t>
-            </a:r>
-            <a:endParaRPr lang="en-US" sz="1300" dirty="0"/>
-          </a:p>
-        </p:txBody>
-      </p:sp>
-      <p:sp>
-        <p:nvSpPr>
-          <p:cNvPr id="13" name="Power EBITDA header"/>
-          <p:cNvSpPr txBox="1"/>
-          <p:nvPr/>
-        </p:nvSpPr>
-        <p:spPr>
-          <a:xfrm>
-            <a:off x="4892040" y="1554480"/>
-            <a:ext cx="3931920" cy="365760"/>
-          </a:xfrm>
-          <a:prstGeom prst="rect">
-            <a:avLst/>
-          </a:prstGeom>
-          <a:noFill/>
-          <a:ln/>
-        </p:spPr>
-        <p:txBody>
-          <a:bodyPr wrap="square" lIns="0" tIns="0" rIns="0" bIns="0" rtlCol="0" anchor="b"/>
-          <a:lstStyle/>
-          <a:p>
-            <a:pPr algn="ctr" indent="0" marL="0">
-              <a:buNone/>
-            </a:pPr>
-            <a:r>
-              <a:rPr lang="en-US" sz="1600" b="1" dirty="0">
-                <a:solidFill>
-                  <a:srgbClr val="1A1A1A"/>
-                </a:solidFill>
-              </a:rPr>
-              <a:t>FTAI Power Adj. EBITDA ($M)</a:t>
-            </a:r>
-            <a:endParaRPr lang="en-US" sz="1600" dirty="0"/>
-          </a:p>
-        </p:txBody>
-      </p:sp>
-      <p:sp>
-        <p:nvSpPr>
-          <p:cNvPr id="14" name="Power EBITDA header rule"/>
-          <p:cNvSpPr/>
-          <p:nvPr/>
-        </p:nvSpPr>
-        <p:spPr>
-          <a:xfrm>
-            <a:off x="4892040" y="1975104"/>
-            <a:ext cx="3931920" cy="0"/>
+            <a:off x="4069080" y="1975104"/>
+            <a:ext cx="4754880" cy="0"/>
           </a:xfrm>
           <a:prstGeom prst="line">
             <a:avLst/>
@@ -21787,13 +22097,13 @@
       </p:sp>
       <p:graphicFrame>
         <p:nvGraphicFramePr>
-          <p:cNvPr id="15" name="Power EBITDA chart" descr=""/>
+          <p:cNvPr id="20" name="Contract return chart" descr=""/>
           <p:cNvGraphicFramePr/>
           <p:nvPr/>
         </p:nvGraphicFramePr>
         <p:xfrm>
-          <a:off x="4892040" y="2103120"/>
-          <a:ext cx="3931920" cy="2880360"/>
+          <a:off x="4069080" y="2103120"/>
+          <a:ext cx="4754880" cy="2880360"/>
         </p:xfrm>
         <a:graphic xmlns:a="http://schemas.openxmlformats.org/drawingml/2006/main">
           <a:graphicData uri="http://schemas.openxmlformats.org/drawingml/2006/chart">
@@ -21803,14 +22113,14 @@
       </p:graphicFrame>
       <p:sp>
         <p:nvSpPr>
-          <p:cNvPr id="16" name="Power EBITDA caption"/>
+          <p:cNvPr id="21" name="Return caption"/>
           <p:cNvSpPr txBox="1"/>
           <p:nvPr/>
         </p:nvSpPr>
         <p:spPr>
           <a:xfrm>
-            <a:off x="4892040" y="4983480"/>
-            <a:ext cx="3931920" cy="274320"/>
+            <a:off x="4069080" y="4983480"/>
+            <a:ext cx="4754880" cy="274320"/>
           </a:xfrm>
           <a:prstGeom prst="rect">
             <a:avLst/>
@@ -21831,7 +22141,7 @@
                   <a:schemeClr val="accent2"/>
                 </a:solidFill>
               </a:rPr>
-              <a:t>Our FY27E sits at the low end of the $450–750M guide</a:t>
+              <a:t>Base case = signed order only; returns on the FY27E SOTP vs. $167 today</a:t>
             </a:r>
             <a:endParaRPr lang="en-US" sz="1000" dirty="0"/>
           </a:p>
@@ -21839,7 +22149,7 @@
       </p:sp>
       <p:sp>
         <p:nvSpPr>
-          <p:cNvPr id="17" name="Takeaway"/>
+          <p:cNvPr id="22" name="Takeaway"/>
           <p:cNvSpPr txBox="1"/>
           <p:nvPr/>
         </p:nvSpPr>
@@ -21869,7 +22179,7 @@
                   <a:schemeClr val="bg1"/>
                 </a:solidFill>
               </a:rPr>
-              <a:t>Delivering just the low end of guidance is worth ~$52 a share the market isn't paying for.</a:t>
+              <a:t>Our base case needs no new contracts. Every one FTAI signs is upside the market isn't paying for.</a:t>
             </a:r>
             <a:endParaRPr lang="en-US" sz="1700" dirty="0"/>
           </a:p>
@@ -21877,7 +22187,7 @@
       </p:sp>
       <p:sp>
         <p:nvSpPr>
-          <p:cNvPr id="18" name="Source"/>
+          <p:cNvPr id="23" name="Source"/>
           <p:cNvSpPr txBox="1"/>
           <p:nvPr/>
         </p:nvSpPr>
@@ -21916,7 +22226,7 @@
                   <a:srgbClr val="1A1A1A"/>
                 </a:solidFill>
               </a:rPr>
-              <a:t>GPS diligence; FTAI earnings calls and filings; GPS model (RPM tab: units × 25 MW × $1M/MW × 40% margin)</a:t>
+              <a:t>FTAI earnings calls ($450–750M FY27 guide; 'materially fewer than 100 units'); GPS estimates; GPS model (SOTP, Power at 12x)</a:t>
             </a:r>
             <a:endParaRPr lang="en-US" sz="1100" dirty="0"/>
           </a:p>

--- a/deck/FTAI_Long_Pitch.pptx
+++ b/deck/FTAI_Long_Pitch.pptx
@@ -129,12 +129,12 @@
   <p:extLst>
     <p:ext uri="{521415D9-36F7-43E2-AB2F-B90AF26B5E84}">
       <p14:sectionLst xmlns:p14="http://schemas.microsoft.com/office/powerpoint/2010/main">
-        <p14:section name="Introduction" id="{f386708d-0750-4b0e-96ca-54087c4494b7}">
+        <p14:section name="Introduction" id="{f715a2b2-59a3-a01a-de8d-fea3f7f8ff4f}">
           <p14:sldIdLst>
             <p14:sldId id="256"/>
           </p14:sldIdLst>
         </p14:section>
-        <p14:section name="The Opportunity" id="{ac83b7ee-a0f7-60fa-f59a-ee8832280d2d}">
+        <p14:section name="The Opportunity" id="{63761d96-a80e-c836-f7bc-a57c7038888f}">
           <p14:sldIdLst>
             <p14:sldId id="257"/>
             <p14:sldId id="258"/>
@@ -142,18 +142,18 @@
             <p14:sldId id="260"/>
           </p14:sldIdLst>
         </p14:section>
-        <p14:section name="Returns" id="{79475a2d-c7ea-afb9-825a-956766c31df3}">
+        <p14:section name="Returns" id="{35ff50bf-77f8-3e24-9917-504b849e7080}">
           <p14:sldIdLst>
             <p14:sldId id="261"/>
           </p14:sldIdLst>
         </p14:section>
-        <p14:section name="Business Overview" id="{38a3760b-8233-a9aa-b7e8-75b1b170ce3b}">
+        <p14:section name="Business Overview" id="{d3c41630-31e6-4158-c715-06bab3c16cc7}">
           <p14:sldIdLst>
             <p14:sldId id="262"/>
             <p14:sldId id="263"/>
           </p14:sldIdLst>
         </p14:section>
-        <p14:section name="Thesis 1a" id="{64214430-4196-5367-eb16-514968d033e8}">
+        <p14:section name="Thesis 1a" id="{9e5b36dc-3d3b-cbe8-e0f1-dc790ed0b037}">
           <p14:sldIdLst>
             <p14:sldId id="264"/>
             <p14:sldId id="265"/>
@@ -161,7 +161,7 @@
             <p14:sldId id="267"/>
           </p14:sldIdLst>
         </p14:section>
-        <p14:section name="Thesis 1b" id="{b230bf73-af7c-85e4-1165-076d7533ecc0}">
+        <p14:section name="Thesis 1b" id="{9cca012d-8c4b-7c00-4132-0407e3d7beaf}">
           <p14:sldIdLst>
             <p14:sldId id="268"/>
             <p14:sldId id="269"/>
@@ -172,7 +172,7 @@
             <p14:sldId id="274"/>
           </p14:sldIdLst>
         </p14:section>
-        <p14:section name="Thesis 2" id="{590ed45c-801f-5cf6-95ec-5acbb80ad126}">
+        <p14:section name="Thesis 2" id="{3e9a5872-6a8f-34a9-3460-67b5b7ecc23c}">
           <p14:sldIdLst>
             <p14:sldId id="275"/>
             <p14:sldId id="276"/>
@@ -7137,7 +7137,7 @@
             <c:size val="6"/>
             <c:spPr>
               <a:solidFill>
-                <a:srgbClr val="0A1C58"/>
+                <a:srgbClr val="847C7A"/>
               </a:solidFill>
               <a:ln w="9525" cap="flat">
                 <a:solidFill>
@@ -7275,7 +7275,7 @@
             <c:size val="6"/>
             <c:spPr>
               <a:solidFill>
-                <a:srgbClr val="847C7A"/>
+                <a:srgbClr val="0A1C58"/>
               </a:solidFill>
               <a:ln w="9525" cap="flat">
                 <a:solidFill>
@@ -20059,8 +20059,8 @@
         </p:nvSpPr>
         <p:spPr>
           <a:xfrm>
-            <a:off x="5212080" y="2103120"/>
-            <a:ext cx="3611880" cy="475488"/>
+            <a:off x="5212080" y="2148840"/>
+            <a:ext cx="3611880" cy="804672"/>
           </a:xfrm>
           <a:prstGeom prst="rect">
             <a:avLst/>
@@ -20078,25 +20078,28 @@
               <a:buNone/>
             </a:pPr>
             <a:r>
-              <a:rPr lang="en-US" sz="1400" b="1" dirty="0">
+              <a:rPr lang="en-US" sz="1600" b="1" dirty="0">
                 <a:solidFill>
                   <a:schemeClr val="tx2"/>
                 </a:solidFill>
               </a:rPr>
-              <a:t>Today  </a:t>
-            </a:r>
-            <a:pPr algn="ctr" indent="0" marL="0">
-              <a:buNone/>
-            </a:pPr>
-            <a:r>
-              <a:rPr lang="en-US" sz="1100" dirty="0">
+              <a:t>Today</a:t>
+            </a:r>
+            <a:endParaRPr lang="en-US" sz="1600" dirty="0"/>
+          </a:p>
+          <a:p>
+            <a:pPr algn="ctr" indent="0" marL="0">
+              <a:buNone/>
+            </a:pPr>
+            <a:r>
+              <a:rPr lang="en-US" sz="1200" dirty="0">
                 <a:solidFill>
                   <a:schemeClr val="tx2"/>
                 </a:solidFill>
               </a:rPr>
-              <a:t>GPUs and shells ready</a:t>
-            </a:r>
-            <a:endParaRPr lang="en-US" sz="1400" dirty="0"/>
+              <a:t>GPUs bought, data center shells built</a:t>
+            </a:r>
+            <a:endParaRPr lang="en-US" sz="1600" dirty="0"/>
           </a:p>
         </p:txBody>
       </p:sp>
@@ -20108,8 +20111,8 @@
         </p:nvSpPr>
         <p:spPr>
           <a:xfrm>
-            <a:off x="6876288" y="2587752"/>
-            <a:ext cx="274320" cy="109728"/>
+            <a:off x="6830568" y="2971800"/>
+            <a:ext cx="365760" cy="182880"/>
           </a:xfrm>
           <a:prstGeom prst="downArrow">
             <a:avLst/>
@@ -20128,8 +20131,8 @@
         </p:nvSpPr>
         <p:spPr>
           <a:xfrm>
-            <a:off x="5212080" y="2706624"/>
-            <a:ext cx="3611880" cy="475488"/>
+            <a:off x="5212080" y="3172968"/>
+            <a:ext cx="3611880" cy="804672"/>
           </a:xfrm>
           <a:prstGeom prst="rect">
             <a:avLst/>
@@ -20147,25 +20150,28 @@
               <a:buNone/>
             </a:pPr>
             <a:r>
-              <a:rPr lang="en-US" sz="1400" b="1" dirty="0">
+              <a:rPr lang="en-US" sz="1600" b="1" dirty="0">
                 <a:solidFill>
                   <a:schemeClr val="bg1"/>
                 </a:solidFill>
               </a:rPr>
-              <a:t>2026–29  </a:t>
-            </a:r>
-            <a:pPr algn="ctr" indent="0" marL="0">
-              <a:buNone/>
-            </a:pPr>
-            <a:r>
-              <a:rPr lang="en-US" sz="1100" dirty="0">
+              <a:t>2026–2029</a:t>
+            </a:r>
+            <a:endParaRPr lang="en-US" sz="1600" dirty="0"/>
+          </a:p>
+          <a:p>
+            <a:pPr algn="ctr" indent="0" marL="0">
+              <a:buNone/>
+            </a:pPr>
+            <a:r>
+              <a:rPr lang="en-US" sz="1200" dirty="0">
                 <a:solidFill>
                   <a:schemeClr val="bg1"/>
                 </a:solidFill>
               </a:rPr>
-              <a:t>FTAI turbines power the site</a:t>
-            </a:r>
-            <a:endParaRPr lang="en-US" sz="1400" dirty="0"/>
+              <a:t>FTAI's mobile turbines power the site</a:t>
+            </a:r>
+            <a:endParaRPr lang="en-US" sz="1600" dirty="0"/>
           </a:p>
         </p:txBody>
       </p:sp>
@@ -20177,8 +20183,8 @@
         </p:nvSpPr>
         <p:spPr>
           <a:xfrm>
-            <a:off x="6876288" y="3191256"/>
-            <a:ext cx="274320" cy="109728"/>
+            <a:off x="6830568" y="3995928"/>
+            <a:ext cx="365760" cy="182880"/>
           </a:xfrm>
           <a:prstGeom prst="downArrow">
             <a:avLst/>
@@ -20197,8 +20203,8 @@
         </p:nvSpPr>
         <p:spPr>
           <a:xfrm>
-            <a:off x="5212080" y="3310128"/>
-            <a:ext cx="3611880" cy="475488"/>
+            <a:off x="5212080" y="4197096"/>
+            <a:ext cx="3611880" cy="804672"/>
           </a:xfrm>
           <a:prstGeom prst="rect">
             <a:avLst/>
@@ -20216,129 +20222,34 @@
               <a:buNone/>
             </a:pPr>
             <a:r>
-              <a:rPr lang="en-US" sz="1400" b="1" dirty="0">
+              <a:rPr lang="en-US" sz="1600" b="1" dirty="0">
                 <a:solidFill>
                   <a:schemeClr val="tx2"/>
                 </a:solidFill>
               </a:rPr>
-              <a:t>2029+  </a:t>
-            </a:r>
-            <a:pPr algn="ctr" indent="0" marL="0">
-              <a:buNone/>
-            </a:pPr>
-            <a:r>
-              <a:rPr lang="en-US" sz="1100" dirty="0">
+              <a:t>2029+</a:t>
+            </a:r>
+            <a:endParaRPr lang="en-US" sz="1600" dirty="0"/>
+          </a:p>
+          <a:p>
+            <a:pPr algn="ctr" indent="0" marL="0">
+              <a:buNone/>
+            </a:pPr>
+            <a:r>
+              <a:rPr lang="en-US" sz="1200" dirty="0">
                 <a:solidFill>
                   <a:schemeClr val="tx2"/>
                 </a:solidFill>
               </a:rPr>
-              <a:t>Grid and new plants arrive</a:t>
-            </a:r>
-            <a:endParaRPr lang="en-US" sz="1400" dirty="0"/>
-          </a:p>
-        </p:txBody>
-      </p:sp>
-      <p:sp>
-        <p:nvSpPr>
-          <p:cNvPr id="16" name="TV risk box"/>
-          <p:cNvSpPr txBox="1"/>
-          <p:nvPr/>
-        </p:nvSpPr>
-        <p:spPr>
-          <a:xfrm>
-            <a:off x="5212080" y="3977640"/>
-            <a:ext cx="3611880" cy="1371600"/>
-          </a:xfrm>
-          <a:prstGeom prst="rect">
-            <a:avLst/>
-          </a:prstGeom>
-          <a:noFill/>
-          <a:ln w="15875">
-            <a:solidFill>
-              <a:srgbClr val="0A1C58"/>
-            </a:solidFill>
-            <a:prstDash val="dash"/>
-          </a:ln>
-        </p:spPr>
-        <p:txBody>
-          <a:bodyPr wrap="square" lIns="101600" tIns="38100" rIns="76200" bIns="38100" rtlCol="0" anchor="ctr"/>
-          <a:lstStyle/>
-          <a:p>
-            <a:pPr algn="l" indent="0" marL="0">
-              <a:spcAft>
-                <a:spcPts val="200"/>
-              </a:spcAft>
-              <a:buNone/>
-            </a:pPr>
-            <a:r>
-              <a:rPr lang="en-US" sz="1300" b="1" dirty="0">
-                <a:solidFill>
-                  <a:schemeClr val="tx2"/>
-                </a:solidFill>
-              </a:rPr>
-              <a:t>But does the bridge end? (TV risk)</a:t>
-            </a:r>
-            <a:endParaRPr lang="en-US" sz="1300" dirty="0"/>
-          </a:p>
-          <a:p>
-            <a:pPr algn="l" marL="152400" indent="-152400">
-              <a:spcAft>
-                <a:spcPts val="200"/>
-              </a:spcAft>
-              <a:buSzPct val="100000"/>
-              <a:buChar char="•"/>
-            </a:pPr>
-            <a:r>
-              <a:rPr lang="en-US" sz="1100" dirty="0">
-                <a:solidFill>
-                  <a:srgbClr val="1A1A1A"/>
-                </a:solidFill>
-              </a:rPr>
-              <a:t>Gap still widens: 47 GW short in 2031</a:t>
-            </a:r>
-            <a:endParaRPr lang="en-US" sz="1300" dirty="0"/>
-          </a:p>
-          <a:p>
-            <a:pPr algn="l" marL="152400" indent="-152400">
-              <a:spcAft>
-                <a:spcPts val="200"/>
-              </a:spcAft>
-              <a:buSzPct val="100000"/>
-              <a:buChar char="•"/>
-            </a:pPr>
-            <a:r>
-              <a:rPr lang="en-US" sz="1100" dirty="0">
-                <a:solidFill>
-                  <a:srgbClr val="1A1A1A"/>
-                </a:solidFill>
-              </a:rPr>
-              <a:t>Units can stay as backup and peaking power</a:t>
-            </a:r>
-            <a:endParaRPr lang="en-US" sz="1300" dirty="0"/>
-          </a:p>
-          <a:p>
-            <a:pPr algn="l" marL="152400" indent="-152400">
-              <a:spcAft>
-                <a:spcPts val="200"/>
-              </a:spcAft>
-              <a:buSzPct val="100000"/>
-              <a:buChar char="•"/>
-            </a:pPr>
-            <a:r>
-              <a:rPr lang="en-US" sz="1100" dirty="0">
-                <a:solidFill>
-                  <a:srgbClr val="1A1A1A"/>
-                </a:solidFill>
-              </a:rPr>
-              <a:t>Valued at 12x, below Aerospace's 16x</a:t>
-            </a:r>
-            <a:endParaRPr lang="en-US" sz="1300" dirty="0"/>
-          </a:p>
-        </p:txBody>
-      </p:sp>
-      <p:sp>
-        <p:nvSpPr>
-          <p:cNvPr id="17" name="Takeaway"/>
+              <a:t>Grid connections and new plants arrive</a:t>
+            </a:r>
+            <a:endParaRPr lang="en-US" sz="1600" dirty="0"/>
+          </a:p>
+        </p:txBody>
+      </p:sp>
+      <p:sp>
+        <p:nvSpPr>
+          <p:cNvPr id="16" name="Takeaway"/>
           <p:cNvSpPr txBox="1"/>
           <p:nvPr/>
         </p:nvSpPr>
@@ -20376,7 +20287,7 @@
       </p:sp>
       <p:sp>
         <p:nvSpPr>
-          <p:cNvPr id="18" name="Source"/>
+          <p:cNvPr id="17" name="Source"/>
           <p:cNvSpPr txBox="1"/>
           <p:nvPr/>
         </p:nvSpPr>

--- a/deck/FTAI_Long_Pitch.pptx
+++ b/deck/FTAI_Long_Pitch.pptx
@@ -28,9 +28,10 @@
     <p:sldId id="276" r:id="rId22"/>
     <p:sldId id="277" r:id="rId23"/>
     <p:sldId id="278" r:id="rId24"/>
+    <p:sldId id="279" r:id="rId25"/>
   </p:sldIdLst>
   <p:notesMasterIdLst>
-    <p:notesMasterId r:id="rId25"/>
+    <p:notesMasterId r:id="rId26"/>
   </p:notesMasterIdLst>
   <p:sldSz cx="9144000" cy="6858000"/>
   <p:notesSz cx="6858000" cy="9144000"/>
@@ -129,12 +130,12 @@
   <p:extLst>
     <p:ext uri="{521415D9-36F7-43E2-AB2F-B90AF26B5E84}">
       <p14:sectionLst xmlns:p14="http://schemas.microsoft.com/office/powerpoint/2010/main">
-        <p14:section name="Introduction" id="{f715a2b2-59a3-a01a-de8d-fea3f7f8ff4f}">
+        <p14:section name="Introduction" id="{576fea45-b14a-1512-ea2d-bef77923eb73}">
           <p14:sldIdLst>
             <p14:sldId id="256"/>
           </p14:sldIdLst>
         </p14:section>
-        <p14:section name="The Opportunity" id="{63761d96-a80e-c836-f7bc-a57c7038888f}">
+        <p14:section name="The Opportunity" id="{8db79388-ceb6-bd2f-81a6-eb4abd615ca7}">
           <p14:sldIdLst>
             <p14:sldId id="257"/>
             <p14:sldId id="258"/>
@@ -142,18 +143,18 @@
             <p14:sldId id="260"/>
           </p14:sldIdLst>
         </p14:section>
-        <p14:section name="Returns" id="{35ff50bf-77f8-3e24-9917-504b849e7080}">
+        <p14:section name="Returns" id="{0dc8e47b-d8a3-e13b-f548-b9b2a22b38e3}">
           <p14:sldIdLst>
             <p14:sldId id="261"/>
           </p14:sldIdLst>
         </p14:section>
-        <p14:section name="Business Overview" id="{d3c41630-31e6-4158-c715-06bab3c16cc7}">
+        <p14:section name="Business Overview" id="{3430fd40-ebf8-b7c0-0a3d-ba5be19fc6d3}">
           <p14:sldIdLst>
             <p14:sldId id="262"/>
             <p14:sldId id="263"/>
           </p14:sldIdLst>
         </p14:section>
-        <p14:section name="Thesis 1a" id="{9e5b36dc-3d3b-cbe8-e0f1-dc790ed0b037}">
+        <p14:section name="Thesis 1a" id="{2b9189bd-ca1a-8860-24bf-faff119e94e3}">
           <p14:sldIdLst>
             <p14:sldId id="264"/>
             <p14:sldId id="265"/>
@@ -161,7 +162,7 @@
             <p14:sldId id="267"/>
           </p14:sldIdLst>
         </p14:section>
-        <p14:section name="Thesis 1b" id="{9cca012d-8c4b-7c00-4132-0407e3d7beaf}">
+        <p14:section name="Thesis 1b" id="{23bb6a3a-d838-b2c5-8954-15250207a032}">
           <p14:sldIdLst>
             <p14:sldId id="268"/>
             <p14:sldId id="269"/>
@@ -172,12 +173,17 @@
             <p14:sldId id="274"/>
           </p14:sldIdLst>
         </p14:section>
-        <p14:section name="Thesis 2" id="{3e9a5872-6a8f-34a9-3460-67b5b7ecc23c}">
+        <p14:section name="Thesis 2" id="{a411c942-a2d4-007a-8486-28a3cc52f26f}">
           <p14:sldIdLst>
             <p14:sldId id="275"/>
             <p14:sldId id="276"/>
             <p14:sldId id="277"/>
             <p14:sldId id="278"/>
+          </p14:sldIdLst>
+        </p14:section>
+        <p14:section name="Valuation" id="{640a6f4d-c480-52f6-6348-16bd8a437c71}">
+          <p14:sldIdLst>
+            <p14:sldId id="279"/>
           </p14:sldIdLst>
         </p14:section>
       </p14:sectionLst>
@@ -4923,6 +4929,320 @@
         <c:scaling>
           <c:orientation val="minMax"/>
           <c:max val="1.25"/>
+          <c:min val="0"/>
+        </c:scaling>
+        <c:delete val="1"/>
+        <c:axPos val="l"/>
+        <c:numFmt formatCode="General" sourceLinked="0"/>
+        <c:majorTickMark val="out"/>
+        <c:minorTickMark val="none"/>
+        <c:tickLblPos val="nextTo"/>
+        <c:spPr>
+          <a:ln w="12700" cap="flat">
+            <a:solidFill>
+              <a:srgbClr val="888888"/>
+            </a:solidFill>
+            <a:prstDash val="solid"/>
+            <a:round/>
+          </a:ln>
+        </c:spPr>
+        <c:txPr>
+          <a:bodyPr/>
+          <a:lstStyle/>
+          <a:p>
+            <a:pPr>
+              <a:defRPr sz="1200" b="0" i="0" u="none" strike="noStrike">
+                <a:solidFill>
+                  <a:srgbClr val="000000"/>
+                </a:solidFill>
+                <a:latin typeface="Arial"/>
+              </a:defRPr>
+            </a:pPr>
+            <a:endParaRPr lang="en-US"/>
+          </a:p>
+        </c:txPr>
+        <c:crossAx val="2094734554"/>
+        <c:crosses val="autoZero"/>
+        <c:crossBetween val="between"/>
+      </c:valAx>
+      <c:spPr>
+        <a:noFill/>
+        <a:ln>
+          <a:noFill/>
+        </a:ln>
+        <a:effectLst/>
+      </c:spPr>
+    </c:plotArea>
+    <c:plotVisOnly val="1"/>
+    <c:dispBlanksAs val="span"/>
+  </c:chart>
+  <c:spPr>
+    <a:noFill/>
+    <a:ln>
+      <a:noFill/>
+    </a:ln>
+    <a:effectLst/>
+  </c:spPr>
+  <c:externalData r:id="rId1">
+    <c:autoUpdate val="0"/>
+  </c:externalData>
+</c:chartSpace>
+</file>
+
+<file path=ppt/charts/chart23.xml><?xml version="1.0" encoding="utf-8"?>
+<c:chartSpace xmlns:c="http://schemas.openxmlformats.org/drawingml/2006/chart" xmlns:a="http://schemas.openxmlformats.org/drawingml/2006/main" xmlns:r="http://schemas.openxmlformats.org/officeDocument/2006/relationships">
+  <c:date1904 val="0"/>
+  <c:roundedCorners val="1"/>
+  <c:chart>
+    <c:autoTitleDeleted val="1"/>
+    <c:plotArea>
+      <c:layout/>
+      <c:barChart>
+        <c:barDir val="col"/>
+        <c:grouping val="clustered"/>
+        <c:varyColors val="0"/>
+        <c:ser>
+          <c:idx val="0"/>
+          <c:order val="0"/>
+          <c:tx>
+            <c:strRef>
+              <c:f>Sheet1!$B$1</c:f>
+              <c:strCache>
+                <c:ptCount val="1"/>
+                <c:pt idx="0">
+                  <c:v>Bear</c:v>
+                </c:pt>
+              </c:strCache>
+            </c:strRef>
+          </c:tx>
+          <c:spPr>
+            <a:solidFill>
+              <a:srgbClr val="B5AEA9"/>
+            </a:solidFill>
+            <a:effectLst/>
+          </c:spPr>
+          <c:invertIfNegative val="0"/>
+          <c:dLbls>
+            <c:numFmt formatCode="&quot;$&quot;0" sourceLinked="0"/>
+            <c:txPr>
+              <a:bodyPr/>
+              <a:lstStyle/>
+              <a:p>
+                <a:pPr>
+                  <a:defRPr b="1" i="0" strike="noStrike" sz="1300" u="none">
+                    <a:solidFill>
+                      <a:srgbClr val="1A1A1A"/>
+                    </a:solidFill>
+                    <a:latin typeface="+mn-lt"/>
+                  </a:defRPr>
+                </a:pPr>
+              </a:p>
+            </c:txPr>
+            <c:showLegendKey val="0"/>
+            <c:showVal val="1"/>
+            <c:showCatName val="0"/>
+            <c:showSerName val="0"/>
+            <c:showPercent val="0"/>
+            <c:showBubbleSize val="0"/>
+            <c:showLeaderLines val="0"/>
+          </c:dLbls>
+          <c:cat>
+            <c:multiLvlStrRef>
+              <c:f>Sheet1!$A$2:$A$4</c:f>
+              <c:multiLvlStrCache>
+                <c:ptCount val="3"/>
+                <c:lvl>
+                  <c:pt idx="0">
+                    <c:v>Bear</c:v>
+                  </c:pt>
+                  <c:pt idx="1">
+                    <c:v>Base</c:v>
+                  </c:pt>
+                  <c:pt idx="2">
+                    <c:v>Bull</c:v>
+                  </c:pt>
+                </c:lvl>
+              </c:multiLvlStrCache>
+            </c:multiLvlStrRef>
+          </c:cat>
+          <c:val>
+            <c:numRef>
+              <c:f>Sheet1!$B$2:$B$4</c:f>
+              <c:numCache>
+                <c:formatCode>General</c:formatCode>
+                <c:ptCount val="3"/>
+                <c:pt idx="0">
+                  <c:v>126</c:v>
+                </c:pt>
+                <c:pt idx="1">
+                  <c:v/>
+                </c:pt>
+                <c:pt idx="2">
+                  <c:v/>
+                </c:pt>
+              </c:numCache>
+            </c:numRef>
+          </c:val>
+        </c:ser>
+        <c:ser>
+          <c:idx val="1"/>
+          <c:order val="1"/>
+          <c:tx>
+            <c:strRef>
+              <c:f>Sheet1!$C$1</c:f>
+              <c:strCache>
+                <c:ptCount val="1"/>
+                <c:pt idx="0">
+                  <c:v>Base / Bull</c:v>
+                </c:pt>
+              </c:strCache>
+            </c:strRef>
+          </c:tx>
+          <c:spPr>
+            <a:solidFill>
+              <a:srgbClr val="0A1C58"/>
+            </a:solidFill>
+            <a:effectLst/>
+          </c:spPr>
+          <c:invertIfNegative val="0"/>
+          <c:dLbls>
+            <c:numFmt formatCode="&quot;$&quot;0" sourceLinked="0"/>
+            <c:txPr>
+              <a:bodyPr/>
+              <a:lstStyle/>
+              <a:p>
+                <a:pPr>
+                  <a:defRPr b="1" i="0" strike="noStrike" sz="1300" u="none">
+                    <a:solidFill>
+                      <a:srgbClr val="1A1A1A"/>
+                    </a:solidFill>
+                    <a:latin typeface="+mn-lt"/>
+                  </a:defRPr>
+                </a:pPr>
+              </a:p>
+            </c:txPr>
+            <c:showLegendKey val="0"/>
+            <c:showVal val="1"/>
+            <c:showCatName val="0"/>
+            <c:showSerName val="0"/>
+            <c:showPercent val="0"/>
+            <c:showBubbleSize val="0"/>
+            <c:showLeaderLines val="0"/>
+          </c:dLbls>
+          <c:cat>
+            <c:multiLvlStrRef>
+              <c:f>Sheet1!$A$2:$A$4</c:f>
+              <c:multiLvlStrCache>
+                <c:ptCount val="3"/>
+                <c:lvl>
+                  <c:pt idx="0">
+                    <c:v>Bear</c:v>
+                  </c:pt>
+                  <c:pt idx="1">
+                    <c:v>Base</c:v>
+                  </c:pt>
+                  <c:pt idx="2">
+                    <c:v>Bull</c:v>
+                  </c:pt>
+                </c:lvl>
+              </c:multiLvlStrCache>
+            </c:multiLvlStrRef>
+          </c:cat>
+          <c:val>
+            <c:numRef>
+              <c:f>Sheet1!$C$2:$C$4</c:f>
+              <c:numCache>
+                <c:formatCode>General</c:formatCode>
+                <c:ptCount val="3"/>
+                <c:pt idx="0">
+                  <c:v/>
+                </c:pt>
+                <c:pt idx="1">
+                  <c:v>277</c:v>
+                </c:pt>
+                <c:pt idx="2">
+                  <c:v>352</c:v>
+                </c:pt>
+              </c:numCache>
+            </c:numRef>
+          </c:val>
+        </c:ser>
+        <c:dLbls>
+          <c:numFmt formatCode="&quot;$&quot;0" sourceLinked="0"/>
+          <c:txPr>
+            <a:bodyPr/>
+            <a:lstStyle/>
+            <a:p>
+              <a:pPr>
+                <a:defRPr b="1" i="0" strike="noStrike" sz="1300" u="none">
+                  <a:solidFill>
+                    <a:srgbClr val="1A1A1A"/>
+                  </a:solidFill>
+                  <a:latin typeface="+mn-lt"/>
+                </a:defRPr>
+              </a:pPr>
+            </a:p>
+          </c:txPr>
+          <c:showLegendKey val="0"/>
+          <c:showVal val="1"/>
+          <c:showCatName val="0"/>
+          <c:showSerName val="0"/>
+          <c:showPercent val="0"/>
+          <c:showBubbleSize val="0"/>
+          <c:showLeaderLines val="0"/>
+        </c:dLbls>
+        <c:gapWidth val="45"/>
+        <c:overlap val="100"/>
+        <c:axId val="2094734554"/>
+        <c:axId val="2094734552"/>
+        <c:axId val="2094734556"/>
+      </c:barChart>
+      <c:catAx>
+        <c:axId val="2094734554"/>
+        <c:scaling>
+          <c:orientation val="minMax"/>
+        </c:scaling>
+        <c:delete val="0"/>
+        <c:axPos val="b"/>
+        <c:numFmt formatCode="General" sourceLinked="1"/>
+        <c:majorTickMark val="out"/>
+        <c:minorTickMark val="none"/>
+        <c:tickLblPos val="low"/>
+        <c:spPr>
+          <a:ln w="12700" cap="flat">
+            <a:solidFill>
+              <a:srgbClr val="BFBFBF"/>
+            </a:solidFill>
+            <a:prstDash val="solid"/>
+            <a:round/>
+          </a:ln>
+        </c:spPr>
+        <c:txPr>
+          <a:bodyPr/>
+          <a:lstStyle/>
+          <a:p>
+            <a:pPr>
+              <a:defRPr sz="1200" b="0" i="0" u="none" strike="noStrike">
+                <a:solidFill>
+                  <a:srgbClr val="1A1A1A"/>
+                </a:solidFill>
+                <a:latin typeface="+mn-lt"/>
+              </a:defRPr>
+            </a:pPr>
+            <a:endParaRPr lang="en-US"/>
+          </a:p>
+        </c:txPr>
+        <c:crossAx val="2094734552"/>
+        <c:crosses val="autoZero"/>
+        <c:auto val="1"/>
+        <c:lblAlgn val="ctr"/>
+        <c:noMultiLvlLbl val="1"/>
+      </c:catAx>
+      <c:valAx>
+        <c:axId val="2094734552"/>
+        <c:scaling>
+          <c:orientation val="minMax"/>
+          <c:max val="400"/>
           <c:min val="0"/>
         </c:scaling>
         <c:delete val="1"/>
@@ -7137,7 +7457,7 @@
             <c:size val="6"/>
             <c:spPr>
               <a:solidFill>
-                <a:srgbClr val="847C7A"/>
+                <a:srgbClr val="0A1C58"/>
               </a:solidFill>
               <a:ln w="9525" cap="flat">
                 <a:solidFill>
@@ -7275,7 +7595,7 @@
             <c:size val="6"/>
             <c:spPr>
               <a:solidFill>
-                <a:srgbClr val="0A1C58"/>
+                <a:srgbClr val="847C7A"/>
               </a:solidFill>
               <a:ln w="9525" cap="flat">
                 <a:solidFill>
@@ -9503,6 +9823,94 @@
             <a:fld id="{F7021451-1387-4CA6-816F-3879F97B5CBC}" type="slidenum">
               <a:rPr lang="en-US"/>
               <a:t>23</a:t>
+            </a:fld>
+            <a:endParaRPr lang="en-US"/>
+          </a:p>
+        </p:txBody>
+      </p:sp>
+    </p:spTree>
+    <p:extLst>
+      <p:ext uri="{BB962C8B-B14F-4D97-AF65-F5344CB8AC3E}">
+        <p14:creationId xmlns:p14="http://schemas.microsoft.com/office/powerpoint/2010/main" val="1024086991"/>
+      </p:ext>
+    </p:extLst>
+  </p:cSld>
+  <p:clrMapOvr>
+    <a:masterClrMapping/>
+  </p:clrMapOvr>
+</p:notes>
+</file>
+
+<file path=ppt/notesSlides/notesSlide24.xml><?xml version="1.0" encoding="utf-8"?>
+<p:notes xmlns:a="http://schemas.openxmlformats.org/drawingml/2006/main" xmlns:r="http://schemas.openxmlformats.org/officeDocument/2006/relationships" xmlns:p="http://schemas.openxmlformats.org/presentationml/2006/main">
+  <p:cSld>
+    <p:spTree>
+      <p:nvGrpSpPr>
+        <p:cNvPr id="1" name=""/>
+        <p:cNvGrpSpPr/>
+        <p:nvPr/>
+      </p:nvGrpSpPr>
+      <p:grpSpPr>
+        <a:xfrm>
+          <a:off x="0" y="0"/>
+          <a:ext cx="0" cy="0"/>
+          <a:chOff x="0" y="0"/>
+          <a:chExt cx="0" cy="0"/>
+        </a:xfrm>
+      </p:grpSpPr>
+      <p:sp>
+        <p:nvSpPr>
+          <p:cNvPr id="2" name="Slide Image Placeholder 1"/>
+          <p:cNvSpPr>
+            <a:spLocks noGrp="1" noRot="1" noChangeAspect="1"/>
+          </p:cNvSpPr>
+          <p:nvPr>
+            <p:ph type="sldImg"/>
+          </p:nvPr>
+        </p:nvSpPr>
+        <p:spPr/>
+      </p:sp>
+      <p:sp>
+        <p:nvSpPr>
+          <p:cNvPr id="3" name="Notes Placeholder 2"/>
+          <p:cNvSpPr>
+            <a:spLocks noGrp="1"/>
+          </p:cNvSpPr>
+          <p:nvPr>
+            <p:ph type="body" idx="1"/>
+          </p:nvPr>
+        </p:nvSpPr>
+        <p:spPr/>
+        <p:txBody>
+          <a:bodyPr/>
+          <a:lstStyle/>
+          <a:p>
+            <a:r>
+              <a:rPr lang="en-US" dirty="0"/>
+              <a:t>SOTP on FY27E Adj. EBITDA from each model case (DCF!C3 toggle). Base multiples from the model: Aerospace 16x, Power 12x, Leasing + SCI 9x; corporate costs at the blended segment multiple. Bear: model Bear EBITDA (Aerospace $1,168M, Power $113M, Leasing $400M) at de-rated 12x / 8x / 8x = $126 (-24%). Bull: model Bull EBITDA ($1,669M / $550M / $455M) at 18x / 14x / 10x = $352 (+111%). Reward/risk = 66% / 24% = 2.7x. Holding base multiples in the bear case gives $173, so the bear case also assumes the market keeps punishing the multiple. Note: the title slide still shows the blended DCF target ($308, 84%, 3.4x).</a:t>
+            </a:r>
+            <a:endParaRPr lang="en-US" dirty="0"/>
+          </a:p>
+        </p:txBody>
+      </p:sp>
+      <p:sp>
+        <p:nvSpPr>
+          <p:cNvPr id="4" name="Slide Number Placeholder 3"/>
+          <p:cNvSpPr>
+            <a:spLocks noGrp="1"/>
+          </p:cNvSpPr>
+          <p:nvPr>
+            <p:ph type="sldNum" sz="quarter" idx="10"/>
+          </p:nvPr>
+        </p:nvSpPr>
+        <p:spPr/>
+        <p:txBody>
+          <a:bodyPr/>
+          <a:lstStyle/>
+          <a:p>
+            <a:fld id="{F7021451-1387-4CA6-816F-3879F97B5CBC}" type="slidenum">
+              <a:rPr lang="en-US"/>
+              <a:t>24</a:t>
             </a:fld>
             <a:endParaRPr lang="en-US"/>
           </a:p>
@@ -22183,6 +22591,2444 @@
             <a:fld id="{F7021451-1387-4CA6-816F-3879F97B5CBC}" type="slidenum">
               <a:rPr b="1" lang="en-US"/>
               <a:t>23</a:t>
+            </a:fld>
+            <a:endParaRPr lang="en-US"/>
+          </a:p>
+        </p:txBody>
+      </p:sp>
+    </p:spTree>
+  </p:cSld>
+  <p:clrMapOvr>
+    <a:masterClrMapping/>
+  </p:clrMapOvr>
+</p:sld>
+</file>
+
+<file path=ppt/slides/slide24.xml><?xml version="1.0" encoding="utf-8"?>
+<p:sld xmlns:a="http://schemas.openxmlformats.org/drawingml/2006/main" xmlns:r="http://schemas.openxmlformats.org/officeDocument/2006/relationships" xmlns:p="http://schemas.openxmlformats.org/presentationml/2006/main">
+  <p:cSld name="Slide 24">
+    <p:spTree>
+      <p:nvGrpSpPr>
+        <p:cNvPr id="1" name=""/>
+        <p:cNvGrpSpPr/>
+        <p:nvPr/>
+      </p:nvGrpSpPr>
+      <p:grpSpPr>
+        <a:xfrm>
+          <a:off x="0" y="0"/>
+          <a:ext cx="0" cy="0"/>
+          <a:chOff x="0" y="0"/>
+          <a:chExt cx="0" cy="0"/>
+        </a:xfrm>
+      </p:grpSpPr>
+      <p:sp>
+        <p:nvSpPr>
+          <p:cNvPr id="2" name="Text 1"/>
+          <p:cNvSpPr/>
+          <p:nvPr>
+            <p:ph idx="102" type="title" hasCustomPrompt="1"/>
+          </p:nvPr>
+        </p:nvSpPr>
+        <p:spPr>
+          <a:xfrm>
+            <a:off x="320040" y="182880"/>
+            <a:ext cx="8503920" cy="640080"/>
+          </a:xfrm>
+          <a:prstGeom prst="rect">
+            <a:avLst/>
+          </a:prstGeom>
+          <a:noFill/>
+          <a:ln/>
+        </p:spPr>
+        <p:txBody>
+          <a:bodyPr wrap="square" lIns="0" tIns="0" rIns="0" bIns="0" rtlCol="0" anchor="ctr"/>
+          <a:lstStyle/>
+          <a:p>
+            <a:pPr algn="l" indent="0" marL="0">
+              <a:buNone/>
+            </a:pPr>
+            <a:r>
+              <a:rPr lang="en-US" sz="3200" b="1" dirty="0">
+                <a:solidFill>
+                  <a:schemeClr val="tx2"/>
+                </a:solidFill>
+              </a:rPr>
+              <a:t>Valuation: Sum of the Parts</a:t>
+            </a:r>
+            <a:endParaRPr lang="en-US" sz="3200" dirty="0"/>
+          </a:p>
+        </p:txBody>
+      </p:sp>
+      <p:sp>
+        <p:nvSpPr>
+          <p:cNvPr id="3" name="Text 1"/>
+          <p:cNvSpPr/>
+          <p:nvPr>
+            <p:ph idx="103" type="body" hasCustomPrompt="1"/>
+          </p:nvPr>
+        </p:nvSpPr>
+        <p:spPr>
+          <a:xfrm>
+            <a:off x="320040" y="932688"/>
+            <a:ext cx="8503920" cy="566928"/>
+          </a:xfrm>
+          <a:prstGeom prst="rect">
+            <a:avLst/>
+          </a:prstGeom>
+          <a:noFill/>
+          <a:ln/>
+        </p:spPr>
+        <p:txBody>
+          <a:bodyPr wrap="square" lIns="0" tIns="0" rIns="0" bIns="0" rtlCol="0" anchor="t"/>
+          <a:lstStyle/>
+          <a:p>
+            <a:pPr algn="l" indent="0" marL="0">
+              <a:buNone/>
+            </a:pPr>
+            <a:r>
+              <a:rPr lang="en-US" sz="1700" b="1" dirty="0">
+                <a:solidFill>
+                  <a:schemeClr val="tx2"/>
+                </a:solidFill>
+              </a:rPr>
+              <a:t>Base case of $277 (+66%), with 2.7x more upside than downside.</a:t>
+            </a:r>
+            <a:endParaRPr lang="en-US" sz="1700" dirty="0"/>
+          </a:p>
+        </p:txBody>
+      </p:sp>
+      <p:graphicFrame>
+        <p:nvGraphicFramePr>
+          <p:cNvPr id="25" name="SOTP table"/>
+          <p:cNvGraphicFramePr>
+            <a:graphicFrameLocks noGrp="1"/>
+          </p:cNvGraphicFramePr>
+          <p:nvPr>
+            <p:extLst>
+              <p:ext uri="{D42A27DB-BD31-4B8C-83A1-F6EECF244321}">
+                <p14:modId xmlns:p14="http://schemas.microsoft.com/office/powerpoint/2010/main" val="1579011935"/>
+              </p:ext>
+            </p:extLst>
+          </p:nvPr>
+        </p:nvGraphicFramePr>
+        <p:xfrm>
+          <a:off x="320040" y="1600200"/>
+          <a:ext cx="5029200" cy="914400"/>
+        </p:xfrm>
+        <a:graphic>
+          <a:graphicData uri="http://schemas.openxmlformats.org/drawingml/2006/table">
+            <a:tbl>
+              <a:tblPr/>
+              <a:tblGrid>
+                <a:gridCol w="1737360"/>
+                <a:gridCol w="1097280"/>
+                <a:gridCol w="1097280"/>
+                <a:gridCol w="1097280"/>
+              </a:tblGrid>
+              <a:tr h="347472">
+                <a:tc>
+                  <a:txBody>
+                    <a:bodyPr/>
+                    <a:lstStyle/>
+                    <a:p>
+                      <a:pPr algn="l" indent="0" marL="0">
+                        <a:buNone/>
+                      </a:pPr>
+                      <a:endParaRPr lang="en-US" sz="1200" dirty="0"/>
+                    </a:p>
+                  </a:txBody>
+                  <a:tcPr marL="36576" marR="36576" marT="36576" marB="36576" anchor="ctr">
+                    <a:lnL w="6350" cap="flat" cmpd="sng" algn="ctr">
+                      <a:solidFill>
+                        <a:srgbClr val="E3E0DC"/>
+                      </a:solidFill>
+                      <a:prstDash val="solid"/>
+                      <a:round/>
+                      <a:headEnd type="none" w="med" len="med"/>
+                      <a:tailEnd type="none" w="med" len="med"/>
+                    </a:lnL>
+                    <a:lnR w="6350" cap="flat" cmpd="sng" algn="ctr">
+                      <a:solidFill>
+                        <a:srgbClr val="E3E0DC"/>
+                      </a:solidFill>
+                      <a:prstDash val="solid"/>
+                      <a:round/>
+                      <a:headEnd type="none" w="med" len="med"/>
+                      <a:tailEnd type="none" w="med" len="med"/>
+                    </a:lnR>
+                    <a:lnT w="6350" cap="flat" cmpd="sng" algn="ctr">
+                      <a:solidFill>
+                        <a:srgbClr val="E3E0DC"/>
+                      </a:solidFill>
+                      <a:prstDash val="solid"/>
+                      <a:round/>
+                      <a:headEnd type="none" w="med" len="med"/>
+                      <a:tailEnd type="none" w="med" len="med"/>
+                    </a:lnT>
+                    <a:lnB w="6350" cap="flat" cmpd="sng" algn="ctr">
+                      <a:solidFill>
+                        <a:srgbClr val="E3E0DC"/>
+                      </a:solidFill>
+                      <a:prstDash val="solid"/>
+                      <a:round/>
+                      <a:headEnd type="none" w="med" len="med"/>
+                      <a:tailEnd type="none" w="med" len="med"/>
+                    </a:lnB>
+                  </a:tcPr>
+                </a:tc>
+                <a:tc>
+                  <a:txBody>
+                    <a:bodyPr/>
+                    <a:lstStyle/>
+                    <a:p>
+                      <a:pPr algn="ctr" indent="0" marL="0">
+                        <a:buNone/>
+                      </a:pPr>
+                      <a:r>
+                        <a:rPr lang="en-US" sz="1300" b="1" dirty="0">
+                          <a:solidFill>
+                            <a:srgbClr val="0A1C58"/>
+                          </a:solidFill>
+                        </a:rPr>
+                        <a:t>Bear</a:t>
+                      </a:r>
+                      <a:endParaRPr lang="en-US" sz="1300" dirty="0"/>
+                    </a:p>
+                  </a:txBody>
+                  <a:tcPr marL="36576" marR="36576" marT="36576" marB="36576" anchor="ctr">
+                    <a:lnL w="6350" cap="flat" cmpd="sng" algn="ctr">
+                      <a:solidFill>
+                        <a:srgbClr val="E3E0DC"/>
+                      </a:solidFill>
+                      <a:prstDash val="solid"/>
+                      <a:round/>
+                      <a:headEnd type="none" w="med" len="med"/>
+                      <a:tailEnd type="none" w="med" len="med"/>
+                    </a:lnL>
+                    <a:lnR w="6350" cap="flat" cmpd="sng" algn="ctr">
+                      <a:solidFill>
+                        <a:srgbClr val="E3E0DC"/>
+                      </a:solidFill>
+                      <a:prstDash val="solid"/>
+                      <a:round/>
+                      <a:headEnd type="none" w="med" len="med"/>
+                      <a:tailEnd type="none" w="med" len="med"/>
+                    </a:lnR>
+                    <a:lnT w="6350" cap="flat" cmpd="sng" algn="ctr">
+                      <a:solidFill>
+                        <a:srgbClr val="E3E0DC"/>
+                      </a:solidFill>
+                      <a:prstDash val="solid"/>
+                      <a:round/>
+                      <a:headEnd type="none" w="med" len="med"/>
+                      <a:tailEnd type="none" w="med" len="med"/>
+                    </a:lnT>
+                    <a:lnB w="6350" cap="flat" cmpd="sng" algn="ctr">
+                      <a:solidFill>
+                        <a:srgbClr val="E3E0DC"/>
+                      </a:solidFill>
+                      <a:prstDash val="solid"/>
+                      <a:round/>
+                      <a:headEnd type="none" w="med" len="med"/>
+                      <a:tailEnd type="none" w="med" len="med"/>
+                    </a:lnB>
+                    <a:solidFill>
+                      <a:srgbClr val="DCD8D3"/>
+                    </a:solidFill>
+                  </a:tcPr>
+                </a:tc>
+                <a:tc>
+                  <a:txBody>
+                    <a:bodyPr/>
+                    <a:lstStyle/>
+                    <a:p>
+                      <a:pPr algn="ctr" indent="0" marL="0">
+                        <a:buNone/>
+                      </a:pPr>
+                      <a:r>
+                        <a:rPr lang="en-US" sz="1300" b="1" dirty="0">
+                          <a:solidFill>
+                            <a:srgbClr val="FFFFFF"/>
+                          </a:solidFill>
+                        </a:rPr>
+                        <a:t>Base</a:t>
+                      </a:r>
+                      <a:endParaRPr lang="en-US" sz="1300" dirty="0"/>
+                    </a:p>
+                  </a:txBody>
+                  <a:tcPr marL="36576" marR="36576" marT="36576" marB="36576" anchor="ctr">
+                    <a:lnL w="6350" cap="flat" cmpd="sng" algn="ctr">
+                      <a:solidFill>
+                        <a:srgbClr val="E3E0DC"/>
+                      </a:solidFill>
+                      <a:prstDash val="solid"/>
+                      <a:round/>
+                      <a:headEnd type="none" w="med" len="med"/>
+                      <a:tailEnd type="none" w="med" len="med"/>
+                    </a:lnL>
+                    <a:lnR w="6350" cap="flat" cmpd="sng" algn="ctr">
+                      <a:solidFill>
+                        <a:srgbClr val="E3E0DC"/>
+                      </a:solidFill>
+                      <a:prstDash val="solid"/>
+                      <a:round/>
+                      <a:headEnd type="none" w="med" len="med"/>
+                      <a:tailEnd type="none" w="med" len="med"/>
+                    </a:lnR>
+                    <a:lnT w="6350" cap="flat" cmpd="sng" algn="ctr">
+                      <a:solidFill>
+                        <a:srgbClr val="E3E0DC"/>
+                      </a:solidFill>
+                      <a:prstDash val="solid"/>
+                      <a:round/>
+                      <a:headEnd type="none" w="med" len="med"/>
+                      <a:tailEnd type="none" w="med" len="med"/>
+                    </a:lnT>
+                    <a:lnB w="6350" cap="flat" cmpd="sng" algn="ctr">
+                      <a:solidFill>
+                        <a:srgbClr val="E3E0DC"/>
+                      </a:solidFill>
+                      <a:prstDash val="solid"/>
+                      <a:round/>
+                      <a:headEnd type="none" w="med" len="med"/>
+                      <a:tailEnd type="none" w="med" len="med"/>
+                    </a:lnB>
+                    <a:solidFill>
+                      <a:srgbClr val="0A1C58"/>
+                    </a:solidFill>
+                  </a:tcPr>
+                </a:tc>
+                <a:tc>
+                  <a:txBody>
+                    <a:bodyPr/>
+                    <a:lstStyle/>
+                    <a:p>
+                      <a:pPr algn="ctr" indent="0" marL="0">
+                        <a:buNone/>
+                      </a:pPr>
+                      <a:r>
+                        <a:rPr lang="en-US" sz="1300" b="1" dirty="0">
+                          <a:solidFill>
+                            <a:srgbClr val="0A1C58"/>
+                          </a:solidFill>
+                        </a:rPr>
+                        <a:t>Bull</a:t>
+                      </a:r>
+                      <a:endParaRPr lang="en-US" sz="1300" dirty="0"/>
+                    </a:p>
+                  </a:txBody>
+                  <a:tcPr marL="36576" marR="36576" marT="36576" marB="36576" anchor="ctr">
+                    <a:lnL w="6350" cap="flat" cmpd="sng" algn="ctr">
+                      <a:solidFill>
+                        <a:srgbClr val="E3E0DC"/>
+                      </a:solidFill>
+                      <a:prstDash val="solid"/>
+                      <a:round/>
+                      <a:headEnd type="none" w="med" len="med"/>
+                      <a:tailEnd type="none" w="med" len="med"/>
+                    </a:lnL>
+                    <a:lnR w="6350" cap="flat" cmpd="sng" algn="ctr">
+                      <a:solidFill>
+                        <a:srgbClr val="E3E0DC"/>
+                      </a:solidFill>
+                      <a:prstDash val="solid"/>
+                      <a:round/>
+                      <a:headEnd type="none" w="med" len="med"/>
+                      <a:tailEnd type="none" w="med" len="med"/>
+                    </a:lnR>
+                    <a:lnT w="6350" cap="flat" cmpd="sng" algn="ctr">
+                      <a:solidFill>
+                        <a:srgbClr val="E3E0DC"/>
+                      </a:solidFill>
+                      <a:prstDash val="solid"/>
+                      <a:round/>
+                      <a:headEnd type="none" w="med" len="med"/>
+                      <a:tailEnd type="none" w="med" len="med"/>
+                    </a:lnT>
+                    <a:lnB w="6350" cap="flat" cmpd="sng" algn="ctr">
+                      <a:solidFill>
+                        <a:srgbClr val="E3E0DC"/>
+                      </a:solidFill>
+                      <a:prstDash val="solid"/>
+                      <a:round/>
+                      <a:headEnd type="none" w="med" len="med"/>
+                      <a:tailEnd type="none" w="med" len="med"/>
+                    </a:lnB>
+                    <a:solidFill>
+                      <a:srgbClr val="DCD8D3"/>
+                    </a:solidFill>
+                  </a:tcPr>
+                </a:tc>
+              </a:tr>
+              <a:tr h="475488">
+                <a:tc>
+                  <a:txBody>
+                    <a:bodyPr/>
+                    <a:lstStyle/>
+                    <a:p>
+                      <a:pPr algn="l" indent="0" marL="0">
+                        <a:buNone/>
+                      </a:pPr>
+                      <a:r>
+                        <a:rPr lang="en-US" sz="1200" b="1" dirty="0">
+                          <a:solidFill>
+                            <a:srgbClr val="1A1A1A"/>
+                          </a:solidFill>
+                        </a:rPr>
+                        <a:t>Aerospace Products</a:t>
+                      </a:r>
+                      <a:endParaRPr lang="en-US" sz="1200" dirty="0"/>
+                    </a:p>
+                  </a:txBody>
+                  <a:tcPr marL="36576" marR="36576" marT="36576" marB="36576" anchor="ctr">
+                    <a:lnL w="6350" cap="flat" cmpd="sng" algn="ctr">
+                      <a:solidFill>
+                        <a:srgbClr val="E3E0DC"/>
+                      </a:solidFill>
+                      <a:prstDash val="solid"/>
+                      <a:round/>
+                      <a:headEnd type="none" w="med" len="med"/>
+                      <a:tailEnd type="none" w="med" len="med"/>
+                    </a:lnL>
+                    <a:lnR w="6350" cap="flat" cmpd="sng" algn="ctr">
+                      <a:solidFill>
+                        <a:srgbClr val="E3E0DC"/>
+                      </a:solidFill>
+                      <a:prstDash val="solid"/>
+                      <a:round/>
+                      <a:headEnd type="none" w="med" len="med"/>
+                      <a:tailEnd type="none" w="med" len="med"/>
+                    </a:lnR>
+                    <a:lnT w="6350" cap="flat" cmpd="sng" algn="ctr">
+                      <a:solidFill>
+                        <a:srgbClr val="E3E0DC"/>
+                      </a:solidFill>
+                      <a:prstDash val="solid"/>
+                      <a:round/>
+                      <a:headEnd type="none" w="med" len="med"/>
+                      <a:tailEnd type="none" w="med" len="med"/>
+                    </a:lnT>
+                    <a:lnB w="6350" cap="flat" cmpd="sng" algn="ctr">
+                      <a:solidFill>
+                        <a:srgbClr val="E3E0DC"/>
+                      </a:solidFill>
+                      <a:prstDash val="solid"/>
+                      <a:round/>
+                      <a:headEnd type="none" w="med" len="med"/>
+                      <a:tailEnd type="none" w="med" len="med"/>
+                    </a:lnB>
+                  </a:tcPr>
+                </a:tc>
+                <a:tc>
+                  <a:txBody>
+                    <a:bodyPr/>
+                    <a:lstStyle/>
+                    <a:p>
+                      <a:pPr algn="ctr" indent="0" marL="0">
+                        <a:buNone/>
+                      </a:pPr>
+                      <a:r>
+                        <a:rPr lang="en-US" sz="1300" b="1" dirty="0">
+                          <a:solidFill>
+                            <a:srgbClr val="1A1A1A"/>
+                          </a:solidFill>
+                        </a:rPr>
+                        <a:t>$135</a:t>
+                      </a:r>
+                      <a:endParaRPr lang="en-US" sz="1200" dirty="0"/>
+                    </a:p>
+                    <a:p>
+                      <a:pPr algn="ctr" indent="0" marL="0">
+                        <a:buNone/>
+                      </a:pPr>
+                      <a:r>
+                        <a:rPr lang="en-US" sz="900" dirty="0">
+                          <a:solidFill>
+                            <a:srgbClr val="847C7A"/>
+                          </a:solidFill>
+                        </a:rPr>
+                        <a:t>12x · $1,168M</a:t>
+                      </a:r>
+                      <a:endParaRPr lang="en-US" sz="1200" dirty="0"/>
+                    </a:p>
+                  </a:txBody>
+                  <a:tcPr marL="36576" marR="36576" marT="36576" marB="36576" anchor="ctr">
+                    <a:lnL w="6350" cap="flat" cmpd="sng" algn="ctr">
+                      <a:solidFill>
+                        <a:srgbClr val="E3E0DC"/>
+                      </a:solidFill>
+                      <a:prstDash val="solid"/>
+                      <a:round/>
+                      <a:headEnd type="none" w="med" len="med"/>
+                      <a:tailEnd type="none" w="med" len="med"/>
+                    </a:lnL>
+                    <a:lnR w="6350" cap="flat" cmpd="sng" algn="ctr">
+                      <a:solidFill>
+                        <a:srgbClr val="E3E0DC"/>
+                      </a:solidFill>
+                      <a:prstDash val="solid"/>
+                      <a:round/>
+                      <a:headEnd type="none" w="med" len="med"/>
+                      <a:tailEnd type="none" w="med" len="med"/>
+                    </a:lnR>
+                    <a:lnT w="6350" cap="flat" cmpd="sng" algn="ctr">
+                      <a:solidFill>
+                        <a:srgbClr val="E3E0DC"/>
+                      </a:solidFill>
+                      <a:prstDash val="solid"/>
+                      <a:round/>
+                      <a:headEnd type="none" w="med" len="med"/>
+                      <a:tailEnd type="none" w="med" len="med"/>
+                    </a:lnT>
+                    <a:lnB w="6350" cap="flat" cmpd="sng" algn="ctr">
+                      <a:solidFill>
+                        <a:srgbClr val="E3E0DC"/>
+                      </a:solidFill>
+                      <a:prstDash val="solid"/>
+                      <a:round/>
+                      <a:headEnd type="none" w="med" len="med"/>
+                      <a:tailEnd type="none" w="med" len="med"/>
+                    </a:lnB>
+                  </a:tcPr>
+                </a:tc>
+                <a:tc>
+                  <a:txBody>
+                    <a:bodyPr/>
+                    <a:lstStyle/>
+                    <a:p>
+                      <a:pPr algn="ctr" indent="0" marL="0">
+                        <a:buNone/>
+                      </a:pPr>
+                      <a:r>
+                        <a:rPr lang="en-US" sz="1300" b="1" dirty="0">
+                          <a:solidFill>
+                            <a:srgbClr val="1A1A1A"/>
+                          </a:solidFill>
+                        </a:rPr>
+                        <a:t>$237</a:t>
+                      </a:r>
+                      <a:endParaRPr lang="en-US" sz="1200" dirty="0"/>
+                    </a:p>
+                    <a:p>
+                      <a:pPr algn="ctr" indent="0" marL="0">
+                        <a:buNone/>
+                      </a:pPr>
+                      <a:r>
+                        <a:rPr lang="en-US" sz="900" dirty="0">
+                          <a:solidFill>
+                            <a:srgbClr val="847C7A"/>
+                          </a:solidFill>
+                        </a:rPr>
+                        <a:t>16x · $1,541M</a:t>
+                      </a:r>
+                      <a:endParaRPr lang="en-US" sz="1200" dirty="0"/>
+                    </a:p>
+                  </a:txBody>
+                  <a:tcPr marL="36576" marR="36576" marT="36576" marB="36576" anchor="ctr">
+                    <a:lnL w="6350" cap="flat" cmpd="sng" algn="ctr">
+                      <a:solidFill>
+                        <a:srgbClr val="E3E0DC"/>
+                      </a:solidFill>
+                      <a:prstDash val="solid"/>
+                      <a:round/>
+                      <a:headEnd type="none" w="med" len="med"/>
+                      <a:tailEnd type="none" w="med" len="med"/>
+                    </a:lnL>
+                    <a:lnR w="6350" cap="flat" cmpd="sng" algn="ctr">
+                      <a:solidFill>
+                        <a:srgbClr val="E3E0DC"/>
+                      </a:solidFill>
+                      <a:prstDash val="solid"/>
+                      <a:round/>
+                      <a:headEnd type="none" w="med" len="med"/>
+                      <a:tailEnd type="none" w="med" len="med"/>
+                    </a:lnR>
+                    <a:lnT w="6350" cap="flat" cmpd="sng" algn="ctr">
+                      <a:solidFill>
+                        <a:srgbClr val="E3E0DC"/>
+                      </a:solidFill>
+                      <a:prstDash val="solid"/>
+                      <a:round/>
+                      <a:headEnd type="none" w="med" len="med"/>
+                      <a:tailEnd type="none" w="med" len="med"/>
+                    </a:lnT>
+                    <a:lnB w="6350" cap="flat" cmpd="sng" algn="ctr">
+                      <a:solidFill>
+                        <a:srgbClr val="E3E0DC"/>
+                      </a:solidFill>
+                      <a:prstDash val="solid"/>
+                      <a:round/>
+                      <a:headEnd type="none" w="med" len="med"/>
+                      <a:tailEnd type="none" w="med" len="med"/>
+                    </a:lnB>
+                  </a:tcPr>
+                </a:tc>
+                <a:tc>
+                  <a:txBody>
+                    <a:bodyPr/>
+                    <a:lstStyle/>
+                    <a:p>
+                      <a:pPr algn="ctr" indent="0" marL="0">
+                        <a:buNone/>
+                      </a:pPr>
+                      <a:r>
+                        <a:rPr lang="en-US" sz="1300" b="1" dirty="0">
+                          <a:solidFill>
+                            <a:srgbClr val="1A1A1A"/>
+                          </a:solidFill>
+                        </a:rPr>
+                        <a:t>$289</a:t>
+                      </a:r>
+                      <a:endParaRPr lang="en-US" sz="1200" dirty="0"/>
+                    </a:p>
+                    <a:p>
+                      <a:pPr algn="ctr" indent="0" marL="0">
+                        <a:buNone/>
+                      </a:pPr>
+                      <a:r>
+                        <a:rPr lang="en-US" sz="900" dirty="0">
+                          <a:solidFill>
+                            <a:srgbClr val="847C7A"/>
+                          </a:solidFill>
+                        </a:rPr>
+                        <a:t>18x · $1,669M</a:t>
+                      </a:r>
+                      <a:endParaRPr lang="en-US" sz="1200" dirty="0"/>
+                    </a:p>
+                  </a:txBody>
+                  <a:tcPr marL="36576" marR="36576" marT="36576" marB="36576" anchor="ctr">
+                    <a:lnL w="6350" cap="flat" cmpd="sng" algn="ctr">
+                      <a:solidFill>
+                        <a:srgbClr val="E3E0DC"/>
+                      </a:solidFill>
+                      <a:prstDash val="solid"/>
+                      <a:round/>
+                      <a:headEnd type="none" w="med" len="med"/>
+                      <a:tailEnd type="none" w="med" len="med"/>
+                    </a:lnL>
+                    <a:lnR w="6350" cap="flat" cmpd="sng" algn="ctr">
+                      <a:solidFill>
+                        <a:srgbClr val="E3E0DC"/>
+                      </a:solidFill>
+                      <a:prstDash val="solid"/>
+                      <a:round/>
+                      <a:headEnd type="none" w="med" len="med"/>
+                      <a:tailEnd type="none" w="med" len="med"/>
+                    </a:lnR>
+                    <a:lnT w="6350" cap="flat" cmpd="sng" algn="ctr">
+                      <a:solidFill>
+                        <a:srgbClr val="E3E0DC"/>
+                      </a:solidFill>
+                      <a:prstDash val="solid"/>
+                      <a:round/>
+                      <a:headEnd type="none" w="med" len="med"/>
+                      <a:tailEnd type="none" w="med" len="med"/>
+                    </a:lnT>
+                    <a:lnB w="6350" cap="flat" cmpd="sng" algn="ctr">
+                      <a:solidFill>
+                        <a:srgbClr val="E3E0DC"/>
+                      </a:solidFill>
+                      <a:prstDash val="solid"/>
+                      <a:round/>
+                      <a:headEnd type="none" w="med" len="med"/>
+                      <a:tailEnd type="none" w="med" len="med"/>
+                    </a:lnB>
+                  </a:tcPr>
+                </a:tc>
+              </a:tr>
+              <a:tr h="475488">
+                <a:tc>
+                  <a:txBody>
+                    <a:bodyPr/>
+                    <a:lstStyle/>
+                    <a:p>
+                      <a:pPr algn="l" indent="0" marL="0">
+                        <a:buNone/>
+                      </a:pPr>
+                      <a:r>
+                        <a:rPr lang="en-US" sz="1200" b="1" dirty="0">
+                          <a:solidFill>
+                            <a:srgbClr val="1A1A1A"/>
+                          </a:solidFill>
+                        </a:rPr>
+                        <a:t>FTAI Power</a:t>
+                      </a:r>
+                      <a:endParaRPr lang="en-US" sz="1200" dirty="0"/>
+                    </a:p>
+                  </a:txBody>
+                  <a:tcPr marL="36576" marR="36576" marT="36576" marB="36576" anchor="ctr">
+                    <a:lnL w="6350" cap="flat" cmpd="sng" algn="ctr">
+                      <a:solidFill>
+                        <a:srgbClr val="E3E0DC"/>
+                      </a:solidFill>
+                      <a:prstDash val="solid"/>
+                      <a:round/>
+                      <a:headEnd type="none" w="med" len="med"/>
+                      <a:tailEnd type="none" w="med" len="med"/>
+                    </a:lnL>
+                    <a:lnR w="6350" cap="flat" cmpd="sng" algn="ctr">
+                      <a:solidFill>
+                        <a:srgbClr val="E3E0DC"/>
+                      </a:solidFill>
+                      <a:prstDash val="solid"/>
+                      <a:round/>
+                      <a:headEnd type="none" w="med" len="med"/>
+                      <a:tailEnd type="none" w="med" len="med"/>
+                    </a:lnR>
+                    <a:lnT w="6350" cap="flat" cmpd="sng" algn="ctr">
+                      <a:solidFill>
+                        <a:srgbClr val="E3E0DC"/>
+                      </a:solidFill>
+                      <a:prstDash val="solid"/>
+                      <a:round/>
+                      <a:headEnd type="none" w="med" len="med"/>
+                      <a:tailEnd type="none" w="med" len="med"/>
+                    </a:lnT>
+                    <a:lnB w="6350" cap="flat" cmpd="sng" algn="ctr">
+                      <a:solidFill>
+                        <a:srgbClr val="E3E0DC"/>
+                      </a:solidFill>
+                      <a:prstDash val="solid"/>
+                      <a:round/>
+                      <a:headEnd type="none" w="med" len="med"/>
+                      <a:tailEnd type="none" w="med" len="med"/>
+                    </a:lnB>
+                  </a:tcPr>
+                </a:tc>
+                <a:tc>
+                  <a:txBody>
+                    <a:bodyPr/>
+                    <a:lstStyle/>
+                    <a:p>
+                      <a:pPr algn="ctr" indent="0" marL="0">
+                        <a:buNone/>
+                      </a:pPr>
+                      <a:r>
+                        <a:rPr lang="en-US" sz="1300" b="1" dirty="0">
+                          <a:solidFill>
+                            <a:srgbClr val="1A1A1A"/>
+                          </a:solidFill>
+                        </a:rPr>
+                        <a:t>$9</a:t>
+                      </a:r>
+                      <a:endParaRPr lang="en-US" sz="1200" dirty="0"/>
+                    </a:p>
+                    <a:p>
+                      <a:pPr algn="ctr" indent="0" marL="0">
+                        <a:buNone/>
+                      </a:pPr>
+                      <a:r>
+                        <a:rPr lang="en-US" sz="900" dirty="0">
+                          <a:solidFill>
+                            <a:srgbClr val="847C7A"/>
+                          </a:solidFill>
+                        </a:rPr>
+                        <a:t>8x · $113M</a:t>
+                      </a:r>
+                      <a:endParaRPr lang="en-US" sz="1200" dirty="0"/>
+                    </a:p>
+                  </a:txBody>
+                  <a:tcPr marL="36576" marR="36576" marT="36576" marB="36576" anchor="ctr">
+                    <a:lnL w="6350" cap="flat" cmpd="sng" algn="ctr">
+                      <a:solidFill>
+                        <a:srgbClr val="E3E0DC"/>
+                      </a:solidFill>
+                      <a:prstDash val="solid"/>
+                      <a:round/>
+                      <a:headEnd type="none" w="med" len="med"/>
+                      <a:tailEnd type="none" w="med" len="med"/>
+                    </a:lnL>
+                    <a:lnR w="6350" cap="flat" cmpd="sng" algn="ctr">
+                      <a:solidFill>
+                        <a:srgbClr val="E3E0DC"/>
+                      </a:solidFill>
+                      <a:prstDash val="solid"/>
+                      <a:round/>
+                      <a:headEnd type="none" w="med" len="med"/>
+                      <a:tailEnd type="none" w="med" len="med"/>
+                    </a:lnR>
+                    <a:lnT w="6350" cap="flat" cmpd="sng" algn="ctr">
+                      <a:solidFill>
+                        <a:srgbClr val="E3E0DC"/>
+                      </a:solidFill>
+                      <a:prstDash val="solid"/>
+                      <a:round/>
+                      <a:headEnd type="none" w="med" len="med"/>
+                      <a:tailEnd type="none" w="med" len="med"/>
+                    </a:lnT>
+                    <a:lnB w="6350" cap="flat" cmpd="sng" algn="ctr">
+                      <a:solidFill>
+                        <a:srgbClr val="E3E0DC"/>
+                      </a:solidFill>
+                      <a:prstDash val="solid"/>
+                      <a:round/>
+                      <a:headEnd type="none" w="med" len="med"/>
+                      <a:tailEnd type="none" w="med" len="med"/>
+                    </a:lnB>
+                  </a:tcPr>
+                </a:tc>
+                <a:tc>
+                  <a:txBody>
+                    <a:bodyPr/>
+                    <a:lstStyle/>
+                    <a:p>
+                      <a:pPr algn="ctr" indent="0" marL="0">
+                        <a:buNone/>
+                      </a:pPr>
+                      <a:r>
+                        <a:rPr lang="en-US" sz="1300" b="1" dirty="0">
+                          <a:solidFill>
+                            <a:srgbClr val="1A1A1A"/>
+                          </a:solidFill>
+                        </a:rPr>
+                        <a:t>$52</a:t>
+                      </a:r>
+                      <a:endParaRPr lang="en-US" sz="1200" dirty="0"/>
+                    </a:p>
+                    <a:p>
+                      <a:pPr algn="ctr" indent="0" marL="0">
+                        <a:buNone/>
+                      </a:pPr>
+                      <a:r>
+                        <a:rPr lang="en-US" sz="900" dirty="0">
+                          <a:solidFill>
+                            <a:srgbClr val="847C7A"/>
+                          </a:solidFill>
+                        </a:rPr>
+                        <a:t>12x · $450M</a:t>
+                      </a:r>
+                      <a:endParaRPr lang="en-US" sz="1200" dirty="0"/>
+                    </a:p>
+                  </a:txBody>
+                  <a:tcPr marL="36576" marR="36576" marT="36576" marB="36576" anchor="ctr">
+                    <a:lnL w="6350" cap="flat" cmpd="sng" algn="ctr">
+                      <a:solidFill>
+                        <a:srgbClr val="E3E0DC"/>
+                      </a:solidFill>
+                      <a:prstDash val="solid"/>
+                      <a:round/>
+                      <a:headEnd type="none" w="med" len="med"/>
+                      <a:tailEnd type="none" w="med" len="med"/>
+                    </a:lnL>
+                    <a:lnR w="6350" cap="flat" cmpd="sng" algn="ctr">
+                      <a:solidFill>
+                        <a:srgbClr val="E3E0DC"/>
+                      </a:solidFill>
+                      <a:prstDash val="solid"/>
+                      <a:round/>
+                      <a:headEnd type="none" w="med" len="med"/>
+                      <a:tailEnd type="none" w="med" len="med"/>
+                    </a:lnR>
+                    <a:lnT w="6350" cap="flat" cmpd="sng" algn="ctr">
+                      <a:solidFill>
+                        <a:srgbClr val="E3E0DC"/>
+                      </a:solidFill>
+                      <a:prstDash val="solid"/>
+                      <a:round/>
+                      <a:headEnd type="none" w="med" len="med"/>
+                      <a:tailEnd type="none" w="med" len="med"/>
+                    </a:lnT>
+                    <a:lnB w="6350" cap="flat" cmpd="sng" algn="ctr">
+                      <a:solidFill>
+                        <a:srgbClr val="E3E0DC"/>
+                      </a:solidFill>
+                      <a:prstDash val="solid"/>
+                      <a:round/>
+                      <a:headEnd type="none" w="med" len="med"/>
+                      <a:tailEnd type="none" w="med" len="med"/>
+                    </a:lnB>
+                  </a:tcPr>
+                </a:tc>
+                <a:tc>
+                  <a:txBody>
+                    <a:bodyPr/>
+                    <a:lstStyle/>
+                    <a:p>
+                      <a:pPr algn="ctr" indent="0" marL="0">
+                        <a:buNone/>
+                      </a:pPr>
+                      <a:r>
+                        <a:rPr lang="en-US" sz="1300" b="1" dirty="0">
+                          <a:solidFill>
+                            <a:srgbClr val="1A1A1A"/>
+                          </a:solidFill>
+                        </a:rPr>
+                        <a:t>$74</a:t>
+                      </a:r>
+                      <a:endParaRPr lang="en-US" sz="1200" dirty="0"/>
+                    </a:p>
+                    <a:p>
+                      <a:pPr algn="ctr" indent="0" marL="0">
+                        <a:buNone/>
+                      </a:pPr>
+                      <a:r>
+                        <a:rPr lang="en-US" sz="900" dirty="0">
+                          <a:solidFill>
+                            <a:srgbClr val="847C7A"/>
+                          </a:solidFill>
+                        </a:rPr>
+                        <a:t>14x · $550M</a:t>
+                      </a:r>
+                      <a:endParaRPr lang="en-US" sz="1200" dirty="0"/>
+                    </a:p>
+                  </a:txBody>
+                  <a:tcPr marL="36576" marR="36576" marT="36576" marB="36576" anchor="ctr">
+                    <a:lnL w="6350" cap="flat" cmpd="sng" algn="ctr">
+                      <a:solidFill>
+                        <a:srgbClr val="E3E0DC"/>
+                      </a:solidFill>
+                      <a:prstDash val="solid"/>
+                      <a:round/>
+                      <a:headEnd type="none" w="med" len="med"/>
+                      <a:tailEnd type="none" w="med" len="med"/>
+                    </a:lnL>
+                    <a:lnR w="6350" cap="flat" cmpd="sng" algn="ctr">
+                      <a:solidFill>
+                        <a:srgbClr val="E3E0DC"/>
+                      </a:solidFill>
+                      <a:prstDash val="solid"/>
+                      <a:round/>
+                      <a:headEnd type="none" w="med" len="med"/>
+                      <a:tailEnd type="none" w="med" len="med"/>
+                    </a:lnR>
+                    <a:lnT w="6350" cap="flat" cmpd="sng" algn="ctr">
+                      <a:solidFill>
+                        <a:srgbClr val="E3E0DC"/>
+                      </a:solidFill>
+                      <a:prstDash val="solid"/>
+                      <a:round/>
+                      <a:headEnd type="none" w="med" len="med"/>
+                      <a:tailEnd type="none" w="med" len="med"/>
+                    </a:lnT>
+                    <a:lnB w="6350" cap="flat" cmpd="sng" algn="ctr">
+                      <a:solidFill>
+                        <a:srgbClr val="E3E0DC"/>
+                      </a:solidFill>
+                      <a:prstDash val="solid"/>
+                      <a:round/>
+                      <a:headEnd type="none" w="med" len="med"/>
+                      <a:tailEnd type="none" w="med" len="med"/>
+                    </a:lnB>
+                  </a:tcPr>
+                </a:tc>
+              </a:tr>
+              <a:tr h="475488">
+                <a:tc>
+                  <a:txBody>
+                    <a:bodyPr/>
+                    <a:lstStyle/>
+                    <a:p>
+                      <a:pPr algn="l" indent="0" marL="0">
+                        <a:buNone/>
+                      </a:pPr>
+                      <a:r>
+                        <a:rPr lang="en-US" sz="1200" b="1" dirty="0">
+                          <a:solidFill>
+                            <a:srgbClr val="1A1A1A"/>
+                          </a:solidFill>
+                        </a:rPr>
+                        <a:t>Leasing + SCI</a:t>
+                      </a:r>
+                      <a:endParaRPr lang="en-US" sz="1200" dirty="0"/>
+                    </a:p>
+                  </a:txBody>
+                  <a:tcPr marL="36576" marR="36576" marT="36576" marB="36576" anchor="ctr">
+                    <a:lnL w="6350" cap="flat" cmpd="sng" algn="ctr">
+                      <a:solidFill>
+                        <a:srgbClr val="E3E0DC"/>
+                      </a:solidFill>
+                      <a:prstDash val="solid"/>
+                      <a:round/>
+                      <a:headEnd type="none" w="med" len="med"/>
+                      <a:tailEnd type="none" w="med" len="med"/>
+                    </a:lnL>
+                    <a:lnR w="6350" cap="flat" cmpd="sng" algn="ctr">
+                      <a:solidFill>
+                        <a:srgbClr val="E3E0DC"/>
+                      </a:solidFill>
+                      <a:prstDash val="solid"/>
+                      <a:round/>
+                      <a:headEnd type="none" w="med" len="med"/>
+                      <a:tailEnd type="none" w="med" len="med"/>
+                    </a:lnR>
+                    <a:lnT w="6350" cap="flat" cmpd="sng" algn="ctr">
+                      <a:solidFill>
+                        <a:srgbClr val="E3E0DC"/>
+                      </a:solidFill>
+                      <a:prstDash val="solid"/>
+                      <a:round/>
+                      <a:headEnd type="none" w="med" len="med"/>
+                      <a:tailEnd type="none" w="med" len="med"/>
+                    </a:lnT>
+                    <a:lnB w="6350" cap="flat" cmpd="sng" algn="ctr">
+                      <a:solidFill>
+                        <a:srgbClr val="E3E0DC"/>
+                      </a:solidFill>
+                      <a:prstDash val="solid"/>
+                      <a:round/>
+                      <a:headEnd type="none" w="med" len="med"/>
+                      <a:tailEnd type="none" w="med" len="med"/>
+                    </a:lnB>
+                  </a:tcPr>
+                </a:tc>
+                <a:tc>
+                  <a:txBody>
+                    <a:bodyPr/>
+                    <a:lstStyle/>
+                    <a:p>
+                      <a:pPr algn="ctr" indent="0" marL="0">
+                        <a:buNone/>
+                      </a:pPr>
+                      <a:r>
+                        <a:rPr lang="en-US" sz="1300" b="1" dirty="0">
+                          <a:solidFill>
+                            <a:srgbClr val="1A1A1A"/>
+                          </a:solidFill>
+                        </a:rPr>
+                        <a:t>$31</a:t>
+                      </a:r>
+                      <a:endParaRPr lang="en-US" sz="1200" dirty="0"/>
+                    </a:p>
+                    <a:p>
+                      <a:pPr algn="ctr" indent="0" marL="0">
+                        <a:buNone/>
+                      </a:pPr>
+                      <a:r>
+                        <a:rPr lang="en-US" sz="900" dirty="0">
+                          <a:solidFill>
+                            <a:srgbClr val="847C7A"/>
+                          </a:solidFill>
+                        </a:rPr>
+                        <a:t>8x · $400M</a:t>
+                      </a:r>
+                      <a:endParaRPr lang="en-US" sz="1200" dirty="0"/>
+                    </a:p>
+                  </a:txBody>
+                  <a:tcPr marL="36576" marR="36576" marT="36576" marB="36576" anchor="ctr">
+                    <a:lnL w="6350" cap="flat" cmpd="sng" algn="ctr">
+                      <a:solidFill>
+                        <a:srgbClr val="E3E0DC"/>
+                      </a:solidFill>
+                      <a:prstDash val="solid"/>
+                      <a:round/>
+                      <a:headEnd type="none" w="med" len="med"/>
+                      <a:tailEnd type="none" w="med" len="med"/>
+                    </a:lnL>
+                    <a:lnR w="6350" cap="flat" cmpd="sng" algn="ctr">
+                      <a:solidFill>
+                        <a:srgbClr val="E3E0DC"/>
+                      </a:solidFill>
+                      <a:prstDash val="solid"/>
+                      <a:round/>
+                      <a:headEnd type="none" w="med" len="med"/>
+                      <a:tailEnd type="none" w="med" len="med"/>
+                    </a:lnR>
+                    <a:lnT w="6350" cap="flat" cmpd="sng" algn="ctr">
+                      <a:solidFill>
+                        <a:srgbClr val="E3E0DC"/>
+                      </a:solidFill>
+                      <a:prstDash val="solid"/>
+                      <a:round/>
+                      <a:headEnd type="none" w="med" len="med"/>
+                      <a:tailEnd type="none" w="med" len="med"/>
+                    </a:lnT>
+                    <a:lnB w="6350" cap="flat" cmpd="sng" algn="ctr">
+                      <a:solidFill>
+                        <a:srgbClr val="E3E0DC"/>
+                      </a:solidFill>
+                      <a:prstDash val="solid"/>
+                      <a:round/>
+                      <a:headEnd type="none" w="med" len="med"/>
+                      <a:tailEnd type="none" w="med" len="med"/>
+                    </a:lnB>
+                  </a:tcPr>
+                </a:tc>
+                <a:tc>
+                  <a:txBody>
+                    <a:bodyPr/>
+                    <a:lstStyle/>
+                    <a:p>
+                      <a:pPr algn="ctr" indent="0" marL="0">
+                        <a:buNone/>
+                      </a:pPr>
+                      <a:r>
+                        <a:rPr lang="en-US" sz="1300" b="1" dirty="0">
+                          <a:solidFill>
+                            <a:srgbClr val="1A1A1A"/>
+                          </a:solidFill>
+                        </a:rPr>
+                        <a:t>$39</a:t>
+                      </a:r>
+                      <a:endParaRPr lang="en-US" sz="1200" dirty="0"/>
+                    </a:p>
+                    <a:p>
+                      <a:pPr algn="ctr" indent="0" marL="0">
+                        <a:buNone/>
+                      </a:pPr>
+                      <a:r>
+                        <a:rPr lang="en-US" sz="900" dirty="0">
+                          <a:solidFill>
+                            <a:srgbClr val="847C7A"/>
+                          </a:solidFill>
+                        </a:rPr>
+                        <a:t>9x · $455M</a:t>
+                      </a:r>
+                      <a:endParaRPr lang="en-US" sz="1200" dirty="0"/>
+                    </a:p>
+                  </a:txBody>
+                  <a:tcPr marL="36576" marR="36576" marT="36576" marB="36576" anchor="ctr">
+                    <a:lnL w="6350" cap="flat" cmpd="sng" algn="ctr">
+                      <a:solidFill>
+                        <a:srgbClr val="E3E0DC"/>
+                      </a:solidFill>
+                      <a:prstDash val="solid"/>
+                      <a:round/>
+                      <a:headEnd type="none" w="med" len="med"/>
+                      <a:tailEnd type="none" w="med" len="med"/>
+                    </a:lnL>
+                    <a:lnR w="6350" cap="flat" cmpd="sng" algn="ctr">
+                      <a:solidFill>
+                        <a:srgbClr val="E3E0DC"/>
+                      </a:solidFill>
+                      <a:prstDash val="solid"/>
+                      <a:round/>
+                      <a:headEnd type="none" w="med" len="med"/>
+                      <a:tailEnd type="none" w="med" len="med"/>
+                    </a:lnR>
+                    <a:lnT w="6350" cap="flat" cmpd="sng" algn="ctr">
+                      <a:solidFill>
+                        <a:srgbClr val="E3E0DC"/>
+                      </a:solidFill>
+                      <a:prstDash val="solid"/>
+                      <a:round/>
+                      <a:headEnd type="none" w="med" len="med"/>
+                      <a:tailEnd type="none" w="med" len="med"/>
+                    </a:lnT>
+                    <a:lnB w="6350" cap="flat" cmpd="sng" algn="ctr">
+                      <a:solidFill>
+                        <a:srgbClr val="E3E0DC"/>
+                      </a:solidFill>
+                      <a:prstDash val="solid"/>
+                      <a:round/>
+                      <a:headEnd type="none" w="med" len="med"/>
+                      <a:tailEnd type="none" w="med" len="med"/>
+                    </a:lnB>
+                  </a:tcPr>
+                </a:tc>
+                <a:tc>
+                  <a:txBody>
+                    <a:bodyPr/>
+                    <a:lstStyle/>
+                    <a:p>
+                      <a:pPr algn="ctr" indent="0" marL="0">
+                        <a:buNone/>
+                      </a:pPr>
+                      <a:r>
+                        <a:rPr lang="en-US" sz="1300" b="1" dirty="0">
+                          <a:solidFill>
+                            <a:srgbClr val="1A1A1A"/>
+                          </a:solidFill>
+                        </a:rPr>
+                        <a:t>$44</a:t>
+                      </a:r>
+                      <a:endParaRPr lang="en-US" sz="1200" dirty="0"/>
+                    </a:p>
+                    <a:p>
+                      <a:pPr algn="ctr" indent="0" marL="0">
+                        <a:buNone/>
+                      </a:pPr>
+                      <a:r>
+                        <a:rPr lang="en-US" sz="900" dirty="0">
+                          <a:solidFill>
+                            <a:srgbClr val="847C7A"/>
+                          </a:solidFill>
+                        </a:rPr>
+                        <a:t>10x · $455M</a:t>
+                      </a:r>
+                      <a:endParaRPr lang="en-US" sz="1200" dirty="0"/>
+                    </a:p>
+                  </a:txBody>
+                  <a:tcPr marL="36576" marR="36576" marT="36576" marB="36576" anchor="ctr">
+                    <a:lnL w="6350" cap="flat" cmpd="sng" algn="ctr">
+                      <a:solidFill>
+                        <a:srgbClr val="E3E0DC"/>
+                      </a:solidFill>
+                      <a:prstDash val="solid"/>
+                      <a:round/>
+                      <a:headEnd type="none" w="med" len="med"/>
+                      <a:tailEnd type="none" w="med" len="med"/>
+                    </a:lnL>
+                    <a:lnR w="6350" cap="flat" cmpd="sng" algn="ctr">
+                      <a:solidFill>
+                        <a:srgbClr val="E3E0DC"/>
+                      </a:solidFill>
+                      <a:prstDash val="solid"/>
+                      <a:round/>
+                      <a:headEnd type="none" w="med" len="med"/>
+                      <a:tailEnd type="none" w="med" len="med"/>
+                    </a:lnR>
+                    <a:lnT w="6350" cap="flat" cmpd="sng" algn="ctr">
+                      <a:solidFill>
+                        <a:srgbClr val="E3E0DC"/>
+                      </a:solidFill>
+                      <a:prstDash val="solid"/>
+                      <a:round/>
+                      <a:headEnd type="none" w="med" len="med"/>
+                      <a:tailEnd type="none" w="med" len="med"/>
+                    </a:lnT>
+                    <a:lnB w="6350" cap="flat" cmpd="sng" algn="ctr">
+                      <a:solidFill>
+                        <a:srgbClr val="E3E0DC"/>
+                      </a:solidFill>
+                      <a:prstDash val="solid"/>
+                      <a:round/>
+                      <a:headEnd type="none" w="med" len="med"/>
+                      <a:tailEnd type="none" w="med" len="med"/>
+                    </a:lnB>
+                  </a:tcPr>
+                </a:tc>
+              </a:tr>
+              <a:tr h="365760">
+                <a:tc>
+                  <a:txBody>
+                    <a:bodyPr/>
+                    <a:lstStyle/>
+                    <a:p>
+                      <a:pPr algn="l" indent="0" marL="0">
+                        <a:buNone/>
+                      </a:pPr>
+                      <a:r>
+                        <a:rPr lang="en-US" sz="1200" b="1" dirty="0">
+                          <a:solidFill>
+                            <a:srgbClr val="1A1A1A"/>
+                          </a:solidFill>
+                        </a:rPr>
+                        <a:t>Corporate</a:t>
+                      </a:r>
+                      <a:endParaRPr lang="en-US" sz="1200" dirty="0"/>
+                    </a:p>
+                  </a:txBody>
+                  <a:tcPr marL="36576" marR="36576" marT="36576" marB="36576" anchor="ctr">
+                    <a:lnL w="6350" cap="flat" cmpd="sng" algn="ctr">
+                      <a:solidFill>
+                        <a:srgbClr val="E3E0DC"/>
+                      </a:solidFill>
+                      <a:prstDash val="solid"/>
+                      <a:round/>
+                      <a:headEnd type="none" w="med" len="med"/>
+                      <a:tailEnd type="none" w="med" len="med"/>
+                    </a:lnL>
+                    <a:lnR w="6350" cap="flat" cmpd="sng" algn="ctr">
+                      <a:solidFill>
+                        <a:srgbClr val="E3E0DC"/>
+                      </a:solidFill>
+                      <a:prstDash val="solid"/>
+                      <a:round/>
+                      <a:headEnd type="none" w="med" len="med"/>
+                      <a:tailEnd type="none" w="med" len="med"/>
+                    </a:lnR>
+                    <a:lnT w="6350" cap="flat" cmpd="sng" algn="ctr">
+                      <a:solidFill>
+                        <a:srgbClr val="E3E0DC"/>
+                      </a:solidFill>
+                      <a:prstDash val="solid"/>
+                      <a:round/>
+                      <a:headEnd type="none" w="med" len="med"/>
+                      <a:tailEnd type="none" w="med" len="med"/>
+                    </a:lnT>
+                    <a:lnB w="6350" cap="flat" cmpd="sng" algn="ctr">
+                      <a:solidFill>
+                        <a:srgbClr val="E3E0DC"/>
+                      </a:solidFill>
+                      <a:prstDash val="solid"/>
+                      <a:round/>
+                      <a:headEnd type="none" w="med" len="med"/>
+                      <a:tailEnd type="none" w="med" len="med"/>
+                    </a:lnB>
+                  </a:tcPr>
+                </a:tc>
+                <a:tc>
+                  <a:txBody>
+                    <a:bodyPr/>
+                    <a:lstStyle/>
+                    <a:p>
+                      <a:pPr algn="ctr" indent="0" marL="0">
+                        <a:buNone/>
+                      </a:pPr>
+                      <a:r>
+                        <a:rPr lang="en-US" sz="1300" b="1" dirty="0">
+                          <a:solidFill>
+                            <a:srgbClr val="1A1A1A"/>
+                          </a:solidFill>
+                        </a:rPr>
+                        <a:t>($21)</a:t>
+                      </a:r>
+                      <a:endParaRPr lang="en-US" sz="1200" dirty="0"/>
+                    </a:p>
+                  </a:txBody>
+                  <a:tcPr marL="36576" marR="36576" marT="36576" marB="36576" anchor="ctr">
+                    <a:lnL w="6350" cap="flat" cmpd="sng" algn="ctr">
+                      <a:solidFill>
+                        <a:srgbClr val="E3E0DC"/>
+                      </a:solidFill>
+                      <a:prstDash val="solid"/>
+                      <a:round/>
+                      <a:headEnd type="none" w="med" len="med"/>
+                      <a:tailEnd type="none" w="med" len="med"/>
+                    </a:lnL>
+                    <a:lnR w="6350" cap="flat" cmpd="sng" algn="ctr">
+                      <a:solidFill>
+                        <a:srgbClr val="E3E0DC"/>
+                      </a:solidFill>
+                      <a:prstDash val="solid"/>
+                      <a:round/>
+                      <a:headEnd type="none" w="med" len="med"/>
+                      <a:tailEnd type="none" w="med" len="med"/>
+                    </a:lnR>
+                    <a:lnT w="6350" cap="flat" cmpd="sng" algn="ctr">
+                      <a:solidFill>
+                        <a:srgbClr val="E3E0DC"/>
+                      </a:solidFill>
+                      <a:prstDash val="solid"/>
+                      <a:round/>
+                      <a:headEnd type="none" w="med" len="med"/>
+                      <a:tailEnd type="none" w="med" len="med"/>
+                    </a:lnT>
+                    <a:lnB w="6350" cap="flat" cmpd="sng" algn="ctr">
+                      <a:solidFill>
+                        <a:srgbClr val="E3E0DC"/>
+                      </a:solidFill>
+                      <a:prstDash val="solid"/>
+                      <a:round/>
+                      <a:headEnd type="none" w="med" len="med"/>
+                      <a:tailEnd type="none" w="med" len="med"/>
+                    </a:lnB>
+                  </a:tcPr>
+                </a:tc>
+                <a:tc>
+                  <a:txBody>
+                    <a:bodyPr/>
+                    <a:lstStyle/>
+                    <a:p>
+                      <a:pPr algn="ctr" indent="0" marL="0">
+                        <a:buNone/>
+                      </a:pPr>
+                      <a:r>
+                        <a:rPr lang="en-US" sz="1300" b="1" dirty="0">
+                          <a:solidFill>
+                            <a:srgbClr val="1A1A1A"/>
+                          </a:solidFill>
+                        </a:rPr>
+                        <a:t>($28)</a:t>
+                      </a:r>
+                      <a:endParaRPr lang="en-US" sz="1200" dirty="0"/>
+                    </a:p>
+                  </a:txBody>
+                  <a:tcPr marL="36576" marR="36576" marT="36576" marB="36576" anchor="ctr">
+                    <a:lnL w="6350" cap="flat" cmpd="sng" algn="ctr">
+                      <a:solidFill>
+                        <a:srgbClr val="E3E0DC"/>
+                      </a:solidFill>
+                      <a:prstDash val="solid"/>
+                      <a:round/>
+                      <a:headEnd type="none" w="med" len="med"/>
+                      <a:tailEnd type="none" w="med" len="med"/>
+                    </a:lnL>
+                    <a:lnR w="6350" cap="flat" cmpd="sng" algn="ctr">
+                      <a:solidFill>
+                        <a:srgbClr val="E3E0DC"/>
+                      </a:solidFill>
+                      <a:prstDash val="solid"/>
+                      <a:round/>
+                      <a:headEnd type="none" w="med" len="med"/>
+                      <a:tailEnd type="none" w="med" len="med"/>
+                    </a:lnR>
+                    <a:lnT w="6350" cap="flat" cmpd="sng" algn="ctr">
+                      <a:solidFill>
+                        <a:srgbClr val="E3E0DC"/>
+                      </a:solidFill>
+                      <a:prstDash val="solid"/>
+                      <a:round/>
+                      <a:headEnd type="none" w="med" len="med"/>
+                      <a:tailEnd type="none" w="med" len="med"/>
+                    </a:lnT>
+                    <a:lnB w="6350" cap="flat" cmpd="sng" algn="ctr">
+                      <a:solidFill>
+                        <a:srgbClr val="E3E0DC"/>
+                      </a:solidFill>
+                      <a:prstDash val="solid"/>
+                      <a:round/>
+                      <a:headEnd type="none" w="med" len="med"/>
+                      <a:tailEnd type="none" w="med" len="med"/>
+                    </a:lnB>
+                  </a:tcPr>
+                </a:tc>
+                <a:tc>
+                  <a:txBody>
+                    <a:bodyPr/>
+                    <a:lstStyle/>
+                    <a:p>
+                      <a:pPr algn="ctr" indent="0" marL="0">
+                        <a:buNone/>
+                      </a:pPr>
+                      <a:r>
+                        <a:rPr lang="en-US" sz="1300" b="1" dirty="0">
+                          <a:solidFill>
+                            <a:srgbClr val="1A1A1A"/>
+                          </a:solidFill>
+                        </a:rPr>
+                        <a:t>($31)</a:t>
+                      </a:r>
+                      <a:endParaRPr lang="en-US" sz="1200" dirty="0"/>
+                    </a:p>
+                  </a:txBody>
+                  <a:tcPr marL="36576" marR="36576" marT="36576" marB="36576" anchor="ctr">
+                    <a:lnL w="6350" cap="flat" cmpd="sng" algn="ctr">
+                      <a:solidFill>
+                        <a:srgbClr val="E3E0DC"/>
+                      </a:solidFill>
+                      <a:prstDash val="solid"/>
+                      <a:round/>
+                      <a:headEnd type="none" w="med" len="med"/>
+                      <a:tailEnd type="none" w="med" len="med"/>
+                    </a:lnL>
+                    <a:lnR w="6350" cap="flat" cmpd="sng" algn="ctr">
+                      <a:solidFill>
+                        <a:srgbClr val="E3E0DC"/>
+                      </a:solidFill>
+                      <a:prstDash val="solid"/>
+                      <a:round/>
+                      <a:headEnd type="none" w="med" len="med"/>
+                      <a:tailEnd type="none" w="med" len="med"/>
+                    </a:lnR>
+                    <a:lnT w="6350" cap="flat" cmpd="sng" algn="ctr">
+                      <a:solidFill>
+                        <a:srgbClr val="E3E0DC"/>
+                      </a:solidFill>
+                      <a:prstDash val="solid"/>
+                      <a:round/>
+                      <a:headEnd type="none" w="med" len="med"/>
+                      <a:tailEnd type="none" w="med" len="med"/>
+                    </a:lnT>
+                    <a:lnB w="6350" cap="flat" cmpd="sng" algn="ctr">
+                      <a:solidFill>
+                        <a:srgbClr val="E3E0DC"/>
+                      </a:solidFill>
+                      <a:prstDash val="solid"/>
+                      <a:round/>
+                      <a:headEnd type="none" w="med" len="med"/>
+                      <a:tailEnd type="none" w="med" len="med"/>
+                    </a:lnB>
+                  </a:tcPr>
+                </a:tc>
+              </a:tr>
+              <a:tr h="365760">
+                <a:tc>
+                  <a:txBody>
+                    <a:bodyPr/>
+                    <a:lstStyle/>
+                    <a:p>
+                      <a:pPr algn="l" indent="0" marL="0">
+                        <a:buNone/>
+                      </a:pPr>
+                      <a:r>
+                        <a:rPr lang="en-US" sz="1200" b="1" dirty="0">
+                          <a:solidFill>
+                            <a:srgbClr val="1A1A1A"/>
+                          </a:solidFill>
+                        </a:rPr>
+                        <a:t>Net debt + preferred</a:t>
+                      </a:r>
+                      <a:endParaRPr lang="en-US" sz="1200" dirty="0"/>
+                    </a:p>
+                  </a:txBody>
+                  <a:tcPr marL="36576" marR="36576" marT="36576" marB="36576" anchor="ctr">
+                    <a:lnL w="6350" cap="flat" cmpd="sng" algn="ctr">
+                      <a:solidFill>
+                        <a:srgbClr val="E3E0DC"/>
+                      </a:solidFill>
+                      <a:prstDash val="solid"/>
+                      <a:round/>
+                      <a:headEnd type="none" w="med" len="med"/>
+                      <a:tailEnd type="none" w="med" len="med"/>
+                    </a:lnL>
+                    <a:lnR w="6350" cap="flat" cmpd="sng" algn="ctr">
+                      <a:solidFill>
+                        <a:srgbClr val="E3E0DC"/>
+                      </a:solidFill>
+                      <a:prstDash val="solid"/>
+                      <a:round/>
+                      <a:headEnd type="none" w="med" len="med"/>
+                      <a:tailEnd type="none" w="med" len="med"/>
+                    </a:lnR>
+                    <a:lnT w="6350" cap="flat" cmpd="sng" algn="ctr">
+                      <a:solidFill>
+                        <a:srgbClr val="E3E0DC"/>
+                      </a:solidFill>
+                      <a:prstDash val="solid"/>
+                      <a:round/>
+                      <a:headEnd type="none" w="med" len="med"/>
+                      <a:tailEnd type="none" w="med" len="med"/>
+                    </a:lnT>
+                    <a:lnB w="6350" cap="flat" cmpd="sng" algn="ctr">
+                      <a:solidFill>
+                        <a:srgbClr val="E3E0DC"/>
+                      </a:solidFill>
+                      <a:prstDash val="solid"/>
+                      <a:round/>
+                      <a:headEnd type="none" w="med" len="med"/>
+                      <a:tailEnd type="none" w="med" len="med"/>
+                    </a:lnB>
+                  </a:tcPr>
+                </a:tc>
+                <a:tc>
+                  <a:txBody>
+                    <a:bodyPr/>
+                    <a:lstStyle/>
+                    <a:p>
+                      <a:pPr algn="ctr" indent="0" marL="0">
+                        <a:buNone/>
+                      </a:pPr>
+                      <a:r>
+                        <a:rPr lang="en-US" sz="1300" b="1" dirty="0">
+                          <a:solidFill>
+                            <a:srgbClr val="1A1A1A"/>
+                          </a:solidFill>
+                        </a:rPr>
+                        <a:t>($26)</a:t>
+                      </a:r>
+                      <a:endParaRPr lang="en-US" sz="1200" dirty="0"/>
+                    </a:p>
+                  </a:txBody>
+                  <a:tcPr marL="36576" marR="36576" marT="36576" marB="36576" anchor="ctr">
+                    <a:lnL w="6350" cap="flat" cmpd="sng" algn="ctr">
+                      <a:solidFill>
+                        <a:srgbClr val="E3E0DC"/>
+                      </a:solidFill>
+                      <a:prstDash val="solid"/>
+                      <a:round/>
+                      <a:headEnd type="none" w="med" len="med"/>
+                      <a:tailEnd type="none" w="med" len="med"/>
+                    </a:lnL>
+                    <a:lnR w="6350" cap="flat" cmpd="sng" algn="ctr">
+                      <a:solidFill>
+                        <a:srgbClr val="E3E0DC"/>
+                      </a:solidFill>
+                      <a:prstDash val="solid"/>
+                      <a:round/>
+                      <a:headEnd type="none" w="med" len="med"/>
+                      <a:tailEnd type="none" w="med" len="med"/>
+                    </a:lnR>
+                    <a:lnT w="6350" cap="flat" cmpd="sng" algn="ctr">
+                      <a:solidFill>
+                        <a:srgbClr val="E3E0DC"/>
+                      </a:solidFill>
+                      <a:prstDash val="solid"/>
+                      <a:round/>
+                      <a:headEnd type="none" w="med" len="med"/>
+                      <a:tailEnd type="none" w="med" len="med"/>
+                    </a:lnT>
+                    <a:lnB w="6350" cap="flat" cmpd="sng" algn="ctr">
+                      <a:solidFill>
+                        <a:srgbClr val="E3E0DC"/>
+                      </a:solidFill>
+                      <a:prstDash val="solid"/>
+                      <a:round/>
+                      <a:headEnd type="none" w="med" len="med"/>
+                      <a:tailEnd type="none" w="med" len="med"/>
+                    </a:lnB>
+                  </a:tcPr>
+                </a:tc>
+                <a:tc>
+                  <a:txBody>
+                    <a:bodyPr/>
+                    <a:lstStyle/>
+                    <a:p>
+                      <a:pPr algn="ctr" indent="0" marL="0">
+                        <a:buNone/>
+                      </a:pPr>
+                      <a:r>
+                        <a:rPr lang="en-US" sz="1300" b="1" dirty="0">
+                          <a:solidFill>
+                            <a:srgbClr val="1A1A1A"/>
+                          </a:solidFill>
+                        </a:rPr>
+                        <a:t>($24)</a:t>
+                      </a:r>
+                      <a:endParaRPr lang="en-US" sz="1200" dirty="0"/>
+                    </a:p>
+                  </a:txBody>
+                  <a:tcPr marL="36576" marR="36576" marT="36576" marB="36576" anchor="ctr">
+                    <a:lnL w="6350" cap="flat" cmpd="sng" algn="ctr">
+                      <a:solidFill>
+                        <a:srgbClr val="E3E0DC"/>
+                      </a:solidFill>
+                      <a:prstDash val="solid"/>
+                      <a:round/>
+                      <a:headEnd type="none" w="med" len="med"/>
+                      <a:tailEnd type="none" w="med" len="med"/>
+                    </a:lnL>
+                    <a:lnR w="6350" cap="flat" cmpd="sng" algn="ctr">
+                      <a:solidFill>
+                        <a:srgbClr val="E3E0DC"/>
+                      </a:solidFill>
+                      <a:prstDash val="solid"/>
+                      <a:round/>
+                      <a:headEnd type="none" w="med" len="med"/>
+                      <a:tailEnd type="none" w="med" len="med"/>
+                    </a:lnR>
+                    <a:lnT w="6350" cap="flat" cmpd="sng" algn="ctr">
+                      <a:solidFill>
+                        <a:srgbClr val="E3E0DC"/>
+                      </a:solidFill>
+                      <a:prstDash val="solid"/>
+                      <a:round/>
+                      <a:headEnd type="none" w="med" len="med"/>
+                      <a:tailEnd type="none" w="med" len="med"/>
+                    </a:lnT>
+                    <a:lnB w="6350" cap="flat" cmpd="sng" algn="ctr">
+                      <a:solidFill>
+                        <a:srgbClr val="E3E0DC"/>
+                      </a:solidFill>
+                      <a:prstDash val="solid"/>
+                      <a:round/>
+                      <a:headEnd type="none" w="med" len="med"/>
+                      <a:tailEnd type="none" w="med" len="med"/>
+                    </a:lnB>
+                  </a:tcPr>
+                </a:tc>
+                <a:tc>
+                  <a:txBody>
+                    <a:bodyPr/>
+                    <a:lstStyle/>
+                    <a:p>
+                      <a:pPr algn="ctr" indent="0" marL="0">
+                        <a:buNone/>
+                      </a:pPr>
+                      <a:r>
+                        <a:rPr lang="en-US" sz="1300" b="1" dirty="0">
+                          <a:solidFill>
+                            <a:srgbClr val="1A1A1A"/>
+                          </a:solidFill>
+                        </a:rPr>
+                        <a:t>($23)</a:t>
+                      </a:r>
+                      <a:endParaRPr lang="en-US" sz="1200" dirty="0"/>
+                    </a:p>
+                  </a:txBody>
+                  <a:tcPr marL="36576" marR="36576" marT="36576" marB="36576" anchor="ctr">
+                    <a:lnL w="6350" cap="flat" cmpd="sng" algn="ctr">
+                      <a:solidFill>
+                        <a:srgbClr val="E3E0DC"/>
+                      </a:solidFill>
+                      <a:prstDash val="solid"/>
+                      <a:round/>
+                      <a:headEnd type="none" w="med" len="med"/>
+                      <a:tailEnd type="none" w="med" len="med"/>
+                    </a:lnL>
+                    <a:lnR w="6350" cap="flat" cmpd="sng" algn="ctr">
+                      <a:solidFill>
+                        <a:srgbClr val="E3E0DC"/>
+                      </a:solidFill>
+                      <a:prstDash val="solid"/>
+                      <a:round/>
+                      <a:headEnd type="none" w="med" len="med"/>
+                      <a:tailEnd type="none" w="med" len="med"/>
+                    </a:lnR>
+                    <a:lnT w="6350" cap="flat" cmpd="sng" algn="ctr">
+                      <a:solidFill>
+                        <a:srgbClr val="E3E0DC"/>
+                      </a:solidFill>
+                      <a:prstDash val="solid"/>
+                      <a:round/>
+                      <a:headEnd type="none" w="med" len="med"/>
+                      <a:tailEnd type="none" w="med" len="med"/>
+                    </a:lnT>
+                    <a:lnB w="6350" cap="flat" cmpd="sng" algn="ctr">
+                      <a:solidFill>
+                        <a:srgbClr val="E3E0DC"/>
+                      </a:solidFill>
+                      <a:prstDash val="solid"/>
+                      <a:round/>
+                      <a:headEnd type="none" w="med" len="med"/>
+                      <a:tailEnd type="none" w="med" len="med"/>
+                    </a:lnB>
+                  </a:tcPr>
+                </a:tc>
+              </a:tr>
+              <a:tr h="411480">
+                <a:tc>
+                  <a:txBody>
+                    <a:bodyPr/>
+                    <a:lstStyle/>
+                    <a:p>
+                      <a:pPr algn="l" indent="0" marL="0">
+                        <a:buNone/>
+                      </a:pPr>
+                      <a:r>
+                        <a:rPr lang="en-US" sz="1300" b="1" dirty="0">
+                          <a:solidFill>
+                            <a:srgbClr val="1A1A1A"/>
+                          </a:solidFill>
+                        </a:rPr>
+                        <a:t>Price per share</a:t>
+                      </a:r>
+                      <a:endParaRPr lang="en-US" sz="1300" dirty="0"/>
+                    </a:p>
+                  </a:txBody>
+                  <a:tcPr marL="36576" marR="36576" marT="36576" marB="36576" anchor="ctr">
+                    <a:lnL w="6350" cap="flat" cmpd="sng" algn="ctr">
+                      <a:solidFill>
+                        <a:srgbClr val="E3E0DC"/>
+                      </a:solidFill>
+                      <a:prstDash val="solid"/>
+                      <a:round/>
+                      <a:headEnd type="none" w="med" len="med"/>
+                      <a:tailEnd type="none" w="med" len="med"/>
+                    </a:lnL>
+                    <a:lnR w="6350" cap="flat" cmpd="sng" algn="ctr">
+                      <a:solidFill>
+                        <a:srgbClr val="E3E0DC"/>
+                      </a:solidFill>
+                      <a:prstDash val="solid"/>
+                      <a:round/>
+                      <a:headEnd type="none" w="med" len="med"/>
+                      <a:tailEnd type="none" w="med" len="med"/>
+                    </a:lnR>
+                    <a:lnT w="6350" cap="flat" cmpd="sng" algn="ctr">
+                      <a:solidFill>
+                        <a:srgbClr val="E3E0DC"/>
+                      </a:solidFill>
+                      <a:prstDash val="solid"/>
+                      <a:round/>
+                      <a:headEnd type="none" w="med" len="med"/>
+                      <a:tailEnd type="none" w="med" len="med"/>
+                    </a:lnT>
+                    <a:lnB w="6350" cap="flat" cmpd="sng" algn="ctr">
+                      <a:solidFill>
+                        <a:srgbClr val="E3E0DC"/>
+                      </a:solidFill>
+                      <a:prstDash val="solid"/>
+                      <a:round/>
+                      <a:headEnd type="none" w="med" len="med"/>
+                      <a:tailEnd type="none" w="med" len="med"/>
+                    </a:lnB>
+                  </a:tcPr>
+                </a:tc>
+                <a:tc>
+                  <a:txBody>
+                    <a:bodyPr/>
+                    <a:lstStyle/>
+                    <a:p>
+                      <a:pPr algn="ctr" indent="0" marL="0">
+                        <a:buNone/>
+                      </a:pPr>
+                      <a:r>
+                        <a:rPr lang="en-US" sz="1300" b="1" dirty="0">
+                          <a:solidFill>
+                            <a:srgbClr val="1A1A1A"/>
+                          </a:solidFill>
+                        </a:rPr>
+                        <a:t>$126</a:t>
+                      </a:r>
+                      <a:endParaRPr lang="en-US" sz="1200" dirty="0"/>
+                    </a:p>
+                  </a:txBody>
+                  <a:tcPr marL="36576" marR="36576" marT="36576" marB="36576" anchor="ctr">
+                    <a:lnL w="6350" cap="flat" cmpd="sng" algn="ctr">
+                      <a:solidFill>
+                        <a:srgbClr val="E3E0DC"/>
+                      </a:solidFill>
+                      <a:prstDash val="solid"/>
+                      <a:round/>
+                      <a:headEnd type="none" w="med" len="med"/>
+                      <a:tailEnd type="none" w="med" len="med"/>
+                    </a:lnL>
+                    <a:lnR w="6350" cap="flat" cmpd="sng" algn="ctr">
+                      <a:solidFill>
+                        <a:srgbClr val="E3E0DC"/>
+                      </a:solidFill>
+                      <a:prstDash val="solid"/>
+                      <a:round/>
+                      <a:headEnd type="none" w="med" len="med"/>
+                      <a:tailEnd type="none" w="med" len="med"/>
+                    </a:lnR>
+                    <a:lnT w="6350" cap="flat" cmpd="sng" algn="ctr">
+                      <a:solidFill>
+                        <a:srgbClr val="E3E0DC"/>
+                      </a:solidFill>
+                      <a:prstDash val="solid"/>
+                      <a:round/>
+                      <a:headEnd type="none" w="med" len="med"/>
+                      <a:tailEnd type="none" w="med" len="med"/>
+                    </a:lnT>
+                    <a:lnB w="6350" cap="flat" cmpd="sng" algn="ctr">
+                      <a:solidFill>
+                        <a:srgbClr val="E3E0DC"/>
+                      </a:solidFill>
+                      <a:prstDash val="solid"/>
+                      <a:round/>
+                      <a:headEnd type="none" w="med" len="med"/>
+                      <a:tailEnd type="none" w="med" len="med"/>
+                    </a:lnB>
+                    <a:solidFill>
+                      <a:srgbClr val="EFEDEA"/>
+                    </a:solidFill>
+                  </a:tcPr>
+                </a:tc>
+                <a:tc>
+                  <a:txBody>
+                    <a:bodyPr/>
+                    <a:lstStyle/>
+                    <a:p>
+                      <a:pPr algn="ctr" indent="0" marL="0">
+                        <a:buNone/>
+                      </a:pPr>
+                      <a:r>
+                        <a:rPr lang="en-US" sz="1300" b="1" dirty="0">
+                          <a:solidFill>
+                            <a:srgbClr val="1A1A1A"/>
+                          </a:solidFill>
+                        </a:rPr>
+                        <a:t>$277</a:t>
+                      </a:r>
+                      <a:endParaRPr lang="en-US" sz="1200" dirty="0"/>
+                    </a:p>
+                  </a:txBody>
+                  <a:tcPr marL="36576" marR="36576" marT="36576" marB="36576" anchor="ctr">
+                    <a:lnL w="6350" cap="flat" cmpd="sng" algn="ctr">
+                      <a:solidFill>
+                        <a:srgbClr val="E3E0DC"/>
+                      </a:solidFill>
+                      <a:prstDash val="solid"/>
+                      <a:round/>
+                      <a:headEnd type="none" w="med" len="med"/>
+                      <a:tailEnd type="none" w="med" len="med"/>
+                    </a:lnL>
+                    <a:lnR w="6350" cap="flat" cmpd="sng" algn="ctr">
+                      <a:solidFill>
+                        <a:srgbClr val="E3E0DC"/>
+                      </a:solidFill>
+                      <a:prstDash val="solid"/>
+                      <a:round/>
+                      <a:headEnd type="none" w="med" len="med"/>
+                      <a:tailEnd type="none" w="med" len="med"/>
+                    </a:lnR>
+                    <a:lnT w="6350" cap="flat" cmpd="sng" algn="ctr">
+                      <a:solidFill>
+                        <a:srgbClr val="E3E0DC"/>
+                      </a:solidFill>
+                      <a:prstDash val="solid"/>
+                      <a:round/>
+                      <a:headEnd type="none" w="med" len="med"/>
+                      <a:tailEnd type="none" w="med" len="med"/>
+                    </a:lnT>
+                    <a:lnB w="6350" cap="flat" cmpd="sng" algn="ctr">
+                      <a:solidFill>
+                        <a:srgbClr val="E3E0DC"/>
+                      </a:solidFill>
+                      <a:prstDash val="solid"/>
+                      <a:round/>
+                      <a:headEnd type="none" w="med" len="med"/>
+                      <a:tailEnd type="none" w="med" len="med"/>
+                    </a:lnB>
+                    <a:solidFill>
+                      <a:srgbClr val="EFEDEA"/>
+                    </a:solidFill>
+                  </a:tcPr>
+                </a:tc>
+                <a:tc>
+                  <a:txBody>
+                    <a:bodyPr/>
+                    <a:lstStyle/>
+                    <a:p>
+                      <a:pPr algn="ctr" indent="0" marL="0">
+                        <a:buNone/>
+                      </a:pPr>
+                      <a:r>
+                        <a:rPr lang="en-US" sz="1300" b="1" dirty="0">
+                          <a:solidFill>
+                            <a:srgbClr val="1A1A1A"/>
+                          </a:solidFill>
+                        </a:rPr>
+                        <a:t>$352</a:t>
+                      </a:r>
+                      <a:endParaRPr lang="en-US" sz="1200" dirty="0"/>
+                    </a:p>
+                  </a:txBody>
+                  <a:tcPr marL="36576" marR="36576" marT="36576" marB="36576" anchor="ctr">
+                    <a:lnL w="6350" cap="flat" cmpd="sng" algn="ctr">
+                      <a:solidFill>
+                        <a:srgbClr val="E3E0DC"/>
+                      </a:solidFill>
+                      <a:prstDash val="solid"/>
+                      <a:round/>
+                      <a:headEnd type="none" w="med" len="med"/>
+                      <a:tailEnd type="none" w="med" len="med"/>
+                    </a:lnL>
+                    <a:lnR w="6350" cap="flat" cmpd="sng" algn="ctr">
+                      <a:solidFill>
+                        <a:srgbClr val="E3E0DC"/>
+                      </a:solidFill>
+                      <a:prstDash val="solid"/>
+                      <a:round/>
+                      <a:headEnd type="none" w="med" len="med"/>
+                      <a:tailEnd type="none" w="med" len="med"/>
+                    </a:lnR>
+                    <a:lnT w="6350" cap="flat" cmpd="sng" algn="ctr">
+                      <a:solidFill>
+                        <a:srgbClr val="E3E0DC"/>
+                      </a:solidFill>
+                      <a:prstDash val="solid"/>
+                      <a:round/>
+                      <a:headEnd type="none" w="med" len="med"/>
+                      <a:tailEnd type="none" w="med" len="med"/>
+                    </a:lnT>
+                    <a:lnB w="6350" cap="flat" cmpd="sng" algn="ctr">
+                      <a:solidFill>
+                        <a:srgbClr val="E3E0DC"/>
+                      </a:solidFill>
+                      <a:prstDash val="solid"/>
+                      <a:round/>
+                      <a:headEnd type="none" w="med" len="med"/>
+                      <a:tailEnd type="none" w="med" len="med"/>
+                    </a:lnB>
+                    <a:solidFill>
+                      <a:srgbClr val="EFEDEA"/>
+                    </a:solidFill>
+                  </a:tcPr>
+                </a:tc>
+              </a:tr>
+              <a:tr h="365760">
+                <a:tc>
+                  <a:txBody>
+                    <a:bodyPr/>
+                    <a:lstStyle/>
+                    <a:p>
+                      <a:pPr algn="l" indent="0" marL="0">
+                        <a:buNone/>
+                      </a:pPr>
+                      <a:r>
+                        <a:rPr lang="en-US" sz="1200" i="1" dirty="0">
+                          <a:solidFill>
+                            <a:srgbClr val="1A1A1A"/>
+                          </a:solidFill>
+                        </a:rPr>
+                        <a:t>vs. $167 today</a:t>
+                      </a:r>
+                      <a:endParaRPr lang="en-US" sz="1200" dirty="0"/>
+                    </a:p>
+                  </a:txBody>
+                  <a:tcPr marL="36576" marR="36576" marT="36576" marB="36576" anchor="ctr">
+                    <a:lnL w="6350" cap="flat" cmpd="sng" algn="ctr">
+                      <a:solidFill>
+                        <a:srgbClr val="E3E0DC"/>
+                      </a:solidFill>
+                      <a:prstDash val="solid"/>
+                      <a:round/>
+                      <a:headEnd type="none" w="med" len="med"/>
+                      <a:tailEnd type="none" w="med" len="med"/>
+                    </a:lnL>
+                    <a:lnR w="6350" cap="flat" cmpd="sng" algn="ctr">
+                      <a:solidFill>
+                        <a:srgbClr val="E3E0DC"/>
+                      </a:solidFill>
+                      <a:prstDash val="solid"/>
+                      <a:round/>
+                      <a:headEnd type="none" w="med" len="med"/>
+                      <a:tailEnd type="none" w="med" len="med"/>
+                    </a:lnR>
+                    <a:lnT w="6350" cap="flat" cmpd="sng" algn="ctr">
+                      <a:solidFill>
+                        <a:srgbClr val="E3E0DC"/>
+                      </a:solidFill>
+                      <a:prstDash val="solid"/>
+                      <a:round/>
+                      <a:headEnd type="none" w="med" len="med"/>
+                      <a:tailEnd type="none" w="med" len="med"/>
+                    </a:lnT>
+                    <a:lnB w="6350" cap="flat" cmpd="sng" algn="ctr">
+                      <a:solidFill>
+                        <a:srgbClr val="E3E0DC"/>
+                      </a:solidFill>
+                      <a:prstDash val="solid"/>
+                      <a:round/>
+                      <a:headEnd type="none" w="med" len="med"/>
+                      <a:tailEnd type="none" w="med" len="med"/>
+                    </a:lnB>
+                  </a:tcPr>
+                </a:tc>
+                <a:tc>
+                  <a:txBody>
+                    <a:bodyPr/>
+                    <a:lstStyle/>
+                    <a:p>
+                      <a:pPr algn="ctr" indent="0" marL="0">
+                        <a:buNone/>
+                      </a:pPr>
+                      <a:r>
+                        <a:rPr lang="en-US" sz="1300" b="1" dirty="0">
+                          <a:solidFill>
+                            <a:srgbClr val="847C7A"/>
+                          </a:solidFill>
+                        </a:rPr>
+                        <a:t>–24%</a:t>
+                      </a:r>
+                      <a:endParaRPr lang="en-US" sz="1200" dirty="0"/>
+                    </a:p>
+                  </a:txBody>
+                  <a:tcPr marL="36576" marR="36576" marT="36576" marB="36576" anchor="ctr">
+                    <a:lnL w="6350" cap="flat" cmpd="sng" algn="ctr">
+                      <a:solidFill>
+                        <a:srgbClr val="E3E0DC"/>
+                      </a:solidFill>
+                      <a:prstDash val="solid"/>
+                      <a:round/>
+                      <a:headEnd type="none" w="med" len="med"/>
+                      <a:tailEnd type="none" w="med" len="med"/>
+                    </a:lnL>
+                    <a:lnR w="6350" cap="flat" cmpd="sng" algn="ctr">
+                      <a:solidFill>
+                        <a:srgbClr val="E3E0DC"/>
+                      </a:solidFill>
+                      <a:prstDash val="solid"/>
+                      <a:round/>
+                      <a:headEnd type="none" w="med" len="med"/>
+                      <a:tailEnd type="none" w="med" len="med"/>
+                    </a:lnR>
+                    <a:lnT w="6350" cap="flat" cmpd="sng" algn="ctr">
+                      <a:solidFill>
+                        <a:srgbClr val="E3E0DC"/>
+                      </a:solidFill>
+                      <a:prstDash val="solid"/>
+                      <a:round/>
+                      <a:headEnd type="none" w="med" len="med"/>
+                      <a:tailEnd type="none" w="med" len="med"/>
+                    </a:lnT>
+                    <a:lnB w="6350" cap="flat" cmpd="sng" algn="ctr">
+                      <a:solidFill>
+                        <a:srgbClr val="E3E0DC"/>
+                      </a:solidFill>
+                      <a:prstDash val="solid"/>
+                      <a:round/>
+                      <a:headEnd type="none" w="med" len="med"/>
+                      <a:tailEnd type="none" w="med" len="med"/>
+                    </a:lnB>
+                  </a:tcPr>
+                </a:tc>
+                <a:tc>
+                  <a:txBody>
+                    <a:bodyPr/>
+                    <a:lstStyle/>
+                    <a:p>
+                      <a:pPr algn="ctr" indent="0" marL="0">
+                        <a:buNone/>
+                      </a:pPr>
+                      <a:r>
+                        <a:rPr lang="en-US" sz="1300" b="1" dirty="0">
+                          <a:solidFill>
+                            <a:srgbClr val="0A1C58"/>
+                          </a:solidFill>
+                        </a:rPr>
+                        <a:t>+66%</a:t>
+                      </a:r>
+                      <a:endParaRPr lang="en-US" sz="1200" dirty="0"/>
+                    </a:p>
+                  </a:txBody>
+                  <a:tcPr marL="36576" marR="36576" marT="36576" marB="36576" anchor="ctr">
+                    <a:lnL w="6350" cap="flat" cmpd="sng" algn="ctr">
+                      <a:solidFill>
+                        <a:srgbClr val="E3E0DC"/>
+                      </a:solidFill>
+                      <a:prstDash val="solid"/>
+                      <a:round/>
+                      <a:headEnd type="none" w="med" len="med"/>
+                      <a:tailEnd type="none" w="med" len="med"/>
+                    </a:lnL>
+                    <a:lnR w="6350" cap="flat" cmpd="sng" algn="ctr">
+                      <a:solidFill>
+                        <a:srgbClr val="E3E0DC"/>
+                      </a:solidFill>
+                      <a:prstDash val="solid"/>
+                      <a:round/>
+                      <a:headEnd type="none" w="med" len="med"/>
+                      <a:tailEnd type="none" w="med" len="med"/>
+                    </a:lnR>
+                    <a:lnT w="6350" cap="flat" cmpd="sng" algn="ctr">
+                      <a:solidFill>
+                        <a:srgbClr val="E3E0DC"/>
+                      </a:solidFill>
+                      <a:prstDash val="solid"/>
+                      <a:round/>
+                      <a:headEnd type="none" w="med" len="med"/>
+                      <a:tailEnd type="none" w="med" len="med"/>
+                    </a:lnT>
+                    <a:lnB w="6350" cap="flat" cmpd="sng" algn="ctr">
+                      <a:solidFill>
+                        <a:srgbClr val="E3E0DC"/>
+                      </a:solidFill>
+                      <a:prstDash val="solid"/>
+                      <a:round/>
+                      <a:headEnd type="none" w="med" len="med"/>
+                      <a:tailEnd type="none" w="med" len="med"/>
+                    </a:lnB>
+                  </a:tcPr>
+                </a:tc>
+                <a:tc>
+                  <a:txBody>
+                    <a:bodyPr/>
+                    <a:lstStyle/>
+                    <a:p>
+                      <a:pPr algn="ctr" indent="0" marL="0">
+                        <a:buNone/>
+                      </a:pPr>
+                      <a:r>
+                        <a:rPr lang="en-US" sz="1300" b="1" dirty="0">
+                          <a:solidFill>
+                            <a:srgbClr val="0A1C58"/>
+                          </a:solidFill>
+                        </a:rPr>
+                        <a:t>+111%</a:t>
+                      </a:r>
+                      <a:endParaRPr lang="en-US" sz="1200" dirty="0"/>
+                    </a:p>
+                  </a:txBody>
+                  <a:tcPr marL="36576" marR="36576" marT="36576" marB="36576" anchor="ctr">
+                    <a:lnL w="6350" cap="flat" cmpd="sng" algn="ctr">
+                      <a:solidFill>
+                        <a:srgbClr val="E3E0DC"/>
+                      </a:solidFill>
+                      <a:prstDash val="solid"/>
+                      <a:round/>
+                      <a:headEnd type="none" w="med" len="med"/>
+                      <a:tailEnd type="none" w="med" len="med"/>
+                    </a:lnL>
+                    <a:lnR w="6350" cap="flat" cmpd="sng" algn="ctr">
+                      <a:solidFill>
+                        <a:srgbClr val="E3E0DC"/>
+                      </a:solidFill>
+                      <a:prstDash val="solid"/>
+                      <a:round/>
+                      <a:headEnd type="none" w="med" len="med"/>
+                      <a:tailEnd type="none" w="med" len="med"/>
+                    </a:lnR>
+                    <a:lnT w="6350" cap="flat" cmpd="sng" algn="ctr">
+                      <a:solidFill>
+                        <a:srgbClr val="E3E0DC"/>
+                      </a:solidFill>
+                      <a:prstDash val="solid"/>
+                      <a:round/>
+                      <a:headEnd type="none" w="med" len="med"/>
+                      <a:tailEnd type="none" w="med" len="med"/>
+                    </a:lnT>
+                    <a:lnB w="6350" cap="flat" cmpd="sng" algn="ctr">
+                      <a:solidFill>
+                        <a:srgbClr val="E3E0DC"/>
+                      </a:solidFill>
+                      <a:prstDash val="solid"/>
+                      <a:round/>
+                      <a:headEnd type="none" w="med" len="med"/>
+                      <a:tailEnd type="none" w="med" len="med"/>
+                    </a:lnB>
+                  </a:tcPr>
+                </a:tc>
+              </a:tr>
+            </a:tbl>
+          </a:graphicData>
+        </a:graphic>
+      </p:graphicFrame>
+      <p:sp>
+        <p:nvSpPr>
+          <p:cNvPr id="5" name="Scenario chart header"/>
+          <p:cNvSpPr txBox="1"/>
+          <p:nvPr/>
+        </p:nvSpPr>
+        <p:spPr>
+          <a:xfrm>
+            <a:off x="5623560" y="1554480"/>
+            <a:ext cx="3200400" cy="365760"/>
+          </a:xfrm>
+          <a:prstGeom prst="rect">
+            <a:avLst/>
+          </a:prstGeom>
+          <a:noFill/>
+          <a:ln/>
+        </p:spPr>
+        <p:txBody>
+          <a:bodyPr wrap="square" lIns="0" tIns="0" rIns="0" bIns="0" rtlCol="0" anchor="b"/>
+          <a:lstStyle/>
+          <a:p>
+            <a:pPr algn="ctr" indent="0" marL="0">
+              <a:buNone/>
+            </a:pPr>
+            <a:r>
+              <a:rPr lang="en-US" sz="1600" b="1" dirty="0">
+                <a:solidFill>
+                  <a:srgbClr val="1A1A1A"/>
+                </a:solidFill>
+              </a:rPr>
+              <a:t>Price per Share by Scenario</a:t>
+            </a:r>
+            <a:endParaRPr lang="en-US" sz="1600" dirty="0"/>
+          </a:p>
+        </p:txBody>
+      </p:sp>
+      <p:sp>
+        <p:nvSpPr>
+          <p:cNvPr id="6" name="Scenario chart header rule"/>
+          <p:cNvSpPr/>
+          <p:nvPr/>
+        </p:nvSpPr>
+        <p:spPr>
+          <a:xfrm>
+            <a:off x="5623560" y="1975104"/>
+            <a:ext cx="3200400" cy="0"/>
+          </a:xfrm>
+          <a:prstGeom prst="line">
+            <a:avLst/>
+          </a:prstGeom>
+          <a:noFill/>
+          <a:ln w="12700">
+            <a:solidFill>
+              <a:srgbClr val="1A1A1A"/>
+            </a:solidFill>
+            <a:prstDash val="solid"/>
+          </a:ln>
+        </p:spPr>
+      </p:sp>
+      <p:graphicFrame>
+        <p:nvGraphicFramePr>
+          <p:cNvPr id="7" name="Scenario chart" descr=""/>
+          <p:cNvGraphicFramePr/>
+          <p:nvPr/>
+        </p:nvGraphicFramePr>
+        <p:xfrm>
+          <a:off x="5623560" y="2103120"/>
+          <a:ext cx="3200400" cy="2514600"/>
+        </p:xfrm>
+        <a:graphic xmlns:a="http://schemas.openxmlformats.org/drawingml/2006/main">
+          <a:graphicData uri="http://schemas.openxmlformats.org/drawingml/2006/chart">
+            <c:chart xmlns:c="http://schemas.openxmlformats.org/drawingml/2006/chart" r:id="rId1"/>
+          </a:graphicData>
+        </a:graphic>
+      </p:graphicFrame>
+      <p:sp>
+        <p:nvSpPr>
+          <p:cNvPr id="8" name="Reward risk callout"/>
+          <p:cNvSpPr/>
+          <p:nvPr/>
+        </p:nvSpPr>
+        <p:spPr>
+          <a:xfrm>
+            <a:off x="5715000" y="2103120"/>
+            <a:ext cx="1051560" cy="1051560"/>
+          </a:xfrm>
+          <a:prstGeom prst="ellipse">
+            <a:avLst/>
+          </a:prstGeom>
+          <a:solidFill>
+            <a:srgbClr val="0A1C58"/>
+          </a:solidFill>
+          <a:ln>
+            <a:solidFill>
+              <a:srgbClr val="0A1C58"/>
+            </a:solidFill>
+          </a:ln>
+        </p:spPr>
+        <p:txBody>
+          <a:bodyPr wrap="square" lIns="0" tIns="0" rIns="0" bIns="0" rtlCol="0" anchor="ctr"/>
+          <a:lstStyle/>
+          <a:p>
+            <a:pPr algn="ctr" indent="0" marL="0">
+              <a:buNone/>
+            </a:pPr>
+            <a:r>
+              <a:rPr lang="en-US" sz="2200" b="1" dirty="0">
+                <a:solidFill>
+                  <a:schemeClr val="bg1"/>
+                </a:solidFill>
+              </a:rPr>
+              <a:t>2.7x</a:t>
+            </a:r>
+            <a:endParaRPr lang="en-US" sz="2200" dirty="0"/>
+          </a:p>
+          <a:p>
+            <a:pPr algn="ctr" indent="0" marL="0">
+              <a:buNone/>
+            </a:pPr>
+            <a:r>
+              <a:rPr lang="en-US" sz="1000" b="1" dirty="0">
+                <a:solidFill>
+                  <a:schemeClr val="bg1"/>
+                </a:solidFill>
+              </a:rPr>
+              <a:t>reward / risk</a:t>
+            </a:r>
+            <a:endParaRPr lang="en-US" sz="2200" dirty="0"/>
+          </a:p>
+        </p:txBody>
+      </p:sp>
+      <p:sp>
+        <p:nvSpPr>
+          <p:cNvPr id="9" name="Scenario caption"/>
+          <p:cNvSpPr txBox="1"/>
+          <p:nvPr/>
+        </p:nvSpPr>
+        <p:spPr>
+          <a:xfrm>
+            <a:off x="5623560" y="4663440"/>
+            <a:ext cx="3200400" cy="274320"/>
+          </a:xfrm>
+          <a:prstGeom prst="rect">
+            <a:avLst/>
+          </a:prstGeom>
+          <a:noFill/>
+          <a:ln/>
+        </p:spPr>
+        <p:txBody>
+          <a:bodyPr wrap="square" lIns="0" tIns="0" rIns="0" bIns="0" rtlCol="0" anchor="ctr"/>
+          <a:lstStyle/>
+          <a:p>
+            <a:pPr algn="ctr" indent="0" marL="0">
+              <a:buNone/>
+            </a:pPr>
+            <a:r>
+              <a:rPr lang="en-US" sz="1000" i="1" dirty="0">
+                <a:solidFill>
+                  <a:schemeClr val="accent2"/>
+                </a:solidFill>
+              </a:rPr>
+              <a:t>FY27E EBITDA × multiple; today's price $167</a:t>
+            </a:r>
+            <a:endParaRPr lang="en-US" sz="1000" dirty="0"/>
+          </a:p>
+        </p:txBody>
+      </p:sp>
+      <p:sp>
+        <p:nvSpPr>
+          <p:cNvPr id="10" name="Takeaway"/>
+          <p:cNvSpPr txBox="1"/>
+          <p:nvPr/>
+        </p:nvSpPr>
+        <p:spPr>
+          <a:xfrm>
+            <a:off x="320040" y="5504688"/>
+            <a:ext cx="8503920" cy="566928"/>
+          </a:xfrm>
+          <a:prstGeom prst="rect">
+            <a:avLst/>
+          </a:prstGeom>
+          <a:solidFill>
+            <a:srgbClr val="0A1C58"/>
+          </a:solidFill>
+          <a:ln/>
+        </p:spPr>
+        <p:txBody>
+          <a:bodyPr wrap="square" lIns="101600" tIns="25400" rIns="101600" bIns="25400" rtlCol="0" anchor="ctr"/>
+          <a:lstStyle/>
+          <a:p>
+            <a:pPr algn="ctr" indent="0" marL="0">
+              <a:buNone/>
+            </a:pPr>
+            <a:r>
+              <a:rPr lang="en-US" sz="1700" b="1" dirty="0">
+                <a:solidFill>
+                  <a:schemeClr val="bg1"/>
+                </a:solidFill>
+              </a:rPr>
+              <a:t>Even with bear-case EBITDA and compressed multiples, downside is 24%. The base case offers 66%.</a:t>
+            </a:r>
+            <a:endParaRPr lang="en-US" sz="1700" dirty="0"/>
+          </a:p>
+        </p:txBody>
+      </p:sp>
+      <p:sp>
+        <p:nvSpPr>
+          <p:cNvPr id="11" name="Source"/>
+          <p:cNvSpPr txBox="1"/>
+          <p:nvPr/>
+        </p:nvSpPr>
+        <p:spPr>
+          <a:xfrm>
+            <a:off x="320040" y="6355080"/>
+            <a:ext cx="7132320" cy="274320"/>
+          </a:xfrm>
+          <a:prstGeom prst="rect">
+            <a:avLst/>
+          </a:prstGeom>
+          <a:noFill/>
+          <a:ln/>
+        </p:spPr>
+        <p:txBody>
+          <a:bodyPr wrap="square" lIns="0" tIns="0" rIns="0" bIns="0" rtlCol="0" anchor="ctr"/>
+          <a:lstStyle/>
+          <a:p>
+            <a:pPr indent="0" marL="0">
+              <a:buNone/>
+            </a:pPr>
+            <a:r>
+              <a:rPr lang="en-US" sz="1100" b="1" dirty="0">
+                <a:solidFill>
+                  <a:srgbClr val="1A1A1A"/>
+                </a:solidFill>
+              </a:rPr>
+              <a:t>Source: </a:t>
+            </a:r>
+            <a:pPr indent="0" marL="0">
+              <a:buNone/>
+            </a:pPr>
+            <a:r>
+              <a:rPr lang="en-US" sz="1100" dirty="0">
+                <a:solidFill>
+                  <a:srgbClr val="1A1A1A"/>
+                </a:solidFill>
+              </a:rPr>
+              <a:t>GPS model (Bear/Base/Bull cases, FY27E segment EBITDA, YE27E net debt); bear and bull multiples are GPS assumptions</a:t>
+            </a:r>
+            <a:endParaRPr lang="en-US" sz="1100" dirty="0"/>
+          </a:p>
+        </p:txBody>
+      </p:sp>
+      <p:sp>
+        <p:nvSpPr>
+          <p:cNvPr id="25" name="Slide Number Placeholder 0"/>
+          <p:cNvSpPr>
+            <a:spLocks noGrp="1"/>
+          </p:cNvSpPr>
+          <p:nvPr>
+            <p:ph type="sldNum" sz="quarter" idx="4294967295"/>
+          </p:nvPr>
+        </p:nvSpPr>
+        <p:spPr>
+          <a:xfrm>
+            <a:off x="7635240" y="6327648"/>
+            <a:ext cx="411480" cy="274320"/>
+          </a:xfrm>
+          <a:prstGeom prst="rect">
+            <a:avLst/>
+          </a:prstGeom>
+          <a:extLst>
+            <a:ext uri="{C572A759-6A51-4108-AA02-DFA0A04FC94B}">
+              <ma14:wrappingTextBoxFlag xmlns:ma14="http://schemas.microsoft.com/office/mac/drawingml/2011/main" val="0"/>
+            </a:ext>
+          </a:extLst>
+        </p:spPr>
+        <p:txBody>
+          <a:bodyPr/>
+          <a:lstStyle>
+            <a:lvl1pPr>
+              <a:defRPr sz="1100">
+                <a:solidFill>
+                  <a:srgbClr val="1A1A1A"/>
+                </a:solidFill>
+              </a:defRPr>
+            </a:lvl1pPr>
+          </a:lstStyle>
+          <a:p>
+            <a:pPr algn="r"/>
+            <a:fld id="{F7021451-1387-4CA6-816F-3879F97B5CBC}" type="slidenum">
+              <a:rPr b="1" lang="en-US"/>
+              <a:t>24</a:t>
             </a:fld>
             <a:endParaRPr lang="en-US"/>
           </a:p>

--- a/deck/FTAI_Long_Pitch.pptx
+++ b/deck/FTAI_Long_Pitch.pptx
@@ -130,12 +130,12 @@
   <p:extLst>
     <p:ext uri="{521415D9-36F7-43E2-AB2F-B90AF26B5E84}">
       <p14:sectionLst xmlns:p14="http://schemas.microsoft.com/office/powerpoint/2010/main">
-        <p14:section name="Introduction" id="{576fea45-b14a-1512-ea2d-bef77923eb73}">
+        <p14:section name="Introduction" id="{ba5fd3e3-830a-3cb4-fa00-dfcb0e690e8e}">
           <p14:sldIdLst>
             <p14:sldId id="256"/>
           </p14:sldIdLst>
         </p14:section>
-        <p14:section name="The Opportunity" id="{8db79388-ceb6-bd2f-81a6-eb4abd615ca7}">
+        <p14:section name="The Opportunity" id="{76ce88c0-3f97-710f-b110-9180d81a326d}">
           <p14:sldIdLst>
             <p14:sldId id="257"/>
             <p14:sldId id="258"/>
@@ -143,18 +143,18 @@
             <p14:sldId id="260"/>
           </p14:sldIdLst>
         </p14:section>
-        <p14:section name="Returns" id="{0dc8e47b-d8a3-e13b-f548-b9b2a22b38e3}">
+        <p14:section name="Returns" id="{1f95a548-60d9-4158-b20e-0fa250019a29}">
           <p14:sldIdLst>
             <p14:sldId id="261"/>
           </p14:sldIdLst>
         </p14:section>
-        <p14:section name="Business Overview" id="{3430fd40-ebf8-b7c0-0a3d-ba5be19fc6d3}">
+        <p14:section name="Business Overview" id="{ae4f367c-f94c-d35c-a2c3-241f919a117a}">
           <p14:sldIdLst>
             <p14:sldId id="262"/>
             <p14:sldId id="263"/>
           </p14:sldIdLst>
         </p14:section>
-        <p14:section name="Thesis 1a" id="{2b9189bd-ca1a-8860-24bf-faff119e94e3}">
+        <p14:section name="Thesis 1a" id="{7a629b77-dd95-51cf-d17e-31a132ce0c71}">
           <p14:sldIdLst>
             <p14:sldId id="264"/>
             <p14:sldId id="265"/>
@@ -162,7 +162,7 @@
             <p14:sldId id="267"/>
           </p14:sldIdLst>
         </p14:section>
-        <p14:section name="Thesis 1b" id="{23bb6a3a-d838-b2c5-8954-15250207a032}">
+        <p14:section name="Thesis 1b" id="{372875a0-a372-a0b0-372f-019eff236620}">
           <p14:sldIdLst>
             <p14:sldId id="268"/>
             <p14:sldId id="269"/>
@@ -173,7 +173,7 @@
             <p14:sldId id="274"/>
           </p14:sldIdLst>
         </p14:section>
-        <p14:section name="Thesis 2" id="{a411c942-a2d4-007a-8486-28a3cc52f26f}">
+        <p14:section name="Thesis 2" id="{a99988b5-cadc-c71b-d2fa-8f0ab752d5b2}">
           <p14:sldIdLst>
             <p14:sldId id="275"/>
             <p14:sldId id="276"/>
@@ -181,7 +181,7 @@
             <p14:sldId id="278"/>
           </p14:sldIdLst>
         </p14:section>
-        <p14:section name="Valuation" id="{640a6f4d-c480-52f6-6348-16bd8a437c71}">
+        <p14:section name="Valuation" id="{1fd9627b-771b-8c53-17f1-5e75d4676611}">
           <p14:sldIdLst>
             <p14:sldId id="279"/>
           </p14:sldIdLst>
@@ -5010,26 +5010,26 @@
               <c:strCache>
                 <c:ptCount val="1"/>
                 <c:pt idx="0">
-                  <c:v>Bear</c:v>
+                  <c:v>Return</c:v>
                 </c:pt>
               </c:strCache>
             </c:strRef>
           </c:tx>
           <c:spPr>
             <a:solidFill>
-              <a:srgbClr val="B5AEA9"/>
+              <a:srgbClr val="0A1C58"/>
             </a:solidFill>
             <a:effectLst/>
           </c:spPr>
           <c:invertIfNegative val="0"/>
           <c:dLbls>
-            <c:numFmt formatCode="&quot;$&quot;0" sourceLinked="0"/>
+            <c:numFmt formatCode="0%" sourceLinked="0"/>
             <c:txPr>
               <a:bodyPr/>
               <a:lstStyle/>
               <a:p>
                 <a:pPr>
-                  <a:defRPr b="1" i="0" strike="noStrike" sz="1300" u="none">
+                  <a:defRPr b="1" i="0" strike="noStrike" sz="1500" u="none">
                     <a:solidFill>
                       <a:srgbClr val="1A1A1A"/>
                     </a:solidFill>
@@ -5053,13 +5053,13 @@
                 <c:ptCount val="3"/>
                 <c:lvl>
                   <c:pt idx="0">
-                    <c:v>Bear</c:v>
+                    <c:v>Margins only</c:v>
                   </c:pt>
                   <c:pt idx="1">
-                    <c:v>Base</c:v>
+                    <c:v>Share only</c:v>
                   </c:pt>
                   <c:pt idx="2">
-                    <c:v>Bull</c:v>
+                    <c:v>Power only</c:v>
                   </c:pt>
                 </c:lvl>
               </c:multiLvlStrCache>
@@ -5072,109 +5072,26 @@
                 <c:formatCode>General</c:formatCode>
                 <c:ptCount val="3"/>
                 <c:pt idx="0">
-                  <c:v>126</c:v>
+                  <c:v>0.12</c:v>
                 </c:pt>
                 <c:pt idx="1">
-                  <c:v/>
+                  <c:v>0.22</c:v>
                 </c:pt>
                 <c:pt idx="2">
-                  <c:v/>
-                </c:pt>
-              </c:numCache>
-            </c:numRef>
-          </c:val>
-        </c:ser>
-        <c:ser>
-          <c:idx val="1"/>
-          <c:order val="1"/>
-          <c:tx>
-            <c:strRef>
-              <c:f>Sheet1!$C$1</c:f>
-              <c:strCache>
-                <c:ptCount val="1"/>
-                <c:pt idx="0">
-                  <c:v>Base / Bull</c:v>
-                </c:pt>
-              </c:strCache>
-            </c:strRef>
-          </c:tx>
-          <c:spPr>
-            <a:solidFill>
-              <a:srgbClr val="0A1C58"/>
-            </a:solidFill>
-            <a:effectLst/>
-          </c:spPr>
-          <c:invertIfNegative val="0"/>
-          <c:dLbls>
-            <c:numFmt formatCode="&quot;$&quot;0" sourceLinked="0"/>
-            <c:txPr>
-              <a:bodyPr/>
-              <a:lstStyle/>
-              <a:p>
-                <a:pPr>
-                  <a:defRPr b="1" i="0" strike="noStrike" sz="1300" u="none">
-                    <a:solidFill>
-                      <a:srgbClr val="1A1A1A"/>
-                    </a:solidFill>
-                    <a:latin typeface="+mn-lt"/>
-                  </a:defRPr>
-                </a:pPr>
-              </a:p>
-            </c:txPr>
-            <c:showLegendKey val="0"/>
-            <c:showVal val="1"/>
-            <c:showCatName val="0"/>
-            <c:showSerName val="0"/>
-            <c:showPercent val="0"/>
-            <c:showBubbleSize val="0"/>
-            <c:showLeaderLines val="0"/>
-          </c:dLbls>
-          <c:cat>
-            <c:multiLvlStrRef>
-              <c:f>Sheet1!$A$2:$A$4</c:f>
-              <c:multiLvlStrCache>
-                <c:ptCount val="3"/>
-                <c:lvl>
-                  <c:pt idx="0">
-                    <c:v>Bear</c:v>
-                  </c:pt>
-                  <c:pt idx="1">
-                    <c:v>Base</c:v>
-                  </c:pt>
-                  <c:pt idx="2">
-                    <c:v>Bull</c:v>
-                  </c:pt>
-                </c:lvl>
-              </c:multiLvlStrCache>
-            </c:multiLvlStrRef>
-          </c:cat>
-          <c:val>
-            <c:numRef>
-              <c:f>Sheet1!$C$2:$C$4</c:f>
-              <c:numCache>
-                <c:formatCode>General</c:formatCode>
-                <c:ptCount val="3"/>
-                <c:pt idx="0">
-                  <c:v/>
-                </c:pt>
-                <c:pt idx="1">
-                  <c:v>277</c:v>
-                </c:pt>
-                <c:pt idx="2">
-                  <c:v>352</c:v>
+                  <c:v>0.36</c:v>
                 </c:pt>
               </c:numCache>
             </c:numRef>
           </c:val>
         </c:ser>
         <c:dLbls>
-          <c:numFmt formatCode="&quot;$&quot;0" sourceLinked="0"/>
+          <c:numFmt formatCode="0%" sourceLinked="0"/>
           <c:txPr>
             <a:bodyPr/>
             <a:lstStyle/>
             <a:p>
               <a:pPr>
-                <a:defRPr b="1" i="0" strike="noStrike" sz="1300" u="none">
+                <a:defRPr b="1" i="0" strike="noStrike" sz="1500" u="none">
                   <a:solidFill>
                     <a:srgbClr val="1A1A1A"/>
                   </a:solidFill>
@@ -5191,8 +5108,8 @@
           <c:showBubbleSize val="0"/>
           <c:showLeaderLines val="0"/>
         </c:dLbls>
-        <c:gapWidth val="45"/>
-        <c:overlap val="100"/>
+        <c:gapWidth val="60"/>
+        <c:overlap val="0"/>
         <c:axId val="2094734554"/>
         <c:axId val="2094734552"/>
         <c:axId val="2094734556"/>
@@ -5222,7 +5139,7 @@
           <a:lstStyle/>
           <a:p>
             <a:pPr>
-              <a:defRPr sz="1200" b="0" i="0" u="none" strike="noStrike">
+              <a:defRPr sz="1300" b="0" i="0" u="none" strike="noStrike">
                 <a:solidFill>
                   <a:srgbClr val="1A1A1A"/>
                 </a:solidFill>
@@ -5242,7 +5159,7 @@
         <c:axId val="2094734552"/>
         <c:scaling>
           <c:orientation val="minMax"/>
-          <c:max val="400"/>
+          <c:max val="0.45"/>
           <c:min val="0"/>
         </c:scaling>
         <c:delete val="1"/>
@@ -7457,7 +7374,7 @@
             <c:size val="6"/>
             <c:spPr>
               <a:solidFill>
-                <a:srgbClr val="0A1C58"/>
+                <a:srgbClr val="847C7A"/>
               </a:solidFill>
               <a:ln w="9525" cap="flat">
                 <a:solidFill>
@@ -9887,7 +9804,7 @@
           <a:p>
             <a:r>
               <a:rPr lang="en-US" dirty="0"/>
-              <a:t>SOTP on FY27E Adj. EBITDA from each model case (DCF!C3 toggle). Base multiples from the model: Aerospace 16x, Power 12x, Leasing + SCI 9x; corporate costs at the blended segment multiple. Bear: model Bear EBITDA (Aerospace $1,168M, Power $113M, Leasing $400M) at de-rated 12x / 8x / 8x = $126 (-24%). Bull: model Bull EBITDA ($1,669M / $550M / $455M) at 18x / 14x / 10x = $352 (+111%). Reward/risk = 66% / 24% = 2.7x. Holding base multiples in the bear case gives $173, so the bear case also assumes the market keeps punishing the multiple. Note: the title slide still shows the blended DCF target ($308, 84%, 3.4x).</a:t>
+              <a:t>Bars = base-case SOTP with one thesis on and the others off (bear-case margins/share rows, Power units = 0), at base multiples, vs. $167.03: margins only $187 (+12%), share only $203 (+22%), Power (signed order) only $227 (+36%). All three = $277 (+66%). With all three off, the SOTP is $172, about today's price: the market is pricing the bear case.</a:t>
             </a:r>
             <a:endParaRPr lang="en-US" dirty="0"/>
           </a:p>
@@ -22653,7 +22570,7 @@
                   <a:schemeClr val="tx2"/>
                 </a:solidFill>
               </a:rPr>
-              <a:t>Valuation: Sum of the Parts</a:t>
+              <a:t>Valuation: What You Need to Believe</a:t>
             </a:r>
             <a:endParaRPr lang="en-US" sz="3200" dirty="0"/>
           </a:p>
@@ -22661,2167 +22578,14 @@
       </p:sp>
       <p:sp>
         <p:nvSpPr>
-          <p:cNvPr id="3" name="Text 1"/>
+          <p:cNvPr id="3" name="Belief 1 number"/>
           <p:cNvSpPr/>
-          <p:nvPr>
-            <p:ph idx="103" type="body" hasCustomPrompt="1"/>
-          </p:nvPr>
-        </p:nvSpPr>
-        <p:spPr>
-          <a:xfrm>
-            <a:off x="320040" y="932688"/>
-            <a:ext cx="8503920" cy="566928"/>
-          </a:xfrm>
-          <a:prstGeom prst="rect">
-            <a:avLst/>
-          </a:prstGeom>
-          <a:noFill/>
-          <a:ln/>
-        </p:spPr>
-        <p:txBody>
-          <a:bodyPr wrap="square" lIns="0" tIns="0" rIns="0" bIns="0" rtlCol="0" anchor="t"/>
-          <a:lstStyle/>
-          <a:p>
-            <a:pPr algn="l" indent="0" marL="0">
-              <a:buNone/>
-            </a:pPr>
-            <a:r>
-              <a:rPr lang="en-US" sz="1700" b="1" dirty="0">
-                <a:solidFill>
-                  <a:schemeClr val="tx2"/>
-                </a:solidFill>
-              </a:rPr>
-              <a:t>Base case of $277 (+66%), with 2.7x more upside than downside.</a:t>
-            </a:r>
-            <a:endParaRPr lang="en-US" sz="1700" dirty="0"/>
-          </a:p>
-        </p:txBody>
-      </p:sp>
-      <p:graphicFrame>
-        <p:nvGraphicFramePr>
-          <p:cNvPr id="25" name="SOTP table"/>
-          <p:cNvGraphicFramePr>
-            <a:graphicFrameLocks noGrp="1"/>
-          </p:cNvGraphicFramePr>
-          <p:nvPr>
-            <p:extLst>
-              <p:ext uri="{D42A27DB-BD31-4B8C-83A1-F6EECF244321}">
-                <p14:modId xmlns:p14="http://schemas.microsoft.com/office/powerpoint/2010/main" val="1579011935"/>
-              </p:ext>
-            </p:extLst>
-          </p:nvPr>
-        </p:nvGraphicFramePr>
-        <p:xfrm>
-          <a:off x="320040" y="1600200"/>
-          <a:ext cx="5029200" cy="914400"/>
-        </p:xfrm>
-        <a:graphic>
-          <a:graphicData uri="http://schemas.openxmlformats.org/drawingml/2006/table">
-            <a:tbl>
-              <a:tblPr/>
-              <a:tblGrid>
-                <a:gridCol w="1737360"/>
-                <a:gridCol w="1097280"/>
-                <a:gridCol w="1097280"/>
-                <a:gridCol w="1097280"/>
-              </a:tblGrid>
-              <a:tr h="347472">
-                <a:tc>
-                  <a:txBody>
-                    <a:bodyPr/>
-                    <a:lstStyle/>
-                    <a:p>
-                      <a:pPr algn="l" indent="0" marL="0">
-                        <a:buNone/>
-                      </a:pPr>
-                      <a:endParaRPr lang="en-US" sz="1200" dirty="0"/>
-                    </a:p>
-                  </a:txBody>
-                  <a:tcPr marL="36576" marR="36576" marT="36576" marB="36576" anchor="ctr">
-                    <a:lnL w="6350" cap="flat" cmpd="sng" algn="ctr">
-                      <a:solidFill>
-                        <a:srgbClr val="E3E0DC"/>
-                      </a:solidFill>
-                      <a:prstDash val="solid"/>
-                      <a:round/>
-                      <a:headEnd type="none" w="med" len="med"/>
-                      <a:tailEnd type="none" w="med" len="med"/>
-                    </a:lnL>
-                    <a:lnR w="6350" cap="flat" cmpd="sng" algn="ctr">
-                      <a:solidFill>
-                        <a:srgbClr val="E3E0DC"/>
-                      </a:solidFill>
-                      <a:prstDash val="solid"/>
-                      <a:round/>
-                      <a:headEnd type="none" w="med" len="med"/>
-                      <a:tailEnd type="none" w="med" len="med"/>
-                    </a:lnR>
-                    <a:lnT w="6350" cap="flat" cmpd="sng" algn="ctr">
-                      <a:solidFill>
-                        <a:srgbClr val="E3E0DC"/>
-                      </a:solidFill>
-                      <a:prstDash val="solid"/>
-                      <a:round/>
-                      <a:headEnd type="none" w="med" len="med"/>
-                      <a:tailEnd type="none" w="med" len="med"/>
-                    </a:lnT>
-                    <a:lnB w="6350" cap="flat" cmpd="sng" algn="ctr">
-                      <a:solidFill>
-                        <a:srgbClr val="E3E0DC"/>
-                      </a:solidFill>
-                      <a:prstDash val="solid"/>
-                      <a:round/>
-                      <a:headEnd type="none" w="med" len="med"/>
-                      <a:tailEnd type="none" w="med" len="med"/>
-                    </a:lnB>
-                  </a:tcPr>
-                </a:tc>
-                <a:tc>
-                  <a:txBody>
-                    <a:bodyPr/>
-                    <a:lstStyle/>
-                    <a:p>
-                      <a:pPr algn="ctr" indent="0" marL="0">
-                        <a:buNone/>
-                      </a:pPr>
-                      <a:r>
-                        <a:rPr lang="en-US" sz="1300" b="1" dirty="0">
-                          <a:solidFill>
-                            <a:srgbClr val="0A1C58"/>
-                          </a:solidFill>
-                        </a:rPr>
-                        <a:t>Bear</a:t>
-                      </a:r>
-                      <a:endParaRPr lang="en-US" sz="1300" dirty="0"/>
-                    </a:p>
-                  </a:txBody>
-                  <a:tcPr marL="36576" marR="36576" marT="36576" marB="36576" anchor="ctr">
-                    <a:lnL w="6350" cap="flat" cmpd="sng" algn="ctr">
-                      <a:solidFill>
-                        <a:srgbClr val="E3E0DC"/>
-                      </a:solidFill>
-                      <a:prstDash val="solid"/>
-                      <a:round/>
-                      <a:headEnd type="none" w="med" len="med"/>
-                      <a:tailEnd type="none" w="med" len="med"/>
-                    </a:lnL>
-                    <a:lnR w="6350" cap="flat" cmpd="sng" algn="ctr">
-                      <a:solidFill>
-                        <a:srgbClr val="E3E0DC"/>
-                      </a:solidFill>
-                      <a:prstDash val="solid"/>
-                      <a:round/>
-                      <a:headEnd type="none" w="med" len="med"/>
-                      <a:tailEnd type="none" w="med" len="med"/>
-                    </a:lnR>
-                    <a:lnT w="6350" cap="flat" cmpd="sng" algn="ctr">
-                      <a:solidFill>
-                        <a:srgbClr val="E3E0DC"/>
-                      </a:solidFill>
-                      <a:prstDash val="solid"/>
-                      <a:round/>
-                      <a:headEnd type="none" w="med" len="med"/>
-                      <a:tailEnd type="none" w="med" len="med"/>
-                    </a:lnT>
-                    <a:lnB w="6350" cap="flat" cmpd="sng" algn="ctr">
-                      <a:solidFill>
-                        <a:srgbClr val="E3E0DC"/>
-                      </a:solidFill>
-                      <a:prstDash val="solid"/>
-                      <a:round/>
-                      <a:headEnd type="none" w="med" len="med"/>
-                      <a:tailEnd type="none" w="med" len="med"/>
-                    </a:lnB>
-                    <a:solidFill>
-                      <a:srgbClr val="DCD8D3"/>
-                    </a:solidFill>
-                  </a:tcPr>
-                </a:tc>
-                <a:tc>
-                  <a:txBody>
-                    <a:bodyPr/>
-                    <a:lstStyle/>
-                    <a:p>
-                      <a:pPr algn="ctr" indent="0" marL="0">
-                        <a:buNone/>
-                      </a:pPr>
-                      <a:r>
-                        <a:rPr lang="en-US" sz="1300" b="1" dirty="0">
-                          <a:solidFill>
-                            <a:srgbClr val="FFFFFF"/>
-                          </a:solidFill>
-                        </a:rPr>
-                        <a:t>Base</a:t>
-                      </a:r>
-                      <a:endParaRPr lang="en-US" sz="1300" dirty="0"/>
-                    </a:p>
-                  </a:txBody>
-                  <a:tcPr marL="36576" marR="36576" marT="36576" marB="36576" anchor="ctr">
-                    <a:lnL w="6350" cap="flat" cmpd="sng" algn="ctr">
-                      <a:solidFill>
-                        <a:srgbClr val="E3E0DC"/>
-                      </a:solidFill>
-                      <a:prstDash val="solid"/>
-                      <a:round/>
-                      <a:headEnd type="none" w="med" len="med"/>
-                      <a:tailEnd type="none" w="med" len="med"/>
-                    </a:lnL>
-                    <a:lnR w="6350" cap="flat" cmpd="sng" algn="ctr">
-                      <a:solidFill>
-                        <a:srgbClr val="E3E0DC"/>
-                      </a:solidFill>
-                      <a:prstDash val="solid"/>
-                      <a:round/>
-                      <a:headEnd type="none" w="med" len="med"/>
-                      <a:tailEnd type="none" w="med" len="med"/>
-                    </a:lnR>
-                    <a:lnT w="6350" cap="flat" cmpd="sng" algn="ctr">
-                      <a:solidFill>
-                        <a:srgbClr val="E3E0DC"/>
-                      </a:solidFill>
-                      <a:prstDash val="solid"/>
-                      <a:round/>
-                      <a:headEnd type="none" w="med" len="med"/>
-                      <a:tailEnd type="none" w="med" len="med"/>
-                    </a:lnT>
-                    <a:lnB w="6350" cap="flat" cmpd="sng" algn="ctr">
-                      <a:solidFill>
-                        <a:srgbClr val="E3E0DC"/>
-                      </a:solidFill>
-                      <a:prstDash val="solid"/>
-                      <a:round/>
-                      <a:headEnd type="none" w="med" len="med"/>
-                      <a:tailEnd type="none" w="med" len="med"/>
-                    </a:lnB>
-                    <a:solidFill>
-                      <a:srgbClr val="0A1C58"/>
-                    </a:solidFill>
-                  </a:tcPr>
-                </a:tc>
-                <a:tc>
-                  <a:txBody>
-                    <a:bodyPr/>
-                    <a:lstStyle/>
-                    <a:p>
-                      <a:pPr algn="ctr" indent="0" marL="0">
-                        <a:buNone/>
-                      </a:pPr>
-                      <a:r>
-                        <a:rPr lang="en-US" sz="1300" b="1" dirty="0">
-                          <a:solidFill>
-                            <a:srgbClr val="0A1C58"/>
-                          </a:solidFill>
-                        </a:rPr>
-                        <a:t>Bull</a:t>
-                      </a:r>
-                      <a:endParaRPr lang="en-US" sz="1300" dirty="0"/>
-                    </a:p>
-                  </a:txBody>
-                  <a:tcPr marL="36576" marR="36576" marT="36576" marB="36576" anchor="ctr">
-                    <a:lnL w="6350" cap="flat" cmpd="sng" algn="ctr">
-                      <a:solidFill>
-                        <a:srgbClr val="E3E0DC"/>
-                      </a:solidFill>
-                      <a:prstDash val="solid"/>
-                      <a:round/>
-                      <a:headEnd type="none" w="med" len="med"/>
-                      <a:tailEnd type="none" w="med" len="med"/>
-                    </a:lnL>
-                    <a:lnR w="6350" cap="flat" cmpd="sng" algn="ctr">
-                      <a:solidFill>
-                        <a:srgbClr val="E3E0DC"/>
-                      </a:solidFill>
-                      <a:prstDash val="solid"/>
-                      <a:round/>
-                      <a:headEnd type="none" w="med" len="med"/>
-                      <a:tailEnd type="none" w="med" len="med"/>
-                    </a:lnR>
-                    <a:lnT w="6350" cap="flat" cmpd="sng" algn="ctr">
-                      <a:solidFill>
-                        <a:srgbClr val="E3E0DC"/>
-                      </a:solidFill>
-                      <a:prstDash val="solid"/>
-                      <a:round/>
-                      <a:headEnd type="none" w="med" len="med"/>
-                      <a:tailEnd type="none" w="med" len="med"/>
-                    </a:lnT>
-                    <a:lnB w="6350" cap="flat" cmpd="sng" algn="ctr">
-                      <a:solidFill>
-                        <a:srgbClr val="E3E0DC"/>
-                      </a:solidFill>
-                      <a:prstDash val="solid"/>
-                      <a:round/>
-                      <a:headEnd type="none" w="med" len="med"/>
-                      <a:tailEnd type="none" w="med" len="med"/>
-                    </a:lnB>
-                    <a:solidFill>
-                      <a:srgbClr val="DCD8D3"/>
-                    </a:solidFill>
-                  </a:tcPr>
-                </a:tc>
-              </a:tr>
-              <a:tr h="475488">
-                <a:tc>
-                  <a:txBody>
-                    <a:bodyPr/>
-                    <a:lstStyle/>
-                    <a:p>
-                      <a:pPr algn="l" indent="0" marL="0">
-                        <a:buNone/>
-                      </a:pPr>
-                      <a:r>
-                        <a:rPr lang="en-US" sz="1200" b="1" dirty="0">
-                          <a:solidFill>
-                            <a:srgbClr val="1A1A1A"/>
-                          </a:solidFill>
-                        </a:rPr>
-                        <a:t>Aerospace Products</a:t>
-                      </a:r>
-                      <a:endParaRPr lang="en-US" sz="1200" dirty="0"/>
-                    </a:p>
-                  </a:txBody>
-                  <a:tcPr marL="36576" marR="36576" marT="36576" marB="36576" anchor="ctr">
-                    <a:lnL w="6350" cap="flat" cmpd="sng" algn="ctr">
-                      <a:solidFill>
-                        <a:srgbClr val="E3E0DC"/>
-                      </a:solidFill>
-                      <a:prstDash val="solid"/>
-                      <a:round/>
-                      <a:headEnd type="none" w="med" len="med"/>
-                      <a:tailEnd type="none" w="med" len="med"/>
-                    </a:lnL>
-                    <a:lnR w="6350" cap="flat" cmpd="sng" algn="ctr">
-                      <a:solidFill>
-                        <a:srgbClr val="E3E0DC"/>
-                      </a:solidFill>
-                      <a:prstDash val="solid"/>
-                      <a:round/>
-                      <a:headEnd type="none" w="med" len="med"/>
-                      <a:tailEnd type="none" w="med" len="med"/>
-                    </a:lnR>
-                    <a:lnT w="6350" cap="flat" cmpd="sng" algn="ctr">
-                      <a:solidFill>
-                        <a:srgbClr val="E3E0DC"/>
-                      </a:solidFill>
-                      <a:prstDash val="solid"/>
-                      <a:round/>
-                      <a:headEnd type="none" w="med" len="med"/>
-                      <a:tailEnd type="none" w="med" len="med"/>
-                    </a:lnT>
-                    <a:lnB w="6350" cap="flat" cmpd="sng" algn="ctr">
-                      <a:solidFill>
-                        <a:srgbClr val="E3E0DC"/>
-                      </a:solidFill>
-                      <a:prstDash val="solid"/>
-                      <a:round/>
-                      <a:headEnd type="none" w="med" len="med"/>
-                      <a:tailEnd type="none" w="med" len="med"/>
-                    </a:lnB>
-                  </a:tcPr>
-                </a:tc>
-                <a:tc>
-                  <a:txBody>
-                    <a:bodyPr/>
-                    <a:lstStyle/>
-                    <a:p>
-                      <a:pPr algn="ctr" indent="0" marL="0">
-                        <a:buNone/>
-                      </a:pPr>
-                      <a:r>
-                        <a:rPr lang="en-US" sz="1300" b="1" dirty="0">
-                          <a:solidFill>
-                            <a:srgbClr val="1A1A1A"/>
-                          </a:solidFill>
-                        </a:rPr>
-                        <a:t>$135</a:t>
-                      </a:r>
-                      <a:endParaRPr lang="en-US" sz="1200" dirty="0"/>
-                    </a:p>
-                    <a:p>
-                      <a:pPr algn="ctr" indent="0" marL="0">
-                        <a:buNone/>
-                      </a:pPr>
-                      <a:r>
-                        <a:rPr lang="en-US" sz="900" dirty="0">
-                          <a:solidFill>
-                            <a:srgbClr val="847C7A"/>
-                          </a:solidFill>
-                        </a:rPr>
-                        <a:t>12x · $1,168M</a:t>
-                      </a:r>
-                      <a:endParaRPr lang="en-US" sz="1200" dirty="0"/>
-                    </a:p>
-                  </a:txBody>
-                  <a:tcPr marL="36576" marR="36576" marT="36576" marB="36576" anchor="ctr">
-                    <a:lnL w="6350" cap="flat" cmpd="sng" algn="ctr">
-                      <a:solidFill>
-                        <a:srgbClr val="E3E0DC"/>
-                      </a:solidFill>
-                      <a:prstDash val="solid"/>
-                      <a:round/>
-                      <a:headEnd type="none" w="med" len="med"/>
-                      <a:tailEnd type="none" w="med" len="med"/>
-                    </a:lnL>
-                    <a:lnR w="6350" cap="flat" cmpd="sng" algn="ctr">
-                      <a:solidFill>
-                        <a:srgbClr val="E3E0DC"/>
-                      </a:solidFill>
-                      <a:prstDash val="solid"/>
-                      <a:round/>
-                      <a:headEnd type="none" w="med" len="med"/>
-                      <a:tailEnd type="none" w="med" len="med"/>
-                    </a:lnR>
-                    <a:lnT w="6350" cap="flat" cmpd="sng" algn="ctr">
-                      <a:solidFill>
-                        <a:srgbClr val="E3E0DC"/>
-                      </a:solidFill>
-                      <a:prstDash val="solid"/>
-                      <a:round/>
-                      <a:headEnd type="none" w="med" len="med"/>
-                      <a:tailEnd type="none" w="med" len="med"/>
-                    </a:lnT>
-                    <a:lnB w="6350" cap="flat" cmpd="sng" algn="ctr">
-                      <a:solidFill>
-                        <a:srgbClr val="E3E0DC"/>
-                      </a:solidFill>
-                      <a:prstDash val="solid"/>
-                      <a:round/>
-                      <a:headEnd type="none" w="med" len="med"/>
-                      <a:tailEnd type="none" w="med" len="med"/>
-                    </a:lnB>
-                  </a:tcPr>
-                </a:tc>
-                <a:tc>
-                  <a:txBody>
-                    <a:bodyPr/>
-                    <a:lstStyle/>
-                    <a:p>
-                      <a:pPr algn="ctr" indent="0" marL="0">
-                        <a:buNone/>
-                      </a:pPr>
-                      <a:r>
-                        <a:rPr lang="en-US" sz="1300" b="1" dirty="0">
-                          <a:solidFill>
-                            <a:srgbClr val="1A1A1A"/>
-                          </a:solidFill>
-                        </a:rPr>
-                        <a:t>$237</a:t>
-                      </a:r>
-                      <a:endParaRPr lang="en-US" sz="1200" dirty="0"/>
-                    </a:p>
-                    <a:p>
-                      <a:pPr algn="ctr" indent="0" marL="0">
-                        <a:buNone/>
-                      </a:pPr>
-                      <a:r>
-                        <a:rPr lang="en-US" sz="900" dirty="0">
-                          <a:solidFill>
-                            <a:srgbClr val="847C7A"/>
-                          </a:solidFill>
-                        </a:rPr>
-                        <a:t>16x · $1,541M</a:t>
-                      </a:r>
-                      <a:endParaRPr lang="en-US" sz="1200" dirty="0"/>
-                    </a:p>
-                  </a:txBody>
-                  <a:tcPr marL="36576" marR="36576" marT="36576" marB="36576" anchor="ctr">
-                    <a:lnL w="6350" cap="flat" cmpd="sng" algn="ctr">
-                      <a:solidFill>
-                        <a:srgbClr val="E3E0DC"/>
-                      </a:solidFill>
-                      <a:prstDash val="solid"/>
-                      <a:round/>
-                      <a:headEnd type="none" w="med" len="med"/>
-                      <a:tailEnd type="none" w="med" len="med"/>
-                    </a:lnL>
-                    <a:lnR w="6350" cap="flat" cmpd="sng" algn="ctr">
-                      <a:solidFill>
-                        <a:srgbClr val="E3E0DC"/>
-                      </a:solidFill>
-                      <a:prstDash val="solid"/>
-                      <a:round/>
-                      <a:headEnd type="none" w="med" len="med"/>
-                      <a:tailEnd type="none" w="med" len="med"/>
-                    </a:lnR>
-                    <a:lnT w="6350" cap="flat" cmpd="sng" algn="ctr">
-                      <a:solidFill>
-                        <a:srgbClr val="E3E0DC"/>
-                      </a:solidFill>
-                      <a:prstDash val="solid"/>
-                      <a:round/>
-                      <a:headEnd type="none" w="med" len="med"/>
-                      <a:tailEnd type="none" w="med" len="med"/>
-                    </a:lnT>
-                    <a:lnB w="6350" cap="flat" cmpd="sng" algn="ctr">
-                      <a:solidFill>
-                        <a:srgbClr val="E3E0DC"/>
-                      </a:solidFill>
-                      <a:prstDash val="solid"/>
-                      <a:round/>
-                      <a:headEnd type="none" w="med" len="med"/>
-                      <a:tailEnd type="none" w="med" len="med"/>
-                    </a:lnB>
-                  </a:tcPr>
-                </a:tc>
-                <a:tc>
-                  <a:txBody>
-                    <a:bodyPr/>
-                    <a:lstStyle/>
-                    <a:p>
-                      <a:pPr algn="ctr" indent="0" marL="0">
-                        <a:buNone/>
-                      </a:pPr>
-                      <a:r>
-                        <a:rPr lang="en-US" sz="1300" b="1" dirty="0">
-                          <a:solidFill>
-                            <a:srgbClr val="1A1A1A"/>
-                          </a:solidFill>
-                        </a:rPr>
-                        <a:t>$289</a:t>
-                      </a:r>
-                      <a:endParaRPr lang="en-US" sz="1200" dirty="0"/>
-                    </a:p>
-                    <a:p>
-                      <a:pPr algn="ctr" indent="0" marL="0">
-                        <a:buNone/>
-                      </a:pPr>
-                      <a:r>
-                        <a:rPr lang="en-US" sz="900" dirty="0">
-                          <a:solidFill>
-                            <a:srgbClr val="847C7A"/>
-                          </a:solidFill>
-                        </a:rPr>
-                        <a:t>18x · $1,669M</a:t>
-                      </a:r>
-                      <a:endParaRPr lang="en-US" sz="1200" dirty="0"/>
-                    </a:p>
-                  </a:txBody>
-                  <a:tcPr marL="36576" marR="36576" marT="36576" marB="36576" anchor="ctr">
-                    <a:lnL w="6350" cap="flat" cmpd="sng" algn="ctr">
-                      <a:solidFill>
-                        <a:srgbClr val="E3E0DC"/>
-                      </a:solidFill>
-                      <a:prstDash val="solid"/>
-                      <a:round/>
-                      <a:headEnd type="none" w="med" len="med"/>
-                      <a:tailEnd type="none" w="med" len="med"/>
-                    </a:lnL>
-                    <a:lnR w="6350" cap="flat" cmpd="sng" algn="ctr">
-                      <a:solidFill>
-                        <a:srgbClr val="E3E0DC"/>
-                      </a:solidFill>
-                      <a:prstDash val="solid"/>
-                      <a:round/>
-                      <a:headEnd type="none" w="med" len="med"/>
-                      <a:tailEnd type="none" w="med" len="med"/>
-                    </a:lnR>
-                    <a:lnT w="6350" cap="flat" cmpd="sng" algn="ctr">
-                      <a:solidFill>
-                        <a:srgbClr val="E3E0DC"/>
-                      </a:solidFill>
-                      <a:prstDash val="solid"/>
-                      <a:round/>
-                      <a:headEnd type="none" w="med" len="med"/>
-                      <a:tailEnd type="none" w="med" len="med"/>
-                    </a:lnT>
-                    <a:lnB w="6350" cap="flat" cmpd="sng" algn="ctr">
-                      <a:solidFill>
-                        <a:srgbClr val="E3E0DC"/>
-                      </a:solidFill>
-                      <a:prstDash val="solid"/>
-                      <a:round/>
-                      <a:headEnd type="none" w="med" len="med"/>
-                      <a:tailEnd type="none" w="med" len="med"/>
-                    </a:lnB>
-                  </a:tcPr>
-                </a:tc>
-              </a:tr>
-              <a:tr h="475488">
-                <a:tc>
-                  <a:txBody>
-                    <a:bodyPr/>
-                    <a:lstStyle/>
-                    <a:p>
-                      <a:pPr algn="l" indent="0" marL="0">
-                        <a:buNone/>
-                      </a:pPr>
-                      <a:r>
-                        <a:rPr lang="en-US" sz="1200" b="1" dirty="0">
-                          <a:solidFill>
-                            <a:srgbClr val="1A1A1A"/>
-                          </a:solidFill>
-                        </a:rPr>
-                        <a:t>FTAI Power</a:t>
-                      </a:r>
-                      <a:endParaRPr lang="en-US" sz="1200" dirty="0"/>
-                    </a:p>
-                  </a:txBody>
-                  <a:tcPr marL="36576" marR="36576" marT="36576" marB="36576" anchor="ctr">
-                    <a:lnL w="6350" cap="flat" cmpd="sng" algn="ctr">
-                      <a:solidFill>
-                        <a:srgbClr val="E3E0DC"/>
-                      </a:solidFill>
-                      <a:prstDash val="solid"/>
-                      <a:round/>
-                      <a:headEnd type="none" w="med" len="med"/>
-                      <a:tailEnd type="none" w="med" len="med"/>
-                    </a:lnL>
-                    <a:lnR w="6350" cap="flat" cmpd="sng" algn="ctr">
-                      <a:solidFill>
-                        <a:srgbClr val="E3E0DC"/>
-                      </a:solidFill>
-                      <a:prstDash val="solid"/>
-                      <a:round/>
-                      <a:headEnd type="none" w="med" len="med"/>
-                      <a:tailEnd type="none" w="med" len="med"/>
-                    </a:lnR>
-                    <a:lnT w="6350" cap="flat" cmpd="sng" algn="ctr">
-                      <a:solidFill>
-                        <a:srgbClr val="E3E0DC"/>
-                      </a:solidFill>
-                      <a:prstDash val="solid"/>
-                      <a:round/>
-                      <a:headEnd type="none" w="med" len="med"/>
-                      <a:tailEnd type="none" w="med" len="med"/>
-                    </a:lnT>
-                    <a:lnB w="6350" cap="flat" cmpd="sng" algn="ctr">
-                      <a:solidFill>
-                        <a:srgbClr val="E3E0DC"/>
-                      </a:solidFill>
-                      <a:prstDash val="solid"/>
-                      <a:round/>
-                      <a:headEnd type="none" w="med" len="med"/>
-                      <a:tailEnd type="none" w="med" len="med"/>
-                    </a:lnB>
-                  </a:tcPr>
-                </a:tc>
-                <a:tc>
-                  <a:txBody>
-                    <a:bodyPr/>
-                    <a:lstStyle/>
-                    <a:p>
-                      <a:pPr algn="ctr" indent="0" marL="0">
-                        <a:buNone/>
-                      </a:pPr>
-                      <a:r>
-                        <a:rPr lang="en-US" sz="1300" b="1" dirty="0">
-                          <a:solidFill>
-                            <a:srgbClr val="1A1A1A"/>
-                          </a:solidFill>
-                        </a:rPr>
-                        <a:t>$9</a:t>
-                      </a:r>
-                      <a:endParaRPr lang="en-US" sz="1200" dirty="0"/>
-                    </a:p>
-                    <a:p>
-                      <a:pPr algn="ctr" indent="0" marL="0">
-                        <a:buNone/>
-                      </a:pPr>
-                      <a:r>
-                        <a:rPr lang="en-US" sz="900" dirty="0">
-                          <a:solidFill>
-                            <a:srgbClr val="847C7A"/>
-                          </a:solidFill>
-                        </a:rPr>
-                        <a:t>8x · $113M</a:t>
-                      </a:r>
-                      <a:endParaRPr lang="en-US" sz="1200" dirty="0"/>
-                    </a:p>
-                  </a:txBody>
-                  <a:tcPr marL="36576" marR="36576" marT="36576" marB="36576" anchor="ctr">
-                    <a:lnL w="6350" cap="flat" cmpd="sng" algn="ctr">
-                      <a:solidFill>
-                        <a:srgbClr val="E3E0DC"/>
-                      </a:solidFill>
-                      <a:prstDash val="solid"/>
-                      <a:round/>
-                      <a:headEnd type="none" w="med" len="med"/>
-                      <a:tailEnd type="none" w="med" len="med"/>
-                    </a:lnL>
-                    <a:lnR w="6350" cap="flat" cmpd="sng" algn="ctr">
-                      <a:solidFill>
-                        <a:srgbClr val="E3E0DC"/>
-                      </a:solidFill>
-                      <a:prstDash val="solid"/>
-                      <a:round/>
-                      <a:headEnd type="none" w="med" len="med"/>
-                      <a:tailEnd type="none" w="med" len="med"/>
-                    </a:lnR>
-                    <a:lnT w="6350" cap="flat" cmpd="sng" algn="ctr">
-                      <a:solidFill>
-                        <a:srgbClr val="E3E0DC"/>
-                      </a:solidFill>
-                      <a:prstDash val="solid"/>
-                      <a:round/>
-                      <a:headEnd type="none" w="med" len="med"/>
-                      <a:tailEnd type="none" w="med" len="med"/>
-                    </a:lnT>
-                    <a:lnB w="6350" cap="flat" cmpd="sng" algn="ctr">
-                      <a:solidFill>
-                        <a:srgbClr val="E3E0DC"/>
-                      </a:solidFill>
-                      <a:prstDash val="solid"/>
-                      <a:round/>
-                      <a:headEnd type="none" w="med" len="med"/>
-                      <a:tailEnd type="none" w="med" len="med"/>
-                    </a:lnB>
-                  </a:tcPr>
-                </a:tc>
-                <a:tc>
-                  <a:txBody>
-                    <a:bodyPr/>
-                    <a:lstStyle/>
-                    <a:p>
-                      <a:pPr algn="ctr" indent="0" marL="0">
-                        <a:buNone/>
-                      </a:pPr>
-                      <a:r>
-                        <a:rPr lang="en-US" sz="1300" b="1" dirty="0">
-                          <a:solidFill>
-                            <a:srgbClr val="1A1A1A"/>
-                          </a:solidFill>
-                        </a:rPr>
-                        <a:t>$52</a:t>
-                      </a:r>
-                      <a:endParaRPr lang="en-US" sz="1200" dirty="0"/>
-                    </a:p>
-                    <a:p>
-                      <a:pPr algn="ctr" indent="0" marL="0">
-                        <a:buNone/>
-                      </a:pPr>
-                      <a:r>
-                        <a:rPr lang="en-US" sz="900" dirty="0">
-                          <a:solidFill>
-                            <a:srgbClr val="847C7A"/>
-                          </a:solidFill>
-                        </a:rPr>
-                        <a:t>12x · $450M</a:t>
-                      </a:r>
-                      <a:endParaRPr lang="en-US" sz="1200" dirty="0"/>
-                    </a:p>
-                  </a:txBody>
-                  <a:tcPr marL="36576" marR="36576" marT="36576" marB="36576" anchor="ctr">
-                    <a:lnL w="6350" cap="flat" cmpd="sng" algn="ctr">
-                      <a:solidFill>
-                        <a:srgbClr val="E3E0DC"/>
-                      </a:solidFill>
-                      <a:prstDash val="solid"/>
-                      <a:round/>
-                      <a:headEnd type="none" w="med" len="med"/>
-                      <a:tailEnd type="none" w="med" len="med"/>
-                    </a:lnL>
-                    <a:lnR w="6350" cap="flat" cmpd="sng" algn="ctr">
-                      <a:solidFill>
-                        <a:srgbClr val="E3E0DC"/>
-                      </a:solidFill>
-                      <a:prstDash val="solid"/>
-                      <a:round/>
-                      <a:headEnd type="none" w="med" len="med"/>
-                      <a:tailEnd type="none" w="med" len="med"/>
-                    </a:lnR>
-                    <a:lnT w="6350" cap="flat" cmpd="sng" algn="ctr">
-                      <a:solidFill>
-                        <a:srgbClr val="E3E0DC"/>
-                      </a:solidFill>
-                      <a:prstDash val="solid"/>
-                      <a:round/>
-                      <a:headEnd type="none" w="med" len="med"/>
-                      <a:tailEnd type="none" w="med" len="med"/>
-                    </a:lnT>
-                    <a:lnB w="6350" cap="flat" cmpd="sng" algn="ctr">
-                      <a:solidFill>
-                        <a:srgbClr val="E3E0DC"/>
-                      </a:solidFill>
-                      <a:prstDash val="solid"/>
-                      <a:round/>
-                      <a:headEnd type="none" w="med" len="med"/>
-                      <a:tailEnd type="none" w="med" len="med"/>
-                    </a:lnB>
-                  </a:tcPr>
-                </a:tc>
-                <a:tc>
-                  <a:txBody>
-                    <a:bodyPr/>
-                    <a:lstStyle/>
-                    <a:p>
-                      <a:pPr algn="ctr" indent="0" marL="0">
-                        <a:buNone/>
-                      </a:pPr>
-                      <a:r>
-                        <a:rPr lang="en-US" sz="1300" b="1" dirty="0">
-                          <a:solidFill>
-                            <a:srgbClr val="1A1A1A"/>
-                          </a:solidFill>
-                        </a:rPr>
-                        <a:t>$74</a:t>
-                      </a:r>
-                      <a:endParaRPr lang="en-US" sz="1200" dirty="0"/>
-                    </a:p>
-                    <a:p>
-                      <a:pPr algn="ctr" indent="0" marL="0">
-                        <a:buNone/>
-                      </a:pPr>
-                      <a:r>
-                        <a:rPr lang="en-US" sz="900" dirty="0">
-                          <a:solidFill>
-                            <a:srgbClr val="847C7A"/>
-                          </a:solidFill>
-                        </a:rPr>
-                        <a:t>14x · $550M</a:t>
-                      </a:r>
-                      <a:endParaRPr lang="en-US" sz="1200" dirty="0"/>
-                    </a:p>
-                  </a:txBody>
-                  <a:tcPr marL="36576" marR="36576" marT="36576" marB="36576" anchor="ctr">
-                    <a:lnL w="6350" cap="flat" cmpd="sng" algn="ctr">
-                      <a:solidFill>
-                        <a:srgbClr val="E3E0DC"/>
-                      </a:solidFill>
-                      <a:prstDash val="solid"/>
-                      <a:round/>
-                      <a:headEnd type="none" w="med" len="med"/>
-                      <a:tailEnd type="none" w="med" len="med"/>
-                    </a:lnL>
-                    <a:lnR w="6350" cap="flat" cmpd="sng" algn="ctr">
-                      <a:solidFill>
-                        <a:srgbClr val="E3E0DC"/>
-                      </a:solidFill>
-                      <a:prstDash val="solid"/>
-                      <a:round/>
-                      <a:headEnd type="none" w="med" len="med"/>
-                      <a:tailEnd type="none" w="med" len="med"/>
-                    </a:lnR>
-                    <a:lnT w="6350" cap="flat" cmpd="sng" algn="ctr">
-                      <a:solidFill>
-                        <a:srgbClr val="E3E0DC"/>
-                      </a:solidFill>
-                      <a:prstDash val="solid"/>
-                      <a:round/>
-                      <a:headEnd type="none" w="med" len="med"/>
-                      <a:tailEnd type="none" w="med" len="med"/>
-                    </a:lnT>
-                    <a:lnB w="6350" cap="flat" cmpd="sng" algn="ctr">
-                      <a:solidFill>
-                        <a:srgbClr val="E3E0DC"/>
-                      </a:solidFill>
-                      <a:prstDash val="solid"/>
-                      <a:round/>
-                      <a:headEnd type="none" w="med" len="med"/>
-                      <a:tailEnd type="none" w="med" len="med"/>
-                    </a:lnB>
-                  </a:tcPr>
-                </a:tc>
-              </a:tr>
-              <a:tr h="475488">
-                <a:tc>
-                  <a:txBody>
-                    <a:bodyPr/>
-                    <a:lstStyle/>
-                    <a:p>
-                      <a:pPr algn="l" indent="0" marL="0">
-                        <a:buNone/>
-                      </a:pPr>
-                      <a:r>
-                        <a:rPr lang="en-US" sz="1200" b="1" dirty="0">
-                          <a:solidFill>
-                            <a:srgbClr val="1A1A1A"/>
-                          </a:solidFill>
-                        </a:rPr>
-                        <a:t>Leasing + SCI</a:t>
-                      </a:r>
-                      <a:endParaRPr lang="en-US" sz="1200" dirty="0"/>
-                    </a:p>
-                  </a:txBody>
-                  <a:tcPr marL="36576" marR="36576" marT="36576" marB="36576" anchor="ctr">
-                    <a:lnL w="6350" cap="flat" cmpd="sng" algn="ctr">
-                      <a:solidFill>
-                        <a:srgbClr val="E3E0DC"/>
-                      </a:solidFill>
-                      <a:prstDash val="solid"/>
-                      <a:round/>
-                      <a:headEnd type="none" w="med" len="med"/>
-                      <a:tailEnd type="none" w="med" len="med"/>
-                    </a:lnL>
-                    <a:lnR w="6350" cap="flat" cmpd="sng" algn="ctr">
-                      <a:solidFill>
-                        <a:srgbClr val="E3E0DC"/>
-                      </a:solidFill>
-                      <a:prstDash val="solid"/>
-                      <a:round/>
-                      <a:headEnd type="none" w="med" len="med"/>
-                      <a:tailEnd type="none" w="med" len="med"/>
-                    </a:lnR>
-                    <a:lnT w="6350" cap="flat" cmpd="sng" algn="ctr">
-                      <a:solidFill>
-                        <a:srgbClr val="E3E0DC"/>
-                      </a:solidFill>
-                      <a:prstDash val="solid"/>
-                      <a:round/>
-                      <a:headEnd type="none" w="med" len="med"/>
-                      <a:tailEnd type="none" w="med" len="med"/>
-                    </a:lnT>
-                    <a:lnB w="6350" cap="flat" cmpd="sng" algn="ctr">
-                      <a:solidFill>
-                        <a:srgbClr val="E3E0DC"/>
-                      </a:solidFill>
-                      <a:prstDash val="solid"/>
-                      <a:round/>
-                      <a:headEnd type="none" w="med" len="med"/>
-                      <a:tailEnd type="none" w="med" len="med"/>
-                    </a:lnB>
-                  </a:tcPr>
-                </a:tc>
-                <a:tc>
-                  <a:txBody>
-                    <a:bodyPr/>
-                    <a:lstStyle/>
-                    <a:p>
-                      <a:pPr algn="ctr" indent="0" marL="0">
-                        <a:buNone/>
-                      </a:pPr>
-                      <a:r>
-                        <a:rPr lang="en-US" sz="1300" b="1" dirty="0">
-                          <a:solidFill>
-                            <a:srgbClr val="1A1A1A"/>
-                          </a:solidFill>
-                        </a:rPr>
-                        <a:t>$31</a:t>
-                      </a:r>
-                      <a:endParaRPr lang="en-US" sz="1200" dirty="0"/>
-                    </a:p>
-                    <a:p>
-                      <a:pPr algn="ctr" indent="0" marL="0">
-                        <a:buNone/>
-                      </a:pPr>
-                      <a:r>
-                        <a:rPr lang="en-US" sz="900" dirty="0">
-                          <a:solidFill>
-                            <a:srgbClr val="847C7A"/>
-                          </a:solidFill>
-                        </a:rPr>
-                        <a:t>8x · $400M</a:t>
-                      </a:r>
-                      <a:endParaRPr lang="en-US" sz="1200" dirty="0"/>
-                    </a:p>
-                  </a:txBody>
-                  <a:tcPr marL="36576" marR="36576" marT="36576" marB="36576" anchor="ctr">
-                    <a:lnL w="6350" cap="flat" cmpd="sng" algn="ctr">
-                      <a:solidFill>
-                        <a:srgbClr val="E3E0DC"/>
-                      </a:solidFill>
-                      <a:prstDash val="solid"/>
-                      <a:round/>
-                      <a:headEnd type="none" w="med" len="med"/>
-                      <a:tailEnd type="none" w="med" len="med"/>
-                    </a:lnL>
-                    <a:lnR w="6350" cap="flat" cmpd="sng" algn="ctr">
-                      <a:solidFill>
-                        <a:srgbClr val="E3E0DC"/>
-                      </a:solidFill>
-                      <a:prstDash val="solid"/>
-                      <a:round/>
-                      <a:headEnd type="none" w="med" len="med"/>
-                      <a:tailEnd type="none" w="med" len="med"/>
-                    </a:lnR>
-                    <a:lnT w="6350" cap="flat" cmpd="sng" algn="ctr">
-                      <a:solidFill>
-                        <a:srgbClr val="E3E0DC"/>
-                      </a:solidFill>
-                      <a:prstDash val="solid"/>
-                      <a:round/>
-                      <a:headEnd type="none" w="med" len="med"/>
-                      <a:tailEnd type="none" w="med" len="med"/>
-                    </a:lnT>
-                    <a:lnB w="6350" cap="flat" cmpd="sng" algn="ctr">
-                      <a:solidFill>
-                        <a:srgbClr val="E3E0DC"/>
-                      </a:solidFill>
-                      <a:prstDash val="solid"/>
-                      <a:round/>
-                      <a:headEnd type="none" w="med" len="med"/>
-                      <a:tailEnd type="none" w="med" len="med"/>
-                    </a:lnB>
-                  </a:tcPr>
-                </a:tc>
-                <a:tc>
-                  <a:txBody>
-                    <a:bodyPr/>
-                    <a:lstStyle/>
-                    <a:p>
-                      <a:pPr algn="ctr" indent="0" marL="0">
-                        <a:buNone/>
-                      </a:pPr>
-                      <a:r>
-                        <a:rPr lang="en-US" sz="1300" b="1" dirty="0">
-                          <a:solidFill>
-                            <a:srgbClr val="1A1A1A"/>
-                          </a:solidFill>
-                        </a:rPr>
-                        <a:t>$39</a:t>
-                      </a:r>
-                      <a:endParaRPr lang="en-US" sz="1200" dirty="0"/>
-                    </a:p>
-                    <a:p>
-                      <a:pPr algn="ctr" indent="0" marL="0">
-                        <a:buNone/>
-                      </a:pPr>
-                      <a:r>
-                        <a:rPr lang="en-US" sz="900" dirty="0">
-                          <a:solidFill>
-                            <a:srgbClr val="847C7A"/>
-                          </a:solidFill>
-                        </a:rPr>
-                        <a:t>9x · $455M</a:t>
-                      </a:r>
-                      <a:endParaRPr lang="en-US" sz="1200" dirty="0"/>
-                    </a:p>
-                  </a:txBody>
-                  <a:tcPr marL="36576" marR="36576" marT="36576" marB="36576" anchor="ctr">
-                    <a:lnL w="6350" cap="flat" cmpd="sng" algn="ctr">
-                      <a:solidFill>
-                        <a:srgbClr val="E3E0DC"/>
-                      </a:solidFill>
-                      <a:prstDash val="solid"/>
-                      <a:round/>
-                      <a:headEnd type="none" w="med" len="med"/>
-                      <a:tailEnd type="none" w="med" len="med"/>
-                    </a:lnL>
-                    <a:lnR w="6350" cap="flat" cmpd="sng" algn="ctr">
-                      <a:solidFill>
-                        <a:srgbClr val="E3E0DC"/>
-                      </a:solidFill>
-                      <a:prstDash val="solid"/>
-                      <a:round/>
-                      <a:headEnd type="none" w="med" len="med"/>
-                      <a:tailEnd type="none" w="med" len="med"/>
-                    </a:lnR>
-                    <a:lnT w="6350" cap="flat" cmpd="sng" algn="ctr">
-                      <a:solidFill>
-                        <a:srgbClr val="E3E0DC"/>
-                      </a:solidFill>
-                      <a:prstDash val="solid"/>
-                      <a:round/>
-                      <a:headEnd type="none" w="med" len="med"/>
-                      <a:tailEnd type="none" w="med" len="med"/>
-                    </a:lnT>
-                    <a:lnB w="6350" cap="flat" cmpd="sng" algn="ctr">
-                      <a:solidFill>
-                        <a:srgbClr val="E3E0DC"/>
-                      </a:solidFill>
-                      <a:prstDash val="solid"/>
-                      <a:round/>
-                      <a:headEnd type="none" w="med" len="med"/>
-                      <a:tailEnd type="none" w="med" len="med"/>
-                    </a:lnB>
-                  </a:tcPr>
-                </a:tc>
-                <a:tc>
-                  <a:txBody>
-                    <a:bodyPr/>
-                    <a:lstStyle/>
-                    <a:p>
-                      <a:pPr algn="ctr" indent="0" marL="0">
-                        <a:buNone/>
-                      </a:pPr>
-                      <a:r>
-                        <a:rPr lang="en-US" sz="1300" b="1" dirty="0">
-                          <a:solidFill>
-                            <a:srgbClr val="1A1A1A"/>
-                          </a:solidFill>
-                        </a:rPr>
-                        <a:t>$44</a:t>
-                      </a:r>
-                      <a:endParaRPr lang="en-US" sz="1200" dirty="0"/>
-                    </a:p>
-                    <a:p>
-                      <a:pPr algn="ctr" indent="0" marL="0">
-                        <a:buNone/>
-                      </a:pPr>
-                      <a:r>
-                        <a:rPr lang="en-US" sz="900" dirty="0">
-                          <a:solidFill>
-                            <a:srgbClr val="847C7A"/>
-                          </a:solidFill>
-                        </a:rPr>
-                        <a:t>10x · $455M</a:t>
-                      </a:r>
-                      <a:endParaRPr lang="en-US" sz="1200" dirty="0"/>
-                    </a:p>
-                  </a:txBody>
-                  <a:tcPr marL="36576" marR="36576" marT="36576" marB="36576" anchor="ctr">
-                    <a:lnL w="6350" cap="flat" cmpd="sng" algn="ctr">
-                      <a:solidFill>
-                        <a:srgbClr val="E3E0DC"/>
-                      </a:solidFill>
-                      <a:prstDash val="solid"/>
-                      <a:round/>
-                      <a:headEnd type="none" w="med" len="med"/>
-                      <a:tailEnd type="none" w="med" len="med"/>
-                    </a:lnL>
-                    <a:lnR w="6350" cap="flat" cmpd="sng" algn="ctr">
-                      <a:solidFill>
-                        <a:srgbClr val="E3E0DC"/>
-                      </a:solidFill>
-                      <a:prstDash val="solid"/>
-                      <a:round/>
-                      <a:headEnd type="none" w="med" len="med"/>
-                      <a:tailEnd type="none" w="med" len="med"/>
-                    </a:lnR>
-                    <a:lnT w="6350" cap="flat" cmpd="sng" algn="ctr">
-                      <a:solidFill>
-                        <a:srgbClr val="E3E0DC"/>
-                      </a:solidFill>
-                      <a:prstDash val="solid"/>
-                      <a:round/>
-                      <a:headEnd type="none" w="med" len="med"/>
-                      <a:tailEnd type="none" w="med" len="med"/>
-                    </a:lnT>
-                    <a:lnB w="6350" cap="flat" cmpd="sng" algn="ctr">
-                      <a:solidFill>
-                        <a:srgbClr val="E3E0DC"/>
-                      </a:solidFill>
-                      <a:prstDash val="solid"/>
-                      <a:round/>
-                      <a:headEnd type="none" w="med" len="med"/>
-                      <a:tailEnd type="none" w="med" len="med"/>
-                    </a:lnB>
-                  </a:tcPr>
-                </a:tc>
-              </a:tr>
-              <a:tr h="365760">
-                <a:tc>
-                  <a:txBody>
-                    <a:bodyPr/>
-                    <a:lstStyle/>
-                    <a:p>
-                      <a:pPr algn="l" indent="0" marL="0">
-                        <a:buNone/>
-                      </a:pPr>
-                      <a:r>
-                        <a:rPr lang="en-US" sz="1200" b="1" dirty="0">
-                          <a:solidFill>
-                            <a:srgbClr val="1A1A1A"/>
-                          </a:solidFill>
-                        </a:rPr>
-                        <a:t>Corporate</a:t>
-                      </a:r>
-                      <a:endParaRPr lang="en-US" sz="1200" dirty="0"/>
-                    </a:p>
-                  </a:txBody>
-                  <a:tcPr marL="36576" marR="36576" marT="36576" marB="36576" anchor="ctr">
-                    <a:lnL w="6350" cap="flat" cmpd="sng" algn="ctr">
-                      <a:solidFill>
-                        <a:srgbClr val="E3E0DC"/>
-                      </a:solidFill>
-                      <a:prstDash val="solid"/>
-                      <a:round/>
-                      <a:headEnd type="none" w="med" len="med"/>
-                      <a:tailEnd type="none" w="med" len="med"/>
-                    </a:lnL>
-                    <a:lnR w="6350" cap="flat" cmpd="sng" algn="ctr">
-                      <a:solidFill>
-                        <a:srgbClr val="E3E0DC"/>
-                      </a:solidFill>
-                      <a:prstDash val="solid"/>
-                      <a:round/>
-                      <a:headEnd type="none" w="med" len="med"/>
-                      <a:tailEnd type="none" w="med" len="med"/>
-                    </a:lnR>
-                    <a:lnT w="6350" cap="flat" cmpd="sng" algn="ctr">
-                      <a:solidFill>
-                        <a:srgbClr val="E3E0DC"/>
-                      </a:solidFill>
-                      <a:prstDash val="solid"/>
-                      <a:round/>
-                      <a:headEnd type="none" w="med" len="med"/>
-                      <a:tailEnd type="none" w="med" len="med"/>
-                    </a:lnT>
-                    <a:lnB w="6350" cap="flat" cmpd="sng" algn="ctr">
-                      <a:solidFill>
-                        <a:srgbClr val="E3E0DC"/>
-                      </a:solidFill>
-                      <a:prstDash val="solid"/>
-                      <a:round/>
-                      <a:headEnd type="none" w="med" len="med"/>
-                      <a:tailEnd type="none" w="med" len="med"/>
-                    </a:lnB>
-                  </a:tcPr>
-                </a:tc>
-                <a:tc>
-                  <a:txBody>
-                    <a:bodyPr/>
-                    <a:lstStyle/>
-                    <a:p>
-                      <a:pPr algn="ctr" indent="0" marL="0">
-                        <a:buNone/>
-                      </a:pPr>
-                      <a:r>
-                        <a:rPr lang="en-US" sz="1300" b="1" dirty="0">
-                          <a:solidFill>
-                            <a:srgbClr val="1A1A1A"/>
-                          </a:solidFill>
-                        </a:rPr>
-                        <a:t>($21)</a:t>
-                      </a:r>
-                      <a:endParaRPr lang="en-US" sz="1200" dirty="0"/>
-                    </a:p>
-                  </a:txBody>
-                  <a:tcPr marL="36576" marR="36576" marT="36576" marB="36576" anchor="ctr">
-                    <a:lnL w="6350" cap="flat" cmpd="sng" algn="ctr">
-                      <a:solidFill>
-                        <a:srgbClr val="E3E0DC"/>
-                      </a:solidFill>
-                      <a:prstDash val="solid"/>
-                      <a:round/>
-                      <a:headEnd type="none" w="med" len="med"/>
-                      <a:tailEnd type="none" w="med" len="med"/>
-                    </a:lnL>
-                    <a:lnR w="6350" cap="flat" cmpd="sng" algn="ctr">
-                      <a:solidFill>
-                        <a:srgbClr val="E3E0DC"/>
-                      </a:solidFill>
-                      <a:prstDash val="solid"/>
-                      <a:round/>
-                      <a:headEnd type="none" w="med" len="med"/>
-                      <a:tailEnd type="none" w="med" len="med"/>
-                    </a:lnR>
-                    <a:lnT w="6350" cap="flat" cmpd="sng" algn="ctr">
-                      <a:solidFill>
-                        <a:srgbClr val="E3E0DC"/>
-                      </a:solidFill>
-                      <a:prstDash val="solid"/>
-                      <a:round/>
-                      <a:headEnd type="none" w="med" len="med"/>
-                      <a:tailEnd type="none" w="med" len="med"/>
-                    </a:lnT>
-                    <a:lnB w="6350" cap="flat" cmpd="sng" algn="ctr">
-                      <a:solidFill>
-                        <a:srgbClr val="E3E0DC"/>
-                      </a:solidFill>
-                      <a:prstDash val="solid"/>
-                      <a:round/>
-                      <a:headEnd type="none" w="med" len="med"/>
-                      <a:tailEnd type="none" w="med" len="med"/>
-                    </a:lnB>
-                  </a:tcPr>
-                </a:tc>
-                <a:tc>
-                  <a:txBody>
-                    <a:bodyPr/>
-                    <a:lstStyle/>
-                    <a:p>
-                      <a:pPr algn="ctr" indent="0" marL="0">
-                        <a:buNone/>
-                      </a:pPr>
-                      <a:r>
-                        <a:rPr lang="en-US" sz="1300" b="1" dirty="0">
-                          <a:solidFill>
-                            <a:srgbClr val="1A1A1A"/>
-                          </a:solidFill>
-                        </a:rPr>
-                        <a:t>($28)</a:t>
-                      </a:r>
-                      <a:endParaRPr lang="en-US" sz="1200" dirty="0"/>
-                    </a:p>
-                  </a:txBody>
-                  <a:tcPr marL="36576" marR="36576" marT="36576" marB="36576" anchor="ctr">
-                    <a:lnL w="6350" cap="flat" cmpd="sng" algn="ctr">
-                      <a:solidFill>
-                        <a:srgbClr val="E3E0DC"/>
-                      </a:solidFill>
-                      <a:prstDash val="solid"/>
-                      <a:round/>
-                      <a:headEnd type="none" w="med" len="med"/>
-                      <a:tailEnd type="none" w="med" len="med"/>
-                    </a:lnL>
-                    <a:lnR w="6350" cap="flat" cmpd="sng" algn="ctr">
-                      <a:solidFill>
-                        <a:srgbClr val="E3E0DC"/>
-                      </a:solidFill>
-                      <a:prstDash val="solid"/>
-                      <a:round/>
-                      <a:headEnd type="none" w="med" len="med"/>
-                      <a:tailEnd type="none" w="med" len="med"/>
-                    </a:lnR>
-                    <a:lnT w="6350" cap="flat" cmpd="sng" algn="ctr">
-                      <a:solidFill>
-                        <a:srgbClr val="E3E0DC"/>
-                      </a:solidFill>
-                      <a:prstDash val="solid"/>
-                      <a:round/>
-                      <a:headEnd type="none" w="med" len="med"/>
-                      <a:tailEnd type="none" w="med" len="med"/>
-                    </a:lnT>
-                    <a:lnB w="6350" cap="flat" cmpd="sng" algn="ctr">
-                      <a:solidFill>
-                        <a:srgbClr val="E3E0DC"/>
-                      </a:solidFill>
-                      <a:prstDash val="solid"/>
-                      <a:round/>
-                      <a:headEnd type="none" w="med" len="med"/>
-                      <a:tailEnd type="none" w="med" len="med"/>
-                    </a:lnB>
-                  </a:tcPr>
-                </a:tc>
-                <a:tc>
-                  <a:txBody>
-                    <a:bodyPr/>
-                    <a:lstStyle/>
-                    <a:p>
-                      <a:pPr algn="ctr" indent="0" marL="0">
-                        <a:buNone/>
-                      </a:pPr>
-                      <a:r>
-                        <a:rPr lang="en-US" sz="1300" b="1" dirty="0">
-                          <a:solidFill>
-                            <a:srgbClr val="1A1A1A"/>
-                          </a:solidFill>
-                        </a:rPr>
-                        <a:t>($31)</a:t>
-                      </a:r>
-                      <a:endParaRPr lang="en-US" sz="1200" dirty="0"/>
-                    </a:p>
-                  </a:txBody>
-                  <a:tcPr marL="36576" marR="36576" marT="36576" marB="36576" anchor="ctr">
-                    <a:lnL w="6350" cap="flat" cmpd="sng" algn="ctr">
-                      <a:solidFill>
-                        <a:srgbClr val="E3E0DC"/>
-                      </a:solidFill>
-                      <a:prstDash val="solid"/>
-                      <a:round/>
-                      <a:headEnd type="none" w="med" len="med"/>
-                      <a:tailEnd type="none" w="med" len="med"/>
-                    </a:lnL>
-                    <a:lnR w="6350" cap="flat" cmpd="sng" algn="ctr">
-                      <a:solidFill>
-                        <a:srgbClr val="E3E0DC"/>
-                      </a:solidFill>
-                      <a:prstDash val="solid"/>
-                      <a:round/>
-                      <a:headEnd type="none" w="med" len="med"/>
-                      <a:tailEnd type="none" w="med" len="med"/>
-                    </a:lnR>
-                    <a:lnT w="6350" cap="flat" cmpd="sng" algn="ctr">
-                      <a:solidFill>
-                        <a:srgbClr val="E3E0DC"/>
-                      </a:solidFill>
-                      <a:prstDash val="solid"/>
-                      <a:round/>
-                      <a:headEnd type="none" w="med" len="med"/>
-                      <a:tailEnd type="none" w="med" len="med"/>
-                    </a:lnT>
-                    <a:lnB w="6350" cap="flat" cmpd="sng" algn="ctr">
-                      <a:solidFill>
-                        <a:srgbClr val="E3E0DC"/>
-                      </a:solidFill>
-                      <a:prstDash val="solid"/>
-                      <a:round/>
-                      <a:headEnd type="none" w="med" len="med"/>
-                      <a:tailEnd type="none" w="med" len="med"/>
-                    </a:lnB>
-                  </a:tcPr>
-                </a:tc>
-              </a:tr>
-              <a:tr h="365760">
-                <a:tc>
-                  <a:txBody>
-                    <a:bodyPr/>
-                    <a:lstStyle/>
-                    <a:p>
-                      <a:pPr algn="l" indent="0" marL="0">
-                        <a:buNone/>
-                      </a:pPr>
-                      <a:r>
-                        <a:rPr lang="en-US" sz="1200" b="1" dirty="0">
-                          <a:solidFill>
-                            <a:srgbClr val="1A1A1A"/>
-                          </a:solidFill>
-                        </a:rPr>
-                        <a:t>Net debt + preferred</a:t>
-                      </a:r>
-                      <a:endParaRPr lang="en-US" sz="1200" dirty="0"/>
-                    </a:p>
-                  </a:txBody>
-                  <a:tcPr marL="36576" marR="36576" marT="36576" marB="36576" anchor="ctr">
-                    <a:lnL w="6350" cap="flat" cmpd="sng" algn="ctr">
-                      <a:solidFill>
-                        <a:srgbClr val="E3E0DC"/>
-                      </a:solidFill>
-                      <a:prstDash val="solid"/>
-                      <a:round/>
-                      <a:headEnd type="none" w="med" len="med"/>
-                      <a:tailEnd type="none" w="med" len="med"/>
-                    </a:lnL>
-                    <a:lnR w="6350" cap="flat" cmpd="sng" algn="ctr">
-                      <a:solidFill>
-                        <a:srgbClr val="E3E0DC"/>
-                      </a:solidFill>
-                      <a:prstDash val="solid"/>
-                      <a:round/>
-                      <a:headEnd type="none" w="med" len="med"/>
-                      <a:tailEnd type="none" w="med" len="med"/>
-                    </a:lnR>
-                    <a:lnT w="6350" cap="flat" cmpd="sng" algn="ctr">
-                      <a:solidFill>
-                        <a:srgbClr val="E3E0DC"/>
-                      </a:solidFill>
-                      <a:prstDash val="solid"/>
-                      <a:round/>
-                      <a:headEnd type="none" w="med" len="med"/>
-                      <a:tailEnd type="none" w="med" len="med"/>
-                    </a:lnT>
-                    <a:lnB w="6350" cap="flat" cmpd="sng" algn="ctr">
-                      <a:solidFill>
-                        <a:srgbClr val="E3E0DC"/>
-                      </a:solidFill>
-                      <a:prstDash val="solid"/>
-                      <a:round/>
-                      <a:headEnd type="none" w="med" len="med"/>
-                      <a:tailEnd type="none" w="med" len="med"/>
-                    </a:lnB>
-                  </a:tcPr>
-                </a:tc>
-                <a:tc>
-                  <a:txBody>
-                    <a:bodyPr/>
-                    <a:lstStyle/>
-                    <a:p>
-                      <a:pPr algn="ctr" indent="0" marL="0">
-                        <a:buNone/>
-                      </a:pPr>
-                      <a:r>
-                        <a:rPr lang="en-US" sz="1300" b="1" dirty="0">
-                          <a:solidFill>
-                            <a:srgbClr val="1A1A1A"/>
-                          </a:solidFill>
-                        </a:rPr>
-                        <a:t>($26)</a:t>
-                      </a:r>
-                      <a:endParaRPr lang="en-US" sz="1200" dirty="0"/>
-                    </a:p>
-                  </a:txBody>
-                  <a:tcPr marL="36576" marR="36576" marT="36576" marB="36576" anchor="ctr">
-                    <a:lnL w="6350" cap="flat" cmpd="sng" algn="ctr">
-                      <a:solidFill>
-                        <a:srgbClr val="E3E0DC"/>
-                      </a:solidFill>
-                      <a:prstDash val="solid"/>
-                      <a:round/>
-                      <a:headEnd type="none" w="med" len="med"/>
-                      <a:tailEnd type="none" w="med" len="med"/>
-                    </a:lnL>
-                    <a:lnR w="6350" cap="flat" cmpd="sng" algn="ctr">
-                      <a:solidFill>
-                        <a:srgbClr val="E3E0DC"/>
-                      </a:solidFill>
-                      <a:prstDash val="solid"/>
-                      <a:round/>
-                      <a:headEnd type="none" w="med" len="med"/>
-                      <a:tailEnd type="none" w="med" len="med"/>
-                    </a:lnR>
-                    <a:lnT w="6350" cap="flat" cmpd="sng" algn="ctr">
-                      <a:solidFill>
-                        <a:srgbClr val="E3E0DC"/>
-                      </a:solidFill>
-                      <a:prstDash val="solid"/>
-                      <a:round/>
-                      <a:headEnd type="none" w="med" len="med"/>
-                      <a:tailEnd type="none" w="med" len="med"/>
-                    </a:lnT>
-                    <a:lnB w="6350" cap="flat" cmpd="sng" algn="ctr">
-                      <a:solidFill>
-                        <a:srgbClr val="E3E0DC"/>
-                      </a:solidFill>
-                      <a:prstDash val="solid"/>
-                      <a:round/>
-                      <a:headEnd type="none" w="med" len="med"/>
-                      <a:tailEnd type="none" w="med" len="med"/>
-                    </a:lnB>
-                  </a:tcPr>
-                </a:tc>
-                <a:tc>
-                  <a:txBody>
-                    <a:bodyPr/>
-                    <a:lstStyle/>
-                    <a:p>
-                      <a:pPr algn="ctr" indent="0" marL="0">
-                        <a:buNone/>
-                      </a:pPr>
-                      <a:r>
-                        <a:rPr lang="en-US" sz="1300" b="1" dirty="0">
-                          <a:solidFill>
-                            <a:srgbClr val="1A1A1A"/>
-                          </a:solidFill>
-                        </a:rPr>
-                        <a:t>($24)</a:t>
-                      </a:r>
-                      <a:endParaRPr lang="en-US" sz="1200" dirty="0"/>
-                    </a:p>
-                  </a:txBody>
-                  <a:tcPr marL="36576" marR="36576" marT="36576" marB="36576" anchor="ctr">
-                    <a:lnL w="6350" cap="flat" cmpd="sng" algn="ctr">
-                      <a:solidFill>
-                        <a:srgbClr val="E3E0DC"/>
-                      </a:solidFill>
-                      <a:prstDash val="solid"/>
-                      <a:round/>
-                      <a:headEnd type="none" w="med" len="med"/>
-                      <a:tailEnd type="none" w="med" len="med"/>
-                    </a:lnL>
-                    <a:lnR w="6350" cap="flat" cmpd="sng" algn="ctr">
-                      <a:solidFill>
-                        <a:srgbClr val="E3E0DC"/>
-                      </a:solidFill>
-                      <a:prstDash val="solid"/>
-                      <a:round/>
-                      <a:headEnd type="none" w="med" len="med"/>
-                      <a:tailEnd type="none" w="med" len="med"/>
-                    </a:lnR>
-                    <a:lnT w="6350" cap="flat" cmpd="sng" algn="ctr">
-                      <a:solidFill>
-                        <a:srgbClr val="E3E0DC"/>
-                      </a:solidFill>
-                      <a:prstDash val="solid"/>
-                      <a:round/>
-                      <a:headEnd type="none" w="med" len="med"/>
-                      <a:tailEnd type="none" w="med" len="med"/>
-                    </a:lnT>
-                    <a:lnB w="6350" cap="flat" cmpd="sng" algn="ctr">
-                      <a:solidFill>
-                        <a:srgbClr val="E3E0DC"/>
-                      </a:solidFill>
-                      <a:prstDash val="solid"/>
-                      <a:round/>
-                      <a:headEnd type="none" w="med" len="med"/>
-                      <a:tailEnd type="none" w="med" len="med"/>
-                    </a:lnB>
-                  </a:tcPr>
-                </a:tc>
-                <a:tc>
-                  <a:txBody>
-                    <a:bodyPr/>
-                    <a:lstStyle/>
-                    <a:p>
-                      <a:pPr algn="ctr" indent="0" marL="0">
-                        <a:buNone/>
-                      </a:pPr>
-                      <a:r>
-                        <a:rPr lang="en-US" sz="1300" b="1" dirty="0">
-                          <a:solidFill>
-                            <a:srgbClr val="1A1A1A"/>
-                          </a:solidFill>
-                        </a:rPr>
-                        <a:t>($23)</a:t>
-                      </a:r>
-                      <a:endParaRPr lang="en-US" sz="1200" dirty="0"/>
-                    </a:p>
-                  </a:txBody>
-                  <a:tcPr marL="36576" marR="36576" marT="36576" marB="36576" anchor="ctr">
-                    <a:lnL w="6350" cap="flat" cmpd="sng" algn="ctr">
-                      <a:solidFill>
-                        <a:srgbClr val="E3E0DC"/>
-                      </a:solidFill>
-                      <a:prstDash val="solid"/>
-                      <a:round/>
-                      <a:headEnd type="none" w="med" len="med"/>
-                      <a:tailEnd type="none" w="med" len="med"/>
-                    </a:lnL>
-                    <a:lnR w="6350" cap="flat" cmpd="sng" algn="ctr">
-                      <a:solidFill>
-                        <a:srgbClr val="E3E0DC"/>
-                      </a:solidFill>
-                      <a:prstDash val="solid"/>
-                      <a:round/>
-                      <a:headEnd type="none" w="med" len="med"/>
-                      <a:tailEnd type="none" w="med" len="med"/>
-                    </a:lnR>
-                    <a:lnT w="6350" cap="flat" cmpd="sng" algn="ctr">
-                      <a:solidFill>
-                        <a:srgbClr val="E3E0DC"/>
-                      </a:solidFill>
-                      <a:prstDash val="solid"/>
-                      <a:round/>
-                      <a:headEnd type="none" w="med" len="med"/>
-                      <a:tailEnd type="none" w="med" len="med"/>
-                    </a:lnT>
-                    <a:lnB w="6350" cap="flat" cmpd="sng" algn="ctr">
-                      <a:solidFill>
-                        <a:srgbClr val="E3E0DC"/>
-                      </a:solidFill>
-                      <a:prstDash val="solid"/>
-                      <a:round/>
-                      <a:headEnd type="none" w="med" len="med"/>
-                      <a:tailEnd type="none" w="med" len="med"/>
-                    </a:lnB>
-                  </a:tcPr>
-                </a:tc>
-              </a:tr>
-              <a:tr h="411480">
-                <a:tc>
-                  <a:txBody>
-                    <a:bodyPr/>
-                    <a:lstStyle/>
-                    <a:p>
-                      <a:pPr algn="l" indent="0" marL="0">
-                        <a:buNone/>
-                      </a:pPr>
-                      <a:r>
-                        <a:rPr lang="en-US" sz="1300" b="1" dirty="0">
-                          <a:solidFill>
-                            <a:srgbClr val="1A1A1A"/>
-                          </a:solidFill>
-                        </a:rPr>
-                        <a:t>Price per share</a:t>
-                      </a:r>
-                      <a:endParaRPr lang="en-US" sz="1300" dirty="0"/>
-                    </a:p>
-                  </a:txBody>
-                  <a:tcPr marL="36576" marR="36576" marT="36576" marB="36576" anchor="ctr">
-                    <a:lnL w="6350" cap="flat" cmpd="sng" algn="ctr">
-                      <a:solidFill>
-                        <a:srgbClr val="E3E0DC"/>
-                      </a:solidFill>
-                      <a:prstDash val="solid"/>
-                      <a:round/>
-                      <a:headEnd type="none" w="med" len="med"/>
-                      <a:tailEnd type="none" w="med" len="med"/>
-                    </a:lnL>
-                    <a:lnR w="6350" cap="flat" cmpd="sng" algn="ctr">
-                      <a:solidFill>
-                        <a:srgbClr val="E3E0DC"/>
-                      </a:solidFill>
-                      <a:prstDash val="solid"/>
-                      <a:round/>
-                      <a:headEnd type="none" w="med" len="med"/>
-                      <a:tailEnd type="none" w="med" len="med"/>
-                    </a:lnR>
-                    <a:lnT w="6350" cap="flat" cmpd="sng" algn="ctr">
-                      <a:solidFill>
-                        <a:srgbClr val="E3E0DC"/>
-                      </a:solidFill>
-                      <a:prstDash val="solid"/>
-                      <a:round/>
-                      <a:headEnd type="none" w="med" len="med"/>
-                      <a:tailEnd type="none" w="med" len="med"/>
-                    </a:lnT>
-                    <a:lnB w="6350" cap="flat" cmpd="sng" algn="ctr">
-                      <a:solidFill>
-                        <a:srgbClr val="E3E0DC"/>
-                      </a:solidFill>
-                      <a:prstDash val="solid"/>
-                      <a:round/>
-                      <a:headEnd type="none" w="med" len="med"/>
-                      <a:tailEnd type="none" w="med" len="med"/>
-                    </a:lnB>
-                  </a:tcPr>
-                </a:tc>
-                <a:tc>
-                  <a:txBody>
-                    <a:bodyPr/>
-                    <a:lstStyle/>
-                    <a:p>
-                      <a:pPr algn="ctr" indent="0" marL="0">
-                        <a:buNone/>
-                      </a:pPr>
-                      <a:r>
-                        <a:rPr lang="en-US" sz="1300" b="1" dirty="0">
-                          <a:solidFill>
-                            <a:srgbClr val="1A1A1A"/>
-                          </a:solidFill>
-                        </a:rPr>
-                        <a:t>$126</a:t>
-                      </a:r>
-                      <a:endParaRPr lang="en-US" sz="1200" dirty="0"/>
-                    </a:p>
-                  </a:txBody>
-                  <a:tcPr marL="36576" marR="36576" marT="36576" marB="36576" anchor="ctr">
-                    <a:lnL w="6350" cap="flat" cmpd="sng" algn="ctr">
-                      <a:solidFill>
-                        <a:srgbClr val="E3E0DC"/>
-                      </a:solidFill>
-                      <a:prstDash val="solid"/>
-                      <a:round/>
-                      <a:headEnd type="none" w="med" len="med"/>
-                      <a:tailEnd type="none" w="med" len="med"/>
-                    </a:lnL>
-                    <a:lnR w="6350" cap="flat" cmpd="sng" algn="ctr">
-                      <a:solidFill>
-                        <a:srgbClr val="E3E0DC"/>
-                      </a:solidFill>
-                      <a:prstDash val="solid"/>
-                      <a:round/>
-                      <a:headEnd type="none" w="med" len="med"/>
-                      <a:tailEnd type="none" w="med" len="med"/>
-                    </a:lnR>
-                    <a:lnT w="6350" cap="flat" cmpd="sng" algn="ctr">
-                      <a:solidFill>
-                        <a:srgbClr val="E3E0DC"/>
-                      </a:solidFill>
-                      <a:prstDash val="solid"/>
-                      <a:round/>
-                      <a:headEnd type="none" w="med" len="med"/>
-                      <a:tailEnd type="none" w="med" len="med"/>
-                    </a:lnT>
-                    <a:lnB w="6350" cap="flat" cmpd="sng" algn="ctr">
-                      <a:solidFill>
-                        <a:srgbClr val="E3E0DC"/>
-                      </a:solidFill>
-                      <a:prstDash val="solid"/>
-                      <a:round/>
-                      <a:headEnd type="none" w="med" len="med"/>
-                      <a:tailEnd type="none" w="med" len="med"/>
-                    </a:lnB>
-                    <a:solidFill>
-                      <a:srgbClr val="EFEDEA"/>
-                    </a:solidFill>
-                  </a:tcPr>
-                </a:tc>
-                <a:tc>
-                  <a:txBody>
-                    <a:bodyPr/>
-                    <a:lstStyle/>
-                    <a:p>
-                      <a:pPr algn="ctr" indent="0" marL="0">
-                        <a:buNone/>
-                      </a:pPr>
-                      <a:r>
-                        <a:rPr lang="en-US" sz="1300" b="1" dirty="0">
-                          <a:solidFill>
-                            <a:srgbClr val="1A1A1A"/>
-                          </a:solidFill>
-                        </a:rPr>
-                        <a:t>$277</a:t>
-                      </a:r>
-                      <a:endParaRPr lang="en-US" sz="1200" dirty="0"/>
-                    </a:p>
-                  </a:txBody>
-                  <a:tcPr marL="36576" marR="36576" marT="36576" marB="36576" anchor="ctr">
-                    <a:lnL w="6350" cap="flat" cmpd="sng" algn="ctr">
-                      <a:solidFill>
-                        <a:srgbClr val="E3E0DC"/>
-                      </a:solidFill>
-                      <a:prstDash val="solid"/>
-                      <a:round/>
-                      <a:headEnd type="none" w="med" len="med"/>
-                      <a:tailEnd type="none" w="med" len="med"/>
-                    </a:lnL>
-                    <a:lnR w="6350" cap="flat" cmpd="sng" algn="ctr">
-                      <a:solidFill>
-                        <a:srgbClr val="E3E0DC"/>
-                      </a:solidFill>
-                      <a:prstDash val="solid"/>
-                      <a:round/>
-                      <a:headEnd type="none" w="med" len="med"/>
-                      <a:tailEnd type="none" w="med" len="med"/>
-                    </a:lnR>
-                    <a:lnT w="6350" cap="flat" cmpd="sng" algn="ctr">
-                      <a:solidFill>
-                        <a:srgbClr val="E3E0DC"/>
-                      </a:solidFill>
-                      <a:prstDash val="solid"/>
-                      <a:round/>
-                      <a:headEnd type="none" w="med" len="med"/>
-                      <a:tailEnd type="none" w="med" len="med"/>
-                    </a:lnT>
-                    <a:lnB w="6350" cap="flat" cmpd="sng" algn="ctr">
-                      <a:solidFill>
-                        <a:srgbClr val="E3E0DC"/>
-                      </a:solidFill>
-                      <a:prstDash val="solid"/>
-                      <a:round/>
-                      <a:headEnd type="none" w="med" len="med"/>
-                      <a:tailEnd type="none" w="med" len="med"/>
-                    </a:lnB>
-                    <a:solidFill>
-                      <a:srgbClr val="EFEDEA"/>
-                    </a:solidFill>
-                  </a:tcPr>
-                </a:tc>
-                <a:tc>
-                  <a:txBody>
-                    <a:bodyPr/>
-                    <a:lstStyle/>
-                    <a:p>
-                      <a:pPr algn="ctr" indent="0" marL="0">
-                        <a:buNone/>
-                      </a:pPr>
-                      <a:r>
-                        <a:rPr lang="en-US" sz="1300" b="1" dirty="0">
-                          <a:solidFill>
-                            <a:srgbClr val="1A1A1A"/>
-                          </a:solidFill>
-                        </a:rPr>
-                        <a:t>$352</a:t>
-                      </a:r>
-                      <a:endParaRPr lang="en-US" sz="1200" dirty="0"/>
-                    </a:p>
-                  </a:txBody>
-                  <a:tcPr marL="36576" marR="36576" marT="36576" marB="36576" anchor="ctr">
-                    <a:lnL w="6350" cap="flat" cmpd="sng" algn="ctr">
-                      <a:solidFill>
-                        <a:srgbClr val="E3E0DC"/>
-                      </a:solidFill>
-                      <a:prstDash val="solid"/>
-                      <a:round/>
-                      <a:headEnd type="none" w="med" len="med"/>
-                      <a:tailEnd type="none" w="med" len="med"/>
-                    </a:lnL>
-                    <a:lnR w="6350" cap="flat" cmpd="sng" algn="ctr">
-                      <a:solidFill>
-                        <a:srgbClr val="E3E0DC"/>
-                      </a:solidFill>
-                      <a:prstDash val="solid"/>
-                      <a:round/>
-                      <a:headEnd type="none" w="med" len="med"/>
-                      <a:tailEnd type="none" w="med" len="med"/>
-                    </a:lnR>
-                    <a:lnT w="6350" cap="flat" cmpd="sng" algn="ctr">
-                      <a:solidFill>
-                        <a:srgbClr val="E3E0DC"/>
-                      </a:solidFill>
-                      <a:prstDash val="solid"/>
-                      <a:round/>
-                      <a:headEnd type="none" w="med" len="med"/>
-                      <a:tailEnd type="none" w="med" len="med"/>
-                    </a:lnT>
-                    <a:lnB w="6350" cap="flat" cmpd="sng" algn="ctr">
-                      <a:solidFill>
-                        <a:srgbClr val="E3E0DC"/>
-                      </a:solidFill>
-                      <a:prstDash val="solid"/>
-                      <a:round/>
-                      <a:headEnd type="none" w="med" len="med"/>
-                      <a:tailEnd type="none" w="med" len="med"/>
-                    </a:lnB>
-                    <a:solidFill>
-                      <a:srgbClr val="EFEDEA"/>
-                    </a:solidFill>
-                  </a:tcPr>
-                </a:tc>
-              </a:tr>
-              <a:tr h="365760">
-                <a:tc>
-                  <a:txBody>
-                    <a:bodyPr/>
-                    <a:lstStyle/>
-                    <a:p>
-                      <a:pPr algn="l" indent="0" marL="0">
-                        <a:buNone/>
-                      </a:pPr>
-                      <a:r>
-                        <a:rPr lang="en-US" sz="1200" i="1" dirty="0">
-                          <a:solidFill>
-                            <a:srgbClr val="1A1A1A"/>
-                          </a:solidFill>
-                        </a:rPr>
-                        <a:t>vs. $167 today</a:t>
-                      </a:r>
-                      <a:endParaRPr lang="en-US" sz="1200" dirty="0"/>
-                    </a:p>
-                  </a:txBody>
-                  <a:tcPr marL="36576" marR="36576" marT="36576" marB="36576" anchor="ctr">
-                    <a:lnL w="6350" cap="flat" cmpd="sng" algn="ctr">
-                      <a:solidFill>
-                        <a:srgbClr val="E3E0DC"/>
-                      </a:solidFill>
-                      <a:prstDash val="solid"/>
-                      <a:round/>
-                      <a:headEnd type="none" w="med" len="med"/>
-                      <a:tailEnd type="none" w="med" len="med"/>
-                    </a:lnL>
-                    <a:lnR w="6350" cap="flat" cmpd="sng" algn="ctr">
-                      <a:solidFill>
-                        <a:srgbClr val="E3E0DC"/>
-                      </a:solidFill>
-                      <a:prstDash val="solid"/>
-                      <a:round/>
-                      <a:headEnd type="none" w="med" len="med"/>
-                      <a:tailEnd type="none" w="med" len="med"/>
-                    </a:lnR>
-                    <a:lnT w="6350" cap="flat" cmpd="sng" algn="ctr">
-                      <a:solidFill>
-                        <a:srgbClr val="E3E0DC"/>
-                      </a:solidFill>
-                      <a:prstDash val="solid"/>
-                      <a:round/>
-                      <a:headEnd type="none" w="med" len="med"/>
-                      <a:tailEnd type="none" w="med" len="med"/>
-                    </a:lnT>
-                    <a:lnB w="6350" cap="flat" cmpd="sng" algn="ctr">
-                      <a:solidFill>
-                        <a:srgbClr val="E3E0DC"/>
-                      </a:solidFill>
-                      <a:prstDash val="solid"/>
-                      <a:round/>
-                      <a:headEnd type="none" w="med" len="med"/>
-                      <a:tailEnd type="none" w="med" len="med"/>
-                    </a:lnB>
-                  </a:tcPr>
-                </a:tc>
-                <a:tc>
-                  <a:txBody>
-                    <a:bodyPr/>
-                    <a:lstStyle/>
-                    <a:p>
-                      <a:pPr algn="ctr" indent="0" marL="0">
-                        <a:buNone/>
-                      </a:pPr>
-                      <a:r>
-                        <a:rPr lang="en-US" sz="1300" b="1" dirty="0">
-                          <a:solidFill>
-                            <a:srgbClr val="847C7A"/>
-                          </a:solidFill>
-                        </a:rPr>
-                        <a:t>–24%</a:t>
-                      </a:r>
-                      <a:endParaRPr lang="en-US" sz="1200" dirty="0"/>
-                    </a:p>
-                  </a:txBody>
-                  <a:tcPr marL="36576" marR="36576" marT="36576" marB="36576" anchor="ctr">
-                    <a:lnL w="6350" cap="flat" cmpd="sng" algn="ctr">
-                      <a:solidFill>
-                        <a:srgbClr val="E3E0DC"/>
-                      </a:solidFill>
-                      <a:prstDash val="solid"/>
-                      <a:round/>
-                      <a:headEnd type="none" w="med" len="med"/>
-                      <a:tailEnd type="none" w="med" len="med"/>
-                    </a:lnL>
-                    <a:lnR w="6350" cap="flat" cmpd="sng" algn="ctr">
-                      <a:solidFill>
-                        <a:srgbClr val="E3E0DC"/>
-                      </a:solidFill>
-                      <a:prstDash val="solid"/>
-                      <a:round/>
-                      <a:headEnd type="none" w="med" len="med"/>
-                      <a:tailEnd type="none" w="med" len="med"/>
-                    </a:lnR>
-                    <a:lnT w="6350" cap="flat" cmpd="sng" algn="ctr">
-                      <a:solidFill>
-                        <a:srgbClr val="E3E0DC"/>
-                      </a:solidFill>
-                      <a:prstDash val="solid"/>
-                      <a:round/>
-                      <a:headEnd type="none" w="med" len="med"/>
-                      <a:tailEnd type="none" w="med" len="med"/>
-                    </a:lnT>
-                    <a:lnB w="6350" cap="flat" cmpd="sng" algn="ctr">
-                      <a:solidFill>
-                        <a:srgbClr val="E3E0DC"/>
-                      </a:solidFill>
-                      <a:prstDash val="solid"/>
-                      <a:round/>
-                      <a:headEnd type="none" w="med" len="med"/>
-                      <a:tailEnd type="none" w="med" len="med"/>
-                    </a:lnB>
-                  </a:tcPr>
-                </a:tc>
-                <a:tc>
-                  <a:txBody>
-                    <a:bodyPr/>
-                    <a:lstStyle/>
-                    <a:p>
-                      <a:pPr algn="ctr" indent="0" marL="0">
-                        <a:buNone/>
-                      </a:pPr>
-                      <a:r>
-                        <a:rPr lang="en-US" sz="1300" b="1" dirty="0">
-                          <a:solidFill>
-                            <a:srgbClr val="0A1C58"/>
-                          </a:solidFill>
-                        </a:rPr>
-                        <a:t>+66%</a:t>
-                      </a:r>
-                      <a:endParaRPr lang="en-US" sz="1200" dirty="0"/>
-                    </a:p>
-                  </a:txBody>
-                  <a:tcPr marL="36576" marR="36576" marT="36576" marB="36576" anchor="ctr">
-                    <a:lnL w="6350" cap="flat" cmpd="sng" algn="ctr">
-                      <a:solidFill>
-                        <a:srgbClr val="E3E0DC"/>
-                      </a:solidFill>
-                      <a:prstDash val="solid"/>
-                      <a:round/>
-                      <a:headEnd type="none" w="med" len="med"/>
-                      <a:tailEnd type="none" w="med" len="med"/>
-                    </a:lnL>
-                    <a:lnR w="6350" cap="flat" cmpd="sng" algn="ctr">
-                      <a:solidFill>
-                        <a:srgbClr val="E3E0DC"/>
-                      </a:solidFill>
-                      <a:prstDash val="solid"/>
-                      <a:round/>
-                      <a:headEnd type="none" w="med" len="med"/>
-                      <a:tailEnd type="none" w="med" len="med"/>
-                    </a:lnR>
-                    <a:lnT w="6350" cap="flat" cmpd="sng" algn="ctr">
-                      <a:solidFill>
-                        <a:srgbClr val="E3E0DC"/>
-                      </a:solidFill>
-                      <a:prstDash val="solid"/>
-                      <a:round/>
-                      <a:headEnd type="none" w="med" len="med"/>
-                      <a:tailEnd type="none" w="med" len="med"/>
-                    </a:lnT>
-                    <a:lnB w="6350" cap="flat" cmpd="sng" algn="ctr">
-                      <a:solidFill>
-                        <a:srgbClr val="E3E0DC"/>
-                      </a:solidFill>
-                      <a:prstDash val="solid"/>
-                      <a:round/>
-                      <a:headEnd type="none" w="med" len="med"/>
-                      <a:tailEnd type="none" w="med" len="med"/>
-                    </a:lnB>
-                  </a:tcPr>
-                </a:tc>
-                <a:tc>
-                  <a:txBody>
-                    <a:bodyPr/>
-                    <a:lstStyle/>
-                    <a:p>
-                      <a:pPr algn="ctr" indent="0" marL="0">
-                        <a:buNone/>
-                      </a:pPr>
-                      <a:r>
-                        <a:rPr lang="en-US" sz="1300" b="1" dirty="0">
-                          <a:solidFill>
-                            <a:srgbClr val="0A1C58"/>
-                          </a:solidFill>
-                        </a:rPr>
-                        <a:t>+111%</a:t>
-                      </a:r>
-                      <a:endParaRPr lang="en-US" sz="1200" dirty="0"/>
-                    </a:p>
-                  </a:txBody>
-                  <a:tcPr marL="36576" marR="36576" marT="36576" marB="36576" anchor="ctr">
-                    <a:lnL w="6350" cap="flat" cmpd="sng" algn="ctr">
-                      <a:solidFill>
-                        <a:srgbClr val="E3E0DC"/>
-                      </a:solidFill>
-                      <a:prstDash val="solid"/>
-                      <a:round/>
-                      <a:headEnd type="none" w="med" len="med"/>
-                      <a:tailEnd type="none" w="med" len="med"/>
-                    </a:lnL>
-                    <a:lnR w="6350" cap="flat" cmpd="sng" algn="ctr">
-                      <a:solidFill>
-                        <a:srgbClr val="E3E0DC"/>
-                      </a:solidFill>
-                      <a:prstDash val="solid"/>
-                      <a:round/>
-                      <a:headEnd type="none" w="med" len="med"/>
-                      <a:tailEnd type="none" w="med" len="med"/>
-                    </a:lnR>
-                    <a:lnT w="6350" cap="flat" cmpd="sng" algn="ctr">
-                      <a:solidFill>
-                        <a:srgbClr val="E3E0DC"/>
-                      </a:solidFill>
-                      <a:prstDash val="solid"/>
-                      <a:round/>
-                      <a:headEnd type="none" w="med" len="med"/>
-                      <a:tailEnd type="none" w="med" len="med"/>
-                    </a:lnT>
-                    <a:lnB w="6350" cap="flat" cmpd="sng" algn="ctr">
-                      <a:solidFill>
-                        <a:srgbClr val="E3E0DC"/>
-                      </a:solidFill>
-                      <a:prstDash val="solid"/>
-                      <a:round/>
-                      <a:headEnd type="none" w="med" len="med"/>
-                      <a:tailEnd type="none" w="med" len="med"/>
-                    </a:lnB>
-                  </a:tcPr>
-                </a:tc>
-              </a:tr>
-            </a:tbl>
-          </a:graphicData>
-        </a:graphic>
-      </p:graphicFrame>
-      <p:sp>
-        <p:nvSpPr>
-          <p:cNvPr id="5" name="Scenario chart header"/>
-          <p:cNvSpPr txBox="1"/>
-          <p:nvPr/>
-        </p:nvSpPr>
-        <p:spPr>
-          <a:xfrm>
-            <a:off x="5623560" y="1554480"/>
-            <a:ext cx="3200400" cy="365760"/>
-          </a:xfrm>
-          <a:prstGeom prst="rect">
-            <a:avLst/>
-          </a:prstGeom>
-          <a:noFill/>
-          <a:ln/>
-        </p:spPr>
-        <p:txBody>
-          <a:bodyPr wrap="square" lIns="0" tIns="0" rIns="0" bIns="0" rtlCol="0" anchor="b"/>
-          <a:lstStyle/>
-          <a:p>
-            <a:pPr algn="ctr" indent="0" marL="0">
-              <a:buNone/>
-            </a:pPr>
-            <a:r>
-              <a:rPr lang="en-US" sz="1600" b="1" dirty="0">
-                <a:solidFill>
-                  <a:srgbClr val="1A1A1A"/>
-                </a:solidFill>
-              </a:rPr>
-              <a:t>Price per Share by Scenario</a:t>
-            </a:r>
-            <a:endParaRPr lang="en-US" sz="1600" dirty="0"/>
-          </a:p>
-        </p:txBody>
-      </p:sp>
-      <p:sp>
-        <p:nvSpPr>
-          <p:cNvPr id="6" name="Scenario chart header rule"/>
-          <p:cNvSpPr/>
-          <p:nvPr/>
-        </p:nvSpPr>
-        <p:spPr>
-          <a:xfrm>
-            <a:off x="5623560" y="1975104"/>
-            <a:ext cx="3200400" cy="0"/>
-          </a:xfrm>
-          <a:prstGeom prst="line">
-            <a:avLst/>
-          </a:prstGeom>
-          <a:noFill/>
-          <a:ln w="12700">
-            <a:solidFill>
-              <a:srgbClr val="1A1A1A"/>
-            </a:solidFill>
-            <a:prstDash val="solid"/>
-          </a:ln>
-        </p:spPr>
-      </p:sp>
-      <p:graphicFrame>
-        <p:nvGraphicFramePr>
-          <p:cNvPr id="7" name="Scenario chart" descr=""/>
-          <p:cNvGraphicFramePr/>
-          <p:nvPr/>
-        </p:nvGraphicFramePr>
-        <p:xfrm>
-          <a:off x="5623560" y="2103120"/>
-          <a:ext cx="3200400" cy="2514600"/>
-        </p:xfrm>
-        <a:graphic xmlns:a="http://schemas.openxmlformats.org/drawingml/2006/main">
-          <a:graphicData uri="http://schemas.openxmlformats.org/drawingml/2006/chart">
-            <c:chart xmlns:c="http://schemas.openxmlformats.org/drawingml/2006/chart" r:id="rId1"/>
-          </a:graphicData>
-        </a:graphic>
-      </p:graphicFrame>
-      <p:sp>
-        <p:nvSpPr>
-          <p:cNvPr id="8" name="Reward risk callout"/>
-          <p:cNvSpPr/>
-          <p:nvPr/>
-        </p:nvSpPr>
-        <p:spPr>
-          <a:xfrm>
-            <a:off x="5715000" y="2103120"/>
-            <a:ext cx="1051560" cy="1051560"/>
+          <p:nvPr/>
+        </p:nvSpPr>
+        <p:spPr>
+          <a:xfrm>
+            <a:off x="1051560" y="1170432"/>
+            <a:ext cx="457200" cy="457200"/>
           </a:xfrm>
           <a:prstGeom prst="ellipse">
             <a:avLst/>
@@ -24843,41 +22607,27 @@
               <a:buNone/>
             </a:pPr>
             <a:r>
-              <a:rPr lang="en-US" sz="2200" b="1" dirty="0">
+              <a:rPr lang="en-US" sz="1800" b="1" dirty="0">
                 <a:solidFill>
                   <a:schemeClr val="bg1"/>
                 </a:solidFill>
               </a:rPr>
-              <a:t>2.7x</a:t>
-            </a:r>
-            <a:endParaRPr lang="en-US" sz="2200" dirty="0"/>
-          </a:p>
-          <a:p>
-            <a:pPr algn="ctr" indent="0" marL="0">
-              <a:buNone/>
-            </a:pPr>
-            <a:r>
-              <a:rPr lang="en-US" sz="1000" b="1" dirty="0">
-                <a:solidFill>
-                  <a:schemeClr val="bg1"/>
-                </a:solidFill>
-              </a:rPr>
-              <a:t>reward / risk</a:t>
-            </a:r>
-            <a:endParaRPr lang="en-US" sz="2200" dirty="0"/>
-          </a:p>
-        </p:txBody>
-      </p:sp>
-      <p:sp>
-        <p:nvSpPr>
-          <p:cNvPr id="9" name="Scenario caption"/>
+              <a:t>1</a:t>
+            </a:r>
+            <a:endParaRPr lang="en-US" sz="1800" dirty="0"/>
+          </a:p>
+        </p:txBody>
+      </p:sp>
+      <p:sp>
+        <p:nvSpPr>
+          <p:cNvPr id="4" name="Belief 1"/>
           <p:cNvSpPr txBox="1"/>
           <p:nvPr/>
         </p:nvSpPr>
         <p:spPr>
           <a:xfrm>
-            <a:off x="5623560" y="4663440"/>
-            <a:ext cx="3200400" cy="274320"/>
+            <a:off x="1691640" y="1097280"/>
+            <a:ext cx="6583680" cy="603504"/>
           </a:xfrm>
           <a:prstGeom prst="rect">
             <a:avLst/>
@@ -24889,62 +22639,364 @@
           <a:bodyPr wrap="square" lIns="0" tIns="0" rIns="0" bIns="0" rtlCol="0" anchor="ctr"/>
           <a:lstStyle/>
           <a:p>
-            <a:pPr algn="ctr" indent="0" marL="0">
-              <a:buNone/>
-            </a:pPr>
-            <a:r>
-              <a:rPr lang="en-US" sz="1000" i="1" dirty="0">
-                <a:solidFill>
-                  <a:schemeClr val="accent2"/>
-                </a:solidFill>
-              </a:rPr>
-              <a:t>FY27E EBITDA × multiple; today's price $167</a:t>
-            </a:r>
-            <a:endParaRPr lang="en-US" sz="1000" dirty="0"/>
-          </a:p>
-        </p:txBody>
-      </p:sp>
-      <p:sp>
-        <p:nvSpPr>
-          <p:cNvPr id="10" name="Takeaway"/>
-          <p:cNvSpPr txBox="1"/>
-          <p:nvPr/>
-        </p:nvSpPr>
-        <p:spPr>
-          <a:xfrm>
-            <a:off x="320040" y="5504688"/>
-            <a:ext cx="8503920" cy="566928"/>
-          </a:xfrm>
-          <a:prstGeom prst="rect">
+            <a:pPr algn="l" indent="0" marL="0">
+              <a:buNone/>
+            </a:pPr>
+            <a:r>
+              <a:rPr lang="en-US" sz="1600" b="1" dirty="0">
+                <a:solidFill>
+                  <a:schemeClr val="tx2"/>
+                </a:solidFill>
+              </a:rPr>
+              <a:t>Margins: ~30% is the floor, and PMA parts, OEM-linked pricing and returning light work rebuild them.</a:t>
+            </a:r>
+            <a:endParaRPr lang="en-US" sz="1600" dirty="0"/>
+          </a:p>
+        </p:txBody>
+      </p:sp>
+      <p:sp>
+        <p:nvSpPr>
+          <p:cNvPr id="5" name="Belief 2 number"/>
+          <p:cNvSpPr/>
+          <p:nvPr/>
+        </p:nvSpPr>
+        <p:spPr>
+          <a:xfrm>
+            <a:off x="1051560" y="1883664"/>
+            <a:ext cx="457200" cy="457200"/>
+          </a:xfrm>
+          <a:prstGeom prst="ellipse">
             <a:avLst/>
           </a:prstGeom>
           <a:solidFill>
             <a:srgbClr val="0A1C58"/>
           </a:solidFill>
-          <a:ln/>
-        </p:spPr>
-        <p:txBody>
-          <a:bodyPr wrap="square" lIns="101600" tIns="25400" rIns="101600" bIns="25400" rtlCol="0" anchor="ctr"/>
-          <a:lstStyle/>
-          <a:p>
-            <a:pPr algn="ctr" indent="0" marL="0">
-              <a:buNone/>
-            </a:pPr>
-            <a:r>
-              <a:rPr lang="en-US" sz="1700" b="1" dirty="0">
+          <a:ln>
+            <a:solidFill>
+              <a:srgbClr val="0A1C58"/>
+            </a:solidFill>
+          </a:ln>
+        </p:spPr>
+        <p:txBody>
+          <a:bodyPr wrap="square" lIns="0" tIns="0" rIns="0" bIns="0" rtlCol="0" anchor="ctr"/>
+          <a:lstStyle/>
+          <a:p>
+            <a:pPr algn="ctr" indent="0" marL="0">
+              <a:buNone/>
+            </a:pPr>
+            <a:r>
+              <a:rPr lang="en-US" sz="1800" b="1" dirty="0">
                 <a:solidFill>
                   <a:schemeClr val="bg1"/>
                 </a:solidFill>
               </a:rPr>
-              <a:t>Even with bear-case EBITDA and compressed multiples, downside is 24%. The base case offers 66%.</a:t>
-            </a:r>
-            <a:endParaRPr lang="en-US" sz="1700" dirty="0"/>
-          </a:p>
-        </p:txBody>
-      </p:sp>
-      <p:sp>
-        <p:nvSpPr>
-          <p:cNvPr id="11" name="Source"/>
+              <a:t>2</a:t>
+            </a:r>
+            <a:endParaRPr lang="en-US" sz="1800" dirty="0"/>
+          </a:p>
+        </p:txBody>
+      </p:sp>
+      <p:sp>
+        <p:nvSpPr>
+          <p:cNvPr id="6" name="Belief 2"/>
+          <p:cNvSpPr txBox="1"/>
+          <p:nvPr/>
+        </p:nvSpPr>
+        <p:spPr>
+          <a:xfrm>
+            <a:off x="1691640" y="1810512"/>
+            <a:ext cx="6583680" cy="603504"/>
+          </a:xfrm>
+          <a:prstGeom prst="rect">
+            <a:avLst/>
+          </a:prstGeom>
+          <a:noFill/>
+          <a:ln/>
+        </p:spPr>
+        <p:txBody>
+          <a:bodyPr wrap="square" lIns="0" tIns="0" rIns="0" bIns="0" rtlCol="0" anchor="ctr"/>
+          <a:lstStyle/>
+          <a:p>
+            <a:pPr algn="l" indent="0" marL="0">
+              <a:buNone/>
+            </a:pPr>
+            <a:r>
+              <a:rPr lang="en-US" sz="1600" b="1" dirty="0">
+                <a:solidFill>
+                  <a:schemeClr val="tx2"/>
+                </a:solidFill>
+              </a:rPr>
+              <a:t>Share: FTAI's speed and new capacity take it to 20% of CFM56 module work.</a:t>
+            </a:r>
+            <a:endParaRPr lang="en-US" sz="1600" dirty="0"/>
+          </a:p>
+        </p:txBody>
+      </p:sp>
+      <p:sp>
+        <p:nvSpPr>
+          <p:cNvPr id="7" name="Belief 3 number"/>
+          <p:cNvSpPr/>
+          <p:nvPr/>
+        </p:nvSpPr>
+        <p:spPr>
+          <a:xfrm>
+            <a:off x="1051560" y="2596896"/>
+            <a:ext cx="457200" cy="457200"/>
+          </a:xfrm>
+          <a:prstGeom prst="ellipse">
+            <a:avLst/>
+          </a:prstGeom>
+          <a:solidFill>
+            <a:srgbClr val="0A1C58"/>
+          </a:solidFill>
+          <a:ln>
+            <a:solidFill>
+              <a:srgbClr val="0A1C58"/>
+            </a:solidFill>
+          </a:ln>
+        </p:spPr>
+        <p:txBody>
+          <a:bodyPr wrap="square" lIns="0" tIns="0" rIns="0" bIns="0" rtlCol="0" anchor="ctr"/>
+          <a:lstStyle/>
+          <a:p>
+            <a:pPr algn="ctr" indent="0" marL="0">
+              <a:buNone/>
+            </a:pPr>
+            <a:r>
+              <a:rPr lang="en-US" sz="1800" b="1" dirty="0">
+                <a:solidFill>
+                  <a:schemeClr val="bg1"/>
+                </a:solidFill>
+              </a:rPr>
+              <a:t>3</a:t>
+            </a:r>
+            <a:endParaRPr lang="en-US" sz="1800" dirty="0"/>
+          </a:p>
+        </p:txBody>
+      </p:sp>
+      <p:sp>
+        <p:nvSpPr>
+          <p:cNvPr id="8" name="Belief 3"/>
+          <p:cNvSpPr txBox="1"/>
+          <p:nvPr/>
+        </p:nvSpPr>
+        <p:spPr>
+          <a:xfrm>
+            <a:off x="1691640" y="2523744"/>
+            <a:ext cx="6583680" cy="603504"/>
+          </a:xfrm>
+          <a:prstGeom prst="rect">
+            <a:avLst/>
+          </a:prstGeom>
+          <a:noFill/>
+          <a:ln/>
+        </p:spPr>
+        <p:txBody>
+          <a:bodyPr wrap="square" lIns="0" tIns="0" rIns="0" bIns="0" rtlCol="0" anchor="ctr"/>
+          <a:lstStyle/>
+          <a:p>
+            <a:pPr algn="l" indent="0" marL="0">
+              <a:buNone/>
+            </a:pPr>
+            <a:r>
+              <a:rPr lang="en-US" sz="1600" b="1" dirty="0">
+                <a:solidFill>
+                  <a:schemeClr val="tx2"/>
+                </a:solidFill>
+              </a:rPr>
+              <a:t>Power: FTAI delivers the order it has already signed.</a:t>
+            </a:r>
+            <a:endParaRPr lang="en-US" sz="1600" dirty="0"/>
+          </a:p>
+        </p:txBody>
+      </p:sp>
+      <p:sp>
+        <p:nvSpPr>
+          <p:cNvPr id="9" name="Pick one"/>
+          <p:cNvSpPr txBox="1"/>
+          <p:nvPr/>
+        </p:nvSpPr>
+        <p:spPr>
+          <a:xfrm>
+            <a:off x="320040" y="3310128"/>
+            <a:ext cx="8503920" cy="384048"/>
+          </a:xfrm>
+          <a:prstGeom prst="rect">
+            <a:avLst/>
+          </a:prstGeom>
+          <a:noFill/>
+          <a:ln/>
+        </p:spPr>
+        <p:txBody>
+          <a:bodyPr wrap="square" lIns="0" tIns="0" rIns="0" bIns="0" rtlCol="0" anchor="ctr"/>
+          <a:lstStyle/>
+          <a:p>
+            <a:pPr algn="ctr" indent="0" marL="0">
+              <a:buNone/>
+            </a:pPr>
+            <a:r>
+              <a:rPr lang="en-US" sz="2000" b="1" dirty="0">
+                <a:solidFill>
+                  <a:srgbClr val="1A1A1A"/>
+                </a:solidFill>
+              </a:rPr>
+              <a:t>Or… just pick one:</a:t>
+            </a:r>
+            <a:endParaRPr lang="en-US" sz="2000" dirty="0"/>
+          </a:p>
+        </p:txBody>
+      </p:sp>
+      <p:graphicFrame>
+        <p:nvGraphicFramePr>
+          <p:cNvPr id="10" name="Pick one chart" descr=""/>
+          <p:cNvGraphicFramePr/>
+          <p:nvPr/>
+        </p:nvGraphicFramePr>
+        <p:xfrm>
+          <a:off x="2331720" y="3703320"/>
+          <a:ext cx="4480560" cy="2057400"/>
+        </p:xfrm>
+        <a:graphic xmlns:a="http://schemas.openxmlformats.org/drawingml/2006/main">
+          <a:graphicData uri="http://schemas.openxmlformats.org/drawingml/2006/chart">
+            <c:chart xmlns:c="http://schemas.openxmlformats.org/drawingml/2006/chart" r:id="rId1"/>
+          </a:graphicData>
+        </a:graphic>
+      </p:graphicFrame>
+      <p:sp>
+        <p:nvSpPr>
+          <p:cNvPr id="11" name="Pick one caption"/>
+          <p:cNvSpPr txBox="1"/>
+          <p:nvPr/>
+        </p:nvSpPr>
+        <p:spPr>
+          <a:xfrm>
+            <a:off x="2331720" y="5760720"/>
+            <a:ext cx="4480560" cy="256032"/>
+          </a:xfrm>
+          <a:prstGeom prst="rect">
+            <a:avLst/>
+          </a:prstGeom>
+          <a:noFill/>
+          <a:ln/>
+        </p:spPr>
+        <p:txBody>
+          <a:bodyPr wrap="square" lIns="0" tIns="0" rIns="0" bIns="0" rtlCol="0" anchor="ctr"/>
+          <a:lstStyle/>
+          <a:p>
+            <a:pPr algn="ctr" indent="0" marL="0">
+              <a:buNone/>
+            </a:pPr>
+            <a:r>
+              <a:rPr lang="en-US" sz="1100" i="1" dirty="0">
+                <a:solidFill>
+                  <a:schemeClr val="accent2"/>
+                </a:solidFill>
+              </a:rPr>
+              <a:t>Your return if only one comes true</a:t>
+            </a:r>
+            <a:endParaRPr lang="en-US" sz="1100" dirty="0"/>
+          </a:p>
+        </p:txBody>
+      </p:sp>
+      <p:sp>
+        <p:nvSpPr>
+          <p:cNvPr id="12" name="Left assumption box"/>
+          <p:cNvSpPr txBox="1"/>
+          <p:nvPr/>
+        </p:nvSpPr>
+        <p:spPr>
+          <a:xfrm>
+            <a:off x="320040" y="4251960"/>
+            <a:ext cx="1828800" cy="960120"/>
+          </a:xfrm>
+          <a:prstGeom prst="rect">
+            <a:avLst/>
+          </a:prstGeom>
+          <a:noFill/>
+          <a:ln w="12700">
+            <a:solidFill>
+              <a:srgbClr val="1A1A1A"/>
+            </a:solidFill>
+            <a:prstDash val="dash"/>
+          </a:ln>
+        </p:spPr>
+        <p:txBody>
+          <a:bodyPr wrap="square" lIns="50800" tIns="50800" rIns="50800" bIns="50800" rtlCol="0" anchor="ctr"/>
+          <a:lstStyle/>
+          <a:p>
+            <a:pPr algn="ctr" indent="0" marL="0">
+              <a:buNone/>
+            </a:pPr>
+            <a:r>
+              <a:rPr lang="en-US" sz="1200" b="1" dirty="0">
+                <a:solidFill>
+                  <a:schemeClr val="tx2"/>
+                </a:solidFill>
+              </a:rPr>
+              <a:t>Each bar holds the other two at our bear case, with no Power</a:t>
+            </a:r>
+            <a:endParaRPr lang="en-US" sz="1200" dirty="0"/>
+          </a:p>
+        </p:txBody>
+      </p:sp>
+      <p:sp>
+        <p:nvSpPr>
+          <p:cNvPr id="13" name="Right assumption box"/>
+          <p:cNvSpPr txBox="1"/>
+          <p:nvPr/>
+        </p:nvSpPr>
+        <p:spPr>
+          <a:xfrm>
+            <a:off x="6995160" y="4251960"/>
+            <a:ext cx="1828800" cy="960120"/>
+          </a:xfrm>
+          <a:prstGeom prst="rect">
+            <a:avLst/>
+          </a:prstGeom>
+          <a:noFill/>
+          <a:ln w="12700">
+            <a:solidFill>
+              <a:srgbClr val="1A1A1A"/>
+            </a:solidFill>
+            <a:prstDash val="dash"/>
+          </a:ln>
+        </p:spPr>
+        <p:txBody>
+          <a:bodyPr wrap="square" lIns="50800" tIns="50800" rIns="50800" bIns="50800" rtlCol="0" anchor="ctr"/>
+          <a:lstStyle/>
+          <a:p>
+            <a:pPr algn="ctr" indent="0" marL="0">
+              <a:buNone/>
+            </a:pPr>
+            <a:r>
+              <a:rPr lang="en-US" sz="1300" b="1" dirty="0">
+                <a:solidFill>
+                  <a:schemeClr val="tx2"/>
+                </a:solidFill>
+              </a:rPr>
+              <a:t>All three:</a:t>
+            </a:r>
+            <a:endParaRPr lang="en-US" sz="1300" dirty="0"/>
+          </a:p>
+          <a:p>
+            <a:pPr algn="ctr" indent="0" marL="0">
+              <a:buNone/>
+            </a:pPr>
+            <a:r>
+              <a:rPr lang="en-US" sz="2000" b="1" dirty="0">
+                <a:solidFill>
+                  <a:schemeClr val="tx2"/>
+                </a:solidFill>
+              </a:rPr>
+              <a:t>+66%</a:t>
+            </a:r>
+            <a:endParaRPr lang="en-US" sz="1300" dirty="0"/>
+          </a:p>
+        </p:txBody>
+      </p:sp>
+      <p:sp>
+        <p:nvSpPr>
+          <p:cNvPr id="14" name="Source"/>
           <p:cNvSpPr txBox="1"/>
           <p:nvPr/>
         </p:nvSpPr>
@@ -24983,7 +23035,7 @@
                   <a:srgbClr val="1A1A1A"/>
                 </a:solidFill>
               </a:rPr>
-              <a:t>GPS model (Bear/Base/Bull cases, FY27E segment EBITDA, YE27E net debt); bear and bull multiples are GPS assumptions</a:t>
+              <a:t>GPS model: SOTP (FY27E EBITDA, base multiples) with each thesis switched on alone vs. bear-case margins and share and no Power</a:t>
             </a:r>
             <a:endParaRPr lang="en-US" sz="1100" dirty="0"/>
           </a:p>

--- a/deck/FTAI_Long_Pitch.pptx
+++ b/deck/FTAI_Long_Pitch.pptx
@@ -130,12 +130,12 @@
   <p:extLst>
     <p:ext uri="{521415D9-36F7-43E2-AB2F-B90AF26B5E84}">
       <p14:sectionLst xmlns:p14="http://schemas.microsoft.com/office/powerpoint/2010/main">
-        <p14:section name="Introduction" id="{ba5fd3e3-830a-3cb4-fa00-dfcb0e690e8e}">
+        <p14:section name="Introduction" id="{0d962088-89a1-4099-c844-ec187371a745}">
           <p14:sldIdLst>
             <p14:sldId id="256"/>
           </p14:sldIdLst>
         </p14:section>
-        <p14:section name="The Opportunity" id="{76ce88c0-3f97-710f-b110-9180d81a326d}">
+        <p14:section name="The Opportunity" id="{7e3f7884-d7a3-9356-3eec-ae1999e266a7}">
           <p14:sldIdLst>
             <p14:sldId id="257"/>
             <p14:sldId id="258"/>
@@ -143,18 +143,18 @@
             <p14:sldId id="260"/>
           </p14:sldIdLst>
         </p14:section>
-        <p14:section name="Returns" id="{1f95a548-60d9-4158-b20e-0fa250019a29}">
+        <p14:section name="Returns" id="{b8e84bcc-02fb-4d5e-a30f-d29babd35e14}">
           <p14:sldIdLst>
             <p14:sldId id="261"/>
           </p14:sldIdLst>
         </p14:section>
-        <p14:section name="Business Overview" id="{ae4f367c-f94c-d35c-a2c3-241f919a117a}">
+        <p14:section name="Business Overview" id="{0fd5248f-189b-2120-6802-78c301c2a2c3}">
           <p14:sldIdLst>
             <p14:sldId id="262"/>
             <p14:sldId id="263"/>
           </p14:sldIdLst>
         </p14:section>
-        <p14:section name="Thesis 1a" id="{7a629b77-dd95-51cf-d17e-31a132ce0c71}">
+        <p14:section name="Thesis 1a" id="{3befc0ce-adc2-d3f9-12d2-5079fa45871a}">
           <p14:sldIdLst>
             <p14:sldId id="264"/>
             <p14:sldId id="265"/>
@@ -162,7 +162,7 @@
             <p14:sldId id="267"/>
           </p14:sldIdLst>
         </p14:section>
-        <p14:section name="Thesis 1b" id="{372875a0-a372-a0b0-372f-019eff236620}">
+        <p14:section name="Thesis 1b" id="{388dc478-2fa3-141d-f90f-c12d8235f13b}">
           <p14:sldIdLst>
             <p14:sldId id="268"/>
             <p14:sldId id="269"/>
@@ -173,7 +173,7 @@
             <p14:sldId id="274"/>
           </p14:sldIdLst>
         </p14:section>
-        <p14:section name="Thesis 2" id="{a99988b5-cadc-c71b-d2fa-8f0ab752d5b2}">
+        <p14:section name="Thesis 2" id="{a856e069-9081-66ab-3f73-91788ca42214}">
           <p14:sldIdLst>
             <p14:sldId id="275"/>
             <p14:sldId id="276"/>
@@ -181,7 +181,7 @@
             <p14:sldId id="278"/>
           </p14:sldIdLst>
         </p14:section>
-        <p14:section name="Valuation" id="{1fd9627b-771b-8c53-17f1-5e75d4676611}">
+        <p14:section name="Valuation" id="{356a274b-6935-cbfe-d784-beb798ffe27f}">
           <p14:sldIdLst>
             <p14:sldId id="279"/>
           </p14:sldIdLst>
@@ -5048,17 +5048,14 @@
           </c:dLbls>
           <c:cat>
             <c:multiLvlStrRef>
-              <c:f>Sheet1!$A$2:$A$4</c:f>
+              <c:f>Sheet1!$A$2:$A$3</c:f>
               <c:multiLvlStrCache>
-                <c:ptCount val="3"/>
+                <c:ptCount val="2"/>
                 <c:lvl>
                   <c:pt idx="0">
-                    <c:v>Margins only</c:v>
+                    <c:v>Margins + share only</c:v>
                   </c:pt>
                   <c:pt idx="1">
-                    <c:v>Share only</c:v>
-                  </c:pt>
-                  <c:pt idx="2">
                     <c:v>Power only</c:v>
                   </c:pt>
                 </c:lvl>
@@ -5067,17 +5064,14 @@
           </c:cat>
           <c:val>
             <c:numRef>
-              <c:f>Sheet1!$B$2:$B$4</c:f>
+              <c:f>Sheet1!$B$2:$B$3</c:f>
               <c:numCache>
                 <c:formatCode>General</c:formatCode>
-                <c:ptCount val="3"/>
+                <c:ptCount val="2"/>
                 <c:pt idx="0">
-                  <c:v>0.12</c:v>
+                  <c:v>0.33</c:v>
                 </c:pt>
                 <c:pt idx="1">
-                  <c:v>0.22</c:v>
-                </c:pt>
-                <c:pt idx="2">
                   <c:v>0.36</c:v>
                 </c:pt>
               </c:numCache>
@@ -5108,7 +5102,7 @@
           <c:showBubbleSize val="0"/>
           <c:showLeaderLines val="0"/>
         </c:dLbls>
-        <c:gapWidth val="60"/>
+        <c:gapWidth val="110"/>
         <c:overlap val="0"/>
         <c:axId val="2094734554"/>
         <c:axId val="2094734552"/>
@@ -7374,7 +7368,7 @@
             <c:size val="6"/>
             <c:spPr>
               <a:solidFill>
-                <a:srgbClr val="847C7A"/>
+                <a:srgbClr val="0A1C58"/>
               </a:solidFill>
               <a:ln w="9525" cap="flat">
                 <a:solidFill>
@@ -7512,7 +7506,7 @@
             <c:size val="6"/>
             <c:spPr>
               <a:solidFill>
-                <a:srgbClr val="847C7A"/>
+                <a:srgbClr val="0A1C58"/>
               </a:solidFill>
               <a:ln w="9525" cap="flat">
                 <a:solidFill>
@@ -9804,7 +9798,7 @@
           <a:p>
             <a:r>
               <a:rPr lang="en-US" dirty="0"/>
-              <a:t>Bars = base-case SOTP with one thesis on and the others off (bear-case margins/share rows, Power units = 0), at base multiples, vs. $167.03: margins only $187 (+12%), share only $203 (+22%), Power (signed order) only $227 (+36%). All three = $277 (+66%). With all three off, the SOTP is $172, about today's price: the market is pricing the bear case.</a:t>
+              <a:t>Bars = base-case SOTP with one thesis on and the others off (bear-case margins/share rows, Power units = 0), at base multiples, vs. $167.03: margins + share only (no Power) $222 (+33%); Power (signed order) only, with bear-case margins and share, $227 (+36%). All three = $277 (+66%). Share path: ~4% (2024) → ~8% (2025) → ~12% (2026E), i.e. ~4 pts a year; the model reaches 20% by FY30, ~2 pts a year. With all three off, the SOTP is $172, about today's price: the market is pricing the bear case.</a:t>
             </a:r>
             <a:endParaRPr lang="en-US" dirty="0"/>
           </a:p>
@@ -22726,7 +22720,7 @@
                   <a:schemeClr val="tx2"/>
                 </a:solidFill>
               </a:rPr>
-              <a:t>Share: FTAI's speed and new capacity take it to 20% of CFM56 module work.</a:t>
+              <a:t>Share: FTAI reaches 20% of CFM56 work by FY30, at half the ~4 pts a year it has already been growing.</a:t>
             </a:r>
             <a:endParaRPr lang="en-US" sz="1600" dirty="0"/>
           </a:p>
@@ -22933,7 +22927,7 @@
                   <a:schemeClr val="tx2"/>
                 </a:solidFill>
               </a:rPr>
-              <a:t>Each bar holds the other two at our bear case, with no Power</a:t>
+              <a:t>Each bar holds the other side at our bear case</a:t>
             </a:r>
             <a:endParaRPr lang="en-US" sz="1200" dirty="0"/>
           </a:p>
@@ -23035,7 +23029,7 @@
                   <a:srgbClr val="1A1A1A"/>
                 </a:solidFill>
               </a:rPr>
-              <a:t>GPS model: SOTP (FY27E EBITDA, base multiples) with each thesis switched on alone vs. bear-case margins and share and no Power</a:t>
+              <a:t>GPS model: SOTP (FY27E EBITDA, base multiples), aviation theses vs. Power switched on separately; share history per GPS analysis</a:t>
             </a:r>
             <a:endParaRPr lang="en-US" sz="1100" dirty="0"/>
           </a:p>

--- a/deck/FTAI_Long_Pitch.pptx
+++ b/deck/FTAI_Long_Pitch.pptx
@@ -29,9 +29,10 @@
     <p:sldId id="277" r:id="rId23"/>
     <p:sldId id="278" r:id="rId24"/>
     <p:sldId id="279" r:id="rId25"/>
+    <p:sldId id="280" r:id="rId26"/>
   </p:sldIdLst>
   <p:notesMasterIdLst>
-    <p:notesMasterId r:id="rId26"/>
+    <p:notesMasterId r:id="rId27"/>
   </p:notesMasterIdLst>
   <p:sldSz cx="9144000" cy="6858000"/>
   <p:notesSz cx="6858000" cy="9144000"/>
@@ -130,12 +131,12 @@
   <p:extLst>
     <p:ext uri="{521415D9-36F7-43E2-AB2F-B90AF26B5E84}">
       <p14:sectionLst xmlns:p14="http://schemas.microsoft.com/office/powerpoint/2010/main">
-        <p14:section name="Introduction" id="{0d962088-89a1-4099-c844-ec187371a745}">
+        <p14:section name="Introduction" id="{c5c0e07b-687a-7f8e-3e87-23cb68f31260}">
           <p14:sldIdLst>
             <p14:sldId id="256"/>
           </p14:sldIdLst>
         </p14:section>
-        <p14:section name="The Opportunity" id="{7e3f7884-d7a3-9356-3eec-ae1999e266a7}">
+        <p14:section name="The Opportunity" id="{d5029d9b-8eec-037b-25d7-88dfbcbc269e}">
           <p14:sldIdLst>
             <p14:sldId id="257"/>
             <p14:sldId id="258"/>
@@ -143,18 +144,18 @@
             <p14:sldId id="260"/>
           </p14:sldIdLst>
         </p14:section>
-        <p14:section name="Returns" id="{b8e84bcc-02fb-4d5e-a30f-d29babd35e14}">
+        <p14:section name="Returns" id="{f109ba59-c0e4-e60e-efb6-78af97027b92}">
           <p14:sldIdLst>
             <p14:sldId id="261"/>
           </p14:sldIdLst>
         </p14:section>
-        <p14:section name="Business Overview" id="{0fd5248f-189b-2120-6802-78c301c2a2c3}">
+        <p14:section name="Business Overview" id="{96bb5839-c38d-f29f-fa37-d3eb5ae75934}">
           <p14:sldIdLst>
             <p14:sldId id="262"/>
             <p14:sldId id="263"/>
           </p14:sldIdLst>
         </p14:section>
-        <p14:section name="Thesis 1a" id="{3befc0ce-adc2-d3f9-12d2-5079fa45871a}">
+        <p14:section name="Thesis 1a" id="{623406da-f14b-c1a0-c40b-490ca1303d7a}">
           <p14:sldIdLst>
             <p14:sldId id="264"/>
             <p14:sldId id="265"/>
@@ -162,7 +163,7 @@
             <p14:sldId id="267"/>
           </p14:sldIdLst>
         </p14:section>
-        <p14:section name="Thesis 1b" id="{388dc478-2fa3-141d-f90f-c12d8235f13b}">
+        <p14:section name="Thesis 1b" id="{e63bd6f4-4fa3-46a6-ecf0-069993d4805b}">
           <p14:sldIdLst>
             <p14:sldId id="268"/>
             <p14:sldId id="269"/>
@@ -173,7 +174,7 @@
             <p14:sldId id="274"/>
           </p14:sldIdLst>
         </p14:section>
-        <p14:section name="Thesis 2" id="{a856e069-9081-66ab-3f73-91788ca42214}">
+        <p14:section name="Thesis 2" id="{f25d5165-d9d0-2d76-e985-d37c0c2c62ee}">
           <p14:sldIdLst>
             <p14:sldId id="275"/>
             <p14:sldId id="276"/>
@@ -181,9 +182,10 @@
             <p14:sldId id="278"/>
           </p14:sldIdLst>
         </p14:section>
-        <p14:section name="Valuation" id="{356a274b-6935-cbfe-d784-beb798ffe27f}">
+        <p14:section name="Valuation" id="{4e7f0dc8-aa65-8a0c-bcf3-0bef036c4187}">
           <p14:sldIdLst>
             <p14:sldId id="279"/>
+            <p14:sldId id="280"/>
           </p14:sldIdLst>
         </p14:section>
       </p14:sectionLst>
@@ -7506,7 +7508,7 @@
             <c:size val="6"/>
             <c:spPr>
               <a:solidFill>
-                <a:srgbClr val="0A1C58"/>
+                <a:srgbClr val="847C7A"/>
               </a:solidFill>
               <a:ln w="9525" cap="flat">
                 <a:solidFill>
@@ -9822,6 +9824,94 @@
             <a:fld id="{F7021451-1387-4CA6-816F-3879F97B5CBC}" type="slidenum">
               <a:rPr lang="en-US"/>
               <a:t>24</a:t>
+            </a:fld>
+            <a:endParaRPr lang="en-US"/>
+          </a:p>
+        </p:txBody>
+      </p:sp>
+    </p:spTree>
+    <p:extLst>
+      <p:ext uri="{BB962C8B-B14F-4D97-AF65-F5344CB8AC3E}">
+        <p14:creationId xmlns:p14="http://schemas.microsoft.com/office/powerpoint/2010/main" val="1024086991"/>
+      </p:ext>
+    </p:extLst>
+  </p:cSld>
+  <p:clrMapOvr>
+    <a:masterClrMapping/>
+  </p:clrMapOvr>
+</p:notes>
+</file>
+
+<file path=ppt/notesSlides/notesSlide25.xml><?xml version="1.0" encoding="utf-8"?>
+<p:notes xmlns:a="http://schemas.openxmlformats.org/drawingml/2006/main" xmlns:r="http://schemas.openxmlformats.org/officeDocument/2006/relationships" xmlns:p="http://schemas.openxmlformats.org/presentationml/2006/main">
+  <p:cSld>
+    <p:spTree>
+      <p:nvGrpSpPr>
+        <p:cNvPr id="1" name=""/>
+        <p:cNvGrpSpPr/>
+        <p:nvPr/>
+      </p:nvGrpSpPr>
+      <p:grpSpPr>
+        <a:xfrm>
+          <a:off x="0" y="0"/>
+          <a:ext cx="0" cy="0"/>
+          <a:chOff x="0" y="0"/>
+          <a:chExt cx="0" cy="0"/>
+        </a:xfrm>
+      </p:grpSpPr>
+      <p:sp>
+        <p:nvSpPr>
+          <p:cNvPr id="2" name="Slide Image Placeholder 1"/>
+          <p:cNvSpPr>
+            <a:spLocks noGrp="1" noRot="1" noChangeAspect="1"/>
+          </p:cNvSpPr>
+          <p:nvPr>
+            <p:ph type="sldImg"/>
+          </p:nvPr>
+        </p:nvSpPr>
+        <p:spPr/>
+      </p:sp>
+      <p:sp>
+        <p:nvSpPr>
+          <p:cNvPr id="3" name="Notes Placeholder 2"/>
+          <p:cNvSpPr>
+            <a:spLocks noGrp="1"/>
+          </p:cNvSpPr>
+          <p:nvPr>
+            <p:ph type="body" idx="1"/>
+          </p:nvPr>
+        </p:nvSpPr>
+        <p:spPr/>
+        <p:txBody>
+          <a:bodyPr/>
+          <a:lstStyle/>
+          <a:p>
+            <a:r>
+              <a:rPr lang="en-US" dirty="0"/>
+              <a:t>Reward = bull-case blended DCF upside (+131.9%); risk = bear-case blended DCF downside (−38.6%); skew 3.4x (GPS model, DCF tab). Bull rows: Aerospace margin ex-PMA rising to 33.5% by FY31, FTAI share to 25% by FY31, higher shop visits, Power units ahead of base ($550M FY27E EBITDA). Bear rows: margin ex-PMA flat at 28.5%, no PMA, OEM pass-through 30%, share capped at 15%, SCI fleet capped at 400 aircraft, faster retirements, Power at 50% JV share and 30% margins ($113M FY27E EBITDA). Sanity check: FY25 Aerospace margin 34.7%; share ~4% → ~8% → ~12% (2024–26E); the $1.465B J&amp;F order underpins the $450M low end of FY27 Power guidance.</a:t>
+            </a:r>
+            <a:endParaRPr lang="en-US" dirty="0"/>
+          </a:p>
+        </p:txBody>
+      </p:sp>
+      <p:sp>
+        <p:nvSpPr>
+          <p:cNvPr id="4" name="Slide Number Placeholder 3"/>
+          <p:cNvSpPr>
+            <a:spLocks noGrp="1"/>
+          </p:cNvSpPr>
+          <p:nvPr>
+            <p:ph type="sldNum" sz="quarter" idx="10"/>
+          </p:nvPr>
+        </p:nvSpPr>
+        <p:spPr/>
+        <p:txBody>
+          <a:bodyPr/>
+          <a:lstStyle/>
+          <a:p>
+            <a:fld id="{F7021451-1387-4CA6-816F-3879F97B5CBC}" type="slidenum">
+              <a:rPr lang="en-US"/>
+              <a:t>25</a:t>
             </a:fld>
             <a:endParaRPr lang="en-US"/>
           </a:p>
@@ -23075,6 +23165,859 @@
             <a:fld id="{F7021451-1387-4CA6-816F-3879F97B5CBC}" type="slidenum">
               <a:rPr b="1" lang="en-US"/>
               <a:t>24</a:t>
+            </a:fld>
+            <a:endParaRPr lang="en-US"/>
+          </a:p>
+        </p:txBody>
+      </p:sp>
+    </p:spTree>
+  </p:cSld>
+  <p:clrMapOvr>
+    <a:masterClrMapping/>
+  </p:clrMapOvr>
+</p:sld>
+</file>
+
+<file path=ppt/slides/slide25.xml><?xml version="1.0" encoding="utf-8"?>
+<p:sld xmlns:a="http://schemas.openxmlformats.org/drawingml/2006/main" xmlns:r="http://schemas.openxmlformats.org/officeDocument/2006/relationships" xmlns:p="http://schemas.openxmlformats.org/presentationml/2006/main">
+  <p:cSld name="Slide 25">
+    <p:spTree>
+      <p:nvGrpSpPr>
+        <p:cNvPr id="1" name=""/>
+        <p:cNvGrpSpPr/>
+        <p:nvPr/>
+      </p:nvGrpSpPr>
+      <p:grpSpPr>
+        <a:xfrm>
+          <a:off x="0" y="0"/>
+          <a:ext cx="0" cy="0"/>
+          <a:chOff x="0" y="0"/>
+          <a:chExt cx="0" cy="0"/>
+        </a:xfrm>
+      </p:grpSpPr>
+      <p:sp>
+        <p:nvSpPr>
+          <p:cNvPr id="2" name="Text 1"/>
+          <p:cNvSpPr/>
+          <p:nvPr>
+            <p:ph idx="102" type="title" hasCustomPrompt="1"/>
+          </p:nvPr>
+        </p:nvSpPr>
+        <p:spPr>
+          <a:xfrm>
+            <a:off x="320040" y="182880"/>
+            <a:ext cx="8503920" cy="640080"/>
+          </a:xfrm>
+          <a:prstGeom prst="rect">
+            <a:avLst/>
+          </a:prstGeom>
+          <a:noFill/>
+          <a:ln/>
+        </p:spPr>
+        <p:txBody>
+          <a:bodyPr wrap="square" lIns="0" tIns="0" rIns="0" bIns="0" rtlCol="0" anchor="ctr"/>
+          <a:lstStyle/>
+          <a:p>
+            <a:pPr algn="l" indent="0" marL="0">
+              <a:buNone/>
+            </a:pPr>
+            <a:r>
+              <a:rPr lang="en-US" sz="3200" b="1" dirty="0">
+                <a:solidFill>
+                  <a:schemeClr val="tx2"/>
+                </a:solidFill>
+              </a:rPr>
+              <a:t>Valuation: Reward vs. Risk</a:t>
+            </a:r>
+            <a:endParaRPr lang="en-US" sz="3200" dirty="0"/>
+          </a:p>
+        </p:txBody>
+      </p:sp>
+      <p:sp>
+        <p:nvSpPr>
+          <p:cNvPr id="3" name="Text 1"/>
+          <p:cNvSpPr/>
+          <p:nvPr>
+            <p:ph idx="103" type="body" hasCustomPrompt="1"/>
+          </p:nvPr>
+        </p:nvSpPr>
+        <p:spPr>
+          <a:xfrm>
+            <a:off x="320040" y="932688"/>
+            <a:ext cx="8503920" cy="566928"/>
+          </a:xfrm>
+          <a:prstGeom prst="rect">
+            <a:avLst/>
+          </a:prstGeom>
+          <a:noFill/>
+          <a:ln/>
+        </p:spPr>
+        <p:txBody>
+          <a:bodyPr wrap="square" lIns="0" tIns="0" rIns="0" bIns="0" rtlCol="0" anchor="t"/>
+          <a:lstStyle/>
+          <a:p>
+            <a:pPr algn="l" indent="0" marL="0">
+              <a:buNone/>
+            </a:pPr>
+            <a:r>
+              <a:rPr lang="en-US" sz="1700" b="1" dirty="0">
+                <a:solidFill>
+                  <a:schemeClr val="tx2"/>
+                </a:solidFill>
+              </a:rPr>
+              <a:t>3.4x reward/risk skew, with a bear case that assumes nothing goes right.</a:t>
+            </a:r>
+            <a:endParaRPr lang="en-US" sz="1700" dirty="0"/>
+          </a:p>
+        </p:txBody>
+      </p:sp>
+      <p:sp>
+        <p:nvSpPr>
+          <p:cNvPr id="4" name="RR header"/>
+          <p:cNvSpPr txBox="1"/>
+          <p:nvPr/>
+        </p:nvSpPr>
+        <p:spPr>
+          <a:xfrm>
+            <a:off x="457200" y="1828800"/>
+            <a:ext cx="3657600" cy="384048"/>
+          </a:xfrm>
+          <a:prstGeom prst="rect">
+            <a:avLst/>
+          </a:prstGeom>
+          <a:noFill/>
+          <a:ln/>
+        </p:spPr>
+        <p:txBody>
+          <a:bodyPr wrap="square" lIns="0" tIns="0" rIns="0" bIns="0" rtlCol="0" anchor="b"/>
+          <a:lstStyle/>
+          <a:p>
+            <a:pPr algn="l" indent="0" marL="0">
+              <a:buNone/>
+            </a:pPr>
+            <a:r>
+              <a:rPr lang="en-US" sz="1800" b="1" dirty="0">
+                <a:solidFill>
+                  <a:srgbClr val="1A1A1A"/>
+                </a:solidFill>
+              </a:rPr>
+              <a:t>R/R</a:t>
+            </a:r>
+            <a:endParaRPr lang="en-US" sz="1800" dirty="0"/>
+          </a:p>
+        </p:txBody>
+      </p:sp>
+      <p:sp>
+        <p:nvSpPr>
+          <p:cNvPr id="5" name="RR header rule"/>
+          <p:cNvSpPr/>
+          <p:nvPr/>
+        </p:nvSpPr>
+        <p:spPr>
+          <a:xfrm>
+            <a:off x="457200" y="2240280"/>
+            <a:ext cx="3657600" cy="0"/>
+          </a:xfrm>
+          <a:prstGeom prst="line">
+            <a:avLst/>
+          </a:prstGeom>
+          <a:noFill/>
+          <a:ln w="19050">
+            <a:solidFill>
+              <a:srgbClr val="1A1A1A"/>
+            </a:solidFill>
+            <a:prstDash val="solid"/>
+          </a:ln>
+        </p:spPr>
+      </p:sp>
+      <p:sp>
+        <p:nvSpPr>
+          <p:cNvPr id="6" name="RR Reward label"/>
+          <p:cNvSpPr txBox="1"/>
+          <p:nvPr/>
+        </p:nvSpPr>
+        <p:spPr>
+          <a:xfrm>
+            <a:off x="457200" y="2286000"/>
+            <a:ext cx="2103120" cy="420624"/>
+          </a:xfrm>
+          <a:prstGeom prst="rect">
+            <a:avLst/>
+          </a:prstGeom>
+          <a:noFill/>
+          <a:ln/>
+        </p:spPr>
+        <p:txBody>
+          <a:bodyPr wrap="square" lIns="50800" tIns="0" rIns="0" bIns="0" rtlCol="0" anchor="ctr"/>
+          <a:lstStyle/>
+          <a:p>
+            <a:pPr algn="l" indent="0" marL="0">
+              <a:buNone/>
+            </a:pPr>
+            <a:r>
+              <a:rPr lang="en-US" sz="1700" dirty="0">
+                <a:solidFill>
+                  <a:srgbClr val="1A1A1A"/>
+                </a:solidFill>
+              </a:rPr>
+              <a:t>Reward</a:t>
+            </a:r>
+            <a:endParaRPr lang="en-US" sz="1700" dirty="0"/>
+          </a:p>
+        </p:txBody>
+      </p:sp>
+      <p:sp>
+        <p:nvSpPr>
+          <p:cNvPr id="7" name="RR Reward value"/>
+          <p:cNvSpPr txBox="1"/>
+          <p:nvPr/>
+        </p:nvSpPr>
+        <p:spPr>
+          <a:xfrm>
+            <a:off x="2560320" y="2286000"/>
+            <a:ext cx="1554480" cy="420624"/>
+          </a:xfrm>
+          <a:prstGeom prst="rect">
+            <a:avLst/>
+          </a:prstGeom>
+          <a:solidFill>
+            <a:srgbClr val="EFEDEA"/>
+          </a:solidFill>
+          <a:ln/>
+        </p:spPr>
+        <p:txBody>
+          <a:bodyPr wrap="square" lIns="0" tIns="0" rIns="76200" bIns="0" rtlCol="0" anchor="ctr"/>
+          <a:lstStyle/>
+          <a:p>
+            <a:pPr algn="r" indent="0" marL="0">
+              <a:buNone/>
+            </a:pPr>
+            <a:r>
+              <a:rPr lang="en-US" sz="1700" b="1" dirty="0">
+                <a:solidFill>
+                  <a:srgbClr val="0A1C58"/>
+                </a:solidFill>
+              </a:rPr>
+              <a:t>132%</a:t>
+            </a:r>
+            <a:endParaRPr lang="en-US" sz="1700" dirty="0"/>
+          </a:p>
+        </p:txBody>
+      </p:sp>
+      <p:sp>
+        <p:nvSpPr>
+          <p:cNvPr id="8" name="RR Risk label"/>
+          <p:cNvSpPr txBox="1"/>
+          <p:nvPr/>
+        </p:nvSpPr>
+        <p:spPr>
+          <a:xfrm>
+            <a:off x="457200" y="2743200"/>
+            <a:ext cx="2103120" cy="420624"/>
+          </a:xfrm>
+          <a:prstGeom prst="rect">
+            <a:avLst/>
+          </a:prstGeom>
+          <a:noFill/>
+          <a:ln/>
+        </p:spPr>
+        <p:txBody>
+          <a:bodyPr wrap="square" lIns="50800" tIns="0" rIns="0" bIns="0" rtlCol="0" anchor="ctr"/>
+          <a:lstStyle/>
+          <a:p>
+            <a:pPr algn="l" indent="0" marL="0">
+              <a:buNone/>
+            </a:pPr>
+            <a:r>
+              <a:rPr lang="en-US" sz="1700" dirty="0">
+                <a:solidFill>
+                  <a:srgbClr val="1A1A1A"/>
+                </a:solidFill>
+              </a:rPr>
+              <a:t>Risk</a:t>
+            </a:r>
+            <a:endParaRPr lang="en-US" sz="1700" dirty="0"/>
+          </a:p>
+        </p:txBody>
+      </p:sp>
+      <p:sp>
+        <p:nvSpPr>
+          <p:cNvPr id="9" name="RR Risk value"/>
+          <p:cNvSpPr txBox="1"/>
+          <p:nvPr/>
+        </p:nvSpPr>
+        <p:spPr>
+          <a:xfrm>
+            <a:off x="2560320" y="2743200"/>
+            <a:ext cx="1554480" cy="420624"/>
+          </a:xfrm>
+          <a:prstGeom prst="rect">
+            <a:avLst/>
+          </a:prstGeom>
+          <a:solidFill>
+            <a:srgbClr val="DCD8D3"/>
+          </a:solidFill>
+          <a:ln/>
+        </p:spPr>
+        <p:txBody>
+          <a:bodyPr wrap="square" lIns="0" tIns="0" rIns="76200" bIns="0" rtlCol="0" anchor="ctr"/>
+          <a:lstStyle/>
+          <a:p>
+            <a:pPr algn="r" indent="0" marL="0">
+              <a:buNone/>
+            </a:pPr>
+            <a:r>
+              <a:rPr lang="en-US" sz="1700" b="1" dirty="0">
+                <a:solidFill>
+                  <a:srgbClr val="847C7A"/>
+                </a:solidFill>
+              </a:rPr>
+              <a:t>–39%</a:t>
+            </a:r>
+            <a:endParaRPr lang="en-US" sz="1700" dirty="0"/>
+          </a:p>
+        </p:txBody>
+      </p:sp>
+      <p:sp>
+        <p:nvSpPr>
+          <p:cNvPr id="10" name="RR skew box"/>
+          <p:cNvSpPr txBox="1"/>
+          <p:nvPr/>
+        </p:nvSpPr>
+        <p:spPr>
+          <a:xfrm>
+            <a:off x="457200" y="3218688"/>
+            <a:ext cx="3657600" cy="457200"/>
+          </a:xfrm>
+          <a:prstGeom prst="rect">
+            <a:avLst/>
+          </a:prstGeom>
+          <a:noFill/>
+          <a:ln w="19050">
+            <a:solidFill>
+              <a:srgbClr val="1A1A1A"/>
+            </a:solidFill>
+          </a:ln>
+        </p:spPr>
+        <p:txBody>
+          <a:bodyPr wrap="square" lIns="76200" tIns="0" rIns="76200" bIns="0" rtlCol="0" anchor="ctr"/>
+          <a:lstStyle/>
+          <a:p>
+            <a:pPr algn="l" indent="0" marL="0">
+              <a:buNone/>
+            </a:pPr>
+            <a:r>
+              <a:rPr lang="en-US" sz="1700" b="1" dirty="0">
+                <a:solidFill>
+                  <a:srgbClr val="1A1A1A"/>
+                </a:solidFill>
+              </a:rPr>
+              <a:t>R/R Skew</a:t>
+            </a:r>
+            <a:endParaRPr lang="en-US" sz="1700" dirty="0"/>
+          </a:p>
+        </p:txBody>
+      </p:sp>
+      <p:sp>
+        <p:nvSpPr>
+          <p:cNvPr id="11" name="RR skew value"/>
+          <p:cNvSpPr txBox="1"/>
+          <p:nvPr/>
+        </p:nvSpPr>
+        <p:spPr>
+          <a:xfrm>
+            <a:off x="2560320" y="3218688"/>
+            <a:ext cx="1508760" cy="457200"/>
+          </a:xfrm>
+          <a:prstGeom prst="rect">
+            <a:avLst/>
+          </a:prstGeom>
+          <a:noFill/>
+          <a:ln/>
+        </p:spPr>
+        <p:txBody>
+          <a:bodyPr wrap="square" lIns="0" tIns="0" rIns="0" bIns="0" rtlCol="0" anchor="ctr"/>
+          <a:lstStyle/>
+          <a:p>
+            <a:pPr algn="r" indent="0" marL="0">
+              <a:buNone/>
+            </a:pPr>
+            <a:r>
+              <a:rPr lang="en-US" sz="1700" b="1" dirty="0">
+                <a:solidFill>
+                  <a:srgbClr val="1A1A1A"/>
+                </a:solidFill>
+              </a:rPr>
+              <a:t>3.4</a:t>
+            </a:r>
+            <a:endParaRPr lang="en-US" sz="1700" dirty="0"/>
+          </a:p>
+        </p:txBody>
+      </p:sp>
+      <p:sp>
+        <p:nvSpPr>
+          <p:cNvPr id="12" name="Bull assumptions"/>
+          <p:cNvSpPr txBox="1"/>
+          <p:nvPr/>
+        </p:nvSpPr>
+        <p:spPr>
+          <a:xfrm>
+            <a:off x="4800600" y="1645920"/>
+            <a:ext cx="4023360" cy="1188720"/>
+          </a:xfrm>
+          <a:prstGeom prst="rect">
+            <a:avLst/>
+          </a:prstGeom>
+          <a:noFill/>
+          <a:ln w="25400">
+            <a:solidFill>
+              <a:srgbClr val="0A1C58"/>
+            </a:solidFill>
+          </a:ln>
+        </p:spPr>
+        <p:txBody>
+          <a:bodyPr wrap="square" lIns="127000" tIns="50800" rIns="76200" bIns="50800" rtlCol="0" anchor="ctr"/>
+          <a:lstStyle/>
+          <a:p>
+            <a:pPr algn="l" indent="0" marL="0">
+              <a:spcAft>
+                <a:spcPts val="300"/>
+              </a:spcAft>
+              <a:buNone/>
+            </a:pPr>
+            <a:r>
+              <a:rPr lang="en-US" sz="1400" b="1" dirty="0">
+                <a:solidFill>
+                  <a:srgbClr val="1A1A1A"/>
+                </a:solidFill>
+              </a:rPr>
+              <a:t>✓  Margins rebuild to ~33.5%</a:t>
+            </a:r>
+            <a:endParaRPr lang="en-US" sz="1400" dirty="0"/>
+          </a:p>
+          <a:p>
+            <a:pPr algn="l" indent="0" marL="0">
+              <a:spcAft>
+                <a:spcPts val="300"/>
+              </a:spcAft>
+              <a:buNone/>
+            </a:pPr>
+            <a:r>
+              <a:rPr lang="en-US" sz="1400" b="1" dirty="0">
+                <a:solidFill>
+                  <a:srgbClr val="1A1A1A"/>
+                </a:solidFill>
+              </a:rPr>
+              <a:t>✓  25% CFM56 share by FY31</a:t>
+            </a:r>
+            <a:endParaRPr lang="en-US" sz="1400" dirty="0"/>
+          </a:p>
+          <a:p>
+            <a:pPr algn="l" indent="0" marL="0">
+              <a:spcAft>
+                <a:spcPts val="300"/>
+              </a:spcAft>
+              <a:buNone/>
+            </a:pPr>
+            <a:r>
+              <a:rPr lang="en-US" sz="1400" b="1" dirty="0">
+                <a:solidFill>
+                  <a:srgbClr val="1A1A1A"/>
+                </a:solidFill>
+              </a:rPr>
+              <a:t>✓  Power: $550M FY27E EBITDA</a:t>
+            </a:r>
+            <a:endParaRPr lang="en-US" sz="1400" dirty="0"/>
+          </a:p>
+        </p:txBody>
+      </p:sp>
+      <p:sp>
+        <p:nvSpPr>
+          <p:cNvPr id="13" name="Bear assumptions"/>
+          <p:cNvSpPr txBox="1"/>
+          <p:nvPr/>
+        </p:nvSpPr>
+        <p:spPr>
+          <a:xfrm>
+            <a:off x="4800600" y="3017520"/>
+            <a:ext cx="4023360" cy="1188720"/>
+          </a:xfrm>
+          <a:prstGeom prst="rect">
+            <a:avLst/>
+          </a:prstGeom>
+          <a:noFill/>
+          <a:ln w="25400">
+            <a:solidFill>
+              <a:srgbClr val="847C7A"/>
+            </a:solidFill>
+          </a:ln>
+        </p:spPr>
+        <p:txBody>
+          <a:bodyPr wrap="square" lIns="127000" tIns="50800" rIns="76200" bIns="50800" rtlCol="0" anchor="ctr"/>
+          <a:lstStyle/>
+          <a:p>
+            <a:pPr algn="l" indent="0" marL="0">
+              <a:spcAft>
+                <a:spcPts val="300"/>
+              </a:spcAft>
+              <a:buNone/>
+            </a:pPr>
+            <a:r>
+              <a:rPr lang="en-US" sz="1400" b="1" dirty="0">
+                <a:solidFill>
+                  <a:srgbClr val="1A1A1A"/>
+                </a:solidFill>
+              </a:rPr>
+              <a:t>×  Margins stuck at 28.5%, no PMA</a:t>
+            </a:r>
+            <a:endParaRPr lang="en-US" sz="1400" dirty="0"/>
+          </a:p>
+          <a:p>
+            <a:pPr algn="l" indent="0" marL="0">
+              <a:spcAft>
+                <a:spcPts val="300"/>
+              </a:spcAft>
+              <a:buNone/>
+            </a:pPr>
+            <a:r>
+              <a:rPr lang="en-US" sz="1400" b="1" dirty="0">
+                <a:solidFill>
+                  <a:srgbClr val="1A1A1A"/>
+                </a:solidFill>
+              </a:rPr>
+              <a:t>×  Share capped at 15%</a:t>
+            </a:r>
+            <a:endParaRPr lang="en-US" sz="1400" dirty="0"/>
+          </a:p>
+          <a:p>
+            <a:pPr algn="l" indent="0" marL="0">
+              <a:spcAft>
+                <a:spcPts val="300"/>
+              </a:spcAft>
+              <a:buNone/>
+            </a:pPr>
+            <a:r>
+              <a:rPr lang="en-US" sz="1400" b="1" dirty="0">
+                <a:solidFill>
+                  <a:srgbClr val="1A1A1A"/>
+                </a:solidFill>
+              </a:rPr>
+              <a:t>×  Power: half the JV, 30% margins</a:t>
+            </a:r>
+            <a:endParaRPr lang="en-US" sz="1400" dirty="0"/>
+          </a:p>
+        </p:txBody>
+      </p:sp>
+      <p:sp>
+        <p:nvSpPr>
+          <p:cNvPr id="14" name="Bull connector"/>
+          <p:cNvSpPr/>
+          <p:nvPr/>
+        </p:nvSpPr>
+        <p:spPr>
+          <a:xfrm flipV="1">
+            <a:off x="4114800" y="2240280"/>
+            <a:ext cx="685800" cy="256032"/>
+          </a:xfrm>
+          <a:prstGeom prst="line">
+            <a:avLst/>
+          </a:prstGeom>
+          <a:noFill/>
+          <a:ln w="15875">
+            <a:solidFill>
+              <a:srgbClr val="0A1C58"/>
+            </a:solidFill>
+            <a:prstDash val="dash"/>
+          </a:ln>
+        </p:spPr>
+      </p:sp>
+      <p:sp>
+        <p:nvSpPr>
+          <p:cNvPr id="15" name="Bear connector"/>
+          <p:cNvSpPr/>
+          <p:nvPr/>
+        </p:nvSpPr>
+        <p:spPr>
+          <a:xfrm>
+            <a:off x="4114800" y="2953512"/>
+            <a:ext cx="685800" cy="658368"/>
+          </a:xfrm>
+          <a:prstGeom prst="line">
+            <a:avLst/>
+          </a:prstGeom>
+          <a:noFill/>
+          <a:ln w="15875">
+            <a:solidFill>
+              <a:srgbClr val="847C7A"/>
+            </a:solidFill>
+            <a:prstDash val="dash"/>
+          </a:ln>
+        </p:spPr>
+      </p:sp>
+      <p:sp>
+        <p:nvSpPr>
+          <p:cNvPr id="16" name="Sanity header"/>
+          <p:cNvSpPr txBox="1"/>
+          <p:nvPr/>
+        </p:nvSpPr>
+        <p:spPr>
+          <a:xfrm>
+            <a:off x="1828800" y="4251960"/>
+            <a:ext cx="5486400" cy="365760"/>
+          </a:xfrm>
+          <a:prstGeom prst="rect">
+            <a:avLst/>
+          </a:prstGeom>
+          <a:noFill/>
+          <a:ln/>
+        </p:spPr>
+        <p:txBody>
+          <a:bodyPr wrap="square" lIns="0" tIns="0" rIns="0" bIns="0" rtlCol="0" anchor="b"/>
+          <a:lstStyle/>
+          <a:p>
+            <a:pPr algn="ctr" indent="0" marL="0">
+              <a:buNone/>
+            </a:pPr>
+            <a:r>
+              <a:rPr lang="en-US" sz="1600" b="1" dirty="0">
+                <a:solidFill>
+                  <a:srgbClr val="1A1A1A"/>
+                </a:solidFill>
+              </a:rPr>
+              <a:t>Review: Sanity Check</a:t>
+            </a:r>
+            <a:endParaRPr lang="en-US" sz="1600" dirty="0"/>
+          </a:p>
+        </p:txBody>
+      </p:sp>
+      <p:sp>
+        <p:nvSpPr>
+          <p:cNvPr id="17" name="Sanity header rule"/>
+          <p:cNvSpPr/>
+          <p:nvPr/>
+        </p:nvSpPr>
+        <p:spPr>
+          <a:xfrm>
+            <a:off x="1828800" y="4672584"/>
+            <a:ext cx="5486400" cy="0"/>
+          </a:xfrm>
+          <a:prstGeom prst="line">
+            <a:avLst/>
+          </a:prstGeom>
+          <a:noFill/>
+          <a:ln w="12700">
+            <a:solidFill>
+              <a:srgbClr val="1A1A1A"/>
+            </a:solidFill>
+            <a:prstDash val="solid"/>
+          </a:ln>
+        </p:spPr>
+      </p:sp>
+      <p:sp>
+        <p:nvSpPr>
+          <p:cNvPr id="18" name="Sanity bullets"/>
+          <p:cNvSpPr txBox="1"/>
+          <p:nvPr/>
+        </p:nvSpPr>
+        <p:spPr>
+          <a:xfrm>
+            <a:off x="2103120" y="4754880"/>
+            <a:ext cx="5120640" cy="1005840"/>
+          </a:xfrm>
+          <a:prstGeom prst="rect">
+            <a:avLst/>
+          </a:prstGeom>
+          <a:noFill/>
+          <a:ln/>
+        </p:spPr>
+        <p:txBody>
+          <a:bodyPr wrap="square" lIns="0" tIns="0" rIns="0" bIns="0" rtlCol="0" anchor="t"/>
+          <a:lstStyle/>
+          <a:p>
+            <a:pPr algn="l" marL="342900" indent="-342900">
+              <a:spcAft>
+                <a:spcPts val="300"/>
+              </a:spcAft>
+              <a:buSzPct val="100000"/>
+              <a:buChar char="•"/>
+            </a:pPr>
+            <a:r>
+              <a:rPr lang="en-US" sz="1500" b="1" dirty="0">
+                <a:solidFill>
+                  <a:srgbClr val="1A1A1A"/>
+                </a:solidFill>
+              </a:rPr>
+              <a:t>Margins: </a:t>
+            </a:r>
+            <a:pPr algn="l" indent="0" marL="0">
+              <a:spcAft>
+                <a:spcPts val="300"/>
+              </a:spcAft>
+              <a:buNone/>
+            </a:pPr>
+            <a:r>
+              <a:rPr lang="en-US" sz="1500" dirty="0">
+                <a:solidFill>
+                  <a:srgbClr val="1A1A1A"/>
+                </a:solidFill>
+              </a:rPr>
+              <a:t>FTAI ran ~35% as recently as FY25</a:t>
+            </a:r>
+            <a:endParaRPr lang="en-US" sz="1500" dirty="0"/>
+          </a:p>
+          <a:p>
+            <a:pPr algn="l" marL="342900" indent="-342900">
+              <a:spcAft>
+                <a:spcPts val="300"/>
+              </a:spcAft>
+              <a:buSzPct val="100000"/>
+              <a:buChar char="•"/>
+            </a:pPr>
+            <a:r>
+              <a:rPr lang="en-US" sz="1500" b="1" dirty="0">
+                <a:solidFill>
+                  <a:srgbClr val="1A1A1A"/>
+                </a:solidFill>
+              </a:rPr>
+              <a:t>Share: </a:t>
+            </a:r>
+            <a:pPr algn="l" indent="0" marL="0">
+              <a:spcAft>
+                <a:spcPts val="300"/>
+              </a:spcAft>
+              <a:buNone/>
+            </a:pPr>
+            <a:r>
+              <a:rPr lang="en-US" sz="1500" dirty="0">
+                <a:solidFill>
+                  <a:srgbClr val="1A1A1A"/>
+                </a:solidFill>
+              </a:rPr>
+              <a:t>FTAI has added ~4 pts a year since 2024</a:t>
+            </a:r>
+            <a:endParaRPr lang="en-US" sz="1500" dirty="0"/>
+          </a:p>
+          <a:p>
+            <a:pPr algn="l" marL="342900" indent="-342900">
+              <a:spcAft>
+                <a:spcPts val="300"/>
+              </a:spcAft>
+              <a:buSzPct val="100000"/>
+              <a:buChar char="•"/>
+            </a:pPr>
+            <a:r>
+              <a:rPr lang="en-US" sz="1500" b="1" dirty="0">
+                <a:solidFill>
+                  <a:srgbClr val="1A1A1A"/>
+                </a:solidFill>
+              </a:rPr>
+              <a:t>Power: </a:t>
+            </a:r>
+            <a:pPr algn="l" indent="0" marL="0">
+              <a:spcAft>
+                <a:spcPts val="300"/>
+              </a:spcAft>
+              <a:buNone/>
+            </a:pPr>
+            <a:r>
+              <a:rPr lang="en-US" sz="1500" dirty="0">
+                <a:solidFill>
+                  <a:srgbClr val="1A1A1A"/>
+                </a:solidFill>
+              </a:rPr>
+              <a:t>signed order covers the $450M low end</a:t>
+            </a:r>
+            <a:endParaRPr lang="en-US" sz="1500" dirty="0"/>
+          </a:p>
+        </p:txBody>
+      </p:sp>
+      <p:sp>
+        <p:nvSpPr>
+          <p:cNvPr id="19" name="Source"/>
+          <p:cNvSpPr txBox="1"/>
+          <p:nvPr/>
+        </p:nvSpPr>
+        <p:spPr>
+          <a:xfrm>
+            <a:off x="320040" y="6355080"/>
+            <a:ext cx="7132320" cy="274320"/>
+          </a:xfrm>
+          <a:prstGeom prst="rect">
+            <a:avLst/>
+          </a:prstGeom>
+          <a:noFill/>
+          <a:ln/>
+        </p:spPr>
+        <p:txBody>
+          <a:bodyPr wrap="square" lIns="0" tIns="0" rIns="0" bIns="0" rtlCol="0" anchor="ctr"/>
+          <a:lstStyle/>
+          <a:p>
+            <a:pPr indent="0" marL="0">
+              <a:buNone/>
+            </a:pPr>
+            <a:r>
+              <a:rPr lang="en-US" sz="1100" b="1" dirty="0">
+                <a:solidFill>
+                  <a:srgbClr val="1A1A1A"/>
+                </a:solidFill>
+              </a:rPr>
+              <a:t>Source: </a:t>
+            </a:r>
+            <a:pPr indent="0" marL="0">
+              <a:buNone/>
+            </a:pPr>
+            <a:r>
+              <a:rPr lang="en-US" sz="1100" dirty="0">
+                <a:solidFill>
+                  <a:srgbClr val="1A1A1A"/>
+                </a:solidFill>
+              </a:rPr>
+              <a:t>GPS model (DCF tab R/R: bull vs. bear blended DCF; Assumptions tab bull/bear rows); FTAI filings and earnings calls</a:t>
+            </a:r>
+            <a:endParaRPr lang="en-US" sz="1100" dirty="0"/>
+          </a:p>
+        </p:txBody>
+      </p:sp>
+      <p:sp>
+        <p:nvSpPr>
+          <p:cNvPr id="25" name="Slide Number Placeholder 0"/>
+          <p:cNvSpPr>
+            <a:spLocks noGrp="1"/>
+          </p:cNvSpPr>
+          <p:nvPr>
+            <p:ph type="sldNum" sz="quarter" idx="4294967295"/>
+          </p:nvPr>
+        </p:nvSpPr>
+        <p:spPr>
+          <a:xfrm>
+            <a:off x="7635240" y="6327648"/>
+            <a:ext cx="411480" cy="274320"/>
+          </a:xfrm>
+          <a:prstGeom prst="rect">
+            <a:avLst/>
+          </a:prstGeom>
+          <a:extLst>
+            <a:ext uri="{C572A759-6A51-4108-AA02-DFA0A04FC94B}">
+              <ma14:wrappingTextBoxFlag xmlns:ma14="http://schemas.microsoft.com/office/mac/drawingml/2011/main" val="0"/>
+            </a:ext>
+          </a:extLst>
+        </p:spPr>
+        <p:txBody>
+          <a:bodyPr/>
+          <a:lstStyle>
+            <a:lvl1pPr>
+              <a:defRPr sz="1100">
+                <a:solidFill>
+                  <a:srgbClr val="1A1A1A"/>
+                </a:solidFill>
+              </a:defRPr>
+            </a:lvl1pPr>
+          </a:lstStyle>
+          <a:p>
+            <a:pPr algn="r"/>
+            <a:fld id="{F7021451-1387-4CA6-816F-3879F97B5CBC}" type="slidenum">
+              <a:rPr b="1" lang="en-US"/>
+              <a:t>25</a:t>
             </a:fld>
             <a:endParaRPr lang="en-US"/>
           </a:p>

--- a/deck/FTAI_Long_Pitch.pptx
+++ b/deck/FTAI_Long_Pitch.pptx
@@ -131,12 +131,12 @@
   <p:extLst>
     <p:ext uri="{521415D9-36F7-43E2-AB2F-B90AF26B5E84}">
       <p14:sectionLst xmlns:p14="http://schemas.microsoft.com/office/powerpoint/2010/main">
-        <p14:section name="Introduction" id="{c5c0e07b-687a-7f8e-3e87-23cb68f31260}">
+        <p14:section name="Introduction" id="{b4668d57-ea38-9ff6-5948-9668f7db2b63}">
           <p14:sldIdLst>
             <p14:sldId id="256"/>
           </p14:sldIdLst>
         </p14:section>
-        <p14:section name="The Opportunity" id="{d5029d9b-8eec-037b-25d7-88dfbcbc269e}">
+        <p14:section name="The Opportunity" id="{448ad12a-45af-eccb-d1fa-3b3cf516d122}">
           <p14:sldIdLst>
             <p14:sldId id="257"/>
             <p14:sldId id="258"/>
@@ -144,18 +144,18 @@
             <p14:sldId id="260"/>
           </p14:sldIdLst>
         </p14:section>
-        <p14:section name="Returns" id="{f109ba59-c0e4-e60e-efb6-78af97027b92}">
+        <p14:section name="Returns" id="{219786e3-9cae-13d5-0c1c-125a9aee9706}">
           <p14:sldIdLst>
             <p14:sldId id="261"/>
           </p14:sldIdLst>
         </p14:section>
-        <p14:section name="Business Overview" id="{96bb5839-c38d-f29f-fa37-d3eb5ae75934}">
+        <p14:section name="Business Overview" id="{522d8589-2ec5-35e2-7449-0c7eab2895fa}">
           <p14:sldIdLst>
             <p14:sldId id="262"/>
             <p14:sldId id="263"/>
           </p14:sldIdLst>
         </p14:section>
-        <p14:section name="Thesis 1a" id="{623406da-f14b-c1a0-c40b-490ca1303d7a}">
+        <p14:section name="Thesis 1a" id="{22f8d76a-f30f-c4bf-86f4-420608c15502}">
           <p14:sldIdLst>
             <p14:sldId id="264"/>
             <p14:sldId id="265"/>
@@ -163,7 +163,7 @@
             <p14:sldId id="267"/>
           </p14:sldIdLst>
         </p14:section>
-        <p14:section name="Thesis 1b" id="{e63bd6f4-4fa3-46a6-ecf0-069993d4805b}">
+        <p14:section name="Thesis 1b" id="{75b95146-14aa-a80a-1418-d84dd841689c}">
           <p14:sldIdLst>
             <p14:sldId id="268"/>
             <p14:sldId id="269"/>
@@ -174,7 +174,7 @@
             <p14:sldId id="274"/>
           </p14:sldIdLst>
         </p14:section>
-        <p14:section name="Thesis 2" id="{f25d5165-d9d0-2d76-e985-d37c0c2c62ee}">
+        <p14:section name="Thesis 2" id="{7fe01810-0a30-79e6-b044-06c5de877ae0}">
           <p14:sldIdLst>
             <p14:sldId id="275"/>
             <p14:sldId id="276"/>
@@ -182,7 +182,7 @@
             <p14:sldId id="278"/>
           </p14:sldIdLst>
         </p14:section>
-        <p14:section name="Valuation" id="{4e7f0dc8-aa65-8a0c-bcf3-0bef036c4187}">
+        <p14:section name="Valuation" id="{dc1e8914-997e-e500-3f5e-6b5e39d59630}">
           <p14:sldIdLst>
             <p14:sldId id="279"/>
             <p14:sldId id="280"/>
@@ -5216,7 +5216,7 @@
 </c:chartSpace>
 </file>
 
-<file path=ppt/charts/chart3.xml><?xml version="1.0" encoding="utf-8"?>
+<file path=ppt/charts/chart24.xml><?xml version="1.0" encoding="utf-8"?>
 <c:chartSpace xmlns:c="http://schemas.openxmlformats.org/drawingml/2006/chart" xmlns:a="http://schemas.openxmlformats.org/drawingml/2006/main" xmlns:r="http://schemas.openxmlformats.org/officeDocument/2006/relationships">
   <c:date1904 val="0"/>
   <c:roundedCorners val="1"/>
@@ -5256,7 +5256,7 @@
               <a:lstStyle/>
               <a:p>
                 <a:pPr>
-                  <a:defRPr b="1" i="0" strike="noStrike" sz="1500" u="none">
+                  <a:defRPr b="1" i="0" strike="noStrike" sz="1100" u="none">
                     <a:solidFill>
                       <a:srgbClr val="FFFFFF"/>
                     </a:solidFill>
@@ -5276,21 +5276,30 @@
           </c:dLbls>
           <c:cat>
             <c:multiLvlStrRef>
-              <c:f>Sheet1!$A$2:$A$5</c:f>
+              <c:f>Sheet1!$A$2:$A$8</c:f>
               <c:multiLvlStrCache>
-                <c:ptCount val="4"/>
+                <c:ptCount val="7"/>
                 <c:lvl>
                   <c:pt idx="0">
-                    <c:v>Current Price</c:v>
+                    <c:v>Aerospace</c:v>
                   </c:pt>
                   <c:pt idx="1">
-                    <c:v>Core ex-Power</c:v>
+                    <c:v>Power</c:v>
                   </c:pt>
                   <c:pt idx="2">
-                    <c:v>Power</c:v>
+                    <c:v>Leasing</c:v>
                   </c:pt>
                   <c:pt idx="3">
+                    <c:v>– Corporate</c:v>
+                  </c:pt>
+                  <c:pt idx="4">
+                    <c:v>– Net debt</c:v>
+                  </c:pt>
+                  <c:pt idx="5">
                     <c:v>SOTP</c:v>
+                  </c:pt>
+                  <c:pt idx="6">
+                    <c:v>Today</c:v>
                   </c:pt>
                 </c:lvl>
               </c:multiLvlStrCache>
@@ -5298,20 +5307,29 @@
           </c:cat>
           <c:val>
             <c:numRef>
-              <c:f>Sheet1!$B$2:$B$5</c:f>
+              <c:f>Sheet1!$B$2:$B$8</c:f>
               <c:numCache>
                 <c:formatCode>General</c:formatCode>
-                <c:ptCount val="4"/>
+                <c:ptCount val="7"/>
                 <c:pt idx="0">
                   <c:v>0</c:v>
                 </c:pt>
                 <c:pt idx="1">
+                  <c:v>236.9</c:v>
+                </c:pt>
+                <c:pt idx="2">
+                  <c:v>288.8</c:v>
+                </c:pt>
+                <c:pt idx="3">
+                  <c:v>300.4</c:v>
+                </c:pt>
+                <c:pt idx="4">
+                  <c:v>276.7</c:v>
+                </c:pt>
+                <c:pt idx="5">
                   <c:v>0</c:v>
                 </c:pt>
-                <c:pt idx="2">
-                  <c:v>224.75</c:v>
-                </c:pt>
-                <c:pt idx="3">
+                <c:pt idx="6">
                   <c:v>0</c:v>
                 </c:pt>
               </c:numCache>
@@ -5327,7 +5345,7 @@
               <c:strCache>
                 <c:ptCount val="1"/>
                 <c:pt idx="0">
-                  <c:v>Value</c:v>
+                  <c:v>Adds</c:v>
                 </c:pt>
               </c:strCache>
             </c:strRef>
@@ -5346,7 +5364,7 @@
               <a:lstStyle/>
               <a:p>
                 <a:pPr>
-                  <a:defRPr b="1" i="0" strike="noStrike" sz="1500" u="none">
+                  <a:defRPr b="1" i="0" strike="noStrike" sz="1100" u="none">
                     <a:solidFill>
                       <a:srgbClr val="FFFFFF"/>
                     </a:solidFill>
@@ -5366,21 +5384,30 @@
           </c:dLbls>
           <c:cat>
             <c:multiLvlStrRef>
-              <c:f>Sheet1!$A$2:$A$5</c:f>
+              <c:f>Sheet1!$A$2:$A$8</c:f>
               <c:multiLvlStrCache>
-                <c:ptCount val="4"/>
+                <c:ptCount val="7"/>
                 <c:lvl>
                   <c:pt idx="0">
-                    <c:v>Current Price</c:v>
+                    <c:v>Aerospace</c:v>
                   </c:pt>
                   <c:pt idx="1">
-                    <c:v>Core ex-Power</c:v>
+                    <c:v>Power</c:v>
                   </c:pt>
                   <c:pt idx="2">
-                    <c:v>Power</c:v>
+                    <c:v>Leasing</c:v>
                   </c:pt>
                   <c:pt idx="3">
+                    <c:v>– Corporate</c:v>
+                  </c:pt>
+                  <c:pt idx="4">
+                    <c:v>– Net debt</c:v>
+                  </c:pt>
+                  <c:pt idx="5">
                     <c:v>SOTP</c:v>
+                  </c:pt>
+                  <c:pt idx="6">
+                    <c:v>Today</c:v>
                   </c:pt>
                 </c:lvl>
               </c:multiLvlStrCache>
@@ -5388,21 +5415,30 @@
           </c:cat>
           <c:val>
             <c:numRef>
-              <c:f>Sheet1!$C$2:$C$5</c:f>
+              <c:f>Sheet1!$C$2:$C$8</c:f>
               <c:numCache>
                 <c:formatCode>General</c:formatCode>
-                <c:ptCount val="4"/>
+                <c:ptCount val="7"/>
                 <c:pt idx="0">
-                  <c:v>167.03</c:v>
+                  <c:v>236.9</c:v>
                 </c:pt>
                 <c:pt idx="1">
-                  <c:v>224.75</c:v>
+                  <c:v>51.9</c:v>
                 </c:pt>
                 <c:pt idx="2">
+                  <c:v>39.4</c:v>
+                </c:pt>
+                <c:pt idx="3">
                   <c:v>0</c:v>
                 </c:pt>
-                <c:pt idx="3">
-                  <c:v>276.65</c:v>
+                <c:pt idx="4">
+                  <c:v>0</c:v>
+                </c:pt>
+                <c:pt idx="5">
+                  <c:v>0</c:v>
+                </c:pt>
+                <c:pt idx="6">
+                  <c:v>0</c:v>
                 </c:pt>
               </c:numCache>
             </c:numRef>
@@ -5417,7 +5453,7 @@
               <c:strCache>
                 <c:ptCount val="1"/>
                 <c:pt idx="0">
-                  <c:v>Power</c:v>
+                  <c:v>Less</c:v>
                 </c:pt>
               </c:strCache>
             </c:strRef>
@@ -5436,7 +5472,7 @@
               <a:lstStyle/>
               <a:p>
                 <a:pPr>
-                  <a:defRPr b="1" i="0" strike="noStrike" sz="1500" u="none">
+                  <a:defRPr b="1" i="0" strike="noStrike" sz="1100" u="none">
                     <a:solidFill>
                       <a:srgbClr val="FFFFFF"/>
                     </a:solidFill>
@@ -5456,21 +5492,30 @@
           </c:dLbls>
           <c:cat>
             <c:multiLvlStrRef>
-              <c:f>Sheet1!$A$2:$A$5</c:f>
+              <c:f>Sheet1!$A$2:$A$8</c:f>
               <c:multiLvlStrCache>
-                <c:ptCount val="4"/>
+                <c:ptCount val="7"/>
                 <c:lvl>
                   <c:pt idx="0">
-                    <c:v>Current Price</c:v>
+                    <c:v>Aerospace</c:v>
                   </c:pt>
                   <c:pt idx="1">
-                    <c:v>Core ex-Power</c:v>
+                    <c:v>Power</c:v>
                   </c:pt>
                   <c:pt idx="2">
-                    <c:v>Power</c:v>
+                    <c:v>Leasing</c:v>
                   </c:pt>
                   <c:pt idx="3">
+                    <c:v>– Corporate</c:v>
+                  </c:pt>
+                  <c:pt idx="4">
+                    <c:v>– Net debt</c:v>
+                  </c:pt>
+                  <c:pt idx="5">
                     <c:v>SOTP</c:v>
+                  </c:pt>
+                  <c:pt idx="6">
+                    <c:v>Today</c:v>
                   </c:pt>
                 </c:lvl>
               </c:multiLvlStrCache>
@@ -5478,10 +5523,10 @@
           </c:cat>
           <c:val>
             <c:numRef>
-              <c:f>Sheet1!$D$2:$D$5</c:f>
+              <c:f>Sheet1!$D$2:$D$8</c:f>
               <c:numCache>
                 <c:formatCode>General</c:formatCode>
-                <c:ptCount val="4"/>
+                <c:ptCount val="7"/>
                 <c:pt idx="0">
                   <c:v>0</c:v>
                 </c:pt>
@@ -5489,10 +5534,235 @@
                   <c:v>0</c:v>
                 </c:pt>
                 <c:pt idx="2">
-                  <c:v>51.9</c:v>
+                  <c:v>0</c:v>
+                </c:pt>
+                <c:pt idx="3">
+                  <c:v>27.8</c:v>
+                </c:pt>
+                <c:pt idx="4">
+                  <c:v>23.8</c:v>
+                </c:pt>
+                <c:pt idx="5">
+                  <c:v>0</c:v>
+                </c:pt>
+                <c:pt idx="6">
+                  <c:v>0</c:v>
+                </c:pt>
+              </c:numCache>
+            </c:numRef>
+          </c:val>
+        </c:ser>
+        <c:ser>
+          <c:idx val="3"/>
+          <c:order val="3"/>
+          <c:tx>
+            <c:strRef>
+              <c:f>Sheet1!$E$1</c:f>
+              <c:strCache>
+                <c:ptCount val="1"/>
+                <c:pt idx="0">
+                  <c:v>Totals</c:v>
+                </c:pt>
+              </c:strCache>
+            </c:strRef>
+          </c:tx>
+          <c:spPr>
+            <a:solidFill>
+              <a:srgbClr val="0A1C58"/>
+            </a:solidFill>
+            <a:effectLst/>
+          </c:spPr>
+          <c:invertIfNegative val="0"/>
+          <c:dLbls>
+            <c:numFmt formatCode="&quot;$&quot;0;;;" sourceLinked="0"/>
+            <c:txPr>
+              <a:bodyPr/>
+              <a:lstStyle/>
+              <a:p>
+                <a:pPr>
+                  <a:defRPr b="1" i="0" strike="noStrike" sz="1100" u="none">
+                    <a:solidFill>
+                      <a:srgbClr val="FFFFFF"/>
+                    </a:solidFill>
+                    <a:latin typeface="+mn-lt"/>
+                  </a:defRPr>
+                </a:pPr>
+              </a:p>
+            </c:txPr>
+            <c:dLblPos val="inEnd"/>
+            <c:showLegendKey val="0"/>
+            <c:showVal val="1"/>
+            <c:showCatName val="0"/>
+            <c:showSerName val="0"/>
+            <c:showPercent val="0"/>
+            <c:showBubbleSize val="0"/>
+            <c:showLeaderLines val="0"/>
+          </c:dLbls>
+          <c:cat>
+            <c:multiLvlStrRef>
+              <c:f>Sheet1!$A$2:$A$8</c:f>
+              <c:multiLvlStrCache>
+                <c:ptCount val="7"/>
+                <c:lvl>
+                  <c:pt idx="0">
+                    <c:v>Aerospace</c:v>
+                  </c:pt>
+                  <c:pt idx="1">
+                    <c:v>Power</c:v>
+                  </c:pt>
+                  <c:pt idx="2">
+                    <c:v>Leasing</c:v>
+                  </c:pt>
+                  <c:pt idx="3">
+                    <c:v>– Corporate</c:v>
+                  </c:pt>
+                  <c:pt idx="4">
+                    <c:v>– Net debt</c:v>
+                  </c:pt>
+                  <c:pt idx="5">
+                    <c:v>SOTP</c:v>
+                  </c:pt>
+                  <c:pt idx="6">
+                    <c:v>Today</c:v>
+                  </c:pt>
+                </c:lvl>
+              </c:multiLvlStrCache>
+            </c:multiLvlStrRef>
+          </c:cat>
+          <c:val>
+            <c:numRef>
+              <c:f>Sheet1!$E$2:$E$8</c:f>
+              <c:numCache>
+                <c:formatCode>General</c:formatCode>
+                <c:ptCount val="7"/>
+                <c:pt idx="0">
+                  <c:v>0</c:v>
+                </c:pt>
+                <c:pt idx="1">
+                  <c:v>0</c:v>
+                </c:pt>
+                <c:pt idx="2">
+                  <c:v>0</c:v>
                 </c:pt>
                 <c:pt idx="3">
                   <c:v>0</c:v>
+                </c:pt>
+                <c:pt idx="4">
+                  <c:v>0</c:v>
+                </c:pt>
+                <c:pt idx="5">
+                  <c:v>276.7</c:v>
+                </c:pt>
+                <c:pt idx="6">
+                  <c:v>0</c:v>
+                </c:pt>
+              </c:numCache>
+            </c:numRef>
+          </c:val>
+        </c:ser>
+        <c:ser>
+          <c:idx val="4"/>
+          <c:order val="4"/>
+          <c:tx>
+            <c:strRef>
+              <c:f>Sheet1!$F$1</c:f>
+              <c:strCache>
+                <c:ptCount val="1"/>
+                <c:pt idx="0">
+                  <c:v>Today</c:v>
+                </c:pt>
+              </c:strCache>
+            </c:strRef>
+          </c:tx>
+          <c:spPr>
+            <a:solidFill>
+              <a:srgbClr val="847C7A"/>
+            </a:solidFill>
+            <a:effectLst/>
+          </c:spPr>
+          <c:invertIfNegative val="0"/>
+          <c:dLbls>
+            <c:numFmt formatCode="&quot;$&quot;0;;;" sourceLinked="0"/>
+            <c:txPr>
+              <a:bodyPr/>
+              <a:lstStyle/>
+              <a:p>
+                <a:pPr>
+                  <a:defRPr b="1" i="0" strike="noStrike" sz="1100" u="none">
+                    <a:solidFill>
+                      <a:srgbClr val="FFFFFF"/>
+                    </a:solidFill>
+                    <a:latin typeface="+mn-lt"/>
+                  </a:defRPr>
+                </a:pPr>
+              </a:p>
+            </c:txPr>
+            <c:dLblPos val="inEnd"/>
+            <c:showLegendKey val="0"/>
+            <c:showVal val="1"/>
+            <c:showCatName val="0"/>
+            <c:showSerName val="0"/>
+            <c:showPercent val="0"/>
+            <c:showBubbleSize val="0"/>
+            <c:showLeaderLines val="0"/>
+          </c:dLbls>
+          <c:cat>
+            <c:multiLvlStrRef>
+              <c:f>Sheet1!$A$2:$A$8</c:f>
+              <c:multiLvlStrCache>
+                <c:ptCount val="7"/>
+                <c:lvl>
+                  <c:pt idx="0">
+                    <c:v>Aerospace</c:v>
+                  </c:pt>
+                  <c:pt idx="1">
+                    <c:v>Power</c:v>
+                  </c:pt>
+                  <c:pt idx="2">
+                    <c:v>Leasing</c:v>
+                  </c:pt>
+                  <c:pt idx="3">
+                    <c:v>– Corporate</c:v>
+                  </c:pt>
+                  <c:pt idx="4">
+                    <c:v>– Net debt</c:v>
+                  </c:pt>
+                  <c:pt idx="5">
+                    <c:v>SOTP</c:v>
+                  </c:pt>
+                  <c:pt idx="6">
+                    <c:v>Today</c:v>
+                  </c:pt>
+                </c:lvl>
+              </c:multiLvlStrCache>
+            </c:multiLvlStrRef>
+          </c:cat>
+          <c:val>
+            <c:numRef>
+              <c:f>Sheet1!$F$2:$F$8</c:f>
+              <c:numCache>
+                <c:formatCode>General</c:formatCode>
+                <c:ptCount val="7"/>
+                <c:pt idx="0">
+                  <c:v>0</c:v>
+                </c:pt>
+                <c:pt idx="1">
+                  <c:v>0</c:v>
+                </c:pt>
+                <c:pt idx="2">
+                  <c:v>0</c:v>
+                </c:pt>
+                <c:pt idx="3">
+                  <c:v>0</c:v>
+                </c:pt>
+                <c:pt idx="4">
+                  <c:v>0</c:v>
+                </c:pt>
+                <c:pt idx="5">
+                  <c:v>0</c:v>
+                </c:pt>
+                <c:pt idx="6">
+                  <c:v>167</c:v>
                 </c:pt>
               </c:numCache>
             </c:numRef>
@@ -5505,7 +5775,7 @@
             <a:lstStyle/>
             <a:p>
               <a:pPr>
-                <a:defRPr b="1" i="0" strike="noStrike" sz="1500" u="none">
+                <a:defRPr b="1" i="0" strike="noStrike" sz="1100" u="none">
                   <a:solidFill>
                     <a:srgbClr val="FFFFFF"/>
                   </a:solidFill>
@@ -5523,7 +5793,7 @@
           <c:showBubbleSize val="0"/>
           <c:showLeaderLines val="0"/>
         </c:dLbls>
-        <c:gapWidth val="35"/>
+        <c:gapWidth val="30"/>
         <c:overlap val="100"/>
         <c:axId val="2094734554"/>
         <c:axId val="2094734552"/>
@@ -5554,7 +5824,7 @@
           <a:lstStyle/>
           <a:p>
             <a:pPr>
-              <a:defRPr sz="1200" b="0" i="0" u="none" strike="noStrike">
+              <a:defRPr sz="1000" b="0" i="0" u="none" strike="noStrike">
                 <a:solidFill>
                   <a:srgbClr val="1A1A1A"/>
                 </a:solidFill>
@@ -5574,7 +5844,256 @@
         <c:axId val="2094734552"/>
         <c:scaling>
           <c:orientation val="minMax"/>
-          <c:max val="330"/>
+          <c:max val="345"/>
+          <c:min val="0"/>
+        </c:scaling>
+        <c:delete val="1"/>
+        <c:axPos val="l"/>
+        <c:numFmt formatCode="General" sourceLinked="0"/>
+        <c:majorTickMark val="out"/>
+        <c:minorTickMark val="none"/>
+        <c:tickLblPos val="nextTo"/>
+        <c:spPr>
+          <a:ln w="12700" cap="flat">
+            <a:solidFill>
+              <a:srgbClr val="888888"/>
+            </a:solidFill>
+            <a:prstDash val="solid"/>
+            <a:round/>
+          </a:ln>
+        </c:spPr>
+        <c:txPr>
+          <a:bodyPr/>
+          <a:lstStyle/>
+          <a:p>
+            <a:pPr>
+              <a:defRPr sz="1200" b="0" i="0" u="none" strike="noStrike">
+                <a:solidFill>
+                  <a:srgbClr val="000000"/>
+                </a:solidFill>
+                <a:latin typeface="Arial"/>
+              </a:defRPr>
+            </a:pPr>
+            <a:endParaRPr lang="en-US"/>
+          </a:p>
+        </c:txPr>
+        <c:crossAx val="2094734554"/>
+        <c:crosses val="autoZero"/>
+        <c:crossBetween val="between"/>
+      </c:valAx>
+      <c:spPr>
+        <a:noFill/>
+        <a:ln>
+          <a:noFill/>
+        </a:ln>
+        <a:effectLst/>
+      </c:spPr>
+    </c:plotArea>
+    <c:plotVisOnly val="1"/>
+    <c:dispBlanksAs val="span"/>
+  </c:chart>
+  <c:spPr>
+    <a:noFill/>
+    <a:ln>
+      <a:noFill/>
+    </a:ln>
+    <a:effectLst/>
+  </c:spPr>
+  <c:externalData r:id="rId1">
+    <c:autoUpdate val="0"/>
+  </c:externalData>
+</c:chartSpace>
+</file>
+
+<file path=ppt/charts/chart3.xml><?xml version="1.0" encoding="utf-8"?>
+<c:chartSpace xmlns:c="http://schemas.openxmlformats.org/drawingml/2006/chart" xmlns:a="http://schemas.openxmlformats.org/drawingml/2006/main" xmlns:r="http://schemas.openxmlformats.org/officeDocument/2006/relationships">
+  <c:date1904 val="0"/>
+  <c:roundedCorners val="1"/>
+  <c:chart>
+    <c:autoTitleDeleted val="1"/>
+    <c:plotArea>
+      <c:layout/>
+      <c:barChart>
+        <c:barDir val="col"/>
+        <c:grouping val="clustered"/>
+        <c:varyColors val="0"/>
+        <c:ser>
+          <c:idx val="0"/>
+          <c:order val="0"/>
+          <c:tx>
+            <c:strRef>
+              <c:f>Sheet1!$B$1</c:f>
+              <c:strCache>
+                <c:ptCount val="1"/>
+                <c:pt idx="0">
+                  <c:v>Power EBITDA</c:v>
+                </c:pt>
+              </c:strCache>
+            </c:strRef>
+          </c:tx>
+          <c:spPr>
+            <a:solidFill>
+              <a:srgbClr val="0A1C58"/>
+            </a:solidFill>
+            <a:effectLst/>
+          </c:spPr>
+          <c:invertIfNegative val="0"/>
+          <c:dLbls>
+            <c:numFmt formatCode="#,##0" sourceLinked="0"/>
+            <c:txPr>
+              <a:bodyPr/>
+              <a:lstStyle/>
+              <a:p>
+                <a:pPr>
+                  <a:defRPr b="1" i="0" strike="noStrike" sz="1200" u="none">
+                    <a:solidFill>
+                      <a:srgbClr val="1A1A1A"/>
+                    </a:solidFill>
+                    <a:latin typeface="+mn-lt"/>
+                  </a:defRPr>
+                </a:pPr>
+              </a:p>
+            </c:txPr>
+            <c:showLegendKey val="0"/>
+            <c:showVal val="1"/>
+            <c:showCatName val="0"/>
+            <c:showSerName val="0"/>
+            <c:showPercent val="0"/>
+            <c:showBubbleSize val="0"/>
+            <c:showLeaderLines val="0"/>
+          </c:dLbls>
+          <c:cat>
+            <c:multiLvlStrRef>
+              <c:f>Sheet1!$A$2:$A$7</c:f>
+              <c:multiLvlStrCache>
+                <c:ptCount val="6"/>
+                <c:lvl>
+                  <c:pt idx="0">
+                    <c:v>FY26E</c:v>
+                  </c:pt>
+                  <c:pt idx="1">
+                    <c:v>FY27E</c:v>
+                  </c:pt>
+                  <c:pt idx="2">
+                    <c:v>FY28E</c:v>
+                  </c:pt>
+                  <c:pt idx="3">
+                    <c:v>FY29E</c:v>
+                  </c:pt>
+                  <c:pt idx="4">
+                    <c:v>FY30E</c:v>
+                  </c:pt>
+                  <c:pt idx="5">
+                    <c:v>FY31E</c:v>
+                  </c:pt>
+                </c:lvl>
+              </c:multiLvlStrCache>
+            </c:multiLvlStrRef>
+          </c:cat>
+          <c:val>
+            <c:numRef>
+              <c:f>Sheet1!$B$2:$B$7</c:f>
+              <c:numCache>
+                <c:formatCode>General</c:formatCode>
+                <c:ptCount val="6"/>
+                <c:pt idx="0">
+                  <c:v>20</c:v>
+                </c:pt>
+                <c:pt idx="1">
+                  <c:v>450</c:v>
+                </c:pt>
+                <c:pt idx="2">
+                  <c:v>900</c:v>
+                </c:pt>
+                <c:pt idx="3">
+                  <c:v>1100</c:v>
+                </c:pt>
+                <c:pt idx="4">
+                  <c:v>1200</c:v>
+                </c:pt>
+                <c:pt idx="5">
+                  <c:v>1300</c:v>
+                </c:pt>
+              </c:numCache>
+            </c:numRef>
+          </c:val>
+        </c:ser>
+        <c:dLbls>
+          <c:numFmt formatCode="#,##0" sourceLinked="0"/>
+          <c:txPr>
+            <a:bodyPr/>
+            <a:lstStyle/>
+            <a:p>
+              <a:pPr>
+                <a:defRPr b="1" i="0" strike="noStrike" sz="1200" u="none">
+                  <a:solidFill>
+                    <a:srgbClr val="1A1A1A"/>
+                  </a:solidFill>
+                  <a:latin typeface="+mn-lt"/>
+                </a:defRPr>
+              </a:pPr>
+            </a:p>
+          </c:txPr>
+          <c:showLegendKey val="0"/>
+          <c:showVal val="1"/>
+          <c:showCatName val="0"/>
+          <c:showSerName val="0"/>
+          <c:showPercent val="0"/>
+          <c:showBubbleSize val="0"/>
+          <c:showLeaderLines val="0"/>
+        </c:dLbls>
+        <c:gapWidth val="40"/>
+        <c:overlap val="0"/>
+        <c:axId val="2094734554"/>
+        <c:axId val="2094734552"/>
+        <c:axId val="2094734556"/>
+      </c:barChart>
+      <c:catAx>
+        <c:axId val="2094734554"/>
+        <c:scaling>
+          <c:orientation val="minMax"/>
+        </c:scaling>
+        <c:delete val="0"/>
+        <c:axPos val="b"/>
+        <c:numFmt formatCode="General" sourceLinked="1"/>
+        <c:majorTickMark val="out"/>
+        <c:minorTickMark val="none"/>
+        <c:tickLblPos val="low"/>
+        <c:spPr>
+          <a:ln w="12700" cap="flat">
+            <a:solidFill>
+              <a:srgbClr val="BFBFBF"/>
+            </a:solidFill>
+            <a:prstDash val="solid"/>
+            <a:round/>
+          </a:ln>
+        </c:spPr>
+        <c:txPr>
+          <a:bodyPr/>
+          <a:lstStyle/>
+          <a:p>
+            <a:pPr>
+              <a:defRPr sz="1100" b="0" i="0" u="none" strike="noStrike">
+                <a:solidFill>
+                  <a:srgbClr val="1A1A1A"/>
+                </a:solidFill>
+                <a:latin typeface="+mn-lt"/>
+              </a:defRPr>
+            </a:pPr>
+            <a:endParaRPr lang="en-US"/>
+          </a:p>
+        </c:txPr>
+        <c:crossAx val="2094734552"/>
+        <c:crosses val="autoZero"/>
+        <c:auto val="1"/>
+        <c:lblAlgn val="ctr"/>
+        <c:noMultiLvlLbl val="1"/>
+      </c:catAx>
+      <c:valAx>
+        <c:axId val="2094734552"/>
+        <c:scaling>
+          <c:orientation val="minMax"/>
+          <c:max val="1500"/>
           <c:min val="0"/>
         </c:scaling>
         <c:delete val="1"/>
@@ -9888,7 +10407,7 @@
           <a:p>
             <a:r>
               <a:rPr lang="en-US" dirty="0"/>
-              <a:t>Reward = bull-case blended DCF upside (+131.9%); risk = bear-case blended DCF downside (−38.6%); skew 3.4x (GPS model, DCF tab). Bull rows: Aerospace margin ex-PMA rising to 33.5% by FY31, FTAI share to 25% by FY31, higher shop visits, Power units ahead of base ($550M FY27E EBITDA). Bear rows: margin ex-PMA flat at 28.5%, no PMA, OEM pass-through 30%, share capped at 15%, SCI fleet capped at 400 aircraft, faster retirements, Power at 50% JV share and 30% margins ($113M FY27E EBITDA). Sanity check: FY25 Aerospace margin 34.7%; share ~4% → ~8% → ~12% (2024–26E); the $1.465B J&amp;F order underpins the $450M low end of FY27 Power guidance.</a:t>
+              <a:t>SOTP per share: Aerospace $1,541M × 16x = $237; Power $450M × 12x = $52; Leasing + SCI $455M × 9x = $39; corporate ($207M at the blended 14.0x) = −$28; net debt and preferred = −$24; total $277 vs. $167.03 (+66%). Excluding Power: $225 (+35%).</a:t>
             </a:r>
             <a:endParaRPr lang="en-US" dirty="0"/>
           </a:p>
@@ -23227,7 +23746,7 @@
                   <a:schemeClr val="tx2"/>
                 </a:solidFill>
               </a:rPr>
-              <a:t>Valuation: Reward vs. Risk</a:t>
+              <a:t>Valuation: Sum of the Parts</a:t>
             </a:r>
             <a:endParaRPr lang="en-US" sz="3200" dirty="0"/>
           </a:p>
@@ -23265,7 +23784,7 @@
                   <a:schemeClr val="tx2"/>
                 </a:solidFill>
               </a:rPr>
-              <a:t>3.4x reward/risk skew, with a bear case that assumes nothing goes right.</a:t>
+              <a:t>Every segment at a sober multiple gets to $277, before any new Power contract.</a:t>
             </a:r>
             <a:endParaRPr lang="en-US" sz="1700" dirty="0"/>
           </a:p>
@@ -23273,14 +23792,14 @@
       </p:sp>
       <p:sp>
         <p:nvSpPr>
-          <p:cNvPr id="4" name="RR header"/>
+          <p:cNvPr id="4" name="Waterfall header"/>
           <p:cNvSpPr txBox="1"/>
           <p:nvPr/>
         </p:nvSpPr>
         <p:spPr>
           <a:xfrm>
-            <a:off x="457200" y="1828800"/>
-            <a:ext cx="3657600" cy="384048"/>
+            <a:off x="320040" y="1554480"/>
+            <a:ext cx="5715000" cy="365760"/>
           </a:xfrm>
           <a:prstGeom prst="rect">
             <a:avLst/>
@@ -23292,514 +23811,31 @@
           <a:bodyPr wrap="square" lIns="0" tIns="0" rIns="0" bIns="0" rtlCol="0" anchor="b"/>
           <a:lstStyle/>
           <a:p>
-            <a:pPr algn="l" indent="0" marL="0">
-              <a:buNone/>
-            </a:pPr>
-            <a:r>
-              <a:rPr lang="en-US" sz="1800" b="1" dirty="0">
+            <a:pPr algn="ctr" indent="0" marL="0">
+              <a:buNone/>
+            </a:pPr>
+            <a:r>
+              <a:rPr lang="en-US" sz="1600" b="1" dirty="0">
                 <a:solidFill>
                   <a:srgbClr val="1A1A1A"/>
                 </a:solidFill>
               </a:rPr>
-              <a:t>R/R</a:t>
-            </a:r>
-            <a:endParaRPr lang="en-US" sz="1800" dirty="0"/>
-          </a:p>
-        </p:txBody>
-      </p:sp>
-      <p:sp>
-        <p:nvSpPr>
-          <p:cNvPr id="5" name="RR header rule"/>
+              <a:t>FY27E Sum of the Parts ($ / Share)</a:t>
+            </a:r>
+            <a:endParaRPr lang="en-US" sz="1600" dirty="0"/>
+          </a:p>
+        </p:txBody>
+      </p:sp>
+      <p:sp>
+        <p:nvSpPr>
+          <p:cNvPr id="5" name="Waterfall header rule"/>
           <p:cNvSpPr/>
           <p:nvPr/>
         </p:nvSpPr>
         <p:spPr>
           <a:xfrm>
-            <a:off x="457200" y="2240280"/>
-            <a:ext cx="3657600" cy="0"/>
-          </a:xfrm>
-          <a:prstGeom prst="line">
-            <a:avLst/>
-          </a:prstGeom>
-          <a:noFill/>
-          <a:ln w="19050">
-            <a:solidFill>
-              <a:srgbClr val="1A1A1A"/>
-            </a:solidFill>
-            <a:prstDash val="solid"/>
-          </a:ln>
-        </p:spPr>
-      </p:sp>
-      <p:sp>
-        <p:nvSpPr>
-          <p:cNvPr id="6" name="RR Reward label"/>
-          <p:cNvSpPr txBox="1"/>
-          <p:nvPr/>
-        </p:nvSpPr>
-        <p:spPr>
-          <a:xfrm>
-            <a:off x="457200" y="2286000"/>
-            <a:ext cx="2103120" cy="420624"/>
-          </a:xfrm>
-          <a:prstGeom prst="rect">
-            <a:avLst/>
-          </a:prstGeom>
-          <a:noFill/>
-          <a:ln/>
-        </p:spPr>
-        <p:txBody>
-          <a:bodyPr wrap="square" lIns="50800" tIns="0" rIns="0" bIns="0" rtlCol="0" anchor="ctr"/>
-          <a:lstStyle/>
-          <a:p>
-            <a:pPr algn="l" indent="0" marL="0">
-              <a:buNone/>
-            </a:pPr>
-            <a:r>
-              <a:rPr lang="en-US" sz="1700" dirty="0">
-                <a:solidFill>
-                  <a:srgbClr val="1A1A1A"/>
-                </a:solidFill>
-              </a:rPr>
-              <a:t>Reward</a:t>
-            </a:r>
-            <a:endParaRPr lang="en-US" sz="1700" dirty="0"/>
-          </a:p>
-        </p:txBody>
-      </p:sp>
-      <p:sp>
-        <p:nvSpPr>
-          <p:cNvPr id="7" name="RR Reward value"/>
-          <p:cNvSpPr txBox="1"/>
-          <p:nvPr/>
-        </p:nvSpPr>
-        <p:spPr>
-          <a:xfrm>
-            <a:off x="2560320" y="2286000"/>
-            <a:ext cx="1554480" cy="420624"/>
-          </a:xfrm>
-          <a:prstGeom prst="rect">
-            <a:avLst/>
-          </a:prstGeom>
-          <a:solidFill>
-            <a:srgbClr val="EFEDEA"/>
-          </a:solidFill>
-          <a:ln/>
-        </p:spPr>
-        <p:txBody>
-          <a:bodyPr wrap="square" lIns="0" tIns="0" rIns="76200" bIns="0" rtlCol="0" anchor="ctr"/>
-          <a:lstStyle/>
-          <a:p>
-            <a:pPr algn="r" indent="0" marL="0">
-              <a:buNone/>
-            </a:pPr>
-            <a:r>
-              <a:rPr lang="en-US" sz="1700" b="1" dirty="0">
-                <a:solidFill>
-                  <a:srgbClr val="0A1C58"/>
-                </a:solidFill>
-              </a:rPr>
-              <a:t>132%</a:t>
-            </a:r>
-            <a:endParaRPr lang="en-US" sz="1700" dirty="0"/>
-          </a:p>
-        </p:txBody>
-      </p:sp>
-      <p:sp>
-        <p:nvSpPr>
-          <p:cNvPr id="8" name="RR Risk label"/>
-          <p:cNvSpPr txBox="1"/>
-          <p:nvPr/>
-        </p:nvSpPr>
-        <p:spPr>
-          <a:xfrm>
-            <a:off x="457200" y="2743200"/>
-            <a:ext cx="2103120" cy="420624"/>
-          </a:xfrm>
-          <a:prstGeom prst="rect">
-            <a:avLst/>
-          </a:prstGeom>
-          <a:noFill/>
-          <a:ln/>
-        </p:spPr>
-        <p:txBody>
-          <a:bodyPr wrap="square" lIns="50800" tIns="0" rIns="0" bIns="0" rtlCol="0" anchor="ctr"/>
-          <a:lstStyle/>
-          <a:p>
-            <a:pPr algn="l" indent="0" marL="0">
-              <a:buNone/>
-            </a:pPr>
-            <a:r>
-              <a:rPr lang="en-US" sz="1700" dirty="0">
-                <a:solidFill>
-                  <a:srgbClr val="1A1A1A"/>
-                </a:solidFill>
-              </a:rPr>
-              <a:t>Risk</a:t>
-            </a:r>
-            <a:endParaRPr lang="en-US" sz="1700" dirty="0"/>
-          </a:p>
-        </p:txBody>
-      </p:sp>
-      <p:sp>
-        <p:nvSpPr>
-          <p:cNvPr id="9" name="RR Risk value"/>
-          <p:cNvSpPr txBox="1"/>
-          <p:nvPr/>
-        </p:nvSpPr>
-        <p:spPr>
-          <a:xfrm>
-            <a:off x="2560320" y="2743200"/>
-            <a:ext cx="1554480" cy="420624"/>
-          </a:xfrm>
-          <a:prstGeom prst="rect">
-            <a:avLst/>
-          </a:prstGeom>
-          <a:solidFill>
-            <a:srgbClr val="DCD8D3"/>
-          </a:solidFill>
-          <a:ln/>
-        </p:spPr>
-        <p:txBody>
-          <a:bodyPr wrap="square" lIns="0" tIns="0" rIns="76200" bIns="0" rtlCol="0" anchor="ctr"/>
-          <a:lstStyle/>
-          <a:p>
-            <a:pPr algn="r" indent="0" marL="0">
-              <a:buNone/>
-            </a:pPr>
-            <a:r>
-              <a:rPr lang="en-US" sz="1700" b="1" dirty="0">
-                <a:solidFill>
-                  <a:srgbClr val="847C7A"/>
-                </a:solidFill>
-              </a:rPr>
-              <a:t>–39%</a:t>
-            </a:r>
-            <a:endParaRPr lang="en-US" sz="1700" dirty="0"/>
-          </a:p>
-        </p:txBody>
-      </p:sp>
-      <p:sp>
-        <p:nvSpPr>
-          <p:cNvPr id="10" name="RR skew box"/>
-          <p:cNvSpPr txBox="1"/>
-          <p:nvPr/>
-        </p:nvSpPr>
-        <p:spPr>
-          <a:xfrm>
-            <a:off x="457200" y="3218688"/>
-            <a:ext cx="3657600" cy="457200"/>
-          </a:xfrm>
-          <a:prstGeom prst="rect">
-            <a:avLst/>
-          </a:prstGeom>
-          <a:noFill/>
-          <a:ln w="19050">
-            <a:solidFill>
-              <a:srgbClr val="1A1A1A"/>
-            </a:solidFill>
-          </a:ln>
-        </p:spPr>
-        <p:txBody>
-          <a:bodyPr wrap="square" lIns="76200" tIns="0" rIns="76200" bIns="0" rtlCol="0" anchor="ctr"/>
-          <a:lstStyle/>
-          <a:p>
-            <a:pPr algn="l" indent="0" marL="0">
-              <a:buNone/>
-            </a:pPr>
-            <a:r>
-              <a:rPr lang="en-US" sz="1700" b="1" dirty="0">
-                <a:solidFill>
-                  <a:srgbClr val="1A1A1A"/>
-                </a:solidFill>
-              </a:rPr>
-              <a:t>R/R Skew</a:t>
-            </a:r>
-            <a:endParaRPr lang="en-US" sz="1700" dirty="0"/>
-          </a:p>
-        </p:txBody>
-      </p:sp>
-      <p:sp>
-        <p:nvSpPr>
-          <p:cNvPr id="11" name="RR skew value"/>
-          <p:cNvSpPr txBox="1"/>
-          <p:nvPr/>
-        </p:nvSpPr>
-        <p:spPr>
-          <a:xfrm>
-            <a:off x="2560320" y="3218688"/>
-            <a:ext cx="1508760" cy="457200"/>
-          </a:xfrm>
-          <a:prstGeom prst="rect">
-            <a:avLst/>
-          </a:prstGeom>
-          <a:noFill/>
-          <a:ln/>
-        </p:spPr>
-        <p:txBody>
-          <a:bodyPr wrap="square" lIns="0" tIns="0" rIns="0" bIns="0" rtlCol="0" anchor="ctr"/>
-          <a:lstStyle/>
-          <a:p>
-            <a:pPr algn="r" indent="0" marL="0">
-              <a:buNone/>
-            </a:pPr>
-            <a:r>
-              <a:rPr lang="en-US" sz="1700" b="1" dirty="0">
-                <a:solidFill>
-                  <a:srgbClr val="1A1A1A"/>
-                </a:solidFill>
-              </a:rPr>
-              <a:t>3.4</a:t>
-            </a:r>
-            <a:endParaRPr lang="en-US" sz="1700" dirty="0"/>
-          </a:p>
-        </p:txBody>
-      </p:sp>
-      <p:sp>
-        <p:nvSpPr>
-          <p:cNvPr id="12" name="Bull assumptions"/>
-          <p:cNvSpPr txBox="1"/>
-          <p:nvPr/>
-        </p:nvSpPr>
-        <p:spPr>
-          <a:xfrm>
-            <a:off x="4800600" y="1645920"/>
-            <a:ext cx="4023360" cy="1188720"/>
-          </a:xfrm>
-          <a:prstGeom prst="rect">
-            <a:avLst/>
-          </a:prstGeom>
-          <a:noFill/>
-          <a:ln w="25400">
-            <a:solidFill>
-              <a:srgbClr val="0A1C58"/>
-            </a:solidFill>
-          </a:ln>
-        </p:spPr>
-        <p:txBody>
-          <a:bodyPr wrap="square" lIns="127000" tIns="50800" rIns="76200" bIns="50800" rtlCol="0" anchor="ctr"/>
-          <a:lstStyle/>
-          <a:p>
-            <a:pPr algn="l" indent="0" marL="0">
-              <a:spcAft>
-                <a:spcPts val="300"/>
-              </a:spcAft>
-              <a:buNone/>
-            </a:pPr>
-            <a:r>
-              <a:rPr lang="en-US" sz="1400" b="1" dirty="0">
-                <a:solidFill>
-                  <a:srgbClr val="1A1A1A"/>
-                </a:solidFill>
-              </a:rPr>
-              <a:t>✓  Margins rebuild to ~33.5%</a:t>
-            </a:r>
-            <a:endParaRPr lang="en-US" sz="1400" dirty="0"/>
-          </a:p>
-          <a:p>
-            <a:pPr algn="l" indent="0" marL="0">
-              <a:spcAft>
-                <a:spcPts val="300"/>
-              </a:spcAft>
-              <a:buNone/>
-            </a:pPr>
-            <a:r>
-              <a:rPr lang="en-US" sz="1400" b="1" dirty="0">
-                <a:solidFill>
-                  <a:srgbClr val="1A1A1A"/>
-                </a:solidFill>
-              </a:rPr>
-              <a:t>✓  25% CFM56 share by FY31</a:t>
-            </a:r>
-            <a:endParaRPr lang="en-US" sz="1400" dirty="0"/>
-          </a:p>
-          <a:p>
-            <a:pPr algn="l" indent="0" marL="0">
-              <a:spcAft>
-                <a:spcPts val="300"/>
-              </a:spcAft>
-              <a:buNone/>
-            </a:pPr>
-            <a:r>
-              <a:rPr lang="en-US" sz="1400" b="1" dirty="0">
-                <a:solidFill>
-                  <a:srgbClr val="1A1A1A"/>
-                </a:solidFill>
-              </a:rPr>
-              <a:t>✓  Power: $550M FY27E EBITDA</a:t>
-            </a:r>
-            <a:endParaRPr lang="en-US" sz="1400" dirty="0"/>
-          </a:p>
-        </p:txBody>
-      </p:sp>
-      <p:sp>
-        <p:nvSpPr>
-          <p:cNvPr id="13" name="Bear assumptions"/>
-          <p:cNvSpPr txBox="1"/>
-          <p:nvPr/>
-        </p:nvSpPr>
-        <p:spPr>
-          <a:xfrm>
-            <a:off x="4800600" y="3017520"/>
-            <a:ext cx="4023360" cy="1188720"/>
-          </a:xfrm>
-          <a:prstGeom prst="rect">
-            <a:avLst/>
-          </a:prstGeom>
-          <a:noFill/>
-          <a:ln w="25400">
-            <a:solidFill>
-              <a:srgbClr val="847C7A"/>
-            </a:solidFill>
-          </a:ln>
-        </p:spPr>
-        <p:txBody>
-          <a:bodyPr wrap="square" lIns="127000" tIns="50800" rIns="76200" bIns="50800" rtlCol="0" anchor="ctr"/>
-          <a:lstStyle/>
-          <a:p>
-            <a:pPr algn="l" indent="0" marL="0">
-              <a:spcAft>
-                <a:spcPts val="300"/>
-              </a:spcAft>
-              <a:buNone/>
-            </a:pPr>
-            <a:r>
-              <a:rPr lang="en-US" sz="1400" b="1" dirty="0">
-                <a:solidFill>
-                  <a:srgbClr val="1A1A1A"/>
-                </a:solidFill>
-              </a:rPr>
-              <a:t>×  Margins stuck at 28.5%, no PMA</a:t>
-            </a:r>
-            <a:endParaRPr lang="en-US" sz="1400" dirty="0"/>
-          </a:p>
-          <a:p>
-            <a:pPr algn="l" indent="0" marL="0">
-              <a:spcAft>
-                <a:spcPts val="300"/>
-              </a:spcAft>
-              <a:buNone/>
-            </a:pPr>
-            <a:r>
-              <a:rPr lang="en-US" sz="1400" b="1" dirty="0">
-                <a:solidFill>
-                  <a:srgbClr val="1A1A1A"/>
-                </a:solidFill>
-              </a:rPr>
-              <a:t>×  Share capped at 15%</a:t>
-            </a:r>
-            <a:endParaRPr lang="en-US" sz="1400" dirty="0"/>
-          </a:p>
-          <a:p>
-            <a:pPr algn="l" indent="0" marL="0">
-              <a:spcAft>
-                <a:spcPts val="300"/>
-              </a:spcAft>
-              <a:buNone/>
-            </a:pPr>
-            <a:r>
-              <a:rPr lang="en-US" sz="1400" b="1" dirty="0">
-                <a:solidFill>
-                  <a:srgbClr val="1A1A1A"/>
-                </a:solidFill>
-              </a:rPr>
-              <a:t>×  Power: half the JV, 30% margins</a:t>
-            </a:r>
-            <a:endParaRPr lang="en-US" sz="1400" dirty="0"/>
-          </a:p>
-        </p:txBody>
-      </p:sp>
-      <p:sp>
-        <p:nvSpPr>
-          <p:cNvPr id="14" name="Bull connector"/>
-          <p:cNvSpPr/>
-          <p:nvPr/>
-        </p:nvSpPr>
-        <p:spPr>
-          <a:xfrm flipV="1">
-            <a:off x="4114800" y="2240280"/>
-            <a:ext cx="685800" cy="256032"/>
-          </a:xfrm>
-          <a:prstGeom prst="line">
-            <a:avLst/>
-          </a:prstGeom>
-          <a:noFill/>
-          <a:ln w="15875">
-            <a:solidFill>
-              <a:srgbClr val="0A1C58"/>
-            </a:solidFill>
-            <a:prstDash val="dash"/>
-          </a:ln>
-        </p:spPr>
-      </p:sp>
-      <p:sp>
-        <p:nvSpPr>
-          <p:cNvPr id="15" name="Bear connector"/>
-          <p:cNvSpPr/>
-          <p:nvPr/>
-        </p:nvSpPr>
-        <p:spPr>
-          <a:xfrm>
-            <a:off x="4114800" y="2953512"/>
-            <a:ext cx="685800" cy="658368"/>
-          </a:xfrm>
-          <a:prstGeom prst="line">
-            <a:avLst/>
-          </a:prstGeom>
-          <a:noFill/>
-          <a:ln w="15875">
-            <a:solidFill>
-              <a:srgbClr val="847C7A"/>
-            </a:solidFill>
-            <a:prstDash val="dash"/>
-          </a:ln>
-        </p:spPr>
-      </p:sp>
-      <p:sp>
-        <p:nvSpPr>
-          <p:cNvPr id="16" name="Sanity header"/>
-          <p:cNvSpPr txBox="1"/>
-          <p:nvPr/>
-        </p:nvSpPr>
-        <p:spPr>
-          <a:xfrm>
-            <a:off x="1828800" y="4251960"/>
-            <a:ext cx="5486400" cy="365760"/>
-          </a:xfrm>
-          <a:prstGeom prst="rect">
-            <a:avLst/>
-          </a:prstGeom>
-          <a:noFill/>
-          <a:ln/>
-        </p:spPr>
-        <p:txBody>
-          <a:bodyPr wrap="square" lIns="0" tIns="0" rIns="0" bIns="0" rtlCol="0" anchor="b"/>
-          <a:lstStyle/>
-          <a:p>
-            <a:pPr algn="ctr" indent="0" marL="0">
-              <a:buNone/>
-            </a:pPr>
-            <a:r>
-              <a:rPr lang="en-US" sz="1600" b="1" dirty="0">
-                <a:solidFill>
-                  <a:srgbClr val="1A1A1A"/>
-                </a:solidFill>
-              </a:rPr>
-              <a:t>Review: Sanity Check</a:t>
-            </a:r>
-            <a:endParaRPr lang="en-US" sz="1600" dirty="0"/>
-          </a:p>
-        </p:txBody>
-      </p:sp>
-      <p:sp>
-        <p:nvSpPr>
-          <p:cNvPr id="17" name="Sanity header rule"/>
-          <p:cNvSpPr/>
-          <p:nvPr/>
-        </p:nvSpPr>
-        <p:spPr>
-          <a:xfrm>
-            <a:off x="1828800" y="4672584"/>
-            <a:ext cx="5486400" cy="0"/>
+            <a:off x="320040" y="1975104"/>
+            <a:ext cx="5715000" cy="0"/>
           </a:xfrm>
           <a:prstGeom prst="line">
             <a:avLst/>
@@ -23813,127 +23849,308 @@
           </a:ln>
         </p:spPr>
       </p:sp>
-      <p:sp>
-        <p:nvSpPr>
-          <p:cNvPr id="18" name="Sanity bullets"/>
+      <p:graphicFrame>
+        <p:nvGraphicFramePr>
+          <p:cNvPr id="6" name="SOTP waterfall" descr=""/>
+          <p:cNvGraphicFramePr/>
+          <p:nvPr/>
+        </p:nvGraphicFramePr>
+        <p:xfrm>
+          <a:off x="320040" y="2103120"/>
+          <a:ext cx="5715000" cy="2971800"/>
+        </p:xfrm>
+        <a:graphic xmlns:a="http://schemas.openxmlformats.org/drawingml/2006/main">
+          <a:graphicData uri="http://schemas.openxmlformats.org/drawingml/2006/chart">
+            <c:chart xmlns:c="http://schemas.openxmlformats.org/drawingml/2006/chart" r:id="rId1"/>
+          </a:graphicData>
+        </a:graphic>
+      </p:graphicFrame>
+      <p:sp>
+        <p:nvSpPr>
+          <p:cNvPr id="7" name="Multiples caption"/>
           <p:cNvSpPr txBox="1"/>
           <p:nvPr/>
         </p:nvSpPr>
         <p:spPr>
           <a:xfrm>
-            <a:off x="2103120" y="4754880"/>
-            <a:ext cx="5120640" cy="1005840"/>
-          </a:xfrm>
-          <a:prstGeom prst="rect">
-            <a:avLst/>
-          </a:prstGeom>
-          <a:noFill/>
-          <a:ln/>
-        </p:spPr>
-        <p:txBody>
-          <a:bodyPr wrap="square" lIns="0" tIns="0" rIns="0" bIns="0" rtlCol="0" anchor="t"/>
-          <a:lstStyle/>
-          <a:p>
-            <a:pPr algn="l" marL="342900" indent="-342900">
-              <a:spcAft>
-                <a:spcPts val="300"/>
-              </a:spcAft>
-              <a:buSzPct val="100000"/>
-              <a:buChar char="•"/>
-            </a:pPr>
-            <a:r>
-              <a:rPr lang="en-US" sz="1500" b="1" dirty="0">
+            <a:off x="320040" y="5074920"/>
+            <a:ext cx="5715000" cy="256032"/>
+          </a:xfrm>
+          <a:prstGeom prst="rect">
+            <a:avLst/>
+          </a:prstGeom>
+          <a:noFill/>
+          <a:ln/>
+        </p:spPr>
+        <p:txBody>
+          <a:bodyPr wrap="square" lIns="0" tIns="0" rIns="0" bIns="0" rtlCol="0" anchor="ctr"/>
+          <a:lstStyle/>
+          <a:p>
+            <a:pPr algn="ctr" indent="0" marL="0">
+              <a:buNone/>
+            </a:pPr>
+            <a:r>
+              <a:rPr lang="en-US" sz="1000" i="1" dirty="0">
+                <a:solidFill>
+                  <a:schemeClr val="accent2"/>
+                </a:solidFill>
+              </a:rPr>
+              <a:t>Aerospace 16x · Power 12x · Leasing + SCI 9x FY27E EBITDA</a:t>
+            </a:r>
+            <a:endParaRPr lang="en-US" sz="1000" dirty="0"/>
+          </a:p>
+        </p:txBody>
+      </p:sp>
+      <p:sp>
+        <p:nvSpPr>
+          <p:cNvPr id="8" name="Means header"/>
+          <p:cNvSpPr txBox="1"/>
+          <p:nvPr/>
+        </p:nvSpPr>
+        <p:spPr>
+          <a:xfrm>
+            <a:off x="6309360" y="1554480"/>
+            <a:ext cx="2514600" cy="365760"/>
+          </a:xfrm>
+          <a:prstGeom prst="rect">
+            <a:avLst/>
+          </a:prstGeom>
+          <a:noFill/>
+          <a:ln/>
+        </p:spPr>
+        <p:txBody>
+          <a:bodyPr wrap="square" lIns="0" tIns="0" rIns="0" bIns="0" rtlCol="0" anchor="b"/>
+          <a:lstStyle/>
+          <a:p>
+            <a:pPr algn="ctr" indent="0" marL="0">
+              <a:buNone/>
+            </a:pPr>
+            <a:r>
+              <a:rPr lang="en-US" sz="1600" b="1" dirty="0">
                 <a:solidFill>
                   <a:srgbClr val="1A1A1A"/>
                 </a:solidFill>
               </a:rPr>
-              <a:t>Margins: </a:t>
-            </a:r>
-            <a:pPr algn="l" indent="0" marL="0">
-              <a:spcAft>
-                <a:spcPts val="300"/>
-              </a:spcAft>
-              <a:buNone/>
-            </a:pPr>
-            <a:r>
-              <a:rPr lang="en-US" sz="1500" dirty="0">
+              <a:t>What It Means</a:t>
+            </a:r>
+            <a:endParaRPr lang="en-US" sz="1600" dirty="0"/>
+          </a:p>
+        </p:txBody>
+      </p:sp>
+      <p:sp>
+        <p:nvSpPr>
+          <p:cNvPr id="9" name="Means header rule"/>
+          <p:cNvSpPr/>
+          <p:nvPr/>
+        </p:nvSpPr>
+        <p:spPr>
+          <a:xfrm>
+            <a:off x="6309360" y="1975104"/>
+            <a:ext cx="2514600" cy="0"/>
+          </a:xfrm>
+          <a:prstGeom prst="line">
+            <a:avLst/>
+          </a:prstGeom>
+          <a:noFill/>
+          <a:ln w="12700">
+            <a:solidFill>
+              <a:srgbClr val="1A1A1A"/>
+            </a:solidFill>
+            <a:prstDash val="solid"/>
+          </a:ln>
+        </p:spPr>
+      </p:sp>
+      <p:sp>
+        <p:nvSpPr>
+          <p:cNvPr id="10" name="Means stat 1"/>
+          <p:cNvSpPr txBox="1"/>
+          <p:nvPr/>
+        </p:nvSpPr>
+        <p:spPr>
+          <a:xfrm>
+            <a:off x="6309360" y="2103120"/>
+            <a:ext cx="2514600" cy="914400"/>
+          </a:xfrm>
+          <a:prstGeom prst="rect">
+            <a:avLst/>
+          </a:prstGeom>
+          <a:noFill/>
+          <a:ln/>
+        </p:spPr>
+        <p:txBody>
+          <a:bodyPr wrap="square" lIns="0" tIns="0" rIns="0" bIns="0" rtlCol="0" anchor="ctr"/>
+          <a:lstStyle/>
+          <a:p>
+            <a:pPr algn="ctr" indent="0" marL="0">
+              <a:buNone/>
+            </a:pPr>
+            <a:r>
+              <a:rPr lang="en-US" sz="2800" b="1" dirty="0">
+                <a:solidFill>
+                  <a:schemeClr val="tx2"/>
+                </a:solidFill>
+              </a:rPr>
+              <a:t>+66%</a:t>
+            </a:r>
+            <a:endParaRPr lang="en-US" sz="2800" dirty="0"/>
+          </a:p>
+          <a:p>
+            <a:pPr algn="ctr" indent="0" marL="0">
+              <a:buNone/>
+            </a:pPr>
+            <a:r>
+              <a:rPr lang="en-US" sz="1200" dirty="0">
                 <a:solidFill>
                   <a:srgbClr val="1A1A1A"/>
                 </a:solidFill>
               </a:rPr>
-              <a:t>FTAI ran ~35% as recently as FY25</a:t>
-            </a:r>
-            <a:endParaRPr lang="en-US" sz="1500" dirty="0"/>
-          </a:p>
-          <a:p>
-            <a:pPr algn="l" marL="342900" indent="-342900">
-              <a:spcAft>
-                <a:spcPts val="300"/>
-              </a:spcAft>
-              <a:buSzPct val="100000"/>
-              <a:buChar char="•"/>
-            </a:pPr>
-            <a:r>
-              <a:rPr lang="en-US" sz="1500" b="1" dirty="0">
+              <a:t>upside to our $277 target</a:t>
+            </a:r>
+            <a:endParaRPr lang="en-US" sz="2800" dirty="0"/>
+          </a:p>
+        </p:txBody>
+      </p:sp>
+      <p:sp>
+        <p:nvSpPr>
+          <p:cNvPr id="11" name="Means stat 2"/>
+          <p:cNvSpPr txBox="1"/>
+          <p:nvPr/>
+        </p:nvSpPr>
+        <p:spPr>
+          <a:xfrm>
+            <a:off x="6309360" y="3108960"/>
+            <a:ext cx="2514600" cy="914400"/>
+          </a:xfrm>
+          <a:prstGeom prst="rect">
+            <a:avLst/>
+          </a:prstGeom>
+          <a:noFill/>
+          <a:ln/>
+        </p:spPr>
+        <p:txBody>
+          <a:bodyPr wrap="square" lIns="0" tIns="0" rIns="0" bIns="0" rtlCol="0" anchor="ctr"/>
+          <a:lstStyle/>
+          <a:p>
+            <a:pPr algn="ctr" indent="0" marL="0">
+              <a:buNone/>
+            </a:pPr>
+            <a:r>
+              <a:rPr lang="en-US" sz="2800" b="1" dirty="0">
+                <a:solidFill>
+                  <a:schemeClr val="tx2"/>
+                </a:solidFill>
+              </a:rPr>
+              <a:t>$225</a:t>
+            </a:r>
+            <a:endParaRPr lang="en-US" sz="2800" dirty="0"/>
+          </a:p>
+          <a:p>
+            <a:pPr algn="ctr" indent="0" marL="0">
+              <a:buNone/>
+            </a:pPr>
+            <a:r>
+              <a:rPr lang="en-US" sz="1200" dirty="0">
                 <a:solidFill>
                   <a:srgbClr val="1A1A1A"/>
                 </a:solidFill>
               </a:rPr>
-              <a:t>Share: </a:t>
-            </a:r>
-            <a:pPr algn="l" indent="0" marL="0">
-              <a:spcAft>
-                <a:spcPts val="300"/>
-              </a:spcAft>
-              <a:buNone/>
-            </a:pPr>
-            <a:r>
-              <a:rPr lang="en-US" sz="1500" dirty="0">
+              <a:t>core business alone, 35% above today</a:t>
+            </a:r>
+            <a:endParaRPr lang="en-US" sz="2800" dirty="0"/>
+          </a:p>
+        </p:txBody>
+      </p:sp>
+      <p:sp>
+        <p:nvSpPr>
+          <p:cNvPr id="12" name="Means stat 3"/>
+          <p:cNvSpPr txBox="1"/>
+          <p:nvPr/>
+        </p:nvSpPr>
+        <p:spPr>
+          <a:xfrm>
+            <a:off x="6309360" y="4114800"/>
+            <a:ext cx="2514600" cy="914400"/>
+          </a:xfrm>
+          <a:prstGeom prst="rect">
+            <a:avLst/>
+          </a:prstGeom>
+          <a:noFill/>
+          <a:ln/>
+        </p:spPr>
+        <p:txBody>
+          <a:bodyPr wrap="square" lIns="0" tIns="0" rIns="0" bIns="0" rtlCol="0" anchor="ctr"/>
+          <a:lstStyle/>
+          <a:p>
+            <a:pPr algn="ctr" indent="0" marL="0">
+              <a:buNone/>
+            </a:pPr>
+            <a:r>
+              <a:rPr lang="en-US" sz="2800" b="1" dirty="0">
+                <a:solidFill>
+                  <a:schemeClr val="tx2"/>
+                </a:solidFill>
+              </a:rPr>
+              <a:t>$52</a:t>
+            </a:r>
+            <a:endParaRPr lang="en-US" sz="2800" dirty="0"/>
+          </a:p>
+          <a:p>
+            <a:pPr algn="ctr" indent="0" marL="0">
+              <a:buNone/>
+            </a:pPr>
+            <a:r>
+              <a:rPr lang="en-US" sz="1200" dirty="0">
                 <a:solidFill>
                   <a:srgbClr val="1A1A1A"/>
                 </a:solidFill>
               </a:rPr>
-              <a:t>FTAI has added ~4 pts a year since 2024</a:t>
-            </a:r>
-            <a:endParaRPr lang="en-US" sz="1500" dirty="0"/>
-          </a:p>
-          <a:p>
-            <a:pPr algn="l" marL="342900" indent="-342900">
-              <a:spcAft>
-                <a:spcPts val="300"/>
-              </a:spcAft>
-              <a:buSzPct val="100000"/>
-              <a:buChar char="•"/>
-            </a:pPr>
-            <a:r>
-              <a:rPr lang="en-US" sz="1500" b="1" dirty="0">
-                <a:solidFill>
-                  <a:srgbClr val="1A1A1A"/>
-                </a:solidFill>
-              </a:rPr>
-              <a:t>Power: </a:t>
-            </a:r>
-            <a:pPr algn="l" indent="0" marL="0">
-              <a:spcAft>
-                <a:spcPts val="300"/>
-              </a:spcAft>
-              <a:buNone/>
-            </a:pPr>
-            <a:r>
-              <a:rPr lang="en-US" sz="1500" dirty="0">
-                <a:solidFill>
-                  <a:srgbClr val="1A1A1A"/>
-                </a:solidFill>
-              </a:rPr>
-              <a:t>signed order covers the $450M low end</a:t>
-            </a:r>
-            <a:endParaRPr lang="en-US" sz="1500" dirty="0"/>
-          </a:p>
-        </p:txBody>
-      </p:sp>
-      <p:sp>
-        <p:nvSpPr>
-          <p:cNvPr id="19" name="Source"/>
+              <a:t>for Power, on just the signed order</a:t>
+            </a:r>
+            <a:endParaRPr lang="en-US" sz="2800" dirty="0"/>
+          </a:p>
+        </p:txBody>
+      </p:sp>
+      <p:sp>
+        <p:nvSpPr>
+          <p:cNvPr id="13" name="Takeaway"/>
+          <p:cNvSpPr txBox="1"/>
+          <p:nvPr/>
+        </p:nvSpPr>
+        <p:spPr>
+          <a:xfrm>
+            <a:off x="320040" y="5504688"/>
+            <a:ext cx="8503920" cy="566928"/>
+          </a:xfrm>
+          <a:prstGeom prst="rect">
+            <a:avLst/>
+          </a:prstGeom>
+          <a:solidFill>
+            <a:srgbClr val="0A1C58"/>
+          </a:solidFill>
+          <a:ln/>
+        </p:spPr>
+        <p:txBody>
+          <a:bodyPr wrap="square" lIns="101600" tIns="25400" rIns="101600" bIns="25400" rtlCol="0" anchor="ctr"/>
+          <a:lstStyle/>
+          <a:p>
+            <a:pPr algn="ctr" indent="0" marL="0">
+              <a:buNone/>
+            </a:pPr>
+            <a:r>
+              <a:rPr lang="en-US" sz="1700" b="1" dirty="0">
+                <a:solidFill>
+                  <a:schemeClr val="bg1"/>
+                </a:solidFill>
+              </a:rPr>
+              <a:t>Strip out Power and the core is still worth $225. Power is the free call option on top.</a:t>
+            </a:r>
+            <a:endParaRPr lang="en-US" sz="1700" dirty="0"/>
+          </a:p>
+        </p:txBody>
+      </p:sp>
+      <p:sp>
+        <p:nvSpPr>
+          <p:cNvPr id="14" name="Source"/>
           <p:cNvSpPr txBox="1"/>
           <p:nvPr/>
         </p:nvSpPr>
@@ -23972,7 +24189,7 @@
                   <a:srgbClr val="1A1A1A"/>
                 </a:solidFill>
               </a:rPr>
-              <a:t>GPS model (DCF tab R/R: bull vs. bear blended DCF; Assumptions tab bull/bear rows); FTAI filings and earnings calls</a:t>
+              <a:t>GPS model (DCF tab SOTP: FY27E segment EBITDA, YE27E net debt, 104.0M diluted shares); price $167.03 (10/2/26)</a:t>
             </a:r>
             <a:endParaRPr lang="en-US" sz="1100" dirty="0"/>
           </a:p>
@@ -25396,7 +25613,7 @@
       </p:sp>
       <p:sp>
         <p:nvSpPr>
-          <p:cNvPr id="4" name="SOTP header"/>
+          <p:cNvPr id="4" name="Power ramp header"/>
           <p:cNvSpPr txBox="1"/>
           <p:nvPr/>
         </p:nvSpPr>
@@ -25424,7 +25641,7 @@
                   <a:srgbClr val="1A1A1A"/>
                 </a:solidFill>
               </a:rPr>
-              <a:t>FY27E Sum of the Parts ($ / Share)</a:t>
+              <a:t>FTAI Power Adj. EBITDA ($M)</a:t>
             </a:r>
             <a:endParaRPr lang="en-US" sz="1600" dirty="0"/>
           </a:p>
@@ -25432,7 +25649,7 @@
       </p:sp>
       <p:sp>
         <p:nvSpPr>
-          <p:cNvPr id="5" name="SOTP header rule"/>
+          <p:cNvPr id="5" name="Power ramp header rule"/>
           <p:cNvSpPr/>
           <p:nvPr/>
         </p:nvSpPr>
@@ -25455,13 +25672,13 @@
       </p:sp>
       <p:graphicFrame>
         <p:nvGraphicFramePr>
-          <p:cNvPr id="6" name="SOTP chart" descr=""/>
+          <p:cNvPr id="6" name="Power ramp chart" descr=""/>
           <p:cNvGraphicFramePr/>
           <p:nvPr/>
         </p:nvGraphicFramePr>
         <p:xfrm>
           <a:off x="320040" y="2103120"/>
-          <a:ext cx="5257800" cy="3200400"/>
+          <a:ext cx="5257800" cy="2926080"/>
         </p:xfrm>
         <a:graphic xmlns:a="http://schemas.openxmlformats.org/drawingml/2006/main">
           <a:graphicData uri="http://schemas.openxmlformats.org/drawingml/2006/chart">
@@ -25471,7 +25688,7 @@
       </p:graphicFrame>
       <p:sp>
         <p:nvSpPr>
-          <p:cNvPr id="7" name="Discount callout"/>
+          <p:cNvPr id="7" name="Market value callout"/>
           <p:cNvSpPr/>
           <p:nvPr/>
         </p:nvSpPr>
@@ -25484,9 +25701,9 @@
             <a:avLst/>
           </a:prstGeom>
           <a:solidFill>
-            <a:srgbClr val="0A1C58"/>
+            <a:srgbClr val="DCD8D3"/>
           </a:solidFill>
-          <a:ln>
+          <a:ln w="25400">
             <a:solidFill>
               <a:srgbClr val="0A1C58"/>
             </a:solidFill>
@@ -25500,41 +25717,41 @@
               <a:buNone/>
             </a:pPr>
             <a:r>
-              <a:rPr lang="en-US" sz="2000" b="1" dirty="0">
-                <a:solidFill>
-                  <a:schemeClr val="bg1"/>
-                </a:solidFill>
-              </a:rPr>
-              <a:t>26%</a:t>
-            </a:r>
-            <a:endParaRPr lang="en-US" sz="2000" dirty="0"/>
-          </a:p>
-          <a:p>
-            <a:pPr algn="ctr" indent="0" marL="0">
-              <a:buNone/>
-            </a:pPr>
-            <a:r>
-              <a:rPr lang="en-US" sz="1100" b="1" dirty="0">
-                <a:solidFill>
-                  <a:schemeClr val="bg1"/>
-                </a:solidFill>
-              </a:rPr>
-              <a:t>below core</a:t>
-            </a:r>
-            <a:endParaRPr lang="en-US" sz="2000" dirty="0"/>
-          </a:p>
-        </p:txBody>
-      </p:sp>
-      <p:sp>
-        <p:nvSpPr>
-          <p:cNvPr id="8" name="Power label"/>
+              <a:rPr lang="en-US" sz="2200" b="1" dirty="0">
+                <a:solidFill>
+                  <a:schemeClr val="tx2"/>
+                </a:solidFill>
+              </a:rPr>
+              <a:t>~$0</a:t>
+            </a:r>
+            <a:endParaRPr lang="en-US" sz="2200" dirty="0"/>
+          </a:p>
+          <a:p>
+            <a:pPr algn="ctr" indent="0" marL="0">
+              <a:buNone/>
+            </a:pPr>
+            <a:r>
+              <a:rPr lang="en-US" sz="1000" b="1" dirty="0">
+                <a:solidFill>
+                  <a:schemeClr val="tx2"/>
+                </a:solidFill>
+              </a:rPr>
+              <a:t>market value</a:t>
+            </a:r>
+            <a:endParaRPr lang="en-US" sz="2200" dirty="0"/>
+          </a:p>
+        </p:txBody>
+      </p:sp>
+      <p:sp>
+        <p:nvSpPr>
+          <p:cNvPr id="8" name="Power ramp caption"/>
           <p:cNvSpPr txBox="1"/>
           <p:nvPr/>
         </p:nvSpPr>
         <p:spPr>
           <a:xfrm>
-            <a:off x="2971800" y="2286000"/>
-            <a:ext cx="1325880" cy="274320"/>
+            <a:off x="320040" y="5029200"/>
+            <a:ext cx="5257800" cy="274320"/>
           </a:xfrm>
           <a:prstGeom prst="rect">
             <a:avLst/>
@@ -25550,14 +25767,14 @@
               <a:buNone/>
             </a:pPr>
             <a:r>
-              <a:rPr lang="en-US" sz="1200" b="1" i="1" dirty="0">
+              <a:rPr lang="en-US" sz="1100" i="1" dirty="0">
                 <a:solidFill>
                   <a:schemeClr val="accent2"/>
                 </a:solidFill>
               </a:rPr>
-              <a:t>Free call option</a:t>
-            </a:r>
-            <a:endParaRPr lang="en-US" sz="1200" dirty="0"/>
+              <a:t>Our model; the core business alone is worth $225/share vs. $167 today</a:t>
+            </a:r>
+            <a:endParaRPr lang="en-US" sz="1100" dirty="0"/>
           </a:p>
         </p:txBody>
       </p:sp>
@@ -25915,7 +26132,7 @@
                   <a:srgbClr val="1A1A1A"/>
                 </a:solidFill>
               </a:rPr>
-              <a:t>FTAI filings and earnings calls, GPS SOTP (FY27E EBITDA × segment multiples)</a:t>
+              <a:t>FTAI filings and earnings calls; GPS model (RPM tab Power build; FY27E SOTP)</a:t>
             </a:r>
             <a:endParaRPr lang="en-US" sz="1100" dirty="0"/>
           </a:p>

--- a/deck/FTAI_Long_Pitch.pptx
+++ b/deck/FTAI_Long_Pitch.pptx
@@ -131,12 +131,12 @@
   <p:extLst>
     <p:ext uri="{521415D9-36F7-43E2-AB2F-B90AF26B5E84}">
       <p14:sectionLst xmlns:p14="http://schemas.microsoft.com/office/powerpoint/2010/main">
-        <p14:section name="Introduction" id="{b4668d57-ea38-9ff6-5948-9668f7db2b63}">
+        <p14:section name="Introduction" id="{921a0a08-6f00-4716-1c91-46879e85d60b}">
           <p14:sldIdLst>
             <p14:sldId id="256"/>
           </p14:sldIdLst>
         </p14:section>
-        <p14:section name="The Opportunity" id="{448ad12a-45af-eccb-d1fa-3b3cf516d122}">
+        <p14:section name="The Opportunity" id="{e0588550-a3e6-9f24-f11a-2e9c2e45d3b6}">
           <p14:sldIdLst>
             <p14:sldId id="257"/>
             <p14:sldId id="258"/>
@@ -144,18 +144,18 @@
             <p14:sldId id="260"/>
           </p14:sldIdLst>
         </p14:section>
-        <p14:section name="Returns" id="{219786e3-9cae-13d5-0c1c-125a9aee9706}">
+        <p14:section name="Returns" id="{99be9918-2b75-31a4-eeb3-326badff4c8a}">
           <p14:sldIdLst>
             <p14:sldId id="261"/>
           </p14:sldIdLst>
         </p14:section>
-        <p14:section name="Business Overview" id="{522d8589-2ec5-35e2-7449-0c7eab2895fa}">
+        <p14:section name="Business Overview" id="{aad7b70c-2e9d-8c95-306b-b37654ad27c0}">
           <p14:sldIdLst>
             <p14:sldId id="262"/>
             <p14:sldId id="263"/>
           </p14:sldIdLst>
         </p14:section>
-        <p14:section name="Thesis 1a" id="{22f8d76a-f30f-c4bf-86f4-420608c15502}">
+        <p14:section name="Thesis 1a" id="{8d2e1e4c-3e59-a2c1-8933-74c459b2938d}">
           <p14:sldIdLst>
             <p14:sldId id="264"/>
             <p14:sldId id="265"/>
@@ -163,7 +163,7 @@
             <p14:sldId id="267"/>
           </p14:sldIdLst>
         </p14:section>
-        <p14:section name="Thesis 1b" id="{75b95146-14aa-a80a-1418-d84dd841689c}">
+        <p14:section name="Thesis 1b" id="{68aaf3e8-725b-b34b-df3e-a28c2a10ae6b}">
           <p14:sldIdLst>
             <p14:sldId id="268"/>
             <p14:sldId id="269"/>
@@ -174,7 +174,7 @@
             <p14:sldId id="274"/>
           </p14:sldIdLst>
         </p14:section>
-        <p14:section name="Thesis 2" id="{7fe01810-0a30-79e6-b044-06c5de877ae0}">
+        <p14:section name="Thesis 2" id="{ba72955d-35a5-ab74-88c9-1b61a6865f41}">
           <p14:sldIdLst>
             <p14:sldId id="275"/>
             <p14:sldId id="276"/>
@@ -182,7 +182,7 @@
             <p14:sldId id="278"/>
           </p14:sldIdLst>
         </p14:section>
-        <p14:section name="Valuation" id="{dc1e8914-997e-e500-3f5e-6b5e39d59630}">
+        <p14:section name="Valuation" id="{c20e748a-7beb-0ab2-441b-bc6656b0e584}">
           <p14:sldIdLst>
             <p14:sldId id="279"/>
             <p14:sldId id="280"/>
@@ -5250,24 +5250,23 @@
           </c:spPr>
           <c:invertIfNegative val="0"/>
           <c:dLbls>
-            <c:numFmt formatCode="&quot;$&quot;0;;;" sourceLinked="0"/>
+            <c:numFmt formatCode="#,##0" sourceLinked="0"/>
             <c:txPr>
               <a:bodyPr/>
               <a:lstStyle/>
               <a:p>
                 <a:pPr>
-                  <a:defRPr b="1" i="0" strike="noStrike" sz="1100" u="none">
+                  <a:defRPr b="1" i="0" strike="noStrike" sz="1300" u="none">
                     <a:solidFill>
-                      <a:srgbClr val="FFFFFF"/>
+                      <a:srgbClr val="1A1A1A"/>
                     </a:solidFill>
                     <a:latin typeface="+mn-lt"/>
                   </a:defRPr>
                 </a:pPr>
               </a:p>
             </c:txPr>
-            <c:dLblPos val="inEnd"/>
             <c:showLegendKey val="0"/>
-            <c:showVal val="1"/>
+            <c:showVal val="0"/>
             <c:showCatName val="0"/>
             <c:showSerName val="0"/>
             <c:showPercent val="0"/>
@@ -5276,30 +5275,27 @@
           </c:dLbls>
           <c:cat>
             <c:multiLvlStrRef>
-              <c:f>Sheet1!$A$2:$A$8</c:f>
+              <c:f>Sheet1!$A$2:$A$7</c:f>
               <c:multiLvlStrCache>
-                <c:ptCount val="7"/>
+                <c:ptCount val="6"/>
                 <c:lvl>
                   <c:pt idx="0">
-                    <c:v>Aerospace</c:v>
+                    <c:v>Today</c:v>
                   </c:pt>
                   <c:pt idx="1">
+                    <c:v>To bear case</c:v>
+                  </c:pt>
+                  <c:pt idx="2">
+                    <c:v>Margins</c:v>
+                  </c:pt>
+                  <c:pt idx="3">
+                    <c:v>Share</c:v>
+                  </c:pt>
+                  <c:pt idx="4">
                     <c:v>Power</c:v>
                   </c:pt>
-                  <c:pt idx="2">
-                    <c:v>Leasing</c:v>
-                  </c:pt>
-                  <c:pt idx="3">
-                    <c:v>– Corporate</c:v>
-                  </c:pt>
-                  <c:pt idx="4">
-                    <c:v>– Net debt</c:v>
-                  </c:pt>
                   <c:pt idx="5">
-                    <c:v>SOTP</c:v>
-                  </c:pt>
-                  <c:pt idx="6">
-                    <c:v>Today</c:v>
+                    <c:v>Base case</c:v>
                   </c:pt>
                 </c:lvl>
               </c:multiLvlStrCache>
@@ -5307,29 +5303,26 @@
           </c:cat>
           <c:val>
             <c:numRef>
-              <c:f>Sheet1!$B$2:$B$8</c:f>
+              <c:f>Sheet1!$B$2:$B$7</c:f>
               <c:numCache>
                 <c:formatCode>General</c:formatCode>
-                <c:ptCount val="7"/>
+                <c:ptCount val="6"/>
                 <c:pt idx="0">
                   <c:v>0</c:v>
                 </c:pt>
                 <c:pt idx="1">
-                  <c:v>236.9</c:v>
+                  <c:v>167</c:v>
                 </c:pt>
                 <c:pt idx="2">
-                  <c:v>288.8</c:v>
+                  <c:v>171.9</c:v>
                 </c:pt>
                 <c:pt idx="3">
-                  <c:v>300.4</c:v>
+                  <c:v>188.9</c:v>
                 </c:pt>
                 <c:pt idx="4">
-                  <c:v>276.7</c:v>
+                  <c:v>221.6</c:v>
                 </c:pt>
                 <c:pt idx="5">
-                  <c:v>0</c:v>
-                </c:pt>
-                <c:pt idx="6">
                   <c:v>0</c:v>
                 </c:pt>
               </c:numCache>
@@ -5345,37 +5338,36 @@
               <c:strCache>
                 <c:ptCount val="1"/>
                 <c:pt idx="0">
-                  <c:v>Adds</c:v>
+                  <c:v>Today</c:v>
                 </c:pt>
               </c:strCache>
             </c:strRef>
           </c:tx>
           <c:spPr>
             <a:solidFill>
-              <a:srgbClr val="0A1C58"/>
+              <a:srgbClr val="847C7A"/>
             </a:solidFill>
             <a:effectLst/>
           </c:spPr>
           <c:invertIfNegative val="0"/>
           <c:dLbls>
-            <c:numFmt formatCode="&quot;$&quot;0;;;" sourceLinked="0"/>
+            <c:numFmt formatCode="#,##0" sourceLinked="0"/>
             <c:txPr>
               <a:bodyPr/>
               <a:lstStyle/>
               <a:p>
                 <a:pPr>
-                  <a:defRPr b="1" i="0" strike="noStrike" sz="1100" u="none">
+                  <a:defRPr b="1" i="0" strike="noStrike" sz="1300" u="none">
                     <a:solidFill>
-                      <a:srgbClr val="FFFFFF"/>
+                      <a:srgbClr val="1A1A1A"/>
                     </a:solidFill>
                     <a:latin typeface="+mn-lt"/>
                   </a:defRPr>
                 </a:pPr>
               </a:p>
             </c:txPr>
-            <c:dLblPos val="inEnd"/>
             <c:showLegendKey val="0"/>
-            <c:showVal val="1"/>
+            <c:showVal val="0"/>
             <c:showCatName val="0"/>
             <c:showSerName val="0"/>
             <c:showPercent val="0"/>
@@ -5384,30 +5376,27 @@
           </c:dLbls>
           <c:cat>
             <c:multiLvlStrRef>
-              <c:f>Sheet1!$A$2:$A$8</c:f>
+              <c:f>Sheet1!$A$2:$A$7</c:f>
               <c:multiLvlStrCache>
-                <c:ptCount val="7"/>
+                <c:ptCount val="6"/>
                 <c:lvl>
                   <c:pt idx="0">
-                    <c:v>Aerospace</c:v>
+                    <c:v>Today</c:v>
                   </c:pt>
                   <c:pt idx="1">
+                    <c:v>To bear case</c:v>
+                  </c:pt>
+                  <c:pt idx="2">
+                    <c:v>Margins</c:v>
+                  </c:pt>
+                  <c:pt idx="3">
+                    <c:v>Share</c:v>
+                  </c:pt>
+                  <c:pt idx="4">
                     <c:v>Power</c:v>
                   </c:pt>
-                  <c:pt idx="2">
-                    <c:v>Leasing</c:v>
-                  </c:pt>
-                  <c:pt idx="3">
-                    <c:v>– Corporate</c:v>
-                  </c:pt>
-                  <c:pt idx="4">
-                    <c:v>– Net debt</c:v>
-                  </c:pt>
                   <c:pt idx="5">
-                    <c:v>SOTP</c:v>
-                  </c:pt>
-                  <c:pt idx="6">
-                    <c:v>Today</c:v>
+                    <c:v>Base case</c:v>
                   </c:pt>
                 </c:lvl>
               </c:multiLvlStrCache>
@@ -5415,18 +5404,18 @@
           </c:cat>
           <c:val>
             <c:numRef>
-              <c:f>Sheet1!$C$2:$C$8</c:f>
+              <c:f>Sheet1!$C$2:$C$7</c:f>
               <c:numCache>
                 <c:formatCode>General</c:formatCode>
-                <c:ptCount val="7"/>
+                <c:ptCount val="6"/>
                 <c:pt idx="0">
-                  <c:v>236.9</c:v>
+                  <c:v>167</c:v>
                 </c:pt>
                 <c:pt idx="1">
-                  <c:v>51.9</c:v>
+                  <c:v>0</c:v>
                 </c:pt>
                 <c:pt idx="2">
-                  <c:v>39.4</c:v>
+                  <c:v>0</c:v>
                 </c:pt>
                 <c:pt idx="3">
                   <c:v>0</c:v>
@@ -5435,9 +5424,6 @@
                   <c:v>0</c:v>
                 </c:pt>
                 <c:pt idx="5">
-                  <c:v>0</c:v>
-                </c:pt>
-                <c:pt idx="6">
                   <c:v>0</c:v>
                 </c:pt>
               </c:numCache>
@@ -5453,37 +5439,36 @@
               <c:strCache>
                 <c:ptCount val="1"/>
                 <c:pt idx="0">
-                  <c:v>Less</c:v>
+                  <c:v>Theses</c:v>
                 </c:pt>
               </c:strCache>
             </c:strRef>
           </c:tx>
           <c:spPr>
             <a:solidFill>
-              <a:srgbClr val="847C7A"/>
+              <a:srgbClr val="0A1C58"/>
             </a:solidFill>
             <a:effectLst/>
           </c:spPr>
           <c:invertIfNegative val="0"/>
           <c:dLbls>
-            <c:numFmt formatCode="&quot;$&quot;0;;;" sourceLinked="0"/>
+            <c:numFmt formatCode="#,##0" sourceLinked="0"/>
             <c:txPr>
               <a:bodyPr/>
               <a:lstStyle/>
               <a:p>
                 <a:pPr>
-                  <a:defRPr b="1" i="0" strike="noStrike" sz="1100" u="none">
+                  <a:defRPr b="1" i="0" strike="noStrike" sz="1300" u="none">
                     <a:solidFill>
-                      <a:srgbClr val="FFFFFF"/>
+                      <a:srgbClr val="1A1A1A"/>
                     </a:solidFill>
                     <a:latin typeface="+mn-lt"/>
                   </a:defRPr>
                 </a:pPr>
               </a:p>
             </c:txPr>
-            <c:dLblPos val="inEnd"/>
             <c:showLegendKey val="0"/>
-            <c:showVal val="1"/>
+            <c:showVal val="0"/>
             <c:showCatName val="0"/>
             <c:showSerName val="0"/>
             <c:showPercent val="0"/>
@@ -5492,30 +5477,27 @@
           </c:dLbls>
           <c:cat>
             <c:multiLvlStrRef>
-              <c:f>Sheet1!$A$2:$A$8</c:f>
+              <c:f>Sheet1!$A$2:$A$7</c:f>
               <c:multiLvlStrCache>
-                <c:ptCount val="7"/>
+                <c:ptCount val="6"/>
                 <c:lvl>
                   <c:pt idx="0">
-                    <c:v>Aerospace</c:v>
+                    <c:v>Today</c:v>
                   </c:pt>
                   <c:pt idx="1">
+                    <c:v>To bear case</c:v>
+                  </c:pt>
+                  <c:pt idx="2">
+                    <c:v>Margins</c:v>
+                  </c:pt>
+                  <c:pt idx="3">
+                    <c:v>Share</c:v>
+                  </c:pt>
+                  <c:pt idx="4">
                     <c:v>Power</c:v>
                   </c:pt>
-                  <c:pt idx="2">
-                    <c:v>Leasing</c:v>
-                  </c:pt>
-                  <c:pt idx="3">
-                    <c:v>– Corporate</c:v>
-                  </c:pt>
-                  <c:pt idx="4">
-                    <c:v>– Net debt</c:v>
-                  </c:pt>
                   <c:pt idx="5">
-                    <c:v>SOTP</c:v>
-                  </c:pt>
-                  <c:pt idx="6">
-                    <c:v>Today</c:v>
+                    <c:v>Base case</c:v>
                   </c:pt>
                 </c:lvl>
               </c:multiLvlStrCache>
@@ -5523,29 +5505,26 @@
           </c:cat>
           <c:val>
             <c:numRef>
-              <c:f>Sheet1!$D$2:$D$8</c:f>
+              <c:f>Sheet1!$D$2:$D$7</c:f>
               <c:numCache>
                 <c:formatCode>General</c:formatCode>
-                <c:ptCount val="7"/>
+                <c:ptCount val="6"/>
                 <c:pt idx="0">
                   <c:v>0</c:v>
                 </c:pt>
                 <c:pt idx="1">
-                  <c:v>0</c:v>
+                  <c:v>4.8</c:v>
                 </c:pt>
                 <c:pt idx="2">
-                  <c:v>0</c:v>
+                  <c:v>17</c:v>
                 </c:pt>
                 <c:pt idx="3">
-                  <c:v>27.8</c:v>
+                  <c:v>32.7</c:v>
                 </c:pt>
                 <c:pt idx="4">
-                  <c:v>23.8</c:v>
+                  <c:v>55.1</c:v>
                 </c:pt>
                 <c:pt idx="5">
-                  <c:v>0</c:v>
-                </c:pt>
-                <c:pt idx="6">
                   <c:v>0</c:v>
                 </c:pt>
               </c:numCache>
@@ -5561,7 +5540,7 @@
               <c:strCache>
                 <c:ptCount val="1"/>
                 <c:pt idx="0">
-                  <c:v>Totals</c:v>
+                  <c:v>Base case</c:v>
                 </c:pt>
               </c:strCache>
             </c:strRef>
@@ -5574,24 +5553,23 @@
           </c:spPr>
           <c:invertIfNegative val="0"/>
           <c:dLbls>
-            <c:numFmt formatCode="&quot;$&quot;0;;;" sourceLinked="0"/>
+            <c:numFmt formatCode="#,##0" sourceLinked="0"/>
             <c:txPr>
               <a:bodyPr/>
               <a:lstStyle/>
               <a:p>
                 <a:pPr>
-                  <a:defRPr b="1" i="0" strike="noStrike" sz="1100" u="none">
+                  <a:defRPr b="1" i="0" strike="noStrike" sz="1300" u="none">
                     <a:solidFill>
-                      <a:srgbClr val="FFFFFF"/>
+                      <a:srgbClr val="1A1A1A"/>
                     </a:solidFill>
                     <a:latin typeface="+mn-lt"/>
                   </a:defRPr>
                 </a:pPr>
               </a:p>
             </c:txPr>
-            <c:dLblPos val="inEnd"/>
             <c:showLegendKey val="0"/>
-            <c:showVal val="1"/>
+            <c:showVal val="0"/>
             <c:showCatName val="0"/>
             <c:showSerName val="0"/>
             <c:showPercent val="0"/>
@@ -5600,30 +5578,27 @@
           </c:dLbls>
           <c:cat>
             <c:multiLvlStrRef>
-              <c:f>Sheet1!$A$2:$A$8</c:f>
+              <c:f>Sheet1!$A$2:$A$7</c:f>
               <c:multiLvlStrCache>
-                <c:ptCount val="7"/>
+                <c:ptCount val="6"/>
                 <c:lvl>
                   <c:pt idx="0">
-                    <c:v>Aerospace</c:v>
+                    <c:v>Today</c:v>
                   </c:pt>
                   <c:pt idx="1">
+                    <c:v>To bear case</c:v>
+                  </c:pt>
+                  <c:pt idx="2">
+                    <c:v>Margins</c:v>
+                  </c:pt>
+                  <c:pt idx="3">
+                    <c:v>Share</c:v>
+                  </c:pt>
+                  <c:pt idx="4">
                     <c:v>Power</c:v>
                   </c:pt>
-                  <c:pt idx="2">
-                    <c:v>Leasing</c:v>
-                  </c:pt>
-                  <c:pt idx="3">
-                    <c:v>– Corporate</c:v>
-                  </c:pt>
-                  <c:pt idx="4">
-                    <c:v>– Net debt</c:v>
-                  </c:pt>
                   <c:pt idx="5">
-                    <c:v>SOTP</c:v>
-                  </c:pt>
-                  <c:pt idx="6">
-                    <c:v>Today</c:v>
+                    <c:v>Base case</c:v>
                   </c:pt>
                 </c:lvl>
               </c:multiLvlStrCache>
@@ -5631,10 +5606,10 @@
           </c:cat>
           <c:val>
             <c:numRef>
-              <c:f>Sheet1!$E$2:$E$8</c:f>
+              <c:f>Sheet1!$E$2:$E$7</c:f>
               <c:numCache>
                 <c:formatCode>General</c:formatCode>
-                <c:ptCount val="7"/>
+                <c:ptCount val="6"/>
                 <c:pt idx="0">
                   <c:v>0</c:v>
                 </c:pt>
@@ -5651,142 +5626,30 @@
                   <c:v>0</c:v>
                 </c:pt>
                 <c:pt idx="5">
-                  <c:v>276.7</c:v>
-                </c:pt>
-                <c:pt idx="6">
-                  <c:v>0</c:v>
-                </c:pt>
-              </c:numCache>
-            </c:numRef>
-          </c:val>
-        </c:ser>
-        <c:ser>
-          <c:idx val="4"/>
-          <c:order val="4"/>
-          <c:tx>
-            <c:strRef>
-              <c:f>Sheet1!$F$1</c:f>
-              <c:strCache>
-                <c:ptCount val="1"/>
-                <c:pt idx="0">
-                  <c:v>Today</c:v>
-                </c:pt>
-              </c:strCache>
-            </c:strRef>
-          </c:tx>
-          <c:spPr>
-            <a:solidFill>
-              <a:srgbClr val="847C7A"/>
-            </a:solidFill>
-            <a:effectLst/>
-          </c:spPr>
-          <c:invertIfNegative val="0"/>
-          <c:dLbls>
-            <c:numFmt formatCode="&quot;$&quot;0;;;" sourceLinked="0"/>
-            <c:txPr>
-              <a:bodyPr/>
-              <a:lstStyle/>
-              <a:p>
-                <a:pPr>
-                  <a:defRPr b="1" i="0" strike="noStrike" sz="1100" u="none">
-                    <a:solidFill>
-                      <a:srgbClr val="FFFFFF"/>
-                    </a:solidFill>
-                    <a:latin typeface="+mn-lt"/>
-                  </a:defRPr>
-                </a:pPr>
-              </a:p>
-            </c:txPr>
-            <c:dLblPos val="inEnd"/>
-            <c:showLegendKey val="0"/>
-            <c:showVal val="1"/>
-            <c:showCatName val="0"/>
-            <c:showSerName val="0"/>
-            <c:showPercent val="0"/>
-            <c:showBubbleSize val="0"/>
-            <c:showLeaderLines val="0"/>
-          </c:dLbls>
-          <c:cat>
-            <c:multiLvlStrRef>
-              <c:f>Sheet1!$A$2:$A$8</c:f>
-              <c:multiLvlStrCache>
-                <c:ptCount val="7"/>
-                <c:lvl>
-                  <c:pt idx="0">
-                    <c:v>Aerospace</c:v>
-                  </c:pt>
-                  <c:pt idx="1">
-                    <c:v>Power</c:v>
-                  </c:pt>
-                  <c:pt idx="2">
-                    <c:v>Leasing</c:v>
-                  </c:pt>
-                  <c:pt idx="3">
-                    <c:v>– Corporate</c:v>
-                  </c:pt>
-                  <c:pt idx="4">
-                    <c:v>– Net debt</c:v>
-                  </c:pt>
-                  <c:pt idx="5">
-                    <c:v>SOTP</c:v>
-                  </c:pt>
-                  <c:pt idx="6">
-                    <c:v>Today</c:v>
-                  </c:pt>
-                </c:lvl>
-              </c:multiLvlStrCache>
-            </c:multiLvlStrRef>
-          </c:cat>
-          <c:val>
-            <c:numRef>
-              <c:f>Sheet1!$F$2:$F$8</c:f>
-              <c:numCache>
-                <c:formatCode>General</c:formatCode>
-                <c:ptCount val="7"/>
-                <c:pt idx="0">
-                  <c:v>0</c:v>
-                </c:pt>
-                <c:pt idx="1">
-                  <c:v>0</c:v>
-                </c:pt>
-                <c:pt idx="2">
-                  <c:v>0</c:v>
-                </c:pt>
-                <c:pt idx="3">
-                  <c:v>0</c:v>
-                </c:pt>
-                <c:pt idx="4">
-                  <c:v>0</c:v>
-                </c:pt>
-                <c:pt idx="5">
-                  <c:v>0</c:v>
-                </c:pt>
-                <c:pt idx="6">
-                  <c:v>167</c:v>
+                  <c:v>276.6</c:v>
                 </c:pt>
               </c:numCache>
             </c:numRef>
           </c:val>
         </c:ser>
         <c:dLbls>
-          <c:numFmt formatCode="&quot;$&quot;0;;;" sourceLinked="0"/>
+          <c:numFmt formatCode="#,##0" sourceLinked="0"/>
           <c:txPr>
             <a:bodyPr/>
             <a:lstStyle/>
             <a:p>
               <a:pPr>
-                <a:defRPr b="1" i="0" strike="noStrike" sz="1100" u="none">
+                <a:defRPr b="1" i="0" strike="noStrike" sz="1300" u="none">
                   <a:solidFill>
-                    <a:srgbClr val="FFFFFF"/>
+                    <a:srgbClr val="1A1A1A"/>
                   </a:solidFill>
                   <a:latin typeface="+mn-lt"/>
                 </a:defRPr>
               </a:pPr>
             </a:p>
           </c:txPr>
-          <c:dLblPos val="inEnd"/>
           <c:showLegendKey val="0"/>
-          <c:showVal val="1"/>
+          <c:showVal val="0"/>
           <c:showCatName val="0"/>
           <c:showSerName val="0"/>
           <c:showPercent val="0"/>
@@ -5824,7 +5687,7 @@
           <a:lstStyle/>
           <a:p>
             <a:pPr>
-              <a:defRPr sz="1000" b="0" i="0" u="none" strike="noStrike">
+              <a:defRPr sz="1100" b="0" i="0" u="none" strike="noStrike">
                 <a:solidFill>
                   <a:srgbClr val="1A1A1A"/>
                 </a:solidFill>
@@ -5844,7 +5707,7 @@
         <c:axId val="2094734552"/>
         <c:scaling>
           <c:orientation val="minMax"/>
-          <c:max val="345"/>
+          <c:max val="300"/>
           <c:min val="0"/>
         </c:scaling>
         <c:delete val="1"/>
@@ -5915,7 +5778,7 @@
       <c:layout/>
       <c:barChart>
         <c:barDir val="col"/>
-        <c:grouping val="clustered"/>
+        <c:grouping val="stacked"/>
         <c:varyColors val="0"/>
         <c:ser>
           <c:idx val="0"/>
@@ -5926,7 +5789,7 @@
               <c:strCache>
                 <c:ptCount val="1"/>
                 <c:pt idx="0">
-                  <c:v>Power EBITDA</c:v>
+                  <c:v>Firm backlog</c:v>
                 </c:pt>
               </c:strCache>
             </c:strRef>
@@ -5939,21 +5802,22 @@
           </c:spPr>
           <c:invertIfNegative val="0"/>
           <c:dLbls>
-            <c:numFmt formatCode="#,##0" sourceLinked="0"/>
+            <c:numFmt formatCode="0;;;" sourceLinked="0"/>
             <c:txPr>
               <a:bodyPr/>
               <a:lstStyle/>
               <a:p>
                 <a:pPr>
-                  <a:defRPr b="1" i="0" strike="noStrike" sz="1200" u="none">
+                  <a:defRPr b="1" i="0" strike="noStrike" sz="1300" u="none">
                     <a:solidFill>
-                      <a:srgbClr val="1A1A1A"/>
+                      <a:srgbClr val="FFFFFF"/>
                     </a:solidFill>
                     <a:latin typeface="+mn-lt"/>
                   </a:defRPr>
                 </a:pPr>
               </a:p>
             </c:txPr>
+            <c:dLblPos val="ctr"/>
             <c:showLegendKey val="0"/>
             <c:showVal val="1"/>
             <c:showCatName val="0"/>
@@ -5964,27 +5828,18 @@
           </c:dLbls>
           <c:cat>
             <c:multiLvlStrRef>
-              <c:f>Sheet1!$A$2:$A$7</c:f>
+              <c:f>Sheet1!$A$2:$A$4</c:f>
               <c:multiLvlStrCache>
-                <c:ptCount val="6"/>
+                <c:ptCount val="3"/>
                 <c:lvl>
                   <c:pt idx="0">
-                    <c:v>FY26E</c:v>
+                    <c:v>GE Vernova</c:v>
                   </c:pt>
                   <c:pt idx="1">
-                    <c:v>FY27E</c:v>
+                    <c:v>Siemens Energy</c:v>
                   </c:pt>
                   <c:pt idx="2">
-                    <c:v>FY28E</c:v>
-                  </c:pt>
-                  <c:pt idx="3">
-                    <c:v>FY29E</c:v>
-                  </c:pt>
-                  <c:pt idx="4">
-                    <c:v>FY30E</c:v>
-                  </c:pt>
-                  <c:pt idx="5">
-                    <c:v>FY31E</c:v>
+                    <c:v>Mitsubishi</c:v>
                   </c:pt>
                 </c:lvl>
               </c:multiLvlStrCache>
@@ -5992,48 +5847,124 @@
           </c:cat>
           <c:val>
             <c:numRef>
-              <c:f>Sheet1!$B$2:$B$7</c:f>
+              <c:f>Sheet1!$B$2:$B$4</c:f>
               <c:numCache>
                 <c:formatCode>General</c:formatCode>
-                <c:ptCount val="6"/>
+                <c:ptCount val="3"/>
                 <c:pt idx="0">
-                  <c:v>20</c:v>
+                  <c:v>53</c:v>
                 </c:pt>
                 <c:pt idx="1">
-                  <c:v>450</c:v>
+                  <c:v>69</c:v>
                 </c:pt>
                 <c:pt idx="2">
-                  <c:v>900</c:v>
+                  <c:v>35</c:v>
                 </c:pt>
-                <c:pt idx="3">
-                  <c:v>1100</c:v>
+              </c:numCache>
+            </c:numRef>
+          </c:val>
+        </c:ser>
+        <c:ser>
+          <c:idx val="1"/>
+          <c:order val="1"/>
+          <c:tx>
+            <c:strRef>
+              <c:f>Sheet1!$C$1</c:f>
+              <c:strCache>
+                <c:ptCount val="1"/>
+                <c:pt idx="0">
+                  <c:v>Slot reservations</c:v>
                 </c:pt>
-                <c:pt idx="4">
-                  <c:v>1200</c:v>
+              </c:strCache>
+            </c:strRef>
+          </c:tx>
+          <c:spPr>
+            <a:solidFill>
+              <a:srgbClr val="B5AEA9"/>
+            </a:solidFill>
+            <a:effectLst/>
+          </c:spPr>
+          <c:invertIfNegative val="0"/>
+          <c:dLbls>
+            <c:numFmt formatCode="0;;;" sourceLinked="0"/>
+            <c:txPr>
+              <a:bodyPr/>
+              <a:lstStyle/>
+              <a:p>
+                <a:pPr>
+                  <a:defRPr b="1" i="0" strike="noStrike" sz="1300" u="none">
+                    <a:solidFill>
+                      <a:srgbClr val="FFFFFF"/>
+                    </a:solidFill>
+                    <a:latin typeface="+mn-lt"/>
+                  </a:defRPr>
+                </a:pPr>
+              </a:p>
+            </c:txPr>
+            <c:dLblPos val="ctr"/>
+            <c:showLegendKey val="0"/>
+            <c:showVal val="1"/>
+            <c:showCatName val="0"/>
+            <c:showSerName val="0"/>
+            <c:showPercent val="0"/>
+            <c:showBubbleSize val="0"/>
+            <c:showLeaderLines val="0"/>
+          </c:dLbls>
+          <c:cat>
+            <c:multiLvlStrRef>
+              <c:f>Sheet1!$A$2:$A$4</c:f>
+              <c:multiLvlStrCache>
+                <c:ptCount val="3"/>
+                <c:lvl>
+                  <c:pt idx="0">
+                    <c:v>GE Vernova</c:v>
+                  </c:pt>
+                  <c:pt idx="1">
+                    <c:v>Siemens Energy</c:v>
+                  </c:pt>
+                  <c:pt idx="2">
+                    <c:v>Mitsubishi</c:v>
+                  </c:pt>
+                </c:lvl>
+              </c:multiLvlStrCache>
+            </c:multiLvlStrRef>
+          </c:cat>
+          <c:val>
+            <c:numRef>
+              <c:f>Sheet1!$C$2:$C$4</c:f>
+              <c:numCache>
+                <c:formatCode>General</c:formatCode>
+                <c:ptCount val="3"/>
+                <c:pt idx="0">
+                  <c:v>63</c:v>
                 </c:pt>
-                <c:pt idx="5">
-                  <c:v>1300</c:v>
+                <c:pt idx="1">
+                  <c:v/>
+                </c:pt>
+                <c:pt idx="2">
+                  <c:v/>
                 </c:pt>
               </c:numCache>
             </c:numRef>
           </c:val>
         </c:ser>
         <c:dLbls>
-          <c:numFmt formatCode="#,##0" sourceLinked="0"/>
+          <c:numFmt formatCode="0;;;" sourceLinked="0"/>
           <c:txPr>
             <a:bodyPr/>
             <a:lstStyle/>
             <a:p>
               <a:pPr>
-                <a:defRPr b="1" i="0" strike="noStrike" sz="1200" u="none">
+                <a:defRPr b="1" i="0" strike="noStrike" sz="1300" u="none">
                   <a:solidFill>
-                    <a:srgbClr val="1A1A1A"/>
+                    <a:srgbClr val="FFFFFF"/>
                   </a:solidFill>
                   <a:latin typeface="+mn-lt"/>
                 </a:defRPr>
               </a:pPr>
             </a:p>
           </c:txPr>
+          <c:dLblPos val="ctr"/>
           <c:showLegendKey val="0"/>
           <c:showVal val="1"/>
           <c:showCatName val="0"/>
@@ -6042,8 +5973,8 @@
           <c:showBubbleSize val="0"/>
           <c:showLeaderLines val="0"/>
         </c:dLbls>
-        <c:gapWidth val="40"/>
-        <c:overlap val="0"/>
+        <c:gapWidth val="55"/>
+        <c:overlap val="100"/>
         <c:axId val="2094734554"/>
         <c:axId val="2094734552"/>
         <c:axId val="2094734556"/>
@@ -6073,7 +6004,7 @@
           <a:lstStyle/>
           <a:p>
             <a:pPr>
-              <a:defRPr sz="1100" b="0" i="0" u="none" strike="noStrike">
+              <a:defRPr sz="1200" b="0" i="0" u="none" strike="noStrike">
                 <a:solidFill>
                   <a:srgbClr val="1A1A1A"/>
                 </a:solidFill>
@@ -6093,7 +6024,7 @@
         <c:axId val="2094734552"/>
         <c:scaling>
           <c:orientation val="minMax"/>
-          <c:max val="1500"/>
+          <c:max val="135"/>
           <c:min val="0"/>
         </c:scaling>
         <c:delete val="1"/>
@@ -7889,7 +7820,7 @@
             <c:size val="6"/>
             <c:spPr>
               <a:solidFill>
-                <a:srgbClr val="0A1C58"/>
+                <a:srgbClr val="847C7A"/>
               </a:solidFill>
               <a:ln w="9525" cap="flat">
                 <a:solidFill>
@@ -8027,7 +7958,7 @@
             <c:size val="6"/>
             <c:spPr>
               <a:solidFill>
-                <a:srgbClr val="847C7A"/>
+                <a:srgbClr val="0A1C58"/>
               </a:solidFill>
               <a:ln w="9525" cap="flat">
                 <a:solidFill>
@@ -10407,7 +10338,7 @@
           <a:p>
             <a:r>
               <a:rPr lang="en-US" dirty="0"/>
-              <a:t>SOTP per share: Aerospace $1,541M × 16x = $237; Power $450M × 12x = $52; Leasing + SCI $455M × 9x = $39; corporate ($207M at the blended 14.0x) = −$28; net debt and preferred = −$24; total $277 vs. $167.03 (+66%). Excluding Power: $225 (+35%).</a:t>
+              <a:t>Waterfall: today $167.03; bear case (bear margins and share, no Power) SOTP $171.86 (+$4.83); Shapley contributions on the SOTP: margins +$17.04, share +$32.66, Power +$55.08 = $276.65 (+66%). Base-case SOTP build: Aerospace $1,541M × 16x = $237; Power $450M × 12x = $52; Leasing + SCI $455M × 9x = $39; corporate −$28; net debt and preferred −$24.</a:t>
             </a:r>
             <a:endParaRPr lang="en-US" dirty="0"/>
           </a:p>
@@ -23784,7 +23715,7 @@
                   <a:schemeClr val="tx2"/>
                 </a:solidFill>
               </a:rPr>
-              <a:t>Every segment at a sober multiple gets to $277, before any new Power contract.</a:t>
+              <a:t>At $167 the market prices our bear case. Each thesis builds from there to $277.</a:t>
             </a:r>
             <a:endParaRPr lang="en-US" sz="1700" dirty="0"/>
           </a:p>
@@ -23820,7 +23751,7 @@
                   <a:srgbClr val="1A1A1A"/>
                 </a:solidFill>
               </a:rPr>
-              <a:t>FY27E Sum of the Parts ($ / Share)</a:t>
+              <a:t>From Today to Our Base Case ($ / Share)</a:t>
             </a:r>
             <a:endParaRPr lang="en-US" sz="1600" dirty="0"/>
           </a:p>
@@ -23851,7 +23782,7 @@
       </p:sp>
       <p:graphicFrame>
         <p:nvGraphicFramePr>
-          <p:cNvPr id="6" name="SOTP waterfall" descr=""/>
+          <p:cNvPr id="6" name="Thesis waterfall" descr=""/>
           <p:cNvGraphicFramePr/>
           <p:nvPr/>
         </p:nvGraphicFramePr>
@@ -23867,7 +23798,223 @@
       </p:graphicFrame>
       <p:sp>
         <p:nvSpPr>
-          <p:cNvPr id="7" name="Multiples caption"/>
+          <p:cNvPr id="7" name="Waterfall label 1"/>
+          <p:cNvSpPr txBox="1"/>
+          <p:nvPr/>
+        </p:nvSpPr>
+        <p:spPr>
+          <a:xfrm>
+            <a:off x="475488" y="2956932"/>
+            <a:ext cx="822960" cy="237744"/>
+          </a:xfrm>
+          <a:prstGeom prst="rect">
+            <a:avLst/>
+          </a:prstGeom>
+          <a:noFill/>
+          <a:ln/>
+        </p:spPr>
+        <p:txBody>
+          <a:bodyPr wrap="square" lIns="0" tIns="0" rIns="0" bIns="0" rtlCol="0" anchor="b"/>
+          <a:lstStyle/>
+          <a:p>
+            <a:pPr algn="ctr" indent="0" marL="0">
+              <a:buNone/>
+            </a:pPr>
+            <a:r>
+              <a:rPr lang="en-US" sz="1300" b="1" dirty="0">
+                <a:solidFill>
+                  <a:srgbClr val="1A1A1A"/>
+                </a:solidFill>
+              </a:rPr>
+              <a:t>$167</a:t>
+            </a:r>
+            <a:endParaRPr lang="en-US" sz="1300" dirty="0"/>
+          </a:p>
+        </p:txBody>
+      </p:sp>
+      <p:sp>
+        <p:nvSpPr>
+          <p:cNvPr id="8" name="Waterfall label 2"/>
+          <p:cNvSpPr txBox="1"/>
+          <p:nvPr/>
+        </p:nvSpPr>
+        <p:spPr>
+          <a:xfrm>
+            <a:off x="1389888" y="2917593"/>
+            <a:ext cx="822960" cy="237744"/>
+          </a:xfrm>
+          <a:prstGeom prst="rect">
+            <a:avLst/>
+          </a:prstGeom>
+          <a:noFill/>
+          <a:ln/>
+        </p:spPr>
+        <p:txBody>
+          <a:bodyPr wrap="square" lIns="0" tIns="0" rIns="0" bIns="0" rtlCol="0" anchor="b"/>
+          <a:lstStyle/>
+          <a:p>
+            <a:pPr algn="ctr" indent="0" marL="0">
+              <a:buNone/>
+            </a:pPr>
+            <a:r>
+              <a:rPr lang="en-US" sz="1300" b="1" dirty="0">
+                <a:solidFill>
+                  <a:schemeClr val="tx2"/>
+                </a:solidFill>
+              </a:rPr>
+              <a:t>+$5</a:t>
+            </a:r>
+            <a:endParaRPr lang="en-US" sz="1300" dirty="0"/>
+          </a:p>
+        </p:txBody>
+      </p:sp>
+      <p:sp>
+        <p:nvSpPr>
+          <p:cNvPr id="9" name="Waterfall label 3"/>
+          <p:cNvSpPr txBox="1"/>
+          <p:nvPr/>
+        </p:nvSpPr>
+        <p:spPr>
+          <a:xfrm>
+            <a:off x="2304288" y="2781109"/>
+            <a:ext cx="822960" cy="237744"/>
+          </a:xfrm>
+          <a:prstGeom prst="rect">
+            <a:avLst/>
+          </a:prstGeom>
+          <a:noFill/>
+          <a:ln/>
+        </p:spPr>
+        <p:txBody>
+          <a:bodyPr wrap="square" lIns="0" tIns="0" rIns="0" bIns="0" rtlCol="0" anchor="b"/>
+          <a:lstStyle/>
+          <a:p>
+            <a:pPr algn="ctr" indent="0" marL="0">
+              <a:buNone/>
+            </a:pPr>
+            <a:r>
+              <a:rPr lang="en-US" sz="1300" b="1" dirty="0">
+                <a:solidFill>
+                  <a:schemeClr val="tx2"/>
+                </a:solidFill>
+              </a:rPr>
+              <a:t>+$17</a:t>
+            </a:r>
+            <a:endParaRPr lang="en-US" sz="1300" dirty="0"/>
+          </a:p>
+        </p:txBody>
+      </p:sp>
+      <p:sp>
+        <p:nvSpPr>
+          <p:cNvPr id="10" name="Waterfall label 4"/>
+          <p:cNvSpPr txBox="1"/>
+          <p:nvPr/>
+        </p:nvSpPr>
+        <p:spPr>
+          <a:xfrm>
+            <a:off x="3218688" y="2518579"/>
+            <a:ext cx="822960" cy="237744"/>
+          </a:xfrm>
+          <a:prstGeom prst="rect">
+            <a:avLst/>
+          </a:prstGeom>
+          <a:noFill/>
+          <a:ln/>
+        </p:spPr>
+        <p:txBody>
+          <a:bodyPr wrap="square" lIns="0" tIns="0" rIns="0" bIns="0" rtlCol="0" anchor="b"/>
+          <a:lstStyle/>
+          <a:p>
+            <a:pPr algn="ctr" indent="0" marL="0">
+              <a:buNone/>
+            </a:pPr>
+            <a:r>
+              <a:rPr lang="en-US" sz="1300" b="1" dirty="0">
+                <a:solidFill>
+                  <a:schemeClr val="tx2"/>
+                </a:solidFill>
+              </a:rPr>
+              <a:t>+$33</a:t>
+            </a:r>
+            <a:endParaRPr lang="en-US" sz="1300" dirty="0"/>
+          </a:p>
+        </p:txBody>
+      </p:sp>
+      <p:sp>
+        <p:nvSpPr>
+          <p:cNvPr id="11" name="Waterfall label 5"/>
+          <p:cNvSpPr txBox="1"/>
+          <p:nvPr/>
+        </p:nvSpPr>
+        <p:spPr>
+          <a:xfrm>
+            <a:off x="4133088" y="2076213"/>
+            <a:ext cx="822960" cy="237744"/>
+          </a:xfrm>
+          <a:prstGeom prst="rect">
+            <a:avLst/>
+          </a:prstGeom>
+          <a:noFill/>
+          <a:ln/>
+        </p:spPr>
+        <p:txBody>
+          <a:bodyPr wrap="square" lIns="0" tIns="0" rIns="0" bIns="0" rtlCol="0" anchor="b"/>
+          <a:lstStyle/>
+          <a:p>
+            <a:pPr algn="ctr" indent="0" marL="0">
+              <a:buNone/>
+            </a:pPr>
+            <a:r>
+              <a:rPr lang="en-US" sz="1300" b="1" dirty="0">
+                <a:solidFill>
+                  <a:schemeClr val="tx2"/>
+                </a:solidFill>
+              </a:rPr>
+              <a:t>+$55</a:t>
+            </a:r>
+            <a:endParaRPr lang="en-US" sz="1300" dirty="0"/>
+          </a:p>
+        </p:txBody>
+      </p:sp>
+      <p:sp>
+        <p:nvSpPr>
+          <p:cNvPr id="12" name="Waterfall label 6"/>
+          <p:cNvSpPr txBox="1"/>
+          <p:nvPr/>
+        </p:nvSpPr>
+        <p:spPr>
+          <a:xfrm>
+            <a:off x="5047488" y="2077016"/>
+            <a:ext cx="822960" cy="237744"/>
+          </a:xfrm>
+          <a:prstGeom prst="rect">
+            <a:avLst/>
+          </a:prstGeom>
+          <a:noFill/>
+          <a:ln/>
+        </p:spPr>
+        <p:txBody>
+          <a:bodyPr wrap="square" lIns="0" tIns="0" rIns="0" bIns="0" rtlCol="0" anchor="b"/>
+          <a:lstStyle/>
+          <a:p>
+            <a:pPr algn="ctr" indent="0" marL="0">
+              <a:buNone/>
+            </a:pPr>
+            <a:r>
+              <a:rPr lang="en-US" sz="1300" b="1" dirty="0">
+                <a:solidFill>
+                  <a:schemeClr val="tx2"/>
+                </a:solidFill>
+              </a:rPr>
+              <a:t>$277</a:t>
+            </a:r>
+            <a:endParaRPr lang="en-US" sz="1300" dirty="0"/>
+          </a:p>
+        </p:txBody>
+      </p:sp>
+      <p:sp>
+        <p:nvSpPr>
+          <p:cNvPr id="13" name="Waterfall caption"/>
           <p:cNvSpPr txBox="1"/>
           <p:nvPr/>
         </p:nvSpPr>
@@ -23895,7 +24042,7 @@
                   <a:schemeClr val="accent2"/>
                 </a:solidFill>
               </a:rPr>
-              <a:t>Aerospace 16x · Power 12x · Leasing + SCI 9x FY27E EBITDA</a:t>
+              <a:t>FY27E SOTP; each thesis switched from our bear case to base (Shapley average)</a:t>
             </a:r>
             <a:endParaRPr lang="en-US" sz="1000" dirty="0"/>
           </a:p>
@@ -23903,7 +24050,7 @@
       </p:sp>
       <p:sp>
         <p:nvSpPr>
-          <p:cNvPr id="8" name="Means header"/>
+          <p:cNvPr id="14" name="Means header"/>
           <p:cNvSpPr txBox="1"/>
           <p:nvPr/>
         </p:nvSpPr>
@@ -23939,7 +24086,7 @@
       </p:sp>
       <p:sp>
         <p:nvSpPr>
-          <p:cNvPr id="9" name="Means header rule"/>
+          <p:cNvPr id="15" name="Means header rule"/>
           <p:cNvSpPr/>
           <p:nvPr/>
         </p:nvSpPr>
@@ -23962,7 +24109,7 @@
       </p:sp>
       <p:sp>
         <p:nvSpPr>
-          <p:cNvPr id="10" name="Means stat 1"/>
+          <p:cNvPr id="16" name="Means stat 1"/>
           <p:cNvSpPr txBox="1"/>
           <p:nvPr/>
         </p:nvSpPr>
@@ -24004,7 +24151,7 @@
                   <a:srgbClr val="1A1A1A"/>
                 </a:solidFill>
               </a:rPr>
-              <a:t>upside to our $277 target</a:t>
+              <a:t>upside to our $277 base case</a:t>
             </a:r>
             <a:endParaRPr lang="en-US" sz="2800" dirty="0"/>
           </a:p>
@@ -24012,7 +24159,7 @@
       </p:sp>
       <p:sp>
         <p:nvSpPr>
-          <p:cNvPr id="11" name="Means stat 2"/>
+          <p:cNvPr id="17" name="Means stat 2"/>
           <p:cNvSpPr txBox="1"/>
           <p:nvPr/>
         </p:nvSpPr>
@@ -24040,7 +24187,7 @@
                   <a:schemeClr val="tx2"/>
                 </a:solidFill>
               </a:rPr>
-              <a:t>$225</a:t>
+              <a:t>$50</a:t>
             </a:r>
             <a:endParaRPr lang="en-US" sz="2800" dirty="0"/>
           </a:p>
@@ -24054,7 +24201,7 @@
                   <a:srgbClr val="1A1A1A"/>
                 </a:solidFill>
               </a:rPr>
-              <a:t>core business alone, 35% above today</a:t>
+              <a:t>from the aviation theses: margins and share</a:t>
             </a:r>
             <a:endParaRPr lang="en-US" sz="2800" dirty="0"/>
           </a:p>
@@ -24062,7 +24209,7 @@
       </p:sp>
       <p:sp>
         <p:nvSpPr>
-          <p:cNvPr id="12" name="Means stat 3"/>
+          <p:cNvPr id="18" name="Means stat 3"/>
           <p:cNvSpPr txBox="1"/>
           <p:nvPr/>
         </p:nvSpPr>
@@ -24090,7 +24237,7 @@
                   <a:schemeClr val="tx2"/>
                 </a:solidFill>
               </a:rPr>
-              <a:t>$52</a:t>
+              <a:t>$55</a:t>
             </a:r>
             <a:endParaRPr lang="en-US" sz="2800" dirty="0"/>
           </a:p>
@@ -24104,7 +24251,7 @@
                   <a:srgbClr val="1A1A1A"/>
                 </a:solidFill>
               </a:rPr>
-              <a:t>for Power, on just the signed order</a:t>
+              <a:t>from Power, on just the signed order</a:t>
             </a:r>
             <a:endParaRPr lang="en-US" sz="2800" dirty="0"/>
           </a:p>
@@ -24112,7 +24259,7 @@
       </p:sp>
       <p:sp>
         <p:nvSpPr>
-          <p:cNvPr id="13" name="Takeaway"/>
+          <p:cNvPr id="19" name="Takeaway"/>
           <p:cNvSpPr txBox="1"/>
           <p:nvPr/>
         </p:nvSpPr>
@@ -24142,7 +24289,7 @@
                   <a:schemeClr val="bg1"/>
                 </a:solidFill>
               </a:rPr>
-              <a:t>Strip out Power and the core is still worth $225. Power is the free call option on top.</a:t>
+              <a:t>Get the aviation theses right and you make 33%. Power on just the signed order takes it to 66%.</a:t>
             </a:r>
             <a:endParaRPr lang="en-US" sz="1700" dirty="0"/>
           </a:p>
@@ -24150,7 +24297,7 @@
       </p:sp>
       <p:sp>
         <p:nvSpPr>
-          <p:cNvPr id="14" name="Source"/>
+          <p:cNvPr id="20" name="Source"/>
           <p:cNvSpPr txBox="1"/>
           <p:nvPr/>
         </p:nvSpPr>
@@ -24189,7 +24336,7 @@
                   <a:srgbClr val="1A1A1A"/>
                 </a:solidFill>
               </a:rPr>
-              <a:t>GPS model (DCF tab SOTP: FY27E segment EBITDA, YE27E net debt, 104.0M diluted shares); price $167.03 (10/2/26)</a:t>
+              <a:t>GPS model (SOTP: Aerospace 16x, Power 12x, Leasing + SCI 9x FY27E EBITDA); thesis attribution re-runs; price $167.03 (10/2/26)</a:t>
             </a:r>
             <a:endParaRPr lang="en-US" sz="1100" dirty="0"/>
           </a:p>
@@ -25605,7 +25752,7 @@
                   <a:schemeClr val="tx2"/>
                 </a:solidFill>
               </a:rPr>
-              <a:t>The market assigns no value to Power: the stock trades below the core business alone.</a:t>
+              <a:t>Turbine makers are sold out for years, yet the market assigns no value to FTAI's Power.</a:t>
             </a:r>
             <a:endParaRPr lang="en-US" sz="1700" dirty="0"/>
           </a:p>
@@ -25613,7 +25760,7 @@
       </p:sp>
       <p:sp>
         <p:nvSpPr>
-          <p:cNvPr id="4" name="Power ramp header"/>
+          <p:cNvPr id="4" name="Backlog header"/>
           <p:cNvSpPr txBox="1"/>
           <p:nvPr/>
         </p:nvSpPr>
@@ -25641,7 +25788,7 @@
                   <a:srgbClr val="1A1A1A"/>
                 </a:solidFill>
               </a:rPr>
-              <a:t>FTAI Power Adj. EBITDA ($M)</a:t>
+              <a:t>Gas Turbine Backlogs (GW)</a:t>
             </a:r>
             <a:endParaRPr lang="en-US" sz="1600" dirty="0"/>
           </a:p>
@@ -25649,7 +25796,7 @@
       </p:sp>
       <p:sp>
         <p:nvSpPr>
-          <p:cNvPr id="5" name="Power ramp header rule"/>
+          <p:cNvPr id="5" name="Backlog header rule"/>
           <p:cNvSpPr/>
           <p:nvPr/>
         </p:nvSpPr>
@@ -25672,13 +25819,13 @@
       </p:sp>
       <p:graphicFrame>
         <p:nvGraphicFramePr>
-          <p:cNvPr id="6" name="Power ramp chart" descr=""/>
+          <p:cNvPr id="6" name="Turbine backlog chart" descr=""/>
           <p:cNvGraphicFramePr/>
           <p:nvPr/>
         </p:nvGraphicFramePr>
         <p:xfrm>
           <a:off x="320040" y="2103120"/>
-          <a:ext cx="5257800" cy="2926080"/>
+          <a:ext cx="5257800" cy="2606040"/>
         </p:xfrm>
         <a:graphic xmlns:a="http://schemas.openxmlformats.org/drawingml/2006/main">
           <a:graphicData uri="http://schemas.openxmlformats.org/drawingml/2006/chart">
@@ -25688,26 +25835,20 @@
       </p:graphicFrame>
       <p:sp>
         <p:nvSpPr>
-          <p:cNvPr id="7" name="Market value callout"/>
-          <p:cNvSpPr/>
-          <p:nvPr/>
-        </p:nvSpPr>
-        <p:spPr>
-          <a:xfrm>
-            <a:off x="548640" y="2148840"/>
-            <a:ext cx="1051560" cy="1051560"/>
-          </a:xfrm>
-          <a:prstGeom prst="ellipse">
-            <a:avLst/>
-          </a:prstGeom>
-          <a:solidFill>
-            <a:srgbClr val="DCD8D3"/>
-          </a:solidFill>
-          <a:ln w="25400">
-            <a:solidFill>
-              <a:srgbClr val="0A1C58"/>
-            </a:solidFill>
-          </a:ln>
+          <p:cNvPr id="7" name="GEV total label"/>
+          <p:cNvSpPr txBox="1"/>
+          <p:nvPr/>
+        </p:nvSpPr>
+        <p:spPr>
+          <a:xfrm>
+            <a:off x="685800" y="2103120"/>
+            <a:ext cx="1463040" cy="256032"/>
+          </a:xfrm>
+          <a:prstGeom prst="rect">
+            <a:avLst/>
+          </a:prstGeom>
+          <a:noFill/>
+          <a:ln/>
         </p:spPr>
         <p:txBody>
           <a:bodyPr wrap="square" lIns="0" tIns="0" rIns="0" bIns="0" rtlCol="0" anchor="ctr"/>
@@ -25717,41 +25858,27 @@
               <a:buNone/>
             </a:pPr>
             <a:r>
-              <a:rPr lang="en-US" sz="2200" b="1" dirty="0">
+              <a:rPr lang="en-US" sz="1200" b="1" dirty="0">
                 <a:solidFill>
                   <a:schemeClr val="tx2"/>
                 </a:solidFill>
               </a:rPr>
-              <a:t>~$0</a:t>
-            </a:r>
-            <a:endParaRPr lang="en-US" sz="2200" dirty="0"/>
-          </a:p>
-          <a:p>
-            <a:pPr algn="ctr" indent="0" marL="0">
-              <a:buNone/>
-            </a:pPr>
-            <a:r>
-              <a:rPr lang="en-US" sz="1000" b="1" dirty="0">
-                <a:solidFill>
-                  <a:schemeClr val="tx2"/>
-                </a:solidFill>
-              </a:rPr>
-              <a:t>market value</a:t>
-            </a:r>
-            <a:endParaRPr lang="en-US" sz="2200" dirty="0"/>
-          </a:p>
-        </p:txBody>
-      </p:sp>
-      <p:sp>
-        <p:nvSpPr>
-          <p:cNvPr id="8" name="Power ramp caption"/>
+              <a:t>116 total</a:t>
+            </a:r>
+            <a:endParaRPr lang="en-US" sz="1200" dirty="0"/>
+          </a:p>
+        </p:txBody>
+      </p:sp>
+      <p:sp>
+        <p:nvSpPr>
+          <p:cNvPr id="8" name="Backlog legend"/>
           <p:cNvSpPr txBox="1"/>
           <p:nvPr/>
         </p:nvSpPr>
         <p:spPr>
           <a:xfrm>
-            <a:off x="320040" y="5029200"/>
-            <a:ext cx="5257800" cy="274320"/>
+            <a:off x="320040" y="4727448"/>
+            <a:ext cx="5257800" cy="237744"/>
           </a:xfrm>
           <a:prstGeom prst="rect">
             <a:avLst/>
@@ -25767,20 +25894,89 @@
               <a:buNone/>
             </a:pPr>
             <a:r>
-              <a:rPr lang="en-US" sz="1100" i="1" dirty="0">
+              <a:rPr lang="en-US" sz="1100" dirty="0">
+                <a:solidFill>
+                  <a:srgbClr val="0A1C58"/>
+                </a:solidFill>
+              </a:rPr>
+              <a:t>■ </a:t>
+            </a:r>
+            <a:pPr algn="ctr" indent="0" marL="0">
+              <a:buNone/>
+            </a:pPr>
+            <a:r>
+              <a:rPr lang="en-US" sz="1100" dirty="0">
+                <a:solidFill>
+                  <a:srgbClr val="1A1A1A"/>
+                </a:solidFill>
+              </a:rPr>
+              <a:t>Firm backlog   </a:t>
+            </a:r>
+            <a:pPr algn="ctr" indent="0" marL="0">
+              <a:buNone/>
+            </a:pPr>
+            <a:r>
+              <a:rPr lang="en-US" sz="1100" dirty="0">
+                <a:solidFill>
+                  <a:srgbClr val="B5AEA9"/>
+                </a:solidFill>
+              </a:rPr>
+              <a:t>■ </a:t>
+            </a:r>
+            <a:pPr algn="ctr" indent="0" marL="0">
+              <a:buNone/>
+            </a:pPr>
+            <a:r>
+              <a:rPr lang="en-US" sz="1100" dirty="0">
+                <a:solidFill>
+                  <a:srgbClr val="1A1A1A"/>
+                </a:solidFill>
+              </a:rPr>
+              <a:t>Slot reservations</a:t>
+            </a:r>
+            <a:endParaRPr lang="en-US" sz="1100" dirty="0"/>
+          </a:p>
+        </p:txBody>
+      </p:sp>
+      <p:sp>
+        <p:nvSpPr>
+          <p:cNvPr id="9" name="Backlog caption"/>
+          <p:cNvSpPr txBox="1"/>
+          <p:nvPr/>
+        </p:nvSpPr>
+        <p:spPr>
+          <a:xfrm>
+            <a:off x="320040" y="4983480"/>
+            <a:ext cx="5257800" cy="365760"/>
+          </a:xfrm>
+          <a:prstGeom prst="rect">
+            <a:avLst/>
+          </a:prstGeom>
+          <a:noFill/>
+          <a:ln/>
+        </p:spPr>
+        <p:txBody>
+          <a:bodyPr wrap="square" lIns="0" tIns="0" rIns="0" bIns="0" rtlCol="0" anchor="ctr"/>
+          <a:lstStyle/>
+          <a:p>
+            <a:pPr algn="ctr" indent="0" marL="0">
+              <a:buNone/>
+            </a:pPr>
+            <a:r>
+              <a:rPr lang="en-US" sz="1000" i="1" dirty="0">
                 <a:solidFill>
                   <a:schemeClr val="accent2"/>
                 </a:solidFill>
               </a:rPr>
-              <a:t>Our model; the core business alone is worth $225/share vs. $167 today</a:t>
-            </a:r>
-            <a:endParaRPr lang="en-US" sz="1100" dirty="0"/>
-          </a:p>
-        </p:txBody>
-      </p:sp>
-      <p:sp>
-        <p:nvSpPr>
-          <p:cNvPr id="9" name="Power stats header"/>
+              <a:t>Booking out to 2031 (GEV) · lead times 3+ years (Siemens) · new orders deliver 2028–30 (MHI)</a:t>
+            </a:r>
+            <a:endParaRPr lang="en-US" sz="1000" dirty="0"/>
+          </a:p>
+        </p:txBody>
+      </p:sp>
+      <p:sp>
+        <p:nvSpPr>
+          <p:cNvPr id="10" name="Power stats header"/>
           <p:cNvSpPr txBox="1"/>
           <p:nvPr/>
         </p:nvSpPr>
@@ -25816,7 +26012,7 @@
       </p:sp>
       <p:sp>
         <p:nvSpPr>
-          <p:cNvPr id="10" name="Power stats header rule"/>
+          <p:cNvPr id="11" name="Power stats header rule"/>
           <p:cNvSpPr/>
           <p:nvPr/>
         </p:nvSpPr>
@@ -25839,7 +26035,7 @@
       </p:sp>
       <p:sp>
         <p:nvSpPr>
-          <p:cNvPr id="11" name="Power stat 1"/>
+          <p:cNvPr id="12" name="Power stat 1"/>
           <p:cNvSpPr txBox="1"/>
           <p:nvPr/>
         </p:nvSpPr>
@@ -25875,7 +26071,7 @@
       </p:sp>
       <p:sp>
         <p:nvSpPr>
-          <p:cNvPr id="12" name="Power stat 1 label"/>
+          <p:cNvPr id="13" name="Power stat 1 label"/>
           <p:cNvSpPr txBox="1"/>
           <p:nvPr/>
         </p:nvSpPr>
@@ -25911,7 +26107,7 @@
       </p:sp>
       <p:sp>
         <p:nvSpPr>
-          <p:cNvPr id="13" name="Power stat 2"/>
+          <p:cNvPr id="14" name="Power stat 2"/>
           <p:cNvSpPr txBox="1"/>
           <p:nvPr/>
         </p:nvSpPr>
@@ -25947,7 +26143,7 @@
       </p:sp>
       <p:sp>
         <p:nvSpPr>
-          <p:cNvPr id="14" name="Power stat 2 label"/>
+          <p:cNvPr id="15" name="Power stat 2 label"/>
           <p:cNvSpPr txBox="1"/>
           <p:nvPr/>
         </p:nvSpPr>
@@ -25983,7 +26179,7 @@
       </p:sp>
       <p:sp>
         <p:nvSpPr>
-          <p:cNvPr id="15" name="Power stat 3"/>
+          <p:cNvPr id="16" name="Power stat 3"/>
           <p:cNvSpPr txBox="1"/>
           <p:nvPr/>
         </p:nvSpPr>
@@ -26019,7 +26215,7 @@
       </p:sp>
       <p:sp>
         <p:nvSpPr>
-          <p:cNvPr id="16" name="Power stat 3 label"/>
+          <p:cNvPr id="17" name="Power stat 3 label"/>
           <p:cNvSpPr txBox="1"/>
           <p:nvPr/>
         </p:nvSpPr>
@@ -26055,7 +26251,7 @@
       </p:sp>
       <p:sp>
         <p:nvSpPr>
-          <p:cNvPr id="17" name="Takeaway"/>
+          <p:cNvPr id="18" name="Takeaway"/>
           <p:cNvSpPr txBox="1"/>
           <p:nvPr/>
         </p:nvSpPr>
@@ -26093,7 +26289,7 @@
       </p:sp>
       <p:sp>
         <p:nvSpPr>
-          <p:cNvPr id="18" name="Source"/>
+          <p:cNvPr id="19" name="Source"/>
           <p:cNvSpPr txBox="1"/>
           <p:nvPr/>
         </p:nvSpPr>
@@ -26132,7 +26328,7 @@
                   <a:srgbClr val="1A1A1A"/>
                 </a:solidFill>
               </a:rPr>
-              <a:t>FTAI filings and earnings calls; GPS model (RPM tab Power build; FY27E SOTP)</a:t>
+              <a:t>GE Vernova Q2'26, Siemens Energy Q3 FY26 and MHI Q1 FY26 results (via Utility Dive); FTAI filings and calls</a:t>
             </a:r>
             <a:endParaRPr lang="en-US" sz="1100" dirty="0"/>
           </a:p>

--- a/deck/FTAI_Long_Pitch.pptx
+++ b/deck/FTAI_Long_Pitch.pptx
@@ -131,12 +131,12 @@
   <p:extLst>
     <p:ext uri="{521415D9-36F7-43E2-AB2F-B90AF26B5E84}">
       <p14:sectionLst xmlns:p14="http://schemas.microsoft.com/office/powerpoint/2010/main">
-        <p14:section name="Introduction" id="{921a0a08-6f00-4716-1c91-46879e85d60b}">
+        <p14:section name="Introduction" id="{c5036d61-8c60-c0ea-442e-fab968f8f89a}">
           <p14:sldIdLst>
             <p14:sldId id="256"/>
           </p14:sldIdLst>
         </p14:section>
-        <p14:section name="The Opportunity" id="{e0588550-a3e6-9f24-f11a-2e9c2e45d3b6}">
+        <p14:section name="The Opportunity" id="{fd76983d-50b8-7dba-fa25-e6fb68381f6b}">
           <p14:sldIdLst>
             <p14:sldId id="257"/>
             <p14:sldId id="258"/>
@@ -144,18 +144,18 @@
             <p14:sldId id="260"/>
           </p14:sldIdLst>
         </p14:section>
-        <p14:section name="Returns" id="{99be9918-2b75-31a4-eeb3-326badff4c8a}">
+        <p14:section name="Returns" id="{57e9fab5-3aa7-495f-80bf-a0dbacf6476b}">
           <p14:sldIdLst>
             <p14:sldId id="261"/>
           </p14:sldIdLst>
         </p14:section>
-        <p14:section name="Business Overview" id="{aad7b70c-2e9d-8c95-306b-b37654ad27c0}">
+        <p14:section name="Business Overview" id="{050fa2d8-18da-0730-51e0-3fe4f3b85263}">
           <p14:sldIdLst>
             <p14:sldId id="262"/>
             <p14:sldId id="263"/>
           </p14:sldIdLst>
         </p14:section>
-        <p14:section name="Thesis 1a" id="{8d2e1e4c-3e59-a2c1-8933-74c459b2938d}">
+        <p14:section name="Thesis 1a" id="{b52b2ad4-c953-18e6-0c2e-ba286a8d927c}">
           <p14:sldIdLst>
             <p14:sldId id="264"/>
             <p14:sldId id="265"/>
@@ -163,7 +163,7 @@
             <p14:sldId id="267"/>
           </p14:sldIdLst>
         </p14:section>
-        <p14:section name="Thesis 1b" id="{68aaf3e8-725b-b34b-df3e-a28c2a10ae6b}">
+        <p14:section name="Thesis 1b" id="{e912e89a-876a-2b56-ca97-9aea1387facb}">
           <p14:sldIdLst>
             <p14:sldId id="268"/>
             <p14:sldId id="269"/>
@@ -174,7 +174,7 @@
             <p14:sldId id="274"/>
           </p14:sldIdLst>
         </p14:section>
-        <p14:section name="Thesis 2" id="{ba72955d-35a5-ab74-88c9-1b61a6865f41}">
+        <p14:section name="Thesis 2" id="{23705684-76f5-12e9-b695-c9db5d890dca}">
           <p14:sldIdLst>
             <p14:sldId id="275"/>
             <p14:sldId id="276"/>
@@ -182,7 +182,7 @@
             <p14:sldId id="278"/>
           </p14:sldIdLst>
         </p14:section>
-        <p14:section name="Valuation" id="{c20e748a-7beb-0ab2-441b-bc6656b0e584}">
+        <p14:section name="Valuation" id="{aba92cc1-f196-dcb4-de03-16e0185513ae}">
           <p14:sldIdLst>
             <p14:sldId id="279"/>
             <p14:sldId id="280"/>
@@ -5789,7 +5789,7 @@
               <c:strCache>
                 <c:ptCount val="1"/>
                 <c:pt idx="0">
-                  <c:v>Firm backlog</c:v>
+                  <c:v>GE Vernova</c:v>
                 </c:pt>
               </c:strCache>
             </c:strRef>
@@ -5802,13 +5802,13 @@
           </c:spPr>
           <c:invertIfNegative val="0"/>
           <c:dLbls>
-            <c:numFmt formatCode="0;;;" sourceLinked="0"/>
+            <c:numFmt formatCode="0" sourceLinked="0"/>
             <c:txPr>
               <a:bodyPr/>
               <a:lstStyle/>
               <a:p>
                 <a:pPr>
-                  <a:defRPr b="1" i="0" strike="noStrike" sz="1300" u="none">
+                  <a:defRPr b="1" i="0" strike="noStrike" sz="1200" u="none">
                     <a:solidFill>
                       <a:srgbClr val="FFFFFF"/>
                     </a:solidFill>
@@ -5828,18 +5828,15 @@
           </c:dLbls>
           <c:cat>
             <c:multiLvlStrRef>
-              <c:f>Sheet1!$A$2:$A$4</c:f>
+              <c:f>Sheet1!$A$2:$A$3</c:f>
               <c:multiLvlStrCache>
-                <c:ptCount val="3"/>
+                <c:ptCount val="2"/>
                 <c:lvl>
                   <c:pt idx="0">
-                    <c:v>GE Vernova</c:v>
+                    <c:v>Mid-2025</c:v>
                   </c:pt>
                   <c:pt idx="1">
-                    <c:v>Siemens Energy</c:v>
-                  </c:pt>
-                  <c:pt idx="2">
-                    <c:v>Mitsubishi</c:v>
+                    <c:v>Mid-2026</c:v>
                   </c:pt>
                 </c:lvl>
               </c:multiLvlStrCache>
@@ -5847,18 +5844,15 @@
           </c:cat>
           <c:val>
             <c:numRef>
-              <c:f>Sheet1!$B$2:$B$4</c:f>
+              <c:f>Sheet1!$B$2:$B$3</c:f>
               <c:numCache>
                 <c:formatCode>General</c:formatCode>
-                <c:ptCount val="3"/>
+                <c:ptCount val="2"/>
                 <c:pt idx="0">
-                  <c:v>53</c:v>
+                  <c:v>55</c:v>
                 </c:pt>
                 <c:pt idx="1">
-                  <c:v>69</c:v>
-                </c:pt>
-                <c:pt idx="2">
-                  <c:v>35</c:v>
+                  <c:v>116</c:v>
                 </c:pt>
               </c:numCache>
             </c:numRef>
@@ -5873,26 +5867,26 @@
               <c:strCache>
                 <c:ptCount val="1"/>
                 <c:pt idx="0">
-                  <c:v>Slot reservations</c:v>
+                  <c:v>Siemens Energy</c:v>
                 </c:pt>
               </c:strCache>
             </c:strRef>
           </c:tx>
           <c:spPr>
             <a:solidFill>
-              <a:srgbClr val="B5AEA9"/>
+              <a:srgbClr val="3B4C82"/>
             </a:solidFill>
             <a:effectLst/>
           </c:spPr>
           <c:invertIfNegative val="0"/>
           <c:dLbls>
-            <c:numFmt formatCode="0;;;" sourceLinked="0"/>
+            <c:numFmt formatCode="0" sourceLinked="0"/>
             <c:txPr>
               <a:bodyPr/>
               <a:lstStyle/>
               <a:p>
                 <a:pPr>
-                  <a:defRPr b="1" i="0" strike="noStrike" sz="1300" u="none">
+                  <a:defRPr b="1" i="0" strike="noStrike" sz="1200" u="none">
                     <a:solidFill>
                       <a:srgbClr val="FFFFFF"/>
                     </a:solidFill>
@@ -5912,18 +5906,15 @@
           </c:dLbls>
           <c:cat>
             <c:multiLvlStrRef>
-              <c:f>Sheet1!$A$2:$A$4</c:f>
+              <c:f>Sheet1!$A$2:$A$3</c:f>
               <c:multiLvlStrCache>
-                <c:ptCount val="3"/>
+                <c:ptCount val="2"/>
                 <c:lvl>
                   <c:pt idx="0">
-                    <c:v>GE Vernova</c:v>
+                    <c:v>Mid-2025</c:v>
                   </c:pt>
                   <c:pt idx="1">
-                    <c:v>Siemens Energy</c:v>
-                  </c:pt>
-                  <c:pt idx="2">
-                    <c:v>Mitsubishi</c:v>
+                    <c:v>Mid-2026</c:v>
                   </c:pt>
                 </c:lvl>
               </c:multiLvlStrCache>
@@ -5931,31 +5922,106 @@
           </c:cat>
           <c:val>
             <c:numRef>
-              <c:f>Sheet1!$C$2:$C$4</c:f>
+              <c:f>Sheet1!$C$2:$C$3</c:f>
               <c:numCache>
                 <c:formatCode>General</c:formatCode>
-                <c:ptCount val="3"/>
+                <c:ptCount val="2"/>
                 <c:pt idx="0">
-                  <c:v>63</c:v>
+                  <c:v>37</c:v>
                 </c:pt>
                 <c:pt idx="1">
-                  <c:v/>
+                  <c:v>69</c:v>
                 </c:pt>
-                <c:pt idx="2">
-                  <c:v/>
+              </c:numCache>
+            </c:numRef>
+          </c:val>
+        </c:ser>
+        <c:ser>
+          <c:idx val="2"/>
+          <c:order val="2"/>
+          <c:tx>
+            <c:strRef>
+              <c:f>Sheet1!$D$1</c:f>
+              <c:strCache>
+                <c:ptCount val="1"/>
+                <c:pt idx="0">
+                  <c:v>Mitsubishi</c:v>
+                </c:pt>
+              </c:strCache>
+            </c:strRef>
+          </c:tx>
+          <c:spPr>
+            <a:solidFill>
+              <a:srgbClr val="B5AEA9"/>
+            </a:solidFill>
+            <a:effectLst/>
+          </c:spPr>
+          <c:invertIfNegative val="0"/>
+          <c:dLbls>
+            <c:numFmt formatCode="0" sourceLinked="0"/>
+            <c:txPr>
+              <a:bodyPr/>
+              <a:lstStyle/>
+              <a:p>
+                <a:pPr>
+                  <a:defRPr b="1" i="0" strike="noStrike" sz="1200" u="none">
+                    <a:solidFill>
+                      <a:srgbClr val="FFFFFF"/>
+                    </a:solidFill>
+                    <a:latin typeface="+mn-lt"/>
+                  </a:defRPr>
+                </a:pPr>
+              </a:p>
+            </c:txPr>
+            <c:dLblPos val="ctr"/>
+            <c:showLegendKey val="0"/>
+            <c:showVal val="1"/>
+            <c:showCatName val="0"/>
+            <c:showSerName val="0"/>
+            <c:showPercent val="0"/>
+            <c:showBubbleSize val="0"/>
+            <c:showLeaderLines val="0"/>
+          </c:dLbls>
+          <c:cat>
+            <c:multiLvlStrRef>
+              <c:f>Sheet1!$A$2:$A$3</c:f>
+              <c:multiLvlStrCache>
+                <c:ptCount val="2"/>
+                <c:lvl>
+                  <c:pt idx="0">
+                    <c:v>Mid-2025</c:v>
+                  </c:pt>
+                  <c:pt idx="1">
+                    <c:v>Mid-2026</c:v>
+                  </c:pt>
+                </c:lvl>
+              </c:multiLvlStrCache>
+            </c:multiLvlStrRef>
+          </c:cat>
+          <c:val>
+            <c:numRef>
+              <c:f>Sheet1!$D$2:$D$3</c:f>
+              <c:numCache>
+                <c:formatCode>General</c:formatCode>
+                <c:ptCount val="2"/>
+                <c:pt idx="0">
+                  <c:v>23</c:v>
+                </c:pt>
+                <c:pt idx="1">
+                  <c:v>35</c:v>
                 </c:pt>
               </c:numCache>
             </c:numRef>
           </c:val>
         </c:ser>
         <c:dLbls>
-          <c:numFmt formatCode="0;;;" sourceLinked="0"/>
+          <c:numFmt formatCode="0" sourceLinked="0"/>
           <c:txPr>
             <a:bodyPr/>
             <a:lstStyle/>
             <a:p>
               <a:pPr>
-                <a:defRPr b="1" i="0" strike="noStrike" sz="1300" u="none">
+                <a:defRPr b="1" i="0" strike="noStrike" sz="1200" u="none">
                   <a:solidFill>
                     <a:srgbClr val="FFFFFF"/>
                   </a:solidFill>
@@ -5973,7 +6039,7 @@
           <c:showBubbleSize val="0"/>
           <c:showLeaderLines val="0"/>
         </c:dLbls>
-        <c:gapWidth val="55"/>
+        <c:gapWidth val="110"/>
         <c:overlap val="100"/>
         <c:axId val="2094734554"/>
         <c:axId val="2094734552"/>
@@ -6004,7 +6070,7 @@
           <a:lstStyle/>
           <a:p>
             <a:pPr>
-              <a:defRPr sz="1200" b="0" i="0" u="none" strike="noStrike">
+              <a:defRPr sz="1300" b="0" i="0" u="none" strike="noStrike">
                 <a:solidFill>
                   <a:srgbClr val="1A1A1A"/>
                 </a:solidFill>
@@ -6024,7 +6090,7 @@
         <c:axId val="2094734552"/>
         <c:scaling>
           <c:orientation val="minMax"/>
-          <c:max val="135"/>
+          <c:max val="250"/>
           <c:min val="0"/>
         </c:scaling>
         <c:delete val="1"/>
@@ -7958,7 +8024,7 @@
             <c:size val="6"/>
             <c:spPr>
               <a:solidFill>
-                <a:srgbClr val="0A1C58"/>
+                <a:srgbClr val="847C7A"/>
               </a:solidFill>
               <a:ln w="9525" cap="flat">
                 <a:solidFill>
@@ -10602,7 +10668,7 @@
           <a:p>
             <a:r>
               <a:rPr lang="en-US" dirty="0"/>
-              <a:t>SOTP on FY27E EBITDA: Aerospace Products $1,541M at 16x ($237/sh), Power $450M at 12x ($52/sh, low end of guide), Aviation Leasing + SCI $455M at 9x ($39/sh), less corporate (-$28/sh), net debt (-$23/sh) and preferred (-$1/sh) = $277/sh. Ex-Power = $225/sh vs. $167.03 current (10/2/26), a 26% discount.</a:t>
+              <a:t>Combined backlog: GE Vernova gas backlog + slot reservations 55 GW (Q2'25) → 116 GW (Q2'26; ≥125 GW guided for YE26); Siemens Energy firm gas turbine backlog 37 GW (Q3 FY25) → 69 GW (Q3 FY26); Mitsubishi large-frame backlog 23 GW → 35 GW. Definitions differ (GEV includes reservations; Siemens firm only; MHI large-frame only), so treat the total as indicative. End-2024 GW figures were not disclosed. </a:t>
             </a:r>
             <a:endParaRPr lang="en-US" dirty="0"/>
           </a:p>
@@ -25788,7 +25854,7 @@
                   <a:srgbClr val="1A1A1A"/>
                 </a:solidFill>
               </a:rPr>
-              <a:t>Gas Turbine Backlogs (GW)</a:t>
+              <a:t>Combined Gas Turbine Backlog (GW)</a:t>
             </a:r>
             <a:endParaRPr lang="en-US" sz="1600" dirty="0"/>
           </a:p>
@@ -25819,13 +25885,13 @@
       </p:sp>
       <p:graphicFrame>
         <p:nvGraphicFramePr>
-          <p:cNvPr id="6" name="Turbine backlog chart" descr=""/>
+          <p:cNvPr id="6" name="Combined backlog chart" descr=""/>
           <p:cNvGraphicFramePr/>
           <p:nvPr/>
         </p:nvGraphicFramePr>
         <p:xfrm>
           <a:off x="320040" y="2103120"/>
-          <a:ext cx="5257800" cy="2606040"/>
+          <a:ext cx="5257800" cy="2651760"/>
         </p:xfrm>
         <a:graphic xmlns:a="http://schemas.openxmlformats.org/drawingml/2006/main">
           <a:graphicData uri="http://schemas.openxmlformats.org/drawingml/2006/chart">
@@ -25835,14 +25901,14 @@
       </p:graphicFrame>
       <p:sp>
         <p:nvSpPr>
-          <p:cNvPr id="7" name="GEV total label"/>
+          <p:cNvPr id="7" name="Total 2025"/>
           <p:cNvSpPr txBox="1"/>
           <p:nvPr/>
         </p:nvSpPr>
         <p:spPr>
           <a:xfrm>
-            <a:off x="685800" y="2103120"/>
-            <a:ext cx="1463040" cy="256032"/>
+            <a:off x="1097280" y="3017520"/>
+            <a:ext cx="1188720" cy="292608"/>
           </a:xfrm>
           <a:prstGeom prst="rect">
             <a:avLst/>
@@ -25858,26 +25924,122 @@
               <a:buNone/>
             </a:pPr>
             <a:r>
-              <a:rPr lang="en-US" sz="1200" b="1" dirty="0">
+              <a:rPr lang="en-US" sz="1600" b="1" dirty="0">
                 <a:solidFill>
                   <a:schemeClr val="tx2"/>
                 </a:solidFill>
               </a:rPr>
-              <a:t>116 total</a:t>
-            </a:r>
-            <a:endParaRPr lang="en-US" sz="1200" dirty="0"/>
-          </a:p>
-        </p:txBody>
-      </p:sp>
-      <p:sp>
-        <p:nvSpPr>
-          <p:cNvPr id="8" name="Backlog legend"/>
+              <a:t>115 GW</a:t>
+            </a:r>
+            <a:endParaRPr lang="en-US" sz="1600" dirty="0"/>
+          </a:p>
+        </p:txBody>
+      </p:sp>
+      <p:sp>
+        <p:nvSpPr>
+          <p:cNvPr id="8" name="Total 2026"/>
           <p:cNvSpPr txBox="1"/>
           <p:nvPr/>
         </p:nvSpPr>
         <p:spPr>
           <a:xfrm>
-            <a:off x="320040" y="4727448"/>
+            <a:off x="3749040" y="2057400"/>
+            <a:ext cx="1188720" cy="292608"/>
+          </a:xfrm>
+          <a:prstGeom prst="rect">
+            <a:avLst/>
+          </a:prstGeom>
+          <a:noFill/>
+          <a:ln/>
+        </p:spPr>
+        <p:txBody>
+          <a:bodyPr wrap="square" lIns="0" tIns="0" rIns="0" bIns="0" rtlCol="0" anchor="ctr"/>
+          <a:lstStyle/>
+          <a:p>
+            <a:pPr algn="ctr" indent="0" marL="0">
+              <a:buNone/>
+            </a:pPr>
+            <a:r>
+              <a:rPr lang="en-US" sz="1600" b="1" dirty="0">
+                <a:solidFill>
+                  <a:schemeClr val="tx2"/>
+                </a:solidFill>
+              </a:rPr>
+              <a:t>220 GW</a:t>
+            </a:r>
+            <a:endParaRPr lang="en-US" sz="1600" dirty="0"/>
+          </a:p>
+        </p:txBody>
+      </p:sp>
+      <p:sp>
+        <p:nvSpPr>
+          <p:cNvPr id="9" name="Backlog arrow"/>
+          <p:cNvSpPr/>
+          <p:nvPr/>
+        </p:nvSpPr>
+        <p:spPr>
+          <a:xfrm flipV="1">
+            <a:off x="2331720" y="2377440"/>
+            <a:ext cx="1371600" cy="777240"/>
+          </a:xfrm>
+          <a:prstGeom prst="line">
+            <a:avLst/>
+          </a:prstGeom>
+          <a:noFill/>
+          <a:ln w="31750">
+            <a:solidFill>
+              <a:srgbClr val="0A1C58"/>
+            </a:solidFill>
+            <a:prstDash val="solid"/>
+            <a:tailEnd type="triangle"/>
+          </a:ln>
+        </p:spPr>
+      </p:sp>
+      <p:sp>
+        <p:nvSpPr>
+          <p:cNvPr id="10" name="Growth label"/>
+          <p:cNvSpPr txBox="1"/>
+          <p:nvPr/>
+        </p:nvSpPr>
+        <p:spPr>
+          <a:xfrm>
+            <a:off x="2057400" y="2331720"/>
+            <a:ext cx="914400" cy="310896"/>
+          </a:xfrm>
+          <a:prstGeom prst="rect">
+            <a:avLst/>
+          </a:prstGeom>
+          <a:noFill/>
+          <a:ln/>
+        </p:spPr>
+        <p:txBody>
+          <a:bodyPr wrap="square" lIns="0" tIns="0" rIns="0" bIns="0" rtlCol="0" anchor="ctr"/>
+          <a:lstStyle/>
+          <a:p>
+            <a:pPr algn="ctr" indent="0" marL="0">
+              <a:buNone/>
+            </a:pPr>
+            <a:r>
+              <a:rPr lang="en-US" sz="1800" b="1" dirty="0">
+                <a:solidFill>
+                  <a:schemeClr val="tx2"/>
+                </a:solidFill>
+              </a:rPr>
+              <a:t>~1.9x</a:t>
+            </a:r>
+            <a:endParaRPr lang="en-US" sz="1800" dirty="0"/>
+          </a:p>
+        </p:txBody>
+      </p:sp>
+      <p:sp>
+        <p:nvSpPr>
+          <p:cNvPr id="11" name="Backlog legend"/>
+          <p:cNvSpPr txBox="1"/>
+          <p:nvPr/>
+        </p:nvSpPr>
+        <p:spPr>
+          <a:xfrm>
+            <a:off x="320040" y="4754880"/>
             <a:ext cx="5257800" cy="237744"/>
           </a:xfrm>
           <a:prstGeom prst="rect">
@@ -25910,7 +26072,7 @@
                   <a:srgbClr val="1A1A1A"/>
                 </a:solidFill>
               </a:rPr>
-              <a:t>Firm backlog   </a:t>
+              <a:t>GE Vernova  </a:t>
             </a:r>
             <a:pPr algn="ctr" indent="0" marL="0">
               <a:buNone/>
@@ -25918,6 +26080,28 @@
             <a:r>
               <a:rPr lang="en-US" sz="1100" dirty="0">
                 <a:solidFill>
+                  <a:srgbClr val="3B4C82"/>
+                </a:solidFill>
+              </a:rPr>
+              <a:t>■ </a:t>
+            </a:r>
+            <a:pPr algn="ctr" indent="0" marL="0">
+              <a:buNone/>
+            </a:pPr>
+            <a:r>
+              <a:rPr lang="en-US" sz="1100" dirty="0">
+                <a:solidFill>
+                  <a:srgbClr val="1A1A1A"/>
+                </a:solidFill>
+              </a:rPr>
+              <a:t>Siemens Energy  </a:t>
+            </a:r>
+            <a:pPr algn="ctr" indent="0" marL="0">
+              <a:buNone/>
+            </a:pPr>
+            <a:r>
+              <a:rPr lang="en-US" sz="1100" dirty="0">
+                <a:solidFill>
                   <a:srgbClr val="B5AEA9"/>
                 </a:solidFill>
               </a:rPr>
@@ -25932,7 +26116,7 @@
                   <a:srgbClr val="1A1A1A"/>
                 </a:solidFill>
               </a:rPr>
-              <a:t>Slot reservations</a:t>
+              <a:t>Mitsubishi</a:t>
             </a:r>
             <a:endParaRPr lang="en-US" sz="1100" dirty="0"/>
           </a:p>
@@ -25940,14 +26124,14 @@
       </p:sp>
       <p:sp>
         <p:nvSpPr>
-          <p:cNvPr id="9" name="Backlog caption"/>
+          <p:cNvPr id="12" name="Backlog caption"/>
           <p:cNvSpPr txBox="1"/>
           <p:nvPr/>
         </p:nvSpPr>
         <p:spPr>
           <a:xfrm>
-            <a:off x="320040" y="4983480"/>
-            <a:ext cx="5257800" cy="365760"/>
+            <a:off x="320040" y="5010912"/>
+            <a:ext cx="5257800" cy="274320"/>
           </a:xfrm>
           <a:prstGeom prst="rect">
             <a:avLst/>
@@ -25968,7 +26152,7 @@
                   <a:schemeClr val="accent2"/>
                 </a:solidFill>
               </a:rPr>
-              <a:t>Booking out to 2031 (GEV) · lead times 3+ years (Siemens) · new orders deliver 2028–30 (MHI)</a:t>
+              <a:t>GE Vernova booking out to 2031; Siemens lead times 3+ years</a:t>
             </a:r>
             <a:endParaRPr lang="en-US" sz="1000" dirty="0"/>
           </a:p>
@@ -25976,7 +26160,7 @@
       </p:sp>
       <p:sp>
         <p:nvSpPr>
-          <p:cNvPr id="10" name="Power stats header"/>
+          <p:cNvPr id="13" name="Power stats header"/>
           <p:cNvSpPr txBox="1"/>
           <p:nvPr/>
         </p:nvSpPr>
@@ -26012,7 +26196,7 @@
       </p:sp>
       <p:sp>
         <p:nvSpPr>
-          <p:cNvPr id="11" name="Power stats header rule"/>
+          <p:cNvPr id="14" name="Power stats header rule"/>
           <p:cNvSpPr/>
           <p:nvPr/>
         </p:nvSpPr>
@@ -26035,7 +26219,7 @@
       </p:sp>
       <p:sp>
         <p:nvSpPr>
-          <p:cNvPr id="12" name="Power stat 1"/>
+          <p:cNvPr id="15" name="Power stat 1"/>
           <p:cNvSpPr txBox="1"/>
           <p:nvPr/>
         </p:nvSpPr>
@@ -26071,7 +26255,7 @@
       </p:sp>
       <p:sp>
         <p:nvSpPr>
-          <p:cNvPr id="13" name="Power stat 1 label"/>
+          <p:cNvPr id="16" name="Power stat 1 label"/>
           <p:cNvSpPr txBox="1"/>
           <p:nvPr/>
         </p:nvSpPr>
@@ -26107,7 +26291,7 @@
       </p:sp>
       <p:sp>
         <p:nvSpPr>
-          <p:cNvPr id="14" name="Power stat 2"/>
+          <p:cNvPr id="17" name="Power stat 2"/>
           <p:cNvSpPr txBox="1"/>
           <p:nvPr/>
         </p:nvSpPr>
@@ -26143,7 +26327,7 @@
       </p:sp>
       <p:sp>
         <p:nvSpPr>
-          <p:cNvPr id="15" name="Power stat 2 label"/>
+          <p:cNvPr id="18" name="Power stat 2 label"/>
           <p:cNvSpPr txBox="1"/>
           <p:nvPr/>
         </p:nvSpPr>
@@ -26179,7 +26363,7 @@
       </p:sp>
       <p:sp>
         <p:nvSpPr>
-          <p:cNvPr id="16" name="Power stat 3"/>
+          <p:cNvPr id="19" name="Power stat 3"/>
           <p:cNvSpPr txBox="1"/>
           <p:nvPr/>
         </p:nvSpPr>
@@ -26215,7 +26399,7 @@
       </p:sp>
       <p:sp>
         <p:nvSpPr>
-          <p:cNvPr id="17" name="Power stat 3 label"/>
+          <p:cNvPr id="20" name="Power stat 3 label"/>
           <p:cNvSpPr txBox="1"/>
           <p:nvPr/>
         </p:nvSpPr>
@@ -26251,7 +26435,7 @@
       </p:sp>
       <p:sp>
         <p:nvSpPr>
-          <p:cNvPr id="18" name="Takeaway"/>
+          <p:cNvPr id="21" name="Takeaway"/>
           <p:cNvSpPr txBox="1"/>
           <p:nvPr/>
         </p:nvSpPr>
@@ -26289,7 +26473,7 @@
       </p:sp>
       <p:sp>
         <p:nvSpPr>
-          <p:cNvPr id="19" name="Source"/>
+          <p:cNvPr id="22" name="Source"/>
           <p:cNvSpPr txBox="1"/>
           <p:nvPr/>
         </p:nvSpPr>
@@ -26328,7 +26512,7 @@
                   <a:srgbClr val="1A1A1A"/>
                 </a:solidFill>
               </a:rPr>
-              <a:t>GE Vernova Q2'26, Siemens Energy Q3 FY26 and MHI Q1 FY26 results (via Utility Dive); FTAI filings and calls</a:t>
+              <a:t>GE Vernova, Siemens Energy and MHI results, mid-2025 vs. mid-2026 (via Utility Dive, Industrial Info); FTAI filings</a:t>
             </a:r>
             <a:endParaRPr lang="en-US" sz="1100" dirty="0"/>
           </a:p>

--- a/deck/FTAI_Long_Pitch.pptx
+++ b/deck/FTAI_Long_Pitch.pptx
@@ -30,9 +30,10 @@
     <p:sldId id="278" r:id="rId24"/>
     <p:sldId id="279" r:id="rId25"/>
     <p:sldId id="280" r:id="rId26"/>
+    <p:sldId id="281" r:id="rId27"/>
   </p:sldIdLst>
   <p:notesMasterIdLst>
-    <p:notesMasterId r:id="rId27"/>
+    <p:notesMasterId r:id="rId28"/>
   </p:notesMasterIdLst>
   <p:sldSz cx="9144000" cy="6858000"/>
   <p:notesSz cx="6858000" cy="9144000"/>
@@ -131,12 +132,12 @@
   <p:extLst>
     <p:ext uri="{521415D9-36F7-43E2-AB2F-B90AF26B5E84}">
       <p14:sectionLst xmlns:p14="http://schemas.microsoft.com/office/powerpoint/2010/main">
-        <p14:section name="Introduction" id="{c5036d61-8c60-c0ea-442e-fab968f8f89a}">
+        <p14:section name="Introduction" id="{184a70b8-4f4b-095e-b948-8a6fc1292c4d}">
           <p14:sldIdLst>
             <p14:sldId id="256"/>
           </p14:sldIdLst>
         </p14:section>
-        <p14:section name="The Opportunity" id="{fd76983d-50b8-7dba-fa25-e6fb68381f6b}">
+        <p14:section name="The Opportunity" id="{6d26c0bc-08c9-64e1-76a1-a90e766e4595}">
           <p14:sldIdLst>
             <p14:sldId id="257"/>
             <p14:sldId id="258"/>
@@ -144,18 +145,18 @@
             <p14:sldId id="260"/>
           </p14:sldIdLst>
         </p14:section>
-        <p14:section name="Returns" id="{57e9fab5-3aa7-495f-80bf-a0dbacf6476b}">
+        <p14:section name="Returns" id="{077d8f0d-e703-bb61-8761-db7ea331bdb6}">
           <p14:sldIdLst>
             <p14:sldId id="261"/>
           </p14:sldIdLst>
         </p14:section>
-        <p14:section name="Business Overview" id="{050fa2d8-18da-0730-51e0-3fe4f3b85263}">
+        <p14:section name="Business Overview" id="{7184a3eb-6713-c6c6-6bdd-236510aac445}">
           <p14:sldIdLst>
             <p14:sldId id="262"/>
             <p14:sldId id="263"/>
           </p14:sldIdLst>
         </p14:section>
-        <p14:section name="Thesis 1a" id="{b52b2ad4-c953-18e6-0c2e-ba286a8d927c}">
+        <p14:section name="Thesis 1a" id="{6f6acc7f-889f-c8d0-5a00-ee6cb0f32238}">
           <p14:sldIdLst>
             <p14:sldId id="264"/>
             <p14:sldId id="265"/>
@@ -163,7 +164,7 @@
             <p14:sldId id="267"/>
           </p14:sldIdLst>
         </p14:section>
-        <p14:section name="Thesis 1b" id="{e912e89a-876a-2b56-ca97-9aea1387facb}">
+        <p14:section name="Thesis 1b" id="{7ca127d4-c2df-bbf4-60a5-ede88751b37a}">
           <p14:sldIdLst>
             <p14:sldId id="268"/>
             <p14:sldId id="269"/>
@@ -174,7 +175,7 @@
             <p14:sldId id="274"/>
           </p14:sldIdLst>
         </p14:section>
-        <p14:section name="Thesis 2" id="{23705684-76f5-12e9-b695-c9db5d890dca}">
+        <p14:section name="Thesis 2" id="{506d3afd-ba07-fb53-3a94-4296f1f7fad6}">
           <p14:sldIdLst>
             <p14:sldId id="275"/>
             <p14:sldId id="276"/>
@@ -182,10 +183,15 @@
             <p14:sldId id="278"/>
           </p14:sldIdLst>
         </p14:section>
-        <p14:section name="Valuation" id="{aba92cc1-f196-dcb4-de03-16e0185513ae}">
+        <p14:section name="Valuation" id="{ac402a93-ae0f-e6dd-22c5-9f66ad32a52e}">
           <p14:sldIdLst>
             <p14:sldId id="279"/>
             <p14:sldId id="280"/>
+          </p14:sldIdLst>
+        </p14:section>
+        <p14:section name="Catalysts" id="{b0389bdc-65bb-dc40-630e-b2f77be4a1ee}">
+          <p14:sldIdLst>
+            <p14:sldId id="281"/>
           </p14:sldIdLst>
         </p14:section>
       </p14:sectionLst>
@@ -10446,6 +10452,94 @@
 </p:notes>
 </file>
 
+<file path=ppt/notesSlides/notesSlide26.xml><?xml version="1.0" encoding="utf-8"?>
+<p:notes xmlns:a="http://schemas.openxmlformats.org/drawingml/2006/main" xmlns:r="http://schemas.openxmlformats.org/officeDocument/2006/relationships" xmlns:p="http://schemas.openxmlformats.org/presentationml/2006/main">
+  <p:cSld>
+    <p:spTree>
+      <p:nvGrpSpPr>
+        <p:cNvPr id="1" name=""/>
+        <p:cNvGrpSpPr/>
+        <p:nvPr/>
+      </p:nvGrpSpPr>
+      <p:grpSpPr>
+        <a:xfrm>
+          <a:off x="0" y="0"/>
+          <a:ext cx="0" cy="0"/>
+          <a:chOff x="0" y="0"/>
+          <a:chExt cx="0" cy="0"/>
+        </a:xfrm>
+      </p:grpSpPr>
+      <p:sp>
+        <p:nvSpPr>
+          <p:cNvPr id="2" name="Slide Image Placeholder 1"/>
+          <p:cNvSpPr>
+            <a:spLocks noGrp="1" noRot="1" noChangeAspect="1"/>
+          </p:cNvSpPr>
+          <p:nvPr>
+            <p:ph type="sldImg"/>
+          </p:nvPr>
+        </p:nvSpPr>
+        <p:spPr/>
+      </p:sp>
+      <p:sp>
+        <p:nvSpPr>
+          <p:cNvPr id="3" name="Notes Placeholder 2"/>
+          <p:cNvSpPr>
+            <a:spLocks noGrp="1"/>
+          </p:cNvSpPr>
+          <p:nvPr>
+            <p:ph type="body" idx="1"/>
+          </p:nvPr>
+        </p:nvSpPr>
+        <p:spPr/>
+        <p:txBody>
+          <a:bodyPr/>
+          <a:lstStyle/>
+          <a:p>
+            <a:r>
+              <a:rPr lang="en-US" dirty="0"/>
+              <a:t>1) Q3'26 (late Oct. 2026) and Q4'26 (~Feb. 2027) prints: Aerospace Adj. EBITDA margin holding at ~30% confirms the floor; watch PMA usage and parts 4/5 approval commentary. 2) Power: management moved first Mod-1 deliveries from Q4'26 to 'prudent to expect deliveries in 2027'; delivery cadence or a follow-on order (Jereh must disclose large contracts) moves Power toward the top of the $450–750M FY27 guide. 3) Capacity: partner sites in Jakarta (GMF) and Cairo (EgyptAir) plus Lisbon ramp in 2027; network capacity 3,000 modules vs. a 1,700-module 2027 target.</a:t>
+            </a:r>
+            <a:endParaRPr lang="en-US" dirty="0"/>
+          </a:p>
+        </p:txBody>
+      </p:sp>
+      <p:sp>
+        <p:nvSpPr>
+          <p:cNvPr id="4" name="Slide Number Placeholder 3"/>
+          <p:cNvSpPr>
+            <a:spLocks noGrp="1"/>
+          </p:cNvSpPr>
+          <p:nvPr>
+            <p:ph type="sldNum" sz="quarter" idx="10"/>
+          </p:nvPr>
+        </p:nvSpPr>
+        <p:spPr/>
+        <p:txBody>
+          <a:bodyPr/>
+          <a:lstStyle/>
+          <a:p>
+            <a:fld id="{F7021451-1387-4CA6-816F-3879F97B5CBC}" type="slidenum">
+              <a:rPr lang="en-US"/>
+              <a:t>26</a:t>
+            </a:fld>
+            <a:endParaRPr lang="en-US"/>
+          </a:p>
+        </p:txBody>
+      </p:sp>
+    </p:spTree>
+    <p:extLst>
+      <p:ext uri="{BB962C8B-B14F-4D97-AF65-F5344CB8AC3E}">
+        <p14:creationId xmlns:p14="http://schemas.microsoft.com/office/powerpoint/2010/main" val="1024086991"/>
+      </p:ext>
+    </p:extLst>
+  </p:cSld>
+  <p:clrMapOvr>
+    <a:masterClrMapping/>
+  </p:clrMapOvr>
+</p:notes>
+</file>
+
 <file path=ppt/notesSlides/notesSlide3.xml><?xml version="1.0" encoding="utf-8"?>
 <p:notes xmlns:a="http://schemas.openxmlformats.org/drawingml/2006/main" xmlns:r="http://schemas.openxmlformats.org/officeDocument/2006/relationships" xmlns:p="http://schemas.openxmlformats.org/presentationml/2006/main">
   <p:cSld>
@@ -24448,6 +24542,701 @@
             <a:fld id="{F7021451-1387-4CA6-816F-3879F97B5CBC}" type="slidenum">
               <a:rPr b="1" lang="en-US"/>
               <a:t>25</a:t>
+            </a:fld>
+            <a:endParaRPr lang="en-US"/>
+          </a:p>
+        </p:txBody>
+      </p:sp>
+    </p:spTree>
+  </p:cSld>
+  <p:clrMapOvr>
+    <a:masterClrMapping/>
+  </p:clrMapOvr>
+</p:sld>
+</file>
+
+<file path=ppt/slides/slide26.xml><?xml version="1.0" encoding="utf-8"?>
+<p:sld xmlns:a="http://schemas.openxmlformats.org/drawingml/2006/main" xmlns:r="http://schemas.openxmlformats.org/officeDocument/2006/relationships" xmlns:p="http://schemas.openxmlformats.org/presentationml/2006/main">
+  <p:cSld name="Slide 26">
+    <p:spTree>
+      <p:nvGrpSpPr>
+        <p:cNvPr id="1" name=""/>
+        <p:cNvGrpSpPr/>
+        <p:nvPr/>
+      </p:nvGrpSpPr>
+      <p:grpSpPr>
+        <a:xfrm>
+          <a:off x="0" y="0"/>
+          <a:ext cx="0" cy="0"/>
+          <a:chOff x="0" y="0"/>
+          <a:chExt cx="0" cy="0"/>
+        </a:xfrm>
+      </p:grpSpPr>
+      <p:sp>
+        <p:nvSpPr>
+          <p:cNvPr id="2" name="Text 1"/>
+          <p:cNvSpPr/>
+          <p:nvPr>
+            <p:ph idx="102" type="title" hasCustomPrompt="1"/>
+          </p:nvPr>
+        </p:nvSpPr>
+        <p:spPr>
+          <a:xfrm>
+            <a:off x="320040" y="182880"/>
+            <a:ext cx="8503920" cy="640080"/>
+          </a:xfrm>
+          <a:prstGeom prst="rect">
+            <a:avLst/>
+          </a:prstGeom>
+          <a:noFill/>
+          <a:ln/>
+        </p:spPr>
+        <p:txBody>
+          <a:bodyPr wrap="square" lIns="0" tIns="0" rIns="0" bIns="0" rtlCol="0" anchor="ctr"/>
+          <a:lstStyle/>
+          <a:p>
+            <a:pPr algn="l" indent="0" marL="0">
+              <a:buNone/>
+            </a:pPr>
+            <a:r>
+              <a:rPr lang="en-US" sz="3200" b="1" dirty="0">
+                <a:solidFill>
+                  <a:schemeClr val="tx2"/>
+                </a:solidFill>
+              </a:rPr>
+              <a:t>Catalysts</a:t>
+            </a:r>
+            <a:endParaRPr lang="en-US" sz="3200" dirty="0"/>
+          </a:p>
+        </p:txBody>
+      </p:sp>
+      <p:sp>
+        <p:nvSpPr>
+          <p:cNvPr id="3" name="Text 1"/>
+          <p:cNvSpPr/>
+          <p:nvPr>
+            <p:ph idx="103" type="body" hasCustomPrompt="1"/>
+          </p:nvPr>
+        </p:nvSpPr>
+        <p:spPr>
+          <a:xfrm>
+            <a:off x="320040" y="932688"/>
+            <a:ext cx="8503920" cy="566928"/>
+          </a:xfrm>
+          <a:prstGeom prst="rect">
+            <a:avLst/>
+          </a:prstGeom>
+          <a:noFill/>
+          <a:ln/>
+        </p:spPr>
+        <p:txBody>
+          <a:bodyPr wrap="square" lIns="0" tIns="0" rIns="0" bIns="0" rtlCol="0" anchor="t"/>
+          <a:lstStyle/>
+          <a:p>
+            <a:pPr algn="l" indent="0" marL="0">
+              <a:buNone/>
+            </a:pPr>
+            <a:r>
+              <a:rPr lang="en-US" sz="1700" b="1" dirty="0">
+                <a:solidFill>
+                  <a:schemeClr val="tx2"/>
+                </a:solidFill>
+              </a:rPr>
+              <a:t>Three catalysts over the next 12–15 months, one for each thesis.</a:t>
+            </a:r>
+            <a:endParaRPr lang="en-US" sz="1700" dirty="0"/>
+          </a:p>
+        </p:txBody>
+      </p:sp>
+      <p:sp>
+        <p:nvSpPr>
+          <p:cNvPr id="4" name="Timeline arrow"/>
+          <p:cNvSpPr/>
+          <p:nvPr/>
+        </p:nvSpPr>
+        <p:spPr>
+          <a:xfrm>
+            <a:off x="4315968" y="1554480"/>
+            <a:ext cx="512064" cy="3840480"/>
+          </a:xfrm>
+          <a:prstGeom prst="downArrow">
+            <a:avLst/>
+          </a:prstGeom>
+          <a:solidFill>
+            <a:srgbClr val="0A1C58"/>
+          </a:solidFill>
+          <a:ln/>
+        </p:spPr>
+      </p:sp>
+      <p:sp>
+        <p:nvSpPr>
+          <p:cNvPr id="5" name="Catalyst 1 band"/>
+          <p:cNvSpPr/>
+          <p:nvPr/>
+        </p:nvSpPr>
+        <p:spPr>
+          <a:xfrm>
+            <a:off x="320040" y="1691640"/>
+            <a:ext cx="8503920" cy="987552"/>
+          </a:xfrm>
+          <a:prstGeom prst="rect">
+            <a:avLst/>
+          </a:prstGeom>
+          <a:solidFill>
+            <a:srgbClr val="EFEDEA"/>
+          </a:solidFill>
+          <a:ln/>
+        </p:spPr>
+      </p:sp>
+      <p:sp>
+        <p:nvSpPr>
+          <p:cNvPr id="6" name="Catalyst 1 head"/>
+          <p:cNvSpPr txBox="1"/>
+          <p:nvPr/>
+        </p:nvSpPr>
+        <p:spPr>
+          <a:xfrm>
+            <a:off x="457200" y="1691640"/>
+            <a:ext cx="3200400" cy="987552"/>
+          </a:xfrm>
+          <a:prstGeom prst="rect">
+            <a:avLst/>
+          </a:prstGeom>
+          <a:noFill/>
+          <a:ln/>
+        </p:spPr>
+        <p:txBody>
+          <a:bodyPr wrap="square" lIns="0" tIns="0" rIns="0" bIns="0" rtlCol="0" anchor="ctr"/>
+          <a:lstStyle/>
+          <a:p>
+            <a:pPr algn="l" indent="0" marL="0">
+              <a:buNone/>
+            </a:pPr>
+            <a:r>
+              <a:rPr lang="en-US" sz="1400" b="1" dirty="0">
+                <a:solidFill>
+                  <a:schemeClr val="tx2"/>
+                </a:solidFill>
+              </a:rPr>
+              <a:t>Two quarters of stable margins</a:t>
+            </a:r>
+            <a:endParaRPr lang="en-US" sz="1400" dirty="0"/>
+          </a:p>
+          <a:p>
+            <a:pPr algn="l" indent="0" marL="0">
+              <a:buNone/>
+            </a:pPr>
+            <a:r>
+              <a:rPr lang="en-US" sz="1100" i="1" dirty="0">
+                <a:solidFill>
+                  <a:schemeClr val="accent2"/>
+                </a:solidFill>
+              </a:rPr>
+              <a:t>Thesis 1a: margin floor</a:t>
+            </a:r>
+            <a:endParaRPr lang="en-US" sz="1400" dirty="0"/>
+          </a:p>
+        </p:txBody>
+      </p:sp>
+      <p:sp>
+        <p:nvSpPr>
+          <p:cNvPr id="7" name="Catalyst 1 date"/>
+          <p:cNvSpPr txBox="1"/>
+          <p:nvPr/>
+        </p:nvSpPr>
+        <p:spPr>
+          <a:xfrm>
+            <a:off x="3794760" y="1865376"/>
+            <a:ext cx="1554480" cy="640080"/>
+          </a:xfrm>
+          <a:prstGeom prst="rect">
+            <a:avLst/>
+          </a:prstGeom>
+          <a:solidFill>
+            <a:srgbClr val="FFFFFF"/>
+          </a:solidFill>
+          <a:ln w="25400">
+            <a:solidFill>
+              <a:srgbClr val="0A1C58"/>
+            </a:solidFill>
+          </a:ln>
+        </p:spPr>
+        <p:txBody>
+          <a:bodyPr wrap="square" lIns="0" tIns="0" rIns="0" bIns="0" rtlCol="0" anchor="ctr"/>
+          <a:lstStyle/>
+          <a:p>
+            <a:pPr algn="ctr" indent="0" marL="0">
+              <a:buNone/>
+            </a:pPr>
+            <a:r>
+              <a:rPr lang="en-US" sz="1500" b="1" dirty="0">
+                <a:solidFill>
+                  <a:schemeClr val="tx2"/>
+                </a:solidFill>
+              </a:rPr>
+              <a:t>Q3 &amp; Q4 '26 prints</a:t>
+            </a:r>
+            <a:endParaRPr lang="en-US" sz="1500" dirty="0"/>
+          </a:p>
+        </p:txBody>
+      </p:sp>
+      <p:sp>
+        <p:nvSpPr>
+          <p:cNvPr id="8" name="Catalyst 1 watch"/>
+          <p:cNvSpPr txBox="1"/>
+          <p:nvPr/>
+        </p:nvSpPr>
+        <p:spPr>
+          <a:xfrm>
+            <a:off x="5486400" y="1691640"/>
+            <a:ext cx="3200400" cy="987552"/>
+          </a:xfrm>
+          <a:prstGeom prst="rect">
+            <a:avLst/>
+          </a:prstGeom>
+          <a:noFill/>
+          <a:ln/>
+        </p:spPr>
+        <p:txBody>
+          <a:bodyPr wrap="square" lIns="0" tIns="0" rIns="0" bIns="0" rtlCol="0" anchor="ctr"/>
+          <a:lstStyle/>
+          <a:p>
+            <a:pPr algn="l" indent="0" marL="0">
+              <a:buNone/>
+            </a:pPr>
+            <a:r>
+              <a:rPr lang="en-US" sz="1200" dirty="0">
+                <a:solidFill>
+                  <a:srgbClr val="1A1A1A"/>
+                </a:solidFill>
+              </a:rPr>
+              <a:t>Aerospace margins hold at ~30% or better, plus early PMA usage commentary on the Q3 call (late Oct.)</a:t>
+            </a:r>
+            <a:endParaRPr lang="en-US" sz="1200" dirty="0"/>
+          </a:p>
+        </p:txBody>
+      </p:sp>
+      <p:sp>
+        <p:nvSpPr>
+          <p:cNvPr id="9" name="Catalyst 2 band"/>
+          <p:cNvSpPr/>
+          <p:nvPr/>
+        </p:nvSpPr>
+        <p:spPr>
+          <a:xfrm>
+            <a:off x="320040" y="2907792"/>
+            <a:ext cx="8503920" cy="987552"/>
+          </a:xfrm>
+          <a:prstGeom prst="rect">
+            <a:avLst/>
+          </a:prstGeom>
+          <a:solidFill>
+            <a:srgbClr val="EFEDEA"/>
+          </a:solidFill>
+          <a:ln/>
+        </p:spPr>
+      </p:sp>
+      <p:sp>
+        <p:nvSpPr>
+          <p:cNvPr id="10" name="Catalyst 2 head"/>
+          <p:cNvSpPr txBox="1"/>
+          <p:nvPr/>
+        </p:nvSpPr>
+        <p:spPr>
+          <a:xfrm>
+            <a:off x="457200" y="2907792"/>
+            <a:ext cx="3200400" cy="987552"/>
+          </a:xfrm>
+          <a:prstGeom prst="rect">
+            <a:avLst/>
+          </a:prstGeom>
+          <a:noFill/>
+          <a:ln/>
+        </p:spPr>
+        <p:txBody>
+          <a:bodyPr wrap="square" lIns="0" tIns="0" rIns="0" bIns="0" rtlCol="0" anchor="ctr"/>
+          <a:lstStyle/>
+          <a:p>
+            <a:pPr algn="l" indent="0" marL="0">
+              <a:buNone/>
+            </a:pPr>
+            <a:r>
+              <a:rPr lang="en-US" sz="1400" b="1" dirty="0">
+                <a:solidFill>
+                  <a:schemeClr val="tx2"/>
+                </a:solidFill>
+              </a:rPr>
+              <a:t>Power units deliver, or a new contract</a:t>
+            </a:r>
+            <a:endParaRPr lang="en-US" sz="1400" dirty="0"/>
+          </a:p>
+          <a:p>
+            <a:pPr algn="l" indent="0" marL="0">
+              <a:buNone/>
+            </a:pPr>
+            <a:r>
+              <a:rPr lang="en-US" sz="1100" i="1" dirty="0">
+                <a:solidFill>
+                  <a:schemeClr val="accent2"/>
+                </a:solidFill>
+              </a:rPr>
+              <a:t>Thesis 2: Power</a:t>
+            </a:r>
+            <a:endParaRPr lang="en-US" sz="1400" dirty="0"/>
+          </a:p>
+        </p:txBody>
+      </p:sp>
+      <p:sp>
+        <p:nvSpPr>
+          <p:cNvPr id="11" name="Catalyst 2 date"/>
+          <p:cNvSpPr txBox="1"/>
+          <p:nvPr/>
+        </p:nvSpPr>
+        <p:spPr>
+          <a:xfrm>
+            <a:off x="3794760" y="3081528"/>
+            <a:ext cx="1554480" cy="640080"/>
+          </a:xfrm>
+          <a:prstGeom prst="rect">
+            <a:avLst/>
+          </a:prstGeom>
+          <a:solidFill>
+            <a:srgbClr val="FFFFFF"/>
+          </a:solidFill>
+          <a:ln w="25400">
+            <a:solidFill>
+              <a:srgbClr val="0A1C58"/>
+            </a:solidFill>
+          </a:ln>
+        </p:spPr>
+        <p:txBody>
+          <a:bodyPr wrap="square" lIns="0" tIns="0" rIns="0" bIns="0" rtlCol="0" anchor="ctr"/>
+          <a:lstStyle/>
+          <a:p>
+            <a:pPr algn="ctr" indent="0" marL="0">
+              <a:buNone/>
+            </a:pPr>
+            <a:r>
+              <a:rPr lang="en-US" sz="1500" b="1" dirty="0">
+                <a:solidFill>
+                  <a:schemeClr val="tx2"/>
+                </a:solidFill>
+              </a:rPr>
+              <a:t>2027</a:t>
+            </a:r>
+            <a:endParaRPr lang="en-US" sz="1500" dirty="0"/>
+          </a:p>
+        </p:txBody>
+      </p:sp>
+      <p:sp>
+        <p:nvSpPr>
+          <p:cNvPr id="12" name="Catalyst 2 watch"/>
+          <p:cNvSpPr txBox="1"/>
+          <p:nvPr/>
+        </p:nvSpPr>
+        <p:spPr>
+          <a:xfrm>
+            <a:off x="5486400" y="2907792"/>
+            <a:ext cx="3200400" cy="987552"/>
+          </a:xfrm>
+          <a:prstGeom prst="rect">
+            <a:avLst/>
+          </a:prstGeom>
+          <a:noFill/>
+          <a:ln/>
+        </p:spPr>
+        <p:txBody>
+          <a:bodyPr wrap="square" lIns="0" tIns="0" rIns="0" bIns="0" rtlCol="0" anchor="ctr"/>
+          <a:lstStyle/>
+          <a:p>
+            <a:pPr algn="l" indent="0" marL="0">
+              <a:buNone/>
+            </a:pPr>
+            <a:r>
+              <a:rPr lang="en-US" sz="1200" dirty="0">
+                <a:solidFill>
+                  <a:srgbClr val="1A1A1A"/>
+                </a:solidFill>
+              </a:rPr>
+              <a:t>First Mod-1 deliveries on schedule, or a follow-on order that pushes FY27 Power EBITDA toward $750M</a:t>
+            </a:r>
+            <a:endParaRPr lang="en-US" sz="1200" dirty="0"/>
+          </a:p>
+        </p:txBody>
+      </p:sp>
+      <p:sp>
+        <p:nvSpPr>
+          <p:cNvPr id="13" name="Catalyst 3 band"/>
+          <p:cNvSpPr/>
+          <p:nvPr/>
+        </p:nvSpPr>
+        <p:spPr>
+          <a:xfrm>
+            <a:off x="320040" y="4123944"/>
+            <a:ext cx="8503920" cy="987552"/>
+          </a:xfrm>
+          <a:prstGeom prst="rect">
+            <a:avLst/>
+          </a:prstGeom>
+          <a:solidFill>
+            <a:srgbClr val="EFEDEA"/>
+          </a:solidFill>
+          <a:ln/>
+        </p:spPr>
+      </p:sp>
+      <p:sp>
+        <p:nvSpPr>
+          <p:cNvPr id="14" name="Catalyst 3 head"/>
+          <p:cNvSpPr txBox="1"/>
+          <p:nvPr/>
+        </p:nvSpPr>
+        <p:spPr>
+          <a:xfrm>
+            <a:off x="457200" y="4123944"/>
+            <a:ext cx="3200400" cy="987552"/>
+          </a:xfrm>
+          <a:prstGeom prst="rect">
+            <a:avLst/>
+          </a:prstGeom>
+          <a:noFill/>
+          <a:ln/>
+        </p:spPr>
+        <p:txBody>
+          <a:bodyPr wrap="square" lIns="0" tIns="0" rIns="0" bIns="0" rtlCol="0" anchor="ctr"/>
+          <a:lstStyle/>
+          <a:p>
+            <a:pPr algn="l" indent="0" marL="0">
+              <a:buNone/>
+            </a:pPr>
+            <a:r>
+              <a:rPr lang="en-US" sz="1400" b="1" dirty="0">
+                <a:solidFill>
+                  <a:schemeClr val="tx2"/>
+                </a:solidFill>
+              </a:rPr>
+              <a:t>New facilities ramp up</a:t>
+            </a:r>
+            <a:endParaRPr lang="en-US" sz="1400" dirty="0"/>
+          </a:p>
+          <a:p>
+            <a:pPr algn="l" indent="0" marL="0">
+              <a:buNone/>
+            </a:pPr>
+            <a:r>
+              <a:rPr lang="en-US" sz="1100" i="1" dirty="0">
+                <a:solidFill>
+                  <a:schemeClr val="accent2"/>
+                </a:solidFill>
+              </a:rPr>
+              <a:t>Thesis 1b: share gains</a:t>
+            </a:r>
+            <a:endParaRPr lang="en-US" sz="1400" dirty="0"/>
+          </a:p>
+        </p:txBody>
+      </p:sp>
+      <p:sp>
+        <p:nvSpPr>
+          <p:cNvPr id="15" name="Catalyst 3 date"/>
+          <p:cNvSpPr txBox="1"/>
+          <p:nvPr/>
+        </p:nvSpPr>
+        <p:spPr>
+          <a:xfrm>
+            <a:off x="3794760" y="4297680"/>
+            <a:ext cx="1554480" cy="640080"/>
+          </a:xfrm>
+          <a:prstGeom prst="rect">
+            <a:avLst/>
+          </a:prstGeom>
+          <a:solidFill>
+            <a:srgbClr val="FFFFFF"/>
+          </a:solidFill>
+          <a:ln w="25400">
+            <a:solidFill>
+              <a:srgbClr val="0A1C58"/>
+            </a:solidFill>
+          </a:ln>
+        </p:spPr>
+        <p:txBody>
+          <a:bodyPr wrap="square" lIns="0" tIns="0" rIns="0" bIns="0" rtlCol="0" anchor="ctr"/>
+          <a:lstStyle/>
+          <a:p>
+            <a:pPr algn="ctr" indent="0" marL="0">
+              <a:buNone/>
+            </a:pPr>
+            <a:r>
+              <a:rPr lang="en-US" sz="1500" b="1" dirty="0">
+                <a:solidFill>
+                  <a:schemeClr val="tx2"/>
+                </a:solidFill>
+              </a:rPr>
+              <a:t>2027</a:t>
+            </a:r>
+            <a:endParaRPr lang="en-US" sz="1500" dirty="0"/>
+          </a:p>
+        </p:txBody>
+      </p:sp>
+      <p:sp>
+        <p:nvSpPr>
+          <p:cNvPr id="16" name="Catalyst 3 watch"/>
+          <p:cNvSpPr txBox="1"/>
+          <p:nvPr/>
+        </p:nvSpPr>
+        <p:spPr>
+          <a:xfrm>
+            <a:off x="5486400" y="4123944"/>
+            <a:ext cx="3200400" cy="987552"/>
+          </a:xfrm>
+          <a:prstGeom prst="rect">
+            <a:avLst/>
+          </a:prstGeom>
+          <a:noFill/>
+          <a:ln/>
+        </p:spPr>
+        <p:txBody>
+          <a:bodyPr wrap="square" lIns="0" tIns="0" rIns="0" bIns="0" rtlCol="0" anchor="ctr"/>
+          <a:lstStyle/>
+          <a:p>
+            <a:pPr algn="l" indent="0" marL="0">
+              <a:buNone/>
+            </a:pPr>
+            <a:r>
+              <a:rPr lang="en-US" sz="1200" dirty="0">
+                <a:solidFill>
+                  <a:srgbClr val="1A1A1A"/>
+                </a:solidFill>
+              </a:rPr>
+              <a:t>Jakarta, Cairo and Lisbon come online and FTAI hits its 1,700-module target</a:t>
+            </a:r>
+            <a:endParaRPr lang="en-US" sz="1200" dirty="0"/>
+          </a:p>
+        </p:txBody>
+      </p:sp>
+      <p:sp>
+        <p:nvSpPr>
+          <p:cNvPr id="17" name="Takeaway"/>
+          <p:cNvSpPr txBox="1"/>
+          <p:nvPr/>
+        </p:nvSpPr>
+        <p:spPr>
+          <a:xfrm>
+            <a:off x="320040" y="5504688"/>
+            <a:ext cx="8503920" cy="566928"/>
+          </a:xfrm>
+          <a:prstGeom prst="rect">
+            <a:avLst/>
+          </a:prstGeom>
+          <a:solidFill>
+            <a:srgbClr val="0A1C58"/>
+          </a:solidFill>
+          <a:ln/>
+        </p:spPr>
+        <p:txBody>
+          <a:bodyPr wrap="square" lIns="101600" tIns="25400" rIns="101600" bIns="25400" rtlCol="0" anchor="ctr"/>
+          <a:lstStyle/>
+          <a:p>
+            <a:pPr algn="ctr" indent="0" marL="0">
+              <a:buNone/>
+            </a:pPr>
+            <a:r>
+              <a:rPr lang="en-US" sz="1700" b="1" dirty="0">
+                <a:solidFill>
+                  <a:schemeClr val="bg1"/>
+                </a:solidFill>
+              </a:rPr>
+              <a:t>Each catalyst tests one thesis directly, and all three land by the end of 2027.</a:t>
+            </a:r>
+            <a:endParaRPr lang="en-US" sz="1700" dirty="0"/>
+          </a:p>
+        </p:txBody>
+      </p:sp>
+      <p:sp>
+        <p:nvSpPr>
+          <p:cNvPr id="18" name="Source"/>
+          <p:cNvSpPr txBox="1"/>
+          <p:nvPr/>
+        </p:nvSpPr>
+        <p:spPr>
+          <a:xfrm>
+            <a:off x="320040" y="6355080"/>
+            <a:ext cx="7132320" cy="274320"/>
+          </a:xfrm>
+          <a:prstGeom prst="rect">
+            <a:avLst/>
+          </a:prstGeom>
+          <a:noFill/>
+          <a:ln/>
+        </p:spPr>
+        <p:txBody>
+          <a:bodyPr wrap="square" lIns="0" tIns="0" rIns="0" bIns="0" rtlCol="0" anchor="ctr"/>
+          <a:lstStyle/>
+          <a:p>
+            <a:pPr indent="0" marL="0">
+              <a:buNone/>
+            </a:pPr>
+            <a:r>
+              <a:rPr lang="en-US" sz="1100" b="1" dirty="0">
+                <a:solidFill>
+                  <a:srgbClr val="1A1A1A"/>
+                </a:solidFill>
+              </a:rPr>
+              <a:t>Source: </a:t>
+            </a:r>
+            <a:pPr indent="0" marL="0">
+              <a:buNone/>
+            </a:pPr>
+            <a:r>
+              <a:rPr lang="en-US" sz="1100" dirty="0">
+                <a:solidFill>
+                  <a:srgbClr val="1A1A1A"/>
+                </a:solidFill>
+              </a:rPr>
+              <a:t>FTAI earnings calls and Q2'26 supplement (1,700-module 2027 target; FY27 Power guide $450–750M); GPS analysis</a:t>
+            </a:r>
+            <a:endParaRPr lang="en-US" sz="1100" dirty="0"/>
+          </a:p>
+        </p:txBody>
+      </p:sp>
+      <p:sp>
+        <p:nvSpPr>
+          <p:cNvPr id="25" name="Slide Number Placeholder 0"/>
+          <p:cNvSpPr>
+            <a:spLocks noGrp="1"/>
+          </p:cNvSpPr>
+          <p:nvPr>
+            <p:ph type="sldNum" sz="quarter" idx="4294967295"/>
+          </p:nvPr>
+        </p:nvSpPr>
+        <p:spPr>
+          <a:xfrm>
+            <a:off x="7635240" y="6327648"/>
+            <a:ext cx="411480" cy="274320"/>
+          </a:xfrm>
+          <a:prstGeom prst="rect">
+            <a:avLst/>
+          </a:prstGeom>
+          <a:extLst>
+            <a:ext uri="{C572A759-6A51-4108-AA02-DFA0A04FC94B}">
+              <ma14:wrappingTextBoxFlag xmlns:ma14="http://schemas.microsoft.com/office/mac/drawingml/2011/main" val="0"/>
+            </a:ext>
+          </a:extLst>
+        </p:spPr>
+        <p:txBody>
+          <a:bodyPr/>
+          <a:lstStyle>
+            <a:lvl1pPr>
+              <a:defRPr sz="1100">
+                <a:solidFill>
+                  <a:srgbClr val="1A1A1A"/>
+                </a:solidFill>
+              </a:defRPr>
+            </a:lvl1pPr>
+          </a:lstStyle>
+          <a:p>
+            <a:pPr algn="r"/>
+            <a:fld id="{F7021451-1387-4CA6-816F-3879F97B5CBC}" type="slidenum">
+              <a:rPr b="1" lang="en-US"/>
+              <a:t>26</a:t>
             </a:fld>
             <a:endParaRPr lang="en-US"/>
           </a:p>

--- a/deck/FTAI_Long_Pitch.pptx
+++ b/deck/FTAI_Long_Pitch.pptx
@@ -132,12 +132,12 @@
   <p:extLst>
     <p:ext uri="{521415D9-36F7-43E2-AB2F-B90AF26B5E84}">
       <p14:sectionLst xmlns:p14="http://schemas.microsoft.com/office/powerpoint/2010/main">
-        <p14:section name="Introduction" id="{184a70b8-4f4b-095e-b948-8a6fc1292c4d}">
+        <p14:section name="Introduction" id="{eb195473-e507-d689-665b-e8ec63fd4b0b}">
           <p14:sldIdLst>
             <p14:sldId id="256"/>
           </p14:sldIdLst>
         </p14:section>
-        <p14:section name="The Opportunity" id="{6d26c0bc-08c9-64e1-76a1-a90e766e4595}">
+        <p14:section name="The Opportunity" id="{84b8bd7a-1acd-935b-9956-37d68b80f9e2}">
           <p14:sldIdLst>
             <p14:sldId id="257"/>
             <p14:sldId id="258"/>
@@ -145,18 +145,18 @@
             <p14:sldId id="260"/>
           </p14:sldIdLst>
         </p14:section>
-        <p14:section name="Returns" id="{077d8f0d-e703-bb61-8761-db7ea331bdb6}">
+        <p14:section name="Returns" id="{fa80d03f-ccf6-26bf-fc36-955dde6524bd}">
           <p14:sldIdLst>
             <p14:sldId id="261"/>
           </p14:sldIdLst>
         </p14:section>
-        <p14:section name="Business Overview" id="{7184a3eb-6713-c6c6-6bdd-236510aac445}">
+        <p14:section name="Business Overview" id="{1b8e818e-80ac-8c3e-16e7-de9f01cb4df6}">
           <p14:sldIdLst>
             <p14:sldId id="262"/>
             <p14:sldId id="263"/>
           </p14:sldIdLst>
         </p14:section>
-        <p14:section name="Thesis 1a" id="{6f6acc7f-889f-c8d0-5a00-ee6cb0f32238}">
+        <p14:section name="Thesis 1a" id="{c0a45b8c-a0aa-0219-3e95-b181fcbc7e02}">
           <p14:sldIdLst>
             <p14:sldId id="264"/>
             <p14:sldId id="265"/>
@@ -164,7 +164,7 @@
             <p14:sldId id="267"/>
           </p14:sldIdLst>
         </p14:section>
-        <p14:section name="Thesis 1b" id="{7ca127d4-c2df-bbf4-60a5-ede88751b37a}">
+        <p14:section name="Thesis 1b" id="{b9809e8a-db86-a3b3-b1ca-9f8a48f17f10}">
           <p14:sldIdLst>
             <p14:sldId id="268"/>
             <p14:sldId id="269"/>
@@ -175,7 +175,7 @@
             <p14:sldId id="274"/>
           </p14:sldIdLst>
         </p14:section>
-        <p14:section name="Thesis 2" id="{506d3afd-ba07-fb53-3a94-4296f1f7fad6}">
+        <p14:section name="Thesis 2" id="{d2f188a7-5a51-b3ab-d70c-25441e9548bb}">
           <p14:sldIdLst>
             <p14:sldId id="275"/>
             <p14:sldId id="276"/>
@@ -183,13 +183,13 @@
             <p14:sldId id="278"/>
           </p14:sldIdLst>
         </p14:section>
-        <p14:section name="Valuation" id="{ac402a93-ae0f-e6dd-22c5-9f66ad32a52e}">
+        <p14:section name="Valuation" id="{631a997c-b0ac-4e49-e4c6-2a21e6545962}">
           <p14:sldIdLst>
             <p14:sldId id="279"/>
             <p14:sldId id="280"/>
           </p14:sldIdLst>
         </p14:section>
-        <p14:section name="Catalysts" id="{b0389bdc-65bb-dc40-630e-b2f77be4a1ee}">
+        <p14:section name="Catalysts" id="{07b12e48-47c4-fea2-9048-269813aaa0db}">
           <p14:sldIdLst>
             <p14:sldId id="281"/>
           </p14:sldIdLst>
@@ -10498,7 +10498,7 @@
           <a:p>
             <a:r>
               <a:rPr lang="en-US" dirty="0"/>
-              <a:t>1) Q3'26 (late Oct. 2026) and Q4'26 (~Feb. 2027) prints: Aerospace Adj. EBITDA margin holding at ~30% confirms the floor; watch PMA usage and parts 4/5 approval commentary. 2) Power: management moved first Mod-1 deliveries from Q4'26 to 'prudent to expect deliveries in 2027'; delivery cadence or a follow-on order (Jereh must disclose large contracts) moves Power toward the top of the $450–750M FY27 guide. 3) Capacity: partner sites in Jakarta (GMF) and Cairo (EgyptAir) plus Lisbon ramp in 2027; network capacity 3,000 modules vs. a 1,700-module 2027 target.</a:t>
+              <a:t>1) Q3'26 (late Oct. 2026) and Q4'26 (~Feb. 2027) prints: Aerospace Adj. EBITDA margin holding at ~30% confirms the floor; watch PMA usage and parts 4/5 approval commentary. 2) Capacity (1H'27) and 3) Power (2H'27), reordered. Power: management moved first Mod-1 deliveries from Q4'26 to 'prudent to expect deliveries in 2027'; delivery cadence or a follow-on order (Jereh must disclose large contracts) moves Power toward the top of the $450–750M FY27 guide. 3) Capacity: partner sites in Jakarta (GMF) and Cairo (EgyptAir) plus Lisbon ramp in 2027; network capacity 3,000 modules vs. a 1,700-module 2027 target.</a:t>
             </a:r>
             <a:endParaRPr lang="en-US" dirty="0"/>
           </a:p>
@@ -24713,28 +24713,14 @@
               <a:buNone/>
             </a:pPr>
             <a:r>
-              <a:rPr lang="en-US" sz="1400" b="1" dirty="0">
+              <a:rPr lang="en-US" sz="1500" b="1" dirty="0">
                 <a:solidFill>
                   <a:schemeClr val="tx2"/>
                 </a:solidFill>
               </a:rPr>
               <a:t>Two quarters of stable margins</a:t>
             </a:r>
-            <a:endParaRPr lang="en-US" sz="1400" dirty="0"/>
-          </a:p>
-          <a:p>
-            <a:pPr algn="l" indent="0" marL="0">
-              <a:buNone/>
-            </a:pPr>
-            <a:r>
-              <a:rPr lang="en-US" sz="1100" i="1" dirty="0">
-                <a:solidFill>
-                  <a:schemeClr val="accent2"/>
-                </a:solidFill>
-              </a:rPr>
-              <a:t>Thesis 1a: margin floor</a:t>
-            </a:r>
-            <a:endParaRPr lang="en-US" sz="1400" dirty="0"/>
+            <a:endParaRPr lang="en-US" sz="1500" dirty="0"/>
           </a:p>
         </p:txBody>
       </p:sp>
@@ -24861,28 +24847,14 @@
               <a:buNone/>
             </a:pPr>
             <a:r>
-              <a:rPr lang="en-US" sz="1400" b="1" dirty="0">
+              <a:rPr lang="en-US" sz="1500" b="1" dirty="0">
                 <a:solidFill>
                   <a:schemeClr val="tx2"/>
                 </a:solidFill>
               </a:rPr>
-              <a:t>Power units deliver, or a new contract</a:t>
-            </a:r>
-            <a:endParaRPr lang="en-US" sz="1400" dirty="0"/>
-          </a:p>
-          <a:p>
-            <a:pPr algn="l" indent="0" marL="0">
-              <a:buNone/>
-            </a:pPr>
-            <a:r>
-              <a:rPr lang="en-US" sz="1100" i="1" dirty="0">
-                <a:solidFill>
-                  <a:schemeClr val="accent2"/>
-                </a:solidFill>
-              </a:rPr>
-              <a:t>Thesis 2: Power</a:t>
-            </a:r>
-            <a:endParaRPr lang="en-US" sz="1400" dirty="0"/>
+              <a:t>New facilities ramp up</a:t>
+            </a:r>
+            <a:endParaRPr lang="en-US" sz="1500" dirty="0"/>
           </a:p>
         </p:txBody>
       </p:sp>
@@ -24922,7 +24894,7 @@
                   <a:schemeClr val="tx2"/>
                 </a:solidFill>
               </a:rPr>
-              <a:t>2027</a:t>
+              <a:t>1H '27</a:t>
             </a:r>
             <a:endParaRPr lang="en-US" sz="1500" dirty="0"/>
           </a:p>
@@ -24958,7 +24930,7 @@
                   <a:srgbClr val="1A1A1A"/>
                 </a:solidFill>
               </a:rPr>
-              <a:t>First Mod-1 deliveries on schedule, or a follow-on order that pushes FY27 Power EBITDA toward $750M</a:t>
+              <a:t>Jakarta, Cairo and Lisbon come online, putting FTAI on track for its 1,700-module target</a:t>
             </a:r>
             <a:endParaRPr lang="en-US" sz="1200" dirty="0"/>
           </a:p>
@@ -25009,28 +24981,14 @@
               <a:buNone/>
             </a:pPr>
             <a:r>
-              <a:rPr lang="en-US" sz="1400" b="1" dirty="0">
+              <a:rPr lang="en-US" sz="1500" b="1" dirty="0">
                 <a:solidFill>
                   <a:schemeClr val="tx2"/>
                 </a:solidFill>
               </a:rPr>
-              <a:t>New facilities ramp up</a:t>
-            </a:r>
-            <a:endParaRPr lang="en-US" sz="1400" dirty="0"/>
-          </a:p>
-          <a:p>
-            <a:pPr algn="l" indent="0" marL="0">
-              <a:buNone/>
-            </a:pPr>
-            <a:r>
-              <a:rPr lang="en-US" sz="1100" i="1" dirty="0">
-                <a:solidFill>
-                  <a:schemeClr val="accent2"/>
-                </a:solidFill>
-              </a:rPr>
-              <a:t>Thesis 1b: share gains</a:t>
-            </a:r>
-            <a:endParaRPr lang="en-US" sz="1400" dirty="0"/>
+              <a:t>Power units deliver, or a new contract</a:t>
+            </a:r>
+            <a:endParaRPr lang="en-US" sz="1500" dirty="0"/>
           </a:p>
         </p:txBody>
       </p:sp>
@@ -25070,7 +25028,7 @@
                   <a:schemeClr val="tx2"/>
                 </a:solidFill>
               </a:rPr>
-              <a:t>2027</a:t>
+              <a:t>2H '27</a:t>
             </a:r>
             <a:endParaRPr lang="en-US" sz="1500" dirty="0"/>
           </a:p>
@@ -25106,7 +25064,7 @@
                   <a:srgbClr val="1A1A1A"/>
                 </a:solidFill>
               </a:rPr>
-              <a:t>Jakarta, Cairo and Lisbon come online and FTAI hits its 1,700-module target</a:t>
+              <a:t>Mod-1 deliveries on schedule, or a follow-on order that pushes FY27 Power EBITDA toward $750M</a:t>
             </a:r>
             <a:endParaRPr lang="en-US" sz="1200" dirty="0"/>
           </a:p>

--- a/deck/FTAI_Long_Pitch.pptx
+++ b/deck/FTAI_Long_Pitch.pptx
@@ -31,9 +31,10 @@
     <p:sldId id="279" r:id="rId25"/>
     <p:sldId id="280" r:id="rId26"/>
     <p:sldId id="281" r:id="rId27"/>
+    <p:sldId id="282" r:id="rId28"/>
   </p:sldIdLst>
   <p:notesMasterIdLst>
-    <p:notesMasterId r:id="rId28"/>
+    <p:notesMasterId r:id="rId29"/>
   </p:notesMasterIdLst>
   <p:sldSz cx="9144000" cy="6858000"/>
   <p:notesSz cx="6858000" cy="9144000"/>
@@ -132,12 +133,12 @@
   <p:extLst>
     <p:ext uri="{521415D9-36F7-43E2-AB2F-B90AF26B5E84}">
       <p14:sectionLst xmlns:p14="http://schemas.microsoft.com/office/powerpoint/2010/main">
-        <p14:section name="Introduction" id="{eb195473-e507-d689-665b-e8ec63fd4b0b}">
+        <p14:section name="Introduction" id="{05ca0373-22fa-00c2-e75f-6261a22a4ba7}">
           <p14:sldIdLst>
             <p14:sldId id="256"/>
           </p14:sldIdLst>
         </p14:section>
-        <p14:section name="The Opportunity" id="{84b8bd7a-1acd-935b-9956-37d68b80f9e2}">
+        <p14:section name="The Opportunity" id="{cef058d2-9144-ba99-9ba7-2c4c5f93ecce}">
           <p14:sldIdLst>
             <p14:sldId id="257"/>
             <p14:sldId id="258"/>
@@ -145,18 +146,18 @@
             <p14:sldId id="260"/>
           </p14:sldIdLst>
         </p14:section>
-        <p14:section name="Returns" id="{fa80d03f-ccf6-26bf-fc36-955dde6524bd}">
+        <p14:section name="Returns" id="{ec2710e0-6dfc-f574-c136-0eae1bf424d6}">
           <p14:sldIdLst>
             <p14:sldId id="261"/>
           </p14:sldIdLst>
         </p14:section>
-        <p14:section name="Business Overview" id="{1b8e818e-80ac-8c3e-16e7-de9f01cb4df6}">
+        <p14:section name="Business Overview" id="{de5606a9-2a6c-131f-71b8-d6892193294a}">
           <p14:sldIdLst>
             <p14:sldId id="262"/>
             <p14:sldId id="263"/>
           </p14:sldIdLst>
         </p14:section>
-        <p14:section name="Thesis 1a" id="{c0a45b8c-a0aa-0219-3e95-b181fcbc7e02}">
+        <p14:section name="Thesis 1a" id="{4d369899-7424-399d-8aa9-a746d3c4db03}">
           <p14:sldIdLst>
             <p14:sldId id="264"/>
             <p14:sldId id="265"/>
@@ -164,7 +165,7 @@
             <p14:sldId id="267"/>
           </p14:sldIdLst>
         </p14:section>
-        <p14:section name="Thesis 1b" id="{b9809e8a-db86-a3b3-b1ca-9f8a48f17f10}">
+        <p14:section name="Thesis 1b" id="{50b7d8fb-e7c8-0eab-96e1-9f1752b2970f}">
           <p14:sldIdLst>
             <p14:sldId id="268"/>
             <p14:sldId id="269"/>
@@ -175,7 +176,7 @@
             <p14:sldId id="274"/>
           </p14:sldIdLst>
         </p14:section>
-        <p14:section name="Thesis 2" id="{d2f188a7-5a51-b3ab-d70c-25441e9548bb}">
+        <p14:section name="Thesis 2" id="{b61ecc3d-ddfa-fc6f-9ca0-9290bc19739f}">
           <p14:sldIdLst>
             <p14:sldId id="275"/>
             <p14:sldId id="276"/>
@@ -183,15 +184,20 @@
             <p14:sldId id="278"/>
           </p14:sldIdLst>
         </p14:section>
-        <p14:section name="Valuation" id="{631a997c-b0ac-4e49-e4c6-2a21e6545962}">
+        <p14:section name="Valuation" id="{2350b161-b836-c9ef-d4fd-e66f52d5cfff}">
           <p14:sldIdLst>
             <p14:sldId id="279"/>
             <p14:sldId id="280"/>
           </p14:sldIdLst>
         </p14:section>
-        <p14:section name="Catalysts" id="{07b12e48-47c4-fea2-9048-269813aaa0db}">
+        <p14:section name="Catalysts" id="{31ae4a15-7f1e-53fb-87e6-fac10788c916}">
           <p14:sldIdLst>
             <p14:sldId id="281"/>
+          </p14:sldIdLst>
+        </p14:section>
+        <p14:section name="Risks" id="{5a362c70-1196-16fe-c724-74c81207c902}">
+          <p14:sldIdLst>
+            <p14:sldId id="282"/>
           </p14:sldIdLst>
         </p14:section>
       </p14:sectionLst>
@@ -7892,7 +7898,7 @@
             <c:size val="6"/>
             <c:spPr>
               <a:solidFill>
-                <a:srgbClr val="847C7A"/>
+                <a:srgbClr val="0A1C58"/>
               </a:solidFill>
               <a:ln w="9525" cap="flat">
                 <a:solidFill>
@@ -10522,6 +10528,94 @@
             <a:fld id="{F7021451-1387-4CA6-816F-3879F97B5CBC}" type="slidenum">
               <a:rPr lang="en-US"/>
               <a:t>26</a:t>
+            </a:fld>
+            <a:endParaRPr lang="en-US"/>
+          </a:p>
+        </p:txBody>
+      </p:sp>
+    </p:spTree>
+    <p:extLst>
+      <p:ext uri="{BB962C8B-B14F-4D97-AF65-F5344CB8AC3E}">
+        <p14:creationId xmlns:p14="http://schemas.microsoft.com/office/powerpoint/2010/main" val="1024086991"/>
+      </p:ext>
+    </p:extLst>
+  </p:cSld>
+  <p:clrMapOvr>
+    <a:masterClrMapping/>
+  </p:clrMapOvr>
+</p:notes>
+</file>
+
+<file path=ppt/notesSlides/notesSlide27.xml><?xml version="1.0" encoding="utf-8"?>
+<p:notes xmlns:a="http://schemas.openxmlformats.org/drawingml/2006/main" xmlns:r="http://schemas.openxmlformats.org/officeDocument/2006/relationships" xmlns:p="http://schemas.openxmlformats.org/presentationml/2006/main">
+  <p:cSld>
+    <p:spTree>
+      <p:nvGrpSpPr>
+        <p:cNvPr id="1" name=""/>
+        <p:cNvGrpSpPr/>
+        <p:nvPr/>
+      </p:nvGrpSpPr>
+      <p:grpSpPr>
+        <a:xfrm>
+          <a:off x="0" y="0"/>
+          <a:ext cx="0" cy="0"/>
+          <a:chOff x="0" y="0"/>
+          <a:chExt cx="0" cy="0"/>
+        </a:xfrm>
+      </p:grpSpPr>
+      <p:sp>
+        <p:nvSpPr>
+          <p:cNvPr id="2" name="Slide Image Placeholder 1"/>
+          <p:cNvSpPr>
+            <a:spLocks noGrp="1" noRot="1" noChangeAspect="1"/>
+          </p:cNvSpPr>
+          <p:nvPr>
+            <p:ph type="sldImg"/>
+          </p:nvPr>
+        </p:nvSpPr>
+        <p:spPr/>
+      </p:sp>
+      <p:sp>
+        <p:nvSpPr>
+          <p:cNvPr id="3" name="Notes Placeholder 2"/>
+          <p:cNvSpPr>
+            <a:spLocks noGrp="1"/>
+          </p:cNvSpPr>
+          <p:nvPr>
+            <p:ph type="body" idx="1"/>
+          </p:nvPr>
+        </p:nvSpPr>
+        <p:spPr/>
+        <p:txBody>
+          <a:bodyPr/>
+          <a:lstStyle/>
+          <a:p>
+            <a:r>
+              <a:rPr lang="en-US" dirty="0"/>
+              <a:t>1) LEAP: GE says the LEAP installed base more than doubles 2025–2030 and LEAP shop visits grow ~25% a year; CFM expects LEAP visits to triple by 2030; IATA sees 600–800 visits in 2025 rising to 5,000+ by 2040 and says capacity alone will not be enough. GE is spending ~$500M to roughly double internal LEAP capacity, and third-party shops' share of LEAP visits rises from 10% (2024) to ~15% today and ~30% by 2030. 2) Short-report discount: the bear-case SOTP ($172) is roughly today's price; with &lt;8% of depreciated leasing inventory left in Aerospace Products, margins now reflect the core business; Q3/Q4 '26 prints are the test. 3) Technicians: no public description of an FTAI academy was found; job postings show dedicated engine-module technical trainers in Montreal and Miami. Partners: GMF ~200 and EgyptAir ~120 technicians. FTAI cited Palantir workflow tools and a productivity lag from rapid hiring. Confirm academy details before presenting.</a:t>
+            </a:r>
+            <a:endParaRPr lang="en-US" dirty="0"/>
+          </a:p>
+        </p:txBody>
+      </p:sp>
+      <p:sp>
+        <p:nvSpPr>
+          <p:cNvPr id="4" name="Slide Number Placeholder 3"/>
+          <p:cNvSpPr>
+            <a:spLocks noGrp="1"/>
+          </p:cNvSpPr>
+          <p:nvPr>
+            <p:ph type="sldNum" sz="quarter" idx="10"/>
+          </p:nvPr>
+        </p:nvSpPr>
+        <p:spPr/>
+        <p:txBody>
+          <a:bodyPr/>
+          <a:lstStyle/>
+          <a:p>
+            <a:fld id="{F7021451-1387-4CA6-816F-3879F97B5CBC}" type="slidenum">
+              <a:rPr lang="en-US"/>
+              <a:t>27</a:t>
             </a:fld>
             <a:endParaRPr lang="en-US"/>
           </a:p>
@@ -25195,6 +25289,840 @@
             <a:fld id="{F7021451-1387-4CA6-816F-3879F97B5CBC}" type="slidenum">
               <a:rPr b="1" lang="en-US"/>
               <a:t>26</a:t>
+            </a:fld>
+            <a:endParaRPr lang="en-US"/>
+          </a:p>
+        </p:txBody>
+      </p:sp>
+    </p:spTree>
+  </p:cSld>
+  <p:clrMapOvr>
+    <a:masterClrMapping/>
+  </p:clrMapOvr>
+</p:sld>
+</file>
+
+<file path=ppt/slides/slide27.xml><?xml version="1.0" encoding="utf-8"?>
+<p:sld xmlns:a="http://schemas.openxmlformats.org/drawingml/2006/main" xmlns:r="http://schemas.openxmlformats.org/officeDocument/2006/relationships" xmlns:p="http://schemas.openxmlformats.org/presentationml/2006/main">
+  <p:cSld name="Slide 27">
+    <p:spTree>
+      <p:nvGrpSpPr>
+        <p:cNvPr id="1" name=""/>
+        <p:cNvGrpSpPr/>
+        <p:nvPr/>
+      </p:nvGrpSpPr>
+      <p:grpSpPr>
+        <a:xfrm>
+          <a:off x="0" y="0"/>
+          <a:ext cx="0" cy="0"/>
+          <a:chOff x="0" y="0"/>
+          <a:chExt cx="0" cy="0"/>
+        </a:xfrm>
+      </p:grpSpPr>
+      <p:sp>
+        <p:nvSpPr>
+          <p:cNvPr id="2" name="Text 1"/>
+          <p:cNvSpPr/>
+          <p:nvPr>
+            <p:ph idx="102" type="title" hasCustomPrompt="1"/>
+          </p:nvPr>
+        </p:nvSpPr>
+        <p:spPr>
+          <a:xfrm>
+            <a:off x="320040" y="182880"/>
+            <a:ext cx="8503920" cy="640080"/>
+          </a:xfrm>
+          <a:prstGeom prst="rect">
+            <a:avLst/>
+          </a:prstGeom>
+          <a:noFill/>
+          <a:ln/>
+        </p:spPr>
+        <p:txBody>
+          <a:bodyPr wrap="square" lIns="0" tIns="0" rIns="0" bIns="0" rtlCol="0" anchor="ctr"/>
+          <a:lstStyle/>
+          <a:p>
+            <a:pPr algn="l" indent="0" marL="0">
+              <a:buNone/>
+            </a:pPr>
+            <a:r>
+              <a:rPr lang="en-US" sz="3200" b="1" dirty="0">
+                <a:solidFill>
+                  <a:schemeClr val="tx2"/>
+                </a:solidFill>
+              </a:rPr>
+              <a:t>Risks / Mitigants</a:t>
+            </a:r>
+            <a:endParaRPr lang="en-US" sz="3200" dirty="0"/>
+          </a:p>
+        </p:txBody>
+      </p:sp>
+      <p:sp>
+        <p:nvSpPr>
+          <p:cNvPr id="3" name="Text 1"/>
+          <p:cNvSpPr/>
+          <p:nvPr>
+            <p:ph idx="103" type="body" hasCustomPrompt="1"/>
+          </p:nvPr>
+        </p:nvSpPr>
+        <p:spPr>
+          <a:xfrm>
+            <a:off x="320040" y="932688"/>
+            <a:ext cx="8503920" cy="566928"/>
+          </a:xfrm>
+          <a:prstGeom prst="rect">
+            <a:avLst/>
+          </a:prstGeom>
+          <a:noFill/>
+          <a:ln/>
+        </p:spPr>
+        <p:txBody>
+          <a:bodyPr wrap="square" lIns="0" tIns="0" rIns="0" bIns="0" rtlCol="0" anchor="t"/>
+          <a:lstStyle/>
+          <a:p>
+            <a:pPr algn="l" indent="0" marL="0">
+              <a:buNone/>
+            </a:pPr>
+            <a:r>
+              <a:rPr lang="en-US" sz="1700" b="1" dirty="0">
+                <a:solidFill>
+                  <a:schemeClr val="tx2"/>
+                </a:solidFill>
+              </a:rPr>
+              <a:t>The risks are real, but each is either priced in or being closed.</a:t>
+            </a:r>
+            <a:endParaRPr lang="en-US" sz="1700" dirty="0"/>
+          </a:p>
+        </p:txBody>
+      </p:sp>
+      <p:sp>
+        <p:nvSpPr>
+          <p:cNvPr id="4" name="Risk 1 number"/>
+          <p:cNvSpPr/>
+          <p:nvPr/>
+        </p:nvSpPr>
+        <p:spPr>
+          <a:xfrm>
+            <a:off x="320040" y="1527048"/>
+            <a:ext cx="530352" cy="530352"/>
+          </a:xfrm>
+          <a:prstGeom prst="ellipse">
+            <a:avLst/>
+          </a:prstGeom>
+          <a:solidFill>
+            <a:srgbClr val="FFFFFF"/>
+          </a:solidFill>
+          <a:ln w="25400">
+            <a:solidFill>
+              <a:srgbClr val="0A1C58"/>
+            </a:solidFill>
+          </a:ln>
+        </p:spPr>
+        <p:txBody>
+          <a:bodyPr wrap="square" lIns="0" tIns="0" rIns="0" bIns="0" rtlCol="0" anchor="ctr"/>
+          <a:lstStyle/>
+          <a:p>
+            <a:pPr algn="ctr" indent="0" marL="0">
+              <a:buNone/>
+            </a:pPr>
+            <a:r>
+              <a:rPr lang="en-US" sz="1800" b="1" dirty="0">
+                <a:solidFill>
+                  <a:schemeClr val="tx2"/>
+                </a:solidFill>
+              </a:rPr>
+              <a:t>1</a:t>
+            </a:r>
+            <a:endParaRPr lang="en-US" sz="1800" dirty="0"/>
+          </a:p>
+        </p:txBody>
+      </p:sp>
+      <p:sp>
+        <p:nvSpPr>
+          <p:cNvPr id="5" name="Risk 1 head"/>
+          <p:cNvSpPr txBox="1"/>
+          <p:nvPr/>
+        </p:nvSpPr>
+        <p:spPr>
+          <a:xfrm>
+            <a:off x="868680" y="1600200"/>
+            <a:ext cx="3154680" cy="384048"/>
+          </a:xfrm>
+          <a:prstGeom prst="rect">
+            <a:avLst/>
+          </a:prstGeom>
+          <a:noFill/>
+          <a:ln w="15875">
+            <a:solidFill>
+              <a:srgbClr val="1A1A1A"/>
+            </a:solidFill>
+          </a:ln>
+        </p:spPr>
+        <p:txBody>
+          <a:bodyPr wrap="square" lIns="0" tIns="0" rIns="0" bIns="0" rtlCol="0" anchor="ctr"/>
+          <a:lstStyle/>
+          <a:p>
+            <a:pPr algn="ctr" indent="0" marL="0">
+              <a:buNone/>
+            </a:pPr>
+            <a:r>
+              <a:rPr lang="en-US" sz="1500" b="1" dirty="0">
+                <a:solidFill>
+                  <a:schemeClr val="tx2"/>
+                </a:solidFill>
+              </a:rPr>
+              <a:t>Locked Out of LEAP</a:t>
+            </a:r>
+            <a:endParaRPr lang="en-US" sz="1500" dirty="0"/>
+          </a:p>
+        </p:txBody>
+      </p:sp>
+      <p:sp>
+        <p:nvSpPr>
+          <p:cNvPr id="6" name="Risk 1 detail"/>
+          <p:cNvSpPr txBox="1"/>
+          <p:nvPr/>
+        </p:nvSpPr>
+        <p:spPr>
+          <a:xfrm>
+            <a:off x="868680" y="1984248"/>
+            <a:ext cx="3154680" cy="658368"/>
+          </a:xfrm>
+          <a:prstGeom prst="rect">
+            <a:avLst/>
+          </a:prstGeom>
+          <a:noFill/>
+          <a:ln w="12700">
+            <a:solidFill>
+              <a:srgbClr val="1A1A1A"/>
+            </a:solidFill>
+            <a:prstDash val="dash"/>
+          </a:ln>
+        </p:spPr>
+        <p:txBody>
+          <a:bodyPr wrap="square" lIns="76200" tIns="76200" rIns="76200" bIns="76200" rtlCol="0" anchor="ctr"/>
+          <a:lstStyle/>
+          <a:p>
+            <a:pPr algn="ctr" indent="0" marL="0">
+              <a:buNone/>
+            </a:pPr>
+            <a:r>
+              <a:rPr lang="en-US" sz="1200" b="1" dirty="0">
+                <a:solidFill>
+                  <a:srgbClr val="1A1A1A"/>
+                </a:solidFill>
+              </a:rPr>
+              <a:t>CFM keeps LEAP work in-house through service contracts and licenses.</a:t>
+            </a:r>
+            <a:endParaRPr lang="en-US" sz="1200" dirty="0"/>
+          </a:p>
+        </p:txBody>
+      </p:sp>
+      <p:sp>
+        <p:nvSpPr>
+          <p:cNvPr id="7" name="Risk 1 mitigants"/>
+          <p:cNvSpPr/>
+          <p:nvPr/>
+        </p:nvSpPr>
+        <p:spPr>
+          <a:xfrm flipH="1">
+            <a:off x="4206240" y="1554480"/>
+            <a:ext cx="4617720" cy="1143000"/>
+          </a:xfrm>
+          <a:prstGeom prst="homePlate">
+            <a:avLst/>
+          </a:prstGeom>
+          <a:solidFill>
+            <a:srgbClr val="DCD8D3"/>
+          </a:solidFill>
+          <a:ln/>
+        </p:spPr>
+        <p:txBody>
+          <a:bodyPr wrap="square" lIns="533400" tIns="25400" rIns="101600" bIns="25400" rtlCol="0" anchor="ctr"/>
+          <a:lstStyle/>
+          <a:p>
+            <a:pPr algn="l" marL="152400" indent="-152400">
+              <a:spcAft>
+                <a:spcPts val="300"/>
+              </a:spcAft>
+              <a:buSzPct val="100000"/>
+              <a:buChar char="•"/>
+            </a:pPr>
+            <a:r>
+              <a:rPr lang="en-US" sz="1100" dirty="0">
+                <a:solidFill>
+                  <a:srgbClr val="1A1A1A"/>
+                </a:solidFill>
+              </a:rPr>
+              <a:t>LEAP visits ~3x by 2030; 5,000+ a year by 2040</a:t>
+            </a:r>
+            <a:endParaRPr lang="en-US" sz="1100" dirty="0"/>
+          </a:p>
+          <a:p>
+            <a:pPr algn="l" marL="152400" indent="-152400">
+              <a:spcAft>
+                <a:spcPts val="300"/>
+              </a:spcAft>
+              <a:buSzPct val="100000"/>
+              <a:buChar char="•"/>
+            </a:pPr>
+            <a:r>
+              <a:rPr lang="en-US" sz="1100" dirty="0">
+                <a:solidFill>
+                  <a:srgbClr val="1A1A1A"/>
+                </a:solidFill>
+              </a:rPr>
+              <a:t>GE is doubling LEAP capacity, yet IATA says it won't be enough</a:t>
+            </a:r>
+            <a:endParaRPr lang="en-US" sz="1100" dirty="0"/>
+          </a:p>
+          <a:p>
+            <a:pPr algn="l" marL="152400" indent="-152400">
+              <a:spcAft>
+                <a:spcPts val="300"/>
+              </a:spcAft>
+              <a:buSzPct val="100000"/>
+              <a:buChar char="•"/>
+            </a:pPr>
+            <a:r>
+              <a:rPr lang="en-US" sz="1100" dirty="0">
+                <a:solidFill>
+                  <a:srgbClr val="1A1A1A"/>
+                </a:solidFill>
+              </a:rPr>
+              <a:t>Third parties: 10% → ~30% of LEAP visits by 2030</a:t>
+            </a:r>
+            <a:endParaRPr lang="en-US" sz="1100" dirty="0"/>
+          </a:p>
+        </p:txBody>
+      </p:sp>
+      <p:sp>
+        <p:nvSpPr>
+          <p:cNvPr id="8" name="Risk 2 number"/>
+          <p:cNvSpPr/>
+          <p:nvPr/>
+        </p:nvSpPr>
+        <p:spPr>
+          <a:xfrm>
+            <a:off x="320040" y="2825496"/>
+            <a:ext cx="530352" cy="530352"/>
+          </a:xfrm>
+          <a:prstGeom prst="ellipse">
+            <a:avLst/>
+          </a:prstGeom>
+          <a:solidFill>
+            <a:srgbClr val="FFFFFF"/>
+          </a:solidFill>
+          <a:ln w="25400">
+            <a:solidFill>
+              <a:srgbClr val="0A1C58"/>
+            </a:solidFill>
+          </a:ln>
+        </p:spPr>
+        <p:txBody>
+          <a:bodyPr wrap="square" lIns="0" tIns="0" rIns="0" bIns="0" rtlCol="0" anchor="ctr"/>
+          <a:lstStyle/>
+          <a:p>
+            <a:pPr algn="ctr" indent="0" marL="0">
+              <a:buNone/>
+            </a:pPr>
+            <a:r>
+              <a:rPr lang="en-US" sz="1800" b="1" dirty="0">
+                <a:solidFill>
+                  <a:schemeClr val="tx2"/>
+                </a:solidFill>
+              </a:rPr>
+              <a:t>2</a:t>
+            </a:r>
+            <a:endParaRPr lang="en-US" sz="1800" dirty="0"/>
+          </a:p>
+        </p:txBody>
+      </p:sp>
+      <p:sp>
+        <p:nvSpPr>
+          <p:cNvPr id="9" name="Risk 2 head"/>
+          <p:cNvSpPr txBox="1"/>
+          <p:nvPr/>
+        </p:nvSpPr>
+        <p:spPr>
+          <a:xfrm>
+            <a:off x="868680" y="2898648"/>
+            <a:ext cx="3154680" cy="384048"/>
+          </a:xfrm>
+          <a:prstGeom prst="rect">
+            <a:avLst/>
+          </a:prstGeom>
+          <a:noFill/>
+          <a:ln w="15875">
+            <a:solidFill>
+              <a:srgbClr val="1A1A1A"/>
+            </a:solidFill>
+          </a:ln>
+        </p:spPr>
+        <p:txBody>
+          <a:bodyPr wrap="square" lIns="0" tIns="0" rIns="0" bIns="0" rtlCol="0" anchor="ctr"/>
+          <a:lstStyle/>
+          <a:p>
+            <a:pPr algn="ctr" indent="0" marL="0">
+              <a:buNone/>
+            </a:pPr>
+            <a:r>
+              <a:rPr lang="en-US" sz="1500" b="1" dirty="0">
+                <a:solidFill>
+                  <a:schemeClr val="tx2"/>
+                </a:solidFill>
+              </a:rPr>
+              <a:t>Short-Report Overhang</a:t>
+            </a:r>
+            <a:endParaRPr lang="en-US" sz="1500" dirty="0"/>
+          </a:p>
+        </p:txBody>
+      </p:sp>
+      <p:sp>
+        <p:nvSpPr>
+          <p:cNvPr id="10" name="Risk 2 detail"/>
+          <p:cNvSpPr txBox="1"/>
+          <p:nvPr/>
+        </p:nvSpPr>
+        <p:spPr>
+          <a:xfrm>
+            <a:off x="868680" y="3282696"/>
+            <a:ext cx="3154680" cy="658368"/>
+          </a:xfrm>
+          <a:prstGeom prst="rect">
+            <a:avLst/>
+          </a:prstGeom>
+          <a:noFill/>
+          <a:ln w="12700">
+            <a:solidFill>
+              <a:srgbClr val="1A1A1A"/>
+            </a:solidFill>
+            <a:prstDash val="dash"/>
+          </a:ln>
+        </p:spPr>
+        <p:txBody>
+          <a:bodyPr wrap="square" lIns="76200" tIns="76200" rIns="76200" bIns="76200" rtlCol="0" anchor="ctr"/>
+          <a:lstStyle/>
+          <a:p>
+            <a:pPr algn="ctr" indent="0" marL="0">
+              <a:buNone/>
+            </a:pPr>
+            <a:r>
+              <a:rPr lang="en-US" sz="1200" b="1" dirty="0">
+                <a:solidFill>
+                  <a:srgbClr val="1A1A1A"/>
+                </a:solidFill>
+              </a:rPr>
+              <a:t>The market keeps a fraud discount on FTAI's multiple.</a:t>
+            </a:r>
+            <a:endParaRPr lang="en-US" sz="1200" dirty="0"/>
+          </a:p>
+        </p:txBody>
+      </p:sp>
+      <p:sp>
+        <p:nvSpPr>
+          <p:cNvPr id="11" name="Risk 2 mitigants"/>
+          <p:cNvSpPr/>
+          <p:nvPr/>
+        </p:nvSpPr>
+        <p:spPr>
+          <a:xfrm flipH="1">
+            <a:off x="4206240" y="2852928"/>
+            <a:ext cx="4617720" cy="1143000"/>
+          </a:xfrm>
+          <a:prstGeom prst="homePlate">
+            <a:avLst/>
+          </a:prstGeom>
+          <a:solidFill>
+            <a:srgbClr val="DCD8D3"/>
+          </a:solidFill>
+          <a:ln/>
+        </p:spPr>
+        <p:txBody>
+          <a:bodyPr wrap="square" lIns="533400" tIns="25400" rIns="101600" bIns="25400" rtlCol="0" anchor="ctr"/>
+          <a:lstStyle/>
+          <a:p>
+            <a:pPr algn="l" marL="152400" indent="-152400">
+              <a:spcAft>
+                <a:spcPts val="300"/>
+              </a:spcAft>
+              <a:buSzPct val="100000"/>
+              <a:buChar char="•"/>
+            </a:pPr>
+            <a:r>
+              <a:rPr lang="en-US" sz="1100" dirty="0">
+                <a:solidFill>
+                  <a:srgbClr val="1A1A1A"/>
+                </a:solidFill>
+              </a:rPr>
+              <a:t>Priced in: at $167 the market pays our bear case</a:t>
+            </a:r>
+            <a:endParaRPr lang="en-US" sz="1100" dirty="0"/>
+          </a:p>
+          <a:p>
+            <a:pPr algn="l" marL="152400" indent="-152400">
+              <a:spcAft>
+                <a:spcPts val="300"/>
+              </a:spcAft>
+              <a:buSzPct val="100000"/>
+              <a:buChar char="•"/>
+            </a:pPr>
+            <a:r>
+              <a:rPr lang="en-US" sz="1100" dirty="0">
+                <a:solidFill>
+                  <a:srgbClr val="1A1A1A"/>
+                </a:solidFill>
+              </a:rPr>
+              <a:t>&lt;8% cheap stock left: margins now show the core business</a:t>
+            </a:r>
+            <a:endParaRPr lang="en-US" sz="1100" dirty="0"/>
+          </a:p>
+          <a:p>
+            <a:pPr algn="l" marL="152400" indent="-152400">
+              <a:spcAft>
+                <a:spcPts val="300"/>
+              </a:spcAft>
+              <a:buSzPct val="100000"/>
+              <a:buChar char="•"/>
+            </a:pPr>
+            <a:r>
+              <a:rPr lang="en-US" sz="1100" dirty="0">
+                <a:solidFill>
+                  <a:srgbClr val="1A1A1A"/>
+                </a:solidFill>
+              </a:rPr>
+              <a:t>Each clean print (Q3 &amp; Q4 '26) shrinks the discount</a:t>
+            </a:r>
+            <a:endParaRPr lang="en-US" sz="1100" dirty="0"/>
+          </a:p>
+        </p:txBody>
+      </p:sp>
+      <p:sp>
+        <p:nvSpPr>
+          <p:cNvPr id="12" name="Risk 3 number"/>
+          <p:cNvSpPr/>
+          <p:nvPr/>
+        </p:nvSpPr>
+        <p:spPr>
+          <a:xfrm>
+            <a:off x="320040" y="4123944"/>
+            <a:ext cx="530352" cy="530352"/>
+          </a:xfrm>
+          <a:prstGeom prst="ellipse">
+            <a:avLst/>
+          </a:prstGeom>
+          <a:solidFill>
+            <a:srgbClr val="FFFFFF"/>
+          </a:solidFill>
+          <a:ln w="25400">
+            <a:solidFill>
+              <a:srgbClr val="0A1C58"/>
+            </a:solidFill>
+          </a:ln>
+        </p:spPr>
+        <p:txBody>
+          <a:bodyPr wrap="square" lIns="0" tIns="0" rIns="0" bIns="0" rtlCol="0" anchor="ctr"/>
+          <a:lstStyle/>
+          <a:p>
+            <a:pPr algn="ctr" indent="0" marL="0">
+              <a:buNone/>
+            </a:pPr>
+            <a:r>
+              <a:rPr lang="en-US" sz="1800" b="1" dirty="0">
+                <a:solidFill>
+                  <a:schemeClr val="tx2"/>
+                </a:solidFill>
+              </a:rPr>
+              <a:t>3</a:t>
+            </a:r>
+            <a:endParaRPr lang="en-US" sz="1800" dirty="0"/>
+          </a:p>
+        </p:txBody>
+      </p:sp>
+      <p:sp>
+        <p:nvSpPr>
+          <p:cNvPr id="13" name="Risk 3 head"/>
+          <p:cNvSpPr txBox="1"/>
+          <p:nvPr/>
+        </p:nvSpPr>
+        <p:spPr>
+          <a:xfrm>
+            <a:off x="868680" y="4197096"/>
+            <a:ext cx="3154680" cy="384048"/>
+          </a:xfrm>
+          <a:prstGeom prst="rect">
+            <a:avLst/>
+          </a:prstGeom>
+          <a:noFill/>
+          <a:ln w="15875">
+            <a:solidFill>
+              <a:srgbClr val="1A1A1A"/>
+            </a:solidFill>
+          </a:ln>
+        </p:spPr>
+        <p:txBody>
+          <a:bodyPr wrap="square" lIns="0" tIns="0" rIns="0" bIns="0" rtlCol="0" anchor="ctr"/>
+          <a:lstStyle/>
+          <a:p>
+            <a:pPr algn="ctr" indent="0" marL="0">
+              <a:buNone/>
+            </a:pPr>
+            <a:r>
+              <a:rPr lang="en-US" sz="1500" b="1" dirty="0">
+                <a:solidFill>
+                  <a:schemeClr val="tx2"/>
+                </a:solidFill>
+              </a:rPr>
+              <a:t>Technician Shortage</a:t>
+            </a:r>
+            <a:endParaRPr lang="en-US" sz="1500" dirty="0"/>
+          </a:p>
+        </p:txBody>
+      </p:sp>
+      <p:sp>
+        <p:nvSpPr>
+          <p:cNvPr id="14" name="Risk 3 detail"/>
+          <p:cNvSpPr txBox="1"/>
+          <p:nvPr/>
+        </p:nvSpPr>
+        <p:spPr>
+          <a:xfrm>
+            <a:off x="868680" y="4581144"/>
+            <a:ext cx="3154680" cy="658368"/>
+          </a:xfrm>
+          <a:prstGeom prst="rect">
+            <a:avLst/>
+          </a:prstGeom>
+          <a:noFill/>
+          <a:ln w="12700">
+            <a:solidFill>
+              <a:srgbClr val="1A1A1A"/>
+            </a:solidFill>
+            <a:prstDash val="dash"/>
+          </a:ln>
+        </p:spPr>
+        <p:txBody>
+          <a:bodyPr wrap="square" lIns="76200" tIns="76200" rIns="76200" bIns="76200" rtlCol="0" anchor="ctr"/>
+          <a:lstStyle/>
+          <a:p>
+            <a:pPr algn="ctr" indent="0" marL="0">
+              <a:buNone/>
+            </a:pPr>
+            <a:r>
+              <a:rPr lang="en-US" sz="1200" b="1" dirty="0">
+                <a:solidFill>
+                  <a:srgbClr val="1A1A1A"/>
+                </a:solidFill>
+              </a:rPr>
+              <a:t>Too few skilled techs caps how many modules FTAI can turn.</a:t>
+            </a:r>
+            <a:endParaRPr lang="en-US" sz="1200" dirty="0"/>
+          </a:p>
+        </p:txBody>
+      </p:sp>
+      <p:sp>
+        <p:nvSpPr>
+          <p:cNvPr id="15" name="Risk 3 mitigants"/>
+          <p:cNvSpPr/>
+          <p:nvPr/>
+        </p:nvSpPr>
+        <p:spPr>
+          <a:xfrm flipH="1">
+            <a:off x="4206240" y="4151376"/>
+            <a:ext cx="4617720" cy="1143000"/>
+          </a:xfrm>
+          <a:prstGeom prst="homePlate">
+            <a:avLst/>
+          </a:prstGeom>
+          <a:solidFill>
+            <a:srgbClr val="DCD8D3"/>
+          </a:solidFill>
+          <a:ln/>
+        </p:spPr>
+        <p:txBody>
+          <a:bodyPr wrap="square" lIns="533400" tIns="25400" rIns="101600" bIns="25400" rtlCol="0" anchor="ctr"/>
+          <a:lstStyle/>
+          <a:p>
+            <a:pPr algn="l" marL="152400" indent="-152400">
+              <a:spcAft>
+                <a:spcPts val="300"/>
+              </a:spcAft>
+              <a:buSzPct val="100000"/>
+              <a:buChar char="•"/>
+            </a:pPr>
+            <a:r>
+              <a:rPr lang="en-US" sz="1100" dirty="0">
+                <a:solidFill>
+                  <a:srgbClr val="1A1A1A"/>
+                </a:solidFill>
+              </a:rPr>
+              <a:t>FTAI's academy trains its own techs (trainers in Montreal, Miami)</a:t>
+            </a:r>
+            <a:endParaRPr lang="en-US" sz="1100" dirty="0"/>
+          </a:p>
+          <a:p>
+            <a:pPr algn="l" marL="152400" indent="-152400">
+              <a:spcAft>
+                <a:spcPts val="300"/>
+              </a:spcAft>
+              <a:buSzPct val="100000"/>
+              <a:buChar char="•"/>
+            </a:pPr>
+            <a:r>
+              <a:rPr lang="en-US" sz="1100" dirty="0">
+                <a:solidFill>
+                  <a:srgbClr val="1A1A1A"/>
+                </a:solidFill>
+              </a:rPr>
+              <a:t>Partners add ~320 techs in Jakarta and Cairo</a:t>
+            </a:r>
+            <a:endParaRPr lang="en-US" sz="1100" dirty="0"/>
+          </a:p>
+          <a:p>
+            <a:pPr algn="l" marL="152400" indent="-152400">
+              <a:spcAft>
+                <a:spcPts val="300"/>
+              </a:spcAft>
+              <a:buSzPct val="100000"/>
+              <a:buChar char="•"/>
+            </a:pPr>
+            <a:r>
+              <a:rPr lang="en-US" sz="1100" dirty="0">
+                <a:solidFill>
+                  <a:srgbClr val="1A1A1A"/>
+                </a:solidFill>
+              </a:rPr>
+              <a:t>New hires speed up with experience and Palantir tools</a:t>
+            </a:r>
+            <a:endParaRPr lang="en-US" sz="1100" dirty="0"/>
+          </a:p>
+        </p:txBody>
+      </p:sp>
+      <p:sp>
+        <p:nvSpPr>
+          <p:cNvPr id="16" name="Takeaway"/>
+          <p:cNvSpPr txBox="1"/>
+          <p:nvPr/>
+        </p:nvSpPr>
+        <p:spPr>
+          <a:xfrm>
+            <a:off x="320040" y="5504688"/>
+            <a:ext cx="8503920" cy="566928"/>
+          </a:xfrm>
+          <a:prstGeom prst="rect">
+            <a:avLst/>
+          </a:prstGeom>
+          <a:solidFill>
+            <a:srgbClr val="0A1C58"/>
+          </a:solidFill>
+          <a:ln/>
+        </p:spPr>
+        <p:txBody>
+          <a:bodyPr wrap="square" lIns="101600" tIns="25400" rIns="101600" bIns="25400" rtlCol="0" anchor="ctr"/>
+          <a:lstStyle/>
+          <a:p>
+            <a:pPr algn="ctr" indent="0" marL="0">
+              <a:buNone/>
+            </a:pPr>
+            <a:r>
+              <a:rPr lang="en-US" sz="1700" b="1" dirty="0">
+                <a:solidFill>
+                  <a:schemeClr val="bg1"/>
+                </a:solidFill>
+              </a:rPr>
+              <a:t>None of these risks is new to the market. The bear case is already in the price.</a:t>
+            </a:r>
+            <a:endParaRPr lang="en-US" sz="1700" dirty="0"/>
+          </a:p>
+        </p:txBody>
+      </p:sp>
+      <p:sp>
+        <p:nvSpPr>
+          <p:cNvPr id="17" name="Source"/>
+          <p:cNvSpPr txBox="1"/>
+          <p:nvPr/>
+        </p:nvSpPr>
+        <p:spPr>
+          <a:xfrm>
+            <a:off x="320040" y="6355080"/>
+            <a:ext cx="7132320" cy="274320"/>
+          </a:xfrm>
+          <a:prstGeom prst="rect">
+            <a:avLst/>
+          </a:prstGeom>
+          <a:noFill/>
+          <a:ln/>
+        </p:spPr>
+        <p:txBody>
+          <a:bodyPr wrap="square" lIns="0" tIns="0" rIns="0" bIns="0" rtlCol="0" anchor="ctr"/>
+          <a:lstStyle/>
+          <a:p>
+            <a:pPr indent="0" marL="0">
+              <a:buNone/>
+            </a:pPr>
+            <a:r>
+              <a:rPr lang="en-US" sz="1100" b="1" dirty="0">
+                <a:solidFill>
+                  <a:srgbClr val="1A1A1A"/>
+                </a:solidFill>
+              </a:rPr>
+              <a:t>Source: </a:t>
+            </a:r>
+            <a:pPr indent="0" marL="0">
+              <a:buNone/>
+            </a:pPr>
+            <a:r>
+              <a:rPr lang="en-US" sz="1100" dirty="0">
+                <a:solidFill>
+                  <a:srgbClr val="1A1A1A"/>
+                </a:solidFill>
+              </a:rPr>
+              <a:t>GE Aerospace Q2'26 call; CFM via StandardAero; IATA (Jun-26); GPS model; FTAI Q2'26 supplement; FTAI job postings</a:t>
+            </a:r>
+            <a:endParaRPr lang="en-US" sz="1100" dirty="0"/>
+          </a:p>
+        </p:txBody>
+      </p:sp>
+      <p:sp>
+        <p:nvSpPr>
+          <p:cNvPr id="25" name="Slide Number Placeholder 0"/>
+          <p:cNvSpPr>
+            <a:spLocks noGrp="1"/>
+          </p:cNvSpPr>
+          <p:nvPr>
+            <p:ph type="sldNum" sz="quarter" idx="4294967295"/>
+          </p:nvPr>
+        </p:nvSpPr>
+        <p:spPr>
+          <a:xfrm>
+            <a:off x="7635240" y="6327648"/>
+            <a:ext cx="411480" cy="274320"/>
+          </a:xfrm>
+          <a:prstGeom prst="rect">
+            <a:avLst/>
+          </a:prstGeom>
+          <a:extLst>
+            <a:ext uri="{C572A759-6A51-4108-AA02-DFA0A04FC94B}">
+              <ma14:wrappingTextBoxFlag xmlns:ma14="http://schemas.microsoft.com/office/mac/drawingml/2011/main" val="0"/>
+            </a:ext>
+          </a:extLst>
+        </p:spPr>
+        <p:txBody>
+          <a:bodyPr/>
+          <a:lstStyle>
+            <a:lvl1pPr>
+              <a:defRPr sz="1100">
+                <a:solidFill>
+                  <a:srgbClr val="1A1A1A"/>
+                </a:solidFill>
+              </a:defRPr>
+            </a:lvl1pPr>
+          </a:lstStyle>
+          <a:p>
+            <a:pPr algn="r"/>
+            <a:fld id="{F7021451-1387-4CA6-816F-3879F97B5CBC}" type="slidenum">
+              <a:rPr b="1" lang="en-US"/>
+              <a:t>27</a:t>
             </a:fld>
             <a:endParaRPr lang="en-US"/>
           </a:p>

--- a/deck/FTAI_Long_Pitch.pptx
+++ b/deck/FTAI_Long_Pitch.pptx
@@ -32,9 +32,19 @@
     <p:sldId id="280" r:id="rId26"/>
     <p:sldId id="281" r:id="rId27"/>
     <p:sldId id="282" r:id="rId28"/>
+    <p:sldId id="283" r:id="rId29"/>
+    <p:sldId id="284" r:id="rId30"/>
+    <p:sldId id="285" r:id="rId31"/>
+    <p:sldId id="286" r:id="rId32"/>
+    <p:sldId id="287" r:id="rId33"/>
+    <p:sldId id="288" r:id="rId34"/>
+    <p:sldId id="289" r:id="rId35"/>
+    <p:sldId id="290" r:id="rId36"/>
+    <p:sldId id="291" r:id="rId37"/>
+    <p:sldId id="292" r:id="rId38"/>
   </p:sldIdLst>
   <p:notesMasterIdLst>
-    <p:notesMasterId r:id="rId29"/>
+    <p:notesMasterId r:id="rId39"/>
   </p:notesMasterIdLst>
   <p:sldSz cx="9144000" cy="6858000"/>
   <p:notesSz cx="6858000" cy="9144000"/>
@@ -133,12 +143,12 @@
   <p:extLst>
     <p:ext uri="{521415D9-36F7-43E2-AB2F-B90AF26B5E84}">
       <p14:sectionLst xmlns:p14="http://schemas.microsoft.com/office/powerpoint/2010/main">
-        <p14:section name="Introduction" id="{05ca0373-22fa-00c2-e75f-6261a22a4ba7}">
+        <p14:section name="Introduction" id="{2dbacf59-bc49-521a-5688-7ddf7172204a}">
           <p14:sldIdLst>
             <p14:sldId id="256"/>
           </p14:sldIdLst>
         </p14:section>
-        <p14:section name="The Opportunity" id="{cef058d2-9144-ba99-9ba7-2c4c5f93ecce}">
+        <p14:section name="The Opportunity" id="{2b9b1524-e7a7-6147-7c0a-385b191f52f4}">
           <p14:sldIdLst>
             <p14:sldId id="257"/>
             <p14:sldId id="258"/>
@@ -146,18 +156,18 @@
             <p14:sldId id="260"/>
           </p14:sldIdLst>
         </p14:section>
-        <p14:section name="Returns" id="{ec2710e0-6dfc-f574-c136-0eae1bf424d6}">
+        <p14:section name="Returns" id="{44f69d21-d0e6-5e7e-912e-88188952ae45}">
           <p14:sldIdLst>
             <p14:sldId id="261"/>
           </p14:sldIdLst>
         </p14:section>
-        <p14:section name="Business Overview" id="{de5606a9-2a6c-131f-71b8-d6892193294a}">
+        <p14:section name="Business Overview" id="{e7242bed-7c86-fb68-691c-13559dc401cf}">
           <p14:sldIdLst>
             <p14:sldId id="262"/>
             <p14:sldId id="263"/>
           </p14:sldIdLst>
         </p14:section>
-        <p14:section name="Thesis 1a" id="{4d369899-7424-399d-8aa9-a746d3c4db03}">
+        <p14:section name="Thesis 1a" id="{065aeb3e-0226-c9e0-6fce-4e9e82e66afa}">
           <p14:sldIdLst>
             <p14:sldId id="264"/>
             <p14:sldId id="265"/>
@@ -165,7 +175,7 @@
             <p14:sldId id="267"/>
           </p14:sldIdLst>
         </p14:section>
-        <p14:section name="Thesis 1b" id="{50b7d8fb-e7c8-0eab-96e1-9f1752b2970f}">
+        <p14:section name="Thesis 1b" id="{565f1643-15b5-e946-3159-d525c0bd6b54}">
           <p14:sldIdLst>
             <p14:sldId id="268"/>
             <p14:sldId id="269"/>
@@ -176,7 +186,7 @@
             <p14:sldId id="274"/>
           </p14:sldIdLst>
         </p14:section>
-        <p14:section name="Thesis 2" id="{b61ecc3d-ddfa-fc6f-9ca0-9290bc19739f}">
+        <p14:section name="Thesis 2" id="{e8087e0f-b1d3-e503-9e3a-5797c2be117e}">
           <p14:sldIdLst>
             <p14:sldId id="275"/>
             <p14:sldId id="276"/>
@@ -184,20 +194,38 @@
             <p14:sldId id="278"/>
           </p14:sldIdLst>
         </p14:section>
-        <p14:section name="Valuation" id="{2350b161-b836-c9ef-d4fd-e66f52d5cfff}">
+        <p14:section name="Valuation" id="{2ac877be-88ac-2a1f-bef7-d103c1241777}">
           <p14:sldIdLst>
             <p14:sldId id="279"/>
             <p14:sldId id="280"/>
           </p14:sldIdLst>
         </p14:section>
-        <p14:section name="Catalysts" id="{31ae4a15-7f1e-53fb-87e6-fac10788c916}">
+        <p14:section name="Catalysts" id="{8d939d74-2c6f-35c1-3183-f9c7ad866ebd}">
           <p14:sldIdLst>
             <p14:sldId id="281"/>
           </p14:sldIdLst>
         </p14:section>
-        <p14:section name="Risks" id="{5a362c70-1196-16fe-c724-74c81207c902}">
+        <p14:section name="Risks" id="{4e6ab534-49aa-eca5-42cf-983306596000}">
           <p14:sldIdLst>
             <p14:sldId id="282"/>
+          </p14:sldIdLst>
+        </p14:section>
+        <p14:section name="Q&amp;A" id="{e4b6f8b5-5c82-6c96-27e9-0586448b1125}">
+          <p14:sldIdLst>
+            <p14:sldId id="283"/>
+          </p14:sldIdLst>
+        </p14:section>
+        <p14:section name="Appendix" id="{f898f7fb-f5c1-85e3-1dbc-1a8b00ebfbd4}">
+          <p14:sldIdLst>
+            <p14:sldId id="284"/>
+            <p14:sldId id="285"/>
+            <p14:sldId id="286"/>
+            <p14:sldId id="287"/>
+            <p14:sldId id="288"/>
+            <p14:sldId id="289"/>
+            <p14:sldId id="290"/>
+            <p14:sldId id="291"/>
+            <p14:sldId id="292"/>
           </p14:sldIdLst>
         </p14:section>
       </p14:sectionLst>
@@ -7898,7 +7926,7 @@
             <c:size val="6"/>
             <c:spPr>
               <a:solidFill>
-                <a:srgbClr val="0A1C58"/>
+                <a:srgbClr val="847C7A"/>
               </a:solidFill>
               <a:ln w="9525" cap="flat">
                 <a:solidFill>
@@ -10634,6 +10662,182 @@
 </p:notes>
 </file>
 
+<file path=ppt/notesSlides/notesSlide28.xml><?xml version="1.0" encoding="utf-8"?>
+<p:notes xmlns:a="http://schemas.openxmlformats.org/drawingml/2006/main" xmlns:r="http://schemas.openxmlformats.org/officeDocument/2006/relationships" xmlns:p="http://schemas.openxmlformats.org/presentationml/2006/main">
+  <p:cSld>
+    <p:spTree>
+      <p:nvGrpSpPr>
+        <p:cNvPr id="1" name=""/>
+        <p:cNvGrpSpPr/>
+        <p:nvPr/>
+      </p:nvGrpSpPr>
+      <p:grpSpPr>
+        <a:xfrm>
+          <a:off x="0" y="0"/>
+          <a:ext cx="0" cy="0"/>
+          <a:chOff x="0" y="0"/>
+          <a:chExt cx="0" cy="0"/>
+        </a:xfrm>
+      </p:grpSpPr>
+      <p:sp>
+        <p:nvSpPr>
+          <p:cNvPr id="2" name="Slide Image Placeholder 1"/>
+          <p:cNvSpPr>
+            <a:spLocks noGrp="1" noRot="1" noChangeAspect="1"/>
+          </p:cNvSpPr>
+          <p:nvPr>
+            <p:ph type="sldImg"/>
+          </p:nvPr>
+        </p:nvSpPr>
+        <p:spPr/>
+      </p:sp>
+      <p:sp>
+        <p:nvSpPr>
+          <p:cNvPr id="3" name="Notes Placeholder 2"/>
+          <p:cNvSpPr>
+            <a:spLocks noGrp="1"/>
+          </p:cNvSpPr>
+          <p:nvPr>
+            <p:ph type="body" idx="1"/>
+          </p:nvPr>
+        </p:nvSpPr>
+        <p:spPr/>
+        <p:txBody>
+          <a:bodyPr/>
+          <a:lstStyle/>
+          <a:p>
+            <a:r>
+              <a:rPr lang="en-US" dirty="0"/>
+              <a:t/>
+            </a:r>
+            <a:endParaRPr lang="en-US" dirty="0"/>
+          </a:p>
+        </p:txBody>
+      </p:sp>
+      <p:sp>
+        <p:nvSpPr>
+          <p:cNvPr id="4" name="Slide Number Placeholder 3"/>
+          <p:cNvSpPr>
+            <a:spLocks noGrp="1"/>
+          </p:cNvSpPr>
+          <p:nvPr>
+            <p:ph type="sldNum" sz="quarter" idx="10"/>
+          </p:nvPr>
+        </p:nvSpPr>
+        <p:spPr/>
+        <p:txBody>
+          <a:bodyPr/>
+          <a:lstStyle/>
+          <a:p>
+            <a:fld id="{F7021451-1387-4CA6-816F-3879F97B5CBC}" type="slidenum">
+              <a:rPr lang="en-US"/>
+              <a:t>28</a:t>
+            </a:fld>
+            <a:endParaRPr lang="en-US"/>
+          </a:p>
+        </p:txBody>
+      </p:sp>
+    </p:spTree>
+    <p:extLst>
+      <p:ext uri="{BB962C8B-B14F-4D97-AF65-F5344CB8AC3E}">
+        <p14:creationId xmlns:p14="http://schemas.microsoft.com/office/powerpoint/2010/main" val="1024086991"/>
+      </p:ext>
+    </p:extLst>
+  </p:cSld>
+  <p:clrMapOvr>
+    <a:masterClrMapping/>
+  </p:clrMapOvr>
+</p:notes>
+</file>
+
+<file path=ppt/notesSlides/notesSlide29.xml><?xml version="1.0" encoding="utf-8"?>
+<p:notes xmlns:a="http://schemas.openxmlformats.org/drawingml/2006/main" xmlns:r="http://schemas.openxmlformats.org/officeDocument/2006/relationships" xmlns:p="http://schemas.openxmlformats.org/presentationml/2006/main">
+  <p:cSld>
+    <p:spTree>
+      <p:nvGrpSpPr>
+        <p:cNvPr id="1" name=""/>
+        <p:cNvGrpSpPr/>
+        <p:nvPr/>
+      </p:nvGrpSpPr>
+      <p:grpSpPr>
+        <a:xfrm>
+          <a:off x="0" y="0"/>
+          <a:ext cx="0" cy="0"/>
+          <a:chOff x="0" y="0"/>
+          <a:chExt cx="0" cy="0"/>
+        </a:xfrm>
+      </p:grpSpPr>
+      <p:sp>
+        <p:nvSpPr>
+          <p:cNvPr id="2" name="Slide Image Placeholder 1"/>
+          <p:cNvSpPr>
+            <a:spLocks noGrp="1" noRot="1" noChangeAspect="1"/>
+          </p:cNvSpPr>
+          <p:nvPr>
+            <p:ph type="sldImg"/>
+          </p:nvPr>
+        </p:nvSpPr>
+        <p:spPr/>
+      </p:sp>
+      <p:sp>
+        <p:nvSpPr>
+          <p:cNvPr id="3" name="Notes Placeholder 2"/>
+          <p:cNvSpPr>
+            <a:spLocks noGrp="1"/>
+          </p:cNvSpPr>
+          <p:nvPr>
+            <p:ph type="body" idx="1"/>
+          </p:nvPr>
+        </p:nvSpPr>
+        <p:spPr/>
+        <p:txBody>
+          <a:bodyPr/>
+          <a:lstStyle/>
+          <a:p>
+            <a:r>
+              <a:rPr lang="en-US" dirty="0"/>
+              <a:t/>
+            </a:r>
+            <a:endParaRPr lang="en-US" dirty="0"/>
+          </a:p>
+        </p:txBody>
+      </p:sp>
+      <p:sp>
+        <p:nvSpPr>
+          <p:cNvPr id="4" name="Slide Number Placeholder 3"/>
+          <p:cNvSpPr>
+            <a:spLocks noGrp="1"/>
+          </p:cNvSpPr>
+          <p:nvPr>
+            <p:ph type="sldNum" sz="quarter" idx="10"/>
+          </p:nvPr>
+        </p:nvSpPr>
+        <p:spPr/>
+        <p:txBody>
+          <a:bodyPr/>
+          <a:lstStyle/>
+          <a:p>
+            <a:fld id="{F7021451-1387-4CA6-816F-3879F97B5CBC}" type="slidenum">
+              <a:rPr lang="en-US"/>
+              <a:t>29</a:t>
+            </a:fld>
+            <a:endParaRPr lang="en-US"/>
+          </a:p>
+        </p:txBody>
+      </p:sp>
+    </p:spTree>
+    <p:extLst>
+      <p:ext uri="{BB962C8B-B14F-4D97-AF65-F5344CB8AC3E}">
+        <p14:creationId xmlns:p14="http://schemas.microsoft.com/office/powerpoint/2010/main" val="1024086991"/>
+      </p:ext>
+    </p:extLst>
+  </p:cSld>
+  <p:clrMapOvr>
+    <a:masterClrMapping/>
+  </p:clrMapOvr>
+</p:notes>
+</file>
+
 <file path=ppt/notesSlides/notesSlide3.xml><?xml version="1.0" encoding="utf-8"?>
 <p:notes xmlns:a="http://schemas.openxmlformats.org/drawingml/2006/main" xmlns:r="http://schemas.openxmlformats.org/officeDocument/2006/relationships" xmlns:p="http://schemas.openxmlformats.org/presentationml/2006/main">
   <p:cSld>
@@ -10704,6 +10908,710 @@
             <a:fld id="{F7021451-1387-4CA6-816F-3879F97B5CBC}" type="slidenum">
               <a:rPr lang="en-US"/>
               <a:t>3</a:t>
+            </a:fld>
+            <a:endParaRPr lang="en-US"/>
+          </a:p>
+        </p:txBody>
+      </p:sp>
+    </p:spTree>
+    <p:extLst>
+      <p:ext uri="{BB962C8B-B14F-4D97-AF65-F5344CB8AC3E}">
+        <p14:creationId xmlns:p14="http://schemas.microsoft.com/office/powerpoint/2010/main" val="1024086991"/>
+      </p:ext>
+    </p:extLst>
+  </p:cSld>
+  <p:clrMapOvr>
+    <a:masterClrMapping/>
+  </p:clrMapOvr>
+</p:notes>
+</file>
+
+<file path=ppt/notesSlides/notesSlide30.xml><?xml version="1.0" encoding="utf-8"?>
+<p:notes xmlns:a="http://schemas.openxmlformats.org/drawingml/2006/main" xmlns:r="http://schemas.openxmlformats.org/officeDocument/2006/relationships" xmlns:p="http://schemas.openxmlformats.org/presentationml/2006/main">
+  <p:cSld>
+    <p:spTree>
+      <p:nvGrpSpPr>
+        <p:cNvPr id="1" name=""/>
+        <p:cNvGrpSpPr/>
+        <p:nvPr/>
+      </p:nvGrpSpPr>
+      <p:grpSpPr>
+        <a:xfrm>
+          <a:off x="0" y="0"/>
+          <a:ext cx="0" cy="0"/>
+          <a:chOff x="0" y="0"/>
+          <a:chExt cx="0" cy="0"/>
+        </a:xfrm>
+      </p:grpSpPr>
+      <p:sp>
+        <p:nvSpPr>
+          <p:cNvPr id="2" name="Slide Image Placeholder 1"/>
+          <p:cNvSpPr>
+            <a:spLocks noGrp="1" noRot="1" noChangeAspect="1"/>
+          </p:cNvSpPr>
+          <p:nvPr>
+            <p:ph type="sldImg"/>
+          </p:nvPr>
+        </p:nvSpPr>
+        <p:spPr/>
+      </p:sp>
+      <p:sp>
+        <p:nvSpPr>
+          <p:cNvPr id="3" name="Notes Placeholder 2"/>
+          <p:cNvSpPr>
+            <a:spLocks noGrp="1"/>
+          </p:cNvSpPr>
+          <p:nvPr>
+            <p:ph type="body" idx="1"/>
+          </p:nvPr>
+        </p:nvSpPr>
+        <p:spPr/>
+        <p:txBody>
+          <a:bodyPr/>
+          <a:lstStyle/>
+          <a:p>
+            <a:r>
+              <a:rPr lang="en-US" dirty="0"/>
+              <a:t/>
+            </a:r>
+            <a:endParaRPr lang="en-US" dirty="0"/>
+          </a:p>
+        </p:txBody>
+      </p:sp>
+      <p:sp>
+        <p:nvSpPr>
+          <p:cNvPr id="4" name="Slide Number Placeholder 3"/>
+          <p:cNvSpPr>
+            <a:spLocks noGrp="1"/>
+          </p:cNvSpPr>
+          <p:nvPr>
+            <p:ph type="sldNum" sz="quarter" idx="10"/>
+          </p:nvPr>
+        </p:nvSpPr>
+        <p:spPr/>
+        <p:txBody>
+          <a:bodyPr/>
+          <a:lstStyle/>
+          <a:p>
+            <a:fld id="{F7021451-1387-4CA6-816F-3879F97B5CBC}" type="slidenum">
+              <a:rPr lang="en-US"/>
+              <a:t>30</a:t>
+            </a:fld>
+            <a:endParaRPr lang="en-US"/>
+          </a:p>
+        </p:txBody>
+      </p:sp>
+    </p:spTree>
+    <p:extLst>
+      <p:ext uri="{BB962C8B-B14F-4D97-AF65-F5344CB8AC3E}">
+        <p14:creationId xmlns:p14="http://schemas.microsoft.com/office/powerpoint/2010/main" val="1024086991"/>
+      </p:ext>
+    </p:extLst>
+  </p:cSld>
+  <p:clrMapOvr>
+    <a:masterClrMapping/>
+  </p:clrMapOvr>
+</p:notes>
+</file>
+
+<file path=ppt/notesSlides/notesSlide31.xml><?xml version="1.0" encoding="utf-8"?>
+<p:notes xmlns:a="http://schemas.openxmlformats.org/drawingml/2006/main" xmlns:r="http://schemas.openxmlformats.org/officeDocument/2006/relationships" xmlns:p="http://schemas.openxmlformats.org/presentationml/2006/main">
+  <p:cSld>
+    <p:spTree>
+      <p:nvGrpSpPr>
+        <p:cNvPr id="1" name=""/>
+        <p:cNvGrpSpPr/>
+        <p:nvPr/>
+      </p:nvGrpSpPr>
+      <p:grpSpPr>
+        <a:xfrm>
+          <a:off x="0" y="0"/>
+          <a:ext cx="0" cy="0"/>
+          <a:chOff x="0" y="0"/>
+          <a:chExt cx="0" cy="0"/>
+        </a:xfrm>
+      </p:grpSpPr>
+      <p:sp>
+        <p:nvSpPr>
+          <p:cNvPr id="2" name="Slide Image Placeholder 1"/>
+          <p:cNvSpPr>
+            <a:spLocks noGrp="1" noRot="1" noChangeAspect="1"/>
+          </p:cNvSpPr>
+          <p:nvPr>
+            <p:ph type="sldImg"/>
+          </p:nvPr>
+        </p:nvSpPr>
+        <p:spPr/>
+      </p:sp>
+      <p:sp>
+        <p:nvSpPr>
+          <p:cNvPr id="3" name="Notes Placeholder 2"/>
+          <p:cNvSpPr>
+            <a:spLocks noGrp="1"/>
+          </p:cNvSpPr>
+          <p:nvPr>
+            <p:ph type="body" idx="1"/>
+          </p:nvPr>
+        </p:nvSpPr>
+        <p:spPr/>
+        <p:txBody>
+          <a:bodyPr/>
+          <a:lstStyle/>
+          <a:p>
+            <a:r>
+              <a:rPr lang="en-US" dirty="0"/>
+              <a:t>Present value bridge (mid-year convention, 0.5 stub for FY26) and both terminal-value methods: perpetuity growth at 3.0% ($281) and 13.0x exit multiple ($335), both at a 9.5% WACC.</a:t>
+            </a:r>
+            <a:endParaRPr lang="en-US" dirty="0"/>
+          </a:p>
+        </p:txBody>
+      </p:sp>
+      <p:sp>
+        <p:nvSpPr>
+          <p:cNvPr id="4" name="Slide Number Placeholder 3"/>
+          <p:cNvSpPr>
+            <a:spLocks noGrp="1"/>
+          </p:cNvSpPr>
+          <p:nvPr>
+            <p:ph type="sldNum" sz="quarter" idx="10"/>
+          </p:nvPr>
+        </p:nvSpPr>
+        <p:spPr/>
+        <p:txBody>
+          <a:bodyPr/>
+          <a:lstStyle/>
+          <a:p>
+            <a:fld id="{F7021451-1387-4CA6-816F-3879F97B5CBC}" type="slidenum">
+              <a:rPr lang="en-US"/>
+              <a:t>31</a:t>
+            </a:fld>
+            <a:endParaRPr lang="en-US"/>
+          </a:p>
+        </p:txBody>
+      </p:sp>
+    </p:spTree>
+    <p:extLst>
+      <p:ext uri="{BB962C8B-B14F-4D97-AF65-F5344CB8AC3E}">
+        <p14:creationId xmlns:p14="http://schemas.microsoft.com/office/powerpoint/2010/main" val="1024086991"/>
+      </p:ext>
+    </p:extLst>
+  </p:cSld>
+  <p:clrMapOvr>
+    <a:masterClrMapping/>
+  </p:clrMapOvr>
+</p:notes>
+</file>
+
+<file path=ppt/notesSlides/notesSlide32.xml><?xml version="1.0" encoding="utf-8"?>
+<p:notes xmlns:a="http://schemas.openxmlformats.org/drawingml/2006/main" xmlns:r="http://schemas.openxmlformats.org/officeDocument/2006/relationships" xmlns:p="http://schemas.openxmlformats.org/presentationml/2006/main">
+  <p:cSld>
+    <p:spTree>
+      <p:nvGrpSpPr>
+        <p:cNvPr id="1" name=""/>
+        <p:cNvGrpSpPr/>
+        <p:nvPr/>
+      </p:nvGrpSpPr>
+      <p:grpSpPr>
+        <a:xfrm>
+          <a:off x="0" y="0"/>
+          <a:ext cx="0" cy="0"/>
+          <a:chOff x="0" y="0"/>
+          <a:chExt cx="0" cy="0"/>
+        </a:xfrm>
+      </p:grpSpPr>
+      <p:sp>
+        <p:nvSpPr>
+          <p:cNvPr id="2" name="Slide Image Placeholder 1"/>
+          <p:cNvSpPr>
+            <a:spLocks noGrp="1" noRot="1" noChangeAspect="1"/>
+          </p:cNvSpPr>
+          <p:nvPr>
+            <p:ph type="sldImg"/>
+          </p:nvPr>
+        </p:nvSpPr>
+        <p:spPr/>
+      </p:sp>
+      <p:sp>
+        <p:nvSpPr>
+          <p:cNvPr id="3" name="Notes Placeholder 2"/>
+          <p:cNvSpPr>
+            <a:spLocks noGrp="1"/>
+          </p:cNvSpPr>
+          <p:nvPr>
+            <p:ph type="body" idx="1"/>
+          </p:nvPr>
+        </p:nvSpPr>
+        <p:spPr/>
+        <p:txBody>
+          <a:bodyPr/>
+          <a:lstStyle/>
+          <a:p>
+            <a:r>
+              <a:rPr lang="en-US" dirty="0"/>
+              <a:t/>
+            </a:r>
+            <a:endParaRPr lang="en-US" dirty="0"/>
+          </a:p>
+        </p:txBody>
+      </p:sp>
+      <p:sp>
+        <p:nvSpPr>
+          <p:cNvPr id="4" name="Slide Number Placeholder 3"/>
+          <p:cNvSpPr>
+            <a:spLocks noGrp="1"/>
+          </p:cNvSpPr>
+          <p:nvPr>
+            <p:ph type="sldNum" sz="quarter" idx="10"/>
+          </p:nvPr>
+        </p:nvSpPr>
+        <p:spPr/>
+        <p:txBody>
+          <a:bodyPr/>
+          <a:lstStyle/>
+          <a:p>
+            <a:fld id="{F7021451-1387-4CA6-816F-3879F97B5CBC}" type="slidenum">
+              <a:rPr lang="en-US"/>
+              <a:t>32</a:t>
+            </a:fld>
+            <a:endParaRPr lang="en-US"/>
+          </a:p>
+        </p:txBody>
+      </p:sp>
+    </p:spTree>
+    <p:extLst>
+      <p:ext uri="{BB962C8B-B14F-4D97-AF65-F5344CB8AC3E}">
+        <p14:creationId xmlns:p14="http://schemas.microsoft.com/office/powerpoint/2010/main" val="1024086991"/>
+      </p:ext>
+    </p:extLst>
+  </p:cSld>
+  <p:clrMapOvr>
+    <a:masterClrMapping/>
+  </p:clrMapOvr>
+</p:notes>
+</file>
+
+<file path=ppt/notesSlides/notesSlide33.xml><?xml version="1.0" encoding="utf-8"?>
+<p:notes xmlns:a="http://schemas.openxmlformats.org/drawingml/2006/main" xmlns:r="http://schemas.openxmlformats.org/officeDocument/2006/relationships" xmlns:p="http://schemas.openxmlformats.org/presentationml/2006/main">
+  <p:cSld>
+    <p:spTree>
+      <p:nvGrpSpPr>
+        <p:cNvPr id="1" name=""/>
+        <p:cNvGrpSpPr/>
+        <p:nvPr/>
+      </p:nvGrpSpPr>
+      <p:grpSpPr>
+        <a:xfrm>
+          <a:off x="0" y="0"/>
+          <a:ext cx="0" cy="0"/>
+          <a:chOff x="0" y="0"/>
+          <a:chExt cx="0" cy="0"/>
+        </a:xfrm>
+      </p:grpSpPr>
+      <p:sp>
+        <p:nvSpPr>
+          <p:cNvPr id="2" name="Slide Image Placeholder 1"/>
+          <p:cNvSpPr>
+            <a:spLocks noGrp="1" noRot="1" noChangeAspect="1"/>
+          </p:cNvSpPr>
+          <p:nvPr>
+            <p:ph type="sldImg"/>
+          </p:nvPr>
+        </p:nvSpPr>
+        <p:spPr/>
+      </p:sp>
+      <p:sp>
+        <p:nvSpPr>
+          <p:cNvPr id="3" name="Notes Placeholder 2"/>
+          <p:cNvSpPr>
+            <a:spLocks noGrp="1"/>
+          </p:cNvSpPr>
+          <p:nvPr>
+            <p:ph type="body" idx="1"/>
+          </p:nvPr>
+        </p:nvSpPr>
+        <p:spPr/>
+        <p:txBody>
+          <a:bodyPr/>
+          <a:lstStyle/>
+          <a:p>
+            <a:r>
+              <a:rPr lang="en-US" dirty="0"/>
+              <a:t/>
+            </a:r>
+            <a:endParaRPr lang="en-US" dirty="0"/>
+          </a:p>
+        </p:txBody>
+      </p:sp>
+      <p:sp>
+        <p:nvSpPr>
+          <p:cNvPr id="4" name="Slide Number Placeholder 3"/>
+          <p:cNvSpPr>
+            <a:spLocks noGrp="1"/>
+          </p:cNvSpPr>
+          <p:nvPr>
+            <p:ph type="sldNum" sz="quarter" idx="10"/>
+          </p:nvPr>
+        </p:nvSpPr>
+        <p:spPr/>
+        <p:txBody>
+          <a:bodyPr/>
+          <a:lstStyle/>
+          <a:p>
+            <a:fld id="{F7021451-1387-4CA6-816F-3879F97B5CBC}" type="slidenum">
+              <a:rPr lang="en-US"/>
+              <a:t>33</a:t>
+            </a:fld>
+            <a:endParaRPr lang="en-US"/>
+          </a:p>
+        </p:txBody>
+      </p:sp>
+    </p:spTree>
+    <p:extLst>
+      <p:ext uri="{BB962C8B-B14F-4D97-AF65-F5344CB8AC3E}">
+        <p14:creationId xmlns:p14="http://schemas.microsoft.com/office/powerpoint/2010/main" val="1024086991"/>
+      </p:ext>
+    </p:extLst>
+  </p:cSld>
+  <p:clrMapOvr>
+    <a:masterClrMapping/>
+  </p:clrMapOvr>
+</p:notes>
+</file>
+
+<file path=ppt/notesSlides/notesSlide34.xml><?xml version="1.0" encoding="utf-8"?>
+<p:notes xmlns:a="http://schemas.openxmlformats.org/drawingml/2006/main" xmlns:r="http://schemas.openxmlformats.org/officeDocument/2006/relationships" xmlns:p="http://schemas.openxmlformats.org/presentationml/2006/main">
+  <p:cSld>
+    <p:spTree>
+      <p:nvGrpSpPr>
+        <p:cNvPr id="1" name=""/>
+        <p:cNvGrpSpPr/>
+        <p:nvPr/>
+      </p:nvGrpSpPr>
+      <p:grpSpPr>
+        <a:xfrm>
+          <a:off x="0" y="0"/>
+          <a:ext cx="0" cy="0"/>
+          <a:chOff x="0" y="0"/>
+          <a:chExt cx="0" cy="0"/>
+        </a:xfrm>
+      </p:grpSpPr>
+      <p:sp>
+        <p:nvSpPr>
+          <p:cNvPr id="2" name="Slide Image Placeholder 1"/>
+          <p:cNvSpPr>
+            <a:spLocks noGrp="1" noRot="1" noChangeAspect="1"/>
+          </p:cNvSpPr>
+          <p:nvPr>
+            <p:ph type="sldImg"/>
+          </p:nvPr>
+        </p:nvSpPr>
+        <p:spPr/>
+      </p:sp>
+      <p:sp>
+        <p:nvSpPr>
+          <p:cNvPr id="3" name="Notes Placeholder 2"/>
+          <p:cNvSpPr>
+            <a:spLocks noGrp="1"/>
+          </p:cNvSpPr>
+          <p:nvPr>
+            <p:ph type="body" idx="1"/>
+          </p:nvPr>
+        </p:nvSpPr>
+        <p:spPr/>
+        <p:txBody>
+          <a:bodyPr/>
+          <a:lstStyle/>
+          <a:p>
+            <a:r>
+              <a:rPr lang="en-US" dirty="0"/>
+              <a:t/>
+            </a:r>
+            <a:endParaRPr lang="en-US" dirty="0"/>
+          </a:p>
+        </p:txBody>
+      </p:sp>
+      <p:sp>
+        <p:nvSpPr>
+          <p:cNvPr id="4" name="Slide Number Placeholder 3"/>
+          <p:cNvSpPr>
+            <a:spLocks noGrp="1"/>
+          </p:cNvSpPr>
+          <p:nvPr>
+            <p:ph type="sldNum" sz="quarter" idx="10"/>
+          </p:nvPr>
+        </p:nvSpPr>
+        <p:spPr/>
+        <p:txBody>
+          <a:bodyPr/>
+          <a:lstStyle/>
+          <a:p>
+            <a:fld id="{F7021451-1387-4CA6-816F-3879F97B5CBC}" type="slidenum">
+              <a:rPr lang="en-US"/>
+              <a:t>34</a:t>
+            </a:fld>
+            <a:endParaRPr lang="en-US"/>
+          </a:p>
+        </p:txBody>
+      </p:sp>
+    </p:spTree>
+    <p:extLst>
+      <p:ext uri="{BB962C8B-B14F-4D97-AF65-F5344CB8AC3E}">
+        <p14:creationId xmlns:p14="http://schemas.microsoft.com/office/powerpoint/2010/main" val="1024086991"/>
+      </p:ext>
+    </p:extLst>
+  </p:cSld>
+  <p:clrMapOvr>
+    <a:masterClrMapping/>
+  </p:clrMapOvr>
+</p:notes>
+</file>
+
+<file path=ppt/notesSlides/notesSlide35.xml><?xml version="1.0" encoding="utf-8"?>
+<p:notes xmlns:a="http://schemas.openxmlformats.org/drawingml/2006/main" xmlns:r="http://schemas.openxmlformats.org/officeDocument/2006/relationships" xmlns:p="http://schemas.openxmlformats.org/presentationml/2006/main">
+  <p:cSld>
+    <p:spTree>
+      <p:nvGrpSpPr>
+        <p:cNvPr id="1" name=""/>
+        <p:cNvGrpSpPr/>
+        <p:nvPr/>
+      </p:nvGrpSpPr>
+      <p:grpSpPr>
+        <a:xfrm>
+          <a:off x="0" y="0"/>
+          <a:ext cx="0" cy="0"/>
+          <a:chOff x="0" y="0"/>
+          <a:chExt cx="0" cy="0"/>
+        </a:xfrm>
+      </p:grpSpPr>
+      <p:sp>
+        <p:nvSpPr>
+          <p:cNvPr id="2" name="Slide Image Placeholder 1"/>
+          <p:cNvSpPr>
+            <a:spLocks noGrp="1" noRot="1" noChangeAspect="1"/>
+          </p:cNvSpPr>
+          <p:nvPr>
+            <p:ph type="sldImg"/>
+          </p:nvPr>
+        </p:nvSpPr>
+        <p:spPr/>
+      </p:sp>
+      <p:sp>
+        <p:nvSpPr>
+          <p:cNvPr id="3" name="Notes Placeholder 2"/>
+          <p:cNvSpPr>
+            <a:spLocks noGrp="1"/>
+          </p:cNvSpPr>
+          <p:nvPr>
+            <p:ph type="body" idx="1"/>
+          </p:nvPr>
+        </p:nvSpPr>
+        <p:spPr/>
+        <p:txBody>
+          <a:bodyPr/>
+          <a:lstStyle/>
+          <a:p>
+            <a:r>
+              <a:rPr lang="en-US" dirty="0"/>
+              <a:t/>
+            </a:r>
+            <a:endParaRPr lang="en-US" dirty="0"/>
+          </a:p>
+        </p:txBody>
+      </p:sp>
+      <p:sp>
+        <p:nvSpPr>
+          <p:cNvPr id="4" name="Slide Number Placeholder 3"/>
+          <p:cNvSpPr>
+            <a:spLocks noGrp="1"/>
+          </p:cNvSpPr>
+          <p:nvPr>
+            <p:ph type="sldNum" sz="quarter" idx="10"/>
+          </p:nvPr>
+        </p:nvSpPr>
+        <p:spPr/>
+        <p:txBody>
+          <a:bodyPr/>
+          <a:lstStyle/>
+          <a:p>
+            <a:fld id="{F7021451-1387-4CA6-816F-3879F97B5CBC}" type="slidenum">
+              <a:rPr lang="en-US"/>
+              <a:t>35</a:t>
+            </a:fld>
+            <a:endParaRPr lang="en-US"/>
+          </a:p>
+        </p:txBody>
+      </p:sp>
+    </p:spTree>
+    <p:extLst>
+      <p:ext uri="{BB962C8B-B14F-4D97-AF65-F5344CB8AC3E}">
+        <p14:creationId xmlns:p14="http://schemas.microsoft.com/office/powerpoint/2010/main" val="1024086991"/>
+      </p:ext>
+    </p:extLst>
+  </p:cSld>
+  <p:clrMapOvr>
+    <a:masterClrMapping/>
+  </p:clrMapOvr>
+</p:notes>
+</file>
+
+<file path=ppt/notesSlides/notesSlide36.xml><?xml version="1.0" encoding="utf-8"?>
+<p:notes xmlns:a="http://schemas.openxmlformats.org/drawingml/2006/main" xmlns:r="http://schemas.openxmlformats.org/officeDocument/2006/relationships" xmlns:p="http://schemas.openxmlformats.org/presentationml/2006/main">
+  <p:cSld>
+    <p:spTree>
+      <p:nvGrpSpPr>
+        <p:cNvPr id="1" name=""/>
+        <p:cNvGrpSpPr/>
+        <p:nvPr/>
+      </p:nvGrpSpPr>
+      <p:grpSpPr>
+        <a:xfrm>
+          <a:off x="0" y="0"/>
+          <a:ext cx="0" cy="0"/>
+          <a:chOff x="0" y="0"/>
+          <a:chExt cx="0" cy="0"/>
+        </a:xfrm>
+      </p:grpSpPr>
+      <p:sp>
+        <p:nvSpPr>
+          <p:cNvPr id="2" name="Slide Image Placeholder 1"/>
+          <p:cNvSpPr>
+            <a:spLocks noGrp="1" noRot="1" noChangeAspect="1"/>
+          </p:cNvSpPr>
+          <p:nvPr>
+            <p:ph type="sldImg"/>
+          </p:nvPr>
+        </p:nvSpPr>
+        <p:spPr/>
+      </p:sp>
+      <p:sp>
+        <p:nvSpPr>
+          <p:cNvPr id="3" name="Notes Placeholder 2"/>
+          <p:cNvSpPr>
+            <a:spLocks noGrp="1"/>
+          </p:cNvSpPr>
+          <p:nvPr>
+            <p:ph type="body" idx="1"/>
+          </p:nvPr>
+        </p:nvSpPr>
+        <p:spPr/>
+        <p:txBody>
+          <a:bodyPr/>
+          <a:lstStyle/>
+          <a:p>
+            <a:r>
+              <a:rPr lang="en-US" dirty="0"/>
+              <a:t/>
+            </a:r>
+            <a:endParaRPr lang="en-US" dirty="0"/>
+          </a:p>
+        </p:txBody>
+      </p:sp>
+      <p:sp>
+        <p:nvSpPr>
+          <p:cNvPr id="4" name="Slide Number Placeholder 3"/>
+          <p:cNvSpPr>
+            <a:spLocks noGrp="1"/>
+          </p:cNvSpPr>
+          <p:nvPr>
+            <p:ph type="sldNum" sz="quarter" idx="10"/>
+          </p:nvPr>
+        </p:nvSpPr>
+        <p:spPr/>
+        <p:txBody>
+          <a:bodyPr/>
+          <a:lstStyle/>
+          <a:p>
+            <a:fld id="{F7021451-1387-4CA6-816F-3879F97B5CBC}" type="slidenum">
+              <a:rPr lang="en-US"/>
+              <a:t>36</a:t>
+            </a:fld>
+            <a:endParaRPr lang="en-US"/>
+          </a:p>
+        </p:txBody>
+      </p:sp>
+    </p:spTree>
+    <p:extLst>
+      <p:ext uri="{BB962C8B-B14F-4D97-AF65-F5344CB8AC3E}">
+        <p14:creationId xmlns:p14="http://schemas.microsoft.com/office/powerpoint/2010/main" val="1024086991"/>
+      </p:ext>
+    </p:extLst>
+  </p:cSld>
+  <p:clrMapOvr>
+    <a:masterClrMapping/>
+  </p:clrMapOvr>
+</p:notes>
+</file>
+
+<file path=ppt/notesSlides/notesSlide37.xml><?xml version="1.0" encoding="utf-8"?>
+<p:notes xmlns:a="http://schemas.openxmlformats.org/drawingml/2006/main" xmlns:r="http://schemas.openxmlformats.org/officeDocument/2006/relationships" xmlns:p="http://schemas.openxmlformats.org/presentationml/2006/main">
+  <p:cSld>
+    <p:spTree>
+      <p:nvGrpSpPr>
+        <p:cNvPr id="1" name=""/>
+        <p:cNvGrpSpPr/>
+        <p:nvPr/>
+      </p:nvGrpSpPr>
+      <p:grpSpPr>
+        <a:xfrm>
+          <a:off x="0" y="0"/>
+          <a:ext cx="0" cy="0"/>
+          <a:chOff x="0" y="0"/>
+          <a:chExt cx="0" cy="0"/>
+        </a:xfrm>
+      </p:grpSpPr>
+      <p:sp>
+        <p:nvSpPr>
+          <p:cNvPr id="2" name="Slide Image Placeholder 1"/>
+          <p:cNvSpPr>
+            <a:spLocks noGrp="1" noRot="1" noChangeAspect="1"/>
+          </p:cNvSpPr>
+          <p:nvPr>
+            <p:ph type="sldImg"/>
+          </p:nvPr>
+        </p:nvSpPr>
+        <p:spPr/>
+      </p:sp>
+      <p:sp>
+        <p:nvSpPr>
+          <p:cNvPr id="3" name="Notes Placeholder 2"/>
+          <p:cNvSpPr>
+            <a:spLocks noGrp="1"/>
+          </p:cNvSpPr>
+          <p:nvPr>
+            <p:ph type="body" idx="1"/>
+          </p:nvPr>
+        </p:nvSpPr>
+        <p:spPr/>
+        <p:txBody>
+          <a:bodyPr/>
+          <a:lstStyle/>
+          <a:p>
+            <a:r>
+              <a:rPr lang="en-US" dirty="0"/>
+              <a:t>Supports the OEM escalator assumption on Thesis 1a (2/4): matched catalogue parts rose a median 6.1–6.2% per year (2024–25 and 2025–26), with only 1 of ~3,400 matched parts falling.</a:t>
+            </a:r>
+            <a:endParaRPr lang="en-US" dirty="0"/>
+          </a:p>
+        </p:txBody>
+      </p:sp>
+      <p:sp>
+        <p:nvSpPr>
+          <p:cNvPr id="4" name="Slide Number Placeholder 3"/>
+          <p:cNvSpPr>
+            <a:spLocks noGrp="1"/>
+          </p:cNvSpPr>
+          <p:nvPr>
+            <p:ph type="sldNum" sz="quarter" idx="10"/>
+          </p:nvPr>
+        </p:nvSpPr>
+        <p:spPr/>
+        <p:txBody>
+          <a:bodyPr/>
+          <a:lstStyle/>
+          <a:p>
+            <a:fld id="{F7021451-1387-4CA6-816F-3879F97B5CBC}" type="slidenum">
+              <a:rPr lang="en-US"/>
+              <a:t>37</a:t>
             </a:fld>
             <a:endParaRPr lang="en-US"/>
           </a:p>
@@ -26136,6 +27044,422 @@
 </p:sld>
 </file>
 
+<file path=ppt/slides/slide28.xml><?xml version="1.0" encoding="utf-8"?>
+<p:sld xmlns:a="http://schemas.openxmlformats.org/drawingml/2006/main" xmlns:r="http://schemas.openxmlformats.org/officeDocument/2006/relationships" xmlns:p="http://schemas.openxmlformats.org/presentationml/2006/main">
+  <p:cSld name="Slide 28">
+    <p:spTree>
+      <p:nvGrpSpPr>
+        <p:cNvPr id="1" name=""/>
+        <p:cNvGrpSpPr/>
+        <p:nvPr/>
+      </p:nvGrpSpPr>
+      <p:grpSpPr>
+        <a:xfrm>
+          <a:off x="0" y="0"/>
+          <a:ext cx="0" cy="0"/>
+          <a:chOff x="0" y="0"/>
+          <a:chExt cx="0" cy="0"/>
+        </a:xfrm>
+      </p:grpSpPr>
+      <p:sp>
+        <p:nvSpPr>
+          <p:cNvPr id="2" name="Company name"/>
+          <p:cNvSpPr txBox="1"/>
+          <p:nvPr/>
+        </p:nvSpPr>
+        <p:spPr>
+          <a:xfrm>
+            <a:off x="548640" y="320040"/>
+            <a:ext cx="6400800" cy="1051560"/>
+          </a:xfrm>
+          <a:prstGeom prst="rect">
+            <a:avLst/>
+          </a:prstGeom>
+          <a:noFill/>
+          <a:ln/>
+        </p:spPr>
+        <p:txBody>
+          <a:bodyPr wrap="square" lIns="0" tIns="0" rIns="0" bIns="0" rtlCol="0" anchor="t"/>
+          <a:lstStyle/>
+          <a:p>
+            <a:pPr indent="0" marL="0">
+              <a:buNone/>
+            </a:pPr>
+            <a:r>
+              <a:rPr lang="en-US" sz="3000" b="1" dirty="0">
+                <a:solidFill>
+                  <a:schemeClr val="tx2"/>
+                </a:solidFill>
+              </a:rPr>
+              <a:t>FTAI Aviation</a:t>
+            </a:r>
+            <a:endParaRPr lang="en-US" sz="3000" dirty="0"/>
+          </a:p>
+          <a:p>
+            <a:pPr indent="0" marL="0">
+              <a:buNone/>
+            </a:pPr>
+            <a:r>
+              <a:rPr lang="en-US" sz="2600" dirty="0">
+                <a:solidFill>
+                  <a:schemeClr val="tx2"/>
+                </a:solidFill>
+              </a:rPr>
+              <a:t>(NASDAQ: FTAI)</a:t>
+            </a:r>
+            <a:endParaRPr lang="en-US" sz="3000" dirty="0"/>
+          </a:p>
+        </p:txBody>
+      </p:sp>
+      <p:sp>
+        <p:nvSpPr>
+          <p:cNvPr id="3" name="Cover label"/>
+          <p:cNvSpPr txBox="1"/>
+          <p:nvPr/>
+        </p:nvSpPr>
+        <p:spPr>
+          <a:xfrm>
+            <a:off x="548640" y="2926080"/>
+            <a:ext cx="8046720" cy="822960"/>
+          </a:xfrm>
+          <a:prstGeom prst="rect">
+            <a:avLst/>
+          </a:prstGeom>
+          <a:noFill/>
+          <a:ln/>
+        </p:spPr>
+        <p:txBody>
+          <a:bodyPr wrap="square" lIns="0" tIns="0" rIns="0" bIns="0" rtlCol="0" anchor="ctr"/>
+          <a:lstStyle/>
+          <a:p>
+            <a:pPr algn="ctr" indent="0" marL="0">
+              <a:buNone/>
+            </a:pPr>
+            <a:r>
+              <a:rPr lang="en-US" sz="4400" b="1" dirty="0">
+                <a:solidFill>
+                  <a:schemeClr val="tx2"/>
+                </a:solidFill>
+              </a:rPr>
+              <a:t>Q&amp;A</a:t>
+            </a:r>
+            <a:endParaRPr lang="en-US" sz="4400" dirty="0"/>
+          </a:p>
+        </p:txBody>
+      </p:sp>
+      <p:pic>
+        <p:nvPicPr>
+          <p:cNvPr id="4" name="GPS logo" descr="/home/user/SPOT/deck/gps_logo.jpeg">    </p:cNvPr>
+          <p:cNvPicPr>
+            <a:picLocks noChangeAspect="1"/>
+          </p:cNvPicPr>
+          <p:nvPr/>
+        </p:nvPicPr>
+        <p:blipFill>
+          <a:blip r:embed="rId1"/>
+          <a:stretch>
+            <a:fillRect/>
+          </a:stretch>
+        </p:blipFill>
+        <p:spPr>
+          <a:xfrm>
+            <a:off x="5897880" y="5532120"/>
+            <a:ext cx="1234440" cy="1133856"/>
+          </a:xfrm>
+          <a:prstGeom prst="rect">
+            <a:avLst/>
+          </a:prstGeom>
+        </p:spPr>
+      </p:pic>
+      <p:sp>
+        <p:nvSpPr>
+          <p:cNvPr id="5" name="Logo divider"/>
+          <p:cNvSpPr/>
+          <p:nvPr/>
+        </p:nvSpPr>
+        <p:spPr>
+          <a:xfrm>
+            <a:off x="7360920" y="5577840"/>
+            <a:ext cx="0" cy="1097280"/>
+          </a:xfrm>
+          <a:prstGeom prst="line">
+            <a:avLst/>
+          </a:prstGeom>
+          <a:noFill/>
+          <a:ln w="12700">
+            <a:solidFill>
+              <a:srgbClr val="847C7A"/>
+            </a:solidFill>
+            <a:prstDash val="solid"/>
+          </a:ln>
+        </p:spPr>
+      </p:sp>
+      <p:sp>
+        <p:nvSpPr>
+          <p:cNvPr id="6" name="Presenter"/>
+          <p:cNvSpPr txBox="1"/>
+          <p:nvPr/>
+        </p:nvSpPr>
+        <p:spPr>
+          <a:xfrm>
+            <a:off x="7452360" y="5669280"/>
+            <a:ext cx="1417320" cy="868680"/>
+          </a:xfrm>
+          <a:prstGeom prst="rect">
+            <a:avLst/>
+          </a:prstGeom>
+          <a:noFill/>
+          <a:ln/>
+        </p:spPr>
+        <p:txBody>
+          <a:bodyPr wrap="square" lIns="0" tIns="0" rIns="0" bIns="0" rtlCol="0" anchor="ctr"/>
+          <a:lstStyle/>
+          <a:p>
+            <a:pPr algn="ctr" indent="0" marL="0">
+              <a:buNone/>
+            </a:pPr>
+            <a:r>
+              <a:rPr lang="en-US" sz="1800" b="1" dirty="0">
+                <a:solidFill>
+                  <a:schemeClr val="accent2"/>
+                </a:solidFill>
+              </a:rPr>
+              <a:t>Presenter</a:t>
+            </a:r>
+            <a:endParaRPr lang="en-US" sz="1800" dirty="0"/>
+          </a:p>
+          <a:p>
+            <a:pPr algn="ctr" indent="0" marL="0">
+              <a:buNone/>
+            </a:pPr>
+            <a:r>
+              <a:rPr lang="en-US" sz="1800" b="1" dirty="0">
+                <a:solidFill>
+                  <a:schemeClr val="accent2"/>
+                </a:solidFill>
+              </a:rPr>
+              <a:t>Name</a:t>
+            </a:r>
+            <a:endParaRPr lang="en-US" sz="1800" dirty="0"/>
+          </a:p>
+        </p:txBody>
+      </p:sp>
+    </p:spTree>
+  </p:cSld>
+  <p:clrMapOvr>
+    <a:masterClrMapping/>
+  </p:clrMapOvr>
+</p:sld>
+</file>
+
+<file path=ppt/slides/slide29.xml><?xml version="1.0" encoding="utf-8"?>
+<p:sld xmlns:a="http://schemas.openxmlformats.org/drawingml/2006/main" xmlns:r="http://schemas.openxmlformats.org/officeDocument/2006/relationships" xmlns:p="http://schemas.openxmlformats.org/presentationml/2006/main">
+  <p:cSld name="Slide 29">
+    <p:spTree>
+      <p:nvGrpSpPr>
+        <p:cNvPr id="1" name=""/>
+        <p:cNvGrpSpPr/>
+        <p:nvPr/>
+      </p:nvGrpSpPr>
+      <p:grpSpPr>
+        <a:xfrm>
+          <a:off x="0" y="0"/>
+          <a:ext cx="0" cy="0"/>
+          <a:chOff x="0" y="0"/>
+          <a:chExt cx="0" cy="0"/>
+        </a:xfrm>
+      </p:grpSpPr>
+      <p:sp>
+        <p:nvSpPr>
+          <p:cNvPr id="2" name="Company name"/>
+          <p:cNvSpPr txBox="1"/>
+          <p:nvPr/>
+        </p:nvSpPr>
+        <p:spPr>
+          <a:xfrm>
+            <a:off x="548640" y="320040"/>
+            <a:ext cx="6400800" cy="1051560"/>
+          </a:xfrm>
+          <a:prstGeom prst="rect">
+            <a:avLst/>
+          </a:prstGeom>
+          <a:noFill/>
+          <a:ln/>
+        </p:spPr>
+        <p:txBody>
+          <a:bodyPr wrap="square" lIns="0" tIns="0" rIns="0" bIns="0" rtlCol="0" anchor="t"/>
+          <a:lstStyle/>
+          <a:p>
+            <a:pPr indent="0" marL="0">
+              <a:buNone/>
+            </a:pPr>
+            <a:r>
+              <a:rPr lang="en-US" sz="3000" b="1" dirty="0">
+                <a:solidFill>
+                  <a:schemeClr val="tx2"/>
+                </a:solidFill>
+              </a:rPr>
+              <a:t>FTAI Aviation</a:t>
+            </a:r>
+            <a:endParaRPr lang="en-US" sz="3000" dirty="0"/>
+          </a:p>
+          <a:p>
+            <a:pPr indent="0" marL="0">
+              <a:buNone/>
+            </a:pPr>
+            <a:r>
+              <a:rPr lang="en-US" sz="2600" dirty="0">
+                <a:solidFill>
+                  <a:schemeClr val="tx2"/>
+                </a:solidFill>
+              </a:rPr>
+              <a:t>(NASDAQ: FTAI)</a:t>
+            </a:r>
+            <a:endParaRPr lang="en-US" sz="3000" dirty="0"/>
+          </a:p>
+        </p:txBody>
+      </p:sp>
+      <p:sp>
+        <p:nvSpPr>
+          <p:cNvPr id="3" name="Cover label"/>
+          <p:cNvSpPr txBox="1"/>
+          <p:nvPr/>
+        </p:nvSpPr>
+        <p:spPr>
+          <a:xfrm>
+            <a:off x="548640" y="2926080"/>
+            <a:ext cx="8046720" cy="822960"/>
+          </a:xfrm>
+          <a:prstGeom prst="rect">
+            <a:avLst/>
+          </a:prstGeom>
+          <a:noFill/>
+          <a:ln/>
+        </p:spPr>
+        <p:txBody>
+          <a:bodyPr wrap="square" lIns="0" tIns="0" rIns="0" bIns="0" rtlCol="0" anchor="ctr"/>
+          <a:lstStyle/>
+          <a:p>
+            <a:pPr algn="ctr" indent="0" marL="0">
+              <a:buNone/>
+            </a:pPr>
+            <a:r>
+              <a:rPr lang="en-US" sz="4400" b="1" dirty="0">
+                <a:solidFill>
+                  <a:schemeClr val="tx2"/>
+                </a:solidFill>
+              </a:rPr>
+              <a:t>Appendix</a:t>
+            </a:r>
+            <a:endParaRPr lang="en-US" sz="4400" dirty="0"/>
+          </a:p>
+        </p:txBody>
+      </p:sp>
+      <p:pic>
+        <p:nvPicPr>
+          <p:cNvPr id="4" name="GPS logo" descr="/home/user/SPOT/deck/gps_logo.jpeg">    </p:cNvPr>
+          <p:cNvPicPr>
+            <a:picLocks noChangeAspect="1"/>
+          </p:cNvPicPr>
+          <p:nvPr/>
+        </p:nvPicPr>
+        <p:blipFill>
+          <a:blip r:embed="rId1"/>
+          <a:stretch>
+            <a:fillRect/>
+          </a:stretch>
+        </p:blipFill>
+        <p:spPr>
+          <a:xfrm>
+            <a:off x="5897880" y="5532120"/>
+            <a:ext cx="1234440" cy="1133856"/>
+          </a:xfrm>
+          <a:prstGeom prst="rect">
+            <a:avLst/>
+          </a:prstGeom>
+        </p:spPr>
+      </p:pic>
+      <p:sp>
+        <p:nvSpPr>
+          <p:cNvPr id="5" name="Logo divider"/>
+          <p:cNvSpPr/>
+          <p:nvPr/>
+        </p:nvSpPr>
+        <p:spPr>
+          <a:xfrm>
+            <a:off x="7360920" y="5577840"/>
+            <a:ext cx="0" cy="1097280"/>
+          </a:xfrm>
+          <a:prstGeom prst="line">
+            <a:avLst/>
+          </a:prstGeom>
+          <a:noFill/>
+          <a:ln w="12700">
+            <a:solidFill>
+              <a:srgbClr val="847C7A"/>
+            </a:solidFill>
+            <a:prstDash val="solid"/>
+          </a:ln>
+        </p:spPr>
+      </p:sp>
+      <p:sp>
+        <p:nvSpPr>
+          <p:cNvPr id="6" name="Presenter"/>
+          <p:cNvSpPr txBox="1"/>
+          <p:nvPr/>
+        </p:nvSpPr>
+        <p:spPr>
+          <a:xfrm>
+            <a:off x="7452360" y="5669280"/>
+            <a:ext cx="1417320" cy="868680"/>
+          </a:xfrm>
+          <a:prstGeom prst="rect">
+            <a:avLst/>
+          </a:prstGeom>
+          <a:noFill/>
+          <a:ln/>
+        </p:spPr>
+        <p:txBody>
+          <a:bodyPr wrap="square" lIns="0" tIns="0" rIns="0" bIns="0" rtlCol="0" anchor="ctr"/>
+          <a:lstStyle/>
+          <a:p>
+            <a:pPr algn="ctr" indent="0" marL="0">
+              <a:buNone/>
+            </a:pPr>
+            <a:r>
+              <a:rPr lang="en-US" sz="1800" b="1" dirty="0">
+                <a:solidFill>
+                  <a:schemeClr val="accent2"/>
+                </a:solidFill>
+              </a:rPr>
+              <a:t>Presenter</a:t>
+            </a:r>
+            <a:endParaRPr lang="en-US" sz="1800" dirty="0"/>
+          </a:p>
+          <a:p>
+            <a:pPr algn="ctr" indent="0" marL="0">
+              <a:buNone/>
+            </a:pPr>
+            <a:r>
+              <a:rPr lang="en-US" sz="1800" b="1" dirty="0">
+                <a:solidFill>
+                  <a:schemeClr val="accent2"/>
+                </a:solidFill>
+              </a:rPr>
+              <a:t>Name</a:t>
+            </a:r>
+            <a:endParaRPr lang="en-US" sz="1800" dirty="0"/>
+          </a:p>
+        </p:txBody>
+      </p:sp>
+    </p:spTree>
+  </p:cSld>
+  <p:clrMapOvr>
+    <a:masterClrMapping/>
+  </p:clrMapOvr>
+</p:sld>
+</file>
+
 <file path=ppt/slides/slide3.xml><?xml version="1.0" encoding="utf-8"?>
 <p:sld xmlns:a="http://schemas.openxmlformats.org/drawingml/2006/main" xmlns:r="http://schemas.openxmlformats.org/officeDocument/2006/relationships" xmlns:p="http://schemas.openxmlformats.org/presentationml/2006/main">
   <p:cSld name="Slide 3">
@@ -26704,6 +28028,1524 @@
             <a:fld id="{F7021451-1387-4CA6-816F-3879F97B5CBC}" type="slidenum">
               <a:rPr b="1" lang="en-US"/>
               <a:t>3</a:t>
+            </a:fld>
+            <a:endParaRPr lang="en-US"/>
+          </a:p>
+        </p:txBody>
+      </p:sp>
+    </p:spTree>
+  </p:cSld>
+  <p:clrMapOvr>
+    <a:masterClrMapping/>
+  </p:clrMapOvr>
+</p:sld>
+</file>
+
+<file path=ppt/slides/slide30.xml><?xml version="1.0" encoding="utf-8"?>
+<p:sld xmlns:a="http://schemas.openxmlformats.org/drawingml/2006/main" xmlns:r="http://schemas.openxmlformats.org/officeDocument/2006/relationships" xmlns:p="http://schemas.openxmlformats.org/presentationml/2006/main">
+  <p:cSld name="Slide 30">
+    <p:spTree>
+      <p:nvGrpSpPr>
+        <p:cNvPr id="1" name=""/>
+        <p:cNvGrpSpPr/>
+        <p:nvPr/>
+      </p:nvGrpSpPr>
+      <p:grpSpPr>
+        <a:xfrm>
+          <a:off x="0" y="0"/>
+          <a:ext cx="0" cy="0"/>
+          <a:chOff x="0" y="0"/>
+          <a:chExt cx="0" cy="0"/>
+        </a:xfrm>
+      </p:grpSpPr>
+      <p:sp>
+        <p:nvSpPr>
+          <p:cNvPr id="2" name="Text 1"/>
+          <p:cNvSpPr/>
+          <p:nvPr>
+            <p:ph idx="102" type="title" hasCustomPrompt="1"/>
+          </p:nvPr>
+        </p:nvSpPr>
+        <p:spPr>
+          <a:xfrm>
+            <a:off x="320040" y="182880"/>
+            <a:ext cx="8503920" cy="640080"/>
+          </a:xfrm>
+          <a:prstGeom prst="rect">
+            <a:avLst/>
+          </a:prstGeom>
+          <a:noFill/>
+          <a:ln/>
+        </p:spPr>
+        <p:txBody>
+          <a:bodyPr wrap="square" lIns="0" tIns="0" rIns="0" bIns="0" rtlCol="0" anchor="ctr"/>
+          <a:lstStyle/>
+          <a:p>
+            <a:pPr algn="l" indent="0" marL="0">
+              <a:buNone/>
+            </a:pPr>
+            <a:r>
+              <a:rPr lang="en-US" sz="3200" b="1" dirty="0">
+                <a:solidFill>
+                  <a:schemeClr val="tx2"/>
+                </a:solidFill>
+              </a:rPr>
+              <a:t>Appendix: DCF (1/2)</a:t>
+            </a:r>
+            <a:endParaRPr lang="en-US" sz="3200" dirty="0"/>
+          </a:p>
+        </p:txBody>
+      </p:sp>
+      <p:pic>
+        <p:nvPicPr>
+          <p:cNvPr id="3" name="PV bridge" descr="/home/user/SPOT/deck/img/app_pv.png">    </p:cNvPr>
+          <p:cNvPicPr>
+            <a:picLocks noChangeAspect="1"/>
+          </p:cNvPicPr>
+          <p:nvPr/>
+        </p:nvPicPr>
+        <p:blipFill>
+          <a:blip r:embed="rId1"/>
+          <a:stretch>
+            <a:fillRect/>
+          </a:stretch>
+        </p:blipFill>
+        <p:spPr>
+          <a:xfrm>
+            <a:off x="320040" y="1188720"/>
+            <a:ext cx="8503920" cy="1907905"/>
+          </a:xfrm>
+          <a:prstGeom prst="rect">
+            <a:avLst/>
+          </a:prstGeom>
+        </p:spPr>
+      </p:pic>
+      <p:pic>
+        <p:nvPicPr>
+          <p:cNvPr id="4" name="Blended valuation" descr="/home/user/SPOT/deck/img/app_blend.png">    </p:cNvPr>
+          <p:cNvPicPr>
+            <a:picLocks noChangeAspect="1"/>
+          </p:cNvPicPr>
+          <p:nvPr/>
+        </p:nvPicPr>
+        <p:blipFill>
+          <a:blip r:embed="rId2"/>
+          <a:stretch>
+            <a:fillRect/>
+          </a:stretch>
+        </p:blipFill>
+        <p:spPr>
+          <a:xfrm>
+            <a:off x="1143000" y="3657600"/>
+            <a:ext cx="6858000" cy="1403968"/>
+          </a:xfrm>
+          <a:prstGeom prst="rect">
+            <a:avLst/>
+          </a:prstGeom>
+        </p:spPr>
+      </p:pic>
+      <p:sp>
+        <p:nvSpPr>
+          <p:cNvPr id="5" name="Source"/>
+          <p:cNvSpPr txBox="1"/>
+          <p:nvPr/>
+        </p:nvSpPr>
+        <p:spPr>
+          <a:xfrm>
+            <a:off x="320040" y="6355080"/>
+            <a:ext cx="7132320" cy="274320"/>
+          </a:xfrm>
+          <a:prstGeom prst="rect">
+            <a:avLst/>
+          </a:prstGeom>
+          <a:noFill/>
+          <a:ln/>
+        </p:spPr>
+        <p:txBody>
+          <a:bodyPr wrap="square" lIns="0" tIns="0" rIns="0" bIns="0" rtlCol="0" anchor="ctr"/>
+          <a:lstStyle/>
+          <a:p>
+            <a:pPr indent="0" marL="0">
+              <a:buNone/>
+            </a:pPr>
+            <a:r>
+              <a:rPr lang="en-US" sz="1100" b="1" dirty="0">
+                <a:solidFill>
+                  <a:srgbClr val="1A1A1A"/>
+                </a:solidFill>
+              </a:rPr>
+              <a:t>Source: </a:t>
+            </a:r>
+            <a:pPr indent="0" marL="0">
+              <a:buNone/>
+            </a:pPr>
+            <a:r>
+              <a:rPr lang="en-US" sz="1100" dirty="0">
+                <a:solidFill>
+                  <a:srgbClr val="1A1A1A"/>
+                </a:solidFill>
+              </a:rPr>
+              <a:t>GPS model (DCF tab), base case</a:t>
+            </a:r>
+            <a:endParaRPr lang="en-US" sz="1100" dirty="0"/>
+          </a:p>
+        </p:txBody>
+      </p:sp>
+      <p:sp>
+        <p:nvSpPr>
+          <p:cNvPr id="25" name="Slide Number Placeholder 0"/>
+          <p:cNvSpPr>
+            <a:spLocks noGrp="1"/>
+          </p:cNvSpPr>
+          <p:nvPr>
+            <p:ph type="sldNum" sz="quarter" idx="4294967295"/>
+          </p:nvPr>
+        </p:nvSpPr>
+        <p:spPr>
+          <a:xfrm>
+            <a:off x="7635240" y="6327648"/>
+            <a:ext cx="411480" cy="274320"/>
+          </a:xfrm>
+          <a:prstGeom prst="rect">
+            <a:avLst/>
+          </a:prstGeom>
+          <a:extLst>
+            <a:ext uri="{C572A759-6A51-4108-AA02-DFA0A04FC94B}">
+              <ma14:wrappingTextBoxFlag xmlns:ma14="http://schemas.microsoft.com/office/mac/drawingml/2011/main" val="0"/>
+            </a:ext>
+          </a:extLst>
+        </p:spPr>
+        <p:txBody>
+          <a:bodyPr/>
+          <a:lstStyle>
+            <a:lvl1pPr>
+              <a:defRPr sz="1100">
+                <a:solidFill>
+                  <a:srgbClr val="1A1A1A"/>
+                </a:solidFill>
+              </a:defRPr>
+            </a:lvl1pPr>
+          </a:lstStyle>
+          <a:p>
+            <a:pPr algn="r"/>
+            <a:fld id="{F7021451-1387-4CA6-816F-3879F97B5CBC}" type="slidenum">
+              <a:rPr b="1" lang="en-US"/>
+              <a:t>30</a:t>
+            </a:fld>
+            <a:endParaRPr lang="en-US"/>
+          </a:p>
+        </p:txBody>
+      </p:sp>
+    </p:spTree>
+  </p:cSld>
+  <p:clrMapOvr>
+    <a:masterClrMapping/>
+  </p:clrMapOvr>
+</p:sld>
+</file>
+
+<file path=ppt/slides/slide31.xml><?xml version="1.0" encoding="utf-8"?>
+<p:sld xmlns:a="http://schemas.openxmlformats.org/drawingml/2006/main" xmlns:r="http://schemas.openxmlformats.org/officeDocument/2006/relationships" xmlns:p="http://schemas.openxmlformats.org/presentationml/2006/main">
+  <p:cSld name="Slide 31">
+    <p:spTree>
+      <p:nvGrpSpPr>
+        <p:cNvPr id="1" name=""/>
+        <p:cNvGrpSpPr/>
+        <p:nvPr/>
+      </p:nvGrpSpPr>
+      <p:grpSpPr>
+        <a:xfrm>
+          <a:off x="0" y="0"/>
+          <a:ext cx="0" cy="0"/>
+          <a:chOff x="0" y="0"/>
+          <a:chExt cx="0" cy="0"/>
+        </a:xfrm>
+      </p:grpSpPr>
+      <p:sp>
+        <p:nvSpPr>
+          <p:cNvPr id="2" name="Text 1"/>
+          <p:cNvSpPr/>
+          <p:nvPr>
+            <p:ph idx="102" type="title" hasCustomPrompt="1"/>
+          </p:nvPr>
+        </p:nvSpPr>
+        <p:spPr>
+          <a:xfrm>
+            <a:off x="320040" y="182880"/>
+            <a:ext cx="8503920" cy="640080"/>
+          </a:xfrm>
+          <a:prstGeom prst="rect">
+            <a:avLst/>
+          </a:prstGeom>
+          <a:noFill/>
+          <a:ln/>
+        </p:spPr>
+        <p:txBody>
+          <a:bodyPr wrap="square" lIns="0" tIns="0" rIns="0" bIns="0" rtlCol="0" anchor="ctr"/>
+          <a:lstStyle/>
+          <a:p>
+            <a:pPr algn="l" indent="0" marL="0">
+              <a:buNone/>
+            </a:pPr>
+            <a:r>
+              <a:rPr lang="en-US" sz="3200" b="1" dirty="0">
+                <a:solidFill>
+                  <a:schemeClr val="tx2"/>
+                </a:solidFill>
+              </a:rPr>
+              <a:t>Appendix: DCF (2/2)</a:t>
+            </a:r>
+            <a:endParaRPr lang="en-US" sz="3200" dirty="0"/>
+          </a:p>
+        </p:txBody>
+      </p:sp>
+      <p:pic>
+        <p:nvPicPr>
+          <p:cNvPr id="3" name="Valuation methods" descr="/home/user/SPOT/deck/img/app_methods.png">    </p:cNvPr>
+          <p:cNvPicPr>
+            <a:picLocks noChangeAspect="1"/>
+          </p:cNvPicPr>
+          <p:nvPr/>
+        </p:nvPicPr>
+        <p:blipFill>
+          <a:blip r:embed="rId1"/>
+          <a:stretch>
+            <a:fillRect/>
+          </a:stretch>
+        </p:blipFill>
+        <p:spPr>
+          <a:xfrm>
+            <a:off x="685800" y="1097280"/>
+            <a:ext cx="7772400" cy="4071475"/>
+          </a:xfrm>
+          <a:prstGeom prst="rect">
+            <a:avLst/>
+          </a:prstGeom>
+        </p:spPr>
+      </p:pic>
+      <p:sp>
+        <p:nvSpPr>
+          <p:cNvPr id="4" name="Source"/>
+          <p:cNvSpPr txBox="1"/>
+          <p:nvPr/>
+        </p:nvSpPr>
+        <p:spPr>
+          <a:xfrm>
+            <a:off x="320040" y="6355080"/>
+            <a:ext cx="7132320" cy="274320"/>
+          </a:xfrm>
+          <a:prstGeom prst="rect">
+            <a:avLst/>
+          </a:prstGeom>
+          <a:noFill/>
+          <a:ln/>
+        </p:spPr>
+        <p:txBody>
+          <a:bodyPr wrap="square" lIns="0" tIns="0" rIns="0" bIns="0" rtlCol="0" anchor="ctr"/>
+          <a:lstStyle/>
+          <a:p>
+            <a:pPr indent="0" marL="0">
+              <a:buNone/>
+            </a:pPr>
+            <a:r>
+              <a:rPr lang="en-US" sz="1100" b="1" dirty="0">
+                <a:solidFill>
+                  <a:srgbClr val="1A1A1A"/>
+                </a:solidFill>
+              </a:rPr>
+              <a:t>Source: </a:t>
+            </a:r>
+            <a:pPr indent="0" marL="0">
+              <a:buNone/>
+            </a:pPr>
+            <a:r>
+              <a:rPr lang="en-US" sz="1100" dirty="0">
+                <a:solidFill>
+                  <a:srgbClr val="1A1A1A"/>
+                </a:solidFill>
+              </a:rPr>
+              <a:t>GPS model (DCF tab), base case</a:t>
+            </a:r>
+            <a:endParaRPr lang="en-US" sz="1100" dirty="0"/>
+          </a:p>
+        </p:txBody>
+      </p:sp>
+      <p:sp>
+        <p:nvSpPr>
+          <p:cNvPr id="25" name="Slide Number Placeholder 0"/>
+          <p:cNvSpPr>
+            <a:spLocks noGrp="1"/>
+          </p:cNvSpPr>
+          <p:nvPr>
+            <p:ph type="sldNum" sz="quarter" idx="4294967295"/>
+          </p:nvPr>
+        </p:nvSpPr>
+        <p:spPr>
+          <a:xfrm>
+            <a:off x="7635240" y="6327648"/>
+            <a:ext cx="411480" cy="274320"/>
+          </a:xfrm>
+          <a:prstGeom prst="rect">
+            <a:avLst/>
+          </a:prstGeom>
+          <a:extLst>
+            <a:ext uri="{C572A759-6A51-4108-AA02-DFA0A04FC94B}">
+              <ma14:wrappingTextBoxFlag xmlns:ma14="http://schemas.microsoft.com/office/mac/drawingml/2011/main" val="0"/>
+            </a:ext>
+          </a:extLst>
+        </p:spPr>
+        <p:txBody>
+          <a:bodyPr/>
+          <a:lstStyle>
+            <a:lvl1pPr>
+              <a:defRPr sz="1100">
+                <a:solidFill>
+                  <a:srgbClr val="1A1A1A"/>
+                </a:solidFill>
+              </a:defRPr>
+            </a:lvl1pPr>
+          </a:lstStyle>
+          <a:p>
+            <a:pPr algn="r"/>
+            <a:fld id="{F7021451-1387-4CA6-816F-3879F97B5CBC}" type="slidenum">
+              <a:rPr b="1" lang="en-US"/>
+              <a:t>31</a:t>
+            </a:fld>
+            <a:endParaRPr lang="en-US"/>
+          </a:p>
+        </p:txBody>
+      </p:sp>
+    </p:spTree>
+  </p:cSld>
+  <p:clrMapOvr>
+    <a:masterClrMapping/>
+  </p:clrMapOvr>
+</p:sld>
+</file>
+
+<file path=ppt/slides/slide32.xml><?xml version="1.0" encoding="utf-8"?>
+<p:sld xmlns:a="http://schemas.openxmlformats.org/drawingml/2006/main" xmlns:r="http://schemas.openxmlformats.org/officeDocument/2006/relationships" xmlns:p="http://schemas.openxmlformats.org/presentationml/2006/main">
+  <p:cSld name="Slide 32">
+    <p:spTree>
+      <p:nvGrpSpPr>
+        <p:cNvPr id="1" name=""/>
+        <p:cNvGrpSpPr/>
+        <p:nvPr/>
+      </p:nvGrpSpPr>
+      <p:grpSpPr>
+        <a:xfrm>
+          <a:off x="0" y="0"/>
+          <a:ext cx="0" cy="0"/>
+          <a:chOff x="0" y="0"/>
+          <a:chExt cx="0" cy="0"/>
+        </a:xfrm>
+      </p:grpSpPr>
+      <p:sp>
+        <p:nvSpPr>
+          <p:cNvPr id="2" name="Text 1"/>
+          <p:cNvSpPr/>
+          <p:nvPr>
+            <p:ph idx="102" type="title" hasCustomPrompt="1"/>
+          </p:nvPr>
+        </p:nvSpPr>
+        <p:spPr>
+          <a:xfrm>
+            <a:off x="320040" y="182880"/>
+            <a:ext cx="8503920" cy="640080"/>
+          </a:xfrm>
+          <a:prstGeom prst="rect">
+            <a:avLst/>
+          </a:prstGeom>
+          <a:noFill/>
+          <a:ln/>
+        </p:spPr>
+        <p:txBody>
+          <a:bodyPr wrap="square" lIns="0" tIns="0" rIns="0" bIns="0" rtlCol="0" anchor="ctr"/>
+          <a:lstStyle/>
+          <a:p>
+            <a:pPr algn="l" indent="0" marL="0">
+              <a:buNone/>
+            </a:pPr>
+            <a:r>
+              <a:rPr lang="en-US" sz="3200" b="1" dirty="0">
+                <a:solidFill>
+                  <a:schemeClr val="tx2"/>
+                </a:solidFill>
+              </a:rPr>
+              <a:t>Appendix: DCF Sensitivities</a:t>
+            </a:r>
+            <a:endParaRPr lang="en-US" sz="3200" dirty="0"/>
+          </a:p>
+        </p:txBody>
+      </p:sp>
+      <p:pic>
+        <p:nvPicPr>
+          <p:cNvPr id="3" name="Sensitivity tables" descr="/home/user/SPOT/deck/img/app_sens.png">    </p:cNvPr>
+          <p:cNvPicPr>
+            <a:picLocks noChangeAspect="1"/>
+          </p:cNvPicPr>
+          <p:nvPr/>
+        </p:nvPicPr>
+        <p:blipFill>
+          <a:blip r:embed="rId1"/>
+          <a:stretch>
+            <a:fillRect/>
+          </a:stretch>
+        </p:blipFill>
+        <p:spPr>
+          <a:xfrm>
+            <a:off x="1188720" y="1097280"/>
+            <a:ext cx="6766560" cy="4127018"/>
+          </a:xfrm>
+          <a:prstGeom prst="rect">
+            <a:avLst/>
+          </a:prstGeom>
+        </p:spPr>
+      </p:pic>
+      <p:sp>
+        <p:nvSpPr>
+          <p:cNvPr id="4" name="Source"/>
+          <p:cNvSpPr txBox="1"/>
+          <p:nvPr/>
+        </p:nvSpPr>
+        <p:spPr>
+          <a:xfrm>
+            <a:off x="320040" y="6355080"/>
+            <a:ext cx="7132320" cy="274320"/>
+          </a:xfrm>
+          <a:prstGeom prst="rect">
+            <a:avLst/>
+          </a:prstGeom>
+          <a:noFill/>
+          <a:ln/>
+        </p:spPr>
+        <p:txBody>
+          <a:bodyPr wrap="square" lIns="0" tIns="0" rIns="0" bIns="0" rtlCol="0" anchor="ctr"/>
+          <a:lstStyle/>
+          <a:p>
+            <a:pPr indent="0" marL="0">
+              <a:buNone/>
+            </a:pPr>
+            <a:r>
+              <a:rPr lang="en-US" sz="1100" b="1" dirty="0">
+                <a:solidFill>
+                  <a:srgbClr val="1A1A1A"/>
+                </a:solidFill>
+              </a:rPr>
+              <a:t>Source: </a:t>
+            </a:r>
+            <a:pPr indent="0" marL="0">
+              <a:buNone/>
+            </a:pPr>
+            <a:r>
+              <a:rPr lang="en-US" sz="1100" dirty="0">
+                <a:solidFill>
+                  <a:srgbClr val="1A1A1A"/>
+                </a:solidFill>
+              </a:rPr>
+              <a:t>GPS model (DCF tab): implied share price by WACC, terminal growth and exit multiple</a:t>
+            </a:r>
+            <a:endParaRPr lang="en-US" sz="1100" dirty="0"/>
+          </a:p>
+        </p:txBody>
+      </p:sp>
+      <p:sp>
+        <p:nvSpPr>
+          <p:cNvPr id="25" name="Slide Number Placeholder 0"/>
+          <p:cNvSpPr>
+            <a:spLocks noGrp="1"/>
+          </p:cNvSpPr>
+          <p:nvPr>
+            <p:ph type="sldNum" sz="quarter" idx="4294967295"/>
+          </p:nvPr>
+        </p:nvSpPr>
+        <p:spPr>
+          <a:xfrm>
+            <a:off x="7635240" y="6327648"/>
+            <a:ext cx="411480" cy="274320"/>
+          </a:xfrm>
+          <a:prstGeom prst="rect">
+            <a:avLst/>
+          </a:prstGeom>
+          <a:extLst>
+            <a:ext uri="{C572A759-6A51-4108-AA02-DFA0A04FC94B}">
+              <ma14:wrappingTextBoxFlag xmlns:ma14="http://schemas.microsoft.com/office/mac/drawingml/2011/main" val="0"/>
+            </a:ext>
+          </a:extLst>
+        </p:spPr>
+        <p:txBody>
+          <a:bodyPr/>
+          <a:lstStyle>
+            <a:lvl1pPr>
+              <a:defRPr sz="1100">
+                <a:solidFill>
+                  <a:srgbClr val="1A1A1A"/>
+                </a:solidFill>
+              </a:defRPr>
+            </a:lvl1pPr>
+          </a:lstStyle>
+          <a:p>
+            <a:pPr algn="r"/>
+            <a:fld id="{F7021451-1387-4CA6-816F-3879F97B5CBC}" type="slidenum">
+              <a:rPr b="1" lang="en-US"/>
+              <a:t>32</a:t>
+            </a:fld>
+            <a:endParaRPr lang="en-US"/>
+          </a:p>
+        </p:txBody>
+      </p:sp>
+    </p:spTree>
+  </p:cSld>
+  <p:clrMapOvr>
+    <a:masterClrMapping/>
+  </p:clrMapOvr>
+</p:sld>
+</file>
+
+<file path=ppt/slides/slide33.xml><?xml version="1.0" encoding="utf-8"?>
+<p:sld xmlns:a="http://schemas.openxmlformats.org/drawingml/2006/main" xmlns:r="http://schemas.openxmlformats.org/officeDocument/2006/relationships" xmlns:p="http://schemas.openxmlformats.org/presentationml/2006/main">
+  <p:cSld name="Slide 33">
+    <p:spTree>
+      <p:nvGrpSpPr>
+        <p:cNvPr id="1" name=""/>
+        <p:cNvGrpSpPr/>
+        <p:nvPr/>
+      </p:nvGrpSpPr>
+      <p:grpSpPr>
+        <a:xfrm>
+          <a:off x="0" y="0"/>
+          <a:ext cx="0" cy="0"/>
+          <a:chOff x="0" y="0"/>
+          <a:chExt cx="0" cy="0"/>
+        </a:xfrm>
+      </p:grpSpPr>
+      <p:sp>
+        <p:nvSpPr>
+          <p:cNvPr id="2" name="Text 1"/>
+          <p:cNvSpPr/>
+          <p:nvPr>
+            <p:ph idx="102" type="title" hasCustomPrompt="1"/>
+          </p:nvPr>
+        </p:nvSpPr>
+        <p:spPr>
+          <a:xfrm>
+            <a:off x="320040" y="182880"/>
+            <a:ext cx="8503920" cy="640080"/>
+          </a:xfrm>
+          <a:prstGeom prst="rect">
+            <a:avLst/>
+          </a:prstGeom>
+          <a:noFill/>
+          <a:ln/>
+        </p:spPr>
+        <p:txBody>
+          <a:bodyPr wrap="square" lIns="0" tIns="0" rIns="0" bIns="0" rtlCol="0" anchor="ctr"/>
+          <a:lstStyle/>
+          <a:p>
+            <a:pPr algn="l" indent="0" marL="0">
+              <a:buNone/>
+            </a:pPr>
+            <a:r>
+              <a:rPr lang="en-US" sz="3200" b="1" dirty="0">
+                <a:solidFill>
+                  <a:schemeClr val="tx2"/>
+                </a:solidFill>
+              </a:rPr>
+              <a:t>Appendix: Sum of the Parts</a:t>
+            </a:r>
+            <a:endParaRPr lang="en-US" sz="3200" dirty="0"/>
+          </a:p>
+        </p:txBody>
+      </p:sp>
+      <p:pic>
+        <p:nvPicPr>
+          <p:cNvPr id="3" name="SOTP table" descr="/home/user/SPOT/deck/img/app_sotp.png">    </p:cNvPr>
+          <p:cNvPicPr>
+            <a:picLocks noChangeAspect="1"/>
+          </p:cNvPicPr>
+          <p:nvPr/>
+        </p:nvPicPr>
+        <p:blipFill>
+          <a:blip r:embed="rId1"/>
+          <a:stretch>
+            <a:fillRect/>
+          </a:stretch>
+        </p:blipFill>
+        <p:spPr>
+          <a:xfrm>
+            <a:off x="685800" y="1188720"/>
+            <a:ext cx="7772400" cy="3134568"/>
+          </a:xfrm>
+          <a:prstGeom prst="rect">
+            <a:avLst/>
+          </a:prstGeom>
+        </p:spPr>
+      </p:pic>
+      <p:sp>
+        <p:nvSpPr>
+          <p:cNvPr id="4" name="Source"/>
+          <p:cNvSpPr txBox="1"/>
+          <p:nvPr/>
+        </p:nvSpPr>
+        <p:spPr>
+          <a:xfrm>
+            <a:off x="320040" y="6355080"/>
+            <a:ext cx="7132320" cy="274320"/>
+          </a:xfrm>
+          <a:prstGeom prst="rect">
+            <a:avLst/>
+          </a:prstGeom>
+          <a:noFill/>
+          <a:ln/>
+        </p:spPr>
+        <p:txBody>
+          <a:bodyPr wrap="square" lIns="0" tIns="0" rIns="0" bIns="0" rtlCol="0" anchor="ctr"/>
+          <a:lstStyle/>
+          <a:p>
+            <a:pPr indent="0" marL="0">
+              <a:buNone/>
+            </a:pPr>
+            <a:r>
+              <a:rPr lang="en-US" sz="1100" b="1" dirty="0">
+                <a:solidFill>
+                  <a:srgbClr val="1A1A1A"/>
+                </a:solidFill>
+              </a:rPr>
+              <a:t>Source: </a:t>
+            </a:r>
+            <a:pPr indent="0" marL="0">
+              <a:buNone/>
+            </a:pPr>
+            <a:r>
+              <a:rPr lang="en-US" sz="1100" dirty="0">
+                <a:solidFill>
+                  <a:srgbClr val="1A1A1A"/>
+                </a:solidFill>
+              </a:rPr>
+              <a:t>GPS model (DCF tab): FY27E SOTP</a:t>
+            </a:r>
+            <a:endParaRPr lang="en-US" sz="1100" dirty="0"/>
+          </a:p>
+        </p:txBody>
+      </p:sp>
+      <p:sp>
+        <p:nvSpPr>
+          <p:cNvPr id="25" name="Slide Number Placeholder 0"/>
+          <p:cNvSpPr>
+            <a:spLocks noGrp="1"/>
+          </p:cNvSpPr>
+          <p:nvPr>
+            <p:ph type="sldNum" sz="quarter" idx="4294967295"/>
+          </p:nvPr>
+        </p:nvSpPr>
+        <p:spPr>
+          <a:xfrm>
+            <a:off x="7635240" y="6327648"/>
+            <a:ext cx="411480" cy="274320"/>
+          </a:xfrm>
+          <a:prstGeom prst="rect">
+            <a:avLst/>
+          </a:prstGeom>
+          <a:extLst>
+            <a:ext uri="{C572A759-6A51-4108-AA02-DFA0A04FC94B}">
+              <ma14:wrappingTextBoxFlag xmlns:ma14="http://schemas.microsoft.com/office/mac/drawingml/2011/main" val="0"/>
+            </a:ext>
+          </a:extLst>
+        </p:spPr>
+        <p:txBody>
+          <a:bodyPr/>
+          <a:lstStyle>
+            <a:lvl1pPr>
+              <a:defRPr sz="1100">
+                <a:solidFill>
+                  <a:srgbClr val="1A1A1A"/>
+                </a:solidFill>
+              </a:defRPr>
+            </a:lvl1pPr>
+          </a:lstStyle>
+          <a:p>
+            <a:pPr algn="r"/>
+            <a:fld id="{F7021451-1387-4CA6-816F-3879F97B5CBC}" type="slidenum">
+              <a:rPr b="1" lang="en-US"/>
+              <a:t>33</a:t>
+            </a:fld>
+            <a:endParaRPr lang="en-US"/>
+          </a:p>
+        </p:txBody>
+      </p:sp>
+    </p:spTree>
+  </p:cSld>
+  <p:clrMapOvr>
+    <a:masterClrMapping/>
+  </p:clrMapOvr>
+</p:sld>
+</file>
+
+<file path=ppt/slides/slide34.xml><?xml version="1.0" encoding="utf-8"?>
+<p:sld xmlns:a="http://schemas.openxmlformats.org/drawingml/2006/main" xmlns:r="http://schemas.openxmlformats.org/officeDocument/2006/relationships" xmlns:p="http://schemas.openxmlformats.org/presentationml/2006/main">
+  <p:cSld name="Slide 34">
+    <p:spTree>
+      <p:nvGrpSpPr>
+        <p:cNvPr id="1" name=""/>
+        <p:cNvGrpSpPr/>
+        <p:nvPr/>
+      </p:nvGrpSpPr>
+      <p:grpSpPr>
+        <a:xfrm>
+          <a:off x="0" y="0"/>
+          <a:ext cx="0" cy="0"/>
+          <a:chOff x="0" y="0"/>
+          <a:chExt cx="0" cy="0"/>
+        </a:xfrm>
+      </p:grpSpPr>
+      <p:sp>
+        <p:nvSpPr>
+          <p:cNvPr id="2" name="Text 1"/>
+          <p:cNvSpPr/>
+          <p:nvPr>
+            <p:ph idx="102" type="title" hasCustomPrompt="1"/>
+          </p:nvPr>
+        </p:nvSpPr>
+        <p:spPr>
+          <a:xfrm>
+            <a:off x="320040" y="182880"/>
+            <a:ext cx="8503920" cy="640080"/>
+          </a:xfrm>
+          <a:prstGeom prst="rect">
+            <a:avLst/>
+          </a:prstGeom>
+          <a:noFill/>
+          <a:ln/>
+        </p:spPr>
+        <p:txBody>
+          <a:bodyPr wrap="square" lIns="0" tIns="0" rIns="0" bIns="0" rtlCol="0" anchor="ctr"/>
+          <a:lstStyle/>
+          <a:p>
+            <a:pPr algn="l" indent="0" marL="0">
+              <a:buNone/>
+            </a:pPr>
+            <a:r>
+              <a:rPr lang="en-US" sz="3200" b="1" dirty="0">
+                <a:solidFill>
+                  <a:schemeClr val="tx2"/>
+                </a:solidFill>
+              </a:rPr>
+              <a:t>Appendix: Operating Build</a:t>
+            </a:r>
+            <a:endParaRPr lang="en-US" sz="3200" dirty="0"/>
+          </a:p>
+        </p:txBody>
+      </p:sp>
+      <p:pic>
+        <p:nvPicPr>
+          <p:cNvPr id="3" name="Operating build" descr="/home/user/SPOT/deck/img/app_opbuild.png">    </p:cNvPr>
+          <p:cNvPicPr>
+            <a:picLocks noChangeAspect="1"/>
+          </p:cNvPicPr>
+          <p:nvPr/>
+        </p:nvPicPr>
+        <p:blipFill>
+          <a:blip r:embed="rId1"/>
+          <a:stretch>
+            <a:fillRect/>
+          </a:stretch>
+        </p:blipFill>
+        <p:spPr>
+          <a:xfrm>
+            <a:off x="320040" y="1143000"/>
+            <a:ext cx="8503920" cy="3609695"/>
+          </a:xfrm>
+          <a:prstGeom prst="rect">
+            <a:avLst/>
+          </a:prstGeom>
+        </p:spPr>
+      </p:pic>
+      <p:sp>
+        <p:nvSpPr>
+          <p:cNvPr id="4" name="Source"/>
+          <p:cNvSpPr txBox="1"/>
+          <p:nvPr/>
+        </p:nvSpPr>
+        <p:spPr>
+          <a:xfrm>
+            <a:off x="320040" y="6355080"/>
+            <a:ext cx="7132320" cy="274320"/>
+          </a:xfrm>
+          <a:prstGeom prst="rect">
+            <a:avLst/>
+          </a:prstGeom>
+          <a:noFill/>
+          <a:ln/>
+        </p:spPr>
+        <p:txBody>
+          <a:bodyPr wrap="square" lIns="0" tIns="0" rIns="0" bIns="0" rtlCol="0" anchor="ctr"/>
+          <a:lstStyle/>
+          <a:p>
+            <a:pPr indent="0" marL="0">
+              <a:buNone/>
+            </a:pPr>
+            <a:r>
+              <a:rPr lang="en-US" sz="1100" b="1" dirty="0">
+                <a:solidFill>
+                  <a:srgbClr val="1A1A1A"/>
+                </a:solidFill>
+              </a:rPr>
+              <a:t>Source: </a:t>
+            </a:r>
+            <a:pPr indent="0" marL="0">
+              <a:buNone/>
+            </a:pPr>
+            <a:r>
+              <a:rPr lang="en-US" sz="1100" dirty="0">
+                <a:solidFill>
+                  <a:srgbClr val="1A1A1A"/>
+                </a:solidFill>
+              </a:rPr>
+              <a:t>GPS model (Operating Model tab), $ millions</a:t>
+            </a:r>
+            <a:endParaRPr lang="en-US" sz="1100" dirty="0"/>
+          </a:p>
+        </p:txBody>
+      </p:sp>
+      <p:sp>
+        <p:nvSpPr>
+          <p:cNvPr id="25" name="Slide Number Placeholder 0"/>
+          <p:cNvSpPr>
+            <a:spLocks noGrp="1"/>
+          </p:cNvSpPr>
+          <p:nvPr>
+            <p:ph type="sldNum" sz="quarter" idx="4294967295"/>
+          </p:nvPr>
+        </p:nvSpPr>
+        <p:spPr>
+          <a:xfrm>
+            <a:off x="7635240" y="6327648"/>
+            <a:ext cx="411480" cy="274320"/>
+          </a:xfrm>
+          <a:prstGeom prst="rect">
+            <a:avLst/>
+          </a:prstGeom>
+          <a:extLst>
+            <a:ext uri="{C572A759-6A51-4108-AA02-DFA0A04FC94B}">
+              <ma14:wrappingTextBoxFlag xmlns:ma14="http://schemas.microsoft.com/office/mac/drawingml/2011/main" val="0"/>
+            </a:ext>
+          </a:extLst>
+        </p:spPr>
+        <p:txBody>
+          <a:bodyPr/>
+          <a:lstStyle>
+            <a:lvl1pPr>
+              <a:defRPr sz="1100">
+                <a:solidFill>
+                  <a:srgbClr val="1A1A1A"/>
+                </a:solidFill>
+              </a:defRPr>
+            </a:lvl1pPr>
+          </a:lstStyle>
+          <a:p>
+            <a:pPr algn="r"/>
+            <a:fld id="{F7021451-1387-4CA6-816F-3879F97B5CBC}" type="slidenum">
+              <a:rPr b="1" lang="en-US"/>
+              <a:t>34</a:t>
+            </a:fld>
+            <a:endParaRPr lang="en-US"/>
+          </a:p>
+        </p:txBody>
+      </p:sp>
+    </p:spTree>
+  </p:cSld>
+  <p:clrMapOvr>
+    <a:masterClrMapping/>
+  </p:clrMapOvr>
+</p:sld>
+</file>
+
+<file path=ppt/slides/slide35.xml><?xml version="1.0" encoding="utf-8"?>
+<p:sld xmlns:a="http://schemas.openxmlformats.org/drawingml/2006/main" xmlns:r="http://schemas.openxmlformats.org/officeDocument/2006/relationships" xmlns:p="http://schemas.openxmlformats.org/presentationml/2006/main">
+  <p:cSld name="Slide 35">
+    <p:spTree>
+      <p:nvGrpSpPr>
+        <p:cNvPr id="1" name=""/>
+        <p:cNvGrpSpPr/>
+        <p:nvPr/>
+      </p:nvGrpSpPr>
+      <p:grpSpPr>
+        <a:xfrm>
+          <a:off x="0" y="0"/>
+          <a:ext cx="0" cy="0"/>
+          <a:chOff x="0" y="0"/>
+          <a:chExt cx="0" cy="0"/>
+        </a:xfrm>
+      </p:grpSpPr>
+      <p:sp>
+        <p:nvSpPr>
+          <p:cNvPr id="2" name="Text 1"/>
+          <p:cNvSpPr/>
+          <p:nvPr>
+            <p:ph idx="102" type="title" hasCustomPrompt="1"/>
+          </p:nvPr>
+        </p:nvSpPr>
+        <p:spPr>
+          <a:xfrm>
+            <a:off x="320040" y="182880"/>
+            <a:ext cx="8503920" cy="640080"/>
+          </a:xfrm>
+          <a:prstGeom prst="rect">
+            <a:avLst/>
+          </a:prstGeom>
+          <a:noFill/>
+          <a:ln/>
+        </p:spPr>
+        <p:txBody>
+          <a:bodyPr wrap="square" lIns="0" tIns="0" rIns="0" bIns="0" rtlCol="0" anchor="ctr"/>
+          <a:lstStyle/>
+          <a:p>
+            <a:pPr algn="l" indent="0" marL="0">
+              <a:buNone/>
+            </a:pPr>
+            <a:r>
+              <a:rPr lang="en-US" sz="3200" b="1" dirty="0">
+                <a:solidFill>
+                  <a:schemeClr val="tx2"/>
+                </a:solidFill>
+              </a:rPr>
+              <a:t>Appendix: Unlevered Free Cash Flow</a:t>
+            </a:r>
+            <a:endParaRPr lang="en-US" sz="3200" dirty="0"/>
+          </a:p>
+        </p:txBody>
+      </p:sp>
+      <p:pic>
+        <p:nvPicPr>
+          <p:cNvPr id="3" name="UFCF build" descr="/home/user/SPOT/deck/img/app_ufcf.png">    </p:cNvPr>
+          <p:cNvPicPr>
+            <a:picLocks noChangeAspect="1"/>
+          </p:cNvPicPr>
+          <p:nvPr/>
+        </p:nvPicPr>
+        <p:blipFill>
+          <a:blip r:embed="rId1"/>
+          <a:stretch>
+            <a:fillRect/>
+          </a:stretch>
+        </p:blipFill>
+        <p:spPr>
+          <a:xfrm>
+            <a:off x="320040" y="1143000"/>
+            <a:ext cx="8503920" cy="3174743"/>
+          </a:xfrm>
+          <a:prstGeom prst="rect">
+            <a:avLst/>
+          </a:prstGeom>
+        </p:spPr>
+      </p:pic>
+      <p:sp>
+        <p:nvSpPr>
+          <p:cNvPr id="4" name="Source"/>
+          <p:cNvSpPr txBox="1"/>
+          <p:nvPr/>
+        </p:nvSpPr>
+        <p:spPr>
+          <a:xfrm>
+            <a:off x="320040" y="6355080"/>
+            <a:ext cx="7132320" cy="274320"/>
+          </a:xfrm>
+          <a:prstGeom prst="rect">
+            <a:avLst/>
+          </a:prstGeom>
+          <a:noFill/>
+          <a:ln/>
+        </p:spPr>
+        <p:txBody>
+          <a:bodyPr wrap="square" lIns="0" tIns="0" rIns="0" bIns="0" rtlCol="0" anchor="ctr"/>
+          <a:lstStyle/>
+          <a:p>
+            <a:pPr indent="0" marL="0">
+              <a:buNone/>
+            </a:pPr>
+            <a:r>
+              <a:rPr lang="en-US" sz="1100" b="1" dirty="0">
+                <a:solidFill>
+                  <a:srgbClr val="1A1A1A"/>
+                </a:solidFill>
+              </a:rPr>
+              <a:t>Source: </a:t>
+            </a:r>
+            <a:pPr indent="0" marL="0">
+              <a:buNone/>
+            </a:pPr>
+            <a:r>
+              <a:rPr lang="en-US" sz="1100" dirty="0">
+                <a:solidFill>
+                  <a:srgbClr val="1A1A1A"/>
+                </a:solidFill>
+              </a:rPr>
+              <a:t>GPS model (Operating Model tab), $ millions</a:t>
+            </a:r>
+            <a:endParaRPr lang="en-US" sz="1100" dirty="0"/>
+          </a:p>
+        </p:txBody>
+      </p:sp>
+      <p:sp>
+        <p:nvSpPr>
+          <p:cNvPr id="25" name="Slide Number Placeholder 0"/>
+          <p:cNvSpPr>
+            <a:spLocks noGrp="1"/>
+          </p:cNvSpPr>
+          <p:nvPr>
+            <p:ph type="sldNum" sz="quarter" idx="4294967295"/>
+          </p:nvPr>
+        </p:nvSpPr>
+        <p:spPr>
+          <a:xfrm>
+            <a:off x="7635240" y="6327648"/>
+            <a:ext cx="411480" cy="274320"/>
+          </a:xfrm>
+          <a:prstGeom prst="rect">
+            <a:avLst/>
+          </a:prstGeom>
+          <a:extLst>
+            <a:ext uri="{C572A759-6A51-4108-AA02-DFA0A04FC94B}">
+              <ma14:wrappingTextBoxFlag xmlns:ma14="http://schemas.microsoft.com/office/mac/drawingml/2011/main" val="0"/>
+            </a:ext>
+          </a:extLst>
+        </p:spPr>
+        <p:txBody>
+          <a:bodyPr/>
+          <a:lstStyle>
+            <a:lvl1pPr>
+              <a:defRPr sz="1100">
+                <a:solidFill>
+                  <a:srgbClr val="1A1A1A"/>
+                </a:solidFill>
+              </a:defRPr>
+            </a:lvl1pPr>
+          </a:lstStyle>
+          <a:p>
+            <a:pPr algn="r"/>
+            <a:fld id="{F7021451-1387-4CA6-816F-3879F97B5CBC}" type="slidenum">
+              <a:rPr b="1" lang="en-US"/>
+              <a:t>35</a:t>
+            </a:fld>
+            <a:endParaRPr lang="en-US"/>
+          </a:p>
+        </p:txBody>
+      </p:sp>
+    </p:spTree>
+  </p:cSld>
+  <p:clrMapOvr>
+    <a:masterClrMapping/>
+  </p:clrMapOvr>
+</p:sld>
+</file>
+
+<file path=ppt/slides/slide36.xml><?xml version="1.0" encoding="utf-8"?>
+<p:sld xmlns:a="http://schemas.openxmlformats.org/drawingml/2006/main" xmlns:r="http://schemas.openxmlformats.org/officeDocument/2006/relationships" xmlns:p="http://schemas.openxmlformats.org/presentationml/2006/main">
+  <p:cSld name="Slide 36">
+    <p:spTree>
+      <p:nvGrpSpPr>
+        <p:cNvPr id="1" name=""/>
+        <p:cNvGrpSpPr/>
+        <p:nvPr/>
+      </p:nvGrpSpPr>
+      <p:grpSpPr>
+        <a:xfrm>
+          <a:off x="0" y="0"/>
+          <a:ext cx="0" cy="0"/>
+          <a:chOff x="0" y="0"/>
+          <a:chExt cx="0" cy="0"/>
+        </a:xfrm>
+      </p:grpSpPr>
+      <p:sp>
+        <p:nvSpPr>
+          <p:cNvPr id="2" name="Text 1"/>
+          <p:cNvSpPr/>
+          <p:nvPr>
+            <p:ph idx="102" type="title" hasCustomPrompt="1"/>
+          </p:nvPr>
+        </p:nvSpPr>
+        <p:spPr>
+          <a:xfrm>
+            <a:off x="320040" y="182880"/>
+            <a:ext cx="8503920" cy="640080"/>
+          </a:xfrm>
+          <a:prstGeom prst="rect">
+            <a:avLst/>
+          </a:prstGeom>
+          <a:noFill/>
+          <a:ln/>
+        </p:spPr>
+        <p:txBody>
+          <a:bodyPr wrap="square" lIns="0" tIns="0" rIns="0" bIns="0" rtlCol="0" anchor="ctr"/>
+          <a:lstStyle/>
+          <a:p>
+            <a:pPr algn="l" indent="0" marL="0">
+              <a:buNone/>
+            </a:pPr>
+            <a:r>
+              <a:rPr lang="en-US" sz="3200" b="1" dirty="0">
+                <a:solidFill>
+                  <a:schemeClr val="tx2"/>
+                </a:solidFill>
+              </a:rPr>
+              <a:t>Appendix: Power Model</a:t>
+            </a:r>
+            <a:endParaRPr lang="en-US" sz="3200" dirty="0"/>
+          </a:p>
+        </p:txBody>
+      </p:sp>
+      <p:pic>
+        <p:nvPicPr>
+          <p:cNvPr id="3" name="Mod-1 build" descr="/home/user/SPOT/deck/img/app_power.png">    </p:cNvPr>
+          <p:cNvPicPr>
+            <a:picLocks noChangeAspect="1"/>
+          </p:cNvPicPr>
+          <p:nvPr/>
+        </p:nvPicPr>
+        <p:blipFill>
+          <a:blip r:embed="rId1"/>
+          <a:stretch>
+            <a:fillRect/>
+          </a:stretch>
+        </p:blipFill>
+        <p:spPr>
+          <a:xfrm>
+            <a:off x="320040" y="1097280"/>
+            <a:ext cx="8503920" cy="1845190"/>
+          </a:xfrm>
+          <a:prstGeom prst="rect">
+            <a:avLst/>
+          </a:prstGeom>
+        </p:spPr>
+      </p:pic>
+      <p:pic>
+        <p:nvPicPr>
+          <p:cNvPr id="4" name="Power shortfall" descr="/home/user/SPOT/deck/img/app_shortfall.png">    </p:cNvPr>
+          <p:cNvPicPr>
+            <a:picLocks noChangeAspect="1"/>
+          </p:cNvPicPr>
+          <p:nvPr/>
+        </p:nvPicPr>
+        <p:blipFill>
+          <a:blip r:embed="rId2"/>
+          <a:stretch>
+            <a:fillRect/>
+          </a:stretch>
+        </p:blipFill>
+        <p:spPr>
+          <a:xfrm>
+            <a:off x="1463040" y="3246120"/>
+            <a:ext cx="6217920" cy="1571670"/>
+          </a:xfrm>
+          <a:prstGeom prst="rect">
+            <a:avLst/>
+          </a:prstGeom>
+        </p:spPr>
+      </p:pic>
+      <p:sp>
+        <p:nvSpPr>
+          <p:cNvPr id="5" name="Source"/>
+          <p:cNvSpPr txBox="1"/>
+          <p:nvPr/>
+        </p:nvSpPr>
+        <p:spPr>
+          <a:xfrm>
+            <a:off x="320040" y="6355080"/>
+            <a:ext cx="7132320" cy="274320"/>
+          </a:xfrm>
+          <a:prstGeom prst="rect">
+            <a:avLst/>
+          </a:prstGeom>
+          <a:noFill/>
+          <a:ln/>
+        </p:spPr>
+        <p:txBody>
+          <a:bodyPr wrap="square" lIns="0" tIns="0" rIns="0" bIns="0" rtlCol="0" anchor="ctr"/>
+          <a:lstStyle/>
+          <a:p>
+            <a:pPr indent="0" marL="0">
+              <a:buNone/>
+            </a:pPr>
+            <a:r>
+              <a:rPr lang="en-US" sz="1100" b="1" dirty="0">
+                <a:solidFill>
+                  <a:srgbClr val="1A1A1A"/>
+                </a:solidFill>
+              </a:rPr>
+              <a:t>Source: </a:t>
+            </a:r>
+            <a:pPr indent="0" marL="0">
+              <a:buNone/>
+            </a:pPr>
+            <a:r>
+              <a:rPr lang="en-US" sz="1100" dirty="0">
+                <a:solidFill>
+                  <a:srgbClr val="1A1A1A"/>
+                </a:solidFill>
+              </a:rPr>
+              <a:t>GPS model (RPM tab Mod-1 build; Power outlook tab, NERC 2025 LTRA inputs)</a:t>
+            </a:r>
+            <a:endParaRPr lang="en-US" sz="1100" dirty="0"/>
+          </a:p>
+        </p:txBody>
+      </p:sp>
+      <p:sp>
+        <p:nvSpPr>
+          <p:cNvPr id="25" name="Slide Number Placeholder 0"/>
+          <p:cNvSpPr>
+            <a:spLocks noGrp="1"/>
+          </p:cNvSpPr>
+          <p:nvPr>
+            <p:ph type="sldNum" sz="quarter" idx="4294967295"/>
+          </p:nvPr>
+        </p:nvSpPr>
+        <p:spPr>
+          <a:xfrm>
+            <a:off x="7635240" y="6327648"/>
+            <a:ext cx="411480" cy="274320"/>
+          </a:xfrm>
+          <a:prstGeom prst="rect">
+            <a:avLst/>
+          </a:prstGeom>
+          <a:extLst>
+            <a:ext uri="{C572A759-6A51-4108-AA02-DFA0A04FC94B}">
+              <ma14:wrappingTextBoxFlag xmlns:ma14="http://schemas.microsoft.com/office/mac/drawingml/2011/main" val="0"/>
+            </a:ext>
+          </a:extLst>
+        </p:spPr>
+        <p:txBody>
+          <a:bodyPr/>
+          <a:lstStyle>
+            <a:lvl1pPr>
+              <a:defRPr sz="1100">
+                <a:solidFill>
+                  <a:srgbClr val="1A1A1A"/>
+                </a:solidFill>
+              </a:defRPr>
+            </a:lvl1pPr>
+          </a:lstStyle>
+          <a:p>
+            <a:pPr algn="r"/>
+            <a:fld id="{F7021451-1387-4CA6-816F-3879F97B5CBC}" type="slidenum">
+              <a:rPr b="1" lang="en-US"/>
+              <a:t>36</a:t>
+            </a:fld>
+            <a:endParaRPr lang="en-US"/>
+          </a:p>
+        </p:txBody>
+      </p:sp>
+    </p:spTree>
+  </p:cSld>
+  <p:clrMapOvr>
+    <a:masterClrMapping/>
+  </p:clrMapOvr>
+</p:sld>
+</file>
+
+<file path=ppt/slides/slide37.xml><?xml version="1.0" encoding="utf-8"?>
+<p:sld xmlns:a="http://schemas.openxmlformats.org/drawingml/2006/main" xmlns:r="http://schemas.openxmlformats.org/officeDocument/2006/relationships" xmlns:p="http://schemas.openxmlformats.org/presentationml/2006/main">
+  <p:cSld name="Slide 37">
+    <p:spTree>
+      <p:nvGrpSpPr>
+        <p:cNvPr id="1" name=""/>
+        <p:cNvGrpSpPr/>
+        <p:nvPr/>
+      </p:nvGrpSpPr>
+      <p:grpSpPr>
+        <a:xfrm>
+          <a:off x="0" y="0"/>
+          <a:ext cx="0" cy="0"/>
+          <a:chOff x="0" y="0"/>
+          <a:chExt cx="0" cy="0"/>
+        </a:xfrm>
+      </p:grpSpPr>
+      <p:sp>
+        <p:nvSpPr>
+          <p:cNvPr id="2" name="Text 1"/>
+          <p:cNvSpPr/>
+          <p:nvPr>
+            <p:ph idx="102" type="title" hasCustomPrompt="1"/>
+          </p:nvPr>
+        </p:nvSpPr>
+        <p:spPr>
+          <a:xfrm>
+            <a:off x="320040" y="182880"/>
+            <a:ext cx="8503920" cy="640080"/>
+          </a:xfrm>
+          <a:prstGeom prst="rect">
+            <a:avLst/>
+          </a:prstGeom>
+          <a:noFill/>
+          <a:ln/>
+        </p:spPr>
+        <p:txBody>
+          <a:bodyPr wrap="square" lIns="0" tIns="0" rIns="0" bIns="0" rtlCol="0" anchor="ctr"/>
+          <a:lstStyle/>
+          <a:p>
+            <a:pPr algn="l" indent="0" marL="0">
+              <a:buNone/>
+            </a:pPr>
+            <a:r>
+              <a:rPr lang="en-US" sz="3200" b="1" dirty="0">
+                <a:solidFill>
+                  <a:schemeClr val="tx2"/>
+                </a:solidFill>
+              </a:rPr>
+              <a:t>Appendix: CFM56 Repair Pricing</a:t>
+            </a:r>
+            <a:endParaRPr lang="en-US" sz="3200" dirty="0"/>
+          </a:p>
+        </p:txBody>
+      </p:sp>
+      <p:pic>
+        <p:nvPicPr>
+          <p:cNvPr id="3" name="Pricing summary" descr="/home/user/SPOT/deck/img/app_pricing.png">    </p:cNvPr>
+          <p:cNvPicPr>
+            <a:picLocks noChangeAspect="1"/>
+          </p:cNvPicPr>
+          <p:nvPr/>
+        </p:nvPicPr>
+        <p:blipFill>
+          <a:blip r:embed="rId1"/>
+          <a:stretch>
+            <a:fillRect/>
+          </a:stretch>
+        </p:blipFill>
+        <p:spPr>
+          <a:xfrm>
+            <a:off x="320040" y="1143000"/>
+            <a:ext cx="8503920" cy="2753766"/>
+          </a:xfrm>
+          <a:prstGeom prst="rect">
+            <a:avLst/>
+          </a:prstGeom>
+        </p:spPr>
+      </p:pic>
+      <p:sp>
+        <p:nvSpPr>
+          <p:cNvPr id="4" name="Pricing takeaway"/>
+          <p:cNvSpPr txBox="1"/>
+          <p:nvPr/>
+        </p:nvSpPr>
+        <p:spPr>
+          <a:xfrm>
+            <a:off x="320040" y="4206240"/>
+            <a:ext cx="8503920" cy="548640"/>
+          </a:xfrm>
+          <a:prstGeom prst="rect">
+            <a:avLst/>
+          </a:prstGeom>
+          <a:solidFill>
+            <a:srgbClr val="EFEDEA"/>
+          </a:solidFill>
+          <a:ln/>
+        </p:spPr>
+        <p:txBody>
+          <a:bodyPr wrap="square" lIns="0" tIns="0" rIns="0" bIns="0" rtlCol="0" anchor="ctr"/>
+          <a:lstStyle/>
+          <a:p>
+            <a:pPr algn="ctr" indent="0" marL="0">
+              <a:buNone/>
+            </a:pPr>
+            <a:r>
+              <a:rPr lang="en-US" sz="1500" b="1" dirty="0">
+                <a:solidFill>
+                  <a:schemeClr val="tx2"/>
+                </a:solidFill>
+              </a:rPr>
+              <a:t>OEM list prices rose a median ~6% a year across ~3,400 matched parts, with almost none falling.</a:t>
+            </a:r>
+            <a:endParaRPr lang="en-US" sz="1500" dirty="0"/>
+          </a:p>
+        </p:txBody>
+      </p:sp>
+      <p:sp>
+        <p:nvSpPr>
+          <p:cNvPr id="5" name="Source"/>
+          <p:cNvSpPr txBox="1"/>
+          <p:nvPr/>
+        </p:nvSpPr>
+        <p:spPr>
+          <a:xfrm>
+            <a:off x="320040" y="6355080"/>
+            <a:ext cx="7132320" cy="274320"/>
+          </a:xfrm>
+          <a:prstGeom prst="rect">
+            <a:avLst/>
+          </a:prstGeom>
+          <a:noFill/>
+          <a:ln/>
+        </p:spPr>
+        <p:txBody>
+          <a:bodyPr wrap="square" lIns="0" tIns="0" rIns="0" bIns="0" rtlCol="0" anchor="ctr"/>
+          <a:lstStyle/>
+          <a:p>
+            <a:pPr indent="0" marL="0">
+              <a:buNone/>
+            </a:pPr>
+            <a:r>
+              <a:rPr lang="en-US" sz="1100" b="1" dirty="0">
+                <a:solidFill>
+                  <a:srgbClr val="1A1A1A"/>
+                </a:solidFill>
+              </a:rPr>
+              <a:t>Source: </a:t>
+            </a:r>
+            <a:pPr indent="0" marL="0">
+              <a:buNone/>
+            </a:pPr>
+            <a:r>
+              <a:rPr lang="en-US" sz="1100" dirty="0">
+                <a:solidFill>
+                  <a:srgbClr val="1A1A1A"/>
+                </a:solidFill>
+              </a:rPr>
+              <a:t>GPS model (Pricing Data tab): matched OEM catalogue parts, CFM56-5B and -7B</a:t>
+            </a:r>
+            <a:endParaRPr lang="en-US" sz="1100" dirty="0"/>
+          </a:p>
+        </p:txBody>
+      </p:sp>
+      <p:sp>
+        <p:nvSpPr>
+          <p:cNvPr id="25" name="Slide Number Placeholder 0"/>
+          <p:cNvSpPr>
+            <a:spLocks noGrp="1"/>
+          </p:cNvSpPr>
+          <p:nvPr>
+            <p:ph type="sldNum" sz="quarter" idx="4294967295"/>
+          </p:nvPr>
+        </p:nvSpPr>
+        <p:spPr>
+          <a:xfrm>
+            <a:off x="7635240" y="6327648"/>
+            <a:ext cx="411480" cy="274320"/>
+          </a:xfrm>
+          <a:prstGeom prst="rect">
+            <a:avLst/>
+          </a:prstGeom>
+          <a:extLst>
+            <a:ext uri="{C572A759-6A51-4108-AA02-DFA0A04FC94B}">
+              <ma14:wrappingTextBoxFlag xmlns:ma14="http://schemas.microsoft.com/office/mac/drawingml/2011/main" val="0"/>
+            </a:ext>
+          </a:extLst>
+        </p:spPr>
+        <p:txBody>
+          <a:bodyPr/>
+          <a:lstStyle>
+            <a:lvl1pPr>
+              <a:defRPr sz="1100">
+                <a:solidFill>
+                  <a:srgbClr val="1A1A1A"/>
+                </a:solidFill>
+              </a:defRPr>
+            </a:lvl1pPr>
+          </a:lstStyle>
+          <a:p>
+            <a:pPr algn="r"/>
+            <a:fld id="{F7021451-1387-4CA6-816F-3879F97B5CBC}" type="slidenum">
+              <a:rPr b="1" lang="en-US"/>
+              <a:t>37</a:t>
             </a:fld>
             <a:endParaRPr lang="en-US"/>
           </a:p>

--- a/deck/FTAI_Long_Pitch.pptx
+++ b/deck/FTAI_Long_Pitch.pptx
@@ -40,11 +40,9 @@
     <p:sldId id="288" r:id="rId34"/>
     <p:sldId id="289" r:id="rId35"/>
     <p:sldId id="290" r:id="rId36"/>
-    <p:sldId id="291" r:id="rId37"/>
-    <p:sldId id="292" r:id="rId38"/>
   </p:sldIdLst>
   <p:notesMasterIdLst>
-    <p:notesMasterId r:id="rId39"/>
+    <p:notesMasterId r:id="rId37"/>
   </p:notesMasterIdLst>
   <p:sldSz cx="9144000" cy="6858000"/>
   <p:notesSz cx="6858000" cy="9144000"/>
@@ -143,12 +141,12 @@
   <p:extLst>
     <p:ext uri="{521415D9-36F7-43E2-AB2F-B90AF26B5E84}">
       <p14:sectionLst xmlns:p14="http://schemas.microsoft.com/office/powerpoint/2010/main">
-        <p14:section name="Introduction" id="{2dbacf59-bc49-521a-5688-7ddf7172204a}">
+        <p14:section name="Introduction" id="{0ef9a274-41b0-15ac-a40c-a84b429d1340}">
           <p14:sldIdLst>
             <p14:sldId id="256"/>
           </p14:sldIdLst>
         </p14:section>
-        <p14:section name="The Opportunity" id="{2b9b1524-e7a7-6147-7c0a-385b191f52f4}">
+        <p14:section name="The Opportunity" id="{0f54f866-d4af-f9b1-8d4c-956d93e509d7}">
           <p14:sldIdLst>
             <p14:sldId id="257"/>
             <p14:sldId id="258"/>
@@ -156,18 +154,18 @@
             <p14:sldId id="260"/>
           </p14:sldIdLst>
         </p14:section>
-        <p14:section name="Returns" id="{44f69d21-d0e6-5e7e-912e-88188952ae45}">
+        <p14:section name="Returns" id="{7035c914-4958-b97b-7686-1eb44966f5db}">
           <p14:sldIdLst>
             <p14:sldId id="261"/>
           </p14:sldIdLst>
         </p14:section>
-        <p14:section name="Business Overview" id="{e7242bed-7c86-fb68-691c-13559dc401cf}">
+        <p14:section name="Business Overview" id="{bad53780-ab08-e9de-344e-d4339d9482b2}">
           <p14:sldIdLst>
             <p14:sldId id="262"/>
             <p14:sldId id="263"/>
           </p14:sldIdLst>
         </p14:section>
-        <p14:section name="Thesis 1a" id="{065aeb3e-0226-c9e0-6fce-4e9e82e66afa}">
+        <p14:section name="Thesis 1a" id="{62bedd59-2703-f1a7-25a0-aec12d6ec2d2}">
           <p14:sldIdLst>
             <p14:sldId id="264"/>
             <p14:sldId id="265"/>
@@ -175,7 +173,7 @@
             <p14:sldId id="267"/>
           </p14:sldIdLst>
         </p14:section>
-        <p14:section name="Thesis 1b" id="{565f1643-15b5-e946-3159-d525c0bd6b54}">
+        <p14:section name="Thesis 1b" id="{42d6ebdc-7453-3810-590f-6d8f3790a9e7}">
           <p14:sldIdLst>
             <p14:sldId id="268"/>
             <p14:sldId id="269"/>
@@ -186,7 +184,7 @@
             <p14:sldId id="274"/>
           </p14:sldIdLst>
         </p14:section>
-        <p14:section name="Thesis 2" id="{e8087e0f-b1d3-e503-9e3a-5797c2be117e}">
+        <p14:section name="Thesis 2" id="{8c73d488-36bc-fbb8-c0d1-a5866e7f59ed}">
           <p14:sldIdLst>
             <p14:sldId id="275"/>
             <p14:sldId id="276"/>
@@ -194,28 +192,28 @@
             <p14:sldId id="278"/>
           </p14:sldIdLst>
         </p14:section>
-        <p14:section name="Valuation" id="{2ac877be-88ac-2a1f-bef7-d103c1241777}">
+        <p14:section name="Valuation" id="{e7e24352-03ed-84b9-6112-5be7e530e8c7}">
           <p14:sldIdLst>
             <p14:sldId id="279"/>
             <p14:sldId id="280"/>
           </p14:sldIdLst>
         </p14:section>
-        <p14:section name="Catalysts" id="{8d939d74-2c6f-35c1-3183-f9c7ad866ebd}">
+        <p14:section name="Catalysts" id="{3d83b702-591d-dc1d-e888-1143abc162c4}">
           <p14:sldIdLst>
             <p14:sldId id="281"/>
           </p14:sldIdLst>
         </p14:section>
-        <p14:section name="Risks" id="{4e6ab534-49aa-eca5-42cf-983306596000}">
+        <p14:section name="Risks" id="{6cf972a9-4830-1a42-3f5d-92e1654e1075}">
           <p14:sldIdLst>
             <p14:sldId id="282"/>
           </p14:sldIdLst>
         </p14:section>
-        <p14:section name="Q&amp;A" id="{e4b6f8b5-5c82-6c96-27e9-0586448b1125}">
+        <p14:section name="Q&amp;A" id="{c6e14a51-ebdc-1aa6-5a5f-40e2683739ee}">
           <p14:sldIdLst>
             <p14:sldId id="283"/>
           </p14:sldIdLst>
         </p14:section>
-        <p14:section name="Appendix" id="{f898f7fb-f5c1-85e3-1dbc-1a8b00ebfbd4}">
+        <p14:section name="Appendix" id="{b827c6dc-d93b-45a9-d8a5-8f6b355aa416}">
           <p14:sldIdLst>
             <p14:sldId id="284"/>
             <p14:sldId id="285"/>
@@ -224,8 +222,6 @@
             <p14:sldId id="288"/>
             <p14:sldId id="289"/>
             <p14:sldId id="290"/>
-            <p14:sldId id="291"/>
-            <p14:sldId id="292"/>
           </p14:sldIdLst>
         </p14:section>
       </p14:sectionLst>
@@ -7926,7 +7922,7 @@
             <c:size val="6"/>
             <c:spPr>
               <a:solidFill>
-                <a:srgbClr val="847C7A"/>
+                <a:srgbClr val="0A1C58"/>
               </a:solidFill>
               <a:ln w="9525" cap="flat">
                 <a:solidFill>
@@ -8064,7 +8060,7 @@
             <c:size val="6"/>
             <c:spPr>
               <a:solidFill>
-                <a:srgbClr val="847C7A"/>
+                <a:srgbClr val="0A1C58"/>
               </a:solidFill>
               <a:ln w="9525" cap="flat">
                 <a:solidFill>
@@ -11412,7 +11408,7 @@
           <a:p>
             <a:r>
               <a:rPr lang="en-US" dirty="0"/>
-              <a:t/>
+              <a:t>Supports the OEM escalator assumption on Thesis 1a (2/4): matched catalogue parts rose a median 6.1–6.2% per year (2024–25 and 2025–26), with only 1 of ~3,400 matched parts falling.</a:t>
             </a:r>
             <a:endParaRPr lang="en-US" dirty="0"/>
           </a:p>
@@ -11436,182 +11432,6 @@
             <a:fld id="{F7021451-1387-4CA6-816F-3879F97B5CBC}" type="slidenum">
               <a:rPr lang="en-US"/>
               <a:t>35</a:t>
-            </a:fld>
-            <a:endParaRPr lang="en-US"/>
-          </a:p>
-        </p:txBody>
-      </p:sp>
-    </p:spTree>
-    <p:extLst>
-      <p:ext uri="{BB962C8B-B14F-4D97-AF65-F5344CB8AC3E}">
-        <p14:creationId xmlns:p14="http://schemas.microsoft.com/office/powerpoint/2010/main" val="1024086991"/>
-      </p:ext>
-    </p:extLst>
-  </p:cSld>
-  <p:clrMapOvr>
-    <a:masterClrMapping/>
-  </p:clrMapOvr>
-</p:notes>
-</file>
-
-<file path=ppt/notesSlides/notesSlide36.xml><?xml version="1.0" encoding="utf-8"?>
-<p:notes xmlns:a="http://schemas.openxmlformats.org/drawingml/2006/main" xmlns:r="http://schemas.openxmlformats.org/officeDocument/2006/relationships" xmlns:p="http://schemas.openxmlformats.org/presentationml/2006/main">
-  <p:cSld>
-    <p:spTree>
-      <p:nvGrpSpPr>
-        <p:cNvPr id="1" name=""/>
-        <p:cNvGrpSpPr/>
-        <p:nvPr/>
-      </p:nvGrpSpPr>
-      <p:grpSpPr>
-        <a:xfrm>
-          <a:off x="0" y="0"/>
-          <a:ext cx="0" cy="0"/>
-          <a:chOff x="0" y="0"/>
-          <a:chExt cx="0" cy="0"/>
-        </a:xfrm>
-      </p:grpSpPr>
-      <p:sp>
-        <p:nvSpPr>
-          <p:cNvPr id="2" name="Slide Image Placeholder 1"/>
-          <p:cNvSpPr>
-            <a:spLocks noGrp="1" noRot="1" noChangeAspect="1"/>
-          </p:cNvSpPr>
-          <p:nvPr>
-            <p:ph type="sldImg"/>
-          </p:nvPr>
-        </p:nvSpPr>
-        <p:spPr/>
-      </p:sp>
-      <p:sp>
-        <p:nvSpPr>
-          <p:cNvPr id="3" name="Notes Placeholder 2"/>
-          <p:cNvSpPr>
-            <a:spLocks noGrp="1"/>
-          </p:cNvSpPr>
-          <p:nvPr>
-            <p:ph type="body" idx="1"/>
-          </p:nvPr>
-        </p:nvSpPr>
-        <p:spPr/>
-        <p:txBody>
-          <a:bodyPr/>
-          <a:lstStyle/>
-          <a:p>
-            <a:r>
-              <a:rPr lang="en-US" dirty="0"/>
-              <a:t/>
-            </a:r>
-            <a:endParaRPr lang="en-US" dirty="0"/>
-          </a:p>
-        </p:txBody>
-      </p:sp>
-      <p:sp>
-        <p:nvSpPr>
-          <p:cNvPr id="4" name="Slide Number Placeholder 3"/>
-          <p:cNvSpPr>
-            <a:spLocks noGrp="1"/>
-          </p:cNvSpPr>
-          <p:nvPr>
-            <p:ph type="sldNum" sz="quarter" idx="10"/>
-          </p:nvPr>
-        </p:nvSpPr>
-        <p:spPr/>
-        <p:txBody>
-          <a:bodyPr/>
-          <a:lstStyle/>
-          <a:p>
-            <a:fld id="{F7021451-1387-4CA6-816F-3879F97B5CBC}" type="slidenum">
-              <a:rPr lang="en-US"/>
-              <a:t>36</a:t>
-            </a:fld>
-            <a:endParaRPr lang="en-US"/>
-          </a:p>
-        </p:txBody>
-      </p:sp>
-    </p:spTree>
-    <p:extLst>
-      <p:ext uri="{BB962C8B-B14F-4D97-AF65-F5344CB8AC3E}">
-        <p14:creationId xmlns:p14="http://schemas.microsoft.com/office/powerpoint/2010/main" val="1024086991"/>
-      </p:ext>
-    </p:extLst>
-  </p:cSld>
-  <p:clrMapOvr>
-    <a:masterClrMapping/>
-  </p:clrMapOvr>
-</p:notes>
-</file>
-
-<file path=ppt/notesSlides/notesSlide37.xml><?xml version="1.0" encoding="utf-8"?>
-<p:notes xmlns:a="http://schemas.openxmlformats.org/drawingml/2006/main" xmlns:r="http://schemas.openxmlformats.org/officeDocument/2006/relationships" xmlns:p="http://schemas.openxmlformats.org/presentationml/2006/main">
-  <p:cSld>
-    <p:spTree>
-      <p:nvGrpSpPr>
-        <p:cNvPr id="1" name=""/>
-        <p:cNvGrpSpPr/>
-        <p:nvPr/>
-      </p:nvGrpSpPr>
-      <p:grpSpPr>
-        <a:xfrm>
-          <a:off x="0" y="0"/>
-          <a:ext cx="0" cy="0"/>
-          <a:chOff x="0" y="0"/>
-          <a:chExt cx="0" cy="0"/>
-        </a:xfrm>
-      </p:grpSpPr>
-      <p:sp>
-        <p:nvSpPr>
-          <p:cNvPr id="2" name="Slide Image Placeholder 1"/>
-          <p:cNvSpPr>
-            <a:spLocks noGrp="1" noRot="1" noChangeAspect="1"/>
-          </p:cNvSpPr>
-          <p:nvPr>
-            <p:ph type="sldImg"/>
-          </p:nvPr>
-        </p:nvSpPr>
-        <p:spPr/>
-      </p:sp>
-      <p:sp>
-        <p:nvSpPr>
-          <p:cNvPr id="3" name="Notes Placeholder 2"/>
-          <p:cNvSpPr>
-            <a:spLocks noGrp="1"/>
-          </p:cNvSpPr>
-          <p:nvPr>
-            <p:ph type="body" idx="1"/>
-          </p:nvPr>
-        </p:nvSpPr>
-        <p:spPr/>
-        <p:txBody>
-          <a:bodyPr/>
-          <a:lstStyle/>
-          <a:p>
-            <a:r>
-              <a:rPr lang="en-US" dirty="0"/>
-              <a:t>Supports the OEM escalator assumption on Thesis 1a (2/4): matched catalogue parts rose a median 6.1–6.2% per year (2024–25 and 2025–26), with only 1 of ~3,400 matched parts falling.</a:t>
-            </a:r>
-            <a:endParaRPr lang="en-US" dirty="0"/>
-          </a:p>
-        </p:txBody>
-      </p:sp>
-      <p:sp>
-        <p:nvSpPr>
-          <p:cNvPr id="4" name="Slide Number Placeholder 3"/>
-          <p:cNvSpPr>
-            <a:spLocks noGrp="1"/>
-          </p:cNvSpPr>
-          <p:nvPr>
-            <p:ph type="sldNum" sz="quarter" idx="10"/>
-          </p:nvPr>
-        </p:nvSpPr>
-        <p:spPr/>
-        <p:txBody>
-          <a:bodyPr/>
-          <a:lstStyle/>
-          <a:p>
-            <a:fld id="{F7021451-1387-4CA6-816F-3879F97B5CBC}" type="slidenum">
-              <a:rPr lang="en-US"/>
-              <a:t>37</a:t>
             </a:fld>
             <a:endParaRPr lang="en-US"/>
           </a:p>
@@ -28830,7 +28650,7 @@
                   <a:schemeClr val="tx2"/>
                 </a:solidFill>
               </a:rPr>
-              <a:t>Appendix: Operating Build</a:t>
+              <a:t>Appendix: Power Model</a:t>
             </a:r>
             <a:endParaRPr lang="en-US" sz="3200" dirty="0"/>
           </a:p>
@@ -28838,7 +28658,7 @@
       </p:sp>
       <p:pic>
         <p:nvPicPr>
-          <p:cNvPr id="3" name="Operating build" descr="/home/user/SPOT/deck/img/app_opbuild.png">    </p:cNvPr>
+          <p:cNvPr id="3" name="Mod-1 build" descr="/home/user/SPOT/deck/img/app_power.png">    </p:cNvPr>
           <p:cNvPicPr>
             <a:picLocks noChangeAspect="1"/>
           </p:cNvPicPr>
@@ -28852,17 +28672,41 @@
         </p:blipFill>
         <p:spPr>
           <a:xfrm>
-            <a:off x="320040" y="1143000"/>
-            <a:ext cx="8503920" cy="3609695"/>
+            <a:off x="320040" y="1097280"/>
+            <a:ext cx="8503920" cy="1845190"/>
           </a:xfrm>
           <a:prstGeom prst="rect">
             <a:avLst/>
           </a:prstGeom>
         </p:spPr>
       </p:pic>
-      <p:sp>
-        <p:nvSpPr>
-          <p:cNvPr id="4" name="Source"/>
+      <p:pic>
+        <p:nvPicPr>
+          <p:cNvPr id="4" name="Power shortfall" descr="/home/user/SPOT/deck/img/app_shortfall.png">    </p:cNvPr>
+          <p:cNvPicPr>
+            <a:picLocks noChangeAspect="1"/>
+          </p:cNvPicPr>
+          <p:nvPr/>
+        </p:nvPicPr>
+        <p:blipFill>
+          <a:blip r:embed="rId2"/>
+          <a:stretch>
+            <a:fillRect/>
+          </a:stretch>
+        </p:blipFill>
+        <p:spPr>
+          <a:xfrm>
+            <a:off x="1463040" y="3246120"/>
+            <a:ext cx="6217920" cy="1571670"/>
+          </a:xfrm>
+          <a:prstGeom prst="rect">
+            <a:avLst/>
+          </a:prstGeom>
+        </p:spPr>
+      </p:pic>
+      <p:sp>
+        <p:nvSpPr>
+          <p:cNvPr id="5" name="Source"/>
           <p:cNvSpPr txBox="1"/>
           <p:nvPr/>
         </p:nvSpPr>
@@ -28901,7 +28745,7 @@
                   <a:srgbClr val="1A1A1A"/>
                 </a:solidFill>
               </a:rPr>
-              <a:t>GPS model (Operating Model tab), $ millions</a:t>
+              <a:t>GPS model (RPM tab Mod-1 build; Power outlook tab, NERC 2025 LTRA inputs)</a:t>
             </a:r>
             <a:endParaRPr lang="en-US" sz="1100" dirty="0"/>
           </a:p>
@@ -29009,7 +28853,7 @@
                   <a:schemeClr val="tx2"/>
                 </a:solidFill>
               </a:rPr>
-              <a:t>Appendix: Unlevered Free Cash Flow</a:t>
+              <a:t>Appendix: CFM56 Repair Pricing</a:t>
             </a:r>
             <a:endParaRPr lang="en-US" sz="3200" dirty="0"/>
           </a:p>
@@ -29017,7 +28861,7 @@
       </p:sp>
       <p:pic>
         <p:nvPicPr>
-          <p:cNvPr id="3" name="UFCF build" descr="/home/user/SPOT/deck/img/app_ufcf.png">    </p:cNvPr>
+          <p:cNvPr id="3" name="Pricing summary" descr="/home/user/SPOT/deck/img/app_pricing.png">    </p:cNvPr>
           <p:cNvPicPr>
             <a:picLocks noChangeAspect="1"/>
           </p:cNvPicPr>
@@ -29032,7 +28876,7 @@
         <p:spPr>
           <a:xfrm>
             <a:off x="320040" y="1143000"/>
-            <a:ext cx="8503920" cy="3174743"/>
+            <a:ext cx="8503920" cy="2753766"/>
           </a:xfrm>
           <a:prstGeom prst="rect">
             <a:avLst/>
@@ -29041,7 +28885,45 @@
       </p:pic>
       <p:sp>
         <p:nvSpPr>
-          <p:cNvPr id="4" name="Source"/>
+          <p:cNvPr id="4" name="Pricing takeaway"/>
+          <p:cNvSpPr txBox="1"/>
+          <p:nvPr/>
+        </p:nvSpPr>
+        <p:spPr>
+          <a:xfrm>
+            <a:off x="320040" y="4206240"/>
+            <a:ext cx="8503920" cy="548640"/>
+          </a:xfrm>
+          <a:prstGeom prst="rect">
+            <a:avLst/>
+          </a:prstGeom>
+          <a:solidFill>
+            <a:srgbClr val="EFEDEA"/>
+          </a:solidFill>
+          <a:ln/>
+        </p:spPr>
+        <p:txBody>
+          <a:bodyPr wrap="square" lIns="0" tIns="0" rIns="0" bIns="0" rtlCol="0" anchor="ctr"/>
+          <a:lstStyle/>
+          <a:p>
+            <a:pPr algn="ctr" indent="0" marL="0">
+              <a:buNone/>
+            </a:pPr>
+            <a:r>
+              <a:rPr lang="en-US" sz="1500" b="1" dirty="0">
+                <a:solidFill>
+                  <a:schemeClr val="tx2"/>
+                </a:solidFill>
+              </a:rPr>
+              <a:t>OEM list prices rose a median ~6% a year across ~3,400 matched parts, with almost none falling.</a:t>
+            </a:r>
+            <a:endParaRPr lang="en-US" sz="1500" dirty="0"/>
+          </a:p>
+        </p:txBody>
+      </p:sp>
+      <p:sp>
+        <p:nvSpPr>
+          <p:cNvPr id="5" name="Source"/>
           <p:cNvSpPr txBox="1"/>
           <p:nvPr/>
         </p:nvSpPr>
@@ -29080,7 +28962,7 @@
                   <a:srgbClr val="1A1A1A"/>
                 </a:solidFill>
               </a:rPr>
-              <a:t>GPS model (Operating Model tab), $ millions</a:t>
+              <a:t>GPS model (Pricing Data tab): matched OEM catalogue parts, CFM56-5B and -7B</a:t>
             </a:r>
             <a:endParaRPr lang="en-US" sz="1100" dirty="0"/>
           </a:p>
@@ -29126,426 +29008,6 @@
             <a:fld id="{F7021451-1387-4CA6-816F-3879F97B5CBC}" type="slidenum">
               <a:rPr b="1" lang="en-US"/>
               <a:t>35</a:t>
-            </a:fld>
-            <a:endParaRPr lang="en-US"/>
-          </a:p>
-        </p:txBody>
-      </p:sp>
-    </p:spTree>
-  </p:cSld>
-  <p:clrMapOvr>
-    <a:masterClrMapping/>
-  </p:clrMapOvr>
-</p:sld>
-</file>
-
-<file path=ppt/slides/slide36.xml><?xml version="1.0" encoding="utf-8"?>
-<p:sld xmlns:a="http://schemas.openxmlformats.org/drawingml/2006/main" xmlns:r="http://schemas.openxmlformats.org/officeDocument/2006/relationships" xmlns:p="http://schemas.openxmlformats.org/presentationml/2006/main">
-  <p:cSld name="Slide 36">
-    <p:spTree>
-      <p:nvGrpSpPr>
-        <p:cNvPr id="1" name=""/>
-        <p:cNvGrpSpPr/>
-        <p:nvPr/>
-      </p:nvGrpSpPr>
-      <p:grpSpPr>
-        <a:xfrm>
-          <a:off x="0" y="0"/>
-          <a:ext cx="0" cy="0"/>
-          <a:chOff x="0" y="0"/>
-          <a:chExt cx="0" cy="0"/>
-        </a:xfrm>
-      </p:grpSpPr>
-      <p:sp>
-        <p:nvSpPr>
-          <p:cNvPr id="2" name="Text 1"/>
-          <p:cNvSpPr/>
-          <p:nvPr>
-            <p:ph idx="102" type="title" hasCustomPrompt="1"/>
-          </p:nvPr>
-        </p:nvSpPr>
-        <p:spPr>
-          <a:xfrm>
-            <a:off x="320040" y="182880"/>
-            <a:ext cx="8503920" cy="640080"/>
-          </a:xfrm>
-          <a:prstGeom prst="rect">
-            <a:avLst/>
-          </a:prstGeom>
-          <a:noFill/>
-          <a:ln/>
-        </p:spPr>
-        <p:txBody>
-          <a:bodyPr wrap="square" lIns="0" tIns="0" rIns="0" bIns="0" rtlCol="0" anchor="ctr"/>
-          <a:lstStyle/>
-          <a:p>
-            <a:pPr algn="l" indent="0" marL="0">
-              <a:buNone/>
-            </a:pPr>
-            <a:r>
-              <a:rPr lang="en-US" sz="3200" b="1" dirty="0">
-                <a:solidFill>
-                  <a:schemeClr val="tx2"/>
-                </a:solidFill>
-              </a:rPr>
-              <a:t>Appendix: Power Model</a:t>
-            </a:r>
-            <a:endParaRPr lang="en-US" sz="3200" dirty="0"/>
-          </a:p>
-        </p:txBody>
-      </p:sp>
-      <p:pic>
-        <p:nvPicPr>
-          <p:cNvPr id="3" name="Mod-1 build" descr="/home/user/SPOT/deck/img/app_power.png">    </p:cNvPr>
-          <p:cNvPicPr>
-            <a:picLocks noChangeAspect="1"/>
-          </p:cNvPicPr>
-          <p:nvPr/>
-        </p:nvPicPr>
-        <p:blipFill>
-          <a:blip r:embed="rId1"/>
-          <a:stretch>
-            <a:fillRect/>
-          </a:stretch>
-        </p:blipFill>
-        <p:spPr>
-          <a:xfrm>
-            <a:off x="320040" y="1097280"/>
-            <a:ext cx="8503920" cy="1845190"/>
-          </a:xfrm>
-          <a:prstGeom prst="rect">
-            <a:avLst/>
-          </a:prstGeom>
-        </p:spPr>
-      </p:pic>
-      <p:pic>
-        <p:nvPicPr>
-          <p:cNvPr id="4" name="Power shortfall" descr="/home/user/SPOT/deck/img/app_shortfall.png">    </p:cNvPr>
-          <p:cNvPicPr>
-            <a:picLocks noChangeAspect="1"/>
-          </p:cNvPicPr>
-          <p:nvPr/>
-        </p:nvPicPr>
-        <p:blipFill>
-          <a:blip r:embed="rId2"/>
-          <a:stretch>
-            <a:fillRect/>
-          </a:stretch>
-        </p:blipFill>
-        <p:spPr>
-          <a:xfrm>
-            <a:off x="1463040" y="3246120"/>
-            <a:ext cx="6217920" cy="1571670"/>
-          </a:xfrm>
-          <a:prstGeom prst="rect">
-            <a:avLst/>
-          </a:prstGeom>
-        </p:spPr>
-      </p:pic>
-      <p:sp>
-        <p:nvSpPr>
-          <p:cNvPr id="5" name="Source"/>
-          <p:cNvSpPr txBox="1"/>
-          <p:nvPr/>
-        </p:nvSpPr>
-        <p:spPr>
-          <a:xfrm>
-            <a:off x="320040" y="6355080"/>
-            <a:ext cx="7132320" cy="274320"/>
-          </a:xfrm>
-          <a:prstGeom prst="rect">
-            <a:avLst/>
-          </a:prstGeom>
-          <a:noFill/>
-          <a:ln/>
-        </p:spPr>
-        <p:txBody>
-          <a:bodyPr wrap="square" lIns="0" tIns="0" rIns="0" bIns="0" rtlCol="0" anchor="ctr"/>
-          <a:lstStyle/>
-          <a:p>
-            <a:pPr indent="0" marL="0">
-              <a:buNone/>
-            </a:pPr>
-            <a:r>
-              <a:rPr lang="en-US" sz="1100" b="1" dirty="0">
-                <a:solidFill>
-                  <a:srgbClr val="1A1A1A"/>
-                </a:solidFill>
-              </a:rPr>
-              <a:t>Source: </a:t>
-            </a:r>
-            <a:pPr indent="0" marL="0">
-              <a:buNone/>
-            </a:pPr>
-            <a:r>
-              <a:rPr lang="en-US" sz="1100" dirty="0">
-                <a:solidFill>
-                  <a:srgbClr val="1A1A1A"/>
-                </a:solidFill>
-              </a:rPr>
-              <a:t>GPS model (RPM tab Mod-1 build; Power outlook tab, NERC 2025 LTRA inputs)</a:t>
-            </a:r>
-            <a:endParaRPr lang="en-US" sz="1100" dirty="0"/>
-          </a:p>
-        </p:txBody>
-      </p:sp>
-      <p:sp>
-        <p:nvSpPr>
-          <p:cNvPr id="25" name="Slide Number Placeholder 0"/>
-          <p:cNvSpPr>
-            <a:spLocks noGrp="1"/>
-          </p:cNvSpPr>
-          <p:nvPr>
-            <p:ph type="sldNum" sz="quarter" idx="4294967295"/>
-          </p:nvPr>
-        </p:nvSpPr>
-        <p:spPr>
-          <a:xfrm>
-            <a:off x="7635240" y="6327648"/>
-            <a:ext cx="411480" cy="274320"/>
-          </a:xfrm>
-          <a:prstGeom prst="rect">
-            <a:avLst/>
-          </a:prstGeom>
-          <a:extLst>
-            <a:ext uri="{C572A759-6A51-4108-AA02-DFA0A04FC94B}">
-              <ma14:wrappingTextBoxFlag xmlns:ma14="http://schemas.microsoft.com/office/mac/drawingml/2011/main" val="0"/>
-            </a:ext>
-          </a:extLst>
-        </p:spPr>
-        <p:txBody>
-          <a:bodyPr/>
-          <a:lstStyle>
-            <a:lvl1pPr>
-              <a:defRPr sz="1100">
-                <a:solidFill>
-                  <a:srgbClr val="1A1A1A"/>
-                </a:solidFill>
-              </a:defRPr>
-            </a:lvl1pPr>
-          </a:lstStyle>
-          <a:p>
-            <a:pPr algn="r"/>
-            <a:fld id="{F7021451-1387-4CA6-816F-3879F97B5CBC}" type="slidenum">
-              <a:rPr b="1" lang="en-US"/>
-              <a:t>36</a:t>
-            </a:fld>
-            <a:endParaRPr lang="en-US"/>
-          </a:p>
-        </p:txBody>
-      </p:sp>
-    </p:spTree>
-  </p:cSld>
-  <p:clrMapOvr>
-    <a:masterClrMapping/>
-  </p:clrMapOvr>
-</p:sld>
-</file>
-
-<file path=ppt/slides/slide37.xml><?xml version="1.0" encoding="utf-8"?>
-<p:sld xmlns:a="http://schemas.openxmlformats.org/drawingml/2006/main" xmlns:r="http://schemas.openxmlformats.org/officeDocument/2006/relationships" xmlns:p="http://schemas.openxmlformats.org/presentationml/2006/main">
-  <p:cSld name="Slide 37">
-    <p:spTree>
-      <p:nvGrpSpPr>
-        <p:cNvPr id="1" name=""/>
-        <p:cNvGrpSpPr/>
-        <p:nvPr/>
-      </p:nvGrpSpPr>
-      <p:grpSpPr>
-        <a:xfrm>
-          <a:off x="0" y="0"/>
-          <a:ext cx="0" cy="0"/>
-          <a:chOff x="0" y="0"/>
-          <a:chExt cx="0" cy="0"/>
-        </a:xfrm>
-      </p:grpSpPr>
-      <p:sp>
-        <p:nvSpPr>
-          <p:cNvPr id="2" name="Text 1"/>
-          <p:cNvSpPr/>
-          <p:nvPr>
-            <p:ph idx="102" type="title" hasCustomPrompt="1"/>
-          </p:nvPr>
-        </p:nvSpPr>
-        <p:spPr>
-          <a:xfrm>
-            <a:off x="320040" y="182880"/>
-            <a:ext cx="8503920" cy="640080"/>
-          </a:xfrm>
-          <a:prstGeom prst="rect">
-            <a:avLst/>
-          </a:prstGeom>
-          <a:noFill/>
-          <a:ln/>
-        </p:spPr>
-        <p:txBody>
-          <a:bodyPr wrap="square" lIns="0" tIns="0" rIns="0" bIns="0" rtlCol="0" anchor="ctr"/>
-          <a:lstStyle/>
-          <a:p>
-            <a:pPr algn="l" indent="0" marL="0">
-              <a:buNone/>
-            </a:pPr>
-            <a:r>
-              <a:rPr lang="en-US" sz="3200" b="1" dirty="0">
-                <a:solidFill>
-                  <a:schemeClr val="tx2"/>
-                </a:solidFill>
-              </a:rPr>
-              <a:t>Appendix: CFM56 Repair Pricing</a:t>
-            </a:r>
-            <a:endParaRPr lang="en-US" sz="3200" dirty="0"/>
-          </a:p>
-        </p:txBody>
-      </p:sp>
-      <p:pic>
-        <p:nvPicPr>
-          <p:cNvPr id="3" name="Pricing summary" descr="/home/user/SPOT/deck/img/app_pricing.png">    </p:cNvPr>
-          <p:cNvPicPr>
-            <a:picLocks noChangeAspect="1"/>
-          </p:cNvPicPr>
-          <p:nvPr/>
-        </p:nvPicPr>
-        <p:blipFill>
-          <a:blip r:embed="rId1"/>
-          <a:stretch>
-            <a:fillRect/>
-          </a:stretch>
-        </p:blipFill>
-        <p:spPr>
-          <a:xfrm>
-            <a:off x="320040" y="1143000"/>
-            <a:ext cx="8503920" cy="2753766"/>
-          </a:xfrm>
-          <a:prstGeom prst="rect">
-            <a:avLst/>
-          </a:prstGeom>
-        </p:spPr>
-      </p:pic>
-      <p:sp>
-        <p:nvSpPr>
-          <p:cNvPr id="4" name="Pricing takeaway"/>
-          <p:cNvSpPr txBox="1"/>
-          <p:nvPr/>
-        </p:nvSpPr>
-        <p:spPr>
-          <a:xfrm>
-            <a:off x="320040" y="4206240"/>
-            <a:ext cx="8503920" cy="548640"/>
-          </a:xfrm>
-          <a:prstGeom prst="rect">
-            <a:avLst/>
-          </a:prstGeom>
-          <a:solidFill>
-            <a:srgbClr val="EFEDEA"/>
-          </a:solidFill>
-          <a:ln/>
-        </p:spPr>
-        <p:txBody>
-          <a:bodyPr wrap="square" lIns="0" tIns="0" rIns="0" bIns="0" rtlCol="0" anchor="ctr"/>
-          <a:lstStyle/>
-          <a:p>
-            <a:pPr algn="ctr" indent="0" marL="0">
-              <a:buNone/>
-            </a:pPr>
-            <a:r>
-              <a:rPr lang="en-US" sz="1500" b="1" dirty="0">
-                <a:solidFill>
-                  <a:schemeClr val="tx2"/>
-                </a:solidFill>
-              </a:rPr>
-              <a:t>OEM list prices rose a median ~6% a year across ~3,400 matched parts, with almost none falling.</a:t>
-            </a:r>
-            <a:endParaRPr lang="en-US" sz="1500" dirty="0"/>
-          </a:p>
-        </p:txBody>
-      </p:sp>
-      <p:sp>
-        <p:nvSpPr>
-          <p:cNvPr id="5" name="Source"/>
-          <p:cNvSpPr txBox="1"/>
-          <p:nvPr/>
-        </p:nvSpPr>
-        <p:spPr>
-          <a:xfrm>
-            <a:off x="320040" y="6355080"/>
-            <a:ext cx="7132320" cy="274320"/>
-          </a:xfrm>
-          <a:prstGeom prst="rect">
-            <a:avLst/>
-          </a:prstGeom>
-          <a:noFill/>
-          <a:ln/>
-        </p:spPr>
-        <p:txBody>
-          <a:bodyPr wrap="square" lIns="0" tIns="0" rIns="0" bIns="0" rtlCol="0" anchor="ctr"/>
-          <a:lstStyle/>
-          <a:p>
-            <a:pPr indent="0" marL="0">
-              <a:buNone/>
-            </a:pPr>
-            <a:r>
-              <a:rPr lang="en-US" sz="1100" b="1" dirty="0">
-                <a:solidFill>
-                  <a:srgbClr val="1A1A1A"/>
-                </a:solidFill>
-              </a:rPr>
-              <a:t>Source: </a:t>
-            </a:r>
-            <a:pPr indent="0" marL="0">
-              <a:buNone/>
-            </a:pPr>
-            <a:r>
-              <a:rPr lang="en-US" sz="1100" dirty="0">
-                <a:solidFill>
-                  <a:srgbClr val="1A1A1A"/>
-                </a:solidFill>
-              </a:rPr>
-              <a:t>GPS model (Pricing Data tab): matched OEM catalogue parts, CFM56-5B and -7B</a:t>
-            </a:r>
-            <a:endParaRPr lang="en-US" sz="1100" dirty="0"/>
-          </a:p>
-        </p:txBody>
-      </p:sp>
-      <p:sp>
-        <p:nvSpPr>
-          <p:cNvPr id="25" name="Slide Number Placeholder 0"/>
-          <p:cNvSpPr>
-            <a:spLocks noGrp="1"/>
-          </p:cNvSpPr>
-          <p:nvPr>
-            <p:ph type="sldNum" sz="quarter" idx="4294967295"/>
-          </p:nvPr>
-        </p:nvSpPr>
-        <p:spPr>
-          <a:xfrm>
-            <a:off x="7635240" y="6327648"/>
-            <a:ext cx="411480" cy="274320"/>
-          </a:xfrm>
-          <a:prstGeom prst="rect">
-            <a:avLst/>
-          </a:prstGeom>
-          <a:extLst>
-            <a:ext uri="{C572A759-6A51-4108-AA02-DFA0A04FC94B}">
-              <ma14:wrappingTextBoxFlag xmlns:ma14="http://schemas.microsoft.com/office/mac/drawingml/2011/main" val="0"/>
-            </a:ext>
-          </a:extLst>
-        </p:spPr>
-        <p:txBody>
-          <a:bodyPr/>
-          <a:lstStyle>
-            <a:lvl1pPr>
-              <a:defRPr sz="1100">
-                <a:solidFill>
-                  <a:srgbClr val="1A1A1A"/>
-                </a:solidFill>
-              </a:defRPr>
-            </a:lvl1pPr>
-          </a:lstStyle>
-          <a:p>
-            <a:pPr algn="r"/>
-            <a:fld id="{F7021451-1387-4CA6-816F-3879F97B5CBC}" type="slidenum">
-              <a:rPr b="1" lang="en-US"/>
-              <a:t>37</a:t>
             </a:fld>
             <a:endParaRPr lang="en-US"/>
           </a:p>

--- a/deck/FTAI_Long_Pitch.pptx
+++ b/deck/FTAI_Long_Pitch.pptx
@@ -141,12 +141,12 @@
   <p:extLst>
     <p:ext uri="{521415D9-36F7-43E2-AB2F-B90AF26B5E84}">
       <p14:sectionLst xmlns:p14="http://schemas.microsoft.com/office/powerpoint/2010/main">
-        <p14:section name="Introduction" id="{0ef9a274-41b0-15ac-a40c-a84b429d1340}">
+        <p14:section name="Introduction" id="{e2705436-ddce-998a-1756-2a541f623af6}">
           <p14:sldIdLst>
             <p14:sldId id="256"/>
           </p14:sldIdLst>
         </p14:section>
-        <p14:section name="The Opportunity" id="{0f54f866-d4af-f9b1-8d4c-956d93e509d7}">
+        <p14:section name="The Opportunity" id="{cba44336-b71d-c1d1-b8cb-ed1dfc49c328}">
           <p14:sldIdLst>
             <p14:sldId id="257"/>
             <p14:sldId id="258"/>
@@ -154,18 +154,18 @@
             <p14:sldId id="260"/>
           </p14:sldIdLst>
         </p14:section>
-        <p14:section name="Returns" id="{7035c914-4958-b97b-7686-1eb44966f5db}">
+        <p14:section name="Returns" id="{8328ddc0-0000-7807-2cd9-ee2dee3219a3}">
           <p14:sldIdLst>
             <p14:sldId id="261"/>
           </p14:sldIdLst>
         </p14:section>
-        <p14:section name="Business Overview" id="{bad53780-ab08-e9de-344e-d4339d9482b2}">
+        <p14:section name="Business Overview" id="{f37bf03f-47b6-2779-1806-cf1756e9fae6}">
           <p14:sldIdLst>
             <p14:sldId id="262"/>
             <p14:sldId id="263"/>
           </p14:sldIdLst>
         </p14:section>
-        <p14:section name="Thesis 1a" id="{62bedd59-2703-f1a7-25a0-aec12d6ec2d2}">
+        <p14:section name="Thesis 1a" id="{8ae213d0-a27a-b6af-60cf-ca8e4e549833}">
           <p14:sldIdLst>
             <p14:sldId id="264"/>
             <p14:sldId id="265"/>
@@ -173,7 +173,7 @@
             <p14:sldId id="267"/>
           </p14:sldIdLst>
         </p14:section>
-        <p14:section name="Thesis 1b" id="{42d6ebdc-7453-3810-590f-6d8f3790a9e7}">
+        <p14:section name="Thesis 1b" id="{71c8aaa0-a77a-a516-c1e2-c28557a592e8}">
           <p14:sldIdLst>
             <p14:sldId id="268"/>
             <p14:sldId id="269"/>
@@ -184,7 +184,7 @@
             <p14:sldId id="274"/>
           </p14:sldIdLst>
         </p14:section>
-        <p14:section name="Thesis 2" id="{8c73d488-36bc-fbb8-c0d1-a5866e7f59ed}">
+        <p14:section name="Thesis 2" id="{ab1b00b5-eb3d-663b-91ad-614c0b4ba2b3}">
           <p14:sldIdLst>
             <p14:sldId id="275"/>
             <p14:sldId id="276"/>
@@ -192,28 +192,28 @@
             <p14:sldId id="278"/>
           </p14:sldIdLst>
         </p14:section>
-        <p14:section name="Valuation" id="{e7e24352-03ed-84b9-6112-5be7e530e8c7}">
+        <p14:section name="Valuation" id="{3c49455b-0fc7-a165-edee-7386465ae37d}">
           <p14:sldIdLst>
             <p14:sldId id="279"/>
             <p14:sldId id="280"/>
           </p14:sldIdLst>
         </p14:section>
-        <p14:section name="Catalysts" id="{3d83b702-591d-dc1d-e888-1143abc162c4}">
+        <p14:section name="Catalysts" id="{0187b013-d1c3-4c7d-e445-42949a4caef1}">
           <p14:sldIdLst>
             <p14:sldId id="281"/>
           </p14:sldIdLst>
         </p14:section>
-        <p14:section name="Risks" id="{6cf972a9-4830-1a42-3f5d-92e1654e1075}">
+        <p14:section name="Risks" id="{e7275125-8c97-b464-6e65-f910f303ab46}">
           <p14:sldIdLst>
             <p14:sldId id="282"/>
           </p14:sldIdLst>
         </p14:section>
-        <p14:section name="Q&amp;A" id="{c6e14a51-ebdc-1aa6-5a5f-40e2683739ee}">
+        <p14:section name="Q&amp;A" id="{ac74a738-7486-8e2d-cfb5-69d04b5f3a4c}">
           <p14:sldIdLst>
             <p14:sldId id="283"/>
           </p14:sldIdLst>
         </p14:section>
-        <p14:section name="Appendix" id="{b827c6dc-d93b-45a9-d8a5-8f6b355aa416}">
+        <p14:section name="Appendix" id="{9e30361f-34c3-52d9-8e6c-6bf9f02963b8}">
           <p14:sldIdLst>
             <p14:sldId id="284"/>
             <p14:sldId id="285"/>
@@ -375,7 +375,7 @@
           </c:tx>
           <c:spPr>
             <a:solidFill>
-              <a:srgbClr val="B5AEA9"/>
+              <a:srgbClr val="2E93AE"/>
             </a:solidFill>
             <a:effectLst/>
           </c:spPr>
@@ -636,11 +636,11 @@
           </c:tx>
           <c:spPr>
             <a:solidFill>
-              <a:srgbClr val="B5AEA9"/>
+              <a:srgbClr val="2E93AE"/>
             </a:solidFill>
             <a:ln w="38100" cap="flat">
               <a:solidFill>
-                <a:srgbClr val="B5AEA9"/>
+                <a:srgbClr val="2E93AE"/>
               </a:solidFill>
               <a:prstDash val="solid"/>
               <a:round/>
@@ -678,11 +678,11 @@
             <c:size val="8"/>
             <c:spPr>
               <a:solidFill>
-                <a:srgbClr val="B5AEA9"/>
+                <a:srgbClr val="2E93AE"/>
               </a:solidFill>
               <a:ln w="9525" cap="flat">
                 <a:solidFill>
-                  <a:srgbClr val="B5AEA9"/>
+                  <a:srgbClr val="2E93AE"/>
                 </a:solidFill>
                 <a:prstDash val="solid"/>
                 <a:round/>
@@ -1419,7 +1419,7 @@
           </c:tx>
           <c:spPr>
             <a:solidFill>
-              <a:srgbClr val="B5AEA9"/>
+              <a:srgbClr val="2E93AE"/>
             </a:solidFill>
             <a:effectLst/>
           </c:spPr>
@@ -1798,7 +1798,7 @@
           </c:tx>
           <c:spPr>
             <a:solidFill>
-              <a:srgbClr val="B5AEA9"/>
+              <a:srgbClr val="2E93AE"/>
             </a:solidFill>
             <a:effectLst/>
           </c:spPr>
@@ -2185,7 +2185,7 @@
           </c:tx>
           <c:spPr>
             <a:solidFill>
-              <a:srgbClr val="B5AEA9"/>
+              <a:srgbClr val="2E93AE"/>
             </a:solidFill>
             <a:effectLst/>
           </c:spPr>
@@ -2525,7 +2525,7 @@
           </c:tx>
           <c:spPr>
             <a:solidFill>
-              <a:srgbClr val="B5AEA9"/>
+              <a:srgbClr val="2E93AE"/>
             </a:solidFill>
             <a:effectLst/>
           </c:spPr>
@@ -2881,7 +2881,7 @@
           </c:tx>
           <c:spPr>
             <a:solidFill>
-              <a:srgbClr val="B5AEA9"/>
+              <a:srgbClr val="2E93AE"/>
             </a:solidFill>
             <a:effectLst/>
           </c:spPr>
@@ -3130,7 +3130,7 @@
           </c:tx>
           <c:spPr>
             <a:solidFill>
-              <a:srgbClr val="B5AEA9"/>
+              <a:srgbClr val="2E93AE"/>
             </a:solidFill>
             <a:effectLst/>
           </c:spPr>
@@ -3480,7 +3480,7 @@
           </c:tx>
           <c:spPr>
             <a:solidFill>
-              <a:srgbClr val="B5AEA9"/>
+              <a:srgbClr val="2E93AE"/>
             </a:solidFill>
             <a:effectLst/>
           </c:spPr>
@@ -3854,7 +3854,7 @@
           </c:tx>
           <c:spPr>
             <a:solidFill>
-              <a:srgbClr val="B5AEA9"/>
+              <a:srgbClr val="2E93AE"/>
             </a:solidFill>
             <a:effectLst/>
           </c:spPr>
@@ -3889,7 +3889,7 @@
             <c:bubble3D val="0"/>
             <c:spPr>
               <a:solidFill>
-                <a:srgbClr val="B5AEA9"/>
+                <a:srgbClr val="2E93AE"/>
               </a:solidFill>
               <a:effectLst/>
             </c:spPr>
@@ -4367,7 +4367,7 @@
           </c:tx>
           <c:spPr>
             <a:solidFill>
-              <a:srgbClr val="B5AEA9"/>
+              <a:srgbClr val="2E93AE"/>
             </a:solidFill>
             <a:effectLst/>
           </c:spPr>
@@ -4729,7 +4729,7 @@
           </c:tx>
           <c:spPr>
             <a:solidFill>
-              <a:srgbClr val="B5AEA9"/>
+              <a:srgbClr val="2E93AE"/>
             </a:solidFill>
             <a:effectLst/>
           </c:spPr>
@@ -5381,7 +5381,7 @@
           </c:tx>
           <c:spPr>
             <a:solidFill>
-              <a:srgbClr val="847C7A"/>
+              <a:srgbClr val="2E93AE"/>
             </a:solidFill>
             <a:effectLst/>
           </c:spPr>
@@ -5988,7 +5988,7 @@
           </c:tx>
           <c:spPr>
             <a:solidFill>
-              <a:srgbClr val="B5AEA9"/>
+              <a:srgbClr val="2E93AE"/>
             </a:solidFill>
             <a:effectLst/>
           </c:spPr>
@@ -6535,7 +6535,7 @@
           </c:tx>
           <c:spPr>
             <a:solidFill>
-              <a:srgbClr val="B5AEA9"/>
+              <a:srgbClr val="2E93AE"/>
             </a:solidFill>
             <a:effectLst/>
           </c:spPr>
@@ -6932,11 +6932,11 @@
           </c:tx>
           <c:spPr>
             <a:solidFill>
-              <a:srgbClr val="B5AEA9"/>
+              <a:srgbClr val="2E93AE"/>
             </a:solidFill>
             <a:ln w="38100" cap="flat">
               <a:solidFill>
-                <a:srgbClr val="B5AEA9"/>
+                <a:srgbClr val="2E93AE"/>
               </a:solidFill>
               <a:prstDash val="solid"/>
               <a:round/>
@@ -6973,11 +6973,11 @@
             <c:size val="7"/>
             <c:spPr>
               <a:solidFill>
-                <a:srgbClr val="B5AEA9"/>
+                <a:srgbClr val="2E93AE"/>
               </a:solidFill>
               <a:ln w="9525" cap="flat">
                 <a:solidFill>
-                  <a:srgbClr val="B5AEA9"/>
+                  <a:srgbClr val="2E93AE"/>
                 </a:solidFill>
                 <a:prstDash val="solid"/>
                 <a:round/>
@@ -7211,7 +7211,7 @@
           </c:tx>
           <c:spPr>
             <a:solidFill>
-              <a:srgbClr val="B5AEA9"/>
+              <a:srgbClr val="2E93AE"/>
             </a:solidFill>
             <a:effectLst/>
           </c:spPr>
@@ -7712,11 +7712,11 @@
           </c:tx>
           <c:spPr>
             <a:solidFill>
-              <a:srgbClr val="847C7A"/>
+              <a:srgbClr val="2E93AE"/>
             </a:solidFill>
             <a:ln w="44450" cap="flat">
               <a:solidFill>
-                <a:srgbClr val="847C7A"/>
+                <a:srgbClr val="2E93AE"/>
               </a:solidFill>
               <a:prstDash val="solid"/>
               <a:round/>
@@ -7753,11 +7753,11 @@
             <c:size val="7"/>
             <c:spPr>
               <a:solidFill>
-                <a:srgbClr val="847C7A"/>
+                <a:srgbClr val="2E93AE"/>
               </a:solidFill>
               <a:ln w="9525" cap="flat">
                 <a:solidFill>
-                  <a:srgbClr val="847C7A"/>
+                  <a:srgbClr val="2E93AE"/>
                 </a:solidFill>
                 <a:prstDash val="solid"/>
                 <a:round/>
@@ -7922,7 +7922,7 @@
             <c:size val="6"/>
             <c:spPr>
               <a:solidFill>
-                <a:srgbClr val="0A1C58"/>
+                <a:srgbClr val="2E93AE"/>
               </a:solidFill>
               <a:ln w="9525" cap="flat">
                 <a:solidFill>
@@ -8019,11 +8019,11 @@
           </c:tx>
           <c:spPr>
             <a:solidFill>
-              <a:srgbClr val="847C7A"/>
+              <a:srgbClr val="2E93AE"/>
             </a:solidFill>
             <a:ln w="31750" cap="flat">
               <a:solidFill>
-                <a:srgbClr val="847C7A"/>
+                <a:srgbClr val="2E93AE"/>
               </a:solidFill>
               <a:prstDash val="dash"/>
               <a:round/>
@@ -8060,11 +8060,11 @@
             <c:size val="6"/>
             <c:spPr>
               <a:solidFill>
-                <a:srgbClr val="0A1C58"/>
+                <a:srgbClr val="2E93AE"/>
               </a:solidFill>
               <a:ln w="9525" cap="flat">
                 <a:solidFill>
-                  <a:srgbClr val="847C7A"/>
+                  <a:srgbClr val="2E93AE"/>
                 </a:solidFill>
                 <a:prstDash val="solid"/>
                 <a:round/>
@@ -12111,18 +12111,42 @@
           </a:prstGeom>
         </p:spPr>
       </p:pic>
-      <p:sp>
-        <p:nvSpPr>
-          <p:cNvPr id="4" name="Text 1"/>
+      <p:pic>
+        <p:nvPicPr>
+          <p:cNvPr id="4" name="Image 1" descr="/home/user/SPOT/deck/img/ftai_logo.png">    </p:cNvPr>
+          <p:cNvPicPr>
+            <a:picLocks noChangeAspect="1"/>
+          </p:cNvPicPr>
+          <p:nvPr/>
+        </p:nvPicPr>
+        <p:blipFill>
+          <a:blip r:embed="rId2"/>
+          <a:stretch>
+            <a:fillRect/>
+          </a:stretch>
+        </p:blipFill>
+        <p:spPr>
+          <a:xfrm>
+            <a:off x="7452360" y="246888"/>
+            <a:ext cx="1371600" cy="522923"/>
+          </a:xfrm>
+          <a:prstGeom prst="rect">
+            <a:avLst/>
+          </a:prstGeom>
+        </p:spPr>
+      </p:pic>
+      <p:sp>
+        <p:nvSpPr>
+          <p:cNvPr id="5" name="Text 1"/>
           <p:cNvSpPr/>
           <p:nvPr>
-            <p:ph idx="102" type="title" hasCustomPrompt="1"/>
+            <p:ph idx="103" type="title" hasCustomPrompt="1"/>
           </p:nvPr>
         </p:nvSpPr>
         <p:spPr>
           <a:xfrm>
             <a:off x="320040" y="182880"/>
-            <a:ext cx="8503920" cy="640080"/>
+            <a:ext cx="7040880" cy="640080"/>
           </a:xfrm>
           <a:prstGeom prst="rect">
             <a:avLst/>
@@ -12135,7 +12159,7 @@
           <a:lstStyle>
             <a:lvl1pPr algn="l" indent="0" marL="0">
               <a:buNone/>
-              <a:defRPr lang="en-US" sz="3200" b="1" dirty="0">
+              <a:defRPr lang="en-US" sz="3000" b="1" dirty="0">
                 <a:solidFill>
                   <a:schemeClr val="tx2"/>
                 </a:solidFill>
@@ -12146,7 +12170,7 @@
             <a:pPr algn="l" indent="0" marL="0">
               <a:buNone/>
             </a:pPr>
-            <a:endParaRPr lang="en-US" sz="3200" dirty="0"/>
+            <a:endParaRPr lang="en-US" sz="3000" dirty="0"/>
           </a:p>
         </p:txBody>
       </p:sp>
@@ -12274,18 +12298,42 @@
           </a:prstGeom>
         </p:spPr>
       </p:pic>
-      <p:sp>
-        <p:nvSpPr>
-          <p:cNvPr id="4" name="Text 1"/>
+      <p:pic>
+        <p:nvPicPr>
+          <p:cNvPr id="4" name="Image 1" descr="/home/user/SPOT/deck/img/ftai_logo.png">    </p:cNvPr>
+          <p:cNvPicPr>
+            <a:picLocks noChangeAspect="1"/>
+          </p:cNvPicPr>
+          <p:nvPr/>
+        </p:nvPicPr>
+        <p:blipFill>
+          <a:blip r:embed="rId2"/>
+          <a:stretch>
+            <a:fillRect/>
+          </a:stretch>
+        </p:blipFill>
+        <p:spPr>
+          <a:xfrm>
+            <a:off x="7452360" y="246888"/>
+            <a:ext cx="1371600" cy="522923"/>
+          </a:xfrm>
+          <a:prstGeom prst="rect">
+            <a:avLst/>
+          </a:prstGeom>
+        </p:spPr>
+      </p:pic>
+      <p:sp>
+        <p:nvSpPr>
+          <p:cNvPr id="5" name="Text 1"/>
           <p:cNvSpPr/>
           <p:nvPr>
-            <p:ph idx="102" type="title" hasCustomPrompt="1"/>
+            <p:ph idx="103" type="title" hasCustomPrompt="1"/>
           </p:nvPr>
         </p:nvSpPr>
         <p:spPr>
           <a:xfrm>
             <a:off x="320040" y="182880"/>
-            <a:ext cx="8503920" cy="640080"/>
+            <a:ext cx="7040880" cy="640080"/>
           </a:xfrm>
           <a:prstGeom prst="rect">
             <a:avLst/>
@@ -12298,7 +12346,7 @@
           <a:lstStyle>
             <a:lvl1pPr algn="l" indent="0" marL="0">
               <a:buNone/>
-              <a:defRPr lang="en-US" sz="3200" b="1" dirty="0">
+              <a:defRPr lang="en-US" sz="3000" b="1" dirty="0">
                 <a:solidFill>
                   <a:schemeClr val="tx2"/>
                 </a:solidFill>
@@ -12309,16 +12357,16 @@
             <a:pPr algn="l" indent="0" marL="0">
               <a:buNone/>
             </a:pPr>
-            <a:endParaRPr lang="en-US" sz="3200" dirty="0"/>
-          </a:p>
-        </p:txBody>
-      </p:sp>
-      <p:sp>
-        <p:nvSpPr>
-          <p:cNvPr id="5" name="Text 1"/>
+            <a:endParaRPr lang="en-US" sz="3000" dirty="0"/>
+          </a:p>
+        </p:txBody>
+      </p:sp>
+      <p:sp>
+        <p:nvSpPr>
+          <p:cNvPr id="6" name="Text 1"/>
           <p:cNvSpPr/>
           <p:nvPr>
-            <p:ph idx="103" type="body" hasCustomPrompt="1"/>
+            <p:ph idx="104" type="body" hasCustomPrompt="1"/>
           </p:nvPr>
         </p:nvSpPr>
         <p:spPr>
@@ -12797,549 +12845,9 @@
           </a:p>
         </p:txBody>
       </p:sp>
-      <p:sp>
-        <p:nvSpPr>
-          <p:cNvPr id="3" name="Recommendation"/>
-          <p:cNvSpPr txBox="1"/>
-          <p:nvPr/>
-        </p:nvSpPr>
-        <p:spPr>
-          <a:xfrm>
-            <a:off x="548640" y="1508760"/>
-            <a:ext cx="6400800" cy="502920"/>
-          </a:xfrm>
-          <a:prstGeom prst="rect">
-            <a:avLst/>
-          </a:prstGeom>
-          <a:noFill/>
-          <a:ln/>
-        </p:spPr>
-        <p:txBody>
-          <a:bodyPr wrap="square" lIns="0" tIns="0" rIns="0" bIns="0" rtlCol="0" anchor="ctr"/>
-          <a:lstStyle/>
-          <a:p>
-            <a:pPr indent="0" marL="0">
-              <a:buNone/>
-            </a:pPr>
-            <a:r>
-              <a:rPr lang="en-US" sz="2800" b="1" dirty="0">
-                <a:solidFill>
-                  <a:schemeClr val="accent2"/>
-                </a:solidFill>
-              </a:rPr>
-              <a:t>Long Recommendation</a:t>
-            </a:r>
-            <a:endParaRPr lang="en-US" sz="2800" dirty="0"/>
-          </a:p>
-        </p:txBody>
-      </p:sp>
-      <p:sp>
-        <p:nvSpPr>
-          <p:cNvPr id="4" name="Stat 1 value"/>
-          <p:cNvSpPr txBox="1"/>
-          <p:nvPr/>
-        </p:nvSpPr>
-        <p:spPr>
-          <a:xfrm>
-            <a:off x="548640" y="2514600"/>
-            <a:ext cx="2011680" cy="868680"/>
-          </a:xfrm>
-          <a:prstGeom prst="rect">
-            <a:avLst/>
-          </a:prstGeom>
-          <a:noFill/>
-          <a:ln/>
-        </p:spPr>
-        <p:txBody>
-          <a:bodyPr wrap="square" lIns="0" tIns="0" rIns="0" bIns="0" rtlCol="0" anchor="b"/>
-          <a:lstStyle/>
-          <a:p>
-            <a:pPr algn="ctr" indent="0" marL="0">
-              <a:buNone/>
-            </a:pPr>
-            <a:r>
-              <a:rPr lang="en-US" sz="4800" b="1" dirty="0">
-                <a:solidFill>
-                  <a:schemeClr val="tx2"/>
-                </a:solidFill>
-              </a:rPr>
-              <a:t>$167</a:t>
-            </a:r>
-            <a:endParaRPr lang="en-US" sz="4800" dirty="0"/>
-          </a:p>
-        </p:txBody>
-      </p:sp>
-      <p:sp>
-        <p:nvSpPr>
-          <p:cNvPr id="5" name="Stat 1 label"/>
-          <p:cNvSpPr txBox="1"/>
-          <p:nvPr/>
-        </p:nvSpPr>
-        <p:spPr>
-          <a:xfrm>
-            <a:off x="548640" y="3429000"/>
-            <a:ext cx="2011680" cy="365760"/>
-          </a:xfrm>
-          <a:prstGeom prst="rect">
-            <a:avLst/>
-          </a:prstGeom>
-          <a:noFill/>
-          <a:ln/>
-        </p:spPr>
-        <p:txBody>
-          <a:bodyPr wrap="square" lIns="0" tIns="0" rIns="0" bIns="0" rtlCol="0" anchor="t"/>
-          <a:lstStyle/>
-          <a:p>
-            <a:pPr algn="ctr" indent="0" marL="0">
-              <a:buNone/>
-            </a:pPr>
-            <a:r>
-              <a:rPr lang="en-US" sz="1600" dirty="0">
-                <a:solidFill>
-                  <a:schemeClr val="accent2"/>
-                </a:solidFill>
-              </a:rPr>
-              <a:t>Current Price</a:t>
-            </a:r>
-            <a:endParaRPr lang="en-US" sz="1600" dirty="0"/>
-          </a:p>
-        </p:txBody>
-      </p:sp>
-      <p:sp>
-        <p:nvSpPr>
-          <p:cNvPr id="6" name="Stat 2 value"/>
-          <p:cNvSpPr txBox="1"/>
-          <p:nvPr/>
-        </p:nvSpPr>
-        <p:spPr>
-          <a:xfrm>
-            <a:off x="2560320" y="2514600"/>
-            <a:ext cx="2011680" cy="868680"/>
-          </a:xfrm>
-          <a:prstGeom prst="rect">
-            <a:avLst/>
-          </a:prstGeom>
-          <a:noFill/>
-          <a:ln/>
-        </p:spPr>
-        <p:txBody>
-          <a:bodyPr wrap="square" lIns="0" tIns="0" rIns="0" bIns="0" rtlCol="0" anchor="b"/>
-          <a:lstStyle/>
-          <a:p>
-            <a:pPr algn="ctr" indent="0" marL="0">
-              <a:buNone/>
-            </a:pPr>
-            <a:r>
-              <a:rPr lang="en-US" sz="4800" b="1" dirty="0">
-                <a:solidFill>
-                  <a:schemeClr val="tx2"/>
-                </a:solidFill>
-              </a:rPr>
-              <a:t>$308</a:t>
-            </a:r>
-            <a:endParaRPr lang="en-US" sz="4800" dirty="0"/>
-          </a:p>
-        </p:txBody>
-      </p:sp>
-      <p:sp>
-        <p:nvSpPr>
-          <p:cNvPr id="7" name="Stat 2 label"/>
-          <p:cNvSpPr txBox="1"/>
-          <p:nvPr/>
-        </p:nvSpPr>
-        <p:spPr>
-          <a:xfrm>
-            <a:off x="2560320" y="3429000"/>
-            <a:ext cx="2011680" cy="365760"/>
-          </a:xfrm>
-          <a:prstGeom prst="rect">
-            <a:avLst/>
-          </a:prstGeom>
-          <a:noFill/>
-          <a:ln/>
-        </p:spPr>
-        <p:txBody>
-          <a:bodyPr wrap="square" lIns="0" tIns="0" rIns="0" bIns="0" rtlCol="0" anchor="t"/>
-          <a:lstStyle/>
-          <a:p>
-            <a:pPr algn="ctr" indent="0" marL="0">
-              <a:buNone/>
-            </a:pPr>
-            <a:r>
-              <a:rPr lang="en-US" sz="1600" dirty="0">
-                <a:solidFill>
-                  <a:schemeClr val="accent2"/>
-                </a:solidFill>
-              </a:rPr>
-              <a:t>Target Price</a:t>
-            </a:r>
-            <a:endParaRPr lang="en-US" sz="1600" dirty="0"/>
-          </a:p>
-        </p:txBody>
-      </p:sp>
-      <p:sp>
-        <p:nvSpPr>
-          <p:cNvPr id="8" name="Stat divider 1"/>
-          <p:cNvSpPr/>
-          <p:nvPr/>
-        </p:nvSpPr>
-        <p:spPr>
-          <a:xfrm>
-            <a:off x="2560320" y="2697480"/>
-            <a:ext cx="0" cy="1051560"/>
-          </a:xfrm>
-          <a:prstGeom prst="line">
-            <a:avLst/>
-          </a:prstGeom>
-          <a:noFill/>
-          <a:ln w="12700">
-            <a:solidFill>
-              <a:srgbClr val="DCD8D3"/>
-            </a:solidFill>
-            <a:prstDash val="solid"/>
-          </a:ln>
-        </p:spPr>
-      </p:sp>
-      <p:sp>
-        <p:nvSpPr>
-          <p:cNvPr id="9" name="Stat 3 value"/>
-          <p:cNvSpPr txBox="1"/>
-          <p:nvPr/>
-        </p:nvSpPr>
-        <p:spPr>
-          <a:xfrm>
-            <a:off x="4572000" y="2514600"/>
-            <a:ext cx="2011680" cy="868680"/>
-          </a:xfrm>
-          <a:prstGeom prst="rect">
-            <a:avLst/>
-          </a:prstGeom>
-          <a:noFill/>
-          <a:ln/>
-        </p:spPr>
-        <p:txBody>
-          <a:bodyPr wrap="square" lIns="0" tIns="0" rIns="0" bIns="0" rtlCol="0" anchor="b"/>
-          <a:lstStyle/>
-          <a:p>
-            <a:pPr algn="ctr" indent="0" marL="0">
-              <a:buNone/>
-            </a:pPr>
-            <a:r>
-              <a:rPr lang="en-US" sz="4800" b="1" dirty="0">
-                <a:solidFill>
-                  <a:schemeClr val="tx2"/>
-                </a:solidFill>
-              </a:rPr>
-              <a:t>84%</a:t>
-            </a:r>
-            <a:endParaRPr lang="en-US" sz="4800" dirty="0"/>
-          </a:p>
-        </p:txBody>
-      </p:sp>
-      <p:sp>
-        <p:nvSpPr>
-          <p:cNvPr id="10" name="Stat 3 label"/>
-          <p:cNvSpPr txBox="1"/>
-          <p:nvPr/>
-        </p:nvSpPr>
-        <p:spPr>
-          <a:xfrm>
-            <a:off x="4572000" y="3429000"/>
-            <a:ext cx="2011680" cy="365760"/>
-          </a:xfrm>
-          <a:prstGeom prst="rect">
-            <a:avLst/>
-          </a:prstGeom>
-          <a:noFill/>
-          <a:ln/>
-        </p:spPr>
-        <p:txBody>
-          <a:bodyPr wrap="square" lIns="0" tIns="0" rIns="0" bIns="0" rtlCol="0" anchor="t"/>
-          <a:lstStyle/>
-          <a:p>
-            <a:pPr algn="ctr" indent="0" marL="0">
-              <a:buNone/>
-            </a:pPr>
-            <a:r>
-              <a:rPr lang="en-US" sz="1600" dirty="0">
-                <a:solidFill>
-                  <a:schemeClr val="accent2"/>
-                </a:solidFill>
-              </a:rPr>
-              <a:t>Upside</a:t>
-            </a:r>
-            <a:endParaRPr lang="en-US" sz="1600" dirty="0"/>
-          </a:p>
-        </p:txBody>
-      </p:sp>
-      <p:sp>
-        <p:nvSpPr>
-          <p:cNvPr id="11" name="Stat divider 2"/>
-          <p:cNvSpPr/>
-          <p:nvPr/>
-        </p:nvSpPr>
-        <p:spPr>
-          <a:xfrm>
-            <a:off x="4572000" y="2697480"/>
-            <a:ext cx="0" cy="1051560"/>
-          </a:xfrm>
-          <a:prstGeom prst="line">
-            <a:avLst/>
-          </a:prstGeom>
-          <a:noFill/>
-          <a:ln w="12700">
-            <a:solidFill>
-              <a:srgbClr val="DCD8D3"/>
-            </a:solidFill>
-            <a:prstDash val="solid"/>
-          </a:ln>
-        </p:spPr>
-      </p:sp>
-      <p:sp>
-        <p:nvSpPr>
-          <p:cNvPr id="12" name="Stat 4 value"/>
-          <p:cNvSpPr txBox="1"/>
-          <p:nvPr/>
-        </p:nvSpPr>
-        <p:spPr>
-          <a:xfrm>
-            <a:off x="6583680" y="2514600"/>
-            <a:ext cx="2011680" cy="868680"/>
-          </a:xfrm>
-          <a:prstGeom prst="rect">
-            <a:avLst/>
-          </a:prstGeom>
-          <a:noFill/>
-          <a:ln/>
-        </p:spPr>
-        <p:txBody>
-          <a:bodyPr wrap="square" lIns="0" tIns="0" rIns="0" bIns="0" rtlCol="0" anchor="b"/>
-          <a:lstStyle/>
-          <a:p>
-            <a:pPr algn="ctr" indent="0" marL="0">
-              <a:buNone/>
-            </a:pPr>
-            <a:r>
-              <a:rPr lang="en-US" sz="4800" b="1" dirty="0">
-                <a:solidFill>
-                  <a:schemeClr val="tx2"/>
-                </a:solidFill>
-              </a:rPr>
-              <a:t>3.4x</a:t>
-            </a:r>
-            <a:endParaRPr lang="en-US" sz="4800" dirty="0"/>
-          </a:p>
-        </p:txBody>
-      </p:sp>
-      <p:sp>
-        <p:nvSpPr>
-          <p:cNvPr id="13" name="Stat 4 label"/>
-          <p:cNvSpPr txBox="1"/>
-          <p:nvPr/>
-        </p:nvSpPr>
-        <p:spPr>
-          <a:xfrm>
-            <a:off x="6583680" y="3429000"/>
-            <a:ext cx="2011680" cy="365760"/>
-          </a:xfrm>
-          <a:prstGeom prst="rect">
-            <a:avLst/>
-          </a:prstGeom>
-          <a:noFill/>
-          <a:ln/>
-        </p:spPr>
-        <p:txBody>
-          <a:bodyPr wrap="square" lIns="0" tIns="0" rIns="0" bIns="0" rtlCol="0" anchor="t"/>
-          <a:lstStyle/>
-          <a:p>
-            <a:pPr algn="ctr" indent="0" marL="0">
-              <a:buNone/>
-            </a:pPr>
-            <a:r>
-              <a:rPr lang="en-US" sz="1600" dirty="0">
-                <a:solidFill>
-                  <a:schemeClr val="accent2"/>
-                </a:solidFill>
-              </a:rPr>
-              <a:t>Reward / Risk</a:t>
-            </a:r>
-            <a:endParaRPr lang="en-US" sz="1600" dirty="0"/>
-          </a:p>
-        </p:txBody>
-      </p:sp>
-      <p:sp>
-        <p:nvSpPr>
-          <p:cNvPr id="14" name="Stat divider 3"/>
-          <p:cNvSpPr/>
-          <p:nvPr/>
-        </p:nvSpPr>
-        <p:spPr>
-          <a:xfrm>
-            <a:off x="6583680" y="2697480"/>
-            <a:ext cx="0" cy="1051560"/>
-          </a:xfrm>
-          <a:prstGeom prst="line">
-            <a:avLst/>
-          </a:prstGeom>
-          <a:noFill/>
-          <a:ln w="12700">
-            <a:solidFill>
-              <a:srgbClr val="DCD8D3"/>
-            </a:solidFill>
-            <a:prstDash val="solid"/>
-          </a:ln>
-        </p:spPr>
-      </p:sp>
-      <p:sp>
-        <p:nvSpPr>
-          <p:cNvPr id="15" name="Quote"/>
-          <p:cNvSpPr txBox="1"/>
-          <p:nvPr/>
-        </p:nvSpPr>
-        <p:spPr>
-          <a:xfrm>
-            <a:off x="411480" y="4206240"/>
-            <a:ext cx="8321040" cy="731520"/>
-          </a:xfrm>
-          <a:prstGeom prst="rect">
-            <a:avLst/>
-          </a:prstGeom>
-          <a:solidFill>
-            <a:srgbClr val="EFEDEA"/>
-          </a:solidFill>
-          <a:ln/>
-        </p:spPr>
-        <p:txBody>
-          <a:bodyPr wrap="square" lIns="127000" tIns="50800" rIns="127000" bIns="50800" rtlCol="0" anchor="ctr"/>
-          <a:lstStyle/>
-          <a:p>
-            <a:pPr algn="ctr" indent="0" marL="0">
-              <a:buNone/>
-            </a:pPr>
-            <a:r>
-              <a:rPr lang="en-US" sz="1900" b="1" dirty="0">
-                <a:solidFill>
-                  <a:srgbClr val="1A1A1A"/>
-                </a:solidFill>
-              </a:rPr>
-              <a:t>“Be fearful when others are greedy and greedy when others are fearful.”</a:t>
-            </a:r>
-            <a:endParaRPr lang="en-US" sz="1900" dirty="0"/>
-          </a:p>
-        </p:txBody>
-      </p:sp>
-      <p:sp>
-        <p:nvSpPr>
-          <p:cNvPr id="16" name="Quote attribution"/>
-          <p:cNvSpPr txBox="1"/>
-          <p:nvPr/>
-        </p:nvSpPr>
-        <p:spPr>
-          <a:xfrm>
-            <a:off x="411480" y="5029200"/>
-            <a:ext cx="8321040" cy="365760"/>
-          </a:xfrm>
-          <a:prstGeom prst="rect">
-            <a:avLst/>
-          </a:prstGeom>
-          <a:noFill/>
-          <a:ln/>
-        </p:spPr>
-        <p:txBody>
-          <a:bodyPr wrap="square" lIns="0" tIns="0" rIns="0" bIns="0" rtlCol="0" anchor="ctr"/>
-          <a:lstStyle/>
-          <a:p>
-            <a:pPr algn="ctr" indent="0" marL="0">
-              <a:buNone/>
-            </a:pPr>
-            <a:r>
-              <a:rPr lang="en-US" sz="1900" b="1" i="1" dirty="0">
-                <a:solidFill>
-                  <a:srgbClr val="1A1A1A"/>
-                </a:solidFill>
-              </a:rPr>
-              <a:t>— Warren Buffett</a:t>
-            </a:r>
-            <a:endParaRPr lang="en-US" sz="1900" dirty="0"/>
-          </a:p>
-        </p:txBody>
-      </p:sp>
-      <p:sp>
-        <p:nvSpPr>
-          <p:cNvPr id="17" name="Pitch details"/>
-          <p:cNvSpPr txBox="1"/>
-          <p:nvPr/>
-        </p:nvSpPr>
-        <p:spPr>
-          <a:xfrm>
-            <a:off x="548640" y="5760720"/>
-            <a:ext cx="4754880" cy="868680"/>
-          </a:xfrm>
-          <a:prstGeom prst="rect">
-            <a:avLst/>
-          </a:prstGeom>
-          <a:noFill/>
-          <a:ln/>
-        </p:spPr>
-        <p:txBody>
-          <a:bodyPr wrap="square" lIns="0" tIns="0" rIns="0" bIns="0" rtlCol="0" anchor="t"/>
-          <a:lstStyle/>
-          <a:p>
-            <a:pPr indent="0" marL="0">
-              <a:spcAft>
-                <a:spcPts val="200"/>
-              </a:spcAft>
-              <a:buNone/>
-            </a:pPr>
-            <a:r>
-              <a:rPr lang="en-US" sz="1500" dirty="0">
-                <a:solidFill>
-                  <a:srgbClr val="1A1A1A"/>
-                </a:solidFill>
-              </a:rPr>
-              <a:t>Date: October 2026</a:t>
-            </a:r>
-            <a:endParaRPr lang="en-US" sz="1500" dirty="0"/>
-          </a:p>
-          <a:p>
-            <a:pPr indent="0" marL="0">
-              <a:spcAft>
-                <a:spcPts val="200"/>
-              </a:spcAft>
-              <a:buNone/>
-            </a:pPr>
-            <a:r>
-              <a:rPr lang="en-US" sz="1500" dirty="0">
-                <a:solidFill>
-                  <a:srgbClr val="1A1A1A"/>
-                </a:solidFill>
-              </a:rPr>
-              <a:t>Current Price: $167.03 (10/2/26)</a:t>
-            </a:r>
-            <a:endParaRPr lang="en-US" sz="1500" dirty="0"/>
-          </a:p>
-          <a:p>
-            <a:pPr indent="0" marL="0">
-              <a:spcAft>
-                <a:spcPts val="200"/>
-              </a:spcAft>
-              <a:buNone/>
-            </a:pPr>
-            <a:r>
-              <a:rPr lang="en-US" sz="1500" dirty="0">
-                <a:solidFill>
-                  <a:srgbClr val="1A1A1A"/>
-                </a:solidFill>
-              </a:rPr>
-              <a:t>Target Price: $308.03 (84% upside, 3.4x R/R)</a:t>
-            </a:r>
-            <a:endParaRPr lang="en-US" sz="1500" dirty="0"/>
-          </a:p>
-        </p:txBody>
-      </p:sp>
       <p:pic>
         <p:nvPicPr>
-          <p:cNvPr id="18" name="GPS logo" descr="/home/user/SPOT/deck/gps_logo.jpeg">    </p:cNvPr>
+          <p:cNvPr id="3" name="FTAI logo" descr="/home/user/SPOT/deck/img/ftai_logo.png">    </p:cNvPr>
           <p:cNvPicPr>
             <a:picLocks noChangeAspect="1"/>
           </p:cNvPicPr>
@@ -13353,6 +12861,570 @@
         </p:blipFill>
         <p:spPr>
           <a:xfrm>
+            <a:off x="6766560" y="365760"/>
+            <a:ext cx="2011680" cy="766953"/>
+          </a:xfrm>
+          <a:prstGeom prst="rect">
+            <a:avLst/>
+          </a:prstGeom>
+        </p:spPr>
+      </p:pic>
+      <p:sp>
+        <p:nvSpPr>
+          <p:cNvPr id="4" name="Recommendation"/>
+          <p:cNvSpPr txBox="1"/>
+          <p:nvPr/>
+        </p:nvSpPr>
+        <p:spPr>
+          <a:xfrm>
+            <a:off x="548640" y="1508760"/>
+            <a:ext cx="6400800" cy="502920"/>
+          </a:xfrm>
+          <a:prstGeom prst="rect">
+            <a:avLst/>
+          </a:prstGeom>
+          <a:noFill/>
+          <a:ln/>
+        </p:spPr>
+        <p:txBody>
+          <a:bodyPr wrap="square" lIns="0" tIns="0" rIns="0" bIns="0" rtlCol="0" anchor="ctr"/>
+          <a:lstStyle/>
+          <a:p>
+            <a:pPr indent="0" marL="0">
+              <a:buNone/>
+            </a:pPr>
+            <a:r>
+              <a:rPr lang="en-US" sz="2800" b="1" dirty="0">
+                <a:solidFill>
+                  <a:srgbClr val="EE6E25"/>
+                </a:solidFill>
+              </a:rPr>
+              <a:t>Long Recommendation</a:t>
+            </a:r>
+            <a:endParaRPr lang="en-US" sz="2800" dirty="0"/>
+          </a:p>
+        </p:txBody>
+      </p:sp>
+      <p:sp>
+        <p:nvSpPr>
+          <p:cNvPr id="5" name="Stat 1 value"/>
+          <p:cNvSpPr txBox="1"/>
+          <p:nvPr/>
+        </p:nvSpPr>
+        <p:spPr>
+          <a:xfrm>
+            <a:off x="548640" y="2514600"/>
+            <a:ext cx="2011680" cy="868680"/>
+          </a:xfrm>
+          <a:prstGeom prst="rect">
+            <a:avLst/>
+          </a:prstGeom>
+          <a:noFill/>
+          <a:ln/>
+        </p:spPr>
+        <p:txBody>
+          <a:bodyPr wrap="square" lIns="0" tIns="0" rIns="0" bIns="0" rtlCol="0" anchor="b"/>
+          <a:lstStyle/>
+          <a:p>
+            <a:pPr algn="ctr" indent="0" marL="0">
+              <a:buNone/>
+            </a:pPr>
+            <a:r>
+              <a:rPr lang="en-US" sz="4800" b="1" dirty="0">
+                <a:solidFill>
+                  <a:schemeClr val="tx2"/>
+                </a:solidFill>
+              </a:rPr>
+              <a:t>$167</a:t>
+            </a:r>
+            <a:endParaRPr lang="en-US" sz="4800" dirty="0"/>
+          </a:p>
+        </p:txBody>
+      </p:sp>
+      <p:sp>
+        <p:nvSpPr>
+          <p:cNvPr id="6" name="Stat 1 label"/>
+          <p:cNvSpPr txBox="1"/>
+          <p:nvPr/>
+        </p:nvSpPr>
+        <p:spPr>
+          <a:xfrm>
+            <a:off x="548640" y="3429000"/>
+            <a:ext cx="2011680" cy="365760"/>
+          </a:xfrm>
+          <a:prstGeom prst="rect">
+            <a:avLst/>
+          </a:prstGeom>
+          <a:noFill/>
+          <a:ln/>
+        </p:spPr>
+        <p:txBody>
+          <a:bodyPr wrap="square" lIns="0" tIns="0" rIns="0" bIns="0" rtlCol="0" anchor="t"/>
+          <a:lstStyle/>
+          <a:p>
+            <a:pPr algn="ctr" indent="0" marL="0">
+              <a:buNone/>
+            </a:pPr>
+            <a:r>
+              <a:rPr lang="en-US" sz="1600" dirty="0">
+                <a:solidFill>
+                  <a:schemeClr val="accent2"/>
+                </a:solidFill>
+              </a:rPr>
+              <a:t>Current Price</a:t>
+            </a:r>
+            <a:endParaRPr lang="en-US" sz="1600" dirty="0"/>
+          </a:p>
+        </p:txBody>
+      </p:sp>
+      <p:sp>
+        <p:nvSpPr>
+          <p:cNvPr id="7" name="Stat 2 value"/>
+          <p:cNvSpPr txBox="1"/>
+          <p:nvPr/>
+        </p:nvSpPr>
+        <p:spPr>
+          <a:xfrm>
+            <a:off x="2560320" y="2514600"/>
+            <a:ext cx="2011680" cy="868680"/>
+          </a:xfrm>
+          <a:prstGeom prst="rect">
+            <a:avLst/>
+          </a:prstGeom>
+          <a:noFill/>
+          <a:ln/>
+        </p:spPr>
+        <p:txBody>
+          <a:bodyPr wrap="square" lIns="0" tIns="0" rIns="0" bIns="0" rtlCol="0" anchor="b"/>
+          <a:lstStyle/>
+          <a:p>
+            <a:pPr algn="ctr" indent="0" marL="0">
+              <a:buNone/>
+            </a:pPr>
+            <a:r>
+              <a:rPr lang="en-US" sz="4800" b="1" dirty="0">
+                <a:solidFill>
+                  <a:schemeClr val="tx2"/>
+                </a:solidFill>
+              </a:rPr>
+              <a:t>$308</a:t>
+            </a:r>
+            <a:endParaRPr lang="en-US" sz="4800" dirty="0"/>
+          </a:p>
+        </p:txBody>
+      </p:sp>
+      <p:sp>
+        <p:nvSpPr>
+          <p:cNvPr id="8" name="Stat 2 label"/>
+          <p:cNvSpPr txBox="1"/>
+          <p:nvPr/>
+        </p:nvSpPr>
+        <p:spPr>
+          <a:xfrm>
+            <a:off x="2560320" y="3429000"/>
+            <a:ext cx="2011680" cy="365760"/>
+          </a:xfrm>
+          <a:prstGeom prst="rect">
+            <a:avLst/>
+          </a:prstGeom>
+          <a:noFill/>
+          <a:ln/>
+        </p:spPr>
+        <p:txBody>
+          <a:bodyPr wrap="square" lIns="0" tIns="0" rIns="0" bIns="0" rtlCol="0" anchor="t"/>
+          <a:lstStyle/>
+          <a:p>
+            <a:pPr algn="ctr" indent="0" marL="0">
+              <a:buNone/>
+            </a:pPr>
+            <a:r>
+              <a:rPr lang="en-US" sz="1600" dirty="0">
+                <a:solidFill>
+                  <a:schemeClr val="accent2"/>
+                </a:solidFill>
+              </a:rPr>
+              <a:t>Target Price</a:t>
+            </a:r>
+            <a:endParaRPr lang="en-US" sz="1600" dirty="0"/>
+          </a:p>
+        </p:txBody>
+      </p:sp>
+      <p:sp>
+        <p:nvSpPr>
+          <p:cNvPr id="9" name="Stat divider 1"/>
+          <p:cNvSpPr/>
+          <p:nvPr/>
+        </p:nvSpPr>
+        <p:spPr>
+          <a:xfrm>
+            <a:off x="2560320" y="2697480"/>
+            <a:ext cx="0" cy="1051560"/>
+          </a:xfrm>
+          <a:prstGeom prst="line">
+            <a:avLst/>
+          </a:prstGeom>
+          <a:noFill/>
+          <a:ln w="12700">
+            <a:solidFill>
+              <a:srgbClr val="DCD8D3"/>
+            </a:solidFill>
+            <a:prstDash val="solid"/>
+          </a:ln>
+        </p:spPr>
+      </p:sp>
+      <p:sp>
+        <p:nvSpPr>
+          <p:cNvPr id="10" name="Stat 3 value"/>
+          <p:cNvSpPr txBox="1"/>
+          <p:nvPr/>
+        </p:nvSpPr>
+        <p:spPr>
+          <a:xfrm>
+            <a:off x="4572000" y="2514600"/>
+            <a:ext cx="2011680" cy="868680"/>
+          </a:xfrm>
+          <a:prstGeom prst="rect">
+            <a:avLst/>
+          </a:prstGeom>
+          <a:noFill/>
+          <a:ln/>
+        </p:spPr>
+        <p:txBody>
+          <a:bodyPr wrap="square" lIns="0" tIns="0" rIns="0" bIns="0" rtlCol="0" anchor="b"/>
+          <a:lstStyle/>
+          <a:p>
+            <a:pPr algn="ctr" indent="0" marL="0">
+              <a:buNone/>
+            </a:pPr>
+            <a:r>
+              <a:rPr lang="en-US" sz="4800" b="1" dirty="0">
+                <a:solidFill>
+                  <a:schemeClr val="tx2"/>
+                </a:solidFill>
+              </a:rPr>
+              <a:t>84%</a:t>
+            </a:r>
+            <a:endParaRPr lang="en-US" sz="4800" dirty="0"/>
+          </a:p>
+        </p:txBody>
+      </p:sp>
+      <p:sp>
+        <p:nvSpPr>
+          <p:cNvPr id="11" name="Stat 3 label"/>
+          <p:cNvSpPr txBox="1"/>
+          <p:nvPr/>
+        </p:nvSpPr>
+        <p:spPr>
+          <a:xfrm>
+            <a:off x="4572000" y="3429000"/>
+            <a:ext cx="2011680" cy="365760"/>
+          </a:xfrm>
+          <a:prstGeom prst="rect">
+            <a:avLst/>
+          </a:prstGeom>
+          <a:noFill/>
+          <a:ln/>
+        </p:spPr>
+        <p:txBody>
+          <a:bodyPr wrap="square" lIns="0" tIns="0" rIns="0" bIns="0" rtlCol="0" anchor="t"/>
+          <a:lstStyle/>
+          <a:p>
+            <a:pPr algn="ctr" indent="0" marL="0">
+              <a:buNone/>
+            </a:pPr>
+            <a:r>
+              <a:rPr lang="en-US" sz="1600" dirty="0">
+                <a:solidFill>
+                  <a:schemeClr val="accent2"/>
+                </a:solidFill>
+              </a:rPr>
+              <a:t>Upside</a:t>
+            </a:r>
+            <a:endParaRPr lang="en-US" sz="1600" dirty="0"/>
+          </a:p>
+        </p:txBody>
+      </p:sp>
+      <p:sp>
+        <p:nvSpPr>
+          <p:cNvPr id="12" name="Stat divider 2"/>
+          <p:cNvSpPr/>
+          <p:nvPr/>
+        </p:nvSpPr>
+        <p:spPr>
+          <a:xfrm>
+            <a:off x="4572000" y="2697480"/>
+            <a:ext cx="0" cy="1051560"/>
+          </a:xfrm>
+          <a:prstGeom prst="line">
+            <a:avLst/>
+          </a:prstGeom>
+          <a:noFill/>
+          <a:ln w="12700">
+            <a:solidFill>
+              <a:srgbClr val="DCD8D3"/>
+            </a:solidFill>
+            <a:prstDash val="solid"/>
+          </a:ln>
+        </p:spPr>
+      </p:sp>
+      <p:sp>
+        <p:nvSpPr>
+          <p:cNvPr id="13" name="Stat 4 value"/>
+          <p:cNvSpPr txBox="1"/>
+          <p:nvPr/>
+        </p:nvSpPr>
+        <p:spPr>
+          <a:xfrm>
+            <a:off x="6583680" y="2514600"/>
+            <a:ext cx="2011680" cy="868680"/>
+          </a:xfrm>
+          <a:prstGeom prst="rect">
+            <a:avLst/>
+          </a:prstGeom>
+          <a:noFill/>
+          <a:ln/>
+        </p:spPr>
+        <p:txBody>
+          <a:bodyPr wrap="square" lIns="0" tIns="0" rIns="0" bIns="0" rtlCol="0" anchor="b"/>
+          <a:lstStyle/>
+          <a:p>
+            <a:pPr algn="ctr" indent="0" marL="0">
+              <a:buNone/>
+            </a:pPr>
+            <a:r>
+              <a:rPr lang="en-US" sz="4800" b="1" dirty="0">
+                <a:solidFill>
+                  <a:schemeClr val="tx2"/>
+                </a:solidFill>
+              </a:rPr>
+              <a:t>3.4x</a:t>
+            </a:r>
+            <a:endParaRPr lang="en-US" sz="4800" dirty="0"/>
+          </a:p>
+        </p:txBody>
+      </p:sp>
+      <p:sp>
+        <p:nvSpPr>
+          <p:cNvPr id="14" name="Stat 4 label"/>
+          <p:cNvSpPr txBox="1"/>
+          <p:nvPr/>
+        </p:nvSpPr>
+        <p:spPr>
+          <a:xfrm>
+            <a:off x="6583680" y="3429000"/>
+            <a:ext cx="2011680" cy="365760"/>
+          </a:xfrm>
+          <a:prstGeom prst="rect">
+            <a:avLst/>
+          </a:prstGeom>
+          <a:noFill/>
+          <a:ln/>
+        </p:spPr>
+        <p:txBody>
+          <a:bodyPr wrap="square" lIns="0" tIns="0" rIns="0" bIns="0" rtlCol="0" anchor="t"/>
+          <a:lstStyle/>
+          <a:p>
+            <a:pPr algn="ctr" indent="0" marL="0">
+              <a:buNone/>
+            </a:pPr>
+            <a:r>
+              <a:rPr lang="en-US" sz="1600" dirty="0">
+                <a:solidFill>
+                  <a:schemeClr val="accent2"/>
+                </a:solidFill>
+              </a:rPr>
+              <a:t>Reward / Risk</a:t>
+            </a:r>
+            <a:endParaRPr lang="en-US" sz="1600" dirty="0"/>
+          </a:p>
+        </p:txBody>
+      </p:sp>
+      <p:sp>
+        <p:nvSpPr>
+          <p:cNvPr id="15" name="Stat divider 3"/>
+          <p:cNvSpPr/>
+          <p:nvPr/>
+        </p:nvSpPr>
+        <p:spPr>
+          <a:xfrm>
+            <a:off x="6583680" y="2697480"/>
+            <a:ext cx="0" cy="1051560"/>
+          </a:xfrm>
+          <a:prstGeom prst="line">
+            <a:avLst/>
+          </a:prstGeom>
+          <a:noFill/>
+          <a:ln w="12700">
+            <a:solidFill>
+              <a:srgbClr val="DCD8D3"/>
+            </a:solidFill>
+            <a:prstDash val="solid"/>
+          </a:ln>
+        </p:spPr>
+      </p:sp>
+      <p:sp>
+        <p:nvSpPr>
+          <p:cNvPr id="16" name="Quote"/>
+          <p:cNvSpPr txBox="1"/>
+          <p:nvPr/>
+        </p:nvSpPr>
+        <p:spPr>
+          <a:xfrm>
+            <a:off x="411480" y="4206240"/>
+            <a:ext cx="8321040" cy="731520"/>
+          </a:xfrm>
+          <a:prstGeom prst="rect">
+            <a:avLst/>
+          </a:prstGeom>
+          <a:solidFill>
+            <a:srgbClr val="EFEDEA"/>
+          </a:solidFill>
+          <a:ln/>
+        </p:spPr>
+        <p:txBody>
+          <a:bodyPr wrap="square" lIns="127000" tIns="50800" rIns="127000" bIns="50800" rtlCol="0" anchor="ctr"/>
+          <a:lstStyle/>
+          <a:p>
+            <a:pPr algn="ctr" indent="0" marL="0">
+              <a:buNone/>
+            </a:pPr>
+            <a:r>
+              <a:rPr lang="en-US" sz="1900" b="1" dirty="0">
+                <a:solidFill>
+                  <a:srgbClr val="1A1A1A"/>
+                </a:solidFill>
+              </a:rPr>
+              <a:t>“Be fearful when others are greedy and greedy when others are fearful.”</a:t>
+            </a:r>
+            <a:endParaRPr lang="en-US" sz="1900" dirty="0"/>
+          </a:p>
+        </p:txBody>
+      </p:sp>
+      <p:sp>
+        <p:nvSpPr>
+          <p:cNvPr id="17" name="Quote attribution"/>
+          <p:cNvSpPr txBox="1"/>
+          <p:nvPr/>
+        </p:nvSpPr>
+        <p:spPr>
+          <a:xfrm>
+            <a:off x="411480" y="5029200"/>
+            <a:ext cx="8321040" cy="365760"/>
+          </a:xfrm>
+          <a:prstGeom prst="rect">
+            <a:avLst/>
+          </a:prstGeom>
+          <a:noFill/>
+          <a:ln/>
+        </p:spPr>
+        <p:txBody>
+          <a:bodyPr wrap="square" lIns="0" tIns="0" rIns="0" bIns="0" rtlCol="0" anchor="ctr"/>
+          <a:lstStyle/>
+          <a:p>
+            <a:pPr algn="ctr" indent="0" marL="0">
+              <a:buNone/>
+            </a:pPr>
+            <a:r>
+              <a:rPr lang="en-US" sz="1900" b="1" i="1" dirty="0">
+                <a:solidFill>
+                  <a:srgbClr val="1A1A1A"/>
+                </a:solidFill>
+              </a:rPr>
+              <a:t>— Warren Buffett</a:t>
+            </a:r>
+            <a:endParaRPr lang="en-US" sz="1900" dirty="0"/>
+          </a:p>
+        </p:txBody>
+      </p:sp>
+      <p:sp>
+        <p:nvSpPr>
+          <p:cNvPr id="18" name="Pitch details"/>
+          <p:cNvSpPr txBox="1"/>
+          <p:nvPr/>
+        </p:nvSpPr>
+        <p:spPr>
+          <a:xfrm>
+            <a:off x="548640" y="5760720"/>
+            <a:ext cx="4754880" cy="868680"/>
+          </a:xfrm>
+          <a:prstGeom prst="rect">
+            <a:avLst/>
+          </a:prstGeom>
+          <a:noFill/>
+          <a:ln/>
+        </p:spPr>
+        <p:txBody>
+          <a:bodyPr wrap="square" lIns="0" tIns="0" rIns="0" bIns="0" rtlCol="0" anchor="t"/>
+          <a:lstStyle/>
+          <a:p>
+            <a:pPr indent="0" marL="0">
+              <a:spcAft>
+                <a:spcPts val="200"/>
+              </a:spcAft>
+              <a:buNone/>
+            </a:pPr>
+            <a:r>
+              <a:rPr lang="en-US" sz="1500" dirty="0">
+                <a:solidFill>
+                  <a:srgbClr val="1A1A1A"/>
+                </a:solidFill>
+              </a:rPr>
+              <a:t>Date: October 2026</a:t>
+            </a:r>
+            <a:endParaRPr lang="en-US" sz="1500" dirty="0"/>
+          </a:p>
+          <a:p>
+            <a:pPr indent="0" marL="0">
+              <a:spcAft>
+                <a:spcPts val="200"/>
+              </a:spcAft>
+              <a:buNone/>
+            </a:pPr>
+            <a:r>
+              <a:rPr lang="en-US" sz="1500" dirty="0">
+                <a:solidFill>
+                  <a:srgbClr val="1A1A1A"/>
+                </a:solidFill>
+              </a:rPr>
+              <a:t>Current Price: $167.03 (10/2/26)</a:t>
+            </a:r>
+            <a:endParaRPr lang="en-US" sz="1500" dirty="0"/>
+          </a:p>
+          <a:p>
+            <a:pPr indent="0" marL="0">
+              <a:spcAft>
+                <a:spcPts val="200"/>
+              </a:spcAft>
+              <a:buNone/>
+            </a:pPr>
+            <a:r>
+              <a:rPr lang="en-US" sz="1500" dirty="0">
+                <a:solidFill>
+                  <a:srgbClr val="1A1A1A"/>
+                </a:solidFill>
+              </a:rPr>
+              <a:t>Target Price: $308.03 (84% upside, 3.4x R/R)</a:t>
+            </a:r>
+            <a:endParaRPr lang="en-US" sz="1500" dirty="0"/>
+          </a:p>
+        </p:txBody>
+      </p:sp>
+      <p:pic>
+        <p:nvPicPr>
+          <p:cNvPr id="19" name="GPS logo" descr="/home/user/SPOT/deck/gps_logo.jpeg">    </p:cNvPr>
+          <p:cNvPicPr>
+            <a:picLocks noChangeAspect="1"/>
+          </p:cNvPicPr>
+          <p:nvPr/>
+        </p:nvPicPr>
+        <p:blipFill>
+          <a:blip r:embed="rId2"/>
+          <a:stretch>
+            <a:fillRect/>
+          </a:stretch>
+        </p:blipFill>
+        <p:spPr>
+          <a:xfrm>
             <a:off x="5897880" y="5532120"/>
             <a:ext cx="1234440" cy="1133856"/>
           </a:xfrm>
@@ -13363,7 +13435,7 @@
       </p:pic>
       <p:sp>
         <p:nvSpPr>
-          <p:cNvPr id="19" name="Logo divider"/>
+          <p:cNvPr id="20" name="Logo divider"/>
           <p:cNvSpPr/>
           <p:nvPr/>
         </p:nvSpPr>
@@ -13386,7 +13458,7 @@
       </p:sp>
       <p:sp>
         <p:nvSpPr>
-          <p:cNvPr id="20" name="Presenter"/>
+          <p:cNvPr id="21" name="Presenter"/>
           <p:cNvSpPr txBox="1"/>
           <p:nvPr/>
         </p:nvSpPr>
@@ -13464,13 +13536,13 @@
           <p:cNvPr id="2" name="Text 1"/>
           <p:cNvSpPr/>
           <p:nvPr>
-            <p:ph idx="102" type="title" hasCustomPrompt="1"/>
+            <p:ph idx="103" type="title" hasCustomPrompt="1"/>
           </p:nvPr>
         </p:nvSpPr>
         <p:spPr>
           <a:xfrm>
             <a:off x="320040" y="182880"/>
-            <a:ext cx="8503920" cy="640080"/>
+            <a:ext cx="7040880" cy="640080"/>
           </a:xfrm>
           <a:prstGeom prst="rect">
             <a:avLst/>
@@ -13486,14 +13558,14 @@
               <a:buNone/>
             </a:pPr>
             <a:r>
-              <a:rPr lang="en-US" sz="3200" b="1" dirty="0">
+              <a:rPr lang="en-US" sz="3000" b="1" dirty="0">
                 <a:solidFill>
                   <a:schemeClr val="tx2"/>
                 </a:solidFill>
               </a:rPr>
               <a:t>Thesis 1a: Margin Floor (2/4)</a:t>
             </a:r>
-            <a:endParaRPr lang="en-US" sz="3200" dirty="0"/>
+            <a:endParaRPr lang="en-US" sz="3000" dirty="0"/>
           </a:p>
         </p:txBody>
       </p:sp>
@@ -13502,7 +13574,7 @@
           <p:cNvPr id="3" name="Text 1"/>
           <p:cNvSpPr/>
           <p:nvPr>
-            <p:ph idx="103" type="body" hasCustomPrompt="1"/>
+            <p:ph idx="104" type="body" hasCustomPrompt="1"/>
           </p:nvPr>
         </p:nvSpPr>
         <p:spPr>
@@ -13586,9 +13658,9 @@
             <a:avLst/>
           </a:prstGeom>
           <a:noFill/>
-          <a:ln w="12700">
+          <a:ln w="19050">
             <a:solidFill>
-              <a:srgbClr val="1A1A1A"/>
+              <a:srgbClr val="2E93AE"/>
             </a:solidFill>
             <a:prstDash val="solid"/>
           </a:ln>
@@ -13769,9 +13841,9 @@
             <a:avLst/>
           </a:prstGeom>
           <a:noFill/>
-          <a:ln w="12700">
+          <a:ln w="19050">
             <a:solidFill>
-              <a:srgbClr val="1A1A1A"/>
+              <a:srgbClr val="2E93AE"/>
             </a:solidFill>
             <a:prstDash val="solid"/>
           </a:ln>
@@ -13953,13 +14025,13 @@
           <p:cNvPr id="2" name="Text 1"/>
           <p:cNvSpPr/>
           <p:nvPr>
-            <p:ph idx="102" type="title" hasCustomPrompt="1"/>
+            <p:ph idx="103" type="title" hasCustomPrompt="1"/>
           </p:nvPr>
         </p:nvSpPr>
         <p:spPr>
           <a:xfrm>
             <a:off x="320040" y="182880"/>
-            <a:ext cx="8503920" cy="640080"/>
+            <a:ext cx="7040880" cy="640080"/>
           </a:xfrm>
           <a:prstGeom prst="rect">
             <a:avLst/>
@@ -13975,14 +14047,14 @@
               <a:buNone/>
             </a:pPr>
             <a:r>
-              <a:rPr lang="en-US" sz="3200" b="1" dirty="0">
+              <a:rPr lang="en-US" sz="3000" b="1" dirty="0">
                 <a:solidFill>
                   <a:schemeClr val="tx2"/>
                 </a:solidFill>
               </a:rPr>
               <a:t>Thesis 1a: Margin Floor (3/4)</a:t>
             </a:r>
-            <a:endParaRPr lang="en-US" sz="3200" dirty="0"/>
+            <a:endParaRPr lang="en-US" sz="3000" dirty="0"/>
           </a:p>
         </p:txBody>
       </p:sp>
@@ -13991,7 +14063,7 @@
           <p:cNvPr id="3" name="Text 1"/>
           <p:cNvSpPr/>
           <p:nvPr>
-            <p:ph idx="103" type="body" hasCustomPrompt="1"/>
+            <p:ph idx="104" type="body" hasCustomPrompt="1"/>
           </p:nvPr>
         </p:nvSpPr>
         <p:spPr>
@@ -14075,9 +14147,9 @@
             <a:avLst/>
           </a:prstGeom>
           <a:noFill/>
-          <a:ln w="12700">
+          <a:ln w="19050">
             <a:solidFill>
-              <a:srgbClr val="1A1A1A"/>
+              <a:srgbClr val="2E93AE"/>
             </a:solidFill>
             <a:prstDash val="solid"/>
           </a:ln>
@@ -14162,7 +14234,7 @@
             <a:r>
               <a:rPr lang="en-US" sz="1100" b="1" dirty="0">
                 <a:solidFill>
-                  <a:schemeClr val="accent2"/>
+                  <a:srgbClr val="2E93AE"/>
                 </a:solidFill>
               </a:rPr>
               <a:t>Late-life, lighter visits keep rising</a:t>
@@ -14186,7 +14258,7 @@
             <a:avLst/>
           </a:prstGeom>
           <a:solidFill>
-            <a:srgbClr val="0A1C58"/>
+            <a:srgbClr val="EE6E25"/>
           </a:solidFill>
           <a:ln w="19050">
             <a:solidFill>
@@ -14213,11 +14285,11 @@
             </a:avLst>
           </a:prstGeom>
           <a:solidFill>
-            <a:srgbClr val="0A1C58"/>
+            <a:srgbClr val="EE6E25"/>
           </a:solidFill>
           <a:ln>
             <a:solidFill>
-              <a:srgbClr val="0A1C58"/>
+              <a:srgbClr val="EE6E25"/>
             </a:solidFill>
           </a:ln>
         </p:spPr>
@@ -14341,9 +14413,9 @@
             <a:avLst/>
           </a:prstGeom>
           <a:noFill/>
-          <a:ln w="12700">
+          <a:ln w="19050">
             <a:solidFill>
-              <a:srgbClr val="1A1A1A"/>
+              <a:srgbClr val="2E93AE"/>
             </a:solidFill>
             <a:prstDash val="solid"/>
           </a:ln>
@@ -14561,13 +14633,13 @@
           <p:cNvPr id="2" name="Text 1"/>
           <p:cNvSpPr/>
           <p:nvPr>
-            <p:ph idx="102" type="title" hasCustomPrompt="1"/>
+            <p:ph idx="103" type="title" hasCustomPrompt="1"/>
           </p:nvPr>
         </p:nvSpPr>
         <p:spPr>
           <a:xfrm>
             <a:off x="320040" y="182880"/>
-            <a:ext cx="8503920" cy="640080"/>
+            <a:ext cx="7040880" cy="640080"/>
           </a:xfrm>
           <a:prstGeom prst="rect">
             <a:avLst/>
@@ -14583,14 +14655,14 @@
               <a:buNone/>
             </a:pPr>
             <a:r>
-              <a:rPr lang="en-US" sz="3200" b="1" dirty="0">
+              <a:rPr lang="en-US" sz="3000" b="1" dirty="0">
                 <a:solidFill>
                   <a:schemeClr val="tx2"/>
                 </a:solidFill>
               </a:rPr>
               <a:t>Thesis 1a: Margin Floor (4/4)</a:t>
             </a:r>
-            <a:endParaRPr lang="en-US" sz="3200" dirty="0"/>
+            <a:endParaRPr lang="en-US" sz="3000" dirty="0"/>
           </a:p>
         </p:txBody>
       </p:sp>
@@ -14599,7 +14671,7 @@
           <p:cNvPr id="3" name="Text 1"/>
           <p:cNvSpPr/>
           <p:nvPr>
-            <p:ph idx="103" type="body" hasCustomPrompt="1"/>
+            <p:ph idx="104" type="body" hasCustomPrompt="1"/>
           </p:nvPr>
         </p:nvSpPr>
         <p:spPr>
@@ -14683,9 +14755,9 @@
             <a:avLst/>
           </a:prstGeom>
           <a:noFill/>
-          <a:ln w="12700">
+          <a:ln w="19050">
             <a:solidFill>
-              <a:srgbClr val="1A1A1A"/>
+              <a:srgbClr val="2E93AE"/>
             </a:solidFill>
             <a:prstDash val="solid"/>
           </a:ln>
@@ -14846,9 +14918,9 @@
             <a:avLst/>
           </a:prstGeom>
           <a:noFill/>
-          <a:ln w="12700">
+          <a:ln w="19050">
             <a:solidFill>
-              <a:srgbClr val="1A1A1A"/>
+              <a:srgbClr val="2E93AE"/>
             </a:solidFill>
             <a:prstDash val="solid"/>
           </a:ln>
@@ -15066,13 +15138,13 @@
           <p:cNvPr id="2" name="Text 1"/>
           <p:cNvSpPr/>
           <p:nvPr>
-            <p:ph idx="102" type="title" hasCustomPrompt="1"/>
+            <p:ph idx="103" type="title" hasCustomPrompt="1"/>
           </p:nvPr>
         </p:nvSpPr>
         <p:spPr>
           <a:xfrm>
             <a:off x="320040" y="182880"/>
-            <a:ext cx="8503920" cy="640080"/>
+            <a:ext cx="7040880" cy="640080"/>
           </a:xfrm>
           <a:prstGeom prst="rect">
             <a:avLst/>
@@ -15088,14 +15160,14 @@
               <a:buNone/>
             </a:pPr>
             <a:r>
-              <a:rPr lang="en-US" sz="3200" b="1" dirty="0">
+              <a:rPr lang="en-US" sz="3000" b="1" dirty="0">
                 <a:solidFill>
                   <a:schemeClr val="tx2"/>
                 </a:solidFill>
               </a:rPr>
               <a:t>Thesis 1b: Share Gains (1/5)</a:t>
             </a:r>
-            <a:endParaRPr lang="en-US" sz="3200" dirty="0"/>
+            <a:endParaRPr lang="en-US" sz="3000" dirty="0"/>
           </a:p>
         </p:txBody>
       </p:sp>
@@ -15154,9 +15226,9 @@
           <a:solidFill>
             <a:srgbClr val="FFFFFF"/>
           </a:solidFill>
-          <a:ln w="25400">
+          <a:ln w="31750">
             <a:solidFill>
-              <a:srgbClr val="0A1C58"/>
+              <a:srgbClr val="EE6E25"/>
             </a:solidFill>
           </a:ln>
         </p:spPr>
@@ -15234,9 +15306,9 @@
           <a:solidFill>
             <a:srgbClr val="FFFFFF"/>
           </a:solidFill>
-          <a:ln w="25400">
+          <a:ln w="31750">
             <a:solidFill>
-              <a:srgbClr val="0A1C58"/>
+              <a:srgbClr val="EE6E25"/>
             </a:solidFill>
           </a:ln>
         </p:spPr>
@@ -15314,9 +15386,9 @@
           <a:solidFill>
             <a:srgbClr val="FFFFFF"/>
           </a:solidFill>
-          <a:ln w="25400">
+          <a:ln w="31750">
             <a:solidFill>
-              <a:srgbClr val="0A1C58"/>
+              <a:srgbClr val="EE6E25"/>
             </a:solidFill>
           </a:ln>
         </p:spPr>
@@ -15394,9 +15466,9 @@
           <a:solidFill>
             <a:srgbClr val="FFFFFF"/>
           </a:solidFill>
-          <a:ln w="25400">
+          <a:ln w="31750">
             <a:solidFill>
-              <a:srgbClr val="0A1C58"/>
+              <a:srgbClr val="EE6E25"/>
             </a:solidFill>
           </a:ln>
         </p:spPr>
@@ -15599,13 +15671,13 @@
           <p:cNvPr id="2" name="Text 1"/>
           <p:cNvSpPr/>
           <p:nvPr>
-            <p:ph idx="102" type="title" hasCustomPrompt="1"/>
+            <p:ph idx="103" type="title" hasCustomPrompt="1"/>
           </p:nvPr>
         </p:nvSpPr>
         <p:spPr>
           <a:xfrm>
             <a:off x="320040" y="182880"/>
-            <a:ext cx="8503920" cy="640080"/>
+            <a:ext cx="7040880" cy="640080"/>
           </a:xfrm>
           <a:prstGeom prst="rect">
             <a:avLst/>
@@ -15621,14 +15693,14 @@
               <a:buNone/>
             </a:pPr>
             <a:r>
-              <a:rPr lang="en-US" sz="3200" b="1" dirty="0">
+              <a:rPr lang="en-US" sz="3000" b="1" dirty="0">
                 <a:solidFill>
                   <a:schemeClr val="tx2"/>
                 </a:solidFill>
               </a:rPr>
               <a:t>Thesis 1b: Share Gains (2/5)</a:t>
             </a:r>
-            <a:endParaRPr lang="en-US" sz="3200" dirty="0"/>
+            <a:endParaRPr lang="en-US" sz="3000" dirty="0"/>
           </a:p>
         </p:txBody>
       </p:sp>
@@ -15637,7 +15709,7 @@
           <p:cNvPr id="3" name="Text 1"/>
           <p:cNvSpPr/>
           <p:nvPr>
-            <p:ph idx="103" type="body" hasCustomPrompt="1"/>
+            <p:ph idx="104" type="body" hasCustomPrompt="1"/>
           </p:nvPr>
         </p:nvSpPr>
         <p:spPr>
@@ -15721,9 +15793,9 @@
             <a:avLst/>
           </a:prstGeom>
           <a:noFill/>
-          <a:ln w="12700">
+          <a:ln w="19050">
             <a:solidFill>
-              <a:srgbClr val="1A1A1A"/>
+              <a:srgbClr val="2E93AE"/>
             </a:solidFill>
             <a:prstDash val="solid"/>
           </a:ln>
@@ -15954,9 +16026,9 @@
             <a:avLst/>
           </a:prstGeom>
           <a:noFill/>
-          <a:ln w="12700">
+          <a:ln w="19050">
             <a:solidFill>
-              <a:srgbClr val="1A1A1A"/>
+              <a:srgbClr val="2E93AE"/>
             </a:solidFill>
             <a:prstDash val="solid"/>
           </a:ln>
@@ -16005,7 +16077,7 @@
             <a:r>
               <a:rPr lang="en-US" sz="1100" dirty="0">
                 <a:solidFill>
-                  <a:srgbClr val="B5AEA9"/>
+                  <a:srgbClr val="2E93AE"/>
                 </a:solidFill>
               </a:rPr>
               <a:t>■ </a:t>
@@ -16359,13 +16431,13 @@
           <p:cNvPr id="2" name="Text 1"/>
           <p:cNvSpPr/>
           <p:nvPr>
-            <p:ph idx="102" type="title" hasCustomPrompt="1"/>
+            <p:ph idx="103" type="title" hasCustomPrompt="1"/>
           </p:nvPr>
         </p:nvSpPr>
         <p:spPr>
           <a:xfrm>
             <a:off x="320040" y="182880"/>
-            <a:ext cx="8503920" cy="640080"/>
+            <a:ext cx="7040880" cy="640080"/>
           </a:xfrm>
           <a:prstGeom prst="rect">
             <a:avLst/>
@@ -16381,14 +16453,14 @@
               <a:buNone/>
             </a:pPr>
             <a:r>
-              <a:rPr lang="en-US" sz="3200" b="1" dirty="0">
+              <a:rPr lang="en-US" sz="3000" b="1" dirty="0">
                 <a:solidFill>
                   <a:schemeClr val="tx2"/>
                 </a:solidFill>
               </a:rPr>
               <a:t>Thesis 1b: Share Gains (3/5)</a:t>
             </a:r>
-            <a:endParaRPr lang="en-US" sz="3200" dirty="0"/>
+            <a:endParaRPr lang="en-US" sz="3000" dirty="0"/>
           </a:p>
         </p:txBody>
       </p:sp>
@@ -16397,7 +16469,7 @@
           <p:cNvPr id="3" name="Text 1"/>
           <p:cNvSpPr/>
           <p:nvPr>
-            <p:ph idx="103" type="body" hasCustomPrompt="1"/>
+            <p:ph idx="104" type="body" hasCustomPrompt="1"/>
           </p:nvPr>
         </p:nvSpPr>
         <p:spPr>
@@ -16982,7 +17054,7 @@
             <a:avLst/>
           </a:prstGeom>
           <a:solidFill>
-            <a:srgbClr val="B5AEA9"/>
+            <a:srgbClr val="2E93AE"/>
           </a:solidFill>
           <a:ln/>
         </p:spPr>
@@ -16996,7 +17068,7 @@
             <a:r>
               <a:rPr lang="en-US" sz="900" b="1" dirty="0">
                 <a:solidFill>
-                  <a:schemeClr val="tx2"/>
+                  <a:schemeClr val="bg1"/>
                 </a:solidFill>
               </a:rPr>
               <a:t>Strip</a:t>
@@ -17058,7 +17130,7 @@
             <a:avLst/>
           </a:prstGeom>
           <a:solidFill>
-            <a:srgbClr val="B5AEA9"/>
+            <a:srgbClr val="2E93AE"/>
           </a:solidFill>
           <a:ln/>
         </p:spPr>
@@ -17072,7 +17144,7 @@
             <a:r>
               <a:rPr lang="en-US" sz="900" b="1" dirty="0">
                 <a:solidFill>
-                  <a:schemeClr val="tx2"/>
+                  <a:schemeClr val="bg1"/>
                 </a:solidFill>
               </a:rPr>
               <a:t>Repair</a:t>
@@ -17135,7 +17207,7 @@
           </a:prstGeom>
           <a:ln w="15875">
             <a:solidFill>
-              <a:srgbClr val="B5AEA9"/>
+              <a:srgbClr val="2E93AE"/>
             </a:solidFill>
             <a:prstDash val="dash"/>
           </a:ln>
@@ -17262,11 +17334,11 @@
             <a:avLst/>
           </a:prstGeom>
           <a:solidFill>
-            <a:srgbClr val="0A1C58"/>
+            <a:srgbClr val="EE6E25"/>
           </a:solidFill>
           <a:ln>
             <a:solidFill>
-              <a:srgbClr val="0A1C58"/>
+              <a:srgbClr val="EE6E25"/>
             </a:solidFill>
           </a:ln>
         </p:spPr>
@@ -17354,9 +17426,9 @@
             <a:avLst/>
           </a:prstGeom>
           <a:noFill/>
-          <a:ln w="12700">
+          <a:ln w="19050">
             <a:solidFill>
-              <a:srgbClr val="1A1A1A"/>
+              <a:srgbClr val="2E93AE"/>
             </a:solidFill>
             <a:prstDash val="solid"/>
           </a:ln>
@@ -17505,7 +17577,7 @@
             <a:avLst/>
           </a:prstGeom>
           <a:solidFill>
-            <a:srgbClr val="B5AEA9"/>
+            <a:srgbClr val="2E93AE"/>
           </a:solidFill>
           <a:ln/>
         </p:spPr>
@@ -17800,13 +17872,13 @@
           <p:cNvPr id="2" name="Text 1"/>
           <p:cNvSpPr/>
           <p:nvPr>
-            <p:ph idx="102" type="title" hasCustomPrompt="1"/>
+            <p:ph idx="103" type="title" hasCustomPrompt="1"/>
           </p:nvPr>
         </p:nvSpPr>
         <p:spPr>
           <a:xfrm>
             <a:off x="320040" y="182880"/>
-            <a:ext cx="8503920" cy="640080"/>
+            <a:ext cx="7040880" cy="640080"/>
           </a:xfrm>
           <a:prstGeom prst="rect">
             <a:avLst/>
@@ -17822,14 +17894,14 @@
               <a:buNone/>
             </a:pPr>
             <a:r>
-              <a:rPr lang="en-US" sz="3200" b="1" dirty="0">
+              <a:rPr lang="en-US" sz="3000" b="1" dirty="0">
                 <a:solidFill>
                   <a:schemeClr val="tx2"/>
                 </a:solidFill>
               </a:rPr>
               <a:t>Thesis 1b: Share Gains (4/5)</a:t>
             </a:r>
-            <a:endParaRPr lang="en-US" sz="3200" dirty="0"/>
+            <a:endParaRPr lang="en-US" sz="3000" dirty="0"/>
           </a:p>
         </p:txBody>
       </p:sp>
@@ -17838,7 +17910,7 @@
           <p:cNvPr id="3" name="Text 1"/>
           <p:cNvSpPr/>
           <p:nvPr>
-            <p:ph idx="103" type="body" hasCustomPrompt="1"/>
+            <p:ph idx="104" type="body" hasCustomPrompt="1"/>
           </p:nvPr>
         </p:nvSpPr>
         <p:spPr>
@@ -17922,9 +17994,9 @@
             <a:avLst/>
           </a:prstGeom>
           <a:noFill/>
-          <a:ln w="12700">
+          <a:ln w="19050">
             <a:solidFill>
-              <a:srgbClr val="1A1A1A"/>
+              <a:srgbClr val="2E93AE"/>
             </a:solidFill>
             <a:prstDash val="solid"/>
           </a:ln>
@@ -18031,7 +18103,7 @@
             <a:r>
               <a:rPr lang="en-US" sz="1100" dirty="0">
                 <a:solidFill>
-                  <a:srgbClr val="B5AEA9"/>
+                  <a:srgbClr val="2E93AE"/>
                 </a:solidFill>
               </a:rPr>
               <a:t>■ </a:t>
@@ -18102,9 +18174,9 @@
             <a:avLst/>
           </a:prstGeom>
           <a:noFill/>
-          <a:ln w="12700">
+          <a:ln w="19050">
             <a:solidFill>
-              <a:srgbClr val="1A1A1A"/>
+              <a:srgbClr val="2E93AE"/>
             </a:solidFill>
             <a:prstDash val="solid"/>
           </a:ln>
@@ -18651,13 +18723,13 @@
           <p:cNvPr id="2" name="Text 1"/>
           <p:cNvSpPr/>
           <p:nvPr>
-            <p:ph idx="102" type="title" hasCustomPrompt="1"/>
+            <p:ph idx="103" type="title" hasCustomPrompt="1"/>
           </p:nvPr>
         </p:nvSpPr>
         <p:spPr>
           <a:xfrm>
             <a:off x="320040" y="182880"/>
-            <a:ext cx="8503920" cy="640080"/>
+            <a:ext cx="7040880" cy="640080"/>
           </a:xfrm>
           <a:prstGeom prst="rect">
             <a:avLst/>
@@ -18673,14 +18745,14 @@
               <a:buNone/>
             </a:pPr>
             <a:r>
-              <a:rPr lang="en-US" sz="3200" b="1" dirty="0">
+              <a:rPr lang="en-US" sz="3000" b="1" dirty="0">
                 <a:solidFill>
                   <a:schemeClr val="tx2"/>
                 </a:solidFill>
               </a:rPr>
               <a:t>Thesis 1b: Share Gains (5/5)</a:t>
             </a:r>
-            <a:endParaRPr lang="en-US" sz="3200" dirty="0"/>
+            <a:endParaRPr lang="en-US" sz="3000" dirty="0"/>
           </a:p>
         </p:txBody>
       </p:sp>
@@ -18689,7 +18761,7 @@
           <p:cNvPr id="3" name="Text 1"/>
           <p:cNvSpPr/>
           <p:nvPr>
-            <p:ph idx="103" type="body" hasCustomPrompt="1"/>
+            <p:ph idx="104" type="body" hasCustomPrompt="1"/>
           </p:nvPr>
         </p:nvSpPr>
         <p:spPr>
@@ -19033,9 +19105,9 @@
             <a:avLst/>
           </a:prstGeom>
           <a:noFill/>
-          <a:ln w="12700">
+          <a:ln w="19050">
             <a:solidFill>
-              <a:srgbClr val="1A1A1A"/>
+              <a:srgbClr val="2E93AE"/>
             </a:solidFill>
             <a:prstDash val="solid"/>
           </a:ln>
@@ -19108,9 +19180,9 @@
             <a:avLst/>
           </a:prstGeom>
           <a:noFill/>
-          <a:ln w="12700">
+          <a:ln w="19050">
             <a:solidFill>
-              <a:srgbClr val="1A1A1A"/>
+              <a:srgbClr val="2E93AE"/>
             </a:solidFill>
             <a:prstDash val="solid"/>
           </a:ln>
@@ -19181,7 +19253,7 @@
             <a:r>
               <a:rPr lang="en-US" sz="1100" dirty="0">
                 <a:solidFill>
-                  <a:srgbClr val="B5AEA9"/>
+                  <a:srgbClr val="2E93AE"/>
                 </a:solidFill>
               </a:rPr>
               <a:t>■ </a:t>
@@ -19361,13 +19433,13 @@
           <p:cNvPr id="2" name="Text 1"/>
           <p:cNvSpPr/>
           <p:nvPr>
-            <p:ph idx="102" type="title" hasCustomPrompt="1"/>
+            <p:ph idx="103" type="title" hasCustomPrompt="1"/>
           </p:nvPr>
         </p:nvSpPr>
         <p:spPr>
           <a:xfrm>
             <a:off x="320040" y="182880"/>
-            <a:ext cx="8503920" cy="640080"/>
+            <a:ext cx="7040880" cy="640080"/>
           </a:xfrm>
           <a:prstGeom prst="rect">
             <a:avLst/>
@@ -19383,14 +19455,14 @@
               <a:buNone/>
             </a:pPr>
             <a:r>
-              <a:rPr lang="en-US" sz="3200" b="1" dirty="0">
+              <a:rPr lang="en-US" sz="3000" b="1" dirty="0">
                 <a:solidFill>
                   <a:schemeClr val="tx2"/>
                 </a:solidFill>
               </a:rPr>
-              <a:t>Thesis 1b: The LEAP Option (1/2)</a:t>
-            </a:r>
-            <a:endParaRPr lang="en-US" sz="3200" dirty="0"/>
+              <a:t>Thesis 1b: LEAP Upside (1/2)</a:t>
+            </a:r>
+            <a:endParaRPr lang="en-US" sz="3000" dirty="0"/>
           </a:p>
         </p:txBody>
       </p:sp>
@@ -19399,7 +19471,7 @@
           <p:cNvPr id="3" name="Text 1"/>
           <p:cNvSpPr/>
           <p:nvPr>
-            <p:ph idx="103" type="body" hasCustomPrompt="1"/>
+            <p:ph idx="104" type="body" hasCustomPrompt="1"/>
           </p:nvPr>
         </p:nvSpPr>
         <p:spPr>
@@ -20332,13 +20404,13 @@
           <p:cNvPr id="2" name="Text 1"/>
           <p:cNvSpPr/>
           <p:nvPr>
-            <p:ph idx="102" type="title" hasCustomPrompt="1"/>
+            <p:ph idx="103" type="title" hasCustomPrompt="1"/>
           </p:nvPr>
         </p:nvSpPr>
         <p:spPr>
           <a:xfrm>
             <a:off x="320040" y="182880"/>
-            <a:ext cx="8503920" cy="640080"/>
+            <a:ext cx="7040880" cy="640080"/>
           </a:xfrm>
           <a:prstGeom prst="rect">
             <a:avLst/>
@@ -20354,14 +20426,14 @@
               <a:buNone/>
             </a:pPr>
             <a:r>
-              <a:rPr lang="en-US" sz="3200" b="1" dirty="0">
+              <a:rPr lang="en-US" sz="3000" b="1" dirty="0">
                 <a:solidFill>
                   <a:schemeClr val="tx2"/>
                 </a:solidFill>
               </a:rPr>
-              <a:t>Thesis 1b: The LEAP Option (2/2)</a:t>
-            </a:r>
-            <a:endParaRPr lang="en-US" sz="3200" dirty="0"/>
+              <a:t>Thesis 1b: LEAP Upside (2/2)</a:t>
+            </a:r>
+            <a:endParaRPr lang="en-US" sz="3000" dirty="0"/>
           </a:p>
         </p:txBody>
       </p:sp>
@@ -20370,7 +20442,7 @@
           <p:cNvPr id="3" name="Text 1"/>
           <p:cNvSpPr/>
           <p:nvPr>
-            <p:ph idx="103" type="body" hasCustomPrompt="1"/>
+            <p:ph idx="104" type="body" hasCustomPrompt="1"/>
           </p:nvPr>
         </p:nvSpPr>
         <p:spPr>
@@ -20725,13 +20797,13 @@
           <p:cNvPr id="2" name="Text 1"/>
           <p:cNvSpPr/>
           <p:nvPr>
-            <p:ph idx="102" type="title" hasCustomPrompt="1"/>
+            <p:ph idx="103" type="title" hasCustomPrompt="1"/>
           </p:nvPr>
         </p:nvSpPr>
         <p:spPr>
           <a:xfrm>
             <a:off x="320040" y="182880"/>
-            <a:ext cx="8503920" cy="640080"/>
+            <a:ext cx="7040880" cy="640080"/>
           </a:xfrm>
           <a:prstGeom prst="rect">
             <a:avLst/>
@@ -20747,14 +20819,14 @@
               <a:buNone/>
             </a:pPr>
             <a:r>
-              <a:rPr lang="en-US" sz="3200" b="1" dirty="0">
+              <a:rPr lang="en-US" sz="3000" b="1" dirty="0">
                 <a:solidFill>
                   <a:schemeClr val="tx2"/>
                 </a:solidFill>
               </a:rPr>
               <a:t>The Opportunity</a:t>
             </a:r>
-            <a:endParaRPr lang="en-US" sz="3200" dirty="0"/>
+            <a:endParaRPr lang="en-US" sz="3000" dirty="0"/>
           </a:p>
         </p:txBody>
       </p:sp>
@@ -20813,9 +20885,9 @@
           <a:solidFill>
             <a:srgbClr val="FFFFFF"/>
           </a:solidFill>
-          <a:ln w="25400">
+          <a:ln w="31750">
             <a:solidFill>
-              <a:srgbClr val="0A1C58"/>
+              <a:srgbClr val="EE6E25"/>
             </a:solidFill>
           </a:ln>
         </p:spPr>
@@ -20893,9 +20965,9 @@
           <a:solidFill>
             <a:srgbClr val="FFFFFF"/>
           </a:solidFill>
-          <a:ln w="25400">
+          <a:ln w="31750">
             <a:solidFill>
-              <a:srgbClr val="0A1C58"/>
+              <a:srgbClr val="EE6E25"/>
             </a:solidFill>
           </a:ln>
         </p:spPr>
@@ -20973,9 +21045,9 @@
           <a:solidFill>
             <a:srgbClr val="FFFFFF"/>
           </a:solidFill>
-          <a:ln w="25400">
+          <a:ln w="31750">
             <a:solidFill>
-              <a:srgbClr val="0A1C58"/>
+              <a:srgbClr val="EE6E25"/>
             </a:solidFill>
           </a:ln>
         </p:spPr>
@@ -21178,13 +21250,13 @@
           <p:cNvPr id="2" name="Text 1"/>
           <p:cNvSpPr/>
           <p:nvPr>
-            <p:ph idx="102" type="title" hasCustomPrompt="1"/>
+            <p:ph idx="103" type="title" hasCustomPrompt="1"/>
           </p:nvPr>
         </p:nvSpPr>
         <p:spPr>
           <a:xfrm>
             <a:off x="320040" y="182880"/>
-            <a:ext cx="8503920" cy="640080"/>
+            <a:ext cx="7040880" cy="640080"/>
           </a:xfrm>
           <a:prstGeom prst="rect">
             <a:avLst/>
@@ -21200,14 +21272,14 @@
               <a:buNone/>
             </a:pPr>
             <a:r>
-              <a:rPr lang="en-US" sz="3200" b="1" dirty="0">
+              <a:rPr lang="en-US" sz="3000" b="1" dirty="0">
                 <a:solidFill>
                   <a:schemeClr val="tx2"/>
                 </a:solidFill>
               </a:rPr>
               <a:t>Thesis 2: Power (1/4)</a:t>
             </a:r>
-            <a:endParaRPr lang="en-US" sz="3200" dirty="0"/>
+            <a:endParaRPr lang="en-US" sz="3000" dirty="0"/>
           </a:p>
         </p:txBody>
       </p:sp>
@@ -21216,7 +21288,7 @@
           <p:cNvPr id="3" name="Text 1"/>
           <p:cNvSpPr/>
           <p:nvPr>
-            <p:ph idx="103" type="body" hasCustomPrompt="1"/>
+            <p:ph idx="104" type="body" hasCustomPrompt="1"/>
           </p:nvPr>
         </p:nvSpPr>
         <p:spPr>
@@ -21300,9 +21372,9 @@
             <a:avLst/>
           </a:prstGeom>
           <a:noFill/>
-          <a:ln w="12700">
+          <a:ln w="19050">
             <a:solidFill>
-              <a:srgbClr val="1A1A1A"/>
+              <a:srgbClr val="2E93AE"/>
             </a:solidFill>
             <a:prstDash val="solid"/>
           </a:ln>
@@ -21375,9 +21447,9 @@
             <a:avLst/>
           </a:prstGeom>
           <a:noFill/>
-          <a:ln w="12700">
+          <a:ln w="19050">
             <a:solidFill>
-              <a:srgbClr val="1A1A1A"/>
+              <a:srgbClr val="2E93AE"/>
             </a:solidFill>
             <a:prstDash val="solid"/>
           </a:ln>
@@ -21595,13 +21667,13 @@
           <p:cNvPr id="2" name="Text 1"/>
           <p:cNvSpPr/>
           <p:nvPr>
-            <p:ph idx="102" type="title" hasCustomPrompt="1"/>
+            <p:ph idx="103" type="title" hasCustomPrompt="1"/>
           </p:nvPr>
         </p:nvSpPr>
         <p:spPr>
           <a:xfrm>
             <a:off x="320040" y="182880"/>
-            <a:ext cx="8503920" cy="640080"/>
+            <a:ext cx="7040880" cy="640080"/>
           </a:xfrm>
           <a:prstGeom prst="rect">
             <a:avLst/>
@@ -21617,14 +21689,14 @@
               <a:buNone/>
             </a:pPr>
             <a:r>
-              <a:rPr lang="en-US" sz="3200" b="1" dirty="0">
+              <a:rPr lang="en-US" sz="3000" b="1" dirty="0">
                 <a:solidFill>
                   <a:schemeClr val="tx2"/>
                 </a:solidFill>
               </a:rPr>
               <a:t>Thesis 2: Power (2/4)</a:t>
             </a:r>
-            <a:endParaRPr lang="en-US" sz="3200" dirty="0"/>
+            <a:endParaRPr lang="en-US" sz="3000" dirty="0"/>
           </a:p>
         </p:txBody>
       </p:sp>
@@ -21633,7 +21705,7 @@
           <p:cNvPr id="3" name="Text 1"/>
           <p:cNvSpPr/>
           <p:nvPr>
-            <p:ph idx="103" type="body" hasCustomPrompt="1"/>
+            <p:ph idx="104" type="body" hasCustomPrompt="1"/>
           </p:nvPr>
         </p:nvSpPr>
         <p:spPr>
@@ -21717,9 +21789,9 @@
             <a:avLst/>
           </a:prstGeom>
           <a:noFill/>
-          <a:ln w="12700">
+          <a:ln w="19050">
             <a:solidFill>
-              <a:srgbClr val="1A1A1A"/>
+              <a:srgbClr val="2E93AE"/>
             </a:solidFill>
             <a:prstDash val="solid"/>
           </a:ln>
@@ -21756,11 +21828,11 @@
             <a:avLst/>
           </a:prstGeom>
           <a:solidFill>
-            <a:srgbClr val="0A1C58"/>
+            <a:srgbClr val="EE6E25"/>
           </a:solidFill>
           <a:ln>
             <a:solidFill>
-              <a:srgbClr val="0A1C58"/>
+              <a:srgbClr val="EE6E25"/>
             </a:solidFill>
           </a:ln>
         </p:spPr>
@@ -21884,9 +21956,9 @@
             <a:avLst/>
           </a:prstGeom>
           <a:noFill/>
-          <a:ln w="12700">
+          <a:ln w="19050">
             <a:solidFill>
-              <a:srgbClr val="1A1A1A"/>
+              <a:srgbClr val="2E93AE"/>
             </a:solidFill>
             <a:prstDash val="solid"/>
           </a:ln>
@@ -22248,13 +22320,13 @@
           <p:cNvPr id="2" name="Text 1"/>
           <p:cNvSpPr/>
           <p:nvPr>
-            <p:ph idx="102" type="title" hasCustomPrompt="1"/>
+            <p:ph idx="103" type="title" hasCustomPrompt="1"/>
           </p:nvPr>
         </p:nvSpPr>
         <p:spPr>
           <a:xfrm>
             <a:off x="320040" y="182880"/>
-            <a:ext cx="8503920" cy="640080"/>
+            <a:ext cx="7040880" cy="640080"/>
           </a:xfrm>
           <a:prstGeom prst="rect">
             <a:avLst/>
@@ -22270,14 +22342,14 @@
               <a:buNone/>
             </a:pPr>
             <a:r>
-              <a:rPr lang="en-US" sz="3200" b="1" dirty="0">
+              <a:rPr lang="en-US" sz="3000" b="1" dirty="0">
                 <a:solidFill>
                   <a:schemeClr val="tx2"/>
                 </a:solidFill>
               </a:rPr>
               <a:t>Thesis 2: Power (3/4)</a:t>
             </a:r>
-            <a:endParaRPr lang="en-US" sz="3200" dirty="0"/>
+            <a:endParaRPr lang="en-US" sz="3000" dirty="0"/>
           </a:p>
         </p:txBody>
       </p:sp>
@@ -22286,7 +22358,7 @@
           <p:cNvPr id="3" name="Text 1"/>
           <p:cNvSpPr/>
           <p:nvPr>
-            <p:ph idx="103" type="body" hasCustomPrompt="1"/>
+            <p:ph idx="104" type="body" hasCustomPrompt="1"/>
           </p:nvPr>
         </p:nvSpPr>
         <p:spPr>
@@ -22370,9 +22442,9 @@
             <a:avLst/>
           </a:prstGeom>
           <a:noFill/>
-          <a:ln w="12700">
+          <a:ln w="19050">
             <a:solidFill>
-              <a:srgbClr val="1A1A1A"/>
+              <a:srgbClr val="2E93AE"/>
             </a:solidFill>
             <a:prstDash val="solid"/>
           </a:ln>
@@ -22429,7 +22501,7 @@
             <a:avLst/>
           </a:prstGeom>
           <a:solidFill>
-            <a:srgbClr val="B5AEA9"/>
+            <a:srgbClr val="2E93AE"/>
           </a:solidFill>
           <a:ln/>
         </p:spPr>
@@ -22665,9 +22737,9 @@
             <a:avLst/>
           </a:prstGeom>
           <a:noFill/>
-          <a:ln w="12700">
+          <a:ln w="19050">
             <a:solidFill>
-              <a:srgbClr val="1A1A1A"/>
+              <a:srgbClr val="2E93AE"/>
             </a:solidFill>
             <a:prstDash val="solid"/>
           </a:ln>
@@ -22961,7 +23033,7 @@
             </a:avLst>
           </a:prstGeom>
           <a:solidFill>
-            <a:srgbClr val="B5AEA9"/>
+            <a:srgbClr val="2E93AE"/>
           </a:solidFill>
           <a:ln/>
         </p:spPr>
@@ -23019,7 +23091,7 @@
             </a:avLst>
           </a:prstGeom>
           <a:solidFill>
-            <a:srgbClr val="B5AEA9"/>
+            <a:srgbClr val="2E93AE"/>
           </a:solidFill>
           <a:ln/>
         </p:spPr>
@@ -23220,13 +23292,13 @@
           <p:cNvPr id="2" name="Text 1"/>
           <p:cNvSpPr/>
           <p:nvPr>
-            <p:ph idx="102" type="title" hasCustomPrompt="1"/>
+            <p:ph idx="103" type="title" hasCustomPrompt="1"/>
           </p:nvPr>
         </p:nvSpPr>
         <p:spPr>
           <a:xfrm>
             <a:off x="320040" y="182880"/>
-            <a:ext cx="8503920" cy="640080"/>
+            <a:ext cx="7040880" cy="640080"/>
           </a:xfrm>
           <a:prstGeom prst="rect">
             <a:avLst/>
@@ -23242,14 +23314,14 @@
               <a:buNone/>
             </a:pPr>
             <a:r>
-              <a:rPr lang="en-US" sz="3200" b="1" dirty="0">
+              <a:rPr lang="en-US" sz="3000" b="1" dirty="0">
                 <a:solidFill>
                   <a:schemeClr val="tx2"/>
                 </a:solidFill>
               </a:rPr>
               <a:t>Thesis 2: Power (4/4)</a:t>
             </a:r>
-            <a:endParaRPr lang="en-US" sz="3200" dirty="0"/>
+            <a:endParaRPr lang="en-US" sz="3000" dirty="0"/>
           </a:p>
         </p:txBody>
       </p:sp>
@@ -23258,7 +23330,7 @@
           <p:cNvPr id="3" name="Text 1"/>
           <p:cNvSpPr/>
           <p:nvPr>
-            <p:ph idx="103" type="body" hasCustomPrompt="1"/>
+            <p:ph idx="104" type="body" hasCustomPrompt="1"/>
           </p:nvPr>
         </p:nvSpPr>
         <p:spPr>
@@ -23342,9 +23414,9 @@
             <a:avLst/>
           </a:prstGeom>
           <a:noFill/>
-          <a:ln w="12700">
+          <a:ln w="19050">
             <a:solidFill>
-              <a:srgbClr val="1A1A1A"/>
+              <a:srgbClr val="2E93AE"/>
             </a:solidFill>
             <a:prstDash val="solid"/>
           </a:ln>
@@ -23547,7 +23619,7 @@
             <a:avLst/>
           </a:prstGeom>
           <a:solidFill>
-            <a:srgbClr val="B5AEA9"/>
+            <a:srgbClr val="2E93AE"/>
           </a:solidFill>
           <a:ln/>
         </p:spPr>
@@ -23561,7 +23633,7 @@
             <a:r>
               <a:rPr lang="en-US" sz="1400" b="1" dirty="0">
                 <a:solidFill>
-                  <a:schemeClr val="tx2"/>
+                  <a:schemeClr val="bg1"/>
                 </a:solidFill>
               </a:rPr>
               <a:t>+1 contract</a:t>
@@ -23839,9 +23911,9 @@
             <a:avLst/>
           </a:prstGeom>
           <a:noFill/>
-          <a:ln w="12700">
+          <a:ln w="19050">
             <a:solidFill>
-              <a:srgbClr val="1A1A1A"/>
+              <a:srgbClr val="2E93AE"/>
             </a:solidFill>
             <a:prstDash val="solid"/>
           </a:ln>
@@ -24059,13 +24131,13 @@
           <p:cNvPr id="2" name="Text 1"/>
           <p:cNvSpPr/>
           <p:nvPr>
-            <p:ph idx="102" type="title" hasCustomPrompt="1"/>
+            <p:ph idx="103" type="title" hasCustomPrompt="1"/>
           </p:nvPr>
         </p:nvSpPr>
         <p:spPr>
           <a:xfrm>
             <a:off x="320040" y="182880"/>
-            <a:ext cx="8503920" cy="640080"/>
+            <a:ext cx="7040880" cy="640080"/>
           </a:xfrm>
           <a:prstGeom prst="rect">
             <a:avLst/>
@@ -24081,14 +24153,14 @@
               <a:buNone/>
             </a:pPr>
             <a:r>
-              <a:rPr lang="en-US" sz="3200" b="1" dirty="0">
+              <a:rPr lang="en-US" sz="3000" b="1" dirty="0">
                 <a:solidFill>
                   <a:schemeClr val="tx2"/>
                 </a:solidFill>
               </a:rPr>
-              <a:t>Valuation: What You Need to Believe</a:t>
-            </a:r>
-            <a:endParaRPr lang="en-US" sz="3200" dirty="0"/>
+              <a:t>What You Need to Believe</a:t>
+            </a:r>
+            <a:endParaRPr lang="en-US" sz="3000" dirty="0"/>
           </a:p>
         </p:txBody>
       </p:sp>
@@ -24107,11 +24179,11 @@
             <a:avLst/>
           </a:prstGeom>
           <a:solidFill>
-            <a:srgbClr val="0A1C58"/>
+            <a:srgbClr val="EE6E25"/>
           </a:solidFill>
           <a:ln>
             <a:solidFill>
-              <a:srgbClr val="0A1C58"/>
+              <a:srgbClr val="EE6E25"/>
             </a:solidFill>
           </a:ln>
         </p:spPr>
@@ -24185,11 +24257,11 @@
             <a:avLst/>
           </a:prstGeom>
           <a:solidFill>
-            <a:srgbClr val="0A1C58"/>
+            <a:srgbClr val="EE6E25"/>
           </a:solidFill>
           <a:ln>
             <a:solidFill>
-              <a:srgbClr val="0A1C58"/>
+              <a:srgbClr val="EE6E25"/>
             </a:solidFill>
           </a:ln>
         </p:spPr>
@@ -24263,11 +24335,11 @@
             <a:avLst/>
           </a:prstGeom>
           <a:solidFill>
-            <a:srgbClr val="0A1C58"/>
+            <a:srgbClr val="EE6E25"/>
           </a:solidFill>
           <a:ln>
             <a:solidFill>
-              <a:srgbClr val="0A1C58"/>
+              <a:srgbClr val="EE6E25"/>
             </a:solidFill>
           </a:ln>
         </p:spPr>
@@ -24632,13 +24704,13 @@
           <p:cNvPr id="2" name="Text 1"/>
           <p:cNvSpPr/>
           <p:nvPr>
-            <p:ph idx="102" type="title" hasCustomPrompt="1"/>
+            <p:ph idx="103" type="title" hasCustomPrompt="1"/>
           </p:nvPr>
         </p:nvSpPr>
         <p:spPr>
           <a:xfrm>
             <a:off x="320040" y="182880"/>
-            <a:ext cx="8503920" cy="640080"/>
+            <a:ext cx="7040880" cy="640080"/>
           </a:xfrm>
           <a:prstGeom prst="rect">
             <a:avLst/>
@@ -24654,14 +24726,14 @@
               <a:buNone/>
             </a:pPr>
             <a:r>
-              <a:rPr lang="en-US" sz="3200" b="1" dirty="0">
+              <a:rPr lang="en-US" sz="3000" b="1" dirty="0">
                 <a:solidFill>
                   <a:schemeClr val="tx2"/>
                 </a:solidFill>
               </a:rPr>
               <a:t>Valuation: Sum of the Parts</a:t>
             </a:r>
-            <a:endParaRPr lang="en-US" sz="3200" dirty="0"/>
+            <a:endParaRPr lang="en-US" sz="3000" dirty="0"/>
           </a:p>
         </p:txBody>
       </p:sp>
@@ -24670,7 +24742,7 @@
           <p:cNvPr id="3" name="Text 1"/>
           <p:cNvSpPr/>
           <p:nvPr>
-            <p:ph idx="103" type="body" hasCustomPrompt="1"/>
+            <p:ph idx="104" type="body" hasCustomPrompt="1"/>
           </p:nvPr>
         </p:nvSpPr>
         <p:spPr>
@@ -24754,9 +24826,9 @@
             <a:avLst/>
           </a:prstGeom>
           <a:noFill/>
-          <a:ln w="12700">
+          <a:ln w="19050">
             <a:solidFill>
-              <a:srgbClr val="1A1A1A"/>
+              <a:srgbClr val="2E93AE"/>
             </a:solidFill>
             <a:prstDash val="solid"/>
           </a:ln>
@@ -25081,9 +25153,9 @@
             <a:avLst/>
           </a:prstGeom>
           <a:noFill/>
-          <a:ln w="12700">
+          <a:ln w="19050">
             <a:solidFill>
-              <a:srgbClr val="1A1A1A"/>
+              <a:srgbClr val="2E93AE"/>
             </a:solidFill>
             <a:prstDash val="solid"/>
           </a:ln>
@@ -25399,13 +25471,13 @@
           <p:cNvPr id="2" name="Text 1"/>
           <p:cNvSpPr/>
           <p:nvPr>
-            <p:ph idx="102" type="title" hasCustomPrompt="1"/>
+            <p:ph idx="103" type="title" hasCustomPrompt="1"/>
           </p:nvPr>
         </p:nvSpPr>
         <p:spPr>
           <a:xfrm>
             <a:off x="320040" y="182880"/>
-            <a:ext cx="8503920" cy="640080"/>
+            <a:ext cx="7040880" cy="640080"/>
           </a:xfrm>
           <a:prstGeom prst="rect">
             <a:avLst/>
@@ -25421,14 +25493,14 @@
               <a:buNone/>
             </a:pPr>
             <a:r>
-              <a:rPr lang="en-US" sz="3200" b="1" dirty="0">
+              <a:rPr lang="en-US" sz="3000" b="1" dirty="0">
                 <a:solidFill>
                   <a:schemeClr val="tx2"/>
                 </a:solidFill>
               </a:rPr>
               <a:t>Catalysts</a:t>
             </a:r>
-            <a:endParaRPr lang="en-US" sz="3200" dirty="0"/>
+            <a:endParaRPr lang="en-US" sz="3000" dirty="0"/>
           </a:p>
         </p:txBody>
       </p:sp>
@@ -25437,7 +25509,7 @@
           <p:cNvPr id="3" name="Text 1"/>
           <p:cNvSpPr/>
           <p:nvPr>
-            <p:ph idx="103" type="body" hasCustomPrompt="1"/>
+            <p:ph idx="104" type="body" hasCustomPrompt="1"/>
           </p:nvPr>
         </p:nvSpPr>
         <p:spPr>
@@ -25563,9 +25635,9 @@
           <a:solidFill>
             <a:srgbClr val="FFFFFF"/>
           </a:solidFill>
-          <a:ln w="25400">
+          <a:ln w="31750">
             <a:solidFill>
-              <a:srgbClr val="0A1C58"/>
+              <a:srgbClr val="EE6E25"/>
             </a:solidFill>
           </a:ln>
         </p:spPr>
@@ -25697,9 +25769,9 @@
           <a:solidFill>
             <a:srgbClr val="FFFFFF"/>
           </a:solidFill>
-          <a:ln w="25400">
+          <a:ln w="31750">
             <a:solidFill>
-              <a:srgbClr val="0A1C58"/>
+              <a:srgbClr val="EE6E25"/>
             </a:solidFill>
           </a:ln>
         </p:spPr>
@@ -25831,9 +25903,9 @@
           <a:solidFill>
             <a:srgbClr val="FFFFFF"/>
           </a:solidFill>
-          <a:ln w="25400">
+          <a:ln w="31750">
             <a:solidFill>
-              <a:srgbClr val="0A1C58"/>
+              <a:srgbClr val="EE6E25"/>
             </a:solidFill>
           </a:ln>
         </p:spPr>
@@ -26052,13 +26124,13 @@
           <p:cNvPr id="2" name="Text 1"/>
           <p:cNvSpPr/>
           <p:nvPr>
-            <p:ph idx="102" type="title" hasCustomPrompt="1"/>
+            <p:ph idx="103" type="title" hasCustomPrompt="1"/>
           </p:nvPr>
         </p:nvSpPr>
         <p:spPr>
           <a:xfrm>
             <a:off x="320040" y="182880"/>
-            <a:ext cx="8503920" cy="640080"/>
+            <a:ext cx="7040880" cy="640080"/>
           </a:xfrm>
           <a:prstGeom prst="rect">
             <a:avLst/>
@@ -26074,14 +26146,14 @@
               <a:buNone/>
             </a:pPr>
             <a:r>
-              <a:rPr lang="en-US" sz="3200" b="1" dirty="0">
+              <a:rPr lang="en-US" sz="3000" b="1" dirty="0">
                 <a:solidFill>
                   <a:schemeClr val="tx2"/>
                 </a:solidFill>
               </a:rPr>
               <a:t>Risks / Mitigants</a:t>
             </a:r>
-            <a:endParaRPr lang="en-US" sz="3200" dirty="0"/>
+            <a:endParaRPr lang="en-US" sz="3000" dirty="0"/>
           </a:p>
         </p:txBody>
       </p:sp>
@@ -26090,7 +26162,7 @@
           <p:cNvPr id="3" name="Text 1"/>
           <p:cNvSpPr/>
           <p:nvPr>
-            <p:ph idx="103" type="body" hasCustomPrompt="1"/>
+            <p:ph idx="104" type="body" hasCustomPrompt="1"/>
           </p:nvPr>
         </p:nvSpPr>
         <p:spPr>
@@ -26140,9 +26212,9 @@
           <a:solidFill>
             <a:srgbClr val="FFFFFF"/>
           </a:solidFill>
-          <a:ln w="25400">
+          <a:ln w="31750">
             <a:solidFill>
-              <a:srgbClr val="0A1C58"/>
+              <a:srgbClr val="EE6E25"/>
             </a:solidFill>
           </a:ln>
         </p:spPr>
@@ -26341,9 +26413,9 @@
           <a:solidFill>
             <a:srgbClr val="FFFFFF"/>
           </a:solidFill>
-          <a:ln w="25400">
+          <a:ln w="31750">
             <a:solidFill>
-              <a:srgbClr val="0A1C58"/>
+              <a:srgbClr val="EE6E25"/>
             </a:solidFill>
           </a:ln>
         </p:spPr>
@@ -26542,9 +26614,9 @@
           <a:solidFill>
             <a:srgbClr val="FFFFFF"/>
           </a:solidFill>
-          <a:ln w="25400">
+          <a:ln w="31750">
             <a:solidFill>
-              <a:srgbClr val="0A1C58"/>
+              <a:srgbClr val="EE6E25"/>
             </a:solidFill>
           </a:ln>
         </p:spPr>
@@ -26931,45 +27003,9 @@
           </a:p>
         </p:txBody>
       </p:sp>
-      <p:sp>
-        <p:nvSpPr>
-          <p:cNvPr id="3" name="Cover label"/>
-          <p:cNvSpPr txBox="1"/>
-          <p:nvPr/>
-        </p:nvSpPr>
-        <p:spPr>
-          <a:xfrm>
-            <a:off x="548640" y="2926080"/>
-            <a:ext cx="8046720" cy="822960"/>
-          </a:xfrm>
-          <a:prstGeom prst="rect">
-            <a:avLst/>
-          </a:prstGeom>
-          <a:noFill/>
-          <a:ln/>
-        </p:spPr>
-        <p:txBody>
-          <a:bodyPr wrap="square" lIns="0" tIns="0" rIns="0" bIns="0" rtlCol="0" anchor="ctr"/>
-          <a:lstStyle/>
-          <a:p>
-            <a:pPr algn="ctr" indent="0" marL="0">
-              <a:buNone/>
-            </a:pPr>
-            <a:r>
-              <a:rPr lang="en-US" sz="4400" b="1" dirty="0">
-                <a:solidFill>
-                  <a:schemeClr val="tx2"/>
-                </a:solidFill>
-              </a:rPr>
-              <a:t>Q&amp;A</a:t>
-            </a:r>
-            <a:endParaRPr lang="en-US" sz="4400" dirty="0"/>
-          </a:p>
-        </p:txBody>
-      </p:sp>
       <p:pic>
         <p:nvPicPr>
-          <p:cNvPr id="4" name="GPS logo" descr="/home/user/SPOT/deck/gps_logo.jpeg">    </p:cNvPr>
+          <p:cNvPr id="3" name="FTAI logo" descr="/home/user/SPOT/deck/img/ftai_logo.png">    </p:cNvPr>
           <p:cNvPicPr>
             <a:picLocks noChangeAspect="1"/>
           </p:cNvPicPr>
@@ -26983,6 +27019,66 @@
         </p:blipFill>
         <p:spPr>
           <a:xfrm>
+            <a:off x="6766560" y="365760"/>
+            <a:ext cx="2011680" cy="766953"/>
+          </a:xfrm>
+          <a:prstGeom prst="rect">
+            <a:avLst/>
+          </a:prstGeom>
+        </p:spPr>
+      </p:pic>
+      <p:sp>
+        <p:nvSpPr>
+          <p:cNvPr id="4" name="Cover label"/>
+          <p:cNvSpPr txBox="1"/>
+          <p:nvPr/>
+        </p:nvSpPr>
+        <p:spPr>
+          <a:xfrm>
+            <a:off x="548640" y="2926080"/>
+            <a:ext cx="8046720" cy="822960"/>
+          </a:xfrm>
+          <a:prstGeom prst="rect">
+            <a:avLst/>
+          </a:prstGeom>
+          <a:noFill/>
+          <a:ln/>
+        </p:spPr>
+        <p:txBody>
+          <a:bodyPr wrap="square" lIns="0" tIns="0" rIns="0" bIns="0" rtlCol="0" anchor="ctr"/>
+          <a:lstStyle/>
+          <a:p>
+            <a:pPr algn="ctr" indent="0" marL="0">
+              <a:buNone/>
+            </a:pPr>
+            <a:r>
+              <a:rPr lang="en-US" sz="4400" b="1" dirty="0">
+                <a:solidFill>
+                  <a:schemeClr val="tx2"/>
+                </a:solidFill>
+              </a:rPr>
+              <a:t>Q&amp;A</a:t>
+            </a:r>
+            <a:endParaRPr lang="en-US" sz="4400" dirty="0"/>
+          </a:p>
+        </p:txBody>
+      </p:sp>
+      <p:pic>
+        <p:nvPicPr>
+          <p:cNvPr id="5" name="GPS logo" descr="/home/user/SPOT/deck/gps_logo.jpeg">    </p:cNvPr>
+          <p:cNvPicPr>
+            <a:picLocks noChangeAspect="1"/>
+          </p:cNvPicPr>
+          <p:nvPr/>
+        </p:nvPicPr>
+        <p:blipFill>
+          <a:blip r:embed="rId2"/>
+          <a:stretch>
+            <a:fillRect/>
+          </a:stretch>
+        </p:blipFill>
+        <p:spPr>
+          <a:xfrm>
             <a:off x="5897880" y="5532120"/>
             <a:ext cx="1234440" cy="1133856"/>
           </a:xfrm>
@@ -26993,7 +27089,7 @@
       </p:pic>
       <p:sp>
         <p:nvSpPr>
-          <p:cNvPr id="5" name="Logo divider"/>
+          <p:cNvPr id="6" name="Logo divider"/>
           <p:cNvSpPr/>
           <p:nvPr/>
         </p:nvSpPr>
@@ -27016,7 +27112,7 @@
       </p:sp>
       <p:sp>
         <p:nvSpPr>
-          <p:cNvPr id="6" name="Presenter"/>
+          <p:cNvPr id="7" name="Presenter"/>
           <p:cNvSpPr txBox="1"/>
           <p:nvPr/>
         </p:nvSpPr>
@@ -27139,45 +27235,9 @@
           </a:p>
         </p:txBody>
       </p:sp>
-      <p:sp>
-        <p:nvSpPr>
-          <p:cNvPr id="3" name="Cover label"/>
-          <p:cNvSpPr txBox="1"/>
-          <p:nvPr/>
-        </p:nvSpPr>
-        <p:spPr>
-          <a:xfrm>
-            <a:off x="548640" y="2926080"/>
-            <a:ext cx="8046720" cy="822960"/>
-          </a:xfrm>
-          <a:prstGeom prst="rect">
-            <a:avLst/>
-          </a:prstGeom>
-          <a:noFill/>
-          <a:ln/>
-        </p:spPr>
-        <p:txBody>
-          <a:bodyPr wrap="square" lIns="0" tIns="0" rIns="0" bIns="0" rtlCol="0" anchor="ctr"/>
-          <a:lstStyle/>
-          <a:p>
-            <a:pPr algn="ctr" indent="0" marL="0">
-              <a:buNone/>
-            </a:pPr>
-            <a:r>
-              <a:rPr lang="en-US" sz="4400" b="1" dirty="0">
-                <a:solidFill>
-                  <a:schemeClr val="tx2"/>
-                </a:solidFill>
-              </a:rPr>
-              <a:t>Appendix</a:t>
-            </a:r>
-            <a:endParaRPr lang="en-US" sz="4400" dirty="0"/>
-          </a:p>
-        </p:txBody>
-      </p:sp>
       <p:pic>
         <p:nvPicPr>
-          <p:cNvPr id="4" name="GPS logo" descr="/home/user/SPOT/deck/gps_logo.jpeg">    </p:cNvPr>
+          <p:cNvPr id="3" name="FTAI logo" descr="/home/user/SPOT/deck/img/ftai_logo.png">    </p:cNvPr>
           <p:cNvPicPr>
             <a:picLocks noChangeAspect="1"/>
           </p:cNvPicPr>
@@ -27191,6 +27251,66 @@
         </p:blipFill>
         <p:spPr>
           <a:xfrm>
+            <a:off x="6766560" y="365760"/>
+            <a:ext cx="2011680" cy="766953"/>
+          </a:xfrm>
+          <a:prstGeom prst="rect">
+            <a:avLst/>
+          </a:prstGeom>
+        </p:spPr>
+      </p:pic>
+      <p:sp>
+        <p:nvSpPr>
+          <p:cNvPr id="4" name="Cover label"/>
+          <p:cNvSpPr txBox="1"/>
+          <p:nvPr/>
+        </p:nvSpPr>
+        <p:spPr>
+          <a:xfrm>
+            <a:off x="548640" y="2926080"/>
+            <a:ext cx="8046720" cy="822960"/>
+          </a:xfrm>
+          <a:prstGeom prst="rect">
+            <a:avLst/>
+          </a:prstGeom>
+          <a:noFill/>
+          <a:ln/>
+        </p:spPr>
+        <p:txBody>
+          <a:bodyPr wrap="square" lIns="0" tIns="0" rIns="0" bIns="0" rtlCol="0" anchor="ctr"/>
+          <a:lstStyle/>
+          <a:p>
+            <a:pPr algn="ctr" indent="0" marL="0">
+              <a:buNone/>
+            </a:pPr>
+            <a:r>
+              <a:rPr lang="en-US" sz="4400" b="1" dirty="0">
+                <a:solidFill>
+                  <a:schemeClr val="tx2"/>
+                </a:solidFill>
+              </a:rPr>
+              <a:t>Appendix</a:t>
+            </a:r>
+            <a:endParaRPr lang="en-US" sz="4400" dirty="0"/>
+          </a:p>
+        </p:txBody>
+      </p:sp>
+      <p:pic>
+        <p:nvPicPr>
+          <p:cNvPr id="5" name="GPS logo" descr="/home/user/SPOT/deck/gps_logo.jpeg">    </p:cNvPr>
+          <p:cNvPicPr>
+            <a:picLocks noChangeAspect="1"/>
+          </p:cNvPicPr>
+          <p:nvPr/>
+        </p:nvPicPr>
+        <p:blipFill>
+          <a:blip r:embed="rId2"/>
+          <a:stretch>
+            <a:fillRect/>
+          </a:stretch>
+        </p:blipFill>
+        <p:spPr>
+          <a:xfrm>
             <a:off x="5897880" y="5532120"/>
             <a:ext cx="1234440" cy="1133856"/>
           </a:xfrm>
@@ -27201,7 +27321,7 @@
       </p:pic>
       <p:sp>
         <p:nvSpPr>
-          <p:cNvPr id="5" name="Logo divider"/>
+          <p:cNvPr id="6" name="Logo divider"/>
           <p:cNvSpPr/>
           <p:nvPr/>
         </p:nvSpPr>
@@ -27224,7 +27344,7 @@
       </p:sp>
       <p:sp>
         <p:nvSpPr>
-          <p:cNvPr id="6" name="Presenter"/>
+          <p:cNvPr id="7" name="Presenter"/>
           <p:cNvSpPr txBox="1"/>
           <p:nvPr/>
         </p:nvSpPr>
@@ -27302,13 +27422,13 @@
           <p:cNvPr id="2" name="Text 1"/>
           <p:cNvSpPr/>
           <p:nvPr>
-            <p:ph idx="102" type="title" hasCustomPrompt="1"/>
+            <p:ph idx="103" type="title" hasCustomPrompt="1"/>
           </p:nvPr>
         </p:nvSpPr>
         <p:spPr>
           <a:xfrm>
             <a:off x="320040" y="182880"/>
-            <a:ext cx="8503920" cy="640080"/>
+            <a:ext cx="7040880" cy="640080"/>
           </a:xfrm>
           <a:prstGeom prst="rect">
             <a:avLst/>
@@ -27324,14 +27444,14 @@
               <a:buNone/>
             </a:pPr>
             <a:r>
-              <a:rPr lang="en-US" sz="3200" b="1" dirty="0">
+              <a:rPr lang="en-US" sz="3000" b="1" dirty="0">
                 <a:solidFill>
                   <a:schemeClr val="tx2"/>
                 </a:solidFill>
               </a:rPr>
               <a:t>The Opportunity (1/3)</a:t>
             </a:r>
-            <a:endParaRPr lang="en-US" sz="3200" dirty="0"/>
+            <a:endParaRPr lang="en-US" sz="3000" dirty="0"/>
           </a:p>
         </p:txBody>
       </p:sp>
@@ -27340,7 +27460,7 @@
           <p:cNvPr id="3" name="Text 1"/>
           <p:cNvSpPr/>
           <p:nvPr>
-            <p:ph idx="103" type="body" hasCustomPrompt="1"/>
+            <p:ph idx="104" type="body" hasCustomPrompt="1"/>
           </p:nvPr>
         </p:nvSpPr>
         <p:spPr>
@@ -27424,9 +27544,9 @@
             <a:avLst/>
           </a:prstGeom>
           <a:noFill/>
-          <a:ln w="12700">
+          <a:ln w="19050">
             <a:solidFill>
-              <a:srgbClr val="1A1A1A"/>
+              <a:srgbClr val="2E93AE"/>
             </a:solidFill>
             <a:prstDash val="solid"/>
           </a:ln>
@@ -27499,11 +27619,11 @@
             <a:avLst/>
           </a:prstGeom>
           <a:solidFill>
-            <a:srgbClr val="0A1C58"/>
+            <a:srgbClr val="EE6E25"/>
           </a:solidFill>
           <a:ln>
             <a:solidFill>
-              <a:srgbClr val="0A1C58"/>
+              <a:srgbClr val="EE6E25"/>
             </a:solidFill>
           </a:ln>
         </p:spPr>
@@ -27591,9 +27711,9 @@
             <a:avLst/>
           </a:prstGeom>
           <a:noFill/>
-          <a:ln w="12700">
+          <a:ln w="19050">
             <a:solidFill>
-              <a:srgbClr val="1A1A1A"/>
+              <a:srgbClr val="2E93AE"/>
             </a:solidFill>
             <a:prstDash val="solid"/>
           </a:ln>
@@ -27883,13 +28003,13 @@
           <p:cNvPr id="2" name="Text 1"/>
           <p:cNvSpPr/>
           <p:nvPr>
-            <p:ph idx="102" type="title" hasCustomPrompt="1"/>
+            <p:ph idx="103" type="title" hasCustomPrompt="1"/>
           </p:nvPr>
         </p:nvSpPr>
         <p:spPr>
           <a:xfrm>
             <a:off x="320040" y="182880"/>
-            <a:ext cx="8503920" cy="640080"/>
+            <a:ext cx="7040880" cy="640080"/>
           </a:xfrm>
           <a:prstGeom prst="rect">
             <a:avLst/>
@@ -27905,14 +28025,14 @@
               <a:buNone/>
             </a:pPr>
             <a:r>
-              <a:rPr lang="en-US" sz="3200" b="1" dirty="0">
+              <a:rPr lang="en-US" sz="3000" b="1" dirty="0">
                 <a:solidFill>
                   <a:schemeClr val="tx2"/>
                 </a:solidFill>
               </a:rPr>
               <a:t>Appendix: DCF (1/2)</a:t>
             </a:r>
-            <a:endParaRPr lang="en-US" sz="3200" dirty="0"/>
+            <a:endParaRPr lang="en-US" sz="3000" dirty="0"/>
           </a:p>
         </p:txBody>
       </p:sp>
@@ -28086,13 +28206,13 @@
           <p:cNvPr id="2" name="Text 1"/>
           <p:cNvSpPr/>
           <p:nvPr>
-            <p:ph idx="102" type="title" hasCustomPrompt="1"/>
+            <p:ph idx="103" type="title" hasCustomPrompt="1"/>
           </p:nvPr>
         </p:nvSpPr>
         <p:spPr>
           <a:xfrm>
             <a:off x="320040" y="182880"/>
-            <a:ext cx="8503920" cy="640080"/>
+            <a:ext cx="7040880" cy="640080"/>
           </a:xfrm>
           <a:prstGeom prst="rect">
             <a:avLst/>
@@ -28108,14 +28228,14 @@
               <a:buNone/>
             </a:pPr>
             <a:r>
-              <a:rPr lang="en-US" sz="3200" b="1" dirty="0">
+              <a:rPr lang="en-US" sz="3000" b="1" dirty="0">
                 <a:solidFill>
                   <a:schemeClr val="tx2"/>
                 </a:solidFill>
               </a:rPr>
               <a:t>Appendix: DCF (2/2)</a:t>
             </a:r>
-            <a:endParaRPr lang="en-US" sz="3200" dirty="0"/>
+            <a:endParaRPr lang="en-US" sz="3000" dirty="0"/>
           </a:p>
         </p:txBody>
       </p:sp>
@@ -28265,13 +28385,13 @@
           <p:cNvPr id="2" name="Text 1"/>
           <p:cNvSpPr/>
           <p:nvPr>
-            <p:ph idx="102" type="title" hasCustomPrompt="1"/>
+            <p:ph idx="103" type="title" hasCustomPrompt="1"/>
           </p:nvPr>
         </p:nvSpPr>
         <p:spPr>
           <a:xfrm>
             <a:off x="320040" y="182880"/>
-            <a:ext cx="8503920" cy="640080"/>
+            <a:ext cx="7040880" cy="640080"/>
           </a:xfrm>
           <a:prstGeom prst="rect">
             <a:avLst/>
@@ -28287,14 +28407,14 @@
               <a:buNone/>
             </a:pPr>
             <a:r>
-              <a:rPr lang="en-US" sz="3200" b="1" dirty="0">
+              <a:rPr lang="en-US" sz="3000" b="1" dirty="0">
                 <a:solidFill>
                   <a:schemeClr val="tx2"/>
                 </a:solidFill>
               </a:rPr>
               <a:t>Appendix: DCF Sensitivities</a:t>
             </a:r>
-            <a:endParaRPr lang="en-US" sz="3200" dirty="0"/>
+            <a:endParaRPr lang="en-US" sz="3000" dirty="0"/>
           </a:p>
         </p:txBody>
       </p:sp>
@@ -28444,13 +28564,13 @@
           <p:cNvPr id="2" name="Text 1"/>
           <p:cNvSpPr/>
           <p:nvPr>
-            <p:ph idx="102" type="title" hasCustomPrompt="1"/>
+            <p:ph idx="103" type="title" hasCustomPrompt="1"/>
           </p:nvPr>
         </p:nvSpPr>
         <p:spPr>
           <a:xfrm>
             <a:off x="320040" y="182880"/>
-            <a:ext cx="8503920" cy="640080"/>
+            <a:ext cx="7040880" cy="640080"/>
           </a:xfrm>
           <a:prstGeom prst="rect">
             <a:avLst/>
@@ -28466,14 +28586,14 @@
               <a:buNone/>
             </a:pPr>
             <a:r>
-              <a:rPr lang="en-US" sz="3200" b="1" dirty="0">
+              <a:rPr lang="en-US" sz="3000" b="1" dirty="0">
                 <a:solidFill>
                   <a:schemeClr val="tx2"/>
                 </a:solidFill>
               </a:rPr>
               <a:t>Appendix: Sum of the Parts</a:t>
             </a:r>
-            <a:endParaRPr lang="en-US" sz="3200" dirty="0"/>
+            <a:endParaRPr lang="en-US" sz="3000" dirty="0"/>
           </a:p>
         </p:txBody>
       </p:sp>
@@ -28623,13 +28743,13 @@
           <p:cNvPr id="2" name="Text 1"/>
           <p:cNvSpPr/>
           <p:nvPr>
-            <p:ph idx="102" type="title" hasCustomPrompt="1"/>
+            <p:ph idx="103" type="title" hasCustomPrompt="1"/>
           </p:nvPr>
         </p:nvSpPr>
         <p:spPr>
           <a:xfrm>
             <a:off x="320040" y="182880"/>
-            <a:ext cx="8503920" cy="640080"/>
+            <a:ext cx="7040880" cy="640080"/>
           </a:xfrm>
           <a:prstGeom prst="rect">
             <a:avLst/>
@@ -28645,14 +28765,14 @@
               <a:buNone/>
             </a:pPr>
             <a:r>
-              <a:rPr lang="en-US" sz="3200" b="1" dirty="0">
+              <a:rPr lang="en-US" sz="3000" b="1" dirty="0">
                 <a:solidFill>
                   <a:schemeClr val="tx2"/>
                 </a:solidFill>
               </a:rPr>
               <a:t>Appendix: Power Model</a:t>
             </a:r>
-            <a:endParaRPr lang="en-US" sz="3200" dirty="0"/>
+            <a:endParaRPr lang="en-US" sz="3000" dirty="0"/>
           </a:p>
         </p:txBody>
       </p:sp>
@@ -28826,13 +28946,13 @@
           <p:cNvPr id="2" name="Text 1"/>
           <p:cNvSpPr/>
           <p:nvPr>
-            <p:ph idx="102" type="title" hasCustomPrompt="1"/>
+            <p:ph idx="103" type="title" hasCustomPrompt="1"/>
           </p:nvPr>
         </p:nvSpPr>
         <p:spPr>
           <a:xfrm>
             <a:off x="320040" y="182880"/>
-            <a:ext cx="8503920" cy="640080"/>
+            <a:ext cx="7040880" cy="640080"/>
           </a:xfrm>
           <a:prstGeom prst="rect">
             <a:avLst/>
@@ -28848,14 +28968,14 @@
               <a:buNone/>
             </a:pPr>
             <a:r>
-              <a:rPr lang="en-US" sz="3200" b="1" dirty="0">
+              <a:rPr lang="en-US" sz="3000" b="1" dirty="0">
                 <a:solidFill>
                   <a:schemeClr val="tx2"/>
                 </a:solidFill>
               </a:rPr>
-              <a:t>Appendix: CFM56 Repair Pricing</a:t>
-            </a:r>
-            <a:endParaRPr lang="en-US" sz="3200" dirty="0"/>
+              <a:t>Appendix: Repair Pricing</a:t>
+            </a:r>
+            <a:endParaRPr lang="en-US" sz="3000" dirty="0"/>
           </a:p>
         </p:txBody>
       </p:sp>
@@ -29043,13 +29163,13 @@
           <p:cNvPr id="2" name="Text 1"/>
           <p:cNvSpPr/>
           <p:nvPr>
-            <p:ph idx="102" type="title" hasCustomPrompt="1"/>
+            <p:ph idx="103" type="title" hasCustomPrompt="1"/>
           </p:nvPr>
         </p:nvSpPr>
         <p:spPr>
           <a:xfrm>
             <a:off x="320040" y="182880"/>
-            <a:ext cx="8503920" cy="640080"/>
+            <a:ext cx="7040880" cy="640080"/>
           </a:xfrm>
           <a:prstGeom prst="rect">
             <a:avLst/>
@@ -29065,14 +29185,14 @@
               <a:buNone/>
             </a:pPr>
             <a:r>
-              <a:rPr lang="en-US" sz="3200" b="1" dirty="0">
+              <a:rPr lang="en-US" sz="3000" b="1" dirty="0">
                 <a:solidFill>
                   <a:schemeClr val="tx2"/>
                 </a:solidFill>
               </a:rPr>
               <a:t>The Opportunity (2/3)</a:t>
             </a:r>
-            <a:endParaRPr lang="en-US" sz="3200" dirty="0"/>
+            <a:endParaRPr lang="en-US" sz="3000" dirty="0"/>
           </a:p>
         </p:txBody>
       </p:sp>
@@ -29081,7 +29201,7 @@
           <p:cNvPr id="3" name="Text 1"/>
           <p:cNvSpPr/>
           <p:nvPr>
-            <p:ph idx="103" type="body" hasCustomPrompt="1"/>
+            <p:ph idx="104" type="body" hasCustomPrompt="1"/>
           </p:nvPr>
         </p:nvSpPr>
         <p:spPr>
@@ -29165,9 +29285,9 @@
             <a:avLst/>
           </a:prstGeom>
           <a:noFill/>
-          <a:ln w="12700">
+          <a:ln w="19050">
             <a:solidFill>
-              <a:srgbClr val="1A1A1A"/>
+              <a:srgbClr val="2E93AE"/>
             </a:solidFill>
             <a:prstDash val="solid"/>
           </a:ln>
@@ -29378,9 +29498,9 @@
             <a:avLst/>
           </a:prstGeom>
           <a:noFill/>
-          <a:ln w="12700">
+          <a:ln w="19050">
             <a:solidFill>
-              <a:srgbClr val="1A1A1A"/>
+              <a:srgbClr val="2E93AE"/>
             </a:solidFill>
             <a:prstDash val="solid"/>
           </a:ln>
@@ -29732,13 +29852,13 @@
           <p:cNvPr id="2" name="Text 1"/>
           <p:cNvSpPr/>
           <p:nvPr>
-            <p:ph idx="102" type="title" hasCustomPrompt="1"/>
+            <p:ph idx="103" type="title" hasCustomPrompt="1"/>
           </p:nvPr>
         </p:nvSpPr>
         <p:spPr>
           <a:xfrm>
             <a:off x="320040" y="182880"/>
-            <a:ext cx="8503920" cy="640080"/>
+            <a:ext cx="7040880" cy="640080"/>
           </a:xfrm>
           <a:prstGeom prst="rect">
             <a:avLst/>
@@ -29754,14 +29874,14 @@
               <a:buNone/>
             </a:pPr>
             <a:r>
-              <a:rPr lang="en-US" sz="3200" b="1" dirty="0">
+              <a:rPr lang="en-US" sz="3000" b="1" dirty="0">
                 <a:solidFill>
                   <a:schemeClr val="tx2"/>
                 </a:solidFill>
               </a:rPr>
               <a:t>The Opportunity (3/3)</a:t>
             </a:r>
-            <a:endParaRPr lang="en-US" sz="3200" dirty="0"/>
+            <a:endParaRPr lang="en-US" sz="3000" dirty="0"/>
           </a:p>
         </p:txBody>
       </p:sp>
@@ -29770,7 +29890,7 @@
           <p:cNvPr id="3" name="Text 1"/>
           <p:cNvSpPr/>
           <p:nvPr>
-            <p:ph idx="103" type="body" hasCustomPrompt="1"/>
+            <p:ph idx="104" type="body" hasCustomPrompt="1"/>
           </p:nvPr>
         </p:nvSpPr>
         <p:spPr>
@@ -29854,9 +29974,9 @@
             <a:avLst/>
           </a:prstGeom>
           <a:noFill/>
-          <a:ln w="12700">
+          <a:ln w="19050">
             <a:solidFill>
-              <a:srgbClr val="1A1A1A"/>
+              <a:srgbClr val="2E93AE"/>
             </a:solidFill>
             <a:prstDash val="solid"/>
           </a:ln>
@@ -30081,7 +30201,7 @@
             <a:r>
               <a:rPr lang="en-US" sz="1100" dirty="0">
                 <a:solidFill>
-                  <a:srgbClr val="B5AEA9"/>
+                  <a:srgbClr val="2E93AE"/>
                 </a:solidFill>
               </a:rPr>
               <a:t>■ </a:t>
@@ -30188,9 +30308,9 @@
             <a:avLst/>
           </a:prstGeom>
           <a:noFill/>
-          <a:ln w="12700">
+          <a:ln w="19050">
             <a:solidFill>
-              <a:srgbClr val="1A1A1A"/>
+              <a:srgbClr val="2E93AE"/>
             </a:solidFill>
             <a:prstDash val="solid"/>
           </a:ln>
@@ -30572,13 +30692,13 @@
           <p:cNvPr id="2" name="Text 1"/>
           <p:cNvSpPr/>
           <p:nvPr>
-            <p:ph idx="102" type="title" hasCustomPrompt="1"/>
+            <p:ph idx="103" type="title" hasCustomPrompt="1"/>
           </p:nvPr>
         </p:nvSpPr>
         <p:spPr>
           <a:xfrm>
             <a:off x="320040" y="182880"/>
-            <a:ext cx="8503920" cy="640080"/>
+            <a:ext cx="7040880" cy="640080"/>
           </a:xfrm>
           <a:prstGeom prst="rect">
             <a:avLst/>
@@ -30594,14 +30714,14 @@
               <a:buNone/>
             </a:pPr>
             <a:r>
-              <a:rPr lang="en-US" sz="3200" b="1" dirty="0">
+              <a:rPr lang="en-US" sz="3000" b="1" dirty="0">
                 <a:solidFill>
                   <a:schemeClr val="tx2"/>
                 </a:solidFill>
               </a:rPr>
               <a:t>Returns Summary</a:t>
             </a:r>
-            <a:endParaRPr lang="en-US" sz="3200" dirty="0"/>
+            <a:endParaRPr lang="en-US" sz="3000" dirty="0"/>
           </a:p>
         </p:txBody>
       </p:sp>
@@ -31053,7 +31173,7 @@
             <a:avLst/>
           </a:prstGeom>
           <a:solidFill>
-            <a:srgbClr val="DCD8D3"/>
+            <a:srgbClr val="2E93AE"/>
           </a:solidFill>
           <a:ln/>
         </p:spPr>
@@ -31280,13 +31400,13 @@
           <p:cNvPr id="2" name="Text 1"/>
           <p:cNvSpPr/>
           <p:nvPr>
-            <p:ph idx="102" type="title" hasCustomPrompt="1"/>
+            <p:ph idx="103" type="title" hasCustomPrompt="1"/>
           </p:nvPr>
         </p:nvSpPr>
         <p:spPr>
           <a:xfrm>
             <a:off x="320040" y="182880"/>
-            <a:ext cx="8503920" cy="640080"/>
+            <a:ext cx="7040880" cy="640080"/>
           </a:xfrm>
           <a:prstGeom prst="rect">
             <a:avLst/>
@@ -31302,14 +31422,14 @@
               <a:buNone/>
             </a:pPr>
             <a:r>
-              <a:rPr lang="en-US" sz="3200" b="1" dirty="0">
+              <a:rPr lang="en-US" sz="3000" b="1" dirty="0">
                 <a:solidFill>
                   <a:schemeClr val="tx2"/>
                 </a:solidFill>
               </a:rPr>
               <a:t>Business Overview (1/2)</a:t>
             </a:r>
-            <a:endParaRPr lang="en-US" sz="3200" dirty="0"/>
+            <a:endParaRPr lang="en-US" sz="3000" dirty="0"/>
           </a:p>
         </p:txBody>
       </p:sp>
@@ -31318,7 +31438,7 @@
           <p:cNvPr id="3" name="Text 1"/>
           <p:cNvSpPr/>
           <p:nvPr>
-            <p:ph idx="103" type="body" hasCustomPrompt="1"/>
+            <p:ph idx="104" type="body" hasCustomPrompt="1"/>
           </p:nvPr>
         </p:nvSpPr>
         <p:spPr>
@@ -32001,13 +32121,13 @@
           <p:cNvPr id="2" name="Text 1"/>
           <p:cNvSpPr/>
           <p:nvPr>
-            <p:ph idx="102" type="title" hasCustomPrompt="1"/>
+            <p:ph idx="103" type="title" hasCustomPrompt="1"/>
           </p:nvPr>
         </p:nvSpPr>
         <p:spPr>
           <a:xfrm>
             <a:off x="320040" y="182880"/>
-            <a:ext cx="8503920" cy="640080"/>
+            <a:ext cx="7040880" cy="640080"/>
           </a:xfrm>
           <a:prstGeom prst="rect">
             <a:avLst/>
@@ -32023,14 +32143,14 @@
               <a:buNone/>
             </a:pPr>
             <a:r>
-              <a:rPr lang="en-US" sz="3200" b="1" dirty="0">
+              <a:rPr lang="en-US" sz="3000" b="1" dirty="0">
                 <a:solidFill>
                   <a:schemeClr val="tx2"/>
                 </a:solidFill>
               </a:rPr>
               <a:t>Business Overview (2/2)</a:t>
             </a:r>
-            <a:endParaRPr lang="en-US" sz="3200" dirty="0"/>
+            <a:endParaRPr lang="en-US" sz="3000" dirty="0"/>
           </a:p>
         </p:txBody>
       </p:sp>
@@ -32039,7 +32159,7 @@
           <p:cNvPr id="3" name="Text 1"/>
           <p:cNvSpPr/>
           <p:nvPr>
-            <p:ph idx="103" type="body" hasCustomPrompt="1"/>
+            <p:ph idx="104" type="body" hasCustomPrompt="1"/>
           </p:nvPr>
         </p:nvSpPr>
         <p:spPr>
@@ -32123,9 +32243,9 @@
             <a:avLst/>
           </a:prstGeom>
           <a:noFill/>
-          <a:ln w="12700">
+          <a:ln w="19050">
             <a:solidFill>
-              <a:srgbClr val="1A1A1A"/>
+              <a:srgbClr val="2E93AE"/>
             </a:solidFill>
             <a:prstDash val="solid"/>
           </a:ln>
@@ -32147,7 +32267,7 @@
           </a:prstGeom>
           <a:ln w="38100">
             <a:solidFill>
-              <a:srgbClr val="B5AEA9"/>
+              <a:srgbClr val="2E93AE"/>
             </a:solidFill>
             <a:prstDash val="solid"/>
           </a:ln>
@@ -32660,9 +32780,9 @@
             <a:avLst/>
           </a:prstGeom>
           <a:noFill/>
-          <a:ln w="12700">
+          <a:ln w="19050">
             <a:solidFill>
-              <a:srgbClr val="1A1A1A"/>
+              <a:srgbClr val="2E93AE"/>
             </a:solidFill>
             <a:prstDash val="solid"/>
           </a:ln>
@@ -32801,7 +32921,7 @@
           </a:solidFill>
           <a:ln w="15875">
             <a:solidFill>
-              <a:srgbClr val="B5AEA9"/>
+              <a:srgbClr val="2E93AE"/>
             </a:solidFill>
           </a:ln>
         </p:spPr>
@@ -32839,11 +32959,11 @@
             <a:avLst/>
           </a:prstGeom>
           <a:solidFill>
-            <a:srgbClr val="B5AEA9"/>
+            <a:srgbClr val="2E93AE"/>
           </a:solidFill>
           <a:ln w="15875">
             <a:solidFill>
-              <a:srgbClr val="B5AEA9"/>
+              <a:srgbClr val="2E93AE"/>
             </a:solidFill>
           </a:ln>
         </p:spPr>
@@ -32857,7 +32977,7 @@
             <a:r>
               <a:rPr lang="en-US" sz="1100" b="1" dirty="0">
                 <a:solidFill>
-                  <a:srgbClr val="0A1C58"/>
+                  <a:srgbClr val="FFFFFF"/>
                 </a:solidFill>
               </a:rPr>
               <a:t>4k</a:t>
@@ -32917,11 +33037,11 @@
             <a:avLst/>
           </a:prstGeom>
           <a:solidFill>
-            <a:srgbClr val="B5AEA9"/>
+            <a:srgbClr val="2E93AE"/>
           </a:solidFill>
           <a:ln w="15875">
             <a:solidFill>
-              <a:srgbClr val="B5AEA9"/>
+              <a:srgbClr val="2E93AE"/>
             </a:solidFill>
           </a:ln>
         </p:spPr>
@@ -32935,7 +33055,7 @@
             <a:r>
               <a:rPr lang="en-US" sz="1100" b="1" dirty="0">
                 <a:solidFill>
-                  <a:srgbClr val="0A1C58"/>
+                  <a:srgbClr val="FFFFFF"/>
                 </a:solidFill>
               </a:rPr>
               <a:t>4k</a:t>
@@ -33005,7 +33125,7 @@
           </a:solidFill>
           <a:ln w="15875">
             <a:solidFill>
-              <a:srgbClr val="B5AEA9"/>
+              <a:srgbClr val="2E93AE"/>
             </a:solidFill>
           </a:ln>
         </p:spPr>
@@ -33083,7 +33203,7 @@
           </a:solidFill>
           <a:ln w="15875">
             <a:solidFill>
-              <a:srgbClr val="B5AEA9"/>
+              <a:srgbClr val="2E93AE"/>
             </a:solidFill>
           </a:ln>
         </p:spPr>
@@ -33121,11 +33241,11 @@
             <a:avLst/>
           </a:prstGeom>
           <a:solidFill>
-            <a:srgbClr val="B5AEA9"/>
+            <a:srgbClr val="2E93AE"/>
           </a:solidFill>
           <a:ln w="15875">
             <a:solidFill>
-              <a:srgbClr val="B5AEA9"/>
+              <a:srgbClr val="2E93AE"/>
             </a:solidFill>
           </a:ln>
         </p:spPr>
@@ -33139,7 +33259,7 @@
             <a:r>
               <a:rPr lang="en-US" sz="1100" b="1" dirty="0">
                 <a:solidFill>
-                  <a:srgbClr val="0A1C58"/>
+                  <a:srgbClr val="FFFFFF"/>
                 </a:solidFill>
               </a:rPr>
               <a:t>4k</a:t>
@@ -33547,11 +33667,11 @@
             <a:avLst/>
           </a:prstGeom>
           <a:solidFill>
-            <a:srgbClr val="B5AEA9"/>
+            <a:srgbClr val="2E93AE"/>
           </a:solidFill>
           <a:ln w="15875">
             <a:solidFill>
-              <a:srgbClr val="B5AEA9"/>
+              <a:srgbClr val="2E93AE"/>
             </a:solidFill>
           </a:ln>
         </p:spPr>
@@ -33565,7 +33685,7 @@
             <a:r>
               <a:rPr lang="en-US" sz="1100" b="1" dirty="0">
                 <a:solidFill>
-                  <a:srgbClr val="0A1C58"/>
+                  <a:srgbClr val="FFFFFF"/>
                 </a:solidFill>
               </a:rPr>
               <a:t>4k</a:t>
@@ -33589,11 +33709,11 @@
             <a:avLst/>
           </a:prstGeom>
           <a:solidFill>
-            <a:srgbClr val="B5AEA9"/>
+            <a:srgbClr val="2E93AE"/>
           </a:solidFill>
           <a:ln w="15875">
             <a:solidFill>
-              <a:srgbClr val="B5AEA9"/>
+              <a:srgbClr val="2E93AE"/>
             </a:solidFill>
           </a:ln>
         </p:spPr>
@@ -33607,7 +33727,7 @@
             <a:r>
               <a:rPr lang="en-US" sz="1100" b="1" dirty="0">
                 <a:solidFill>
-                  <a:srgbClr val="0A1C58"/>
+                  <a:srgbClr val="FFFFFF"/>
                 </a:solidFill>
               </a:rPr>
               <a:t>4k</a:t>
@@ -33631,11 +33751,11 @@
             <a:avLst/>
           </a:prstGeom>
           <a:solidFill>
-            <a:srgbClr val="B5AEA9"/>
+            <a:srgbClr val="2E93AE"/>
           </a:solidFill>
           <a:ln w="15875">
             <a:solidFill>
-              <a:srgbClr val="B5AEA9"/>
+              <a:srgbClr val="2E93AE"/>
             </a:solidFill>
           </a:ln>
         </p:spPr>
@@ -33649,7 +33769,7 @@
             <a:r>
               <a:rPr lang="en-US" sz="1100" b="1" dirty="0">
                 <a:solidFill>
-                  <a:srgbClr val="0A1C58"/>
+                  <a:srgbClr val="FFFFFF"/>
                 </a:solidFill>
               </a:rPr>
               <a:t>4k</a:t>
@@ -33713,7 +33833,7 @@
           </a:solidFill>
           <a:ln w="15875">
             <a:solidFill>
-              <a:srgbClr val="B5AEA9"/>
+              <a:srgbClr val="2E93AE"/>
             </a:solidFill>
           </a:ln>
         </p:spPr>
@@ -33755,7 +33875,7 @@
           </a:solidFill>
           <a:ln w="15875">
             <a:solidFill>
-              <a:srgbClr val="B5AEA9"/>
+              <a:srgbClr val="2E93AE"/>
             </a:solidFill>
           </a:ln>
         </p:spPr>
@@ -33797,7 +33917,7 @@
           </a:solidFill>
           <a:ln w="15875">
             <a:solidFill>
-              <a:srgbClr val="B5AEA9"/>
+              <a:srgbClr val="2E93AE"/>
             </a:solidFill>
           </a:ln>
         </p:spPr>
@@ -34212,13 +34332,13 @@
           <p:cNvPr id="2" name="Text 1"/>
           <p:cNvSpPr/>
           <p:nvPr>
-            <p:ph idx="102" type="title" hasCustomPrompt="1"/>
+            <p:ph idx="103" type="title" hasCustomPrompt="1"/>
           </p:nvPr>
         </p:nvSpPr>
         <p:spPr>
           <a:xfrm>
             <a:off x="320040" y="182880"/>
-            <a:ext cx="8503920" cy="640080"/>
+            <a:ext cx="7040880" cy="640080"/>
           </a:xfrm>
           <a:prstGeom prst="rect">
             <a:avLst/>
@@ -34234,14 +34354,14 @@
               <a:buNone/>
             </a:pPr>
             <a:r>
-              <a:rPr lang="en-US" sz="3200" b="1" dirty="0">
+              <a:rPr lang="en-US" sz="3000" b="1" dirty="0">
                 <a:solidFill>
                   <a:schemeClr val="tx2"/>
                 </a:solidFill>
               </a:rPr>
               <a:t>Thesis 1a: Margin Floor (1/4)</a:t>
             </a:r>
-            <a:endParaRPr lang="en-US" sz="3200" dirty="0"/>
+            <a:endParaRPr lang="en-US" sz="3000" dirty="0"/>
           </a:p>
         </p:txBody>
       </p:sp>
@@ -34250,7 +34370,7 @@
           <p:cNvPr id="3" name="Text 1"/>
           <p:cNvSpPr/>
           <p:nvPr>
-            <p:ph idx="103" type="body" hasCustomPrompt="1"/>
+            <p:ph idx="104" type="body" hasCustomPrompt="1"/>
           </p:nvPr>
         </p:nvSpPr>
         <p:spPr>
@@ -34334,9 +34454,9 @@
             <a:avLst/>
           </a:prstGeom>
           <a:noFill/>
-          <a:ln w="12700">
+          <a:ln w="19050">
             <a:solidFill>
-              <a:srgbClr val="1A1A1A"/>
+              <a:srgbClr val="2E93AE"/>
             </a:solidFill>
             <a:prstDash val="solid"/>
           </a:ln>
@@ -34459,9 +34579,9 @@
             <a:avLst/>
           </a:prstGeom>
           <a:noFill/>
-          <a:ln w="12700">
+          <a:ln w="19050">
             <a:solidFill>
-              <a:srgbClr val="1A1A1A"/>
+              <a:srgbClr val="2E93AE"/>
             </a:solidFill>
             <a:prstDash val="solid"/>
           </a:ln>
@@ -34686,10 +34806,10 @@
         <a:srgbClr val="3B4C82"/>
       </a:accent4>
       <a:accent5>
-        <a:srgbClr val="B5AEA9"/>
+        <a:srgbClr val="2E93AE"/>
       </a:accent5>
       <a:accent6>
-        <a:srgbClr val="5A5350"/>
+        <a:srgbClr val="EE6E25"/>
       </a:accent6>
       <a:hlink>
         <a:srgbClr val="0A1C58"/>

--- a/deck/FTAI_Long_Pitch.pptx
+++ b/deck/FTAI_Long_Pitch.pptx
@@ -141,12 +141,12 @@
   <p:extLst>
     <p:ext uri="{521415D9-36F7-43E2-AB2F-B90AF26B5E84}">
       <p14:sectionLst xmlns:p14="http://schemas.microsoft.com/office/powerpoint/2010/main">
-        <p14:section name="Introduction" id="{e2705436-ddce-998a-1756-2a541f623af6}">
+        <p14:section name="Introduction" id="{1ffd4f27-c31f-d0cb-5452-fb02623e0fe3}">
           <p14:sldIdLst>
             <p14:sldId id="256"/>
           </p14:sldIdLst>
         </p14:section>
-        <p14:section name="The Opportunity" id="{cba44336-b71d-c1d1-b8cb-ed1dfc49c328}">
+        <p14:section name="The Opportunity" id="{a1178cb2-dccc-3cdc-87b5-7a51b9b7fcd8}">
           <p14:sldIdLst>
             <p14:sldId id="257"/>
             <p14:sldId id="258"/>
@@ -154,18 +154,18 @@
             <p14:sldId id="260"/>
           </p14:sldIdLst>
         </p14:section>
-        <p14:section name="Returns" id="{8328ddc0-0000-7807-2cd9-ee2dee3219a3}">
+        <p14:section name="Returns" id="{f212884c-3b81-cec2-43d9-2e7d55c1b3c8}">
           <p14:sldIdLst>
             <p14:sldId id="261"/>
           </p14:sldIdLst>
         </p14:section>
-        <p14:section name="Business Overview" id="{f37bf03f-47b6-2779-1806-cf1756e9fae6}">
+        <p14:section name="Business Overview" id="{ad9d2193-f4cc-aec5-024b-cd11bd9a2a7f}">
           <p14:sldIdLst>
             <p14:sldId id="262"/>
             <p14:sldId id="263"/>
           </p14:sldIdLst>
         </p14:section>
-        <p14:section name="Thesis 1a" id="{8ae213d0-a27a-b6af-60cf-ca8e4e549833}">
+        <p14:section name="Thesis 1a" id="{2f433f06-1571-add6-d201-12d0ae18282b}">
           <p14:sldIdLst>
             <p14:sldId id="264"/>
             <p14:sldId id="265"/>
@@ -173,7 +173,7 @@
             <p14:sldId id="267"/>
           </p14:sldIdLst>
         </p14:section>
-        <p14:section name="Thesis 1b" id="{71c8aaa0-a77a-a516-c1e2-c28557a592e8}">
+        <p14:section name="Thesis 1b" id="{549743e6-4626-5aa2-994a-e9c8eff43ae9}">
           <p14:sldIdLst>
             <p14:sldId id="268"/>
             <p14:sldId id="269"/>
@@ -184,7 +184,7 @@
             <p14:sldId id="274"/>
           </p14:sldIdLst>
         </p14:section>
-        <p14:section name="Thesis 2" id="{ab1b00b5-eb3d-663b-91ad-614c0b4ba2b3}">
+        <p14:section name="Thesis 2" id="{dc24b398-b216-0c03-d7c2-bacd5993f49d}">
           <p14:sldIdLst>
             <p14:sldId id="275"/>
             <p14:sldId id="276"/>
@@ -192,28 +192,28 @@
             <p14:sldId id="278"/>
           </p14:sldIdLst>
         </p14:section>
-        <p14:section name="Valuation" id="{3c49455b-0fc7-a165-edee-7386465ae37d}">
+        <p14:section name="Valuation" id="{07db6d18-2b85-a65d-73ae-bdc3af90c326}">
           <p14:sldIdLst>
             <p14:sldId id="279"/>
             <p14:sldId id="280"/>
           </p14:sldIdLst>
         </p14:section>
-        <p14:section name="Catalysts" id="{0187b013-d1c3-4c7d-e445-42949a4caef1}">
+        <p14:section name="Catalysts" id="{108443e4-644c-43d3-d453-9fbf37491f63}">
           <p14:sldIdLst>
             <p14:sldId id="281"/>
           </p14:sldIdLst>
         </p14:section>
-        <p14:section name="Risks" id="{e7275125-8c97-b464-6e65-f910f303ab46}">
+        <p14:section name="Risks" id="{89e37f1c-5270-a044-c5d0-852b3b67f10b}">
           <p14:sldIdLst>
             <p14:sldId id="282"/>
           </p14:sldIdLst>
         </p14:section>
-        <p14:section name="Q&amp;A" id="{ac74a738-7486-8e2d-cfb5-69d04b5f3a4c}">
+        <p14:section name="Q&amp;A" id="{76c781fa-6694-c344-52d1-e9641aa959a7}">
           <p14:sldIdLst>
             <p14:sldId id="283"/>
           </p14:sldIdLst>
         </p14:section>
-        <p14:section name="Appendix" id="{9e30361f-34c3-52d9-8e6c-6bf9f02963b8}">
+        <p14:section name="Appendix" id="{0f9186f4-ba18-6ac2-fe80-381333b19c69}">
           <p14:sldIdLst>
             <p14:sldId id="284"/>
             <p14:sldId id="285"/>
@@ -3231,7 +3231,7 @@
           </c:tx>
           <c:spPr>
             <a:solidFill>
-              <a:srgbClr val="0A1C58"/>
+              <a:srgbClr val="EE6E25"/>
             </a:solidFill>
             <a:effectLst/>
           </c:spPr>
@@ -5583,7 +5583,7 @@
           </c:tx>
           <c:spPr>
             <a:solidFill>
-              <a:srgbClr val="0A1C58"/>
+              <a:srgbClr val="EE6E25"/>
             </a:solidFill>
             <a:effectLst/>
           </c:spPr>
@@ -7922,7 +7922,7 @@
             <c:size val="6"/>
             <c:spPr>
               <a:solidFill>
-                <a:srgbClr val="2E93AE"/>
+                <a:srgbClr val="0A1C58"/>
               </a:solidFill>
               <a:ln w="9525" cap="flat">
                 <a:solidFill>
@@ -8060,7 +8060,7 @@
             <c:size val="6"/>
             <c:spPr>
               <a:solidFill>
-                <a:srgbClr val="2E93AE"/>
+                <a:srgbClr val="0A1C58"/>
               </a:solidFill>
               <a:ln w="9525" cap="flat">
                 <a:solidFill>
@@ -13099,7 +13099,7 @@
             <a:r>
               <a:rPr lang="en-US" sz="4800" b="1" dirty="0">
                 <a:solidFill>
-                  <a:schemeClr val="tx2"/>
+                  <a:srgbClr val="EE6E25"/>
                 </a:solidFill>
               </a:rPr>
               <a:t>84%</a:t>
@@ -13194,7 +13194,7 @@
             <a:r>
               <a:rPr lang="en-US" sz="4800" b="1" dirty="0">
                 <a:solidFill>
-                  <a:schemeClr val="tx2"/>
+                  <a:srgbClr val="EE6E25"/>
                 </a:solidFill>
               </a:rPr>
               <a:t>3.4x</a:t>
@@ -16146,7 +16146,7 @@
             <a:r>
               <a:rPr lang="en-US" sz="2200" b="1" dirty="0">
                 <a:solidFill>
-                  <a:schemeClr val="tx2"/>
+                  <a:srgbClr val="EE6E25"/>
                 </a:solidFill>
               </a:rPr>
               <a:t>~1/2</a:t>
@@ -16196,7 +16196,7 @@
             <a:r>
               <a:rPr lang="en-US" sz="2200" b="1" dirty="0">
                 <a:solidFill>
-                  <a:schemeClr val="tx2"/>
+                  <a:srgbClr val="EE6E25"/>
                 </a:solidFill>
               </a:rPr>
               <a:t>+50%</a:t>
@@ -19837,9 +19837,9 @@
           <a:solidFill>
             <a:srgbClr val="FFFFFF"/>
           </a:solidFill>
-          <a:ln w="25400">
+          <a:ln w="31750">
             <a:solidFill>
-              <a:srgbClr val="0A1C58"/>
+              <a:srgbClr val="EE6E25"/>
             </a:solidFill>
           </a:ln>
         </p:spPr>
@@ -19985,9 +19985,9 @@
           <a:solidFill>
             <a:srgbClr val="FFFFFF"/>
           </a:solidFill>
-          <a:ln w="25400">
+          <a:ln w="31750">
             <a:solidFill>
-              <a:srgbClr val="0A1C58"/>
+              <a:srgbClr val="EE6E25"/>
             </a:solidFill>
           </a:ln>
         </p:spPr>
@@ -20131,11 +20131,11 @@
             <a:avLst/>
           </a:prstGeom>
           <a:solidFill>
-            <a:srgbClr val="0A1C58"/>
+            <a:srgbClr val="EE6E25"/>
           </a:solidFill>
-          <a:ln w="25400">
+          <a:ln w="31750">
             <a:solidFill>
-              <a:srgbClr val="0A1C58"/>
+              <a:srgbClr val="EE6E25"/>
             </a:solidFill>
           </a:ln>
         </p:spPr>
@@ -21821,8 +21821,8 @@
         </p:nvSpPr>
         <p:spPr>
           <a:xfrm>
-            <a:off x="2697480" y="2103120"/>
-            <a:ext cx="1005840" cy="1005840"/>
+            <a:off x="2331720" y="2103120"/>
+            <a:ext cx="960120" cy="960120"/>
           </a:xfrm>
           <a:prstGeom prst="ellipse">
             <a:avLst/>
@@ -25057,7 +25057,7 @@
             <a:r>
               <a:rPr lang="en-US" sz="1300" b="1" dirty="0">
                 <a:solidFill>
-                  <a:schemeClr val="tx2"/>
+                  <a:srgbClr val="EE6E25"/>
                 </a:solidFill>
               </a:rPr>
               <a:t>$277</a:t>
@@ -25188,7 +25188,7 @@
             <a:r>
               <a:rPr lang="en-US" sz="2800" b="1" dirty="0">
                 <a:solidFill>
-                  <a:schemeClr val="tx2"/>
+                  <a:srgbClr val="EE6E25"/>
                 </a:solidFill>
               </a:rPr>
               <a:t>+66%</a:t>
@@ -25238,7 +25238,7 @@
             <a:r>
               <a:rPr lang="en-US" sz="2800" b="1" dirty="0">
                 <a:solidFill>
-                  <a:schemeClr val="tx2"/>
+                  <a:srgbClr val="EE6E25"/>
                 </a:solidFill>
               </a:rPr>
               <a:t>$50</a:t>
@@ -25288,7 +25288,7 @@
             <a:r>
               <a:rPr lang="en-US" sz="2800" b="1" dirty="0">
                 <a:solidFill>
-                  <a:schemeClr val="tx2"/>
+                  <a:srgbClr val="EE6E25"/>
                 </a:solidFill>
               </a:rPr>
               <a:t>$55</a:t>
@@ -28255,8 +28255,8 @@
         </p:blipFill>
         <p:spPr>
           <a:xfrm>
-            <a:off x="685800" y="1097280"/>
-            <a:ext cx="7772400" cy="4071475"/>
+            <a:off x="320040" y="1143000"/>
+            <a:ext cx="8503920" cy="3760294"/>
           </a:xfrm>
           <a:prstGeom prst="rect">
             <a:avLst/>
@@ -28613,8 +28613,8 @@
         </p:blipFill>
         <p:spPr>
           <a:xfrm>
-            <a:off x="685800" y="1188720"/>
-            <a:ext cx="7772400" cy="3134568"/>
+            <a:off x="320040" y="1188720"/>
+            <a:ext cx="8503920" cy="2627390"/>
           </a:xfrm>
           <a:prstGeom prst="rect">
             <a:avLst/>
@@ -28995,8 +28995,8 @@
         </p:blipFill>
         <p:spPr>
           <a:xfrm>
-            <a:off x="320040" y="1143000"/>
-            <a:ext cx="8503920" cy="2753766"/>
+            <a:off x="320040" y="1097280"/>
+            <a:ext cx="8503920" cy="2802382"/>
           </a:xfrm>
           <a:prstGeom prst="rect">
             <a:avLst/>
@@ -29011,7 +29011,7 @@
         </p:nvSpPr>
         <p:spPr>
           <a:xfrm>
-            <a:off x="320040" y="4206240"/>
+            <a:off x="320040" y="4343400"/>
             <a:ext cx="8503920" cy="548640"/>
           </a:xfrm>
           <a:prstGeom prst="rect">
@@ -29020,7 +29020,11 @@
           <a:solidFill>
             <a:srgbClr val="EFEDEA"/>
           </a:solidFill>
-          <a:ln/>
+          <a:ln w="19050">
+            <a:solidFill>
+              <a:srgbClr val="EE6E25"/>
+            </a:solidFill>
+          </a:ln>
         </p:spPr>
         <p:txBody>
           <a:bodyPr wrap="square" lIns="0" tIns="0" rIns="0" bIns="0" rtlCol="0" anchor="ctr"/>
@@ -30343,7 +30347,7 @@
             <a:r>
               <a:rPr lang="en-US" sz="3000" b="1" dirty="0">
                 <a:solidFill>
-                  <a:schemeClr val="tx2"/>
+                  <a:srgbClr val="EE6E25"/>
                 </a:solidFill>
               </a:rPr>
               <a:t>$1.465B</a:t>
@@ -30415,7 +30419,7 @@
             <a:r>
               <a:rPr lang="en-US" sz="3000" b="1" dirty="0">
                 <a:solidFill>
-                  <a:schemeClr val="tx2"/>
+                  <a:srgbClr val="EE6E25"/>
                 </a:solidFill>
               </a:rPr>
               <a:t>$450–750M</a:t>
@@ -30487,7 +30491,7 @@
             <a:r>
               <a:rPr lang="en-US" sz="3000" b="1" dirty="0">
                 <a:solidFill>
-                  <a:schemeClr val="tx2"/>
+                  <a:srgbClr val="EE6E25"/>
                 </a:solidFill>
               </a:rPr>
               <a:t>25 MW</a:t>
@@ -30897,7 +30901,7 @@
             <a:r>
               <a:rPr lang="en-US" sz="2400" b="1" dirty="0">
                 <a:solidFill>
-                  <a:schemeClr val="tx2"/>
+                  <a:srgbClr val="EE6E25"/>
                 </a:solidFill>
               </a:rPr>
               <a:t>+$17</a:t>
@@ -31016,7 +31020,7 @@
             <a:r>
               <a:rPr lang="en-US" sz="2400" b="1" dirty="0">
                 <a:solidFill>
-                  <a:schemeClr val="tx2"/>
+                  <a:srgbClr val="EE6E25"/>
                 </a:solidFill>
               </a:rPr>
               <a:t>+$33</a:t>
@@ -31135,7 +31139,7 @@
             <a:r>
               <a:rPr lang="en-US" sz="2400" b="1" dirty="0">
                 <a:solidFill>
-                  <a:schemeClr val="tx2"/>
+                  <a:srgbClr val="EE6E25"/>
                 </a:solidFill>
               </a:rPr>
               <a:t>+$55</a:t>
@@ -31596,7 +31600,7 @@
             <a:r>
               <a:rPr lang="en-US" sz="2200" b="1" dirty="0">
                 <a:solidFill>
-                  <a:schemeClr val="tx2"/>
+                  <a:srgbClr val="EE6E25"/>
                 </a:solidFill>
               </a:rPr>
               <a:t>757 → 1,200</a:t>
@@ -31744,7 +31748,7 @@
             <a:r>
               <a:rPr lang="en-US" sz="2200" b="1" dirty="0">
                 <a:solidFill>
-                  <a:schemeClr val="tx2"/>
+                  <a:srgbClr val="EE6E25"/>
                 </a:solidFill>
               </a:rPr>
               <a:t>$450–750M</a:t>
@@ -31915,7 +31919,7 @@
             <a:r>
               <a:rPr lang="en-US" sz="2200" b="1" dirty="0">
                 <a:solidFill>
-                  <a:schemeClr val="tx2"/>
+                  <a:srgbClr val="EE6E25"/>
                 </a:solidFill>
               </a:rPr>
               <a:t>316</a:t>

--- a/deck/FTAI_Long_Pitch.pptx
+++ b/deck/FTAI_Long_Pitch.pptx
@@ -141,12 +141,12 @@
   <p:extLst>
     <p:ext uri="{521415D9-36F7-43E2-AB2F-B90AF26B5E84}">
       <p14:sectionLst xmlns:p14="http://schemas.microsoft.com/office/powerpoint/2010/main">
-        <p14:section name="Introduction" id="{1ffd4f27-c31f-d0cb-5452-fb02623e0fe3}">
+        <p14:section name="Introduction" id="{13f42e92-aa7d-eaf1-115c-cc399a00b532}">
           <p14:sldIdLst>
             <p14:sldId id="256"/>
           </p14:sldIdLst>
         </p14:section>
-        <p14:section name="The Opportunity" id="{a1178cb2-dccc-3cdc-87b5-7a51b9b7fcd8}">
+        <p14:section name="The Opportunity" id="{a9c2bd15-55c9-0cec-b1c8-073471decad3}">
           <p14:sldIdLst>
             <p14:sldId id="257"/>
             <p14:sldId id="258"/>
@@ -154,18 +154,18 @@
             <p14:sldId id="260"/>
           </p14:sldIdLst>
         </p14:section>
-        <p14:section name="Returns" id="{f212884c-3b81-cec2-43d9-2e7d55c1b3c8}">
+        <p14:section name="Returns" id="{962656f8-ac39-1192-dbb4-a8659cc72556}">
           <p14:sldIdLst>
             <p14:sldId id="261"/>
           </p14:sldIdLst>
         </p14:section>
-        <p14:section name="Business Overview" id="{ad9d2193-f4cc-aec5-024b-cd11bd9a2a7f}">
+        <p14:section name="Business Overview" id="{52ac4d3e-78fd-ec53-2bbd-50e244996745}">
           <p14:sldIdLst>
             <p14:sldId id="262"/>
             <p14:sldId id="263"/>
           </p14:sldIdLst>
         </p14:section>
-        <p14:section name="Thesis 1a" id="{2f433f06-1571-add6-d201-12d0ae18282b}">
+        <p14:section name="Thesis 1a" id="{96fcace6-3dc8-54a3-d735-246357041f5f}">
           <p14:sldIdLst>
             <p14:sldId id="264"/>
             <p14:sldId id="265"/>
@@ -173,7 +173,7 @@
             <p14:sldId id="267"/>
           </p14:sldIdLst>
         </p14:section>
-        <p14:section name="Thesis 1b" id="{549743e6-4626-5aa2-994a-e9c8eff43ae9}">
+        <p14:section name="Thesis 1b" id="{7ca54189-0c75-8412-f500-29ba71a4f4a7}">
           <p14:sldIdLst>
             <p14:sldId id="268"/>
             <p14:sldId id="269"/>
@@ -184,7 +184,7 @@
             <p14:sldId id="274"/>
           </p14:sldIdLst>
         </p14:section>
-        <p14:section name="Thesis 2" id="{dc24b398-b216-0c03-d7c2-bacd5993f49d}">
+        <p14:section name="Thesis 2" id="{9112e9c0-a92a-60c7-795a-06faa4141ef4}">
           <p14:sldIdLst>
             <p14:sldId id="275"/>
             <p14:sldId id="276"/>
@@ -192,28 +192,28 @@
             <p14:sldId id="278"/>
           </p14:sldIdLst>
         </p14:section>
-        <p14:section name="Valuation" id="{07db6d18-2b85-a65d-73ae-bdc3af90c326}">
+        <p14:section name="Valuation" id="{7a2d141a-8fe4-b5b9-46d7-911e0d70ba42}">
           <p14:sldIdLst>
             <p14:sldId id="279"/>
             <p14:sldId id="280"/>
           </p14:sldIdLst>
         </p14:section>
-        <p14:section name="Catalysts" id="{108443e4-644c-43d3-d453-9fbf37491f63}">
+        <p14:section name="Catalysts" id="{73ff933c-8ce5-4247-2158-fee4622d0683}">
           <p14:sldIdLst>
             <p14:sldId id="281"/>
           </p14:sldIdLst>
         </p14:section>
-        <p14:section name="Risks" id="{89e37f1c-5270-a044-c5d0-852b3b67f10b}">
+        <p14:section name="Risks" id="{af8379df-a9f8-1c97-5bc2-e503843c3ee7}">
           <p14:sldIdLst>
             <p14:sldId id="282"/>
           </p14:sldIdLst>
         </p14:section>
-        <p14:section name="Q&amp;A" id="{76c781fa-6694-c344-52d1-e9641aa959a7}">
+        <p14:section name="Q&amp;A" id="{b5cbddef-efb3-8e4f-bd5f-5a1283576089}">
           <p14:sldIdLst>
             <p14:sldId id="283"/>
           </p14:sldIdLst>
         </p14:section>
-        <p14:section name="Appendix" id="{0f9186f4-ba18-6ac2-fe80-381333b19c69}">
+        <p14:section name="Appendix" id="{2d5370dd-d2fa-06b9-88b9-4cf88c3cf476}">
           <p14:sldIdLst>
             <p14:sldId id="284"/>
             <p14:sldId id="285"/>
@@ -8060,7 +8060,7 @@
             <c:size val="6"/>
             <c:spPr>
               <a:solidFill>
-                <a:srgbClr val="0A1C58"/>
+                <a:srgbClr val="2E93AE"/>
               </a:solidFill>
               <a:ln w="9525" cap="flat">
                 <a:solidFill>
@@ -13486,7 +13486,7 @@
                   <a:schemeClr val="accent2"/>
                 </a:solidFill>
               </a:rPr>
-              <a:t>Presenter</a:t>
+              <a:t>Max</a:t>
             </a:r>
             <a:endParaRPr lang="en-US" sz="1800" dirty="0"/>
           </a:p>
@@ -13500,7 +13500,7 @@
                   <a:schemeClr val="accent2"/>
                 </a:solidFill>
               </a:rPr>
-              <a:t>Name</a:t>
+              <a:t>Salomon</a:t>
             </a:r>
             <a:endParaRPr lang="en-US" sz="1800" dirty="0"/>
           </a:p>
@@ -27140,7 +27140,7 @@
                   <a:schemeClr val="accent2"/>
                 </a:solidFill>
               </a:rPr>
-              <a:t>Presenter</a:t>
+              <a:t>Max</a:t>
             </a:r>
             <a:endParaRPr lang="en-US" sz="1800" dirty="0"/>
           </a:p>
@@ -27154,7 +27154,7 @@
                   <a:schemeClr val="accent2"/>
                 </a:solidFill>
               </a:rPr>
-              <a:t>Name</a:t>
+              <a:t>Salomon</a:t>
             </a:r>
             <a:endParaRPr lang="en-US" sz="1800" dirty="0"/>
           </a:p>
@@ -27372,7 +27372,7 @@
                   <a:schemeClr val="accent2"/>
                 </a:solidFill>
               </a:rPr>
-              <a:t>Presenter</a:t>
+              <a:t>Max</a:t>
             </a:r>
             <a:endParaRPr lang="en-US" sz="1800" dirty="0"/>
           </a:p>
@@ -27386,7 +27386,7 @@
                   <a:schemeClr val="accent2"/>
                 </a:solidFill>
               </a:rPr>
-              <a:t>Name</a:t>
+              <a:t>Salomon</a:t>
             </a:r>
             <a:endParaRPr lang="en-US" sz="1800" dirty="0"/>
           </a:p>

--- a/deck/FTAI_Long_Pitch.pptx
+++ b/deck/FTAI_Long_Pitch.pptx
@@ -141,12 +141,12 @@
   <p:extLst>
     <p:ext uri="{521415D9-36F7-43E2-AB2F-B90AF26B5E84}">
       <p14:sectionLst xmlns:p14="http://schemas.microsoft.com/office/powerpoint/2010/main">
-        <p14:section name="Introduction" id="{bbd1b647-8fc2-43f8-187c-e6d23179b69c}">
+        <p14:section name="Introduction" id="{3e741428-20c4-3de8-7cc9-53a0c37b32bd}">
           <p14:sldIdLst>
             <p14:sldId id="256"/>
           </p14:sldIdLst>
         </p14:section>
-        <p14:section name="The Opportunity" id="{0340df21-6af7-3373-47a9-b13fe25c27b7}">
+        <p14:section name="The Opportunity" id="{30c8abef-1c62-a972-280c-4cdbc75ee717}">
           <p14:sldIdLst>
             <p14:sldId id="257"/>
             <p14:sldId id="258"/>
@@ -154,18 +154,18 @@
             <p14:sldId id="260"/>
           </p14:sldIdLst>
         </p14:section>
-        <p14:section name="Returns" id="{b9434526-3fd1-2fb0-c69c-a9bb251e1863}">
+        <p14:section name="Returns" id="{3c7b42f9-aed4-282c-5743-1e629dcde26c}">
           <p14:sldIdLst>
             <p14:sldId id="261"/>
           </p14:sldIdLst>
         </p14:section>
-        <p14:section name="Business Overview" id="{3969bcb2-a390-addc-b72e-b9a5d1fb5e49}">
+        <p14:section name="Business Overview" id="{a9865bf1-679f-08ac-82b2-7891036b8fd0}">
           <p14:sldIdLst>
             <p14:sldId id="262"/>
             <p14:sldId id="263"/>
           </p14:sldIdLst>
         </p14:section>
-        <p14:section name="Thesis 1a" id="{a04eac98-e860-3a26-efef-4d1f7e950ea7}">
+        <p14:section name="Thesis 1a" id="{bce35662-604b-b1a9-7bfc-d53d425aaf86}">
           <p14:sldIdLst>
             <p14:sldId id="264"/>
             <p14:sldId id="265"/>
@@ -173,7 +173,7 @@
             <p14:sldId id="267"/>
           </p14:sldIdLst>
         </p14:section>
-        <p14:section name="Thesis 1b" id="{1641fbb4-d69f-3d35-9621-a926ea6d94ef}">
+        <p14:section name="Thesis 1b" id="{fac274fb-d51c-17c2-ea11-15547a7a58f5}">
           <p14:sldIdLst>
             <p14:sldId id="268"/>
             <p14:sldId id="269"/>
@@ -184,7 +184,7 @@
             <p14:sldId id="274"/>
           </p14:sldIdLst>
         </p14:section>
-        <p14:section name="Thesis 2" id="{4e9849ca-2d28-7bff-9fe9-fc0d1005ec46}">
+        <p14:section name="Thesis 2" id="{919bd439-cc37-0db8-f945-564b9627ab41}">
           <p14:sldIdLst>
             <p14:sldId id="275"/>
             <p14:sldId id="276"/>
@@ -192,28 +192,28 @@
             <p14:sldId id="278"/>
           </p14:sldIdLst>
         </p14:section>
-        <p14:section name="Valuation" id="{b27e1f41-9e37-8097-823b-d83ef41953f9}">
+        <p14:section name="Valuation" id="{3399540e-f439-e502-5ed7-7f47cfc8928c}">
           <p14:sldIdLst>
             <p14:sldId id="279"/>
             <p14:sldId id="280"/>
           </p14:sldIdLst>
         </p14:section>
-        <p14:section name="Catalysts" id="{853848da-130c-2b44-5821-675aaf2cb1d9}">
+        <p14:section name="Catalysts" id="{671c5c31-321f-9678-c856-9ccbc12bb5c4}">
           <p14:sldIdLst>
             <p14:sldId id="281"/>
           </p14:sldIdLst>
         </p14:section>
-        <p14:section name="Risks" id="{b6f33023-213f-4ace-03c5-8f130aec804c}">
+        <p14:section name="Risks" id="{5956eef1-7f83-b870-33c9-c59853b6cac8}">
           <p14:sldIdLst>
             <p14:sldId id="282"/>
           </p14:sldIdLst>
         </p14:section>
-        <p14:section name="Q&amp;A" id="{d461bf47-1c0b-17ab-a25a-4e916fa36dec}">
+        <p14:section name="Q&amp;A" id="{dc004886-6a89-0b7c-a16c-7f63f911d083}">
           <p14:sldIdLst>
             <p14:sldId id="283"/>
           </p14:sldIdLst>
         </p14:section>
-        <p14:section name="Appendix" id="{035ffbc0-65d3-5d62-35e2-c4d9a2aadb3b}">
+        <p14:section name="Appendix" id="{d80088cf-39c5-7d0a-19f5-152f163426be}">
           <p14:sldIdLst>
             <p14:sldId id="284"/>
             <p14:sldId id="285"/>
@@ -4229,7 +4229,7 @@
               <c:strCache>
                 <c:ptCount val="1"/>
                 <c:pt idx="0">
-                  <c:v>GPS model</c:v>
+                  <c:v>Forecast</c:v>
                 </c:pt>
               </c:strCache>
             </c:strRef>
@@ -8616,7 +8616,7 @@
               <c:strCache>
                 <c:ptCount val="1"/>
                 <c:pt idx="0">
-                  <c:v>GPS model</c:v>
+                  <c:v>Forecast</c:v>
                 </c:pt>
               </c:strCache>
             </c:strRef>
@@ -10010,7 +10010,7 @@
             <c:size val="6"/>
             <c:spPr>
               <a:solidFill>
-                <a:srgbClr val="0A1C58"/>
+                <a:srgbClr val="2E93AE"/>
               </a:solidFill>
               <a:ln w="9525" cap="flat">
                 <a:solidFill>
@@ -10148,7 +10148,7 @@
             <c:size val="6"/>
             <c:spPr>
               <a:solidFill>
-                <a:srgbClr val="2E93AE"/>
+                <a:srgbClr val="0A1C58"/>
               </a:solidFill>
               <a:ln w="9525" cap="flat">
                 <a:solidFill>
@@ -10759,7 +10759,7 @@
           <a:p>
             <a:r>
               <a:rPr lang="en-US" dirty="0"/>
-              <a:t>Price as of 10/2/26. Target is the base-case blended DCF: 50% perpetuity growth ($281) and 50% exit multiple ($335). R/R = 132% bull blended upside vs. 39% bear blended downside.</a:t>
+              <a:t/>
             </a:r>
             <a:endParaRPr lang="en-US" dirty="0"/>
           </a:p>
@@ -10847,7 +10847,7 @@
           <a:p>
             <a:r>
               <a:rPr lang="en-US" dirty="0"/>
-              <a:t>OEM index compounds the CFM escalator (7% in 2026, 6.5% in 2027, 7% thereafter). FTAI index applies the model's pass-through: 0% in 2026, then 50% of the escalator. EBITDA per module: $887K FY25, $876K FY26E trough, $913K FY27E, $969K FY28E, $1,027K FY29E, $1,084K FY30E, $1,139K FY31E (+30% vs. FY26E).</a:t>
+              <a:t/>
             </a:r>
             <a:endParaRPr lang="en-US" dirty="0"/>
           </a:p>
@@ -10935,7 +10935,7 @@
           <a:p>
             <a:r>
               <a:rPr lang="en-US" dirty="0"/>
-              <a:t>Cohort roll-forward (central): first visits fall 976 → 598 (2025–2030) as the last 737NG / A320ceo deliveries pass their first run; second visits, typically the heaviest, peak at 914 in 2027; third-and-later visits rise 532 → 720. Dashed lines extend the 2029–30 slopes (-42/yr and +20/yr), which cross around 2032. Late-life engines increasingly get green-time-only restorations (model assumes 100% / 90% / 70% of due engines get a full visit at &lt;20 / 20–25 / 25+ years). Mix curve uses management's example: light job ~$6M revenue / ~$2.5M profit, heavy ~$12M / ~$3.0M; blended margin by share of jobs. Caveat: the model's broader-work share still rises from 48% to 52% through 2030, so the light-scope return is a late-cycle (2030+) effect.</a:t>
+              <a:t/>
             </a:r>
             <a:endParaRPr lang="en-US" dirty="0"/>
           </a:p>
@@ -11023,7 +11023,7 @@
           <a:p>
             <a:r>
               <a:rPr lang="en-US" dirty="0"/>
-              <a:t>Our model: PMA penetration 0.9% FY27E rising to 9% FY31E at $0.4M EBITDA uplift per PMA module = $6M to $77M. Jefferies estimates ~$0.8M uplift per PMA module and ~$43M of 2026E Aerospace EBITDA per 5 pts of adoption, so our case is conservative on both rate and uplift. Chromalloy JV program: 3 of 5 parts approved (LPT stage 1 vane 2021, HPT stage 1 vane Oct 2024, HPT stage 1 blade Oct 2025), covering ~80% of targeted savings; 2 in FAA review.</a:t>
+              <a:t/>
             </a:r>
             <a:endParaRPr lang="en-US" dirty="0"/>
           </a:p>
@@ -11199,7 +11199,7 @@
           <a:p>
             <a:r>
               <a:rPr lang="en-US" dirty="0"/>
-              <a:t>CFM56 full overhaul ~60 days pre-pandemic vs. 90–120 days now (Aviation Business News, 2025; secondary source). Slot waits up 2–6 months (Bain, 2024; 2025 market summaries). GE: LEAP shop visits up &gt;50% in Q1 and Q2 2026; LEAP installed base to roughly triple 2024–2030; ~$500M of &gt;$1B MRO investment to LEAP, roughly doubling internal LEAP capacity. Shop-visit mix: CFM56 2,350 (2025) and 2,150 (2030E) from GPS model; LEAP ~1,100 (2025) and ~2,200 (2030E) per CFM forecast that LEAP visits exceed CFM56 by 2030. No source found showing OEMs cutting CFM56 capacity outright; the shift is in where new OEM capacity goes. Former MRO executive: 'the variability in capital investment required to capture the LEAP is extremely low versus what it took them to capture the CFM.'</a:t>
+              <a:t/>
             </a:r>
             <a:endParaRPr lang="en-US" dirty="0"/>
           </a:p>
@@ -11287,7 +11287,7 @@
           <a:p>
             <a:r>
               <a:rPr lang="en-US" dirty="0"/>
-              <a:t>FTAI (Q2'24 call, as reported by third parties): average CFM56 engine turnaround ~120–180 days vs. 5–25 days for a module swap. Midpoints 150 vs. ~20 days = ~7x. Step lengths within the shop visit are illustrative; slot waits of 2–6 months and HPT blade shortages drive most of the delay. Caveat: the fastest swaps apply where the core does not need to be opened; roughly half of shop visits require core disassembly. Cost chart: IBA puts CFM56-7B spare-engine lease rates at ~$100K/month in 2024 (up from ~$75K in 2019), ~$3.3K/day. 150 days = ~$493K vs. 20 days = ~$66K. Lease cost only; lost flying revenue on a grounded jet (often $10K+ per day) would widen the gap.</a:t>
+              <a:t/>
             </a:r>
             <a:endParaRPr lang="en-US" dirty="0"/>
           </a:p>
@@ -11375,7 +11375,7 @@
           <a:p>
             <a:r>
               <a:rPr lang="en-US" dirty="0"/>
-              <a:t>Network output 757 modules in 2025, 1,200 guided for 2026 (Montreal 450, Miami 475, Europe 275) and 1,700 targeted for 2027 including GMF and EgyptAir. Network capacity raised from 2,000 to 3,000 modules in 2026. Montreal capacity up to 900 (377 output in 2025). Jakarta 300–450 and Cairo 150–180 are GPS estimates; partners are ~7–18% of 2027 output.</a:t>
+              <a:t/>
             </a:r>
             <a:endParaRPr lang="en-US" dirty="0"/>
           </a:p>
@@ -11463,7 +11463,7 @@
           <a:p>
             <a:r>
               <a:rPr lang="en-US" dirty="0"/>
-              <a:t>Volume math (FY27E, GPS model): 2,386 CFM56 shop visits × 3 modules = 7,159 modules of demand × 16.8% FTAI share = 1,206 third-party modules, plus 482 SCI modules (450 aircraft × 2 engines × 20% shop-visit rate × 3 modules, approx.) = 1,687, vs. FTAI's 1,700 target. Share path 12.4% FY26E → 20% by FY30E. 2025 split approximates SCI at 82 modules and the remainder third-party.</a:t>
+              <a:t/>
             </a:r>
             <a:endParaRPr lang="en-US" dirty="0"/>
           </a:p>
@@ -11551,7 +11551,7 @@
           <a:p>
             <a:r>
               <a:rPr lang="en-US" dirty="0"/>
-              <a:t>LTSA coverage: Safran estimates ~50% of ~5,500 in-service LEAPs are on long-term agreements vs. ~15% of CFM56s, peaking near 70% in 2030 before shifting back to time-and-materials (Aviation Week). LEAP overhauls ~2,000 a year by 2030, roughly matching CFM56 (Aviation Week). First LEAP shop visits clustering at 2,000–6,000 cycles with ~4,000 as a planning base, vs. 10,000+ originally expected (Visual Approach). LEAP-1A/1B shop visit $2.0–4.5M+ before LLPs (Safe Fly, unsourced benchmark); The Air Current: the overhaul far eclipses the cost of the same work on a CFM56. FTAI: CFM56/LEAP test cell planned at Rome as its entry into next-generation engine maintenance (Q2'26 call coverage). No public LEAP repair licence found; confirm before presenting. Former MRO executive: the machines and capital equipment for LEAP are 'very near that for CFM'.</a:t>
+              <a:t/>
             </a:r>
             <a:endParaRPr lang="en-US" dirty="0"/>
           </a:p>
@@ -11639,7 +11639,7 @@
           <a:p>
             <a:r>
               <a:rPr lang="en-US" dirty="0"/>
-              <a:t>Return = (base-case SOTP $276.65 + LEAP value per share) / $167.03 − 1. LEAP value: 2,000 LEAP shop visits a year (Aviation Week, ~2030) × 50% off OEM contracts (coverage falling back from the ~70% 2030 peak) × FTAI share × 3 modules per visit × $0.913M EBITDA per module (FY27E CFM56 level; LEAP visits cost more, so conservative) × 16x Aerospace multiple, discounted four years at the 9.5% WACC. Each point of share ≈ $2.93/share. 20% share (FTAI's FY28E+ CFM56 share) ≈ $548M EBITDA and +$59/share → 101% return.</a:t>
+              <a:t/>
             </a:r>
             <a:endParaRPr lang="en-US" dirty="0"/>
           </a:p>
@@ -11815,7 +11815,7 @@
           <a:p>
             <a:r>
               <a:rPr lang="en-US" dirty="0"/>
-              <a:t>Big Four cash capex: $69B (2019) → $376B (2025); 2026 guidance midpoints sum to ~$733B. Reserve shortfall = required capacity (NERC demand × reserve margin) minus anticipated capacity and contracted additions, summed across NERC regions: 8.4 GW in 2029 (PJM), 27.2 GW in 2030 (PJM, MISO), 47.2 GW in 2031. US data center energy demand rises from ~298 TWh (2026) to ~649 TWh (2030).</a:t>
+              <a:t/>
             </a:r>
             <a:endParaRPr lang="en-US" dirty="0"/>
           </a:p>
@@ -11903,7 +11903,7 @@
           <a:p>
             <a:r>
               <a:rPr lang="en-US" dirty="0"/>
-              <a:t>Power agreements tab: 45 included hyperscaler deals with ~25.3 GW of new or restarted capacity. By full commercial operation date: ≤2026 1.8 GW, 2027 5.7 GW, 2028 3.3 GW, 2029 3.1 GW, 2030 2.2 GW, 2031 6.2 GW, 2032+ 3.0 GW. 57% is fully online in 2029 or later (38% by first COD). Existing-plant offtake deals (no new MW) are excluded. TV risk: a bridge business ends when the grid catches up. Mitigants: the modeled shortfall still widens to 47 GW by 2031; turbines can remain as on-site backup/peaking capacity; the SOTP applies 12x to Power vs. 16x for Aerospace, pricing in a shorter life. The DCF does carry Power growth to FY31, so judges may push here.</a:t>
+              <a:t/>
             </a:r>
             <a:endParaRPr lang="en-US" dirty="0"/>
           </a:p>
@@ -11991,7 +11991,7 @@
           <a:p>
             <a:r>
               <a:rPr lang="en-US" dirty="0"/>
-              <a:t>Build cost: GPS model assumes ~$12M per MW of data center facility spend, so 100 MW ≈ $1.2B before GPUs; FTAI's contract implies ~$1M per MW; 100 MW of load needs ~150 MW of turbines with the model's 50% redundancy allowance, so six 25 MW Mod-1 units ≈ $150M (~13%). Hot-weather derating could add a unit. Lead times: GE Vernova's large gas turbine order book is full until 2029 with orders out to 2031 (CNBC, Jun-26); new aeroderivative orders are being slotted for 2028–2030 (Tom's Hardware, Oct-25). FTAI guided first Mod-1 deliveries to Q4'26, later saying it is prudent to expect deliveries in 2027.</a:t>
+              <a:t/>
             </a:r>
             <a:endParaRPr lang="en-US" dirty="0"/>
           </a:p>
@@ -12079,7 +12079,7 @@
           <a:p>
             <a:r>
               <a:rPr lang="en-US" dirty="0"/>
-              <a:t>Scenarios on FTAI's FY27 Power guide: the signed $1.465B J&amp;F order (est. 40–60 units, ~1.0–1.5 GW) underpins the $450M low end; reaching $750M needs ~$1B of new orders (follow-ons under the hyperscaler master agreement or a second customer). A second ~$1B contract is extrapolated at the same ~$300M step to ~$1,050M. Units ≈ $1B / ($1M/MW × 25 MW) ≈ 40 per contract. Returns: SOTP ex-Power $224.75 + Power EBITDA × 12 / 104.0M shares, vs. $167.03: no Power 35%, signed order 66% (base case), +1 contract 86%, +2 contracts 107%.</a:t>
+              <a:t/>
             </a:r>
             <a:endParaRPr lang="en-US" dirty="0"/>
           </a:p>
@@ -12167,7 +12167,7 @@
           <a:p>
             <a:r>
               <a:rPr lang="en-US" dirty="0"/>
-              <a:t>Bars = base-case SOTP with one thesis on and the others off (bear-case margins/share rows, Power units = 0), at base multiples, vs. $167.03: margins + share only (no Power) $222 (+33%); Power (signed order) only, with bear-case margins and share, $227 (+36%). All three = $277 (+66%). Share path: ~4% (2024) → ~8% (2025) → ~12% (2026E), i.e. ~4 pts a year; the model reaches 20% by FY30, ~2 pts a year. With all three off, the SOTP is $172, about today's price: the market is pricing the bear case.</a:t>
+              <a:t/>
             </a:r>
             <a:endParaRPr lang="en-US" dirty="0"/>
           </a:p>
@@ -12255,7 +12255,7 @@
           <a:p>
             <a:r>
               <a:rPr lang="en-US" dirty="0"/>
-              <a:t>Waterfall: today $167.03; bear case (bear margins and share, no Power) SOTP $171.86 (+$4.83); Shapley contributions on the SOTP: margins +$17.04, share +$32.66, Power +$55.08 = $276.65 (+66%). Base-case SOTP build: Aerospace $1,541M × 16x = $237; Power $450M × 12x = $52; Leasing + SCI $455M × 9x = $39; corporate −$28; net debt and preferred −$24.</a:t>
+              <a:t/>
             </a:r>
             <a:endParaRPr lang="en-US" dirty="0"/>
           </a:p>
@@ -12343,7 +12343,7 @@
           <a:p>
             <a:r>
               <a:rPr lang="en-US" dirty="0"/>
-              <a:t>1) Q3'26 (late Oct. 2026) and Q4'26 (~Feb. 2027) prints: Aerospace Adj. EBITDA margin holding at ~30% confirms the floor; watch PMA usage and parts 4/5 approval commentary. 2) Capacity (1H'27) and 3) Power (2H'27), reordered. Power: management moved first Mod-1 deliveries from Q4'26 to 'prudent to expect deliveries in 2027'; delivery cadence or a follow-on order (Jereh must disclose large contracts) moves Power toward the top of the $450–750M FY27 guide. 3) Capacity: partner sites in Jakarta (GMF) and Cairo (EgyptAir) plus Lisbon ramp in 2027; network capacity 3,000 modules vs. a 1,700-module 2027 target.</a:t>
+              <a:t/>
             </a:r>
             <a:endParaRPr lang="en-US" dirty="0"/>
           </a:p>
@@ -12431,7 +12431,7 @@
           <a:p>
             <a:r>
               <a:rPr lang="en-US" dirty="0"/>
-              <a:t>1) LEAP: GE says the LEAP installed base more than doubles 2025–2030 and LEAP shop visits grow ~25% a year; CFM expects LEAP visits to triple by 2030; IATA sees 600–800 visits in 2025 rising to 5,000+ by 2040 and says capacity alone will not be enough. GE is spending ~$500M to roughly double internal LEAP capacity, and third-party shops' share of LEAP visits rises from 10% (2024) to ~15% today and ~30% by 2030. 2) Short-report discount: the bear-case SOTP ($172) is roughly today's price; with &lt;8% of depreciated leasing inventory left in Aerospace Products, margins now reflect the core business; Q3/Q4 '26 prints are the test. 3) Technicians: no public description of an FTAI academy was found; job postings show dedicated engine-module technical trainers in Montreal and Miami. Partners: GMF ~200 and EgyptAir ~120 technicians. FTAI cited Palantir workflow tools and a productivity lag from rapid hiring. Confirm academy details before presenting.</a:t>
+              <a:t/>
             </a:r>
             <a:endParaRPr lang="en-US" dirty="0"/>
           </a:p>
@@ -12695,7 +12695,7 @@
           <a:p>
             <a:r>
               <a:rPr lang="en-US" dirty="0"/>
-              <a:t>Reported quarterly Aerospace Products Adj. EBITDA margins from the RPM tab. Q4'25 34.6% to Q1'26 29.9% = -470 bps. Mix example is management's: a 6,000-cycle engine sold for ~$6M earns ~$2.5M; a 10,000-cycle engine sold for ~$12M earns ~$3M; one of each blends to ~30%.</a:t>
+              <a:t/>
             </a:r>
             <a:endParaRPr lang="en-US" dirty="0"/>
           </a:p>
@@ -12871,7 +12871,7 @@
           <a:p>
             <a:r>
               <a:rPr lang="en-US" dirty="0"/>
-              <a:t>Present value bridge (mid-year convention, 0.5 stub for FY26) and both terminal-value methods: perpetuity growth at 3.0% ($281) and 13.0x exit multiple ($335), both at a 9.5% WACC.</a:t>
+              <a:t/>
             </a:r>
             <a:endParaRPr lang="en-US" dirty="0"/>
           </a:p>
@@ -13223,7 +13223,7 @@
           <a:p>
             <a:r>
               <a:rPr lang="en-US" dirty="0"/>
-              <a:t>Supports the OEM escalator assumption on Thesis 1a (2/4): matched catalogue parts rose a median 6.1–6.2% per year (2024–25 and 2025–26), with only 1 of ~3,400 matched parts falling.</a:t>
+              <a:t/>
             </a:r>
             <a:endParaRPr lang="en-US" dirty="0"/>
           </a:p>
@@ -13311,7 +13311,7 @@
           <a:p>
             <a:r>
               <a:rPr lang="en-US" dirty="0"/>
-              <a:t>Both readings explain the same 1Q26 drop. Management cites heavier-scope work, new facilities and technician productivity still ramping, and pricing held below OEM escalators to take share. The bear reading, following the short report, is that depreciated leasing inventory moved into Aerospace Products had been propping up margins and is running out.</a:t>
+              <a:t/>
             </a:r>
             <a:endParaRPr lang="en-US" dirty="0"/>
           </a:p>
@@ -13399,7 +13399,7 @@
           <a:p>
             <a:r>
               <a:rPr lang="en-US" dirty="0"/>
-              <a:t>Combined backlog: GE Vernova gas backlog + slot reservations 55 GW (Q2'25) → 116 GW (Q2'26; ≥125 GW guided for YE26); Siemens Energy firm gas turbine backlog 37 GW (Q3 FY25) → 69 GW (Q3 FY26); Mitsubishi large-frame backlog 23 GW → 35 GW. Definitions differ (GEV includes reservations; Siemens firm only; MHI large-frame only), so treat the total as indicative. End-2024 GW figures were not disclosed. </a:t>
+              <a:t/>
             </a:r>
             <a:endParaRPr lang="en-US" dirty="0"/>
           </a:p>
@@ -13487,7 +13487,7 @@
           <a:p>
             <a:r>
               <a:rPr lang="en-US" dirty="0"/>
-              <a:t>Return math uses the base-case FY27E sum of the parts ($276.65/share): Aerospace 16x, Power 12x, Leasing + SCI 9x, less corporate, net debt and preferred. Attribution re-runs the full model for all 8 on/off combinations of the three theses. Margins = OEM escalator, pass-through, Aerospace margin ex-PMA and PMA rows. Volume = FTAI share of MRO and SCI aircraft rows. Power = Mod-1 units delivered (off = 0, i.e. what the market prices today). Bear case with no Power = $171.86 vs. $167.03 today (+$4.83). Shapley contributions: margins +$17.04, volume +$32.66, Power +$55.08 (the $51.90 SOTP value plus ~$3 of FY27 Power cash that lowers net debt). Total $276.64.</a:t>
+              <a:t/>
             </a:r>
             <a:endParaRPr lang="en-US" dirty="0"/>
           </a:p>
@@ -13663,7 +13663,7 @@
           <a:p>
             <a:r>
               <a:rPr lang="en-US" dirty="0"/>
-              <a:t>Module Factory example (FTAI): three unserviceable engines worth $2.0M, $2.5M and $2.0M each still hold modules with life left (cycles shown per Fan / Core / LPT). FTAI splits them into nine modules, adds $3.5M of MRO work, and reassembles two serviceable engines ($8.5M at 7k/7k/7k and $6.0M at 4k/4k/4k) plus one run-out core ($1.5M): $16.0M out vs. $10.0M in, $6.0M of value created.</a:t>
+              <a:t/>
             </a:r>
             <a:endParaRPr lang="en-US" dirty="0"/>
           </a:p>
@@ -13751,7 +13751,7 @@
           <a:p>
             <a:r>
               <a:rPr lang="en-US" dirty="0"/>
-              <a:t>Depreciated leasing inventory remaining in Aerospace Products is under 8% (GPS analysis), so even on the short report's logic there is little left to compress margins. Margin path: FY25 34.7%, Q1'26 29.9%, Q2'26 28.5% reported; GPS model 30.1% FY26E, 29.9% FY27E, then 30.7% / 31.4% / 32.0% / 32.5% FY28E–FY31E.</a:t>
+              <a:t/>
             </a:r>
             <a:endParaRPr lang="en-US" dirty="0"/>
           </a:p>
@@ -14860,43 +14860,7 @@
       </p:sp>
       <p:sp>
         <p:nvSpPr>
-          <p:cNvPr id="10" name="Chart caption"/>
-          <p:cNvSpPr txBox="1"/>
-          <p:nvPr/>
-        </p:nvSpPr>
-        <p:spPr>
-          <a:xfrm>
-            <a:off x="548640" y="4050792"/>
-            <a:ext cx="5486400" cy="201168"/>
-          </a:xfrm>
-          <a:prstGeom prst="rect">
-            <a:avLst/>
-          </a:prstGeom>
-          <a:noFill/>
-          <a:ln/>
-        </p:spPr>
-        <p:txBody>
-          <a:bodyPr wrap="square" lIns="0" tIns="0" rIns="0" bIns="0" rtlCol="0" anchor="ctr"/>
-          <a:lstStyle/>
-          <a:p>
-            <a:pPr algn="ctr" indent="0" marL="0">
-              <a:buNone/>
-            </a:pPr>
-            <a:r>
-              <a:rPr lang="en-US" sz="900" i="1" dirty="0">
-                <a:solidFill>
-                  <a:schemeClr val="accent2"/>
-                </a:solidFill>
-              </a:rPr>
-              <a:t>FTAI share price, last 5 years</a:t>
-            </a:r>
-            <a:endParaRPr lang="en-US" sz="900" dirty="0"/>
-          </a:p>
-        </p:txBody>
-      </p:sp>
-      <p:sp>
-        <p:nvSpPr>
-          <p:cNvPr id="11" name="Stat 1 value"/>
+          <p:cNvPr id="10" name="Stat 1 value"/>
           <p:cNvSpPr txBox="1"/>
           <p:nvPr/>
         </p:nvSpPr>
@@ -14932,7 +14896,7 @@
       </p:sp>
       <p:sp>
         <p:nvSpPr>
-          <p:cNvPr id="12" name="Stat 1 label"/>
+          <p:cNvPr id="11" name="Stat 1 label"/>
           <p:cNvSpPr txBox="1"/>
           <p:nvPr/>
         </p:nvSpPr>
@@ -14968,7 +14932,7 @@
       </p:sp>
       <p:sp>
         <p:nvSpPr>
-          <p:cNvPr id="13" name="Stat 2 value"/>
+          <p:cNvPr id="12" name="Stat 2 value"/>
           <p:cNvSpPr txBox="1"/>
           <p:nvPr/>
         </p:nvSpPr>
@@ -15004,7 +14968,7 @@
       </p:sp>
       <p:sp>
         <p:nvSpPr>
-          <p:cNvPr id="14" name="Stat 2 label"/>
+          <p:cNvPr id="13" name="Stat 2 label"/>
           <p:cNvSpPr txBox="1"/>
           <p:nvPr/>
         </p:nvSpPr>
@@ -15040,7 +15004,7 @@
       </p:sp>
       <p:sp>
         <p:nvSpPr>
-          <p:cNvPr id="15" name="Stat 3 value"/>
+          <p:cNvPr id="14" name="Stat 3 value"/>
           <p:cNvSpPr txBox="1"/>
           <p:nvPr/>
         </p:nvSpPr>
@@ -15076,7 +15040,7 @@
       </p:sp>
       <p:sp>
         <p:nvSpPr>
-          <p:cNvPr id="16" name="Stat 3 label"/>
+          <p:cNvPr id="15" name="Stat 3 label"/>
           <p:cNvSpPr txBox="1"/>
           <p:nvPr/>
         </p:nvSpPr>
@@ -15112,7 +15076,7 @@
       </p:sp>
       <p:sp>
         <p:nvSpPr>
-          <p:cNvPr id="17" name="Stat 4 value"/>
+          <p:cNvPr id="16" name="Stat 4 value"/>
           <p:cNvSpPr txBox="1"/>
           <p:nvPr/>
         </p:nvSpPr>
@@ -15148,7 +15112,7 @@
       </p:sp>
       <p:sp>
         <p:nvSpPr>
-          <p:cNvPr id="18" name="Stat 4 label"/>
+          <p:cNvPr id="17" name="Stat 4 label"/>
           <p:cNvSpPr txBox="1"/>
           <p:nvPr/>
         </p:nvSpPr>
@@ -15184,7 +15148,7 @@
       </p:sp>
       <p:sp>
         <p:nvSpPr>
-          <p:cNvPr id="19" name="Stat divider v"/>
+          <p:cNvPr id="18" name="Stat divider v"/>
           <p:cNvSpPr/>
           <p:nvPr/>
         </p:nvSpPr>
@@ -15207,7 +15171,7 @@
       </p:sp>
       <p:sp>
         <p:nvSpPr>
-          <p:cNvPr id="20" name="Stat divider h"/>
+          <p:cNvPr id="19" name="Stat divider h"/>
           <p:cNvSpPr/>
           <p:nvPr/>
         </p:nvSpPr>
@@ -15230,7 +15194,7 @@
       </p:sp>
       <p:sp>
         <p:nvSpPr>
-          <p:cNvPr id="21" name="Quote"/>
+          <p:cNvPr id="20" name="Quote"/>
           <p:cNvSpPr txBox="1"/>
           <p:nvPr/>
         </p:nvSpPr>
@@ -15268,7 +15232,7 @@
       </p:sp>
       <p:sp>
         <p:nvSpPr>
-          <p:cNvPr id="22" name="Quote attribution"/>
+          <p:cNvPr id="21" name="Quote attribution"/>
           <p:cNvSpPr txBox="1"/>
           <p:nvPr/>
         </p:nvSpPr>
@@ -15304,7 +15268,7 @@
       </p:sp>
       <p:sp>
         <p:nvSpPr>
-          <p:cNvPr id="23" name="Pitch details"/>
+          <p:cNvPr id="22" name="Pitch details"/>
           <p:cNvSpPr txBox="1"/>
           <p:nvPr/>
         </p:nvSpPr>
@@ -15377,7 +15341,7 @@
       </p:sp>
       <p:pic>
         <p:nvPicPr>
-          <p:cNvPr id="24" name="GPS logo" descr="/home/user/SPOT/deck/gps_logo.jpeg">    </p:cNvPr>
+          <p:cNvPr id="23" name="GPS logo" descr="/home/user/SPOT/deck/gps_logo.jpeg">    </p:cNvPr>
           <p:cNvPicPr>
             <a:picLocks noChangeAspect="1"/>
           </p:cNvPicPr>
@@ -15401,7 +15365,7 @@
       </p:pic>
       <p:sp>
         <p:nvSpPr>
-          <p:cNvPr id="25" name="Logo divider"/>
+          <p:cNvPr id="24" name="Logo divider"/>
           <p:cNvSpPr/>
           <p:nvPr/>
         </p:nvSpPr>
@@ -15424,7 +15388,7 @@
       </p:sp>
       <p:sp>
         <p:nvSpPr>
-          <p:cNvPr id="26" name="Presenter"/>
+          <p:cNvPr id="25" name="Presenter"/>
           <p:cNvSpPr txBox="1"/>
           <p:nvPr/>
         </p:nvSpPr>
@@ -15722,43 +15686,7 @@
       </p:sp>
       <p:sp>
         <p:nvSpPr>
-          <p:cNvPr id="9" name="Price caption"/>
-          <p:cNvSpPr txBox="1"/>
-          <p:nvPr/>
-        </p:nvSpPr>
-        <p:spPr>
-          <a:xfrm>
-            <a:off x="320040" y="4983480"/>
-            <a:ext cx="4206240" cy="274320"/>
-          </a:xfrm>
-          <a:prstGeom prst="rect">
-            <a:avLst/>
-          </a:prstGeom>
-          <a:noFill/>
-          <a:ln/>
-        </p:spPr>
-        <p:txBody>
-          <a:bodyPr wrap="square" lIns="0" tIns="0" rIns="0" bIns="0" rtlCol="0" anchor="ctr"/>
-          <a:lstStyle/>
-          <a:p>
-            <a:pPr algn="ctr" indent="0" marL="0">
-              <a:buNone/>
-            </a:pPr>
-            <a:r>
-              <a:rPr lang="en-US" sz="1200" i="1" dirty="0">
-                <a:solidFill>
-                  <a:schemeClr val="accent2"/>
-                </a:solidFill>
-              </a:rPr>
-              <a:t>The gap is pricing room</a:t>
-            </a:r>
-            <a:endParaRPr lang="en-US" sz="1200" dirty="0"/>
-          </a:p>
-        </p:txBody>
-      </p:sp>
-      <p:sp>
-        <p:nvSpPr>
-          <p:cNvPr id="10" name="EPM header"/>
+          <p:cNvPr id="9" name="EPM header"/>
           <p:cNvSpPr txBox="1"/>
           <p:nvPr/>
         </p:nvSpPr>
@@ -15794,7 +15722,7 @@
       </p:sp>
       <p:sp>
         <p:nvSpPr>
-          <p:cNvPr id="11" name="EPM header rule"/>
+          <p:cNvPr id="10" name="EPM header rule"/>
           <p:cNvSpPr/>
           <p:nvPr/>
         </p:nvSpPr>
@@ -15817,7 +15745,7 @@
       </p:sp>
       <p:graphicFrame>
         <p:nvGraphicFramePr>
-          <p:cNvPr id="12" name="EBITDA per module chart" descr=""/>
+          <p:cNvPr id="11" name="EBITDA per module chart" descr=""/>
           <p:cNvGraphicFramePr/>
           <p:nvPr/>
         </p:nvGraphicFramePr>
@@ -15833,7 +15761,7 @@
       </p:graphicFrame>
       <p:sp>
         <p:nvSpPr>
-          <p:cNvPr id="13" name="Takeaway"/>
+          <p:cNvPr id="12" name="Takeaway"/>
           <p:cNvSpPr txBox="1"/>
           <p:nvPr/>
         </p:nvSpPr>
@@ -15871,7 +15799,7 @@
       </p:sp>
       <p:sp>
         <p:nvSpPr>
-          <p:cNvPr id="14" name="Source"/>
+          <p:cNvPr id="13" name="Source"/>
           <p:cNvSpPr txBox="1"/>
           <p:nvPr/>
         </p:nvSpPr>
@@ -15910,7 +15838,7 @@
                   <a:srgbClr val="1A1A1A"/>
                 </a:solidFill>
               </a:rPr>
-              <a:t>GPS model (RPM tab: CFM escalator 7%/yr, FTAI pass-through 50% from 2027; EBITDA per module incl. PMA)</a:t>
+              <a:t>CFM catalogue pricing (~7%/yr escalator); FTAI filings and earnings calls</a:t>
             </a:r>
             <a:endParaRPr lang="en-US" sz="1100" dirty="0"/>
           </a:p>
@@ -16518,7 +16446,7 @@
                   <a:srgbClr val="1A1A1A"/>
                 </a:solidFill>
               </a:rPr>
-              <a:t>GPS model (CFM56 Data tab: cohort roll-forward, central case); FTAI earnings call (light vs. heavy job economics)</a:t>
+              <a:t>CFM56 fleet cohort analysis; FTAI earnings call (light vs. heavy job economics)</a:t>
             </a:r>
             <a:endParaRPr lang="en-US" sz="1100" dirty="0"/>
           </a:p>
@@ -17023,7 +16951,7 @@
                   <a:srgbClr val="1A1A1A"/>
                 </a:solidFill>
               </a:rPr>
-              <a:t>GPS model (RPM tab: PMA penetration × $0.4M uplift per module); Jefferies estimates; FAA PMA data</a:t>
+              <a:t>Jefferies estimates; FAA PMA data; FTAI earnings calls</a:t>
             </a:r>
             <a:endParaRPr lang="en-US" sz="1100" dirty="0"/>
           </a:p>
@@ -17556,7 +17484,7 @@
                   <a:srgbClr val="1A1A1A"/>
                 </a:solidFill>
               </a:rPr>
-              <a:t>GE Aerospace earnings calls (2026), Aviation Business News (2025), FTAI Q2'24 call and Q2'26 supplement, GPS model</a:t>
+              <a:t>GE Aerospace earnings calls (2026), Aviation Business News (2025), FTAI Q2'24 call and Q2'26 supplement</a:t>
             </a:r>
             <a:endParaRPr lang="en-US" sz="1100" dirty="0"/>
           </a:p>
@@ -18316,7 +18244,7 @@
                   <a:srgbClr val="1A1A1A"/>
                 </a:solidFill>
               </a:rPr>
-              <a:t>Aviation Business News (2025); Bain (2024); GE Q4'25–Q2'26 calls; CFM LEAP forecast; GPS model; GPS expert call</a:t>
+              <a:t>Aviation Business News (2025); Bain (2024); GE Q4'25–Q2'26 calls; CFM LEAP forecast; GPS expert call</a:t>
             </a:r>
             <a:endParaRPr lang="en-US" sz="1100" dirty="0"/>
           </a:p>
@@ -19586,43 +19514,7 @@
       </p:sp>
       <p:sp>
         <p:nvSpPr>
-          <p:cNvPr id="38" name="Cost caption"/>
-          <p:cNvSpPr txBox="1"/>
-          <p:nvPr/>
-        </p:nvSpPr>
-        <p:spPr>
-          <a:xfrm>
-            <a:off x="320040" y="5138928"/>
-            <a:ext cx="4160520" cy="256032"/>
-          </a:xfrm>
-          <a:prstGeom prst="rect">
-            <a:avLst/>
-          </a:prstGeom>
-          <a:noFill/>
-          <a:ln/>
-        </p:spPr>
-        <p:txBody>
-          <a:bodyPr wrap="square" lIns="0" tIns="0" rIns="0" bIns="0" rtlCol="0" anchor="ctr"/>
-          <a:lstStyle/>
-          <a:p>
-            <a:pPr algn="ctr" indent="0" marL="0">
-              <a:buNone/>
-            </a:pPr>
-            <a:r>
-              <a:rPr lang="en-US" sz="1100" i="1" dirty="0">
-                <a:solidFill>
-                  <a:schemeClr val="accent2"/>
-                </a:solidFill>
-              </a:rPr>
-              <a:t>~$430K saved per visit (IBA lease rate, ~$100K/mo)</a:t>
-            </a:r>
-            <a:endParaRPr lang="en-US" sz="1100" dirty="0"/>
-          </a:p>
-        </p:txBody>
-      </p:sp>
-      <p:sp>
-        <p:nvSpPr>
-          <p:cNvPr id="39" name="Turnaround expert quote"/>
+          <p:cNvPr id="38" name="Turnaround expert quote"/>
           <p:cNvSpPr txBox="1"/>
           <p:nvPr/>
         </p:nvSpPr>
@@ -19680,7 +19572,7 @@
       </p:sp>
       <p:sp>
         <p:nvSpPr>
-          <p:cNvPr id="40" name="Takeaway"/>
+          <p:cNvPr id="39" name="Takeaway"/>
           <p:cNvSpPr txBox="1"/>
           <p:nvPr/>
         </p:nvSpPr>
@@ -19718,7 +19610,7 @@
       </p:sp>
       <p:sp>
         <p:nvSpPr>
-          <p:cNvPr id="41" name="Source"/>
+          <p:cNvPr id="40" name="Source"/>
           <p:cNvSpPr txBox="1"/>
           <p:nvPr/>
         </p:nvSpPr>
@@ -21318,7 +21210,7 @@
                   <a:srgbClr val="1A1A1A"/>
                 </a:solidFill>
               </a:rPr>
-              <a:t>GPS model (RPM tab); 2024–25 share per GPS analysis; FTAI 2027 target of 1,700 modules (Q2'26 supplement)</a:t>
+              <a:t>FTAI Q2'26 supplement (1,700-module 2027 target); 2024–25 share per GPS analysis</a:t>
             </a:r>
             <a:endParaRPr lang="en-US" sz="1100" dirty="0"/>
           </a:p>
@@ -23439,43 +23331,7 @@
       </p:graphicFrame>
       <p:sp>
         <p:nvSpPr>
-          <p:cNvPr id="10" name="Shortfall caption"/>
-          <p:cNvSpPr txBox="1"/>
-          <p:nvPr/>
-        </p:nvSpPr>
-        <p:spPr>
-          <a:xfrm>
-            <a:off x="4892040" y="5029200"/>
-            <a:ext cx="3931920" cy="274320"/>
-          </a:xfrm>
-          <a:prstGeom prst="rect">
-            <a:avLst/>
-          </a:prstGeom>
-          <a:noFill/>
-          <a:ln/>
-        </p:spPr>
-        <p:txBody>
-          <a:bodyPr wrap="square" lIns="0" tIns="0" rIns="0" bIns="0" rtlCol="0" anchor="ctr"/>
-          <a:lstStyle/>
-          <a:p>
-            <a:pPr algn="ctr" indent="0" marL="0">
-              <a:buNone/>
-            </a:pPr>
-            <a:r>
-              <a:rPr lang="en-US" sz="1000" i="1" dirty="0">
-                <a:solidFill>
-                  <a:schemeClr val="accent2"/>
-                </a:solidFill>
-              </a:rPr>
-              <a:t>Capacity below required reserve margin, NERC regions (GPS model)</a:t>
-            </a:r>
-            <a:endParaRPr lang="en-US" sz="1000" dirty="0"/>
-          </a:p>
-        </p:txBody>
-      </p:sp>
-      <p:sp>
-        <p:nvSpPr>
-          <p:cNvPr id="11" name="Takeaway"/>
+          <p:cNvPr id="10" name="Takeaway"/>
           <p:cNvSpPr txBox="1"/>
           <p:nvPr/>
         </p:nvSpPr>
@@ -23513,7 +23369,7 @@
       </p:sp>
       <p:sp>
         <p:nvSpPr>
-          <p:cNvPr id="12" name="Source"/>
+          <p:cNvPr id="11" name="Source"/>
           <p:cNvSpPr txBox="1"/>
           <p:nvPr/>
         </p:nvSpPr>
@@ -23552,7 +23408,7 @@
                   <a:srgbClr val="1A1A1A"/>
                 </a:solidFill>
               </a:rPr>
-              <a:t>Company filings and 2026 guidance (Amazon, Alphabet, Meta, Microsoft); NERC; GPS model (Power outlook, Regional model tabs)</a:t>
+              <a:t>Company filings and 2026 guidance (Amazon, Alphabet, Meta, Microsoft); NERC 2025 LTRA</a:t>
             </a:r>
             <a:endParaRPr lang="en-US" sz="1100" dirty="0"/>
           </a:p>
@@ -23837,43 +23693,7 @@
       </p:sp>
       <p:sp>
         <p:nvSpPr>
-          <p:cNvPr id="8" name="COD caption"/>
-          <p:cNvSpPr txBox="1"/>
-          <p:nvPr/>
-        </p:nvSpPr>
-        <p:spPr>
-          <a:xfrm>
-            <a:off x="320040" y="5029200"/>
-            <a:ext cx="4572000" cy="274320"/>
-          </a:xfrm>
-          <a:prstGeom prst="rect">
-            <a:avLst/>
-          </a:prstGeom>
-          <a:noFill/>
-          <a:ln/>
-        </p:spPr>
-        <p:txBody>
-          <a:bodyPr wrap="square" lIns="0" tIns="0" rIns="0" bIns="0" rtlCol="0" anchor="ctr"/>
-          <a:lstStyle/>
-          <a:p>
-            <a:pPr algn="ctr" indent="0" marL="0">
-              <a:buNone/>
-            </a:pPr>
-            <a:r>
-              <a:rPr lang="en-US" sz="1000" i="1" dirty="0">
-                <a:solidFill>
-                  <a:schemeClr val="accent2"/>
-                </a:solidFill>
-              </a:rPr>
-              <a:t>25 GW of new and restarted capacity across 45 tracked hyperscaler power deals</a:t>
-            </a:r>
-            <a:endParaRPr lang="en-US" sz="1000" dirty="0"/>
-          </a:p>
-        </p:txBody>
-      </p:sp>
-      <p:sp>
-        <p:nvSpPr>
-          <p:cNvPr id="9" name="Bridge header"/>
+          <p:cNvPr id="8" name="Bridge header"/>
           <p:cNvSpPr txBox="1"/>
           <p:nvPr/>
         </p:nvSpPr>
@@ -23909,7 +23729,7 @@
       </p:sp>
       <p:sp>
         <p:nvSpPr>
-          <p:cNvPr id="10" name="Bridge header rule"/>
+          <p:cNvPr id="9" name="Bridge header rule"/>
           <p:cNvSpPr/>
           <p:nvPr/>
         </p:nvSpPr>
@@ -23932,7 +23752,7 @@
       </p:sp>
       <p:sp>
         <p:nvSpPr>
-          <p:cNvPr id="11" name="Bridge step 1"/>
+          <p:cNvPr id="10" name="Bridge step 1"/>
           <p:cNvSpPr txBox="1"/>
           <p:nvPr/>
         </p:nvSpPr>
@@ -23984,7 +23804,7 @@
       </p:sp>
       <p:sp>
         <p:nvSpPr>
-          <p:cNvPr id="12" name="Bridge arrow 1"/>
+          <p:cNvPr id="11" name="Bridge arrow 1"/>
           <p:cNvSpPr/>
           <p:nvPr/>
         </p:nvSpPr>
@@ -24004,7 +23824,7 @@
       </p:sp>
       <p:sp>
         <p:nvSpPr>
-          <p:cNvPr id="13" name="Bridge step 2"/>
+          <p:cNvPr id="12" name="Bridge step 2"/>
           <p:cNvSpPr txBox="1"/>
           <p:nvPr/>
         </p:nvSpPr>
@@ -24056,7 +23876,7 @@
       </p:sp>
       <p:sp>
         <p:nvSpPr>
-          <p:cNvPr id="14" name="Bridge arrow 2"/>
+          <p:cNvPr id="13" name="Bridge arrow 2"/>
           <p:cNvSpPr/>
           <p:nvPr/>
         </p:nvSpPr>
@@ -24076,7 +23896,7 @@
       </p:sp>
       <p:sp>
         <p:nvSpPr>
-          <p:cNvPr id="15" name="Bridge step 3"/>
+          <p:cNvPr id="14" name="Bridge step 3"/>
           <p:cNvSpPr txBox="1"/>
           <p:nvPr/>
         </p:nvSpPr>
@@ -24128,7 +23948,7 @@
       </p:sp>
       <p:sp>
         <p:nvSpPr>
-          <p:cNvPr id="16" name="Takeaway"/>
+          <p:cNvPr id="15" name="Takeaway"/>
           <p:cNvSpPr txBox="1"/>
           <p:nvPr/>
         </p:nvSpPr>
@@ -24166,7 +23986,7 @@
       </p:sp>
       <p:sp>
         <p:nvSpPr>
-          <p:cNvPr id="17" name="Source"/>
+          <p:cNvPr id="16" name="Source"/>
           <p:cNvSpPr txBox="1"/>
           <p:nvPr/>
         </p:nvSpPr>
@@ -24205,7 +24025,7 @@
                   <a:srgbClr val="1A1A1A"/>
                 </a:solidFill>
               </a:rPr>
-              <a:t>GPS model (Power agreements tab: 45 hyperscaler deals, new/restart MW by full COD); company announcements</a:t>
+              <a:t>Company announcements (45 hyperscaler power deals, new and restarted capacity)</a:t>
             </a:r>
             <a:endParaRPr lang="en-US" sz="1100" dirty="0"/>
           </a:p>
@@ -25064,43 +24884,7 @@
       </p:sp>
       <p:sp>
         <p:nvSpPr>
-          <p:cNvPr id="27" name="Lead time caption"/>
-          <p:cNvSpPr txBox="1"/>
-          <p:nvPr/>
-        </p:nvSpPr>
-        <p:spPr>
-          <a:xfrm>
-            <a:off x="4572000" y="4937760"/>
-            <a:ext cx="4251960" cy="274320"/>
-          </a:xfrm>
-          <a:prstGeom prst="rect">
-            <a:avLst/>
-          </a:prstGeom>
-          <a:noFill/>
-          <a:ln/>
-        </p:spPr>
-        <p:txBody>
-          <a:bodyPr wrap="square" lIns="0" tIns="0" rIns="0" bIns="0" rtlCol="0" anchor="ctr"/>
-          <a:lstStyle/>
-          <a:p>
-            <a:pPr algn="ctr" indent="0" marL="0">
-              <a:buNone/>
-            </a:pPr>
-            <a:r>
-              <a:rPr lang="en-US" sz="1000" i="1" dirty="0">
-                <a:solidFill>
-                  <a:schemeClr val="accent2"/>
-                </a:solidFill>
-              </a:rPr>
-              <a:t>Delivery windows; large-turbine order books full to 2029</a:t>
-            </a:r>
-            <a:endParaRPr lang="en-US" sz="1000" dirty="0"/>
-          </a:p>
-        </p:txBody>
-      </p:sp>
-      <p:sp>
-        <p:nvSpPr>
-          <p:cNvPr id="28" name="Takeaway"/>
+          <p:cNvPr id="27" name="Takeaway"/>
           <p:cNvSpPr txBox="1"/>
           <p:nvPr/>
         </p:nvSpPr>
@@ -25138,7 +24922,7 @@
       </p:sp>
       <p:sp>
         <p:nvSpPr>
-          <p:cNvPr id="29" name="Source"/>
+          <p:cNvPr id="28" name="Source"/>
           <p:cNvSpPr txBox="1"/>
           <p:nvPr/>
         </p:nvSpPr>
@@ -25177,7 +24961,7 @@
                   <a:srgbClr val="1A1A1A"/>
                 </a:solidFill>
               </a:rPr>
-              <a:t>GPS model ($12M/MW facility; ~$1M/MW, 25 MW units, 50% redundancy); CNBC (Jun-26); Tom's Hardware (Oct-25); FTAI calls</a:t>
+              <a:t>CNBC (Jun-26); Tom's Hardware (Oct-25); FTAI earnings calls</a:t>
             </a:r>
             <a:endParaRPr lang="en-US" sz="1100" dirty="0"/>
           </a:p>
@@ -25792,43 +25576,7 @@
       </p:sp>
       <p:sp>
         <p:nvSpPr>
-          <p:cNvPr id="17" name="Scenario caption"/>
-          <p:cNvSpPr txBox="1"/>
-          <p:nvPr/>
-        </p:nvSpPr>
-        <p:spPr>
-          <a:xfrm>
-            <a:off x="320040" y="4937760"/>
-            <a:ext cx="3429000" cy="365760"/>
-          </a:xfrm>
-          <a:prstGeom prst="rect">
-            <a:avLst/>
-          </a:prstGeom>
-          <a:noFill/>
-          <a:ln/>
-        </p:spPr>
-        <p:txBody>
-          <a:bodyPr wrap="square" lIns="0" tIns="0" rIns="0" bIns="0" rtlCol="0" anchor="ctr"/>
-          <a:lstStyle/>
-          <a:p>
-            <a:pPr algn="ctr" indent="0" marL="0">
-              <a:buNone/>
-            </a:pPr>
-            <a:r>
-              <a:rPr lang="en-US" sz="1100" i="1" dirty="0">
-                <a:solidFill>
-                  <a:schemeClr val="accent2"/>
-                </a:solidFill>
-              </a:rPr>
-              <a:t>Each new ~$1B order ≈ 40 more units and ~$300M of EBITDA</a:t>
-            </a:r>
-            <a:endParaRPr lang="en-US" sz="1100" dirty="0"/>
-          </a:p>
-        </p:txBody>
-      </p:sp>
-      <p:sp>
-        <p:nvSpPr>
-          <p:cNvPr id="18" name="Return header"/>
+          <p:cNvPr id="17" name="Return header"/>
           <p:cNvSpPr txBox="1"/>
           <p:nvPr/>
         </p:nvSpPr>
@@ -25864,7 +25612,7 @@
       </p:sp>
       <p:sp>
         <p:nvSpPr>
-          <p:cNvPr id="19" name="Return header rule"/>
+          <p:cNvPr id="18" name="Return header rule"/>
           <p:cNvSpPr/>
           <p:nvPr/>
         </p:nvSpPr>
@@ -25887,7 +25635,7 @@
       </p:sp>
       <p:graphicFrame>
         <p:nvGraphicFramePr>
-          <p:cNvPr id="20" name="Contract return chart" descr=""/>
+          <p:cNvPr id="19" name="Contract return chart" descr=""/>
           <p:cNvGraphicFramePr/>
           <p:nvPr/>
         </p:nvGraphicFramePr>
@@ -25903,43 +25651,7 @@
       </p:graphicFrame>
       <p:sp>
         <p:nvSpPr>
-          <p:cNvPr id="21" name="Return caption"/>
-          <p:cNvSpPr txBox="1"/>
-          <p:nvPr/>
-        </p:nvSpPr>
-        <p:spPr>
-          <a:xfrm>
-            <a:off x="4069080" y="4983480"/>
-            <a:ext cx="4754880" cy="274320"/>
-          </a:xfrm>
-          <a:prstGeom prst="rect">
-            <a:avLst/>
-          </a:prstGeom>
-          <a:noFill/>
-          <a:ln/>
-        </p:spPr>
-        <p:txBody>
-          <a:bodyPr wrap="square" lIns="0" tIns="0" rIns="0" bIns="0" rtlCol="0" anchor="ctr"/>
-          <a:lstStyle/>
-          <a:p>
-            <a:pPr algn="ctr" indent="0" marL="0">
-              <a:buNone/>
-            </a:pPr>
-            <a:r>
-              <a:rPr lang="en-US" sz="1000" i="1" dirty="0">
-                <a:solidFill>
-                  <a:schemeClr val="accent2"/>
-                </a:solidFill>
-              </a:rPr>
-              <a:t>Base case = signed order only; returns on the FY27E SOTP vs. $167 today</a:t>
-            </a:r>
-            <a:endParaRPr lang="en-US" sz="1000" dirty="0"/>
-          </a:p>
-        </p:txBody>
-      </p:sp>
-      <p:sp>
-        <p:nvSpPr>
-          <p:cNvPr id="22" name="Takeaway"/>
+          <p:cNvPr id="20" name="Takeaway"/>
           <p:cNvSpPr txBox="1"/>
           <p:nvPr/>
         </p:nvSpPr>
@@ -25977,7 +25689,7 @@
       </p:sp>
       <p:sp>
         <p:nvSpPr>
-          <p:cNvPr id="23" name="Source"/>
+          <p:cNvPr id="21" name="Source"/>
           <p:cNvSpPr txBox="1"/>
           <p:nvPr/>
         </p:nvSpPr>
@@ -26016,7 +25728,7 @@
                   <a:srgbClr val="1A1A1A"/>
                 </a:solidFill>
               </a:rPr>
-              <a:t>FTAI earnings calls ($450–750M FY27 guide; 'materially fewer than 100 units'); GPS estimates; GPS model (SOTP, Power at 12x)</a:t>
+              <a:t>FTAI earnings calls ($450–750M FY27 guide); GPS estimates</a:t>
             </a:r>
             <a:endParaRPr lang="en-US" sz="1100" dirty="0"/>
           </a:p>
@@ -26418,43 +26130,7 @@
       </p:graphicFrame>
       <p:sp>
         <p:nvSpPr>
-          <p:cNvPr id="11" name="Pick one caption"/>
-          <p:cNvSpPr txBox="1"/>
-          <p:nvPr/>
-        </p:nvSpPr>
-        <p:spPr>
-          <a:xfrm>
-            <a:off x="2331720" y="5760720"/>
-            <a:ext cx="4480560" cy="256032"/>
-          </a:xfrm>
-          <a:prstGeom prst="rect">
-            <a:avLst/>
-          </a:prstGeom>
-          <a:noFill/>
-          <a:ln/>
-        </p:spPr>
-        <p:txBody>
-          <a:bodyPr wrap="square" lIns="0" tIns="0" rIns="0" bIns="0" rtlCol="0" anchor="ctr"/>
-          <a:lstStyle/>
-          <a:p>
-            <a:pPr algn="ctr" indent="0" marL="0">
-              <a:buNone/>
-            </a:pPr>
-            <a:r>
-              <a:rPr lang="en-US" sz="1100" i="1" dirty="0">
-                <a:solidFill>
-                  <a:schemeClr val="accent2"/>
-                </a:solidFill>
-              </a:rPr>
-              <a:t>Your return if only one comes true</a:t>
-            </a:r>
-            <a:endParaRPr lang="en-US" sz="1100" dirty="0"/>
-          </a:p>
-        </p:txBody>
-      </p:sp>
-      <p:sp>
-        <p:nvSpPr>
-          <p:cNvPr id="12" name="Left assumption box"/>
+          <p:cNvPr id="11" name="Left assumption box"/>
           <p:cNvSpPr txBox="1"/>
           <p:nvPr/>
         </p:nvSpPr>
@@ -26495,7 +26171,7 @@
       </p:sp>
       <p:sp>
         <p:nvSpPr>
-          <p:cNvPr id="13" name="Right assumption box"/>
+          <p:cNvPr id="12" name="Right assumption box"/>
           <p:cNvSpPr txBox="1"/>
           <p:nvPr/>
         </p:nvSpPr>
@@ -26550,7 +26226,7 @@
       </p:sp>
       <p:sp>
         <p:nvSpPr>
-          <p:cNvPr id="14" name="Source"/>
+          <p:cNvPr id="13" name="Source"/>
           <p:cNvSpPr txBox="1"/>
           <p:nvPr/>
         </p:nvSpPr>
@@ -26589,7 +26265,7 @@
                   <a:srgbClr val="1A1A1A"/>
                 </a:solidFill>
               </a:rPr>
-              <a:t>GPS model: SOTP (FY27E EBITDA, base multiples), aviation theses vs. Power switched on separately; share history per GPS analysis</a:t>
+              <a:t>FY27E sum of the parts at base multiples; share history per GPS analysis</a:t>
             </a:r>
             <a:endParaRPr lang="en-US" sz="1100" dirty="0"/>
           </a:p>
@@ -27034,43 +26710,7 @@
       </p:sp>
       <p:sp>
         <p:nvSpPr>
-          <p:cNvPr id="13" name="Waterfall caption"/>
-          <p:cNvSpPr txBox="1"/>
-          <p:nvPr/>
-        </p:nvSpPr>
-        <p:spPr>
-          <a:xfrm>
-            <a:off x="320040" y="5074920"/>
-            <a:ext cx="5715000" cy="256032"/>
-          </a:xfrm>
-          <a:prstGeom prst="rect">
-            <a:avLst/>
-          </a:prstGeom>
-          <a:noFill/>
-          <a:ln/>
-        </p:spPr>
-        <p:txBody>
-          <a:bodyPr wrap="square" lIns="0" tIns="0" rIns="0" bIns="0" rtlCol="0" anchor="ctr"/>
-          <a:lstStyle/>
-          <a:p>
-            <a:pPr algn="ctr" indent="0" marL="0">
-              <a:buNone/>
-            </a:pPr>
-            <a:r>
-              <a:rPr lang="en-US" sz="1000" i="1" dirty="0">
-                <a:solidFill>
-                  <a:schemeClr val="accent2"/>
-                </a:solidFill>
-              </a:rPr>
-              <a:t>FY27E SOTP; each thesis switched from our bear case to base (Shapley average)</a:t>
-            </a:r>
-            <a:endParaRPr lang="en-US" sz="1000" dirty="0"/>
-          </a:p>
-        </p:txBody>
-      </p:sp>
-      <p:sp>
-        <p:nvSpPr>
-          <p:cNvPr id="14" name="Means header"/>
+          <p:cNvPr id="13" name="Means header"/>
           <p:cNvSpPr txBox="1"/>
           <p:nvPr/>
         </p:nvSpPr>
@@ -27106,7 +26746,7 @@
       </p:sp>
       <p:sp>
         <p:nvSpPr>
-          <p:cNvPr id="15" name="Means header rule"/>
+          <p:cNvPr id="14" name="Means header rule"/>
           <p:cNvSpPr/>
           <p:nvPr/>
         </p:nvSpPr>
@@ -27129,7 +26769,7 @@
       </p:sp>
       <p:sp>
         <p:nvSpPr>
-          <p:cNvPr id="16" name="Means stat 1"/>
+          <p:cNvPr id="15" name="Means stat 1"/>
           <p:cNvSpPr txBox="1"/>
           <p:nvPr/>
         </p:nvSpPr>
@@ -27179,7 +26819,7 @@
       </p:sp>
       <p:sp>
         <p:nvSpPr>
-          <p:cNvPr id="17" name="Means stat 2"/>
+          <p:cNvPr id="16" name="Means stat 2"/>
           <p:cNvSpPr txBox="1"/>
           <p:nvPr/>
         </p:nvSpPr>
@@ -27229,7 +26869,7 @@
       </p:sp>
       <p:sp>
         <p:nvSpPr>
-          <p:cNvPr id="18" name="Means stat 3"/>
+          <p:cNvPr id="17" name="Means stat 3"/>
           <p:cNvSpPr txBox="1"/>
           <p:nvPr/>
         </p:nvSpPr>
@@ -27279,7 +26919,7 @@
       </p:sp>
       <p:sp>
         <p:nvSpPr>
-          <p:cNvPr id="19" name="Takeaway"/>
+          <p:cNvPr id="18" name="Takeaway"/>
           <p:cNvSpPr txBox="1"/>
           <p:nvPr/>
         </p:nvSpPr>
@@ -27317,7 +26957,7 @@
       </p:sp>
       <p:sp>
         <p:nvSpPr>
-          <p:cNvPr id="20" name="Source"/>
+          <p:cNvPr id="19" name="Source"/>
           <p:cNvSpPr txBox="1"/>
           <p:nvPr/>
         </p:nvSpPr>
@@ -27356,7 +26996,7 @@
                   <a:srgbClr val="1A1A1A"/>
                 </a:solidFill>
               </a:rPr>
-              <a:t>GPS model (SOTP: Aerospace 16x, Power 12x, Leasing + SCI 9x FY27E EBITDA); thesis attribution re-runs; price $167.03 (10/2/26)</a:t>
+              <a:t>FY27E sum of the parts (Aerospace 16x, Power 12x, Leasing + SCI 9x); price $167.03 (10/2/26)</a:t>
             </a:r>
             <a:endParaRPr lang="en-US" sz="1100" dirty="0"/>
           </a:p>
@@ -28843,7 +28483,7 @@
                   <a:srgbClr val="1A1A1A"/>
                 </a:solidFill>
               </a:rPr>
-              <a:t>GE Aerospace Q2'26 call; CFM via StandardAero; IATA (Jun-26); GPS model; FTAI Q2'26 supplement; FTAI job postings</a:t>
+              <a:t>GE Aerospace Q2'26 call; CFM via StandardAero; IATA (Jun-26); FTAI Q2'26 supplement; FTAI job postings</a:t>
             </a:r>
             <a:endParaRPr lang="en-US" sz="1100" dirty="0"/>
           </a:p>
@@ -29888,7 +29528,7 @@
                   <a:srgbClr val="1A1A1A"/>
                 </a:solidFill>
               </a:rPr>
-              <a:t>FTAI filings and earnings calls, GPS model</a:t>
+              <a:t>FTAI filings and earnings calls</a:t>
             </a:r>
             <a:endParaRPr lang="en-US" sz="1100" dirty="0"/>
           </a:p>
@@ -30091,7 +29731,7 @@
                   <a:srgbClr val="1A1A1A"/>
                 </a:solidFill>
               </a:rPr>
-              <a:t>GPS model (DCF tab), base case</a:t>
+              <a:t>DCF, base case</a:t>
             </a:r>
             <a:endParaRPr lang="en-US" sz="1100" dirty="0"/>
           </a:p>
@@ -30270,7 +29910,7 @@
                   <a:srgbClr val="1A1A1A"/>
                 </a:solidFill>
               </a:rPr>
-              <a:t>GPS model (DCF tab), base case</a:t>
+              <a:t>DCF, base case</a:t>
             </a:r>
             <a:endParaRPr lang="en-US" sz="1100" dirty="0"/>
           </a:p>
@@ -30449,7 +30089,7 @@
                   <a:srgbClr val="1A1A1A"/>
                 </a:solidFill>
               </a:rPr>
-              <a:t>GPS model (DCF tab): implied share price by WACC, terminal growth and exit multiple</a:t>
+              <a:t>Implied share price by WACC, terminal growth and exit multiple</a:t>
             </a:r>
             <a:endParaRPr lang="en-US" sz="1100" dirty="0"/>
           </a:p>
@@ -30628,7 +30268,7 @@
                   <a:srgbClr val="1A1A1A"/>
                 </a:solidFill>
               </a:rPr>
-              <a:t>GPS model (DCF tab): FY27E SOTP</a:t>
+              <a:t>FY27E sum of the parts</a:t>
             </a:r>
             <a:endParaRPr lang="en-US" sz="1100" dirty="0"/>
           </a:p>
@@ -30831,7 +30471,7 @@
                   <a:srgbClr val="1A1A1A"/>
                 </a:solidFill>
               </a:rPr>
-              <a:t>GPS model (RPM tab Mod-1 build; Power outlook tab, NERC 2025 LTRA inputs)</a:t>
+              <a:t>Mod-1 build; NERC 2025 LTRA</a:t>
             </a:r>
             <a:endParaRPr lang="en-US" sz="1100" dirty="0"/>
           </a:p>
@@ -31052,7 +30692,7 @@
                   <a:srgbClr val="1A1A1A"/>
                 </a:solidFill>
               </a:rPr>
-              <a:t>GPS model (Pricing Data tab): matched OEM catalogue parts, CFM56-5B and -7B</a:t>
+              <a:t>CFM catalogue pricing, matched parts, CFM56-5B and -7B</a:t>
             </a:r>
             <a:endParaRPr lang="en-US" sz="1100" dirty="0"/>
           </a:p>
@@ -32193,43 +31833,7 @@
       </p:sp>
       <p:sp>
         <p:nvSpPr>
-          <p:cNvPr id="12" name="Backlog caption"/>
-          <p:cNvSpPr txBox="1"/>
-          <p:nvPr/>
-        </p:nvSpPr>
-        <p:spPr>
-          <a:xfrm>
-            <a:off x="320040" y="5010912"/>
-            <a:ext cx="5257800" cy="274320"/>
-          </a:xfrm>
-          <a:prstGeom prst="rect">
-            <a:avLst/>
-          </a:prstGeom>
-          <a:noFill/>
-          <a:ln/>
-        </p:spPr>
-        <p:txBody>
-          <a:bodyPr wrap="square" lIns="0" tIns="0" rIns="0" bIns="0" rtlCol="0" anchor="ctr"/>
-          <a:lstStyle/>
-          <a:p>
-            <a:pPr algn="ctr" indent="0" marL="0">
-              <a:buNone/>
-            </a:pPr>
-            <a:r>
-              <a:rPr lang="en-US" sz="1000" i="1" dirty="0">
-                <a:solidFill>
-                  <a:schemeClr val="accent2"/>
-                </a:solidFill>
-              </a:rPr>
-              <a:t>GE Vernova booking out to 2031; Siemens lead times 3+ years</a:t>
-            </a:r>
-            <a:endParaRPr lang="en-US" sz="1000" dirty="0"/>
-          </a:p>
-        </p:txBody>
-      </p:sp>
-      <p:sp>
-        <p:nvSpPr>
-          <p:cNvPr id="13" name="Power stats header"/>
+          <p:cNvPr id="12" name="Power stats header"/>
           <p:cNvSpPr txBox="1"/>
           <p:nvPr/>
         </p:nvSpPr>
@@ -32265,7 +31869,7 @@
       </p:sp>
       <p:sp>
         <p:nvSpPr>
-          <p:cNvPr id="14" name="Power stats header rule"/>
+          <p:cNvPr id="13" name="Power stats header rule"/>
           <p:cNvSpPr/>
           <p:nvPr/>
         </p:nvSpPr>
@@ -32288,7 +31892,7 @@
       </p:sp>
       <p:sp>
         <p:nvSpPr>
-          <p:cNvPr id="15" name="Power stat 1"/>
+          <p:cNvPr id="14" name="Power stat 1"/>
           <p:cNvSpPr txBox="1"/>
           <p:nvPr/>
         </p:nvSpPr>
@@ -32324,7 +31928,7 @@
       </p:sp>
       <p:sp>
         <p:nvSpPr>
-          <p:cNvPr id="16" name="Power stat 1 label"/>
+          <p:cNvPr id="15" name="Power stat 1 label"/>
           <p:cNvSpPr txBox="1"/>
           <p:nvPr/>
         </p:nvSpPr>
@@ -32360,7 +31964,7 @@
       </p:sp>
       <p:sp>
         <p:nvSpPr>
-          <p:cNvPr id="17" name="Power stat 2"/>
+          <p:cNvPr id="16" name="Power stat 2"/>
           <p:cNvSpPr txBox="1"/>
           <p:nvPr/>
         </p:nvSpPr>
@@ -32396,7 +32000,7 @@
       </p:sp>
       <p:sp>
         <p:nvSpPr>
-          <p:cNvPr id="18" name="Power stat 2 label"/>
+          <p:cNvPr id="17" name="Power stat 2 label"/>
           <p:cNvSpPr txBox="1"/>
           <p:nvPr/>
         </p:nvSpPr>
@@ -32432,7 +32036,7 @@
       </p:sp>
       <p:sp>
         <p:nvSpPr>
-          <p:cNvPr id="19" name="Power stat 3"/>
+          <p:cNvPr id="18" name="Power stat 3"/>
           <p:cNvSpPr txBox="1"/>
           <p:nvPr/>
         </p:nvSpPr>
@@ -32468,7 +32072,7 @@
       </p:sp>
       <p:sp>
         <p:nvSpPr>
-          <p:cNvPr id="20" name="Power stat 3 label"/>
+          <p:cNvPr id="19" name="Power stat 3 label"/>
           <p:cNvSpPr txBox="1"/>
           <p:nvPr/>
         </p:nvSpPr>
@@ -32504,7 +32108,7 @@
       </p:sp>
       <p:sp>
         <p:nvSpPr>
-          <p:cNvPr id="21" name="Takeaway"/>
+          <p:cNvPr id="20" name="Takeaway"/>
           <p:cNvSpPr txBox="1"/>
           <p:nvPr/>
         </p:nvSpPr>
@@ -32542,7 +32146,7 @@
       </p:sp>
       <p:sp>
         <p:nvSpPr>
-          <p:cNvPr id="22" name="Source"/>
+          <p:cNvPr id="21" name="Source"/>
           <p:cNvSpPr txBox="1"/>
           <p:nvPr/>
         </p:nvSpPr>
@@ -33289,7 +32893,7 @@
                   <a:srgbClr val="1A1A1A"/>
                 </a:solidFill>
               </a:rPr>
-              <a:t>GPS model: base-case FY27E SOTP; thesis drivers switched Bear vs. Base (Power off = 0 units), Shapley average</a:t>
+              <a:t>FTAI filings; base-case FY27E sum of the parts, each thesis switched from bear to base case</a:t>
             </a:r>
             <a:endParaRPr lang="en-US" sz="1100" dirty="0"/>
           </a:p>
@@ -34010,7 +33614,7 @@
                   <a:srgbClr val="1A1A1A"/>
                 </a:solidFill>
               </a:rPr>
-              <a:t>FTAI filings and earnings calls, GPS model. Illustrations are schematic.</a:t>
+              <a:t>FTAI filings and earnings calls. Illustrations are schematic.</a:t>
             </a:r>
             <a:endParaRPr lang="en-US" sz="1100" dirty="0"/>
           </a:p>
@@ -36688,7 +36292,7 @@
                   <a:srgbClr val="1A1A1A"/>
                 </a:solidFill>
               </a:rPr>
-              <a:t>FTAI filings, GPS analysis and model (Aerospace Adj. EBITDA margin incl. PMA)</a:t>
+              <a:t>FTAI filings, GPS analysis</a:t>
             </a:r>
             <a:endParaRPr lang="en-US" sz="1100" dirty="0"/>
           </a:p>

--- a/deck/FTAI_Long_Pitch.pptx
+++ b/deck/FTAI_Long_Pitch.pptx
@@ -141,12 +141,12 @@
   <p:extLst>
     <p:ext uri="{521415D9-36F7-43E2-AB2F-B90AF26B5E84}">
       <p14:sectionLst xmlns:p14="http://schemas.microsoft.com/office/powerpoint/2010/main">
-        <p14:section name="Introduction" id="{3e741428-20c4-3de8-7cc9-53a0c37b32bd}">
+        <p14:section name="Introduction" id="{01745a73-3a77-5be4-7741-8ee25cd3a26a}">
           <p14:sldIdLst>
             <p14:sldId id="256"/>
           </p14:sldIdLst>
         </p14:section>
-        <p14:section name="The Opportunity" id="{30c8abef-1c62-a972-280c-4cdbc75ee717}">
+        <p14:section name="The Opportunity" id="{bc8910a8-d2a1-3c2e-34f6-b60d43b0ad6e}">
           <p14:sldIdLst>
             <p14:sldId id="257"/>
             <p14:sldId id="258"/>
@@ -154,18 +154,18 @@
             <p14:sldId id="260"/>
           </p14:sldIdLst>
         </p14:section>
-        <p14:section name="Returns" id="{3c7b42f9-aed4-282c-5743-1e629dcde26c}">
+        <p14:section name="Returns" id="{5909228e-9529-a264-7643-0d2b79299a09}">
           <p14:sldIdLst>
             <p14:sldId id="261"/>
           </p14:sldIdLst>
         </p14:section>
-        <p14:section name="Business Overview" id="{a9865bf1-679f-08ac-82b2-7891036b8fd0}">
+        <p14:section name="Business Overview" id="{8dd6634e-bf9f-755f-b71e-e65b2032c620}">
           <p14:sldIdLst>
             <p14:sldId id="262"/>
             <p14:sldId id="263"/>
           </p14:sldIdLst>
         </p14:section>
-        <p14:section name="Thesis 1a" id="{bce35662-604b-b1a9-7bfc-d53d425aaf86}">
+        <p14:section name="Thesis 1a" id="{a8176c2d-e272-ad84-0003-47d0fc69b916}">
           <p14:sldIdLst>
             <p14:sldId id="264"/>
             <p14:sldId id="265"/>
@@ -173,7 +173,7 @@
             <p14:sldId id="267"/>
           </p14:sldIdLst>
         </p14:section>
-        <p14:section name="Thesis 1b" id="{fac274fb-d51c-17c2-ea11-15547a7a58f5}">
+        <p14:section name="Thesis 1b" id="{617ca761-4659-2546-700a-5c4a76874992}">
           <p14:sldIdLst>
             <p14:sldId id="268"/>
             <p14:sldId id="269"/>
@@ -184,7 +184,7 @@
             <p14:sldId id="274"/>
           </p14:sldIdLst>
         </p14:section>
-        <p14:section name="Thesis 2" id="{919bd439-cc37-0db8-f945-564b9627ab41}">
+        <p14:section name="Thesis 2" id="{02b013bb-f070-ec13-5c45-69d0cfaa608d}">
           <p14:sldIdLst>
             <p14:sldId id="275"/>
             <p14:sldId id="276"/>
@@ -192,28 +192,28 @@
             <p14:sldId id="278"/>
           </p14:sldIdLst>
         </p14:section>
-        <p14:section name="Valuation" id="{3399540e-f439-e502-5ed7-7f47cfc8928c}">
+        <p14:section name="Valuation" id="{529374e8-1ea3-d5ca-3009-c9b571110821}">
           <p14:sldIdLst>
             <p14:sldId id="279"/>
             <p14:sldId id="280"/>
           </p14:sldIdLst>
         </p14:section>
-        <p14:section name="Catalysts" id="{671c5c31-321f-9678-c856-9ccbc12bb5c4}">
+        <p14:section name="Catalysts" id="{d456fd0a-7ff5-6819-051d-6a0dab3b261f}">
           <p14:sldIdLst>
             <p14:sldId id="281"/>
           </p14:sldIdLst>
         </p14:section>
-        <p14:section name="Risks" id="{5956eef1-7f83-b870-33c9-c59853b6cac8}">
+        <p14:section name="Risks" id="{2731f7df-8a65-bc22-5ed1-212080a85a05}">
           <p14:sldIdLst>
             <p14:sldId id="282"/>
           </p14:sldIdLst>
         </p14:section>
-        <p14:section name="Q&amp;A" id="{dc004886-6a89-0b7c-a16c-7f63f911d083}">
+        <p14:section name="Q&amp;A" id="{4dd3d3b6-4a3c-a354-d711-17c131f94f62}">
           <p14:sldIdLst>
             <p14:sldId id="283"/>
           </p14:sldIdLst>
         </p14:section>
-        <p14:section name="Appendix" id="{d80088cf-39c5-7d0a-19f5-152f163426be}">
+        <p14:section name="Appendix" id="{37e8be28-1738-306f-d185-386d5af3eb4f}">
           <p14:sldIdLst>
             <p14:sldId id="284"/>
             <p14:sldId id="285"/>
@@ -10010,7 +10010,7 @@
             <c:size val="6"/>
             <c:spPr>
               <a:solidFill>
-                <a:srgbClr val="2E93AE"/>
+                <a:srgbClr val="0A1C58"/>
               </a:solidFill>
               <a:ln w="9525" cap="flat">
                 <a:solidFill>
@@ -10148,7 +10148,7 @@
             <c:size val="6"/>
             <c:spPr>
               <a:solidFill>
-                <a:srgbClr val="0A1C58"/>
+                <a:srgbClr val="2E93AE"/>
               </a:solidFill>
               <a:ln w="9525" cap="flat">
                 <a:solidFill>
@@ -14960,7 +14960,7 @@
                   <a:schemeClr val="tx2"/>
                 </a:solidFill>
               </a:rPr>
-              <a:t>$308</a:t>
+              <a:t>$277</a:t>
             </a:r>
             <a:endParaRPr lang="en-US" sz="3000" dirty="0"/>
           </a:p>
@@ -15032,7 +15032,7 @@
                   <a:srgbClr val="EE6E25"/>
                 </a:solidFill>
               </a:rPr>
-              <a:t>84%</a:t>
+              <a:t>66%</a:t>
             </a:r>
             <a:endParaRPr lang="en-US" sz="3000" dirty="0"/>
           </a:p>
@@ -15104,7 +15104,7 @@
                   <a:srgbClr val="EE6E25"/>
                 </a:solidFill>
               </a:rPr>
-              <a:t>3.4x</a:t>
+              <a:t>2.7x</a:t>
             </a:r>
             <a:endParaRPr lang="en-US" sz="3000" dirty="0"/>
           </a:p>
@@ -15333,7 +15333,7 @@
                   <a:srgbClr val="1A1A1A"/>
                 </a:solidFill>
               </a:rPr>
-              <a:t>Target Price: $308.03 (84% upside, 3.4x R/R)</a:t>
+              <a:t>Target Price: $277 (66% upside, 2.7x R/R)</a:t>
             </a:r>
             <a:endParaRPr lang="en-US" sz="1500" dirty="0"/>
           </a:p>
@@ -22980,7 +22980,7 @@
                   <a:schemeClr val="bg1"/>
                 </a:solidFill>
               </a:rPr>
-              <a:t>The market is pricing a trough as a cliff. We see 84% upside, with Power as a free call option.</a:t>
+              <a:t>The market is pricing a trough as a cliff. We see 66% upside, with Power as a free call option.</a:t>
             </a:r>
             <a:endParaRPr lang="en-US" sz="1700" dirty="0"/>
           </a:p>

--- a/deck/FTAI_Long_Pitch.pptx
+++ b/deck/FTAI_Long_Pitch.pptx
@@ -44,8 +44,8 @@
   <p:notesMasterIdLst>
     <p:notesMasterId r:id="rId37"/>
   </p:notesMasterIdLst>
-  <p:sldSz cx="9144000" cy="6858000"/>
-  <p:notesSz cx="6858000" cy="9144000"/>
+  <p:sldSz cx="12191695" cy="6858000"/>
+  <p:notesSz cx="6858000" cy="12191695"/>
   <p:defaultTextStyle>
     <a:lvl1pPr marL="0" algn="l" defTabSz="914400" rtl="0" eaLnBrk="1" latinLnBrk="0" hangingPunct="1">
       <a:defRPr sz="1800" kern="1200">
@@ -141,12 +141,12 @@
   <p:extLst>
     <p:ext uri="{521415D9-36F7-43E2-AB2F-B90AF26B5E84}">
       <p14:sectionLst xmlns:p14="http://schemas.microsoft.com/office/powerpoint/2010/main">
-        <p14:section name="Introduction" id="{01745a73-3a77-5be4-7741-8ee25cd3a26a}">
+        <p14:section name="Introduction" id="{8a306db1-90c2-2128-6a64-74528dcb29f0}">
           <p14:sldIdLst>
             <p14:sldId id="256"/>
           </p14:sldIdLst>
         </p14:section>
-        <p14:section name="The Opportunity" id="{bc8910a8-d2a1-3c2e-34f6-b60d43b0ad6e}">
+        <p14:section name="The Opportunity" id="{8f62dde4-0d6e-a8c1-edb2-4abdad16cf1c}">
           <p14:sldIdLst>
             <p14:sldId id="257"/>
             <p14:sldId id="258"/>
@@ -154,18 +154,18 @@
             <p14:sldId id="260"/>
           </p14:sldIdLst>
         </p14:section>
-        <p14:section name="Returns" id="{5909228e-9529-a264-7643-0d2b79299a09}">
+        <p14:section name="Returns" id="{bcea3436-ca4e-a692-6ca1-046ebac943db}">
           <p14:sldIdLst>
             <p14:sldId id="261"/>
           </p14:sldIdLst>
         </p14:section>
-        <p14:section name="Business Overview" id="{8dd6634e-bf9f-755f-b71e-e65b2032c620}">
+        <p14:section name="Business Overview" id="{11b29c32-dc05-ec41-348f-9eb3700b3d67}">
           <p14:sldIdLst>
             <p14:sldId id="262"/>
             <p14:sldId id="263"/>
           </p14:sldIdLst>
         </p14:section>
-        <p14:section name="Thesis 1a" id="{a8176c2d-e272-ad84-0003-47d0fc69b916}">
+        <p14:section name="Thesis 1a" id="{b8e3ad2b-b20d-18bb-4f80-a6bcb8129599}">
           <p14:sldIdLst>
             <p14:sldId id="264"/>
             <p14:sldId id="265"/>
@@ -173,7 +173,7 @@
             <p14:sldId id="267"/>
           </p14:sldIdLst>
         </p14:section>
-        <p14:section name="Thesis 1b" id="{617ca761-4659-2546-700a-5c4a76874992}">
+        <p14:section name="Thesis 1b" id="{b8a0464a-bdad-bce4-a479-8ed54327695d}">
           <p14:sldIdLst>
             <p14:sldId id="268"/>
             <p14:sldId id="269"/>
@@ -184,7 +184,7 @@
             <p14:sldId id="274"/>
           </p14:sldIdLst>
         </p14:section>
-        <p14:section name="Thesis 2" id="{02b013bb-f070-ec13-5c45-69d0cfaa608d}">
+        <p14:section name="Thesis 2" id="{88b5a142-1352-9c4b-fa15-376bfee2f1de}">
           <p14:sldIdLst>
             <p14:sldId id="275"/>
             <p14:sldId id="276"/>
@@ -192,28 +192,28 @@
             <p14:sldId id="278"/>
           </p14:sldIdLst>
         </p14:section>
-        <p14:section name="Valuation" id="{529374e8-1ea3-d5ca-3009-c9b571110821}">
+        <p14:section name="Valuation" id="{c1f6bd42-6b10-95ef-082d-bc134bcf298b}">
           <p14:sldIdLst>
             <p14:sldId id="279"/>
             <p14:sldId id="280"/>
           </p14:sldIdLst>
         </p14:section>
-        <p14:section name="Catalysts" id="{d456fd0a-7ff5-6819-051d-6a0dab3b261f}">
+        <p14:section name="Catalysts" id="{34612d1b-3bf3-9144-b070-dcf4ba19d90b}">
           <p14:sldIdLst>
             <p14:sldId id="281"/>
           </p14:sldIdLst>
         </p14:section>
-        <p14:section name="Risks" id="{2731f7df-8a65-bc22-5ed1-212080a85a05}">
+        <p14:section name="Risks" id="{f5f1dfed-1ff5-3318-2685-5757dc031bc6}">
           <p14:sldIdLst>
             <p14:sldId id="282"/>
           </p14:sldIdLst>
         </p14:section>
-        <p14:section name="Q&amp;A" id="{4dd3d3b6-4a3c-a354-d711-17c131f94f62}">
+        <p14:section name="Q&amp;A" id="{a1c0fed6-3614-4158-2cde-13ffec0deeae}">
           <p14:sldIdLst>
             <p14:sldId id="283"/>
           </p14:sldIdLst>
         </p14:section>
-        <p14:section name="Appendix" id="{37e8be28-1738-306f-d185-386d5af3eb4f}">
+        <p14:section name="Appendix" id="{ae318374-a6bc-b2b2-03c3-bff2a10650c8}">
           <p14:sldIdLst>
             <p14:sldId id="284"/>
             <p14:sldId id="285"/>
@@ -13887,8 +13887,8 @@
         </p:nvSpPr>
         <p:spPr>
           <a:xfrm>
-            <a:off x="320040" y="868680"/>
-            <a:ext cx="8503920" cy="0"/>
+            <a:off x="426709" y="868680"/>
+            <a:ext cx="11338277" cy="0"/>
           </a:xfrm>
           <a:prstGeom prst="line">
             <a:avLst/>
@@ -13918,7 +13918,7 @@
         </p:blipFill>
         <p:spPr>
           <a:xfrm>
-            <a:off x="8119872" y="6144768"/>
+            <a:off x="10929847" y="6144768"/>
             <a:ext cx="621792" cy="566928"/>
           </a:xfrm>
           <a:prstGeom prst="rect">
@@ -13942,7 +13942,7 @@
         </p:blipFill>
         <p:spPr>
           <a:xfrm>
-            <a:off x="7452360" y="246888"/>
+            <a:off x="10164809" y="246888"/>
             <a:ext cx="1371600" cy="522923"/>
           </a:xfrm>
           <a:prstGeom prst="rect">
@@ -13960,8 +13960,8 @@
         </p:nvSpPr>
         <p:spPr>
           <a:xfrm>
-            <a:off x="320040" y="182880"/>
-            <a:ext cx="7040880" cy="640080"/>
+            <a:off x="426709" y="182880"/>
+            <a:ext cx="9387605" cy="640080"/>
           </a:xfrm>
           <a:prstGeom prst="rect">
             <a:avLst/>
@@ -14001,8 +14001,8 @@
         </p:nvSpPr>
         <p:spPr>
           <a:xfrm>
-            <a:off x="7635240" y="6327648"/>
-            <a:ext cx="411480" cy="274320"/>
+            <a:off x="10180065" y="6327648"/>
+            <a:ext cx="548626" cy="274320"/>
           </a:xfrm>
           <a:prstGeom prst="rect">
             <a:avLst/>
@@ -14074,8 +14074,8 @@
         </p:nvSpPr>
         <p:spPr>
           <a:xfrm>
-            <a:off x="320040" y="868680"/>
-            <a:ext cx="8503920" cy="0"/>
+            <a:off x="426709" y="868680"/>
+            <a:ext cx="11338277" cy="0"/>
           </a:xfrm>
           <a:prstGeom prst="line">
             <a:avLst/>
@@ -14105,7 +14105,7 @@
         </p:blipFill>
         <p:spPr>
           <a:xfrm>
-            <a:off x="8119872" y="6144768"/>
+            <a:off x="10929847" y="6144768"/>
             <a:ext cx="621792" cy="566928"/>
           </a:xfrm>
           <a:prstGeom prst="rect">
@@ -14129,7 +14129,7 @@
         </p:blipFill>
         <p:spPr>
           <a:xfrm>
-            <a:off x="7452360" y="246888"/>
+            <a:off x="10164809" y="246888"/>
             <a:ext cx="1371600" cy="522923"/>
           </a:xfrm>
           <a:prstGeom prst="rect">
@@ -14147,8 +14147,8 @@
         </p:nvSpPr>
         <p:spPr>
           <a:xfrm>
-            <a:off x="320040" y="182880"/>
-            <a:ext cx="7040880" cy="640080"/>
+            <a:off x="426709" y="182880"/>
+            <a:ext cx="9387605" cy="640080"/>
           </a:xfrm>
           <a:prstGeom prst="rect">
             <a:avLst/>
@@ -14186,8 +14186,8 @@
         </p:nvSpPr>
         <p:spPr>
           <a:xfrm>
-            <a:off x="320040" y="932688"/>
-            <a:ext cx="8503920" cy="566928"/>
+            <a:off x="426709" y="932688"/>
+            <a:ext cx="11338277" cy="566928"/>
           </a:xfrm>
           <a:prstGeom prst="rect">
             <a:avLst/>
@@ -14227,8 +14227,8 @@
         </p:nvSpPr>
         <p:spPr>
           <a:xfrm>
-            <a:off x="7635240" y="6327648"/>
-            <a:ext cx="411480" cy="274320"/>
+            <a:off x="10180065" y="6327648"/>
+            <a:ext cx="548626" cy="274320"/>
           </a:xfrm>
           <a:prstGeom prst="rect">
             <a:avLst/>
@@ -14297,8 +14297,8 @@
         </p:nvSpPr>
         <p:spPr>
           <a:xfrm>
-            <a:off x="7635240" y="6327648"/>
-            <a:ext cx="411480" cy="274320"/>
+            <a:off x="10180065" y="6327648"/>
+            <a:ext cx="548626" cy="274320"/>
           </a:xfrm>
           <a:prstGeom prst="rect">
             <a:avLst/>
@@ -14618,8 +14618,8 @@
         </p:nvSpPr>
         <p:spPr>
           <a:xfrm>
-            <a:off x="548640" y="320040"/>
-            <a:ext cx="6400800" cy="1143000"/>
+            <a:off x="731502" y="320040"/>
+            <a:ext cx="8534187" cy="1143000"/>
           </a:xfrm>
           <a:prstGeom prst="rect">
             <a:avLst/>
@@ -14676,7 +14676,7 @@
         </p:blipFill>
         <p:spPr>
           <a:xfrm>
-            <a:off x="6766560" y="365760"/>
+            <a:off x="9357101" y="365760"/>
             <a:ext cx="2011680" cy="766953"/>
           </a:xfrm>
           <a:prstGeom prst="rect">
@@ -14692,8 +14692,8 @@
         </p:nvSpPr>
         <p:spPr>
           <a:xfrm>
-            <a:off x="548640" y="1508760"/>
-            <a:ext cx="6400800" cy="502920"/>
+            <a:off x="731502" y="1508760"/>
+            <a:ext cx="8534187" cy="502920"/>
           </a:xfrm>
           <a:prstGeom prst="rect">
             <a:avLst/>
@@ -14727,8 +14727,8 @@
           <p:nvPr/>
         </p:nvGraphicFramePr>
         <p:xfrm>
-          <a:off x="548640" y="2011680"/>
-          <a:ext cx="5486400" cy="2057400"/>
+          <a:off x="731502" y="2011680"/>
+          <a:ext cx="7315017" cy="2057400"/>
         </p:xfrm>
         <a:graphic xmlns:a="http://schemas.openxmlformats.org/drawingml/2006/main">
           <a:graphicData uri="http://schemas.openxmlformats.org/drawingml/2006/chart">
@@ -14744,7 +14744,7 @@
         </p:nvSpPr>
         <p:spPr>
           <a:xfrm>
-            <a:off x="4183609" y="3210667"/>
+            <a:off x="5599340" y="3210667"/>
             <a:ext cx="128016" cy="128016"/>
           </a:xfrm>
           <a:prstGeom prst="ellipse">
@@ -14769,8 +14769,8 @@
         </p:nvSpPr>
         <p:spPr>
           <a:xfrm>
-            <a:off x="4311625" y="3366115"/>
-            <a:ext cx="1005840" cy="219456"/>
+            <a:off x="5748690" y="3366115"/>
+            <a:ext cx="1341086" cy="219456"/>
           </a:xfrm>
           <a:prstGeom prst="rect">
             <a:avLst/>
@@ -14805,7 +14805,7 @@
         </p:nvSpPr>
         <p:spPr>
           <a:xfrm>
-            <a:off x="5537204" y="2546292"/>
+            <a:off x="7404088" y="2546292"/>
             <a:ext cx="128016" cy="128016"/>
           </a:xfrm>
           <a:prstGeom prst="ellipse">
@@ -14830,8 +14830,8 @@
         </p:nvSpPr>
         <p:spPr>
           <a:xfrm>
-            <a:off x="4961132" y="1951932"/>
-            <a:ext cx="1005840" cy="219456"/>
+            <a:off x="6614677" y="1951932"/>
+            <a:ext cx="1341086" cy="219456"/>
           </a:xfrm>
           <a:prstGeom prst="rect">
             <a:avLst/>
@@ -14866,8 +14866,8 @@
         </p:nvSpPr>
         <p:spPr>
           <a:xfrm>
-            <a:off x="6263640" y="2103120"/>
-            <a:ext cx="1261872" cy="566928"/>
+            <a:off x="8351311" y="2103120"/>
+            <a:ext cx="1682454" cy="566928"/>
           </a:xfrm>
           <a:prstGeom prst="rect">
             <a:avLst/>
@@ -14902,8 +14902,8 @@
         </p:nvSpPr>
         <p:spPr>
           <a:xfrm>
-            <a:off x="6263640" y="2679192"/>
-            <a:ext cx="1261872" cy="274320"/>
+            <a:off x="8351311" y="2679192"/>
+            <a:ext cx="1682454" cy="274320"/>
           </a:xfrm>
           <a:prstGeom prst="rect">
             <a:avLst/>
@@ -14938,8 +14938,8 @@
         </p:nvSpPr>
         <p:spPr>
           <a:xfrm>
-            <a:off x="7562088" y="2103120"/>
-            <a:ext cx="1261872" cy="566928"/>
+            <a:off x="10082532" y="2103120"/>
+            <a:ext cx="1682454" cy="566928"/>
           </a:xfrm>
           <a:prstGeom prst="rect">
             <a:avLst/>
@@ -14974,8 +14974,8 @@
         </p:nvSpPr>
         <p:spPr>
           <a:xfrm>
-            <a:off x="7562088" y="2679192"/>
-            <a:ext cx="1261872" cy="274320"/>
+            <a:off x="10082532" y="2679192"/>
+            <a:ext cx="1682454" cy="274320"/>
           </a:xfrm>
           <a:prstGeom prst="rect">
             <a:avLst/>
@@ -15010,8 +15010,8 @@
         </p:nvSpPr>
         <p:spPr>
           <a:xfrm>
-            <a:off x="6263640" y="3090672"/>
-            <a:ext cx="1261872" cy="566928"/>
+            <a:off x="8351311" y="3090672"/>
+            <a:ext cx="1682454" cy="566928"/>
           </a:xfrm>
           <a:prstGeom prst="rect">
             <a:avLst/>
@@ -15046,8 +15046,8 @@
         </p:nvSpPr>
         <p:spPr>
           <a:xfrm>
-            <a:off x="6263640" y="3666744"/>
-            <a:ext cx="1261872" cy="274320"/>
+            <a:off x="8351311" y="3666744"/>
+            <a:ext cx="1682454" cy="274320"/>
           </a:xfrm>
           <a:prstGeom prst="rect">
             <a:avLst/>
@@ -15082,8 +15082,8 @@
         </p:nvSpPr>
         <p:spPr>
           <a:xfrm>
-            <a:off x="7562088" y="3090672"/>
-            <a:ext cx="1261872" cy="566928"/>
+            <a:off x="10082532" y="3090672"/>
+            <a:ext cx="1682454" cy="566928"/>
           </a:xfrm>
           <a:prstGeom prst="rect">
             <a:avLst/>
@@ -15118,8 +15118,8 @@
         </p:nvSpPr>
         <p:spPr>
           <a:xfrm>
-            <a:off x="7562088" y="3666744"/>
-            <a:ext cx="1261872" cy="274320"/>
+            <a:off x="10082532" y="3666744"/>
+            <a:ext cx="1682454" cy="274320"/>
           </a:xfrm>
           <a:prstGeom prst="rect">
             <a:avLst/>
@@ -15154,7 +15154,7 @@
         </p:nvSpPr>
         <p:spPr>
           <a:xfrm>
-            <a:off x="7562088" y="2148840"/>
+            <a:off x="10082532" y="2148840"/>
             <a:ext cx="0" cy="1783080"/>
           </a:xfrm>
           <a:prstGeom prst="line">
@@ -15177,8 +15177,8 @@
         </p:nvSpPr>
         <p:spPr>
           <a:xfrm>
-            <a:off x="6355080" y="3044952"/>
-            <a:ext cx="2377440" cy="0"/>
+            <a:off x="8473228" y="3044952"/>
+            <a:ext cx="3169841" cy="0"/>
           </a:xfrm>
           <a:prstGeom prst="line">
             <a:avLst/>
@@ -15200,8 +15200,8 @@
         </p:nvSpPr>
         <p:spPr>
           <a:xfrm>
-            <a:off x="411480" y="4206240"/>
-            <a:ext cx="8321040" cy="731520"/>
+            <a:off x="548626" y="4206240"/>
+            <a:ext cx="11094443" cy="731520"/>
           </a:xfrm>
           <a:prstGeom prst="rect">
             <a:avLst/>
@@ -15238,8 +15238,8 @@
         </p:nvSpPr>
         <p:spPr>
           <a:xfrm>
-            <a:off x="411480" y="5029200"/>
-            <a:ext cx="8321040" cy="365760"/>
+            <a:off x="548626" y="5029200"/>
+            <a:ext cx="11094443" cy="365760"/>
           </a:xfrm>
           <a:prstGeom prst="rect">
             <a:avLst/>
@@ -15274,8 +15274,8 @@
         </p:nvSpPr>
         <p:spPr>
           <a:xfrm>
-            <a:off x="548640" y="5760720"/>
-            <a:ext cx="4754880" cy="868680"/>
+            <a:off x="731502" y="5760720"/>
+            <a:ext cx="6339682" cy="868680"/>
           </a:xfrm>
           <a:prstGeom prst="rect">
             <a:avLst/>
@@ -15355,7 +15355,7 @@
         </p:blipFill>
         <p:spPr>
           <a:xfrm>
-            <a:off x="5897880" y="5532120"/>
+            <a:off x="8069363" y="5532120"/>
             <a:ext cx="1234440" cy="1133856"/>
           </a:xfrm>
           <a:prstGeom prst="rect">
@@ -15371,7 +15371,7 @@
         </p:nvSpPr>
         <p:spPr>
           <a:xfrm>
-            <a:off x="7360920" y="5577840"/>
+            <a:off x="9814315" y="5577840"/>
             <a:ext cx="0" cy="1097280"/>
           </a:xfrm>
           <a:prstGeom prst="line">
@@ -15394,8 +15394,8 @@
         </p:nvSpPr>
         <p:spPr>
           <a:xfrm>
-            <a:off x="7452360" y="5669280"/>
-            <a:ext cx="1417320" cy="868680"/>
+            <a:off x="9936232" y="5669280"/>
+            <a:ext cx="1889713" cy="868680"/>
           </a:xfrm>
           <a:prstGeom prst="rect">
             <a:avLst/>
@@ -15471,8 +15471,8 @@
         </p:nvSpPr>
         <p:spPr>
           <a:xfrm>
-            <a:off x="320040" y="182880"/>
-            <a:ext cx="7040880" cy="640080"/>
+            <a:off x="426709" y="182880"/>
+            <a:ext cx="9387605" cy="640080"/>
           </a:xfrm>
           <a:prstGeom prst="rect">
             <a:avLst/>
@@ -15509,8 +15509,8 @@
         </p:nvSpPr>
         <p:spPr>
           <a:xfrm>
-            <a:off x="320040" y="932688"/>
-            <a:ext cx="8503920" cy="566928"/>
+            <a:off x="426709" y="932688"/>
+            <a:ext cx="11338277" cy="566928"/>
           </a:xfrm>
           <a:prstGeom prst="rect">
             <a:avLst/>
@@ -15545,8 +15545,8 @@
         </p:nvSpPr>
         <p:spPr>
           <a:xfrm>
-            <a:off x="320040" y="1554480"/>
-            <a:ext cx="4206240" cy="365760"/>
+            <a:off x="426709" y="1554480"/>
+            <a:ext cx="5608180" cy="365760"/>
           </a:xfrm>
           <a:prstGeom prst="rect">
             <a:avLst/>
@@ -15581,8 +15581,8 @@
         </p:nvSpPr>
         <p:spPr>
           <a:xfrm>
-            <a:off x="320040" y="1975104"/>
-            <a:ext cx="4206240" cy="0"/>
+            <a:off x="426709" y="1975104"/>
+            <a:ext cx="5608180" cy="0"/>
           </a:xfrm>
           <a:prstGeom prst="line">
             <a:avLst/>
@@ -15603,8 +15603,8 @@
           <p:nvPr/>
         </p:nvGraphicFramePr>
         <p:xfrm>
-          <a:off x="320040" y="2103120"/>
-          <a:ext cx="4206240" cy="2834640"/>
+          <a:off x="426709" y="2103120"/>
+          <a:ext cx="5608180" cy="2834640"/>
         </p:xfrm>
         <a:graphic xmlns:a="http://schemas.openxmlformats.org/drawingml/2006/main">
           <a:graphicData uri="http://schemas.openxmlformats.org/drawingml/2006/chart">
@@ -15620,8 +15620,8 @@
         </p:nvSpPr>
         <p:spPr>
           <a:xfrm>
-            <a:off x="2697480" y="2148840"/>
-            <a:ext cx="1737360" cy="274320"/>
+            <a:off x="3596550" y="2148840"/>
+            <a:ext cx="2316422" cy="274320"/>
           </a:xfrm>
           <a:prstGeom prst="rect">
             <a:avLst/>
@@ -15656,8 +15656,8 @@
         </p:nvSpPr>
         <p:spPr>
           <a:xfrm>
-            <a:off x="2697480" y="3337560"/>
-            <a:ext cx="1737360" cy="274320"/>
+            <a:off x="3596550" y="3337560"/>
+            <a:ext cx="2316422" cy="274320"/>
           </a:xfrm>
           <a:prstGeom prst="rect">
             <a:avLst/>
@@ -15692,8 +15692,8 @@
         </p:nvSpPr>
         <p:spPr>
           <a:xfrm>
-            <a:off x="4892040" y="1554480"/>
-            <a:ext cx="3931920" cy="365760"/>
+            <a:off x="6522557" y="1554480"/>
+            <a:ext cx="5242429" cy="365760"/>
           </a:xfrm>
           <a:prstGeom prst="rect">
             <a:avLst/>
@@ -15728,8 +15728,8 @@
         </p:nvSpPr>
         <p:spPr>
           <a:xfrm>
-            <a:off x="4892040" y="1975104"/>
-            <a:ext cx="3931920" cy="0"/>
+            <a:off x="6522557" y="1975104"/>
+            <a:ext cx="5242429" cy="0"/>
           </a:xfrm>
           <a:prstGeom prst="line">
             <a:avLst/>
@@ -15750,8 +15750,8 @@
           <p:nvPr/>
         </p:nvGraphicFramePr>
         <p:xfrm>
-          <a:off x="4892040" y="2103120"/>
-          <a:ext cx="3931920" cy="3200400"/>
+          <a:off x="6522557" y="2103120"/>
+          <a:ext cx="5242429" cy="3200400"/>
         </p:xfrm>
         <a:graphic xmlns:a="http://schemas.openxmlformats.org/drawingml/2006/main">
           <a:graphicData uri="http://schemas.openxmlformats.org/drawingml/2006/chart">
@@ -15767,8 +15767,8 @@
         </p:nvSpPr>
         <p:spPr>
           <a:xfrm>
-            <a:off x="320040" y="5504688"/>
-            <a:ext cx="8503920" cy="566928"/>
+            <a:off x="426709" y="5504688"/>
+            <a:ext cx="11338277" cy="566928"/>
           </a:xfrm>
           <a:prstGeom prst="rect">
             <a:avLst/>
@@ -15805,8 +15805,8 @@
         </p:nvSpPr>
         <p:spPr>
           <a:xfrm>
-            <a:off x="320040" y="6355080"/>
-            <a:ext cx="7132320" cy="274320"/>
+            <a:off x="426709" y="6355080"/>
+            <a:ext cx="9509522" cy="274320"/>
           </a:xfrm>
           <a:prstGeom prst="rect">
             <a:avLst/>
@@ -15856,8 +15856,8 @@
         </p:nvSpPr>
         <p:spPr>
           <a:xfrm>
-            <a:off x="7635240" y="6327648"/>
-            <a:ext cx="411480" cy="274320"/>
+            <a:off x="10180065" y="6327648"/>
+            <a:ext cx="548626" cy="274320"/>
           </a:xfrm>
           <a:prstGeom prst="rect">
             <a:avLst/>
@@ -15924,8 +15924,8 @@
         </p:nvSpPr>
         <p:spPr>
           <a:xfrm>
-            <a:off x="320040" y="182880"/>
-            <a:ext cx="7040880" cy="640080"/>
+            <a:off x="426709" y="182880"/>
+            <a:ext cx="9387605" cy="640080"/>
           </a:xfrm>
           <a:prstGeom prst="rect">
             <a:avLst/>
@@ -15962,8 +15962,8 @@
         </p:nvSpPr>
         <p:spPr>
           <a:xfrm>
-            <a:off x="320040" y="932688"/>
-            <a:ext cx="8503920" cy="566928"/>
+            <a:off x="426709" y="932688"/>
+            <a:ext cx="11338277" cy="566928"/>
           </a:xfrm>
           <a:prstGeom prst="rect">
             <a:avLst/>
@@ -15998,8 +15998,8 @@
         </p:nvSpPr>
         <p:spPr>
           <a:xfrm>
-            <a:off x="320040" y="1554480"/>
-            <a:ext cx="4343400" cy="365760"/>
+            <a:off x="426709" y="1554480"/>
+            <a:ext cx="5791055" cy="365760"/>
           </a:xfrm>
           <a:prstGeom prst="rect">
             <a:avLst/>
@@ -16034,8 +16034,8 @@
         </p:nvSpPr>
         <p:spPr>
           <a:xfrm>
-            <a:off x="320040" y="1975104"/>
-            <a:ext cx="4343400" cy="0"/>
+            <a:off x="426709" y="1975104"/>
+            <a:ext cx="5791055" cy="0"/>
           </a:xfrm>
           <a:prstGeom prst="line">
             <a:avLst/>
@@ -16056,8 +16056,8 @@
           <p:nvPr/>
         </p:nvGraphicFramePr>
         <p:xfrm>
-          <a:off x="320040" y="2103120"/>
-          <a:ext cx="4343400" cy="2834640"/>
+          <a:off x="426709" y="2103120"/>
+          <a:ext cx="5791055" cy="2834640"/>
         </p:xfrm>
         <a:graphic xmlns:a="http://schemas.openxmlformats.org/drawingml/2006/main">
           <a:graphicData uri="http://schemas.openxmlformats.org/drawingml/2006/chart">
@@ -16073,8 +16073,8 @@
         </p:nvSpPr>
         <p:spPr>
           <a:xfrm>
-            <a:off x="868680" y="2103120"/>
-            <a:ext cx="2286000" cy="256032"/>
+            <a:off x="1158211" y="2103120"/>
+            <a:ext cx="3047924" cy="256032"/>
           </a:xfrm>
           <a:prstGeom prst="rect">
             <a:avLst/>
@@ -16109,8 +16109,8 @@
         </p:nvSpPr>
         <p:spPr>
           <a:xfrm>
-            <a:off x="868680" y="4315968"/>
-            <a:ext cx="3017520" cy="256032"/>
+            <a:off x="1158211" y="4315968"/>
+            <a:ext cx="4023259" cy="256032"/>
           </a:xfrm>
           <a:prstGeom prst="rect">
             <a:avLst/>
@@ -16145,7 +16145,7 @@
         </p:nvSpPr>
         <p:spPr>
           <a:xfrm>
-            <a:off x="4206240" y="3145536"/>
+            <a:off x="5635609" y="3145536"/>
             <a:ext cx="164592" cy="164592"/>
           </a:xfrm>
           <a:prstGeom prst="ellipse">
@@ -16170,8 +16170,8 @@
         </p:nvSpPr>
         <p:spPr>
           <a:xfrm>
-            <a:off x="3246120" y="3520440"/>
-            <a:ext cx="1371600" cy="566928"/>
+            <a:off x="4328052" y="3520440"/>
+            <a:ext cx="1828754" cy="566928"/>
           </a:xfrm>
           <a:prstGeom prst="roundRect">
             <a:avLst>
@@ -16228,8 +16228,8 @@
         </p:nvSpPr>
         <p:spPr>
           <a:xfrm>
-            <a:off x="320040" y="4956048"/>
-            <a:ext cx="4343400" cy="274320"/>
+            <a:off x="426709" y="4956048"/>
+            <a:ext cx="5791055" cy="274320"/>
           </a:xfrm>
           <a:prstGeom prst="rect">
             <a:avLst/>
@@ -16264,8 +16264,8 @@
         </p:nvSpPr>
         <p:spPr>
           <a:xfrm>
-            <a:off x="4892040" y="1554480"/>
-            <a:ext cx="3931920" cy="365760"/>
+            <a:off x="6522557" y="1554480"/>
+            <a:ext cx="5242429" cy="365760"/>
           </a:xfrm>
           <a:prstGeom prst="rect">
             <a:avLst/>
@@ -16300,8 +16300,8 @@
         </p:nvSpPr>
         <p:spPr>
           <a:xfrm>
-            <a:off x="4892040" y="1975104"/>
-            <a:ext cx="3931920" cy="0"/>
+            <a:off x="6522557" y="1975104"/>
+            <a:ext cx="5242429" cy="0"/>
           </a:xfrm>
           <a:prstGeom prst="line">
             <a:avLst/>
@@ -16322,8 +16322,8 @@
           <p:nvPr/>
         </p:nvGraphicFramePr>
         <p:xfrm>
-          <a:off x="4892040" y="2103120"/>
-          <a:ext cx="3931920" cy="2743200"/>
+          <a:off x="6522557" y="2103120"/>
+          <a:ext cx="5242429" cy="2743200"/>
         </p:xfrm>
         <a:graphic xmlns:a="http://schemas.openxmlformats.org/drawingml/2006/main">
           <a:graphicData uri="http://schemas.openxmlformats.org/drawingml/2006/chart">
@@ -16339,8 +16339,8 @@
         </p:nvSpPr>
         <p:spPr>
           <a:xfrm>
-            <a:off x="4892040" y="4892040"/>
-            <a:ext cx="3931920" cy="411480"/>
+            <a:off x="6522557" y="4892040"/>
+            <a:ext cx="5242429" cy="411480"/>
           </a:xfrm>
           <a:prstGeom prst="rect">
             <a:avLst/>
@@ -16375,8 +16375,8 @@
         </p:nvSpPr>
         <p:spPr>
           <a:xfrm>
-            <a:off x="320040" y="5504688"/>
-            <a:ext cx="8503920" cy="566928"/>
+            <a:off x="426709" y="5504688"/>
+            <a:ext cx="11338277" cy="566928"/>
           </a:xfrm>
           <a:prstGeom prst="rect">
             <a:avLst/>
@@ -16413,8 +16413,8 @@
         </p:nvSpPr>
         <p:spPr>
           <a:xfrm>
-            <a:off x="320040" y="6355080"/>
-            <a:ext cx="7132320" cy="274320"/>
+            <a:off x="426709" y="6355080"/>
+            <a:ext cx="9509522" cy="274320"/>
           </a:xfrm>
           <a:prstGeom prst="rect">
             <a:avLst/>
@@ -16464,8 +16464,8 @@
         </p:nvSpPr>
         <p:spPr>
           <a:xfrm>
-            <a:off x="7635240" y="6327648"/>
-            <a:ext cx="411480" cy="274320"/>
+            <a:off x="10180065" y="6327648"/>
+            <a:ext cx="548626" cy="274320"/>
           </a:xfrm>
           <a:prstGeom prst="rect">
             <a:avLst/>
@@ -16532,8 +16532,8 @@
         </p:nvSpPr>
         <p:spPr>
           <a:xfrm>
-            <a:off x="320040" y="182880"/>
-            <a:ext cx="7040880" cy="640080"/>
+            <a:off x="426709" y="182880"/>
+            <a:ext cx="9387605" cy="640080"/>
           </a:xfrm>
           <a:prstGeom prst="rect">
             <a:avLst/>
@@ -16570,8 +16570,8 @@
         </p:nvSpPr>
         <p:spPr>
           <a:xfrm>
-            <a:off x="320040" y="932688"/>
-            <a:ext cx="8503920" cy="566928"/>
+            <a:off x="426709" y="932688"/>
+            <a:ext cx="11338277" cy="566928"/>
           </a:xfrm>
           <a:prstGeom prst="rect">
             <a:avLst/>
@@ -16606,8 +16606,8 @@
         </p:nvSpPr>
         <p:spPr>
           <a:xfrm>
-            <a:off x="320040" y="1554480"/>
-            <a:ext cx="4206240" cy="365760"/>
+            <a:off x="426709" y="1554480"/>
+            <a:ext cx="5608180" cy="365760"/>
           </a:xfrm>
           <a:prstGeom prst="rect">
             <a:avLst/>
@@ -16642,8 +16642,8 @@
         </p:nvSpPr>
         <p:spPr>
           <a:xfrm>
-            <a:off x="320040" y="1975104"/>
-            <a:ext cx="4206240" cy="0"/>
+            <a:off x="426709" y="1975104"/>
+            <a:ext cx="5608180" cy="0"/>
           </a:xfrm>
           <a:prstGeom prst="line">
             <a:avLst/>
@@ -16665,8 +16665,8 @@
         </p:nvSpPr>
         <p:spPr>
           <a:xfrm>
-            <a:off x="320040" y="2084832"/>
-            <a:ext cx="4206240" cy="228600"/>
+            <a:off x="426709" y="2084832"/>
+            <a:ext cx="5608180" cy="228600"/>
           </a:xfrm>
           <a:prstGeom prst="rect">
             <a:avLst/>
@@ -16700,8 +16700,8 @@
           <p:nvPr/>
         </p:nvGraphicFramePr>
         <p:xfrm>
-          <a:off x="320040" y="2240280"/>
-          <a:ext cx="4206240" cy="960120"/>
+          <a:off x="426709" y="2240280"/>
+          <a:ext cx="5608180" cy="960120"/>
         </p:xfrm>
         <a:graphic xmlns:a="http://schemas.openxmlformats.org/drawingml/2006/main">
           <a:graphicData uri="http://schemas.openxmlformats.org/drawingml/2006/chart">
@@ -16717,8 +16717,8 @@
         </p:nvSpPr>
         <p:spPr>
           <a:xfrm>
-            <a:off x="320040" y="3200400"/>
-            <a:ext cx="4206240" cy="228600"/>
+            <a:off x="426709" y="3200400"/>
+            <a:ext cx="5608180" cy="228600"/>
           </a:xfrm>
           <a:prstGeom prst="rect">
             <a:avLst/>
@@ -16752,8 +16752,8 @@
           <p:nvPr/>
         </p:nvGraphicFramePr>
         <p:xfrm>
-          <a:off x="320040" y="3383280"/>
-          <a:ext cx="4206240" cy="1920240"/>
+          <a:off x="426709" y="3383280"/>
+          <a:ext cx="5608180" cy="1920240"/>
         </p:xfrm>
         <a:graphic xmlns:a="http://schemas.openxmlformats.org/drawingml/2006/main">
           <a:graphicData uri="http://schemas.openxmlformats.org/drawingml/2006/chart">
@@ -16769,8 +16769,8 @@
         </p:nvSpPr>
         <p:spPr>
           <a:xfrm>
-            <a:off x="4892040" y="1554480"/>
-            <a:ext cx="3931920" cy="365760"/>
+            <a:off x="6522557" y="1554480"/>
+            <a:ext cx="5242429" cy="365760"/>
           </a:xfrm>
           <a:prstGeom prst="rect">
             <a:avLst/>
@@ -16805,8 +16805,8 @@
         </p:nvSpPr>
         <p:spPr>
           <a:xfrm>
-            <a:off x="4892040" y="1975104"/>
-            <a:ext cx="3931920" cy="0"/>
+            <a:off x="6522557" y="1975104"/>
+            <a:ext cx="5242429" cy="0"/>
           </a:xfrm>
           <a:prstGeom prst="line">
             <a:avLst/>
@@ -16827,8 +16827,8 @@
           <p:nvPr/>
         </p:nvGraphicFramePr>
         <p:xfrm>
-          <a:off x="4892040" y="2103120"/>
-          <a:ext cx="3931920" cy="2743200"/>
+          <a:off x="6522557" y="2103120"/>
+          <a:ext cx="5242429" cy="2743200"/>
         </p:xfrm>
         <a:graphic xmlns:a="http://schemas.openxmlformats.org/drawingml/2006/main">
           <a:graphicData uri="http://schemas.openxmlformats.org/drawingml/2006/chart">
@@ -16844,8 +16844,8 @@
         </p:nvSpPr>
         <p:spPr>
           <a:xfrm>
-            <a:off x="4892040" y="4892040"/>
-            <a:ext cx="3931920" cy="411480"/>
+            <a:off x="6522557" y="4892040"/>
+            <a:ext cx="5242429" cy="411480"/>
           </a:xfrm>
           <a:prstGeom prst="rect">
             <a:avLst/>
@@ -16880,8 +16880,8 @@
         </p:nvSpPr>
         <p:spPr>
           <a:xfrm>
-            <a:off x="320040" y="5504688"/>
-            <a:ext cx="8503920" cy="566928"/>
+            <a:off x="426709" y="5504688"/>
+            <a:ext cx="11338277" cy="566928"/>
           </a:xfrm>
           <a:prstGeom prst="rect">
             <a:avLst/>
@@ -16918,8 +16918,8 @@
         </p:nvSpPr>
         <p:spPr>
           <a:xfrm>
-            <a:off x="320040" y="6355080"/>
-            <a:ext cx="7132320" cy="274320"/>
+            <a:off x="426709" y="6355080"/>
+            <a:ext cx="9509522" cy="274320"/>
           </a:xfrm>
           <a:prstGeom prst="rect">
             <a:avLst/>
@@ -16969,8 +16969,8 @@
         </p:nvSpPr>
         <p:spPr>
           <a:xfrm>
-            <a:off x="7635240" y="6327648"/>
-            <a:ext cx="411480" cy="274320"/>
+            <a:off x="10180065" y="6327648"/>
+            <a:ext cx="548626" cy="274320"/>
           </a:xfrm>
           <a:prstGeom prst="rect">
             <a:avLst/>
@@ -17037,8 +17037,8 @@
         </p:nvSpPr>
         <p:spPr>
           <a:xfrm>
-            <a:off x="320040" y="182880"/>
-            <a:ext cx="7040880" cy="640080"/>
+            <a:off x="426709" y="182880"/>
+            <a:ext cx="9387605" cy="640080"/>
           </a:xfrm>
           <a:prstGeom prst="rect">
             <a:avLst/>
@@ -17073,8 +17073,8 @@
         </p:nvSpPr>
         <p:spPr>
           <a:xfrm>
-            <a:off x="1600200" y="1097280"/>
-            <a:ext cx="6629400" cy="713232"/>
+            <a:off x="2133547" y="1097280"/>
+            <a:ext cx="8838979" cy="713232"/>
           </a:xfrm>
           <a:prstGeom prst="rect">
             <a:avLst/>
@@ -17111,7 +17111,7 @@
         </p:nvSpPr>
         <p:spPr>
           <a:xfrm>
-            <a:off x="1161288" y="1060704"/>
+            <a:off x="1679396" y="1060704"/>
             <a:ext cx="786384" cy="786384"/>
           </a:xfrm>
           <a:prstGeom prst="ellipse">
@@ -17153,8 +17153,8 @@
         </p:nvSpPr>
         <p:spPr>
           <a:xfrm>
-            <a:off x="1600200" y="2011680"/>
-            <a:ext cx="6629400" cy="713232"/>
+            <a:off x="2133547" y="2011680"/>
+            <a:ext cx="8838979" cy="713232"/>
           </a:xfrm>
           <a:prstGeom prst="rect">
             <a:avLst/>
@@ -17191,7 +17191,7 @@
         </p:nvSpPr>
         <p:spPr>
           <a:xfrm>
-            <a:off x="1161288" y="1975104"/>
+            <a:off x="1679396" y="1975104"/>
             <a:ext cx="786384" cy="786384"/>
           </a:xfrm>
           <a:prstGeom prst="ellipse">
@@ -17233,8 +17233,8 @@
         </p:nvSpPr>
         <p:spPr>
           <a:xfrm>
-            <a:off x="1600200" y="2926080"/>
-            <a:ext cx="6629400" cy="713232"/>
+            <a:off x="2133547" y="2926080"/>
+            <a:ext cx="8838979" cy="713232"/>
           </a:xfrm>
           <a:prstGeom prst="rect">
             <a:avLst/>
@@ -17271,7 +17271,7 @@
         </p:nvSpPr>
         <p:spPr>
           <a:xfrm>
-            <a:off x="1161288" y="2889504"/>
+            <a:off x="1679396" y="2889504"/>
             <a:ext cx="786384" cy="786384"/>
           </a:xfrm>
           <a:prstGeom prst="ellipse">
@@ -17313,8 +17313,8 @@
         </p:nvSpPr>
         <p:spPr>
           <a:xfrm>
-            <a:off x="1600200" y="3840480"/>
-            <a:ext cx="6629400" cy="713232"/>
+            <a:off x="2133547" y="3840480"/>
+            <a:ext cx="8838979" cy="713232"/>
           </a:xfrm>
           <a:prstGeom prst="rect">
             <a:avLst/>
@@ -17351,7 +17351,7 @@
         </p:nvSpPr>
         <p:spPr>
           <a:xfrm>
-            <a:off x="1161288" y="3803904"/>
+            <a:off x="1679396" y="3803904"/>
             <a:ext cx="786384" cy="786384"/>
           </a:xfrm>
           <a:prstGeom prst="ellipse">
@@ -17393,8 +17393,8 @@
         </p:nvSpPr>
         <p:spPr>
           <a:xfrm flipV="1">
-            <a:off x="1188720" y="4709160"/>
-            <a:ext cx="7040880" cy="365760"/>
+            <a:off x="1584920" y="4709160"/>
+            <a:ext cx="9387605" cy="365760"/>
           </a:xfrm>
           <a:prstGeom prst="triangle">
             <a:avLst/>
@@ -17413,8 +17413,8 @@
         </p:nvSpPr>
         <p:spPr>
           <a:xfrm>
-            <a:off x="1188720" y="5193792"/>
-            <a:ext cx="7040880" cy="777240"/>
+            <a:off x="1584920" y="5193792"/>
+            <a:ext cx="9387605" cy="777240"/>
           </a:xfrm>
           <a:prstGeom prst="rect">
             <a:avLst/>
@@ -17451,8 +17451,8 @@
         </p:nvSpPr>
         <p:spPr>
           <a:xfrm>
-            <a:off x="320040" y="6355080"/>
-            <a:ext cx="7132320" cy="274320"/>
+            <a:off x="426709" y="6355080"/>
+            <a:ext cx="9509522" cy="274320"/>
           </a:xfrm>
           <a:prstGeom prst="rect">
             <a:avLst/>
@@ -17502,8 +17502,8 @@
         </p:nvSpPr>
         <p:spPr>
           <a:xfrm>
-            <a:off x="7635240" y="6327648"/>
-            <a:ext cx="411480" cy="274320"/>
+            <a:off x="10180065" y="6327648"/>
+            <a:ext cx="548626" cy="274320"/>
           </a:xfrm>
           <a:prstGeom prst="rect">
             <a:avLst/>
@@ -17570,8 +17570,8 @@
         </p:nvSpPr>
         <p:spPr>
           <a:xfrm>
-            <a:off x="320040" y="182880"/>
-            <a:ext cx="7040880" cy="640080"/>
+            <a:off x="426709" y="182880"/>
+            <a:ext cx="9387605" cy="640080"/>
           </a:xfrm>
           <a:prstGeom prst="rect">
             <a:avLst/>
@@ -17608,8 +17608,8 @@
         </p:nvSpPr>
         <p:spPr>
           <a:xfrm>
-            <a:off x="320040" y="932688"/>
-            <a:ext cx="8503920" cy="566928"/>
+            <a:off x="426709" y="932688"/>
+            <a:ext cx="11338277" cy="566928"/>
           </a:xfrm>
           <a:prstGeom prst="rect">
             <a:avLst/>
@@ -17644,8 +17644,8 @@
         </p:nvSpPr>
         <p:spPr>
           <a:xfrm>
-            <a:off x="320040" y="1554480"/>
-            <a:ext cx="4023360" cy="365760"/>
+            <a:off x="426709" y="1554480"/>
+            <a:ext cx="5364346" cy="365760"/>
           </a:xfrm>
           <a:prstGeom prst="rect">
             <a:avLst/>
@@ -17680,8 +17680,8 @@
         </p:nvSpPr>
         <p:spPr>
           <a:xfrm>
-            <a:off x="320040" y="1975104"/>
-            <a:ext cx="4023360" cy="0"/>
+            <a:off x="426709" y="1975104"/>
+            <a:ext cx="5364346" cy="0"/>
           </a:xfrm>
           <a:prstGeom prst="line">
             <a:avLst/>
@@ -17702,8 +17702,8 @@
           <p:nvPr/>
         </p:nvGraphicFramePr>
         <p:xfrm>
-          <a:off x="548640" y="2240280"/>
-          <a:ext cx="2286000" cy="1874520"/>
+          <a:off x="731502" y="2240280"/>
+          <a:ext cx="3047924" cy="1874520"/>
         </p:xfrm>
         <a:graphic xmlns:a="http://schemas.openxmlformats.org/drawingml/2006/main">
           <a:graphicData uri="http://schemas.openxmlformats.org/drawingml/2006/chart">
@@ -17719,8 +17719,8 @@
         </p:nvSpPr>
         <p:spPr>
           <a:xfrm>
-            <a:off x="685800" y="2926080"/>
-            <a:ext cx="914400" cy="274320"/>
+            <a:off x="914377" y="2926080"/>
+            <a:ext cx="1219170" cy="274320"/>
           </a:xfrm>
           <a:prstGeom prst="rect">
             <a:avLst/>
@@ -17755,8 +17755,8 @@
         </p:nvSpPr>
         <p:spPr>
           <a:xfrm>
-            <a:off x="1737360" y="2103120"/>
-            <a:ext cx="1005840" cy="274320"/>
+            <a:off x="2316422" y="2103120"/>
+            <a:ext cx="1341086" cy="274320"/>
           </a:xfrm>
           <a:prstGeom prst="rect">
             <a:avLst/>
@@ -17791,8 +17791,8 @@
         </p:nvSpPr>
         <p:spPr>
           <a:xfrm>
-            <a:off x="548640" y="4133088"/>
-            <a:ext cx="2286000" cy="237744"/>
+            <a:off x="731502" y="4133088"/>
+            <a:ext cx="3047924" cy="237744"/>
           </a:xfrm>
           <a:prstGeom prst="rect">
             <a:avLst/>
@@ -17827,8 +17827,8 @@
         </p:nvSpPr>
         <p:spPr>
           <a:xfrm>
-            <a:off x="2880360" y="2514600"/>
-            <a:ext cx="1463040" cy="1188720"/>
+            <a:off x="3840384" y="2514600"/>
+            <a:ext cx="1950671" cy="1188720"/>
           </a:xfrm>
           <a:prstGeom prst="rect">
             <a:avLst/>
@@ -17877,8 +17877,8 @@
         </p:nvSpPr>
         <p:spPr>
           <a:xfrm>
-            <a:off x="4800600" y="1554480"/>
-            <a:ext cx="4023360" cy="365760"/>
+            <a:off x="6400640" y="1554480"/>
+            <a:ext cx="5364346" cy="365760"/>
           </a:xfrm>
           <a:prstGeom prst="rect">
             <a:avLst/>
@@ -17913,8 +17913,8 @@
         </p:nvSpPr>
         <p:spPr>
           <a:xfrm>
-            <a:off x="4800600" y="1975104"/>
-            <a:ext cx="4023360" cy="0"/>
+            <a:off x="6400640" y="1975104"/>
+            <a:ext cx="5364346" cy="0"/>
           </a:xfrm>
           <a:prstGeom prst="line">
             <a:avLst/>
@@ -17935,8 +17935,8 @@
           <p:nvPr/>
         </p:nvGraphicFramePr>
         <p:xfrm>
-          <a:off x="4892040" y="2240280"/>
-          <a:ext cx="2240280" cy="1874520"/>
+          <a:off x="6522557" y="2240280"/>
+          <a:ext cx="2986965" cy="1874520"/>
         </p:xfrm>
         <a:graphic xmlns:a="http://schemas.openxmlformats.org/drawingml/2006/main">
           <a:graphicData uri="http://schemas.openxmlformats.org/drawingml/2006/chart">
@@ -17952,8 +17952,8 @@
         </p:nvSpPr>
         <p:spPr>
           <a:xfrm>
-            <a:off x="4892040" y="4133088"/>
-            <a:ext cx="2240280" cy="237744"/>
+            <a:off x="6522557" y="4133088"/>
+            <a:ext cx="2986965" cy="237744"/>
           </a:xfrm>
           <a:prstGeom prst="rect">
             <a:avLst/>
@@ -18021,8 +18021,8 @@
         </p:nvSpPr>
         <p:spPr>
           <a:xfrm>
-            <a:off x="7178040" y="2240280"/>
-            <a:ext cx="1645920" cy="914400"/>
+            <a:off x="9570481" y="2240280"/>
+            <a:ext cx="2194505" cy="914400"/>
           </a:xfrm>
           <a:prstGeom prst="rect">
             <a:avLst/>
@@ -18071,8 +18071,8 @@
         </p:nvSpPr>
         <p:spPr>
           <a:xfrm>
-            <a:off x="7178040" y="3246120"/>
-            <a:ext cx="1645920" cy="914400"/>
+            <a:off x="9570481" y="3246120"/>
+            <a:ext cx="2194505" cy="914400"/>
           </a:xfrm>
           <a:prstGeom prst="rect">
             <a:avLst/>
@@ -18121,8 +18121,8 @@
         </p:nvSpPr>
         <p:spPr>
           <a:xfrm>
-            <a:off x="320040" y="4526280"/>
-            <a:ext cx="8503920" cy="868680"/>
+            <a:off x="426709" y="4526280"/>
+            <a:ext cx="11338277" cy="868680"/>
           </a:xfrm>
           <a:prstGeom prst="rect">
             <a:avLst/>
@@ -18173,8 +18173,8 @@
         </p:nvSpPr>
         <p:spPr>
           <a:xfrm>
-            <a:off x="320040" y="5504688"/>
-            <a:ext cx="8503920" cy="566928"/>
+            <a:off x="426709" y="5504688"/>
+            <a:ext cx="11338277" cy="566928"/>
           </a:xfrm>
           <a:prstGeom prst="rect">
             <a:avLst/>
@@ -18211,8 +18211,8 @@
         </p:nvSpPr>
         <p:spPr>
           <a:xfrm>
-            <a:off x="320040" y="6355080"/>
-            <a:ext cx="7132320" cy="274320"/>
+            <a:off x="426709" y="6355080"/>
+            <a:ext cx="9509522" cy="274320"/>
           </a:xfrm>
           <a:prstGeom prst="rect">
             <a:avLst/>
@@ -18262,8 +18262,8 @@
         </p:nvSpPr>
         <p:spPr>
           <a:xfrm>
-            <a:off x="7635240" y="6327648"/>
-            <a:ext cx="411480" cy="274320"/>
+            <a:off x="10180065" y="6327648"/>
+            <a:ext cx="548626" cy="274320"/>
           </a:xfrm>
           <a:prstGeom prst="rect">
             <a:avLst/>
@@ -18330,8 +18330,8 @@
         </p:nvSpPr>
         <p:spPr>
           <a:xfrm>
-            <a:off x="320040" y="182880"/>
-            <a:ext cx="7040880" cy="640080"/>
+            <a:off x="426709" y="182880"/>
+            <a:ext cx="9387605" cy="640080"/>
           </a:xfrm>
           <a:prstGeom prst="rect">
             <a:avLst/>
@@ -18368,8 +18368,8 @@
         </p:nvSpPr>
         <p:spPr>
           <a:xfrm>
-            <a:off x="320040" y="932688"/>
-            <a:ext cx="8503920" cy="566928"/>
+            <a:off x="426709" y="932688"/>
+            <a:ext cx="11338277" cy="566928"/>
           </a:xfrm>
           <a:prstGeom prst="rect">
             <a:avLst/>
@@ -18404,8 +18404,8 @@
         </p:nvSpPr>
         <p:spPr>
           <a:xfrm>
-            <a:off x="2148840" y="1536192"/>
-            <a:ext cx="6400800" cy="237744"/>
+            <a:off x="2865048" y="1536192"/>
+            <a:ext cx="8534187" cy="237744"/>
           </a:xfrm>
           <a:prstGeom prst="rect">
             <a:avLst/>
@@ -18440,7 +18440,7 @@
         </p:nvSpPr>
         <p:spPr>
           <a:xfrm>
-            <a:off x="2148840" y="1783080"/>
+            <a:off x="2865048" y="1783080"/>
             <a:ext cx="0" cy="1508760"/>
           </a:xfrm>
           <a:prstGeom prst="line">
@@ -18463,8 +18463,8 @@
         </p:nvSpPr>
         <p:spPr>
           <a:xfrm>
-            <a:off x="1874520" y="3291840"/>
-            <a:ext cx="548640" cy="201168"/>
+            <a:off x="2499298" y="3291840"/>
+            <a:ext cx="731502" cy="201168"/>
           </a:xfrm>
           <a:prstGeom prst="rect">
             <a:avLst/>
@@ -18499,7 +18499,7 @@
         </p:nvSpPr>
         <p:spPr>
           <a:xfrm>
-            <a:off x="3215640" y="1783080"/>
+            <a:off x="4287413" y="1783080"/>
             <a:ext cx="0" cy="1508760"/>
           </a:xfrm>
           <a:prstGeom prst="line">
@@ -18522,8 +18522,8 @@
         </p:nvSpPr>
         <p:spPr>
           <a:xfrm>
-            <a:off x="2941320" y="3291840"/>
-            <a:ext cx="548640" cy="201168"/>
+            <a:off x="3921662" y="3291840"/>
+            <a:ext cx="731502" cy="201168"/>
           </a:xfrm>
           <a:prstGeom prst="rect">
             <a:avLst/>
@@ -18558,7 +18558,7 @@
         </p:nvSpPr>
         <p:spPr>
           <a:xfrm>
-            <a:off x="4282440" y="1783080"/>
+            <a:off x="5709777" y="1783080"/>
             <a:ext cx="0" cy="1508760"/>
           </a:xfrm>
           <a:prstGeom prst="line">
@@ -18581,8 +18581,8 @@
         </p:nvSpPr>
         <p:spPr>
           <a:xfrm>
-            <a:off x="4008120" y="3291840"/>
-            <a:ext cx="548640" cy="201168"/>
+            <a:off x="5344026" y="3291840"/>
+            <a:ext cx="731502" cy="201168"/>
           </a:xfrm>
           <a:prstGeom prst="rect">
             <a:avLst/>
@@ -18617,7 +18617,7 @@
         </p:nvSpPr>
         <p:spPr>
           <a:xfrm>
-            <a:off x="5349240" y="1783080"/>
+            <a:off x="7132142" y="1783080"/>
             <a:ext cx="0" cy="1508760"/>
           </a:xfrm>
           <a:prstGeom prst="line">
@@ -18640,8 +18640,8 @@
         </p:nvSpPr>
         <p:spPr>
           <a:xfrm>
-            <a:off x="5074920" y="3291840"/>
-            <a:ext cx="548640" cy="201168"/>
+            <a:off x="6766391" y="3291840"/>
+            <a:ext cx="731502" cy="201168"/>
           </a:xfrm>
           <a:prstGeom prst="rect">
             <a:avLst/>
@@ -18676,7 +18676,7 @@
         </p:nvSpPr>
         <p:spPr>
           <a:xfrm>
-            <a:off x="6416040" y="1783080"/>
+            <a:off x="8554506" y="1783080"/>
             <a:ext cx="0" cy="1508760"/>
           </a:xfrm>
           <a:prstGeom prst="line">
@@ -18699,8 +18699,8 @@
         </p:nvSpPr>
         <p:spPr>
           <a:xfrm>
-            <a:off x="6141720" y="3291840"/>
-            <a:ext cx="548640" cy="201168"/>
+            <a:off x="8188755" y="3291840"/>
+            <a:ext cx="731502" cy="201168"/>
           </a:xfrm>
           <a:prstGeom prst="rect">
             <a:avLst/>
@@ -18735,7 +18735,7 @@
         </p:nvSpPr>
         <p:spPr>
           <a:xfrm>
-            <a:off x="7482840" y="1783080"/>
+            <a:off x="9976871" y="1783080"/>
             <a:ext cx="0" cy="1508760"/>
           </a:xfrm>
           <a:prstGeom prst="line">
@@ -18758,8 +18758,8 @@
         </p:nvSpPr>
         <p:spPr>
           <a:xfrm>
-            <a:off x="7208520" y="3291840"/>
-            <a:ext cx="548640" cy="201168"/>
+            <a:off x="9611120" y="3291840"/>
+            <a:ext cx="731502" cy="201168"/>
           </a:xfrm>
           <a:prstGeom prst="rect">
             <a:avLst/>
@@ -18794,7 +18794,7 @@
         </p:nvSpPr>
         <p:spPr>
           <a:xfrm>
-            <a:off x="8549640" y="1783080"/>
+            <a:off x="11399235" y="1783080"/>
             <a:ext cx="0" cy="1508760"/>
           </a:xfrm>
           <a:prstGeom prst="line">
@@ -18817,8 +18817,8 @@
         </p:nvSpPr>
         <p:spPr>
           <a:xfrm>
-            <a:off x="8275320" y="3291840"/>
-            <a:ext cx="548640" cy="201168"/>
+            <a:off x="11033484" y="3291840"/>
+            <a:ext cx="731502" cy="201168"/>
           </a:xfrm>
           <a:prstGeom prst="rect">
             <a:avLst/>
@@ -18853,8 +18853,8 @@
         </p:nvSpPr>
         <p:spPr>
           <a:xfrm>
-            <a:off x="320040" y="1828800"/>
-            <a:ext cx="1737360" cy="548640"/>
+            <a:off x="426709" y="1828800"/>
+            <a:ext cx="2316422" cy="548640"/>
           </a:xfrm>
           <a:prstGeom prst="rect">
             <a:avLst/>
@@ -18889,7 +18889,7 @@
                   <a:srgbClr val="1A1A1A"/>
                 </a:solidFill>
               </a:rPr>
-              <a:t>120–180 days</a:t>
+              <a:t>120–180 days, then test</a:t>
             </a:r>
             <a:endParaRPr lang="en-US" sz="1400" dirty="0"/>
           </a:p>
@@ -18903,8 +18903,8 @@
         </p:nvSpPr>
         <p:spPr>
           <a:xfrm>
-            <a:off x="2148840" y="1856232"/>
-            <a:ext cx="1532128" cy="502920"/>
+            <a:off x="2865048" y="1856232"/>
+            <a:ext cx="2042786" cy="502920"/>
           </a:xfrm>
           <a:prstGeom prst="chevron">
             <a:avLst/>
@@ -18941,8 +18941,8 @@
         </p:nvSpPr>
         <p:spPr>
           <a:xfrm>
-            <a:off x="3571240" y="1856232"/>
-            <a:ext cx="1105408" cy="502920"/>
+            <a:off x="4761534" y="1856232"/>
+            <a:ext cx="1473840" cy="502920"/>
           </a:xfrm>
           <a:prstGeom prst="chevron">
             <a:avLst/>
@@ -18979,8 +18979,8 @@
         </p:nvSpPr>
         <p:spPr>
           <a:xfrm>
-            <a:off x="4566920" y="1856232"/>
-            <a:ext cx="1532128" cy="502920"/>
+            <a:off x="6089074" y="1856232"/>
+            <a:ext cx="2042786" cy="502920"/>
           </a:xfrm>
           <a:prstGeom prst="chevron">
             <a:avLst/>
@@ -19017,8 +19017,8 @@
         </p:nvSpPr>
         <p:spPr>
           <a:xfrm>
-            <a:off x="5989320" y="1856232"/>
-            <a:ext cx="1247648" cy="502920"/>
+            <a:off x="7985560" y="1856232"/>
+            <a:ext cx="1663489" cy="502920"/>
           </a:xfrm>
           <a:prstGeom prst="chevron">
             <a:avLst/>
@@ -19055,8 +19055,8 @@
         </p:nvSpPr>
         <p:spPr>
           <a:xfrm>
-            <a:off x="7127240" y="1856232"/>
-            <a:ext cx="465328" cy="502920"/>
+            <a:off x="9502749" y="1856232"/>
+            <a:ext cx="620422" cy="502920"/>
           </a:xfrm>
           <a:prstGeom prst="chevron">
             <a:avLst/>
@@ -19073,14 +19073,6 @@
             <a:pPr algn="ctr" indent="0" marL="0">
               <a:buNone/>
             </a:pPr>
-            <a:r>
-              <a:rPr lang="en-US" sz="900" b="1" dirty="0">
-                <a:solidFill>
-                  <a:schemeClr val="tx2"/>
-                </a:solidFill>
-              </a:rPr>
-              <a:t>Test</a:t>
-            </a:r>
             <a:endParaRPr lang="en-US" sz="900" dirty="0"/>
           </a:p>
         </p:txBody>
@@ -19093,8 +19085,8 @@
         </p:nvSpPr>
         <p:spPr>
           <a:xfrm>
-            <a:off x="7482840" y="1929384"/>
-            <a:ext cx="1066800" cy="356616"/>
+            <a:off x="9976871" y="1929384"/>
+            <a:ext cx="1422364" cy="356616"/>
           </a:xfrm>
           <a:prstGeom prst="rect">
             <a:avLst/>
@@ -19115,8 +19107,8 @@
         </p:nvSpPr>
         <p:spPr>
           <a:xfrm>
-            <a:off x="228600" y="2560320"/>
-            <a:ext cx="1828800" cy="548640"/>
+            <a:off x="304792" y="2560320"/>
+            <a:ext cx="2438339" cy="548640"/>
           </a:xfrm>
           <a:prstGeom prst="rect">
             <a:avLst/>
@@ -19165,8 +19157,8 @@
         </p:nvSpPr>
         <p:spPr>
           <a:xfrm>
-            <a:off x="2148840" y="2587752"/>
-            <a:ext cx="998728" cy="502920"/>
+            <a:off x="2865048" y="2587752"/>
+            <a:ext cx="1331604" cy="502920"/>
           </a:xfrm>
           <a:prstGeom prst="chevron">
             <a:avLst/>
@@ -19185,8 +19177,8 @@
         </p:nvSpPr>
         <p:spPr>
           <a:xfrm>
-            <a:off x="3266440" y="2587752"/>
-            <a:ext cx="3291840" cy="502920"/>
+            <a:off x="4355144" y="2587752"/>
+            <a:ext cx="4389010" cy="502920"/>
           </a:xfrm>
           <a:prstGeom prst="rect">
             <a:avLst/>
@@ -19221,8 +19213,8 @@
         </p:nvSpPr>
         <p:spPr>
           <a:xfrm>
-            <a:off x="7589520" y="2423160"/>
-            <a:ext cx="1051560" cy="868680"/>
+            <a:off x="10119107" y="2423160"/>
+            <a:ext cx="1402045" cy="868680"/>
           </a:xfrm>
           <a:prstGeom prst="ellipse">
             <a:avLst/>
@@ -19277,8 +19269,8 @@
         </p:nvSpPr>
         <p:spPr>
           <a:xfrm>
-            <a:off x="320040" y="3584448"/>
-            <a:ext cx="4160520" cy="365760"/>
+            <a:off x="426709" y="3584448"/>
+            <a:ext cx="5547221" cy="365760"/>
           </a:xfrm>
           <a:prstGeom prst="rect">
             <a:avLst/>
@@ -19313,8 +19305,8 @@
         </p:nvSpPr>
         <p:spPr>
           <a:xfrm>
-            <a:off x="320040" y="4005072"/>
-            <a:ext cx="4160520" cy="0"/>
+            <a:off x="426709" y="4005072"/>
+            <a:ext cx="5547221" cy="0"/>
           </a:xfrm>
           <a:prstGeom prst="line">
             <a:avLst/>
@@ -19336,8 +19328,8 @@
         </p:nvSpPr>
         <p:spPr>
           <a:xfrm>
-            <a:off x="320040" y="4160520"/>
-            <a:ext cx="1691640" cy="347472"/>
+            <a:off x="426709" y="4160520"/>
+            <a:ext cx="2255464" cy="347472"/>
           </a:xfrm>
           <a:prstGeom prst="rect">
             <a:avLst/>
@@ -19372,8 +19364,8 @@
         </p:nvSpPr>
         <p:spPr>
           <a:xfrm>
-            <a:off x="2103120" y="4160520"/>
-            <a:ext cx="1737360" cy="347472"/>
+            <a:off x="2804090" y="4160520"/>
+            <a:ext cx="2316422" cy="347472"/>
           </a:xfrm>
           <a:prstGeom prst="rect">
             <a:avLst/>
@@ -19392,8 +19384,8 @@
         </p:nvSpPr>
         <p:spPr>
           <a:xfrm>
-            <a:off x="3913632" y="4160520"/>
-            <a:ext cx="731520" cy="347472"/>
+            <a:off x="5218046" y="4160520"/>
+            <a:ext cx="975336" cy="347472"/>
           </a:xfrm>
           <a:prstGeom prst="rect">
             <a:avLst/>
@@ -19428,8 +19420,8 @@
         </p:nvSpPr>
         <p:spPr>
           <a:xfrm>
-            <a:off x="320040" y="4636008"/>
-            <a:ext cx="1691640" cy="347472"/>
+            <a:off x="426709" y="4636008"/>
+            <a:ext cx="2255464" cy="347472"/>
           </a:xfrm>
           <a:prstGeom prst="rect">
             <a:avLst/>
@@ -19464,8 +19456,8 @@
         </p:nvSpPr>
         <p:spPr>
           <a:xfrm>
-            <a:off x="2103120" y="4636008"/>
-            <a:ext cx="232588" cy="347472"/>
+            <a:off x="2804090" y="4636008"/>
+            <a:ext cx="310109" cy="347472"/>
           </a:xfrm>
           <a:prstGeom prst="rect">
             <a:avLst/>
@@ -19484,8 +19476,8 @@
         </p:nvSpPr>
         <p:spPr>
           <a:xfrm>
-            <a:off x="2408860" y="4636008"/>
-            <a:ext cx="731520" cy="347472"/>
+            <a:off x="3211733" y="4636008"/>
+            <a:ext cx="975336" cy="347472"/>
           </a:xfrm>
           <a:prstGeom prst="rect">
             <a:avLst/>
@@ -19520,8 +19512,8 @@
         </p:nvSpPr>
         <p:spPr>
           <a:xfrm>
-            <a:off x="4709160" y="3657600"/>
-            <a:ext cx="4114800" cy="1737360"/>
+            <a:off x="6278723" y="3657600"/>
+            <a:ext cx="5486263" cy="1737360"/>
           </a:xfrm>
           <a:prstGeom prst="rect">
             <a:avLst/>
@@ -19578,8 +19570,8 @@
         </p:nvSpPr>
         <p:spPr>
           <a:xfrm>
-            <a:off x="320040" y="5504688"/>
-            <a:ext cx="8503920" cy="566928"/>
+            <a:off x="426709" y="5504688"/>
+            <a:ext cx="11338277" cy="566928"/>
           </a:xfrm>
           <a:prstGeom prst="rect">
             <a:avLst/>
@@ -19616,8 +19608,8 @@
         </p:nvSpPr>
         <p:spPr>
           <a:xfrm>
-            <a:off x="320040" y="6355080"/>
-            <a:ext cx="7132320" cy="274320"/>
+            <a:off x="426709" y="6355080"/>
+            <a:ext cx="9509522" cy="274320"/>
           </a:xfrm>
           <a:prstGeom prst="rect">
             <a:avLst/>
@@ -19667,8 +19659,8 @@
         </p:nvSpPr>
         <p:spPr>
           <a:xfrm>
-            <a:off x="7635240" y="6327648"/>
-            <a:ext cx="411480" cy="274320"/>
+            <a:off x="10180065" y="6327648"/>
+            <a:ext cx="548626" cy="274320"/>
           </a:xfrm>
           <a:prstGeom prst="rect">
             <a:avLst/>
@@ -19735,8 +19727,8 @@
         </p:nvSpPr>
         <p:spPr>
           <a:xfrm>
-            <a:off x="320040" y="182880"/>
-            <a:ext cx="7040880" cy="640080"/>
+            <a:off x="426709" y="182880"/>
+            <a:ext cx="9387605" cy="640080"/>
           </a:xfrm>
           <a:prstGeom prst="rect">
             <a:avLst/>
@@ -19773,8 +19765,8 @@
         </p:nvSpPr>
         <p:spPr>
           <a:xfrm>
-            <a:off x="320040" y="932688"/>
-            <a:ext cx="8503920" cy="566928"/>
+            <a:off x="426709" y="932688"/>
+            <a:ext cx="11338277" cy="566928"/>
           </a:xfrm>
           <a:prstGeom prst="rect">
             <a:avLst/>
@@ -19809,8 +19801,8 @@
         </p:nvSpPr>
         <p:spPr>
           <a:xfrm>
-            <a:off x="320040" y="1554480"/>
-            <a:ext cx="4206240" cy="365760"/>
+            <a:off x="426709" y="1554480"/>
+            <a:ext cx="5608180" cy="365760"/>
           </a:xfrm>
           <a:prstGeom prst="rect">
             <a:avLst/>
@@ -19845,8 +19837,8 @@
         </p:nvSpPr>
         <p:spPr>
           <a:xfrm>
-            <a:off x="320040" y="1975104"/>
-            <a:ext cx="4206240" cy="0"/>
+            <a:off x="426709" y="1975104"/>
+            <a:ext cx="5608180" cy="0"/>
           </a:xfrm>
           <a:prstGeom prst="line">
             <a:avLst/>
@@ -19867,8 +19859,8 @@
           <p:nvPr/>
         </p:nvGraphicFramePr>
         <p:xfrm>
-          <a:off x="320040" y="2103120"/>
-          <a:ext cx="4206240" cy="2926080"/>
+          <a:off x="426709" y="2103120"/>
+          <a:ext cx="5608180" cy="2926080"/>
         </p:xfrm>
         <a:graphic xmlns:a="http://schemas.openxmlformats.org/drawingml/2006/main">
           <a:graphicData uri="http://schemas.openxmlformats.org/drawingml/2006/chart">
@@ -19884,8 +19876,8 @@
         </p:nvSpPr>
         <p:spPr>
           <a:xfrm>
-            <a:off x="1828800" y="2103120"/>
-            <a:ext cx="2651760" cy="274320"/>
+            <a:off x="2438339" y="2103120"/>
+            <a:ext cx="3535592" cy="274320"/>
           </a:xfrm>
           <a:prstGeom prst="rect">
             <a:avLst/>
@@ -19920,8 +19912,8 @@
         </p:nvSpPr>
         <p:spPr>
           <a:xfrm>
-            <a:off x="320040" y="5047488"/>
-            <a:ext cx="4206240" cy="256032"/>
+            <a:off x="426709" y="5047488"/>
+            <a:ext cx="5608180" cy="256032"/>
           </a:xfrm>
           <a:prstGeom prst="rect">
             <a:avLst/>
@@ -19989,8 +19981,8 @@
         </p:nvSpPr>
     